--- a/outputs/presentation/ssd-future-ready-strategy.pptx
+++ b/outputs/presentation/ssd-future-ready-strategy.pptx
@@ -645,7 +645,7 @@
           <a:lstStyle/>
           <a:p>
             <a:r>
-              <a:t>3장입니다. 왜 고객 시스템까지 가야 하는지 데이터로 말씀드리겠습니다. 왼쪽 위는 셀이 견디는 쓰기 횟수입니다. SLC 10만 회에서 QLC 1천 회로 약 100배 줄었습니다. 그 옆은 고객의 캐시 계층이 실제로 쓰는 양입니다. QLC 정격은 하루 0.6회인데, Meta의 플래시 캐시는 하루 3회를 쓰기 예산으로 잡고, Meta 벌크 스토리지 캐시 연구는 7.2회를 목표로 둡니다. AI KV 캐시 계층을 실측하면 드라이브당 3.2회였습니다. 기준은 예산, 실측, 목표로 서로 다르지만 방향은 같습니다. 고객의 쓰기는 커지는데 셀 수명은 줄면, 보상은 늘 한 계층 위로 올라갔습니다. 첫 계단은 NAND에서 SSD입니다. 셀 오류율이 약 100만 배 나빠졌지만 컨트롤러 ECC가 약 60배 강해지면서 SSD 안에서 완결됐습니다. 둘째 계단은 SSD 혼자 하는 최적화입니다. 2014년부터 2019년까지 SSD가 워크로드를 추정했지만 실제 워크로드에서 WAF는 약 3에 머물렀습니다. 데이터가 언제 지워지는지는 호스트만 알기 때문입니다. 셋째 계단이 고객 시스템과의 공동 설계입니다. 호스트가 데이터 수명을 알려 주는 FDP로 CacheLib은 WAF를 3.22에서 1.03으로 낮췄습니다. 고객은 이미 자기 시스템에서 이 문제와 싸우고 있습니다. Meta CacheLib 논문에 따르면, 캐시 쓰기를 그대로 두면 SSD 수명 예산의 1.5배가 됩니다. 그래서 Meta는 플래시를 50퍼센트 더 두고, 머신러닝 수용 정책이라는 자기 소프트웨어로 플래시 기록량을 44퍼센트 줄였습니다. 해법이 이미 고객 소프트웨어 안에 있다는 뜻입니다. 사양서를 받아 SSD를 잘 만드는 방식은 둘째 계단에 머뭅니다. 셋째 계단은 고객 시스템 안에서 함께 설계해야 닿습니다.</a:t>
+              <a:t>3장입니다. 왜 고객 시스템까지 가야 하는지 데이터로 말씀드리겠습니다. 왼쪽 위는 셀이 견디는 쓰기 횟수입니다. SLC 10만 회에서 QLC 1천 회로 약 100배 줄었습니다. 그 옆은 고객의 캐시 계층이 실제로 쓰는 양입니다. QLC 정격은 하루 0.6회인데, Meta의 플래시 캐시는 하루 3회를 쓰기 예산으로 잡고, Meta 벌크 스토리지 캐시 연구는 7.2회를 목표로 둡니다. AI KV 캐시 계층을 실측하면 드라이브당 3.2회였습니다. 기준은 예산, 실측, 목표로 서로 다르지만 방향은 같습니다. 고객의 쓰기는 커지는데 셀 수명은 줄면, 보상은 늘 한 계층 위로 올라갔습니다. 첫 계단은 NAND에서 SSD입니다. 셀 오류율이 약 100만 배 나빠졌지만 컨트롤러 ECC가 약 60배 강해지면서 SSD 안에서 완결됐습니다. 둘째 계단은 SSD 혼자 하는 최적화입니다. 오른쪽이 그때 SSD 안에 쌓은 기술입니다. FTL과 ECC, GC와 웨어 레벨링 위에, 2014년부터 2019년까지 핫 · 콜드 추정, 스트림 분리(2014년 멀티 스트림, 2017년 자동 스트림), IO 결정성(2019년)을 더했습니다. 테일 지연과 성능은 좋아졌지만, 실제 워크로드에서 WAF는 약 3에 머물렀습니다. 데이터가 언제 지워지는지는 호스트만 알기 때문입니다. 셋째 계단이 고객 시스템과의 공동 설계입니다. 호스트가 데이터 수명을 알려 주는 FDP로 CacheLib은 WAF를 3.22에서 1.03으로 낮췄습니다. 고객은 이미 자기 시스템에서 이 문제와 싸우고 있습니다. Meta CacheLib 논문에 따르면, 캐시 쓰기를 그대로 두면 SSD 수명 예산의 1.5배가 됩니다. 그래서 Meta는 플래시를 50퍼센트 더 두고, 머신러닝 수용 정책이라는 자기 소프트웨어로 플래시 기록량을 44퍼센트 줄였습니다. 해법이 이미 고객 소프트웨어 안에 있다는 뜻입니다. 사양서를 받아 SSD를 잘 만드는 방식은 둘째 계단에 머뭅니다. 셋째 계단은 고객 시스템 안에서 함께 설계해야 닿습니다.</a:t>
             </a:r>
           </a:p>
         </p:txBody>
@@ -17007,7 +17007,7 @@
         </p:blipFill>
         <p:spPr>
           <a:xfrm>
-            <a:off x="6384197" y="6071616"/>
+            <a:off x="6292757" y="6163056"/>
             <a:ext cx="2118036" cy="786384"/>
           </a:xfrm>
           <a:prstGeom prst="rect">
@@ -17023,8 +17023,8 @@
         </p:nvSpPr>
         <p:spPr>
           <a:xfrm>
-            <a:off x="6254496" y="6967728"/>
-            <a:ext cx="4846320" cy="640080"/>
+            <a:off x="6254496" y="7168896"/>
+            <a:ext cx="2395728" cy="640080"/>
           </a:xfrm>
           <a:prstGeom prst="rect">
             <a:avLst/>
@@ -17063,8 +17063,8 @@
         </p:nvSpPr>
         <p:spPr>
           <a:xfrm>
-            <a:off x="6254496" y="7607808"/>
-            <a:ext cx="4846320" cy="347472"/>
+            <a:off x="6254496" y="7808975"/>
+            <a:ext cx="2395728" cy="347472"/>
           </a:xfrm>
           <a:prstGeom prst="rect">
             <a:avLst/>
@@ -17414,7 +17414,561 @@
       </p:sp>
       <p:sp>
         <p:nvSpPr>
-          <p:cNvPr id="61" name="Rounded Rectangle 60"/>
+          <p:cNvPr id="61" name="TextBox 60"/>
+          <p:cNvSpPr txBox="1"/>
+          <p:nvPr/>
+        </p:nvSpPr>
+        <p:spPr>
+          <a:xfrm>
+            <a:off x="8741664" y="5815584"/>
+            <a:ext cx="2377440" cy="365760"/>
+          </a:xfrm>
+          <a:prstGeom prst="rect">
+            <a:avLst/>
+          </a:prstGeom>
+          <a:noFill/>
+        </p:spPr>
+        <p:txBody>
+          <a:bodyPr wrap="square" anchor="ctr" lIns="0" rIns="0" tIns="0" bIns="0">
+            <a:spAutoFit/>
+          </a:bodyPr>
+          <a:lstStyle/>
+          <a:p>
+            <a:pPr algn="l">
+              <a:lnSpc>
+                <a:spcPct val="110000"/>
+              </a:lnSpc>
+            </a:pPr>
+            <a:r>
+              <a:rPr sz="1800" b="1">
+                <a:solidFill>
+                  <a:srgbClr val="555555"/>
+                </a:solidFill>
+                <a:latin typeface="Arial"/>
+                <a:ea typeface="Arial"/>
+              </a:rPr>
+              <a:t>SSD 내부 기술 스택</a:t>
+            </a:r>
+          </a:p>
+        </p:txBody>
+      </p:sp>
+      <p:sp>
+        <p:nvSpPr>
+          <p:cNvPr id="62" name="Rounded Rectangle 61"/>
+          <p:cNvSpPr/>
+          <p:nvPr/>
+        </p:nvSpPr>
+        <p:spPr>
+          <a:xfrm>
+            <a:off x="8741664" y="6217920"/>
+            <a:ext cx="2377440" cy="365760"/>
+          </a:xfrm>
+          <a:prstGeom prst="roundRect">
+            <a:avLst>
+              <a:gd name="adj" fmla="val 20000"/>
+            </a:avLst>
+          </a:prstGeom>
+          <a:solidFill>
+            <a:srgbClr val="555555"/>
+          </a:solidFill>
+          <a:ln>
+            <a:noFill/>
+          </a:ln>
+          <a:effectLst/>
+        </p:spPr>
+        <p:style>
+          <a:lnRef idx="1">
+            <a:schemeClr val="accent1"/>
+          </a:lnRef>
+          <a:fillRef idx="3">
+            <a:schemeClr val="accent1"/>
+          </a:fillRef>
+          <a:effectRef idx="2">
+            <a:schemeClr val="accent1"/>
+          </a:effectRef>
+          <a:fontRef idx="minor">
+            <a:schemeClr val="lt1"/>
+          </a:fontRef>
+        </p:style>
+        <p:txBody>
+          <a:bodyPr rtlCol="0" anchor="ctr"/>
+          <a:lstStyle/>
+          <a:p>
+            <a:pPr algn="ctr"/>
+          </a:p>
+        </p:txBody>
+      </p:sp>
+      <p:sp>
+        <p:nvSpPr>
+          <p:cNvPr id="63" name="TextBox 62"/>
+          <p:cNvSpPr txBox="1"/>
+          <p:nvPr/>
+        </p:nvSpPr>
+        <p:spPr>
+          <a:xfrm>
+            <a:off x="8869680" y="6217920"/>
+            <a:ext cx="2121408" cy="365760"/>
+          </a:xfrm>
+          <a:prstGeom prst="rect">
+            <a:avLst/>
+          </a:prstGeom>
+          <a:noFill/>
+        </p:spPr>
+        <p:txBody>
+          <a:bodyPr wrap="square" anchor="ctr" lIns="0" rIns="0" tIns="0" bIns="0">
+            <a:spAutoFit/>
+          </a:bodyPr>
+          <a:lstStyle/>
+          <a:p>
+            <a:pPr algn="l">
+              <a:lnSpc>
+                <a:spcPct val="110000"/>
+              </a:lnSpc>
+            </a:pPr>
+            <a:r>
+              <a:rPr sz="1800" b="1">
+                <a:solidFill>
+                  <a:srgbClr val="FFFFFF"/>
+                </a:solidFill>
+                <a:latin typeface="Arial"/>
+                <a:ea typeface="Arial"/>
+              </a:rPr>
+              <a:t>핫 · 콜드 추정</a:t>
+            </a:r>
+          </a:p>
+        </p:txBody>
+      </p:sp>
+      <p:sp>
+        <p:nvSpPr>
+          <p:cNvPr id="64" name="Rounded Rectangle 63"/>
+          <p:cNvSpPr/>
+          <p:nvPr/>
+        </p:nvSpPr>
+        <p:spPr>
+          <a:xfrm>
+            <a:off x="8741664" y="6638544"/>
+            <a:ext cx="2377440" cy="365760"/>
+          </a:xfrm>
+          <a:prstGeom prst="roundRect">
+            <a:avLst>
+              <a:gd name="adj" fmla="val 20000"/>
+            </a:avLst>
+          </a:prstGeom>
+          <a:solidFill>
+            <a:srgbClr val="555555"/>
+          </a:solidFill>
+          <a:ln>
+            <a:noFill/>
+          </a:ln>
+          <a:effectLst/>
+        </p:spPr>
+        <p:style>
+          <a:lnRef idx="1">
+            <a:schemeClr val="accent1"/>
+          </a:lnRef>
+          <a:fillRef idx="3">
+            <a:schemeClr val="accent1"/>
+          </a:fillRef>
+          <a:effectRef idx="2">
+            <a:schemeClr val="accent1"/>
+          </a:effectRef>
+          <a:fontRef idx="minor">
+            <a:schemeClr val="lt1"/>
+          </a:fontRef>
+        </p:style>
+        <p:txBody>
+          <a:bodyPr rtlCol="0" anchor="ctr"/>
+          <a:lstStyle/>
+          <a:p>
+            <a:pPr algn="ctr"/>
+          </a:p>
+        </p:txBody>
+      </p:sp>
+      <p:sp>
+        <p:nvSpPr>
+          <p:cNvPr id="65" name="TextBox 64"/>
+          <p:cNvSpPr txBox="1"/>
+          <p:nvPr/>
+        </p:nvSpPr>
+        <p:spPr>
+          <a:xfrm>
+            <a:off x="8869680" y="6638544"/>
+            <a:ext cx="2121408" cy="365760"/>
+          </a:xfrm>
+          <a:prstGeom prst="rect">
+            <a:avLst/>
+          </a:prstGeom>
+          <a:noFill/>
+        </p:spPr>
+        <p:txBody>
+          <a:bodyPr wrap="square" anchor="ctr" lIns="0" rIns="0" tIns="0" bIns="0">
+            <a:spAutoFit/>
+          </a:bodyPr>
+          <a:lstStyle/>
+          <a:p>
+            <a:pPr algn="l">
+              <a:lnSpc>
+                <a:spcPct val="110000"/>
+              </a:lnSpc>
+            </a:pPr>
+            <a:r>
+              <a:rPr sz="1800" b="1">
+                <a:solidFill>
+                  <a:srgbClr val="FFFFFF"/>
+                </a:solidFill>
+                <a:latin typeface="Arial"/>
+                <a:ea typeface="Arial"/>
+              </a:rPr>
+              <a:t>스트림 분리</a:t>
+            </a:r>
+          </a:p>
+        </p:txBody>
+      </p:sp>
+      <p:sp>
+        <p:nvSpPr>
+          <p:cNvPr id="66" name="TextBox 65"/>
+          <p:cNvSpPr txBox="1"/>
+          <p:nvPr/>
+        </p:nvSpPr>
+        <p:spPr>
+          <a:xfrm>
+            <a:off x="8869680" y="6638544"/>
+            <a:ext cx="2121408" cy="365760"/>
+          </a:xfrm>
+          <a:prstGeom prst="rect">
+            <a:avLst/>
+          </a:prstGeom>
+          <a:noFill/>
+        </p:spPr>
+        <p:txBody>
+          <a:bodyPr wrap="square" anchor="ctr" lIns="0" rIns="0" tIns="0" bIns="0">
+            <a:spAutoFit/>
+          </a:bodyPr>
+          <a:lstStyle/>
+          <a:p>
+            <a:pPr algn="r">
+              <a:lnSpc>
+                <a:spcPct val="110000"/>
+              </a:lnSpc>
+            </a:pPr>
+            <a:r>
+              <a:rPr sz="1600" b="0">
+                <a:solidFill>
+                  <a:srgbClr val="D9D9D9"/>
+                </a:solidFill>
+                <a:latin typeface="Arial"/>
+                <a:ea typeface="Arial"/>
+              </a:rPr>
+              <a:t>2014~17</a:t>
+            </a:r>
+          </a:p>
+        </p:txBody>
+      </p:sp>
+      <p:sp>
+        <p:nvSpPr>
+          <p:cNvPr id="67" name="Rounded Rectangle 66"/>
+          <p:cNvSpPr/>
+          <p:nvPr/>
+        </p:nvSpPr>
+        <p:spPr>
+          <a:xfrm>
+            <a:off x="8741664" y="7059168"/>
+            <a:ext cx="2377440" cy="365760"/>
+          </a:xfrm>
+          <a:prstGeom prst="roundRect">
+            <a:avLst>
+              <a:gd name="adj" fmla="val 20000"/>
+            </a:avLst>
+          </a:prstGeom>
+          <a:solidFill>
+            <a:srgbClr val="555555"/>
+          </a:solidFill>
+          <a:ln>
+            <a:noFill/>
+          </a:ln>
+          <a:effectLst/>
+        </p:spPr>
+        <p:style>
+          <a:lnRef idx="1">
+            <a:schemeClr val="accent1"/>
+          </a:lnRef>
+          <a:fillRef idx="3">
+            <a:schemeClr val="accent1"/>
+          </a:fillRef>
+          <a:effectRef idx="2">
+            <a:schemeClr val="accent1"/>
+          </a:effectRef>
+          <a:fontRef idx="minor">
+            <a:schemeClr val="lt1"/>
+          </a:fontRef>
+        </p:style>
+        <p:txBody>
+          <a:bodyPr rtlCol="0" anchor="ctr"/>
+          <a:lstStyle/>
+          <a:p>
+            <a:pPr algn="ctr"/>
+          </a:p>
+        </p:txBody>
+      </p:sp>
+      <p:sp>
+        <p:nvSpPr>
+          <p:cNvPr id="68" name="TextBox 67"/>
+          <p:cNvSpPr txBox="1"/>
+          <p:nvPr/>
+        </p:nvSpPr>
+        <p:spPr>
+          <a:xfrm>
+            <a:off x="8869680" y="7059168"/>
+            <a:ext cx="2121408" cy="365760"/>
+          </a:xfrm>
+          <a:prstGeom prst="rect">
+            <a:avLst/>
+          </a:prstGeom>
+          <a:noFill/>
+        </p:spPr>
+        <p:txBody>
+          <a:bodyPr wrap="square" anchor="ctr" lIns="0" rIns="0" tIns="0" bIns="0">
+            <a:spAutoFit/>
+          </a:bodyPr>
+          <a:lstStyle/>
+          <a:p>
+            <a:pPr algn="l">
+              <a:lnSpc>
+                <a:spcPct val="110000"/>
+              </a:lnSpc>
+            </a:pPr>
+            <a:r>
+              <a:rPr sz="1800" b="1">
+                <a:solidFill>
+                  <a:srgbClr val="FFFFFF"/>
+                </a:solidFill>
+                <a:latin typeface="Arial"/>
+                <a:ea typeface="Arial"/>
+              </a:rPr>
+              <a:t>IO 결정성</a:t>
+            </a:r>
+          </a:p>
+        </p:txBody>
+      </p:sp>
+      <p:sp>
+        <p:nvSpPr>
+          <p:cNvPr id="69" name="TextBox 68"/>
+          <p:cNvSpPr txBox="1"/>
+          <p:nvPr/>
+        </p:nvSpPr>
+        <p:spPr>
+          <a:xfrm>
+            <a:off x="8869680" y="7059168"/>
+            <a:ext cx="2121408" cy="365760"/>
+          </a:xfrm>
+          <a:prstGeom prst="rect">
+            <a:avLst/>
+          </a:prstGeom>
+          <a:noFill/>
+        </p:spPr>
+        <p:txBody>
+          <a:bodyPr wrap="square" anchor="ctr" lIns="0" rIns="0" tIns="0" bIns="0">
+            <a:spAutoFit/>
+          </a:bodyPr>
+          <a:lstStyle/>
+          <a:p>
+            <a:pPr algn="r">
+              <a:lnSpc>
+                <a:spcPct val="110000"/>
+              </a:lnSpc>
+            </a:pPr>
+            <a:r>
+              <a:rPr sz="1600" b="0">
+                <a:solidFill>
+                  <a:srgbClr val="D9D9D9"/>
+                </a:solidFill>
+                <a:latin typeface="Arial"/>
+                <a:ea typeface="Arial"/>
+              </a:rPr>
+              <a:t>2019</a:t>
+            </a:r>
+          </a:p>
+        </p:txBody>
+      </p:sp>
+      <p:sp>
+        <p:nvSpPr>
+          <p:cNvPr id="70" name="Rounded Rectangle 69"/>
+          <p:cNvSpPr/>
+          <p:nvPr/>
+        </p:nvSpPr>
+        <p:spPr>
+          <a:xfrm>
+            <a:off x="8741664" y="7479792"/>
+            <a:ext cx="2377440" cy="365760"/>
+          </a:xfrm>
+          <a:prstGeom prst="roundRect">
+            <a:avLst>
+              <a:gd name="adj" fmla="val 20000"/>
+            </a:avLst>
+          </a:prstGeom>
+          <a:solidFill>
+            <a:srgbClr val="FFFFFF"/>
+          </a:solidFill>
+          <a:ln w="12700">
+            <a:solidFill>
+              <a:srgbClr val="D9D9D9"/>
+            </a:solidFill>
+          </a:ln>
+          <a:effectLst/>
+        </p:spPr>
+        <p:style>
+          <a:lnRef idx="1">
+            <a:schemeClr val="accent1"/>
+          </a:lnRef>
+          <a:fillRef idx="3">
+            <a:schemeClr val="accent1"/>
+          </a:fillRef>
+          <a:effectRef idx="2">
+            <a:schemeClr val="accent1"/>
+          </a:effectRef>
+          <a:fontRef idx="minor">
+            <a:schemeClr val="lt1"/>
+          </a:fontRef>
+        </p:style>
+        <p:txBody>
+          <a:bodyPr rtlCol="0" anchor="ctr"/>
+          <a:lstStyle/>
+          <a:p>
+            <a:pPr algn="ctr"/>
+          </a:p>
+        </p:txBody>
+      </p:sp>
+      <p:sp>
+        <p:nvSpPr>
+          <p:cNvPr id="71" name="TextBox 70"/>
+          <p:cNvSpPr txBox="1"/>
+          <p:nvPr/>
+        </p:nvSpPr>
+        <p:spPr>
+          <a:xfrm>
+            <a:off x="8869680" y="7479792"/>
+            <a:ext cx="2121408" cy="365760"/>
+          </a:xfrm>
+          <a:prstGeom prst="rect">
+            <a:avLst/>
+          </a:prstGeom>
+          <a:noFill/>
+        </p:spPr>
+        <p:txBody>
+          <a:bodyPr wrap="square" anchor="ctr" lIns="0" rIns="0" tIns="0" bIns="0">
+            <a:spAutoFit/>
+          </a:bodyPr>
+          <a:lstStyle/>
+          <a:p>
+            <a:pPr algn="l">
+              <a:lnSpc>
+                <a:spcPct val="110000"/>
+              </a:lnSpc>
+            </a:pPr>
+            <a:r>
+              <a:rPr sz="1800" b="1">
+                <a:solidFill>
+                  <a:srgbClr val="555555"/>
+                </a:solidFill>
+                <a:latin typeface="Arial"/>
+                <a:ea typeface="Arial"/>
+              </a:rPr>
+              <a:t>GC · 웨어 레벨링</a:t>
+            </a:r>
+          </a:p>
+        </p:txBody>
+      </p:sp>
+      <p:sp>
+        <p:nvSpPr>
+          <p:cNvPr id="72" name="Rounded Rectangle 71"/>
+          <p:cNvSpPr/>
+          <p:nvPr/>
+        </p:nvSpPr>
+        <p:spPr>
+          <a:xfrm>
+            <a:off x="8741664" y="7900416"/>
+            <a:ext cx="2377440" cy="365760"/>
+          </a:xfrm>
+          <a:prstGeom prst="roundRect">
+            <a:avLst>
+              <a:gd name="adj" fmla="val 20000"/>
+            </a:avLst>
+          </a:prstGeom>
+          <a:solidFill>
+            <a:srgbClr val="FFFFFF"/>
+          </a:solidFill>
+          <a:ln w="12700">
+            <a:solidFill>
+              <a:srgbClr val="D9D9D9"/>
+            </a:solidFill>
+          </a:ln>
+          <a:effectLst/>
+        </p:spPr>
+        <p:style>
+          <a:lnRef idx="1">
+            <a:schemeClr val="accent1"/>
+          </a:lnRef>
+          <a:fillRef idx="3">
+            <a:schemeClr val="accent1"/>
+          </a:fillRef>
+          <a:effectRef idx="2">
+            <a:schemeClr val="accent1"/>
+          </a:effectRef>
+          <a:fontRef idx="minor">
+            <a:schemeClr val="lt1"/>
+          </a:fontRef>
+        </p:style>
+        <p:txBody>
+          <a:bodyPr rtlCol="0" anchor="ctr"/>
+          <a:lstStyle/>
+          <a:p>
+            <a:pPr algn="ctr"/>
+          </a:p>
+        </p:txBody>
+      </p:sp>
+      <p:sp>
+        <p:nvSpPr>
+          <p:cNvPr id="73" name="TextBox 72"/>
+          <p:cNvSpPr txBox="1"/>
+          <p:nvPr/>
+        </p:nvSpPr>
+        <p:spPr>
+          <a:xfrm>
+            <a:off x="8869680" y="7900416"/>
+            <a:ext cx="2121408" cy="365760"/>
+          </a:xfrm>
+          <a:prstGeom prst="rect">
+            <a:avLst/>
+          </a:prstGeom>
+          <a:noFill/>
+        </p:spPr>
+        <p:txBody>
+          <a:bodyPr wrap="square" anchor="ctr" lIns="0" rIns="0" tIns="0" bIns="0">
+            <a:spAutoFit/>
+          </a:bodyPr>
+          <a:lstStyle/>
+          <a:p>
+            <a:pPr algn="l">
+              <a:lnSpc>
+                <a:spcPct val="110000"/>
+              </a:lnSpc>
+            </a:pPr>
+            <a:r>
+              <a:rPr sz="1800" b="1">
+                <a:solidFill>
+                  <a:srgbClr val="555555"/>
+                </a:solidFill>
+                <a:latin typeface="Arial"/>
+                <a:ea typeface="Arial"/>
+              </a:rPr>
+              <a:t>FTL · ECC</a:t>
+            </a:r>
+          </a:p>
+        </p:txBody>
+      </p:sp>
+      <p:sp>
+        <p:nvSpPr>
+          <p:cNvPr id="74" name="Rounded Rectangle 73"/>
           <p:cNvSpPr/>
           <p:nvPr/>
         </p:nvSpPr>
@@ -17460,7 +18014,7 @@
       </p:sp>
       <p:pic>
         <p:nvPicPr>
-          <p:cNvPr id="62" name="Picture 61" descr="meta.png"/>
+          <p:cNvPr id="75" name="Picture 74" descr="meta.png"/>
           <p:cNvPicPr>
             <a:picLocks noChangeAspect="1"/>
           </p:cNvPicPr>
@@ -17484,7 +18038,7 @@
       </p:pic>
       <p:sp>
         <p:nvSpPr>
-          <p:cNvPr id="63" name="TextBox 62"/>
+          <p:cNvPr id="76" name="TextBox 75"/>
           <p:cNvSpPr txBox="1"/>
           <p:nvPr/>
         </p:nvSpPr>
@@ -17524,7 +18078,7 @@
       </p:sp>
       <p:sp>
         <p:nvSpPr>
-          <p:cNvPr id="64" name="Rectangle 63"/>
+          <p:cNvPr id="77" name="Rectangle 76"/>
           <p:cNvSpPr/>
           <p:nvPr/>
         </p:nvSpPr>
@@ -17568,7 +18122,7 @@
       </p:sp>
       <p:sp>
         <p:nvSpPr>
-          <p:cNvPr id="65" name="TextBox 64"/>
+          <p:cNvPr id="78" name="TextBox 77"/>
           <p:cNvSpPr txBox="1"/>
           <p:nvPr/>
         </p:nvSpPr>
@@ -17608,7 +18162,7 @@
       </p:sp>
       <p:sp>
         <p:nvSpPr>
-          <p:cNvPr id="66" name="TextBox 65"/>
+          <p:cNvPr id="79" name="TextBox 78"/>
           <p:cNvSpPr txBox="1"/>
           <p:nvPr/>
         </p:nvSpPr>
@@ -17648,7 +18202,7 @@
       </p:sp>
       <p:sp>
         <p:nvSpPr>
-          <p:cNvPr id="67" name="Rectangle 66"/>
+          <p:cNvPr id="80" name="Rectangle 79"/>
           <p:cNvSpPr/>
           <p:nvPr/>
         </p:nvSpPr>
@@ -17692,7 +18246,7 @@
       </p:sp>
       <p:sp>
         <p:nvSpPr>
-          <p:cNvPr id="68" name="TextBox 67"/>
+          <p:cNvPr id="81" name="TextBox 80"/>
           <p:cNvSpPr txBox="1"/>
           <p:nvPr/>
         </p:nvSpPr>
@@ -17732,7 +18286,7 @@
       </p:sp>
       <p:sp>
         <p:nvSpPr>
-          <p:cNvPr id="69" name="TextBox 68"/>
+          <p:cNvPr id="82" name="TextBox 81"/>
           <p:cNvSpPr txBox="1"/>
           <p:nvPr/>
         </p:nvSpPr>
@@ -17772,7 +18326,7 @@
       </p:sp>
       <p:sp>
         <p:nvSpPr>
-          <p:cNvPr id="70" name="Rectangle 69"/>
+          <p:cNvPr id="83" name="Rectangle 82"/>
           <p:cNvSpPr/>
           <p:nvPr/>
         </p:nvSpPr>
@@ -17816,7 +18370,7 @@
       </p:sp>
       <p:sp>
         <p:nvSpPr>
-          <p:cNvPr id="71" name="TextBox 70"/>
+          <p:cNvPr id="84" name="TextBox 83"/>
           <p:cNvSpPr txBox="1"/>
           <p:nvPr/>
         </p:nvSpPr>
@@ -17856,7 +18410,7 @@
       </p:sp>
       <p:sp>
         <p:nvSpPr>
-          <p:cNvPr id="72" name="TextBox 71"/>
+          <p:cNvPr id="85" name="TextBox 84"/>
           <p:cNvSpPr txBox="1"/>
           <p:nvPr/>
         </p:nvSpPr>
@@ -17896,7 +18450,7 @@
       </p:sp>
       <p:sp>
         <p:nvSpPr>
-          <p:cNvPr id="73" name="Chevron 72"/>
+          <p:cNvPr id="86" name="Chevron 85"/>
           <p:cNvSpPr/>
           <p:nvPr/>
         </p:nvSpPr>
@@ -17940,7 +18494,7 @@
       </p:sp>
       <p:sp>
         <p:nvSpPr>
-          <p:cNvPr id="74" name="Chevron 73"/>
+          <p:cNvPr id="87" name="Chevron 86"/>
           <p:cNvSpPr/>
           <p:nvPr/>
         </p:nvSpPr>
@@ -17984,7 +18538,7 @@
       </p:sp>
       <p:sp>
         <p:nvSpPr>
-          <p:cNvPr id="75" name="Rectangle 74"/>
+          <p:cNvPr id="88" name="Rectangle 87"/>
           <p:cNvSpPr/>
           <p:nvPr/>
         </p:nvSpPr>
@@ -18028,7 +18582,7 @@
       </p:sp>
       <p:sp>
         <p:nvSpPr>
-          <p:cNvPr id="76" name="TextBox 75"/>
+          <p:cNvPr id="89" name="TextBox 88"/>
           <p:cNvSpPr txBox="1"/>
           <p:nvPr/>
         </p:nvSpPr>
@@ -18068,7 +18622,7 @@
       </p:sp>
       <p:sp>
         <p:nvSpPr>
-          <p:cNvPr id="77" name="TextBox 76"/>
+          <p:cNvPr id="90" name="TextBox 89"/>
           <p:cNvSpPr txBox="1"/>
           <p:nvPr/>
         </p:nvSpPr>
@@ -18108,7 +18662,7 @@
       </p:sp>
       <p:sp>
         <p:nvSpPr>
-          <p:cNvPr id="78" name="TextBox 77"/>
+          <p:cNvPr id="91" name="TextBox 90"/>
           <p:cNvSpPr txBox="1"/>
           <p:nvPr/>
         </p:nvSpPr>
@@ -18141,14 +18695,14 @@
                 <a:latin typeface="Arial"/>
                 <a:ea typeface="Arial"/>
               </a:rPr>
-              <a:t>출처: 해법 사다리 원장(JESD218 · LDPC · FDP TP4146 · CacheLib + FDP 3.22 → 1.03, EuroSys'25) · 캐시 DWPD: Kangaroo 예산 3 · Baleen 목표 7.2 · StorageReview KV 실측 3.2 · CacheLib 150% · -44%(OSDI'20) · 기준(예산 · 실측 · 목표)이 서로 다름 · 부품 이미지는 3D 렌더</a:t>
-            </a:r>
-          </a:p>
-        </p:txBody>
-      </p:sp>
-      <p:sp>
-        <p:nvSpPr>
-          <p:cNvPr id="79" name="TextBox 78"/>
+              <a:t>출처: 해법 사다리 원장(JESD218 · LDPC · 스트림 '14 · '17 · NVMe 1.4 · FDP TP4146 · CacheLib + FDP 3.22 → 1.03, EuroSys'25) · 캐시 DWPD: Kangaroo 예산 3 · Baleen 목표 7.2 · StorageReview KV 실측 3.2 · CacheLib 150% · -44%(OSDI'20) · 기준(예산 · 실측 · 목표)이 서로 다름 · 부품 이미지는 3D 렌더</a:t>
+            </a:r>
+          </a:p>
+        </p:txBody>
+      </p:sp>
+      <p:sp>
+        <p:nvSpPr>
+          <p:cNvPr id="92" name="TextBox 91"/>
           <p:cNvSpPr txBox="1"/>
           <p:nvPr/>
         </p:nvSpPr>

--- a/outputs/presentation/ssd-future-ready-strategy.pptx
+++ b/outputs/presentation/ssd-future-ready-strategy.pptx
@@ -575,7 +575,7 @@
           <a:lstStyle/>
           <a:p>
             <a:r>
-              <a:t>2장입니다. 1장의 제품 포트폴리오를 받치는 핵심 기술 여섯 가지를, 왼쪽에는 어떤 제품군에 쓰이는지, 오른쪽에는 고객과 어떻게 협력해야 하는지로 정리했습니다. 왼쪽부터 보겠습니다. Fault Tolerant는 다이와 플레인 단위로 고장을 격리합니다. 같은 폼팩터에서 245테라바이트는 다이 1,024개, 512테라바이트는 약 2,133개라 고용량일수록 필요합니다. Large Mapping은 매핑 단위를 4킬로바이트에서 8에서 64킬로바이트로 키웁니다. 245테라바이트 드라이브의 매핑 DRAM이 약 245기가바이트에서 15기가바이트로 줄어드는 대신, 매핑 단위보다 작은 쓰기는 최대 16배를 다시 씁니다. Mixed Media는 pSLC와 QLC를 별도 네임스페이스로 나눕니다. 작은 쓰기를 모아 순차로 내리면 4킬로바이트 쓰기의 WAF가 70을 넘던 것이 1.02까지 내려간 사례가 있고, 고객이 요구한 pSLC 비율은 QLC 용량의 0.5에서 2퍼센트입니다. Multi-Tenant QoS는 네임스페이스 단위로 테넌트를 격리합니다. 이웃 테넌트의 쓰기만으로 WAF가 1.28에서 3.0으로 오르고, 하드웨어로 격리하면 p99 지연이 최대 3.1배 줄었습니다. FDP는 배치 핸들로 수명이 같은 데이터를 모읍니다. SLC급, 고내구 TLC, 고용량 QLC에 모두 걸려 가장 넓습니다. Confidential Storage는 RoT, 암호화, 증명으로 기밀 VM의 디스크를 지킵니다. Meta는 Meta도 접근하지 못하는 Muse 기밀 VM을 예고했습니다. 고용량 QLC에는 여섯 가지 중 다섯 가지가 걸립니다. 오른쪽은 협력의 깊이입니다. 가로축은 고객 시스템과 함께 설계돼야 하는 정도, 세로축은 명확한 스펙만으로 최적화가 닫히는지입니다. Mixed Media와 Confidential Storage는 고객 시스템에 깊이 들어갑니다. 그러나 Mixed Media의 인터페이스는 표준 네임스페이스이고, pSLC 비율은 출하 시 정하는 값이며 고객이 이미 수치로 요구합니다. 네임스페이스 간 QoS도 목표 수치로 사내에서 검증할 수 있습니다. Confidential Storage는 Caliptra, SPDM, TDISP, OCP L.O.C.K. 같은 표준이 인터페이스와 동작을 정하고, 삼성은 L.O.C.K.의 공저자입니다. Large Mapping과 QoS도 고객의 쓰기 크기와 지연 목표를 스펙으로 받으면 됩니다. 이 다섯은 고객 요구를 정확한 스펙으로 받는 협력이면 충분합니다. FDP는 다릅니다. 효과는 고객 소프트웨어가 데이터 수명을 얼마나 잘 나누는지와, SSD의 RU 크기와 GC 정책이 맞물릴 때만 납니다. FAST'26의 WARP 연구에서는 같은 FDP 지원 드라이브, 같은 워크로드에서 한 장치는 WAF가 1 근처를 지켰고 다른 장치는 무너졌습니다. 분류가 어긋나 사용자 데이터의 99퍼센트가 한 핸들로 몰리면 효과가 사라지고, 한 핸들의 무효화가 다른 핸들의 WAF까지 키우기도 합니다. 게다가 RUH와 RG 구성은 출하 시 고정되므로, 고객 워크로드를 보고 미리 함께 정해야 합니다. CacheLib이 WAF를 3.22에서 1.03으로 낮춘 결과도 Meta와 삼성의 공동 연구였습니다. 그래서 FDP는 고객과 함께 설계해야 제대로 동작합니다. 정리하면, 스펙을 정확히 받든 함께 설계하든, 핵심 기술을 제대로 확보하려면 고객과의 협력이 필수입니다. 협력의 깊이 판단은 과제팀의 판단이고, 근거는 위키에 정리했습니다.</a:t>
+              <a:t>2장입니다. 1장의 제품 포트폴리오를 받치는 핵심 기술 여섯 가지를, 왼쪽에는 어떤 제품군에 쓰이는지, 오른쪽에는 고객과 어떻게 협력해야 하는지로 정리했습니다. 왼쪽부터 보겠습니다. Fault Tolerant는 다이와 플레인 단위로 고장을 격리합니다. 같은 폼팩터에서 245테라바이트는 다이 1,024개, 512테라바이트는 약 2,133개라 고용량일수록 필요합니다. Large Mapping은 매핑 단위를 4킬로바이트에서 8에서 64킬로바이트로 키웁니다. 245테라바이트 드라이브의 매핑 DRAM이 약 245기가바이트에서 15기가바이트로 줄어드는 대신, 매핑 단위보다 작은 쓰기는 최대 16배를 다시 씁니다. Mixed Media는 pSLC와 QLC를 별도 네임스페이스로 나눕니다. 작은 쓰기를 모아 순차로 내리면 4킬로바이트 쓰기의 WAF가 70을 넘던 것이 1.02까지 내려간 사례가 있고, 고객이 요구한 pSLC 비율은 QLC 용량의 0.5에서 2퍼센트입니다. Multi-Tenant QoS는 네임스페이스 단위로 테넌트를 격리합니다. 이웃 테넌트의 쓰기만으로 WAF가 1.28에서 3.0으로 오르고, 하드웨어로 격리하면 p99 지연이 최대 3.1배 줄었습니다. FDP는 배치 핸들로 수명이 같은 데이터를 모읍니다. SLC급, 고내구 TLC, 고용량 QLC에 모두 걸려 가장 넓습니다. Confidential Storage는 RoT, 암호화, 증명으로 기밀 VM의 디스크를 지킵니다. Meta는 Meta도 접근하지 못하는 Muse 기밀 VM을 예고했습니다. 고용량 QLC에는 여섯 가지 중 다섯 가지가 걸립니다. 오른쪽은 협력의 깊이입니다. 가로축은 고객 시스템과 함께 설계돼야 하는 정도, 세로축은 명확한 스펙만으로 최적화가 닫히는지입니다. Mixed Media와 Confidential Storage는 고객 시스템에 깊이 들어갑니다. 그러나 Mixed Media의 인터페이스는 표준 네임스페이스이고, pSLC 비율은 출하 시 정하는 값이며 고객이 이미 수치로 요구합니다. 네임스페이스 간 QoS도 목표 수치로 사내에서 검증할 수 있습니다. Confidential Storage는 Caliptra, SPDM, TDISP, OCP L.O.C.K. 같은 표준이 인터페이스와 동작을 정하고, 삼성은 L.O.C.K.의 공저자입니다. Large Mapping과 QoS도 고객의 쓰기 크기와 지연 목표를 스펙으로 받으면 됩니다. 이 다섯은 고객 요구를 정확한 스펙으로 받는 협력이면 충분합니다. FDP는 다릅니다. 효과는 고객 소프트웨어가 데이터 수명을 얼마나 잘 나누는지와, SSD의 RU 크기와 GC 정책이 맞물릴 때만 납니다. FAST'26의 WARP 연구에서는 같은 FDP 지원 드라이브, 같은 워크로드에서 한 장치는 WAF가 1 근처를 지켰고 다른 장치는 무너졌습니다. 분류가 어긋나 사용자 데이터의 99퍼센트가 한 핸들로 몰리면 효과가 사라지고, 한 핸들의 무효화가 다른 핸들의 WAF까지 키우기도 합니다. 게다가 RUH와 RG 구성은 출하 시 고정되므로, 고객 워크로드를 보고 미리 함께 정해야 합니다. CacheLib이 WAF를 3.22에서 1.03으로 낮춘 결과도 삼성 엔지니어가 Meta의 오픈소스 CacheLib 안에 들어가 구현하고 Meta가 받아들인 결과였습니다. 그래서 FDP는 고객과 함께 설계해야 제대로 동작합니다. 정리하면, 스펙을 정확히 받든 함께 설계하든, 핵심 기술을 제대로 확보하려면 고객과의 협력이 필수입니다. 협력의 깊이 판단은 과제팀의 판단이고, 근거는 위키에 정리했습니다.</a:t>
             </a:r>
           </a:p>
         </p:txBody>
@@ -645,7 +645,7 @@
           <a:lstStyle/>
           <a:p>
             <a:r>
-              <a:t>3장입니다. 왜 고객 시스템까지 가야 하는지 데이터로 말씀드리겠습니다. 왼쪽 위는 셀이 견디는 쓰기 횟수입니다. SLC 10만 회에서 QLC 1천 회로 약 100배 줄었습니다. 그 옆은 고객의 캐시 계층이 실제로 쓰는 양입니다. QLC 정격은 하루 0.6회인데, Meta의 플래시 캐시는 하루 3회를 쓰기 예산으로 잡고, Meta 벌크 스토리지 캐시 연구는 7.2회를 목표로 둡니다. AI KV 캐시 계층을 실측하면 드라이브당 3.2회였습니다. 기준은 예산, 실측, 목표로 서로 다르지만 방향은 같습니다. 고객의 쓰기는 커지는데 셀 수명은 줄면, 보상은 늘 한 계층 위로 올라갔습니다. 첫 계단은 NAND에서 SSD입니다. 셀 오류율이 약 100만 배 나빠졌지만 컨트롤러 ECC가 약 60배 강해지면서 SSD 안에서 완결됐습니다. 둘째 계단은 SSD 혼자 하는 최적화입니다. 오른쪽이 그때 SSD 안에 쌓은 기술입니다. FTL과 ECC, GC와 웨어 레벨링 위에, 2014년부터 2019년까지 핫 · 콜드 추정, 스트림 분리(2014년 멀티 스트림, 2017년 자동 스트림), IO 결정성(2019년)을 더했습니다. 테일 지연과 성능은 좋아졌지만, 실제 워크로드에서 WAF는 약 3에 머물렀습니다. 데이터가 언제 지워지는지는 호스트만 알기 때문입니다. 셋째 계단이 고객 시스템과의 공동 설계입니다. 호스트가 데이터 수명을 알려 주는 FDP로 CacheLib은 WAF를 3.22에서 1.03으로 낮췄습니다. 고객은 이미 자기 시스템에서 이 문제와 싸우고 있습니다. Meta CacheLib 논문에 따르면, 캐시 쓰기를 그대로 두면 SSD 수명 예산의 1.5배가 됩니다. 그래서 Meta는 플래시를 50퍼센트 더 두고, 머신러닝 수용 정책이라는 자기 소프트웨어로 플래시 기록량을 44퍼센트 줄였습니다. 해법이 이미 고객 소프트웨어 안에 있다는 뜻입니다. 사양서를 받아 SSD를 잘 만드는 방식은 둘째 계단에 머뭅니다. 셋째 계단은 고객 시스템 안에서 함께 설계해야 닿습니다.</a:t>
+              <a:t>3장입니다. 왜 고객 시스템까지 가야 하는지 데이터로 말씀드리겠습니다. 위쪽 그래프 넷은 지난 10~15년 동안 데이터센터 SSD가 혼자서 얼마나 성장했는지입니다. 4K 랜덤 읽기는 2012년 7만 5천 IOPS에서 2026년 680만 IOPS로 약 90배, 와트당 읽기 성능은 83에서 1,120MB/s로 약 13배, 1달러로 사는 NAND 용량은 2010년 0.56GB에서 2024년 13GB로 약 24배 늘었습니다. NAND 세대, 컨트롤러, 인터페이스 세대가 만든 성장이고, 모두 SSD 안에서 이룬 것입니다. 그런데 오른쪽 정격 DWPD는 반대입니다. 2012년 고내구 드라이브의 10에서 지금 플래그십 1로, QLC는 0.26까지 내려왔습니다. 셀이 견디는 쓰기가 SLC 10만 회에서 QLC 1천 회로 약 100배 줄었기 때문입니다. 고내구 등급에서 읽기 위주 등급으로 옮겨 간 영향도 섞여 있지만, 고객 캐시 계층은 하루 3회에서 7.2회를 씁니다. 이 띠와 정격 사이의 간격이 지금의 과제입니다. 아래 계단은 이 간격을 어디서 메워 왔는지입니다. 첫 계단 NAND에서 SSD로는 컨트롤러 ECC가 약 60배 강해지면서 SSD 안에서 완결됐습니다. 둘째 계단은 SSD 혼자 하는 최적화입니다. FTL과 ECC, GC와 웨어 레벨링 위에, 2014년부터 2019년까지 핫 · 콜드 추정, 스트림 분리, IO 결정성을 더했습니다. 테일 지연과 성능은 좋아졌지만, 실제 워크로드에서 WAF는 약 3에 머물렀습니다. 데이터가 언제 지워지는지는 호스트만 알기 때문입니다. 셋째 계단이 고객 시스템과의 공동 설계입니다. 삼성 엔지니어가 Meta의 오픈소스 CacheLib 안에 FDP 배치를 구현했고, WAF가 3.22에서 1.03으로 내려갔습니다. 이 방향은 이미 주요 데이터센터 기업의 흐름입니다. Baidu는 2014년 하드웨어와 소프트웨어를 함께 설계한 자체 SSD를 3천 대 넘게 배치했습니다. Google은 2016년 논문에서 자체 인터페이스와 펌웨어를 얹은 자체 설계 SSD를 운용한다고 밝혔고, 지금은 Titanium SSD를 씁니다. Alibaba는 2016년 AliFlash로 시작해 2023년 자체 SSD 컨트롤러를 내놓았고, 누적 50만 개 넘게 출하했다고 발표했습니다. AWS는 FTL을 새로 쓴 Nitro SSD로 I3 대비 지연을 최대 60퍼센트 줄였다고 밝혔습니다. 다만 컨트롤러 칩까지 직접 만든다는 근거는 없습니다. Microsoft와 Meta는 SSD를 직접 만들지 않지만 OCP SSD 스펙과 FDP 표준을 직접 썼고, ByteDance도 사내 SSD 개발 조직을 공개했습니다. Tencent는 공개 근거를 찾지 못했습니다. 고객은 이미 자기 시스템에 맞춰 SSD를 설계하고 있습니다. 사양서를 받아 SSD를 잘 만드는 방식은 둘째 계단에 머물고, 셋째 계단은 고객 시스템 안에서 함께 설계해야 닿습니다.</a:t>
             </a:r>
           </a:p>
         </p:txBody>
@@ -14885,7 +14885,7 @@
                 <a:latin typeface="Arial"/>
                 <a:ea typeface="Arial"/>
               </a:rPr>
-              <a:t>출처: WAF 3.22 → 1.03(CacheLib, Meta · Samsung EuroSys'25) · 같은 FDP 지원 장치에서도 결과가 갈림(WARP FAST'26) · RUH · RG 출하 시 고정(NVMe FDP) · 제품군 적합도와 협력 깊이는 과제팀 판단(위키 ssd-core-technologies-customer-collaboration)</a:t>
+              <a:t>출처: WAF 3.22 → 1.03(CacheLib FDP, 삼성 EuroSys'25 · Meta 반영) · 같은 FDP 지원 장치에서도 결과가 갈림(WARP FAST'26) · RUH · RG 출하 시 고정(NVMe FDP) · 제품군 적합도와 협력 깊이는 과제팀 판단(위키 ssd-core-technologies-customer-collaboration)</a:t>
             </a:r>
           </a:p>
         </p:txBody>
@@ -15147,8 +15147,8 @@
         </p:nvSpPr>
         <p:spPr>
           <a:xfrm>
-            <a:off x="722376" y="2212848"/>
-            <a:ext cx="4937760" cy="365760"/>
+            <a:off x="722376" y="2176272"/>
+            <a:ext cx="2514600" cy="402336"/>
           </a:xfrm>
           <a:prstGeom prst="rect">
             <a:avLst/>
@@ -15169,38 +15169,297 @@
             <a:r>
               <a:rPr sz="2000" b="1">
                 <a:solidFill>
+                  <a:srgbClr val="1A1A1A"/>
+                </a:solidFill>
+                <a:latin typeface="Arial"/>
+                <a:ea typeface="Arial"/>
+              </a:rPr>
+              <a:t>성능  </a:t>
+            </a:r>
+            <a:r>
+              <a:rPr sz="2400" b="1">
+                <a:solidFill>
+                  <a:srgbClr val="1A1A1A"/>
+                </a:solidFill>
+                <a:latin typeface="Arial"/>
+                <a:ea typeface="Arial"/>
+              </a:rPr>
+              <a:t>×90</a:t>
+            </a:r>
+          </a:p>
+        </p:txBody>
+      </p:sp>
+      <p:sp>
+        <p:nvSpPr>
+          <p:cNvPr id="7" name="TextBox 6"/>
+          <p:cNvSpPr txBox="1"/>
+          <p:nvPr/>
+        </p:nvSpPr>
+        <p:spPr>
+          <a:xfrm>
+            <a:off x="722376" y="2560320"/>
+            <a:ext cx="2514600" cy="292608"/>
+          </a:xfrm>
+          <a:prstGeom prst="rect">
+            <a:avLst/>
+          </a:prstGeom>
+          <a:noFill/>
+        </p:spPr>
+        <p:txBody>
+          <a:bodyPr wrap="square" anchor="ctr" lIns="0" rIns="0" tIns="0" bIns="0">
+            <a:spAutoFit/>
+          </a:bodyPr>
+          <a:lstStyle/>
+          <a:p>
+            <a:pPr algn="l">
+              <a:lnSpc>
+                <a:spcPct val="110000"/>
+              </a:lnSpc>
+            </a:pPr>
+            <a:r>
+              <a:rPr sz="1600" b="0">
+                <a:solidFill>
                   <a:srgbClr val="555555"/>
                 </a:solidFill>
                 <a:latin typeface="Arial"/>
                 <a:ea typeface="Arial"/>
               </a:rPr>
-              <a:t>▼ 셀이 견디는 쓰기  </a:t>
-            </a:r>
-            <a:r>
-              <a:rPr sz="1600" b="0">
-                <a:solidFill>
-                  <a:srgbClr val="555555"/>
-                </a:solidFill>
-                <a:latin typeface="Arial"/>
-                <a:ea typeface="Arial"/>
-              </a:rPr>
-              <a:t>P/E</a:t>
-            </a:r>
-          </a:p>
-        </p:txBody>
-      </p:sp>
-      <p:sp>
-        <p:nvSpPr>
-          <p:cNvPr id="7" name="Rectangle 6"/>
+              <a:t>랜덤 읽기 IOPS (로그 축)</a:t>
+            </a:r>
+          </a:p>
+        </p:txBody>
+      </p:sp>
+      <p:sp>
+        <p:nvSpPr>
+          <p:cNvPr id="8" name="Rectangle 7"/>
           <p:cNvSpPr/>
           <p:nvPr/>
         </p:nvSpPr>
         <p:spPr>
           <a:xfrm>
-            <a:off x="996696" y="3063239"/>
-            <a:ext cx="731520" cy="1783080"/>
-          </a:xfrm>
-          <a:prstGeom prst="rect">
+            <a:off x="813816" y="4553712"/>
+            <a:ext cx="2331720" cy="10972"/>
+          </a:xfrm>
+          <a:prstGeom prst="rect">
+            <a:avLst/>
+          </a:prstGeom>
+          <a:solidFill>
+            <a:srgbClr val="D9D9D9"/>
+          </a:solidFill>
+          <a:ln>
+            <a:noFill/>
+          </a:ln>
+          <a:effectLst/>
+        </p:spPr>
+        <p:style>
+          <a:lnRef idx="1">
+            <a:schemeClr val="accent1"/>
+          </a:lnRef>
+          <a:fillRef idx="3">
+            <a:schemeClr val="accent1"/>
+          </a:fillRef>
+          <a:effectRef idx="2">
+            <a:schemeClr val="accent1"/>
+          </a:effectRef>
+          <a:fontRef idx="minor">
+            <a:schemeClr val="lt1"/>
+          </a:fontRef>
+        </p:style>
+        <p:txBody>
+          <a:bodyPr rtlCol="0" anchor="ctr"/>
+          <a:lstStyle/>
+          <a:p>
+            <a:pPr algn="ctr"/>
+          </a:p>
+        </p:txBody>
+      </p:sp>
+      <p:cxnSp>
+        <p:nvCxnSpPr>
+          <p:cNvPr id="9" name="Connector 8"/>
+          <p:cNvCxnSpPr/>
+          <p:nvPr/>
+        </p:nvCxnSpPr>
+        <p:spPr>
+          <a:xfrm flipV="1">
+            <a:off x="1269873" y="3672982"/>
+            <a:ext cx="354901" cy="559537"/>
+          </a:xfrm>
+          <a:prstGeom prst="line">
+            <a:avLst/>
+          </a:prstGeom>
+          <a:ln w="28575">
+            <a:solidFill>
+              <a:srgbClr val="555555"/>
+            </a:solidFill>
+          </a:ln>
+        </p:spPr>
+        <p:style>
+          <a:lnRef idx="2">
+            <a:schemeClr val="accent1"/>
+          </a:lnRef>
+          <a:fillRef idx="0">
+            <a:schemeClr val="accent1"/>
+          </a:fillRef>
+          <a:effectRef idx="1">
+            <a:schemeClr val="accent1"/>
+          </a:effectRef>
+          <a:fontRef idx="minor">
+            <a:schemeClr val="tx1"/>
+          </a:fontRef>
+        </p:style>
+      </p:cxnSp>
+      <p:cxnSp>
+        <p:nvCxnSpPr>
+          <p:cNvPr id="10" name="Connector 9"/>
+          <p:cNvCxnSpPr/>
+          <p:nvPr/>
+        </p:nvCxnSpPr>
+        <p:spPr>
+          <a:xfrm flipV="1">
+            <a:off x="1624774" y="3504544"/>
+            <a:ext cx="473202" cy="168438"/>
+          </a:xfrm>
+          <a:prstGeom prst="line">
+            <a:avLst/>
+          </a:prstGeom>
+          <a:ln w="28575">
+            <a:solidFill>
+              <a:srgbClr val="555555"/>
+            </a:solidFill>
+          </a:ln>
+        </p:spPr>
+        <p:style>
+          <a:lnRef idx="2">
+            <a:schemeClr val="accent1"/>
+          </a:lnRef>
+          <a:fillRef idx="0">
+            <a:schemeClr val="accent1"/>
+          </a:fillRef>
+          <a:effectRef idx="1">
+            <a:schemeClr val="accent1"/>
+          </a:effectRef>
+          <a:fontRef idx="minor">
+            <a:schemeClr val="tx1"/>
+          </a:fontRef>
+        </p:style>
+      </p:cxnSp>
+      <p:cxnSp>
+        <p:nvCxnSpPr>
+          <p:cNvPr id="11" name="Connector 10"/>
+          <p:cNvCxnSpPr/>
+          <p:nvPr/>
+        </p:nvCxnSpPr>
+        <p:spPr>
+          <a:xfrm flipV="1">
+            <a:off x="2097976" y="3380412"/>
+            <a:ext cx="354902" cy="124132"/>
+          </a:xfrm>
+          <a:prstGeom prst="line">
+            <a:avLst/>
+          </a:prstGeom>
+          <a:ln w="28575">
+            <a:solidFill>
+              <a:srgbClr val="555555"/>
+            </a:solidFill>
+          </a:ln>
+        </p:spPr>
+        <p:style>
+          <a:lnRef idx="2">
+            <a:schemeClr val="accent1"/>
+          </a:lnRef>
+          <a:fillRef idx="0">
+            <a:schemeClr val="accent1"/>
+          </a:fillRef>
+          <a:effectRef idx="1">
+            <a:schemeClr val="accent1"/>
+          </a:effectRef>
+          <a:fontRef idx="minor">
+            <a:schemeClr val="tx1"/>
+          </a:fontRef>
+        </p:style>
+      </p:cxnSp>
+      <p:cxnSp>
+        <p:nvCxnSpPr>
+          <p:cNvPr id="12" name="Connector 11"/>
+          <p:cNvCxnSpPr/>
+          <p:nvPr/>
+        </p:nvCxnSpPr>
+        <p:spPr>
+          <a:xfrm flipV="1">
+            <a:off x="2452878" y="3312946"/>
+            <a:ext cx="236601" cy="67466"/>
+          </a:xfrm>
+          <a:prstGeom prst="line">
+            <a:avLst/>
+          </a:prstGeom>
+          <a:ln w="28575">
+            <a:solidFill>
+              <a:srgbClr val="555555"/>
+            </a:solidFill>
+          </a:ln>
+        </p:spPr>
+        <p:style>
+          <a:lnRef idx="2">
+            <a:schemeClr val="accent1"/>
+          </a:lnRef>
+          <a:fillRef idx="0">
+            <a:schemeClr val="accent1"/>
+          </a:fillRef>
+          <a:effectRef idx="1">
+            <a:schemeClr val="accent1"/>
+          </a:effectRef>
+          <a:fontRef idx="minor">
+            <a:schemeClr val="tx1"/>
+          </a:fontRef>
+        </p:style>
+      </p:cxnSp>
+      <p:cxnSp>
+        <p:nvCxnSpPr>
+          <p:cNvPr id="13" name="Connector 12"/>
+          <p:cNvCxnSpPr/>
+          <p:nvPr/>
+        </p:nvCxnSpPr>
+        <p:spPr>
+          <a:xfrm flipV="1">
+            <a:off x="2689479" y="3137254"/>
+            <a:ext cx="236601" cy="175692"/>
+          </a:xfrm>
+          <a:prstGeom prst="line">
+            <a:avLst/>
+          </a:prstGeom>
+          <a:ln w="28575">
+            <a:solidFill>
+              <a:srgbClr val="555555"/>
+            </a:solidFill>
+          </a:ln>
+        </p:spPr>
+        <p:style>
+          <a:lnRef idx="2">
+            <a:schemeClr val="accent1"/>
+          </a:lnRef>
+          <a:fillRef idx="0">
+            <a:schemeClr val="accent1"/>
+          </a:fillRef>
+          <a:effectRef idx="1">
+            <a:schemeClr val="accent1"/>
+          </a:effectRef>
+          <a:fontRef idx="minor">
+            <a:schemeClr val="tx1"/>
+          </a:fontRef>
+        </p:style>
+      </p:cxnSp>
+      <p:sp>
+        <p:nvSpPr>
+          <p:cNvPr id="14" name="Oval 13"/>
+          <p:cNvSpPr/>
+          <p:nvPr/>
+        </p:nvSpPr>
+        <p:spPr>
+          <a:xfrm>
+            <a:off x="1219581" y="4182227"/>
+            <a:ext cx="100584" cy="100584"/>
+          </a:xfrm>
+          <a:prstGeom prst="ellipse">
             <a:avLst/>
           </a:prstGeom>
           <a:solidFill>
@@ -15235,14 +15494,234 @@
       </p:sp>
       <p:sp>
         <p:nvSpPr>
-          <p:cNvPr id="8" name="TextBox 7"/>
+          <p:cNvPr id="15" name="Oval 14"/>
+          <p:cNvSpPr/>
+          <p:nvPr/>
+        </p:nvSpPr>
+        <p:spPr>
+          <a:xfrm>
+            <a:off x="1574482" y="3622690"/>
+            <a:ext cx="100584" cy="100584"/>
+          </a:xfrm>
+          <a:prstGeom prst="ellipse">
+            <a:avLst/>
+          </a:prstGeom>
+          <a:solidFill>
+            <a:srgbClr val="555555"/>
+          </a:solidFill>
+          <a:ln>
+            <a:noFill/>
+          </a:ln>
+          <a:effectLst/>
+        </p:spPr>
+        <p:style>
+          <a:lnRef idx="1">
+            <a:schemeClr val="accent1"/>
+          </a:lnRef>
+          <a:fillRef idx="3">
+            <a:schemeClr val="accent1"/>
+          </a:fillRef>
+          <a:effectRef idx="2">
+            <a:schemeClr val="accent1"/>
+          </a:effectRef>
+          <a:fontRef idx="minor">
+            <a:schemeClr val="lt1"/>
+          </a:fontRef>
+        </p:style>
+        <p:txBody>
+          <a:bodyPr rtlCol="0" anchor="ctr"/>
+          <a:lstStyle/>
+          <a:p>
+            <a:pPr algn="ctr"/>
+          </a:p>
+        </p:txBody>
+      </p:sp>
+      <p:sp>
+        <p:nvSpPr>
+          <p:cNvPr id="16" name="Oval 15"/>
+          <p:cNvSpPr/>
+          <p:nvPr/>
+        </p:nvSpPr>
+        <p:spPr>
+          <a:xfrm>
+            <a:off x="2047684" y="3454252"/>
+            <a:ext cx="100584" cy="100584"/>
+          </a:xfrm>
+          <a:prstGeom prst="ellipse">
+            <a:avLst/>
+          </a:prstGeom>
+          <a:solidFill>
+            <a:srgbClr val="555555"/>
+          </a:solidFill>
+          <a:ln>
+            <a:noFill/>
+          </a:ln>
+          <a:effectLst/>
+        </p:spPr>
+        <p:style>
+          <a:lnRef idx="1">
+            <a:schemeClr val="accent1"/>
+          </a:lnRef>
+          <a:fillRef idx="3">
+            <a:schemeClr val="accent1"/>
+          </a:fillRef>
+          <a:effectRef idx="2">
+            <a:schemeClr val="accent1"/>
+          </a:effectRef>
+          <a:fontRef idx="minor">
+            <a:schemeClr val="lt1"/>
+          </a:fontRef>
+        </p:style>
+        <p:txBody>
+          <a:bodyPr rtlCol="0" anchor="ctr"/>
+          <a:lstStyle/>
+          <a:p>
+            <a:pPr algn="ctr"/>
+          </a:p>
+        </p:txBody>
+      </p:sp>
+      <p:sp>
+        <p:nvSpPr>
+          <p:cNvPr id="17" name="Oval 16"/>
+          <p:cNvSpPr/>
+          <p:nvPr/>
+        </p:nvSpPr>
+        <p:spPr>
+          <a:xfrm>
+            <a:off x="2402586" y="3330120"/>
+            <a:ext cx="100584" cy="100584"/>
+          </a:xfrm>
+          <a:prstGeom prst="ellipse">
+            <a:avLst/>
+          </a:prstGeom>
+          <a:solidFill>
+            <a:srgbClr val="555555"/>
+          </a:solidFill>
+          <a:ln>
+            <a:noFill/>
+          </a:ln>
+          <a:effectLst/>
+        </p:spPr>
+        <p:style>
+          <a:lnRef idx="1">
+            <a:schemeClr val="accent1"/>
+          </a:lnRef>
+          <a:fillRef idx="3">
+            <a:schemeClr val="accent1"/>
+          </a:fillRef>
+          <a:effectRef idx="2">
+            <a:schemeClr val="accent1"/>
+          </a:effectRef>
+          <a:fontRef idx="minor">
+            <a:schemeClr val="lt1"/>
+          </a:fontRef>
+        </p:style>
+        <p:txBody>
+          <a:bodyPr rtlCol="0" anchor="ctr"/>
+          <a:lstStyle/>
+          <a:p>
+            <a:pPr algn="ctr"/>
+          </a:p>
+        </p:txBody>
+      </p:sp>
+      <p:sp>
+        <p:nvSpPr>
+          <p:cNvPr id="18" name="Oval 17"/>
+          <p:cNvSpPr/>
+          <p:nvPr/>
+        </p:nvSpPr>
+        <p:spPr>
+          <a:xfrm>
+            <a:off x="2639187" y="3262654"/>
+            <a:ext cx="100584" cy="100584"/>
+          </a:xfrm>
+          <a:prstGeom prst="ellipse">
+            <a:avLst/>
+          </a:prstGeom>
+          <a:solidFill>
+            <a:srgbClr val="555555"/>
+          </a:solidFill>
+          <a:ln>
+            <a:noFill/>
+          </a:ln>
+          <a:effectLst/>
+        </p:spPr>
+        <p:style>
+          <a:lnRef idx="1">
+            <a:schemeClr val="accent1"/>
+          </a:lnRef>
+          <a:fillRef idx="3">
+            <a:schemeClr val="accent1"/>
+          </a:fillRef>
+          <a:effectRef idx="2">
+            <a:schemeClr val="accent1"/>
+          </a:effectRef>
+          <a:fontRef idx="minor">
+            <a:schemeClr val="lt1"/>
+          </a:fontRef>
+        </p:style>
+        <p:txBody>
+          <a:bodyPr rtlCol="0" anchor="ctr"/>
+          <a:lstStyle/>
+          <a:p>
+            <a:pPr algn="ctr"/>
+          </a:p>
+        </p:txBody>
+      </p:sp>
+      <p:sp>
+        <p:nvSpPr>
+          <p:cNvPr id="19" name="Oval 18"/>
+          <p:cNvSpPr/>
+          <p:nvPr/>
+        </p:nvSpPr>
+        <p:spPr>
+          <a:xfrm>
+            <a:off x="2875788" y="3086962"/>
+            <a:ext cx="100584" cy="100584"/>
+          </a:xfrm>
+          <a:prstGeom prst="ellipse">
+            <a:avLst/>
+          </a:prstGeom>
+          <a:solidFill>
+            <a:srgbClr val="555555"/>
+          </a:solidFill>
+          <a:ln>
+            <a:noFill/>
+          </a:ln>
+          <a:effectLst/>
+        </p:spPr>
+        <p:style>
+          <a:lnRef idx="1">
+            <a:schemeClr val="accent1"/>
+          </a:lnRef>
+          <a:fillRef idx="3">
+            <a:schemeClr val="accent1"/>
+          </a:fillRef>
+          <a:effectRef idx="2">
+            <a:schemeClr val="accent1"/>
+          </a:effectRef>
+          <a:fontRef idx="minor">
+            <a:schemeClr val="lt1"/>
+          </a:fontRef>
+        </p:style>
+        <p:txBody>
+          <a:bodyPr rtlCol="0" anchor="ctr"/>
+          <a:lstStyle/>
+          <a:p>
+            <a:pPr algn="ctr"/>
+          </a:p>
+        </p:txBody>
+      </p:sp>
+      <p:sp>
+        <p:nvSpPr>
+          <p:cNvPr id="20" name="TextBox 19"/>
           <p:cNvSpPr txBox="1"/>
           <p:nvPr/>
         </p:nvSpPr>
         <p:spPr>
           <a:xfrm>
-            <a:off x="813816" y="2715768"/>
-            <a:ext cx="1097280" cy="329184"/>
+            <a:off x="904113" y="4287383"/>
+            <a:ext cx="731520" cy="256032"/>
           </a:xfrm>
           <a:prstGeom prst="rect">
             <a:avLst/>
@@ -15250,7 +15729,7 @@
           <a:noFill/>
         </p:spPr>
         <p:txBody>
-          <a:bodyPr wrap="square" anchor="t" lIns="0" rIns="0" tIns="0" bIns="0">
+          <a:bodyPr wrap="square" anchor="ctr" lIns="0" rIns="0" tIns="0" bIns="0">
             <a:spAutoFit/>
           </a:bodyPr>
           <a:lstStyle/>
@@ -15261,6 +15740,46 @@
               </a:lnSpc>
             </a:pPr>
             <a:r>
+              <a:rPr sz="1600" b="0">
+                <a:solidFill>
+                  <a:srgbClr val="555555"/>
+                </a:solidFill>
+                <a:latin typeface="Arial"/>
+                <a:ea typeface="Arial"/>
+              </a:rPr>
+              <a:t>75K</a:t>
+            </a:r>
+          </a:p>
+        </p:txBody>
+      </p:sp>
+      <p:sp>
+        <p:nvSpPr>
+          <p:cNvPr id="21" name="TextBox 20"/>
+          <p:cNvSpPr txBox="1"/>
+          <p:nvPr/>
+        </p:nvSpPr>
+        <p:spPr>
+          <a:xfrm>
+            <a:off x="2286000" y="2753206"/>
+            <a:ext cx="822960" cy="292608"/>
+          </a:xfrm>
+          <a:prstGeom prst="rect">
+            <a:avLst/>
+          </a:prstGeom>
+          <a:noFill/>
+        </p:spPr>
+        <p:txBody>
+          <a:bodyPr wrap="square" anchor="ctr" lIns="0" rIns="0" tIns="0" bIns="0">
+            <a:spAutoFit/>
+          </a:bodyPr>
+          <a:lstStyle/>
+          <a:p>
+            <a:pPr algn="r">
+              <a:lnSpc>
+                <a:spcPct val="110000"/>
+              </a:lnSpc>
+            </a:pPr>
+            <a:r>
               <a:rPr sz="1800" b="1">
                 <a:solidFill>
                   <a:srgbClr val="1A1A1A"/>
@@ -15268,21 +15787,21 @@
                 <a:latin typeface="Arial"/>
                 <a:ea typeface="Arial"/>
               </a:rPr>
-              <a:t>10만</a:t>
-            </a:r>
-          </a:p>
-        </p:txBody>
-      </p:sp>
-      <p:sp>
-        <p:nvSpPr>
-          <p:cNvPr id="9" name="TextBox 8"/>
+              <a:t>6.8M</a:t>
+            </a:r>
+          </a:p>
+        </p:txBody>
+      </p:sp>
+      <p:sp>
+        <p:nvSpPr>
+          <p:cNvPr id="22" name="TextBox 21"/>
           <p:cNvSpPr txBox="1"/>
           <p:nvPr/>
         </p:nvSpPr>
         <p:spPr>
           <a:xfrm>
-            <a:off x="813816" y="4864607"/>
-            <a:ext cx="1097280" cy="292608"/>
+            <a:off x="713232" y="4572000"/>
+            <a:ext cx="640080" cy="256032"/>
           </a:xfrm>
           <a:prstGeom prst="rect">
             <a:avLst/>
@@ -15301,30 +15820,2351 @@
               </a:lnSpc>
             </a:pPr>
             <a:r>
-              <a:rPr sz="1800" b="0">
+              <a:rPr sz="1600" b="0">
                 <a:solidFill>
                   <a:srgbClr val="555555"/>
                 </a:solidFill>
                 <a:latin typeface="Arial"/>
                 <a:ea typeface="Arial"/>
               </a:rPr>
-              <a:t>SLC</a:t>
-            </a:r>
-          </a:p>
-        </p:txBody>
-      </p:sp>
-      <p:sp>
-        <p:nvSpPr>
-          <p:cNvPr id="10" name="Rectangle 9"/>
+              <a:t>2010</a:t>
+            </a:r>
+          </a:p>
+        </p:txBody>
+      </p:sp>
+      <p:sp>
+        <p:nvSpPr>
+          <p:cNvPr id="23" name="TextBox 22"/>
+          <p:cNvSpPr txBox="1"/>
+          <p:nvPr/>
+        </p:nvSpPr>
+        <p:spPr>
+          <a:xfrm>
+            <a:off x="1659636" y="4572000"/>
+            <a:ext cx="640080" cy="256032"/>
+          </a:xfrm>
+          <a:prstGeom prst="rect">
+            <a:avLst/>
+          </a:prstGeom>
+          <a:noFill/>
+        </p:spPr>
+        <p:txBody>
+          <a:bodyPr wrap="square" anchor="t" lIns="0" rIns="0" tIns="0" bIns="0">
+            <a:spAutoFit/>
+          </a:bodyPr>
+          <a:lstStyle/>
+          <a:p>
+            <a:pPr algn="ctr">
+              <a:lnSpc>
+                <a:spcPct val="110000"/>
+              </a:lnSpc>
+            </a:pPr>
+            <a:r>
+              <a:rPr sz="1600" b="0">
+                <a:solidFill>
+                  <a:srgbClr val="555555"/>
+                </a:solidFill>
+                <a:latin typeface="Arial"/>
+                <a:ea typeface="Arial"/>
+              </a:rPr>
+              <a:t>2018</a:t>
+            </a:r>
+          </a:p>
+        </p:txBody>
+      </p:sp>
+      <p:sp>
+        <p:nvSpPr>
+          <p:cNvPr id="24" name="TextBox 23"/>
+          <p:cNvSpPr txBox="1"/>
+          <p:nvPr/>
+        </p:nvSpPr>
+        <p:spPr>
+          <a:xfrm>
+            <a:off x="2606040" y="4572000"/>
+            <a:ext cx="640080" cy="256032"/>
+          </a:xfrm>
+          <a:prstGeom prst="rect">
+            <a:avLst/>
+          </a:prstGeom>
+          <a:noFill/>
+        </p:spPr>
+        <p:txBody>
+          <a:bodyPr wrap="square" anchor="t" lIns="0" rIns="0" tIns="0" bIns="0">
+            <a:spAutoFit/>
+          </a:bodyPr>
+          <a:lstStyle/>
+          <a:p>
+            <a:pPr algn="ctr">
+              <a:lnSpc>
+                <a:spcPct val="110000"/>
+              </a:lnSpc>
+            </a:pPr>
+            <a:r>
+              <a:rPr sz="1600" b="0">
+                <a:solidFill>
+                  <a:srgbClr val="555555"/>
+                </a:solidFill>
+                <a:latin typeface="Arial"/>
+                <a:ea typeface="Arial"/>
+              </a:rPr>
+              <a:t>2026</a:t>
+            </a:r>
+          </a:p>
+        </p:txBody>
+      </p:sp>
+      <p:sp>
+        <p:nvSpPr>
+          <p:cNvPr id="25" name="TextBox 24"/>
+          <p:cNvSpPr txBox="1"/>
+          <p:nvPr/>
+        </p:nvSpPr>
+        <p:spPr>
+          <a:xfrm>
+            <a:off x="3438144" y="2176272"/>
+            <a:ext cx="2514600" cy="402336"/>
+          </a:xfrm>
+          <a:prstGeom prst="rect">
+            <a:avLst/>
+          </a:prstGeom>
+          <a:noFill/>
+        </p:spPr>
+        <p:txBody>
+          <a:bodyPr wrap="square" anchor="ctr" lIns="0" rIns="0" tIns="0" bIns="0">
+            <a:spAutoFit/>
+          </a:bodyPr>
+          <a:lstStyle/>
+          <a:p>
+            <a:pPr algn="l">
+              <a:lnSpc>
+                <a:spcPct val="110000"/>
+              </a:lnSpc>
+            </a:pPr>
+            <a:r>
+              <a:rPr sz="2000" b="1">
+                <a:solidFill>
+                  <a:srgbClr val="1A1A1A"/>
+                </a:solidFill>
+                <a:latin typeface="Arial"/>
+                <a:ea typeface="Arial"/>
+              </a:rPr>
+              <a:t>전력 효율  </a:t>
+            </a:r>
+            <a:r>
+              <a:rPr sz="2400" b="1">
+                <a:solidFill>
+                  <a:srgbClr val="1A1A1A"/>
+                </a:solidFill>
+                <a:latin typeface="Arial"/>
+                <a:ea typeface="Arial"/>
+              </a:rPr>
+              <a:t>×13</a:t>
+            </a:r>
+          </a:p>
+        </p:txBody>
+      </p:sp>
+      <p:sp>
+        <p:nvSpPr>
+          <p:cNvPr id="26" name="TextBox 25"/>
+          <p:cNvSpPr txBox="1"/>
+          <p:nvPr/>
+        </p:nvSpPr>
+        <p:spPr>
+          <a:xfrm>
+            <a:off x="3438144" y="2560320"/>
+            <a:ext cx="2514600" cy="292608"/>
+          </a:xfrm>
+          <a:prstGeom prst="rect">
+            <a:avLst/>
+          </a:prstGeom>
+          <a:noFill/>
+        </p:spPr>
+        <p:txBody>
+          <a:bodyPr wrap="square" anchor="ctr" lIns="0" rIns="0" tIns="0" bIns="0">
+            <a:spAutoFit/>
+          </a:bodyPr>
+          <a:lstStyle/>
+          <a:p>
+            <a:pPr algn="l">
+              <a:lnSpc>
+                <a:spcPct val="110000"/>
+              </a:lnSpc>
+            </a:pPr>
+            <a:r>
+              <a:rPr sz="1600" b="0">
+                <a:solidFill>
+                  <a:srgbClr val="555555"/>
+                </a:solidFill>
+                <a:latin typeface="Arial"/>
+                <a:ea typeface="Arial"/>
+              </a:rPr>
+              <a:t>MB/s per W (로그 축)</a:t>
+            </a:r>
+          </a:p>
+        </p:txBody>
+      </p:sp>
+      <p:sp>
+        <p:nvSpPr>
+          <p:cNvPr id="27" name="Rectangle 26"/>
           <p:cNvSpPr/>
           <p:nvPr/>
         </p:nvSpPr>
         <p:spPr>
           <a:xfrm>
-            <a:off x="2112264" y="3657600"/>
-            <a:ext cx="731520" cy="1188719"/>
-          </a:xfrm>
-          <a:prstGeom prst="rect">
+            <a:off x="3529584" y="4553712"/>
+            <a:ext cx="2331720" cy="10972"/>
+          </a:xfrm>
+          <a:prstGeom prst="rect">
+            <a:avLst/>
+          </a:prstGeom>
+          <a:solidFill>
+            <a:srgbClr val="D9D9D9"/>
+          </a:solidFill>
+          <a:ln>
+            <a:noFill/>
+          </a:ln>
+          <a:effectLst/>
+        </p:spPr>
+        <p:style>
+          <a:lnRef idx="1">
+            <a:schemeClr val="accent1"/>
+          </a:lnRef>
+          <a:fillRef idx="3">
+            <a:schemeClr val="accent1"/>
+          </a:fillRef>
+          <a:effectRef idx="2">
+            <a:schemeClr val="accent1"/>
+          </a:effectRef>
+          <a:fontRef idx="minor">
+            <a:schemeClr val="lt1"/>
+          </a:fontRef>
+        </p:style>
+        <p:txBody>
+          <a:bodyPr rtlCol="0" anchor="ctr"/>
+          <a:lstStyle/>
+          <a:p>
+            <a:pPr algn="ctr"/>
+          </a:p>
+        </p:txBody>
+      </p:sp>
+      <p:cxnSp>
+        <p:nvCxnSpPr>
+          <p:cNvPr id="28" name="Connector 27"/>
+          <p:cNvCxnSpPr/>
+          <p:nvPr/>
+        </p:nvCxnSpPr>
+        <p:spPr>
+          <a:xfrm flipV="1">
+            <a:off x="3985641" y="4028451"/>
+            <a:ext cx="354901" cy="148590"/>
+          </a:xfrm>
+          <a:prstGeom prst="line">
+            <a:avLst/>
+          </a:prstGeom>
+          <a:ln w="28575">
+            <a:solidFill>
+              <a:srgbClr val="555555"/>
+            </a:solidFill>
+          </a:ln>
+        </p:spPr>
+        <p:style>
+          <a:lnRef idx="2">
+            <a:schemeClr val="accent1"/>
+          </a:lnRef>
+          <a:fillRef idx="0">
+            <a:schemeClr val="accent1"/>
+          </a:fillRef>
+          <a:effectRef idx="1">
+            <a:schemeClr val="accent1"/>
+          </a:effectRef>
+          <a:fontRef idx="minor">
+            <a:schemeClr val="tx1"/>
+          </a:fontRef>
+        </p:style>
+      </p:cxnSp>
+      <p:cxnSp>
+        <p:nvCxnSpPr>
+          <p:cNvPr id="29" name="Connector 28"/>
+          <p:cNvCxnSpPr/>
+          <p:nvPr/>
+        </p:nvCxnSpPr>
+        <p:spPr>
+          <a:xfrm flipV="1">
+            <a:off x="4340542" y="3644375"/>
+            <a:ext cx="473202" cy="384076"/>
+          </a:xfrm>
+          <a:prstGeom prst="line">
+            <a:avLst/>
+          </a:prstGeom>
+          <a:ln w="28575">
+            <a:solidFill>
+              <a:srgbClr val="555555"/>
+            </a:solidFill>
+          </a:ln>
+        </p:spPr>
+        <p:style>
+          <a:lnRef idx="2">
+            <a:schemeClr val="accent1"/>
+          </a:lnRef>
+          <a:fillRef idx="0">
+            <a:schemeClr val="accent1"/>
+          </a:fillRef>
+          <a:effectRef idx="1">
+            <a:schemeClr val="accent1"/>
+          </a:effectRef>
+          <a:fontRef idx="minor">
+            <a:schemeClr val="tx1"/>
+          </a:fontRef>
+        </p:style>
+      </p:cxnSp>
+      <p:cxnSp>
+        <p:nvCxnSpPr>
+          <p:cNvPr id="30" name="Connector 29"/>
+          <p:cNvCxnSpPr/>
+          <p:nvPr/>
+        </p:nvCxnSpPr>
+        <p:spPr>
+          <a:xfrm flipV="1">
+            <a:off x="4813744" y="3439968"/>
+            <a:ext cx="354902" cy="204407"/>
+          </a:xfrm>
+          <a:prstGeom prst="line">
+            <a:avLst/>
+          </a:prstGeom>
+          <a:ln w="28575">
+            <a:solidFill>
+              <a:srgbClr val="555555"/>
+            </a:solidFill>
+          </a:ln>
+        </p:spPr>
+        <p:style>
+          <a:lnRef idx="2">
+            <a:schemeClr val="accent1"/>
+          </a:lnRef>
+          <a:fillRef idx="0">
+            <a:schemeClr val="accent1"/>
+          </a:fillRef>
+          <a:effectRef idx="1">
+            <a:schemeClr val="accent1"/>
+          </a:effectRef>
+          <a:fontRef idx="minor">
+            <a:schemeClr val="tx1"/>
+          </a:fontRef>
+        </p:style>
+      </p:cxnSp>
+      <p:cxnSp>
+        <p:nvCxnSpPr>
+          <p:cNvPr id="31" name="Connector 30"/>
+          <p:cNvCxnSpPr/>
+          <p:nvPr/>
+        </p:nvCxnSpPr>
+        <p:spPr>
+          <a:xfrm flipV="1">
+            <a:off x="5168646" y="3213846"/>
+            <a:ext cx="473202" cy="226122"/>
+          </a:xfrm>
+          <a:prstGeom prst="line">
+            <a:avLst/>
+          </a:prstGeom>
+          <a:ln w="28575">
+            <a:solidFill>
+              <a:srgbClr val="555555"/>
+            </a:solidFill>
+          </a:ln>
+        </p:spPr>
+        <p:style>
+          <a:lnRef idx="2">
+            <a:schemeClr val="accent1"/>
+          </a:lnRef>
+          <a:fillRef idx="0">
+            <a:schemeClr val="accent1"/>
+          </a:fillRef>
+          <a:effectRef idx="1">
+            <a:schemeClr val="accent1"/>
+          </a:effectRef>
+          <a:fontRef idx="minor">
+            <a:schemeClr val="tx1"/>
+          </a:fontRef>
+        </p:style>
+      </p:cxnSp>
+      <p:sp>
+        <p:nvSpPr>
+          <p:cNvPr id="32" name="Oval 31"/>
+          <p:cNvSpPr/>
+          <p:nvPr/>
+        </p:nvSpPr>
+        <p:spPr>
+          <a:xfrm>
+            <a:off x="3935349" y="4126749"/>
+            <a:ext cx="100584" cy="100584"/>
+          </a:xfrm>
+          <a:prstGeom prst="ellipse">
+            <a:avLst/>
+          </a:prstGeom>
+          <a:solidFill>
+            <a:srgbClr val="555555"/>
+          </a:solidFill>
+          <a:ln>
+            <a:noFill/>
+          </a:ln>
+          <a:effectLst/>
+        </p:spPr>
+        <p:style>
+          <a:lnRef idx="1">
+            <a:schemeClr val="accent1"/>
+          </a:lnRef>
+          <a:fillRef idx="3">
+            <a:schemeClr val="accent1"/>
+          </a:fillRef>
+          <a:effectRef idx="2">
+            <a:schemeClr val="accent1"/>
+          </a:effectRef>
+          <a:fontRef idx="minor">
+            <a:schemeClr val="lt1"/>
+          </a:fontRef>
+        </p:style>
+        <p:txBody>
+          <a:bodyPr rtlCol="0" anchor="ctr"/>
+          <a:lstStyle/>
+          <a:p>
+            <a:pPr algn="ctr"/>
+          </a:p>
+        </p:txBody>
+      </p:sp>
+      <p:sp>
+        <p:nvSpPr>
+          <p:cNvPr id="33" name="Oval 32"/>
+          <p:cNvSpPr/>
+          <p:nvPr/>
+        </p:nvSpPr>
+        <p:spPr>
+          <a:xfrm>
+            <a:off x="4290250" y="3978159"/>
+            <a:ext cx="100584" cy="100584"/>
+          </a:xfrm>
+          <a:prstGeom prst="ellipse">
+            <a:avLst/>
+          </a:prstGeom>
+          <a:solidFill>
+            <a:srgbClr val="555555"/>
+          </a:solidFill>
+          <a:ln>
+            <a:noFill/>
+          </a:ln>
+          <a:effectLst/>
+        </p:spPr>
+        <p:style>
+          <a:lnRef idx="1">
+            <a:schemeClr val="accent1"/>
+          </a:lnRef>
+          <a:fillRef idx="3">
+            <a:schemeClr val="accent1"/>
+          </a:fillRef>
+          <a:effectRef idx="2">
+            <a:schemeClr val="accent1"/>
+          </a:effectRef>
+          <a:fontRef idx="minor">
+            <a:schemeClr val="lt1"/>
+          </a:fontRef>
+        </p:style>
+        <p:txBody>
+          <a:bodyPr rtlCol="0" anchor="ctr"/>
+          <a:lstStyle/>
+          <a:p>
+            <a:pPr algn="ctr"/>
+          </a:p>
+        </p:txBody>
+      </p:sp>
+      <p:sp>
+        <p:nvSpPr>
+          <p:cNvPr id="34" name="Oval 33"/>
+          <p:cNvSpPr/>
+          <p:nvPr/>
+        </p:nvSpPr>
+        <p:spPr>
+          <a:xfrm>
+            <a:off x="4763452" y="3594083"/>
+            <a:ext cx="100584" cy="100584"/>
+          </a:xfrm>
+          <a:prstGeom prst="ellipse">
+            <a:avLst/>
+          </a:prstGeom>
+          <a:solidFill>
+            <a:srgbClr val="555555"/>
+          </a:solidFill>
+          <a:ln>
+            <a:noFill/>
+          </a:ln>
+          <a:effectLst/>
+        </p:spPr>
+        <p:style>
+          <a:lnRef idx="1">
+            <a:schemeClr val="accent1"/>
+          </a:lnRef>
+          <a:fillRef idx="3">
+            <a:schemeClr val="accent1"/>
+          </a:fillRef>
+          <a:effectRef idx="2">
+            <a:schemeClr val="accent1"/>
+          </a:effectRef>
+          <a:fontRef idx="minor">
+            <a:schemeClr val="lt1"/>
+          </a:fontRef>
+        </p:style>
+        <p:txBody>
+          <a:bodyPr rtlCol="0" anchor="ctr"/>
+          <a:lstStyle/>
+          <a:p>
+            <a:pPr algn="ctr"/>
+          </a:p>
+        </p:txBody>
+      </p:sp>
+      <p:sp>
+        <p:nvSpPr>
+          <p:cNvPr id="35" name="Oval 34"/>
+          <p:cNvSpPr/>
+          <p:nvPr/>
+        </p:nvSpPr>
+        <p:spPr>
+          <a:xfrm>
+            <a:off x="5118354" y="3389676"/>
+            <a:ext cx="100584" cy="100584"/>
+          </a:xfrm>
+          <a:prstGeom prst="ellipse">
+            <a:avLst/>
+          </a:prstGeom>
+          <a:solidFill>
+            <a:srgbClr val="555555"/>
+          </a:solidFill>
+          <a:ln>
+            <a:noFill/>
+          </a:ln>
+          <a:effectLst/>
+        </p:spPr>
+        <p:style>
+          <a:lnRef idx="1">
+            <a:schemeClr val="accent1"/>
+          </a:lnRef>
+          <a:fillRef idx="3">
+            <a:schemeClr val="accent1"/>
+          </a:fillRef>
+          <a:effectRef idx="2">
+            <a:schemeClr val="accent1"/>
+          </a:effectRef>
+          <a:fontRef idx="minor">
+            <a:schemeClr val="lt1"/>
+          </a:fontRef>
+        </p:style>
+        <p:txBody>
+          <a:bodyPr rtlCol="0" anchor="ctr"/>
+          <a:lstStyle/>
+          <a:p>
+            <a:pPr algn="ctr"/>
+          </a:p>
+        </p:txBody>
+      </p:sp>
+      <p:sp>
+        <p:nvSpPr>
+          <p:cNvPr id="36" name="Oval 35"/>
+          <p:cNvSpPr/>
+          <p:nvPr/>
+        </p:nvSpPr>
+        <p:spPr>
+          <a:xfrm>
+            <a:off x="5591556" y="3163554"/>
+            <a:ext cx="100584" cy="100584"/>
+          </a:xfrm>
+          <a:prstGeom prst="ellipse">
+            <a:avLst/>
+          </a:prstGeom>
+          <a:solidFill>
+            <a:srgbClr val="555555"/>
+          </a:solidFill>
+          <a:ln>
+            <a:noFill/>
+          </a:ln>
+          <a:effectLst/>
+        </p:spPr>
+        <p:style>
+          <a:lnRef idx="1">
+            <a:schemeClr val="accent1"/>
+          </a:lnRef>
+          <a:fillRef idx="3">
+            <a:schemeClr val="accent1"/>
+          </a:fillRef>
+          <a:effectRef idx="2">
+            <a:schemeClr val="accent1"/>
+          </a:effectRef>
+          <a:fontRef idx="minor">
+            <a:schemeClr val="lt1"/>
+          </a:fontRef>
+        </p:style>
+        <p:txBody>
+          <a:bodyPr rtlCol="0" anchor="ctr"/>
+          <a:lstStyle/>
+          <a:p>
+            <a:pPr algn="ctr"/>
+          </a:p>
+        </p:txBody>
+      </p:sp>
+      <p:sp>
+        <p:nvSpPr>
+          <p:cNvPr id="37" name="TextBox 36"/>
+          <p:cNvSpPr txBox="1"/>
+          <p:nvPr/>
+        </p:nvSpPr>
+        <p:spPr>
+          <a:xfrm>
+            <a:off x="3619881" y="4231905"/>
+            <a:ext cx="731520" cy="256032"/>
+          </a:xfrm>
+          <a:prstGeom prst="rect">
+            <a:avLst/>
+          </a:prstGeom>
+          <a:noFill/>
+        </p:spPr>
+        <p:txBody>
+          <a:bodyPr wrap="square" anchor="ctr" lIns="0" rIns="0" tIns="0" bIns="0">
+            <a:spAutoFit/>
+          </a:bodyPr>
+          <a:lstStyle/>
+          <a:p>
+            <a:pPr algn="ctr">
+              <a:lnSpc>
+                <a:spcPct val="110000"/>
+              </a:lnSpc>
+            </a:pPr>
+            <a:r>
+              <a:rPr sz="1600" b="0">
+                <a:solidFill>
+                  <a:srgbClr val="555555"/>
+                </a:solidFill>
+                <a:latin typeface="Arial"/>
+                <a:ea typeface="Arial"/>
+              </a:rPr>
+              <a:t>83</a:t>
+            </a:r>
+          </a:p>
+        </p:txBody>
+      </p:sp>
+      <p:sp>
+        <p:nvSpPr>
+          <p:cNvPr id="38" name="TextBox 37"/>
+          <p:cNvSpPr txBox="1"/>
+          <p:nvPr/>
+        </p:nvSpPr>
+        <p:spPr>
+          <a:xfrm>
+            <a:off x="5001768" y="2829798"/>
+            <a:ext cx="822960" cy="292608"/>
+          </a:xfrm>
+          <a:prstGeom prst="rect">
+            <a:avLst/>
+          </a:prstGeom>
+          <a:noFill/>
+        </p:spPr>
+        <p:txBody>
+          <a:bodyPr wrap="square" anchor="ctr" lIns="0" rIns="0" tIns="0" bIns="0">
+            <a:spAutoFit/>
+          </a:bodyPr>
+          <a:lstStyle/>
+          <a:p>
+            <a:pPr algn="r">
+              <a:lnSpc>
+                <a:spcPct val="110000"/>
+              </a:lnSpc>
+            </a:pPr>
+            <a:r>
+              <a:rPr sz="1800" b="1">
+                <a:solidFill>
+                  <a:srgbClr val="1A1A1A"/>
+                </a:solidFill>
+                <a:latin typeface="Arial"/>
+                <a:ea typeface="Arial"/>
+              </a:rPr>
+              <a:t>1,120</a:t>
+            </a:r>
+          </a:p>
+        </p:txBody>
+      </p:sp>
+      <p:sp>
+        <p:nvSpPr>
+          <p:cNvPr id="39" name="TextBox 38"/>
+          <p:cNvSpPr txBox="1"/>
+          <p:nvPr/>
+        </p:nvSpPr>
+        <p:spPr>
+          <a:xfrm>
+            <a:off x="3429000" y="4572000"/>
+            <a:ext cx="640080" cy="256032"/>
+          </a:xfrm>
+          <a:prstGeom prst="rect">
+            <a:avLst/>
+          </a:prstGeom>
+          <a:noFill/>
+        </p:spPr>
+        <p:txBody>
+          <a:bodyPr wrap="square" anchor="t" lIns="0" rIns="0" tIns="0" bIns="0">
+            <a:spAutoFit/>
+          </a:bodyPr>
+          <a:lstStyle/>
+          <a:p>
+            <a:pPr algn="ctr">
+              <a:lnSpc>
+                <a:spcPct val="110000"/>
+              </a:lnSpc>
+            </a:pPr>
+            <a:r>
+              <a:rPr sz="1600" b="0">
+                <a:solidFill>
+                  <a:srgbClr val="555555"/>
+                </a:solidFill>
+                <a:latin typeface="Arial"/>
+                <a:ea typeface="Arial"/>
+              </a:rPr>
+              <a:t>2010</a:t>
+            </a:r>
+          </a:p>
+        </p:txBody>
+      </p:sp>
+      <p:sp>
+        <p:nvSpPr>
+          <p:cNvPr id="40" name="TextBox 39"/>
+          <p:cNvSpPr txBox="1"/>
+          <p:nvPr/>
+        </p:nvSpPr>
+        <p:spPr>
+          <a:xfrm>
+            <a:off x="4375404" y="4572000"/>
+            <a:ext cx="640080" cy="256032"/>
+          </a:xfrm>
+          <a:prstGeom prst="rect">
+            <a:avLst/>
+          </a:prstGeom>
+          <a:noFill/>
+        </p:spPr>
+        <p:txBody>
+          <a:bodyPr wrap="square" anchor="t" lIns="0" rIns="0" tIns="0" bIns="0">
+            <a:spAutoFit/>
+          </a:bodyPr>
+          <a:lstStyle/>
+          <a:p>
+            <a:pPr algn="ctr">
+              <a:lnSpc>
+                <a:spcPct val="110000"/>
+              </a:lnSpc>
+            </a:pPr>
+            <a:r>
+              <a:rPr sz="1600" b="0">
+                <a:solidFill>
+                  <a:srgbClr val="555555"/>
+                </a:solidFill>
+                <a:latin typeface="Arial"/>
+                <a:ea typeface="Arial"/>
+              </a:rPr>
+              <a:t>2018</a:t>
+            </a:r>
+          </a:p>
+        </p:txBody>
+      </p:sp>
+      <p:sp>
+        <p:nvSpPr>
+          <p:cNvPr id="41" name="TextBox 40"/>
+          <p:cNvSpPr txBox="1"/>
+          <p:nvPr/>
+        </p:nvSpPr>
+        <p:spPr>
+          <a:xfrm>
+            <a:off x="5321808" y="4572000"/>
+            <a:ext cx="640080" cy="256032"/>
+          </a:xfrm>
+          <a:prstGeom prst="rect">
+            <a:avLst/>
+          </a:prstGeom>
+          <a:noFill/>
+        </p:spPr>
+        <p:txBody>
+          <a:bodyPr wrap="square" anchor="t" lIns="0" rIns="0" tIns="0" bIns="0">
+            <a:spAutoFit/>
+          </a:bodyPr>
+          <a:lstStyle/>
+          <a:p>
+            <a:pPr algn="ctr">
+              <a:lnSpc>
+                <a:spcPct val="110000"/>
+              </a:lnSpc>
+            </a:pPr>
+            <a:r>
+              <a:rPr sz="1600" b="0">
+                <a:solidFill>
+                  <a:srgbClr val="555555"/>
+                </a:solidFill>
+                <a:latin typeface="Arial"/>
+                <a:ea typeface="Arial"/>
+              </a:rPr>
+              <a:t>2026</a:t>
+            </a:r>
+          </a:p>
+        </p:txBody>
+      </p:sp>
+      <p:sp>
+        <p:nvSpPr>
+          <p:cNvPr id="42" name="TextBox 41"/>
+          <p:cNvSpPr txBox="1"/>
+          <p:nvPr/>
+        </p:nvSpPr>
+        <p:spPr>
+          <a:xfrm>
+            <a:off x="6153912" y="2176272"/>
+            <a:ext cx="2514600" cy="402336"/>
+          </a:xfrm>
+          <a:prstGeom prst="rect">
+            <a:avLst/>
+          </a:prstGeom>
+          <a:noFill/>
+        </p:spPr>
+        <p:txBody>
+          <a:bodyPr wrap="square" anchor="ctr" lIns="0" rIns="0" tIns="0" bIns="0">
+            <a:spAutoFit/>
+          </a:bodyPr>
+          <a:lstStyle/>
+          <a:p>
+            <a:pPr algn="l">
+              <a:lnSpc>
+                <a:spcPct val="110000"/>
+              </a:lnSpc>
+            </a:pPr>
+            <a:r>
+              <a:rPr sz="2000" b="1">
+                <a:solidFill>
+                  <a:srgbClr val="1A1A1A"/>
+                </a:solidFill>
+                <a:latin typeface="Arial"/>
+                <a:ea typeface="Arial"/>
+              </a:rPr>
+              <a:t>가성비  </a:t>
+            </a:r>
+            <a:r>
+              <a:rPr sz="2400" b="1">
+                <a:solidFill>
+                  <a:srgbClr val="1A1A1A"/>
+                </a:solidFill>
+                <a:latin typeface="Arial"/>
+                <a:ea typeface="Arial"/>
+              </a:rPr>
+              <a:t>×24</a:t>
+            </a:r>
+          </a:p>
+        </p:txBody>
+      </p:sp>
+      <p:sp>
+        <p:nvSpPr>
+          <p:cNvPr id="43" name="TextBox 42"/>
+          <p:cNvSpPr txBox="1"/>
+          <p:nvPr/>
+        </p:nvSpPr>
+        <p:spPr>
+          <a:xfrm>
+            <a:off x="6153912" y="2560320"/>
+            <a:ext cx="2514600" cy="292608"/>
+          </a:xfrm>
+          <a:prstGeom prst="rect">
+            <a:avLst/>
+          </a:prstGeom>
+          <a:noFill/>
+        </p:spPr>
+        <p:txBody>
+          <a:bodyPr wrap="square" anchor="ctr" lIns="0" rIns="0" tIns="0" bIns="0">
+            <a:spAutoFit/>
+          </a:bodyPr>
+          <a:lstStyle/>
+          <a:p>
+            <a:pPr algn="l">
+              <a:lnSpc>
+                <a:spcPct val="110000"/>
+              </a:lnSpc>
+            </a:pPr>
+            <a:r>
+              <a:rPr sz="1600" b="0">
+                <a:solidFill>
+                  <a:srgbClr val="555555"/>
+                </a:solidFill>
+                <a:latin typeface="Arial"/>
+                <a:ea typeface="Arial"/>
+              </a:rPr>
+              <a:t>1달러당 GB (로그 축)</a:t>
+            </a:r>
+          </a:p>
+        </p:txBody>
+      </p:sp>
+      <p:sp>
+        <p:nvSpPr>
+          <p:cNvPr id="44" name="Rectangle 43"/>
+          <p:cNvSpPr/>
+          <p:nvPr/>
+        </p:nvSpPr>
+        <p:spPr>
+          <a:xfrm>
+            <a:off x="6245352" y="4553712"/>
+            <a:ext cx="2331720" cy="10972"/>
+          </a:xfrm>
+          <a:prstGeom prst="rect">
+            <a:avLst/>
+          </a:prstGeom>
+          <a:solidFill>
+            <a:srgbClr val="D9D9D9"/>
+          </a:solidFill>
+          <a:ln>
+            <a:noFill/>
+          </a:ln>
+          <a:effectLst/>
+        </p:spPr>
+        <p:style>
+          <a:lnRef idx="1">
+            <a:schemeClr val="accent1"/>
+          </a:lnRef>
+          <a:fillRef idx="3">
+            <a:schemeClr val="accent1"/>
+          </a:fillRef>
+          <a:effectRef idx="2">
+            <a:schemeClr val="accent1"/>
+          </a:effectRef>
+          <a:fontRef idx="minor">
+            <a:schemeClr val="lt1"/>
+          </a:fontRef>
+        </p:style>
+        <p:txBody>
+          <a:bodyPr rtlCol="0" anchor="ctr"/>
+          <a:lstStyle/>
+          <a:p>
+            <a:pPr algn="ctr"/>
+          </a:p>
+        </p:txBody>
+      </p:sp>
+      <p:cxnSp>
+        <p:nvCxnSpPr>
+          <p:cNvPr id="45" name="Connector 44"/>
+          <p:cNvCxnSpPr/>
+          <p:nvPr/>
+        </p:nvCxnSpPr>
+        <p:spPr>
+          <a:xfrm flipV="1">
+            <a:off x="6464808" y="3894985"/>
+            <a:ext cx="354901" cy="292146"/>
+          </a:xfrm>
+          <a:prstGeom prst="line">
+            <a:avLst/>
+          </a:prstGeom>
+          <a:ln w="28575">
+            <a:solidFill>
+              <a:srgbClr val="555555"/>
+            </a:solidFill>
+          </a:ln>
+        </p:spPr>
+        <p:style>
+          <a:lnRef idx="2">
+            <a:schemeClr val="accent1"/>
+          </a:lnRef>
+          <a:fillRef idx="0">
+            <a:schemeClr val="accent1"/>
+          </a:fillRef>
+          <a:effectRef idx="1">
+            <a:schemeClr val="accent1"/>
+          </a:effectRef>
+          <a:fontRef idx="minor">
+            <a:schemeClr val="tx1"/>
+          </a:fontRef>
+        </p:style>
+      </p:cxnSp>
+      <p:cxnSp>
+        <p:nvCxnSpPr>
+          <p:cNvPr id="46" name="Connector 45"/>
+          <p:cNvCxnSpPr/>
+          <p:nvPr/>
+        </p:nvCxnSpPr>
+        <p:spPr>
+          <a:xfrm flipV="1">
+            <a:off x="6819709" y="3710930"/>
+            <a:ext cx="354902" cy="184055"/>
+          </a:xfrm>
+          <a:prstGeom prst="line">
+            <a:avLst/>
+          </a:prstGeom>
+          <a:ln w="28575">
+            <a:solidFill>
+              <a:srgbClr val="555555"/>
+            </a:solidFill>
+          </a:ln>
+        </p:spPr>
+        <p:style>
+          <a:lnRef idx="2">
+            <a:schemeClr val="accent1"/>
+          </a:lnRef>
+          <a:fillRef idx="0">
+            <a:schemeClr val="accent1"/>
+          </a:fillRef>
+          <a:effectRef idx="1">
+            <a:schemeClr val="accent1"/>
+          </a:effectRef>
+          <a:fontRef idx="minor">
+            <a:schemeClr val="tx1"/>
+          </a:fontRef>
+        </p:style>
+      </p:cxnSp>
+      <p:cxnSp>
+        <p:nvCxnSpPr>
+          <p:cNvPr id="47" name="Connector 46"/>
+          <p:cNvCxnSpPr/>
+          <p:nvPr/>
+        </p:nvCxnSpPr>
+        <p:spPr>
+          <a:xfrm flipV="1">
+            <a:off x="7174611" y="3639998"/>
+            <a:ext cx="236601" cy="70932"/>
+          </a:xfrm>
+          <a:prstGeom prst="line">
+            <a:avLst/>
+          </a:prstGeom>
+          <a:ln w="28575">
+            <a:solidFill>
+              <a:srgbClr val="555555"/>
+            </a:solidFill>
+          </a:ln>
+        </p:spPr>
+        <p:style>
+          <a:lnRef idx="2">
+            <a:schemeClr val="accent1"/>
+          </a:lnRef>
+          <a:fillRef idx="0">
+            <a:schemeClr val="accent1"/>
+          </a:fillRef>
+          <a:effectRef idx="1">
+            <a:schemeClr val="accent1"/>
+          </a:effectRef>
+          <a:fontRef idx="minor">
+            <a:schemeClr val="tx1"/>
+          </a:fontRef>
+        </p:style>
+      </p:cxnSp>
+      <p:cxnSp>
+        <p:nvCxnSpPr>
+          <p:cNvPr id="48" name="Connector 47"/>
+          <p:cNvCxnSpPr/>
+          <p:nvPr/>
+        </p:nvCxnSpPr>
+        <p:spPr>
+          <a:xfrm flipV="1">
+            <a:off x="7411212" y="3454154"/>
+            <a:ext cx="236601" cy="185844"/>
+          </a:xfrm>
+          <a:prstGeom prst="line">
+            <a:avLst/>
+          </a:prstGeom>
+          <a:ln w="28575">
+            <a:solidFill>
+              <a:srgbClr val="555555"/>
+            </a:solidFill>
+          </a:ln>
+        </p:spPr>
+        <p:style>
+          <a:lnRef idx="2">
+            <a:schemeClr val="accent1"/>
+          </a:lnRef>
+          <a:fillRef idx="0">
+            <a:schemeClr val="accent1"/>
+          </a:fillRef>
+          <a:effectRef idx="1">
+            <a:schemeClr val="accent1"/>
+          </a:effectRef>
+          <a:fontRef idx="minor">
+            <a:schemeClr val="tx1"/>
+          </a:fontRef>
+        </p:style>
+      </p:cxnSp>
+      <p:cxnSp>
+        <p:nvCxnSpPr>
+          <p:cNvPr id="49" name="Connector 48"/>
+          <p:cNvCxnSpPr/>
+          <p:nvPr/>
+        </p:nvCxnSpPr>
+        <p:spPr>
+          <a:xfrm flipV="1">
+            <a:off x="7647813" y="3371434"/>
+            <a:ext cx="236601" cy="82720"/>
+          </a:xfrm>
+          <a:prstGeom prst="line">
+            <a:avLst/>
+          </a:prstGeom>
+          <a:ln w="28575">
+            <a:solidFill>
+              <a:srgbClr val="555555"/>
+            </a:solidFill>
+          </a:ln>
+        </p:spPr>
+        <p:style>
+          <a:lnRef idx="2">
+            <a:schemeClr val="accent1"/>
+          </a:lnRef>
+          <a:fillRef idx="0">
+            <a:schemeClr val="accent1"/>
+          </a:fillRef>
+          <a:effectRef idx="1">
+            <a:schemeClr val="accent1"/>
+          </a:effectRef>
+          <a:fontRef idx="minor">
+            <a:schemeClr val="tx1"/>
+          </a:fontRef>
+        </p:style>
+      </p:cxnSp>
+      <p:cxnSp>
+        <p:nvCxnSpPr>
+          <p:cNvPr id="50" name="Connector 49"/>
+          <p:cNvCxnSpPr/>
+          <p:nvPr/>
+        </p:nvCxnSpPr>
+        <p:spPr>
+          <a:xfrm flipV="1">
+            <a:off x="7884414" y="3192121"/>
+            <a:ext cx="118300" cy="179313"/>
+          </a:xfrm>
+          <a:prstGeom prst="line">
+            <a:avLst/>
+          </a:prstGeom>
+          <a:ln w="28575">
+            <a:solidFill>
+              <a:srgbClr val="555555"/>
+            </a:solidFill>
+          </a:ln>
+        </p:spPr>
+        <p:style>
+          <a:lnRef idx="2">
+            <a:schemeClr val="accent1"/>
+          </a:lnRef>
+          <a:fillRef idx="0">
+            <a:schemeClr val="accent1"/>
+          </a:fillRef>
+          <a:effectRef idx="1">
+            <a:schemeClr val="accent1"/>
+          </a:effectRef>
+          <a:fontRef idx="minor">
+            <a:schemeClr val="tx1"/>
+          </a:fontRef>
+        </p:style>
+      </p:cxnSp>
+      <p:cxnSp>
+        <p:nvCxnSpPr>
+          <p:cNvPr id="51" name="Connector 50"/>
+          <p:cNvCxnSpPr/>
+          <p:nvPr/>
+        </p:nvCxnSpPr>
+        <p:spPr>
+          <a:xfrm>
+            <a:off x="8002714" y="3192121"/>
+            <a:ext cx="118301" cy="113530"/>
+          </a:xfrm>
+          <a:prstGeom prst="line">
+            <a:avLst/>
+          </a:prstGeom>
+          <a:ln w="28575">
+            <a:solidFill>
+              <a:srgbClr val="555555"/>
+            </a:solidFill>
+          </a:ln>
+        </p:spPr>
+        <p:style>
+          <a:lnRef idx="2">
+            <a:schemeClr val="accent1"/>
+          </a:lnRef>
+          <a:fillRef idx="0">
+            <a:schemeClr val="accent1"/>
+          </a:fillRef>
+          <a:effectRef idx="1">
+            <a:schemeClr val="accent1"/>
+          </a:effectRef>
+          <a:fontRef idx="minor">
+            <a:schemeClr val="tx1"/>
+          </a:fontRef>
+        </p:style>
+      </p:cxnSp>
+      <p:sp>
+        <p:nvSpPr>
+          <p:cNvPr id="52" name="Oval 51"/>
+          <p:cNvSpPr/>
+          <p:nvPr/>
+        </p:nvSpPr>
+        <p:spPr>
+          <a:xfrm>
+            <a:off x="6414516" y="4136839"/>
+            <a:ext cx="100584" cy="100584"/>
+          </a:xfrm>
+          <a:prstGeom prst="ellipse">
+            <a:avLst/>
+          </a:prstGeom>
+          <a:solidFill>
+            <a:srgbClr val="555555"/>
+          </a:solidFill>
+          <a:ln>
+            <a:noFill/>
+          </a:ln>
+          <a:effectLst/>
+        </p:spPr>
+        <p:style>
+          <a:lnRef idx="1">
+            <a:schemeClr val="accent1"/>
+          </a:lnRef>
+          <a:fillRef idx="3">
+            <a:schemeClr val="accent1"/>
+          </a:fillRef>
+          <a:effectRef idx="2">
+            <a:schemeClr val="accent1"/>
+          </a:effectRef>
+          <a:fontRef idx="minor">
+            <a:schemeClr val="lt1"/>
+          </a:fontRef>
+        </p:style>
+        <p:txBody>
+          <a:bodyPr rtlCol="0" anchor="ctr"/>
+          <a:lstStyle/>
+          <a:p>
+            <a:pPr algn="ctr"/>
+          </a:p>
+        </p:txBody>
+      </p:sp>
+      <p:sp>
+        <p:nvSpPr>
+          <p:cNvPr id="53" name="Oval 52"/>
+          <p:cNvSpPr/>
+          <p:nvPr/>
+        </p:nvSpPr>
+        <p:spPr>
+          <a:xfrm>
+            <a:off x="6769417" y="3844693"/>
+            <a:ext cx="100584" cy="100584"/>
+          </a:xfrm>
+          <a:prstGeom prst="ellipse">
+            <a:avLst/>
+          </a:prstGeom>
+          <a:solidFill>
+            <a:srgbClr val="555555"/>
+          </a:solidFill>
+          <a:ln>
+            <a:noFill/>
+          </a:ln>
+          <a:effectLst/>
+        </p:spPr>
+        <p:style>
+          <a:lnRef idx="1">
+            <a:schemeClr val="accent1"/>
+          </a:lnRef>
+          <a:fillRef idx="3">
+            <a:schemeClr val="accent1"/>
+          </a:fillRef>
+          <a:effectRef idx="2">
+            <a:schemeClr val="accent1"/>
+          </a:effectRef>
+          <a:fontRef idx="minor">
+            <a:schemeClr val="lt1"/>
+          </a:fontRef>
+        </p:style>
+        <p:txBody>
+          <a:bodyPr rtlCol="0" anchor="ctr"/>
+          <a:lstStyle/>
+          <a:p>
+            <a:pPr algn="ctr"/>
+          </a:p>
+        </p:txBody>
+      </p:sp>
+      <p:sp>
+        <p:nvSpPr>
+          <p:cNvPr id="54" name="Oval 53"/>
+          <p:cNvSpPr/>
+          <p:nvPr/>
+        </p:nvSpPr>
+        <p:spPr>
+          <a:xfrm>
+            <a:off x="7124319" y="3660638"/>
+            <a:ext cx="100584" cy="100584"/>
+          </a:xfrm>
+          <a:prstGeom prst="ellipse">
+            <a:avLst/>
+          </a:prstGeom>
+          <a:solidFill>
+            <a:srgbClr val="555555"/>
+          </a:solidFill>
+          <a:ln>
+            <a:noFill/>
+          </a:ln>
+          <a:effectLst/>
+        </p:spPr>
+        <p:style>
+          <a:lnRef idx="1">
+            <a:schemeClr val="accent1"/>
+          </a:lnRef>
+          <a:fillRef idx="3">
+            <a:schemeClr val="accent1"/>
+          </a:fillRef>
+          <a:effectRef idx="2">
+            <a:schemeClr val="accent1"/>
+          </a:effectRef>
+          <a:fontRef idx="minor">
+            <a:schemeClr val="lt1"/>
+          </a:fontRef>
+        </p:style>
+        <p:txBody>
+          <a:bodyPr rtlCol="0" anchor="ctr"/>
+          <a:lstStyle/>
+          <a:p>
+            <a:pPr algn="ctr"/>
+          </a:p>
+        </p:txBody>
+      </p:sp>
+      <p:sp>
+        <p:nvSpPr>
+          <p:cNvPr id="55" name="Oval 54"/>
+          <p:cNvSpPr/>
+          <p:nvPr/>
+        </p:nvSpPr>
+        <p:spPr>
+          <a:xfrm>
+            <a:off x="7360920" y="3589706"/>
+            <a:ext cx="100584" cy="100584"/>
+          </a:xfrm>
+          <a:prstGeom prst="ellipse">
+            <a:avLst/>
+          </a:prstGeom>
+          <a:solidFill>
+            <a:srgbClr val="555555"/>
+          </a:solidFill>
+          <a:ln>
+            <a:noFill/>
+          </a:ln>
+          <a:effectLst/>
+        </p:spPr>
+        <p:style>
+          <a:lnRef idx="1">
+            <a:schemeClr val="accent1"/>
+          </a:lnRef>
+          <a:fillRef idx="3">
+            <a:schemeClr val="accent1"/>
+          </a:fillRef>
+          <a:effectRef idx="2">
+            <a:schemeClr val="accent1"/>
+          </a:effectRef>
+          <a:fontRef idx="minor">
+            <a:schemeClr val="lt1"/>
+          </a:fontRef>
+        </p:style>
+        <p:txBody>
+          <a:bodyPr rtlCol="0" anchor="ctr"/>
+          <a:lstStyle/>
+          <a:p>
+            <a:pPr algn="ctr"/>
+          </a:p>
+        </p:txBody>
+      </p:sp>
+      <p:sp>
+        <p:nvSpPr>
+          <p:cNvPr id="56" name="Oval 55"/>
+          <p:cNvSpPr/>
+          <p:nvPr/>
+        </p:nvSpPr>
+        <p:spPr>
+          <a:xfrm>
+            <a:off x="7597521" y="3403862"/>
+            <a:ext cx="100584" cy="100584"/>
+          </a:xfrm>
+          <a:prstGeom prst="ellipse">
+            <a:avLst/>
+          </a:prstGeom>
+          <a:solidFill>
+            <a:srgbClr val="555555"/>
+          </a:solidFill>
+          <a:ln>
+            <a:noFill/>
+          </a:ln>
+          <a:effectLst/>
+        </p:spPr>
+        <p:style>
+          <a:lnRef idx="1">
+            <a:schemeClr val="accent1"/>
+          </a:lnRef>
+          <a:fillRef idx="3">
+            <a:schemeClr val="accent1"/>
+          </a:fillRef>
+          <a:effectRef idx="2">
+            <a:schemeClr val="accent1"/>
+          </a:effectRef>
+          <a:fontRef idx="minor">
+            <a:schemeClr val="lt1"/>
+          </a:fontRef>
+        </p:style>
+        <p:txBody>
+          <a:bodyPr rtlCol="0" anchor="ctr"/>
+          <a:lstStyle/>
+          <a:p>
+            <a:pPr algn="ctr"/>
+          </a:p>
+        </p:txBody>
+      </p:sp>
+      <p:sp>
+        <p:nvSpPr>
+          <p:cNvPr id="57" name="Oval 56"/>
+          <p:cNvSpPr/>
+          <p:nvPr/>
+        </p:nvSpPr>
+        <p:spPr>
+          <a:xfrm>
+            <a:off x="7834122" y="3321142"/>
+            <a:ext cx="100584" cy="100584"/>
+          </a:xfrm>
+          <a:prstGeom prst="ellipse">
+            <a:avLst/>
+          </a:prstGeom>
+          <a:solidFill>
+            <a:srgbClr val="555555"/>
+          </a:solidFill>
+          <a:ln>
+            <a:noFill/>
+          </a:ln>
+          <a:effectLst/>
+        </p:spPr>
+        <p:style>
+          <a:lnRef idx="1">
+            <a:schemeClr val="accent1"/>
+          </a:lnRef>
+          <a:fillRef idx="3">
+            <a:schemeClr val="accent1"/>
+          </a:fillRef>
+          <a:effectRef idx="2">
+            <a:schemeClr val="accent1"/>
+          </a:effectRef>
+          <a:fontRef idx="minor">
+            <a:schemeClr val="lt1"/>
+          </a:fontRef>
+        </p:style>
+        <p:txBody>
+          <a:bodyPr rtlCol="0" anchor="ctr"/>
+          <a:lstStyle/>
+          <a:p>
+            <a:pPr algn="ctr"/>
+          </a:p>
+        </p:txBody>
+      </p:sp>
+      <p:sp>
+        <p:nvSpPr>
+          <p:cNvPr id="58" name="Oval 57"/>
+          <p:cNvSpPr/>
+          <p:nvPr/>
+        </p:nvSpPr>
+        <p:spPr>
+          <a:xfrm>
+            <a:off x="7952422" y="3141829"/>
+            <a:ext cx="100584" cy="100584"/>
+          </a:xfrm>
+          <a:prstGeom prst="ellipse">
+            <a:avLst/>
+          </a:prstGeom>
+          <a:solidFill>
+            <a:srgbClr val="555555"/>
+          </a:solidFill>
+          <a:ln>
+            <a:noFill/>
+          </a:ln>
+          <a:effectLst/>
+        </p:spPr>
+        <p:style>
+          <a:lnRef idx="1">
+            <a:schemeClr val="accent1"/>
+          </a:lnRef>
+          <a:fillRef idx="3">
+            <a:schemeClr val="accent1"/>
+          </a:fillRef>
+          <a:effectRef idx="2">
+            <a:schemeClr val="accent1"/>
+          </a:effectRef>
+          <a:fontRef idx="minor">
+            <a:schemeClr val="lt1"/>
+          </a:fontRef>
+        </p:style>
+        <p:txBody>
+          <a:bodyPr rtlCol="0" anchor="ctr"/>
+          <a:lstStyle/>
+          <a:p>
+            <a:pPr algn="ctr"/>
+          </a:p>
+        </p:txBody>
+      </p:sp>
+      <p:sp>
+        <p:nvSpPr>
+          <p:cNvPr id="59" name="Oval 58"/>
+          <p:cNvSpPr/>
+          <p:nvPr/>
+        </p:nvSpPr>
+        <p:spPr>
+          <a:xfrm>
+            <a:off x="8070723" y="3255359"/>
+            <a:ext cx="100584" cy="100584"/>
+          </a:xfrm>
+          <a:prstGeom prst="ellipse">
+            <a:avLst/>
+          </a:prstGeom>
+          <a:solidFill>
+            <a:srgbClr val="555555"/>
+          </a:solidFill>
+          <a:ln>
+            <a:noFill/>
+          </a:ln>
+          <a:effectLst/>
+        </p:spPr>
+        <p:style>
+          <a:lnRef idx="1">
+            <a:schemeClr val="accent1"/>
+          </a:lnRef>
+          <a:fillRef idx="3">
+            <a:schemeClr val="accent1"/>
+          </a:fillRef>
+          <a:effectRef idx="2">
+            <a:schemeClr val="accent1"/>
+          </a:effectRef>
+          <a:fontRef idx="minor">
+            <a:schemeClr val="lt1"/>
+          </a:fontRef>
+        </p:style>
+        <p:txBody>
+          <a:bodyPr rtlCol="0" anchor="ctr"/>
+          <a:lstStyle/>
+          <a:p>
+            <a:pPr algn="ctr"/>
+          </a:p>
+        </p:txBody>
+      </p:sp>
+      <p:sp>
+        <p:nvSpPr>
+          <p:cNvPr id="60" name="TextBox 59"/>
+          <p:cNvSpPr txBox="1"/>
+          <p:nvPr/>
+        </p:nvSpPr>
+        <p:spPr>
+          <a:xfrm>
+            <a:off x="6099048" y="4241995"/>
+            <a:ext cx="731520" cy="256032"/>
+          </a:xfrm>
+          <a:prstGeom prst="rect">
+            <a:avLst/>
+          </a:prstGeom>
+          <a:noFill/>
+        </p:spPr>
+        <p:txBody>
+          <a:bodyPr wrap="square" anchor="ctr" lIns="0" rIns="0" tIns="0" bIns="0">
+            <a:spAutoFit/>
+          </a:bodyPr>
+          <a:lstStyle/>
+          <a:p>
+            <a:pPr algn="ctr">
+              <a:lnSpc>
+                <a:spcPct val="110000"/>
+              </a:lnSpc>
+            </a:pPr>
+            <a:r>
+              <a:rPr sz="1600" b="0">
+                <a:solidFill>
+                  <a:srgbClr val="555555"/>
+                </a:solidFill>
+                <a:latin typeface="Arial"/>
+                <a:ea typeface="Arial"/>
+              </a:rPr>
+              <a:t>0.56</a:t>
+            </a:r>
+          </a:p>
+        </p:txBody>
+      </p:sp>
+      <p:sp>
+        <p:nvSpPr>
+          <p:cNvPr id="61" name="TextBox 60"/>
+          <p:cNvSpPr txBox="1"/>
+          <p:nvPr/>
+        </p:nvSpPr>
+        <p:spPr>
+          <a:xfrm>
+            <a:off x="8212454" y="3159347"/>
+            <a:ext cx="457200" cy="292608"/>
+          </a:xfrm>
+          <a:prstGeom prst="rect">
+            <a:avLst/>
+          </a:prstGeom>
+          <a:noFill/>
+        </p:spPr>
+        <p:txBody>
+          <a:bodyPr wrap="square" anchor="ctr" lIns="0" rIns="0" tIns="0" bIns="0">
+            <a:spAutoFit/>
+          </a:bodyPr>
+          <a:lstStyle/>
+          <a:p>
+            <a:pPr algn="l">
+              <a:lnSpc>
+                <a:spcPct val="110000"/>
+              </a:lnSpc>
+            </a:pPr>
+            <a:r>
+              <a:rPr sz="1800" b="1">
+                <a:solidFill>
+                  <a:srgbClr val="1A1A1A"/>
+                </a:solidFill>
+                <a:latin typeface="Arial"/>
+                <a:ea typeface="Arial"/>
+              </a:rPr>
+              <a:t>13</a:t>
+            </a:r>
+          </a:p>
+        </p:txBody>
+      </p:sp>
+      <p:sp>
+        <p:nvSpPr>
+          <p:cNvPr id="62" name="TextBox 61"/>
+          <p:cNvSpPr txBox="1"/>
+          <p:nvPr/>
+        </p:nvSpPr>
+        <p:spPr>
+          <a:xfrm>
+            <a:off x="6144768" y="4572000"/>
+            <a:ext cx="640080" cy="256032"/>
+          </a:xfrm>
+          <a:prstGeom prst="rect">
+            <a:avLst/>
+          </a:prstGeom>
+          <a:noFill/>
+        </p:spPr>
+        <p:txBody>
+          <a:bodyPr wrap="square" anchor="t" lIns="0" rIns="0" tIns="0" bIns="0">
+            <a:spAutoFit/>
+          </a:bodyPr>
+          <a:lstStyle/>
+          <a:p>
+            <a:pPr algn="ctr">
+              <a:lnSpc>
+                <a:spcPct val="110000"/>
+              </a:lnSpc>
+            </a:pPr>
+            <a:r>
+              <a:rPr sz="1600" b="0">
+                <a:solidFill>
+                  <a:srgbClr val="555555"/>
+                </a:solidFill>
+                <a:latin typeface="Arial"/>
+                <a:ea typeface="Arial"/>
+              </a:rPr>
+              <a:t>2010</a:t>
+            </a:r>
+          </a:p>
+        </p:txBody>
+      </p:sp>
+      <p:sp>
+        <p:nvSpPr>
+          <p:cNvPr id="63" name="TextBox 62"/>
+          <p:cNvSpPr txBox="1"/>
+          <p:nvPr/>
+        </p:nvSpPr>
+        <p:spPr>
+          <a:xfrm>
+            <a:off x="7091172" y="4572000"/>
+            <a:ext cx="640080" cy="256032"/>
+          </a:xfrm>
+          <a:prstGeom prst="rect">
+            <a:avLst/>
+          </a:prstGeom>
+          <a:noFill/>
+        </p:spPr>
+        <p:txBody>
+          <a:bodyPr wrap="square" anchor="t" lIns="0" rIns="0" tIns="0" bIns="0">
+            <a:spAutoFit/>
+          </a:bodyPr>
+          <a:lstStyle/>
+          <a:p>
+            <a:pPr algn="ctr">
+              <a:lnSpc>
+                <a:spcPct val="110000"/>
+              </a:lnSpc>
+            </a:pPr>
+            <a:r>
+              <a:rPr sz="1600" b="0">
+                <a:solidFill>
+                  <a:srgbClr val="555555"/>
+                </a:solidFill>
+                <a:latin typeface="Arial"/>
+                <a:ea typeface="Arial"/>
+              </a:rPr>
+              <a:t>2018</a:t>
+            </a:r>
+          </a:p>
+        </p:txBody>
+      </p:sp>
+      <p:sp>
+        <p:nvSpPr>
+          <p:cNvPr id="64" name="TextBox 63"/>
+          <p:cNvSpPr txBox="1"/>
+          <p:nvPr/>
+        </p:nvSpPr>
+        <p:spPr>
+          <a:xfrm>
+            <a:off x="8037576" y="4572000"/>
+            <a:ext cx="640080" cy="256032"/>
+          </a:xfrm>
+          <a:prstGeom prst="rect">
+            <a:avLst/>
+          </a:prstGeom>
+          <a:noFill/>
+        </p:spPr>
+        <p:txBody>
+          <a:bodyPr wrap="square" anchor="t" lIns="0" rIns="0" tIns="0" bIns="0">
+            <a:spAutoFit/>
+          </a:bodyPr>
+          <a:lstStyle/>
+          <a:p>
+            <a:pPr algn="ctr">
+              <a:lnSpc>
+                <a:spcPct val="110000"/>
+              </a:lnSpc>
+            </a:pPr>
+            <a:r>
+              <a:rPr sz="1600" b="0">
+                <a:solidFill>
+                  <a:srgbClr val="555555"/>
+                </a:solidFill>
+                <a:latin typeface="Arial"/>
+                <a:ea typeface="Arial"/>
+              </a:rPr>
+              <a:t>2026</a:t>
+            </a:r>
+          </a:p>
+        </p:txBody>
+      </p:sp>
+      <p:sp>
+        <p:nvSpPr>
+          <p:cNvPr id="65" name="TextBox 64"/>
+          <p:cNvSpPr txBox="1"/>
+          <p:nvPr/>
+        </p:nvSpPr>
+        <p:spPr>
+          <a:xfrm>
+            <a:off x="8869680" y="2176272"/>
+            <a:ext cx="2514600" cy="402336"/>
+          </a:xfrm>
+          <a:prstGeom prst="rect">
+            <a:avLst/>
+          </a:prstGeom>
+          <a:noFill/>
+        </p:spPr>
+        <p:txBody>
+          <a:bodyPr wrap="square" anchor="ctr" lIns="0" rIns="0" tIns="0" bIns="0">
+            <a:spAutoFit/>
+          </a:bodyPr>
+          <a:lstStyle/>
+          <a:p>
+            <a:pPr algn="l">
+              <a:lnSpc>
+                <a:spcPct val="110000"/>
+              </a:lnSpc>
+            </a:pPr>
+            <a:r>
+              <a:rPr sz="2000" b="1">
+                <a:solidFill>
+                  <a:srgbClr val="1428A0"/>
+                </a:solidFill>
+                <a:latin typeface="Arial"/>
+                <a:ea typeface="Arial"/>
+              </a:rPr>
+              <a:t>DWPD  </a:t>
+            </a:r>
+            <a:r>
+              <a:rPr sz="2400" b="1">
+                <a:solidFill>
+                  <a:srgbClr val="1428A0"/>
+                </a:solidFill>
+                <a:latin typeface="Arial"/>
+                <a:ea typeface="Arial"/>
+              </a:rPr>
+              <a:t>10 → 1</a:t>
+            </a:r>
+          </a:p>
+        </p:txBody>
+      </p:sp>
+      <p:sp>
+        <p:nvSpPr>
+          <p:cNvPr id="66" name="TextBox 65"/>
+          <p:cNvSpPr txBox="1"/>
+          <p:nvPr/>
+        </p:nvSpPr>
+        <p:spPr>
+          <a:xfrm>
+            <a:off x="8869680" y="2560320"/>
+            <a:ext cx="2514600" cy="292608"/>
+          </a:xfrm>
+          <a:prstGeom prst="rect">
+            <a:avLst/>
+          </a:prstGeom>
+          <a:noFill/>
+        </p:spPr>
+        <p:txBody>
+          <a:bodyPr wrap="square" anchor="ctr" lIns="0" rIns="0" tIns="0" bIns="0">
+            <a:spAutoFit/>
+          </a:bodyPr>
+          <a:lstStyle/>
+          <a:p>
+            <a:pPr algn="l">
+              <a:lnSpc>
+                <a:spcPct val="110000"/>
+              </a:lnSpc>
+            </a:pPr>
+            <a:r>
+              <a:rPr sz="1600" b="0">
+                <a:solidFill>
+                  <a:srgbClr val="555555"/>
+                </a:solidFill>
+                <a:latin typeface="Arial"/>
+                <a:ea typeface="Arial"/>
+              </a:rPr>
+              <a:t>정격 하루 쓰기 (로그 축)</a:t>
+            </a:r>
+          </a:p>
+        </p:txBody>
+      </p:sp>
+      <p:sp>
+        <p:nvSpPr>
+          <p:cNvPr id="67" name="Rectangle 66"/>
+          <p:cNvSpPr/>
+          <p:nvPr/>
+        </p:nvSpPr>
+        <p:spPr>
+          <a:xfrm>
+            <a:off x="8961119" y="4553712"/>
+            <a:ext cx="2331720" cy="10972"/>
+          </a:xfrm>
+          <a:prstGeom prst="rect">
+            <a:avLst/>
+          </a:prstGeom>
+          <a:solidFill>
+            <a:srgbClr val="D9D9D9"/>
+          </a:solidFill>
+          <a:ln>
+            <a:noFill/>
+          </a:ln>
+          <a:effectLst/>
+        </p:spPr>
+        <p:style>
+          <a:lnRef idx="1">
+            <a:schemeClr val="accent1"/>
+          </a:lnRef>
+          <a:fillRef idx="3">
+            <a:schemeClr val="accent1"/>
+          </a:fillRef>
+          <a:effectRef idx="2">
+            <a:schemeClr val="accent1"/>
+          </a:effectRef>
+          <a:fontRef idx="minor">
+            <a:schemeClr val="lt1"/>
+          </a:fontRef>
+        </p:style>
+        <p:txBody>
+          <a:bodyPr rtlCol="0" anchor="ctr"/>
+          <a:lstStyle/>
+          <a:p>
+            <a:pPr algn="ctr"/>
+          </a:p>
+        </p:txBody>
+      </p:sp>
+      <p:sp>
+        <p:nvSpPr>
+          <p:cNvPr id="68" name="Rectangle 67"/>
+          <p:cNvSpPr/>
+          <p:nvPr/>
+        </p:nvSpPr>
+        <p:spPr>
+          <a:xfrm>
+            <a:off x="10363580" y="3246984"/>
+            <a:ext cx="709803" cy="295515"/>
+          </a:xfrm>
+          <a:prstGeom prst="rect">
+            <a:avLst/>
+          </a:prstGeom>
+          <a:solidFill>
+            <a:srgbClr val="EEF1FA"/>
+          </a:solidFill>
+          <a:ln w="12700">
+            <a:solidFill>
+              <a:srgbClr val="1428A0"/>
+            </a:solidFill>
+            <a:prstDash val="dash"/>
+          </a:ln>
+          <a:effectLst/>
+        </p:spPr>
+        <p:style>
+          <a:lnRef idx="1">
+            <a:schemeClr val="accent1"/>
+          </a:lnRef>
+          <a:fillRef idx="3">
+            <a:schemeClr val="accent1"/>
+          </a:fillRef>
+          <a:effectRef idx="2">
+            <a:schemeClr val="accent1"/>
+          </a:effectRef>
+          <a:fontRef idx="minor">
+            <a:schemeClr val="lt1"/>
+          </a:fontRef>
+        </p:style>
+        <p:txBody>
+          <a:bodyPr rtlCol="0" anchor="ctr"/>
+          <a:lstStyle/>
+          <a:p>
+            <a:pPr algn="ctr"/>
+          </a:p>
+        </p:txBody>
+      </p:sp>
+      <p:sp>
+        <p:nvSpPr>
+          <p:cNvPr id="69" name="TextBox 68"/>
+          <p:cNvSpPr txBox="1"/>
+          <p:nvPr/>
+        </p:nvSpPr>
+        <p:spPr>
+          <a:xfrm>
+            <a:off x="9336024" y="2963520"/>
+            <a:ext cx="1828800" cy="256032"/>
+          </a:xfrm>
+          <a:prstGeom prst="rect">
+            <a:avLst/>
+          </a:prstGeom>
+          <a:noFill/>
+        </p:spPr>
+        <p:txBody>
+          <a:bodyPr wrap="square" anchor="ctr" lIns="0" rIns="0" tIns="0" bIns="0">
+            <a:spAutoFit/>
+          </a:bodyPr>
+          <a:lstStyle/>
+          <a:p>
+            <a:pPr algn="r">
+              <a:lnSpc>
+                <a:spcPct val="110000"/>
+              </a:lnSpc>
+            </a:pPr>
+            <a:r>
+              <a:rPr sz="1600" b="1">
+                <a:solidFill>
+                  <a:srgbClr val="1428A0"/>
+                </a:solidFill>
+                <a:latin typeface="Arial"/>
+                <a:ea typeface="Arial"/>
+              </a:rPr>
+              <a:t>고객 캐시 3~7.2</a:t>
+            </a:r>
+          </a:p>
+        </p:txBody>
+      </p:sp>
+      <p:cxnSp>
+        <p:nvCxnSpPr>
+          <p:cNvPr id="70" name="Connector 69"/>
+          <p:cNvCxnSpPr/>
+          <p:nvPr/>
+        </p:nvCxnSpPr>
+        <p:spPr>
+          <a:xfrm>
+            <a:off x="9417176" y="3136097"/>
+            <a:ext cx="354902" cy="233972"/>
+          </a:xfrm>
+          <a:prstGeom prst="line">
+            <a:avLst/>
+          </a:prstGeom>
+          <a:ln w="28575">
+            <a:solidFill>
+              <a:srgbClr val="1428A0"/>
+            </a:solidFill>
+          </a:ln>
+        </p:spPr>
+        <p:style>
+          <a:lnRef idx="2">
+            <a:schemeClr val="accent1"/>
+          </a:lnRef>
+          <a:fillRef idx="0">
+            <a:schemeClr val="accent1"/>
+          </a:fillRef>
+          <a:effectRef idx="1">
+            <a:schemeClr val="accent1"/>
+          </a:effectRef>
+          <a:fontRef idx="minor">
+            <a:schemeClr val="tx1"/>
+          </a:fontRef>
+        </p:style>
+      </p:cxnSp>
+      <p:cxnSp>
+        <p:nvCxnSpPr>
+          <p:cNvPr id="71" name="Connector 70"/>
+          <p:cNvCxnSpPr/>
+          <p:nvPr/>
+        </p:nvCxnSpPr>
+        <p:spPr>
+          <a:xfrm>
+            <a:off x="9772078" y="3370069"/>
+            <a:ext cx="473202" cy="543268"/>
+          </a:xfrm>
+          <a:prstGeom prst="line">
+            <a:avLst/>
+          </a:prstGeom>
+          <a:ln w="28575">
+            <a:solidFill>
+              <a:srgbClr val="1428A0"/>
+            </a:solidFill>
+          </a:ln>
+        </p:spPr>
+        <p:style>
+          <a:lnRef idx="2">
+            <a:schemeClr val="accent1"/>
+          </a:lnRef>
+          <a:fillRef idx="0">
+            <a:schemeClr val="accent1"/>
+          </a:fillRef>
+          <a:effectRef idx="1">
+            <a:schemeClr val="accent1"/>
+          </a:effectRef>
+          <a:fontRef idx="minor">
+            <a:schemeClr val="tx1"/>
+          </a:fontRef>
+        </p:style>
+      </p:cxnSp>
+      <p:cxnSp>
+        <p:nvCxnSpPr>
+          <p:cNvPr id="72" name="Connector 71"/>
+          <p:cNvCxnSpPr/>
+          <p:nvPr/>
+        </p:nvCxnSpPr>
+        <p:spPr>
+          <a:xfrm>
+            <a:off x="10245280" y="3913337"/>
+            <a:ext cx="354902" cy="0"/>
+          </a:xfrm>
+          <a:prstGeom prst="line">
+            <a:avLst/>
+          </a:prstGeom>
+          <a:ln w="28575">
+            <a:solidFill>
+              <a:srgbClr val="1428A0"/>
+            </a:solidFill>
+          </a:ln>
+        </p:spPr>
+        <p:style>
+          <a:lnRef idx="2">
+            <a:schemeClr val="accent1"/>
+          </a:lnRef>
+          <a:fillRef idx="0">
+            <a:schemeClr val="accent1"/>
+          </a:fillRef>
+          <a:effectRef idx="1">
+            <a:schemeClr val="accent1"/>
+          </a:effectRef>
+          <a:fontRef idx="minor">
+            <a:schemeClr val="tx1"/>
+          </a:fontRef>
+        </p:style>
+      </p:cxnSp>
+      <p:cxnSp>
+        <p:nvCxnSpPr>
+          <p:cNvPr id="73" name="Connector 72"/>
+          <p:cNvCxnSpPr/>
+          <p:nvPr/>
+        </p:nvCxnSpPr>
+        <p:spPr>
+          <a:xfrm>
+            <a:off x="10600182" y="3913337"/>
+            <a:ext cx="236600" cy="0"/>
+          </a:xfrm>
+          <a:prstGeom prst="line">
+            <a:avLst/>
+          </a:prstGeom>
+          <a:ln w="28575">
+            <a:solidFill>
+              <a:srgbClr val="1428A0"/>
+            </a:solidFill>
+          </a:ln>
+        </p:spPr>
+        <p:style>
+          <a:lnRef idx="2">
+            <a:schemeClr val="accent1"/>
+          </a:lnRef>
+          <a:fillRef idx="0">
+            <a:schemeClr val="accent1"/>
+          </a:fillRef>
+          <a:effectRef idx="1">
+            <a:schemeClr val="accent1"/>
+          </a:effectRef>
+          <a:fontRef idx="minor">
+            <a:schemeClr val="tx1"/>
+          </a:fontRef>
+        </p:style>
+      </p:cxnSp>
+      <p:sp>
+        <p:nvSpPr>
+          <p:cNvPr id="74" name="Oval 73"/>
+          <p:cNvSpPr/>
+          <p:nvPr/>
+        </p:nvSpPr>
+        <p:spPr>
+          <a:xfrm>
+            <a:off x="9366884" y="3085805"/>
+            <a:ext cx="100584" cy="100584"/>
+          </a:xfrm>
+          <a:prstGeom prst="ellipse">
+            <a:avLst/>
+          </a:prstGeom>
+          <a:solidFill>
+            <a:srgbClr val="1428A0"/>
+          </a:solidFill>
+          <a:ln>
+            <a:noFill/>
+          </a:ln>
+          <a:effectLst/>
+        </p:spPr>
+        <p:style>
+          <a:lnRef idx="1">
+            <a:schemeClr val="accent1"/>
+          </a:lnRef>
+          <a:fillRef idx="3">
+            <a:schemeClr val="accent1"/>
+          </a:fillRef>
+          <a:effectRef idx="2">
+            <a:schemeClr val="accent1"/>
+          </a:effectRef>
+          <a:fontRef idx="minor">
+            <a:schemeClr val="lt1"/>
+          </a:fontRef>
+        </p:style>
+        <p:txBody>
+          <a:bodyPr rtlCol="0" anchor="ctr"/>
+          <a:lstStyle/>
+          <a:p>
+            <a:pPr algn="ctr"/>
+          </a:p>
+        </p:txBody>
+      </p:sp>
+      <p:sp>
+        <p:nvSpPr>
+          <p:cNvPr id="75" name="Oval 74"/>
+          <p:cNvSpPr/>
+          <p:nvPr/>
+        </p:nvSpPr>
+        <p:spPr>
+          <a:xfrm>
+            <a:off x="9721786" y="3319777"/>
+            <a:ext cx="100584" cy="100584"/>
+          </a:xfrm>
+          <a:prstGeom prst="ellipse">
+            <a:avLst/>
+          </a:prstGeom>
+          <a:solidFill>
+            <a:srgbClr val="1428A0"/>
+          </a:solidFill>
+          <a:ln>
+            <a:noFill/>
+          </a:ln>
+          <a:effectLst/>
+        </p:spPr>
+        <p:style>
+          <a:lnRef idx="1">
+            <a:schemeClr val="accent1"/>
+          </a:lnRef>
+          <a:fillRef idx="3">
+            <a:schemeClr val="accent1"/>
+          </a:fillRef>
+          <a:effectRef idx="2">
+            <a:schemeClr val="accent1"/>
+          </a:effectRef>
+          <a:fontRef idx="minor">
+            <a:schemeClr val="lt1"/>
+          </a:fontRef>
+        </p:style>
+        <p:txBody>
+          <a:bodyPr rtlCol="0" anchor="ctr"/>
+          <a:lstStyle/>
+          <a:p>
+            <a:pPr algn="ctr"/>
+          </a:p>
+        </p:txBody>
+      </p:sp>
+      <p:sp>
+        <p:nvSpPr>
+          <p:cNvPr id="76" name="Oval 75"/>
+          <p:cNvSpPr/>
+          <p:nvPr/>
+        </p:nvSpPr>
+        <p:spPr>
+          <a:xfrm>
+            <a:off x="10194988" y="3863045"/>
+            <a:ext cx="100584" cy="100584"/>
+          </a:xfrm>
+          <a:prstGeom prst="ellipse">
+            <a:avLst/>
+          </a:prstGeom>
+          <a:solidFill>
+            <a:srgbClr val="1428A0"/>
+          </a:solidFill>
+          <a:ln>
+            <a:noFill/>
+          </a:ln>
+          <a:effectLst/>
+        </p:spPr>
+        <p:style>
+          <a:lnRef idx="1">
+            <a:schemeClr val="accent1"/>
+          </a:lnRef>
+          <a:fillRef idx="3">
+            <a:schemeClr val="accent1"/>
+          </a:fillRef>
+          <a:effectRef idx="2">
+            <a:schemeClr val="accent1"/>
+          </a:effectRef>
+          <a:fontRef idx="minor">
+            <a:schemeClr val="lt1"/>
+          </a:fontRef>
+        </p:style>
+        <p:txBody>
+          <a:bodyPr rtlCol="0" anchor="ctr"/>
+          <a:lstStyle/>
+          <a:p>
+            <a:pPr algn="ctr"/>
+          </a:p>
+        </p:txBody>
+      </p:sp>
+      <p:sp>
+        <p:nvSpPr>
+          <p:cNvPr id="77" name="Oval 76"/>
+          <p:cNvSpPr/>
+          <p:nvPr/>
+        </p:nvSpPr>
+        <p:spPr>
+          <a:xfrm>
+            <a:off x="10549890" y="3863045"/>
+            <a:ext cx="100584" cy="100584"/>
+          </a:xfrm>
+          <a:prstGeom prst="ellipse">
+            <a:avLst/>
+          </a:prstGeom>
+          <a:solidFill>
+            <a:srgbClr val="1428A0"/>
+          </a:solidFill>
+          <a:ln>
+            <a:noFill/>
+          </a:ln>
+          <a:effectLst/>
+        </p:spPr>
+        <p:style>
+          <a:lnRef idx="1">
+            <a:schemeClr val="accent1"/>
+          </a:lnRef>
+          <a:fillRef idx="3">
+            <a:schemeClr val="accent1"/>
+          </a:fillRef>
+          <a:effectRef idx="2">
+            <a:schemeClr val="accent1"/>
+          </a:effectRef>
+          <a:fontRef idx="minor">
+            <a:schemeClr val="lt1"/>
+          </a:fontRef>
+        </p:style>
+        <p:txBody>
+          <a:bodyPr rtlCol="0" anchor="ctr"/>
+          <a:lstStyle/>
+          <a:p>
+            <a:pPr algn="ctr"/>
+          </a:p>
+        </p:txBody>
+      </p:sp>
+      <p:sp>
+        <p:nvSpPr>
+          <p:cNvPr id="78" name="Oval 77"/>
+          <p:cNvSpPr/>
+          <p:nvPr/>
+        </p:nvSpPr>
+        <p:spPr>
+          <a:xfrm>
+            <a:off x="10786490" y="3863045"/>
+            <a:ext cx="100584" cy="100584"/>
+          </a:xfrm>
+          <a:prstGeom prst="ellipse">
+            <a:avLst/>
+          </a:prstGeom>
+          <a:solidFill>
+            <a:srgbClr val="1428A0"/>
+          </a:solidFill>
+          <a:ln>
+            <a:noFill/>
+          </a:ln>
+          <a:effectLst/>
+        </p:spPr>
+        <p:style>
+          <a:lnRef idx="1">
+            <a:schemeClr val="accent1"/>
+          </a:lnRef>
+          <a:fillRef idx="3">
+            <a:schemeClr val="accent1"/>
+          </a:fillRef>
+          <a:effectRef idx="2">
+            <a:schemeClr val="accent1"/>
+          </a:effectRef>
+          <a:fontRef idx="minor">
+            <a:schemeClr val="lt1"/>
+          </a:fontRef>
+        </p:style>
+        <p:txBody>
+          <a:bodyPr rtlCol="0" anchor="ctr"/>
+          <a:lstStyle/>
+          <a:p>
+            <a:pPr algn="ctr"/>
+          </a:p>
+        </p:txBody>
+      </p:sp>
+      <p:cxnSp>
+        <p:nvCxnSpPr>
+          <p:cNvPr id="79" name="Connector 78"/>
+          <p:cNvCxnSpPr/>
+          <p:nvPr/>
+        </p:nvCxnSpPr>
+        <p:spPr>
+          <a:xfrm>
+            <a:off x="10481881" y="4214297"/>
+            <a:ext cx="354901" cy="153746"/>
+          </a:xfrm>
+          <a:prstGeom prst="line">
+            <a:avLst/>
+          </a:prstGeom>
+          <a:ln w="28575">
+            <a:solidFill>
+              <a:srgbClr val="8A8A8A"/>
+            </a:solidFill>
+          </a:ln>
+        </p:spPr>
+        <p:style>
+          <a:lnRef idx="2">
+            <a:schemeClr val="accent1"/>
+          </a:lnRef>
+          <a:fillRef idx="0">
+            <a:schemeClr val="accent1"/>
+          </a:fillRef>
+          <a:effectRef idx="1">
+            <a:schemeClr val="accent1"/>
+          </a:effectRef>
+          <a:fontRef idx="minor">
+            <a:schemeClr val="tx1"/>
+          </a:fontRef>
+        </p:style>
+      </p:cxnSp>
+      <p:sp>
+        <p:nvSpPr>
+          <p:cNvPr id="80" name="Oval 79"/>
+          <p:cNvSpPr/>
+          <p:nvPr/>
+        </p:nvSpPr>
+        <p:spPr>
+          <a:xfrm>
+            <a:off x="10431589" y="4164005"/>
+            <a:ext cx="100584" cy="100584"/>
+          </a:xfrm>
+          <a:prstGeom prst="ellipse">
             <a:avLst/>
           </a:prstGeom>
           <a:solidFill>
@@ -15359,96 +18199,16 @@
       </p:sp>
       <p:sp>
         <p:nvSpPr>
-          <p:cNvPr id="11" name="TextBox 10"/>
-          <p:cNvSpPr txBox="1"/>
-          <p:nvPr/>
-        </p:nvSpPr>
-        <p:spPr>
-          <a:xfrm>
-            <a:off x="1929384" y="3310128"/>
-            <a:ext cx="1097280" cy="329184"/>
-          </a:xfrm>
-          <a:prstGeom prst="rect">
-            <a:avLst/>
-          </a:prstGeom>
-          <a:noFill/>
-        </p:spPr>
-        <p:txBody>
-          <a:bodyPr wrap="square" anchor="t" lIns="0" rIns="0" tIns="0" bIns="0">
-            <a:spAutoFit/>
-          </a:bodyPr>
-          <a:lstStyle/>
-          <a:p>
-            <a:pPr algn="ctr">
-              <a:lnSpc>
-                <a:spcPct val="110000"/>
-              </a:lnSpc>
-            </a:pPr>
-            <a:r>
-              <a:rPr sz="1800" b="1">
-                <a:solidFill>
-                  <a:srgbClr val="1A1A1A"/>
-                </a:solidFill>
-                <a:latin typeface="Arial"/>
-                <a:ea typeface="Arial"/>
-              </a:rPr>
-              <a:t>1만</a:t>
-            </a:r>
-          </a:p>
-        </p:txBody>
-      </p:sp>
-      <p:sp>
-        <p:nvSpPr>
-          <p:cNvPr id="12" name="TextBox 11"/>
-          <p:cNvSpPr txBox="1"/>
-          <p:nvPr/>
-        </p:nvSpPr>
-        <p:spPr>
-          <a:xfrm>
-            <a:off x="1929384" y="4864607"/>
-            <a:ext cx="1097280" cy="292608"/>
-          </a:xfrm>
-          <a:prstGeom prst="rect">
-            <a:avLst/>
-          </a:prstGeom>
-          <a:noFill/>
-        </p:spPr>
-        <p:txBody>
-          <a:bodyPr wrap="square" anchor="t" lIns="0" rIns="0" tIns="0" bIns="0">
-            <a:spAutoFit/>
-          </a:bodyPr>
-          <a:lstStyle/>
-          <a:p>
-            <a:pPr algn="ctr">
-              <a:lnSpc>
-                <a:spcPct val="110000"/>
-              </a:lnSpc>
-            </a:pPr>
-            <a:r>
-              <a:rPr sz="1800" b="0">
-                <a:solidFill>
-                  <a:srgbClr val="555555"/>
-                </a:solidFill>
-                <a:latin typeface="Arial"/>
-                <a:ea typeface="Arial"/>
-              </a:rPr>
-              <a:t>MLC</a:t>
-            </a:r>
-          </a:p>
-        </p:txBody>
-      </p:sp>
-      <p:sp>
-        <p:nvSpPr>
-          <p:cNvPr id="13" name="Rectangle 12"/>
+          <p:cNvPr id="81" name="Oval 80"/>
           <p:cNvSpPr/>
           <p:nvPr/>
         </p:nvSpPr>
         <p:spPr>
           <a:xfrm>
-            <a:off x="3227832" y="3968378"/>
-            <a:ext cx="731520" cy="877941"/>
-          </a:xfrm>
-          <a:prstGeom prst="rect">
+            <a:off x="10786490" y="4317751"/>
+            <a:ext cx="100584" cy="100584"/>
+          </a:xfrm>
+          <a:prstGeom prst="ellipse">
             <a:avLst/>
           </a:prstGeom>
           <a:solidFill>
@@ -15483,14 +18243,14 @@
       </p:sp>
       <p:sp>
         <p:nvSpPr>
-          <p:cNvPr id="14" name="TextBox 13"/>
+          <p:cNvPr id="82" name="TextBox 81"/>
           <p:cNvSpPr txBox="1"/>
           <p:nvPr/>
         </p:nvSpPr>
         <p:spPr>
           <a:xfrm>
-            <a:off x="3044952" y="3620906"/>
-            <a:ext cx="1097280" cy="329184"/>
+            <a:off x="9051416" y="3190961"/>
+            <a:ext cx="731520" cy="256032"/>
           </a:xfrm>
           <a:prstGeom prst="rect">
             <a:avLst/>
@@ -15498,7 +18258,7 @@
           <a:noFill/>
         </p:spPr>
         <p:txBody>
-          <a:bodyPr wrap="square" anchor="t" lIns="0" rIns="0" tIns="0" bIns="0">
+          <a:bodyPr wrap="square" anchor="ctr" lIns="0" rIns="0" tIns="0" bIns="0">
             <a:spAutoFit/>
           </a:bodyPr>
           <a:lstStyle/>
@@ -15509,28 +18269,108 @@
               </a:lnSpc>
             </a:pPr>
             <a:r>
+              <a:rPr sz="1600" b="0">
+                <a:solidFill>
+                  <a:srgbClr val="555555"/>
+                </a:solidFill>
+                <a:latin typeface="Arial"/>
+                <a:ea typeface="Arial"/>
+              </a:rPr>
+              <a:t>10</a:t>
+            </a:r>
+          </a:p>
+        </p:txBody>
+      </p:sp>
+      <p:sp>
+        <p:nvSpPr>
+          <p:cNvPr id="83" name="TextBox 82"/>
+          <p:cNvSpPr txBox="1"/>
+          <p:nvPr/>
+        </p:nvSpPr>
+        <p:spPr>
+          <a:xfrm>
+            <a:off x="10909934" y="3767033"/>
+            <a:ext cx="365760" cy="292608"/>
+          </a:xfrm>
+          <a:prstGeom prst="rect">
+            <a:avLst/>
+          </a:prstGeom>
+          <a:noFill/>
+        </p:spPr>
+        <p:txBody>
+          <a:bodyPr wrap="square" anchor="ctr" lIns="0" rIns="0" tIns="0" bIns="0">
+            <a:spAutoFit/>
+          </a:bodyPr>
+          <a:lstStyle/>
+          <a:p>
+            <a:pPr algn="l">
+              <a:lnSpc>
+                <a:spcPct val="110000"/>
+              </a:lnSpc>
+            </a:pPr>
+            <a:r>
               <a:rPr sz="1800" b="1">
                 <a:solidFill>
-                  <a:srgbClr val="1A1A1A"/>
-                </a:solidFill>
-                <a:latin typeface="Arial"/>
-                <a:ea typeface="Arial"/>
-              </a:rPr>
-              <a:t>3천</a:t>
-            </a:r>
-          </a:p>
-        </p:txBody>
-      </p:sp>
-      <p:sp>
-        <p:nvSpPr>
-          <p:cNvPr id="15" name="TextBox 14"/>
+                  <a:srgbClr val="1428A0"/>
+                </a:solidFill>
+                <a:latin typeface="Arial"/>
+                <a:ea typeface="Arial"/>
+              </a:rPr>
+              <a:t>1</a:t>
+            </a:r>
+          </a:p>
+        </p:txBody>
+      </p:sp>
+      <p:sp>
+        <p:nvSpPr>
+          <p:cNvPr id="84" name="TextBox 83"/>
           <p:cNvSpPr txBox="1"/>
           <p:nvPr/>
         </p:nvSpPr>
         <p:spPr>
           <a:xfrm>
-            <a:off x="3044952" y="4864607"/>
-            <a:ext cx="1097280" cy="292608"/>
+            <a:off x="9338881" y="4159551"/>
+            <a:ext cx="1097280" cy="274320"/>
+          </a:xfrm>
+          <a:prstGeom prst="rect">
+            <a:avLst/>
+          </a:prstGeom>
+          <a:noFill/>
+        </p:spPr>
+        <p:txBody>
+          <a:bodyPr wrap="square" anchor="ctr" lIns="0" rIns="0" tIns="0" bIns="0">
+            <a:spAutoFit/>
+          </a:bodyPr>
+          <a:lstStyle/>
+          <a:p>
+            <a:pPr algn="r">
+              <a:lnSpc>
+                <a:spcPct val="110000"/>
+              </a:lnSpc>
+            </a:pPr>
+            <a:r>
+              <a:rPr sz="1600" b="0">
+                <a:solidFill>
+                  <a:srgbClr val="555555"/>
+                </a:solidFill>
+                <a:latin typeface="Arial"/>
+                <a:ea typeface="Arial"/>
+              </a:rPr>
+              <a:t>QLC 0.26</a:t>
+            </a:r>
+          </a:p>
+        </p:txBody>
+      </p:sp>
+      <p:sp>
+        <p:nvSpPr>
+          <p:cNvPr id="85" name="TextBox 84"/>
+          <p:cNvSpPr txBox="1"/>
+          <p:nvPr/>
+        </p:nvSpPr>
+        <p:spPr>
+          <a:xfrm>
+            <a:off x="8860536" y="4572000"/>
+            <a:ext cx="640080" cy="256032"/>
           </a:xfrm>
           <a:prstGeom prst="rect">
             <a:avLst/>
@@ -15549,6 +18389,189 @@
               </a:lnSpc>
             </a:pPr>
             <a:r>
+              <a:rPr sz="1600" b="0">
+                <a:solidFill>
+                  <a:srgbClr val="555555"/>
+                </a:solidFill>
+                <a:latin typeface="Arial"/>
+                <a:ea typeface="Arial"/>
+              </a:rPr>
+              <a:t>2010</a:t>
+            </a:r>
+          </a:p>
+        </p:txBody>
+      </p:sp>
+      <p:sp>
+        <p:nvSpPr>
+          <p:cNvPr id="86" name="TextBox 85"/>
+          <p:cNvSpPr txBox="1"/>
+          <p:nvPr/>
+        </p:nvSpPr>
+        <p:spPr>
+          <a:xfrm>
+            <a:off x="9806940" y="4572000"/>
+            <a:ext cx="640080" cy="256032"/>
+          </a:xfrm>
+          <a:prstGeom prst="rect">
+            <a:avLst/>
+          </a:prstGeom>
+          <a:noFill/>
+        </p:spPr>
+        <p:txBody>
+          <a:bodyPr wrap="square" anchor="t" lIns="0" rIns="0" tIns="0" bIns="0">
+            <a:spAutoFit/>
+          </a:bodyPr>
+          <a:lstStyle/>
+          <a:p>
+            <a:pPr algn="ctr">
+              <a:lnSpc>
+                <a:spcPct val="110000"/>
+              </a:lnSpc>
+            </a:pPr>
+            <a:r>
+              <a:rPr sz="1600" b="0">
+                <a:solidFill>
+                  <a:srgbClr val="555555"/>
+                </a:solidFill>
+                <a:latin typeface="Arial"/>
+                <a:ea typeface="Arial"/>
+              </a:rPr>
+              <a:t>2018</a:t>
+            </a:r>
+          </a:p>
+        </p:txBody>
+      </p:sp>
+      <p:sp>
+        <p:nvSpPr>
+          <p:cNvPr id="87" name="TextBox 86"/>
+          <p:cNvSpPr txBox="1"/>
+          <p:nvPr/>
+        </p:nvSpPr>
+        <p:spPr>
+          <a:xfrm>
+            <a:off x="10753344" y="4572000"/>
+            <a:ext cx="640080" cy="256032"/>
+          </a:xfrm>
+          <a:prstGeom prst="rect">
+            <a:avLst/>
+          </a:prstGeom>
+          <a:noFill/>
+        </p:spPr>
+        <p:txBody>
+          <a:bodyPr wrap="square" anchor="t" lIns="0" rIns="0" tIns="0" bIns="0">
+            <a:spAutoFit/>
+          </a:bodyPr>
+          <a:lstStyle/>
+          <a:p>
+            <a:pPr algn="ctr">
+              <a:lnSpc>
+                <a:spcPct val="110000"/>
+              </a:lnSpc>
+            </a:pPr>
+            <a:r>
+              <a:rPr sz="1600" b="0">
+                <a:solidFill>
+                  <a:srgbClr val="555555"/>
+                </a:solidFill>
+                <a:latin typeface="Arial"/>
+                <a:ea typeface="Arial"/>
+              </a:rPr>
+              <a:t>2026</a:t>
+            </a:r>
+          </a:p>
+        </p:txBody>
+      </p:sp>
+      <p:sp>
+        <p:nvSpPr>
+          <p:cNvPr id="88" name="Rounded Rectangle 87"/>
+          <p:cNvSpPr/>
+          <p:nvPr/>
+        </p:nvSpPr>
+        <p:spPr>
+          <a:xfrm>
+            <a:off x="722376" y="5669280"/>
+            <a:ext cx="5074920" cy="2926080"/>
+          </a:xfrm>
+          <a:prstGeom prst="roundRect">
+            <a:avLst>
+              <a:gd name="adj" fmla="val 2500"/>
+            </a:avLst>
+          </a:prstGeom>
+          <a:solidFill>
+            <a:srgbClr val="F5F5F5"/>
+          </a:solidFill>
+          <a:ln>
+            <a:noFill/>
+          </a:ln>
+          <a:effectLst/>
+        </p:spPr>
+        <p:style>
+          <a:lnRef idx="1">
+            <a:schemeClr val="accent1"/>
+          </a:lnRef>
+          <a:fillRef idx="3">
+            <a:schemeClr val="accent1"/>
+          </a:fillRef>
+          <a:effectRef idx="2">
+            <a:schemeClr val="accent1"/>
+          </a:effectRef>
+          <a:fontRef idx="minor">
+            <a:schemeClr val="lt1"/>
+          </a:fontRef>
+        </p:style>
+        <p:txBody>
+          <a:bodyPr rtlCol="0" anchor="ctr"/>
+          <a:lstStyle/>
+          <a:p>
+            <a:pPr algn="ctr"/>
+          </a:p>
+        </p:txBody>
+      </p:sp>
+      <p:sp>
+        <p:nvSpPr>
+          <p:cNvPr id="89" name="TextBox 88"/>
+          <p:cNvSpPr txBox="1"/>
+          <p:nvPr/>
+        </p:nvSpPr>
+        <p:spPr>
+          <a:xfrm>
+            <a:off x="996696" y="5779008"/>
+            <a:ext cx="3154679" cy="786384"/>
+          </a:xfrm>
+          <a:prstGeom prst="rect">
+            <a:avLst/>
+          </a:prstGeom>
+          <a:noFill/>
+        </p:spPr>
+        <p:txBody>
+          <a:bodyPr wrap="square" anchor="t" lIns="0" rIns="0" tIns="0" bIns="0">
+            <a:spAutoFit/>
+          </a:bodyPr>
+          <a:lstStyle/>
+          <a:p>
+            <a:pPr algn="l">
+              <a:lnSpc>
+                <a:spcPct val="100000"/>
+              </a:lnSpc>
+            </a:pPr>
+            <a:r>
+              <a:rPr sz="2400" b="1">
+                <a:solidFill>
+                  <a:srgbClr val="1A1A1A"/>
+                </a:solidFill>
+                <a:latin typeface="Arial"/>
+                <a:ea typeface="Arial"/>
+              </a:rPr>
+              <a:t>NAND → SSD</a:t>
+            </a:r>
+          </a:p>
+          <a:p>
+            <a:pPr algn="l">
+              <a:lnSpc>
+                <a:spcPct val="100000"/>
+              </a:lnSpc>
+            </a:pPr>
+            <a:r>
               <a:rPr sz="1800" b="0">
                 <a:solidFill>
                   <a:srgbClr val="555555"/>
@@ -15556,24 +18579,26 @@
                 <a:latin typeface="Arial"/>
                 <a:ea typeface="Arial"/>
               </a:rPr>
-              <a:t>TLC</a:t>
-            </a:r>
-          </a:p>
-        </p:txBody>
-      </p:sp>
-      <p:sp>
-        <p:nvSpPr>
-          <p:cNvPr id="16" name="Rectangle 15"/>
+              <a:t>1991~</a:t>
+            </a:r>
+          </a:p>
+        </p:txBody>
+      </p:sp>
+      <p:sp>
+        <p:nvSpPr>
+          <p:cNvPr id="90" name="Rounded Rectangle 89"/>
           <p:cNvSpPr/>
           <p:nvPr/>
         </p:nvSpPr>
         <p:spPr>
           <a:xfrm>
-            <a:off x="4343400" y="4251960"/>
-            <a:ext cx="731520" cy="594359"/>
-          </a:xfrm>
-          <a:prstGeom prst="rect">
-            <a:avLst/>
+            <a:off x="4242816" y="5852160"/>
+            <a:ext cx="1280160" cy="402336"/>
+          </a:xfrm>
+          <a:prstGeom prst="roundRect">
+            <a:avLst>
+              <a:gd name="adj" fmla="val 18181"/>
+            </a:avLst>
           </a:prstGeom>
           <a:solidFill>
             <a:srgbClr val="8A8A8A"/>
@@ -15607,14 +18632,14 @@
       </p:sp>
       <p:sp>
         <p:nvSpPr>
-          <p:cNvPr id="17" name="TextBox 16"/>
+          <p:cNvPr id="91" name="TextBox 90"/>
           <p:cNvSpPr txBox="1"/>
           <p:nvPr/>
         </p:nvSpPr>
         <p:spPr>
           <a:xfrm>
-            <a:off x="4160520" y="3904488"/>
-            <a:ext cx="1097280" cy="329184"/>
+            <a:off x="4297679" y="5852160"/>
+            <a:ext cx="1170431" cy="402336"/>
           </a:xfrm>
           <a:prstGeom prst="rect">
             <a:avLst/>
@@ -15622,7 +18647,7 @@
           <a:noFill/>
         </p:spPr>
         <p:txBody>
-          <a:bodyPr wrap="square" anchor="t" lIns="0" rIns="0" tIns="0" bIns="0">
+          <a:bodyPr wrap="square" anchor="ctr" lIns="0" rIns="0" tIns="0" bIns="0">
             <a:spAutoFit/>
           </a:bodyPr>
           <a:lstStyle/>
@@ -15635,366 +18660,52 @@
             <a:r>
               <a:rPr sz="1800" b="1">
                 <a:solidFill>
-                  <a:srgbClr val="1A1A1A"/>
-                </a:solidFill>
-                <a:latin typeface="Arial"/>
-                <a:ea typeface="Arial"/>
-              </a:rPr>
-              <a:t>1천</a:t>
-            </a:r>
-          </a:p>
-        </p:txBody>
-      </p:sp>
-      <p:sp>
-        <p:nvSpPr>
-          <p:cNvPr id="18" name="TextBox 17"/>
-          <p:cNvSpPr txBox="1"/>
-          <p:nvPr/>
-        </p:nvSpPr>
-        <p:spPr>
-          <a:xfrm>
-            <a:off x="4160520" y="4864607"/>
-            <a:ext cx="1097280" cy="292608"/>
-          </a:xfrm>
-          <a:prstGeom prst="rect">
-            <a:avLst/>
-          </a:prstGeom>
-          <a:noFill/>
-        </p:spPr>
-        <p:txBody>
-          <a:bodyPr wrap="square" anchor="t" lIns="0" rIns="0" tIns="0" bIns="0">
-            <a:spAutoFit/>
-          </a:bodyPr>
-          <a:lstStyle/>
-          <a:p>
-            <a:pPr algn="ctr">
-              <a:lnSpc>
-                <a:spcPct val="110000"/>
-              </a:lnSpc>
-            </a:pPr>
-            <a:r>
-              <a:rPr sz="1800" b="0">
-                <a:solidFill>
-                  <a:srgbClr val="555555"/>
-                </a:solidFill>
-                <a:latin typeface="Arial"/>
-                <a:ea typeface="Arial"/>
-              </a:rPr>
-              <a:t>QLC</a:t>
-            </a:r>
-          </a:p>
-        </p:txBody>
-      </p:sp>
-      <p:sp>
-        <p:nvSpPr>
-          <p:cNvPr id="19" name="TextBox 18"/>
-          <p:cNvSpPr txBox="1"/>
-          <p:nvPr/>
-        </p:nvSpPr>
-        <p:spPr>
-          <a:xfrm>
-            <a:off x="2825496" y="2706624"/>
-            <a:ext cx="2743200" cy="457200"/>
-          </a:xfrm>
-          <a:prstGeom prst="rect">
-            <a:avLst/>
-          </a:prstGeom>
-          <a:noFill/>
-        </p:spPr>
-        <p:txBody>
-          <a:bodyPr wrap="square" anchor="ctr" lIns="0" rIns="0" tIns="0" bIns="0">
-            <a:spAutoFit/>
-          </a:bodyPr>
-          <a:lstStyle/>
-          <a:p>
-            <a:pPr algn="ctr">
-              <a:lnSpc>
-                <a:spcPct val="110000"/>
-              </a:lnSpc>
-            </a:pPr>
-            <a:r>
-              <a:rPr sz="2600" b="1">
-                <a:solidFill>
-                  <a:srgbClr val="555555"/>
-                </a:solidFill>
-                <a:latin typeface="Arial"/>
-                <a:ea typeface="Arial"/>
-              </a:rPr>
-              <a:t>약 100배 ↓</a:t>
-            </a:r>
-          </a:p>
-        </p:txBody>
-      </p:sp>
-      <p:sp>
-        <p:nvSpPr>
-          <p:cNvPr id="20" name="TextBox 19"/>
-          <p:cNvSpPr txBox="1"/>
-          <p:nvPr/>
-        </p:nvSpPr>
-        <p:spPr>
-          <a:xfrm>
-            <a:off x="6163056" y="2212848"/>
-            <a:ext cx="5486400" cy="365760"/>
-          </a:xfrm>
-          <a:prstGeom prst="rect">
-            <a:avLst/>
-          </a:prstGeom>
-          <a:noFill/>
-        </p:spPr>
-        <p:txBody>
-          <a:bodyPr wrap="square" anchor="ctr" lIns="0" rIns="0" tIns="0" bIns="0">
-            <a:spAutoFit/>
-          </a:bodyPr>
-          <a:lstStyle/>
-          <a:p>
-            <a:pPr algn="l">
-              <a:lnSpc>
-                <a:spcPct val="110000"/>
-              </a:lnSpc>
-            </a:pPr>
-            <a:r>
-              <a:rPr sz="2000" b="1">
-                <a:solidFill>
-                  <a:srgbClr val="1428A0"/>
-                </a:solidFill>
-                <a:latin typeface="Arial"/>
-                <a:ea typeface="Arial"/>
-              </a:rPr>
-              <a:t>▲ 고객 캐시가 쓰는 양  </a:t>
-            </a:r>
-            <a:r>
-              <a:rPr sz="1600" b="0">
-                <a:solidFill>
-                  <a:srgbClr val="555555"/>
-                </a:solidFill>
-                <a:latin typeface="Arial"/>
-                <a:ea typeface="Arial"/>
-              </a:rPr>
-              <a:t>DWPD</a:t>
-            </a:r>
-          </a:p>
-        </p:txBody>
-      </p:sp>
-      <p:sp>
-        <p:nvSpPr>
-          <p:cNvPr id="21" name="Rectangle 20"/>
+                  <a:srgbClr val="FFFFFF"/>
+                </a:solidFill>
+                <a:latin typeface="Arial"/>
+                <a:ea typeface="Arial"/>
+              </a:rPr>
+              <a:t>완결</a:t>
+            </a:r>
+          </a:p>
+        </p:txBody>
+      </p:sp>
+      <p:pic>
+        <p:nvPicPr>
+          <p:cNvPr id="92" name="Picture 91" descr="render_nand.png"/>
+          <p:cNvPicPr>
+            <a:picLocks noChangeAspect="1"/>
+          </p:cNvPicPr>
+          <p:nvPr/>
+        </p:nvPicPr>
+        <p:blipFill>
+          <a:blip r:embed="rId2"/>
+          <a:stretch>
+            <a:fillRect/>
+          </a:stretch>
+        </p:blipFill>
+        <p:spPr>
+          <a:xfrm>
+            <a:off x="1132894" y="6601968"/>
+            <a:ext cx="916323" cy="676656"/>
+          </a:xfrm>
+          <a:prstGeom prst="rect">
+            <a:avLst/>
+          </a:prstGeom>
+        </p:spPr>
+      </p:pic>
+      <p:sp>
+        <p:nvSpPr>
+          <p:cNvPr id="93" name="Right Arrow 92"/>
           <p:cNvSpPr/>
           <p:nvPr/>
         </p:nvSpPr>
         <p:spPr>
           <a:xfrm>
-            <a:off x="9790507" y="2706624"/>
-            <a:ext cx="9144" cy="2029968"/>
-          </a:xfrm>
-          <a:prstGeom prst="rect">
-            <a:avLst/>
-          </a:prstGeom>
-          <a:solidFill>
-            <a:srgbClr val="D9D9D9"/>
-          </a:solidFill>
-          <a:ln>
-            <a:noFill/>
-          </a:ln>
-          <a:effectLst/>
-        </p:spPr>
-        <p:style>
-          <a:lnRef idx="1">
-            <a:schemeClr val="accent1"/>
-          </a:lnRef>
-          <a:fillRef idx="3">
-            <a:schemeClr val="accent1"/>
-          </a:fillRef>
-          <a:effectRef idx="2">
-            <a:schemeClr val="accent1"/>
-          </a:effectRef>
-          <a:fontRef idx="minor">
-            <a:schemeClr val="lt1"/>
-          </a:fontRef>
-        </p:style>
-        <p:txBody>
-          <a:bodyPr rtlCol="0" anchor="ctr"/>
-          <a:lstStyle/>
-          <a:p>
-            <a:pPr algn="ctr"/>
-          </a:p>
-        </p:txBody>
-      </p:sp>
-      <p:sp>
-        <p:nvSpPr>
-          <p:cNvPr id="22" name="TextBox 21"/>
-          <p:cNvSpPr txBox="1"/>
-          <p:nvPr/>
-        </p:nvSpPr>
-        <p:spPr>
-          <a:xfrm>
-            <a:off x="9520759" y="4736592"/>
-            <a:ext cx="548640" cy="256032"/>
-          </a:xfrm>
-          <a:prstGeom prst="rect">
-            <a:avLst/>
-          </a:prstGeom>
-          <a:noFill/>
-        </p:spPr>
-        <p:txBody>
-          <a:bodyPr wrap="square" anchor="t" lIns="0" rIns="0" tIns="0" bIns="0">
-            <a:spAutoFit/>
-          </a:bodyPr>
-          <a:lstStyle/>
-          <a:p>
-            <a:pPr algn="ctr">
-              <a:lnSpc>
-                <a:spcPct val="110000"/>
-              </a:lnSpc>
-            </a:pPr>
-            <a:r>
-              <a:rPr sz="1600" b="0">
-                <a:solidFill>
-                  <a:srgbClr val="555555"/>
-                </a:solidFill>
-                <a:latin typeface="Arial"/>
-                <a:ea typeface="Arial"/>
-              </a:rPr>
-              <a:t>1</a:t>
-            </a:r>
-          </a:p>
-        </p:txBody>
-      </p:sp>
-      <p:sp>
-        <p:nvSpPr>
-          <p:cNvPr id="23" name="Rectangle 22"/>
-          <p:cNvSpPr/>
-          <p:nvPr/>
-        </p:nvSpPr>
-        <p:spPr>
-          <a:xfrm>
-            <a:off x="11127536" y="2706624"/>
-            <a:ext cx="9144" cy="2029968"/>
-          </a:xfrm>
-          <a:prstGeom prst="rect">
-            <a:avLst/>
-          </a:prstGeom>
-          <a:solidFill>
-            <a:srgbClr val="D9D9D9"/>
-          </a:solidFill>
-          <a:ln>
-            <a:noFill/>
-          </a:ln>
-          <a:effectLst/>
-        </p:spPr>
-        <p:style>
-          <a:lnRef idx="1">
-            <a:schemeClr val="accent1"/>
-          </a:lnRef>
-          <a:fillRef idx="3">
-            <a:schemeClr val="accent1"/>
-          </a:fillRef>
-          <a:effectRef idx="2">
-            <a:schemeClr val="accent1"/>
-          </a:effectRef>
-          <a:fontRef idx="minor">
-            <a:schemeClr val="lt1"/>
-          </a:fontRef>
-        </p:style>
-        <p:txBody>
-          <a:bodyPr rtlCol="0" anchor="ctr"/>
-          <a:lstStyle/>
-          <a:p>
-            <a:pPr algn="ctr"/>
-          </a:p>
-        </p:txBody>
-      </p:sp>
-      <p:sp>
-        <p:nvSpPr>
-          <p:cNvPr id="24" name="TextBox 23"/>
-          <p:cNvSpPr txBox="1"/>
-          <p:nvPr/>
-        </p:nvSpPr>
-        <p:spPr>
-          <a:xfrm>
-            <a:off x="10857788" y="4736592"/>
-            <a:ext cx="548640" cy="256032"/>
-          </a:xfrm>
-          <a:prstGeom prst="rect">
-            <a:avLst/>
-          </a:prstGeom>
-          <a:noFill/>
-        </p:spPr>
-        <p:txBody>
-          <a:bodyPr wrap="square" anchor="t" lIns="0" rIns="0" tIns="0" bIns="0">
-            <a:spAutoFit/>
-          </a:bodyPr>
-          <a:lstStyle/>
-          <a:p>
-            <a:pPr algn="ctr">
-              <a:lnSpc>
-                <a:spcPct val="110000"/>
-              </a:lnSpc>
-            </a:pPr>
-            <a:r>
-              <a:rPr sz="1600" b="0">
-                <a:solidFill>
-                  <a:srgbClr val="555555"/>
-                </a:solidFill>
-                <a:latin typeface="Arial"/>
-                <a:ea typeface="Arial"/>
-              </a:rPr>
-              <a:t>10</a:t>
-            </a:r>
-          </a:p>
-        </p:txBody>
-      </p:sp>
-      <p:sp>
-        <p:nvSpPr>
-          <p:cNvPr id="25" name="TextBox 24"/>
-          <p:cNvSpPr txBox="1"/>
-          <p:nvPr/>
-        </p:nvSpPr>
-        <p:spPr>
-          <a:xfrm>
-            <a:off x="6163056" y="2761488"/>
-            <a:ext cx="2624328" cy="402336"/>
-          </a:xfrm>
-          <a:prstGeom prst="rect">
-            <a:avLst/>
-          </a:prstGeom>
-          <a:noFill/>
-        </p:spPr>
-        <p:txBody>
-          <a:bodyPr wrap="square" anchor="ctr" lIns="0" rIns="0" tIns="0" bIns="0">
-            <a:spAutoFit/>
-          </a:bodyPr>
-          <a:lstStyle/>
-          <a:p>
-            <a:pPr algn="l">
-              <a:lnSpc>
-                <a:spcPct val="110000"/>
-              </a:lnSpc>
-            </a:pPr>
-            <a:r>
-              <a:rPr sz="1800" b="0">
-                <a:solidFill>
-                  <a:srgbClr val="1A1A1A"/>
-                </a:solidFill>
-                <a:latin typeface="Arial"/>
-                <a:ea typeface="Arial"/>
-              </a:rPr>
-              <a:t>QLC 정격</a:t>
-            </a:r>
-          </a:p>
-        </p:txBody>
-      </p:sp>
-      <p:sp>
-        <p:nvSpPr>
-          <p:cNvPr id="26" name="Rectangle 25"/>
-          <p:cNvSpPr/>
-          <p:nvPr/>
-        </p:nvSpPr>
-        <p:spPr>
-          <a:xfrm>
-            <a:off x="8860536" y="2816352"/>
-            <a:ext cx="637925" cy="292608"/>
-          </a:xfrm>
-          <a:prstGeom prst="rect">
+            <a:off x="2240280" y="6830568"/>
+            <a:ext cx="420624" cy="219456"/>
+          </a:xfrm>
+          <a:prstGeom prst="rightArrow">
             <a:avLst/>
           </a:prstGeom>
           <a:solidFill>
@@ -16027,16 +18738,40 @@
           </a:p>
         </p:txBody>
       </p:sp>
-      <p:sp>
-        <p:nvSpPr>
-          <p:cNvPr id="27" name="TextBox 26"/>
+      <p:pic>
+        <p:nvPicPr>
+          <p:cNvPr id="94" name="Picture 93" descr="render_ssd.png"/>
+          <p:cNvPicPr>
+            <a:picLocks noChangeAspect="1"/>
+          </p:cNvPicPr>
+          <p:nvPr/>
+        </p:nvPicPr>
+        <p:blipFill>
+          <a:blip r:embed="rId3"/>
+          <a:stretch>
+            <a:fillRect/>
+          </a:stretch>
+        </p:blipFill>
+        <p:spPr>
+          <a:xfrm>
+            <a:off x="2901799" y="6601968"/>
+            <a:ext cx="1822496" cy="676656"/>
+          </a:xfrm>
+          <a:prstGeom prst="rect">
+            <a:avLst/>
+          </a:prstGeom>
+        </p:spPr>
+      </p:pic>
+      <p:sp>
+        <p:nvSpPr>
+          <p:cNvPr id="95" name="TextBox 94"/>
           <p:cNvSpPr txBox="1"/>
           <p:nvPr/>
         </p:nvSpPr>
         <p:spPr>
           <a:xfrm>
-            <a:off x="9553325" y="2761488"/>
-            <a:ext cx="640080" cy="402336"/>
+            <a:off x="996696" y="7333488"/>
+            <a:ext cx="4526280" cy="640080"/>
           </a:xfrm>
           <a:prstGeom prst="rect">
             <a:avLst/>
@@ -16055,28 +18790,28 @@
               </a:lnSpc>
             </a:pPr>
             <a:r>
-              <a:rPr sz="1800" b="1">
+              <a:rPr sz="3600" b="1">
                 <a:solidFill>
                   <a:srgbClr val="1A1A1A"/>
                 </a:solidFill>
                 <a:latin typeface="Arial"/>
                 <a:ea typeface="Arial"/>
               </a:rPr>
-              <a:t>0.6</a:t>
-            </a:r>
-          </a:p>
-        </p:txBody>
-      </p:sp>
-      <p:sp>
-        <p:nvSpPr>
-          <p:cNvPr id="28" name="TextBox 27"/>
+              <a:t>ECC 약 60배</a:t>
+            </a:r>
+          </a:p>
+        </p:txBody>
+      </p:sp>
+      <p:sp>
+        <p:nvSpPr>
+          <p:cNvPr id="96" name="TextBox 95"/>
           <p:cNvSpPr txBox="1"/>
           <p:nvPr/>
         </p:nvSpPr>
         <p:spPr>
           <a:xfrm>
-            <a:off x="6163056" y="3255264"/>
-            <a:ext cx="2624328" cy="402336"/>
+            <a:off x="996696" y="7973568"/>
+            <a:ext cx="4526280" cy="347472"/>
           </a:xfrm>
           <a:prstGeom prst="rect">
             <a:avLst/>
@@ -16084,7 +18819,7 @@
           <a:noFill/>
         </p:spPr>
         <p:txBody>
-          <a:bodyPr wrap="square" anchor="ctr" lIns="0" rIns="0" tIns="0" bIns="0">
+          <a:bodyPr wrap="square" anchor="t" lIns="0" rIns="0" tIns="0" bIns="0">
             <a:spAutoFit/>
           </a:bodyPr>
           <a:lstStyle/>
@@ -16097,362 +18832,30 @@
             <a:r>
               <a:rPr sz="1800" b="0">
                 <a:solidFill>
-                  <a:srgbClr val="1A1A1A"/>
-                </a:solidFill>
-                <a:latin typeface="Arial"/>
-                <a:ea typeface="Arial"/>
-              </a:rPr>
-              <a:t>Meta 플래시 캐시</a:t>
-            </a:r>
-          </a:p>
-        </p:txBody>
-      </p:sp>
-      <p:sp>
-        <p:nvSpPr>
-          <p:cNvPr id="29" name="Rectangle 28"/>
+                  <a:srgbClr val="555555"/>
+                </a:solidFill>
+                <a:latin typeface="Arial"/>
+                <a:ea typeface="Arial"/>
+              </a:rPr>
+              <a:t>셀 오류 약 100만 배를 흡수</a:t>
+            </a:r>
+          </a:p>
+        </p:txBody>
+      </p:sp>
+      <p:sp>
+        <p:nvSpPr>
+          <p:cNvPr id="97" name="Rounded Rectangle 96"/>
           <p:cNvSpPr/>
           <p:nvPr/>
         </p:nvSpPr>
         <p:spPr>
           <a:xfrm>
-            <a:off x="8860536" y="3310128"/>
-            <a:ext cx="1572468" cy="292608"/>
-          </a:xfrm>
-          <a:prstGeom prst="rect">
-            <a:avLst/>
-          </a:prstGeom>
-          <a:solidFill>
-            <a:srgbClr val="555555"/>
-          </a:solidFill>
-          <a:ln>
-            <a:noFill/>
-          </a:ln>
-          <a:effectLst/>
-        </p:spPr>
-        <p:style>
-          <a:lnRef idx="1">
-            <a:schemeClr val="accent1"/>
-          </a:lnRef>
-          <a:fillRef idx="3">
-            <a:schemeClr val="accent1"/>
-          </a:fillRef>
-          <a:effectRef idx="2">
-            <a:schemeClr val="accent1"/>
-          </a:effectRef>
-          <a:fontRef idx="minor">
-            <a:schemeClr val="lt1"/>
-          </a:fontRef>
-        </p:style>
-        <p:txBody>
-          <a:bodyPr rtlCol="0" anchor="ctr"/>
-          <a:lstStyle/>
-          <a:p>
-            <a:pPr algn="ctr"/>
-          </a:p>
-        </p:txBody>
-      </p:sp>
-      <p:sp>
-        <p:nvSpPr>
-          <p:cNvPr id="30" name="TextBox 29"/>
-          <p:cNvSpPr txBox="1"/>
-          <p:nvPr/>
-        </p:nvSpPr>
-        <p:spPr>
-          <a:xfrm>
-            <a:off x="10487868" y="3255264"/>
-            <a:ext cx="640080" cy="402336"/>
-          </a:xfrm>
-          <a:prstGeom prst="rect">
-            <a:avLst/>
-          </a:prstGeom>
-          <a:noFill/>
-        </p:spPr>
-        <p:txBody>
-          <a:bodyPr wrap="square" anchor="ctr" lIns="0" rIns="0" tIns="0" bIns="0">
-            <a:spAutoFit/>
-          </a:bodyPr>
-          <a:lstStyle/>
-          <a:p>
-            <a:pPr algn="l">
-              <a:lnSpc>
-                <a:spcPct val="110000"/>
-              </a:lnSpc>
-            </a:pPr>
-            <a:r>
-              <a:rPr sz="1800" b="1">
-                <a:solidFill>
-                  <a:srgbClr val="1A1A1A"/>
-                </a:solidFill>
-                <a:latin typeface="Arial"/>
-                <a:ea typeface="Arial"/>
-              </a:rPr>
-              <a:t>3</a:t>
-            </a:r>
-          </a:p>
-        </p:txBody>
-      </p:sp>
-      <p:sp>
-        <p:nvSpPr>
-          <p:cNvPr id="31" name="TextBox 30"/>
-          <p:cNvSpPr txBox="1"/>
-          <p:nvPr/>
-        </p:nvSpPr>
-        <p:spPr>
-          <a:xfrm>
-            <a:off x="6163056" y="3749039"/>
-            <a:ext cx="2624328" cy="402336"/>
-          </a:xfrm>
-          <a:prstGeom prst="rect">
-            <a:avLst/>
-          </a:prstGeom>
-          <a:noFill/>
-        </p:spPr>
-        <p:txBody>
-          <a:bodyPr wrap="square" anchor="ctr" lIns="0" rIns="0" tIns="0" bIns="0">
-            <a:spAutoFit/>
-          </a:bodyPr>
-          <a:lstStyle/>
-          <a:p>
-            <a:pPr algn="l">
-              <a:lnSpc>
-                <a:spcPct val="110000"/>
-              </a:lnSpc>
-            </a:pPr>
-            <a:r>
-              <a:rPr sz="1800" b="0">
-                <a:solidFill>
-                  <a:srgbClr val="1A1A1A"/>
-                </a:solidFill>
-                <a:latin typeface="Arial"/>
-                <a:ea typeface="Arial"/>
-              </a:rPr>
-              <a:t>AI KV 캐시</a:t>
-            </a:r>
-          </a:p>
-        </p:txBody>
-      </p:sp>
-      <p:sp>
-        <p:nvSpPr>
-          <p:cNvPr id="32" name="Rectangle 31"/>
-          <p:cNvSpPr/>
-          <p:nvPr/>
-        </p:nvSpPr>
-        <p:spPr>
-          <a:xfrm>
-            <a:off x="8860536" y="3803903"/>
-            <a:ext cx="1609943" cy="292608"/>
-          </a:xfrm>
-          <a:prstGeom prst="rect">
-            <a:avLst/>
-          </a:prstGeom>
-          <a:solidFill>
-            <a:srgbClr val="555555"/>
-          </a:solidFill>
-          <a:ln>
-            <a:noFill/>
-          </a:ln>
-          <a:effectLst/>
-        </p:spPr>
-        <p:style>
-          <a:lnRef idx="1">
-            <a:schemeClr val="accent1"/>
-          </a:lnRef>
-          <a:fillRef idx="3">
-            <a:schemeClr val="accent1"/>
-          </a:fillRef>
-          <a:effectRef idx="2">
-            <a:schemeClr val="accent1"/>
-          </a:effectRef>
-          <a:fontRef idx="minor">
-            <a:schemeClr val="lt1"/>
-          </a:fontRef>
-        </p:style>
-        <p:txBody>
-          <a:bodyPr rtlCol="0" anchor="ctr"/>
-          <a:lstStyle/>
-          <a:p>
-            <a:pPr algn="ctr"/>
-          </a:p>
-        </p:txBody>
-      </p:sp>
-      <p:sp>
-        <p:nvSpPr>
-          <p:cNvPr id="33" name="TextBox 32"/>
-          <p:cNvSpPr txBox="1"/>
-          <p:nvPr/>
-        </p:nvSpPr>
-        <p:spPr>
-          <a:xfrm>
-            <a:off x="10525343" y="3749039"/>
-            <a:ext cx="640080" cy="402336"/>
-          </a:xfrm>
-          <a:prstGeom prst="rect">
-            <a:avLst/>
-          </a:prstGeom>
-          <a:noFill/>
-        </p:spPr>
-        <p:txBody>
-          <a:bodyPr wrap="square" anchor="ctr" lIns="0" rIns="0" tIns="0" bIns="0">
-            <a:spAutoFit/>
-          </a:bodyPr>
-          <a:lstStyle/>
-          <a:p>
-            <a:pPr algn="l">
-              <a:lnSpc>
-                <a:spcPct val="110000"/>
-              </a:lnSpc>
-            </a:pPr>
-            <a:r>
-              <a:rPr sz="1800" b="1">
-                <a:solidFill>
-                  <a:srgbClr val="1A1A1A"/>
-                </a:solidFill>
-                <a:latin typeface="Arial"/>
-                <a:ea typeface="Arial"/>
-              </a:rPr>
-              <a:t>3.2</a:t>
-            </a:r>
-          </a:p>
-        </p:txBody>
-      </p:sp>
-      <p:sp>
-        <p:nvSpPr>
-          <p:cNvPr id="34" name="TextBox 33"/>
-          <p:cNvSpPr txBox="1"/>
-          <p:nvPr/>
-        </p:nvSpPr>
-        <p:spPr>
-          <a:xfrm>
-            <a:off x="6163056" y="4242816"/>
-            <a:ext cx="2624328" cy="402336"/>
-          </a:xfrm>
-          <a:prstGeom prst="rect">
-            <a:avLst/>
-          </a:prstGeom>
-          <a:noFill/>
-        </p:spPr>
-        <p:txBody>
-          <a:bodyPr wrap="square" anchor="ctr" lIns="0" rIns="0" tIns="0" bIns="0">
-            <a:spAutoFit/>
-          </a:bodyPr>
-          <a:lstStyle/>
-          <a:p>
-            <a:pPr algn="l">
-              <a:lnSpc>
-                <a:spcPct val="110000"/>
-              </a:lnSpc>
-            </a:pPr>
-            <a:r>
-              <a:rPr sz="1800" b="1">
-                <a:solidFill>
-                  <a:srgbClr val="1428A0"/>
-                </a:solidFill>
-                <a:latin typeface="Arial"/>
-                <a:ea typeface="Arial"/>
-              </a:rPr>
-              <a:t>Meta 스토리지 캐시</a:t>
-            </a:r>
-          </a:p>
-        </p:txBody>
-      </p:sp>
-      <p:sp>
-        <p:nvSpPr>
-          <p:cNvPr id="35" name="Rectangle 34"/>
-          <p:cNvSpPr/>
-          <p:nvPr/>
-        </p:nvSpPr>
-        <p:spPr>
-          <a:xfrm>
-            <a:off x="8860536" y="4297680"/>
-            <a:ext cx="2080821" cy="292608"/>
-          </a:xfrm>
-          <a:prstGeom prst="rect">
-            <a:avLst/>
-          </a:prstGeom>
-          <a:solidFill>
-            <a:srgbClr val="1428A0"/>
-          </a:solidFill>
-          <a:ln>
-            <a:noFill/>
-          </a:ln>
-          <a:effectLst/>
-        </p:spPr>
-        <p:style>
-          <a:lnRef idx="1">
-            <a:schemeClr val="accent1"/>
-          </a:lnRef>
-          <a:fillRef idx="3">
-            <a:schemeClr val="accent1"/>
-          </a:fillRef>
-          <a:effectRef idx="2">
-            <a:schemeClr val="accent1"/>
-          </a:effectRef>
-          <a:fontRef idx="minor">
-            <a:schemeClr val="lt1"/>
-          </a:fontRef>
-        </p:style>
-        <p:txBody>
-          <a:bodyPr rtlCol="0" anchor="ctr"/>
-          <a:lstStyle/>
-          <a:p>
-            <a:pPr algn="ctr"/>
-          </a:p>
-        </p:txBody>
-      </p:sp>
-      <p:sp>
-        <p:nvSpPr>
-          <p:cNvPr id="36" name="TextBox 35"/>
-          <p:cNvSpPr txBox="1"/>
-          <p:nvPr/>
-        </p:nvSpPr>
-        <p:spPr>
-          <a:xfrm>
-            <a:off x="10996221" y="4242816"/>
-            <a:ext cx="640080" cy="402336"/>
-          </a:xfrm>
-          <a:prstGeom prst="rect">
-            <a:avLst/>
-          </a:prstGeom>
-          <a:noFill/>
-        </p:spPr>
-        <p:txBody>
-          <a:bodyPr wrap="square" anchor="ctr" lIns="0" rIns="0" tIns="0" bIns="0">
-            <a:spAutoFit/>
-          </a:bodyPr>
-          <a:lstStyle/>
-          <a:p>
-            <a:pPr algn="l">
-              <a:lnSpc>
-                <a:spcPct val="110000"/>
-              </a:lnSpc>
-            </a:pPr>
-            <a:r>
-              <a:rPr sz="1800" b="1">
-                <a:solidFill>
-                  <a:srgbClr val="1428A0"/>
-                </a:solidFill>
-                <a:latin typeface="Arial"/>
-                <a:ea typeface="Arial"/>
-              </a:rPr>
-              <a:t>7.2</a:t>
-            </a:r>
-          </a:p>
-        </p:txBody>
-      </p:sp>
-      <p:sp>
-        <p:nvSpPr>
-          <p:cNvPr id="37" name="Rounded Rectangle 36"/>
-          <p:cNvSpPr/>
-          <p:nvPr/>
-        </p:nvSpPr>
-        <p:spPr>
-          <a:xfrm>
-            <a:off x="722376" y="5669280"/>
-            <a:ext cx="5074920" cy="2926080"/>
+            <a:off x="5980176" y="5138928"/>
+            <a:ext cx="5394960" cy="3456432"/>
           </a:xfrm>
           <a:prstGeom prst="roundRect">
             <a:avLst>
-              <a:gd name="adj" fmla="val 2500"/>
+              <a:gd name="adj" fmla="val 2116"/>
             </a:avLst>
           </a:prstGeom>
           <a:solidFill>
@@ -16487,14 +18890,14 @@
       </p:sp>
       <p:sp>
         <p:nvSpPr>
-          <p:cNvPr id="38" name="TextBox 37"/>
+          <p:cNvPr id="98" name="TextBox 97"/>
           <p:cNvSpPr txBox="1"/>
           <p:nvPr/>
         </p:nvSpPr>
         <p:spPr>
           <a:xfrm>
-            <a:off x="996696" y="5779008"/>
-            <a:ext cx="3154679" cy="786384"/>
+            <a:off x="6254496" y="5248656"/>
+            <a:ext cx="3474720" cy="786384"/>
           </a:xfrm>
           <a:prstGeom prst="rect">
             <a:avLst/>
@@ -16520,7 +18923,7 @@
                 <a:latin typeface="Arial"/>
                 <a:ea typeface="Arial"/>
               </a:rPr>
-              <a:t>NAND → SSD</a:t>
+              <a:t>SSD 혼자 최적화</a:t>
             </a:r>
           </a:p>
           <a:p>
@@ -16537,367 +18940,6 @@
                 <a:latin typeface="Arial"/>
                 <a:ea typeface="Arial"/>
               </a:rPr>
-              <a:t>1991~</a:t>
-            </a:r>
-          </a:p>
-        </p:txBody>
-      </p:sp>
-      <p:sp>
-        <p:nvSpPr>
-          <p:cNvPr id="39" name="Rounded Rectangle 38"/>
-          <p:cNvSpPr/>
-          <p:nvPr/>
-        </p:nvSpPr>
-        <p:spPr>
-          <a:xfrm>
-            <a:off x="4242816" y="5852160"/>
-            <a:ext cx="1280160" cy="402336"/>
-          </a:xfrm>
-          <a:prstGeom prst="roundRect">
-            <a:avLst>
-              <a:gd name="adj" fmla="val 18181"/>
-            </a:avLst>
-          </a:prstGeom>
-          <a:solidFill>
-            <a:srgbClr val="8A8A8A"/>
-          </a:solidFill>
-          <a:ln>
-            <a:noFill/>
-          </a:ln>
-          <a:effectLst/>
-        </p:spPr>
-        <p:style>
-          <a:lnRef idx="1">
-            <a:schemeClr val="accent1"/>
-          </a:lnRef>
-          <a:fillRef idx="3">
-            <a:schemeClr val="accent1"/>
-          </a:fillRef>
-          <a:effectRef idx="2">
-            <a:schemeClr val="accent1"/>
-          </a:effectRef>
-          <a:fontRef idx="minor">
-            <a:schemeClr val="lt1"/>
-          </a:fontRef>
-        </p:style>
-        <p:txBody>
-          <a:bodyPr rtlCol="0" anchor="ctr"/>
-          <a:lstStyle/>
-          <a:p>
-            <a:pPr algn="ctr"/>
-          </a:p>
-        </p:txBody>
-      </p:sp>
-      <p:sp>
-        <p:nvSpPr>
-          <p:cNvPr id="40" name="TextBox 39"/>
-          <p:cNvSpPr txBox="1"/>
-          <p:nvPr/>
-        </p:nvSpPr>
-        <p:spPr>
-          <a:xfrm>
-            <a:off x="4297679" y="5852160"/>
-            <a:ext cx="1170431" cy="402336"/>
-          </a:xfrm>
-          <a:prstGeom prst="rect">
-            <a:avLst/>
-          </a:prstGeom>
-          <a:noFill/>
-        </p:spPr>
-        <p:txBody>
-          <a:bodyPr wrap="square" anchor="ctr" lIns="0" rIns="0" tIns="0" bIns="0">
-            <a:spAutoFit/>
-          </a:bodyPr>
-          <a:lstStyle/>
-          <a:p>
-            <a:pPr algn="ctr">
-              <a:lnSpc>
-                <a:spcPct val="110000"/>
-              </a:lnSpc>
-            </a:pPr>
-            <a:r>
-              <a:rPr sz="1800" b="1">
-                <a:solidFill>
-                  <a:srgbClr val="FFFFFF"/>
-                </a:solidFill>
-                <a:latin typeface="Arial"/>
-                <a:ea typeface="Arial"/>
-              </a:rPr>
-              <a:t>완결</a:t>
-            </a:r>
-          </a:p>
-        </p:txBody>
-      </p:sp>
-      <p:pic>
-        <p:nvPicPr>
-          <p:cNvPr id="41" name="Picture 40" descr="render_nand.png"/>
-          <p:cNvPicPr>
-            <a:picLocks noChangeAspect="1"/>
-          </p:cNvPicPr>
-          <p:nvPr/>
-        </p:nvPicPr>
-        <p:blipFill>
-          <a:blip r:embed="rId2"/>
-          <a:stretch>
-            <a:fillRect/>
-          </a:stretch>
-        </p:blipFill>
-        <p:spPr>
-          <a:xfrm>
-            <a:off x="1132894" y="6601968"/>
-            <a:ext cx="916323" cy="676656"/>
-          </a:xfrm>
-          <a:prstGeom prst="rect">
-            <a:avLst/>
-          </a:prstGeom>
-        </p:spPr>
-      </p:pic>
-      <p:sp>
-        <p:nvSpPr>
-          <p:cNvPr id="42" name="Right Arrow 41"/>
-          <p:cNvSpPr/>
-          <p:nvPr/>
-        </p:nvSpPr>
-        <p:spPr>
-          <a:xfrm>
-            <a:off x="2240280" y="6830568"/>
-            <a:ext cx="420624" cy="219456"/>
-          </a:xfrm>
-          <a:prstGeom prst="rightArrow">
-            <a:avLst/>
-          </a:prstGeom>
-          <a:solidFill>
-            <a:srgbClr val="8A8A8A"/>
-          </a:solidFill>
-          <a:ln>
-            <a:noFill/>
-          </a:ln>
-          <a:effectLst/>
-        </p:spPr>
-        <p:style>
-          <a:lnRef idx="1">
-            <a:schemeClr val="accent1"/>
-          </a:lnRef>
-          <a:fillRef idx="3">
-            <a:schemeClr val="accent1"/>
-          </a:fillRef>
-          <a:effectRef idx="2">
-            <a:schemeClr val="accent1"/>
-          </a:effectRef>
-          <a:fontRef idx="minor">
-            <a:schemeClr val="lt1"/>
-          </a:fontRef>
-        </p:style>
-        <p:txBody>
-          <a:bodyPr rtlCol="0" anchor="ctr"/>
-          <a:lstStyle/>
-          <a:p>
-            <a:pPr algn="ctr"/>
-          </a:p>
-        </p:txBody>
-      </p:sp>
-      <p:pic>
-        <p:nvPicPr>
-          <p:cNvPr id="43" name="Picture 42" descr="render_ssd.png"/>
-          <p:cNvPicPr>
-            <a:picLocks noChangeAspect="1"/>
-          </p:cNvPicPr>
-          <p:nvPr/>
-        </p:nvPicPr>
-        <p:blipFill>
-          <a:blip r:embed="rId3"/>
-          <a:stretch>
-            <a:fillRect/>
-          </a:stretch>
-        </p:blipFill>
-        <p:spPr>
-          <a:xfrm>
-            <a:off x="2901799" y="6601968"/>
-            <a:ext cx="1822496" cy="676656"/>
-          </a:xfrm>
-          <a:prstGeom prst="rect">
-            <a:avLst/>
-          </a:prstGeom>
-        </p:spPr>
-      </p:pic>
-      <p:sp>
-        <p:nvSpPr>
-          <p:cNvPr id="44" name="TextBox 43"/>
-          <p:cNvSpPr txBox="1"/>
-          <p:nvPr/>
-        </p:nvSpPr>
-        <p:spPr>
-          <a:xfrm>
-            <a:off x="996696" y="7333488"/>
-            <a:ext cx="4526280" cy="640080"/>
-          </a:xfrm>
-          <a:prstGeom prst="rect">
-            <a:avLst/>
-          </a:prstGeom>
-          <a:noFill/>
-        </p:spPr>
-        <p:txBody>
-          <a:bodyPr wrap="square" anchor="ctr" lIns="0" rIns="0" tIns="0" bIns="0">
-            <a:spAutoFit/>
-          </a:bodyPr>
-          <a:lstStyle/>
-          <a:p>
-            <a:pPr algn="l">
-              <a:lnSpc>
-                <a:spcPct val="110000"/>
-              </a:lnSpc>
-            </a:pPr>
-            <a:r>
-              <a:rPr sz="3600" b="1">
-                <a:solidFill>
-                  <a:srgbClr val="1A1A1A"/>
-                </a:solidFill>
-                <a:latin typeface="Arial"/>
-                <a:ea typeface="Arial"/>
-              </a:rPr>
-              <a:t>ECC 약 60배</a:t>
-            </a:r>
-          </a:p>
-        </p:txBody>
-      </p:sp>
-      <p:sp>
-        <p:nvSpPr>
-          <p:cNvPr id="45" name="TextBox 44"/>
-          <p:cNvSpPr txBox="1"/>
-          <p:nvPr/>
-        </p:nvSpPr>
-        <p:spPr>
-          <a:xfrm>
-            <a:off x="996696" y="7973568"/>
-            <a:ext cx="4526280" cy="347472"/>
-          </a:xfrm>
-          <a:prstGeom prst="rect">
-            <a:avLst/>
-          </a:prstGeom>
-          <a:noFill/>
-        </p:spPr>
-        <p:txBody>
-          <a:bodyPr wrap="square" anchor="t" lIns="0" rIns="0" tIns="0" bIns="0">
-            <a:spAutoFit/>
-          </a:bodyPr>
-          <a:lstStyle/>
-          <a:p>
-            <a:pPr algn="l">
-              <a:lnSpc>
-                <a:spcPct val="110000"/>
-              </a:lnSpc>
-            </a:pPr>
-            <a:r>
-              <a:rPr sz="1800" b="0">
-                <a:solidFill>
-                  <a:srgbClr val="555555"/>
-                </a:solidFill>
-                <a:latin typeface="Arial"/>
-                <a:ea typeface="Arial"/>
-              </a:rPr>
-              <a:t>셀 오류 약 100만 배를 흡수</a:t>
-            </a:r>
-          </a:p>
-        </p:txBody>
-      </p:sp>
-      <p:sp>
-        <p:nvSpPr>
-          <p:cNvPr id="46" name="Rounded Rectangle 45"/>
-          <p:cNvSpPr/>
-          <p:nvPr/>
-        </p:nvSpPr>
-        <p:spPr>
-          <a:xfrm>
-            <a:off x="5980176" y="5138928"/>
-            <a:ext cx="5394960" cy="3456432"/>
-          </a:xfrm>
-          <a:prstGeom prst="roundRect">
-            <a:avLst>
-              <a:gd name="adj" fmla="val 2116"/>
-            </a:avLst>
-          </a:prstGeom>
-          <a:solidFill>
-            <a:srgbClr val="F5F5F5"/>
-          </a:solidFill>
-          <a:ln>
-            <a:noFill/>
-          </a:ln>
-          <a:effectLst/>
-        </p:spPr>
-        <p:style>
-          <a:lnRef idx="1">
-            <a:schemeClr val="accent1"/>
-          </a:lnRef>
-          <a:fillRef idx="3">
-            <a:schemeClr val="accent1"/>
-          </a:fillRef>
-          <a:effectRef idx="2">
-            <a:schemeClr val="accent1"/>
-          </a:effectRef>
-          <a:fontRef idx="minor">
-            <a:schemeClr val="lt1"/>
-          </a:fontRef>
-        </p:style>
-        <p:txBody>
-          <a:bodyPr rtlCol="0" anchor="ctr"/>
-          <a:lstStyle/>
-          <a:p>
-            <a:pPr algn="ctr"/>
-          </a:p>
-        </p:txBody>
-      </p:sp>
-      <p:sp>
-        <p:nvSpPr>
-          <p:cNvPr id="47" name="TextBox 46"/>
-          <p:cNvSpPr txBox="1"/>
-          <p:nvPr/>
-        </p:nvSpPr>
-        <p:spPr>
-          <a:xfrm>
-            <a:off x="6254496" y="5248656"/>
-            <a:ext cx="3474720" cy="786384"/>
-          </a:xfrm>
-          <a:prstGeom prst="rect">
-            <a:avLst/>
-          </a:prstGeom>
-          <a:noFill/>
-        </p:spPr>
-        <p:txBody>
-          <a:bodyPr wrap="square" anchor="t" lIns="0" rIns="0" tIns="0" bIns="0">
-            <a:spAutoFit/>
-          </a:bodyPr>
-          <a:lstStyle/>
-          <a:p>
-            <a:pPr algn="l">
-              <a:lnSpc>
-                <a:spcPct val="100000"/>
-              </a:lnSpc>
-            </a:pPr>
-            <a:r>
-              <a:rPr sz="2400" b="1">
-                <a:solidFill>
-                  <a:srgbClr val="1A1A1A"/>
-                </a:solidFill>
-                <a:latin typeface="Arial"/>
-                <a:ea typeface="Arial"/>
-              </a:rPr>
-              <a:t>SSD 혼자 최적화</a:t>
-            </a:r>
-          </a:p>
-          <a:p>
-            <a:pPr algn="l">
-              <a:lnSpc>
-                <a:spcPct val="100000"/>
-              </a:lnSpc>
-            </a:pPr>
-            <a:r>
-              <a:rPr sz="1800" b="0">
-                <a:solidFill>
-                  <a:srgbClr val="555555"/>
-                </a:solidFill>
-                <a:latin typeface="Arial"/>
-                <a:ea typeface="Arial"/>
-              </a:rPr>
               <a:t>2014~2019</a:t>
             </a:r>
           </a:p>
@@ -16905,7 +18947,7 @@
       </p:sp>
       <p:sp>
         <p:nvSpPr>
-          <p:cNvPr id="48" name="Rounded Rectangle 47"/>
+          <p:cNvPr id="99" name="Rounded Rectangle 98"/>
           <p:cNvSpPr/>
           <p:nvPr/>
         </p:nvSpPr>
@@ -16953,7 +18995,7 @@
       </p:sp>
       <p:sp>
         <p:nvSpPr>
-          <p:cNvPr id="49" name="TextBox 48"/>
+          <p:cNvPr id="100" name="TextBox 99"/>
           <p:cNvSpPr txBox="1"/>
           <p:nvPr/>
         </p:nvSpPr>
@@ -16993,7 +19035,7 @@
       </p:sp>
       <p:pic>
         <p:nvPicPr>
-          <p:cNvPr id="50" name="Picture 49" descr="render_ssd.png"/>
+          <p:cNvPr id="101" name="Picture 100" descr="render_ssd.png"/>
           <p:cNvPicPr>
             <a:picLocks noChangeAspect="1"/>
           </p:cNvPicPr>
@@ -17017,7 +19059,7 @@
       </p:pic>
       <p:sp>
         <p:nvSpPr>
-          <p:cNvPr id="51" name="TextBox 50"/>
+          <p:cNvPr id="102" name="TextBox 101"/>
           <p:cNvSpPr txBox="1"/>
           <p:nvPr/>
         </p:nvSpPr>
@@ -17057,7 +19099,7 @@
       </p:sp>
       <p:sp>
         <p:nvSpPr>
-          <p:cNvPr id="52" name="TextBox 51"/>
+          <p:cNvPr id="103" name="TextBox 102"/>
           <p:cNvSpPr txBox="1"/>
           <p:nvPr/>
         </p:nvSpPr>
@@ -17097,7 +19139,7 @@
       </p:sp>
       <p:sp>
         <p:nvSpPr>
-          <p:cNvPr id="53" name="Rounded Rectangle 52"/>
+          <p:cNvPr id="104" name="Rounded Rectangle 103"/>
           <p:cNvSpPr/>
           <p:nvPr/>
         </p:nvSpPr>
@@ -17143,7 +19185,7 @@
       </p:sp>
       <p:sp>
         <p:nvSpPr>
-          <p:cNvPr id="54" name="TextBox 53"/>
+          <p:cNvPr id="105" name="TextBox 104"/>
           <p:cNvSpPr txBox="1"/>
           <p:nvPr/>
         </p:nvSpPr>
@@ -17200,7 +19242,7 @@
       </p:sp>
       <p:sp>
         <p:nvSpPr>
-          <p:cNvPr id="55" name="Rounded Rectangle 54"/>
+          <p:cNvPr id="106" name="Rounded Rectangle 105"/>
           <p:cNvSpPr/>
           <p:nvPr/>
         </p:nvSpPr>
@@ -17246,7 +19288,7 @@
       </p:sp>
       <p:sp>
         <p:nvSpPr>
-          <p:cNvPr id="56" name="TextBox 55"/>
+          <p:cNvPr id="107" name="TextBox 106"/>
           <p:cNvSpPr txBox="1"/>
           <p:nvPr/>
         </p:nvSpPr>
@@ -17286,7 +19328,7 @@
       </p:sp>
       <p:pic>
         <p:nvPicPr>
-          <p:cNvPr id="57" name="Picture 56" descr="render_server.png"/>
+          <p:cNvPr id="108" name="Picture 107" descr="render_server.png"/>
           <p:cNvPicPr>
             <a:picLocks noChangeAspect="1"/>
           </p:cNvPicPr>
@@ -17300,8 +19342,8 @@
         </p:blipFill>
         <p:spPr>
           <a:xfrm>
-            <a:off x="11976732" y="3145536"/>
-            <a:ext cx="1631448" cy="960120"/>
+            <a:off x="11988964" y="3145536"/>
+            <a:ext cx="1149782" cy="676656"/>
           </a:xfrm>
           <a:prstGeom prst="rect">
             <a:avLst/>
@@ -17310,7 +19352,7 @@
       </p:pic>
       <p:pic>
         <p:nvPicPr>
-          <p:cNvPr id="58" name="Picture 57" descr="render_ssd.png"/>
+          <p:cNvPr id="109" name="Picture 108" descr="render_ssd.png"/>
           <p:cNvPicPr>
             <a:picLocks noChangeAspect="1"/>
           </p:cNvPicPr>
@@ -17324,8 +19366,8 @@
         </p:blipFill>
         <p:spPr>
           <a:xfrm>
-            <a:off x="13844016" y="3361195"/>
-            <a:ext cx="1645920" cy="611096"/>
+            <a:off x="13386816" y="3255359"/>
+            <a:ext cx="1280160" cy="475297"/>
           </a:xfrm>
           <a:prstGeom prst="rect">
             <a:avLst/>
@@ -17334,13 +19376,13 @@
       </p:pic>
       <p:sp>
         <p:nvSpPr>
-          <p:cNvPr id="59" name="TextBox 58"/>
+          <p:cNvPr id="110" name="TextBox 109"/>
           <p:cNvSpPr txBox="1"/>
           <p:nvPr/>
         </p:nvSpPr>
         <p:spPr>
           <a:xfrm>
-            <a:off x="11832336" y="4169664"/>
+            <a:off x="11832336" y="3877056"/>
             <a:ext cx="5458968" cy="640080"/>
           </a:xfrm>
           <a:prstGeom prst="rect">
@@ -17374,13 +19416,13 @@
       </p:sp>
       <p:sp>
         <p:nvSpPr>
-          <p:cNvPr id="60" name="TextBox 59"/>
+          <p:cNvPr id="111" name="TextBox 110"/>
           <p:cNvSpPr txBox="1"/>
           <p:nvPr/>
         </p:nvSpPr>
         <p:spPr>
           <a:xfrm>
-            <a:off x="11832336" y="4809744"/>
+            <a:off x="11832336" y="4517136"/>
             <a:ext cx="5458968" cy="347472"/>
           </a:xfrm>
           <a:prstGeom prst="rect">
@@ -17414,7 +19456,7 @@
       </p:sp>
       <p:sp>
         <p:nvSpPr>
-          <p:cNvPr id="61" name="TextBox 60"/>
+          <p:cNvPr id="112" name="TextBox 111"/>
           <p:cNvSpPr txBox="1"/>
           <p:nvPr/>
         </p:nvSpPr>
@@ -17454,7 +19496,7 @@
       </p:sp>
       <p:sp>
         <p:nvSpPr>
-          <p:cNvPr id="62" name="Rounded Rectangle 61"/>
+          <p:cNvPr id="113" name="Rounded Rectangle 112"/>
           <p:cNvSpPr/>
           <p:nvPr/>
         </p:nvSpPr>
@@ -17500,7 +19542,7 @@
       </p:sp>
       <p:sp>
         <p:nvSpPr>
-          <p:cNvPr id="63" name="TextBox 62"/>
+          <p:cNvPr id="114" name="TextBox 113"/>
           <p:cNvSpPr txBox="1"/>
           <p:nvPr/>
         </p:nvSpPr>
@@ -17540,7 +19582,7 @@
       </p:sp>
       <p:sp>
         <p:nvSpPr>
-          <p:cNvPr id="64" name="Rounded Rectangle 63"/>
+          <p:cNvPr id="115" name="Rounded Rectangle 114"/>
           <p:cNvSpPr/>
           <p:nvPr/>
         </p:nvSpPr>
@@ -17586,7 +19628,7 @@
       </p:sp>
       <p:sp>
         <p:nvSpPr>
-          <p:cNvPr id="65" name="TextBox 64"/>
+          <p:cNvPr id="116" name="TextBox 115"/>
           <p:cNvSpPr txBox="1"/>
           <p:nvPr/>
         </p:nvSpPr>
@@ -17626,7 +19668,7 @@
       </p:sp>
       <p:sp>
         <p:nvSpPr>
-          <p:cNvPr id="66" name="TextBox 65"/>
+          <p:cNvPr id="117" name="TextBox 116"/>
           <p:cNvSpPr txBox="1"/>
           <p:nvPr/>
         </p:nvSpPr>
@@ -17666,7 +19708,7 @@
       </p:sp>
       <p:sp>
         <p:nvSpPr>
-          <p:cNvPr id="67" name="Rounded Rectangle 66"/>
+          <p:cNvPr id="118" name="Rounded Rectangle 117"/>
           <p:cNvSpPr/>
           <p:nvPr/>
         </p:nvSpPr>
@@ -17712,7 +19754,7 @@
       </p:sp>
       <p:sp>
         <p:nvSpPr>
-          <p:cNvPr id="68" name="TextBox 67"/>
+          <p:cNvPr id="119" name="TextBox 118"/>
           <p:cNvSpPr txBox="1"/>
           <p:nvPr/>
         </p:nvSpPr>
@@ -17752,7 +19794,7 @@
       </p:sp>
       <p:sp>
         <p:nvSpPr>
-          <p:cNvPr id="69" name="TextBox 68"/>
+          <p:cNvPr id="120" name="TextBox 119"/>
           <p:cNvSpPr txBox="1"/>
           <p:nvPr/>
         </p:nvSpPr>
@@ -17792,7 +19834,7 @@
       </p:sp>
       <p:sp>
         <p:nvSpPr>
-          <p:cNvPr id="70" name="Rounded Rectangle 69"/>
+          <p:cNvPr id="121" name="Rounded Rectangle 120"/>
           <p:cNvSpPr/>
           <p:nvPr/>
         </p:nvSpPr>
@@ -17840,7 +19882,7 @@
       </p:sp>
       <p:sp>
         <p:nvSpPr>
-          <p:cNvPr id="71" name="TextBox 70"/>
+          <p:cNvPr id="122" name="TextBox 121"/>
           <p:cNvSpPr txBox="1"/>
           <p:nvPr/>
         </p:nvSpPr>
@@ -17880,7 +19922,7 @@
       </p:sp>
       <p:sp>
         <p:nvSpPr>
-          <p:cNvPr id="72" name="Rounded Rectangle 71"/>
+          <p:cNvPr id="123" name="Rounded Rectangle 122"/>
           <p:cNvSpPr/>
           <p:nvPr/>
         </p:nvSpPr>
@@ -17928,7 +19970,7 @@
       </p:sp>
       <p:sp>
         <p:nvSpPr>
-          <p:cNvPr id="73" name="TextBox 72"/>
+          <p:cNvPr id="124" name="TextBox 123"/>
           <p:cNvSpPr txBox="1"/>
           <p:nvPr/>
         </p:nvSpPr>
@@ -17968,18 +20010,18 @@
       </p:sp>
       <p:sp>
         <p:nvSpPr>
-          <p:cNvPr id="74" name="Rounded Rectangle 73"/>
+          <p:cNvPr id="125" name="Rounded Rectangle 124"/>
           <p:cNvSpPr/>
           <p:nvPr/>
         </p:nvSpPr>
         <p:spPr>
           <a:xfrm>
-            <a:off x="11795760" y="5504688"/>
-            <a:ext cx="5532120" cy="2871216"/>
+            <a:off x="11795760" y="4992624"/>
+            <a:ext cx="5532120" cy="3438144"/>
           </a:xfrm>
           <a:prstGeom prst="roundRect">
             <a:avLst>
-              <a:gd name="adj" fmla="val 2547"/>
+              <a:gd name="adj" fmla="val 2127"/>
             </a:avLst>
           </a:prstGeom>
           <a:solidFill>
@@ -18012,9 +20054,553 @@
           </a:p>
         </p:txBody>
       </p:sp>
+      <p:sp>
+        <p:nvSpPr>
+          <p:cNvPr id="126" name="TextBox 125"/>
+          <p:cNvSpPr txBox="1"/>
+          <p:nvPr/>
+        </p:nvSpPr>
+        <p:spPr>
+          <a:xfrm>
+            <a:off x="11996928" y="5084064"/>
+            <a:ext cx="5129784" cy="365760"/>
+          </a:xfrm>
+          <a:prstGeom prst="rect">
+            <a:avLst/>
+          </a:prstGeom>
+          <a:noFill/>
+        </p:spPr>
+        <p:txBody>
+          <a:bodyPr wrap="square" anchor="ctr" lIns="0" rIns="0" tIns="0" bIns="0">
+            <a:spAutoFit/>
+          </a:bodyPr>
+          <a:lstStyle/>
+          <a:p>
+            <a:pPr algn="l">
+              <a:lnSpc>
+                <a:spcPct val="110000"/>
+              </a:lnSpc>
+            </a:pPr>
+            <a:r>
+              <a:rPr sz="2000" b="1">
+                <a:solidFill>
+                  <a:srgbClr val="1A1A1A"/>
+                </a:solidFill>
+                <a:latin typeface="Arial"/>
+                <a:ea typeface="Arial"/>
+              </a:rPr>
+              <a:t>주요 DC 기업은 이미 SSD를 직접 설계</a:t>
+            </a:r>
+          </a:p>
+        </p:txBody>
+      </p:sp>
+      <p:sp>
+        <p:nvSpPr>
+          <p:cNvPr id="127" name="Rectangle 126"/>
+          <p:cNvSpPr/>
+          <p:nvPr/>
+        </p:nvSpPr>
+        <p:spPr>
+          <a:xfrm>
+            <a:off x="11996928" y="5559552"/>
+            <a:ext cx="146304" cy="146304"/>
+          </a:xfrm>
+          <a:prstGeom prst="rect">
+            <a:avLst/>
+          </a:prstGeom>
+          <a:solidFill>
+            <a:srgbClr val="1428A0"/>
+          </a:solidFill>
+          <a:ln>
+            <a:noFill/>
+          </a:ln>
+          <a:effectLst/>
+        </p:spPr>
+        <p:style>
+          <a:lnRef idx="1">
+            <a:schemeClr val="accent1"/>
+          </a:lnRef>
+          <a:fillRef idx="3">
+            <a:schemeClr val="accent1"/>
+          </a:fillRef>
+          <a:effectRef idx="2">
+            <a:schemeClr val="accent1"/>
+          </a:effectRef>
+          <a:fontRef idx="minor">
+            <a:schemeClr val="lt1"/>
+          </a:fontRef>
+        </p:style>
+        <p:txBody>
+          <a:bodyPr rtlCol="0" anchor="ctr"/>
+          <a:lstStyle/>
+          <a:p>
+            <a:pPr algn="ctr"/>
+          </a:p>
+        </p:txBody>
+      </p:sp>
+      <p:sp>
+        <p:nvSpPr>
+          <p:cNvPr id="128" name="TextBox 127"/>
+          <p:cNvSpPr txBox="1"/>
+          <p:nvPr/>
+        </p:nvSpPr>
+        <p:spPr>
+          <a:xfrm>
+            <a:off x="12198096" y="5495544"/>
+            <a:ext cx="1920240" cy="274320"/>
+          </a:xfrm>
+          <a:prstGeom prst="rect">
+            <a:avLst/>
+          </a:prstGeom>
+          <a:noFill/>
+        </p:spPr>
+        <p:txBody>
+          <a:bodyPr wrap="square" anchor="ctr" lIns="0" rIns="0" tIns="0" bIns="0">
+            <a:spAutoFit/>
+          </a:bodyPr>
+          <a:lstStyle/>
+          <a:p>
+            <a:pPr algn="l">
+              <a:lnSpc>
+                <a:spcPct val="110000"/>
+              </a:lnSpc>
+            </a:pPr>
+            <a:r>
+              <a:rPr sz="1600" b="0">
+                <a:solidFill>
+                  <a:srgbClr val="555555"/>
+                </a:solidFill>
+                <a:latin typeface="Arial"/>
+                <a:ea typeface="Arial"/>
+              </a:rPr>
+              <a:t>자체 SSD · 컨트롤러</a:t>
+            </a:r>
+          </a:p>
+        </p:txBody>
+      </p:sp>
+      <p:sp>
+        <p:nvSpPr>
+          <p:cNvPr id="129" name="Rectangle 128"/>
+          <p:cNvSpPr/>
+          <p:nvPr/>
+        </p:nvSpPr>
+        <p:spPr>
+          <a:xfrm>
+            <a:off x="14282928" y="5559552"/>
+            <a:ext cx="146304" cy="146304"/>
+          </a:xfrm>
+          <a:prstGeom prst="rect">
+            <a:avLst/>
+          </a:prstGeom>
+          <a:solidFill>
+            <a:srgbClr val="D9D9D9"/>
+          </a:solidFill>
+          <a:ln>
+            <a:noFill/>
+          </a:ln>
+          <a:effectLst/>
+        </p:spPr>
+        <p:style>
+          <a:lnRef idx="1">
+            <a:schemeClr val="accent1"/>
+          </a:lnRef>
+          <a:fillRef idx="3">
+            <a:schemeClr val="accent1"/>
+          </a:fillRef>
+          <a:effectRef idx="2">
+            <a:schemeClr val="accent1"/>
+          </a:effectRef>
+          <a:fontRef idx="minor">
+            <a:schemeClr val="lt1"/>
+          </a:fontRef>
+        </p:style>
+        <p:txBody>
+          <a:bodyPr rtlCol="0" anchor="ctr"/>
+          <a:lstStyle/>
+          <a:p>
+            <a:pPr algn="ctr"/>
+          </a:p>
+        </p:txBody>
+      </p:sp>
+      <p:sp>
+        <p:nvSpPr>
+          <p:cNvPr id="130" name="TextBox 129"/>
+          <p:cNvSpPr txBox="1"/>
+          <p:nvPr/>
+        </p:nvSpPr>
+        <p:spPr>
+          <a:xfrm>
+            <a:off x="14484096" y="5495544"/>
+            <a:ext cx="1280160" cy="274320"/>
+          </a:xfrm>
+          <a:prstGeom prst="rect">
+            <a:avLst/>
+          </a:prstGeom>
+          <a:noFill/>
+        </p:spPr>
+        <p:txBody>
+          <a:bodyPr wrap="square" anchor="ctr" lIns="0" rIns="0" tIns="0" bIns="0">
+            <a:spAutoFit/>
+          </a:bodyPr>
+          <a:lstStyle/>
+          <a:p>
+            <a:pPr algn="l">
+              <a:lnSpc>
+                <a:spcPct val="110000"/>
+              </a:lnSpc>
+            </a:pPr>
+            <a:r>
+              <a:rPr sz="1600" b="0">
+                <a:solidFill>
+                  <a:srgbClr val="555555"/>
+                </a:solidFill>
+                <a:latin typeface="Arial"/>
+                <a:ea typeface="Arial"/>
+              </a:rPr>
+              <a:t>스펙 · 표준</a:t>
+            </a:r>
+          </a:p>
+        </p:txBody>
+      </p:sp>
+      <p:sp>
+        <p:nvSpPr>
+          <p:cNvPr id="131" name="Rectangle 130"/>
+          <p:cNvSpPr/>
+          <p:nvPr/>
+        </p:nvSpPr>
+        <p:spPr>
+          <a:xfrm>
+            <a:off x="13395102" y="5833872"/>
+            <a:ext cx="9144" cy="2212848"/>
+          </a:xfrm>
+          <a:prstGeom prst="rect">
+            <a:avLst/>
+          </a:prstGeom>
+          <a:solidFill>
+            <a:srgbClr val="D9D9D9"/>
+          </a:solidFill>
+          <a:ln>
+            <a:noFill/>
+          </a:ln>
+          <a:effectLst/>
+        </p:spPr>
+        <p:style>
+          <a:lnRef idx="1">
+            <a:schemeClr val="accent1"/>
+          </a:lnRef>
+          <a:fillRef idx="3">
+            <a:schemeClr val="accent1"/>
+          </a:fillRef>
+          <a:effectRef idx="2">
+            <a:schemeClr val="accent1"/>
+          </a:effectRef>
+          <a:fontRef idx="minor">
+            <a:schemeClr val="lt1"/>
+          </a:fontRef>
+        </p:style>
+        <p:txBody>
+          <a:bodyPr rtlCol="0" anchor="ctr"/>
+          <a:lstStyle/>
+          <a:p>
+            <a:pPr algn="ctr"/>
+          </a:p>
+        </p:txBody>
+      </p:sp>
+      <p:sp>
+        <p:nvSpPr>
+          <p:cNvPr id="132" name="TextBox 131"/>
+          <p:cNvSpPr txBox="1"/>
+          <p:nvPr/>
+        </p:nvSpPr>
+        <p:spPr>
+          <a:xfrm>
+            <a:off x="13079634" y="8065008"/>
+            <a:ext cx="640080" cy="256032"/>
+          </a:xfrm>
+          <a:prstGeom prst="rect">
+            <a:avLst/>
+          </a:prstGeom>
+          <a:noFill/>
+        </p:spPr>
+        <p:txBody>
+          <a:bodyPr wrap="square" anchor="t" lIns="0" rIns="0" tIns="0" bIns="0">
+            <a:spAutoFit/>
+          </a:bodyPr>
+          <a:lstStyle/>
+          <a:p>
+            <a:pPr algn="ctr">
+              <a:lnSpc>
+                <a:spcPct val="110000"/>
+              </a:lnSpc>
+            </a:pPr>
+            <a:r>
+              <a:rPr sz="1600" b="0">
+                <a:solidFill>
+                  <a:srgbClr val="555555"/>
+                </a:solidFill>
+                <a:latin typeface="Arial"/>
+                <a:ea typeface="Arial"/>
+              </a:rPr>
+              <a:t>2014</a:t>
+            </a:r>
+          </a:p>
+        </p:txBody>
+      </p:sp>
+      <p:sp>
+        <p:nvSpPr>
+          <p:cNvPr id="133" name="Rectangle 132"/>
+          <p:cNvSpPr/>
+          <p:nvPr/>
+        </p:nvSpPr>
+        <p:spPr>
+          <a:xfrm>
+            <a:off x="14620970" y="5833872"/>
+            <a:ext cx="9144" cy="2212848"/>
+          </a:xfrm>
+          <a:prstGeom prst="rect">
+            <a:avLst/>
+          </a:prstGeom>
+          <a:solidFill>
+            <a:srgbClr val="D9D9D9"/>
+          </a:solidFill>
+          <a:ln>
+            <a:noFill/>
+          </a:ln>
+          <a:effectLst/>
+        </p:spPr>
+        <p:style>
+          <a:lnRef idx="1">
+            <a:schemeClr val="accent1"/>
+          </a:lnRef>
+          <a:fillRef idx="3">
+            <a:schemeClr val="accent1"/>
+          </a:fillRef>
+          <a:effectRef idx="2">
+            <a:schemeClr val="accent1"/>
+          </a:effectRef>
+          <a:fontRef idx="minor">
+            <a:schemeClr val="lt1"/>
+          </a:fontRef>
+        </p:style>
+        <p:txBody>
+          <a:bodyPr rtlCol="0" anchor="ctr"/>
+          <a:lstStyle/>
+          <a:p>
+            <a:pPr algn="ctr"/>
+          </a:p>
+        </p:txBody>
+      </p:sp>
+      <p:sp>
+        <p:nvSpPr>
+          <p:cNvPr id="134" name="TextBox 133"/>
+          <p:cNvSpPr txBox="1"/>
+          <p:nvPr/>
+        </p:nvSpPr>
+        <p:spPr>
+          <a:xfrm>
+            <a:off x="14305502" y="8065008"/>
+            <a:ext cx="640080" cy="256032"/>
+          </a:xfrm>
+          <a:prstGeom prst="rect">
+            <a:avLst/>
+          </a:prstGeom>
+          <a:noFill/>
+        </p:spPr>
+        <p:txBody>
+          <a:bodyPr wrap="square" anchor="t" lIns="0" rIns="0" tIns="0" bIns="0">
+            <a:spAutoFit/>
+          </a:bodyPr>
+          <a:lstStyle/>
+          <a:p>
+            <a:pPr algn="ctr">
+              <a:lnSpc>
+                <a:spcPct val="110000"/>
+              </a:lnSpc>
+            </a:pPr>
+            <a:r>
+              <a:rPr sz="1600" b="0">
+                <a:solidFill>
+                  <a:srgbClr val="555555"/>
+                </a:solidFill>
+                <a:latin typeface="Arial"/>
+                <a:ea typeface="Arial"/>
+              </a:rPr>
+              <a:t>2018</a:t>
+            </a:r>
+          </a:p>
+        </p:txBody>
+      </p:sp>
+      <p:sp>
+        <p:nvSpPr>
+          <p:cNvPr id="135" name="Rectangle 134"/>
+          <p:cNvSpPr/>
+          <p:nvPr/>
+        </p:nvSpPr>
+        <p:spPr>
+          <a:xfrm>
+            <a:off x="15846837" y="5833872"/>
+            <a:ext cx="9144" cy="2212848"/>
+          </a:xfrm>
+          <a:prstGeom prst="rect">
+            <a:avLst/>
+          </a:prstGeom>
+          <a:solidFill>
+            <a:srgbClr val="D9D9D9"/>
+          </a:solidFill>
+          <a:ln>
+            <a:noFill/>
+          </a:ln>
+          <a:effectLst/>
+        </p:spPr>
+        <p:style>
+          <a:lnRef idx="1">
+            <a:schemeClr val="accent1"/>
+          </a:lnRef>
+          <a:fillRef idx="3">
+            <a:schemeClr val="accent1"/>
+          </a:fillRef>
+          <a:effectRef idx="2">
+            <a:schemeClr val="accent1"/>
+          </a:effectRef>
+          <a:fontRef idx="minor">
+            <a:schemeClr val="lt1"/>
+          </a:fontRef>
+        </p:style>
+        <p:txBody>
+          <a:bodyPr rtlCol="0" anchor="ctr"/>
+          <a:lstStyle/>
+          <a:p>
+            <a:pPr algn="ctr"/>
+          </a:p>
+        </p:txBody>
+      </p:sp>
+      <p:sp>
+        <p:nvSpPr>
+          <p:cNvPr id="136" name="TextBox 135"/>
+          <p:cNvSpPr txBox="1"/>
+          <p:nvPr/>
+        </p:nvSpPr>
+        <p:spPr>
+          <a:xfrm>
+            <a:off x="15531369" y="8065008"/>
+            <a:ext cx="640080" cy="256032"/>
+          </a:xfrm>
+          <a:prstGeom prst="rect">
+            <a:avLst/>
+          </a:prstGeom>
+          <a:noFill/>
+        </p:spPr>
+        <p:txBody>
+          <a:bodyPr wrap="square" anchor="t" lIns="0" rIns="0" tIns="0" bIns="0">
+            <a:spAutoFit/>
+          </a:bodyPr>
+          <a:lstStyle/>
+          <a:p>
+            <a:pPr algn="ctr">
+              <a:lnSpc>
+                <a:spcPct val="110000"/>
+              </a:lnSpc>
+            </a:pPr>
+            <a:r>
+              <a:rPr sz="1600" b="0">
+                <a:solidFill>
+                  <a:srgbClr val="555555"/>
+                </a:solidFill>
+                <a:latin typeface="Arial"/>
+                <a:ea typeface="Arial"/>
+              </a:rPr>
+              <a:t>2022</a:t>
+            </a:r>
+          </a:p>
+        </p:txBody>
+      </p:sp>
+      <p:sp>
+        <p:nvSpPr>
+          <p:cNvPr id="137" name="Rectangle 136"/>
+          <p:cNvSpPr/>
+          <p:nvPr/>
+        </p:nvSpPr>
+        <p:spPr>
+          <a:xfrm>
+            <a:off x="17072705" y="5833872"/>
+            <a:ext cx="9144" cy="2212848"/>
+          </a:xfrm>
+          <a:prstGeom prst="rect">
+            <a:avLst/>
+          </a:prstGeom>
+          <a:solidFill>
+            <a:srgbClr val="D9D9D9"/>
+          </a:solidFill>
+          <a:ln>
+            <a:noFill/>
+          </a:ln>
+          <a:effectLst/>
+        </p:spPr>
+        <p:style>
+          <a:lnRef idx="1">
+            <a:schemeClr val="accent1"/>
+          </a:lnRef>
+          <a:fillRef idx="3">
+            <a:schemeClr val="accent1"/>
+          </a:fillRef>
+          <a:effectRef idx="2">
+            <a:schemeClr val="accent1"/>
+          </a:effectRef>
+          <a:fontRef idx="minor">
+            <a:schemeClr val="lt1"/>
+          </a:fontRef>
+        </p:style>
+        <p:txBody>
+          <a:bodyPr rtlCol="0" anchor="ctr"/>
+          <a:lstStyle/>
+          <a:p>
+            <a:pPr algn="ctr"/>
+          </a:p>
+        </p:txBody>
+      </p:sp>
+      <p:sp>
+        <p:nvSpPr>
+          <p:cNvPr id="138" name="TextBox 137"/>
+          <p:cNvSpPr txBox="1"/>
+          <p:nvPr/>
+        </p:nvSpPr>
+        <p:spPr>
+          <a:xfrm>
+            <a:off x="16559784" y="8065008"/>
+            <a:ext cx="640080" cy="256032"/>
+          </a:xfrm>
+          <a:prstGeom prst="rect">
+            <a:avLst/>
+          </a:prstGeom>
+          <a:noFill/>
+        </p:spPr>
+        <p:txBody>
+          <a:bodyPr wrap="square" anchor="t" lIns="0" rIns="0" tIns="0" bIns="0">
+            <a:spAutoFit/>
+          </a:bodyPr>
+          <a:lstStyle/>
+          <a:p>
+            <a:pPr algn="r">
+              <a:lnSpc>
+                <a:spcPct val="110000"/>
+              </a:lnSpc>
+            </a:pPr>
+            <a:r>
+              <a:rPr sz="1600" b="0">
+                <a:solidFill>
+                  <a:srgbClr val="555555"/>
+                </a:solidFill>
+                <a:latin typeface="Arial"/>
+                <a:ea typeface="Arial"/>
+              </a:rPr>
+              <a:t>2026</a:t>
+            </a:r>
+          </a:p>
+        </p:txBody>
+      </p:sp>
       <p:pic>
         <p:nvPicPr>
-          <p:cNvPr id="75" name="Picture 74" descr="meta.png"/>
+          <p:cNvPr id="139" name="Picture 138" descr="baidu.png"/>
           <p:cNvPicPr>
             <a:picLocks noChangeAspect="1"/>
           </p:cNvPicPr>
@@ -18028,8 +20614,8 @@
         </p:blipFill>
         <p:spPr>
           <a:xfrm>
-            <a:off x="11996928" y="5694883"/>
-            <a:ext cx="1097280" cy="223113"/>
+            <a:off x="11996928" y="5916168"/>
+            <a:ext cx="219456" cy="219456"/>
           </a:xfrm>
           <a:prstGeom prst="rect">
             <a:avLst/>
@@ -18038,14 +20624,14 @@
       </p:pic>
       <p:sp>
         <p:nvSpPr>
-          <p:cNvPr id="76" name="TextBox 75"/>
+          <p:cNvPr id="140" name="TextBox 139"/>
           <p:cNvSpPr txBox="1"/>
           <p:nvPr/>
         </p:nvSpPr>
         <p:spPr>
           <a:xfrm>
-            <a:off x="13203936" y="5614416"/>
-            <a:ext cx="2194560" cy="384048"/>
+            <a:off x="12252960" y="5870448"/>
+            <a:ext cx="1024128" cy="310896"/>
           </a:xfrm>
           <a:prstGeom prst="rect">
             <a:avLst/>
@@ -18064,34 +20650,36 @@
               </a:lnSpc>
             </a:pPr>
             <a:r>
-              <a:rPr sz="2000" b="1">
+              <a:rPr sz="1600" b="1">
                 <a:solidFill>
                   <a:srgbClr val="1A1A1A"/>
                 </a:solidFill>
                 <a:latin typeface="Arial"/>
                 <a:ea typeface="Arial"/>
               </a:rPr>
-              <a:t>CacheLib</a:t>
-            </a:r>
-          </a:p>
-        </p:txBody>
-      </p:sp>
-      <p:sp>
-        <p:nvSpPr>
-          <p:cNvPr id="77" name="Rectangle 76"/>
+              <a:t>Baidu</a:t>
+            </a:r>
+          </a:p>
+        </p:txBody>
+      </p:sp>
+      <p:sp>
+        <p:nvSpPr>
+          <p:cNvPr id="141" name="Rounded Rectangle 140"/>
           <p:cNvSpPr/>
           <p:nvPr/>
         </p:nvSpPr>
         <p:spPr>
           <a:xfrm>
-            <a:off x="11996928" y="6345936"/>
-            <a:ext cx="2331720" cy="493776"/>
-          </a:xfrm>
-          <a:prstGeom prst="rect">
-            <a:avLst/>
+            <a:off x="13399674" y="5907024"/>
+            <a:ext cx="3800189" cy="237744"/>
+          </a:xfrm>
+          <a:prstGeom prst="roundRect">
+            <a:avLst>
+              <a:gd name="adj" fmla="val 30769"/>
+            </a:avLst>
           </a:prstGeom>
           <a:solidFill>
-            <a:srgbClr val="8A8A8A"/>
+            <a:srgbClr val="1428A0"/>
           </a:solidFill>
           <a:ln>
             <a:noFill/>
@@ -18122,14 +20710,14 @@
       </p:sp>
       <p:sp>
         <p:nvSpPr>
-          <p:cNvPr id="78" name="TextBox 77"/>
+          <p:cNvPr id="142" name="TextBox 141"/>
           <p:cNvSpPr txBox="1"/>
           <p:nvPr/>
         </p:nvSpPr>
         <p:spPr>
           <a:xfrm>
-            <a:off x="12106656" y="6345936"/>
-            <a:ext cx="1645920" cy="493776"/>
+            <a:off x="13491114" y="5870448"/>
+            <a:ext cx="3690461" cy="310896"/>
           </a:xfrm>
           <a:prstGeom prst="rect">
             <a:avLst/>
@@ -18148,28 +20736,98 @@
               </a:lnSpc>
             </a:pPr>
             <a:r>
-              <a:rPr sz="1800" b="1">
+              <a:rPr sz="1600" b="1">
                 <a:solidFill>
                   <a:srgbClr val="FFFFFF"/>
                 </a:solidFill>
                 <a:latin typeface="Arial"/>
                 <a:ea typeface="Arial"/>
               </a:rPr>
-              <a:t>쓰기 수요</a:t>
-            </a:r>
-          </a:p>
-        </p:txBody>
-      </p:sp>
-      <p:sp>
-        <p:nvSpPr>
-          <p:cNvPr id="79" name="TextBox 78"/>
+              <a:t>자체 SSD (SDF) · 3천 대</a:t>
+            </a:r>
+          </a:p>
+        </p:txBody>
+      </p:sp>
+      <p:pic>
+        <p:nvPicPr>
+          <p:cNvPr id="143" name="Picture 142" descr="google.png"/>
+          <p:cNvPicPr>
+            <a:picLocks noChangeAspect="1"/>
+          </p:cNvPicPr>
+          <p:nvPr/>
+        </p:nvPicPr>
+        <p:blipFill>
+          <a:blip r:embed="rId6"/>
+          <a:stretch>
+            <a:fillRect/>
+          </a:stretch>
+        </p:blipFill>
+        <p:spPr>
+          <a:xfrm>
+            <a:off x="11996928" y="6236207"/>
+            <a:ext cx="613732" cy="201168"/>
+          </a:xfrm>
+          <a:prstGeom prst="rect">
+            <a:avLst/>
+          </a:prstGeom>
+        </p:spPr>
+      </p:pic>
+      <p:sp>
+        <p:nvSpPr>
+          <p:cNvPr id="144" name="Rounded Rectangle 143"/>
+          <p:cNvSpPr/>
+          <p:nvPr/>
+        </p:nvSpPr>
+        <p:spPr>
+          <a:xfrm>
+            <a:off x="14012608" y="6217920"/>
+            <a:ext cx="3187255" cy="237744"/>
+          </a:xfrm>
+          <a:prstGeom prst="roundRect">
+            <a:avLst>
+              <a:gd name="adj" fmla="val 30769"/>
+            </a:avLst>
+          </a:prstGeom>
+          <a:solidFill>
+            <a:srgbClr val="1428A0"/>
+          </a:solidFill>
+          <a:ln>
+            <a:noFill/>
+          </a:ln>
+          <a:effectLst/>
+        </p:spPr>
+        <p:style>
+          <a:lnRef idx="1">
+            <a:schemeClr val="accent1"/>
+          </a:lnRef>
+          <a:fillRef idx="3">
+            <a:schemeClr val="accent1"/>
+          </a:fillRef>
+          <a:effectRef idx="2">
+            <a:schemeClr val="accent1"/>
+          </a:effectRef>
+          <a:fontRef idx="minor">
+            <a:schemeClr val="lt1"/>
+          </a:fontRef>
+        </p:style>
+        <p:txBody>
+          <a:bodyPr rtlCol="0" anchor="ctr"/>
+          <a:lstStyle/>
+          <a:p>
+            <a:pPr algn="ctr"/>
+          </a:p>
+        </p:txBody>
+      </p:sp>
+      <p:sp>
+        <p:nvSpPr>
+          <p:cNvPr id="145" name="TextBox 144"/>
           <p:cNvSpPr txBox="1"/>
           <p:nvPr/>
         </p:nvSpPr>
         <p:spPr>
           <a:xfrm>
-            <a:off x="14401800" y="6345936"/>
-            <a:ext cx="914400" cy="493776"/>
+            <a:off x="14104048" y="6181344"/>
+            <a:ext cx="3077527" cy="310896"/>
           </a:xfrm>
           <a:prstGeom prst="rect">
             <a:avLst/>
@@ -18188,30 +20846,661 @@
               </a:lnSpc>
             </a:pPr>
             <a:r>
-              <a:rPr sz="2200" b="1">
+              <a:rPr sz="1600" b="1">
+                <a:solidFill>
+                  <a:srgbClr val="FFFFFF"/>
+                </a:solidFill>
+                <a:latin typeface="Arial"/>
+                <a:ea typeface="Arial"/>
+              </a:rPr>
+              <a:t>자체 설계 SSD → Titanium</a:t>
+            </a:r>
+          </a:p>
+        </p:txBody>
+      </p:sp>
+      <p:pic>
+        <p:nvPicPr>
+          <p:cNvPr id="146" name="Picture 145" descr="alibabacloud.png"/>
+          <p:cNvPicPr>
+            <a:picLocks noChangeAspect="1"/>
+          </p:cNvPicPr>
+          <p:nvPr/>
+        </p:nvPicPr>
+        <p:blipFill>
+          <a:blip r:embed="rId7"/>
+          <a:stretch>
+            <a:fillRect/>
+          </a:stretch>
+        </p:blipFill>
+        <p:spPr>
+          <a:xfrm>
+            <a:off x="11996928" y="6537959"/>
+            <a:ext cx="219456" cy="219456"/>
+          </a:xfrm>
+          <a:prstGeom prst="rect">
+            <a:avLst/>
+          </a:prstGeom>
+        </p:spPr>
+      </p:pic>
+      <p:sp>
+        <p:nvSpPr>
+          <p:cNvPr id="147" name="TextBox 146"/>
+          <p:cNvSpPr txBox="1"/>
+          <p:nvPr/>
+        </p:nvSpPr>
+        <p:spPr>
+          <a:xfrm>
+            <a:off x="12252960" y="6492240"/>
+            <a:ext cx="1024128" cy="310896"/>
+          </a:xfrm>
+          <a:prstGeom prst="rect">
+            <a:avLst/>
+          </a:prstGeom>
+          <a:noFill/>
+        </p:spPr>
+        <p:txBody>
+          <a:bodyPr wrap="square" anchor="ctr" lIns="0" rIns="0" tIns="0" bIns="0">
+            <a:spAutoFit/>
+          </a:bodyPr>
+          <a:lstStyle/>
+          <a:p>
+            <a:pPr algn="l">
+              <a:lnSpc>
+                <a:spcPct val="110000"/>
+              </a:lnSpc>
+            </a:pPr>
+            <a:r>
+              <a:rPr sz="1600" b="1">
                 <a:solidFill>
                   <a:srgbClr val="1A1A1A"/>
                 </a:solidFill>
                 <a:latin typeface="Arial"/>
                 <a:ea typeface="Arial"/>
               </a:rPr>
-              <a:t>150%</a:t>
-            </a:r>
-          </a:p>
-        </p:txBody>
-      </p:sp>
-      <p:sp>
-        <p:nvSpPr>
-          <p:cNvPr id="80" name="Rectangle 79"/>
+              <a:t>Alibaba</a:t>
+            </a:r>
+          </a:p>
+        </p:txBody>
+      </p:sp>
+      <p:sp>
+        <p:nvSpPr>
+          <p:cNvPr id="148" name="Rounded Rectangle 147"/>
           <p:cNvSpPr/>
           <p:nvPr/>
         </p:nvSpPr>
         <p:spPr>
           <a:xfrm>
-            <a:off x="11996928" y="7004303"/>
-            <a:ext cx="1554480" cy="493776"/>
-          </a:xfrm>
-          <a:prstGeom prst="rect">
+            <a:off x="14012608" y="6528816"/>
+            <a:ext cx="3187255" cy="237744"/>
+          </a:xfrm>
+          <a:prstGeom prst="roundRect">
+            <a:avLst>
+              <a:gd name="adj" fmla="val 30769"/>
+            </a:avLst>
+          </a:prstGeom>
+          <a:solidFill>
+            <a:srgbClr val="1428A0"/>
+          </a:solidFill>
+          <a:ln>
+            <a:noFill/>
+          </a:ln>
+          <a:effectLst/>
+        </p:spPr>
+        <p:style>
+          <a:lnRef idx="1">
+            <a:schemeClr val="accent1"/>
+          </a:lnRef>
+          <a:fillRef idx="3">
+            <a:schemeClr val="accent1"/>
+          </a:fillRef>
+          <a:effectRef idx="2">
+            <a:schemeClr val="accent1"/>
+          </a:effectRef>
+          <a:fontRef idx="minor">
+            <a:schemeClr val="lt1"/>
+          </a:fontRef>
+        </p:style>
+        <p:txBody>
+          <a:bodyPr rtlCol="0" anchor="ctr"/>
+          <a:lstStyle/>
+          <a:p>
+            <a:pPr algn="ctr"/>
+          </a:p>
+        </p:txBody>
+      </p:sp>
+      <p:sp>
+        <p:nvSpPr>
+          <p:cNvPr id="149" name="TextBox 148"/>
+          <p:cNvSpPr txBox="1"/>
+          <p:nvPr/>
+        </p:nvSpPr>
+        <p:spPr>
+          <a:xfrm>
+            <a:off x="14104048" y="6492240"/>
+            <a:ext cx="3077527" cy="310896"/>
+          </a:xfrm>
+          <a:prstGeom prst="rect">
+            <a:avLst/>
+          </a:prstGeom>
+          <a:noFill/>
+        </p:spPr>
+        <p:txBody>
+          <a:bodyPr wrap="square" anchor="ctr" lIns="0" rIns="0" tIns="0" bIns="0">
+            <a:spAutoFit/>
+          </a:bodyPr>
+          <a:lstStyle/>
+          <a:p>
+            <a:pPr algn="l">
+              <a:lnSpc>
+                <a:spcPct val="110000"/>
+              </a:lnSpc>
+            </a:pPr>
+            <a:r>
+              <a:rPr sz="1600" b="1">
+                <a:solidFill>
+                  <a:srgbClr val="FFFFFF"/>
+                </a:solidFill>
+                <a:latin typeface="Arial"/>
+                <a:ea typeface="Arial"/>
+              </a:rPr>
+              <a:t>AliFlash → 컨트롤러 50만+</a:t>
+            </a:r>
+          </a:p>
+        </p:txBody>
+      </p:sp>
+      <p:pic>
+        <p:nvPicPr>
+          <p:cNvPr id="150" name="Picture 149" descr="microsoft.png"/>
+          <p:cNvPicPr>
+            <a:picLocks noChangeAspect="1"/>
+          </p:cNvPicPr>
+          <p:nvPr/>
+        </p:nvPicPr>
+        <p:blipFill>
+          <a:blip r:embed="rId8"/>
+          <a:stretch>
+            <a:fillRect/>
+          </a:stretch>
+        </p:blipFill>
+        <p:spPr>
+          <a:xfrm>
+            <a:off x="11996928" y="6857999"/>
+            <a:ext cx="938089" cy="201168"/>
+          </a:xfrm>
+          <a:prstGeom prst="rect">
+            <a:avLst/>
+          </a:prstGeom>
+        </p:spPr>
+      </p:pic>
+      <p:sp>
+        <p:nvSpPr>
+          <p:cNvPr id="151" name="Rounded Rectangle 150"/>
+          <p:cNvSpPr/>
+          <p:nvPr/>
+        </p:nvSpPr>
+        <p:spPr>
+          <a:xfrm>
+            <a:off x="14625542" y="6839712"/>
+            <a:ext cx="2574321" cy="237744"/>
+          </a:xfrm>
+          <a:prstGeom prst="roundRect">
+            <a:avLst>
+              <a:gd name="adj" fmla="val 30769"/>
+            </a:avLst>
+          </a:prstGeom>
+          <a:solidFill>
+            <a:srgbClr val="D9D9D9"/>
+          </a:solidFill>
+          <a:ln>
+            <a:noFill/>
+          </a:ln>
+          <a:effectLst/>
+        </p:spPr>
+        <p:style>
+          <a:lnRef idx="1">
+            <a:schemeClr val="accent1"/>
+          </a:lnRef>
+          <a:fillRef idx="3">
+            <a:schemeClr val="accent1"/>
+          </a:fillRef>
+          <a:effectRef idx="2">
+            <a:schemeClr val="accent1"/>
+          </a:effectRef>
+          <a:fontRef idx="minor">
+            <a:schemeClr val="lt1"/>
+          </a:fontRef>
+        </p:style>
+        <p:txBody>
+          <a:bodyPr rtlCol="0" anchor="ctr"/>
+          <a:lstStyle/>
+          <a:p>
+            <a:pPr algn="ctr"/>
+          </a:p>
+        </p:txBody>
+      </p:sp>
+      <p:sp>
+        <p:nvSpPr>
+          <p:cNvPr id="152" name="TextBox 151"/>
+          <p:cNvSpPr txBox="1"/>
+          <p:nvPr/>
+        </p:nvSpPr>
+        <p:spPr>
+          <a:xfrm>
+            <a:off x="14716982" y="6803136"/>
+            <a:ext cx="2464593" cy="310896"/>
+          </a:xfrm>
+          <a:prstGeom prst="rect">
+            <a:avLst/>
+          </a:prstGeom>
+          <a:noFill/>
+        </p:spPr>
+        <p:txBody>
+          <a:bodyPr wrap="square" anchor="ctr" lIns="0" rIns="0" tIns="0" bIns="0">
+            <a:spAutoFit/>
+          </a:bodyPr>
+          <a:lstStyle/>
+          <a:p>
+            <a:pPr algn="l">
+              <a:lnSpc>
+                <a:spcPct val="110000"/>
+              </a:lnSpc>
+            </a:pPr>
+            <a:r>
+              <a:rPr sz="1600" b="1">
+                <a:solidFill>
+                  <a:srgbClr val="1A1A1A"/>
+                </a:solidFill>
+                <a:latin typeface="Arial"/>
+                <a:ea typeface="Arial"/>
+              </a:rPr>
+              <a:t>Denali → OCP SSD 스펙</a:t>
+            </a:r>
+          </a:p>
+        </p:txBody>
+      </p:sp>
+      <p:pic>
+        <p:nvPicPr>
+          <p:cNvPr id="153" name="Picture 152" descr="meta.png"/>
+          <p:cNvPicPr>
+            <a:picLocks noChangeAspect="1"/>
+          </p:cNvPicPr>
+          <p:nvPr/>
+        </p:nvPicPr>
+        <p:blipFill>
+          <a:blip r:embed="rId9"/>
+          <a:stretch>
+            <a:fillRect/>
+          </a:stretch>
+        </p:blipFill>
+        <p:spPr>
+          <a:xfrm>
+            <a:off x="11996928" y="7171867"/>
+            <a:ext cx="960120" cy="195224"/>
+          </a:xfrm>
+          <a:prstGeom prst="rect">
+            <a:avLst/>
+          </a:prstGeom>
+        </p:spPr>
+      </p:pic>
+      <p:sp>
+        <p:nvSpPr>
+          <p:cNvPr id="154" name="Rounded Rectangle 153"/>
+          <p:cNvSpPr/>
+          <p:nvPr/>
+        </p:nvSpPr>
+        <p:spPr>
+          <a:xfrm>
+            <a:off x="15238476" y="7150608"/>
+            <a:ext cx="1961387" cy="237744"/>
+          </a:xfrm>
+          <a:prstGeom prst="roundRect">
+            <a:avLst>
+              <a:gd name="adj" fmla="val 30769"/>
+            </a:avLst>
+          </a:prstGeom>
+          <a:solidFill>
+            <a:srgbClr val="D9D9D9"/>
+          </a:solidFill>
+          <a:ln>
+            <a:noFill/>
+          </a:ln>
+          <a:effectLst/>
+        </p:spPr>
+        <p:style>
+          <a:lnRef idx="1">
+            <a:schemeClr val="accent1"/>
+          </a:lnRef>
+          <a:fillRef idx="3">
+            <a:schemeClr val="accent1"/>
+          </a:fillRef>
+          <a:effectRef idx="2">
+            <a:schemeClr val="accent1"/>
+          </a:effectRef>
+          <a:fontRef idx="minor">
+            <a:schemeClr val="lt1"/>
+          </a:fontRef>
+        </p:style>
+        <p:txBody>
+          <a:bodyPr rtlCol="0" anchor="ctr"/>
+          <a:lstStyle/>
+          <a:p>
+            <a:pPr algn="ctr"/>
+          </a:p>
+        </p:txBody>
+      </p:sp>
+      <p:sp>
+        <p:nvSpPr>
+          <p:cNvPr id="155" name="TextBox 154"/>
+          <p:cNvSpPr txBox="1"/>
+          <p:nvPr/>
+        </p:nvSpPr>
+        <p:spPr>
+          <a:xfrm>
+            <a:off x="15329916" y="7114032"/>
+            <a:ext cx="1851659" cy="310896"/>
+          </a:xfrm>
+          <a:prstGeom prst="rect">
+            <a:avLst/>
+          </a:prstGeom>
+          <a:noFill/>
+        </p:spPr>
+        <p:txBody>
+          <a:bodyPr wrap="square" anchor="ctr" lIns="0" rIns="0" tIns="0" bIns="0">
+            <a:spAutoFit/>
+          </a:bodyPr>
+          <a:lstStyle/>
+          <a:p>
+            <a:pPr algn="l">
+              <a:lnSpc>
+                <a:spcPct val="110000"/>
+              </a:lnSpc>
+            </a:pPr>
+            <a:r>
+              <a:rPr sz="1600" b="1">
+                <a:solidFill>
+                  <a:srgbClr val="1A1A1A"/>
+                </a:solidFill>
+                <a:latin typeface="Arial"/>
+                <a:ea typeface="Arial"/>
+              </a:rPr>
+              <a:t>OCP 스펙 → FDP</a:t>
+            </a:r>
+          </a:p>
+        </p:txBody>
+      </p:sp>
+      <p:pic>
+        <p:nvPicPr>
+          <p:cNvPr id="156" name="Picture 155" descr="aws.png"/>
+          <p:cNvPicPr>
+            <a:picLocks noChangeAspect="1"/>
+          </p:cNvPicPr>
+          <p:nvPr/>
+        </p:nvPicPr>
+        <p:blipFill>
+          <a:blip r:embed="rId10"/>
+          <a:stretch>
+            <a:fillRect/>
+          </a:stretch>
+        </p:blipFill>
+        <p:spPr>
+          <a:xfrm>
+            <a:off x="11996928" y="7452360"/>
+            <a:ext cx="428306" cy="256032"/>
+          </a:xfrm>
+          <a:prstGeom prst="rect">
+            <a:avLst/>
+          </a:prstGeom>
+        </p:spPr>
+      </p:pic>
+      <p:sp>
+        <p:nvSpPr>
+          <p:cNvPr id="157" name="Rounded Rectangle 156"/>
+          <p:cNvSpPr/>
+          <p:nvPr/>
+        </p:nvSpPr>
+        <p:spPr>
+          <a:xfrm>
+            <a:off x="15514296" y="7461504"/>
+            <a:ext cx="1685567" cy="237744"/>
+          </a:xfrm>
+          <a:prstGeom prst="roundRect">
+            <a:avLst>
+              <a:gd name="adj" fmla="val 30769"/>
+            </a:avLst>
+          </a:prstGeom>
+          <a:solidFill>
+            <a:srgbClr val="1428A0"/>
+          </a:solidFill>
+          <a:ln>
+            <a:noFill/>
+          </a:ln>
+          <a:effectLst/>
+        </p:spPr>
+        <p:style>
+          <a:lnRef idx="1">
+            <a:schemeClr val="accent1"/>
+          </a:lnRef>
+          <a:fillRef idx="3">
+            <a:schemeClr val="accent1"/>
+          </a:fillRef>
+          <a:effectRef idx="2">
+            <a:schemeClr val="accent1"/>
+          </a:effectRef>
+          <a:fontRef idx="minor">
+            <a:schemeClr val="lt1"/>
+          </a:fontRef>
+        </p:style>
+        <p:txBody>
+          <a:bodyPr rtlCol="0" anchor="ctr"/>
+          <a:lstStyle/>
+          <a:p>
+            <a:pPr algn="ctr"/>
+          </a:p>
+        </p:txBody>
+      </p:sp>
+      <p:sp>
+        <p:nvSpPr>
+          <p:cNvPr id="158" name="TextBox 157"/>
+          <p:cNvSpPr txBox="1"/>
+          <p:nvPr/>
+        </p:nvSpPr>
+        <p:spPr>
+          <a:xfrm>
+            <a:off x="13185648" y="7424928"/>
+            <a:ext cx="2237208" cy="310896"/>
+          </a:xfrm>
+          <a:prstGeom prst="rect">
+            <a:avLst/>
+          </a:prstGeom>
+          <a:noFill/>
+        </p:spPr>
+        <p:txBody>
+          <a:bodyPr wrap="square" anchor="ctr" lIns="0" rIns="0" tIns="0" bIns="0">
+            <a:spAutoFit/>
+          </a:bodyPr>
+          <a:lstStyle/>
+          <a:p>
+            <a:pPr algn="r">
+              <a:lnSpc>
+                <a:spcPct val="110000"/>
+              </a:lnSpc>
+            </a:pPr>
+            <a:r>
+              <a:rPr sz="1600" b="1">
+                <a:solidFill>
+                  <a:srgbClr val="1428A0"/>
+                </a:solidFill>
+                <a:latin typeface="Arial"/>
+                <a:ea typeface="Arial"/>
+              </a:rPr>
+              <a:t>Nitro SSD · 지연 -60%</a:t>
+            </a:r>
+          </a:p>
+        </p:txBody>
+      </p:sp>
+      <p:pic>
+        <p:nvPicPr>
+          <p:cNvPr id="159" name="Picture 158" descr="bytedance.png"/>
+          <p:cNvPicPr>
+            <a:picLocks noChangeAspect="1"/>
+          </p:cNvPicPr>
+          <p:nvPr/>
+        </p:nvPicPr>
+        <p:blipFill>
+          <a:blip r:embed="rId11"/>
+          <a:stretch>
+            <a:fillRect/>
+          </a:stretch>
+        </p:blipFill>
+        <p:spPr>
+          <a:xfrm>
+            <a:off x="11996928" y="7781544"/>
+            <a:ext cx="219456" cy="219456"/>
+          </a:xfrm>
+          <a:prstGeom prst="rect">
+            <a:avLst/>
+          </a:prstGeom>
+        </p:spPr>
+      </p:pic>
+      <p:sp>
+        <p:nvSpPr>
+          <p:cNvPr id="160" name="TextBox 159"/>
+          <p:cNvSpPr txBox="1"/>
+          <p:nvPr/>
+        </p:nvSpPr>
+        <p:spPr>
+          <a:xfrm>
+            <a:off x="12252960" y="7735824"/>
+            <a:ext cx="1024128" cy="310896"/>
+          </a:xfrm>
+          <a:prstGeom prst="rect">
+            <a:avLst/>
+          </a:prstGeom>
+          <a:noFill/>
+        </p:spPr>
+        <p:txBody>
+          <a:bodyPr wrap="square" anchor="ctr" lIns="0" rIns="0" tIns="0" bIns="0">
+            <a:spAutoFit/>
+          </a:bodyPr>
+          <a:lstStyle/>
+          <a:p>
+            <a:pPr algn="l">
+              <a:lnSpc>
+                <a:spcPct val="110000"/>
+              </a:lnSpc>
+            </a:pPr>
+            <a:r>
+              <a:rPr sz="1600" b="1">
+                <a:solidFill>
+                  <a:srgbClr val="1A1A1A"/>
+                </a:solidFill>
+                <a:latin typeface="Arial"/>
+                <a:ea typeface="Arial"/>
+              </a:rPr>
+              <a:t>ByteDance</a:t>
+            </a:r>
+          </a:p>
+        </p:txBody>
+      </p:sp>
+      <p:sp>
+        <p:nvSpPr>
+          <p:cNvPr id="161" name="Rounded Rectangle 160"/>
+          <p:cNvSpPr/>
+          <p:nvPr/>
+        </p:nvSpPr>
+        <p:spPr>
+          <a:xfrm>
+            <a:off x="17077277" y="7772400"/>
+            <a:ext cx="122586" cy="237744"/>
+          </a:xfrm>
+          <a:prstGeom prst="roundRect">
+            <a:avLst>
+              <a:gd name="adj" fmla="val 50000"/>
+            </a:avLst>
+          </a:prstGeom>
+          <a:noFill/>
+          <a:ln w="12700">
+            <a:solidFill>
+              <a:srgbClr val="1428A0"/>
+            </a:solidFill>
+            <a:prstDash val="dash"/>
+          </a:ln>
+          <a:effectLst/>
+        </p:spPr>
+        <p:style>
+          <a:lnRef idx="1">
+            <a:schemeClr val="accent1"/>
+          </a:lnRef>
+          <a:fillRef idx="3">
+            <a:schemeClr val="accent1"/>
+          </a:fillRef>
+          <a:effectRef idx="2">
+            <a:schemeClr val="accent1"/>
+          </a:effectRef>
+          <a:fontRef idx="minor">
+            <a:schemeClr val="lt1"/>
+          </a:fontRef>
+        </p:style>
+        <p:txBody>
+          <a:bodyPr rtlCol="0" anchor="ctr"/>
+          <a:lstStyle/>
+          <a:p>
+            <a:pPr algn="ctr"/>
+          </a:p>
+        </p:txBody>
+      </p:sp>
+      <p:sp>
+        <p:nvSpPr>
+          <p:cNvPr id="162" name="TextBox 161"/>
+          <p:cNvSpPr txBox="1"/>
+          <p:nvPr/>
+        </p:nvSpPr>
+        <p:spPr>
+          <a:xfrm>
+            <a:off x="13185648" y="7735824"/>
+            <a:ext cx="3800189" cy="310896"/>
+          </a:xfrm>
+          <a:prstGeom prst="rect">
+            <a:avLst/>
+          </a:prstGeom>
+          <a:noFill/>
+        </p:spPr>
+        <p:txBody>
+          <a:bodyPr wrap="square" anchor="ctr" lIns="0" rIns="0" tIns="0" bIns="0">
+            <a:spAutoFit/>
+          </a:bodyPr>
+          <a:lstStyle/>
+          <a:p>
+            <a:pPr algn="r">
+              <a:lnSpc>
+                <a:spcPct val="110000"/>
+              </a:lnSpc>
+            </a:pPr>
+            <a:r>
+              <a:rPr sz="1600" b="1">
+                <a:solidFill>
+                  <a:srgbClr val="1428A0"/>
+                </a:solidFill>
+                <a:latin typeface="Arial"/>
+                <a:ea typeface="Arial"/>
+              </a:rPr>
+              <a:t>사내 SSD 개발 (FMS'26)</a:t>
+            </a:r>
+          </a:p>
+        </p:txBody>
+      </p:sp>
+      <p:sp>
+        <p:nvSpPr>
+          <p:cNvPr id="163" name="Chevron 162"/>
+          <p:cNvSpPr/>
+          <p:nvPr/>
+        </p:nvSpPr>
+        <p:spPr>
+          <a:xfrm>
+            <a:off x="5815584" y="6949440"/>
+            <a:ext cx="146304" cy="457200"/>
+          </a:xfrm>
+          <a:prstGeom prst="chevron">
             <a:avLst/>
           </a:prstGeom>
           <a:solidFill>
@@ -18246,217 +21535,13 @@
       </p:sp>
       <p:sp>
         <p:nvSpPr>
-          <p:cNvPr id="81" name="TextBox 80"/>
-          <p:cNvSpPr txBox="1"/>
-          <p:nvPr/>
-        </p:nvSpPr>
-        <p:spPr>
-          <a:xfrm>
-            <a:off x="12106656" y="7004303"/>
-            <a:ext cx="1645920" cy="493776"/>
-          </a:xfrm>
-          <a:prstGeom prst="rect">
-            <a:avLst/>
-          </a:prstGeom>
-          <a:noFill/>
-        </p:spPr>
-        <p:txBody>
-          <a:bodyPr wrap="square" anchor="ctr" lIns="0" rIns="0" tIns="0" bIns="0">
-            <a:spAutoFit/>
-          </a:bodyPr>
-          <a:lstStyle/>
-          <a:p>
-            <a:pPr algn="l">
-              <a:lnSpc>
-                <a:spcPct val="110000"/>
-              </a:lnSpc>
-            </a:pPr>
-            <a:r>
-              <a:rPr sz="1800" b="1">
-                <a:solidFill>
-                  <a:srgbClr val="1A1A1A"/>
-                </a:solidFill>
-                <a:latin typeface="Arial"/>
-                <a:ea typeface="Arial"/>
-              </a:rPr>
-              <a:t>수명 예산</a:t>
-            </a:r>
-          </a:p>
-        </p:txBody>
-      </p:sp>
-      <p:sp>
-        <p:nvSpPr>
-          <p:cNvPr id="82" name="TextBox 81"/>
-          <p:cNvSpPr txBox="1"/>
-          <p:nvPr/>
-        </p:nvSpPr>
-        <p:spPr>
-          <a:xfrm>
-            <a:off x="13624560" y="7004303"/>
-            <a:ext cx="914400" cy="493776"/>
-          </a:xfrm>
-          <a:prstGeom prst="rect">
-            <a:avLst/>
-          </a:prstGeom>
-          <a:noFill/>
-        </p:spPr>
-        <p:txBody>
-          <a:bodyPr wrap="square" anchor="ctr" lIns="0" rIns="0" tIns="0" bIns="0">
-            <a:spAutoFit/>
-          </a:bodyPr>
-          <a:lstStyle/>
-          <a:p>
-            <a:pPr algn="l">
-              <a:lnSpc>
-                <a:spcPct val="110000"/>
-              </a:lnSpc>
-            </a:pPr>
-            <a:r>
-              <a:rPr sz="2200" b="1">
-                <a:solidFill>
-                  <a:srgbClr val="1A1A1A"/>
-                </a:solidFill>
-                <a:latin typeface="Arial"/>
-                <a:ea typeface="Arial"/>
-              </a:rPr>
-              <a:t>100%</a:t>
-            </a:r>
-          </a:p>
-        </p:txBody>
-      </p:sp>
-      <p:sp>
-        <p:nvSpPr>
-          <p:cNvPr id="83" name="Rectangle 82"/>
+          <p:cNvPr id="164" name="Chevron 163"/>
           <p:cNvSpPr/>
           <p:nvPr/>
         </p:nvSpPr>
         <p:spPr>
           <a:xfrm>
-            <a:off x="15261336" y="6236207"/>
-            <a:ext cx="10972" cy="1828800"/>
-          </a:xfrm>
-          <a:prstGeom prst="rect">
-            <a:avLst/>
-          </a:prstGeom>
-          <a:solidFill>
-            <a:srgbClr val="D9D9D9"/>
-          </a:solidFill>
-          <a:ln>
-            <a:noFill/>
-          </a:ln>
-          <a:effectLst/>
-        </p:spPr>
-        <p:style>
-          <a:lnRef idx="1">
-            <a:schemeClr val="accent1"/>
-          </a:lnRef>
-          <a:fillRef idx="3">
-            <a:schemeClr val="accent1"/>
-          </a:fillRef>
-          <a:effectRef idx="2">
-            <a:schemeClr val="accent1"/>
-          </a:effectRef>
-          <a:fontRef idx="minor">
-            <a:schemeClr val="lt1"/>
-          </a:fontRef>
-        </p:style>
-        <p:txBody>
-          <a:bodyPr rtlCol="0" anchor="ctr"/>
-          <a:lstStyle/>
-          <a:p>
-            <a:pPr algn="ctr"/>
-          </a:p>
-        </p:txBody>
-      </p:sp>
-      <p:sp>
-        <p:nvSpPr>
-          <p:cNvPr id="84" name="TextBox 83"/>
-          <p:cNvSpPr txBox="1"/>
-          <p:nvPr/>
-        </p:nvSpPr>
-        <p:spPr>
-          <a:xfrm>
-            <a:off x="15380208" y="6345936"/>
-            <a:ext cx="1947672" cy="914400"/>
-          </a:xfrm>
-          <a:prstGeom prst="rect">
-            <a:avLst/>
-          </a:prstGeom>
-          <a:noFill/>
-        </p:spPr>
-        <p:txBody>
-          <a:bodyPr wrap="square" anchor="ctr" lIns="0" rIns="0" tIns="0" bIns="0">
-            <a:spAutoFit/>
-          </a:bodyPr>
-          <a:lstStyle/>
-          <a:p>
-            <a:pPr algn="l">
-              <a:lnSpc>
-                <a:spcPct val="110000"/>
-              </a:lnSpc>
-            </a:pPr>
-            <a:r>
-              <a:rPr sz="4600" b="1">
-                <a:solidFill>
-                  <a:srgbClr val="1428A0"/>
-                </a:solidFill>
-                <a:latin typeface="Arial"/>
-                <a:ea typeface="Arial"/>
-              </a:rPr>
-              <a:t>-44%</a:t>
-            </a:r>
-          </a:p>
-        </p:txBody>
-      </p:sp>
-      <p:sp>
-        <p:nvSpPr>
-          <p:cNvPr id="85" name="TextBox 84"/>
-          <p:cNvSpPr txBox="1"/>
-          <p:nvPr/>
-        </p:nvSpPr>
-        <p:spPr>
-          <a:xfrm>
-            <a:off x="15380208" y="7278623"/>
-            <a:ext cx="1947672" cy="365760"/>
-          </a:xfrm>
-          <a:prstGeom prst="rect">
-            <a:avLst/>
-          </a:prstGeom>
-          <a:noFill/>
-        </p:spPr>
-        <p:txBody>
-          <a:bodyPr wrap="square" anchor="ctr" lIns="0" rIns="0" tIns="0" bIns="0">
-            <a:spAutoFit/>
-          </a:bodyPr>
-          <a:lstStyle/>
-          <a:p>
-            <a:pPr algn="l">
-              <a:lnSpc>
-                <a:spcPct val="110000"/>
-              </a:lnSpc>
-            </a:pPr>
-            <a:r>
-              <a:rPr sz="2000" b="1">
-                <a:solidFill>
-                  <a:srgbClr val="1428A0"/>
-                </a:solidFill>
-                <a:latin typeface="Arial"/>
-                <a:ea typeface="Arial"/>
-              </a:rPr>
-              <a:t>고객 SW로</a:t>
-            </a:r>
-          </a:p>
-        </p:txBody>
-      </p:sp>
-      <p:sp>
-        <p:nvSpPr>
-          <p:cNvPr id="86" name="Chevron 85"/>
-          <p:cNvSpPr/>
-          <p:nvPr/>
-        </p:nvSpPr>
-        <p:spPr>
-          <a:xfrm>
-            <a:off x="5815584" y="6949440"/>
+            <a:off x="11393424" y="6492240"/>
             <a:ext cx="146304" cy="457200"/>
           </a:xfrm>
           <a:prstGeom prst="chevron">
@@ -18494,51 +21579,7 @@
       </p:sp>
       <p:sp>
         <p:nvSpPr>
-          <p:cNvPr id="87" name="Chevron 86"/>
-          <p:cNvSpPr/>
-          <p:nvPr/>
-        </p:nvSpPr>
-        <p:spPr>
-          <a:xfrm>
-            <a:off x="11393424" y="6492240"/>
-            <a:ext cx="146304" cy="457200"/>
-          </a:xfrm>
-          <a:prstGeom prst="chevron">
-            <a:avLst/>
-          </a:prstGeom>
-          <a:solidFill>
-            <a:srgbClr val="AAB8E8"/>
-          </a:solidFill>
-          <a:ln>
-            <a:noFill/>
-          </a:ln>
-          <a:effectLst/>
-        </p:spPr>
-        <p:style>
-          <a:lnRef idx="1">
-            <a:schemeClr val="accent1"/>
-          </a:lnRef>
-          <a:fillRef idx="3">
-            <a:schemeClr val="accent1"/>
-          </a:fillRef>
-          <a:effectRef idx="2">
-            <a:schemeClr val="accent1"/>
-          </a:effectRef>
-          <a:fontRef idx="minor">
-            <a:schemeClr val="lt1"/>
-          </a:fontRef>
-        </p:style>
-        <p:txBody>
-          <a:bodyPr rtlCol="0" anchor="ctr"/>
-          <a:lstStyle/>
-          <a:p>
-            <a:pPr algn="ctr"/>
-          </a:p>
-        </p:txBody>
-      </p:sp>
-      <p:sp>
-        <p:nvSpPr>
-          <p:cNvPr id="88" name="Rectangle 87"/>
+          <p:cNvPr id="165" name="Rectangle 164"/>
           <p:cNvSpPr/>
           <p:nvPr/>
         </p:nvSpPr>
@@ -18582,7 +21623,7 @@
       </p:sp>
       <p:sp>
         <p:nvSpPr>
-          <p:cNvPr id="89" name="TextBox 88"/>
+          <p:cNvPr id="166" name="TextBox 165"/>
           <p:cNvSpPr txBox="1"/>
           <p:nvPr/>
         </p:nvSpPr>
@@ -18622,7 +21663,7 @@
       </p:sp>
       <p:sp>
         <p:nvSpPr>
-          <p:cNvPr id="90" name="TextBox 89"/>
+          <p:cNvPr id="167" name="TextBox 166"/>
           <p:cNvSpPr txBox="1"/>
           <p:nvPr/>
         </p:nvSpPr>
@@ -18662,7 +21703,7 @@
       </p:sp>
       <p:sp>
         <p:nvSpPr>
-          <p:cNvPr id="91" name="TextBox 90"/>
+          <p:cNvPr id="168" name="TextBox 167"/>
           <p:cNvSpPr txBox="1"/>
           <p:nvPr/>
         </p:nvSpPr>
@@ -18695,14 +21736,14 @@
                 <a:latin typeface="Arial"/>
                 <a:ea typeface="Arial"/>
               </a:rPr>
-              <a:t>출처: 해법 사다리 원장(JESD218 · LDPC · 스트림 '14 · '17 · NVMe 1.4 · FDP TP4146 · CacheLib + FDP 3.22 → 1.03, EuroSys'25) · 캐시 DWPD: Kangaroo 예산 3 · Baleen 목표 7.2 · StorageReview KV 실측 3.2 · CacheLib 150% · -44%(OSDI'20) · 기준(예산 · 실측 · 목표)이 서로 다름 · 부품 이미지는 3D 렌더</a:t>
-            </a:r>
-          </a:p>
-        </p:txBody>
-      </p:sp>
-      <p:sp>
-        <p:nvSpPr>
-          <p:cNvPr id="92" name="TextBox 91"/>
+              <a:t>출처: 성장 원장(Intel S3700 · 삼성 PM1725~PM1763 · Micron 9650 사양, NAND $/GB = IBM, 명목) · 고객 캐시 DWPD(Kangaroo · KV 실측 · Baleen) · 해법 사다리 원장(스트림 · NVMe 1.4 · FDP · CacheLib 3.22 → 1.03) · 자체 설계 원장(Baidu · Google · Alibaba · OCP · AWS · ByteDance) · 일부 수치는 검색 확인 · 부품 이미지는 3D 렌더</a:t>
+            </a:r>
+          </a:p>
+        </p:txBody>
+      </p:sp>
+      <p:sp>
+        <p:nvSpPr>
+          <p:cNvPr id="169" name="TextBox 168"/>
           <p:cNvSpPr txBox="1"/>
           <p:nvPr/>
         </p:nvSpPr>

--- a/outputs/presentation/ssd-future-ready-strategy.pptx
+++ b/outputs/presentation/ssd-future-ready-strategy.pptx
@@ -645,7 +645,7 @@
           <a:lstStyle/>
           <a:p>
             <a:r>
-              <a:t>3장입니다. 왜 고객 시스템까지 가야 하는지 데이터로 말씀드리겠습니다. 위쪽 그래프 넷은 지난 10~15년 동안 데이터센터 SSD가 혼자서 얼마나 성장했는지입니다. 4K 랜덤 읽기는 2012년 7만 5천 IOPS에서 2026년 680만 IOPS로 약 90배, 와트당 읽기 성능은 83에서 1,120MB/s로 약 13배, 1달러로 사는 NAND 용량은 2010년 0.56GB에서 2024년 13GB로 약 24배 늘었습니다. NAND 세대, 컨트롤러, 인터페이스 세대가 만든 성장이고, 모두 SSD 안에서 이룬 것입니다. 그런데 오른쪽 정격 DWPD는 반대입니다. 2012년 고내구 드라이브의 10에서 지금 플래그십 1로, QLC는 0.26까지 내려왔습니다. 셀이 견디는 쓰기가 SLC 10만 회에서 QLC 1천 회로 약 100배 줄었기 때문입니다. 고내구 등급에서 읽기 위주 등급으로 옮겨 간 영향도 섞여 있지만, 고객 캐시 계층은 하루 3회에서 7.2회를 씁니다. 이 띠와 정격 사이의 간격이 지금의 과제입니다. 아래 계단은 이 간격을 어디서 메워 왔는지입니다. 첫 계단 NAND에서 SSD로는 컨트롤러 ECC가 약 60배 강해지면서 SSD 안에서 완결됐습니다. 둘째 계단은 SSD 혼자 하는 최적화입니다. FTL과 ECC, GC와 웨어 레벨링 위에, 2014년부터 2019년까지 핫 · 콜드 추정, 스트림 분리, IO 결정성을 더했습니다. 테일 지연과 성능은 좋아졌지만, 실제 워크로드에서 WAF는 약 3에 머물렀습니다. 데이터가 언제 지워지는지는 호스트만 알기 때문입니다. 셋째 계단이 고객 시스템과의 공동 설계입니다. 삼성 엔지니어가 Meta의 오픈소스 CacheLib 안에 FDP 배치를 구현했고, WAF가 3.22에서 1.03으로 내려갔습니다. 이 방향은 이미 주요 데이터센터 기업의 흐름입니다. Baidu는 2014년 하드웨어와 소프트웨어를 함께 설계한 자체 SSD를 3천 대 넘게 배치했습니다. Google은 2016년 논문에서 자체 인터페이스와 펌웨어를 얹은 자체 설계 SSD를 운용한다고 밝혔고, 지금은 Titanium SSD를 씁니다. Alibaba는 2016년 AliFlash로 시작해 2023년 자체 SSD 컨트롤러를 내놓았고, 누적 50만 개 넘게 출하했다고 발표했습니다. AWS는 FTL을 새로 쓴 Nitro SSD로 I3 대비 지연을 최대 60퍼센트 줄였다고 밝혔습니다. 다만 컨트롤러 칩까지 직접 만든다는 근거는 없습니다. Microsoft와 Meta는 SSD를 직접 만들지 않지만 OCP SSD 스펙과 FDP 표준을 직접 썼고, ByteDance도 사내 SSD 개발 조직을 공개했습니다. Tencent는 공개 근거를 찾지 못했습니다. 고객은 이미 자기 시스템에 맞춰 SSD를 설계하고 있습니다. 사양서를 받아 SSD를 잘 만드는 방식은 둘째 계단에 머물고, 셋째 계단은 고객 시스템 안에서 함께 설계해야 닿습니다.</a:t>
+              <a:t>3장입니다. 왜 고객 시스템까지 가야 하는지 데이터로 말씀드리겠습니다. 위쪽 그래프 넷은 지난 10~15년 동안 데이터센터 SSD가 혼자서 얼마나 성장했는지입니다. 4K 랜덤 읽기는 2012년 7만 5천 IOPS에서 2026년 680만 IOPS로 약 90배, 와트당 읽기 성능은 83에서 1,120MB/s로 약 13배, 1달러로 사는 NAND 용량은 2010년 0.56GB에서 2024년 13GB로 약 24배 늘었습니다. NAND 세대, 컨트롤러, 인터페이스 세대가 만든 성장이고, 모두 SSD 안에서 이룬 것입니다. 그런데 오른쪽 정격 DWPD는 반대입니다. 2012년 고내구 드라이브의 10에서 지금 플래그십 1로, QLC는 0.26까지 내려왔습니다. 셀이 견디는 쓰기가 SLC 10만 회에서 QLC 1천 회로 약 100배 줄었기 때문입니다. 고내구 등급에서 읽기 위주 등급으로 옮겨 간 영향도 섞여 있지만, 고객 캐시 계층은 하루 3회에서 7.2회를 씁니다. 이 띠와 정격 사이의 간격이 지금의 과제입니다. 아래 계단은 이 간격을 어디서 메워 왔는지입니다. 첫 계단 NAND에서 SSD로는 컨트롤러 ECC가 약 60배 강해지면서 SSD 안에서 완결됐습니다. 둘째 계단은 SSD 혼자 하는 최적화입니다. FTL과 ECC, GC와 웨어 레벨링 위에, 2014년부터 2019년까지 핫 · 콜드 추정, 스트림 분리, IO 결정성을 더했습니다. 테일 지연과 성능은 좋아졌지만, 실제 워크로드에서 WAF는 약 3에 머물렀습니다. 데이터가 언제 지워지는지는 호스트만 알기 때문입니다. 셋째 계단이 고객 시스템과의 공동 설계입니다. 삼성 엔지니어가 Meta의 오픈소스 CacheLib 안에 FDP 배치를 구현했고, WAF가 3.22에서 1.03으로 내려갔습니다. 이 방향은 이미 주요 데이터센터 기업의 흐름입니다. Google은 2016년 논문에서 자체 인터페이스와 펌웨어를 얹은 자체 설계 SSD를 운용한다고 밝혔고, 지금은 Titanium SSD로 이전 세대보다 지연을 최대 35퍼센트 줄였습니다. Alibaba는 2016년 자체 SSD AliFlash로 시작해 2023년 자체 SSD 컨트롤러를 내놓았고, 누적 50만 개 넘게 출하했다고 발표했습니다. AWS는 FTL을 새로 쓴 Nitro SSD로 I3 대비 지연을 최대 60퍼센트 줄였다고 밝혔습니다. 다만 컨트롤러 칩까지 직접 만든다는 근거는 없습니다. 이 밖에 Baidu는 2014년 자체 SSD를 배치했고, Microsoft와 Meta는 OCP SSD 스펙과 FDP 표준을 직접 썼습니다. 고객은 이미 자기 시스템에 맞춰 SSD를 설계하고 있습니다. 사양서를 받아 SSD를 잘 만드는 방식은 둘째 계단에 머물고, 셋째 계단은 고객 시스템 안에서 함께 설계해야 닿습니다.</a:t>
             </a:r>
           </a:p>
         </p:txBody>
@@ -15224,7 +15224,7 @@
                 <a:latin typeface="Arial"/>
                 <a:ea typeface="Arial"/>
               </a:rPr>
-              <a:t>랜덤 읽기 IOPS (로그 축)</a:t>
+              <a:t>랜덤 읽기 IOPS</a:t>
             </a:r>
           </a:p>
         </p:txBody>
@@ -15840,7 +15840,7 @@
         </p:nvSpPr>
         <p:spPr>
           <a:xfrm>
-            <a:off x="1659636" y="4572000"/>
+            <a:off x="2606040" y="4572000"/>
             <a:ext cx="640080" cy="256032"/>
           </a:xfrm>
           <a:prstGeom prst="rect">
@@ -15867,7 +15867,7 @@
                 <a:latin typeface="Arial"/>
                 <a:ea typeface="Arial"/>
               </a:rPr>
-              <a:t>2018</a:t>
+              <a:t>2026</a:t>
             </a:r>
           </a:p>
         </p:txBody>
@@ -15880,8 +15880,8 @@
         </p:nvSpPr>
         <p:spPr>
           <a:xfrm>
-            <a:off x="2606040" y="4572000"/>
-            <a:ext cx="640080" cy="256032"/>
+            <a:off x="3438144" y="2176272"/>
+            <a:ext cx="2514600" cy="402336"/>
           </a:xfrm>
           <a:prstGeom prst="rect">
             <a:avLst/>
@@ -15889,7 +15889,501 @@
           <a:noFill/>
         </p:spPr>
         <p:txBody>
-          <a:bodyPr wrap="square" anchor="t" lIns="0" rIns="0" tIns="0" bIns="0">
+          <a:bodyPr wrap="square" anchor="ctr" lIns="0" rIns="0" tIns="0" bIns="0">
+            <a:spAutoFit/>
+          </a:bodyPr>
+          <a:lstStyle/>
+          <a:p>
+            <a:pPr algn="l">
+              <a:lnSpc>
+                <a:spcPct val="110000"/>
+              </a:lnSpc>
+            </a:pPr>
+            <a:r>
+              <a:rPr sz="2000" b="1">
+                <a:solidFill>
+                  <a:srgbClr val="1A1A1A"/>
+                </a:solidFill>
+                <a:latin typeface="Arial"/>
+                <a:ea typeface="Arial"/>
+              </a:rPr>
+              <a:t>전력 효율  </a:t>
+            </a:r>
+            <a:r>
+              <a:rPr sz="2400" b="1">
+                <a:solidFill>
+                  <a:srgbClr val="1A1A1A"/>
+                </a:solidFill>
+                <a:latin typeface="Arial"/>
+                <a:ea typeface="Arial"/>
+              </a:rPr>
+              <a:t>×13</a:t>
+            </a:r>
+          </a:p>
+        </p:txBody>
+      </p:sp>
+      <p:sp>
+        <p:nvSpPr>
+          <p:cNvPr id="25" name="TextBox 24"/>
+          <p:cNvSpPr txBox="1"/>
+          <p:nvPr/>
+        </p:nvSpPr>
+        <p:spPr>
+          <a:xfrm>
+            <a:off x="3438144" y="2560320"/>
+            <a:ext cx="2514600" cy="292608"/>
+          </a:xfrm>
+          <a:prstGeom prst="rect">
+            <a:avLst/>
+          </a:prstGeom>
+          <a:noFill/>
+        </p:spPr>
+        <p:txBody>
+          <a:bodyPr wrap="square" anchor="ctr" lIns="0" rIns="0" tIns="0" bIns="0">
+            <a:spAutoFit/>
+          </a:bodyPr>
+          <a:lstStyle/>
+          <a:p>
+            <a:pPr algn="l">
+              <a:lnSpc>
+                <a:spcPct val="110000"/>
+              </a:lnSpc>
+            </a:pPr>
+            <a:r>
+              <a:rPr sz="1600" b="0">
+                <a:solidFill>
+                  <a:srgbClr val="555555"/>
+                </a:solidFill>
+                <a:latin typeface="Arial"/>
+                <a:ea typeface="Arial"/>
+              </a:rPr>
+              <a:t>MB/s per W</a:t>
+            </a:r>
+          </a:p>
+        </p:txBody>
+      </p:sp>
+      <p:sp>
+        <p:nvSpPr>
+          <p:cNvPr id="26" name="Rectangle 25"/>
+          <p:cNvSpPr/>
+          <p:nvPr/>
+        </p:nvSpPr>
+        <p:spPr>
+          <a:xfrm>
+            <a:off x="3529584" y="4553712"/>
+            <a:ext cx="2331720" cy="10972"/>
+          </a:xfrm>
+          <a:prstGeom prst="rect">
+            <a:avLst/>
+          </a:prstGeom>
+          <a:solidFill>
+            <a:srgbClr val="D9D9D9"/>
+          </a:solidFill>
+          <a:ln>
+            <a:noFill/>
+          </a:ln>
+          <a:effectLst/>
+        </p:spPr>
+        <p:style>
+          <a:lnRef idx="1">
+            <a:schemeClr val="accent1"/>
+          </a:lnRef>
+          <a:fillRef idx="3">
+            <a:schemeClr val="accent1"/>
+          </a:fillRef>
+          <a:effectRef idx="2">
+            <a:schemeClr val="accent1"/>
+          </a:effectRef>
+          <a:fontRef idx="minor">
+            <a:schemeClr val="lt1"/>
+          </a:fontRef>
+        </p:style>
+        <p:txBody>
+          <a:bodyPr rtlCol="0" anchor="ctr"/>
+          <a:lstStyle/>
+          <a:p>
+            <a:pPr algn="ctr"/>
+          </a:p>
+        </p:txBody>
+      </p:sp>
+      <p:cxnSp>
+        <p:nvCxnSpPr>
+          <p:cNvPr id="27" name="Connector 26"/>
+          <p:cNvCxnSpPr/>
+          <p:nvPr/>
+        </p:nvCxnSpPr>
+        <p:spPr>
+          <a:xfrm flipV="1">
+            <a:off x="3985641" y="4028451"/>
+            <a:ext cx="354901" cy="148590"/>
+          </a:xfrm>
+          <a:prstGeom prst="line">
+            <a:avLst/>
+          </a:prstGeom>
+          <a:ln w="28575">
+            <a:solidFill>
+              <a:srgbClr val="555555"/>
+            </a:solidFill>
+          </a:ln>
+        </p:spPr>
+        <p:style>
+          <a:lnRef idx="2">
+            <a:schemeClr val="accent1"/>
+          </a:lnRef>
+          <a:fillRef idx="0">
+            <a:schemeClr val="accent1"/>
+          </a:fillRef>
+          <a:effectRef idx="1">
+            <a:schemeClr val="accent1"/>
+          </a:effectRef>
+          <a:fontRef idx="minor">
+            <a:schemeClr val="tx1"/>
+          </a:fontRef>
+        </p:style>
+      </p:cxnSp>
+      <p:cxnSp>
+        <p:nvCxnSpPr>
+          <p:cNvPr id="28" name="Connector 27"/>
+          <p:cNvCxnSpPr/>
+          <p:nvPr/>
+        </p:nvCxnSpPr>
+        <p:spPr>
+          <a:xfrm flipV="1">
+            <a:off x="4340542" y="3644375"/>
+            <a:ext cx="473202" cy="384076"/>
+          </a:xfrm>
+          <a:prstGeom prst="line">
+            <a:avLst/>
+          </a:prstGeom>
+          <a:ln w="28575">
+            <a:solidFill>
+              <a:srgbClr val="555555"/>
+            </a:solidFill>
+          </a:ln>
+        </p:spPr>
+        <p:style>
+          <a:lnRef idx="2">
+            <a:schemeClr val="accent1"/>
+          </a:lnRef>
+          <a:fillRef idx="0">
+            <a:schemeClr val="accent1"/>
+          </a:fillRef>
+          <a:effectRef idx="1">
+            <a:schemeClr val="accent1"/>
+          </a:effectRef>
+          <a:fontRef idx="minor">
+            <a:schemeClr val="tx1"/>
+          </a:fontRef>
+        </p:style>
+      </p:cxnSp>
+      <p:cxnSp>
+        <p:nvCxnSpPr>
+          <p:cNvPr id="29" name="Connector 28"/>
+          <p:cNvCxnSpPr/>
+          <p:nvPr/>
+        </p:nvCxnSpPr>
+        <p:spPr>
+          <a:xfrm flipV="1">
+            <a:off x="4813744" y="3439968"/>
+            <a:ext cx="354902" cy="204407"/>
+          </a:xfrm>
+          <a:prstGeom prst="line">
+            <a:avLst/>
+          </a:prstGeom>
+          <a:ln w="28575">
+            <a:solidFill>
+              <a:srgbClr val="555555"/>
+            </a:solidFill>
+          </a:ln>
+        </p:spPr>
+        <p:style>
+          <a:lnRef idx="2">
+            <a:schemeClr val="accent1"/>
+          </a:lnRef>
+          <a:fillRef idx="0">
+            <a:schemeClr val="accent1"/>
+          </a:fillRef>
+          <a:effectRef idx="1">
+            <a:schemeClr val="accent1"/>
+          </a:effectRef>
+          <a:fontRef idx="minor">
+            <a:schemeClr val="tx1"/>
+          </a:fontRef>
+        </p:style>
+      </p:cxnSp>
+      <p:cxnSp>
+        <p:nvCxnSpPr>
+          <p:cNvPr id="30" name="Connector 29"/>
+          <p:cNvCxnSpPr/>
+          <p:nvPr/>
+        </p:nvCxnSpPr>
+        <p:spPr>
+          <a:xfrm flipV="1">
+            <a:off x="5168646" y="3213846"/>
+            <a:ext cx="473202" cy="226122"/>
+          </a:xfrm>
+          <a:prstGeom prst="line">
+            <a:avLst/>
+          </a:prstGeom>
+          <a:ln w="28575">
+            <a:solidFill>
+              <a:srgbClr val="555555"/>
+            </a:solidFill>
+          </a:ln>
+        </p:spPr>
+        <p:style>
+          <a:lnRef idx="2">
+            <a:schemeClr val="accent1"/>
+          </a:lnRef>
+          <a:fillRef idx="0">
+            <a:schemeClr val="accent1"/>
+          </a:fillRef>
+          <a:effectRef idx="1">
+            <a:schemeClr val="accent1"/>
+          </a:effectRef>
+          <a:fontRef idx="minor">
+            <a:schemeClr val="tx1"/>
+          </a:fontRef>
+        </p:style>
+      </p:cxnSp>
+      <p:sp>
+        <p:nvSpPr>
+          <p:cNvPr id="31" name="Oval 30"/>
+          <p:cNvSpPr/>
+          <p:nvPr/>
+        </p:nvSpPr>
+        <p:spPr>
+          <a:xfrm>
+            <a:off x="3935349" y="4126749"/>
+            <a:ext cx="100584" cy="100584"/>
+          </a:xfrm>
+          <a:prstGeom prst="ellipse">
+            <a:avLst/>
+          </a:prstGeom>
+          <a:solidFill>
+            <a:srgbClr val="555555"/>
+          </a:solidFill>
+          <a:ln>
+            <a:noFill/>
+          </a:ln>
+          <a:effectLst/>
+        </p:spPr>
+        <p:style>
+          <a:lnRef idx="1">
+            <a:schemeClr val="accent1"/>
+          </a:lnRef>
+          <a:fillRef idx="3">
+            <a:schemeClr val="accent1"/>
+          </a:fillRef>
+          <a:effectRef idx="2">
+            <a:schemeClr val="accent1"/>
+          </a:effectRef>
+          <a:fontRef idx="minor">
+            <a:schemeClr val="lt1"/>
+          </a:fontRef>
+        </p:style>
+        <p:txBody>
+          <a:bodyPr rtlCol="0" anchor="ctr"/>
+          <a:lstStyle/>
+          <a:p>
+            <a:pPr algn="ctr"/>
+          </a:p>
+        </p:txBody>
+      </p:sp>
+      <p:sp>
+        <p:nvSpPr>
+          <p:cNvPr id="32" name="Oval 31"/>
+          <p:cNvSpPr/>
+          <p:nvPr/>
+        </p:nvSpPr>
+        <p:spPr>
+          <a:xfrm>
+            <a:off x="4290250" y="3978159"/>
+            <a:ext cx="100584" cy="100584"/>
+          </a:xfrm>
+          <a:prstGeom prst="ellipse">
+            <a:avLst/>
+          </a:prstGeom>
+          <a:solidFill>
+            <a:srgbClr val="555555"/>
+          </a:solidFill>
+          <a:ln>
+            <a:noFill/>
+          </a:ln>
+          <a:effectLst/>
+        </p:spPr>
+        <p:style>
+          <a:lnRef idx="1">
+            <a:schemeClr val="accent1"/>
+          </a:lnRef>
+          <a:fillRef idx="3">
+            <a:schemeClr val="accent1"/>
+          </a:fillRef>
+          <a:effectRef idx="2">
+            <a:schemeClr val="accent1"/>
+          </a:effectRef>
+          <a:fontRef idx="minor">
+            <a:schemeClr val="lt1"/>
+          </a:fontRef>
+        </p:style>
+        <p:txBody>
+          <a:bodyPr rtlCol="0" anchor="ctr"/>
+          <a:lstStyle/>
+          <a:p>
+            <a:pPr algn="ctr"/>
+          </a:p>
+        </p:txBody>
+      </p:sp>
+      <p:sp>
+        <p:nvSpPr>
+          <p:cNvPr id="33" name="Oval 32"/>
+          <p:cNvSpPr/>
+          <p:nvPr/>
+        </p:nvSpPr>
+        <p:spPr>
+          <a:xfrm>
+            <a:off x="4763452" y="3594083"/>
+            <a:ext cx="100584" cy="100584"/>
+          </a:xfrm>
+          <a:prstGeom prst="ellipse">
+            <a:avLst/>
+          </a:prstGeom>
+          <a:solidFill>
+            <a:srgbClr val="555555"/>
+          </a:solidFill>
+          <a:ln>
+            <a:noFill/>
+          </a:ln>
+          <a:effectLst/>
+        </p:spPr>
+        <p:style>
+          <a:lnRef idx="1">
+            <a:schemeClr val="accent1"/>
+          </a:lnRef>
+          <a:fillRef idx="3">
+            <a:schemeClr val="accent1"/>
+          </a:fillRef>
+          <a:effectRef idx="2">
+            <a:schemeClr val="accent1"/>
+          </a:effectRef>
+          <a:fontRef idx="minor">
+            <a:schemeClr val="lt1"/>
+          </a:fontRef>
+        </p:style>
+        <p:txBody>
+          <a:bodyPr rtlCol="0" anchor="ctr"/>
+          <a:lstStyle/>
+          <a:p>
+            <a:pPr algn="ctr"/>
+          </a:p>
+        </p:txBody>
+      </p:sp>
+      <p:sp>
+        <p:nvSpPr>
+          <p:cNvPr id="34" name="Oval 33"/>
+          <p:cNvSpPr/>
+          <p:nvPr/>
+        </p:nvSpPr>
+        <p:spPr>
+          <a:xfrm>
+            <a:off x="5118354" y="3389676"/>
+            <a:ext cx="100584" cy="100584"/>
+          </a:xfrm>
+          <a:prstGeom prst="ellipse">
+            <a:avLst/>
+          </a:prstGeom>
+          <a:solidFill>
+            <a:srgbClr val="555555"/>
+          </a:solidFill>
+          <a:ln>
+            <a:noFill/>
+          </a:ln>
+          <a:effectLst/>
+        </p:spPr>
+        <p:style>
+          <a:lnRef idx="1">
+            <a:schemeClr val="accent1"/>
+          </a:lnRef>
+          <a:fillRef idx="3">
+            <a:schemeClr val="accent1"/>
+          </a:fillRef>
+          <a:effectRef idx="2">
+            <a:schemeClr val="accent1"/>
+          </a:effectRef>
+          <a:fontRef idx="minor">
+            <a:schemeClr val="lt1"/>
+          </a:fontRef>
+        </p:style>
+        <p:txBody>
+          <a:bodyPr rtlCol="0" anchor="ctr"/>
+          <a:lstStyle/>
+          <a:p>
+            <a:pPr algn="ctr"/>
+          </a:p>
+        </p:txBody>
+      </p:sp>
+      <p:sp>
+        <p:nvSpPr>
+          <p:cNvPr id="35" name="Oval 34"/>
+          <p:cNvSpPr/>
+          <p:nvPr/>
+        </p:nvSpPr>
+        <p:spPr>
+          <a:xfrm>
+            <a:off x="5591556" y="3163554"/>
+            <a:ext cx="100584" cy="100584"/>
+          </a:xfrm>
+          <a:prstGeom prst="ellipse">
+            <a:avLst/>
+          </a:prstGeom>
+          <a:solidFill>
+            <a:srgbClr val="555555"/>
+          </a:solidFill>
+          <a:ln>
+            <a:noFill/>
+          </a:ln>
+          <a:effectLst/>
+        </p:spPr>
+        <p:style>
+          <a:lnRef idx="1">
+            <a:schemeClr val="accent1"/>
+          </a:lnRef>
+          <a:fillRef idx="3">
+            <a:schemeClr val="accent1"/>
+          </a:fillRef>
+          <a:effectRef idx="2">
+            <a:schemeClr val="accent1"/>
+          </a:effectRef>
+          <a:fontRef idx="minor">
+            <a:schemeClr val="lt1"/>
+          </a:fontRef>
+        </p:style>
+        <p:txBody>
+          <a:bodyPr rtlCol="0" anchor="ctr"/>
+          <a:lstStyle/>
+          <a:p>
+            <a:pPr algn="ctr"/>
+          </a:p>
+        </p:txBody>
+      </p:sp>
+      <p:sp>
+        <p:nvSpPr>
+          <p:cNvPr id="36" name="TextBox 35"/>
+          <p:cNvSpPr txBox="1"/>
+          <p:nvPr/>
+        </p:nvSpPr>
+        <p:spPr>
+          <a:xfrm>
+            <a:off x="3619881" y="4231905"/>
+            <a:ext cx="731520" cy="256032"/>
+          </a:xfrm>
+          <a:prstGeom prst="rect">
+            <a:avLst/>
+          </a:prstGeom>
+          <a:noFill/>
+        </p:spPr>
+        <p:txBody>
+          <a:bodyPr wrap="square" anchor="ctr" lIns="0" rIns="0" tIns="0" bIns="0">
             <a:spAutoFit/>
           </a:bodyPr>
           <a:lstStyle/>
@@ -15907,6 +16401,126 @@
                 <a:latin typeface="Arial"/>
                 <a:ea typeface="Arial"/>
               </a:rPr>
+              <a:t>83</a:t>
+            </a:r>
+          </a:p>
+        </p:txBody>
+      </p:sp>
+      <p:sp>
+        <p:nvSpPr>
+          <p:cNvPr id="37" name="TextBox 36"/>
+          <p:cNvSpPr txBox="1"/>
+          <p:nvPr/>
+        </p:nvSpPr>
+        <p:spPr>
+          <a:xfrm>
+            <a:off x="5001768" y="2829798"/>
+            <a:ext cx="822960" cy="292608"/>
+          </a:xfrm>
+          <a:prstGeom prst="rect">
+            <a:avLst/>
+          </a:prstGeom>
+          <a:noFill/>
+        </p:spPr>
+        <p:txBody>
+          <a:bodyPr wrap="square" anchor="ctr" lIns="0" rIns="0" tIns="0" bIns="0">
+            <a:spAutoFit/>
+          </a:bodyPr>
+          <a:lstStyle/>
+          <a:p>
+            <a:pPr algn="r">
+              <a:lnSpc>
+                <a:spcPct val="110000"/>
+              </a:lnSpc>
+            </a:pPr>
+            <a:r>
+              <a:rPr sz="1800" b="1">
+                <a:solidFill>
+                  <a:srgbClr val="1A1A1A"/>
+                </a:solidFill>
+                <a:latin typeface="Arial"/>
+                <a:ea typeface="Arial"/>
+              </a:rPr>
+              <a:t>1,120</a:t>
+            </a:r>
+          </a:p>
+        </p:txBody>
+      </p:sp>
+      <p:sp>
+        <p:nvSpPr>
+          <p:cNvPr id="38" name="TextBox 37"/>
+          <p:cNvSpPr txBox="1"/>
+          <p:nvPr/>
+        </p:nvSpPr>
+        <p:spPr>
+          <a:xfrm>
+            <a:off x="3429000" y="4572000"/>
+            <a:ext cx="640080" cy="256032"/>
+          </a:xfrm>
+          <a:prstGeom prst="rect">
+            <a:avLst/>
+          </a:prstGeom>
+          <a:noFill/>
+        </p:spPr>
+        <p:txBody>
+          <a:bodyPr wrap="square" anchor="t" lIns="0" rIns="0" tIns="0" bIns="0">
+            <a:spAutoFit/>
+          </a:bodyPr>
+          <a:lstStyle/>
+          <a:p>
+            <a:pPr algn="ctr">
+              <a:lnSpc>
+                <a:spcPct val="110000"/>
+              </a:lnSpc>
+            </a:pPr>
+            <a:r>
+              <a:rPr sz="1600" b="0">
+                <a:solidFill>
+                  <a:srgbClr val="555555"/>
+                </a:solidFill>
+                <a:latin typeface="Arial"/>
+                <a:ea typeface="Arial"/>
+              </a:rPr>
+              <a:t>2010</a:t>
+            </a:r>
+          </a:p>
+        </p:txBody>
+      </p:sp>
+      <p:sp>
+        <p:nvSpPr>
+          <p:cNvPr id="39" name="TextBox 38"/>
+          <p:cNvSpPr txBox="1"/>
+          <p:nvPr/>
+        </p:nvSpPr>
+        <p:spPr>
+          <a:xfrm>
+            <a:off x="5321808" y="4572000"/>
+            <a:ext cx="640080" cy="256032"/>
+          </a:xfrm>
+          <a:prstGeom prst="rect">
+            <a:avLst/>
+          </a:prstGeom>
+          <a:noFill/>
+        </p:spPr>
+        <p:txBody>
+          <a:bodyPr wrap="square" anchor="t" lIns="0" rIns="0" tIns="0" bIns="0">
+            <a:spAutoFit/>
+          </a:bodyPr>
+          <a:lstStyle/>
+          <a:p>
+            <a:pPr algn="ctr">
+              <a:lnSpc>
+                <a:spcPct val="110000"/>
+              </a:lnSpc>
+            </a:pPr>
+            <a:r>
+              <a:rPr sz="1600" b="0">
+                <a:solidFill>
+                  <a:srgbClr val="555555"/>
+                </a:solidFill>
+                <a:latin typeface="Arial"/>
+                <a:ea typeface="Arial"/>
+              </a:rPr>
               <a:t>2026</a:t>
             </a:r>
           </a:p>
@@ -15914,13 +16528,13 @@
       </p:sp>
       <p:sp>
         <p:nvSpPr>
-          <p:cNvPr id="25" name="TextBox 24"/>
+          <p:cNvPr id="40" name="TextBox 39"/>
           <p:cNvSpPr txBox="1"/>
           <p:nvPr/>
         </p:nvSpPr>
         <p:spPr>
           <a:xfrm>
-            <a:off x="3438144" y="2176272"/>
+            <a:off x="6153912" y="2176272"/>
             <a:ext cx="2514600" cy="402336"/>
           </a:xfrm>
           <a:prstGeom prst="rect">
@@ -15947,7 +16561,7 @@
                 <a:latin typeface="Arial"/>
                 <a:ea typeface="Arial"/>
               </a:rPr>
-              <a:t>전력 효율  </a:t>
+              <a:t>가성비  </a:t>
             </a:r>
             <a:r>
               <a:rPr sz="2400" b="1">
@@ -15957,20 +16571,20 @@
                 <a:latin typeface="Arial"/>
                 <a:ea typeface="Arial"/>
               </a:rPr>
-              <a:t>×13</a:t>
-            </a:r>
-          </a:p>
-        </p:txBody>
-      </p:sp>
-      <p:sp>
-        <p:nvSpPr>
-          <p:cNvPr id="26" name="TextBox 25"/>
+              <a:t>×24</a:t>
+            </a:r>
+          </a:p>
+        </p:txBody>
+      </p:sp>
+      <p:sp>
+        <p:nvSpPr>
+          <p:cNvPr id="41" name="TextBox 40"/>
           <p:cNvSpPr txBox="1"/>
           <p:nvPr/>
         </p:nvSpPr>
         <p:spPr>
           <a:xfrm>
-            <a:off x="3438144" y="2560320"/>
+            <a:off x="6153912" y="2560320"/>
             <a:ext cx="2514600" cy="292608"/>
           </a:xfrm>
           <a:prstGeom prst="rect">
@@ -15997,20 +16611,20 @@
                 <a:latin typeface="Arial"/>
                 <a:ea typeface="Arial"/>
               </a:rPr>
-              <a:t>MB/s per W (로그 축)</a:t>
-            </a:r>
-          </a:p>
-        </p:txBody>
-      </p:sp>
-      <p:sp>
-        <p:nvSpPr>
-          <p:cNvPr id="27" name="Rectangle 26"/>
+              <a:t>1달러당 NAND GB</a:t>
+            </a:r>
+          </a:p>
+        </p:txBody>
+      </p:sp>
+      <p:sp>
+        <p:nvSpPr>
+          <p:cNvPr id="42" name="Rectangle 41"/>
           <p:cNvSpPr/>
           <p:nvPr/>
         </p:nvSpPr>
         <p:spPr>
           <a:xfrm>
-            <a:off x="3529584" y="4553712"/>
+            <a:off x="6245352" y="4553712"/>
             <a:ext cx="2331720" cy="10972"/>
           </a:xfrm>
           <a:prstGeom prst="rect">
@@ -16048,14 +16662,14 @@
       </p:sp>
       <p:cxnSp>
         <p:nvCxnSpPr>
-          <p:cNvPr id="28" name="Connector 27"/>
+          <p:cNvPr id="43" name="Connector 42"/>
           <p:cNvCxnSpPr/>
           <p:nvPr/>
         </p:nvCxnSpPr>
         <p:spPr>
           <a:xfrm flipV="1">
-            <a:off x="3985641" y="4028451"/>
-            <a:ext cx="354901" cy="148590"/>
+            <a:off x="6464808" y="3894985"/>
+            <a:ext cx="354901" cy="292146"/>
           </a:xfrm>
           <a:prstGeom prst="line">
             <a:avLst/>
@@ -16083,14 +16697,14 @@
       </p:cxnSp>
       <p:cxnSp>
         <p:nvCxnSpPr>
-          <p:cNvPr id="29" name="Connector 28"/>
+          <p:cNvPr id="44" name="Connector 43"/>
           <p:cNvCxnSpPr/>
           <p:nvPr/>
         </p:nvCxnSpPr>
         <p:spPr>
           <a:xfrm flipV="1">
-            <a:off x="4340542" y="3644375"/>
-            <a:ext cx="473202" cy="384076"/>
+            <a:off x="6819709" y="3710930"/>
+            <a:ext cx="354902" cy="184055"/>
           </a:xfrm>
           <a:prstGeom prst="line">
             <a:avLst/>
@@ -16118,14 +16732,14 @@
       </p:cxnSp>
       <p:cxnSp>
         <p:nvCxnSpPr>
-          <p:cNvPr id="30" name="Connector 29"/>
+          <p:cNvPr id="45" name="Connector 44"/>
           <p:cNvCxnSpPr/>
           <p:nvPr/>
         </p:nvCxnSpPr>
         <p:spPr>
           <a:xfrm flipV="1">
-            <a:off x="4813744" y="3439968"/>
-            <a:ext cx="354902" cy="204407"/>
+            <a:off x="7174611" y="3639998"/>
+            <a:ext cx="236601" cy="70932"/>
           </a:xfrm>
           <a:prstGeom prst="line">
             <a:avLst/>
@@ -16153,14 +16767,14 @@
       </p:cxnSp>
       <p:cxnSp>
         <p:nvCxnSpPr>
-          <p:cNvPr id="31" name="Connector 30"/>
+          <p:cNvPr id="46" name="Connector 45"/>
           <p:cNvCxnSpPr/>
           <p:nvPr/>
         </p:nvCxnSpPr>
         <p:spPr>
           <a:xfrm flipV="1">
-            <a:off x="5168646" y="3213846"/>
-            <a:ext cx="473202" cy="226122"/>
+            <a:off x="7411212" y="3454154"/>
+            <a:ext cx="236601" cy="185844"/>
           </a:xfrm>
           <a:prstGeom prst="line">
             <a:avLst/>
@@ -16186,15 +16800,120 @@
           </a:fontRef>
         </p:style>
       </p:cxnSp>
-      <p:sp>
-        <p:nvSpPr>
-          <p:cNvPr id="32" name="Oval 31"/>
+      <p:cxnSp>
+        <p:nvCxnSpPr>
+          <p:cNvPr id="47" name="Connector 46"/>
+          <p:cNvCxnSpPr/>
+          <p:nvPr/>
+        </p:nvCxnSpPr>
+        <p:spPr>
+          <a:xfrm flipV="1">
+            <a:off x="7647813" y="3371434"/>
+            <a:ext cx="236601" cy="82720"/>
+          </a:xfrm>
+          <a:prstGeom prst="line">
+            <a:avLst/>
+          </a:prstGeom>
+          <a:ln w="28575">
+            <a:solidFill>
+              <a:srgbClr val="555555"/>
+            </a:solidFill>
+          </a:ln>
+        </p:spPr>
+        <p:style>
+          <a:lnRef idx="2">
+            <a:schemeClr val="accent1"/>
+          </a:lnRef>
+          <a:fillRef idx="0">
+            <a:schemeClr val="accent1"/>
+          </a:fillRef>
+          <a:effectRef idx="1">
+            <a:schemeClr val="accent1"/>
+          </a:effectRef>
+          <a:fontRef idx="minor">
+            <a:schemeClr val="tx1"/>
+          </a:fontRef>
+        </p:style>
+      </p:cxnSp>
+      <p:cxnSp>
+        <p:nvCxnSpPr>
+          <p:cNvPr id="48" name="Connector 47"/>
+          <p:cNvCxnSpPr/>
+          <p:nvPr/>
+        </p:nvCxnSpPr>
+        <p:spPr>
+          <a:xfrm flipV="1">
+            <a:off x="7884414" y="3192121"/>
+            <a:ext cx="118300" cy="179313"/>
+          </a:xfrm>
+          <a:prstGeom prst="line">
+            <a:avLst/>
+          </a:prstGeom>
+          <a:ln w="28575">
+            <a:solidFill>
+              <a:srgbClr val="555555"/>
+            </a:solidFill>
+          </a:ln>
+        </p:spPr>
+        <p:style>
+          <a:lnRef idx="2">
+            <a:schemeClr val="accent1"/>
+          </a:lnRef>
+          <a:fillRef idx="0">
+            <a:schemeClr val="accent1"/>
+          </a:fillRef>
+          <a:effectRef idx="1">
+            <a:schemeClr val="accent1"/>
+          </a:effectRef>
+          <a:fontRef idx="minor">
+            <a:schemeClr val="tx1"/>
+          </a:fontRef>
+        </p:style>
+      </p:cxnSp>
+      <p:cxnSp>
+        <p:nvCxnSpPr>
+          <p:cNvPr id="49" name="Connector 48"/>
+          <p:cNvCxnSpPr/>
+          <p:nvPr/>
+        </p:nvCxnSpPr>
+        <p:spPr>
+          <a:xfrm>
+            <a:off x="8002714" y="3192121"/>
+            <a:ext cx="118301" cy="113530"/>
+          </a:xfrm>
+          <a:prstGeom prst="line">
+            <a:avLst/>
+          </a:prstGeom>
+          <a:ln w="28575">
+            <a:solidFill>
+              <a:srgbClr val="555555"/>
+            </a:solidFill>
+          </a:ln>
+        </p:spPr>
+        <p:style>
+          <a:lnRef idx="2">
+            <a:schemeClr val="accent1"/>
+          </a:lnRef>
+          <a:fillRef idx="0">
+            <a:schemeClr val="accent1"/>
+          </a:fillRef>
+          <a:effectRef idx="1">
+            <a:schemeClr val="accent1"/>
+          </a:effectRef>
+          <a:fontRef idx="minor">
+            <a:schemeClr val="tx1"/>
+          </a:fontRef>
+        </p:style>
+      </p:cxnSp>
+      <p:sp>
+        <p:nvSpPr>
+          <p:cNvPr id="50" name="Oval 49"/>
           <p:cNvSpPr/>
           <p:nvPr/>
         </p:nvSpPr>
         <p:spPr>
           <a:xfrm>
-            <a:off x="3935349" y="4126749"/>
+            <a:off x="6414516" y="4136839"/>
             <a:ext cx="100584" cy="100584"/>
           </a:xfrm>
           <a:prstGeom prst="ellipse">
@@ -16232,13 +16951,13 @@
       </p:sp>
       <p:sp>
         <p:nvSpPr>
-          <p:cNvPr id="33" name="Oval 32"/>
+          <p:cNvPr id="51" name="Oval 50"/>
           <p:cNvSpPr/>
           <p:nvPr/>
         </p:nvSpPr>
         <p:spPr>
           <a:xfrm>
-            <a:off x="4290250" y="3978159"/>
+            <a:off x="6769417" y="3844693"/>
             <a:ext cx="100584" cy="100584"/>
           </a:xfrm>
           <a:prstGeom prst="ellipse">
@@ -16276,13 +16995,13 @@
       </p:sp>
       <p:sp>
         <p:nvSpPr>
-          <p:cNvPr id="34" name="Oval 33"/>
+          <p:cNvPr id="52" name="Oval 51"/>
           <p:cNvSpPr/>
           <p:nvPr/>
         </p:nvSpPr>
         <p:spPr>
           <a:xfrm>
-            <a:off x="4763452" y="3594083"/>
+            <a:off x="7124319" y="3660638"/>
             <a:ext cx="100584" cy="100584"/>
           </a:xfrm>
           <a:prstGeom prst="ellipse">
@@ -16320,13 +17039,13 @@
       </p:sp>
       <p:sp>
         <p:nvSpPr>
-          <p:cNvPr id="35" name="Oval 34"/>
+          <p:cNvPr id="53" name="Oval 52"/>
           <p:cNvSpPr/>
           <p:nvPr/>
         </p:nvSpPr>
         <p:spPr>
           <a:xfrm>
-            <a:off x="5118354" y="3389676"/>
+            <a:off x="7360920" y="3589706"/>
             <a:ext cx="100584" cy="100584"/>
           </a:xfrm>
           <a:prstGeom prst="ellipse">
@@ -16364,13 +17083,13 @@
       </p:sp>
       <p:sp>
         <p:nvSpPr>
-          <p:cNvPr id="36" name="Oval 35"/>
+          <p:cNvPr id="54" name="Oval 53"/>
           <p:cNvSpPr/>
           <p:nvPr/>
         </p:nvSpPr>
         <p:spPr>
           <a:xfrm>
-            <a:off x="5591556" y="3163554"/>
+            <a:off x="7597521" y="3403862"/>
             <a:ext cx="100584" cy="100584"/>
           </a:xfrm>
           <a:prstGeom prst="ellipse">
@@ -16408,13 +17127,145 @@
       </p:sp>
       <p:sp>
         <p:nvSpPr>
-          <p:cNvPr id="37" name="TextBox 36"/>
+          <p:cNvPr id="55" name="Oval 54"/>
+          <p:cNvSpPr/>
+          <p:nvPr/>
+        </p:nvSpPr>
+        <p:spPr>
+          <a:xfrm>
+            <a:off x="7834122" y="3321142"/>
+            <a:ext cx="100584" cy="100584"/>
+          </a:xfrm>
+          <a:prstGeom prst="ellipse">
+            <a:avLst/>
+          </a:prstGeom>
+          <a:solidFill>
+            <a:srgbClr val="555555"/>
+          </a:solidFill>
+          <a:ln>
+            <a:noFill/>
+          </a:ln>
+          <a:effectLst/>
+        </p:spPr>
+        <p:style>
+          <a:lnRef idx="1">
+            <a:schemeClr val="accent1"/>
+          </a:lnRef>
+          <a:fillRef idx="3">
+            <a:schemeClr val="accent1"/>
+          </a:fillRef>
+          <a:effectRef idx="2">
+            <a:schemeClr val="accent1"/>
+          </a:effectRef>
+          <a:fontRef idx="minor">
+            <a:schemeClr val="lt1"/>
+          </a:fontRef>
+        </p:style>
+        <p:txBody>
+          <a:bodyPr rtlCol="0" anchor="ctr"/>
+          <a:lstStyle/>
+          <a:p>
+            <a:pPr algn="ctr"/>
+          </a:p>
+        </p:txBody>
+      </p:sp>
+      <p:sp>
+        <p:nvSpPr>
+          <p:cNvPr id="56" name="Oval 55"/>
+          <p:cNvSpPr/>
+          <p:nvPr/>
+        </p:nvSpPr>
+        <p:spPr>
+          <a:xfrm>
+            <a:off x="7952422" y="3141829"/>
+            <a:ext cx="100584" cy="100584"/>
+          </a:xfrm>
+          <a:prstGeom prst="ellipse">
+            <a:avLst/>
+          </a:prstGeom>
+          <a:solidFill>
+            <a:srgbClr val="555555"/>
+          </a:solidFill>
+          <a:ln>
+            <a:noFill/>
+          </a:ln>
+          <a:effectLst/>
+        </p:spPr>
+        <p:style>
+          <a:lnRef idx="1">
+            <a:schemeClr val="accent1"/>
+          </a:lnRef>
+          <a:fillRef idx="3">
+            <a:schemeClr val="accent1"/>
+          </a:fillRef>
+          <a:effectRef idx="2">
+            <a:schemeClr val="accent1"/>
+          </a:effectRef>
+          <a:fontRef idx="minor">
+            <a:schemeClr val="lt1"/>
+          </a:fontRef>
+        </p:style>
+        <p:txBody>
+          <a:bodyPr rtlCol="0" anchor="ctr"/>
+          <a:lstStyle/>
+          <a:p>
+            <a:pPr algn="ctr"/>
+          </a:p>
+        </p:txBody>
+      </p:sp>
+      <p:sp>
+        <p:nvSpPr>
+          <p:cNvPr id="57" name="Oval 56"/>
+          <p:cNvSpPr/>
+          <p:nvPr/>
+        </p:nvSpPr>
+        <p:spPr>
+          <a:xfrm>
+            <a:off x="8070723" y="3255359"/>
+            <a:ext cx="100584" cy="100584"/>
+          </a:xfrm>
+          <a:prstGeom prst="ellipse">
+            <a:avLst/>
+          </a:prstGeom>
+          <a:solidFill>
+            <a:srgbClr val="555555"/>
+          </a:solidFill>
+          <a:ln>
+            <a:noFill/>
+          </a:ln>
+          <a:effectLst/>
+        </p:spPr>
+        <p:style>
+          <a:lnRef idx="1">
+            <a:schemeClr val="accent1"/>
+          </a:lnRef>
+          <a:fillRef idx="3">
+            <a:schemeClr val="accent1"/>
+          </a:fillRef>
+          <a:effectRef idx="2">
+            <a:schemeClr val="accent1"/>
+          </a:effectRef>
+          <a:fontRef idx="minor">
+            <a:schemeClr val="lt1"/>
+          </a:fontRef>
+        </p:style>
+        <p:txBody>
+          <a:bodyPr rtlCol="0" anchor="ctr"/>
+          <a:lstStyle/>
+          <a:p>
+            <a:pPr algn="ctr"/>
+          </a:p>
+        </p:txBody>
+      </p:sp>
+      <p:sp>
+        <p:nvSpPr>
+          <p:cNvPr id="58" name="TextBox 57"/>
           <p:cNvSpPr txBox="1"/>
           <p:nvPr/>
         </p:nvSpPr>
         <p:spPr>
           <a:xfrm>
-            <a:off x="3619881" y="4231905"/>
+            <a:off x="6099048" y="4241995"/>
             <a:ext cx="731520" cy="256032"/>
           </a:xfrm>
           <a:prstGeom prst="rect">
@@ -16441,21 +17292,21 @@
                 <a:latin typeface="Arial"/>
                 <a:ea typeface="Arial"/>
               </a:rPr>
-              <a:t>83</a:t>
-            </a:r>
-          </a:p>
-        </p:txBody>
-      </p:sp>
-      <p:sp>
-        <p:nvSpPr>
-          <p:cNvPr id="38" name="TextBox 37"/>
+              <a:t>0.56</a:t>
+            </a:r>
+          </a:p>
+        </p:txBody>
+      </p:sp>
+      <p:sp>
+        <p:nvSpPr>
+          <p:cNvPr id="59" name="TextBox 58"/>
           <p:cNvSpPr txBox="1"/>
           <p:nvPr/>
         </p:nvSpPr>
         <p:spPr>
           <a:xfrm>
-            <a:off x="5001768" y="2829798"/>
-            <a:ext cx="822960" cy="292608"/>
+            <a:off x="8212454" y="3159347"/>
+            <a:ext cx="457200" cy="292608"/>
           </a:xfrm>
           <a:prstGeom prst="rect">
             <a:avLst/>
@@ -16468,7 +17319,7 @@
           </a:bodyPr>
           <a:lstStyle/>
           <a:p>
-            <a:pPr algn="r">
+            <a:pPr algn="l">
               <a:lnSpc>
                 <a:spcPct val="110000"/>
               </a:lnSpc>
@@ -16481,20 +17332,20 @@
                 <a:latin typeface="Arial"/>
                 <a:ea typeface="Arial"/>
               </a:rPr>
-              <a:t>1,120</a:t>
-            </a:r>
-          </a:p>
-        </p:txBody>
-      </p:sp>
-      <p:sp>
-        <p:nvSpPr>
-          <p:cNvPr id="39" name="TextBox 38"/>
+              <a:t>13</a:t>
+            </a:r>
+          </a:p>
+        </p:txBody>
+      </p:sp>
+      <p:sp>
+        <p:nvSpPr>
+          <p:cNvPr id="60" name="TextBox 59"/>
           <p:cNvSpPr txBox="1"/>
           <p:nvPr/>
         </p:nvSpPr>
         <p:spPr>
           <a:xfrm>
-            <a:off x="3429000" y="4572000"/>
+            <a:off x="6144768" y="4572000"/>
             <a:ext cx="640080" cy="256032"/>
           </a:xfrm>
           <a:prstGeom prst="rect">
@@ -16528,13 +17379,13 @@
       </p:sp>
       <p:sp>
         <p:nvSpPr>
-          <p:cNvPr id="40" name="TextBox 39"/>
+          <p:cNvPr id="61" name="TextBox 60"/>
           <p:cNvSpPr txBox="1"/>
           <p:nvPr/>
         </p:nvSpPr>
         <p:spPr>
           <a:xfrm>
-            <a:off x="4375404" y="4572000"/>
+            <a:off x="8037576" y="4572000"/>
             <a:ext cx="640080" cy="256032"/>
           </a:xfrm>
           <a:prstGeom prst="rect">
@@ -16561,60 +17412,20 @@
                 <a:latin typeface="Arial"/>
                 <a:ea typeface="Arial"/>
               </a:rPr>
-              <a:t>2018</a:t>
-            </a:r>
-          </a:p>
-        </p:txBody>
-      </p:sp>
-      <p:sp>
-        <p:nvSpPr>
-          <p:cNvPr id="41" name="TextBox 40"/>
+              <a:t>2026</a:t>
+            </a:r>
+          </a:p>
+        </p:txBody>
+      </p:sp>
+      <p:sp>
+        <p:nvSpPr>
+          <p:cNvPr id="62" name="TextBox 61"/>
           <p:cNvSpPr txBox="1"/>
           <p:nvPr/>
         </p:nvSpPr>
         <p:spPr>
           <a:xfrm>
-            <a:off x="5321808" y="4572000"/>
-            <a:ext cx="640080" cy="256032"/>
-          </a:xfrm>
-          <a:prstGeom prst="rect">
-            <a:avLst/>
-          </a:prstGeom>
-          <a:noFill/>
-        </p:spPr>
-        <p:txBody>
-          <a:bodyPr wrap="square" anchor="t" lIns="0" rIns="0" tIns="0" bIns="0">
-            <a:spAutoFit/>
-          </a:bodyPr>
-          <a:lstStyle/>
-          <a:p>
-            <a:pPr algn="ctr">
-              <a:lnSpc>
-                <a:spcPct val="110000"/>
-              </a:lnSpc>
-            </a:pPr>
-            <a:r>
-              <a:rPr sz="1600" b="0">
-                <a:solidFill>
-                  <a:srgbClr val="555555"/>
-                </a:solidFill>
-                <a:latin typeface="Arial"/>
-                <a:ea typeface="Arial"/>
-              </a:rPr>
-              <a:t>2026</a:t>
-            </a:r>
-          </a:p>
-        </p:txBody>
-      </p:sp>
-      <p:sp>
-        <p:nvSpPr>
-          <p:cNvPr id="42" name="TextBox 41"/>
-          <p:cNvSpPr txBox="1"/>
-          <p:nvPr/>
-        </p:nvSpPr>
-        <p:spPr>
-          <a:xfrm>
-            <a:off x="6153912" y="2176272"/>
+            <a:off x="8869680" y="2176272"/>
             <a:ext cx="2514600" cy="402336"/>
           </a:xfrm>
           <a:prstGeom prst="rect">
@@ -16636,35 +17447,35 @@
             <a:r>
               <a:rPr sz="2000" b="1">
                 <a:solidFill>
-                  <a:srgbClr val="1A1A1A"/>
-                </a:solidFill>
-                <a:latin typeface="Arial"/>
-                <a:ea typeface="Arial"/>
-              </a:rPr>
-              <a:t>가성비  </a:t>
+                  <a:srgbClr val="1428A0"/>
+                </a:solidFill>
+                <a:latin typeface="Arial"/>
+                <a:ea typeface="Arial"/>
+              </a:rPr>
+              <a:t>DWPD  </a:t>
             </a:r>
             <a:r>
               <a:rPr sz="2400" b="1">
                 <a:solidFill>
-                  <a:srgbClr val="1A1A1A"/>
-                </a:solidFill>
-                <a:latin typeface="Arial"/>
-                <a:ea typeface="Arial"/>
-              </a:rPr>
-              <a:t>×24</a:t>
-            </a:r>
-          </a:p>
-        </p:txBody>
-      </p:sp>
-      <p:sp>
-        <p:nvSpPr>
-          <p:cNvPr id="43" name="TextBox 42"/>
+                  <a:srgbClr val="1428A0"/>
+                </a:solidFill>
+                <a:latin typeface="Arial"/>
+                <a:ea typeface="Arial"/>
+              </a:rPr>
+              <a:t>10 → 1</a:t>
+            </a:r>
+          </a:p>
+        </p:txBody>
+      </p:sp>
+      <p:sp>
+        <p:nvSpPr>
+          <p:cNvPr id="63" name="TextBox 62"/>
           <p:cNvSpPr txBox="1"/>
           <p:nvPr/>
         </p:nvSpPr>
         <p:spPr>
           <a:xfrm>
-            <a:off x="6153912" y="2560320"/>
+            <a:off x="8869680" y="2560320"/>
             <a:ext cx="2514600" cy="292608"/>
           </a:xfrm>
           <a:prstGeom prst="rect">
@@ -16691,20 +17502,20 @@
                 <a:latin typeface="Arial"/>
                 <a:ea typeface="Arial"/>
               </a:rPr>
-              <a:t>1달러당 GB (로그 축)</a:t>
-            </a:r>
-          </a:p>
-        </p:txBody>
-      </p:sp>
-      <p:sp>
-        <p:nvSpPr>
-          <p:cNvPr id="44" name="Rectangle 43"/>
+              <a:t>정격, 하루 쓰기 횟수</a:t>
+            </a:r>
+          </a:p>
+        </p:txBody>
+      </p:sp>
+      <p:sp>
+        <p:nvSpPr>
+          <p:cNvPr id="64" name="Rectangle 63"/>
           <p:cNvSpPr/>
           <p:nvPr/>
         </p:nvSpPr>
         <p:spPr>
           <a:xfrm>
-            <a:off x="6245352" y="4553712"/>
+            <a:off x="8961119" y="4553712"/>
             <a:ext cx="2331720" cy="10972"/>
           </a:xfrm>
           <a:prstGeom prst="rect">
@@ -16740,940 +17551,9 @@
           </a:p>
         </p:txBody>
       </p:sp>
-      <p:cxnSp>
-        <p:nvCxnSpPr>
-          <p:cNvPr id="45" name="Connector 44"/>
-          <p:cNvCxnSpPr/>
-          <p:nvPr/>
-        </p:nvCxnSpPr>
-        <p:spPr>
-          <a:xfrm flipV="1">
-            <a:off x="6464808" y="3894985"/>
-            <a:ext cx="354901" cy="292146"/>
-          </a:xfrm>
-          <a:prstGeom prst="line">
-            <a:avLst/>
-          </a:prstGeom>
-          <a:ln w="28575">
-            <a:solidFill>
-              <a:srgbClr val="555555"/>
-            </a:solidFill>
-          </a:ln>
-        </p:spPr>
-        <p:style>
-          <a:lnRef idx="2">
-            <a:schemeClr val="accent1"/>
-          </a:lnRef>
-          <a:fillRef idx="0">
-            <a:schemeClr val="accent1"/>
-          </a:fillRef>
-          <a:effectRef idx="1">
-            <a:schemeClr val="accent1"/>
-          </a:effectRef>
-          <a:fontRef idx="minor">
-            <a:schemeClr val="tx1"/>
-          </a:fontRef>
-        </p:style>
-      </p:cxnSp>
-      <p:cxnSp>
-        <p:nvCxnSpPr>
-          <p:cNvPr id="46" name="Connector 45"/>
-          <p:cNvCxnSpPr/>
-          <p:nvPr/>
-        </p:nvCxnSpPr>
-        <p:spPr>
-          <a:xfrm flipV="1">
-            <a:off x="6819709" y="3710930"/>
-            <a:ext cx="354902" cy="184055"/>
-          </a:xfrm>
-          <a:prstGeom prst="line">
-            <a:avLst/>
-          </a:prstGeom>
-          <a:ln w="28575">
-            <a:solidFill>
-              <a:srgbClr val="555555"/>
-            </a:solidFill>
-          </a:ln>
-        </p:spPr>
-        <p:style>
-          <a:lnRef idx="2">
-            <a:schemeClr val="accent1"/>
-          </a:lnRef>
-          <a:fillRef idx="0">
-            <a:schemeClr val="accent1"/>
-          </a:fillRef>
-          <a:effectRef idx="1">
-            <a:schemeClr val="accent1"/>
-          </a:effectRef>
-          <a:fontRef idx="minor">
-            <a:schemeClr val="tx1"/>
-          </a:fontRef>
-        </p:style>
-      </p:cxnSp>
-      <p:cxnSp>
-        <p:nvCxnSpPr>
-          <p:cNvPr id="47" name="Connector 46"/>
-          <p:cNvCxnSpPr/>
-          <p:nvPr/>
-        </p:nvCxnSpPr>
-        <p:spPr>
-          <a:xfrm flipV="1">
-            <a:off x="7174611" y="3639998"/>
-            <a:ext cx="236601" cy="70932"/>
-          </a:xfrm>
-          <a:prstGeom prst="line">
-            <a:avLst/>
-          </a:prstGeom>
-          <a:ln w="28575">
-            <a:solidFill>
-              <a:srgbClr val="555555"/>
-            </a:solidFill>
-          </a:ln>
-        </p:spPr>
-        <p:style>
-          <a:lnRef idx="2">
-            <a:schemeClr val="accent1"/>
-          </a:lnRef>
-          <a:fillRef idx="0">
-            <a:schemeClr val="accent1"/>
-          </a:fillRef>
-          <a:effectRef idx="1">
-            <a:schemeClr val="accent1"/>
-          </a:effectRef>
-          <a:fontRef idx="minor">
-            <a:schemeClr val="tx1"/>
-          </a:fontRef>
-        </p:style>
-      </p:cxnSp>
-      <p:cxnSp>
-        <p:nvCxnSpPr>
-          <p:cNvPr id="48" name="Connector 47"/>
-          <p:cNvCxnSpPr/>
-          <p:nvPr/>
-        </p:nvCxnSpPr>
-        <p:spPr>
-          <a:xfrm flipV="1">
-            <a:off x="7411212" y="3454154"/>
-            <a:ext cx="236601" cy="185844"/>
-          </a:xfrm>
-          <a:prstGeom prst="line">
-            <a:avLst/>
-          </a:prstGeom>
-          <a:ln w="28575">
-            <a:solidFill>
-              <a:srgbClr val="555555"/>
-            </a:solidFill>
-          </a:ln>
-        </p:spPr>
-        <p:style>
-          <a:lnRef idx="2">
-            <a:schemeClr val="accent1"/>
-          </a:lnRef>
-          <a:fillRef idx="0">
-            <a:schemeClr val="accent1"/>
-          </a:fillRef>
-          <a:effectRef idx="1">
-            <a:schemeClr val="accent1"/>
-          </a:effectRef>
-          <a:fontRef idx="minor">
-            <a:schemeClr val="tx1"/>
-          </a:fontRef>
-        </p:style>
-      </p:cxnSp>
-      <p:cxnSp>
-        <p:nvCxnSpPr>
-          <p:cNvPr id="49" name="Connector 48"/>
-          <p:cNvCxnSpPr/>
-          <p:nvPr/>
-        </p:nvCxnSpPr>
-        <p:spPr>
-          <a:xfrm flipV="1">
-            <a:off x="7647813" y="3371434"/>
-            <a:ext cx="236601" cy="82720"/>
-          </a:xfrm>
-          <a:prstGeom prst="line">
-            <a:avLst/>
-          </a:prstGeom>
-          <a:ln w="28575">
-            <a:solidFill>
-              <a:srgbClr val="555555"/>
-            </a:solidFill>
-          </a:ln>
-        </p:spPr>
-        <p:style>
-          <a:lnRef idx="2">
-            <a:schemeClr val="accent1"/>
-          </a:lnRef>
-          <a:fillRef idx="0">
-            <a:schemeClr val="accent1"/>
-          </a:fillRef>
-          <a:effectRef idx="1">
-            <a:schemeClr val="accent1"/>
-          </a:effectRef>
-          <a:fontRef idx="minor">
-            <a:schemeClr val="tx1"/>
-          </a:fontRef>
-        </p:style>
-      </p:cxnSp>
-      <p:cxnSp>
-        <p:nvCxnSpPr>
-          <p:cNvPr id="50" name="Connector 49"/>
-          <p:cNvCxnSpPr/>
-          <p:nvPr/>
-        </p:nvCxnSpPr>
-        <p:spPr>
-          <a:xfrm flipV="1">
-            <a:off x="7884414" y="3192121"/>
-            <a:ext cx="118300" cy="179313"/>
-          </a:xfrm>
-          <a:prstGeom prst="line">
-            <a:avLst/>
-          </a:prstGeom>
-          <a:ln w="28575">
-            <a:solidFill>
-              <a:srgbClr val="555555"/>
-            </a:solidFill>
-          </a:ln>
-        </p:spPr>
-        <p:style>
-          <a:lnRef idx="2">
-            <a:schemeClr val="accent1"/>
-          </a:lnRef>
-          <a:fillRef idx="0">
-            <a:schemeClr val="accent1"/>
-          </a:fillRef>
-          <a:effectRef idx="1">
-            <a:schemeClr val="accent1"/>
-          </a:effectRef>
-          <a:fontRef idx="minor">
-            <a:schemeClr val="tx1"/>
-          </a:fontRef>
-        </p:style>
-      </p:cxnSp>
-      <p:cxnSp>
-        <p:nvCxnSpPr>
-          <p:cNvPr id="51" name="Connector 50"/>
-          <p:cNvCxnSpPr/>
-          <p:nvPr/>
-        </p:nvCxnSpPr>
-        <p:spPr>
-          <a:xfrm>
-            <a:off x="8002714" y="3192121"/>
-            <a:ext cx="118301" cy="113530"/>
-          </a:xfrm>
-          <a:prstGeom prst="line">
-            <a:avLst/>
-          </a:prstGeom>
-          <a:ln w="28575">
-            <a:solidFill>
-              <a:srgbClr val="555555"/>
-            </a:solidFill>
-          </a:ln>
-        </p:spPr>
-        <p:style>
-          <a:lnRef idx="2">
-            <a:schemeClr val="accent1"/>
-          </a:lnRef>
-          <a:fillRef idx="0">
-            <a:schemeClr val="accent1"/>
-          </a:fillRef>
-          <a:effectRef idx="1">
-            <a:schemeClr val="accent1"/>
-          </a:effectRef>
-          <a:fontRef idx="minor">
-            <a:schemeClr val="tx1"/>
-          </a:fontRef>
-        </p:style>
-      </p:cxnSp>
-      <p:sp>
-        <p:nvSpPr>
-          <p:cNvPr id="52" name="Oval 51"/>
-          <p:cNvSpPr/>
-          <p:nvPr/>
-        </p:nvSpPr>
-        <p:spPr>
-          <a:xfrm>
-            <a:off x="6414516" y="4136839"/>
-            <a:ext cx="100584" cy="100584"/>
-          </a:xfrm>
-          <a:prstGeom prst="ellipse">
-            <a:avLst/>
-          </a:prstGeom>
-          <a:solidFill>
-            <a:srgbClr val="555555"/>
-          </a:solidFill>
-          <a:ln>
-            <a:noFill/>
-          </a:ln>
-          <a:effectLst/>
-        </p:spPr>
-        <p:style>
-          <a:lnRef idx="1">
-            <a:schemeClr val="accent1"/>
-          </a:lnRef>
-          <a:fillRef idx="3">
-            <a:schemeClr val="accent1"/>
-          </a:fillRef>
-          <a:effectRef idx="2">
-            <a:schemeClr val="accent1"/>
-          </a:effectRef>
-          <a:fontRef idx="minor">
-            <a:schemeClr val="lt1"/>
-          </a:fontRef>
-        </p:style>
-        <p:txBody>
-          <a:bodyPr rtlCol="0" anchor="ctr"/>
-          <a:lstStyle/>
-          <a:p>
-            <a:pPr algn="ctr"/>
-          </a:p>
-        </p:txBody>
-      </p:sp>
-      <p:sp>
-        <p:nvSpPr>
-          <p:cNvPr id="53" name="Oval 52"/>
-          <p:cNvSpPr/>
-          <p:nvPr/>
-        </p:nvSpPr>
-        <p:spPr>
-          <a:xfrm>
-            <a:off x="6769417" y="3844693"/>
-            <a:ext cx="100584" cy="100584"/>
-          </a:xfrm>
-          <a:prstGeom prst="ellipse">
-            <a:avLst/>
-          </a:prstGeom>
-          <a:solidFill>
-            <a:srgbClr val="555555"/>
-          </a:solidFill>
-          <a:ln>
-            <a:noFill/>
-          </a:ln>
-          <a:effectLst/>
-        </p:spPr>
-        <p:style>
-          <a:lnRef idx="1">
-            <a:schemeClr val="accent1"/>
-          </a:lnRef>
-          <a:fillRef idx="3">
-            <a:schemeClr val="accent1"/>
-          </a:fillRef>
-          <a:effectRef idx="2">
-            <a:schemeClr val="accent1"/>
-          </a:effectRef>
-          <a:fontRef idx="minor">
-            <a:schemeClr val="lt1"/>
-          </a:fontRef>
-        </p:style>
-        <p:txBody>
-          <a:bodyPr rtlCol="0" anchor="ctr"/>
-          <a:lstStyle/>
-          <a:p>
-            <a:pPr algn="ctr"/>
-          </a:p>
-        </p:txBody>
-      </p:sp>
-      <p:sp>
-        <p:nvSpPr>
-          <p:cNvPr id="54" name="Oval 53"/>
-          <p:cNvSpPr/>
-          <p:nvPr/>
-        </p:nvSpPr>
-        <p:spPr>
-          <a:xfrm>
-            <a:off x="7124319" y="3660638"/>
-            <a:ext cx="100584" cy="100584"/>
-          </a:xfrm>
-          <a:prstGeom prst="ellipse">
-            <a:avLst/>
-          </a:prstGeom>
-          <a:solidFill>
-            <a:srgbClr val="555555"/>
-          </a:solidFill>
-          <a:ln>
-            <a:noFill/>
-          </a:ln>
-          <a:effectLst/>
-        </p:spPr>
-        <p:style>
-          <a:lnRef idx="1">
-            <a:schemeClr val="accent1"/>
-          </a:lnRef>
-          <a:fillRef idx="3">
-            <a:schemeClr val="accent1"/>
-          </a:fillRef>
-          <a:effectRef idx="2">
-            <a:schemeClr val="accent1"/>
-          </a:effectRef>
-          <a:fontRef idx="minor">
-            <a:schemeClr val="lt1"/>
-          </a:fontRef>
-        </p:style>
-        <p:txBody>
-          <a:bodyPr rtlCol="0" anchor="ctr"/>
-          <a:lstStyle/>
-          <a:p>
-            <a:pPr algn="ctr"/>
-          </a:p>
-        </p:txBody>
-      </p:sp>
-      <p:sp>
-        <p:nvSpPr>
-          <p:cNvPr id="55" name="Oval 54"/>
-          <p:cNvSpPr/>
-          <p:nvPr/>
-        </p:nvSpPr>
-        <p:spPr>
-          <a:xfrm>
-            <a:off x="7360920" y="3589706"/>
-            <a:ext cx="100584" cy="100584"/>
-          </a:xfrm>
-          <a:prstGeom prst="ellipse">
-            <a:avLst/>
-          </a:prstGeom>
-          <a:solidFill>
-            <a:srgbClr val="555555"/>
-          </a:solidFill>
-          <a:ln>
-            <a:noFill/>
-          </a:ln>
-          <a:effectLst/>
-        </p:spPr>
-        <p:style>
-          <a:lnRef idx="1">
-            <a:schemeClr val="accent1"/>
-          </a:lnRef>
-          <a:fillRef idx="3">
-            <a:schemeClr val="accent1"/>
-          </a:fillRef>
-          <a:effectRef idx="2">
-            <a:schemeClr val="accent1"/>
-          </a:effectRef>
-          <a:fontRef idx="minor">
-            <a:schemeClr val="lt1"/>
-          </a:fontRef>
-        </p:style>
-        <p:txBody>
-          <a:bodyPr rtlCol="0" anchor="ctr"/>
-          <a:lstStyle/>
-          <a:p>
-            <a:pPr algn="ctr"/>
-          </a:p>
-        </p:txBody>
-      </p:sp>
-      <p:sp>
-        <p:nvSpPr>
-          <p:cNvPr id="56" name="Oval 55"/>
-          <p:cNvSpPr/>
-          <p:nvPr/>
-        </p:nvSpPr>
-        <p:spPr>
-          <a:xfrm>
-            <a:off x="7597521" y="3403862"/>
-            <a:ext cx="100584" cy="100584"/>
-          </a:xfrm>
-          <a:prstGeom prst="ellipse">
-            <a:avLst/>
-          </a:prstGeom>
-          <a:solidFill>
-            <a:srgbClr val="555555"/>
-          </a:solidFill>
-          <a:ln>
-            <a:noFill/>
-          </a:ln>
-          <a:effectLst/>
-        </p:spPr>
-        <p:style>
-          <a:lnRef idx="1">
-            <a:schemeClr val="accent1"/>
-          </a:lnRef>
-          <a:fillRef idx="3">
-            <a:schemeClr val="accent1"/>
-          </a:fillRef>
-          <a:effectRef idx="2">
-            <a:schemeClr val="accent1"/>
-          </a:effectRef>
-          <a:fontRef idx="minor">
-            <a:schemeClr val="lt1"/>
-          </a:fontRef>
-        </p:style>
-        <p:txBody>
-          <a:bodyPr rtlCol="0" anchor="ctr"/>
-          <a:lstStyle/>
-          <a:p>
-            <a:pPr algn="ctr"/>
-          </a:p>
-        </p:txBody>
-      </p:sp>
-      <p:sp>
-        <p:nvSpPr>
-          <p:cNvPr id="57" name="Oval 56"/>
-          <p:cNvSpPr/>
-          <p:nvPr/>
-        </p:nvSpPr>
-        <p:spPr>
-          <a:xfrm>
-            <a:off x="7834122" y="3321142"/>
-            <a:ext cx="100584" cy="100584"/>
-          </a:xfrm>
-          <a:prstGeom prst="ellipse">
-            <a:avLst/>
-          </a:prstGeom>
-          <a:solidFill>
-            <a:srgbClr val="555555"/>
-          </a:solidFill>
-          <a:ln>
-            <a:noFill/>
-          </a:ln>
-          <a:effectLst/>
-        </p:spPr>
-        <p:style>
-          <a:lnRef idx="1">
-            <a:schemeClr val="accent1"/>
-          </a:lnRef>
-          <a:fillRef idx="3">
-            <a:schemeClr val="accent1"/>
-          </a:fillRef>
-          <a:effectRef idx="2">
-            <a:schemeClr val="accent1"/>
-          </a:effectRef>
-          <a:fontRef idx="minor">
-            <a:schemeClr val="lt1"/>
-          </a:fontRef>
-        </p:style>
-        <p:txBody>
-          <a:bodyPr rtlCol="0" anchor="ctr"/>
-          <a:lstStyle/>
-          <a:p>
-            <a:pPr algn="ctr"/>
-          </a:p>
-        </p:txBody>
-      </p:sp>
-      <p:sp>
-        <p:nvSpPr>
-          <p:cNvPr id="58" name="Oval 57"/>
-          <p:cNvSpPr/>
-          <p:nvPr/>
-        </p:nvSpPr>
-        <p:spPr>
-          <a:xfrm>
-            <a:off x="7952422" y="3141829"/>
-            <a:ext cx="100584" cy="100584"/>
-          </a:xfrm>
-          <a:prstGeom prst="ellipse">
-            <a:avLst/>
-          </a:prstGeom>
-          <a:solidFill>
-            <a:srgbClr val="555555"/>
-          </a:solidFill>
-          <a:ln>
-            <a:noFill/>
-          </a:ln>
-          <a:effectLst/>
-        </p:spPr>
-        <p:style>
-          <a:lnRef idx="1">
-            <a:schemeClr val="accent1"/>
-          </a:lnRef>
-          <a:fillRef idx="3">
-            <a:schemeClr val="accent1"/>
-          </a:fillRef>
-          <a:effectRef idx="2">
-            <a:schemeClr val="accent1"/>
-          </a:effectRef>
-          <a:fontRef idx="minor">
-            <a:schemeClr val="lt1"/>
-          </a:fontRef>
-        </p:style>
-        <p:txBody>
-          <a:bodyPr rtlCol="0" anchor="ctr"/>
-          <a:lstStyle/>
-          <a:p>
-            <a:pPr algn="ctr"/>
-          </a:p>
-        </p:txBody>
-      </p:sp>
-      <p:sp>
-        <p:nvSpPr>
-          <p:cNvPr id="59" name="Oval 58"/>
-          <p:cNvSpPr/>
-          <p:nvPr/>
-        </p:nvSpPr>
-        <p:spPr>
-          <a:xfrm>
-            <a:off x="8070723" y="3255359"/>
-            <a:ext cx="100584" cy="100584"/>
-          </a:xfrm>
-          <a:prstGeom prst="ellipse">
-            <a:avLst/>
-          </a:prstGeom>
-          <a:solidFill>
-            <a:srgbClr val="555555"/>
-          </a:solidFill>
-          <a:ln>
-            <a:noFill/>
-          </a:ln>
-          <a:effectLst/>
-        </p:spPr>
-        <p:style>
-          <a:lnRef idx="1">
-            <a:schemeClr val="accent1"/>
-          </a:lnRef>
-          <a:fillRef idx="3">
-            <a:schemeClr val="accent1"/>
-          </a:fillRef>
-          <a:effectRef idx="2">
-            <a:schemeClr val="accent1"/>
-          </a:effectRef>
-          <a:fontRef idx="minor">
-            <a:schemeClr val="lt1"/>
-          </a:fontRef>
-        </p:style>
-        <p:txBody>
-          <a:bodyPr rtlCol="0" anchor="ctr"/>
-          <a:lstStyle/>
-          <a:p>
-            <a:pPr algn="ctr"/>
-          </a:p>
-        </p:txBody>
-      </p:sp>
-      <p:sp>
-        <p:nvSpPr>
-          <p:cNvPr id="60" name="TextBox 59"/>
-          <p:cNvSpPr txBox="1"/>
-          <p:nvPr/>
-        </p:nvSpPr>
-        <p:spPr>
-          <a:xfrm>
-            <a:off x="6099048" y="4241995"/>
-            <a:ext cx="731520" cy="256032"/>
-          </a:xfrm>
-          <a:prstGeom prst="rect">
-            <a:avLst/>
-          </a:prstGeom>
-          <a:noFill/>
-        </p:spPr>
-        <p:txBody>
-          <a:bodyPr wrap="square" anchor="ctr" lIns="0" rIns="0" tIns="0" bIns="0">
-            <a:spAutoFit/>
-          </a:bodyPr>
-          <a:lstStyle/>
-          <a:p>
-            <a:pPr algn="ctr">
-              <a:lnSpc>
-                <a:spcPct val="110000"/>
-              </a:lnSpc>
-            </a:pPr>
-            <a:r>
-              <a:rPr sz="1600" b="0">
-                <a:solidFill>
-                  <a:srgbClr val="555555"/>
-                </a:solidFill>
-                <a:latin typeface="Arial"/>
-                <a:ea typeface="Arial"/>
-              </a:rPr>
-              <a:t>0.56</a:t>
-            </a:r>
-          </a:p>
-        </p:txBody>
-      </p:sp>
-      <p:sp>
-        <p:nvSpPr>
-          <p:cNvPr id="61" name="TextBox 60"/>
-          <p:cNvSpPr txBox="1"/>
-          <p:nvPr/>
-        </p:nvSpPr>
-        <p:spPr>
-          <a:xfrm>
-            <a:off x="8212454" y="3159347"/>
-            <a:ext cx="457200" cy="292608"/>
-          </a:xfrm>
-          <a:prstGeom prst="rect">
-            <a:avLst/>
-          </a:prstGeom>
-          <a:noFill/>
-        </p:spPr>
-        <p:txBody>
-          <a:bodyPr wrap="square" anchor="ctr" lIns="0" rIns="0" tIns="0" bIns="0">
-            <a:spAutoFit/>
-          </a:bodyPr>
-          <a:lstStyle/>
-          <a:p>
-            <a:pPr algn="l">
-              <a:lnSpc>
-                <a:spcPct val="110000"/>
-              </a:lnSpc>
-            </a:pPr>
-            <a:r>
-              <a:rPr sz="1800" b="1">
-                <a:solidFill>
-                  <a:srgbClr val="1A1A1A"/>
-                </a:solidFill>
-                <a:latin typeface="Arial"/>
-                <a:ea typeface="Arial"/>
-              </a:rPr>
-              <a:t>13</a:t>
-            </a:r>
-          </a:p>
-        </p:txBody>
-      </p:sp>
-      <p:sp>
-        <p:nvSpPr>
-          <p:cNvPr id="62" name="TextBox 61"/>
-          <p:cNvSpPr txBox="1"/>
-          <p:nvPr/>
-        </p:nvSpPr>
-        <p:spPr>
-          <a:xfrm>
-            <a:off x="6144768" y="4572000"/>
-            <a:ext cx="640080" cy="256032"/>
-          </a:xfrm>
-          <a:prstGeom prst="rect">
-            <a:avLst/>
-          </a:prstGeom>
-          <a:noFill/>
-        </p:spPr>
-        <p:txBody>
-          <a:bodyPr wrap="square" anchor="t" lIns="0" rIns="0" tIns="0" bIns="0">
-            <a:spAutoFit/>
-          </a:bodyPr>
-          <a:lstStyle/>
-          <a:p>
-            <a:pPr algn="ctr">
-              <a:lnSpc>
-                <a:spcPct val="110000"/>
-              </a:lnSpc>
-            </a:pPr>
-            <a:r>
-              <a:rPr sz="1600" b="0">
-                <a:solidFill>
-                  <a:srgbClr val="555555"/>
-                </a:solidFill>
-                <a:latin typeface="Arial"/>
-                <a:ea typeface="Arial"/>
-              </a:rPr>
-              <a:t>2010</a:t>
-            </a:r>
-          </a:p>
-        </p:txBody>
-      </p:sp>
-      <p:sp>
-        <p:nvSpPr>
-          <p:cNvPr id="63" name="TextBox 62"/>
-          <p:cNvSpPr txBox="1"/>
-          <p:nvPr/>
-        </p:nvSpPr>
-        <p:spPr>
-          <a:xfrm>
-            <a:off x="7091172" y="4572000"/>
-            <a:ext cx="640080" cy="256032"/>
-          </a:xfrm>
-          <a:prstGeom prst="rect">
-            <a:avLst/>
-          </a:prstGeom>
-          <a:noFill/>
-        </p:spPr>
-        <p:txBody>
-          <a:bodyPr wrap="square" anchor="t" lIns="0" rIns="0" tIns="0" bIns="0">
-            <a:spAutoFit/>
-          </a:bodyPr>
-          <a:lstStyle/>
-          <a:p>
-            <a:pPr algn="ctr">
-              <a:lnSpc>
-                <a:spcPct val="110000"/>
-              </a:lnSpc>
-            </a:pPr>
-            <a:r>
-              <a:rPr sz="1600" b="0">
-                <a:solidFill>
-                  <a:srgbClr val="555555"/>
-                </a:solidFill>
-                <a:latin typeface="Arial"/>
-                <a:ea typeface="Arial"/>
-              </a:rPr>
-              <a:t>2018</a:t>
-            </a:r>
-          </a:p>
-        </p:txBody>
-      </p:sp>
-      <p:sp>
-        <p:nvSpPr>
-          <p:cNvPr id="64" name="TextBox 63"/>
-          <p:cNvSpPr txBox="1"/>
-          <p:nvPr/>
-        </p:nvSpPr>
-        <p:spPr>
-          <a:xfrm>
-            <a:off x="8037576" y="4572000"/>
-            <a:ext cx="640080" cy="256032"/>
-          </a:xfrm>
-          <a:prstGeom prst="rect">
-            <a:avLst/>
-          </a:prstGeom>
-          <a:noFill/>
-        </p:spPr>
-        <p:txBody>
-          <a:bodyPr wrap="square" anchor="t" lIns="0" rIns="0" tIns="0" bIns="0">
-            <a:spAutoFit/>
-          </a:bodyPr>
-          <a:lstStyle/>
-          <a:p>
-            <a:pPr algn="ctr">
-              <a:lnSpc>
-                <a:spcPct val="110000"/>
-              </a:lnSpc>
-            </a:pPr>
-            <a:r>
-              <a:rPr sz="1600" b="0">
-                <a:solidFill>
-                  <a:srgbClr val="555555"/>
-                </a:solidFill>
-                <a:latin typeface="Arial"/>
-                <a:ea typeface="Arial"/>
-              </a:rPr>
-              <a:t>2026</a:t>
-            </a:r>
-          </a:p>
-        </p:txBody>
-      </p:sp>
-      <p:sp>
-        <p:nvSpPr>
-          <p:cNvPr id="65" name="TextBox 64"/>
-          <p:cNvSpPr txBox="1"/>
-          <p:nvPr/>
-        </p:nvSpPr>
-        <p:spPr>
-          <a:xfrm>
-            <a:off x="8869680" y="2176272"/>
-            <a:ext cx="2514600" cy="402336"/>
-          </a:xfrm>
-          <a:prstGeom prst="rect">
-            <a:avLst/>
-          </a:prstGeom>
-          <a:noFill/>
-        </p:spPr>
-        <p:txBody>
-          <a:bodyPr wrap="square" anchor="ctr" lIns="0" rIns="0" tIns="0" bIns="0">
-            <a:spAutoFit/>
-          </a:bodyPr>
-          <a:lstStyle/>
-          <a:p>
-            <a:pPr algn="l">
-              <a:lnSpc>
-                <a:spcPct val="110000"/>
-              </a:lnSpc>
-            </a:pPr>
-            <a:r>
-              <a:rPr sz="2000" b="1">
-                <a:solidFill>
-                  <a:srgbClr val="1428A0"/>
-                </a:solidFill>
-                <a:latin typeface="Arial"/>
-                <a:ea typeface="Arial"/>
-              </a:rPr>
-              <a:t>DWPD  </a:t>
-            </a:r>
-            <a:r>
-              <a:rPr sz="2400" b="1">
-                <a:solidFill>
-                  <a:srgbClr val="1428A0"/>
-                </a:solidFill>
-                <a:latin typeface="Arial"/>
-                <a:ea typeface="Arial"/>
-              </a:rPr>
-              <a:t>10 → 1</a:t>
-            </a:r>
-          </a:p>
-        </p:txBody>
-      </p:sp>
-      <p:sp>
-        <p:nvSpPr>
-          <p:cNvPr id="66" name="TextBox 65"/>
-          <p:cNvSpPr txBox="1"/>
-          <p:nvPr/>
-        </p:nvSpPr>
-        <p:spPr>
-          <a:xfrm>
-            <a:off x="8869680" y="2560320"/>
-            <a:ext cx="2514600" cy="292608"/>
-          </a:xfrm>
-          <a:prstGeom prst="rect">
-            <a:avLst/>
-          </a:prstGeom>
-          <a:noFill/>
-        </p:spPr>
-        <p:txBody>
-          <a:bodyPr wrap="square" anchor="ctr" lIns="0" rIns="0" tIns="0" bIns="0">
-            <a:spAutoFit/>
-          </a:bodyPr>
-          <a:lstStyle/>
-          <a:p>
-            <a:pPr algn="l">
-              <a:lnSpc>
-                <a:spcPct val="110000"/>
-              </a:lnSpc>
-            </a:pPr>
-            <a:r>
-              <a:rPr sz="1600" b="0">
-                <a:solidFill>
-                  <a:srgbClr val="555555"/>
-                </a:solidFill>
-                <a:latin typeface="Arial"/>
-                <a:ea typeface="Arial"/>
-              </a:rPr>
-              <a:t>정격 하루 쓰기 (로그 축)</a:t>
-            </a:r>
-          </a:p>
-        </p:txBody>
-      </p:sp>
-      <p:sp>
-        <p:nvSpPr>
-          <p:cNvPr id="67" name="Rectangle 66"/>
-          <p:cNvSpPr/>
-          <p:nvPr/>
-        </p:nvSpPr>
-        <p:spPr>
-          <a:xfrm>
-            <a:off x="8961119" y="4553712"/>
-            <a:ext cx="2331720" cy="10972"/>
-          </a:xfrm>
-          <a:prstGeom prst="rect">
-            <a:avLst/>
-          </a:prstGeom>
-          <a:solidFill>
-            <a:srgbClr val="D9D9D9"/>
-          </a:solidFill>
-          <a:ln>
-            <a:noFill/>
-          </a:ln>
-          <a:effectLst/>
-        </p:spPr>
-        <p:style>
-          <a:lnRef idx="1">
-            <a:schemeClr val="accent1"/>
-          </a:lnRef>
-          <a:fillRef idx="3">
-            <a:schemeClr val="accent1"/>
-          </a:fillRef>
-          <a:effectRef idx="2">
-            <a:schemeClr val="accent1"/>
-          </a:effectRef>
-          <a:fontRef idx="minor">
-            <a:schemeClr val="lt1"/>
-          </a:fontRef>
-        </p:style>
-        <p:txBody>
-          <a:bodyPr rtlCol="0" anchor="ctr"/>
-          <a:lstStyle/>
-          <a:p>
-            <a:pPr algn="ctr"/>
-          </a:p>
-        </p:txBody>
-      </p:sp>
-      <p:sp>
-        <p:nvSpPr>
-          <p:cNvPr id="68" name="Rectangle 67"/>
+      <p:sp>
+        <p:nvSpPr>
+          <p:cNvPr id="65" name="Rectangle 64"/>
           <p:cNvSpPr/>
           <p:nvPr/>
         </p:nvSpPr>
@@ -17720,7 +17600,7 @@
       </p:sp>
       <p:sp>
         <p:nvSpPr>
-          <p:cNvPr id="69" name="TextBox 68"/>
+          <p:cNvPr id="66" name="TextBox 65"/>
           <p:cNvSpPr txBox="1"/>
           <p:nvPr/>
         </p:nvSpPr>
@@ -17760,7 +17640,7 @@
       </p:sp>
       <p:cxnSp>
         <p:nvCxnSpPr>
-          <p:cNvPr id="70" name="Connector 69"/>
+          <p:cNvPr id="67" name="Connector 66"/>
           <p:cNvCxnSpPr/>
           <p:nvPr/>
         </p:nvCxnSpPr>
@@ -17795,7 +17675,7 @@
       </p:cxnSp>
       <p:cxnSp>
         <p:nvCxnSpPr>
-          <p:cNvPr id="71" name="Connector 70"/>
+          <p:cNvPr id="68" name="Connector 67"/>
           <p:cNvCxnSpPr/>
           <p:nvPr/>
         </p:nvCxnSpPr>
@@ -17830,7 +17710,7 @@
       </p:cxnSp>
       <p:cxnSp>
         <p:nvCxnSpPr>
-          <p:cNvPr id="72" name="Connector 71"/>
+          <p:cNvPr id="69" name="Connector 68"/>
           <p:cNvCxnSpPr/>
           <p:nvPr/>
         </p:nvCxnSpPr>
@@ -17865,7 +17745,7 @@
       </p:cxnSp>
       <p:cxnSp>
         <p:nvCxnSpPr>
-          <p:cNvPr id="73" name="Connector 72"/>
+          <p:cNvPr id="70" name="Connector 69"/>
           <p:cNvCxnSpPr/>
           <p:nvPr/>
         </p:nvCxnSpPr>
@@ -17900,7 +17780,7 @@
       </p:cxnSp>
       <p:sp>
         <p:nvSpPr>
-          <p:cNvPr id="74" name="Oval 73"/>
+          <p:cNvPr id="71" name="Oval 70"/>
           <p:cNvSpPr/>
           <p:nvPr/>
         </p:nvSpPr>
@@ -17944,7 +17824,7 @@
       </p:sp>
       <p:sp>
         <p:nvSpPr>
-          <p:cNvPr id="75" name="Oval 74"/>
+          <p:cNvPr id="72" name="Oval 71"/>
           <p:cNvSpPr/>
           <p:nvPr/>
         </p:nvSpPr>
@@ -17988,7 +17868,7 @@
       </p:sp>
       <p:sp>
         <p:nvSpPr>
-          <p:cNvPr id="76" name="Oval 75"/>
+          <p:cNvPr id="73" name="Oval 72"/>
           <p:cNvSpPr/>
           <p:nvPr/>
         </p:nvSpPr>
@@ -18032,7 +17912,7 @@
       </p:sp>
       <p:sp>
         <p:nvSpPr>
-          <p:cNvPr id="77" name="Oval 76"/>
+          <p:cNvPr id="74" name="Oval 73"/>
           <p:cNvSpPr/>
           <p:nvPr/>
         </p:nvSpPr>
@@ -18076,7 +17956,7 @@
       </p:sp>
       <p:sp>
         <p:nvSpPr>
-          <p:cNvPr id="78" name="Oval 77"/>
+          <p:cNvPr id="75" name="Oval 74"/>
           <p:cNvSpPr/>
           <p:nvPr/>
         </p:nvSpPr>
@@ -18120,7 +18000,7 @@
       </p:sp>
       <p:cxnSp>
         <p:nvCxnSpPr>
-          <p:cNvPr id="79" name="Connector 78"/>
+          <p:cNvPr id="76" name="Connector 75"/>
           <p:cNvCxnSpPr/>
           <p:nvPr/>
         </p:nvCxnSpPr>
@@ -18155,7 +18035,7 @@
       </p:cxnSp>
       <p:sp>
         <p:nvSpPr>
-          <p:cNvPr id="80" name="Oval 79"/>
+          <p:cNvPr id="77" name="Oval 76"/>
           <p:cNvSpPr/>
           <p:nvPr/>
         </p:nvSpPr>
@@ -18199,7 +18079,7 @@
       </p:sp>
       <p:sp>
         <p:nvSpPr>
-          <p:cNvPr id="81" name="Oval 80"/>
+          <p:cNvPr id="78" name="Oval 77"/>
           <p:cNvSpPr/>
           <p:nvPr/>
         </p:nvSpPr>
@@ -18243,7 +18123,7 @@
       </p:sp>
       <p:sp>
         <p:nvSpPr>
-          <p:cNvPr id="82" name="TextBox 81"/>
+          <p:cNvPr id="79" name="TextBox 78"/>
           <p:cNvSpPr txBox="1"/>
           <p:nvPr/>
         </p:nvSpPr>
@@ -18283,7 +18163,7 @@
       </p:sp>
       <p:sp>
         <p:nvSpPr>
-          <p:cNvPr id="83" name="TextBox 82"/>
+          <p:cNvPr id="80" name="TextBox 79"/>
           <p:cNvSpPr txBox="1"/>
           <p:nvPr/>
         </p:nvSpPr>
@@ -18323,7 +18203,7 @@
       </p:sp>
       <p:sp>
         <p:nvSpPr>
-          <p:cNvPr id="84" name="TextBox 83"/>
+          <p:cNvPr id="81" name="TextBox 80"/>
           <p:cNvSpPr txBox="1"/>
           <p:nvPr/>
         </p:nvSpPr>
@@ -18363,7 +18243,7 @@
       </p:sp>
       <p:sp>
         <p:nvSpPr>
-          <p:cNvPr id="85" name="TextBox 84"/>
+          <p:cNvPr id="82" name="TextBox 81"/>
           <p:cNvSpPr txBox="1"/>
           <p:nvPr/>
         </p:nvSpPr>
@@ -18403,13 +18283,13 @@
       </p:sp>
       <p:sp>
         <p:nvSpPr>
-          <p:cNvPr id="86" name="TextBox 85"/>
+          <p:cNvPr id="83" name="TextBox 82"/>
           <p:cNvSpPr txBox="1"/>
           <p:nvPr/>
         </p:nvSpPr>
         <p:spPr>
           <a:xfrm>
-            <a:off x="9806940" y="4572000"/>
+            <a:off x="10753344" y="4572000"/>
             <a:ext cx="640080" cy="256032"/>
           </a:xfrm>
           <a:prstGeom prst="rect">
@@ -18436,8 +18316,157 @@
                 <a:latin typeface="Arial"/>
                 <a:ea typeface="Arial"/>
               </a:rPr>
-              <a:t>2018</a:t>
-            </a:r>
+              <a:t>2026</a:t>
+            </a:r>
+          </a:p>
+        </p:txBody>
+      </p:sp>
+      <p:sp>
+        <p:nvSpPr>
+          <p:cNvPr id="84" name="Rounded Rectangle 83"/>
+          <p:cNvSpPr/>
+          <p:nvPr/>
+        </p:nvSpPr>
+        <p:spPr>
+          <a:xfrm>
+            <a:off x="722376" y="5669280"/>
+            <a:ext cx="5074920" cy="2926080"/>
+          </a:xfrm>
+          <a:prstGeom prst="roundRect">
+            <a:avLst>
+              <a:gd name="adj" fmla="val 2500"/>
+            </a:avLst>
+          </a:prstGeom>
+          <a:solidFill>
+            <a:srgbClr val="F5F5F5"/>
+          </a:solidFill>
+          <a:ln>
+            <a:noFill/>
+          </a:ln>
+          <a:effectLst/>
+        </p:spPr>
+        <p:style>
+          <a:lnRef idx="1">
+            <a:schemeClr val="accent1"/>
+          </a:lnRef>
+          <a:fillRef idx="3">
+            <a:schemeClr val="accent1"/>
+          </a:fillRef>
+          <a:effectRef idx="2">
+            <a:schemeClr val="accent1"/>
+          </a:effectRef>
+          <a:fontRef idx="minor">
+            <a:schemeClr val="lt1"/>
+          </a:fontRef>
+        </p:style>
+        <p:txBody>
+          <a:bodyPr rtlCol="0" anchor="ctr"/>
+          <a:lstStyle/>
+          <a:p>
+            <a:pPr algn="ctr"/>
+          </a:p>
+        </p:txBody>
+      </p:sp>
+      <p:sp>
+        <p:nvSpPr>
+          <p:cNvPr id="85" name="TextBox 84"/>
+          <p:cNvSpPr txBox="1"/>
+          <p:nvPr/>
+        </p:nvSpPr>
+        <p:spPr>
+          <a:xfrm>
+            <a:off x="996696" y="5779008"/>
+            <a:ext cx="3154679" cy="786384"/>
+          </a:xfrm>
+          <a:prstGeom prst="rect">
+            <a:avLst/>
+          </a:prstGeom>
+          <a:noFill/>
+        </p:spPr>
+        <p:txBody>
+          <a:bodyPr wrap="square" anchor="t" lIns="0" rIns="0" tIns="0" bIns="0">
+            <a:spAutoFit/>
+          </a:bodyPr>
+          <a:lstStyle/>
+          <a:p>
+            <a:pPr algn="l">
+              <a:lnSpc>
+                <a:spcPct val="100000"/>
+              </a:lnSpc>
+            </a:pPr>
+            <a:r>
+              <a:rPr sz="2400" b="1">
+                <a:solidFill>
+                  <a:srgbClr val="1A1A1A"/>
+                </a:solidFill>
+                <a:latin typeface="Arial"/>
+                <a:ea typeface="Arial"/>
+              </a:rPr>
+              <a:t>NAND → SSD</a:t>
+            </a:r>
+          </a:p>
+          <a:p>
+            <a:pPr algn="l">
+              <a:lnSpc>
+                <a:spcPct val="100000"/>
+              </a:lnSpc>
+            </a:pPr>
+            <a:r>
+              <a:rPr sz="1800" b="0">
+                <a:solidFill>
+                  <a:srgbClr val="555555"/>
+                </a:solidFill>
+                <a:latin typeface="Arial"/>
+                <a:ea typeface="Arial"/>
+              </a:rPr>
+              <a:t>1991~</a:t>
+            </a:r>
+          </a:p>
+        </p:txBody>
+      </p:sp>
+      <p:sp>
+        <p:nvSpPr>
+          <p:cNvPr id="86" name="Rounded Rectangle 85"/>
+          <p:cNvSpPr/>
+          <p:nvPr/>
+        </p:nvSpPr>
+        <p:spPr>
+          <a:xfrm>
+            <a:off x="4242816" y="5852160"/>
+            <a:ext cx="1280160" cy="402336"/>
+          </a:xfrm>
+          <a:prstGeom prst="roundRect">
+            <a:avLst>
+              <a:gd name="adj" fmla="val 18181"/>
+            </a:avLst>
+          </a:prstGeom>
+          <a:solidFill>
+            <a:srgbClr val="8A8A8A"/>
+          </a:solidFill>
+          <a:ln>
+            <a:noFill/>
+          </a:ln>
+          <a:effectLst/>
+        </p:spPr>
+        <p:style>
+          <a:lnRef idx="1">
+            <a:schemeClr val="accent1"/>
+          </a:lnRef>
+          <a:fillRef idx="3">
+            <a:schemeClr val="accent1"/>
+          </a:fillRef>
+          <a:effectRef idx="2">
+            <a:schemeClr val="accent1"/>
+          </a:effectRef>
+          <a:fontRef idx="minor">
+            <a:schemeClr val="lt1"/>
+          </a:fontRef>
+        </p:style>
+        <p:txBody>
+          <a:bodyPr rtlCol="0" anchor="ctr"/>
+          <a:lstStyle/>
+          <a:p>
+            <a:pPr algn="ctr"/>
           </a:p>
         </p:txBody>
       </p:sp>
@@ -18449,8 +18478,8 @@
         </p:nvSpPr>
         <p:spPr>
           <a:xfrm>
-            <a:off x="10753344" y="4572000"/>
-            <a:ext cx="640080" cy="256032"/>
+            <a:off x="4297679" y="5852160"/>
+            <a:ext cx="1170431" cy="402336"/>
           </a:xfrm>
           <a:prstGeom prst="rect">
             <a:avLst/>
@@ -18458,7 +18487,7 @@
           <a:noFill/>
         </p:spPr>
         <p:txBody>
-          <a:bodyPr wrap="square" anchor="t" lIns="0" rIns="0" tIns="0" bIns="0">
+          <a:bodyPr wrap="square" anchor="ctr" lIns="0" rIns="0" tIns="0" bIns="0">
             <a:spAutoFit/>
           </a:bodyPr>
           <a:lstStyle/>
@@ -18469,195 +18498,6 @@
               </a:lnSpc>
             </a:pPr>
             <a:r>
-              <a:rPr sz="1600" b="0">
-                <a:solidFill>
-                  <a:srgbClr val="555555"/>
-                </a:solidFill>
-                <a:latin typeface="Arial"/>
-                <a:ea typeface="Arial"/>
-              </a:rPr>
-              <a:t>2026</a:t>
-            </a:r>
-          </a:p>
-        </p:txBody>
-      </p:sp>
-      <p:sp>
-        <p:nvSpPr>
-          <p:cNvPr id="88" name="Rounded Rectangle 87"/>
-          <p:cNvSpPr/>
-          <p:nvPr/>
-        </p:nvSpPr>
-        <p:spPr>
-          <a:xfrm>
-            <a:off x="722376" y="5669280"/>
-            <a:ext cx="5074920" cy="2926080"/>
-          </a:xfrm>
-          <a:prstGeom prst="roundRect">
-            <a:avLst>
-              <a:gd name="adj" fmla="val 2500"/>
-            </a:avLst>
-          </a:prstGeom>
-          <a:solidFill>
-            <a:srgbClr val="F5F5F5"/>
-          </a:solidFill>
-          <a:ln>
-            <a:noFill/>
-          </a:ln>
-          <a:effectLst/>
-        </p:spPr>
-        <p:style>
-          <a:lnRef idx="1">
-            <a:schemeClr val="accent1"/>
-          </a:lnRef>
-          <a:fillRef idx="3">
-            <a:schemeClr val="accent1"/>
-          </a:fillRef>
-          <a:effectRef idx="2">
-            <a:schemeClr val="accent1"/>
-          </a:effectRef>
-          <a:fontRef idx="minor">
-            <a:schemeClr val="lt1"/>
-          </a:fontRef>
-        </p:style>
-        <p:txBody>
-          <a:bodyPr rtlCol="0" anchor="ctr"/>
-          <a:lstStyle/>
-          <a:p>
-            <a:pPr algn="ctr"/>
-          </a:p>
-        </p:txBody>
-      </p:sp>
-      <p:sp>
-        <p:nvSpPr>
-          <p:cNvPr id="89" name="TextBox 88"/>
-          <p:cNvSpPr txBox="1"/>
-          <p:nvPr/>
-        </p:nvSpPr>
-        <p:spPr>
-          <a:xfrm>
-            <a:off x="996696" y="5779008"/>
-            <a:ext cx="3154679" cy="786384"/>
-          </a:xfrm>
-          <a:prstGeom prst="rect">
-            <a:avLst/>
-          </a:prstGeom>
-          <a:noFill/>
-        </p:spPr>
-        <p:txBody>
-          <a:bodyPr wrap="square" anchor="t" lIns="0" rIns="0" tIns="0" bIns="0">
-            <a:spAutoFit/>
-          </a:bodyPr>
-          <a:lstStyle/>
-          <a:p>
-            <a:pPr algn="l">
-              <a:lnSpc>
-                <a:spcPct val="100000"/>
-              </a:lnSpc>
-            </a:pPr>
-            <a:r>
-              <a:rPr sz="2400" b="1">
-                <a:solidFill>
-                  <a:srgbClr val="1A1A1A"/>
-                </a:solidFill>
-                <a:latin typeface="Arial"/>
-                <a:ea typeface="Arial"/>
-              </a:rPr>
-              <a:t>NAND → SSD</a:t>
-            </a:r>
-          </a:p>
-          <a:p>
-            <a:pPr algn="l">
-              <a:lnSpc>
-                <a:spcPct val="100000"/>
-              </a:lnSpc>
-            </a:pPr>
-            <a:r>
-              <a:rPr sz="1800" b="0">
-                <a:solidFill>
-                  <a:srgbClr val="555555"/>
-                </a:solidFill>
-                <a:latin typeface="Arial"/>
-                <a:ea typeface="Arial"/>
-              </a:rPr>
-              <a:t>1991~</a:t>
-            </a:r>
-          </a:p>
-        </p:txBody>
-      </p:sp>
-      <p:sp>
-        <p:nvSpPr>
-          <p:cNvPr id="90" name="Rounded Rectangle 89"/>
-          <p:cNvSpPr/>
-          <p:nvPr/>
-        </p:nvSpPr>
-        <p:spPr>
-          <a:xfrm>
-            <a:off x="4242816" y="5852160"/>
-            <a:ext cx="1280160" cy="402336"/>
-          </a:xfrm>
-          <a:prstGeom prst="roundRect">
-            <a:avLst>
-              <a:gd name="adj" fmla="val 18181"/>
-            </a:avLst>
-          </a:prstGeom>
-          <a:solidFill>
-            <a:srgbClr val="8A8A8A"/>
-          </a:solidFill>
-          <a:ln>
-            <a:noFill/>
-          </a:ln>
-          <a:effectLst/>
-        </p:spPr>
-        <p:style>
-          <a:lnRef idx="1">
-            <a:schemeClr val="accent1"/>
-          </a:lnRef>
-          <a:fillRef idx="3">
-            <a:schemeClr val="accent1"/>
-          </a:fillRef>
-          <a:effectRef idx="2">
-            <a:schemeClr val="accent1"/>
-          </a:effectRef>
-          <a:fontRef idx="minor">
-            <a:schemeClr val="lt1"/>
-          </a:fontRef>
-        </p:style>
-        <p:txBody>
-          <a:bodyPr rtlCol="0" anchor="ctr"/>
-          <a:lstStyle/>
-          <a:p>
-            <a:pPr algn="ctr"/>
-          </a:p>
-        </p:txBody>
-      </p:sp>
-      <p:sp>
-        <p:nvSpPr>
-          <p:cNvPr id="91" name="TextBox 90"/>
-          <p:cNvSpPr txBox="1"/>
-          <p:nvPr/>
-        </p:nvSpPr>
-        <p:spPr>
-          <a:xfrm>
-            <a:off x="4297679" y="5852160"/>
-            <a:ext cx="1170431" cy="402336"/>
-          </a:xfrm>
-          <a:prstGeom prst="rect">
-            <a:avLst/>
-          </a:prstGeom>
-          <a:noFill/>
-        </p:spPr>
-        <p:txBody>
-          <a:bodyPr wrap="square" anchor="ctr" lIns="0" rIns="0" tIns="0" bIns="0">
-            <a:spAutoFit/>
-          </a:bodyPr>
-          <a:lstStyle/>
-          <a:p>
-            <a:pPr algn="ctr">
-              <a:lnSpc>
-                <a:spcPct val="110000"/>
-              </a:lnSpc>
-            </a:pPr>
-            <a:r>
               <a:rPr sz="1800" b="1">
                 <a:solidFill>
                   <a:srgbClr val="FFFFFF"/>
@@ -18672,7 +18512,7 @@
       </p:sp>
       <p:pic>
         <p:nvPicPr>
-          <p:cNvPr id="92" name="Picture 91" descr="render_nand.png"/>
+          <p:cNvPr id="88" name="Picture 87" descr="render_nand.png"/>
           <p:cNvPicPr>
             <a:picLocks noChangeAspect="1"/>
           </p:cNvPicPr>
@@ -18696,7 +18536,7 @@
       </p:pic>
       <p:sp>
         <p:nvSpPr>
-          <p:cNvPr id="93" name="Right Arrow 92"/>
+          <p:cNvPr id="89" name="Right Arrow 88"/>
           <p:cNvSpPr/>
           <p:nvPr/>
         </p:nvSpPr>
@@ -18740,7 +18580,7 @@
       </p:sp>
       <p:pic>
         <p:nvPicPr>
-          <p:cNvPr id="94" name="Picture 93" descr="render_ssd.png"/>
+          <p:cNvPr id="90" name="Picture 89" descr="render_ssd.png"/>
           <p:cNvPicPr>
             <a:picLocks noChangeAspect="1"/>
           </p:cNvPicPr>
@@ -18764,7 +18604,7 @@
       </p:pic>
       <p:sp>
         <p:nvSpPr>
-          <p:cNvPr id="95" name="TextBox 94"/>
+          <p:cNvPr id="91" name="TextBox 90"/>
           <p:cNvSpPr txBox="1"/>
           <p:nvPr/>
         </p:nvSpPr>
@@ -18804,7 +18644,7 @@
       </p:sp>
       <p:sp>
         <p:nvSpPr>
-          <p:cNvPr id="96" name="TextBox 95"/>
+          <p:cNvPr id="92" name="TextBox 91"/>
           <p:cNvSpPr txBox="1"/>
           <p:nvPr/>
         </p:nvSpPr>
@@ -18844,7 +18684,7 @@
       </p:sp>
       <p:sp>
         <p:nvSpPr>
-          <p:cNvPr id="97" name="Rounded Rectangle 96"/>
+          <p:cNvPr id="93" name="Rounded Rectangle 92"/>
           <p:cNvSpPr/>
           <p:nvPr/>
         </p:nvSpPr>
@@ -18890,7 +18730,7 @@
       </p:sp>
       <p:sp>
         <p:nvSpPr>
-          <p:cNvPr id="98" name="TextBox 97"/>
+          <p:cNvPr id="94" name="TextBox 93"/>
           <p:cNvSpPr txBox="1"/>
           <p:nvPr/>
         </p:nvSpPr>
@@ -18947,7 +18787,7 @@
       </p:sp>
       <p:sp>
         <p:nvSpPr>
-          <p:cNvPr id="99" name="Rounded Rectangle 98"/>
+          <p:cNvPr id="95" name="Rounded Rectangle 94"/>
           <p:cNvSpPr/>
           <p:nvPr/>
         </p:nvSpPr>
@@ -18995,7 +18835,7 @@
       </p:sp>
       <p:sp>
         <p:nvSpPr>
-          <p:cNvPr id="100" name="TextBox 99"/>
+          <p:cNvPr id="96" name="TextBox 95"/>
           <p:cNvSpPr txBox="1"/>
           <p:nvPr/>
         </p:nvSpPr>
@@ -19035,7 +18875,7 @@
       </p:sp>
       <p:pic>
         <p:nvPicPr>
-          <p:cNvPr id="101" name="Picture 100" descr="render_ssd.png"/>
+          <p:cNvPr id="97" name="Picture 96" descr="render_ssd.png"/>
           <p:cNvPicPr>
             <a:picLocks noChangeAspect="1"/>
           </p:cNvPicPr>
@@ -19059,7 +18899,7 @@
       </p:pic>
       <p:sp>
         <p:nvSpPr>
-          <p:cNvPr id="102" name="TextBox 101"/>
+          <p:cNvPr id="98" name="TextBox 97"/>
           <p:cNvSpPr txBox="1"/>
           <p:nvPr/>
         </p:nvSpPr>
@@ -19099,7 +18939,7 @@
       </p:sp>
       <p:sp>
         <p:nvSpPr>
-          <p:cNvPr id="103" name="TextBox 102"/>
+          <p:cNvPr id="99" name="TextBox 98"/>
           <p:cNvSpPr txBox="1"/>
           <p:nvPr/>
         </p:nvSpPr>
@@ -19139,7 +18979,7 @@
       </p:sp>
       <p:sp>
         <p:nvSpPr>
-          <p:cNvPr id="104" name="Rounded Rectangle 103"/>
+          <p:cNvPr id="100" name="Rounded Rectangle 99"/>
           <p:cNvSpPr/>
           <p:nvPr/>
         </p:nvSpPr>
@@ -19185,7 +19025,7 @@
       </p:sp>
       <p:sp>
         <p:nvSpPr>
-          <p:cNvPr id="105" name="TextBox 104"/>
+          <p:cNvPr id="101" name="TextBox 100"/>
           <p:cNvSpPr txBox="1"/>
           <p:nvPr/>
         </p:nvSpPr>
@@ -19242,7 +19082,7 @@
       </p:sp>
       <p:sp>
         <p:nvSpPr>
-          <p:cNvPr id="106" name="Rounded Rectangle 105"/>
+          <p:cNvPr id="102" name="Rounded Rectangle 101"/>
           <p:cNvSpPr/>
           <p:nvPr/>
         </p:nvSpPr>
@@ -19288,7 +19128,7 @@
       </p:sp>
       <p:sp>
         <p:nvSpPr>
-          <p:cNvPr id="107" name="TextBox 106"/>
+          <p:cNvPr id="103" name="TextBox 102"/>
           <p:cNvSpPr txBox="1"/>
           <p:nvPr/>
         </p:nvSpPr>
@@ -19328,7 +19168,7 @@
       </p:sp>
       <p:pic>
         <p:nvPicPr>
-          <p:cNvPr id="108" name="Picture 107" descr="render_server.png"/>
+          <p:cNvPr id="104" name="Picture 103" descr="render_server.png"/>
           <p:cNvPicPr>
             <a:picLocks noChangeAspect="1"/>
           </p:cNvPicPr>
@@ -19342,8 +19182,8 @@
         </p:blipFill>
         <p:spPr>
           <a:xfrm>
-            <a:off x="11988964" y="3145536"/>
-            <a:ext cx="1149782" cy="676656"/>
+            <a:off x="11976732" y="3145536"/>
+            <a:ext cx="1631448" cy="960120"/>
           </a:xfrm>
           <a:prstGeom prst="rect">
             <a:avLst/>
@@ -19352,7 +19192,7 @@
       </p:pic>
       <p:pic>
         <p:nvPicPr>
-          <p:cNvPr id="109" name="Picture 108" descr="render_ssd.png"/>
+          <p:cNvPr id="105" name="Picture 104" descr="render_ssd.png"/>
           <p:cNvPicPr>
             <a:picLocks noChangeAspect="1"/>
           </p:cNvPicPr>
@@ -19366,8 +19206,8 @@
         </p:blipFill>
         <p:spPr>
           <a:xfrm>
-            <a:off x="13386816" y="3255359"/>
-            <a:ext cx="1280160" cy="475297"/>
+            <a:off x="13844016" y="3361195"/>
+            <a:ext cx="1645920" cy="611096"/>
           </a:xfrm>
           <a:prstGeom prst="rect">
             <a:avLst/>
@@ -19376,13 +19216,13 @@
       </p:pic>
       <p:sp>
         <p:nvSpPr>
-          <p:cNvPr id="110" name="TextBox 109"/>
+          <p:cNvPr id="106" name="TextBox 105"/>
           <p:cNvSpPr txBox="1"/>
           <p:nvPr/>
         </p:nvSpPr>
         <p:spPr>
           <a:xfrm>
-            <a:off x="11832336" y="3877056"/>
+            <a:off x="11832336" y="4169664"/>
             <a:ext cx="5458968" cy="640080"/>
           </a:xfrm>
           <a:prstGeom prst="rect">
@@ -19416,13 +19256,13 @@
       </p:sp>
       <p:sp>
         <p:nvSpPr>
-          <p:cNvPr id="111" name="TextBox 110"/>
+          <p:cNvPr id="107" name="TextBox 106"/>
           <p:cNvSpPr txBox="1"/>
           <p:nvPr/>
         </p:nvSpPr>
         <p:spPr>
           <a:xfrm>
-            <a:off x="11832336" y="4517136"/>
+            <a:off x="11832336" y="4809744"/>
             <a:ext cx="5458968" cy="347472"/>
           </a:xfrm>
           <a:prstGeom prst="rect">
@@ -19456,7 +19296,7 @@
       </p:sp>
       <p:sp>
         <p:nvSpPr>
-          <p:cNvPr id="112" name="TextBox 111"/>
+          <p:cNvPr id="108" name="TextBox 107"/>
           <p:cNvSpPr txBox="1"/>
           <p:nvPr/>
         </p:nvSpPr>
@@ -19496,7 +19336,7 @@
       </p:sp>
       <p:sp>
         <p:nvSpPr>
-          <p:cNvPr id="113" name="Rounded Rectangle 112"/>
+          <p:cNvPr id="109" name="Rounded Rectangle 108"/>
           <p:cNvSpPr/>
           <p:nvPr/>
         </p:nvSpPr>
@@ -19542,7 +19382,7 @@
       </p:sp>
       <p:sp>
         <p:nvSpPr>
-          <p:cNvPr id="114" name="TextBox 113"/>
+          <p:cNvPr id="110" name="TextBox 109"/>
           <p:cNvSpPr txBox="1"/>
           <p:nvPr/>
         </p:nvSpPr>
@@ -19582,7 +19422,7 @@
       </p:sp>
       <p:sp>
         <p:nvSpPr>
-          <p:cNvPr id="115" name="Rounded Rectangle 114"/>
+          <p:cNvPr id="111" name="Rounded Rectangle 110"/>
           <p:cNvSpPr/>
           <p:nvPr/>
         </p:nvSpPr>
@@ -19628,7 +19468,7 @@
       </p:sp>
       <p:sp>
         <p:nvSpPr>
-          <p:cNvPr id="116" name="TextBox 115"/>
+          <p:cNvPr id="112" name="TextBox 111"/>
           <p:cNvSpPr txBox="1"/>
           <p:nvPr/>
         </p:nvSpPr>
@@ -19668,47 +19508,7 @@
       </p:sp>
       <p:sp>
         <p:nvSpPr>
-          <p:cNvPr id="117" name="TextBox 116"/>
-          <p:cNvSpPr txBox="1"/>
-          <p:nvPr/>
-        </p:nvSpPr>
-        <p:spPr>
-          <a:xfrm>
-            <a:off x="8869680" y="6638544"/>
-            <a:ext cx="2121408" cy="365760"/>
-          </a:xfrm>
-          <a:prstGeom prst="rect">
-            <a:avLst/>
-          </a:prstGeom>
-          <a:noFill/>
-        </p:spPr>
-        <p:txBody>
-          <a:bodyPr wrap="square" anchor="ctr" lIns="0" rIns="0" tIns="0" bIns="0">
-            <a:spAutoFit/>
-          </a:bodyPr>
-          <a:lstStyle/>
-          <a:p>
-            <a:pPr algn="r">
-              <a:lnSpc>
-                <a:spcPct val="110000"/>
-              </a:lnSpc>
-            </a:pPr>
-            <a:r>
-              <a:rPr sz="1600" b="0">
-                <a:solidFill>
-                  <a:srgbClr val="D9D9D9"/>
-                </a:solidFill>
-                <a:latin typeface="Arial"/>
-                <a:ea typeface="Arial"/>
-              </a:rPr>
-              <a:t>2014~17</a:t>
-            </a:r>
-          </a:p>
-        </p:txBody>
-      </p:sp>
-      <p:sp>
-        <p:nvSpPr>
-          <p:cNvPr id="118" name="Rounded Rectangle 117"/>
+          <p:cNvPr id="113" name="Rounded Rectangle 112"/>
           <p:cNvSpPr/>
           <p:nvPr/>
         </p:nvSpPr>
@@ -19754,7 +19554,7 @@
       </p:sp>
       <p:sp>
         <p:nvSpPr>
-          <p:cNvPr id="119" name="TextBox 118"/>
+          <p:cNvPr id="114" name="TextBox 113"/>
           <p:cNvSpPr txBox="1"/>
           <p:nvPr/>
         </p:nvSpPr>
@@ -19794,47 +19594,7 @@
       </p:sp>
       <p:sp>
         <p:nvSpPr>
-          <p:cNvPr id="120" name="TextBox 119"/>
-          <p:cNvSpPr txBox="1"/>
-          <p:nvPr/>
-        </p:nvSpPr>
-        <p:spPr>
-          <a:xfrm>
-            <a:off x="8869680" y="7059168"/>
-            <a:ext cx="2121408" cy="365760"/>
-          </a:xfrm>
-          <a:prstGeom prst="rect">
-            <a:avLst/>
-          </a:prstGeom>
-          <a:noFill/>
-        </p:spPr>
-        <p:txBody>
-          <a:bodyPr wrap="square" anchor="ctr" lIns="0" rIns="0" tIns="0" bIns="0">
-            <a:spAutoFit/>
-          </a:bodyPr>
-          <a:lstStyle/>
-          <a:p>
-            <a:pPr algn="r">
-              <a:lnSpc>
-                <a:spcPct val="110000"/>
-              </a:lnSpc>
-            </a:pPr>
-            <a:r>
-              <a:rPr sz="1600" b="0">
-                <a:solidFill>
-                  <a:srgbClr val="D9D9D9"/>
-                </a:solidFill>
-                <a:latin typeface="Arial"/>
-                <a:ea typeface="Arial"/>
-              </a:rPr>
-              <a:t>2019</a:t>
-            </a:r>
-          </a:p>
-        </p:txBody>
-      </p:sp>
-      <p:sp>
-        <p:nvSpPr>
-          <p:cNvPr id="121" name="Rounded Rectangle 120"/>
+          <p:cNvPr id="115" name="Rounded Rectangle 114"/>
           <p:cNvSpPr/>
           <p:nvPr/>
         </p:nvSpPr>
@@ -19882,7 +19642,7 @@
       </p:sp>
       <p:sp>
         <p:nvSpPr>
-          <p:cNvPr id="122" name="TextBox 121"/>
+          <p:cNvPr id="116" name="TextBox 115"/>
           <p:cNvSpPr txBox="1"/>
           <p:nvPr/>
         </p:nvSpPr>
@@ -19922,7 +19682,7 @@
       </p:sp>
       <p:sp>
         <p:nvSpPr>
-          <p:cNvPr id="123" name="Rounded Rectangle 122"/>
+          <p:cNvPr id="117" name="Rounded Rectangle 116"/>
           <p:cNvSpPr/>
           <p:nvPr/>
         </p:nvSpPr>
@@ -19970,7 +19730,7 @@
       </p:sp>
       <p:sp>
         <p:nvSpPr>
-          <p:cNvPr id="124" name="TextBox 123"/>
+          <p:cNvPr id="118" name="TextBox 117"/>
           <p:cNvSpPr txBox="1"/>
           <p:nvPr/>
         </p:nvSpPr>
@@ -20010,18 +19770,18 @@
       </p:sp>
       <p:sp>
         <p:nvSpPr>
-          <p:cNvPr id="125" name="Rounded Rectangle 124"/>
+          <p:cNvPr id="119" name="Rounded Rectangle 118"/>
           <p:cNvSpPr/>
           <p:nvPr/>
         </p:nvSpPr>
         <p:spPr>
           <a:xfrm>
-            <a:off x="11795760" y="4992624"/>
-            <a:ext cx="5532120" cy="3438144"/>
+            <a:off x="11795760" y="5340096"/>
+            <a:ext cx="5532120" cy="3090672"/>
           </a:xfrm>
           <a:prstGeom prst="roundRect">
             <a:avLst>
-              <a:gd name="adj" fmla="val 2127"/>
+              <a:gd name="adj" fmla="val 2366"/>
             </a:avLst>
           </a:prstGeom>
           <a:solidFill>
@@ -20056,14 +19816,14 @@
       </p:sp>
       <p:sp>
         <p:nvSpPr>
-          <p:cNvPr id="126" name="TextBox 125"/>
+          <p:cNvPr id="120" name="TextBox 119"/>
           <p:cNvSpPr txBox="1"/>
           <p:nvPr/>
         </p:nvSpPr>
         <p:spPr>
           <a:xfrm>
-            <a:off x="11996928" y="5084064"/>
-            <a:ext cx="5129784" cy="365760"/>
+            <a:off x="11996928" y="5449824"/>
+            <a:ext cx="5129784" cy="384048"/>
           </a:xfrm>
           <a:prstGeom prst="rect">
             <a:avLst/>
@@ -20096,98 +19856,14 @@
       </p:sp>
       <p:sp>
         <p:nvSpPr>
-          <p:cNvPr id="127" name="Rectangle 126"/>
+          <p:cNvPr id="121" name="Rectangle 120"/>
           <p:cNvSpPr/>
           <p:nvPr/>
         </p:nvSpPr>
         <p:spPr>
           <a:xfrm>
-            <a:off x="11996928" y="5559552"/>
-            <a:ext cx="146304" cy="146304"/>
-          </a:xfrm>
-          <a:prstGeom prst="rect">
-            <a:avLst/>
-          </a:prstGeom>
-          <a:solidFill>
-            <a:srgbClr val="1428A0"/>
-          </a:solidFill>
-          <a:ln>
-            <a:noFill/>
-          </a:ln>
-          <a:effectLst/>
-        </p:spPr>
-        <p:style>
-          <a:lnRef idx="1">
-            <a:schemeClr val="accent1"/>
-          </a:lnRef>
-          <a:fillRef idx="3">
-            <a:schemeClr val="accent1"/>
-          </a:fillRef>
-          <a:effectRef idx="2">
-            <a:schemeClr val="accent1"/>
-          </a:effectRef>
-          <a:fontRef idx="minor">
-            <a:schemeClr val="lt1"/>
-          </a:fontRef>
-        </p:style>
-        <p:txBody>
-          <a:bodyPr rtlCol="0" anchor="ctr"/>
-          <a:lstStyle/>
-          <a:p>
-            <a:pPr algn="ctr"/>
-          </a:p>
-        </p:txBody>
-      </p:sp>
-      <p:sp>
-        <p:nvSpPr>
-          <p:cNvPr id="128" name="TextBox 127"/>
-          <p:cNvSpPr txBox="1"/>
-          <p:nvPr/>
-        </p:nvSpPr>
-        <p:spPr>
-          <a:xfrm>
-            <a:off x="12198096" y="5495544"/>
-            <a:ext cx="1920240" cy="274320"/>
-          </a:xfrm>
-          <a:prstGeom prst="rect">
-            <a:avLst/>
-          </a:prstGeom>
-          <a:noFill/>
-        </p:spPr>
-        <p:txBody>
-          <a:bodyPr wrap="square" anchor="ctr" lIns="0" rIns="0" tIns="0" bIns="0">
-            <a:spAutoFit/>
-          </a:bodyPr>
-          <a:lstStyle/>
-          <a:p>
-            <a:pPr algn="l">
-              <a:lnSpc>
-                <a:spcPct val="110000"/>
-              </a:lnSpc>
-            </a:pPr>
-            <a:r>
-              <a:rPr sz="1600" b="0">
-                <a:solidFill>
-                  <a:srgbClr val="555555"/>
-                </a:solidFill>
-                <a:latin typeface="Arial"/>
-                <a:ea typeface="Arial"/>
-              </a:rPr>
-              <a:t>자체 SSD · 컨트롤러</a:t>
-            </a:r>
-          </a:p>
-        </p:txBody>
-      </p:sp>
-      <p:sp>
-        <p:nvSpPr>
-          <p:cNvPr id="129" name="Rectangle 128"/>
-          <p:cNvSpPr/>
-          <p:nvPr/>
-        </p:nvSpPr>
-        <p:spPr>
-          <a:xfrm>
-            <a:off x="14282928" y="5559552"/>
-            <a:ext cx="146304" cy="146304"/>
+            <a:off x="13345667" y="5980176"/>
+            <a:ext cx="9144" cy="1847088"/>
           </a:xfrm>
           <a:prstGeom prst="rect">
             <a:avLst/>
@@ -20224,14 +19900,14 @@
       </p:sp>
       <p:sp>
         <p:nvSpPr>
-          <p:cNvPr id="130" name="TextBox 129"/>
+          <p:cNvPr id="122" name="TextBox 121"/>
           <p:cNvSpPr txBox="1"/>
           <p:nvPr/>
         </p:nvSpPr>
         <p:spPr>
           <a:xfrm>
-            <a:off x="14484096" y="5495544"/>
-            <a:ext cx="1280160" cy="274320"/>
+            <a:off x="13030200" y="7863840"/>
+            <a:ext cx="640080" cy="274320"/>
           </a:xfrm>
           <a:prstGeom prst="rect">
             <a:avLst/>
@@ -20239,12 +19915,12 @@
           <a:noFill/>
         </p:spPr>
         <p:txBody>
-          <a:bodyPr wrap="square" anchor="ctr" lIns="0" rIns="0" tIns="0" bIns="0">
+          <a:bodyPr wrap="square" anchor="t" lIns="0" rIns="0" tIns="0" bIns="0">
             <a:spAutoFit/>
           </a:bodyPr>
           <a:lstStyle/>
           <a:p>
-            <a:pPr algn="l">
+            <a:pPr algn="ctr">
               <a:lnSpc>
                 <a:spcPct val="110000"/>
               </a:lnSpc>
@@ -20257,21 +19933,21 @@
                 <a:latin typeface="Arial"/>
                 <a:ea typeface="Arial"/>
               </a:rPr>
-              <a:t>스펙 · 표준</a:t>
-            </a:r>
-          </a:p>
-        </p:txBody>
-      </p:sp>
-      <p:sp>
-        <p:nvSpPr>
-          <p:cNvPr id="131" name="Rectangle 130"/>
+              <a:t>2014</a:t>
+            </a:r>
+          </a:p>
+        </p:txBody>
+      </p:sp>
+      <p:sp>
+        <p:nvSpPr>
+          <p:cNvPr id="123" name="Rectangle 122"/>
           <p:cNvSpPr/>
           <p:nvPr/>
         </p:nvSpPr>
         <p:spPr>
           <a:xfrm>
-            <a:off x="13395102" y="5833872"/>
-            <a:ext cx="9144" cy="2212848"/>
+            <a:off x="15233904" y="5980176"/>
+            <a:ext cx="9144" cy="1847088"/>
           </a:xfrm>
           <a:prstGeom prst="rect">
             <a:avLst/>
@@ -20308,14 +19984,14 @@
       </p:sp>
       <p:sp>
         <p:nvSpPr>
-          <p:cNvPr id="132" name="TextBox 131"/>
+          <p:cNvPr id="124" name="TextBox 123"/>
           <p:cNvSpPr txBox="1"/>
           <p:nvPr/>
         </p:nvSpPr>
         <p:spPr>
           <a:xfrm>
-            <a:off x="13079634" y="8065008"/>
-            <a:ext cx="640080" cy="256032"/>
+            <a:off x="14918436" y="7863840"/>
+            <a:ext cx="640080" cy="274320"/>
           </a:xfrm>
           <a:prstGeom prst="rect">
             <a:avLst/>
@@ -20341,21 +20017,21 @@
                 <a:latin typeface="Arial"/>
                 <a:ea typeface="Arial"/>
               </a:rPr>
-              <a:t>2014</a:t>
-            </a:r>
-          </a:p>
-        </p:txBody>
-      </p:sp>
-      <p:sp>
-        <p:nvSpPr>
-          <p:cNvPr id="133" name="Rectangle 132"/>
+              <a:t>2020</a:t>
+            </a:r>
+          </a:p>
+        </p:txBody>
+      </p:sp>
+      <p:sp>
+        <p:nvSpPr>
+          <p:cNvPr id="125" name="Rectangle 124"/>
           <p:cNvSpPr/>
           <p:nvPr/>
         </p:nvSpPr>
         <p:spPr>
           <a:xfrm>
-            <a:off x="14620970" y="5833872"/>
-            <a:ext cx="9144" cy="2212848"/>
+            <a:off x="17122140" y="5980176"/>
+            <a:ext cx="9144" cy="1847088"/>
           </a:xfrm>
           <a:prstGeom prst="rect">
             <a:avLst/>
@@ -20392,182 +20068,14 @@
       </p:sp>
       <p:sp>
         <p:nvSpPr>
-          <p:cNvPr id="134" name="TextBox 133"/>
+          <p:cNvPr id="126" name="TextBox 125"/>
           <p:cNvSpPr txBox="1"/>
           <p:nvPr/>
         </p:nvSpPr>
         <p:spPr>
           <a:xfrm>
-            <a:off x="14305502" y="8065008"/>
-            <a:ext cx="640080" cy="256032"/>
-          </a:xfrm>
-          <a:prstGeom prst="rect">
-            <a:avLst/>
-          </a:prstGeom>
-          <a:noFill/>
-        </p:spPr>
-        <p:txBody>
-          <a:bodyPr wrap="square" anchor="t" lIns="0" rIns="0" tIns="0" bIns="0">
-            <a:spAutoFit/>
-          </a:bodyPr>
-          <a:lstStyle/>
-          <a:p>
-            <a:pPr algn="ctr">
-              <a:lnSpc>
-                <a:spcPct val="110000"/>
-              </a:lnSpc>
-            </a:pPr>
-            <a:r>
-              <a:rPr sz="1600" b="0">
-                <a:solidFill>
-                  <a:srgbClr val="555555"/>
-                </a:solidFill>
-                <a:latin typeface="Arial"/>
-                <a:ea typeface="Arial"/>
-              </a:rPr>
-              <a:t>2018</a:t>
-            </a:r>
-          </a:p>
-        </p:txBody>
-      </p:sp>
-      <p:sp>
-        <p:nvSpPr>
-          <p:cNvPr id="135" name="Rectangle 134"/>
-          <p:cNvSpPr/>
-          <p:nvPr/>
-        </p:nvSpPr>
-        <p:spPr>
-          <a:xfrm>
-            <a:off x="15846837" y="5833872"/>
-            <a:ext cx="9144" cy="2212848"/>
-          </a:xfrm>
-          <a:prstGeom prst="rect">
-            <a:avLst/>
-          </a:prstGeom>
-          <a:solidFill>
-            <a:srgbClr val="D9D9D9"/>
-          </a:solidFill>
-          <a:ln>
-            <a:noFill/>
-          </a:ln>
-          <a:effectLst/>
-        </p:spPr>
-        <p:style>
-          <a:lnRef idx="1">
-            <a:schemeClr val="accent1"/>
-          </a:lnRef>
-          <a:fillRef idx="3">
-            <a:schemeClr val="accent1"/>
-          </a:fillRef>
-          <a:effectRef idx="2">
-            <a:schemeClr val="accent1"/>
-          </a:effectRef>
-          <a:fontRef idx="minor">
-            <a:schemeClr val="lt1"/>
-          </a:fontRef>
-        </p:style>
-        <p:txBody>
-          <a:bodyPr rtlCol="0" anchor="ctr"/>
-          <a:lstStyle/>
-          <a:p>
-            <a:pPr algn="ctr"/>
-          </a:p>
-        </p:txBody>
-      </p:sp>
-      <p:sp>
-        <p:nvSpPr>
-          <p:cNvPr id="136" name="TextBox 135"/>
-          <p:cNvSpPr txBox="1"/>
-          <p:nvPr/>
-        </p:nvSpPr>
-        <p:spPr>
-          <a:xfrm>
-            <a:off x="15531369" y="8065008"/>
-            <a:ext cx="640080" cy="256032"/>
-          </a:xfrm>
-          <a:prstGeom prst="rect">
-            <a:avLst/>
-          </a:prstGeom>
-          <a:noFill/>
-        </p:spPr>
-        <p:txBody>
-          <a:bodyPr wrap="square" anchor="t" lIns="0" rIns="0" tIns="0" bIns="0">
-            <a:spAutoFit/>
-          </a:bodyPr>
-          <a:lstStyle/>
-          <a:p>
-            <a:pPr algn="ctr">
-              <a:lnSpc>
-                <a:spcPct val="110000"/>
-              </a:lnSpc>
-            </a:pPr>
-            <a:r>
-              <a:rPr sz="1600" b="0">
-                <a:solidFill>
-                  <a:srgbClr val="555555"/>
-                </a:solidFill>
-                <a:latin typeface="Arial"/>
-                <a:ea typeface="Arial"/>
-              </a:rPr>
-              <a:t>2022</a:t>
-            </a:r>
-          </a:p>
-        </p:txBody>
-      </p:sp>
-      <p:sp>
-        <p:nvSpPr>
-          <p:cNvPr id="137" name="Rectangle 136"/>
-          <p:cNvSpPr/>
-          <p:nvPr/>
-        </p:nvSpPr>
-        <p:spPr>
-          <a:xfrm>
-            <a:off x="17072705" y="5833872"/>
-            <a:ext cx="9144" cy="2212848"/>
-          </a:xfrm>
-          <a:prstGeom prst="rect">
-            <a:avLst/>
-          </a:prstGeom>
-          <a:solidFill>
-            <a:srgbClr val="D9D9D9"/>
-          </a:solidFill>
-          <a:ln>
-            <a:noFill/>
-          </a:ln>
-          <a:effectLst/>
-        </p:spPr>
-        <p:style>
-          <a:lnRef idx="1">
-            <a:schemeClr val="accent1"/>
-          </a:lnRef>
-          <a:fillRef idx="3">
-            <a:schemeClr val="accent1"/>
-          </a:fillRef>
-          <a:effectRef idx="2">
-            <a:schemeClr val="accent1"/>
-          </a:effectRef>
-          <a:fontRef idx="minor">
-            <a:schemeClr val="lt1"/>
-          </a:fontRef>
-        </p:style>
-        <p:txBody>
-          <a:bodyPr rtlCol="0" anchor="ctr"/>
-          <a:lstStyle/>
-          <a:p>
-            <a:pPr algn="ctr"/>
-          </a:p>
-        </p:txBody>
-      </p:sp>
-      <p:sp>
-        <p:nvSpPr>
-          <p:cNvPr id="138" name="TextBox 137"/>
-          <p:cNvSpPr txBox="1"/>
-          <p:nvPr/>
-        </p:nvSpPr>
-        <p:spPr>
-          <a:xfrm>
-            <a:off x="16559784" y="8065008"/>
-            <a:ext cx="640080" cy="256032"/>
+            <a:off x="16486632" y="7863840"/>
+            <a:ext cx="640080" cy="274320"/>
           </a:xfrm>
           <a:prstGeom prst="rect">
             <a:avLst/>
@@ -20600,7 +20108,7 @@
       </p:sp>
       <p:pic>
         <p:nvPicPr>
-          <p:cNvPr id="139" name="Picture 138" descr="baidu.png"/>
+          <p:cNvPr id="127" name="Picture 126" descr="google.png"/>
           <p:cNvPicPr>
             <a:picLocks noChangeAspect="1"/>
           </p:cNvPicPr>
@@ -20614,8 +20122,8 @@
         </p:blipFill>
         <p:spPr>
           <a:xfrm>
-            <a:off x="11996928" y="5916168"/>
-            <a:ext cx="219456" cy="219456"/>
+            <a:off x="12015216" y="6181344"/>
+            <a:ext cx="836908" cy="274320"/>
           </a:xfrm>
           <a:prstGeom prst="rect">
             <a:avLst/>
@@ -20624,14 +20132,60 @@
       </p:pic>
       <p:sp>
         <p:nvSpPr>
-          <p:cNvPr id="140" name="TextBox 139"/>
+          <p:cNvPr id="128" name="Rounded Rectangle 127"/>
+          <p:cNvSpPr/>
+          <p:nvPr/>
+        </p:nvSpPr>
+        <p:spPr>
+          <a:xfrm>
+            <a:off x="13979652" y="6126480"/>
+            <a:ext cx="3147060" cy="384048"/>
+          </a:xfrm>
+          <a:prstGeom prst="roundRect">
+            <a:avLst>
+              <a:gd name="adj" fmla="val 19047"/>
+            </a:avLst>
+          </a:prstGeom>
+          <a:solidFill>
+            <a:srgbClr val="1428A0"/>
+          </a:solidFill>
+          <a:ln>
+            <a:noFill/>
+          </a:ln>
+          <a:effectLst/>
+        </p:spPr>
+        <p:style>
+          <a:lnRef idx="1">
+            <a:schemeClr val="accent1"/>
+          </a:lnRef>
+          <a:fillRef idx="3">
+            <a:schemeClr val="accent1"/>
+          </a:fillRef>
+          <a:effectRef idx="2">
+            <a:schemeClr val="accent1"/>
+          </a:effectRef>
+          <a:fontRef idx="minor">
+            <a:schemeClr val="lt1"/>
+          </a:fontRef>
+        </p:style>
+        <p:txBody>
+          <a:bodyPr rtlCol="0" anchor="ctr"/>
+          <a:lstStyle/>
+          <a:p>
+            <a:pPr algn="ctr"/>
+          </a:p>
+        </p:txBody>
+      </p:sp>
+      <p:sp>
+        <p:nvSpPr>
+          <p:cNvPr id="129" name="TextBox 128"/>
           <p:cNvSpPr txBox="1"/>
           <p:nvPr/>
         </p:nvSpPr>
         <p:spPr>
           <a:xfrm>
-            <a:off x="12252960" y="5870448"/>
-            <a:ext cx="1024128" cy="310896"/>
+            <a:off x="14107668" y="6016752"/>
+            <a:ext cx="2964180" cy="603504"/>
           </a:xfrm>
           <a:prstGeom prst="rect">
             <a:avLst/>
@@ -20650,107 +20204,21 @@
               </a:lnSpc>
             </a:pPr>
             <a:r>
-              <a:rPr sz="1600" b="1">
-                <a:solidFill>
-                  <a:srgbClr val="1A1A1A"/>
-                </a:solidFill>
-                <a:latin typeface="Arial"/>
-                <a:ea typeface="Arial"/>
-              </a:rPr>
-              <a:t>Baidu</a:t>
-            </a:r>
-          </a:p>
-        </p:txBody>
-      </p:sp>
-      <p:sp>
-        <p:nvSpPr>
-          <p:cNvPr id="141" name="Rounded Rectangle 140"/>
-          <p:cNvSpPr/>
-          <p:nvPr/>
-        </p:nvSpPr>
-        <p:spPr>
-          <a:xfrm>
-            <a:off x="13399674" y="5907024"/>
-            <a:ext cx="3800189" cy="237744"/>
-          </a:xfrm>
-          <a:prstGeom prst="roundRect">
-            <a:avLst>
-              <a:gd name="adj" fmla="val 30769"/>
-            </a:avLst>
-          </a:prstGeom>
-          <a:solidFill>
-            <a:srgbClr val="1428A0"/>
-          </a:solidFill>
-          <a:ln>
-            <a:noFill/>
-          </a:ln>
-          <a:effectLst/>
-        </p:spPr>
-        <p:style>
-          <a:lnRef idx="1">
-            <a:schemeClr val="accent1"/>
-          </a:lnRef>
-          <a:fillRef idx="3">
-            <a:schemeClr val="accent1"/>
-          </a:fillRef>
-          <a:effectRef idx="2">
-            <a:schemeClr val="accent1"/>
-          </a:effectRef>
-          <a:fontRef idx="minor">
-            <a:schemeClr val="lt1"/>
-          </a:fontRef>
-        </p:style>
-        <p:txBody>
-          <a:bodyPr rtlCol="0" anchor="ctr"/>
-          <a:lstStyle/>
-          <a:p>
-            <a:pPr algn="ctr"/>
-          </a:p>
-        </p:txBody>
-      </p:sp>
-      <p:sp>
-        <p:nvSpPr>
-          <p:cNvPr id="142" name="TextBox 141"/>
-          <p:cNvSpPr txBox="1"/>
-          <p:nvPr/>
-        </p:nvSpPr>
-        <p:spPr>
-          <a:xfrm>
-            <a:off x="13491114" y="5870448"/>
-            <a:ext cx="3690461" cy="310896"/>
-          </a:xfrm>
-          <a:prstGeom prst="rect">
-            <a:avLst/>
-          </a:prstGeom>
-          <a:noFill/>
-        </p:spPr>
-        <p:txBody>
-          <a:bodyPr wrap="square" anchor="ctr" lIns="0" rIns="0" tIns="0" bIns="0">
-            <a:spAutoFit/>
-          </a:bodyPr>
-          <a:lstStyle/>
-          <a:p>
-            <a:pPr algn="l">
-              <a:lnSpc>
-                <a:spcPct val="110000"/>
-              </a:lnSpc>
-            </a:pPr>
-            <a:r>
-              <a:rPr sz="1600" b="1">
+              <a:rPr sz="1800" b="1">
                 <a:solidFill>
                   <a:srgbClr val="FFFFFF"/>
                 </a:solidFill>
                 <a:latin typeface="Arial"/>
                 <a:ea typeface="Arial"/>
               </a:rPr>
-              <a:t>자체 SSD (SDF) · 3천 대</a:t>
+              <a:t>자체 설계 SSD</a:t>
             </a:r>
           </a:p>
         </p:txBody>
       </p:sp>
       <p:pic>
         <p:nvPicPr>
-          <p:cNvPr id="143" name="Picture 142" descr="google.png"/>
+          <p:cNvPr id="130" name="Picture 129" descr="alibabacloud.png"/>
           <p:cNvPicPr>
             <a:picLocks noChangeAspect="1"/>
           </p:cNvPicPr>
@@ -20764,8 +20232,8 @@
         </p:blipFill>
         <p:spPr>
           <a:xfrm>
-            <a:off x="11996928" y="6236207"/>
-            <a:ext cx="613732" cy="201168"/>
+            <a:off x="12015216" y="6775704"/>
+            <a:ext cx="292608" cy="292608"/>
           </a:xfrm>
           <a:prstGeom prst="rect">
             <a:avLst/>
@@ -20774,18 +20242,58 @@
       </p:pic>
       <p:sp>
         <p:nvSpPr>
-          <p:cNvPr id="144" name="Rounded Rectangle 143"/>
+          <p:cNvPr id="131" name="TextBox 130"/>
+          <p:cNvSpPr txBox="1"/>
+          <p:nvPr/>
+        </p:nvSpPr>
+        <p:spPr>
+          <a:xfrm>
+            <a:off x="12362688" y="6620256"/>
+            <a:ext cx="1005840" cy="603504"/>
+          </a:xfrm>
+          <a:prstGeom prst="rect">
+            <a:avLst/>
+          </a:prstGeom>
+          <a:noFill/>
+        </p:spPr>
+        <p:txBody>
+          <a:bodyPr wrap="square" anchor="ctr" lIns="0" rIns="0" tIns="0" bIns="0">
+            <a:spAutoFit/>
+          </a:bodyPr>
+          <a:lstStyle/>
+          <a:p>
+            <a:pPr algn="l">
+              <a:lnSpc>
+                <a:spcPct val="110000"/>
+              </a:lnSpc>
+            </a:pPr>
+            <a:r>
+              <a:rPr sz="1800" b="1">
+                <a:solidFill>
+                  <a:srgbClr val="1A1A1A"/>
+                </a:solidFill>
+                <a:latin typeface="Arial"/>
+                <a:ea typeface="Arial"/>
+              </a:rPr>
+              <a:t>Alibaba</a:t>
+            </a:r>
+          </a:p>
+        </p:txBody>
+      </p:sp>
+      <p:sp>
+        <p:nvSpPr>
+          <p:cNvPr id="132" name="Rounded Rectangle 131"/>
           <p:cNvSpPr/>
           <p:nvPr/>
         </p:nvSpPr>
         <p:spPr>
           <a:xfrm>
-            <a:off x="14012608" y="6217920"/>
-            <a:ext cx="3187255" cy="237744"/>
+            <a:off x="13979652" y="6729984"/>
+            <a:ext cx="3147060" cy="384048"/>
           </a:xfrm>
           <a:prstGeom prst="roundRect">
             <a:avLst>
-              <a:gd name="adj" fmla="val 30769"/>
+              <a:gd name="adj" fmla="val 19047"/>
             </a:avLst>
           </a:prstGeom>
           <a:solidFill>
@@ -20820,14 +20328,14 @@
       </p:sp>
       <p:sp>
         <p:nvSpPr>
-          <p:cNvPr id="145" name="TextBox 144"/>
+          <p:cNvPr id="133" name="TextBox 132"/>
           <p:cNvSpPr txBox="1"/>
           <p:nvPr/>
         </p:nvSpPr>
         <p:spPr>
           <a:xfrm>
-            <a:off x="14104048" y="6181344"/>
-            <a:ext cx="3077527" cy="310896"/>
+            <a:off x="14107668" y="6620256"/>
+            <a:ext cx="2964180" cy="603504"/>
           </a:xfrm>
           <a:prstGeom prst="rect">
             <a:avLst/>
@@ -20846,21 +20354,21 @@
               </a:lnSpc>
             </a:pPr>
             <a:r>
-              <a:rPr sz="1600" b="1">
+              <a:rPr sz="1800" b="1">
                 <a:solidFill>
                   <a:srgbClr val="FFFFFF"/>
                 </a:solidFill>
                 <a:latin typeface="Arial"/>
                 <a:ea typeface="Arial"/>
               </a:rPr>
-              <a:t>자체 설계 SSD → Titanium</a:t>
+              <a:t>자체 SSD · 컨트롤러</a:t>
             </a:r>
           </a:p>
         </p:txBody>
       </p:sp>
       <p:pic>
         <p:nvPicPr>
-          <p:cNvPr id="146" name="Picture 145" descr="alibabacloud.png"/>
+          <p:cNvPr id="134" name="Picture 133" descr="aws.png"/>
           <p:cNvPicPr>
             <a:picLocks noChangeAspect="1"/>
           </p:cNvPicPr>
@@ -20874,8 +20382,8 @@
         </p:blipFill>
         <p:spPr>
           <a:xfrm>
-            <a:off x="11996928" y="6537959"/>
-            <a:ext cx="219456" cy="219456"/>
+            <a:off x="12015216" y="7342632"/>
+            <a:ext cx="611866" cy="365760"/>
           </a:xfrm>
           <a:prstGeom prst="rect">
             <a:avLst/>
@@ -20884,14 +20392,60 @@
       </p:pic>
       <p:sp>
         <p:nvSpPr>
-          <p:cNvPr id="147" name="TextBox 146"/>
+          <p:cNvPr id="135" name="Rounded Rectangle 134"/>
+          <p:cNvSpPr/>
+          <p:nvPr/>
+        </p:nvSpPr>
+        <p:spPr>
+          <a:xfrm>
+            <a:off x="15521711" y="7333488"/>
+            <a:ext cx="1605000" cy="384048"/>
+          </a:xfrm>
+          <a:prstGeom prst="roundRect">
+            <a:avLst>
+              <a:gd name="adj" fmla="val 19047"/>
+            </a:avLst>
+          </a:prstGeom>
+          <a:solidFill>
+            <a:srgbClr val="1428A0"/>
+          </a:solidFill>
+          <a:ln>
+            <a:noFill/>
+          </a:ln>
+          <a:effectLst/>
+        </p:spPr>
+        <p:style>
+          <a:lnRef idx="1">
+            <a:schemeClr val="accent1"/>
+          </a:lnRef>
+          <a:fillRef idx="3">
+            <a:schemeClr val="accent1"/>
+          </a:fillRef>
+          <a:effectRef idx="2">
+            <a:schemeClr val="accent1"/>
+          </a:effectRef>
+          <a:fontRef idx="minor">
+            <a:schemeClr val="lt1"/>
+          </a:fontRef>
+        </p:style>
+        <p:txBody>
+          <a:bodyPr rtlCol="0" anchor="ctr"/>
+          <a:lstStyle/>
+          <a:p>
+            <a:pPr algn="ctr"/>
+          </a:p>
+        </p:txBody>
+      </p:sp>
+      <p:sp>
+        <p:nvSpPr>
+          <p:cNvPr id="136" name="TextBox 135"/>
           <p:cNvSpPr txBox="1"/>
           <p:nvPr/>
         </p:nvSpPr>
         <p:spPr>
           <a:xfrm>
-            <a:off x="12252960" y="6492240"/>
-            <a:ext cx="1024128" cy="310896"/>
+            <a:off x="15649727" y="7223760"/>
+            <a:ext cx="1422120" cy="603504"/>
           </a:xfrm>
           <a:prstGeom prst="rect">
             <a:avLst/>
@@ -20910,33 +20464,119 @@
               </a:lnSpc>
             </a:pPr>
             <a:r>
-              <a:rPr sz="1600" b="1">
-                <a:solidFill>
-                  <a:srgbClr val="1A1A1A"/>
-                </a:solidFill>
-                <a:latin typeface="Arial"/>
-                <a:ea typeface="Arial"/>
-              </a:rPr>
-              <a:t>Alibaba</a:t>
-            </a:r>
-          </a:p>
-        </p:txBody>
-      </p:sp>
-      <p:sp>
-        <p:nvSpPr>
-          <p:cNvPr id="148" name="Rounded Rectangle 147"/>
+              <a:rPr sz="1800" b="1">
+                <a:solidFill>
+                  <a:srgbClr val="FFFFFF"/>
+                </a:solidFill>
+                <a:latin typeface="Arial"/>
+                <a:ea typeface="Arial"/>
+              </a:rPr>
+              <a:t>Nitro SSD</a:t>
+            </a:r>
+          </a:p>
+        </p:txBody>
+      </p:sp>
+      <p:sp>
+        <p:nvSpPr>
+          <p:cNvPr id="137" name="Chevron 136"/>
           <p:cNvSpPr/>
           <p:nvPr/>
         </p:nvSpPr>
         <p:spPr>
           <a:xfrm>
-            <a:off x="14012608" y="6528816"/>
-            <a:ext cx="3187255" cy="237744"/>
-          </a:xfrm>
-          <a:prstGeom prst="roundRect">
-            <a:avLst>
-              <a:gd name="adj" fmla="val 30769"/>
-            </a:avLst>
+            <a:off x="5815584" y="6949440"/>
+            <a:ext cx="146304" cy="457200"/>
+          </a:xfrm>
+          <a:prstGeom prst="chevron">
+            <a:avLst/>
+          </a:prstGeom>
+          <a:solidFill>
+            <a:srgbClr val="AAB8E8"/>
+          </a:solidFill>
+          <a:ln>
+            <a:noFill/>
+          </a:ln>
+          <a:effectLst/>
+        </p:spPr>
+        <p:style>
+          <a:lnRef idx="1">
+            <a:schemeClr val="accent1"/>
+          </a:lnRef>
+          <a:fillRef idx="3">
+            <a:schemeClr val="accent1"/>
+          </a:fillRef>
+          <a:effectRef idx="2">
+            <a:schemeClr val="accent1"/>
+          </a:effectRef>
+          <a:fontRef idx="minor">
+            <a:schemeClr val="lt1"/>
+          </a:fontRef>
+        </p:style>
+        <p:txBody>
+          <a:bodyPr rtlCol="0" anchor="ctr"/>
+          <a:lstStyle/>
+          <a:p>
+            <a:pPr algn="ctr"/>
+          </a:p>
+        </p:txBody>
+      </p:sp>
+      <p:sp>
+        <p:nvSpPr>
+          <p:cNvPr id="138" name="Chevron 137"/>
+          <p:cNvSpPr/>
+          <p:nvPr/>
+        </p:nvSpPr>
+        <p:spPr>
+          <a:xfrm>
+            <a:off x="11393424" y="6492240"/>
+            <a:ext cx="146304" cy="457200"/>
+          </a:xfrm>
+          <a:prstGeom prst="chevron">
+            <a:avLst/>
+          </a:prstGeom>
+          <a:solidFill>
+            <a:srgbClr val="AAB8E8"/>
+          </a:solidFill>
+          <a:ln>
+            <a:noFill/>
+          </a:ln>
+          <a:effectLst/>
+        </p:spPr>
+        <p:style>
+          <a:lnRef idx="1">
+            <a:schemeClr val="accent1"/>
+          </a:lnRef>
+          <a:fillRef idx="3">
+            <a:schemeClr val="accent1"/>
+          </a:fillRef>
+          <a:effectRef idx="2">
+            <a:schemeClr val="accent1"/>
+          </a:effectRef>
+          <a:fontRef idx="minor">
+            <a:schemeClr val="lt1"/>
+          </a:fontRef>
+        </p:style>
+        <p:txBody>
+          <a:bodyPr rtlCol="0" anchor="ctr"/>
+          <a:lstStyle/>
+          <a:p>
+            <a:pPr algn="ctr"/>
+          </a:p>
+        </p:txBody>
+      </p:sp>
+      <p:sp>
+        <p:nvSpPr>
+          <p:cNvPr id="139" name="Rectangle 138"/>
+          <p:cNvSpPr/>
+          <p:nvPr/>
+        </p:nvSpPr>
+        <p:spPr>
+          <a:xfrm>
+            <a:off x="722376" y="8778240"/>
+            <a:ext cx="16843248" cy="731520"/>
+          </a:xfrm>
+          <a:prstGeom prst="rect">
+            <a:avLst/>
           </a:prstGeom>
           <a:solidFill>
             <a:srgbClr val="1428A0"/>
@@ -20970,14 +20610,14 @@
       </p:sp>
       <p:sp>
         <p:nvSpPr>
-          <p:cNvPr id="149" name="TextBox 148"/>
+          <p:cNvPr id="140" name="TextBox 139"/>
           <p:cNvSpPr txBox="1"/>
           <p:nvPr/>
         </p:nvSpPr>
         <p:spPr>
           <a:xfrm>
-            <a:off x="14104048" y="6492240"/>
-            <a:ext cx="3077527" cy="310896"/>
+            <a:off x="1088136" y="8778240"/>
+            <a:ext cx="1234440" cy="731520"/>
           </a:xfrm>
           <a:prstGeom prst="rect">
             <a:avLst/>
@@ -20996,98 +20636,28 @@
               </a:lnSpc>
             </a:pPr>
             <a:r>
-              <a:rPr sz="1600" b="1">
-                <a:solidFill>
-                  <a:srgbClr val="FFFFFF"/>
-                </a:solidFill>
-                <a:latin typeface="Arial"/>
-                <a:ea typeface="Arial"/>
-              </a:rPr>
-              <a:t>AliFlash → 컨트롤러 50만+</a:t>
-            </a:r>
-          </a:p>
-        </p:txBody>
-      </p:sp>
-      <p:pic>
-        <p:nvPicPr>
-          <p:cNvPr id="150" name="Picture 149" descr="microsoft.png"/>
-          <p:cNvPicPr>
-            <a:picLocks noChangeAspect="1"/>
-          </p:cNvPicPr>
-          <p:nvPr/>
-        </p:nvPicPr>
-        <p:blipFill>
-          <a:blip r:embed="rId8"/>
-          <a:stretch>
-            <a:fillRect/>
-          </a:stretch>
-        </p:blipFill>
-        <p:spPr>
-          <a:xfrm>
-            <a:off x="11996928" y="6857999"/>
-            <a:ext cx="938089" cy="201168"/>
-          </a:xfrm>
-          <a:prstGeom prst="rect">
-            <a:avLst/>
-          </a:prstGeom>
-        </p:spPr>
-      </p:pic>
-      <p:sp>
-        <p:nvSpPr>
-          <p:cNvPr id="151" name="Rounded Rectangle 150"/>
-          <p:cNvSpPr/>
-          <p:nvPr/>
-        </p:nvSpPr>
-        <p:spPr>
-          <a:xfrm>
-            <a:off x="14625542" y="6839712"/>
-            <a:ext cx="2574321" cy="237744"/>
-          </a:xfrm>
-          <a:prstGeom prst="roundRect">
-            <a:avLst>
-              <a:gd name="adj" fmla="val 30769"/>
-            </a:avLst>
-          </a:prstGeom>
-          <a:solidFill>
-            <a:srgbClr val="D9D9D9"/>
-          </a:solidFill>
-          <a:ln>
-            <a:noFill/>
-          </a:ln>
-          <a:effectLst/>
-        </p:spPr>
-        <p:style>
-          <a:lnRef idx="1">
-            <a:schemeClr val="accent1"/>
-          </a:lnRef>
-          <a:fillRef idx="3">
-            <a:schemeClr val="accent1"/>
-          </a:fillRef>
-          <a:effectRef idx="2">
-            <a:schemeClr val="accent1"/>
-          </a:effectRef>
-          <a:fontRef idx="minor">
-            <a:schemeClr val="lt1"/>
-          </a:fontRef>
-        </p:style>
-        <p:txBody>
-          <a:bodyPr rtlCol="0" anchor="ctr"/>
-          <a:lstStyle/>
-          <a:p>
-            <a:pPr algn="ctr"/>
-          </a:p>
-        </p:txBody>
-      </p:sp>
-      <p:sp>
-        <p:nvSpPr>
-          <p:cNvPr id="152" name="TextBox 151"/>
+              <a:rPr sz="2000" b="0">
+                <a:solidFill>
+                  <a:srgbClr val="AAB8E8"/>
+                </a:solidFill>
+                <a:latin typeface="Arial"/>
+                <a:ea typeface="Arial"/>
+              </a:rPr>
+              <a:t>결론</a:t>
+            </a:r>
+          </a:p>
+        </p:txBody>
+      </p:sp>
+      <p:sp>
+        <p:nvSpPr>
+          <p:cNvPr id="141" name="TextBox 140"/>
           <p:cNvSpPr txBox="1"/>
           <p:nvPr/>
         </p:nvSpPr>
         <p:spPr>
           <a:xfrm>
-            <a:off x="14716982" y="6803136"/>
-            <a:ext cx="2464593" cy="310896"/>
+            <a:off x="2322576" y="8778240"/>
+            <a:ext cx="15060168" cy="731520"/>
           </a:xfrm>
           <a:prstGeom prst="rect">
             <a:avLst/>
@@ -21106,589 +20676,6 @@
               </a:lnSpc>
             </a:pPr>
             <a:r>
-              <a:rPr sz="1600" b="1">
-                <a:solidFill>
-                  <a:srgbClr val="1A1A1A"/>
-                </a:solidFill>
-                <a:latin typeface="Arial"/>
-                <a:ea typeface="Arial"/>
-              </a:rPr>
-              <a:t>Denali → OCP SSD 스펙</a:t>
-            </a:r>
-          </a:p>
-        </p:txBody>
-      </p:sp>
-      <p:pic>
-        <p:nvPicPr>
-          <p:cNvPr id="153" name="Picture 152" descr="meta.png"/>
-          <p:cNvPicPr>
-            <a:picLocks noChangeAspect="1"/>
-          </p:cNvPicPr>
-          <p:nvPr/>
-        </p:nvPicPr>
-        <p:blipFill>
-          <a:blip r:embed="rId9"/>
-          <a:stretch>
-            <a:fillRect/>
-          </a:stretch>
-        </p:blipFill>
-        <p:spPr>
-          <a:xfrm>
-            <a:off x="11996928" y="7171867"/>
-            <a:ext cx="960120" cy="195224"/>
-          </a:xfrm>
-          <a:prstGeom prst="rect">
-            <a:avLst/>
-          </a:prstGeom>
-        </p:spPr>
-      </p:pic>
-      <p:sp>
-        <p:nvSpPr>
-          <p:cNvPr id="154" name="Rounded Rectangle 153"/>
-          <p:cNvSpPr/>
-          <p:nvPr/>
-        </p:nvSpPr>
-        <p:spPr>
-          <a:xfrm>
-            <a:off x="15238476" y="7150608"/>
-            <a:ext cx="1961387" cy="237744"/>
-          </a:xfrm>
-          <a:prstGeom prst="roundRect">
-            <a:avLst>
-              <a:gd name="adj" fmla="val 30769"/>
-            </a:avLst>
-          </a:prstGeom>
-          <a:solidFill>
-            <a:srgbClr val="D9D9D9"/>
-          </a:solidFill>
-          <a:ln>
-            <a:noFill/>
-          </a:ln>
-          <a:effectLst/>
-        </p:spPr>
-        <p:style>
-          <a:lnRef idx="1">
-            <a:schemeClr val="accent1"/>
-          </a:lnRef>
-          <a:fillRef idx="3">
-            <a:schemeClr val="accent1"/>
-          </a:fillRef>
-          <a:effectRef idx="2">
-            <a:schemeClr val="accent1"/>
-          </a:effectRef>
-          <a:fontRef idx="minor">
-            <a:schemeClr val="lt1"/>
-          </a:fontRef>
-        </p:style>
-        <p:txBody>
-          <a:bodyPr rtlCol="0" anchor="ctr"/>
-          <a:lstStyle/>
-          <a:p>
-            <a:pPr algn="ctr"/>
-          </a:p>
-        </p:txBody>
-      </p:sp>
-      <p:sp>
-        <p:nvSpPr>
-          <p:cNvPr id="155" name="TextBox 154"/>
-          <p:cNvSpPr txBox="1"/>
-          <p:nvPr/>
-        </p:nvSpPr>
-        <p:spPr>
-          <a:xfrm>
-            <a:off x="15329916" y="7114032"/>
-            <a:ext cx="1851659" cy="310896"/>
-          </a:xfrm>
-          <a:prstGeom prst="rect">
-            <a:avLst/>
-          </a:prstGeom>
-          <a:noFill/>
-        </p:spPr>
-        <p:txBody>
-          <a:bodyPr wrap="square" anchor="ctr" lIns="0" rIns="0" tIns="0" bIns="0">
-            <a:spAutoFit/>
-          </a:bodyPr>
-          <a:lstStyle/>
-          <a:p>
-            <a:pPr algn="l">
-              <a:lnSpc>
-                <a:spcPct val="110000"/>
-              </a:lnSpc>
-            </a:pPr>
-            <a:r>
-              <a:rPr sz="1600" b="1">
-                <a:solidFill>
-                  <a:srgbClr val="1A1A1A"/>
-                </a:solidFill>
-                <a:latin typeface="Arial"/>
-                <a:ea typeface="Arial"/>
-              </a:rPr>
-              <a:t>OCP 스펙 → FDP</a:t>
-            </a:r>
-          </a:p>
-        </p:txBody>
-      </p:sp>
-      <p:pic>
-        <p:nvPicPr>
-          <p:cNvPr id="156" name="Picture 155" descr="aws.png"/>
-          <p:cNvPicPr>
-            <a:picLocks noChangeAspect="1"/>
-          </p:cNvPicPr>
-          <p:nvPr/>
-        </p:nvPicPr>
-        <p:blipFill>
-          <a:blip r:embed="rId10"/>
-          <a:stretch>
-            <a:fillRect/>
-          </a:stretch>
-        </p:blipFill>
-        <p:spPr>
-          <a:xfrm>
-            <a:off x="11996928" y="7452360"/>
-            <a:ext cx="428306" cy="256032"/>
-          </a:xfrm>
-          <a:prstGeom prst="rect">
-            <a:avLst/>
-          </a:prstGeom>
-        </p:spPr>
-      </p:pic>
-      <p:sp>
-        <p:nvSpPr>
-          <p:cNvPr id="157" name="Rounded Rectangle 156"/>
-          <p:cNvSpPr/>
-          <p:nvPr/>
-        </p:nvSpPr>
-        <p:spPr>
-          <a:xfrm>
-            <a:off x="15514296" y="7461504"/>
-            <a:ext cx="1685567" cy="237744"/>
-          </a:xfrm>
-          <a:prstGeom prst="roundRect">
-            <a:avLst>
-              <a:gd name="adj" fmla="val 30769"/>
-            </a:avLst>
-          </a:prstGeom>
-          <a:solidFill>
-            <a:srgbClr val="1428A0"/>
-          </a:solidFill>
-          <a:ln>
-            <a:noFill/>
-          </a:ln>
-          <a:effectLst/>
-        </p:spPr>
-        <p:style>
-          <a:lnRef idx="1">
-            <a:schemeClr val="accent1"/>
-          </a:lnRef>
-          <a:fillRef idx="3">
-            <a:schemeClr val="accent1"/>
-          </a:fillRef>
-          <a:effectRef idx="2">
-            <a:schemeClr val="accent1"/>
-          </a:effectRef>
-          <a:fontRef idx="minor">
-            <a:schemeClr val="lt1"/>
-          </a:fontRef>
-        </p:style>
-        <p:txBody>
-          <a:bodyPr rtlCol="0" anchor="ctr"/>
-          <a:lstStyle/>
-          <a:p>
-            <a:pPr algn="ctr"/>
-          </a:p>
-        </p:txBody>
-      </p:sp>
-      <p:sp>
-        <p:nvSpPr>
-          <p:cNvPr id="158" name="TextBox 157"/>
-          <p:cNvSpPr txBox="1"/>
-          <p:nvPr/>
-        </p:nvSpPr>
-        <p:spPr>
-          <a:xfrm>
-            <a:off x="13185648" y="7424928"/>
-            <a:ext cx="2237208" cy="310896"/>
-          </a:xfrm>
-          <a:prstGeom prst="rect">
-            <a:avLst/>
-          </a:prstGeom>
-          <a:noFill/>
-        </p:spPr>
-        <p:txBody>
-          <a:bodyPr wrap="square" anchor="ctr" lIns="0" rIns="0" tIns="0" bIns="0">
-            <a:spAutoFit/>
-          </a:bodyPr>
-          <a:lstStyle/>
-          <a:p>
-            <a:pPr algn="r">
-              <a:lnSpc>
-                <a:spcPct val="110000"/>
-              </a:lnSpc>
-            </a:pPr>
-            <a:r>
-              <a:rPr sz="1600" b="1">
-                <a:solidFill>
-                  <a:srgbClr val="1428A0"/>
-                </a:solidFill>
-                <a:latin typeface="Arial"/>
-                <a:ea typeface="Arial"/>
-              </a:rPr>
-              <a:t>Nitro SSD · 지연 -60%</a:t>
-            </a:r>
-          </a:p>
-        </p:txBody>
-      </p:sp>
-      <p:pic>
-        <p:nvPicPr>
-          <p:cNvPr id="159" name="Picture 158" descr="bytedance.png"/>
-          <p:cNvPicPr>
-            <a:picLocks noChangeAspect="1"/>
-          </p:cNvPicPr>
-          <p:nvPr/>
-        </p:nvPicPr>
-        <p:blipFill>
-          <a:blip r:embed="rId11"/>
-          <a:stretch>
-            <a:fillRect/>
-          </a:stretch>
-        </p:blipFill>
-        <p:spPr>
-          <a:xfrm>
-            <a:off x="11996928" y="7781544"/>
-            <a:ext cx="219456" cy="219456"/>
-          </a:xfrm>
-          <a:prstGeom prst="rect">
-            <a:avLst/>
-          </a:prstGeom>
-        </p:spPr>
-      </p:pic>
-      <p:sp>
-        <p:nvSpPr>
-          <p:cNvPr id="160" name="TextBox 159"/>
-          <p:cNvSpPr txBox="1"/>
-          <p:nvPr/>
-        </p:nvSpPr>
-        <p:spPr>
-          <a:xfrm>
-            <a:off x="12252960" y="7735824"/>
-            <a:ext cx="1024128" cy="310896"/>
-          </a:xfrm>
-          <a:prstGeom prst="rect">
-            <a:avLst/>
-          </a:prstGeom>
-          <a:noFill/>
-        </p:spPr>
-        <p:txBody>
-          <a:bodyPr wrap="square" anchor="ctr" lIns="0" rIns="0" tIns="0" bIns="0">
-            <a:spAutoFit/>
-          </a:bodyPr>
-          <a:lstStyle/>
-          <a:p>
-            <a:pPr algn="l">
-              <a:lnSpc>
-                <a:spcPct val="110000"/>
-              </a:lnSpc>
-            </a:pPr>
-            <a:r>
-              <a:rPr sz="1600" b="1">
-                <a:solidFill>
-                  <a:srgbClr val="1A1A1A"/>
-                </a:solidFill>
-                <a:latin typeface="Arial"/>
-                <a:ea typeface="Arial"/>
-              </a:rPr>
-              <a:t>ByteDance</a:t>
-            </a:r>
-          </a:p>
-        </p:txBody>
-      </p:sp>
-      <p:sp>
-        <p:nvSpPr>
-          <p:cNvPr id="161" name="Rounded Rectangle 160"/>
-          <p:cNvSpPr/>
-          <p:nvPr/>
-        </p:nvSpPr>
-        <p:spPr>
-          <a:xfrm>
-            <a:off x="17077277" y="7772400"/>
-            <a:ext cx="122586" cy="237744"/>
-          </a:xfrm>
-          <a:prstGeom prst="roundRect">
-            <a:avLst>
-              <a:gd name="adj" fmla="val 50000"/>
-            </a:avLst>
-          </a:prstGeom>
-          <a:noFill/>
-          <a:ln w="12700">
-            <a:solidFill>
-              <a:srgbClr val="1428A0"/>
-            </a:solidFill>
-            <a:prstDash val="dash"/>
-          </a:ln>
-          <a:effectLst/>
-        </p:spPr>
-        <p:style>
-          <a:lnRef idx="1">
-            <a:schemeClr val="accent1"/>
-          </a:lnRef>
-          <a:fillRef idx="3">
-            <a:schemeClr val="accent1"/>
-          </a:fillRef>
-          <a:effectRef idx="2">
-            <a:schemeClr val="accent1"/>
-          </a:effectRef>
-          <a:fontRef idx="minor">
-            <a:schemeClr val="lt1"/>
-          </a:fontRef>
-        </p:style>
-        <p:txBody>
-          <a:bodyPr rtlCol="0" anchor="ctr"/>
-          <a:lstStyle/>
-          <a:p>
-            <a:pPr algn="ctr"/>
-          </a:p>
-        </p:txBody>
-      </p:sp>
-      <p:sp>
-        <p:nvSpPr>
-          <p:cNvPr id="162" name="TextBox 161"/>
-          <p:cNvSpPr txBox="1"/>
-          <p:nvPr/>
-        </p:nvSpPr>
-        <p:spPr>
-          <a:xfrm>
-            <a:off x="13185648" y="7735824"/>
-            <a:ext cx="3800189" cy="310896"/>
-          </a:xfrm>
-          <a:prstGeom prst="rect">
-            <a:avLst/>
-          </a:prstGeom>
-          <a:noFill/>
-        </p:spPr>
-        <p:txBody>
-          <a:bodyPr wrap="square" anchor="ctr" lIns="0" rIns="0" tIns="0" bIns="0">
-            <a:spAutoFit/>
-          </a:bodyPr>
-          <a:lstStyle/>
-          <a:p>
-            <a:pPr algn="r">
-              <a:lnSpc>
-                <a:spcPct val="110000"/>
-              </a:lnSpc>
-            </a:pPr>
-            <a:r>
-              <a:rPr sz="1600" b="1">
-                <a:solidFill>
-                  <a:srgbClr val="1428A0"/>
-                </a:solidFill>
-                <a:latin typeface="Arial"/>
-                <a:ea typeface="Arial"/>
-              </a:rPr>
-              <a:t>사내 SSD 개발 (FMS'26)</a:t>
-            </a:r>
-          </a:p>
-        </p:txBody>
-      </p:sp>
-      <p:sp>
-        <p:nvSpPr>
-          <p:cNvPr id="163" name="Chevron 162"/>
-          <p:cNvSpPr/>
-          <p:nvPr/>
-        </p:nvSpPr>
-        <p:spPr>
-          <a:xfrm>
-            <a:off x="5815584" y="6949440"/>
-            <a:ext cx="146304" cy="457200"/>
-          </a:xfrm>
-          <a:prstGeom prst="chevron">
-            <a:avLst/>
-          </a:prstGeom>
-          <a:solidFill>
-            <a:srgbClr val="AAB8E8"/>
-          </a:solidFill>
-          <a:ln>
-            <a:noFill/>
-          </a:ln>
-          <a:effectLst/>
-        </p:spPr>
-        <p:style>
-          <a:lnRef idx="1">
-            <a:schemeClr val="accent1"/>
-          </a:lnRef>
-          <a:fillRef idx="3">
-            <a:schemeClr val="accent1"/>
-          </a:fillRef>
-          <a:effectRef idx="2">
-            <a:schemeClr val="accent1"/>
-          </a:effectRef>
-          <a:fontRef idx="minor">
-            <a:schemeClr val="lt1"/>
-          </a:fontRef>
-        </p:style>
-        <p:txBody>
-          <a:bodyPr rtlCol="0" anchor="ctr"/>
-          <a:lstStyle/>
-          <a:p>
-            <a:pPr algn="ctr"/>
-          </a:p>
-        </p:txBody>
-      </p:sp>
-      <p:sp>
-        <p:nvSpPr>
-          <p:cNvPr id="164" name="Chevron 163"/>
-          <p:cNvSpPr/>
-          <p:nvPr/>
-        </p:nvSpPr>
-        <p:spPr>
-          <a:xfrm>
-            <a:off x="11393424" y="6492240"/>
-            <a:ext cx="146304" cy="457200"/>
-          </a:xfrm>
-          <a:prstGeom prst="chevron">
-            <a:avLst/>
-          </a:prstGeom>
-          <a:solidFill>
-            <a:srgbClr val="AAB8E8"/>
-          </a:solidFill>
-          <a:ln>
-            <a:noFill/>
-          </a:ln>
-          <a:effectLst/>
-        </p:spPr>
-        <p:style>
-          <a:lnRef idx="1">
-            <a:schemeClr val="accent1"/>
-          </a:lnRef>
-          <a:fillRef idx="3">
-            <a:schemeClr val="accent1"/>
-          </a:fillRef>
-          <a:effectRef idx="2">
-            <a:schemeClr val="accent1"/>
-          </a:effectRef>
-          <a:fontRef idx="minor">
-            <a:schemeClr val="lt1"/>
-          </a:fontRef>
-        </p:style>
-        <p:txBody>
-          <a:bodyPr rtlCol="0" anchor="ctr"/>
-          <a:lstStyle/>
-          <a:p>
-            <a:pPr algn="ctr"/>
-          </a:p>
-        </p:txBody>
-      </p:sp>
-      <p:sp>
-        <p:nvSpPr>
-          <p:cNvPr id="165" name="Rectangle 164"/>
-          <p:cNvSpPr/>
-          <p:nvPr/>
-        </p:nvSpPr>
-        <p:spPr>
-          <a:xfrm>
-            <a:off x="722376" y="8778240"/>
-            <a:ext cx="16843248" cy="731520"/>
-          </a:xfrm>
-          <a:prstGeom prst="rect">
-            <a:avLst/>
-          </a:prstGeom>
-          <a:solidFill>
-            <a:srgbClr val="1428A0"/>
-          </a:solidFill>
-          <a:ln>
-            <a:noFill/>
-          </a:ln>
-          <a:effectLst/>
-        </p:spPr>
-        <p:style>
-          <a:lnRef idx="1">
-            <a:schemeClr val="accent1"/>
-          </a:lnRef>
-          <a:fillRef idx="3">
-            <a:schemeClr val="accent1"/>
-          </a:fillRef>
-          <a:effectRef idx="2">
-            <a:schemeClr val="accent1"/>
-          </a:effectRef>
-          <a:fontRef idx="minor">
-            <a:schemeClr val="lt1"/>
-          </a:fontRef>
-        </p:style>
-        <p:txBody>
-          <a:bodyPr rtlCol="0" anchor="ctr"/>
-          <a:lstStyle/>
-          <a:p>
-            <a:pPr algn="ctr"/>
-          </a:p>
-        </p:txBody>
-      </p:sp>
-      <p:sp>
-        <p:nvSpPr>
-          <p:cNvPr id="166" name="TextBox 165"/>
-          <p:cNvSpPr txBox="1"/>
-          <p:nvPr/>
-        </p:nvSpPr>
-        <p:spPr>
-          <a:xfrm>
-            <a:off x="1088136" y="8778240"/>
-            <a:ext cx="1234440" cy="731520"/>
-          </a:xfrm>
-          <a:prstGeom prst="rect">
-            <a:avLst/>
-          </a:prstGeom>
-          <a:noFill/>
-        </p:spPr>
-        <p:txBody>
-          <a:bodyPr wrap="square" anchor="ctr" lIns="0" rIns="0" tIns="0" bIns="0">
-            <a:spAutoFit/>
-          </a:bodyPr>
-          <a:lstStyle/>
-          <a:p>
-            <a:pPr algn="l">
-              <a:lnSpc>
-                <a:spcPct val="110000"/>
-              </a:lnSpc>
-            </a:pPr>
-            <a:r>
-              <a:rPr sz="2000" b="0">
-                <a:solidFill>
-                  <a:srgbClr val="AAB8E8"/>
-                </a:solidFill>
-                <a:latin typeface="Arial"/>
-                <a:ea typeface="Arial"/>
-              </a:rPr>
-              <a:t>결론</a:t>
-            </a:r>
-          </a:p>
-        </p:txBody>
-      </p:sp>
-      <p:sp>
-        <p:nvSpPr>
-          <p:cNvPr id="167" name="TextBox 166"/>
-          <p:cNvSpPr txBox="1"/>
-          <p:nvPr/>
-        </p:nvSpPr>
-        <p:spPr>
-          <a:xfrm>
-            <a:off x="2322576" y="8778240"/>
-            <a:ext cx="15060168" cy="731520"/>
-          </a:xfrm>
-          <a:prstGeom prst="rect">
-            <a:avLst/>
-          </a:prstGeom>
-          <a:noFill/>
-        </p:spPr>
-        <p:txBody>
-          <a:bodyPr wrap="square" anchor="ctr" lIns="0" rIns="0" tIns="0" bIns="0">
-            <a:spAutoFit/>
-          </a:bodyPr>
-          <a:lstStyle/>
-          <a:p>
-            <a:pPr algn="l">
-              <a:lnSpc>
-                <a:spcPct val="110000"/>
-              </a:lnSpc>
-            </a:pPr>
-            <a:r>
               <a:rPr sz="2400" b="1">
                 <a:solidFill>
                   <a:srgbClr val="FFFFFF"/>
@@ -21703,7 +20690,7 @@
       </p:sp>
       <p:sp>
         <p:nvSpPr>
-          <p:cNvPr id="168" name="TextBox 167"/>
+          <p:cNvPr id="142" name="TextBox 141"/>
           <p:cNvSpPr txBox="1"/>
           <p:nvPr/>
         </p:nvSpPr>
@@ -21736,14 +20723,14 @@
                 <a:latin typeface="Arial"/>
                 <a:ea typeface="Arial"/>
               </a:rPr>
-              <a:t>출처: 성장 원장(Intel S3700 · 삼성 PM1725~PM1763 · Micron 9650 사양, NAND $/GB = IBM, 명목) · 고객 캐시 DWPD(Kangaroo · KV 실측 · Baleen) · 해법 사다리 원장(스트림 · NVMe 1.4 · FDP · CacheLib 3.22 → 1.03) · 자체 설계 원장(Baidu · Google · Alibaba · OCP · AWS · ByteDance) · 일부 수치는 검색 확인 · 부품 이미지는 3D 렌더</a:t>
-            </a:r>
-          </a:p>
-        </p:txBody>
-      </p:sp>
-      <p:sp>
-        <p:nvSpPr>
-          <p:cNvPr id="169" name="TextBox 168"/>
+              <a:t>출처: 성장 원장(Intel · 삼성 · Micron 사양, NAND $/GB는 IBM 명목) · 고객 캐시 DWPD(Kangaroo · KV 실측 · Baleen) · 해법 사다리 원장 · 자체 설계 원장(Google · Alibaba · AWS) · 그래프 세로축은 로그 축 · 일부 수치는 검색 확인 · 부품 이미지는 3D 렌더</a:t>
+            </a:r>
+          </a:p>
+        </p:txBody>
+      </p:sp>
+      <p:sp>
+        <p:nvSpPr>
+          <p:cNvPr id="143" name="TextBox 142"/>
           <p:cNvSpPr txBox="1"/>
           <p:nvPr/>
         </p:nvSpPr>

--- a/outputs/presentation/ssd-future-ready-strategy.pptx
+++ b/outputs/presentation/ssd-future-ready-strategy.pptx
@@ -16714,8 +16714,8 @@
         </p:nvSpPr>
         <p:spPr>
           <a:xfrm>
-            <a:off x="722376" y="5925312"/>
-            <a:ext cx="146304" cy="146304"/>
+            <a:off x="722376" y="5934456"/>
+            <a:ext cx="128016" cy="128016"/>
           </a:xfrm>
           <a:prstGeom prst="ellipse">
             <a:avLst/>
@@ -16798,8 +16798,8 @@
         </p:nvSpPr>
         <p:spPr>
           <a:xfrm>
-            <a:off x="1645920" y="5925312"/>
-            <a:ext cx="146304" cy="146304"/>
+            <a:off x="1645920" y="5934456"/>
+            <a:ext cx="128016" cy="128016"/>
           </a:xfrm>
           <a:prstGeom prst="ellipse">
             <a:avLst/>
@@ -16882,8 +16882,8 @@
         </p:nvSpPr>
         <p:spPr>
           <a:xfrm>
-            <a:off x="3662172" y="5925312"/>
-            <a:ext cx="146304" cy="146304"/>
+            <a:off x="3662172" y="5934456"/>
+            <a:ext cx="128016" cy="128016"/>
           </a:xfrm>
           <a:prstGeom prst="ellipse">
             <a:avLst/>
@@ -16966,8 +16966,8 @@
         </p:nvSpPr>
         <p:spPr>
           <a:xfrm>
-            <a:off x="4777740" y="5925312"/>
-            <a:ext cx="146304" cy="146304"/>
+            <a:off x="4777740" y="5934456"/>
+            <a:ext cx="128016" cy="128016"/>
           </a:xfrm>
           <a:prstGeom prst="ellipse">
             <a:avLst/>
@@ -17050,8 +17050,8 @@
         </p:nvSpPr>
         <p:spPr>
           <a:xfrm>
-            <a:off x="6793992" y="5925312"/>
-            <a:ext cx="146304" cy="146304"/>
+            <a:off x="6793992" y="5934456"/>
+            <a:ext cx="128016" cy="128016"/>
           </a:xfrm>
           <a:prstGeom prst="ellipse">
             <a:avLst/>
@@ -17134,8 +17134,8 @@
         </p:nvSpPr>
         <p:spPr>
           <a:xfrm>
-            <a:off x="8069579" y="5925312"/>
-            <a:ext cx="146304" cy="146304"/>
+            <a:off x="8069579" y="5934456"/>
+            <a:ext cx="128016" cy="128016"/>
           </a:xfrm>
           <a:prstGeom prst="ellipse">
             <a:avLst/>
@@ -17218,8 +17218,8 @@
         </p:nvSpPr>
         <p:spPr>
           <a:xfrm>
-            <a:off x="9756648" y="5925312"/>
-            <a:ext cx="146304" cy="146304"/>
+            <a:off x="9756648" y="5934456"/>
+            <a:ext cx="128016" cy="128016"/>
           </a:xfrm>
           <a:prstGeom prst="ellipse">
             <a:avLst/>
@@ -17961,20 +17961,25 @@
       </p:sp>
       <p:sp>
         <p:nvSpPr>
-          <p:cNvPr id="73" name="Oval 72"/>
+          <p:cNvPr id="73" name="Right Arrow 72"/>
           <p:cNvSpPr/>
           <p:nvPr/>
         </p:nvSpPr>
         <p:spPr>
-          <a:xfrm>
-            <a:off x="2065200" y="6865620"/>
-            <a:ext cx="155448" cy="155448"/>
-          </a:xfrm>
-          <a:prstGeom prst="ellipse">
-            <a:avLst/>
-          </a:prstGeom>
-          <a:solidFill>
-            <a:srgbClr val="1A9E9E"/>
+          <a:xfrm rot="236725">
+            <a:off x="1585128" y="7031736"/>
+            <a:ext cx="9479846" cy="475488"/>
+          </a:xfrm>
+          <a:prstGeom prst="rightArrow">
+            <a:avLst>
+              <a:gd name="adj1" fmla="val 46000"/>
+              <a:gd name="adj2" fmla="val 90000"/>
+            </a:avLst>
+          </a:prstGeom>
+          <a:solidFill>
+            <a:srgbClr val="1428A0">
+              <a:alpha val="14000"/>
+            </a:srgbClr>
           </a:solidFill>
           <a:ln>
             <a:noFill/>
@@ -18011,8 +18016,8 @@
         </p:nvSpPr>
         <p:spPr>
           <a:xfrm>
-            <a:off x="3293431" y="6865620"/>
-            <a:ext cx="155448" cy="155448"/>
+            <a:off x="2111056" y="6893052"/>
+            <a:ext cx="100584" cy="100584"/>
           </a:xfrm>
           <a:prstGeom prst="ellipse">
             <a:avLst/>
@@ -18055,8 +18060,8 @@
         </p:nvSpPr>
         <p:spPr>
           <a:xfrm>
-            <a:off x="5135778" y="7216282"/>
-            <a:ext cx="155448" cy="155448"/>
+            <a:off x="3339287" y="6893052"/>
+            <a:ext cx="100584" cy="100584"/>
           </a:xfrm>
           <a:prstGeom prst="ellipse">
             <a:avLst/>
@@ -18099,8 +18104,8 @@
         </p:nvSpPr>
         <p:spPr>
           <a:xfrm>
-            <a:off x="6978125" y="7206679"/>
-            <a:ext cx="155448" cy="155448"/>
+            <a:off x="5181633" y="7243714"/>
+            <a:ext cx="100584" cy="100584"/>
           </a:xfrm>
           <a:prstGeom prst="ellipse">
             <a:avLst/>
@@ -18143,8 +18148,8 @@
         </p:nvSpPr>
         <p:spPr>
           <a:xfrm>
-            <a:off x="8206356" y="7206679"/>
-            <a:ext cx="155448" cy="155448"/>
+            <a:off x="7023980" y="7234111"/>
+            <a:ext cx="100584" cy="100584"/>
           </a:xfrm>
           <a:prstGeom prst="ellipse">
             <a:avLst/>
@@ -18187,8 +18192,8 @@
         </p:nvSpPr>
         <p:spPr>
           <a:xfrm>
-            <a:off x="9434587" y="7206679"/>
-            <a:ext cx="155448" cy="155448"/>
+            <a:off x="8252211" y="7234111"/>
+            <a:ext cx="100584" cy="100584"/>
           </a:xfrm>
           <a:prstGeom prst="ellipse">
             <a:avLst/>
@@ -18231,16 +18236,60 @@
         </p:nvSpPr>
         <p:spPr>
           <a:xfrm>
-            <a:off x="5749893" y="7973810"/>
-            <a:ext cx="155448" cy="155448"/>
+            <a:off x="9480442" y="7234111"/>
+            <a:ext cx="100584" cy="100584"/>
           </a:xfrm>
           <a:prstGeom prst="ellipse">
             <a:avLst/>
           </a:prstGeom>
           <a:solidFill>
+            <a:srgbClr val="1A9E9E"/>
+          </a:solidFill>
+          <a:ln>
+            <a:noFill/>
+          </a:ln>
+          <a:effectLst/>
+        </p:spPr>
+        <p:style>
+          <a:lnRef idx="1">
+            <a:schemeClr val="accent1"/>
+          </a:lnRef>
+          <a:fillRef idx="3">
+            <a:schemeClr val="accent1"/>
+          </a:fillRef>
+          <a:effectRef idx="2">
+            <a:schemeClr val="accent1"/>
+          </a:effectRef>
+          <a:fontRef idx="minor">
+            <a:schemeClr val="lt1"/>
+          </a:fontRef>
+        </p:style>
+        <p:txBody>
+          <a:bodyPr rtlCol="0" anchor="ctr"/>
+          <a:lstStyle/>
+          <a:p>
+            <a:pPr algn="ctr"/>
+          </a:p>
+        </p:txBody>
+      </p:sp>
+      <p:sp>
+        <p:nvSpPr>
+          <p:cNvPr id="80" name="Oval 79"/>
+          <p:cNvSpPr/>
+          <p:nvPr/>
+        </p:nvSpPr>
+        <p:spPr>
+          <a:xfrm>
+            <a:off x="5795749" y="8001242"/>
+            <a:ext cx="100584" cy="100584"/>
+          </a:xfrm>
+          <a:prstGeom prst="ellipse">
+            <a:avLst/>
+          </a:prstGeom>
+          <a:solidFill>
             <a:srgbClr val="FFFFFF"/>
           </a:solidFill>
-          <a:ln w="25400">
+          <a:ln w="19050">
             <a:solidFill>
               <a:srgbClr val="1A9E9E"/>
             </a:solidFill>
@@ -18271,14 +18320,14 @@
       </p:sp>
       <p:sp>
         <p:nvSpPr>
-          <p:cNvPr id="80" name="Oval 79"/>
+          <p:cNvPr id="81" name="Oval 80"/>
           <p:cNvSpPr/>
           <p:nvPr/>
         </p:nvSpPr>
         <p:spPr>
           <a:xfrm>
-            <a:off x="7592240" y="7770462"/>
-            <a:ext cx="155448" cy="155448"/>
+            <a:off x="7638096" y="7797894"/>
+            <a:ext cx="100584" cy="100584"/>
           </a:xfrm>
           <a:prstGeom prst="ellipse">
             <a:avLst/>
@@ -18286,7 +18335,7 @@
           <a:solidFill>
             <a:srgbClr val="FFFFFF"/>
           </a:solidFill>
-          <a:ln w="25400">
+          <a:ln w="19050">
             <a:solidFill>
               <a:srgbClr val="1A9E9E"/>
             </a:solidFill>
@@ -18317,14 +18366,14 @@
       </p:sp>
       <p:sp>
         <p:nvSpPr>
-          <p:cNvPr id="81" name="Oval 80"/>
+          <p:cNvPr id="82" name="Oval 81"/>
           <p:cNvSpPr/>
           <p:nvPr/>
         </p:nvSpPr>
         <p:spPr>
           <a:xfrm>
-            <a:off x="8820471" y="7672201"/>
-            <a:ext cx="155448" cy="155448"/>
+            <a:off x="8866327" y="7699633"/>
+            <a:ext cx="100584" cy="100584"/>
           </a:xfrm>
           <a:prstGeom prst="ellipse">
             <a:avLst/>
@@ -18332,7 +18381,7 @@
           <a:solidFill>
             <a:srgbClr val="FFFFFF"/>
           </a:solidFill>
-          <a:ln w="25400">
+          <a:ln w="19050">
             <a:solidFill>
               <a:srgbClr val="1A9E9E"/>
             </a:solidFill>
@@ -18363,14 +18412,14 @@
       </p:sp>
       <p:sp>
         <p:nvSpPr>
-          <p:cNvPr id="82" name="Oval 81"/>
+          <p:cNvPr id="83" name="Oval 82"/>
           <p:cNvSpPr/>
           <p:nvPr/>
         </p:nvSpPr>
         <p:spPr>
           <a:xfrm>
-            <a:off x="2765292" y="6865620"/>
-            <a:ext cx="155448" cy="155448"/>
+            <a:off x="2798865" y="6893052"/>
+            <a:ext cx="100584" cy="100584"/>
           </a:xfrm>
           <a:prstGeom prst="ellipse">
             <a:avLst/>
@@ -18407,14 +18456,14 @@
       </p:sp>
       <p:sp>
         <p:nvSpPr>
-          <p:cNvPr id="83" name="Oval 82"/>
+          <p:cNvPr id="84" name="Oval 83"/>
           <p:cNvSpPr/>
           <p:nvPr/>
         </p:nvSpPr>
         <p:spPr>
           <a:xfrm>
-            <a:off x="4607639" y="7061973"/>
-            <a:ext cx="155448" cy="155448"/>
+            <a:off x="4641212" y="7089405"/>
+            <a:ext cx="100584" cy="100584"/>
           </a:xfrm>
           <a:prstGeom prst="ellipse">
             <a:avLst/>
@@ -18451,14 +18500,14 @@
       </p:sp>
       <p:sp>
         <p:nvSpPr>
-          <p:cNvPr id="84" name="Oval 83"/>
+          <p:cNvPr id="85" name="Oval 84"/>
           <p:cNvSpPr/>
           <p:nvPr/>
         </p:nvSpPr>
         <p:spPr>
           <a:xfrm>
-            <a:off x="6449985" y="7206679"/>
-            <a:ext cx="155448" cy="155448"/>
+            <a:off x="6483558" y="7234111"/>
+            <a:ext cx="100584" cy="100584"/>
           </a:xfrm>
           <a:prstGeom prst="ellipse">
             <a:avLst/>
@@ -18495,14 +18544,14 @@
       </p:sp>
       <p:sp>
         <p:nvSpPr>
-          <p:cNvPr id="85" name="Oval 84"/>
+          <p:cNvPr id="86" name="Oval 85"/>
           <p:cNvSpPr/>
           <p:nvPr/>
         </p:nvSpPr>
         <p:spPr>
           <a:xfrm>
-            <a:off x="7678216" y="7206679"/>
-            <a:ext cx="155448" cy="155448"/>
+            <a:off x="7711789" y="7234111"/>
+            <a:ext cx="100584" cy="100584"/>
           </a:xfrm>
           <a:prstGeom prst="ellipse">
             <a:avLst/>
@@ -18539,14 +18588,14 @@
       </p:sp>
       <p:sp>
         <p:nvSpPr>
-          <p:cNvPr id="86" name="Oval 85"/>
+          <p:cNvPr id="87" name="Oval 86"/>
           <p:cNvSpPr/>
           <p:nvPr/>
         </p:nvSpPr>
         <p:spPr>
           <a:xfrm>
-            <a:off x="8906447" y="7206679"/>
-            <a:ext cx="155448" cy="155448"/>
+            <a:off x="8940021" y="7234111"/>
+            <a:ext cx="100584" cy="100584"/>
           </a:xfrm>
           <a:prstGeom prst="ellipse">
             <a:avLst/>
@@ -18583,14 +18632,14 @@
       </p:sp>
       <p:sp>
         <p:nvSpPr>
-          <p:cNvPr id="87" name="Oval 86"/>
+          <p:cNvPr id="88" name="Oval 87"/>
           <p:cNvSpPr/>
           <p:nvPr/>
         </p:nvSpPr>
         <p:spPr>
           <a:xfrm>
-            <a:off x="10134679" y="7206679"/>
-            <a:ext cx="155448" cy="155448"/>
+            <a:off x="10168252" y="7234111"/>
+            <a:ext cx="100584" cy="100584"/>
           </a:xfrm>
           <a:prstGeom prst="ellipse">
             <a:avLst/>
@@ -18627,14 +18676,14 @@
       </p:sp>
       <p:sp>
         <p:nvSpPr>
-          <p:cNvPr id="88" name="Oval 87"/>
+          <p:cNvPr id="89" name="Oval 88"/>
           <p:cNvSpPr/>
           <p:nvPr/>
         </p:nvSpPr>
         <p:spPr>
           <a:xfrm>
-            <a:off x="10134679" y="7858951"/>
-            <a:ext cx="155448" cy="155448"/>
+            <a:off x="10168252" y="7886383"/>
+            <a:ext cx="100584" cy="100584"/>
           </a:xfrm>
           <a:prstGeom prst="ellipse">
             <a:avLst/>
@@ -18642,7 +18691,7 @@
           <a:solidFill>
             <a:srgbClr val="FFFFFF"/>
           </a:solidFill>
-          <a:ln w="25400">
+          <a:ln w="19050">
             <a:solidFill>
               <a:srgbClr val="E39B25"/>
             </a:solidFill>
@@ -18673,14 +18722,14 @@
       </p:sp>
       <p:sp>
         <p:nvSpPr>
-          <p:cNvPr id="89" name="Oval 88"/>
+          <p:cNvPr id="90" name="Oval 89"/>
           <p:cNvSpPr/>
           <p:nvPr/>
         </p:nvSpPr>
         <p:spPr>
           <a:xfrm>
-            <a:off x="2237152" y="6865620"/>
-            <a:ext cx="155448" cy="155448"/>
+            <a:off x="2258443" y="6893052"/>
+            <a:ext cx="100584" cy="100584"/>
           </a:xfrm>
           <a:prstGeom prst="ellipse">
             <a:avLst/>
@@ -18717,14 +18766,14 @@
       </p:sp>
       <p:sp>
         <p:nvSpPr>
-          <p:cNvPr id="90" name="Oval 89"/>
+          <p:cNvPr id="91" name="Oval 90"/>
           <p:cNvSpPr/>
           <p:nvPr/>
         </p:nvSpPr>
         <p:spPr>
           <a:xfrm>
-            <a:off x="4079499" y="6606054"/>
-            <a:ext cx="155448" cy="155448"/>
+            <a:off x="4100790" y="6633486"/>
+            <a:ext cx="100584" cy="100584"/>
           </a:xfrm>
           <a:prstGeom prst="ellipse">
             <a:avLst/>
@@ -18761,14 +18810,14 @@
       </p:sp>
       <p:sp>
         <p:nvSpPr>
-          <p:cNvPr id="91" name="Oval 90"/>
+          <p:cNvPr id="92" name="Oval 91"/>
           <p:cNvSpPr/>
           <p:nvPr/>
         </p:nvSpPr>
         <p:spPr>
           <a:xfrm>
-            <a:off x="5307730" y="6865620"/>
-            <a:ext cx="155448" cy="155448"/>
+            <a:off x="5329021" y="6893052"/>
+            <a:ext cx="100584" cy="100584"/>
           </a:xfrm>
           <a:prstGeom prst="ellipse">
             <a:avLst/>
@@ -18805,14 +18854,14 @@
       </p:sp>
       <p:sp>
         <p:nvSpPr>
-          <p:cNvPr id="92" name="Oval 91"/>
+          <p:cNvPr id="93" name="Oval 92"/>
           <p:cNvSpPr/>
           <p:nvPr/>
         </p:nvSpPr>
         <p:spPr>
           <a:xfrm>
-            <a:off x="7150077" y="6865620"/>
-            <a:ext cx="155448" cy="155448"/>
+            <a:off x="7171368" y="6893052"/>
+            <a:ext cx="100584" cy="100584"/>
           </a:xfrm>
           <a:prstGeom prst="ellipse">
             <a:avLst/>
@@ -18849,14 +18898,14 @@
       </p:sp>
       <p:sp>
         <p:nvSpPr>
-          <p:cNvPr id="93" name="Oval 92"/>
+          <p:cNvPr id="94" name="Oval 93"/>
           <p:cNvSpPr/>
           <p:nvPr/>
         </p:nvSpPr>
         <p:spPr>
           <a:xfrm>
-            <a:off x="8378308" y="7206679"/>
-            <a:ext cx="155448" cy="155448"/>
+            <a:off x="8399599" y="7234111"/>
+            <a:ext cx="100584" cy="100584"/>
           </a:xfrm>
           <a:prstGeom prst="ellipse">
             <a:avLst/>
@@ -18893,14 +18942,14 @@
       </p:sp>
       <p:sp>
         <p:nvSpPr>
-          <p:cNvPr id="94" name="Oval 93"/>
+          <p:cNvPr id="95" name="Oval 94"/>
           <p:cNvSpPr/>
           <p:nvPr/>
         </p:nvSpPr>
         <p:spPr>
           <a:xfrm>
-            <a:off x="10220655" y="7206679"/>
-            <a:ext cx="155448" cy="155448"/>
+            <a:off x="10241946" y="7234111"/>
+            <a:ext cx="100584" cy="100584"/>
           </a:xfrm>
           <a:prstGeom prst="ellipse">
             <a:avLst/>
@@ -18937,14 +18986,14 @@
       </p:sp>
       <p:sp>
         <p:nvSpPr>
-          <p:cNvPr id="95" name="Oval 94"/>
+          <p:cNvPr id="96" name="Oval 95"/>
           <p:cNvSpPr/>
           <p:nvPr/>
         </p:nvSpPr>
         <p:spPr>
           <a:xfrm>
-            <a:off x="10220655" y="7858951"/>
-            <a:ext cx="155448" cy="155448"/>
+            <a:off x="10241946" y="7886383"/>
+            <a:ext cx="100584" cy="100584"/>
           </a:xfrm>
           <a:prstGeom prst="ellipse">
             <a:avLst/>
@@ -18952,7 +19001,7 @@
           <a:solidFill>
             <a:srgbClr val="FFFFFF"/>
           </a:solidFill>
-          <a:ln w="25400">
+          <a:ln w="19050">
             <a:solidFill>
               <a:srgbClr val="8B5FBF"/>
             </a:solidFill>
@@ -18983,14 +19032,14 @@
       </p:sp>
       <p:sp>
         <p:nvSpPr>
-          <p:cNvPr id="96" name="Oval 95"/>
+          <p:cNvPr id="97" name="Oval 96"/>
           <p:cNvSpPr/>
           <p:nvPr/>
         </p:nvSpPr>
         <p:spPr>
           <a:xfrm>
-            <a:off x="6621938" y="7206679"/>
-            <a:ext cx="155448" cy="155448"/>
+            <a:off x="6630946" y="7234111"/>
+            <a:ext cx="100584" cy="100584"/>
           </a:xfrm>
           <a:prstGeom prst="ellipse">
             <a:avLst/>
@@ -19027,14 +19076,14 @@
       </p:sp>
       <p:sp>
         <p:nvSpPr>
-          <p:cNvPr id="97" name="Oval 96"/>
+          <p:cNvPr id="98" name="Oval 97"/>
           <p:cNvSpPr/>
           <p:nvPr/>
         </p:nvSpPr>
         <p:spPr>
           <a:xfrm>
-            <a:off x="7236053" y="7206679"/>
-            <a:ext cx="155448" cy="155448"/>
+            <a:off x="7245062" y="7234111"/>
+            <a:ext cx="100584" cy="100584"/>
           </a:xfrm>
           <a:prstGeom prst="ellipse">
             <a:avLst/>
@@ -19071,14 +19120,14 @@
       </p:sp>
       <p:sp>
         <p:nvSpPr>
-          <p:cNvPr id="98" name="Oval 97"/>
+          <p:cNvPr id="99" name="Oval 98"/>
           <p:cNvSpPr/>
           <p:nvPr/>
         </p:nvSpPr>
         <p:spPr>
           <a:xfrm>
-            <a:off x="1794989" y="6865620"/>
-            <a:ext cx="155448" cy="155448"/>
+            <a:off x="1791715" y="6893052"/>
+            <a:ext cx="100584" cy="100584"/>
           </a:xfrm>
           <a:prstGeom prst="ellipse">
             <a:avLst/>
@@ -19115,14 +19164,14 @@
       </p:sp>
       <p:sp>
         <p:nvSpPr>
-          <p:cNvPr id="99" name="Oval 98"/>
+          <p:cNvPr id="100" name="Oval 99"/>
           <p:cNvSpPr/>
           <p:nvPr/>
         </p:nvSpPr>
         <p:spPr>
           <a:xfrm>
-            <a:off x="2409105" y="6409701"/>
-            <a:ext cx="155448" cy="155448"/>
+            <a:off x="2405831" y="6437133"/>
+            <a:ext cx="100584" cy="100584"/>
           </a:xfrm>
           <a:prstGeom prst="ellipse">
             <a:avLst/>
@@ -19159,14 +19208,14 @@
       </p:sp>
       <p:sp>
         <p:nvSpPr>
-          <p:cNvPr id="100" name="Oval 99"/>
+          <p:cNvPr id="101" name="Oval 100"/>
           <p:cNvSpPr/>
           <p:nvPr/>
         </p:nvSpPr>
         <p:spPr>
           <a:xfrm>
-            <a:off x="3637336" y="6606054"/>
-            <a:ext cx="155448" cy="155448"/>
+            <a:off x="3634062" y="6633486"/>
+            <a:ext cx="100584" cy="100584"/>
           </a:xfrm>
           <a:prstGeom prst="ellipse">
             <a:avLst/>
@@ -19203,14 +19252,14 @@
       </p:sp>
       <p:sp>
         <p:nvSpPr>
-          <p:cNvPr id="101" name="Oval 100"/>
+          <p:cNvPr id="102" name="Oval 101"/>
           <p:cNvSpPr/>
           <p:nvPr/>
         </p:nvSpPr>
         <p:spPr>
           <a:xfrm>
-            <a:off x="5479683" y="6865620"/>
-            <a:ext cx="155448" cy="155448"/>
+            <a:off x="5476409" y="6893052"/>
+            <a:ext cx="100584" cy="100584"/>
           </a:xfrm>
           <a:prstGeom prst="ellipse">
             <a:avLst/>
@@ -19247,14 +19296,14 @@
       </p:sp>
       <p:sp>
         <p:nvSpPr>
-          <p:cNvPr id="102" name="Oval 101"/>
+          <p:cNvPr id="103" name="Oval 102"/>
           <p:cNvSpPr/>
           <p:nvPr/>
         </p:nvSpPr>
         <p:spPr>
           <a:xfrm>
-            <a:off x="7322029" y="7206679"/>
-            <a:ext cx="155448" cy="155448"/>
+            <a:off x="7318755" y="7234111"/>
+            <a:ext cx="100584" cy="100584"/>
           </a:xfrm>
           <a:prstGeom prst="ellipse">
             <a:avLst/>
@@ -19291,14 +19340,14 @@
       </p:sp>
       <p:sp>
         <p:nvSpPr>
-          <p:cNvPr id="103" name="Oval 102"/>
+          <p:cNvPr id="104" name="Oval 103"/>
           <p:cNvSpPr/>
           <p:nvPr/>
         </p:nvSpPr>
         <p:spPr>
           <a:xfrm>
-            <a:off x="9778491" y="7206679"/>
-            <a:ext cx="155448" cy="155448"/>
+            <a:off x="9775218" y="7234111"/>
+            <a:ext cx="100584" cy="100584"/>
           </a:xfrm>
           <a:prstGeom prst="ellipse">
             <a:avLst/>
@@ -19335,14 +19384,14 @@
       </p:sp>
       <p:sp>
         <p:nvSpPr>
-          <p:cNvPr id="104" name="Oval 103"/>
+          <p:cNvPr id="105" name="Oval 104"/>
           <p:cNvSpPr/>
           <p:nvPr/>
         </p:nvSpPr>
         <p:spPr>
           <a:xfrm>
-            <a:off x="10392607" y="7815283"/>
-            <a:ext cx="155448" cy="155448"/>
+            <a:off x="10389333" y="7842715"/>
+            <a:ext cx="100584" cy="100584"/>
           </a:xfrm>
           <a:prstGeom prst="ellipse">
             <a:avLst/>
@@ -19350,7 +19399,7 @@
           <a:solidFill>
             <a:srgbClr val="FFFFFF"/>
           </a:solidFill>
-          <a:ln w="25400">
+          <a:ln w="19050">
             <a:solidFill>
               <a:srgbClr val="8A8A8A"/>
             </a:solidFill>
@@ -19381,14 +19430,14 @@
       </p:sp>
       <p:sp>
         <p:nvSpPr>
-          <p:cNvPr id="105" name="Oval 104"/>
+          <p:cNvPr id="106" name="Oval 105"/>
           <p:cNvSpPr/>
           <p:nvPr/>
         </p:nvSpPr>
         <p:spPr>
           <a:xfrm>
-            <a:off x="1979224" y="6865620"/>
-            <a:ext cx="155448" cy="155448"/>
+            <a:off x="2037362" y="6893052"/>
+            <a:ext cx="100584" cy="100584"/>
           </a:xfrm>
           <a:prstGeom prst="ellipse">
             <a:avLst/>
@@ -19425,14 +19474,14 @@
       </p:sp>
       <p:sp>
         <p:nvSpPr>
-          <p:cNvPr id="106" name="Oval 105"/>
+          <p:cNvPr id="107" name="Oval 106"/>
           <p:cNvSpPr/>
           <p:nvPr/>
         </p:nvSpPr>
         <p:spPr>
           <a:xfrm>
-            <a:off x="3207455" y="6865620"/>
-            <a:ext cx="155448" cy="155448"/>
+            <a:off x="3265593" y="6893052"/>
+            <a:ext cx="100584" cy="100584"/>
           </a:xfrm>
           <a:prstGeom prst="ellipse">
             <a:avLst/>
@@ -19469,14 +19518,14 @@
       </p:sp>
       <p:sp>
         <p:nvSpPr>
-          <p:cNvPr id="107" name="Oval 106"/>
+          <p:cNvPr id="108" name="Oval 107"/>
           <p:cNvSpPr/>
           <p:nvPr/>
         </p:nvSpPr>
         <p:spPr>
           <a:xfrm>
-            <a:off x="3821571" y="7061973"/>
-            <a:ext cx="155448" cy="155448"/>
+            <a:off x="3879708" y="7089405"/>
+            <a:ext cx="100584" cy="100584"/>
           </a:xfrm>
           <a:prstGeom prst="ellipse">
             <a:avLst/>
@@ -19513,14 +19562,14 @@
       </p:sp>
       <p:sp>
         <p:nvSpPr>
-          <p:cNvPr id="108" name="Oval 107"/>
+          <p:cNvPr id="109" name="Oval 108"/>
           <p:cNvSpPr/>
           <p:nvPr/>
         </p:nvSpPr>
         <p:spPr>
           <a:xfrm>
-            <a:off x="5049802" y="7061973"/>
-            <a:ext cx="155448" cy="155448"/>
+            <a:off x="5107940" y="7089405"/>
+            <a:ext cx="100584" cy="100584"/>
           </a:xfrm>
           <a:prstGeom prst="ellipse">
             <a:avLst/>
@@ -19557,14 +19606,14 @@
       </p:sp>
       <p:sp>
         <p:nvSpPr>
-          <p:cNvPr id="109" name="Oval 108"/>
+          <p:cNvPr id="110" name="Oval 109"/>
           <p:cNvSpPr/>
           <p:nvPr/>
         </p:nvSpPr>
         <p:spPr>
           <a:xfrm>
-            <a:off x="6278033" y="7206679"/>
-            <a:ext cx="155448" cy="155448"/>
+            <a:off x="6336171" y="7234111"/>
+            <a:ext cx="100584" cy="100584"/>
           </a:xfrm>
           <a:prstGeom prst="ellipse">
             <a:avLst/>
@@ -19601,14 +19650,14 @@
       </p:sp>
       <p:sp>
         <p:nvSpPr>
-          <p:cNvPr id="110" name="Oval 109"/>
+          <p:cNvPr id="111" name="Oval 110"/>
           <p:cNvSpPr/>
           <p:nvPr/>
         </p:nvSpPr>
         <p:spPr>
           <a:xfrm>
-            <a:off x="8120380" y="7206679"/>
-            <a:ext cx="155448" cy="155448"/>
+            <a:off x="8178517" y="7234111"/>
+            <a:ext cx="100584" cy="100584"/>
           </a:xfrm>
           <a:prstGeom prst="ellipse">
             <a:avLst/>
@@ -19645,14 +19694,14 @@
       </p:sp>
       <p:sp>
         <p:nvSpPr>
-          <p:cNvPr id="111" name="Oval 110"/>
+          <p:cNvPr id="112" name="Oval 111"/>
           <p:cNvSpPr/>
           <p:nvPr/>
         </p:nvSpPr>
         <p:spPr>
           <a:xfrm>
-            <a:off x="9348611" y="7206679"/>
-            <a:ext cx="155448" cy="155448"/>
+            <a:off x="9406748" y="7234111"/>
+            <a:ext cx="100584" cy="100584"/>
           </a:xfrm>
           <a:prstGeom prst="ellipse">
             <a:avLst/>
@@ -19689,14 +19738,14 @@
       </p:sp>
       <p:sp>
         <p:nvSpPr>
-          <p:cNvPr id="112" name="Oval 111"/>
+          <p:cNvPr id="113" name="Oval 112"/>
           <p:cNvSpPr/>
           <p:nvPr/>
         </p:nvSpPr>
         <p:spPr>
           <a:xfrm>
-            <a:off x="6892148" y="8003656"/>
-            <a:ext cx="155448" cy="155448"/>
+            <a:off x="6950286" y="8031088"/>
+            <a:ext cx="100584" cy="100584"/>
           </a:xfrm>
           <a:prstGeom prst="ellipse">
             <a:avLst/>
@@ -19704,7 +19753,7 @@
           <a:solidFill>
             <a:srgbClr val="FFFFFF"/>
           </a:solidFill>
-          <a:ln w="25400">
+          <a:ln w="19050">
             <a:solidFill>
               <a:srgbClr val="1428A0"/>
             </a:solidFill>
@@ -19735,14 +19784,14 @@
       </p:sp>
       <p:sp>
         <p:nvSpPr>
-          <p:cNvPr id="113" name="Oval 112"/>
+          <p:cNvPr id="114" name="Oval 113"/>
           <p:cNvSpPr/>
           <p:nvPr/>
         </p:nvSpPr>
         <p:spPr>
           <a:xfrm>
-            <a:off x="9348611" y="7899488"/>
-            <a:ext cx="155448" cy="155448"/>
+            <a:off x="9406748" y="7926920"/>
+            <a:ext cx="100584" cy="100584"/>
           </a:xfrm>
           <a:prstGeom prst="ellipse">
             <a:avLst/>
@@ -19750,7 +19799,7 @@
           <a:solidFill>
             <a:srgbClr val="FFFFFF"/>
           </a:solidFill>
-          <a:ln w="25400">
+          <a:ln w="19050">
             <a:solidFill>
               <a:srgbClr val="1428A0"/>
             </a:solidFill>
@@ -19781,7 +19830,7 @@
       </p:sp>
       <p:sp>
         <p:nvSpPr>
-          <p:cNvPr id="114" name="Rounded Rectangle 113"/>
+          <p:cNvPr id="115" name="Rounded Rectangle 114"/>
           <p:cNvSpPr/>
           <p:nvPr/>
         </p:nvSpPr>
@@ -19827,7 +19876,7 @@
       </p:sp>
       <p:sp>
         <p:nvSpPr>
-          <p:cNvPr id="115" name="TextBox 114"/>
+          <p:cNvPr id="116" name="TextBox 115"/>
           <p:cNvSpPr txBox="1"/>
           <p:nvPr/>
         </p:nvSpPr>
@@ -19867,7 +19916,7 @@
       </p:sp>
       <p:sp>
         <p:nvSpPr>
-          <p:cNvPr id="116" name="Rectangle 115"/>
+          <p:cNvPr id="117" name="Rectangle 116"/>
           <p:cNvSpPr/>
           <p:nvPr/>
         </p:nvSpPr>
@@ -19911,7 +19960,7 @@
       </p:sp>
       <p:sp>
         <p:nvSpPr>
-          <p:cNvPr id="117" name="TextBox 116"/>
+          <p:cNvPr id="118" name="TextBox 117"/>
           <p:cNvSpPr txBox="1"/>
           <p:nvPr/>
         </p:nvSpPr>
@@ -19951,7 +20000,7 @@
       </p:sp>
       <p:sp>
         <p:nvSpPr>
-          <p:cNvPr id="118" name="Rectangle 117"/>
+          <p:cNvPr id="119" name="Rectangle 118"/>
           <p:cNvSpPr/>
           <p:nvPr/>
         </p:nvSpPr>
@@ -19995,7 +20044,7 @@
       </p:sp>
       <p:sp>
         <p:nvSpPr>
-          <p:cNvPr id="119" name="TextBox 118"/>
+          <p:cNvPr id="120" name="TextBox 119"/>
           <p:cNvSpPr txBox="1"/>
           <p:nvPr/>
         </p:nvSpPr>
@@ -20035,7 +20084,7 @@
       </p:sp>
       <p:sp>
         <p:nvSpPr>
-          <p:cNvPr id="120" name="Rectangle 119"/>
+          <p:cNvPr id="121" name="Rectangle 120"/>
           <p:cNvSpPr/>
           <p:nvPr/>
         </p:nvSpPr>
@@ -20079,7 +20128,7 @@
       </p:sp>
       <p:sp>
         <p:nvSpPr>
-          <p:cNvPr id="121" name="TextBox 120"/>
+          <p:cNvPr id="122" name="TextBox 121"/>
           <p:cNvSpPr txBox="1"/>
           <p:nvPr/>
         </p:nvSpPr>
@@ -20119,7 +20168,7 @@
       </p:sp>
       <p:pic>
         <p:nvPicPr>
-          <p:cNvPr id="122" name="Picture 121" descr="google.png"/>
+          <p:cNvPr id="123" name="Picture 122" descr="google.png"/>
           <p:cNvPicPr>
             <a:picLocks noChangeAspect="1"/>
           </p:cNvPicPr>
@@ -20143,7 +20192,7 @@
       </p:pic>
       <p:sp>
         <p:nvSpPr>
-          <p:cNvPr id="123" name="Rounded Rectangle 122"/>
+          <p:cNvPr id="124" name="Rounded Rectangle 123"/>
           <p:cNvSpPr/>
           <p:nvPr/>
         </p:nvSpPr>
@@ -20189,7 +20238,7 @@
       </p:sp>
       <p:sp>
         <p:nvSpPr>
-          <p:cNvPr id="124" name="TextBox 123"/>
+          <p:cNvPr id="125" name="TextBox 124"/>
           <p:cNvSpPr txBox="1"/>
           <p:nvPr/>
         </p:nvSpPr>
@@ -20229,7 +20278,7 @@
       </p:sp>
       <p:pic>
         <p:nvPicPr>
-          <p:cNvPr id="125" name="Picture 124" descr="alibabacloud.png"/>
+          <p:cNvPr id="126" name="Picture 125" descr="alibabacloud.png"/>
           <p:cNvPicPr>
             <a:picLocks noChangeAspect="1"/>
           </p:cNvPicPr>
@@ -20253,7 +20302,7 @@
       </p:pic>
       <p:sp>
         <p:nvSpPr>
-          <p:cNvPr id="126" name="TextBox 125"/>
+          <p:cNvPr id="127" name="TextBox 126"/>
           <p:cNvSpPr txBox="1"/>
           <p:nvPr/>
         </p:nvSpPr>
@@ -20293,7 +20342,7 @@
       </p:sp>
       <p:sp>
         <p:nvSpPr>
-          <p:cNvPr id="127" name="Rounded Rectangle 126"/>
+          <p:cNvPr id="128" name="Rounded Rectangle 127"/>
           <p:cNvSpPr/>
           <p:nvPr/>
         </p:nvSpPr>
@@ -20339,7 +20388,7 @@
       </p:sp>
       <p:sp>
         <p:nvSpPr>
-          <p:cNvPr id="128" name="TextBox 127"/>
+          <p:cNvPr id="129" name="TextBox 128"/>
           <p:cNvSpPr txBox="1"/>
           <p:nvPr/>
         </p:nvSpPr>
@@ -20379,7 +20428,7 @@
       </p:sp>
       <p:pic>
         <p:nvPicPr>
-          <p:cNvPr id="129" name="Picture 128" descr="aws.png"/>
+          <p:cNvPr id="130" name="Picture 129" descr="aws.png"/>
           <p:cNvPicPr>
             <a:picLocks noChangeAspect="1"/>
           </p:cNvPicPr>
@@ -20403,7 +20452,7 @@
       </p:pic>
       <p:sp>
         <p:nvSpPr>
-          <p:cNvPr id="130" name="Rounded Rectangle 129"/>
+          <p:cNvPr id="131" name="Rounded Rectangle 130"/>
           <p:cNvSpPr/>
           <p:nvPr/>
         </p:nvSpPr>
@@ -20449,7 +20498,7 @@
       </p:sp>
       <p:sp>
         <p:nvSpPr>
-          <p:cNvPr id="131" name="TextBox 130"/>
+          <p:cNvPr id="132" name="TextBox 131"/>
           <p:cNvSpPr txBox="1"/>
           <p:nvPr/>
         </p:nvSpPr>
@@ -20489,7 +20538,7 @@
       </p:sp>
       <p:sp>
         <p:nvSpPr>
-          <p:cNvPr id="132" name="Chevron 131"/>
+          <p:cNvPr id="133" name="Chevron 132"/>
           <p:cNvSpPr/>
           <p:nvPr/>
         </p:nvSpPr>
@@ -20533,7 +20582,7 @@
       </p:sp>
       <p:sp>
         <p:nvSpPr>
-          <p:cNvPr id="133" name="Chevron 132"/>
+          <p:cNvPr id="134" name="Chevron 133"/>
           <p:cNvSpPr/>
           <p:nvPr/>
         </p:nvSpPr>
@@ -20577,7 +20626,7 @@
       </p:sp>
       <p:sp>
         <p:nvSpPr>
-          <p:cNvPr id="134" name="Rectangle 133"/>
+          <p:cNvPr id="135" name="Rectangle 134"/>
           <p:cNvSpPr/>
           <p:nvPr/>
         </p:nvSpPr>
@@ -20621,7 +20670,7 @@
       </p:sp>
       <p:sp>
         <p:nvSpPr>
-          <p:cNvPr id="135" name="TextBox 134"/>
+          <p:cNvPr id="136" name="TextBox 135"/>
           <p:cNvSpPr txBox="1"/>
           <p:nvPr/>
         </p:nvSpPr>
@@ -20661,7 +20710,7 @@
       </p:sp>
       <p:sp>
         <p:nvSpPr>
-          <p:cNvPr id="136" name="TextBox 135"/>
+          <p:cNvPr id="137" name="TextBox 136"/>
           <p:cNvSpPr txBox="1"/>
           <p:nvPr/>
         </p:nvSpPr>
@@ -20701,7 +20750,7 @@
       </p:sp>
       <p:sp>
         <p:nvSpPr>
-          <p:cNvPr id="137" name="TextBox 136"/>
+          <p:cNvPr id="138" name="TextBox 137"/>
           <p:cNvSpPr txBox="1"/>
           <p:nvPr/>
         </p:nvSpPr>
@@ -20741,7 +20790,7 @@
       </p:sp>
       <p:sp>
         <p:nvSpPr>
-          <p:cNvPr id="138" name="TextBox 137"/>
+          <p:cNvPr id="139" name="TextBox 138"/>
           <p:cNvSpPr txBox="1"/>
           <p:nvPr/>
         </p:nvSpPr>

--- a/outputs/presentation/ssd-future-ready-strategy.pptx
+++ b/outputs/presentation/ssd-future-ready-strategy.pptx
@@ -645,7 +645,7 @@
           <a:lstStyle/>
           <a:p>
             <a:r>
-              <a:t>3장입니다. 왜 고객 시스템까지 가야 하는지 순서대로 말씀드리겠습니다. 위 왼쪽 첫 칸은 NAND에서 SSD로 넘어온 단계입니다. 셀 오류율이 약 100만 배 나빠졌지만 컨트롤러 ECC가 약 60배 강해지면서 SSD 안에서 완결됐습니다. 둘째 칸은 SSD 혼자 하는 최적화입니다. FTL과 ECC, GC와 웨어 레벨링 위에, 2014년부터 2019년까지 핫 · 콜드 추정, 스트림 분리, IO 결정성을 더했습니다. 테일 지연과 성능은 좋아졌지만, 실제 워크로드에서 WAF는 약 3에 머물렀습니다. 데이터가 언제 지워지는지는 호스트만 알기 때문입니다. 그 결과가 아래 점도표입니다. 지난 15년 동안 6개 업체가 내놓은 데이터센터 SSD 가운데 세대별 대표 제품의 정격 DWPD입니다. 채운 점은 그 세대에서 가장 높은 내구 등급, 빈 점은 QLC 용량형입니다. 보증 3년 제품은 5년 기준으로 환산했습니다. 가장 높은 등급의 중앙값이 2011~2014년 10에서 2015~2018년 5, 2019년 이후 3으로 내려왔고, QLC는 0.2에서 0.6입니다. 셀이 견디는 쓰기가 SLC 10만 회에서 QLC 1천 회로 약 100배 줄었기 때문입니다. 전체 226개 등급으로 봐도 중앙값은 10에서 1로, 10 DWPD 이상 등급은 67퍼센트에서 0퍼센트가 됐습니다. 30 이상은 Optane, Z-SSD 같은 SLC · SCM 특수 제품뿐이라 이 그림에서는 뺐습니다. 고객 캐시 계층은 하루 3회에서 7.2회를 씁니다. 대용량 QLC로는 이 띠에 닿지 않습니다. SSD 혼자서는 DWPD를 끌어올리기 어렵다는 뜻입니다. 그래서 오른쪽 셋째 칸, 고객 시스템과의 공동 설계입니다. 삼성 엔지니어가 Meta의 오픈소스 CacheLib 안에 FDP 배치를 구현했고, WAF가 3.22에서 1.03으로 내려갔습니다. 이 방향은 이미 주요 데이터센터 기업의 흐름입니다. Google은 2016년 논문에서 자체 인터페이스와 펌웨어를 얹은 자체 설계 SSD를 운용한다고 밝혔고, 지금은 Titanium SSD로 이전 세대보다 지연을 최대 35퍼센트 줄였습니다. Alibaba는 2016년 자체 SSD AliFlash로 시작해 2023년 자체 SSD 컨트롤러를 내놓았고, 누적 50만 개 넘게 출하했다고 발표했습니다. AWS는 FTL을 새로 쓴 Nitro SSD로 I3 대비 지연을 최대 60퍼센트 줄였다고 밝혔습니다. 다만 컨트롤러 칩까지 직접 만든다는 근거는 없습니다. 이 밖에 Baidu는 2014년 자체 SSD를 배치했고, Microsoft와 Meta는 OCP SSD 스펙과 FDP 표준을 직접 썼습니다. 고객은 이미 자기 시스템에 맞춰 SSD를 설계하고 있습니다. 사양서를 받아 SSD를 잘 만드는 방식은 둘째 칸에 머물고, 셋째 칸은 고객 시스템 안에서 함께 설계해야 닿습니다.</a:t>
+              <a:t>3장입니다. 왜 고객 시스템까지 가야 하는지 순서대로 말씀드리겠습니다. 위 왼쪽 첫 칸은 NAND에서 SSD로 넘어온 단계입니다. 셀 오류율이 약 100만 배 나빠졌지만 컨트롤러 ECC가 약 60배 강해지면서 SSD 안에서 완결됐습니다. 둘째 칸은 SSD 혼자 하는 최적화입니다. FTL과 ECC, GC와 웨어 레벨링 위에, 2014년부터 2019년까지 핫 · 콜드 추정, 스트림 분리, IO 결정성을 더했습니다. 테일 지연과 성능은 좋아졌지만, 실제 워크로드에서 WAF는 약 3에 머물렀습니다. 데이터가 언제 지워지는지는 호스트만 알기 때문입니다. 그 결과가 아래 점도표입니다. 지난 15년 동안 6개 업체가 내놓은 데이터센터 SSD 가운데 세대별 대표 제품의 정격 DWPD입니다. 채운 점은 그 세대에서 가장 높은 내구 등급, 빈 점은 QLC 용량형입니다. 보증 3년 제품은 5년 기준으로 환산했습니다. 제목 오른쪽 숫자는 점으로 찍은 대표 제품이 아니라 조사한 226개 등급 전체의 중앙값입니다. 2008~2014년 9.6에서 2015~2018년 2, 2019년 이후 1로 내려왔고, 흐린 화살표가 이 흐름입니다. QLC는 0.2에서 0.6입니다. 가장 높은 등급만 봐도 10에서 3으로 내려왔습니다. 셀이 견디는 쓰기가 SLC 10만 회에서 QLC 1천 회로 약 100배 줄었기 때문입니다. 10 DWPD 이상 등급은 67퍼센트에서 0퍼센트가 됐고, 30 이상은 Optane, Z-SSD 같은 SLC · SCM 특수 제품뿐이라 이 그림에서는 뺐습니다. 고객 캐시 계층은 하루 3회에서 7.2회를 씁니다. 대용량 QLC로는 이 띠에 닿지 않습니다. SSD 혼자서는 DWPD를 끌어올리기 어렵다는 뜻입니다. 그래서 오른쪽 셋째 칸, 고객 시스템과의 공동 설계입니다. 삼성 엔지니어가 Meta의 오픈소스 CacheLib 안에 FDP 배치를 구현했고, WAF가 3.22에서 1.03으로 내려갔습니다. 이 방향은 이미 주요 데이터센터 기업의 흐름입니다. Google은 2016년 논문에서 자체 인터페이스와 펌웨어를 얹은 자체 설계 SSD를 운용한다고 밝혔고, 지금은 Titanium SSD로 이전 세대보다 지연을 최대 35퍼센트 줄였습니다. Alibaba는 2016년 자체 SSD AliFlash로 시작해 2023년 자체 SSD 컨트롤러를 내놓았고, 누적 50만 개 넘게 출하했다고 발표했습니다. AWS는 FTL을 새로 쓴 Nitro SSD로 I3 대비 지연을 최대 60퍼센트 줄였다고 밝혔습니다. 다만 컨트롤러 칩까지 직접 만든다는 근거는 없습니다. 이 밖에 Baidu는 2014년 자체 SSD를 배치했고, Microsoft와 Meta는 OCP SSD 스펙과 FDP 표준을 직접 썼습니다. 고객은 이미 자기 시스템에 맞춰 SSD를 설계하고 있습니다. 사양서를 받아 SSD를 잘 만드는 방식은 둘째 칸에 머물고, 셋째 칸은 고객 시스템 안에서 함께 설계해야 닿습니다.</a:t>
             </a:r>
           </a:p>
         </p:txBody>
@@ -16671,7 +16671,7 @@
                 <a:latin typeface="Arial"/>
                 <a:ea typeface="Arial"/>
               </a:rPr>
-              <a:t>최고 등급 중앙값 </a:t>
+              <a:t>전체 제품 중앙값 </a:t>
             </a:r>
             <a:r>
               <a:rPr sz="2400" b="1">
@@ -16681,7 +16681,7 @@
                 <a:latin typeface="Arial"/>
                 <a:ea typeface="Arial"/>
               </a:rPr>
-              <a:t>10 → 5 → 3</a:t>
+              <a:t>9.6 → 2 → 1</a:t>
             </a:r>
             <a:r>
               <a:rPr sz="1800" b="1">
@@ -20783,7 +20783,7 @@
                 <a:latin typeface="Arial"/>
                 <a:ea typeface="Arial"/>
               </a:rPr>
-              <a:t>출처: 정격 DWPD 원장(6개 업체 226개 등급 중 세대 대표의 최고 내구 등급 33개 · QLC 8개, 3년 보증은 5년으로 환산, QLC는 랜덤 쓰기, SLC · SCM 특수 제품 제외) · 고객 캐시 DWPD(Kangaroo · KV 실측 · Baleen) · 해법 사다리 원장 · 자체 설계 원장 · 세로축 로그 · 일부 수치 검색 확인 · 부품 이미지는 3D 렌더</a:t>
+              <a:t>출처: 정격 DWPD 원장(6개 업체 226개 등급, 점은 세대 대표의 최고 내구 등급 33개 · QLC 8개, 중앙값은 전체 등급, 3년 보증은 5년 환산, QLC는 랜덤 쓰기, SLC · SCM 특수 제외) · 고객 캐시 DWPD(Kangaroo · KV 실측 · Baleen) · 해법 사다리 원장 · 자체 설계 원장 · 세로축 로그 · 일부 수치 검색 확인 · 부품 이미지는 3D 렌더</a:t>
             </a:r>
           </a:p>
         </p:txBody>

--- a/outputs/presentation/ssd-future-ready-strategy.pptx
+++ b/outputs/presentation/ssd-future-ready-strategy.pptx
@@ -645,7 +645,7 @@
           <a:lstStyle/>
           <a:p>
             <a:r>
-              <a:t>3장입니다. 왜 고객 시스템까지 가야 하는지 순서대로 말씀드리겠습니다. 위 왼쪽 첫 칸은 NAND에서 SSD로 넘어온 단계입니다. 셀 오류율이 약 100만 배 나빠졌지만 컨트롤러 ECC가 약 60배 강해지면서 SSD 안에서 완결됐습니다. 둘째 칸은 SSD 혼자 하는 최적화입니다. FTL과 ECC, GC와 웨어 레벨링 위에, 2014년부터 2019년까지 핫 · 콜드 추정, 스트림 분리, IO 결정성을 더했습니다. 테일 지연과 성능은 좋아졌지만, 실제 워크로드에서 WAF는 약 3에 머물렀습니다. 데이터가 언제 지워지는지는 호스트만 알기 때문입니다. 그 결과가 아래 점도표입니다. 지난 15년 동안 6개 업체가 내놓은 데이터센터 SSD 가운데 세대별 대표 제품의 정격 DWPD입니다. 채운 점은 그 세대에서 가장 높은 내구 등급, 빈 점은 QLC 용량형입니다. 보증 3년 제품은 5년 기준으로 환산했습니다. 제목 오른쪽 숫자는 점으로 찍은 대표 제품이 아니라 조사한 226개 등급 전체의 중앙값입니다. 2008~2014년 9.6에서 2015~2018년 2, 2019년 이후 1로 내려왔고, 흐린 화살표가 이 흐름입니다. QLC는 0.2에서 0.6입니다. 가장 높은 등급만 봐도 10에서 3으로 내려왔습니다. 셀이 견디는 쓰기가 SLC 10만 회에서 QLC 1천 회로 약 100배 줄었기 때문입니다. 10 DWPD 이상 등급은 67퍼센트에서 0퍼센트가 됐고, 30 이상은 Optane, Z-SSD 같은 SLC · SCM 특수 제품뿐이라 이 그림에서는 뺐습니다. 고객 캐시 계층은 하루 3회에서 7.2회를 씁니다. 대용량 QLC로는 이 띠에 닿지 않습니다. SSD 혼자서는 DWPD를 끌어올리기 어렵다는 뜻입니다. 그래서 오른쪽 셋째 칸, 고객 시스템과의 공동 설계입니다. 삼성 엔지니어가 Meta의 오픈소스 CacheLib 안에 FDP 배치를 구현했고, WAF가 3.22에서 1.03으로 내려갔습니다. 이 방향은 이미 주요 데이터센터 기업의 흐름입니다. Google은 2016년 논문에서 자체 인터페이스와 펌웨어를 얹은 자체 설계 SSD를 운용한다고 밝혔고, 지금은 Titanium SSD로 이전 세대보다 지연을 최대 35퍼센트 줄였습니다. Alibaba는 2016년 자체 SSD AliFlash로 시작해 2023년 자체 SSD 컨트롤러를 내놓았고, 누적 50만 개 넘게 출하했다고 발표했습니다. AWS는 FTL을 새로 쓴 Nitro SSD로 I3 대비 지연을 최대 60퍼센트 줄였다고 밝혔습니다. 다만 컨트롤러 칩까지 직접 만든다는 근거는 없습니다. 이 밖에 Baidu는 2014년 자체 SSD를 배치했고, Microsoft와 Meta는 OCP SSD 스펙과 FDP 표준을 직접 썼습니다. 고객은 이미 자기 시스템에 맞춰 SSD를 설계하고 있습니다. 사양서를 받아 SSD를 잘 만드는 방식은 둘째 칸에 머물고, 셋째 칸은 고객 시스템 안에서 함께 설계해야 닿습니다.</a:t>
+              <a:t>3장입니다. 왜 고객 시스템까지 가야 하는지 순서대로 말씀드리겠습니다. 위 왼쪽 첫 칸은 NAND에서 SSD로 넘어온 단계입니다. 셀 오류율이 약 100만 배 나빠졌지만 컨트롤러 ECC가 약 60배 강해지면서 SSD 안에서 완결됐습니다. 둘째 칸은 SSD 혼자 하는 최적화입니다. FTL과 ECC, GC와 웨어 레벨링 위에, 2014년부터 2019년까지 핫 · 콜드 추정, 스트림 분리, IO 결정성을 더했습니다. 테일 지연과 성능은 좋아졌지만, 실제 워크로드에서 WAF는 약 3에 머물렀습니다. 데이터가 언제 지워지는지는 호스트만 알기 때문입니다. 그 결과가 아래 점도표입니다. 지난 15년 동안 6개 업체가 내놓은 데이터센터 SSD 가운데 세대별 대표 제품의 정격 DWPD입니다. 채운 점은 그 세대에서 가장 높은 내구 등급, 빈 점은 QLC 용량형입니다. 보증 3년 제품은 5년 기준으로 환산했습니다. 제목 오른쪽 숫자는 점으로 찍은 대표 제품이 아니라 조사한 226개 등급 전체의 중앙값입니다. 2008~2014년 9.6에서 2015~2018년 2, 2019년 이후 1로 내려왔고, 흐린 화살표가 이 흐름입니다. QLC는 0.2에서 0.6입니다. 세로축은 0에서 10까지 선형이고, 10을 넘는 초기 고내구 제품 3개는 그림에서 뺐습니다. 가장 높은 등급만 봐도 10에서 3으로 내려왔습니다. 셀이 견디는 쓰기가 SLC 10만 회에서 QLC 1천 회로 약 100배 줄었기 때문입니다. 10 DWPD 이상 등급은 67퍼센트에서 0퍼센트가 됐고, 30 이상은 Optane, Z-SSD 같은 SLC · SCM 특수 제품뿐이라 이 그림에서는 뺐습니다. 고객 캐시 계층은 하루 3회에서 7.2회를 씁니다. 대용량 QLC로는 이 띠에 닿지 않습니다. SSD 혼자서는 DWPD를 끌어올리기 어렵다는 뜻입니다. 그래서 오른쪽 셋째 칸, 고객 시스템과의 공동 설계입니다. 삼성 엔지니어가 Meta의 오픈소스 CacheLib 안에 FDP 배치를 구현했고, WAF가 3.22에서 1.03으로 내려갔습니다. 이 방향은 이미 주요 데이터센터 기업의 흐름입니다. Google은 2016년 논문에서 자체 인터페이스와 펌웨어를 얹은 자체 설계 SSD를 운용한다고 밝혔고, 지금은 Titanium SSD로 이전 세대보다 지연을 최대 35퍼센트 줄였습니다. Alibaba는 2016년 자체 SSD AliFlash로 시작해 2023년 자체 SSD 컨트롤러를 내놓았고, 누적 50만 개 넘게 출하했다고 발표했습니다. AWS는 FTL을 새로 쓴 Nitro SSD로 I3 대비 지연을 최대 60퍼센트 줄였다고 밝혔습니다. 다만 컨트롤러 칩까지 직접 만든다는 근거는 없습니다. 이 밖에 Baidu는 2014년 자체 SSD를 배치했고, Microsoft와 Meta는 OCP SSD 스펙과 FDP 표준을 직접 썼습니다. 고객은 이미 자기 시스템에 맞춰 SSD를 설계하고 있습니다. 사양서를 받아 SSD를 잘 만드는 방식은 둘째 칸에 머물고, 셋째 칸은 고객 시스템 안에서 함께 설계해야 닿습니다.</a:t>
             </a:r>
           </a:p>
         </p:txBody>
@@ -17375,7 +17375,7 @@
                 <a:latin typeface="Arial"/>
                 <a:ea typeface="Arial"/>
               </a:rPr>
-              <a:t>0.1</a:t>
+              <a:t>0</a:t>
             </a:r>
           </a:p>
         </p:txBody>
@@ -17388,7 +17388,7 @@
         </p:nvSpPr>
         <p:spPr>
           <a:xfrm>
-            <a:off x="1289304" y="7590129"/>
+            <a:off x="1289304" y="7858353"/>
             <a:ext cx="9948672" cy="10972"/>
           </a:xfrm>
           <a:prstGeom prst="rect">
@@ -17432,7 +17432,7 @@
         </p:nvSpPr>
         <p:spPr>
           <a:xfrm>
-            <a:off x="722376" y="7458456"/>
+            <a:off x="722376" y="7726679"/>
             <a:ext cx="502920" cy="274320"/>
           </a:xfrm>
           <a:prstGeom prst="rect">
@@ -17459,7 +17459,7 @@
                 <a:latin typeface="Arial"/>
                 <a:ea typeface="Arial"/>
               </a:rPr>
-              <a:t>1</a:t>
+              <a:t>2</a:t>
             </a:r>
           </a:p>
         </p:txBody>
@@ -17472,7 +17472,7 @@
         </p:nvSpPr>
         <p:spPr>
           <a:xfrm>
-            <a:off x="1289304" y="6937857"/>
+            <a:off x="1289304" y="7474305"/>
             <a:ext cx="9948672" cy="10972"/>
           </a:xfrm>
           <a:prstGeom prst="rect">
@@ -17516,7 +17516,7 @@
         </p:nvSpPr>
         <p:spPr>
           <a:xfrm>
-            <a:off x="722376" y="6806184"/>
+            <a:off x="722376" y="7342631"/>
             <a:ext cx="502920" cy="274320"/>
           </a:xfrm>
           <a:prstGeom prst="rect">
@@ -17543,7 +17543,7 @@
                 <a:latin typeface="Arial"/>
                 <a:ea typeface="Arial"/>
               </a:rPr>
-              <a:t>10</a:t>
+              <a:t>4</a:t>
             </a:r>
           </a:p>
         </p:txBody>
@@ -17556,7 +17556,7 @@
         </p:nvSpPr>
         <p:spPr>
           <a:xfrm>
-            <a:off x="1289304" y="6285585"/>
+            <a:off x="1289304" y="7090257"/>
             <a:ext cx="9948672" cy="10972"/>
           </a:xfrm>
           <a:prstGeom prst="rect">
@@ -17600,7 +17600,7 @@
         </p:nvSpPr>
         <p:spPr>
           <a:xfrm>
-            <a:off x="722376" y="6153912"/>
+            <a:off x="722376" y="6958583"/>
             <a:ext cx="502920" cy="274320"/>
           </a:xfrm>
           <a:prstGeom prst="rect">
@@ -17627,14 +17627,182 @@
                 <a:latin typeface="Arial"/>
                 <a:ea typeface="Arial"/>
               </a:rPr>
-              <a:t>100</a:t>
-            </a:r>
-          </a:p>
-        </p:txBody>
-      </p:sp>
-      <p:sp>
-        <p:nvSpPr>
-          <p:cNvPr id="65" name="TextBox 64"/>
+              <a:t>6</a:t>
+            </a:r>
+          </a:p>
+        </p:txBody>
+      </p:sp>
+      <p:sp>
+        <p:nvSpPr>
+          <p:cNvPr id="65" name="Rectangle 64"/>
+          <p:cNvSpPr/>
+          <p:nvPr/>
+        </p:nvSpPr>
+        <p:spPr>
+          <a:xfrm>
+            <a:off x="1289304" y="6706209"/>
+            <a:ext cx="9948672" cy="10972"/>
+          </a:xfrm>
+          <a:prstGeom prst="rect">
+            <a:avLst/>
+          </a:prstGeom>
+          <a:solidFill>
+            <a:srgbClr val="D9D9D9"/>
+          </a:solidFill>
+          <a:ln>
+            <a:noFill/>
+          </a:ln>
+          <a:effectLst/>
+        </p:spPr>
+        <p:style>
+          <a:lnRef idx="1">
+            <a:schemeClr val="accent1"/>
+          </a:lnRef>
+          <a:fillRef idx="3">
+            <a:schemeClr val="accent1"/>
+          </a:fillRef>
+          <a:effectRef idx="2">
+            <a:schemeClr val="accent1"/>
+          </a:effectRef>
+          <a:fontRef idx="minor">
+            <a:schemeClr val="lt1"/>
+          </a:fontRef>
+        </p:style>
+        <p:txBody>
+          <a:bodyPr rtlCol="0" anchor="ctr"/>
+          <a:lstStyle/>
+          <a:p>
+            <a:pPr algn="ctr"/>
+          </a:p>
+        </p:txBody>
+      </p:sp>
+      <p:sp>
+        <p:nvSpPr>
+          <p:cNvPr id="66" name="TextBox 65"/>
+          <p:cNvSpPr txBox="1"/>
+          <p:nvPr/>
+        </p:nvSpPr>
+        <p:spPr>
+          <a:xfrm>
+            <a:off x="722376" y="6574536"/>
+            <a:ext cx="502920" cy="274320"/>
+          </a:xfrm>
+          <a:prstGeom prst="rect">
+            <a:avLst/>
+          </a:prstGeom>
+          <a:noFill/>
+        </p:spPr>
+        <p:txBody>
+          <a:bodyPr wrap="square" anchor="ctr" lIns="0" rIns="0" tIns="0" bIns="0">
+            <a:spAutoFit/>
+          </a:bodyPr>
+          <a:lstStyle/>
+          <a:p>
+            <a:pPr algn="r">
+              <a:lnSpc>
+                <a:spcPct val="110000"/>
+              </a:lnSpc>
+            </a:pPr>
+            <a:r>
+              <a:rPr sz="1600" b="0">
+                <a:solidFill>
+                  <a:srgbClr val="555555"/>
+                </a:solidFill>
+                <a:latin typeface="Arial"/>
+                <a:ea typeface="Arial"/>
+              </a:rPr>
+              <a:t>8</a:t>
+            </a:r>
+          </a:p>
+        </p:txBody>
+      </p:sp>
+      <p:sp>
+        <p:nvSpPr>
+          <p:cNvPr id="67" name="Rectangle 66"/>
+          <p:cNvSpPr/>
+          <p:nvPr/>
+        </p:nvSpPr>
+        <p:spPr>
+          <a:xfrm>
+            <a:off x="1289304" y="6322161"/>
+            <a:ext cx="9948672" cy="10972"/>
+          </a:xfrm>
+          <a:prstGeom prst="rect">
+            <a:avLst/>
+          </a:prstGeom>
+          <a:solidFill>
+            <a:srgbClr val="D9D9D9"/>
+          </a:solidFill>
+          <a:ln>
+            <a:noFill/>
+          </a:ln>
+          <a:effectLst/>
+        </p:spPr>
+        <p:style>
+          <a:lnRef idx="1">
+            <a:schemeClr val="accent1"/>
+          </a:lnRef>
+          <a:fillRef idx="3">
+            <a:schemeClr val="accent1"/>
+          </a:fillRef>
+          <a:effectRef idx="2">
+            <a:schemeClr val="accent1"/>
+          </a:effectRef>
+          <a:fontRef idx="minor">
+            <a:schemeClr val="lt1"/>
+          </a:fontRef>
+        </p:style>
+        <p:txBody>
+          <a:bodyPr rtlCol="0" anchor="ctr"/>
+          <a:lstStyle/>
+          <a:p>
+            <a:pPr algn="ctr"/>
+          </a:p>
+        </p:txBody>
+      </p:sp>
+      <p:sp>
+        <p:nvSpPr>
+          <p:cNvPr id="68" name="TextBox 67"/>
+          <p:cNvSpPr txBox="1"/>
+          <p:nvPr/>
+        </p:nvSpPr>
+        <p:spPr>
+          <a:xfrm>
+            <a:off x="722376" y="6190488"/>
+            <a:ext cx="502920" cy="274320"/>
+          </a:xfrm>
+          <a:prstGeom prst="rect">
+            <a:avLst/>
+          </a:prstGeom>
+          <a:noFill/>
+        </p:spPr>
+        <p:txBody>
+          <a:bodyPr wrap="square" anchor="ctr" lIns="0" rIns="0" tIns="0" bIns="0">
+            <a:spAutoFit/>
+          </a:bodyPr>
+          <a:lstStyle/>
+          <a:p>
+            <a:pPr algn="r">
+              <a:lnSpc>
+                <a:spcPct val="110000"/>
+              </a:lnSpc>
+            </a:pPr>
+            <a:r>
+              <a:rPr sz="1600" b="0">
+                <a:solidFill>
+                  <a:srgbClr val="555555"/>
+                </a:solidFill>
+                <a:latin typeface="Arial"/>
+                <a:ea typeface="Arial"/>
+              </a:rPr>
+              <a:t>10</a:t>
+            </a:r>
+          </a:p>
+        </p:txBody>
+      </p:sp>
+      <p:sp>
+        <p:nvSpPr>
+          <p:cNvPr id="69" name="TextBox 68"/>
           <p:cNvSpPr txBox="1"/>
           <p:nvPr/>
         </p:nvSpPr>
@@ -17674,7 +17842,7 @@
       </p:sp>
       <p:sp>
         <p:nvSpPr>
-          <p:cNvPr id="66" name="TextBox 65"/>
+          <p:cNvPr id="70" name="TextBox 69"/>
           <p:cNvSpPr txBox="1"/>
           <p:nvPr/>
         </p:nvSpPr>
@@ -17714,7 +17882,7 @@
       </p:sp>
       <p:sp>
         <p:nvSpPr>
-          <p:cNvPr id="67" name="TextBox 66"/>
+          <p:cNvPr id="71" name="TextBox 70"/>
           <p:cNvSpPr txBox="1"/>
           <p:nvPr/>
         </p:nvSpPr>
@@ -17754,7 +17922,7 @@
       </p:sp>
       <p:sp>
         <p:nvSpPr>
-          <p:cNvPr id="68" name="TextBox 67"/>
+          <p:cNvPr id="72" name="TextBox 71"/>
           <p:cNvSpPr txBox="1"/>
           <p:nvPr/>
         </p:nvSpPr>
@@ -17794,7 +17962,7 @@
       </p:sp>
       <p:sp>
         <p:nvSpPr>
-          <p:cNvPr id="69" name="TextBox 68"/>
+          <p:cNvPr id="73" name="TextBox 72"/>
           <p:cNvSpPr txBox="1"/>
           <p:nvPr/>
         </p:nvSpPr>
@@ -17834,7 +18002,7 @@
       </p:sp>
       <p:sp>
         <p:nvSpPr>
-          <p:cNvPr id="70" name="TextBox 69"/>
+          <p:cNvPr id="74" name="TextBox 73"/>
           <p:cNvSpPr txBox="1"/>
           <p:nvPr/>
         </p:nvSpPr>
@@ -17874,14 +18042,14 @@
       </p:sp>
       <p:sp>
         <p:nvSpPr>
-          <p:cNvPr id="71" name="Rectangle 70"/>
+          <p:cNvPr id="75" name="Rectangle 74"/>
           <p:cNvSpPr/>
           <p:nvPr/>
         </p:nvSpPr>
         <p:spPr>
           <a:xfrm>
-            <a:off x="6570697" y="7036402"/>
-            <a:ext cx="4667278" cy="248001"/>
+            <a:off x="6570697" y="6865315"/>
+            <a:ext cx="4667278" cy="806500"/>
           </a:xfrm>
           <a:prstGeom prst="rect">
             <a:avLst/>
@@ -17921,13 +18089,13 @@
       </p:sp>
       <p:sp>
         <p:nvSpPr>
-          <p:cNvPr id="72" name="TextBox 71"/>
+          <p:cNvPr id="76" name="TextBox 75"/>
           <p:cNvSpPr txBox="1"/>
           <p:nvPr/>
         </p:nvSpPr>
         <p:spPr>
           <a:xfrm>
-            <a:off x="8860536" y="6752938"/>
+            <a:off x="8860536" y="6581851"/>
             <a:ext cx="2377440" cy="256032"/>
           </a:xfrm>
           <a:prstGeom prst="rect">
@@ -17961,14 +18129,14 @@
       </p:sp>
       <p:sp>
         <p:nvSpPr>
-          <p:cNvPr id="73" name="Right Arrow 72"/>
+          <p:cNvPr id="77" name="Right Arrow 76"/>
           <p:cNvSpPr/>
           <p:nvPr/>
         </p:nvSpPr>
         <p:spPr>
-          <a:xfrm rot="236725">
-            <a:off x="1585128" y="7031736"/>
-            <a:ext cx="9479846" cy="475488"/>
+          <a:xfrm rot="621349">
+            <a:off x="1518057" y="6954012"/>
+            <a:ext cx="9613987" cy="475488"/>
           </a:xfrm>
           <a:prstGeom prst="rightArrow">
             <a:avLst>
@@ -18010,13 +18178,13 @@
       </p:sp>
       <p:sp>
         <p:nvSpPr>
-          <p:cNvPr id="74" name="Oval 73"/>
+          <p:cNvPr id="78" name="Oval 77"/>
           <p:cNvSpPr/>
           <p:nvPr/>
         </p:nvSpPr>
         <p:spPr>
           <a:xfrm>
-            <a:off x="2111056" y="6893052"/>
+            <a:off x="2111056" y="6277356"/>
             <a:ext cx="100584" cy="100584"/>
           </a:xfrm>
           <a:prstGeom prst="ellipse">
@@ -18054,13 +18222,13 @@
       </p:sp>
       <p:sp>
         <p:nvSpPr>
-          <p:cNvPr id="75" name="Oval 74"/>
+          <p:cNvPr id="79" name="Oval 78"/>
           <p:cNvSpPr/>
           <p:nvPr/>
         </p:nvSpPr>
         <p:spPr>
           <a:xfrm>
-            <a:off x="3339287" y="6893052"/>
+            <a:off x="3339287" y="6277356"/>
             <a:ext cx="100584" cy="100584"/>
           </a:xfrm>
           <a:prstGeom prst="ellipse">
@@ -18098,13 +18266,13 @@
       </p:sp>
       <p:sp>
         <p:nvSpPr>
-          <p:cNvPr id="76" name="Oval 75"/>
+          <p:cNvPr id="80" name="Oval 79"/>
           <p:cNvSpPr/>
           <p:nvPr/>
         </p:nvSpPr>
         <p:spPr>
           <a:xfrm>
-            <a:off x="5181633" y="7243714"/>
+            <a:off x="5181633" y="7640726"/>
             <a:ext cx="100584" cy="100584"/>
           </a:xfrm>
           <a:prstGeom prst="ellipse">
@@ -18142,13 +18310,13 @@
       </p:sp>
       <p:sp>
         <p:nvSpPr>
-          <p:cNvPr id="77" name="Oval 76"/>
+          <p:cNvPr id="81" name="Oval 80"/>
           <p:cNvSpPr/>
           <p:nvPr/>
         </p:nvSpPr>
         <p:spPr>
           <a:xfrm>
-            <a:off x="7023980" y="7234111"/>
+            <a:off x="7023980" y="7621524"/>
             <a:ext cx="100584" cy="100584"/>
           </a:xfrm>
           <a:prstGeom prst="ellipse">
@@ -18186,13 +18354,13 @@
       </p:sp>
       <p:sp>
         <p:nvSpPr>
-          <p:cNvPr id="78" name="Oval 77"/>
+          <p:cNvPr id="82" name="Oval 81"/>
           <p:cNvSpPr/>
           <p:nvPr/>
         </p:nvSpPr>
         <p:spPr>
           <a:xfrm>
-            <a:off x="8252211" y="7234111"/>
+            <a:off x="8252211" y="7621524"/>
             <a:ext cx="100584" cy="100584"/>
           </a:xfrm>
           <a:prstGeom prst="ellipse">
@@ -18230,13 +18398,13 @@
       </p:sp>
       <p:sp>
         <p:nvSpPr>
-          <p:cNvPr id="79" name="Oval 78"/>
+          <p:cNvPr id="83" name="Oval 82"/>
           <p:cNvSpPr/>
           <p:nvPr/>
         </p:nvSpPr>
         <p:spPr>
           <a:xfrm>
-            <a:off x="9480442" y="7234111"/>
+            <a:off x="9480442" y="7621524"/>
             <a:ext cx="100584" cy="100584"/>
           </a:xfrm>
           <a:prstGeom prst="ellipse">
@@ -18274,13 +18442,13 @@
       </p:sp>
       <p:sp>
         <p:nvSpPr>
-          <p:cNvPr id="80" name="Oval 79"/>
+          <p:cNvPr id="84" name="Oval 83"/>
           <p:cNvSpPr/>
           <p:nvPr/>
         </p:nvSpPr>
         <p:spPr>
           <a:xfrm>
-            <a:off x="5795749" y="8001242"/>
+            <a:off x="5795749" y="8159191"/>
             <a:ext cx="100584" cy="100584"/>
           </a:xfrm>
           <a:prstGeom prst="ellipse">
@@ -18320,13 +18488,13 @@
       </p:sp>
       <p:sp>
         <p:nvSpPr>
-          <p:cNvPr id="81" name="Oval 80"/>
+          <p:cNvPr id="85" name="Oval 84"/>
           <p:cNvSpPr/>
           <p:nvPr/>
         </p:nvSpPr>
         <p:spPr>
           <a:xfrm>
-            <a:off x="7638096" y="7797894"/>
+            <a:off x="7638096" y="8118866"/>
             <a:ext cx="100584" cy="100584"/>
           </a:xfrm>
           <a:prstGeom prst="ellipse">
@@ -18366,13 +18534,13 @@
       </p:sp>
       <p:sp>
         <p:nvSpPr>
-          <p:cNvPr id="82" name="Oval 81"/>
+          <p:cNvPr id="86" name="Oval 85"/>
           <p:cNvSpPr/>
           <p:nvPr/>
         </p:nvSpPr>
         <p:spPr>
           <a:xfrm>
-            <a:off x="8866327" y="7699633"/>
+            <a:off x="8866327" y="8086222"/>
             <a:ext cx="100584" cy="100584"/>
           </a:xfrm>
           <a:prstGeom prst="ellipse">
@@ -18412,13 +18580,13 @@
       </p:sp>
       <p:sp>
         <p:nvSpPr>
-          <p:cNvPr id="83" name="Oval 82"/>
+          <p:cNvPr id="87" name="Oval 86"/>
           <p:cNvSpPr/>
           <p:nvPr/>
         </p:nvSpPr>
         <p:spPr>
           <a:xfrm>
-            <a:off x="2798865" y="6893052"/>
+            <a:off x="2798865" y="6277356"/>
             <a:ext cx="100584" cy="100584"/>
           </a:xfrm>
           <a:prstGeom prst="ellipse">
@@ -18456,13 +18624,13 @@
       </p:sp>
       <p:sp>
         <p:nvSpPr>
-          <p:cNvPr id="84" name="Oval 83"/>
+          <p:cNvPr id="88" name="Oval 87"/>
           <p:cNvSpPr/>
           <p:nvPr/>
         </p:nvSpPr>
         <p:spPr>
           <a:xfrm>
-            <a:off x="4641212" y="7089405"/>
+            <a:off x="4641212" y="7237476"/>
             <a:ext cx="100584" cy="100584"/>
           </a:xfrm>
           <a:prstGeom prst="ellipse">
@@ -18500,13 +18668,13 @@
       </p:sp>
       <p:sp>
         <p:nvSpPr>
-          <p:cNvPr id="85" name="Oval 84"/>
+          <p:cNvPr id="89" name="Oval 88"/>
           <p:cNvSpPr/>
           <p:nvPr/>
         </p:nvSpPr>
         <p:spPr>
           <a:xfrm>
-            <a:off x="6483558" y="7234111"/>
+            <a:off x="6483558" y="7621524"/>
             <a:ext cx="100584" cy="100584"/>
           </a:xfrm>
           <a:prstGeom prst="ellipse">
@@ -18544,13 +18712,13 @@
       </p:sp>
       <p:sp>
         <p:nvSpPr>
-          <p:cNvPr id="86" name="Oval 85"/>
+          <p:cNvPr id="90" name="Oval 89"/>
           <p:cNvSpPr/>
           <p:nvPr/>
         </p:nvSpPr>
         <p:spPr>
           <a:xfrm>
-            <a:off x="7711789" y="7234111"/>
+            <a:off x="7711789" y="7621524"/>
             <a:ext cx="100584" cy="100584"/>
           </a:xfrm>
           <a:prstGeom prst="ellipse">
@@ -18588,13 +18756,13 @@
       </p:sp>
       <p:sp>
         <p:nvSpPr>
-          <p:cNvPr id="87" name="Oval 86"/>
+          <p:cNvPr id="91" name="Oval 90"/>
           <p:cNvSpPr/>
           <p:nvPr/>
         </p:nvSpPr>
         <p:spPr>
           <a:xfrm>
-            <a:off x="8940021" y="7234111"/>
+            <a:off x="8940021" y="7621524"/>
             <a:ext cx="100584" cy="100584"/>
           </a:xfrm>
           <a:prstGeom prst="ellipse">
@@ -18632,13 +18800,13 @@
       </p:sp>
       <p:sp>
         <p:nvSpPr>
-          <p:cNvPr id="88" name="Oval 87"/>
+          <p:cNvPr id="92" name="Oval 91"/>
           <p:cNvSpPr/>
           <p:nvPr/>
         </p:nvSpPr>
         <p:spPr>
           <a:xfrm>
-            <a:off x="10168252" y="7234111"/>
+            <a:off x="10168252" y="7621524"/>
             <a:ext cx="100584" cy="100584"/>
           </a:xfrm>
           <a:prstGeom prst="ellipse">
@@ -18676,13 +18844,13 @@
       </p:sp>
       <p:sp>
         <p:nvSpPr>
-          <p:cNvPr id="89" name="Oval 88"/>
+          <p:cNvPr id="93" name="Oval 92"/>
           <p:cNvSpPr/>
           <p:nvPr/>
         </p:nvSpPr>
         <p:spPr>
           <a:xfrm>
-            <a:off x="10168252" y="7886383"/>
+            <a:off x="10168252" y="8139988"/>
             <a:ext cx="100584" cy="100584"/>
           </a:xfrm>
           <a:prstGeom prst="ellipse">
@@ -18722,13 +18890,13 @@
       </p:sp>
       <p:sp>
         <p:nvSpPr>
-          <p:cNvPr id="90" name="Oval 89"/>
+          <p:cNvPr id="94" name="Oval 93"/>
           <p:cNvSpPr/>
           <p:nvPr/>
         </p:nvSpPr>
         <p:spPr>
           <a:xfrm>
-            <a:off x="2258443" y="6893052"/>
+            <a:off x="2258443" y="6277356"/>
             <a:ext cx="100584" cy="100584"/>
           </a:xfrm>
           <a:prstGeom prst="ellipse">
@@ -18766,13 +18934,13 @@
       </p:sp>
       <p:sp>
         <p:nvSpPr>
-          <p:cNvPr id="91" name="Oval 90"/>
+          <p:cNvPr id="95" name="Oval 94"/>
           <p:cNvSpPr/>
           <p:nvPr/>
         </p:nvSpPr>
         <p:spPr>
           <a:xfrm>
-            <a:off x="4100790" y="6633486"/>
+            <a:off x="5329021" y="6277356"/>
             <a:ext cx="100584" cy="100584"/>
           </a:xfrm>
           <a:prstGeom prst="ellipse">
@@ -18810,13 +18978,13 @@
       </p:sp>
       <p:sp>
         <p:nvSpPr>
-          <p:cNvPr id="92" name="Oval 91"/>
+          <p:cNvPr id="96" name="Oval 95"/>
           <p:cNvSpPr/>
           <p:nvPr/>
         </p:nvSpPr>
         <p:spPr>
           <a:xfrm>
-            <a:off x="5329021" y="6893052"/>
+            <a:off x="7171368" y="6277356"/>
             <a:ext cx="100584" cy="100584"/>
           </a:xfrm>
           <a:prstGeom prst="ellipse">
@@ -18854,13 +19022,13 @@
       </p:sp>
       <p:sp>
         <p:nvSpPr>
-          <p:cNvPr id="93" name="Oval 92"/>
+          <p:cNvPr id="97" name="Oval 96"/>
           <p:cNvSpPr/>
           <p:nvPr/>
         </p:nvSpPr>
         <p:spPr>
           <a:xfrm>
-            <a:off x="7171368" y="6893052"/>
+            <a:off x="8399599" y="7621524"/>
             <a:ext cx="100584" cy="100584"/>
           </a:xfrm>
           <a:prstGeom prst="ellipse">
@@ -18898,13 +19066,13 @@
       </p:sp>
       <p:sp>
         <p:nvSpPr>
-          <p:cNvPr id="94" name="Oval 93"/>
+          <p:cNvPr id="98" name="Oval 97"/>
           <p:cNvSpPr/>
           <p:nvPr/>
         </p:nvSpPr>
         <p:spPr>
           <a:xfrm>
-            <a:off x="8399599" y="7234111"/>
+            <a:off x="10241946" y="7621524"/>
             <a:ext cx="100584" cy="100584"/>
           </a:xfrm>
           <a:prstGeom prst="ellipse">
@@ -18942,57 +19110,13 @@
       </p:sp>
       <p:sp>
         <p:nvSpPr>
-          <p:cNvPr id="95" name="Oval 94"/>
+          <p:cNvPr id="99" name="Oval 98"/>
           <p:cNvSpPr/>
           <p:nvPr/>
         </p:nvSpPr>
         <p:spPr>
           <a:xfrm>
-            <a:off x="10241946" y="7234111"/>
-            <a:ext cx="100584" cy="100584"/>
-          </a:xfrm>
-          <a:prstGeom prst="ellipse">
-            <a:avLst/>
-          </a:prstGeom>
-          <a:solidFill>
-            <a:srgbClr val="8B5FBF"/>
-          </a:solidFill>
-          <a:ln>
-            <a:noFill/>
-          </a:ln>
-          <a:effectLst/>
-        </p:spPr>
-        <p:style>
-          <a:lnRef idx="1">
-            <a:schemeClr val="accent1"/>
-          </a:lnRef>
-          <a:fillRef idx="3">
-            <a:schemeClr val="accent1"/>
-          </a:fillRef>
-          <a:effectRef idx="2">
-            <a:schemeClr val="accent1"/>
-          </a:effectRef>
-          <a:fontRef idx="minor">
-            <a:schemeClr val="lt1"/>
-          </a:fontRef>
-        </p:style>
-        <p:txBody>
-          <a:bodyPr rtlCol="0" anchor="ctr"/>
-          <a:lstStyle/>
-          <a:p>
-            <a:pPr algn="ctr"/>
-          </a:p>
-        </p:txBody>
-      </p:sp>
-      <p:sp>
-        <p:nvSpPr>
-          <p:cNvPr id="96" name="Oval 95"/>
-          <p:cNvSpPr/>
-          <p:nvPr/>
-        </p:nvSpPr>
-        <p:spPr>
-          <a:xfrm>
-            <a:off x="10241946" y="7886383"/>
+            <a:off x="10241946" y="8139988"/>
             <a:ext cx="100584" cy="100584"/>
           </a:xfrm>
           <a:prstGeom prst="ellipse">
@@ -19032,13 +19156,13 @@
       </p:sp>
       <p:sp>
         <p:nvSpPr>
-          <p:cNvPr id="97" name="Oval 96"/>
+          <p:cNvPr id="100" name="Oval 99"/>
           <p:cNvSpPr/>
           <p:nvPr/>
         </p:nvSpPr>
         <p:spPr>
           <a:xfrm>
-            <a:off x="6630946" y="7234111"/>
+            <a:off x="6630946" y="7621524"/>
             <a:ext cx="100584" cy="100584"/>
           </a:xfrm>
           <a:prstGeom prst="ellipse">
@@ -19076,13 +19200,13 @@
       </p:sp>
       <p:sp>
         <p:nvSpPr>
-          <p:cNvPr id="98" name="Oval 97"/>
+          <p:cNvPr id="101" name="Oval 100"/>
           <p:cNvSpPr/>
           <p:nvPr/>
         </p:nvSpPr>
         <p:spPr>
           <a:xfrm>
-            <a:off x="7245062" y="7234111"/>
+            <a:off x="7245062" y="7621524"/>
             <a:ext cx="100584" cy="100584"/>
           </a:xfrm>
           <a:prstGeom prst="ellipse">
@@ -19120,13 +19244,13 @@
       </p:sp>
       <p:sp>
         <p:nvSpPr>
-          <p:cNvPr id="99" name="Oval 98"/>
+          <p:cNvPr id="102" name="Oval 101"/>
           <p:cNvSpPr/>
           <p:nvPr/>
         </p:nvSpPr>
         <p:spPr>
           <a:xfrm>
-            <a:off x="1791715" y="6893052"/>
+            <a:off x="1791715" y="6277356"/>
             <a:ext cx="100584" cy="100584"/>
           </a:xfrm>
           <a:prstGeom prst="ellipse">
@@ -19164,13 +19288,13 @@
       </p:sp>
       <p:sp>
         <p:nvSpPr>
-          <p:cNvPr id="100" name="Oval 99"/>
+          <p:cNvPr id="103" name="Oval 102"/>
           <p:cNvSpPr/>
           <p:nvPr/>
         </p:nvSpPr>
         <p:spPr>
           <a:xfrm>
-            <a:off x="2405831" y="6437133"/>
+            <a:off x="5476409" y="6277356"/>
             <a:ext cx="100584" cy="100584"/>
           </a:xfrm>
           <a:prstGeom prst="ellipse">
@@ -19208,13 +19332,13 @@
       </p:sp>
       <p:sp>
         <p:nvSpPr>
-          <p:cNvPr id="101" name="Oval 100"/>
+          <p:cNvPr id="104" name="Oval 103"/>
           <p:cNvSpPr/>
           <p:nvPr/>
         </p:nvSpPr>
         <p:spPr>
           <a:xfrm>
-            <a:off x="3634062" y="6633486"/>
+            <a:off x="7318755" y="7621524"/>
             <a:ext cx="100584" cy="100584"/>
           </a:xfrm>
           <a:prstGeom prst="ellipse">
@@ -19252,13 +19376,13 @@
       </p:sp>
       <p:sp>
         <p:nvSpPr>
-          <p:cNvPr id="102" name="Oval 101"/>
+          <p:cNvPr id="105" name="Oval 104"/>
           <p:cNvSpPr/>
           <p:nvPr/>
         </p:nvSpPr>
         <p:spPr>
           <a:xfrm>
-            <a:off x="5476409" y="6893052"/>
+            <a:off x="9775218" y="7621524"/>
             <a:ext cx="100584" cy="100584"/>
           </a:xfrm>
           <a:prstGeom prst="ellipse">
@@ -19296,101 +19420,13 @@
       </p:sp>
       <p:sp>
         <p:nvSpPr>
-          <p:cNvPr id="103" name="Oval 102"/>
+          <p:cNvPr id="106" name="Oval 105"/>
           <p:cNvSpPr/>
           <p:nvPr/>
         </p:nvSpPr>
         <p:spPr>
           <a:xfrm>
-            <a:off x="7318755" y="7234111"/>
-            <a:ext cx="100584" cy="100584"/>
-          </a:xfrm>
-          <a:prstGeom prst="ellipse">
-            <a:avLst/>
-          </a:prstGeom>
-          <a:solidFill>
-            <a:srgbClr val="8A8A8A"/>
-          </a:solidFill>
-          <a:ln>
-            <a:noFill/>
-          </a:ln>
-          <a:effectLst/>
-        </p:spPr>
-        <p:style>
-          <a:lnRef idx="1">
-            <a:schemeClr val="accent1"/>
-          </a:lnRef>
-          <a:fillRef idx="3">
-            <a:schemeClr val="accent1"/>
-          </a:fillRef>
-          <a:effectRef idx="2">
-            <a:schemeClr val="accent1"/>
-          </a:effectRef>
-          <a:fontRef idx="minor">
-            <a:schemeClr val="lt1"/>
-          </a:fontRef>
-        </p:style>
-        <p:txBody>
-          <a:bodyPr rtlCol="0" anchor="ctr"/>
-          <a:lstStyle/>
-          <a:p>
-            <a:pPr algn="ctr"/>
-          </a:p>
-        </p:txBody>
-      </p:sp>
-      <p:sp>
-        <p:nvSpPr>
-          <p:cNvPr id="104" name="Oval 103"/>
-          <p:cNvSpPr/>
-          <p:nvPr/>
-        </p:nvSpPr>
-        <p:spPr>
-          <a:xfrm>
-            <a:off x="9775218" y="7234111"/>
-            <a:ext cx="100584" cy="100584"/>
-          </a:xfrm>
-          <a:prstGeom prst="ellipse">
-            <a:avLst/>
-          </a:prstGeom>
-          <a:solidFill>
-            <a:srgbClr val="8A8A8A"/>
-          </a:solidFill>
-          <a:ln>
-            <a:noFill/>
-          </a:ln>
-          <a:effectLst/>
-        </p:spPr>
-        <p:style>
-          <a:lnRef idx="1">
-            <a:schemeClr val="accent1"/>
-          </a:lnRef>
-          <a:fillRef idx="3">
-            <a:schemeClr val="accent1"/>
-          </a:fillRef>
-          <a:effectRef idx="2">
-            <a:schemeClr val="accent1"/>
-          </a:effectRef>
-          <a:fontRef idx="minor">
-            <a:schemeClr val="lt1"/>
-          </a:fontRef>
-        </p:style>
-        <p:txBody>
-          <a:bodyPr rtlCol="0" anchor="ctr"/>
-          <a:lstStyle/>
-          <a:p>
-            <a:pPr algn="ctr"/>
-          </a:p>
-        </p:txBody>
-      </p:sp>
-      <p:sp>
-        <p:nvSpPr>
-          <p:cNvPr id="105" name="Oval 104"/>
-          <p:cNvSpPr/>
-          <p:nvPr/>
-        </p:nvSpPr>
-        <p:spPr>
-          <a:xfrm>
-            <a:off x="10389333" y="7842715"/>
+            <a:off x="10389333" y="8130387"/>
             <a:ext cx="100584" cy="100584"/>
           </a:xfrm>
           <a:prstGeom prst="ellipse">
@@ -19430,13 +19466,13 @@
       </p:sp>
       <p:sp>
         <p:nvSpPr>
-          <p:cNvPr id="106" name="Oval 105"/>
+          <p:cNvPr id="107" name="Oval 106"/>
           <p:cNvSpPr/>
           <p:nvPr/>
         </p:nvSpPr>
         <p:spPr>
           <a:xfrm>
-            <a:off x="2037362" y="6893052"/>
+            <a:off x="2037362" y="6277356"/>
             <a:ext cx="100584" cy="100584"/>
           </a:xfrm>
           <a:prstGeom prst="ellipse">
@@ -19474,13 +19510,13 @@
       </p:sp>
       <p:sp>
         <p:nvSpPr>
-          <p:cNvPr id="107" name="Oval 106"/>
+          <p:cNvPr id="108" name="Oval 107"/>
           <p:cNvSpPr/>
           <p:nvPr/>
         </p:nvSpPr>
         <p:spPr>
           <a:xfrm>
-            <a:off x="3265593" y="6893052"/>
+            <a:off x="3265593" y="6277356"/>
             <a:ext cx="100584" cy="100584"/>
           </a:xfrm>
           <a:prstGeom prst="ellipse">
@@ -19518,13 +19554,13 @@
       </p:sp>
       <p:sp>
         <p:nvSpPr>
-          <p:cNvPr id="108" name="Oval 107"/>
+          <p:cNvPr id="109" name="Oval 108"/>
           <p:cNvSpPr/>
           <p:nvPr/>
         </p:nvSpPr>
         <p:spPr>
           <a:xfrm>
-            <a:off x="3879708" y="7089405"/>
+            <a:off x="3879708" y="7237476"/>
             <a:ext cx="100584" cy="100584"/>
           </a:xfrm>
           <a:prstGeom prst="ellipse">
@@ -19562,13 +19598,13 @@
       </p:sp>
       <p:sp>
         <p:nvSpPr>
-          <p:cNvPr id="109" name="Oval 108"/>
+          <p:cNvPr id="110" name="Oval 109"/>
           <p:cNvSpPr/>
           <p:nvPr/>
         </p:nvSpPr>
         <p:spPr>
           <a:xfrm>
-            <a:off x="5107940" y="7089405"/>
+            <a:off x="5107940" y="7237476"/>
             <a:ext cx="100584" cy="100584"/>
           </a:xfrm>
           <a:prstGeom prst="ellipse">
@@ -19606,13 +19642,13 @@
       </p:sp>
       <p:sp>
         <p:nvSpPr>
-          <p:cNvPr id="110" name="Oval 109"/>
+          <p:cNvPr id="111" name="Oval 110"/>
           <p:cNvSpPr/>
           <p:nvPr/>
         </p:nvSpPr>
         <p:spPr>
           <a:xfrm>
-            <a:off x="6336171" y="7234111"/>
+            <a:off x="6336171" y="7621524"/>
             <a:ext cx="100584" cy="100584"/>
           </a:xfrm>
           <a:prstGeom prst="ellipse">
@@ -19650,13 +19686,13 @@
       </p:sp>
       <p:sp>
         <p:nvSpPr>
-          <p:cNvPr id="111" name="Oval 110"/>
+          <p:cNvPr id="112" name="Oval 111"/>
           <p:cNvSpPr/>
           <p:nvPr/>
         </p:nvSpPr>
         <p:spPr>
           <a:xfrm>
-            <a:off x="8178517" y="7234111"/>
+            <a:off x="8178517" y="7621524"/>
             <a:ext cx="100584" cy="100584"/>
           </a:xfrm>
           <a:prstGeom prst="ellipse">
@@ -19694,13 +19730,13 @@
       </p:sp>
       <p:sp>
         <p:nvSpPr>
-          <p:cNvPr id="112" name="Oval 111"/>
+          <p:cNvPr id="113" name="Oval 112"/>
           <p:cNvSpPr/>
           <p:nvPr/>
         </p:nvSpPr>
         <p:spPr>
           <a:xfrm>
-            <a:off x="9406748" y="7234111"/>
+            <a:off x="9406748" y="7621524"/>
             <a:ext cx="100584" cy="100584"/>
           </a:xfrm>
           <a:prstGeom prst="ellipse">
@@ -19738,13 +19774,13 @@
       </p:sp>
       <p:sp>
         <p:nvSpPr>
-          <p:cNvPr id="113" name="Oval 112"/>
+          <p:cNvPr id="114" name="Oval 113"/>
           <p:cNvSpPr/>
           <p:nvPr/>
         </p:nvSpPr>
         <p:spPr>
           <a:xfrm>
-            <a:off x="6950286" y="8031088"/>
+            <a:off x="6950286" y="8163031"/>
             <a:ext cx="100584" cy="100584"/>
           </a:xfrm>
           <a:prstGeom prst="ellipse">
@@ -19784,13 +19820,13 @@
       </p:sp>
       <p:sp>
         <p:nvSpPr>
-          <p:cNvPr id="114" name="Oval 113"/>
+          <p:cNvPr id="115" name="Oval 114"/>
           <p:cNvSpPr/>
           <p:nvPr/>
         </p:nvSpPr>
         <p:spPr>
           <a:xfrm>
-            <a:off x="9406748" y="7926920"/>
+            <a:off x="9406748" y="8147669"/>
             <a:ext cx="100584" cy="100584"/>
           </a:xfrm>
           <a:prstGeom prst="ellipse">
@@ -19830,7 +19866,7 @@
       </p:sp>
       <p:sp>
         <p:nvSpPr>
-          <p:cNvPr id="115" name="Rounded Rectangle 114"/>
+          <p:cNvPr id="116" name="Rounded Rectangle 115"/>
           <p:cNvSpPr/>
           <p:nvPr/>
         </p:nvSpPr>
@@ -19876,7 +19912,7 @@
       </p:sp>
       <p:sp>
         <p:nvSpPr>
-          <p:cNvPr id="116" name="TextBox 115"/>
+          <p:cNvPr id="117" name="TextBox 116"/>
           <p:cNvSpPr txBox="1"/>
           <p:nvPr/>
         </p:nvSpPr>
@@ -19916,7 +19952,7 @@
       </p:sp>
       <p:sp>
         <p:nvSpPr>
-          <p:cNvPr id="117" name="Rectangle 116"/>
+          <p:cNvPr id="118" name="Rectangle 117"/>
           <p:cNvSpPr/>
           <p:nvPr/>
         </p:nvSpPr>
@@ -19960,7 +19996,7 @@
       </p:sp>
       <p:sp>
         <p:nvSpPr>
-          <p:cNvPr id="118" name="TextBox 117"/>
+          <p:cNvPr id="119" name="TextBox 118"/>
           <p:cNvSpPr txBox="1"/>
           <p:nvPr/>
         </p:nvSpPr>
@@ -20000,7 +20036,7 @@
       </p:sp>
       <p:sp>
         <p:nvSpPr>
-          <p:cNvPr id="119" name="Rectangle 118"/>
+          <p:cNvPr id="120" name="Rectangle 119"/>
           <p:cNvSpPr/>
           <p:nvPr/>
         </p:nvSpPr>
@@ -20044,7 +20080,7 @@
       </p:sp>
       <p:sp>
         <p:nvSpPr>
-          <p:cNvPr id="120" name="TextBox 119"/>
+          <p:cNvPr id="121" name="TextBox 120"/>
           <p:cNvSpPr txBox="1"/>
           <p:nvPr/>
         </p:nvSpPr>
@@ -20084,7 +20120,7 @@
       </p:sp>
       <p:sp>
         <p:nvSpPr>
-          <p:cNvPr id="121" name="Rectangle 120"/>
+          <p:cNvPr id="122" name="Rectangle 121"/>
           <p:cNvSpPr/>
           <p:nvPr/>
         </p:nvSpPr>
@@ -20128,7 +20164,7 @@
       </p:sp>
       <p:sp>
         <p:nvSpPr>
-          <p:cNvPr id="122" name="TextBox 121"/>
+          <p:cNvPr id="123" name="TextBox 122"/>
           <p:cNvSpPr txBox="1"/>
           <p:nvPr/>
         </p:nvSpPr>
@@ -20168,7 +20204,7 @@
       </p:sp>
       <p:pic>
         <p:nvPicPr>
-          <p:cNvPr id="123" name="Picture 122" descr="google.png"/>
+          <p:cNvPr id="124" name="Picture 123" descr="google.png"/>
           <p:cNvPicPr>
             <a:picLocks noChangeAspect="1"/>
           </p:cNvPicPr>
@@ -20192,7 +20228,7 @@
       </p:pic>
       <p:sp>
         <p:nvSpPr>
-          <p:cNvPr id="124" name="Rounded Rectangle 123"/>
+          <p:cNvPr id="125" name="Rounded Rectangle 124"/>
           <p:cNvSpPr/>
           <p:nvPr/>
         </p:nvSpPr>
@@ -20238,7 +20274,7 @@
       </p:sp>
       <p:sp>
         <p:nvSpPr>
-          <p:cNvPr id="125" name="TextBox 124"/>
+          <p:cNvPr id="126" name="TextBox 125"/>
           <p:cNvSpPr txBox="1"/>
           <p:nvPr/>
         </p:nvSpPr>
@@ -20278,7 +20314,7 @@
       </p:sp>
       <p:pic>
         <p:nvPicPr>
-          <p:cNvPr id="126" name="Picture 125" descr="alibabacloud.png"/>
+          <p:cNvPr id="127" name="Picture 126" descr="alibabacloud.png"/>
           <p:cNvPicPr>
             <a:picLocks noChangeAspect="1"/>
           </p:cNvPicPr>
@@ -20302,7 +20338,7 @@
       </p:pic>
       <p:sp>
         <p:nvSpPr>
-          <p:cNvPr id="127" name="TextBox 126"/>
+          <p:cNvPr id="128" name="TextBox 127"/>
           <p:cNvSpPr txBox="1"/>
           <p:nvPr/>
         </p:nvSpPr>
@@ -20342,7 +20378,7 @@
       </p:sp>
       <p:sp>
         <p:nvSpPr>
-          <p:cNvPr id="128" name="Rounded Rectangle 127"/>
+          <p:cNvPr id="129" name="Rounded Rectangle 128"/>
           <p:cNvSpPr/>
           <p:nvPr/>
         </p:nvSpPr>
@@ -20388,7 +20424,7 @@
       </p:sp>
       <p:sp>
         <p:nvSpPr>
-          <p:cNvPr id="129" name="TextBox 128"/>
+          <p:cNvPr id="130" name="TextBox 129"/>
           <p:cNvSpPr txBox="1"/>
           <p:nvPr/>
         </p:nvSpPr>
@@ -20428,7 +20464,7 @@
       </p:sp>
       <p:pic>
         <p:nvPicPr>
-          <p:cNvPr id="130" name="Picture 129" descr="aws.png"/>
+          <p:cNvPr id="131" name="Picture 130" descr="aws.png"/>
           <p:cNvPicPr>
             <a:picLocks noChangeAspect="1"/>
           </p:cNvPicPr>
@@ -20452,7 +20488,7 @@
       </p:pic>
       <p:sp>
         <p:nvSpPr>
-          <p:cNvPr id="131" name="Rounded Rectangle 130"/>
+          <p:cNvPr id="132" name="Rounded Rectangle 131"/>
           <p:cNvSpPr/>
           <p:nvPr/>
         </p:nvSpPr>
@@ -20498,7 +20534,7 @@
       </p:sp>
       <p:sp>
         <p:nvSpPr>
-          <p:cNvPr id="132" name="TextBox 131"/>
+          <p:cNvPr id="133" name="TextBox 132"/>
           <p:cNvSpPr txBox="1"/>
           <p:nvPr/>
         </p:nvSpPr>
@@ -20538,7 +20574,7 @@
       </p:sp>
       <p:sp>
         <p:nvSpPr>
-          <p:cNvPr id="133" name="Chevron 132"/>
+          <p:cNvPr id="134" name="Chevron 133"/>
           <p:cNvSpPr/>
           <p:nvPr/>
         </p:nvSpPr>
@@ -20582,7 +20618,7 @@
       </p:sp>
       <p:sp>
         <p:nvSpPr>
-          <p:cNvPr id="134" name="Chevron 133"/>
+          <p:cNvPr id="135" name="Chevron 134"/>
           <p:cNvSpPr/>
           <p:nvPr/>
         </p:nvSpPr>
@@ -20626,7 +20662,7 @@
       </p:sp>
       <p:sp>
         <p:nvSpPr>
-          <p:cNvPr id="135" name="Rectangle 134"/>
+          <p:cNvPr id="136" name="Rectangle 135"/>
           <p:cNvSpPr/>
           <p:nvPr/>
         </p:nvSpPr>
@@ -20670,7 +20706,7 @@
       </p:sp>
       <p:sp>
         <p:nvSpPr>
-          <p:cNvPr id="136" name="TextBox 135"/>
+          <p:cNvPr id="137" name="TextBox 136"/>
           <p:cNvSpPr txBox="1"/>
           <p:nvPr/>
         </p:nvSpPr>
@@ -20710,7 +20746,7 @@
       </p:sp>
       <p:sp>
         <p:nvSpPr>
-          <p:cNvPr id="137" name="TextBox 136"/>
+          <p:cNvPr id="138" name="TextBox 137"/>
           <p:cNvSpPr txBox="1"/>
           <p:nvPr/>
         </p:nvSpPr>
@@ -20750,7 +20786,7 @@
       </p:sp>
       <p:sp>
         <p:nvSpPr>
-          <p:cNvPr id="138" name="TextBox 137"/>
+          <p:cNvPr id="139" name="TextBox 138"/>
           <p:cNvSpPr txBox="1"/>
           <p:nvPr/>
         </p:nvSpPr>
@@ -20783,14 +20819,14 @@
                 <a:latin typeface="Arial"/>
                 <a:ea typeface="Arial"/>
               </a:rPr>
-              <a:t>출처: 정격 DWPD 원장(6개 업체 226개 등급, 점은 세대 대표의 최고 내구 등급 33개 · QLC 8개, 중앙값은 전체 등급, 3년 보증은 5년 환산, QLC는 랜덤 쓰기, SLC · SCM 특수 제외) · 고객 캐시 DWPD(Kangaroo · KV 실측 · Baleen) · 해법 사다리 원장 · 자체 설계 원장 · 세로축 로그 · 일부 수치 검색 확인 · 부품 이미지는 3D 렌더</a:t>
-            </a:r>
-          </a:p>
-        </p:txBody>
-      </p:sp>
-      <p:sp>
-        <p:nvSpPr>
-          <p:cNvPr id="139" name="TextBox 138"/>
+              <a:t>출처: 정격 DWPD 원장(6개 업체 226개 등급, 점 = 세대 대표 최고 등급 · QLC, 중앙값 = 전체 등급, 5년 보증 환산, SLC · SCM 특수와 10 초과 3개 제외) · 고객 캐시 DWPD(Kangaroo · KV 실측 · Baleen) · 해법 사다리 원장 · 자체 설계 원장 · 일부 수치 검색 확인 · 부품 이미지는 3D 렌더</a:t>
+            </a:r>
+          </a:p>
+        </p:txBody>
+      </p:sp>
+      <p:sp>
+        <p:nvSpPr>
+          <p:cNvPr id="140" name="TextBox 139"/>
           <p:cNvSpPr txBox="1"/>
           <p:nvPr/>
         </p:nvSpPr>

--- a/outputs/presentation/ssd-future-ready-strategy.pptx
+++ b/outputs/presentation/ssd-future-ready-strategy.pptx
@@ -645,7 +645,7 @@
           <a:lstStyle/>
           <a:p>
             <a:r>
-              <a:t>3장입니다. 왜 고객 시스템까지 가야 하는지 순서대로 말씀드리겠습니다. 위 왼쪽 첫 칸은 NAND에서 SSD로 넘어온 단계입니다. 셀 오류율이 약 100만 배 나빠졌지만 컨트롤러 ECC가 약 60배 강해지면서 SSD 안에서 완결됐습니다. 둘째 칸은 SSD 혼자 하는 최적화입니다. FTL과 ECC, GC와 웨어 레벨링 위에, 2014년부터 2019년까지 핫 · 콜드 추정, 스트림 분리, IO 결정성을 더했습니다. 테일 지연과 성능은 좋아졌지만, 실제 워크로드에서 WAF는 약 3에 머물렀습니다. 데이터가 언제 지워지는지는 호스트만 알기 때문입니다. 그 결과가 아래 점도표입니다. 지난 15년 동안 6개 업체가 내놓은 데이터센터 SSD 가운데 세대별 대표 제품의 정격 DWPD입니다. 채운 점은 그 세대에서 가장 높은 내구 등급, 빈 점은 QLC 용량형입니다. 보증 3년 제품은 5년 기준으로 환산했습니다. 제목 오른쪽 숫자는 점으로 찍은 대표 제품이 아니라 조사한 226개 등급 전체의 중앙값입니다. 2008~2014년 9.6에서 2015~2018년 2, 2019년 이후 1로 내려왔고, 흐린 화살표가 이 흐름입니다. QLC는 0.2에서 0.6입니다. 세로축은 0에서 10까지 선형이고, 10을 넘는 초기 고내구 제품 3개는 그림에서 뺐습니다. 가장 높은 등급만 봐도 10에서 3으로 내려왔습니다. 셀이 견디는 쓰기가 SLC 10만 회에서 QLC 1천 회로 약 100배 줄었기 때문입니다. 10 DWPD 이상 등급은 67퍼센트에서 0퍼센트가 됐고, 30 이상은 Optane, Z-SSD 같은 SLC · SCM 특수 제품뿐이라 이 그림에서는 뺐습니다. 고객 캐시 계층은 하루 3회에서 7.2회를 씁니다. 대용량 QLC로는 이 띠에 닿지 않습니다. SSD 혼자서는 DWPD를 끌어올리기 어렵다는 뜻입니다. 그래서 오른쪽 셋째 칸, 고객 시스템과의 공동 설계입니다. 삼성 엔지니어가 Meta의 오픈소스 CacheLib 안에 FDP 배치를 구현했고, WAF가 3.22에서 1.03으로 내려갔습니다. 이 방향은 이미 주요 데이터센터 기업의 흐름입니다. Google은 2016년 논문에서 자체 인터페이스와 펌웨어를 얹은 자체 설계 SSD를 운용한다고 밝혔고, 지금은 Titanium SSD로 이전 세대보다 지연을 최대 35퍼센트 줄였습니다. Alibaba는 2016년 자체 SSD AliFlash로 시작해 2023년 자체 SSD 컨트롤러를 내놓았고, 누적 50만 개 넘게 출하했다고 발표했습니다. AWS는 FTL을 새로 쓴 Nitro SSD로 I3 대비 지연을 최대 60퍼센트 줄였다고 밝혔습니다. 다만 컨트롤러 칩까지 직접 만든다는 근거는 없습니다. 이 밖에 Baidu는 2014년 자체 SSD를 배치했고, Microsoft와 Meta는 OCP SSD 스펙과 FDP 표준을 직접 썼습니다. 고객은 이미 자기 시스템에 맞춰 SSD를 설계하고 있습니다. 사양서를 받아 SSD를 잘 만드는 방식은 둘째 칸에 머물고, 셋째 칸은 고객 시스템 안에서 함께 설계해야 닿습니다.</a:t>
+              <a:t>3장입니다. 왜 고객 시스템까지 가야 하는지 순서대로 말씀드리겠습니다. 위 왼쪽 첫 칸은 NAND에서 SSD로 넘어온 단계입니다. 셀 오류율이 약 100만 배 나빠졌지만 컨트롤러 ECC가 약 60배 강해지면서 SSD 안에서 완결됐습니다. 둘째 칸은 SSD 혼자 하는 최적화입니다. FTL과 ECC, GC와 웨어 레벨링 위에, 2014년부터 2019년까지 핫 · 콜드 추정, 스트림 분리, IO 결정성을 더했습니다. 테일 지연과 성능은 좋아졌지만, 실제 워크로드에서 WAF는 약 3에 머물렀습니다. 데이터가 언제 지워지는지는 호스트만 알기 때문입니다. 그 결과가 아래 점도표입니다. 지난 15년 동안 6개 업체가 내놓은 데이터센터 SSD 가운데 세대별 대표 제품의 정격 DWPD입니다. 채운 점은 그 세대에서 가장 높은 내구 등급, 빈 점은 QLC 용량형입니다. 보증 3년 제품은 5년 기준으로 환산했습니다. 제목 오른쪽 숫자는 점으로 찍은 대표 제품이 아니라 조사한 226개 등급 전체의 중앙값입니다. 2008~2014년 9.6에서 2015~2018년 2, 2019년 이후 1로 내려왔고, 흐린 화살표가 이 흐름입니다. QLC는 0.2에서 0.6입니다. 세로축은 0에서 10까지 선형이고, 10을 넘는 초기 고내구 제품 3개는 그림에서 뺐습니다. 가장 높은 등급만 봐도 10에서 3으로 내려왔습니다. 셀이 견디는 쓰기가 SLC 10만 회에서 QLC 1천 회로 약 100배 줄었기 때문입니다. 10 DWPD 이상 등급은 67퍼센트에서 0퍼센트가 됐고, 30 이상은 Optane, Z-SSD 같은 SLC · SCM 특수 제품뿐이라 이 그림에서는 뺐습니다. 점선 영역은 NAND 종류입니다. MLC 시절 대표 제품은 10이었고, TLC로 오면서 5에서 3으로, 대용량 QLC는 1 아래로 내려왔습니다. SLC는 17에서 100이지만 용량이 작은 특수 제품이라 축 위에 따로 적었습니다. 반면 고객 캐시 계층은 하루 3회에서 7.2회를 씁니다. SSD 혼자서는 DWPD를 끌어올리기 어렵다는 뜻입니다. 그래서 오른쪽 셋째 칸, 고객 시스템과의 공동 설계입니다. 삼성 엔지니어가 Meta의 오픈소스 CacheLib 안에 FDP 배치를 구현했고, WAF가 3.22에서 1.03으로 내려갔습니다. 이 방향은 이미 주요 데이터센터 기업의 흐름입니다. Google은 2016년 논문에서 자체 인터페이스와 펌웨어를 얹은 자체 설계 SSD를 운용한다고 밝혔고, 지금은 Titanium SSD로 이전 세대보다 지연을 최대 35퍼센트 줄였습니다. Alibaba는 2016년 자체 SSD AliFlash로 시작해 2023년 자체 SSD 컨트롤러를 내놓았고, 누적 50만 개 넘게 출하했다고 발표했습니다. AWS는 FTL을 새로 쓴 Nitro SSD로 I3 대비 지연을 최대 60퍼센트 줄였다고 밝혔습니다. 다만 컨트롤러 칩까지 직접 만든다는 근거는 없습니다. 이 밖에 Baidu는 2014년 자체 SSD를 배치했고, Microsoft와 Meta는 OCP SSD 스펙과 FDP 표준을 직접 썼습니다. 고객은 이미 자기 시스템에 맞춰 SSD를 설계하고 있습니다. 사양서를 받아 SSD를 잘 만드는 방식은 둘째 칸에 머물고, 셋째 칸은 고객 시스템 안에서 함께 설계해야 닿습니다.</a:t>
             </a:r>
           </a:p>
         </p:txBody>
@@ -17388,7 +17388,7 @@
         </p:nvSpPr>
         <p:spPr>
           <a:xfrm>
-            <a:off x="1289304" y="7858353"/>
+            <a:off x="1289304" y="7909559"/>
             <a:ext cx="9948672" cy="10972"/>
           </a:xfrm>
           <a:prstGeom prst="rect">
@@ -17432,7 +17432,7 @@
         </p:nvSpPr>
         <p:spPr>
           <a:xfrm>
-            <a:off x="722376" y="7726679"/>
+            <a:off x="722376" y="7777886"/>
             <a:ext cx="502920" cy="274320"/>
           </a:xfrm>
           <a:prstGeom prst="rect">
@@ -17472,7 +17472,7 @@
         </p:nvSpPr>
         <p:spPr>
           <a:xfrm>
-            <a:off x="1289304" y="7474305"/>
+            <a:off x="1289304" y="7576718"/>
             <a:ext cx="9948672" cy="10972"/>
           </a:xfrm>
           <a:prstGeom prst="rect">
@@ -17516,7 +17516,7 @@
         </p:nvSpPr>
         <p:spPr>
           <a:xfrm>
-            <a:off x="722376" y="7342631"/>
+            <a:off x="722376" y="7445044"/>
             <a:ext cx="502920" cy="274320"/>
           </a:xfrm>
           <a:prstGeom prst="rect">
@@ -17556,7 +17556,7 @@
         </p:nvSpPr>
         <p:spPr>
           <a:xfrm>
-            <a:off x="1289304" y="7090257"/>
+            <a:off x="1289304" y="7243876"/>
             <a:ext cx="9948672" cy="10972"/>
           </a:xfrm>
           <a:prstGeom prst="rect">
@@ -17600,7 +17600,7 @@
         </p:nvSpPr>
         <p:spPr>
           <a:xfrm>
-            <a:off x="722376" y="6958583"/>
+            <a:off x="722376" y="7112203"/>
             <a:ext cx="502920" cy="274320"/>
           </a:xfrm>
           <a:prstGeom prst="rect">
@@ -17640,7 +17640,7 @@
         </p:nvSpPr>
         <p:spPr>
           <a:xfrm>
-            <a:off x="1289304" y="6706209"/>
+            <a:off x="1289304" y="6911035"/>
             <a:ext cx="9948672" cy="10972"/>
           </a:xfrm>
           <a:prstGeom prst="rect">
@@ -17684,7 +17684,7 @@
         </p:nvSpPr>
         <p:spPr>
           <a:xfrm>
-            <a:off x="722376" y="6574536"/>
+            <a:off x="722376" y="6779361"/>
             <a:ext cx="502920" cy="274320"/>
           </a:xfrm>
           <a:prstGeom prst="rect">
@@ -17724,7 +17724,7 @@
         </p:nvSpPr>
         <p:spPr>
           <a:xfrm>
-            <a:off x="1289304" y="6322161"/>
+            <a:off x="1289304" y="6578193"/>
             <a:ext cx="9948672" cy="10972"/>
           </a:xfrm>
           <a:prstGeom prst="rect">
@@ -17768,7 +17768,7 @@
         </p:nvSpPr>
         <p:spPr>
           <a:xfrm>
-            <a:off x="722376" y="6190488"/>
+            <a:off x="722376" y="6446520"/>
             <a:ext cx="502920" cy="274320"/>
           </a:xfrm>
           <a:prstGeom prst="rect">
@@ -18042,26 +18042,2028 @@
       </p:sp>
       <p:sp>
         <p:nvSpPr>
-          <p:cNvPr id="75" name="Rectangle 74"/>
+          <p:cNvPr id="75" name="Rounded Rectangle 74"/>
           <p:cNvSpPr/>
           <p:nvPr/>
         </p:nvSpPr>
         <p:spPr>
           <a:xfrm>
-            <a:off x="6570697" y="6865315"/>
-            <a:ext cx="4667278" cy="806500"/>
-          </a:xfrm>
-          <a:prstGeom prst="rect">
-            <a:avLst/>
-          </a:prstGeom>
-          <a:solidFill>
-            <a:srgbClr val="EEF1FA"/>
-          </a:solidFill>
+            <a:off x="1289304" y="6181344"/>
+            <a:ext cx="9948672" cy="292608"/>
+          </a:xfrm>
+          <a:prstGeom prst="roundRect">
+            <a:avLst>
+              <a:gd name="adj" fmla="val 25000"/>
+            </a:avLst>
+          </a:prstGeom>
+          <a:noFill/>
           <a:ln w="12700">
+            <a:solidFill>
+              <a:srgbClr val="8A8A8A"/>
+            </a:solidFill>
+            <a:prstDash val="dash"/>
+          </a:ln>
+          <a:effectLst/>
+        </p:spPr>
+        <p:style>
+          <a:lnRef idx="1">
+            <a:schemeClr val="accent1"/>
+          </a:lnRef>
+          <a:fillRef idx="3">
+            <a:schemeClr val="accent1"/>
+          </a:fillRef>
+          <a:effectRef idx="2">
+            <a:schemeClr val="accent1"/>
+          </a:effectRef>
+          <a:fontRef idx="minor">
+            <a:schemeClr val="lt1"/>
+          </a:fontRef>
+        </p:style>
+        <p:txBody>
+          <a:bodyPr rtlCol="0" anchor="ctr"/>
+          <a:lstStyle/>
+          <a:p>
+            <a:pPr algn="ctr"/>
+          </a:p>
+        </p:txBody>
+      </p:sp>
+      <p:sp>
+        <p:nvSpPr>
+          <p:cNvPr id="76" name="TextBox 75"/>
+          <p:cNvSpPr txBox="1"/>
+          <p:nvPr/>
+        </p:nvSpPr>
+        <p:spPr>
+          <a:xfrm>
+            <a:off x="1417320" y="6181344"/>
+            <a:ext cx="5486400" cy="292608"/>
+          </a:xfrm>
+          <a:prstGeom prst="rect">
+            <a:avLst/>
+          </a:prstGeom>
+          <a:noFill/>
+        </p:spPr>
+        <p:txBody>
+          <a:bodyPr wrap="square" anchor="ctr" lIns="0" rIns="0" tIns="0" bIns="0">
+            <a:spAutoFit/>
+          </a:bodyPr>
+          <a:lstStyle/>
+          <a:p>
+            <a:pPr algn="l">
+              <a:lnSpc>
+                <a:spcPct val="110000"/>
+              </a:lnSpc>
+            </a:pPr>
+            <a:r>
+              <a:rPr sz="1800" b="1">
+                <a:solidFill>
+                  <a:srgbClr val="555555"/>
+                </a:solidFill>
+                <a:latin typeface="Arial"/>
+                <a:ea typeface="Arial"/>
+              </a:rPr>
+              <a:t>SLC  </a:t>
+            </a:r>
+            <a:r>
+              <a:rPr sz="1600" b="0">
+                <a:solidFill>
+                  <a:srgbClr val="555555"/>
+                </a:solidFill>
+                <a:latin typeface="Arial"/>
+                <a:ea typeface="Arial"/>
+              </a:rPr>
+              <a:t>17~100 · 특수 제품, 축 위 생략</a:t>
+            </a:r>
+          </a:p>
+        </p:txBody>
+      </p:sp>
+      <p:sp>
+        <p:nvSpPr>
+          <p:cNvPr id="77" name="Rounded Rectangle 76"/>
+          <p:cNvSpPr/>
+          <p:nvPr/>
+        </p:nvSpPr>
+        <p:spPr>
+          <a:xfrm>
+            <a:off x="1504244" y="6508790"/>
+            <a:ext cx="2456462" cy="307878"/>
+          </a:xfrm>
+          <a:prstGeom prst="roundRect">
+            <a:avLst>
+              <a:gd name="adj" fmla="val 23760"/>
+            </a:avLst>
+          </a:prstGeom>
+          <a:noFill/>
+          <a:ln w="12700">
+            <a:solidFill>
+              <a:srgbClr val="8A8A8A"/>
+            </a:solidFill>
+            <a:prstDash val="dash"/>
+          </a:ln>
+          <a:effectLst/>
+        </p:spPr>
+        <p:style>
+          <a:lnRef idx="1">
+            <a:schemeClr val="accent1"/>
+          </a:lnRef>
+          <a:fillRef idx="3">
+            <a:schemeClr val="accent1"/>
+          </a:fillRef>
+          <a:effectRef idx="2">
+            <a:schemeClr val="accent1"/>
+          </a:effectRef>
+          <a:fontRef idx="minor">
+            <a:schemeClr val="lt1"/>
+          </a:fontRef>
+        </p:style>
+        <p:txBody>
+          <a:bodyPr rtlCol="0" anchor="ctr"/>
+          <a:lstStyle/>
+          <a:p>
+            <a:pPr algn="ctr"/>
+          </a:p>
+        </p:txBody>
+      </p:sp>
+      <p:sp>
+        <p:nvSpPr>
+          <p:cNvPr id="78" name="TextBox 77"/>
+          <p:cNvSpPr txBox="1"/>
+          <p:nvPr/>
+        </p:nvSpPr>
+        <p:spPr>
+          <a:xfrm>
+            <a:off x="1627067" y="6862572"/>
+            <a:ext cx="822960" cy="274320"/>
+          </a:xfrm>
+          <a:prstGeom prst="rect">
+            <a:avLst/>
+          </a:prstGeom>
+          <a:noFill/>
+        </p:spPr>
+        <p:txBody>
+          <a:bodyPr wrap="square" anchor="ctr" lIns="0" rIns="0" tIns="0" bIns="0">
+            <a:spAutoFit/>
+          </a:bodyPr>
+          <a:lstStyle/>
+          <a:p>
+            <a:pPr algn="l">
+              <a:lnSpc>
+                <a:spcPct val="110000"/>
+              </a:lnSpc>
+            </a:pPr>
+            <a:r>
+              <a:rPr sz="1800" b="1">
+                <a:solidFill>
+                  <a:srgbClr val="555555"/>
+                </a:solidFill>
+                <a:latin typeface="Arial"/>
+                <a:ea typeface="Arial"/>
+              </a:rPr>
+              <a:t>MLC</a:t>
+            </a:r>
+          </a:p>
+        </p:txBody>
+      </p:sp>
+      <p:sp>
+        <p:nvSpPr>
+          <p:cNvPr id="79" name="Rounded Rectangle 78"/>
+          <p:cNvSpPr/>
+          <p:nvPr/>
+        </p:nvSpPr>
+        <p:spPr>
+          <a:xfrm>
+            <a:off x="4022118" y="6508790"/>
+            <a:ext cx="7123740" cy="1372971"/>
+          </a:xfrm>
+          <a:prstGeom prst="roundRect">
+            <a:avLst>
+              <a:gd name="adj" fmla="val 5328"/>
+            </a:avLst>
+          </a:prstGeom>
+          <a:noFill/>
+          <a:ln w="12700">
+            <a:solidFill>
+              <a:srgbClr val="8A8A8A"/>
+            </a:solidFill>
+            <a:prstDash val="dash"/>
+          </a:ln>
+          <a:effectLst/>
+        </p:spPr>
+        <p:style>
+          <a:lnRef idx="1">
+            <a:schemeClr val="accent1"/>
+          </a:lnRef>
+          <a:fillRef idx="3">
+            <a:schemeClr val="accent1"/>
+          </a:fillRef>
+          <a:effectRef idx="2">
+            <a:schemeClr val="accent1"/>
+          </a:effectRef>
+          <a:fontRef idx="minor">
+            <a:schemeClr val="lt1"/>
+          </a:fontRef>
+        </p:style>
+        <p:txBody>
+          <a:bodyPr rtlCol="0" anchor="ctr"/>
+          <a:lstStyle/>
+          <a:p>
+            <a:pPr algn="ctr"/>
+          </a:p>
+        </p:txBody>
+      </p:sp>
+      <p:sp>
+        <p:nvSpPr>
+          <p:cNvPr id="80" name="TextBox 79"/>
+          <p:cNvSpPr txBox="1"/>
+          <p:nvPr/>
+        </p:nvSpPr>
+        <p:spPr>
+          <a:xfrm>
+            <a:off x="4144941" y="6538051"/>
+            <a:ext cx="822960" cy="274320"/>
+          </a:xfrm>
+          <a:prstGeom prst="rect">
+            <a:avLst/>
+          </a:prstGeom>
+          <a:noFill/>
+        </p:spPr>
+        <p:txBody>
+          <a:bodyPr wrap="square" anchor="ctr" lIns="0" rIns="0" tIns="0" bIns="0">
+            <a:spAutoFit/>
+          </a:bodyPr>
+          <a:lstStyle/>
+          <a:p>
+            <a:pPr algn="l">
+              <a:lnSpc>
+                <a:spcPct val="110000"/>
+              </a:lnSpc>
+            </a:pPr>
+            <a:r>
+              <a:rPr sz="1800" b="1">
+                <a:solidFill>
+                  <a:srgbClr val="555555"/>
+                </a:solidFill>
+                <a:latin typeface="Arial"/>
+                <a:ea typeface="Arial"/>
+              </a:rPr>
+              <a:t>TLC</a:t>
+            </a:r>
+          </a:p>
+        </p:txBody>
+      </p:sp>
+      <p:sp>
+        <p:nvSpPr>
+          <p:cNvPr id="81" name="Rounded Rectangle 80"/>
+          <p:cNvSpPr/>
+          <p:nvPr/>
+        </p:nvSpPr>
+        <p:spPr>
+          <a:xfrm>
+            <a:off x="5680230" y="8089788"/>
+            <a:ext cx="5465628" cy="174741"/>
+          </a:xfrm>
+          <a:prstGeom prst="roundRect">
+            <a:avLst>
+              <a:gd name="adj" fmla="val 41862"/>
+            </a:avLst>
+          </a:prstGeom>
+          <a:noFill/>
+          <a:ln w="12700">
+            <a:solidFill>
+              <a:srgbClr val="8A8A8A"/>
+            </a:solidFill>
+            <a:prstDash val="dash"/>
+          </a:ln>
+          <a:effectLst/>
+        </p:spPr>
+        <p:style>
+          <a:lnRef idx="1">
+            <a:schemeClr val="accent1"/>
+          </a:lnRef>
+          <a:fillRef idx="3">
+            <a:schemeClr val="accent1"/>
+          </a:fillRef>
+          <a:effectRef idx="2">
+            <a:schemeClr val="accent1"/>
+          </a:effectRef>
+          <a:fontRef idx="minor">
+            <a:schemeClr val="lt1"/>
+          </a:fontRef>
+        </p:style>
+        <p:txBody>
+          <a:bodyPr rtlCol="0" anchor="ctr"/>
+          <a:lstStyle/>
+          <a:p>
+            <a:pPr algn="ctr"/>
+          </a:p>
+        </p:txBody>
+      </p:sp>
+      <p:sp>
+        <p:nvSpPr>
+          <p:cNvPr id="82" name="TextBox 81"/>
+          <p:cNvSpPr txBox="1"/>
+          <p:nvPr/>
+        </p:nvSpPr>
+        <p:spPr>
+          <a:xfrm>
+            <a:off x="4820468" y="8040831"/>
+            <a:ext cx="822960" cy="274320"/>
+          </a:xfrm>
+          <a:prstGeom prst="rect">
+            <a:avLst/>
+          </a:prstGeom>
+          <a:noFill/>
+        </p:spPr>
+        <p:txBody>
+          <a:bodyPr wrap="square" anchor="ctr" lIns="0" rIns="0" tIns="0" bIns="0">
+            <a:spAutoFit/>
+          </a:bodyPr>
+          <a:lstStyle/>
+          <a:p>
+            <a:pPr algn="l">
+              <a:lnSpc>
+                <a:spcPct val="110000"/>
+              </a:lnSpc>
+            </a:pPr>
+            <a:r>
+              <a:rPr sz="1800" b="1">
+                <a:solidFill>
+                  <a:srgbClr val="555555"/>
+                </a:solidFill>
+                <a:latin typeface="Arial"/>
+                <a:ea typeface="Arial"/>
+              </a:rPr>
+              <a:t>QLC</a:t>
+            </a:r>
+          </a:p>
+        </p:txBody>
+      </p:sp>
+      <p:sp>
+        <p:nvSpPr>
+          <p:cNvPr id="83" name="Right Arrow 82"/>
+          <p:cNvSpPr/>
+          <p:nvPr/>
+        </p:nvSpPr>
+        <p:spPr>
+          <a:xfrm rot="539959">
+            <a:off x="1537427" y="7094829"/>
+            <a:ext cx="9575249" cy="475488"/>
+          </a:xfrm>
+          <a:prstGeom prst="rightArrow">
+            <a:avLst>
+              <a:gd name="adj1" fmla="val 46000"/>
+              <a:gd name="adj2" fmla="val 90000"/>
+            </a:avLst>
+          </a:prstGeom>
+          <a:solidFill>
+            <a:srgbClr val="1428A0">
+              <a:alpha val="14000"/>
+            </a:srgbClr>
+          </a:solidFill>
+          <a:ln>
+            <a:noFill/>
+          </a:ln>
+          <a:effectLst/>
+        </p:spPr>
+        <p:style>
+          <a:lnRef idx="1">
+            <a:schemeClr val="accent1"/>
+          </a:lnRef>
+          <a:fillRef idx="3">
+            <a:schemeClr val="accent1"/>
+          </a:fillRef>
+          <a:effectRef idx="2">
+            <a:schemeClr val="accent1"/>
+          </a:effectRef>
+          <a:fontRef idx="minor">
+            <a:schemeClr val="lt1"/>
+          </a:fontRef>
+        </p:style>
+        <p:txBody>
+          <a:bodyPr rtlCol="0" anchor="ctr"/>
+          <a:lstStyle/>
+          <a:p>
+            <a:pPr algn="ctr"/>
+          </a:p>
+        </p:txBody>
+      </p:sp>
+      <p:sp>
+        <p:nvSpPr>
+          <p:cNvPr id="84" name="Oval 83"/>
+          <p:cNvSpPr/>
+          <p:nvPr/>
+        </p:nvSpPr>
+        <p:spPr>
+          <a:xfrm>
+            <a:off x="2111056" y="6533388"/>
+            <a:ext cx="100584" cy="100584"/>
+          </a:xfrm>
+          <a:prstGeom prst="ellipse">
+            <a:avLst/>
+          </a:prstGeom>
+          <a:solidFill>
+            <a:srgbClr val="1A9E9E"/>
+          </a:solidFill>
+          <a:ln>
+            <a:noFill/>
+          </a:ln>
+          <a:effectLst/>
+        </p:spPr>
+        <p:style>
+          <a:lnRef idx="1">
+            <a:schemeClr val="accent1"/>
+          </a:lnRef>
+          <a:fillRef idx="3">
+            <a:schemeClr val="accent1"/>
+          </a:fillRef>
+          <a:effectRef idx="2">
+            <a:schemeClr val="accent1"/>
+          </a:effectRef>
+          <a:fontRef idx="minor">
+            <a:schemeClr val="lt1"/>
+          </a:fontRef>
+        </p:style>
+        <p:txBody>
+          <a:bodyPr rtlCol="0" anchor="ctr"/>
+          <a:lstStyle/>
+          <a:p>
+            <a:pPr algn="ctr"/>
+          </a:p>
+        </p:txBody>
+      </p:sp>
+      <p:sp>
+        <p:nvSpPr>
+          <p:cNvPr id="85" name="Oval 84"/>
+          <p:cNvSpPr/>
+          <p:nvPr/>
+        </p:nvSpPr>
+        <p:spPr>
+          <a:xfrm>
+            <a:off x="3339287" y="6533388"/>
+            <a:ext cx="100584" cy="100584"/>
+          </a:xfrm>
+          <a:prstGeom prst="ellipse">
+            <a:avLst/>
+          </a:prstGeom>
+          <a:solidFill>
+            <a:srgbClr val="1A9E9E"/>
+          </a:solidFill>
+          <a:ln>
+            <a:noFill/>
+          </a:ln>
+          <a:effectLst/>
+        </p:spPr>
+        <p:style>
+          <a:lnRef idx="1">
+            <a:schemeClr val="accent1"/>
+          </a:lnRef>
+          <a:fillRef idx="3">
+            <a:schemeClr val="accent1"/>
+          </a:fillRef>
+          <a:effectRef idx="2">
+            <a:schemeClr val="accent1"/>
+          </a:effectRef>
+          <a:fontRef idx="minor">
+            <a:schemeClr val="lt1"/>
+          </a:fontRef>
+        </p:style>
+        <p:txBody>
+          <a:bodyPr rtlCol="0" anchor="ctr"/>
+          <a:lstStyle/>
+          <a:p>
+            <a:pPr algn="ctr"/>
+          </a:p>
+        </p:txBody>
+      </p:sp>
+      <p:sp>
+        <p:nvSpPr>
+          <p:cNvPr id="86" name="Oval 85"/>
+          <p:cNvSpPr/>
+          <p:nvPr/>
+        </p:nvSpPr>
+        <p:spPr>
+          <a:xfrm>
+            <a:off x="5181633" y="7714975"/>
+            <a:ext cx="100584" cy="100584"/>
+          </a:xfrm>
+          <a:prstGeom prst="ellipse">
+            <a:avLst/>
+          </a:prstGeom>
+          <a:solidFill>
+            <a:srgbClr val="1A9E9E"/>
+          </a:solidFill>
+          <a:ln>
+            <a:noFill/>
+          </a:ln>
+          <a:effectLst/>
+        </p:spPr>
+        <p:style>
+          <a:lnRef idx="1">
+            <a:schemeClr val="accent1"/>
+          </a:lnRef>
+          <a:fillRef idx="3">
+            <a:schemeClr val="accent1"/>
+          </a:fillRef>
+          <a:effectRef idx="2">
+            <a:schemeClr val="accent1"/>
+          </a:effectRef>
+          <a:fontRef idx="minor">
+            <a:schemeClr val="lt1"/>
+          </a:fontRef>
+        </p:style>
+        <p:txBody>
+          <a:bodyPr rtlCol="0" anchor="ctr"/>
+          <a:lstStyle/>
+          <a:p>
+            <a:pPr algn="ctr"/>
+          </a:p>
+        </p:txBody>
+      </p:sp>
+      <p:sp>
+        <p:nvSpPr>
+          <p:cNvPr id="87" name="Oval 86"/>
+          <p:cNvSpPr/>
+          <p:nvPr/>
+        </p:nvSpPr>
+        <p:spPr>
+          <a:xfrm>
+            <a:off x="7023980" y="7698333"/>
+            <a:ext cx="100584" cy="100584"/>
+          </a:xfrm>
+          <a:prstGeom prst="ellipse">
+            <a:avLst/>
+          </a:prstGeom>
+          <a:solidFill>
+            <a:srgbClr val="1A9E9E"/>
+          </a:solidFill>
+          <a:ln>
+            <a:noFill/>
+          </a:ln>
+          <a:effectLst/>
+        </p:spPr>
+        <p:style>
+          <a:lnRef idx="1">
+            <a:schemeClr val="accent1"/>
+          </a:lnRef>
+          <a:fillRef idx="3">
+            <a:schemeClr val="accent1"/>
+          </a:fillRef>
+          <a:effectRef idx="2">
+            <a:schemeClr val="accent1"/>
+          </a:effectRef>
+          <a:fontRef idx="minor">
+            <a:schemeClr val="lt1"/>
+          </a:fontRef>
+        </p:style>
+        <p:txBody>
+          <a:bodyPr rtlCol="0" anchor="ctr"/>
+          <a:lstStyle/>
+          <a:p>
+            <a:pPr algn="ctr"/>
+          </a:p>
+        </p:txBody>
+      </p:sp>
+      <p:sp>
+        <p:nvSpPr>
+          <p:cNvPr id="88" name="Oval 87"/>
+          <p:cNvSpPr/>
+          <p:nvPr/>
+        </p:nvSpPr>
+        <p:spPr>
+          <a:xfrm>
+            <a:off x="8252211" y="7698333"/>
+            <a:ext cx="100584" cy="100584"/>
+          </a:xfrm>
+          <a:prstGeom prst="ellipse">
+            <a:avLst/>
+          </a:prstGeom>
+          <a:solidFill>
+            <a:srgbClr val="1A9E9E"/>
+          </a:solidFill>
+          <a:ln>
+            <a:noFill/>
+          </a:ln>
+          <a:effectLst/>
+        </p:spPr>
+        <p:style>
+          <a:lnRef idx="1">
+            <a:schemeClr val="accent1"/>
+          </a:lnRef>
+          <a:fillRef idx="3">
+            <a:schemeClr val="accent1"/>
+          </a:fillRef>
+          <a:effectRef idx="2">
+            <a:schemeClr val="accent1"/>
+          </a:effectRef>
+          <a:fontRef idx="minor">
+            <a:schemeClr val="lt1"/>
+          </a:fontRef>
+        </p:style>
+        <p:txBody>
+          <a:bodyPr rtlCol="0" anchor="ctr"/>
+          <a:lstStyle/>
+          <a:p>
+            <a:pPr algn="ctr"/>
+          </a:p>
+        </p:txBody>
+      </p:sp>
+      <p:sp>
+        <p:nvSpPr>
+          <p:cNvPr id="89" name="Oval 88"/>
+          <p:cNvSpPr/>
+          <p:nvPr/>
+        </p:nvSpPr>
+        <p:spPr>
+          <a:xfrm>
+            <a:off x="9480442" y="7698333"/>
+            <a:ext cx="100584" cy="100584"/>
+          </a:xfrm>
+          <a:prstGeom prst="ellipse">
+            <a:avLst/>
+          </a:prstGeom>
+          <a:solidFill>
+            <a:srgbClr val="1A9E9E"/>
+          </a:solidFill>
+          <a:ln>
+            <a:noFill/>
+          </a:ln>
+          <a:effectLst/>
+        </p:spPr>
+        <p:style>
+          <a:lnRef idx="1">
+            <a:schemeClr val="accent1"/>
+          </a:lnRef>
+          <a:fillRef idx="3">
+            <a:schemeClr val="accent1"/>
+          </a:fillRef>
+          <a:effectRef idx="2">
+            <a:schemeClr val="accent1"/>
+          </a:effectRef>
+          <a:fontRef idx="minor">
+            <a:schemeClr val="lt1"/>
+          </a:fontRef>
+        </p:style>
+        <p:txBody>
+          <a:bodyPr rtlCol="0" anchor="ctr"/>
+          <a:lstStyle/>
+          <a:p>
+            <a:pPr algn="ctr"/>
+          </a:p>
+        </p:txBody>
+      </p:sp>
+      <p:sp>
+        <p:nvSpPr>
+          <p:cNvPr id="90" name="Oval 89"/>
+          <p:cNvSpPr/>
+          <p:nvPr/>
+        </p:nvSpPr>
+        <p:spPr>
+          <a:xfrm>
+            <a:off x="5795749" y="8164311"/>
+            <a:ext cx="100584" cy="100584"/>
+          </a:xfrm>
+          <a:prstGeom prst="ellipse">
+            <a:avLst/>
+          </a:prstGeom>
+          <a:solidFill>
+            <a:srgbClr val="FFFFFF"/>
+          </a:solidFill>
+          <a:ln w="19050">
+            <a:solidFill>
+              <a:srgbClr val="1A9E9E"/>
+            </a:solidFill>
+          </a:ln>
+          <a:effectLst/>
+        </p:spPr>
+        <p:style>
+          <a:lnRef idx="1">
+            <a:schemeClr val="accent1"/>
+          </a:lnRef>
+          <a:fillRef idx="3">
+            <a:schemeClr val="accent1"/>
+          </a:fillRef>
+          <a:effectRef idx="2">
+            <a:schemeClr val="accent1"/>
+          </a:effectRef>
+          <a:fontRef idx="minor">
+            <a:schemeClr val="lt1"/>
+          </a:fontRef>
+        </p:style>
+        <p:txBody>
+          <a:bodyPr rtlCol="0" anchor="ctr"/>
+          <a:lstStyle/>
+          <a:p>
+            <a:pPr algn="ctr"/>
+          </a:p>
+        </p:txBody>
+      </p:sp>
+      <p:sp>
+        <p:nvSpPr>
+          <p:cNvPr id="91" name="Oval 90"/>
+          <p:cNvSpPr/>
+          <p:nvPr/>
+        </p:nvSpPr>
+        <p:spPr>
+          <a:xfrm>
+            <a:off x="7638096" y="8129363"/>
+            <a:ext cx="100584" cy="100584"/>
+          </a:xfrm>
+          <a:prstGeom prst="ellipse">
+            <a:avLst/>
+          </a:prstGeom>
+          <a:solidFill>
+            <a:srgbClr val="FFFFFF"/>
+          </a:solidFill>
+          <a:ln w="19050">
+            <a:solidFill>
+              <a:srgbClr val="1A9E9E"/>
+            </a:solidFill>
+          </a:ln>
+          <a:effectLst/>
+        </p:spPr>
+        <p:style>
+          <a:lnRef idx="1">
+            <a:schemeClr val="accent1"/>
+          </a:lnRef>
+          <a:fillRef idx="3">
+            <a:schemeClr val="accent1"/>
+          </a:fillRef>
+          <a:effectRef idx="2">
+            <a:schemeClr val="accent1"/>
+          </a:effectRef>
+          <a:fontRef idx="minor">
+            <a:schemeClr val="lt1"/>
+          </a:fontRef>
+        </p:style>
+        <p:txBody>
+          <a:bodyPr rtlCol="0" anchor="ctr"/>
+          <a:lstStyle/>
+          <a:p>
+            <a:pPr algn="ctr"/>
+          </a:p>
+        </p:txBody>
+      </p:sp>
+      <p:sp>
+        <p:nvSpPr>
+          <p:cNvPr id="92" name="Oval 91"/>
+          <p:cNvSpPr/>
+          <p:nvPr/>
+        </p:nvSpPr>
+        <p:spPr>
+          <a:xfrm>
+            <a:off x="8866327" y="8101071"/>
+            <a:ext cx="100584" cy="100584"/>
+          </a:xfrm>
+          <a:prstGeom prst="ellipse">
+            <a:avLst/>
+          </a:prstGeom>
+          <a:solidFill>
+            <a:srgbClr val="FFFFFF"/>
+          </a:solidFill>
+          <a:ln w="19050">
+            <a:solidFill>
+              <a:srgbClr val="1A9E9E"/>
+            </a:solidFill>
+          </a:ln>
+          <a:effectLst/>
+        </p:spPr>
+        <p:style>
+          <a:lnRef idx="1">
+            <a:schemeClr val="accent1"/>
+          </a:lnRef>
+          <a:fillRef idx="3">
+            <a:schemeClr val="accent1"/>
+          </a:fillRef>
+          <a:effectRef idx="2">
+            <a:schemeClr val="accent1"/>
+          </a:effectRef>
+          <a:fontRef idx="minor">
+            <a:schemeClr val="lt1"/>
+          </a:fontRef>
+        </p:style>
+        <p:txBody>
+          <a:bodyPr rtlCol="0" anchor="ctr"/>
+          <a:lstStyle/>
+          <a:p>
+            <a:pPr algn="ctr"/>
+          </a:p>
+        </p:txBody>
+      </p:sp>
+      <p:sp>
+        <p:nvSpPr>
+          <p:cNvPr id="93" name="Oval 92"/>
+          <p:cNvSpPr/>
+          <p:nvPr/>
+        </p:nvSpPr>
+        <p:spPr>
+          <a:xfrm>
+            <a:off x="2798865" y="6533388"/>
+            <a:ext cx="100584" cy="100584"/>
+          </a:xfrm>
+          <a:prstGeom prst="ellipse">
+            <a:avLst/>
+          </a:prstGeom>
+          <a:solidFill>
+            <a:srgbClr val="E39B25"/>
+          </a:solidFill>
+          <a:ln>
+            <a:noFill/>
+          </a:ln>
+          <a:effectLst/>
+        </p:spPr>
+        <p:style>
+          <a:lnRef idx="1">
+            <a:schemeClr val="accent1"/>
+          </a:lnRef>
+          <a:fillRef idx="3">
+            <a:schemeClr val="accent1"/>
+          </a:fillRef>
+          <a:effectRef idx="2">
+            <a:schemeClr val="accent1"/>
+          </a:effectRef>
+          <a:fontRef idx="minor">
+            <a:schemeClr val="lt1"/>
+          </a:fontRef>
+        </p:style>
+        <p:txBody>
+          <a:bodyPr rtlCol="0" anchor="ctr"/>
+          <a:lstStyle/>
+          <a:p>
+            <a:pPr algn="ctr"/>
+          </a:p>
+        </p:txBody>
+      </p:sp>
+      <p:sp>
+        <p:nvSpPr>
+          <p:cNvPr id="94" name="Oval 93"/>
+          <p:cNvSpPr/>
+          <p:nvPr/>
+        </p:nvSpPr>
+        <p:spPr>
+          <a:xfrm>
+            <a:off x="4641212" y="7365492"/>
+            <a:ext cx="100584" cy="100584"/>
+          </a:xfrm>
+          <a:prstGeom prst="ellipse">
+            <a:avLst/>
+          </a:prstGeom>
+          <a:solidFill>
+            <a:srgbClr val="E39B25"/>
+          </a:solidFill>
+          <a:ln>
+            <a:noFill/>
+          </a:ln>
+          <a:effectLst/>
+        </p:spPr>
+        <p:style>
+          <a:lnRef idx="1">
+            <a:schemeClr val="accent1"/>
+          </a:lnRef>
+          <a:fillRef idx="3">
+            <a:schemeClr val="accent1"/>
+          </a:fillRef>
+          <a:effectRef idx="2">
+            <a:schemeClr val="accent1"/>
+          </a:effectRef>
+          <a:fontRef idx="minor">
+            <a:schemeClr val="lt1"/>
+          </a:fontRef>
+        </p:style>
+        <p:txBody>
+          <a:bodyPr rtlCol="0" anchor="ctr"/>
+          <a:lstStyle/>
+          <a:p>
+            <a:pPr algn="ctr"/>
+          </a:p>
+        </p:txBody>
+      </p:sp>
+      <p:sp>
+        <p:nvSpPr>
+          <p:cNvPr id="95" name="Oval 94"/>
+          <p:cNvSpPr/>
+          <p:nvPr/>
+        </p:nvSpPr>
+        <p:spPr>
+          <a:xfrm>
+            <a:off x="6483558" y="7698333"/>
+            <a:ext cx="100584" cy="100584"/>
+          </a:xfrm>
+          <a:prstGeom prst="ellipse">
+            <a:avLst/>
+          </a:prstGeom>
+          <a:solidFill>
+            <a:srgbClr val="E39B25"/>
+          </a:solidFill>
+          <a:ln>
+            <a:noFill/>
+          </a:ln>
+          <a:effectLst/>
+        </p:spPr>
+        <p:style>
+          <a:lnRef idx="1">
+            <a:schemeClr val="accent1"/>
+          </a:lnRef>
+          <a:fillRef idx="3">
+            <a:schemeClr val="accent1"/>
+          </a:fillRef>
+          <a:effectRef idx="2">
+            <a:schemeClr val="accent1"/>
+          </a:effectRef>
+          <a:fontRef idx="minor">
+            <a:schemeClr val="lt1"/>
+          </a:fontRef>
+        </p:style>
+        <p:txBody>
+          <a:bodyPr rtlCol="0" anchor="ctr"/>
+          <a:lstStyle/>
+          <a:p>
+            <a:pPr algn="ctr"/>
+          </a:p>
+        </p:txBody>
+      </p:sp>
+      <p:sp>
+        <p:nvSpPr>
+          <p:cNvPr id="96" name="Oval 95"/>
+          <p:cNvSpPr/>
+          <p:nvPr/>
+        </p:nvSpPr>
+        <p:spPr>
+          <a:xfrm>
+            <a:off x="7711789" y="7698333"/>
+            <a:ext cx="100584" cy="100584"/>
+          </a:xfrm>
+          <a:prstGeom prst="ellipse">
+            <a:avLst/>
+          </a:prstGeom>
+          <a:solidFill>
+            <a:srgbClr val="E39B25"/>
+          </a:solidFill>
+          <a:ln>
+            <a:noFill/>
+          </a:ln>
+          <a:effectLst/>
+        </p:spPr>
+        <p:style>
+          <a:lnRef idx="1">
+            <a:schemeClr val="accent1"/>
+          </a:lnRef>
+          <a:fillRef idx="3">
+            <a:schemeClr val="accent1"/>
+          </a:fillRef>
+          <a:effectRef idx="2">
+            <a:schemeClr val="accent1"/>
+          </a:effectRef>
+          <a:fontRef idx="minor">
+            <a:schemeClr val="lt1"/>
+          </a:fontRef>
+        </p:style>
+        <p:txBody>
+          <a:bodyPr rtlCol="0" anchor="ctr"/>
+          <a:lstStyle/>
+          <a:p>
+            <a:pPr algn="ctr"/>
+          </a:p>
+        </p:txBody>
+      </p:sp>
+      <p:sp>
+        <p:nvSpPr>
+          <p:cNvPr id="97" name="Oval 96"/>
+          <p:cNvSpPr/>
+          <p:nvPr/>
+        </p:nvSpPr>
+        <p:spPr>
+          <a:xfrm>
+            <a:off x="8940021" y="7698333"/>
+            <a:ext cx="100584" cy="100584"/>
+          </a:xfrm>
+          <a:prstGeom prst="ellipse">
+            <a:avLst/>
+          </a:prstGeom>
+          <a:solidFill>
+            <a:srgbClr val="E39B25"/>
+          </a:solidFill>
+          <a:ln>
+            <a:noFill/>
+          </a:ln>
+          <a:effectLst/>
+        </p:spPr>
+        <p:style>
+          <a:lnRef idx="1">
+            <a:schemeClr val="accent1"/>
+          </a:lnRef>
+          <a:fillRef idx="3">
+            <a:schemeClr val="accent1"/>
+          </a:fillRef>
+          <a:effectRef idx="2">
+            <a:schemeClr val="accent1"/>
+          </a:effectRef>
+          <a:fontRef idx="minor">
+            <a:schemeClr val="lt1"/>
+          </a:fontRef>
+        </p:style>
+        <p:txBody>
+          <a:bodyPr rtlCol="0" anchor="ctr"/>
+          <a:lstStyle/>
+          <a:p>
+            <a:pPr algn="ctr"/>
+          </a:p>
+        </p:txBody>
+      </p:sp>
+      <p:sp>
+        <p:nvSpPr>
+          <p:cNvPr id="98" name="Oval 97"/>
+          <p:cNvSpPr/>
+          <p:nvPr/>
+        </p:nvSpPr>
+        <p:spPr>
+          <a:xfrm>
+            <a:off x="10168252" y="7698333"/>
+            <a:ext cx="100584" cy="100584"/>
+          </a:xfrm>
+          <a:prstGeom prst="ellipse">
+            <a:avLst/>
+          </a:prstGeom>
+          <a:solidFill>
+            <a:srgbClr val="E39B25"/>
+          </a:solidFill>
+          <a:ln>
+            <a:noFill/>
+          </a:ln>
+          <a:effectLst/>
+        </p:spPr>
+        <p:style>
+          <a:lnRef idx="1">
+            <a:schemeClr val="accent1"/>
+          </a:lnRef>
+          <a:fillRef idx="3">
+            <a:schemeClr val="accent1"/>
+          </a:fillRef>
+          <a:effectRef idx="2">
+            <a:schemeClr val="accent1"/>
+          </a:effectRef>
+          <a:fontRef idx="minor">
+            <a:schemeClr val="lt1"/>
+          </a:fontRef>
+        </p:style>
+        <p:txBody>
+          <a:bodyPr rtlCol="0" anchor="ctr"/>
+          <a:lstStyle/>
+          <a:p>
+            <a:pPr algn="ctr"/>
+          </a:p>
+        </p:txBody>
+      </p:sp>
+      <p:sp>
+        <p:nvSpPr>
+          <p:cNvPr id="99" name="Oval 98"/>
+          <p:cNvSpPr/>
+          <p:nvPr/>
+        </p:nvSpPr>
+        <p:spPr>
+          <a:xfrm>
+            <a:off x="10168252" y="8147669"/>
+            <a:ext cx="100584" cy="100584"/>
+          </a:xfrm>
+          <a:prstGeom prst="ellipse">
+            <a:avLst/>
+          </a:prstGeom>
+          <a:solidFill>
+            <a:srgbClr val="FFFFFF"/>
+          </a:solidFill>
+          <a:ln w="19050">
+            <a:solidFill>
+              <a:srgbClr val="E39B25"/>
+            </a:solidFill>
+          </a:ln>
+          <a:effectLst/>
+        </p:spPr>
+        <p:style>
+          <a:lnRef idx="1">
+            <a:schemeClr val="accent1"/>
+          </a:lnRef>
+          <a:fillRef idx="3">
+            <a:schemeClr val="accent1"/>
+          </a:fillRef>
+          <a:effectRef idx="2">
+            <a:schemeClr val="accent1"/>
+          </a:effectRef>
+          <a:fontRef idx="minor">
+            <a:schemeClr val="lt1"/>
+          </a:fontRef>
+        </p:style>
+        <p:txBody>
+          <a:bodyPr rtlCol="0" anchor="ctr"/>
+          <a:lstStyle/>
+          <a:p>
+            <a:pPr algn="ctr"/>
+          </a:p>
+        </p:txBody>
+      </p:sp>
+      <p:sp>
+        <p:nvSpPr>
+          <p:cNvPr id="100" name="Oval 99"/>
+          <p:cNvSpPr/>
+          <p:nvPr/>
+        </p:nvSpPr>
+        <p:spPr>
+          <a:xfrm>
+            <a:off x="2258443" y="6533388"/>
+            <a:ext cx="100584" cy="100584"/>
+          </a:xfrm>
+          <a:prstGeom prst="ellipse">
+            <a:avLst/>
+          </a:prstGeom>
+          <a:solidFill>
+            <a:srgbClr val="8B5FBF"/>
+          </a:solidFill>
+          <a:ln>
+            <a:noFill/>
+          </a:ln>
+          <a:effectLst/>
+        </p:spPr>
+        <p:style>
+          <a:lnRef idx="1">
+            <a:schemeClr val="accent1"/>
+          </a:lnRef>
+          <a:fillRef idx="3">
+            <a:schemeClr val="accent1"/>
+          </a:fillRef>
+          <a:effectRef idx="2">
+            <a:schemeClr val="accent1"/>
+          </a:effectRef>
+          <a:fontRef idx="minor">
+            <a:schemeClr val="lt1"/>
+          </a:fontRef>
+        </p:style>
+        <p:txBody>
+          <a:bodyPr rtlCol="0" anchor="ctr"/>
+          <a:lstStyle/>
+          <a:p>
+            <a:pPr algn="ctr"/>
+          </a:p>
+        </p:txBody>
+      </p:sp>
+      <p:sp>
+        <p:nvSpPr>
+          <p:cNvPr id="101" name="Oval 100"/>
+          <p:cNvSpPr/>
+          <p:nvPr/>
+        </p:nvSpPr>
+        <p:spPr>
+          <a:xfrm>
+            <a:off x="5329021" y="6533388"/>
+            <a:ext cx="100584" cy="100584"/>
+          </a:xfrm>
+          <a:prstGeom prst="ellipse">
+            <a:avLst/>
+          </a:prstGeom>
+          <a:solidFill>
+            <a:srgbClr val="8B5FBF"/>
+          </a:solidFill>
+          <a:ln>
+            <a:noFill/>
+          </a:ln>
+          <a:effectLst/>
+        </p:spPr>
+        <p:style>
+          <a:lnRef idx="1">
+            <a:schemeClr val="accent1"/>
+          </a:lnRef>
+          <a:fillRef idx="3">
+            <a:schemeClr val="accent1"/>
+          </a:fillRef>
+          <a:effectRef idx="2">
+            <a:schemeClr val="accent1"/>
+          </a:effectRef>
+          <a:fontRef idx="minor">
+            <a:schemeClr val="lt1"/>
+          </a:fontRef>
+        </p:style>
+        <p:txBody>
+          <a:bodyPr rtlCol="0" anchor="ctr"/>
+          <a:lstStyle/>
+          <a:p>
+            <a:pPr algn="ctr"/>
+          </a:p>
+        </p:txBody>
+      </p:sp>
+      <p:sp>
+        <p:nvSpPr>
+          <p:cNvPr id="102" name="Oval 101"/>
+          <p:cNvSpPr/>
+          <p:nvPr/>
+        </p:nvSpPr>
+        <p:spPr>
+          <a:xfrm>
+            <a:off x="7171368" y="6533388"/>
+            <a:ext cx="100584" cy="100584"/>
+          </a:xfrm>
+          <a:prstGeom prst="ellipse">
+            <a:avLst/>
+          </a:prstGeom>
+          <a:solidFill>
+            <a:srgbClr val="8B5FBF"/>
+          </a:solidFill>
+          <a:ln>
+            <a:noFill/>
+          </a:ln>
+          <a:effectLst/>
+        </p:spPr>
+        <p:style>
+          <a:lnRef idx="1">
+            <a:schemeClr val="accent1"/>
+          </a:lnRef>
+          <a:fillRef idx="3">
+            <a:schemeClr val="accent1"/>
+          </a:fillRef>
+          <a:effectRef idx="2">
+            <a:schemeClr val="accent1"/>
+          </a:effectRef>
+          <a:fontRef idx="minor">
+            <a:schemeClr val="lt1"/>
+          </a:fontRef>
+        </p:style>
+        <p:txBody>
+          <a:bodyPr rtlCol="0" anchor="ctr"/>
+          <a:lstStyle/>
+          <a:p>
+            <a:pPr algn="ctr"/>
+          </a:p>
+        </p:txBody>
+      </p:sp>
+      <p:sp>
+        <p:nvSpPr>
+          <p:cNvPr id="103" name="Oval 102"/>
+          <p:cNvSpPr/>
+          <p:nvPr/>
+        </p:nvSpPr>
+        <p:spPr>
+          <a:xfrm>
+            <a:off x="8399599" y="7698333"/>
+            <a:ext cx="100584" cy="100584"/>
+          </a:xfrm>
+          <a:prstGeom prst="ellipse">
+            <a:avLst/>
+          </a:prstGeom>
+          <a:solidFill>
+            <a:srgbClr val="8B5FBF"/>
+          </a:solidFill>
+          <a:ln>
+            <a:noFill/>
+          </a:ln>
+          <a:effectLst/>
+        </p:spPr>
+        <p:style>
+          <a:lnRef idx="1">
+            <a:schemeClr val="accent1"/>
+          </a:lnRef>
+          <a:fillRef idx="3">
+            <a:schemeClr val="accent1"/>
+          </a:fillRef>
+          <a:effectRef idx="2">
+            <a:schemeClr val="accent1"/>
+          </a:effectRef>
+          <a:fontRef idx="minor">
+            <a:schemeClr val="lt1"/>
+          </a:fontRef>
+        </p:style>
+        <p:txBody>
+          <a:bodyPr rtlCol="0" anchor="ctr"/>
+          <a:lstStyle/>
+          <a:p>
+            <a:pPr algn="ctr"/>
+          </a:p>
+        </p:txBody>
+      </p:sp>
+      <p:sp>
+        <p:nvSpPr>
+          <p:cNvPr id="104" name="Oval 103"/>
+          <p:cNvSpPr/>
+          <p:nvPr/>
+        </p:nvSpPr>
+        <p:spPr>
+          <a:xfrm>
+            <a:off x="10241946" y="7698333"/>
+            <a:ext cx="100584" cy="100584"/>
+          </a:xfrm>
+          <a:prstGeom prst="ellipse">
+            <a:avLst/>
+          </a:prstGeom>
+          <a:solidFill>
+            <a:srgbClr val="8B5FBF"/>
+          </a:solidFill>
+          <a:ln>
+            <a:noFill/>
+          </a:ln>
+          <a:effectLst/>
+        </p:spPr>
+        <p:style>
+          <a:lnRef idx="1">
+            <a:schemeClr val="accent1"/>
+          </a:lnRef>
+          <a:fillRef idx="3">
+            <a:schemeClr val="accent1"/>
+          </a:fillRef>
+          <a:effectRef idx="2">
+            <a:schemeClr val="accent1"/>
+          </a:effectRef>
+          <a:fontRef idx="minor">
+            <a:schemeClr val="lt1"/>
+          </a:fontRef>
+        </p:style>
+        <p:txBody>
+          <a:bodyPr rtlCol="0" anchor="ctr"/>
+          <a:lstStyle/>
+          <a:p>
+            <a:pPr algn="ctr"/>
+          </a:p>
+        </p:txBody>
+      </p:sp>
+      <p:sp>
+        <p:nvSpPr>
+          <p:cNvPr id="105" name="Oval 104"/>
+          <p:cNvSpPr/>
+          <p:nvPr/>
+        </p:nvSpPr>
+        <p:spPr>
+          <a:xfrm>
+            <a:off x="10241946" y="8147669"/>
+            <a:ext cx="100584" cy="100584"/>
+          </a:xfrm>
+          <a:prstGeom prst="ellipse">
+            <a:avLst/>
+          </a:prstGeom>
+          <a:solidFill>
+            <a:srgbClr val="FFFFFF"/>
+          </a:solidFill>
+          <a:ln w="19050">
+            <a:solidFill>
+              <a:srgbClr val="8B5FBF"/>
+            </a:solidFill>
+          </a:ln>
+          <a:effectLst/>
+        </p:spPr>
+        <p:style>
+          <a:lnRef idx="1">
+            <a:schemeClr val="accent1"/>
+          </a:lnRef>
+          <a:fillRef idx="3">
+            <a:schemeClr val="accent1"/>
+          </a:fillRef>
+          <a:effectRef idx="2">
+            <a:schemeClr val="accent1"/>
+          </a:effectRef>
+          <a:fontRef idx="minor">
+            <a:schemeClr val="lt1"/>
+          </a:fontRef>
+        </p:style>
+        <p:txBody>
+          <a:bodyPr rtlCol="0" anchor="ctr"/>
+          <a:lstStyle/>
+          <a:p>
+            <a:pPr algn="ctr"/>
+          </a:p>
+        </p:txBody>
+      </p:sp>
+      <p:sp>
+        <p:nvSpPr>
+          <p:cNvPr id="106" name="Oval 105"/>
+          <p:cNvSpPr/>
+          <p:nvPr/>
+        </p:nvSpPr>
+        <p:spPr>
+          <a:xfrm>
+            <a:off x="6630946" y="7698333"/>
+            <a:ext cx="100584" cy="100584"/>
+          </a:xfrm>
+          <a:prstGeom prst="ellipse">
+            <a:avLst/>
+          </a:prstGeom>
+          <a:solidFill>
+            <a:srgbClr val="D9637A"/>
+          </a:solidFill>
+          <a:ln>
+            <a:noFill/>
+          </a:ln>
+          <a:effectLst/>
+        </p:spPr>
+        <p:style>
+          <a:lnRef idx="1">
+            <a:schemeClr val="accent1"/>
+          </a:lnRef>
+          <a:fillRef idx="3">
+            <a:schemeClr val="accent1"/>
+          </a:fillRef>
+          <a:effectRef idx="2">
+            <a:schemeClr val="accent1"/>
+          </a:effectRef>
+          <a:fontRef idx="minor">
+            <a:schemeClr val="lt1"/>
+          </a:fontRef>
+        </p:style>
+        <p:txBody>
+          <a:bodyPr rtlCol="0" anchor="ctr"/>
+          <a:lstStyle/>
+          <a:p>
+            <a:pPr algn="ctr"/>
+          </a:p>
+        </p:txBody>
+      </p:sp>
+      <p:sp>
+        <p:nvSpPr>
+          <p:cNvPr id="107" name="Oval 106"/>
+          <p:cNvSpPr/>
+          <p:nvPr/>
+        </p:nvSpPr>
+        <p:spPr>
+          <a:xfrm>
+            <a:off x="7245062" y="7698333"/>
+            <a:ext cx="100584" cy="100584"/>
+          </a:xfrm>
+          <a:prstGeom prst="ellipse">
+            <a:avLst/>
+          </a:prstGeom>
+          <a:solidFill>
+            <a:srgbClr val="D9637A"/>
+          </a:solidFill>
+          <a:ln>
+            <a:noFill/>
+          </a:ln>
+          <a:effectLst/>
+        </p:spPr>
+        <p:style>
+          <a:lnRef idx="1">
+            <a:schemeClr val="accent1"/>
+          </a:lnRef>
+          <a:fillRef idx="3">
+            <a:schemeClr val="accent1"/>
+          </a:fillRef>
+          <a:effectRef idx="2">
+            <a:schemeClr val="accent1"/>
+          </a:effectRef>
+          <a:fontRef idx="minor">
+            <a:schemeClr val="lt1"/>
+          </a:fontRef>
+        </p:style>
+        <p:txBody>
+          <a:bodyPr rtlCol="0" anchor="ctr"/>
+          <a:lstStyle/>
+          <a:p>
+            <a:pPr algn="ctr"/>
+          </a:p>
+        </p:txBody>
+      </p:sp>
+      <p:sp>
+        <p:nvSpPr>
+          <p:cNvPr id="108" name="Oval 107"/>
+          <p:cNvSpPr/>
+          <p:nvPr/>
+        </p:nvSpPr>
+        <p:spPr>
+          <a:xfrm>
+            <a:off x="1791715" y="6533388"/>
+            <a:ext cx="100584" cy="100584"/>
+          </a:xfrm>
+          <a:prstGeom prst="ellipse">
+            <a:avLst/>
+          </a:prstGeom>
+          <a:solidFill>
+            <a:srgbClr val="8A8A8A"/>
+          </a:solidFill>
+          <a:ln>
+            <a:noFill/>
+          </a:ln>
+          <a:effectLst/>
+        </p:spPr>
+        <p:style>
+          <a:lnRef idx="1">
+            <a:schemeClr val="accent1"/>
+          </a:lnRef>
+          <a:fillRef idx="3">
+            <a:schemeClr val="accent1"/>
+          </a:fillRef>
+          <a:effectRef idx="2">
+            <a:schemeClr val="accent1"/>
+          </a:effectRef>
+          <a:fontRef idx="minor">
+            <a:schemeClr val="lt1"/>
+          </a:fontRef>
+        </p:style>
+        <p:txBody>
+          <a:bodyPr rtlCol="0" anchor="ctr"/>
+          <a:lstStyle/>
+          <a:p>
+            <a:pPr algn="ctr"/>
+          </a:p>
+        </p:txBody>
+      </p:sp>
+      <p:sp>
+        <p:nvSpPr>
+          <p:cNvPr id="109" name="Oval 108"/>
+          <p:cNvSpPr/>
+          <p:nvPr/>
+        </p:nvSpPr>
+        <p:spPr>
+          <a:xfrm>
+            <a:off x="5476409" y="6533388"/>
+            <a:ext cx="100584" cy="100584"/>
+          </a:xfrm>
+          <a:prstGeom prst="ellipse">
+            <a:avLst/>
+          </a:prstGeom>
+          <a:solidFill>
+            <a:srgbClr val="8A8A8A"/>
+          </a:solidFill>
+          <a:ln>
+            <a:noFill/>
+          </a:ln>
+          <a:effectLst/>
+        </p:spPr>
+        <p:style>
+          <a:lnRef idx="1">
+            <a:schemeClr val="accent1"/>
+          </a:lnRef>
+          <a:fillRef idx="3">
+            <a:schemeClr val="accent1"/>
+          </a:fillRef>
+          <a:effectRef idx="2">
+            <a:schemeClr val="accent1"/>
+          </a:effectRef>
+          <a:fontRef idx="minor">
+            <a:schemeClr val="lt1"/>
+          </a:fontRef>
+        </p:style>
+        <p:txBody>
+          <a:bodyPr rtlCol="0" anchor="ctr"/>
+          <a:lstStyle/>
+          <a:p>
+            <a:pPr algn="ctr"/>
+          </a:p>
+        </p:txBody>
+      </p:sp>
+      <p:sp>
+        <p:nvSpPr>
+          <p:cNvPr id="110" name="Oval 109"/>
+          <p:cNvSpPr/>
+          <p:nvPr/>
+        </p:nvSpPr>
+        <p:spPr>
+          <a:xfrm>
+            <a:off x="7318755" y="7698333"/>
+            <a:ext cx="100584" cy="100584"/>
+          </a:xfrm>
+          <a:prstGeom prst="ellipse">
+            <a:avLst/>
+          </a:prstGeom>
+          <a:solidFill>
+            <a:srgbClr val="8A8A8A"/>
+          </a:solidFill>
+          <a:ln>
+            <a:noFill/>
+          </a:ln>
+          <a:effectLst/>
+        </p:spPr>
+        <p:style>
+          <a:lnRef idx="1">
+            <a:schemeClr val="accent1"/>
+          </a:lnRef>
+          <a:fillRef idx="3">
+            <a:schemeClr val="accent1"/>
+          </a:fillRef>
+          <a:effectRef idx="2">
+            <a:schemeClr val="accent1"/>
+          </a:effectRef>
+          <a:fontRef idx="minor">
+            <a:schemeClr val="lt1"/>
+          </a:fontRef>
+        </p:style>
+        <p:txBody>
+          <a:bodyPr rtlCol="0" anchor="ctr"/>
+          <a:lstStyle/>
+          <a:p>
+            <a:pPr algn="ctr"/>
+          </a:p>
+        </p:txBody>
+      </p:sp>
+      <p:sp>
+        <p:nvSpPr>
+          <p:cNvPr id="111" name="Oval 110"/>
+          <p:cNvSpPr/>
+          <p:nvPr/>
+        </p:nvSpPr>
+        <p:spPr>
+          <a:xfrm>
+            <a:off x="9775218" y="7698333"/>
+            <a:ext cx="100584" cy="100584"/>
+          </a:xfrm>
+          <a:prstGeom prst="ellipse">
+            <a:avLst/>
+          </a:prstGeom>
+          <a:solidFill>
+            <a:srgbClr val="8A8A8A"/>
+          </a:solidFill>
+          <a:ln>
+            <a:noFill/>
+          </a:ln>
+          <a:effectLst/>
+        </p:spPr>
+        <p:style>
+          <a:lnRef idx="1">
+            <a:schemeClr val="accent1"/>
+          </a:lnRef>
+          <a:fillRef idx="3">
+            <a:schemeClr val="accent1"/>
+          </a:fillRef>
+          <a:effectRef idx="2">
+            <a:schemeClr val="accent1"/>
+          </a:effectRef>
+          <a:fontRef idx="minor">
+            <a:schemeClr val="lt1"/>
+          </a:fontRef>
+        </p:style>
+        <p:txBody>
+          <a:bodyPr rtlCol="0" anchor="ctr"/>
+          <a:lstStyle/>
+          <a:p>
+            <a:pPr algn="ctr"/>
+          </a:p>
+        </p:txBody>
+      </p:sp>
+      <p:sp>
+        <p:nvSpPr>
+          <p:cNvPr id="112" name="Oval 111"/>
+          <p:cNvSpPr/>
+          <p:nvPr/>
+        </p:nvSpPr>
+        <p:spPr>
+          <a:xfrm>
+            <a:off x="10389333" y="8139348"/>
+            <a:ext cx="100584" cy="100584"/>
+          </a:xfrm>
+          <a:prstGeom prst="ellipse">
+            <a:avLst/>
+          </a:prstGeom>
+          <a:solidFill>
+            <a:srgbClr val="FFFFFF"/>
+          </a:solidFill>
+          <a:ln w="19050">
+            <a:solidFill>
+              <a:srgbClr val="8A8A8A"/>
+            </a:solidFill>
+          </a:ln>
+          <a:effectLst/>
+        </p:spPr>
+        <p:style>
+          <a:lnRef idx="1">
+            <a:schemeClr val="accent1"/>
+          </a:lnRef>
+          <a:fillRef idx="3">
+            <a:schemeClr val="accent1"/>
+          </a:fillRef>
+          <a:effectRef idx="2">
+            <a:schemeClr val="accent1"/>
+          </a:effectRef>
+          <a:fontRef idx="minor">
+            <a:schemeClr val="lt1"/>
+          </a:fontRef>
+        </p:style>
+        <p:txBody>
+          <a:bodyPr rtlCol="0" anchor="ctr"/>
+          <a:lstStyle/>
+          <a:p>
+            <a:pPr algn="ctr"/>
+          </a:p>
+        </p:txBody>
+      </p:sp>
+      <p:sp>
+        <p:nvSpPr>
+          <p:cNvPr id="113" name="Oval 112"/>
+          <p:cNvSpPr/>
+          <p:nvPr/>
+        </p:nvSpPr>
+        <p:spPr>
+          <a:xfrm>
+            <a:off x="2037362" y="6533388"/>
+            <a:ext cx="100584" cy="100584"/>
+          </a:xfrm>
+          <a:prstGeom prst="ellipse">
+            <a:avLst/>
+          </a:prstGeom>
+          <a:solidFill>
+            <a:srgbClr val="1428A0"/>
+          </a:solidFill>
+          <a:ln>
+            <a:noFill/>
+          </a:ln>
+          <a:effectLst/>
+        </p:spPr>
+        <p:style>
+          <a:lnRef idx="1">
+            <a:schemeClr val="accent1"/>
+          </a:lnRef>
+          <a:fillRef idx="3">
+            <a:schemeClr val="accent1"/>
+          </a:fillRef>
+          <a:effectRef idx="2">
+            <a:schemeClr val="accent1"/>
+          </a:effectRef>
+          <a:fontRef idx="minor">
+            <a:schemeClr val="lt1"/>
+          </a:fontRef>
+        </p:style>
+        <p:txBody>
+          <a:bodyPr rtlCol="0" anchor="ctr"/>
+          <a:lstStyle/>
+          <a:p>
+            <a:pPr algn="ctr"/>
+          </a:p>
+        </p:txBody>
+      </p:sp>
+      <p:sp>
+        <p:nvSpPr>
+          <p:cNvPr id="114" name="Oval 113"/>
+          <p:cNvSpPr/>
+          <p:nvPr/>
+        </p:nvSpPr>
+        <p:spPr>
+          <a:xfrm>
+            <a:off x="3265593" y="6533388"/>
+            <a:ext cx="100584" cy="100584"/>
+          </a:xfrm>
+          <a:prstGeom prst="ellipse">
+            <a:avLst/>
+          </a:prstGeom>
+          <a:solidFill>
+            <a:srgbClr val="1428A0"/>
+          </a:solidFill>
+          <a:ln>
+            <a:noFill/>
+          </a:ln>
+          <a:effectLst/>
+        </p:spPr>
+        <p:style>
+          <a:lnRef idx="1">
+            <a:schemeClr val="accent1"/>
+          </a:lnRef>
+          <a:fillRef idx="3">
+            <a:schemeClr val="accent1"/>
+          </a:fillRef>
+          <a:effectRef idx="2">
+            <a:schemeClr val="accent1"/>
+          </a:effectRef>
+          <a:fontRef idx="minor">
+            <a:schemeClr val="lt1"/>
+          </a:fontRef>
+        </p:style>
+        <p:txBody>
+          <a:bodyPr rtlCol="0" anchor="ctr"/>
+          <a:lstStyle/>
+          <a:p>
+            <a:pPr algn="ctr"/>
+          </a:p>
+        </p:txBody>
+      </p:sp>
+      <p:sp>
+        <p:nvSpPr>
+          <p:cNvPr id="115" name="Oval 114"/>
+          <p:cNvSpPr/>
+          <p:nvPr/>
+        </p:nvSpPr>
+        <p:spPr>
+          <a:xfrm>
+            <a:off x="3879708" y="7365492"/>
+            <a:ext cx="100584" cy="100584"/>
+          </a:xfrm>
+          <a:prstGeom prst="ellipse">
+            <a:avLst/>
+          </a:prstGeom>
+          <a:solidFill>
+            <a:srgbClr val="1428A0"/>
+          </a:solidFill>
+          <a:ln>
+            <a:noFill/>
+          </a:ln>
+          <a:effectLst/>
+        </p:spPr>
+        <p:style>
+          <a:lnRef idx="1">
+            <a:schemeClr val="accent1"/>
+          </a:lnRef>
+          <a:fillRef idx="3">
+            <a:schemeClr val="accent1"/>
+          </a:fillRef>
+          <a:effectRef idx="2">
+            <a:schemeClr val="accent1"/>
+          </a:effectRef>
+          <a:fontRef idx="minor">
+            <a:schemeClr val="lt1"/>
+          </a:fontRef>
+        </p:style>
+        <p:txBody>
+          <a:bodyPr rtlCol="0" anchor="ctr"/>
+          <a:lstStyle/>
+          <a:p>
+            <a:pPr algn="ctr"/>
+          </a:p>
+        </p:txBody>
+      </p:sp>
+      <p:sp>
+        <p:nvSpPr>
+          <p:cNvPr id="116" name="Oval 115"/>
+          <p:cNvSpPr/>
+          <p:nvPr/>
+        </p:nvSpPr>
+        <p:spPr>
+          <a:xfrm>
+            <a:off x="5107940" y="7365492"/>
+            <a:ext cx="100584" cy="100584"/>
+          </a:xfrm>
+          <a:prstGeom prst="ellipse">
+            <a:avLst/>
+          </a:prstGeom>
+          <a:solidFill>
+            <a:srgbClr val="1428A0"/>
+          </a:solidFill>
+          <a:ln>
+            <a:noFill/>
+          </a:ln>
+          <a:effectLst/>
+        </p:spPr>
+        <p:style>
+          <a:lnRef idx="1">
+            <a:schemeClr val="accent1"/>
+          </a:lnRef>
+          <a:fillRef idx="3">
+            <a:schemeClr val="accent1"/>
+          </a:fillRef>
+          <a:effectRef idx="2">
+            <a:schemeClr val="accent1"/>
+          </a:effectRef>
+          <a:fontRef idx="minor">
+            <a:schemeClr val="lt1"/>
+          </a:fontRef>
+        </p:style>
+        <p:txBody>
+          <a:bodyPr rtlCol="0" anchor="ctr"/>
+          <a:lstStyle/>
+          <a:p>
+            <a:pPr algn="ctr"/>
+          </a:p>
+        </p:txBody>
+      </p:sp>
+      <p:sp>
+        <p:nvSpPr>
+          <p:cNvPr id="117" name="Oval 116"/>
+          <p:cNvSpPr/>
+          <p:nvPr/>
+        </p:nvSpPr>
+        <p:spPr>
+          <a:xfrm>
+            <a:off x="6336171" y="7698333"/>
+            <a:ext cx="100584" cy="100584"/>
+          </a:xfrm>
+          <a:prstGeom prst="ellipse">
+            <a:avLst/>
+          </a:prstGeom>
+          <a:solidFill>
+            <a:srgbClr val="1428A0"/>
+          </a:solidFill>
+          <a:ln>
+            <a:noFill/>
+          </a:ln>
+          <a:effectLst/>
+        </p:spPr>
+        <p:style>
+          <a:lnRef idx="1">
+            <a:schemeClr val="accent1"/>
+          </a:lnRef>
+          <a:fillRef idx="3">
+            <a:schemeClr val="accent1"/>
+          </a:fillRef>
+          <a:effectRef idx="2">
+            <a:schemeClr val="accent1"/>
+          </a:effectRef>
+          <a:fontRef idx="minor">
+            <a:schemeClr val="lt1"/>
+          </a:fontRef>
+        </p:style>
+        <p:txBody>
+          <a:bodyPr rtlCol="0" anchor="ctr"/>
+          <a:lstStyle/>
+          <a:p>
+            <a:pPr algn="ctr"/>
+          </a:p>
+        </p:txBody>
+      </p:sp>
+      <p:sp>
+        <p:nvSpPr>
+          <p:cNvPr id="118" name="Oval 117"/>
+          <p:cNvSpPr/>
+          <p:nvPr/>
+        </p:nvSpPr>
+        <p:spPr>
+          <a:xfrm>
+            <a:off x="8178517" y="7698333"/>
+            <a:ext cx="100584" cy="100584"/>
+          </a:xfrm>
+          <a:prstGeom prst="ellipse">
+            <a:avLst/>
+          </a:prstGeom>
+          <a:solidFill>
+            <a:srgbClr val="1428A0"/>
+          </a:solidFill>
+          <a:ln>
+            <a:noFill/>
+          </a:ln>
+          <a:effectLst/>
+        </p:spPr>
+        <p:style>
+          <a:lnRef idx="1">
+            <a:schemeClr val="accent1"/>
+          </a:lnRef>
+          <a:fillRef idx="3">
+            <a:schemeClr val="accent1"/>
+          </a:fillRef>
+          <a:effectRef idx="2">
+            <a:schemeClr val="accent1"/>
+          </a:effectRef>
+          <a:fontRef idx="minor">
+            <a:schemeClr val="lt1"/>
+          </a:fontRef>
+        </p:style>
+        <p:txBody>
+          <a:bodyPr rtlCol="0" anchor="ctr"/>
+          <a:lstStyle/>
+          <a:p>
+            <a:pPr algn="ctr"/>
+          </a:p>
+        </p:txBody>
+      </p:sp>
+      <p:sp>
+        <p:nvSpPr>
+          <p:cNvPr id="119" name="Oval 118"/>
+          <p:cNvSpPr/>
+          <p:nvPr/>
+        </p:nvSpPr>
+        <p:spPr>
+          <a:xfrm>
+            <a:off x="9406748" y="7698333"/>
+            <a:ext cx="100584" cy="100584"/>
+          </a:xfrm>
+          <a:prstGeom prst="ellipse">
+            <a:avLst/>
+          </a:prstGeom>
+          <a:solidFill>
+            <a:srgbClr val="1428A0"/>
+          </a:solidFill>
+          <a:ln>
+            <a:noFill/>
+          </a:ln>
+          <a:effectLst/>
+        </p:spPr>
+        <p:style>
+          <a:lnRef idx="1">
+            <a:schemeClr val="accent1"/>
+          </a:lnRef>
+          <a:fillRef idx="3">
+            <a:schemeClr val="accent1"/>
+          </a:fillRef>
+          <a:effectRef idx="2">
+            <a:schemeClr val="accent1"/>
+          </a:effectRef>
+          <a:fontRef idx="minor">
+            <a:schemeClr val="lt1"/>
+          </a:fontRef>
+        </p:style>
+        <p:txBody>
+          <a:bodyPr rtlCol="0" anchor="ctr"/>
+          <a:lstStyle/>
+          <a:p>
+            <a:pPr algn="ctr"/>
+          </a:p>
+        </p:txBody>
+      </p:sp>
+      <p:sp>
+        <p:nvSpPr>
+          <p:cNvPr id="120" name="Oval 119"/>
+          <p:cNvSpPr/>
+          <p:nvPr/>
+        </p:nvSpPr>
+        <p:spPr>
+          <a:xfrm>
+            <a:off x="6950286" y="8167640"/>
+            <a:ext cx="100584" cy="100584"/>
+          </a:xfrm>
+          <a:prstGeom prst="ellipse">
+            <a:avLst/>
+          </a:prstGeom>
+          <a:solidFill>
+            <a:srgbClr val="FFFFFF"/>
+          </a:solidFill>
+          <a:ln w="19050">
             <a:solidFill>
               <a:srgbClr val="1428A0"/>
             </a:solidFill>
-            <a:prstDash val="dash"/>
           </a:ln>
           <a:effectLst/>
         </p:spPr>
@@ -18089,14 +20091,106 @@
       </p:sp>
       <p:sp>
         <p:nvSpPr>
-          <p:cNvPr id="76" name="TextBox 75"/>
+          <p:cNvPr id="121" name="Oval 120"/>
+          <p:cNvSpPr/>
+          <p:nvPr/>
+        </p:nvSpPr>
+        <p:spPr>
+          <a:xfrm>
+            <a:off x="9406748" y="8154326"/>
+            <a:ext cx="100584" cy="100584"/>
+          </a:xfrm>
+          <a:prstGeom prst="ellipse">
+            <a:avLst/>
+          </a:prstGeom>
+          <a:solidFill>
+            <a:srgbClr val="FFFFFF"/>
+          </a:solidFill>
+          <a:ln w="19050">
+            <a:solidFill>
+              <a:srgbClr val="1428A0"/>
+            </a:solidFill>
+          </a:ln>
+          <a:effectLst/>
+        </p:spPr>
+        <p:style>
+          <a:lnRef idx="1">
+            <a:schemeClr val="accent1"/>
+          </a:lnRef>
+          <a:fillRef idx="3">
+            <a:schemeClr val="accent1"/>
+          </a:fillRef>
+          <a:effectRef idx="2">
+            <a:schemeClr val="accent1"/>
+          </a:effectRef>
+          <a:fontRef idx="minor">
+            <a:schemeClr val="lt1"/>
+          </a:fontRef>
+        </p:style>
+        <p:txBody>
+          <a:bodyPr rtlCol="0" anchor="ctr"/>
+          <a:lstStyle/>
+          <a:p>
+            <a:pPr algn="ctr"/>
+          </a:p>
+        </p:txBody>
+      </p:sp>
+      <p:sp>
+        <p:nvSpPr>
+          <p:cNvPr id="122" name="Rounded Rectangle 121"/>
+          <p:cNvSpPr/>
+          <p:nvPr/>
+        </p:nvSpPr>
+        <p:spPr>
+          <a:xfrm>
+            <a:off x="11795760" y="5340096"/>
+            <a:ext cx="5532120" cy="3090672"/>
+          </a:xfrm>
+          <a:prstGeom prst="roundRect">
+            <a:avLst>
+              <a:gd name="adj" fmla="val 2366"/>
+            </a:avLst>
+          </a:prstGeom>
+          <a:solidFill>
+            <a:srgbClr val="FFFFFF"/>
+          </a:solidFill>
+          <a:ln>
+            <a:noFill/>
+          </a:ln>
+          <a:effectLst/>
+        </p:spPr>
+        <p:style>
+          <a:lnRef idx="1">
+            <a:schemeClr val="accent1"/>
+          </a:lnRef>
+          <a:fillRef idx="3">
+            <a:schemeClr val="accent1"/>
+          </a:fillRef>
+          <a:effectRef idx="2">
+            <a:schemeClr val="accent1"/>
+          </a:effectRef>
+          <a:fontRef idx="minor">
+            <a:schemeClr val="lt1"/>
+          </a:fontRef>
+        </p:style>
+        <p:txBody>
+          <a:bodyPr rtlCol="0" anchor="ctr"/>
+          <a:lstStyle/>
+          <a:p>
+            <a:pPr algn="ctr"/>
+          </a:p>
+        </p:txBody>
+      </p:sp>
+      <p:sp>
+        <p:nvSpPr>
+          <p:cNvPr id="123" name="TextBox 122"/>
           <p:cNvSpPr txBox="1"/>
           <p:nvPr/>
         </p:nvSpPr>
         <p:spPr>
           <a:xfrm>
-            <a:off x="8860536" y="6581851"/>
-            <a:ext cx="2377440" cy="256032"/>
+            <a:off x="11996928" y="5449824"/>
+            <a:ext cx="5129784" cy="384048"/>
           </a:xfrm>
           <a:prstGeom prst="rect">
             <a:avLst/>
@@ -18105,6 +20199,258 @@
         </p:spPr>
         <p:txBody>
           <a:bodyPr wrap="square" anchor="ctr" lIns="0" rIns="0" tIns="0" bIns="0">
+            <a:spAutoFit/>
+          </a:bodyPr>
+          <a:lstStyle/>
+          <a:p>
+            <a:pPr algn="l">
+              <a:lnSpc>
+                <a:spcPct val="110000"/>
+              </a:lnSpc>
+            </a:pPr>
+            <a:r>
+              <a:rPr sz="2000" b="1">
+                <a:solidFill>
+                  <a:srgbClr val="1A1A1A"/>
+                </a:solidFill>
+                <a:latin typeface="Arial"/>
+                <a:ea typeface="Arial"/>
+              </a:rPr>
+              <a:t>주요 DC 기업은 이미 SSD를 직접 설계</a:t>
+            </a:r>
+          </a:p>
+        </p:txBody>
+      </p:sp>
+      <p:sp>
+        <p:nvSpPr>
+          <p:cNvPr id="124" name="Rectangle 123"/>
+          <p:cNvSpPr/>
+          <p:nvPr/>
+        </p:nvSpPr>
+        <p:spPr>
+          <a:xfrm>
+            <a:off x="13345667" y="5980176"/>
+            <a:ext cx="9144" cy="1847088"/>
+          </a:xfrm>
+          <a:prstGeom prst="rect">
+            <a:avLst/>
+          </a:prstGeom>
+          <a:solidFill>
+            <a:srgbClr val="D9D9D9"/>
+          </a:solidFill>
+          <a:ln>
+            <a:noFill/>
+          </a:ln>
+          <a:effectLst/>
+        </p:spPr>
+        <p:style>
+          <a:lnRef idx="1">
+            <a:schemeClr val="accent1"/>
+          </a:lnRef>
+          <a:fillRef idx="3">
+            <a:schemeClr val="accent1"/>
+          </a:fillRef>
+          <a:effectRef idx="2">
+            <a:schemeClr val="accent1"/>
+          </a:effectRef>
+          <a:fontRef idx="minor">
+            <a:schemeClr val="lt1"/>
+          </a:fontRef>
+        </p:style>
+        <p:txBody>
+          <a:bodyPr rtlCol="0" anchor="ctr"/>
+          <a:lstStyle/>
+          <a:p>
+            <a:pPr algn="ctr"/>
+          </a:p>
+        </p:txBody>
+      </p:sp>
+      <p:sp>
+        <p:nvSpPr>
+          <p:cNvPr id="125" name="TextBox 124"/>
+          <p:cNvSpPr txBox="1"/>
+          <p:nvPr/>
+        </p:nvSpPr>
+        <p:spPr>
+          <a:xfrm>
+            <a:off x="13030200" y="7863840"/>
+            <a:ext cx="640080" cy="274320"/>
+          </a:xfrm>
+          <a:prstGeom prst="rect">
+            <a:avLst/>
+          </a:prstGeom>
+          <a:noFill/>
+        </p:spPr>
+        <p:txBody>
+          <a:bodyPr wrap="square" anchor="t" lIns="0" rIns="0" tIns="0" bIns="0">
+            <a:spAutoFit/>
+          </a:bodyPr>
+          <a:lstStyle/>
+          <a:p>
+            <a:pPr algn="ctr">
+              <a:lnSpc>
+                <a:spcPct val="110000"/>
+              </a:lnSpc>
+            </a:pPr>
+            <a:r>
+              <a:rPr sz="1600" b="0">
+                <a:solidFill>
+                  <a:srgbClr val="555555"/>
+                </a:solidFill>
+                <a:latin typeface="Arial"/>
+                <a:ea typeface="Arial"/>
+              </a:rPr>
+              <a:t>2014</a:t>
+            </a:r>
+          </a:p>
+        </p:txBody>
+      </p:sp>
+      <p:sp>
+        <p:nvSpPr>
+          <p:cNvPr id="126" name="Rectangle 125"/>
+          <p:cNvSpPr/>
+          <p:nvPr/>
+        </p:nvSpPr>
+        <p:spPr>
+          <a:xfrm>
+            <a:off x="15233904" y="5980176"/>
+            <a:ext cx="9144" cy="1847088"/>
+          </a:xfrm>
+          <a:prstGeom prst="rect">
+            <a:avLst/>
+          </a:prstGeom>
+          <a:solidFill>
+            <a:srgbClr val="D9D9D9"/>
+          </a:solidFill>
+          <a:ln>
+            <a:noFill/>
+          </a:ln>
+          <a:effectLst/>
+        </p:spPr>
+        <p:style>
+          <a:lnRef idx="1">
+            <a:schemeClr val="accent1"/>
+          </a:lnRef>
+          <a:fillRef idx="3">
+            <a:schemeClr val="accent1"/>
+          </a:fillRef>
+          <a:effectRef idx="2">
+            <a:schemeClr val="accent1"/>
+          </a:effectRef>
+          <a:fontRef idx="minor">
+            <a:schemeClr val="lt1"/>
+          </a:fontRef>
+        </p:style>
+        <p:txBody>
+          <a:bodyPr rtlCol="0" anchor="ctr"/>
+          <a:lstStyle/>
+          <a:p>
+            <a:pPr algn="ctr"/>
+          </a:p>
+        </p:txBody>
+      </p:sp>
+      <p:sp>
+        <p:nvSpPr>
+          <p:cNvPr id="127" name="TextBox 126"/>
+          <p:cNvSpPr txBox="1"/>
+          <p:nvPr/>
+        </p:nvSpPr>
+        <p:spPr>
+          <a:xfrm>
+            <a:off x="14918436" y="7863840"/>
+            <a:ext cx="640080" cy="274320"/>
+          </a:xfrm>
+          <a:prstGeom prst="rect">
+            <a:avLst/>
+          </a:prstGeom>
+          <a:noFill/>
+        </p:spPr>
+        <p:txBody>
+          <a:bodyPr wrap="square" anchor="t" lIns="0" rIns="0" tIns="0" bIns="0">
+            <a:spAutoFit/>
+          </a:bodyPr>
+          <a:lstStyle/>
+          <a:p>
+            <a:pPr algn="ctr">
+              <a:lnSpc>
+                <a:spcPct val="110000"/>
+              </a:lnSpc>
+            </a:pPr>
+            <a:r>
+              <a:rPr sz="1600" b="0">
+                <a:solidFill>
+                  <a:srgbClr val="555555"/>
+                </a:solidFill>
+                <a:latin typeface="Arial"/>
+                <a:ea typeface="Arial"/>
+              </a:rPr>
+              <a:t>2020</a:t>
+            </a:r>
+          </a:p>
+        </p:txBody>
+      </p:sp>
+      <p:sp>
+        <p:nvSpPr>
+          <p:cNvPr id="128" name="Rectangle 127"/>
+          <p:cNvSpPr/>
+          <p:nvPr/>
+        </p:nvSpPr>
+        <p:spPr>
+          <a:xfrm>
+            <a:off x="17122140" y="5980176"/>
+            <a:ext cx="9144" cy="1847088"/>
+          </a:xfrm>
+          <a:prstGeom prst="rect">
+            <a:avLst/>
+          </a:prstGeom>
+          <a:solidFill>
+            <a:srgbClr val="D9D9D9"/>
+          </a:solidFill>
+          <a:ln>
+            <a:noFill/>
+          </a:ln>
+          <a:effectLst/>
+        </p:spPr>
+        <p:style>
+          <a:lnRef idx="1">
+            <a:schemeClr val="accent1"/>
+          </a:lnRef>
+          <a:fillRef idx="3">
+            <a:schemeClr val="accent1"/>
+          </a:fillRef>
+          <a:effectRef idx="2">
+            <a:schemeClr val="accent1"/>
+          </a:effectRef>
+          <a:fontRef idx="minor">
+            <a:schemeClr val="lt1"/>
+          </a:fontRef>
+        </p:style>
+        <p:txBody>
+          <a:bodyPr rtlCol="0" anchor="ctr"/>
+          <a:lstStyle/>
+          <a:p>
+            <a:pPr algn="ctr"/>
+          </a:p>
+        </p:txBody>
+      </p:sp>
+      <p:sp>
+        <p:nvSpPr>
+          <p:cNvPr id="129" name="TextBox 128"/>
+          <p:cNvSpPr txBox="1"/>
+          <p:nvPr/>
+        </p:nvSpPr>
+        <p:spPr>
+          <a:xfrm>
+            <a:off x="16486632" y="7863840"/>
+            <a:ext cx="640080" cy="274320"/>
+          </a:xfrm>
+          <a:prstGeom prst="rect">
+            <a:avLst/>
+          </a:prstGeom>
+          <a:noFill/>
+        </p:spPr>
+        <p:txBody>
+          <a:bodyPr wrap="square" anchor="t" lIns="0" rIns="0" tIns="0" bIns="0">
             <a:spAutoFit/>
           </a:bodyPr>
           <a:lstStyle/>
@@ -18115,2081 +20461,6 @@
               </a:lnSpc>
             </a:pPr>
             <a:r>
-              <a:rPr sz="1600" b="1">
-                <a:solidFill>
-                  <a:srgbClr val="1428A0"/>
-                </a:solidFill>
-                <a:latin typeface="Arial"/>
-                <a:ea typeface="Arial"/>
-              </a:rPr>
-              <a:t>고객 캐시 요구 3~7.2</a:t>
-            </a:r>
-          </a:p>
-        </p:txBody>
-      </p:sp>
-      <p:sp>
-        <p:nvSpPr>
-          <p:cNvPr id="77" name="Right Arrow 76"/>
-          <p:cNvSpPr/>
-          <p:nvPr/>
-        </p:nvSpPr>
-        <p:spPr>
-          <a:xfrm rot="621349">
-            <a:off x="1518057" y="6954012"/>
-            <a:ext cx="9613987" cy="475488"/>
-          </a:xfrm>
-          <a:prstGeom prst="rightArrow">
-            <a:avLst>
-              <a:gd name="adj1" fmla="val 46000"/>
-              <a:gd name="adj2" fmla="val 90000"/>
-            </a:avLst>
-          </a:prstGeom>
-          <a:solidFill>
-            <a:srgbClr val="1428A0">
-              <a:alpha val="14000"/>
-            </a:srgbClr>
-          </a:solidFill>
-          <a:ln>
-            <a:noFill/>
-          </a:ln>
-          <a:effectLst/>
-        </p:spPr>
-        <p:style>
-          <a:lnRef idx="1">
-            <a:schemeClr val="accent1"/>
-          </a:lnRef>
-          <a:fillRef idx="3">
-            <a:schemeClr val="accent1"/>
-          </a:fillRef>
-          <a:effectRef idx="2">
-            <a:schemeClr val="accent1"/>
-          </a:effectRef>
-          <a:fontRef idx="minor">
-            <a:schemeClr val="lt1"/>
-          </a:fontRef>
-        </p:style>
-        <p:txBody>
-          <a:bodyPr rtlCol="0" anchor="ctr"/>
-          <a:lstStyle/>
-          <a:p>
-            <a:pPr algn="ctr"/>
-          </a:p>
-        </p:txBody>
-      </p:sp>
-      <p:sp>
-        <p:nvSpPr>
-          <p:cNvPr id="78" name="Oval 77"/>
-          <p:cNvSpPr/>
-          <p:nvPr/>
-        </p:nvSpPr>
-        <p:spPr>
-          <a:xfrm>
-            <a:off x="2111056" y="6277356"/>
-            <a:ext cx="100584" cy="100584"/>
-          </a:xfrm>
-          <a:prstGeom prst="ellipse">
-            <a:avLst/>
-          </a:prstGeom>
-          <a:solidFill>
-            <a:srgbClr val="1A9E9E"/>
-          </a:solidFill>
-          <a:ln>
-            <a:noFill/>
-          </a:ln>
-          <a:effectLst/>
-        </p:spPr>
-        <p:style>
-          <a:lnRef idx="1">
-            <a:schemeClr val="accent1"/>
-          </a:lnRef>
-          <a:fillRef idx="3">
-            <a:schemeClr val="accent1"/>
-          </a:fillRef>
-          <a:effectRef idx="2">
-            <a:schemeClr val="accent1"/>
-          </a:effectRef>
-          <a:fontRef idx="minor">
-            <a:schemeClr val="lt1"/>
-          </a:fontRef>
-        </p:style>
-        <p:txBody>
-          <a:bodyPr rtlCol="0" anchor="ctr"/>
-          <a:lstStyle/>
-          <a:p>
-            <a:pPr algn="ctr"/>
-          </a:p>
-        </p:txBody>
-      </p:sp>
-      <p:sp>
-        <p:nvSpPr>
-          <p:cNvPr id="79" name="Oval 78"/>
-          <p:cNvSpPr/>
-          <p:nvPr/>
-        </p:nvSpPr>
-        <p:spPr>
-          <a:xfrm>
-            <a:off x="3339287" y="6277356"/>
-            <a:ext cx="100584" cy="100584"/>
-          </a:xfrm>
-          <a:prstGeom prst="ellipse">
-            <a:avLst/>
-          </a:prstGeom>
-          <a:solidFill>
-            <a:srgbClr val="1A9E9E"/>
-          </a:solidFill>
-          <a:ln>
-            <a:noFill/>
-          </a:ln>
-          <a:effectLst/>
-        </p:spPr>
-        <p:style>
-          <a:lnRef idx="1">
-            <a:schemeClr val="accent1"/>
-          </a:lnRef>
-          <a:fillRef idx="3">
-            <a:schemeClr val="accent1"/>
-          </a:fillRef>
-          <a:effectRef idx="2">
-            <a:schemeClr val="accent1"/>
-          </a:effectRef>
-          <a:fontRef idx="minor">
-            <a:schemeClr val="lt1"/>
-          </a:fontRef>
-        </p:style>
-        <p:txBody>
-          <a:bodyPr rtlCol="0" anchor="ctr"/>
-          <a:lstStyle/>
-          <a:p>
-            <a:pPr algn="ctr"/>
-          </a:p>
-        </p:txBody>
-      </p:sp>
-      <p:sp>
-        <p:nvSpPr>
-          <p:cNvPr id="80" name="Oval 79"/>
-          <p:cNvSpPr/>
-          <p:nvPr/>
-        </p:nvSpPr>
-        <p:spPr>
-          <a:xfrm>
-            <a:off x="5181633" y="7640726"/>
-            <a:ext cx="100584" cy="100584"/>
-          </a:xfrm>
-          <a:prstGeom prst="ellipse">
-            <a:avLst/>
-          </a:prstGeom>
-          <a:solidFill>
-            <a:srgbClr val="1A9E9E"/>
-          </a:solidFill>
-          <a:ln>
-            <a:noFill/>
-          </a:ln>
-          <a:effectLst/>
-        </p:spPr>
-        <p:style>
-          <a:lnRef idx="1">
-            <a:schemeClr val="accent1"/>
-          </a:lnRef>
-          <a:fillRef idx="3">
-            <a:schemeClr val="accent1"/>
-          </a:fillRef>
-          <a:effectRef idx="2">
-            <a:schemeClr val="accent1"/>
-          </a:effectRef>
-          <a:fontRef idx="minor">
-            <a:schemeClr val="lt1"/>
-          </a:fontRef>
-        </p:style>
-        <p:txBody>
-          <a:bodyPr rtlCol="0" anchor="ctr"/>
-          <a:lstStyle/>
-          <a:p>
-            <a:pPr algn="ctr"/>
-          </a:p>
-        </p:txBody>
-      </p:sp>
-      <p:sp>
-        <p:nvSpPr>
-          <p:cNvPr id="81" name="Oval 80"/>
-          <p:cNvSpPr/>
-          <p:nvPr/>
-        </p:nvSpPr>
-        <p:spPr>
-          <a:xfrm>
-            <a:off x="7023980" y="7621524"/>
-            <a:ext cx="100584" cy="100584"/>
-          </a:xfrm>
-          <a:prstGeom prst="ellipse">
-            <a:avLst/>
-          </a:prstGeom>
-          <a:solidFill>
-            <a:srgbClr val="1A9E9E"/>
-          </a:solidFill>
-          <a:ln>
-            <a:noFill/>
-          </a:ln>
-          <a:effectLst/>
-        </p:spPr>
-        <p:style>
-          <a:lnRef idx="1">
-            <a:schemeClr val="accent1"/>
-          </a:lnRef>
-          <a:fillRef idx="3">
-            <a:schemeClr val="accent1"/>
-          </a:fillRef>
-          <a:effectRef idx="2">
-            <a:schemeClr val="accent1"/>
-          </a:effectRef>
-          <a:fontRef idx="minor">
-            <a:schemeClr val="lt1"/>
-          </a:fontRef>
-        </p:style>
-        <p:txBody>
-          <a:bodyPr rtlCol="0" anchor="ctr"/>
-          <a:lstStyle/>
-          <a:p>
-            <a:pPr algn="ctr"/>
-          </a:p>
-        </p:txBody>
-      </p:sp>
-      <p:sp>
-        <p:nvSpPr>
-          <p:cNvPr id="82" name="Oval 81"/>
-          <p:cNvSpPr/>
-          <p:nvPr/>
-        </p:nvSpPr>
-        <p:spPr>
-          <a:xfrm>
-            <a:off x="8252211" y="7621524"/>
-            <a:ext cx="100584" cy="100584"/>
-          </a:xfrm>
-          <a:prstGeom prst="ellipse">
-            <a:avLst/>
-          </a:prstGeom>
-          <a:solidFill>
-            <a:srgbClr val="1A9E9E"/>
-          </a:solidFill>
-          <a:ln>
-            <a:noFill/>
-          </a:ln>
-          <a:effectLst/>
-        </p:spPr>
-        <p:style>
-          <a:lnRef idx="1">
-            <a:schemeClr val="accent1"/>
-          </a:lnRef>
-          <a:fillRef idx="3">
-            <a:schemeClr val="accent1"/>
-          </a:fillRef>
-          <a:effectRef idx="2">
-            <a:schemeClr val="accent1"/>
-          </a:effectRef>
-          <a:fontRef idx="minor">
-            <a:schemeClr val="lt1"/>
-          </a:fontRef>
-        </p:style>
-        <p:txBody>
-          <a:bodyPr rtlCol="0" anchor="ctr"/>
-          <a:lstStyle/>
-          <a:p>
-            <a:pPr algn="ctr"/>
-          </a:p>
-        </p:txBody>
-      </p:sp>
-      <p:sp>
-        <p:nvSpPr>
-          <p:cNvPr id="83" name="Oval 82"/>
-          <p:cNvSpPr/>
-          <p:nvPr/>
-        </p:nvSpPr>
-        <p:spPr>
-          <a:xfrm>
-            <a:off x="9480442" y="7621524"/>
-            <a:ext cx="100584" cy="100584"/>
-          </a:xfrm>
-          <a:prstGeom prst="ellipse">
-            <a:avLst/>
-          </a:prstGeom>
-          <a:solidFill>
-            <a:srgbClr val="1A9E9E"/>
-          </a:solidFill>
-          <a:ln>
-            <a:noFill/>
-          </a:ln>
-          <a:effectLst/>
-        </p:spPr>
-        <p:style>
-          <a:lnRef idx="1">
-            <a:schemeClr val="accent1"/>
-          </a:lnRef>
-          <a:fillRef idx="3">
-            <a:schemeClr val="accent1"/>
-          </a:fillRef>
-          <a:effectRef idx="2">
-            <a:schemeClr val="accent1"/>
-          </a:effectRef>
-          <a:fontRef idx="minor">
-            <a:schemeClr val="lt1"/>
-          </a:fontRef>
-        </p:style>
-        <p:txBody>
-          <a:bodyPr rtlCol="0" anchor="ctr"/>
-          <a:lstStyle/>
-          <a:p>
-            <a:pPr algn="ctr"/>
-          </a:p>
-        </p:txBody>
-      </p:sp>
-      <p:sp>
-        <p:nvSpPr>
-          <p:cNvPr id="84" name="Oval 83"/>
-          <p:cNvSpPr/>
-          <p:nvPr/>
-        </p:nvSpPr>
-        <p:spPr>
-          <a:xfrm>
-            <a:off x="5795749" y="8159191"/>
-            <a:ext cx="100584" cy="100584"/>
-          </a:xfrm>
-          <a:prstGeom prst="ellipse">
-            <a:avLst/>
-          </a:prstGeom>
-          <a:solidFill>
-            <a:srgbClr val="FFFFFF"/>
-          </a:solidFill>
-          <a:ln w="19050">
-            <a:solidFill>
-              <a:srgbClr val="1A9E9E"/>
-            </a:solidFill>
-          </a:ln>
-          <a:effectLst/>
-        </p:spPr>
-        <p:style>
-          <a:lnRef idx="1">
-            <a:schemeClr val="accent1"/>
-          </a:lnRef>
-          <a:fillRef idx="3">
-            <a:schemeClr val="accent1"/>
-          </a:fillRef>
-          <a:effectRef idx="2">
-            <a:schemeClr val="accent1"/>
-          </a:effectRef>
-          <a:fontRef idx="minor">
-            <a:schemeClr val="lt1"/>
-          </a:fontRef>
-        </p:style>
-        <p:txBody>
-          <a:bodyPr rtlCol="0" anchor="ctr"/>
-          <a:lstStyle/>
-          <a:p>
-            <a:pPr algn="ctr"/>
-          </a:p>
-        </p:txBody>
-      </p:sp>
-      <p:sp>
-        <p:nvSpPr>
-          <p:cNvPr id="85" name="Oval 84"/>
-          <p:cNvSpPr/>
-          <p:nvPr/>
-        </p:nvSpPr>
-        <p:spPr>
-          <a:xfrm>
-            <a:off x="7638096" y="8118866"/>
-            <a:ext cx="100584" cy="100584"/>
-          </a:xfrm>
-          <a:prstGeom prst="ellipse">
-            <a:avLst/>
-          </a:prstGeom>
-          <a:solidFill>
-            <a:srgbClr val="FFFFFF"/>
-          </a:solidFill>
-          <a:ln w="19050">
-            <a:solidFill>
-              <a:srgbClr val="1A9E9E"/>
-            </a:solidFill>
-          </a:ln>
-          <a:effectLst/>
-        </p:spPr>
-        <p:style>
-          <a:lnRef idx="1">
-            <a:schemeClr val="accent1"/>
-          </a:lnRef>
-          <a:fillRef idx="3">
-            <a:schemeClr val="accent1"/>
-          </a:fillRef>
-          <a:effectRef idx="2">
-            <a:schemeClr val="accent1"/>
-          </a:effectRef>
-          <a:fontRef idx="minor">
-            <a:schemeClr val="lt1"/>
-          </a:fontRef>
-        </p:style>
-        <p:txBody>
-          <a:bodyPr rtlCol="0" anchor="ctr"/>
-          <a:lstStyle/>
-          <a:p>
-            <a:pPr algn="ctr"/>
-          </a:p>
-        </p:txBody>
-      </p:sp>
-      <p:sp>
-        <p:nvSpPr>
-          <p:cNvPr id="86" name="Oval 85"/>
-          <p:cNvSpPr/>
-          <p:nvPr/>
-        </p:nvSpPr>
-        <p:spPr>
-          <a:xfrm>
-            <a:off x="8866327" y="8086222"/>
-            <a:ext cx="100584" cy="100584"/>
-          </a:xfrm>
-          <a:prstGeom prst="ellipse">
-            <a:avLst/>
-          </a:prstGeom>
-          <a:solidFill>
-            <a:srgbClr val="FFFFFF"/>
-          </a:solidFill>
-          <a:ln w="19050">
-            <a:solidFill>
-              <a:srgbClr val="1A9E9E"/>
-            </a:solidFill>
-          </a:ln>
-          <a:effectLst/>
-        </p:spPr>
-        <p:style>
-          <a:lnRef idx="1">
-            <a:schemeClr val="accent1"/>
-          </a:lnRef>
-          <a:fillRef idx="3">
-            <a:schemeClr val="accent1"/>
-          </a:fillRef>
-          <a:effectRef idx="2">
-            <a:schemeClr val="accent1"/>
-          </a:effectRef>
-          <a:fontRef idx="minor">
-            <a:schemeClr val="lt1"/>
-          </a:fontRef>
-        </p:style>
-        <p:txBody>
-          <a:bodyPr rtlCol="0" anchor="ctr"/>
-          <a:lstStyle/>
-          <a:p>
-            <a:pPr algn="ctr"/>
-          </a:p>
-        </p:txBody>
-      </p:sp>
-      <p:sp>
-        <p:nvSpPr>
-          <p:cNvPr id="87" name="Oval 86"/>
-          <p:cNvSpPr/>
-          <p:nvPr/>
-        </p:nvSpPr>
-        <p:spPr>
-          <a:xfrm>
-            <a:off x="2798865" y="6277356"/>
-            <a:ext cx="100584" cy="100584"/>
-          </a:xfrm>
-          <a:prstGeom prst="ellipse">
-            <a:avLst/>
-          </a:prstGeom>
-          <a:solidFill>
-            <a:srgbClr val="E39B25"/>
-          </a:solidFill>
-          <a:ln>
-            <a:noFill/>
-          </a:ln>
-          <a:effectLst/>
-        </p:spPr>
-        <p:style>
-          <a:lnRef idx="1">
-            <a:schemeClr val="accent1"/>
-          </a:lnRef>
-          <a:fillRef idx="3">
-            <a:schemeClr val="accent1"/>
-          </a:fillRef>
-          <a:effectRef idx="2">
-            <a:schemeClr val="accent1"/>
-          </a:effectRef>
-          <a:fontRef idx="minor">
-            <a:schemeClr val="lt1"/>
-          </a:fontRef>
-        </p:style>
-        <p:txBody>
-          <a:bodyPr rtlCol="0" anchor="ctr"/>
-          <a:lstStyle/>
-          <a:p>
-            <a:pPr algn="ctr"/>
-          </a:p>
-        </p:txBody>
-      </p:sp>
-      <p:sp>
-        <p:nvSpPr>
-          <p:cNvPr id="88" name="Oval 87"/>
-          <p:cNvSpPr/>
-          <p:nvPr/>
-        </p:nvSpPr>
-        <p:spPr>
-          <a:xfrm>
-            <a:off x="4641212" y="7237476"/>
-            <a:ext cx="100584" cy="100584"/>
-          </a:xfrm>
-          <a:prstGeom prst="ellipse">
-            <a:avLst/>
-          </a:prstGeom>
-          <a:solidFill>
-            <a:srgbClr val="E39B25"/>
-          </a:solidFill>
-          <a:ln>
-            <a:noFill/>
-          </a:ln>
-          <a:effectLst/>
-        </p:spPr>
-        <p:style>
-          <a:lnRef idx="1">
-            <a:schemeClr val="accent1"/>
-          </a:lnRef>
-          <a:fillRef idx="3">
-            <a:schemeClr val="accent1"/>
-          </a:fillRef>
-          <a:effectRef idx="2">
-            <a:schemeClr val="accent1"/>
-          </a:effectRef>
-          <a:fontRef idx="minor">
-            <a:schemeClr val="lt1"/>
-          </a:fontRef>
-        </p:style>
-        <p:txBody>
-          <a:bodyPr rtlCol="0" anchor="ctr"/>
-          <a:lstStyle/>
-          <a:p>
-            <a:pPr algn="ctr"/>
-          </a:p>
-        </p:txBody>
-      </p:sp>
-      <p:sp>
-        <p:nvSpPr>
-          <p:cNvPr id="89" name="Oval 88"/>
-          <p:cNvSpPr/>
-          <p:nvPr/>
-        </p:nvSpPr>
-        <p:spPr>
-          <a:xfrm>
-            <a:off x="6483558" y="7621524"/>
-            <a:ext cx="100584" cy="100584"/>
-          </a:xfrm>
-          <a:prstGeom prst="ellipse">
-            <a:avLst/>
-          </a:prstGeom>
-          <a:solidFill>
-            <a:srgbClr val="E39B25"/>
-          </a:solidFill>
-          <a:ln>
-            <a:noFill/>
-          </a:ln>
-          <a:effectLst/>
-        </p:spPr>
-        <p:style>
-          <a:lnRef idx="1">
-            <a:schemeClr val="accent1"/>
-          </a:lnRef>
-          <a:fillRef idx="3">
-            <a:schemeClr val="accent1"/>
-          </a:fillRef>
-          <a:effectRef idx="2">
-            <a:schemeClr val="accent1"/>
-          </a:effectRef>
-          <a:fontRef idx="minor">
-            <a:schemeClr val="lt1"/>
-          </a:fontRef>
-        </p:style>
-        <p:txBody>
-          <a:bodyPr rtlCol="0" anchor="ctr"/>
-          <a:lstStyle/>
-          <a:p>
-            <a:pPr algn="ctr"/>
-          </a:p>
-        </p:txBody>
-      </p:sp>
-      <p:sp>
-        <p:nvSpPr>
-          <p:cNvPr id="90" name="Oval 89"/>
-          <p:cNvSpPr/>
-          <p:nvPr/>
-        </p:nvSpPr>
-        <p:spPr>
-          <a:xfrm>
-            <a:off x="7711789" y="7621524"/>
-            <a:ext cx="100584" cy="100584"/>
-          </a:xfrm>
-          <a:prstGeom prst="ellipse">
-            <a:avLst/>
-          </a:prstGeom>
-          <a:solidFill>
-            <a:srgbClr val="E39B25"/>
-          </a:solidFill>
-          <a:ln>
-            <a:noFill/>
-          </a:ln>
-          <a:effectLst/>
-        </p:spPr>
-        <p:style>
-          <a:lnRef idx="1">
-            <a:schemeClr val="accent1"/>
-          </a:lnRef>
-          <a:fillRef idx="3">
-            <a:schemeClr val="accent1"/>
-          </a:fillRef>
-          <a:effectRef idx="2">
-            <a:schemeClr val="accent1"/>
-          </a:effectRef>
-          <a:fontRef idx="minor">
-            <a:schemeClr val="lt1"/>
-          </a:fontRef>
-        </p:style>
-        <p:txBody>
-          <a:bodyPr rtlCol="0" anchor="ctr"/>
-          <a:lstStyle/>
-          <a:p>
-            <a:pPr algn="ctr"/>
-          </a:p>
-        </p:txBody>
-      </p:sp>
-      <p:sp>
-        <p:nvSpPr>
-          <p:cNvPr id="91" name="Oval 90"/>
-          <p:cNvSpPr/>
-          <p:nvPr/>
-        </p:nvSpPr>
-        <p:spPr>
-          <a:xfrm>
-            <a:off x="8940021" y="7621524"/>
-            <a:ext cx="100584" cy="100584"/>
-          </a:xfrm>
-          <a:prstGeom prst="ellipse">
-            <a:avLst/>
-          </a:prstGeom>
-          <a:solidFill>
-            <a:srgbClr val="E39B25"/>
-          </a:solidFill>
-          <a:ln>
-            <a:noFill/>
-          </a:ln>
-          <a:effectLst/>
-        </p:spPr>
-        <p:style>
-          <a:lnRef idx="1">
-            <a:schemeClr val="accent1"/>
-          </a:lnRef>
-          <a:fillRef idx="3">
-            <a:schemeClr val="accent1"/>
-          </a:fillRef>
-          <a:effectRef idx="2">
-            <a:schemeClr val="accent1"/>
-          </a:effectRef>
-          <a:fontRef idx="minor">
-            <a:schemeClr val="lt1"/>
-          </a:fontRef>
-        </p:style>
-        <p:txBody>
-          <a:bodyPr rtlCol="0" anchor="ctr"/>
-          <a:lstStyle/>
-          <a:p>
-            <a:pPr algn="ctr"/>
-          </a:p>
-        </p:txBody>
-      </p:sp>
-      <p:sp>
-        <p:nvSpPr>
-          <p:cNvPr id="92" name="Oval 91"/>
-          <p:cNvSpPr/>
-          <p:nvPr/>
-        </p:nvSpPr>
-        <p:spPr>
-          <a:xfrm>
-            <a:off x="10168252" y="7621524"/>
-            <a:ext cx="100584" cy="100584"/>
-          </a:xfrm>
-          <a:prstGeom prst="ellipse">
-            <a:avLst/>
-          </a:prstGeom>
-          <a:solidFill>
-            <a:srgbClr val="E39B25"/>
-          </a:solidFill>
-          <a:ln>
-            <a:noFill/>
-          </a:ln>
-          <a:effectLst/>
-        </p:spPr>
-        <p:style>
-          <a:lnRef idx="1">
-            <a:schemeClr val="accent1"/>
-          </a:lnRef>
-          <a:fillRef idx="3">
-            <a:schemeClr val="accent1"/>
-          </a:fillRef>
-          <a:effectRef idx="2">
-            <a:schemeClr val="accent1"/>
-          </a:effectRef>
-          <a:fontRef idx="minor">
-            <a:schemeClr val="lt1"/>
-          </a:fontRef>
-        </p:style>
-        <p:txBody>
-          <a:bodyPr rtlCol="0" anchor="ctr"/>
-          <a:lstStyle/>
-          <a:p>
-            <a:pPr algn="ctr"/>
-          </a:p>
-        </p:txBody>
-      </p:sp>
-      <p:sp>
-        <p:nvSpPr>
-          <p:cNvPr id="93" name="Oval 92"/>
-          <p:cNvSpPr/>
-          <p:nvPr/>
-        </p:nvSpPr>
-        <p:spPr>
-          <a:xfrm>
-            <a:off x="10168252" y="8139988"/>
-            <a:ext cx="100584" cy="100584"/>
-          </a:xfrm>
-          <a:prstGeom prst="ellipse">
-            <a:avLst/>
-          </a:prstGeom>
-          <a:solidFill>
-            <a:srgbClr val="FFFFFF"/>
-          </a:solidFill>
-          <a:ln w="19050">
-            <a:solidFill>
-              <a:srgbClr val="E39B25"/>
-            </a:solidFill>
-          </a:ln>
-          <a:effectLst/>
-        </p:spPr>
-        <p:style>
-          <a:lnRef idx="1">
-            <a:schemeClr val="accent1"/>
-          </a:lnRef>
-          <a:fillRef idx="3">
-            <a:schemeClr val="accent1"/>
-          </a:fillRef>
-          <a:effectRef idx="2">
-            <a:schemeClr val="accent1"/>
-          </a:effectRef>
-          <a:fontRef idx="minor">
-            <a:schemeClr val="lt1"/>
-          </a:fontRef>
-        </p:style>
-        <p:txBody>
-          <a:bodyPr rtlCol="0" anchor="ctr"/>
-          <a:lstStyle/>
-          <a:p>
-            <a:pPr algn="ctr"/>
-          </a:p>
-        </p:txBody>
-      </p:sp>
-      <p:sp>
-        <p:nvSpPr>
-          <p:cNvPr id="94" name="Oval 93"/>
-          <p:cNvSpPr/>
-          <p:nvPr/>
-        </p:nvSpPr>
-        <p:spPr>
-          <a:xfrm>
-            <a:off x="2258443" y="6277356"/>
-            <a:ext cx="100584" cy="100584"/>
-          </a:xfrm>
-          <a:prstGeom prst="ellipse">
-            <a:avLst/>
-          </a:prstGeom>
-          <a:solidFill>
-            <a:srgbClr val="8B5FBF"/>
-          </a:solidFill>
-          <a:ln>
-            <a:noFill/>
-          </a:ln>
-          <a:effectLst/>
-        </p:spPr>
-        <p:style>
-          <a:lnRef idx="1">
-            <a:schemeClr val="accent1"/>
-          </a:lnRef>
-          <a:fillRef idx="3">
-            <a:schemeClr val="accent1"/>
-          </a:fillRef>
-          <a:effectRef idx="2">
-            <a:schemeClr val="accent1"/>
-          </a:effectRef>
-          <a:fontRef idx="minor">
-            <a:schemeClr val="lt1"/>
-          </a:fontRef>
-        </p:style>
-        <p:txBody>
-          <a:bodyPr rtlCol="0" anchor="ctr"/>
-          <a:lstStyle/>
-          <a:p>
-            <a:pPr algn="ctr"/>
-          </a:p>
-        </p:txBody>
-      </p:sp>
-      <p:sp>
-        <p:nvSpPr>
-          <p:cNvPr id="95" name="Oval 94"/>
-          <p:cNvSpPr/>
-          <p:nvPr/>
-        </p:nvSpPr>
-        <p:spPr>
-          <a:xfrm>
-            <a:off x="5329021" y="6277356"/>
-            <a:ext cx="100584" cy="100584"/>
-          </a:xfrm>
-          <a:prstGeom prst="ellipse">
-            <a:avLst/>
-          </a:prstGeom>
-          <a:solidFill>
-            <a:srgbClr val="8B5FBF"/>
-          </a:solidFill>
-          <a:ln>
-            <a:noFill/>
-          </a:ln>
-          <a:effectLst/>
-        </p:spPr>
-        <p:style>
-          <a:lnRef idx="1">
-            <a:schemeClr val="accent1"/>
-          </a:lnRef>
-          <a:fillRef idx="3">
-            <a:schemeClr val="accent1"/>
-          </a:fillRef>
-          <a:effectRef idx="2">
-            <a:schemeClr val="accent1"/>
-          </a:effectRef>
-          <a:fontRef idx="minor">
-            <a:schemeClr val="lt1"/>
-          </a:fontRef>
-        </p:style>
-        <p:txBody>
-          <a:bodyPr rtlCol="0" anchor="ctr"/>
-          <a:lstStyle/>
-          <a:p>
-            <a:pPr algn="ctr"/>
-          </a:p>
-        </p:txBody>
-      </p:sp>
-      <p:sp>
-        <p:nvSpPr>
-          <p:cNvPr id="96" name="Oval 95"/>
-          <p:cNvSpPr/>
-          <p:nvPr/>
-        </p:nvSpPr>
-        <p:spPr>
-          <a:xfrm>
-            <a:off x="7171368" y="6277356"/>
-            <a:ext cx="100584" cy="100584"/>
-          </a:xfrm>
-          <a:prstGeom prst="ellipse">
-            <a:avLst/>
-          </a:prstGeom>
-          <a:solidFill>
-            <a:srgbClr val="8B5FBF"/>
-          </a:solidFill>
-          <a:ln>
-            <a:noFill/>
-          </a:ln>
-          <a:effectLst/>
-        </p:spPr>
-        <p:style>
-          <a:lnRef idx="1">
-            <a:schemeClr val="accent1"/>
-          </a:lnRef>
-          <a:fillRef idx="3">
-            <a:schemeClr val="accent1"/>
-          </a:fillRef>
-          <a:effectRef idx="2">
-            <a:schemeClr val="accent1"/>
-          </a:effectRef>
-          <a:fontRef idx="minor">
-            <a:schemeClr val="lt1"/>
-          </a:fontRef>
-        </p:style>
-        <p:txBody>
-          <a:bodyPr rtlCol="0" anchor="ctr"/>
-          <a:lstStyle/>
-          <a:p>
-            <a:pPr algn="ctr"/>
-          </a:p>
-        </p:txBody>
-      </p:sp>
-      <p:sp>
-        <p:nvSpPr>
-          <p:cNvPr id="97" name="Oval 96"/>
-          <p:cNvSpPr/>
-          <p:nvPr/>
-        </p:nvSpPr>
-        <p:spPr>
-          <a:xfrm>
-            <a:off x="8399599" y="7621524"/>
-            <a:ext cx="100584" cy="100584"/>
-          </a:xfrm>
-          <a:prstGeom prst="ellipse">
-            <a:avLst/>
-          </a:prstGeom>
-          <a:solidFill>
-            <a:srgbClr val="8B5FBF"/>
-          </a:solidFill>
-          <a:ln>
-            <a:noFill/>
-          </a:ln>
-          <a:effectLst/>
-        </p:spPr>
-        <p:style>
-          <a:lnRef idx="1">
-            <a:schemeClr val="accent1"/>
-          </a:lnRef>
-          <a:fillRef idx="3">
-            <a:schemeClr val="accent1"/>
-          </a:fillRef>
-          <a:effectRef idx="2">
-            <a:schemeClr val="accent1"/>
-          </a:effectRef>
-          <a:fontRef idx="minor">
-            <a:schemeClr val="lt1"/>
-          </a:fontRef>
-        </p:style>
-        <p:txBody>
-          <a:bodyPr rtlCol="0" anchor="ctr"/>
-          <a:lstStyle/>
-          <a:p>
-            <a:pPr algn="ctr"/>
-          </a:p>
-        </p:txBody>
-      </p:sp>
-      <p:sp>
-        <p:nvSpPr>
-          <p:cNvPr id="98" name="Oval 97"/>
-          <p:cNvSpPr/>
-          <p:nvPr/>
-        </p:nvSpPr>
-        <p:spPr>
-          <a:xfrm>
-            <a:off x="10241946" y="7621524"/>
-            <a:ext cx="100584" cy="100584"/>
-          </a:xfrm>
-          <a:prstGeom prst="ellipse">
-            <a:avLst/>
-          </a:prstGeom>
-          <a:solidFill>
-            <a:srgbClr val="8B5FBF"/>
-          </a:solidFill>
-          <a:ln>
-            <a:noFill/>
-          </a:ln>
-          <a:effectLst/>
-        </p:spPr>
-        <p:style>
-          <a:lnRef idx="1">
-            <a:schemeClr val="accent1"/>
-          </a:lnRef>
-          <a:fillRef idx="3">
-            <a:schemeClr val="accent1"/>
-          </a:fillRef>
-          <a:effectRef idx="2">
-            <a:schemeClr val="accent1"/>
-          </a:effectRef>
-          <a:fontRef idx="minor">
-            <a:schemeClr val="lt1"/>
-          </a:fontRef>
-        </p:style>
-        <p:txBody>
-          <a:bodyPr rtlCol="0" anchor="ctr"/>
-          <a:lstStyle/>
-          <a:p>
-            <a:pPr algn="ctr"/>
-          </a:p>
-        </p:txBody>
-      </p:sp>
-      <p:sp>
-        <p:nvSpPr>
-          <p:cNvPr id="99" name="Oval 98"/>
-          <p:cNvSpPr/>
-          <p:nvPr/>
-        </p:nvSpPr>
-        <p:spPr>
-          <a:xfrm>
-            <a:off x="10241946" y="8139988"/>
-            <a:ext cx="100584" cy="100584"/>
-          </a:xfrm>
-          <a:prstGeom prst="ellipse">
-            <a:avLst/>
-          </a:prstGeom>
-          <a:solidFill>
-            <a:srgbClr val="FFFFFF"/>
-          </a:solidFill>
-          <a:ln w="19050">
-            <a:solidFill>
-              <a:srgbClr val="8B5FBF"/>
-            </a:solidFill>
-          </a:ln>
-          <a:effectLst/>
-        </p:spPr>
-        <p:style>
-          <a:lnRef idx="1">
-            <a:schemeClr val="accent1"/>
-          </a:lnRef>
-          <a:fillRef idx="3">
-            <a:schemeClr val="accent1"/>
-          </a:fillRef>
-          <a:effectRef idx="2">
-            <a:schemeClr val="accent1"/>
-          </a:effectRef>
-          <a:fontRef idx="minor">
-            <a:schemeClr val="lt1"/>
-          </a:fontRef>
-        </p:style>
-        <p:txBody>
-          <a:bodyPr rtlCol="0" anchor="ctr"/>
-          <a:lstStyle/>
-          <a:p>
-            <a:pPr algn="ctr"/>
-          </a:p>
-        </p:txBody>
-      </p:sp>
-      <p:sp>
-        <p:nvSpPr>
-          <p:cNvPr id="100" name="Oval 99"/>
-          <p:cNvSpPr/>
-          <p:nvPr/>
-        </p:nvSpPr>
-        <p:spPr>
-          <a:xfrm>
-            <a:off x="6630946" y="7621524"/>
-            <a:ext cx="100584" cy="100584"/>
-          </a:xfrm>
-          <a:prstGeom prst="ellipse">
-            <a:avLst/>
-          </a:prstGeom>
-          <a:solidFill>
-            <a:srgbClr val="D9637A"/>
-          </a:solidFill>
-          <a:ln>
-            <a:noFill/>
-          </a:ln>
-          <a:effectLst/>
-        </p:spPr>
-        <p:style>
-          <a:lnRef idx="1">
-            <a:schemeClr val="accent1"/>
-          </a:lnRef>
-          <a:fillRef idx="3">
-            <a:schemeClr val="accent1"/>
-          </a:fillRef>
-          <a:effectRef idx="2">
-            <a:schemeClr val="accent1"/>
-          </a:effectRef>
-          <a:fontRef idx="minor">
-            <a:schemeClr val="lt1"/>
-          </a:fontRef>
-        </p:style>
-        <p:txBody>
-          <a:bodyPr rtlCol="0" anchor="ctr"/>
-          <a:lstStyle/>
-          <a:p>
-            <a:pPr algn="ctr"/>
-          </a:p>
-        </p:txBody>
-      </p:sp>
-      <p:sp>
-        <p:nvSpPr>
-          <p:cNvPr id="101" name="Oval 100"/>
-          <p:cNvSpPr/>
-          <p:nvPr/>
-        </p:nvSpPr>
-        <p:spPr>
-          <a:xfrm>
-            <a:off x="7245062" y="7621524"/>
-            <a:ext cx="100584" cy="100584"/>
-          </a:xfrm>
-          <a:prstGeom prst="ellipse">
-            <a:avLst/>
-          </a:prstGeom>
-          <a:solidFill>
-            <a:srgbClr val="D9637A"/>
-          </a:solidFill>
-          <a:ln>
-            <a:noFill/>
-          </a:ln>
-          <a:effectLst/>
-        </p:spPr>
-        <p:style>
-          <a:lnRef idx="1">
-            <a:schemeClr val="accent1"/>
-          </a:lnRef>
-          <a:fillRef idx="3">
-            <a:schemeClr val="accent1"/>
-          </a:fillRef>
-          <a:effectRef idx="2">
-            <a:schemeClr val="accent1"/>
-          </a:effectRef>
-          <a:fontRef idx="minor">
-            <a:schemeClr val="lt1"/>
-          </a:fontRef>
-        </p:style>
-        <p:txBody>
-          <a:bodyPr rtlCol="0" anchor="ctr"/>
-          <a:lstStyle/>
-          <a:p>
-            <a:pPr algn="ctr"/>
-          </a:p>
-        </p:txBody>
-      </p:sp>
-      <p:sp>
-        <p:nvSpPr>
-          <p:cNvPr id="102" name="Oval 101"/>
-          <p:cNvSpPr/>
-          <p:nvPr/>
-        </p:nvSpPr>
-        <p:spPr>
-          <a:xfrm>
-            <a:off x="1791715" y="6277356"/>
-            <a:ext cx="100584" cy="100584"/>
-          </a:xfrm>
-          <a:prstGeom prst="ellipse">
-            <a:avLst/>
-          </a:prstGeom>
-          <a:solidFill>
-            <a:srgbClr val="8A8A8A"/>
-          </a:solidFill>
-          <a:ln>
-            <a:noFill/>
-          </a:ln>
-          <a:effectLst/>
-        </p:spPr>
-        <p:style>
-          <a:lnRef idx="1">
-            <a:schemeClr val="accent1"/>
-          </a:lnRef>
-          <a:fillRef idx="3">
-            <a:schemeClr val="accent1"/>
-          </a:fillRef>
-          <a:effectRef idx="2">
-            <a:schemeClr val="accent1"/>
-          </a:effectRef>
-          <a:fontRef idx="minor">
-            <a:schemeClr val="lt1"/>
-          </a:fontRef>
-        </p:style>
-        <p:txBody>
-          <a:bodyPr rtlCol="0" anchor="ctr"/>
-          <a:lstStyle/>
-          <a:p>
-            <a:pPr algn="ctr"/>
-          </a:p>
-        </p:txBody>
-      </p:sp>
-      <p:sp>
-        <p:nvSpPr>
-          <p:cNvPr id="103" name="Oval 102"/>
-          <p:cNvSpPr/>
-          <p:nvPr/>
-        </p:nvSpPr>
-        <p:spPr>
-          <a:xfrm>
-            <a:off x="5476409" y="6277356"/>
-            <a:ext cx="100584" cy="100584"/>
-          </a:xfrm>
-          <a:prstGeom prst="ellipse">
-            <a:avLst/>
-          </a:prstGeom>
-          <a:solidFill>
-            <a:srgbClr val="8A8A8A"/>
-          </a:solidFill>
-          <a:ln>
-            <a:noFill/>
-          </a:ln>
-          <a:effectLst/>
-        </p:spPr>
-        <p:style>
-          <a:lnRef idx="1">
-            <a:schemeClr val="accent1"/>
-          </a:lnRef>
-          <a:fillRef idx="3">
-            <a:schemeClr val="accent1"/>
-          </a:fillRef>
-          <a:effectRef idx="2">
-            <a:schemeClr val="accent1"/>
-          </a:effectRef>
-          <a:fontRef idx="minor">
-            <a:schemeClr val="lt1"/>
-          </a:fontRef>
-        </p:style>
-        <p:txBody>
-          <a:bodyPr rtlCol="0" anchor="ctr"/>
-          <a:lstStyle/>
-          <a:p>
-            <a:pPr algn="ctr"/>
-          </a:p>
-        </p:txBody>
-      </p:sp>
-      <p:sp>
-        <p:nvSpPr>
-          <p:cNvPr id="104" name="Oval 103"/>
-          <p:cNvSpPr/>
-          <p:nvPr/>
-        </p:nvSpPr>
-        <p:spPr>
-          <a:xfrm>
-            <a:off x="7318755" y="7621524"/>
-            <a:ext cx="100584" cy="100584"/>
-          </a:xfrm>
-          <a:prstGeom prst="ellipse">
-            <a:avLst/>
-          </a:prstGeom>
-          <a:solidFill>
-            <a:srgbClr val="8A8A8A"/>
-          </a:solidFill>
-          <a:ln>
-            <a:noFill/>
-          </a:ln>
-          <a:effectLst/>
-        </p:spPr>
-        <p:style>
-          <a:lnRef idx="1">
-            <a:schemeClr val="accent1"/>
-          </a:lnRef>
-          <a:fillRef idx="3">
-            <a:schemeClr val="accent1"/>
-          </a:fillRef>
-          <a:effectRef idx="2">
-            <a:schemeClr val="accent1"/>
-          </a:effectRef>
-          <a:fontRef idx="minor">
-            <a:schemeClr val="lt1"/>
-          </a:fontRef>
-        </p:style>
-        <p:txBody>
-          <a:bodyPr rtlCol="0" anchor="ctr"/>
-          <a:lstStyle/>
-          <a:p>
-            <a:pPr algn="ctr"/>
-          </a:p>
-        </p:txBody>
-      </p:sp>
-      <p:sp>
-        <p:nvSpPr>
-          <p:cNvPr id="105" name="Oval 104"/>
-          <p:cNvSpPr/>
-          <p:nvPr/>
-        </p:nvSpPr>
-        <p:spPr>
-          <a:xfrm>
-            <a:off x="9775218" y="7621524"/>
-            <a:ext cx="100584" cy="100584"/>
-          </a:xfrm>
-          <a:prstGeom prst="ellipse">
-            <a:avLst/>
-          </a:prstGeom>
-          <a:solidFill>
-            <a:srgbClr val="8A8A8A"/>
-          </a:solidFill>
-          <a:ln>
-            <a:noFill/>
-          </a:ln>
-          <a:effectLst/>
-        </p:spPr>
-        <p:style>
-          <a:lnRef idx="1">
-            <a:schemeClr val="accent1"/>
-          </a:lnRef>
-          <a:fillRef idx="3">
-            <a:schemeClr val="accent1"/>
-          </a:fillRef>
-          <a:effectRef idx="2">
-            <a:schemeClr val="accent1"/>
-          </a:effectRef>
-          <a:fontRef idx="minor">
-            <a:schemeClr val="lt1"/>
-          </a:fontRef>
-        </p:style>
-        <p:txBody>
-          <a:bodyPr rtlCol="0" anchor="ctr"/>
-          <a:lstStyle/>
-          <a:p>
-            <a:pPr algn="ctr"/>
-          </a:p>
-        </p:txBody>
-      </p:sp>
-      <p:sp>
-        <p:nvSpPr>
-          <p:cNvPr id="106" name="Oval 105"/>
-          <p:cNvSpPr/>
-          <p:nvPr/>
-        </p:nvSpPr>
-        <p:spPr>
-          <a:xfrm>
-            <a:off x="10389333" y="8130387"/>
-            <a:ext cx="100584" cy="100584"/>
-          </a:xfrm>
-          <a:prstGeom prst="ellipse">
-            <a:avLst/>
-          </a:prstGeom>
-          <a:solidFill>
-            <a:srgbClr val="FFFFFF"/>
-          </a:solidFill>
-          <a:ln w="19050">
-            <a:solidFill>
-              <a:srgbClr val="8A8A8A"/>
-            </a:solidFill>
-          </a:ln>
-          <a:effectLst/>
-        </p:spPr>
-        <p:style>
-          <a:lnRef idx="1">
-            <a:schemeClr val="accent1"/>
-          </a:lnRef>
-          <a:fillRef idx="3">
-            <a:schemeClr val="accent1"/>
-          </a:fillRef>
-          <a:effectRef idx="2">
-            <a:schemeClr val="accent1"/>
-          </a:effectRef>
-          <a:fontRef idx="minor">
-            <a:schemeClr val="lt1"/>
-          </a:fontRef>
-        </p:style>
-        <p:txBody>
-          <a:bodyPr rtlCol="0" anchor="ctr"/>
-          <a:lstStyle/>
-          <a:p>
-            <a:pPr algn="ctr"/>
-          </a:p>
-        </p:txBody>
-      </p:sp>
-      <p:sp>
-        <p:nvSpPr>
-          <p:cNvPr id="107" name="Oval 106"/>
-          <p:cNvSpPr/>
-          <p:nvPr/>
-        </p:nvSpPr>
-        <p:spPr>
-          <a:xfrm>
-            <a:off x="2037362" y="6277356"/>
-            <a:ext cx="100584" cy="100584"/>
-          </a:xfrm>
-          <a:prstGeom prst="ellipse">
-            <a:avLst/>
-          </a:prstGeom>
-          <a:solidFill>
-            <a:srgbClr val="1428A0"/>
-          </a:solidFill>
-          <a:ln>
-            <a:noFill/>
-          </a:ln>
-          <a:effectLst/>
-        </p:spPr>
-        <p:style>
-          <a:lnRef idx="1">
-            <a:schemeClr val="accent1"/>
-          </a:lnRef>
-          <a:fillRef idx="3">
-            <a:schemeClr val="accent1"/>
-          </a:fillRef>
-          <a:effectRef idx="2">
-            <a:schemeClr val="accent1"/>
-          </a:effectRef>
-          <a:fontRef idx="minor">
-            <a:schemeClr val="lt1"/>
-          </a:fontRef>
-        </p:style>
-        <p:txBody>
-          <a:bodyPr rtlCol="0" anchor="ctr"/>
-          <a:lstStyle/>
-          <a:p>
-            <a:pPr algn="ctr"/>
-          </a:p>
-        </p:txBody>
-      </p:sp>
-      <p:sp>
-        <p:nvSpPr>
-          <p:cNvPr id="108" name="Oval 107"/>
-          <p:cNvSpPr/>
-          <p:nvPr/>
-        </p:nvSpPr>
-        <p:spPr>
-          <a:xfrm>
-            <a:off x="3265593" y="6277356"/>
-            <a:ext cx="100584" cy="100584"/>
-          </a:xfrm>
-          <a:prstGeom prst="ellipse">
-            <a:avLst/>
-          </a:prstGeom>
-          <a:solidFill>
-            <a:srgbClr val="1428A0"/>
-          </a:solidFill>
-          <a:ln>
-            <a:noFill/>
-          </a:ln>
-          <a:effectLst/>
-        </p:spPr>
-        <p:style>
-          <a:lnRef idx="1">
-            <a:schemeClr val="accent1"/>
-          </a:lnRef>
-          <a:fillRef idx="3">
-            <a:schemeClr val="accent1"/>
-          </a:fillRef>
-          <a:effectRef idx="2">
-            <a:schemeClr val="accent1"/>
-          </a:effectRef>
-          <a:fontRef idx="minor">
-            <a:schemeClr val="lt1"/>
-          </a:fontRef>
-        </p:style>
-        <p:txBody>
-          <a:bodyPr rtlCol="0" anchor="ctr"/>
-          <a:lstStyle/>
-          <a:p>
-            <a:pPr algn="ctr"/>
-          </a:p>
-        </p:txBody>
-      </p:sp>
-      <p:sp>
-        <p:nvSpPr>
-          <p:cNvPr id="109" name="Oval 108"/>
-          <p:cNvSpPr/>
-          <p:nvPr/>
-        </p:nvSpPr>
-        <p:spPr>
-          <a:xfrm>
-            <a:off x="3879708" y="7237476"/>
-            <a:ext cx="100584" cy="100584"/>
-          </a:xfrm>
-          <a:prstGeom prst="ellipse">
-            <a:avLst/>
-          </a:prstGeom>
-          <a:solidFill>
-            <a:srgbClr val="1428A0"/>
-          </a:solidFill>
-          <a:ln>
-            <a:noFill/>
-          </a:ln>
-          <a:effectLst/>
-        </p:spPr>
-        <p:style>
-          <a:lnRef idx="1">
-            <a:schemeClr val="accent1"/>
-          </a:lnRef>
-          <a:fillRef idx="3">
-            <a:schemeClr val="accent1"/>
-          </a:fillRef>
-          <a:effectRef idx="2">
-            <a:schemeClr val="accent1"/>
-          </a:effectRef>
-          <a:fontRef idx="minor">
-            <a:schemeClr val="lt1"/>
-          </a:fontRef>
-        </p:style>
-        <p:txBody>
-          <a:bodyPr rtlCol="0" anchor="ctr"/>
-          <a:lstStyle/>
-          <a:p>
-            <a:pPr algn="ctr"/>
-          </a:p>
-        </p:txBody>
-      </p:sp>
-      <p:sp>
-        <p:nvSpPr>
-          <p:cNvPr id="110" name="Oval 109"/>
-          <p:cNvSpPr/>
-          <p:nvPr/>
-        </p:nvSpPr>
-        <p:spPr>
-          <a:xfrm>
-            <a:off x="5107940" y="7237476"/>
-            <a:ext cx="100584" cy="100584"/>
-          </a:xfrm>
-          <a:prstGeom prst="ellipse">
-            <a:avLst/>
-          </a:prstGeom>
-          <a:solidFill>
-            <a:srgbClr val="1428A0"/>
-          </a:solidFill>
-          <a:ln>
-            <a:noFill/>
-          </a:ln>
-          <a:effectLst/>
-        </p:spPr>
-        <p:style>
-          <a:lnRef idx="1">
-            <a:schemeClr val="accent1"/>
-          </a:lnRef>
-          <a:fillRef idx="3">
-            <a:schemeClr val="accent1"/>
-          </a:fillRef>
-          <a:effectRef idx="2">
-            <a:schemeClr val="accent1"/>
-          </a:effectRef>
-          <a:fontRef idx="minor">
-            <a:schemeClr val="lt1"/>
-          </a:fontRef>
-        </p:style>
-        <p:txBody>
-          <a:bodyPr rtlCol="0" anchor="ctr"/>
-          <a:lstStyle/>
-          <a:p>
-            <a:pPr algn="ctr"/>
-          </a:p>
-        </p:txBody>
-      </p:sp>
-      <p:sp>
-        <p:nvSpPr>
-          <p:cNvPr id="111" name="Oval 110"/>
-          <p:cNvSpPr/>
-          <p:nvPr/>
-        </p:nvSpPr>
-        <p:spPr>
-          <a:xfrm>
-            <a:off x="6336171" y="7621524"/>
-            <a:ext cx="100584" cy="100584"/>
-          </a:xfrm>
-          <a:prstGeom prst="ellipse">
-            <a:avLst/>
-          </a:prstGeom>
-          <a:solidFill>
-            <a:srgbClr val="1428A0"/>
-          </a:solidFill>
-          <a:ln>
-            <a:noFill/>
-          </a:ln>
-          <a:effectLst/>
-        </p:spPr>
-        <p:style>
-          <a:lnRef idx="1">
-            <a:schemeClr val="accent1"/>
-          </a:lnRef>
-          <a:fillRef idx="3">
-            <a:schemeClr val="accent1"/>
-          </a:fillRef>
-          <a:effectRef idx="2">
-            <a:schemeClr val="accent1"/>
-          </a:effectRef>
-          <a:fontRef idx="minor">
-            <a:schemeClr val="lt1"/>
-          </a:fontRef>
-        </p:style>
-        <p:txBody>
-          <a:bodyPr rtlCol="0" anchor="ctr"/>
-          <a:lstStyle/>
-          <a:p>
-            <a:pPr algn="ctr"/>
-          </a:p>
-        </p:txBody>
-      </p:sp>
-      <p:sp>
-        <p:nvSpPr>
-          <p:cNvPr id="112" name="Oval 111"/>
-          <p:cNvSpPr/>
-          <p:nvPr/>
-        </p:nvSpPr>
-        <p:spPr>
-          <a:xfrm>
-            <a:off x="8178517" y="7621524"/>
-            <a:ext cx="100584" cy="100584"/>
-          </a:xfrm>
-          <a:prstGeom prst="ellipse">
-            <a:avLst/>
-          </a:prstGeom>
-          <a:solidFill>
-            <a:srgbClr val="1428A0"/>
-          </a:solidFill>
-          <a:ln>
-            <a:noFill/>
-          </a:ln>
-          <a:effectLst/>
-        </p:spPr>
-        <p:style>
-          <a:lnRef idx="1">
-            <a:schemeClr val="accent1"/>
-          </a:lnRef>
-          <a:fillRef idx="3">
-            <a:schemeClr val="accent1"/>
-          </a:fillRef>
-          <a:effectRef idx="2">
-            <a:schemeClr val="accent1"/>
-          </a:effectRef>
-          <a:fontRef idx="minor">
-            <a:schemeClr val="lt1"/>
-          </a:fontRef>
-        </p:style>
-        <p:txBody>
-          <a:bodyPr rtlCol="0" anchor="ctr"/>
-          <a:lstStyle/>
-          <a:p>
-            <a:pPr algn="ctr"/>
-          </a:p>
-        </p:txBody>
-      </p:sp>
-      <p:sp>
-        <p:nvSpPr>
-          <p:cNvPr id="113" name="Oval 112"/>
-          <p:cNvSpPr/>
-          <p:nvPr/>
-        </p:nvSpPr>
-        <p:spPr>
-          <a:xfrm>
-            <a:off x="9406748" y="7621524"/>
-            <a:ext cx="100584" cy="100584"/>
-          </a:xfrm>
-          <a:prstGeom prst="ellipse">
-            <a:avLst/>
-          </a:prstGeom>
-          <a:solidFill>
-            <a:srgbClr val="1428A0"/>
-          </a:solidFill>
-          <a:ln>
-            <a:noFill/>
-          </a:ln>
-          <a:effectLst/>
-        </p:spPr>
-        <p:style>
-          <a:lnRef idx="1">
-            <a:schemeClr val="accent1"/>
-          </a:lnRef>
-          <a:fillRef idx="3">
-            <a:schemeClr val="accent1"/>
-          </a:fillRef>
-          <a:effectRef idx="2">
-            <a:schemeClr val="accent1"/>
-          </a:effectRef>
-          <a:fontRef idx="minor">
-            <a:schemeClr val="lt1"/>
-          </a:fontRef>
-        </p:style>
-        <p:txBody>
-          <a:bodyPr rtlCol="0" anchor="ctr"/>
-          <a:lstStyle/>
-          <a:p>
-            <a:pPr algn="ctr"/>
-          </a:p>
-        </p:txBody>
-      </p:sp>
-      <p:sp>
-        <p:nvSpPr>
-          <p:cNvPr id="114" name="Oval 113"/>
-          <p:cNvSpPr/>
-          <p:nvPr/>
-        </p:nvSpPr>
-        <p:spPr>
-          <a:xfrm>
-            <a:off x="6950286" y="8163031"/>
-            <a:ext cx="100584" cy="100584"/>
-          </a:xfrm>
-          <a:prstGeom prst="ellipse">
-            <a:avLst/>
-          </a:prstGeom>
-          <a:solidFill>
-            <a:srgbClr val="FFFFFF"/>
-          </a:solidFill>
-          <a:ln w="19050">
-            <a:solidFill>
-              <a:srgbClr val="1428A0"/>
-            </a:solidFill>
-          </a:ln>
-          <a:effectLst/>
-        </p:spPr>
-        <p:style>
-          <a:lnRef idx="1">
-            <a:schemeClr val="accent1"/>
-          </a:lnRef>
-          <a:fillRef idx="3">
-            <a:schemeClr val="accent1"/>
-          </a:fillRef>
-          <a:effectRef idx="2">
-            <a:schemeClr val="accent1"/>
-          </a:effectRef>
-          <a:fontRef idx="minor">
-            <a:schemeClr val="lt1"/>
-          </a:fontRef>
-        </p:style>
-        <p:txBody>
-          <a:bodyPr rtlCol="0" anchor="ctr"/>
-          <a:lstStyle/>
-          <a:p>
-            <a:pPr algn="ctr"/>
-          </a:p>
-        </p:txBody>
-      </p:sp>
-      <p:sp>
-        <p:nvSpPr>
-          <p:cNvPr id="115" name="Oval 114"/>
-          <p:cNvSpPr/>
-          <p:nvPr/>
-        </p:nvSpPr>
-        <p:spPr>
-          <a:xfrm>
-            <a:off x="9406748" y="8147669"/>
-            <a:ext cx="100584" cy="100584"/>
-          </a:xfrm>
-          <a:prstGeom prst="ellipse">
-            <a:avLst/>
-          </a:prstGeom>
-          <a:solidFill>
-            <a:srgbClr val="FFFFFF"/>
-          </a:solidFill>
-          <a:ln w="19050">
-            <a:solidFill>
-              <a:srgbClr val="1428A0"/>
-            </a:solidFill>
-          </a:ln>
-          <a:effectLst/>
-        </p:spPr>
-        <p:style>
-          <a:lnRef idx="1">
-            <a:schemeClr val="accent1"/>
-          </a:lnRef>
-          <a:fillRef idx="3">
-            <a:schemeClr val="accent1"/>
-          </a:fillRef>
-          <a:effectRef idx="2">
-            <a:schemeClr val="accent1"/>
-          </a:effectRef>
-          <a:fontRef idx="minor">
-            <a:schemeClr val="lt1"/>
-          </a:fontRef>
-        </p:style>
-        <p:txBody>
-          <a:bodyPr rtlCol="0" anchor="ctr"/>
-          <a:lstStyle/>
-          <a:p>
-            <a:pPr algn="ctr"/>
-          </a:p>
-        </p:txBody>
-      </p:sp>
-      <p:sp>
-        <p:nvSpPr>
-          <p:cNvPr id="116" name="Rounded Rectangle 115"/>
-          <p:cNvSpPr/>
-          <p:nvPr/>
-        </p:nvSpPr>
-        <p:spPr>
-          <a:xfrm>
-            <a:off x="11795760" y="5340096"/>
-            <a:ext cx="5532120" cy="3090672"/>
-          </a:xfrm>
-          <a:prstGeom prst="roundRect">
-            <a:avLst>
-              <a:gd name="adj" fmla="val 2366"/>
-            </a:avLst>
-          </a:prstGeom>
-          <a:solidFill>
-            <a:srgbClr val="FFFFFF"/>
-          </a:solidFill>
-          <a:ln>
-            <a:noFill/>
-          </a:ln>
-          <a:effectLst/>
-        </p:spPr>
-        <p:style>
-          <a:lnRef idx="1">
-            <a:schemeClr val="accent1"/>
-          </a:lnRef>
-          <a:fillRef idx="3">
-            <a:schemeClr val="accent1"/>
-          </a:fillRef>
-          <a:effectRef idx="2">
-            <a:schemeClr val="accent1"/>
-          </a:effectRef>
-          <a:fontRef idx="minor">
-            <a:schemeClr val="lt1"/>
-          </a:fontRef>
-        </p:style>
-        <p:txBody>
-          <a:bodyPr rtlCol="0" anchor="ctr"/>
-          <a:lstStyle/>
-          <a:p>
-            <a:pPr algn="ctr"/>
-          </a:p>
-        </p:txBody>
-      </p:sp>
-      <p:sp>
-        <p:nvSpPr>
-          <p:cNvPr id="117" name="TextBox 116"/>
-          <p:cNvSpPr txBox="1"/>
-          <p:nvPr/>
-        </p:nvSpPr>
-        <p:spPr>
-          <a:xfrm>
-            <a:off x="11996928" y="5449824"/>
-            <a:ext cx="5129784" cy="384048"/>
-          </a:xfrm>
-          <a:prstGeom prst="rect">
-            <a:avLst/>
-          </a:prstGeom>
-          <a:noFill/>
-        </p:spPr>
-        <p:txBody>
-          <a:bodyPr wrap="square" anchor="ctr" lIns="0" rIns="0" tIns="0" bIns="0">
-            <a:spAutoFit/>
-          </a:bodyPr>
-          <a:lstStyle/>
-          <a:p>
-            <a:pPr algn="l">
-              <a:lnSpc>
-                <a:spcPct val="110000"/>
-              </a:lnSpc>
-            </a:pPr>
-            <a:r>
-              <a:rPr sz="2000" b="1">
-                <a:solidFill>
-                  <a:srgbClr val="1A1A1A"/>
-                </a:solidFill>
-                <a:latin typeface="Arial"/>
-                <a:ea typeface="Arial"/>
-              </a:rPr>
-              <a:t>주요 DC 기업은 이미 SSD를 직접 설계</a:t>
-            </a:r>
-          </a:p>
-        </p:txBody>
-      </p:sp>
-      <p:sp>
-        <p:nvSpPr>
-          <p:cNvPr id="118" name="Rectangle 117"/>
-          <p:cNvSpPr/>
-          <p:nvPr/>
-        </p:nvSpPr>
-        <p:spPr>
-          <a:xfrm>
-            <a:off x="13345667" y="5980176"/>
-            <a:ext cx="9144" cy="1847088"/>
-          </a:xfrm>
-          <a:prstGeom prst="rect">
-            <a:avLst/>
-          </a:prstGeom>
-          <a:solidFill>
-            <a:srgbClr val="D9D9D9"/>
-          </a:solidFill>
-          <a:ln>
-            <a:noFill/>
-          </a:ln>
-          <a:effectLst/>
-        </p:spPr>
-        <p:style>
-          <a:lnRef idx="1">
-            <a:schemeClr val="accent1"/>
-          </a:lnRef>
-          <a:fillRef idx="3">
-            <a:schemeClr val="accent1"/>
-          </a:fillRef>
-          <a:effectRef idx="2">
-            <a:schemeClr val="accent1"/>
-          </a:effectRef>
-          <a:fontRef idx="minor">
-            <a:schemeClr val="lt1"/>
-          </a:fontRef>
-        </p:style>
-        <p:txBody>
-          <a:bodyPr rtlCol="0" anchor="ctr"/>
-          <a:lstStyle/>
-          <a:p>
-            <a:pPr algn="ctr"/>
-          </a:p>
-        </p:txBody>
-      </p:sp>
-      <p:sp>
-        <p:nvSpPr>
-          <p:cNvPr id="119" name="TextBox 118"/>
-          <p:cNvSpPr txBox="1"/>
-          <p:nvPr/>
-        </p:nvSpPr>
-        <p:spPr>
-          <a:xfrm>
-            <a:off x="13030200" y="7863840"/>
-            <a:ext cx="640080" cy="274320"/>
-          </a:xfrm>
-          <a:prstGeom prst="rect">
-            <a:avLst/>
-          </a:prstGeom>
-          <a:noFill/>
-        </p:spPr>
-        <p:txBody>
-          <a:bodyPr wrap="square" anchor="t" lIns="0" rIns="0" tIns="0" bIns="0">
-            <a:spAutoFit/>
-          </a:bodyPr>
-          <a:lstStyle/>
-          <a:p>
-            <a:pPr algn="ctr">
-              <a:lnSpc>
-                <a:spcPct val="110000"/>
-              </a:lnSpc>
-            </a:pPr>
-            <a:r>
-              <a:rPr sz="1600" b="0">
-                <a:solidFill>
-                  <a:srgbClr val="555555"/>
-                </a:solidFill>
-                <a:latin typeface="Arial"/>
-                <a:ea typeface="Arial"/>
-              </a:rPr>
-              <a:t>2014</a:t>
-            </a:r>
-          </a:p>
-        </p:txBody>
-      </p:sp>
-      <p:sp>
-        <p:nvSpPr>
-          <p:cNvPr id="120" name="Rectangle 119"/>
-          <p:cNvSpPr/>
-          <p:nvPr/>
-        </p:nvSpPr>
-        <p:spPr>
-          <a:xfrm>
-            <a:off x="15233904" y="5980176"/>
-            <a:ext cx="9144" cy="1847088"/>
-          </a:xfrm>
-          <a:prstGeom prst="rect">
-            <a:avLst/>
-          </a:prstGeom>
-          <a:solidFill>
-            <a:srgbClr val="D9D9D9"/>
-          </a:solidFill>
-          <a:ln>
-            <a:noFill/>
-          </a:ln>
-          <a:effectLst/>
-        </p:spPr>
-        <p:style>
-          <a:lnRef idx="1">
-            <a:schemeClr val="accent1"/>
-          </a:lnRef>
-          <a:fillRef idx="3">
-            <a:schemeClr val="accent1"/>
-          </a:fillRef>
-          <a:effectRef idx="2">
-            <a:schemeClr val="accent1"/>
-          </a:effectRef>
-          <a:fontRef idx="minor">
-            <a:schemeClr val="lt1"/>
-          </a:fontRef>
-        </p:style>
-        <p:txBody>
-          <a:bodyPr rtlCol="0" anchor="ctr"/>
-          <a:lstStyle/>
-          <a:p>
-            <a:pPr algn="ctr"/>
-          </a:p>
-        </p:txBody>
-      </p:sp>
-      <p:sp>
-        <p:nvSpPr>
-          <p:cNvPr id="121" name="TextBox 120"/>
-          <p:cNvSpPr txBox="1"/>
-          <p:nvPr/>
-        </p:nvSpPr>
-        <p:spPr>
-          <a:xfrm>
-            <a:off x="14918436" y="7863840"/>
-            <a:ext cx="640080" cy="274320"/>
-          </a:xfrm>
-          <a:prstGeom prst="rect">
-            <a:avLst/>
-          </a:prstGeom>
-          <a:noFill/>
-        </p:spPr>
-        <p:txBody>
-          <a:bodyPr wrap="square" anchor="t" lIns="0" rIns="0" tIns="0" bIns="0">
-            <a:spAutoFit/>
-          </a:bodyPr>
-          <a:lstStyle/>
-          <a:p>
-            <a:pPr algn="ctr">
-              <a:lnSpc>
-                <a:spcPct val="110000"/>
-              </a:lnSpc>
-            </a:pPr>
-            <a:r>
-              <a:rPr sz="1600" b="0">
-                <a:solidFill>
-                  <a:srgbClr val="555555"/>
-                </a:solidFill>
-                <a:latin typeface="Arial"/>
-                <a:ea typeface="Arial"/>
-              </a:rPr>
-              <a:t>2020</a:t>
-            </a:r>
-          </a:p>
-        </p:txBody>
-      </p:sp>
-      <p:sp>
-        <p:nvSpPr>
-          <p:cNvPr id="122" name="Rectangle 121"/>
-          <p:cNvSpPr/>
-          <p:nvPr/>
-        </p:nvSpPr>
-        <p:spPr>
-          <a:xfrm>
-            <a:off x="17122140" y="5980176"/>
-            <a:ext cx="9144" cy="1847088"/>
-          </a:xfrm>
-          <a:prstGeom prst="rect">
-            <a:avLst/>
-          </a:prstGeom>
-          <a:solidFill>
-            <a:srgbClr val="D9D9D9"/>
-          </a:solidFill>
-          <a:ln>
-            <a:noFill/>
-          </a:ln>
-          <a:effectLst/>
-        </p:spPr>
-        <p:style>
-          <a:lnRef idx="1">
-            <a:schemeClr val="accent1"/>
-          </a:lnRef>
-          <a:fillRef idx="3">
-            <a:schemeClr val="accent1"/>
-          </a:fillRef>
-          <a:effectRef idx="2">
-            <a:schemeClr val="accent1"/>
-          </a:effectRef>
-          <a:fontRef idx="minor">
-            <a:schemeClr val="lt1"/>
-          </a:fontRef>
-        </p:style>
-        <p:txBody>
-          <a:bodyPr rtlCol="0" anchor="ctr"/>
-          <a:lstStyle/>
-          <a:p>
-            <a:pPr algn="ctr"/>
-          </a:p>
-        </p:txBody>
-      </p:sp>
-      <p:sp>
-        <p:nvSpPr>
-          <p:cNvPr id="123" name="TextBox 122"/>
-          <p:cNvSpPr txBox="1"/>
-          <p:nvPr/>
-        </p:nvSpPr>
-        <p:spPr>
-          <a:xfrm>
-            <a:off x="16486632" y="7863840"/>
-            <a:ext cx="640080" cy="274320"/>
-          </a:xfrm>
-          <a:prstGeom prst="rect">
-            <a:avLst/>
-          </a:prstGeom>
-          <a:noFill/>
-        </p:spPr>
-        <p:txBody>
-          <a:bodyPr wrap="square" anchor="t" lIns="0" rIns="0" tIns="0" bIns="0">
-            <a:spAutoFit/>
-          </a:bodyPr>
-          <a:lstStyle/>
-          <a:p>
-            <a:pPr algn="r">
-              <a:lnSpc>
-                <a:spcPct val="110000"/>
-              </a:lnSpc>
-            </a:pPr>
-            <a:r>
               <a:rPr sz="1600" b="0">
                 <a:solidFill>
                   <a:srgbClr val="555555"/>
@@ -20204,7 +20475,7 @@
       </p:sp>
       <p:pic>
         <p:nvPicPr>
-          <p:cNvPr id="124" name="Picture 123" descr="google.png"/>
+          <p:cNvPr id="130" name="Picture 129" descr="google.png"/>
           <p:cNvPicPr>
             <a:picLocks noChangeAspect="1"/>
           </p:cNvPicPr>
@@ -20228,7 +20499,7 @@
       </p:pic>
       <p:sp>
         <p:nvSpPr>
-          <p:cNvPr id="125" name="Rounded Rectangle 124"/>
+          <p:cNvPr id="131" name="Rounded Rectangle 130"/>
           <p:cNvSpPr/>
           <p:nvPr/>
         </p:nvSpPr>
@@ -20274,7 +20545,7 @@
       </p:sp>
       <p:sp>
         <p:nvSpPr>
-          <p:cNvPr id="126" name="TextBox 125"/>
+          <p:cNvPr id="132" name="TextBox 131"/>
           <p:cNvSpPr txBox="1"/>
           <p:nvPr/>
         </p:nvSpPr>
@@ -20314,7 +20585,7 @@
       </p:sp>
       <p:pic>
         <p:nvPicPr>
-          <p:cNvPr id="127" name="Picture 126" descr="alibabacloud.png"/>
+          <p:cNvPr id="133" name="Picture 132" descr="alibabacloud.png"/>
           <p:cNvPicPr>
             <a:picLocks noChangeAspect="1"/>
           </p:cNvPicPr>
@@ -20338,7 +20609,7 @@
       </p:pic>
       <p:sp>
         <p:nvSpPr>
-          <p:cNvPr id="128" name="TextBox 127"/>
+          <p:cNvPr id="134" name="TextBox 133"/>
           <p:cNvSpPr txBox="1"/>
           <p:nvPr/>
         </p:nvSpPr>
@@ -20378,7 +20649,7 @@
       </p:sp>
       <p:sp>
         <p:nvSpPr>
-          <p:cNvPr id="129" name="Rounded Rectangle 128"/>
+          <p:cNvPr id="135" name="Rounded Rectangle 134"/>
           <p:cNvSpPr/>
           <p:nvPr/>
         </p:nvSpPr>
@@ -20424,7 +20695,7 @@
       </p:sp>
       <p:sp>
         <p:nvSpPr>
-          <p:cNvPr id="130" name="TextBox 129"/>
+          <p:cNvPr id="136" name="TextBox 135"/>
           <p:cNvSpPr txBox="1"/>
           <p:nvPr/>
         </p:nvSpPr>
@@ -20464,7 +20735,7 @@
       </p:sp>
       <p:pic>
         <p:nvPicPr>
-          <p:cNvPr id="131" name="Picture 130" descr="aws.png"/>
+          <p:cNvPr id="137" name="Picture 136" descr="aws.png"/>
           <p:cNvPicPr>
             <a:picLocks noChangeAspect="1"/>
           </p:cNvPicPr>
@@ -20488,7 +20759,7 @@
       </p:pic>
       <p:sp>
         <p:nvSpPr>
-          <p:cNvPr id="132" name="Rounded Rectangle 131"/>
+          <p:cNvPr id="138" name="Rounded Rectangle 137"/>
           <p:cNvSpPr/>
           <p:nvPr/>
         </p:nvSpPr>
@@ -20534,7 +20805,7 @@
       </p:sp>
       <p:sp>
         <p:nvSpPr>
-          <p:cNvPr id="133" name="TextBox 132"/>
+          <p:cNvPr id="139" name="TextBox 138"/>
           <p:cNvSpPr txBox="1"/>
           <p:nvPr/>
         </p:nvSpPr>
@@ -20574,7 +20845,7 @@
       </p:sp>
       <p:sp>
         <p:nvSpPr>
-          <p:cNvPr id="134" name="Chevron 133"/>
+          <p:cNvPr id="140" name="Chevron 139"/>
           <p:cNvSpPr/>
           <p:nvPr/>
         </p:nvSpPr>
@@ -20618,7 +20889,7 @@
       </p:sp>
       <p:sp>
         <p:nvSpPr>
-          <p:cNvPr id="135" name="Chevron 134"/>
+          <p:cNvPr id="141" name="Chevron 140"/>
           <p:cNvSpPr/>
           <p:nvPr/>
         </p:nvSpPr>
@@ -20662,7 +20933,7 @@
       </p:sp>
       <p:sp>
         <p:nvSpPr>
-          <p:cNvPr id="136" name="Rectangle 135"/>
+          <p:cNvPr id="142" name="Rectangle 141"/>
           <p:cNvSpPr/>
           <p:nvPr/>
         </p:nvSpPr>
@@ -20706,7 +20977,7 @@
       </p:sp>
       <p:sp>
         <p:nvSpPr>
-          <p:cNvPr id="137" name="TextBox 136"/>
+          <p:cNvPr id="143" name="TextBox 142"/>
           <p:cNvSpPr txBox="1"/>
           <p:nvPr/>
         </p:nvSpPr>
@@ -20746,7 +21017,7 @@
       </p:sp>
       <p:sp>
         <p:nvSpPr>
-          <p:cNvPr id="138" name="TextBox 137"/>
+          <p:cNvPr id="144" name="TextBox 143"/>
           <p:cNvSpPr txBox="1"/>
           <p:nvPr/>
         </p:nvSpPr>
@@ -20786,7 +21057,7 @@
       </p:sp>
       <p:sp>
         <p:nvSpPr>
-          <p:cNvPr id="139" name="TextBox 138"/>
+          <p:cNvPr id="145" name="TextBox 144"/>
           <p:cNvSpPr txBox="1"/>
           <p:nvPr/>
         </p:nvSpPr>
@@ -20819,14 +21090,14 @@
                 <a:latin typeface="Arial"/>
                 <a:ea typeface="Arial"/>
               </a:rPr>
-              <a:t>출처: 정격 DWPD 원장(6개 업체 226개 등급, 점 = 세대 대표 최고 등급 · QLC, 중앙값 = 전체 등급, 5년 보증 환산, SLC · SCM 특수와 10 초과 3개 제외) · 고객 캐시 DWPD(Kangaroo · KV 실측 · Baleen) · 해법 사다리 원장 · 자체 설계 원장 · 일부 수치 검색 확인 · 부품 이미지는 3D 렌더</a:t>
-            </a:r>
-          </a:p>
-        </p:txBody>
-      </p:sp>
-      <p:sp>
-        <p:nvSpPr>
-          <p:cNvPr id="140" name="TextBox 139"/>
+              <a:t>출처: 정격 DWPD 원장(6개 업체 226개 등급, 점 = 세대 대표 최고 등급 · QLC, 중앙값 = 전체 등급, 5년 보증 환산, SLC · SCM 특수와 10 초과 3개 제외) · 해법 사다리 원장 · 자체 설계 원장 · 일부 수치 검색 확인 · 부품 이미지는 3D 렌더</a:t>
+            </a:r>
+          </a:p>
+        </p:txBody>
+      </p:sp>
+      <p:sp>
+        <p:nvSpPr>
+          <p:cNvPr id="146" name="TextBox 145"/>
           <p:cNvSpPr txBox="1"/>
           <p:nvPr/>
         </p:nvSpPr>

--- a/outputs/presentation/ssd-future-ready-strategy.pptx
+++ b/outputs/presentation/ssd-future-ready-strategy.pptx
@@ -9,6 +9,7 @@
     <p:sldId id="257" r:id="rId9"/>
     <p:sldId id="258" r:id="rId10"/>
     <p:sldId id="259" r:id="rId11"/>
+    <p:sldId id="260" r:id="rId12"/>
   </p:sldIdLst>
   <p:sldSz cx="18288000" cy="10287000" type="screen4x3"/>
   <p:notesSz cx="6858000" cy="9144000"/>
@@ -505,7 +506,7 @@
           <a:lstStyle/>
           <a:p>
             <a:r>
-              <a:t>1장입니다. HBM에서 삼성 점유율은 2022년 40퍼센트에서 2025년 2분기 17퍼센트로, SK하이닉스는 50에서 62퍼센트로 갈렸습니다. 하나의 수요를 늦게 읽으면 첫 호황을 놓친다는 교훈입니다. 그래서 SSD의 다음 수요를 하나로 단정하지 않고, 하이퍼스케일러의 데이터센터 응용 네 가지를 SSD에 요구하는 특성으로 비교했습니다. 첫째, 범용 클라우드입니다. 여러 고객의 VM이 서버의 SSD를 나눠 씁니다. Microsoft의 SSD 50만 대를 보면 실제 쓰기는 0.07에서 0.23 DWPD로 범용 TLC 정격 1 DWPD 안에 들어옵니다. 기존 SSD 기술로 대응할 수 있습니다. 다만 한 고객의 쓰기가 같은 SSD를 쓰는 다른 고객의 지연을 키웁니다. Microsoft 워크로드 실험에서 하드웨어로 격리하면 p99 지연이 최대 3.1배 줄었습니다. 멀티테넌트 QoS와 격리는 여전히 중요한 요구입니다. 둘째, AI 학습입니다. NVIDIA SuperPOD 가이드를 GPU당으로 환산하면, 데이터가 캐시보다 큰 멀티모달 학습은 기본 등급보다 약 3배의 스토리지 대역을 요구합니다. 데이터 로딩에는 고성능 TLC가 맞습니다. 405B 모델은 체크포인트 한 번에 약 5.7테라바이트를 쓰고, 다 쓸 때까지 학습이 멈춥니다. 체크포인트 간격이 짧아지면 고내구 TLC가 필요할 수 있어 점선으로 두었습니다. 셋째, AI 추론의 KV 캐시 오프로드입니다. KV 캐시 계층을 실측하면 드라이브당 3.2 DWPD로 QLC 정격 0.6을 크게 넘고, AI 전용 SSD는 50에서 120 DWPD로 나왔습니다. 반대로 읽기 위주라는 측정도 있습니다. 그래서 같은 KV 캐시라도 쓰기량에 따라 SLC급, 고내구 TLC, 고성능 TLC로 갈리고, 읽기 위주라면 QLC도 후보입니다. 고내구라는 요구에도 필요한 DWPD에 따라 SLC부터 QLC까지 여러 답이 있다는 뜻입니다. 넷째, Meta Muse와 OpenAI Dot 같은 에이전트입니다. 사실을 다시 확인해 보니 이 서비스들은 사용자마다 VM을 하나씩 주는 구조이고, 에이전트는 대부분의 시간을 휴면 상태로 보냅니다. 휴면 상태는 압축 스냅샷으로 오브젝트 스토리지에 보관됩니다. 제3자가 Muse VM을 관측한 결과 메모리 7.75기가바이트에 디스크 100기가바이트로, 디스크가 13배 큽니다. 사용자 1억 명이면 할당 기준 10엑사바이트입니다. 그래서 에이전트 VM 자체에는 고DWPD보다 고용량 QLC가 맞습니다. 다만 실제 사용량은 아직 할당보다 훨씬 작고, 에이전트 VM 디스크의 쓰기량을 공개한 측정은 없습니다. 에이전트가 키우는 고DWPD 수요는 VM이 아니라 추론의 KV 캐시 계층에서 나옵니다. 에이전트가 한꺼번에 깨어날 때 디스크 경합이 생긴다는 Google의 설명이 있어, 고성능 TLC는 점선으로 두었습니다. 아래 표는 이것을 제품군으로 정리한 것입니다. 위에서 아래로 요구 DWPD는 낮아지고 최대 용량은 커집니다. 파란 칸은 지금 쓰는 곳, 점선 칸은 신호에 따라 쓰일 곳입니다. 응용마다 필요한 제품군의 조합이 다르고, 하나의 제품으로 모든 응용에 대응할 수 없습니다. 그래서 다양한 데이터센터 응용에 대응하려면 SLC부터 QLC까지 다양한 제품 포트폴리오가 필요합니다. 다만 지금 예측할 수 있는 범위 안의 준비입니다.</a:t>
+              <a:t>1장입니다. HBM에서 삼성 점유율은 2022년 40퍼센트에서 2025년 2분기 17퍼센트로, SK하이닉스는 50에서 62퍼센트로 갈렸습니다. 하나의 수요를 늦게 읽으면 첫 호황을 놓친다는 교훈입니다. 그래서 SSD의 다음 수요를 하나로 단정하지 않고, 하이퍼스케일러의 데이터센터 응용 네 가지를 SSD에 요구하는 특성으로 비교했습니다. 카드 오른쪽 위 숫자는 McKinsey가 본 2030년 eSSD 수요입니다. 범용 클라우드와 엔터프라이즈가 약 500, AI 추론이 약 450, AI 학습이 약 130엑사바이트이고, 에이전트는 따로 떼어 낸 전망이 없습니다. 연도별 상세는 참고 5장에 두었습니다. 첫째, 범용 클라우드입니다. 여러 고객의 VM이 서버의 SSD를 나눠 씁니다. Microsoft의 SSD 50만 대를 보면 실제 쓰기는 0.07에서 0.23 DWPD로 범용 TLC 정격 1 DWPD 안에 들어옵니다. 기존 SSD 기술로 대응할 수 있습니다. 다만 한 고객의 쓰기가 같은 SSD를 쓰는 다른 고객의 지연을 키웁니다. Microsoft 워크로드 실험에서 하드웨어로 격리하면 p99 지연이 최대 3.1배 줄었습니다. 멀티테넌트 QoS와 격리는 여전히 중요한 요구입니다. 둘째, AI 학습입니다. NVIDIA SuperPOD 가이드를 GPU당으로 환산하면, 데이터가 캐시보다 큰 멀티모달 학습은 기본 등급보다 약 3배의 스토리지 대역을 요구합니다. 데이터 로딩에는 고성능 TLC가 맞습니다. 405B 모델은 체크포인트 한 번에 약 5.7테라바이트를 쓰고, 다 쓸 때까지 학습이 멈춥니다. 체크포인트 간격이 짧아지면 고내구 TLC가 필요할 수 있어 점선으로 두었습니다. 셋째, AI 추론의 KV 캐시 오프로드입니다. KV 캐시 계층을 실측하면 드라이브당 3.2 DWPD로 QLC 정격 0.6을 크게 넘고, AI 전용 SSD는 50에서 120 DWPD로 나왔습니다. 반대로 읽기 위주라는 측정도 있습니다. 그래서 같은 KV 캐시라도 쓰기량에 따라 SLC급, 고내구 TLC, 고성능 TLC로 갈리고, 읽기 위주라면 QLC도 후보입니다. 고내구라는 요구에도 필요한 DWPD에 따라 SLC부터 QLC까지 여러 답이 있다는 뜻입니다. 넷째, Meta Muse와 OpenAI Dot 같은 에이전트입니다. 사실을 다시 확인해 보니 이 서비스들은 사용자마다 VM을 하나씩 주는 구조이고, 에이전트는 대부분의 시간을 휴면 상태로 보냅니다. 휴면 상태는 압축 스냅샷으로 오브젝트 스토리지에 보관됩니다. 제3자가 Muse VM을 관측한 결과 메모리 7.75기가바이트에 디스크 100기가바이트로, 디스크가 13배 큽니다. 사용자 1억 명이면 할당 기준 10엑사바이트입니다. 그래서 에이전트 VM 자체에는 고DWPD보다 고용량 QLC가 맞습니다. 다만 실제 사용량은 아직 할당보다 훨씬 작고, 에이전트 VM 디스크의 쓰기량을 공개한 측정은 없습니다. 에이전트가 키우는 고DWPD 수요는 VM이 아니라 추론의 KV 캐시 계층에서 나옵니다. 에이전트가 한꺼번에 깨어날 때 디스크 경합이 생긴다는 Google의 설명이 있어, 고성능 TLC는 점선으로 두었습니다. 아래 표는 이것을 제품군으로 정리한 것입니다. 위에서 아래로 요구 DWPD는 낮아지고 최대 용량은 커집니다. 파란 칸은 지금 쓰는 곳, 점선 칸은 신호에 따라 쓰일 곳입니다. 응용마다 필요한 제품군의 조합이 다르고, 하나의 제품으로 모든 응용에 대응할 수 없습니다. 그래서 다양한 데이터센터 응용에 대응하려면 SLC부터 QLC까지 다양한 제품 포트폴리오가 필요합니다. 다만 지금 예측할 수 있는 범위 안의 준비입니다.</a:t>
             </a:r>
           </a:p>
         </p:txBody>
@@ -716,6 +717,76 @@
           <a:p>
             <a:r>
               <a:t>4장 실행 전략입니다. 2장에서 고른 FDP의 요구, 곧 데이터가 언제 지워지는지와 그것이 SSD의 배치 정책과 어떻게 맞물리는지는 고객 시스템 안에 있습니다. 그래서 지금까지와 다른 방식이 필요하고, 그 방식을 FDP에 집중합니다. 나머지 다섯 기술은 고객 요구를 정확한 스펙으로 받는 지금 방식을 다듬어 준비합니다. 첫째, 계약입니다. 지금의 Multi-Year Deal, MYD는 여러 해의 수량과 가격을 약속합니다. Micron은 Anthropic과의 전략적 계약에서 다년 공급 위에 공동 설계와 운영 통합을 묶었습니다. 우리도 MYD 위에 기술 협력을 쌓겠습니다. 둘째, 사람입니다. 스펙 문서로는 명시된 요구만 옵니다. Palantir와 OpenAI의 FDE처럼 삼성 Pod가 고객 AI 데이터센터 안에서 고객 엔지니어와 함께 일합니다. 핵심 업무는 세 가지입니다. 하나, 고객 워크로드 측정과 분석입니다. 고객 트레이스로 쓰기 크기와 데이터 수명을 재서, 고객이 말한 요구와 실제 요구의 차이를 찾습니다. 둘, 호스트 소프트웨어 스택의 최적화와 평가입니다. 고객 엔지니어와 함께 KV 캐시 소프트웨어와 SSD를 맞물려 최적화하고, 고객 환경에서 WAF와 꼬리 지연, 그리고 토큰당 비용과 GPU 가동률로 효과를 평가합니다. LMCache에 FDP 배치를 머지한 것이 선례입니다. 셋, 차세대 제품을 위한 기술 교류입니다. 현장에서 증명한 것을 고객 엔지니어와 함께 다음 제품의 사양과 고객 RFQ, OCP 요구로 굳힙니다. 이렇게 고객 안에서 요구를 찾고, 수요를 함께 만듭니다. 셋째, 역량입니다. NAND와 SSD 펌웨어는 강점이고, 비어 있는 곳은 그 위입니다. KV 캐시 소프트웨어는 LMCache에서 시작했고 Dynamo와 Mooncake에는 아직 기여가 없습니다. 고객의 지표인 토큰당 비용과 GPU 가동률로 말하는 사람이 필요합니다. 마지막으로 화두를 하나 드리겠습니다. 지금까지 고객 관계 관리, CRM은 경영진과 경영진, 영업과 구매 사이의 일이었습니다. 앞으로는 엔지니어와 엔지니어 사이까지 넓어져야 합니다. 고객 엔지니어가 신뢰하는 상대는 같은 문제를 같은 언어로 푸는 엔지니어이고, 고객과 국가마다 다른 언어와 문화를 이해하는 것도 그 관계의 일부입니다. 엔지니어 수준의 고객 관계를 우리가 맡을 준비가 되어 있는지 함께 생각해 보면 좋겠습니다. 첫 90일에는 다섯 가지를 하겠습니다. 전략 고객 한두 곳을 정해 FDP 공동 설계 의제를 맞추고, Co-Design Pod를 꾸리고, 시스템 소프트웨어 전문가 채용을 시작하고, 고객 KV 트레이스로 WAF를 실측하고, 신호 대시보드를 돌리겠습니다. 마지막으로, 실패할 수도 있는 기술에 투자하는 것이 불확실한 미래에 실패하지 않는 불변 전략입니다. 지금 예측할 수 있는 범위 안에서 최선을 다하고, 신호가 바뀌면 판단을 고치겠습니다.</a:t>
+            </a:r>
+          </a:p>
+        </p:txBody>
+      </p:sp>
+      <p:sp>
+        <p:nvSpPr>
+          <p:cNvPr id="4" name="Slide Number Placeholder 3"/>
+          <p:cNvSpPr>
+            <a:spLocks noGrp="1"/>
+          </p:cNvSpPr>
+          <p:nvPr>
+            <p:ph type="sldNum" idx="5" sz="quarter"/>
+          </p:nvPr>
+        </p:nvSpPr>
+        <p:spPr/>
+      </p:sp>
+    </p:spTree>
+  </p:cSld>
+  <p:clrMapOvr>
+    <a:masterClrMapping/>
+  </p:clrMapOvr>
+</p:notes>
+</file>
+
+<file path=ppt/notesSlides/notesSlide5.xml><?xml version="1.0" encoding="utf-8"?>
+<p:notes xmlns:a="http://schemas.openxmlformats.org/drawingml/2006/main" xmlns:p="http://schemas.openxmlformats.org/presentationml/2006/main" xmlns:r="http://schemas.openxmlformats.org/officeDocument/2006/relationships">
+  <p:cSld>
+    <p:spTree>
+      <p:nvGrpSpPr>
+        <p:cNvPr id="1" name=""/>
+        <p:cNvGrpSpPr/>
+        <p:nvPr/>
+      </p:nvGrpSpPr>
+      <p:grpSpPr>
+        <a:xfrm>
+          <a:off x="0" y="0"/>
+          <a:ext cx="0" cy="0"/>
+          <a:chOff x="0" y="0"/>
+          <a:chExt cx="0" cy="0"/>
+        </a:xfrm>
+      </p:grpSpPr>
+      <p:sp>
+        <p:nvSpPr>
+          <p:cNvPr id="2" name="Slide Image Placeholder 1"/>
+          <p:cNvSpPr>
+            <a:spLocks noGrp="1"/>
+          </p:cNvSpPr>
+          <p:nvPr>
+            <p:ph type="sldImg" idx="2"/>
+          </p:nvPr>
+        </p:nvSpPr>
+        <p:spPr/>
+      </p:sp>
+      <p:sp>
+        <p:nvSpPr>
+          <p:cNvPr id="3" name="Notes Placeholder 2"/>
+          <p:cNvSpPr>
+            <a:spLocks noGrp="1"/>
+          </p:cNvSpPr>
+          <p:nvPr>
+            <p:ph type="body" idx="3" sz="quarter"/>
+          </p:nvPr>
+        </p:nvSpPr>
+        <p:spPr/>
+        <p:txBody>
+          <a:bodyPr/>
+          <a:lstStyle/>
+          <a:p>
+            <a:r>
+              <a:t>참고 자료입니다. 1장에서 본 데이터센터 응용 네 가지가 2030년까지 어느 정도의 수요가 되는지 공개 전망으로 정리했습니다. 막대는 McKinsey의 2024년 말 기준 시나리오입니다. eSSD 수요는 2024년 181엑사바이트에서 2030년 1,078엑사바이트로 약 6배가 됩니다. 2030년과 2024년 값은 McKinsey 수치이고, 그 사이 해는 수요처별 연평균 성장률로 이은 과제팀 산술입니다. 가장 큰 몫은 AI 추론입니다. KV 캐시와 RAG를 포함한 추론 수요는 6에서 447엑사바이트로 약 75배 늘어 2030년 eSSD의 41퍼센트가 됩니다. AI 학습은 7에서 127엑사바이트, 범용 클라우드와 엔터프라이즈는 총량에서 학습과 추론을 뺀 값으로 약 500엑사바이트입니다. 에이전트는 따로 떼어 낸 전망이 없습니다. 추론의 KV 캐시와 범용의 VM 디스크에 나뉘어 잡힙니다. 마름모는 2026년에 나온 최신 전망입니다. JPM과 Kioxia는 2028년에 약 900엑사바이트를 봅니다. 2024년 전망 경로로는 2029년과 2030년 사이에야 닿는 규모라 약 1년 반 앞당겨진 셈입니다. SanDisk도 2030년 AI 데이터센터 플래시를 1.2제타바이트로 봅니다. 기관마다 정의가 달라 막대와 정확히 겹쳐 읽을 수는 없고 방향만 비교합니다. 마지막으로 네 응용에 없는 큰 수요가 HDD 대체입니다. 니어라인 HDD는 2030년 연 약 3.9제타바이트가 출하될 전망이라, 그중 10퍼센트만 플래시로 넘어와도 약 390엑사바이트로 AI 학습 전체의 세 배입니다. 다만 QLC 가격이 HDD의 3배 안에 들어야 하는데, 지금 가격 경로로는 2031년에서 2032년 무렵이고, 실제 전환은 전력과 공간이 병목인 AI 데이터센터부터 TCO로 일어날 가능성이 큽니다. 모든 수치는 검색으로 확인한 2차 자료이며 1차 문서 대조가 필요합니다.</a:t>
             </a:r>
           </a:p>
         </p:txBody>
@@ -3766,7 +3837,7 @@
                 <a:latin typeface="Arial"/>
                 <a:ea typeface="Arial"/>
               </a:rPr>
-              <a:t>   1 / 4  배경</a:t>
+              <a:t>   1 / 5  배경</a:t>
             </a:r>
           </a:p>
         </p:txBody>
@@ -5477,9 +5548,209 @@
           </a:p>
         </p:txBody>
       </p:sp>
+      <p:sp>
+        <p:nvSpPr>
+          <p:cNvPr id="44" name="TextBox 43"/>
+          <p:cNvSpPr txBox="1"/>
+          <p:nvPr/>
+        </p:nvSpPr>
+        <p:spPr>
+          <a:xfrm>
+            <a:off x="4489704" y="4718304"/>
+            <a:ext cx="2839212" cy="329184"/>
+          </a:xfrm>
+          <a:prstGeom prst="rect">
+            <a:avLst/>
+          </a:prstGeom>
+          <a:noFill/>
+        </p:spPr>
+        <p:txBody>
+          <a:bodyPr wrap="square" anchor="ctr" lIns="0" rIns="0" tIns="0" bIns="0">
+            <a:spAutoFit/>
+          </a:bodyPr>
+          <a:lstStyle/>
+          <a:p>
+            <a:pPr algn="l">
+              <a:lnSpc>
+                <a:spcPct val="110000"/>
+              </a:lnSpc>
+            </a:pPr>
+            <a:r>
+              <a:rPr sz="1600" b="0">
+                <a:solidFill>
+                  <a:srgbClr val="555555"/>
+                </a:solidFill>
+                <a:latin typeface="Arial"/>
+                <a:ea typeface="Arial"/>
+              </a:rPr>
+              <a:t>2030  </a:t>
+            </a:r>
+            <a:r>
+              <a:rPr sz="2000" b="1">
+                <a:solidFill>
+                  <a:srgbClr val="1A1A1A"/>
+                </a:solidFill>
+                <a:latin typeface="Arial"/>
+                <a:ea typeface="Arial"/>
+              </a:rPr>
+              <a:t>약 500EB</a:t>
+            </a:r>
+          </a:p>
+        </p:txBody>
+      </p:sp>
+      <p:sp>
+        <p:nvSpPr>
+          <p:cNvPr id="45" name="TextBox 44"/>
+          <p:cNvSpPr txBox="1"/>
+          <p:nvPr/>
+        </p:nvSpPr>
+        <p:spPr>
+          <a:xfrm>
+            <a:off x="7840979" y="4718304"/>
+            <a:ext cx="2839212" cy="329184"/>
+          </a:xfrm>
+          <a:prstGeom prst="rect">
+            <a:avLst/>
+          </a:prstGeom>
+          <a:noFill/>
+        </p:spPr>
+        <p:txBody>
+          <a:bodyPr wrap="square" anchor="ctr" lIns="0" rIns="0" tIns="0" bIns="0">
+            <a:spAutoFit/>
+          </a:bodyPr>
+          <a:lstStyle/>
+          <a:p>
+            <a:pPr algn="l">
+              <a:lnSpc>
+                <a:spcPct val="110000"/>
+              </a:lnSpc>
+            </a:pPr>
+            <a:r>
+              <a:rPr sz="1600" b="0">
+                <a:solidFill>
+                  <a:srgbClr val="555555"/>
+                </a:solidFill>
+                <a:latin typeface="Arial"/>
+                <a:ea typeface="Arial"/>
+              </a:rPr>
+              <a:t>2030  </a:t>
+            </a:r>
+            <a:r>
+              <a:rPr sz="2000" b="1">
+                <a:solidFill>
+                  <a:srgbClr val="1A1A1A"/>
+                </a:solidFill>
+                <a:latin typeface="Arial"/>
+                <a:ea typeface="Arial"/>
+              </a:rPr>
+              <a:t>약 130EB</a:t>
+            </a:r>
+          </a:p>
+        </p:txBody>
+      </p:sp>
+      <p:sp>
+        <p:nvSpPr>
+          <p:cNvPr id="46" name="TextBox 45"/>
+          <p:cNvSpPr txBox="1"/>
+          <p:nvPr/>
+        </p:nvSpPr>
+        <p:spPr>
+          <a:xfrm>
+            <a:off x="11192256" y="4718304"/>
+            <a:ext cx="2839212" cy="329184"/>
+          </a:xfrm>
+          <a:prstGeom prst="rect">
+            <a:avLst/>
+          </a:prstGeom>
+          <a:noFill/>
+        </p:spPr>
+        <p:txBody>
+          <a:bodyPr wrap="square" anchor="ctr" lIns="0" rIns="0" tIns="0" bIns="0">
+            <a:spAutoFit/>
+          </a:bodyPr>
+          <a:lstStyle/>
+          <a:p>
+            <a:pPr algn="l">
+              <a:lnSpc>
+                <a:spcPct val="110000"/>
+              </a:lnSpc>
+            </a:pPr>
+            <a:r>
+              <a:rPr sz="1600" b="0">
+                <a:solidFill>
+                  <a:srgbClr val="555555"/>
+                </a:solidFill>
+                <a:latin typeface="Arial"/>
+                <a:ea typeface="Arial"/>
+              </a:rPr>
+              <a:t>2030  </a:t>
+            </a:r>
+            <a:r>
+              <a:rPr sz="2000" b="1">
+                <a:solidFill>
+                  <a:srgbClr val="1A1A1A"/>
+                </a:solidFill>
+                <a:latin typeface="Arial"/>
+                <a:ea typeface="Arial"/>
+              </a:rPr>
+              <a:t>약 450EB</a:t>
+            </a:r>
+          </a:p>
+        </p:txBody>
+      </p:sp>
+      <p:sp>
+        <p:nvSpPr>
+          <p:cNvPr id="47" name="TextBox 46"/>
+          <p:cNvSpPr txBox="1"/>
+          <p:nvPr/>
+        </p:nvSpPr>
+        <p:spPr>
+          <a:xfrm>
+            <a:off x="14543532" y="4718304"/>
+            <a:ext cx="2839212" cy="329184"/>
+          </a:xfrm>
+          <a:prstGeom prst="rect">
+            <a:avLst/>
+          </a:prstGeom>
+          <a:noFill/>
+        </p:spPr>
+        <p:txBody>
+          <a:bodyPr wrap="square" anchor="ctr" lIns="0" rIns="0" tIns="0" bIns="0">
+            <a:spAutoFit/>
+          </a:bodyPr>
+          <a:lstStyle/>
+          <a:p>
+            <a:pPr algn="l">
+              <a:lnSpc>
+                <a:spcPct val="110000"/>
+              </a:lnSpc>
+            </a:pPr>
+            <a:r>
+              <a:rPr sz="1600" b="0">
+                <a:solidFill>
+                  <a:srgbClr val="555555"/>
+                </a:solidFill>
+                <a:latin typeface="Arial"/>
+                <a:ea typeface="Arial"/>
+              </a:rPr>
+              <a:t>2030  </a:t>
+            </a:r>
+            <a:r>
+              <a:rPr sz="1600" b="0">
+                <a:solidFill>
+                  <a:srgbClr val="555555"/>
+                </a:solidFill>
+                <a:latin typeface="Arial"/>
+                <a:ea typeface="Arial"/>
+              </a:rPr>
+              <a:t>별도 전망 없음</a:t>
+            </a:r>
+          </a:p>
+        </p:txBody>
+      </p:sp>
       <p:pic>
         <p:nvPicPr>
-          <p:cNvPr id="44" name="Picture 43" descr="nvidia.png"/>
+          <p:cNvPr id="48" name="Picture 47" descr="nvidia.png"/>
           <p:cNvPicPr>
             <a:picLocks noChangeAspect="1"/>
           </p:cNvPicPr>
@@ -5503,7 +5774,7 @@
       </p:pic>
       <p:pic>
         <p:nvPicPr>
-          <p:cNvPr id="45" name="Picture 44" descr="aws.png"/>
+          <p:cNvPr id="49" name="Picture 48" descr="aws.png"/>
           <p:cNvPicPr>
             <a:picLocks noChangeAspect="1"/>
           </p:cNvPicPr>
@@ -5527,7 +5798,7 @@
       </p:pic>
       <p:pic>
         <p:nvPicPr>
-          <p:cNvPr id="46" name="Picture 45" descr="microsoft.png"/>
+          <p:cNvPr id="50" name="Picture 49" descr="microsoft.png"/>
           <p:cNvPicPr>
             <a:picLocks noChangeAspect="1"/>
           </p:cNvPicPr>
@@ -5551,7 +5822,7 @@
       </p:pic>
       <p:pic>
         <p:nvPicPr>
-          <p:cNvPr id="47" name="Picture 46" descr="google.png"/>
+          <p:cNvPr id="51" name="Picture 50" descr="google.png"/>
           <p:cNvPicPr>
             <a:picLocks noChangeAspect="1"/>
           </p:cNvPicPr>
@@ -5575,7 +5846,7 @@
       </p:pic>
       <p:pic>
         <p:nvPicPr>
-          <p:cNvPr id="48" name="Picture 47" descr="meta.png"/>
+          <p:cNvPr id="52" name="Picture 51" descr="meta.png"/>
           <p:cNvPicPr>
             <a:picLocks noChangeAspect="1"/>
           </p:cNvPicPr>
@@ -5599,7 +5870,7 @@
       </p:pic>
       <p:sp>
         <p:nvSpPr>
-          <p:cNvPr id="49" name="TextBox 48"/>
+          <p:cNvPr id="53" name="TextBox 52"/>
           <p:cNvSpPr txBox="1"/>
           <p:nvPr/>
         </p:nvSpPr>
@@ -5639,7 +5910,7 @@
       </p:sp>
       <p:pic>
         <p:nvPicPr>
-          <p:cNvPr id="50" name="Picture 49" descr="openai.png"/>
+          <p:cNvPr id="54" name="Picture 53" descr="openai.png"/>
           <p:cNvPicPr>
             <a:picLocks noChangeAspect="1"/>
           </p:cNvPicPr>
@@ -5663,7 +5934,7 @@
       </p:pic>
       <p:sp>
         <p:nvSpPr>
-          <p:cNvPr id="51" name="TextBox 50"/>
+          <p:cNvPr id="55" name="TextBox 54"/>
           <p:cNvSpPr txBox="1"/>
           <p:nvPr/>
         </p:nvSpPr>
@@ -5703,7 +5974,7 @@
       </p:sp>
       <p:sp>
         <p:nvSpPr>
-          <p:cNvPr id="52" name="Cloud 51"/>
+          <p:cNvPr id="56" name="Cloud 55"/>
           <p:cNvSpPr/>
           <p:nvPr/>
         </p:nvSpPr>
@@ -5747,7 +6018,7 @@
       </p:sp>
       <p:sp>
         <p:nvSpPr>
-          <p:cNvPr id="53" name="Rectangle 52"/>
+          <p:cNvPr id="57" name="Rectangle 56"/>
           <p:cNvSpPr/>
           <p:nvPr/>
         </p:nvSpPr>
@@ -5791,7 +6062,7 @@
       </p:sp>
       <p:sp>
         <p:nvSpPr>
-          <p:cNvPr id="54" name="Rectangle 53"/>
+          <p:cNvPr id="58" name="Rectangle 57"/>
           <p:cNvSpPr/>
           <p:nvPr/>
         </p:nvSpPr>
@@ -5835,7 +6106,7 @@
       </p:sp>
       <p:sp>
         <p:nvSpPr>
-          <p:cNvPr id="55" name="Rectangle 54"/>
+          <p:cNvPr id="59" name="Rectangle 58"/>
           <p:cNvSpPr/>
           <p:nvPr/>
         </p:nvSpPr>
@@ -5879,7 +6150,7 @@
       </p:sp>
       <p:sp>
         <p:nvSpPr>
-          <p:cNvPr id="56" name="Rectangle 55"/>
+          <p:cNvPr id="60" name="Rectangle 59"/>
           <p:cNvSpPr/>
           <p:nvPr/>
         </p:nvSpPr>
@@ -5923,7 +6194,7 @@
       </p:sp>
       <p:sp>
         <p:nvSpPr>
-          <p:cNvPr id="57" name="Rectangle 56"/>
+          <p:cNvPr id="61" name="Rectangle 60"/>
           <p:cNvSpPr/>
           <p:nvPr/>
         </p:nvSpPr>
@@ -5967,7 +6238,7 @@
       </p:sp>
       <p:sp>
         <p:nvSpPr>
-          <p:cNvPr id="58" name="Rectangle 57"/>
+          <p:cNvPr id="62" name="Rectangle 61"/>
           <p:cNvSpPr/>
           <p:nvPr/>
         </p:nvSpPr>
@@ -6011,7 +6282,7 @@
       </p:sp>
       <p:sp>
         <p:nvSpPr>
-          <p:cNvPr id="59" name="Rectangle 58"/>
+          <p:cNvPr id="63" name="Rectangle 62"/>
           <p:cNvSpPr/>
           <p:nvPr/>
         </p:nvSpPr>
@@ -6055,7 +6326,7 @@
       </p:sp>
       <p:sp>
         <p:nvSpPr>
-          <p:cNvPr id="60" name="Rectangle 59"/>
+          <p:cNvPr id="64" name="Rectangle 63"/>
           <p:cNvSpPr/>
           <p:nvPr/>
         </p:nvSpPr>
@@ -6099,7 +6370,7 @@
       </p:sp>
       <p:sp>
         <p:nvSpPr>
-          <p:cNvPr id="61" name="Rectangle 60"/>
+          <p:cNvPr id="65" name="Rectangle 64"/>
           <p:cNvSpPr/>
           <p:nvPr/>
         </p:nvSpPr>
@@ -6143,7 +6414,7 @@
       </p:sp>
       <p:sp>
         <p:nvSpPr>
-          <p:cNvPr id="62" name="Rectangle 61"/>
+          <p:cNvPr id="66" name="Rectangle 65"/>
           <p:cNvSpPr/>
           <p:nvPr/>
         </p:nvSpPr>
@@ -6187,7 +6458,7 @@
       </p:sp>
       <p:sp>
         <p:nvSpPr>
-          <p:cNvPr id="63" name="TextBox 62"/>
+          <p:cNvPr id="67" name="TextBox 66"/>
           <p:cNvSpPr txBox="1"/>
           <p:nvPr/>
         </p:nvSpPr>
@@ -6227,7 +6498,7 @@
       </p:sp>
       <p:sp>
         <p:nvSpPr>
-          <p:cNvPr id="64" name="TextBox 63"/>
+          <p:cNvPr id="68" name="TextBox 67"/>
           <p:cNvSpPr txBox="1"/>
           <p:nvPr/>
         </p:nvSpPr>
@@ -6267,7 +6538,7 @@
       </p:sp>
       <p:sp>
         <p:nvSpPr>
-          <p:cNvPr id="65" name="Rectangle 64"/>
+          <p:cNvPr id="69" name="Rectangle 68"/>
           <p:cNvSpPr/>
           <p:nvPr/>
         </p:nvSpPr>
@@ -6311,7 +6582,7 @@
       </p:sp>
       <p:sp>
         <p:nvSpPr>
-          <p:cNvPr id="66" name="TextBox 65"/>
+          <p:cNvPr id="70" name="TextBox 69"/>
           <p:cNvSpPr txBox="1"/>
           <p:nvPr/>
         </p:nvSpPr>
@@ -6351,7 +6622,7 @@
       </p:sp>
       <p:sp>
         <p:nvSpPr>
-          <p:cNvPr id="67" name="TextBox 66"/>
+          <p:cNvPr id="71" name="TextBox 70"/>
           <p:cNvSpPr txBox="1"/>
           <p:nvPr/>
         </p:nvSpPr>
@@ -6391,7 +6662,7 @@
       </p:sp>
       <p:sp>
         <p:nvSpPr>
-          <p:cNvPr id="68" name="Rectangle 67"/>
+          <p:cNvPr id="72" name="Rectangle 71"/>
           <p:cNvSpPr/>
           <p:nvPr/>
         </p:nvSpPr>
@@ -6435,7 +6706,7 @@
       </p:sp>
       <p:sp>
         <p:nvSpPr>
-          <p:cNvPr id="69" name="TextBox 68"/>
+          <p:cNvPr id="73" name="TextBox 72"/>
           <p:cNvSpPr txBox="1"/>
           <p:nvPr/>
         </p:nvSpPr>
@@ -6475,7 +6746,7 @@
       </p:sp>
       <p:sp>
         <p:nvSpPr>
-          <p:cNvPr id="70" name="TextBox 69"/>
+          <p:cNvPr id="74" name="TextBox 73"/>
           <p:cNvSpPr txBox="1"/>
           <p:nvPr/>
         </p:nvSpPr>
@@ -6515,7 +6786,7 @@
       </p:sp>
       <p:sp>
         <p:nvSpPr>
-          <p:cNvPr id="71" name="Rectangle 70"/>
+          <p:cNvPr id="75" name="Rectangle 74"/>
           <p:cNvSpPr/>
           <p:nvPr/>
         </p:nvSpPr>
@@ -6559,7 +6830,7 @@
       </p:sp>
       <p:sp>
         <p:nvSpPr>
-          <p:cNvPr id="72" name="TextBox 71"/>
+          <p:cNvPr id="76" name="TextBox 75"/>
           <p:cNvSpPr txBox="1"/>
           <p:nvPr/>
         </p:nvSpPr>
@@ -6599,7 +6870,7 @@
       </p:sp>
       <p:sp>
         <p:nvSpPr>
-          <p:cNvPr id="73" name="TextBox 72"/>
+          <p:cNvPr id="77" name="TextBox 76"/>
           <p:cNvSpPr txBox="1"/>
           <p:nvPr/>
         </p:nvSpPr>
@@ -6639,7 +6910,7 @@
       </p:sp>
       <p:sp>
         <p:nvSpPr>
-          <p:cNvPr id="74" name="Rectangle 73"/>
+          <p:cNvPr id="78" name="Rectangle 77"/>
           <p:cNvSpPr/>
           <p:nvPr/>
         </p:nvSpPr>
@@ -6683,7 +6954,7 @@
       </p:sp>
       <p:sp>
         <p:nvSpPr>
-          <p:cNvPr id="75" name="TextBox 74"/>
+          <p:cNvPr id="79" name="TextBox 78"/>
           <p:cNvSpPr txBox="1"/>
           <p:nvPr/>
         </p:nvSpPr>
@@ -6723,7 +6994,7 @@
       </p:sp>
       <p:sp>
         <p:nvSpPr>
-          <p:cNvPr id="76" name="TextBox 75"/>
+          <p:cNvPr id="80" name="TextBox 79"/>
           <p:cNvSpPr txBox="1"/>
           <p:nvPr/>
         </p:nvSpPr>
@@ -6763,7 +7034,7 @@
       </p:sp>
       <p:sp>
         <p:nvSpPr>
-          <p:cNvPr id="77" name="TextBox 76"/>
+          <p:cNvPr id="81" name="TextBox 80"/>
           <p:cNvSpPr txBox="1"/>
           <p:nvPr/>
         </p:nvSpPr>
@@ -6803,7 +7074,7 @@
       </p:sp>
       <p:sp>
         <p:nvSpPr>
-          <p:cNvPr id="78" name="TextBox 77"/>
+          <p:cNvPr id="82" name="TextBox 81"/>
           <p:cNvSpPr txBox="1"/>
           <p:nvPr/>
         </p:nvSpPr>
@@ -6860,7 +7131,7 @@
       </p:sp>
       <p:sp>
         <p:nvSpPr>
-          <p:cNvPr id="79" name="Rectangle 78"/>
+          <p:cNvPr id="83" name="Rectangle 82"/>
           <p:cNvSpPr/>
           <p:nvPr/>
         </p:nvSpPr>
@@ -6904,7 +7175,7 @@
       </p:sp>
       <p:sp>
         <p:nvSpPr>
-          <p:cNvPr id="80" name="TextBox 79"/>
+          <p:cNvPr id="84" name="TextBox 83"/>
           <p:cNvSpPr txBox="1"/>
           <p:nvPr/>
         </p:nvSpPr>
@@ -6944,7 +7215,7 @@
       </p:sp>
       <p:sp>
         <p:nvSpPr>
-          <p:cNvPr id="81" name="Rectangle 80"/>
+          <p:cNvPr id="85" name="Rectangle 84"/>
           <p:cNvSpPr/>
           <p:nvPr/>
         </p:nvSpPr>
@@ -6988,7 +7259,7 @@
       </p:sp>
       <p:sp>
         <p:nvSpPr>
-          <p:cNvPr id="82" name="TextBox 81"/>
+          <p:cNvPr id="86" name="TextBox 85"/>
           <p:cNvSpPr txBox="1"/>
           <p:nvPr/>
         </p:nvSpPr>
@@ -7028,7 +7299,7 @@
       </p:sp>
       <p:sp>
         <p:nvSpPr>
-          <p:cNvPr id="83" name="Rectangle 82"/>
+          <p:cNvPr id="87" name="Rectangle 86"/>
           <p:cNvSpPr/>
           <p:nvPr/>
         </p:nvSpPr>
@@ -7072,7 +7343,7 @@
       </p:sp>
       <p:sp>
         <p:nvSpPr>
-          <p:cNvPr id="84" name="TextBox 83"/>
+          <p:cNvPr id="88" name="TextBox 87"/>
           <p:cNvSpPr txBox="1"/>
           <p:nvPr/>
         </p:nvSpPr>
@@ -7112,7 +7383,7 @@
       </p:sp>
       <p:sp>
         <p:nvSpPr>
-          <p:cNvPr id="85" name="TextBox 84"/>
+          <p:cNvPr id="89" name="TextBox 88"/>
           <p:cNvSpPr txBox="1"/>
           <p:nvPr/>
         </p:nvSpPr>
@@ -7152,7 +7423,7 @@
       </p:sp>
       <p:sp>
         <p:nvSpPr>
-          <p:cNvPr id="86" name="Rectangle 85"/>
+          <p:cNvPr id="90" name="Rectangle 89"/>
           <p:cNvSpPr/>
           <p:nvPr/>
         </p:nvSpPr>
@@ -7196,7 +7467,7 @@
       </p:sp>
       <p:sp>
         <p:nvSpPr>
-          <p:cNvPr id="87" name="TextBox 86"/>
+          <p:cNvPr id="91" name="TextBox 90"/>
           <p:cNvSpPr txBox="1"/>
           <p:nvPr/>
         </p:nvSpPr>
@@ -7236,7 +7507,7 @@
       </p:sp>
       <p:sp>
         <p:nvSpPr>
-          <p:cNvPr id="88" name="TextBox 87"/>
+          <p:cNvPr id="92" name="TextBox 91"/>
           <p:cNvSpPr txBox="1"/>
           <p:nvPr/>
         </p:nvSpPr>
@@ -7276,7 +7547,7 @@
       </p:sp>
       <p:sp>
         <p:nvSpPr>
-          <p:cNvPr id="89" name="Rectangle 88"/>
+          <p:cNvPr id="93" name="Rectangle 92"/>
           <p:cNvSpPr/>
           <p:nvPr/>
         </p:nvSpPr>
@@ -7320,7 +7591,7 @@
       </p:sp>
       <p:sp>
         <p:nvSpPr>
-          <p:cNvPr id="90" name="TextBox 89"/>
+          <p:cNvPr id="94" name="TextBox 93"/>
           <p:cNvSpPr txBox="1"/>
           <p:nvPr/>
         </p:nvSpPr>
@@ -7360,7 +7631,7 @@
       </p:sp>
       <p:sp>
         <p:nvSpPr>
-          <p:cNvPr id="91" name="TextBox 90"/>
+          <p:cNvPr id="95" name="TextBox 94"/>
           <p:cNvSpPr txBox="1"/>
           <p:nvPr/>
         </p:nvSpPr>
@@ -7400,7 +7671,7 @@
       </p:sp>
       <p:sp>
         <p:nvSpPr>
-          <p:cNvPr id="92" name="Rectangle 91"/>
+          <p:cNvPr id="96" name="Rectangle 95"/>
           <p:cNvSpPr/>
           <p:nvPr/>
         </p:nvSpPr>
@@ -7444,7 +7715,7 @@
       </p:sp>
       <p:sp>
         <p:nvSpPr>
-          <p:cNvPr id="93" name="Rectangle 92"/>
+          <p:cNvPr id="97" name="Rectangle 96"/>
           <p:cNvSpPr/>
           <p:nvPr/>
         </p:nvSpPr>
@@ -7488,7 +7759,7 @@
       </p:sp>
       <p:sp>
         <p:nvSpPr>
-          <p:cNvPr id="94" name="TextBox 93"/>
+          <p:cNvPr id="98" name="TextBox 97"/>
           <p:cNvSpPr txBox="1"/>
           <p:nvPr/>
         </p:nvSpPr>
@@ -7528,7 +7799,7 @@
       </p:sp>
       <p:sp>
         <p:nvSpPr>
-          <p:cNvPr id="95" name="Rectangle 94"/>
+          <p:cNvPr id="99" name="Rectangle 98"/>
           <p:cNvSpPr/>
           <p:nvPr/>
         </p:nvSpPr>
@@ -7572,7 +7843,7 @@
       </p:sp>
       <p:sp>
         <p:nvSpPr>
-          <p:cNvPr id="96" name="Rectangle 95"/>
+          <p:cNvPr id="100" name="Rectangle 99"/>
           <p:cNvSpPr/>
           <p:nvPr/>
         </p:nvSpPr>
@@ -7616,7 +7887,7 @@
       </p:sp>
       <p:sp>
         <p:nvSpPr>
-          <p:cNvPr id="97" name="Rectangle 96"/>
+          <p:cNvPr id="101" name="Rectangle 100"/>
           <p:cNvSpPr/>
           <p:nvPr/>
         </p:nvSpPr>
@@ -7660,7 +7931,7 @@
       </p:sp>
       <p:sp>
         <p:nvSpPr>
-          <p:cNvPr id="98" name="Rectangle 97"/>
+          <p:cNvPr id="102" name="Rectangle 101"/>
           <p:cNvSpPr/>
           <p:nvPr/>
         </p:nvSpPr>
@@ -7704,7 +7975,7 @@
       </p:sp>
       <p:sp>
         <p:nvSpPr>
-          <p:cNvPr id="99" name="Rectangle 98"/>
+          <p:cNvPr id="103" name="Rectangle 102"/>
           <p:cNvSpPr/>
           <p:nvPr/>
         </p:nvSpPr>
@@ -7748,7 +8019,7 @@
       </p:sp>
       <p:sp>
         <p:nvSpPr>
-          <p:cNvPr id="100" name="Rectangle 99"/>
+          <p:cNvPr id="104" name="Rectangle 103"/>
           <p:cNvSpPr/>
           <p:nvPr/>
         </p:nvSpPr>
@@ -7792,7 +8063,7 @@
       </p:sp>
       <p:sp>
         <p:nvSpPr>
-          <p:cNvPr id="101" name="Rectangle 100"/>
+          <p:cNvPr id="105" name="Rectangle 104"/>
           <p:cNvSpPr/>
           <p:nvPr/>
         </p:nvSpPr>
@@ -7836,7 +8107,7 @@
       </p:sp>
       <p:sp>
         <p:nvSpPr>
-          <p:cNvPr id="102" name="Rectangle 101"/>
+          <p:cNvPr id="106" name="Rectangle 105"/>
           <p:cNvSpPr/>
           <p:nvPr/>
         </p:nvSpPr>
@@ -7880,7 +8151,7 @@
       </p:sp>
       <p:sp>
         <p:nvSpPr>
-          <p:cNvPr id="103" name="Rectangle 102"/>
+          <p:cNvPr id="107" name="Rectangle 106"/>
           <p:cNvSpPr/>
           <p:nvPr/>
         </p:nvSpPr>
@@ -7924,7 +8195,7 @@
       </p:sp>
       <p:sp>
         <p:nvSpPr>
-          <p:cNvPr id="104" name="Rectangle 103"/>
+          <p:cNvPr id="108" name="Rectangle 107"/>
           <p:cNvSpPr/>
           <p:nvPr/>
         </p:nvSpPr>
@@ -7968,7 +8239,7 @@
       </p:sp>
       <p:sp>
         <p:nvSpPr>
-          <p:cNvPr id="105" name="Rectangle 104"/>
+          <p:cNvPr id="109" name="Rectangle 108"/>
           <p:cNvSpPr/>
           <p:nvPr/>
         </p:nvSpPr>
@@ -8012,7 +8283,7 @@
       </p:sp>
       <p:sp>
         <p:nvSpPr>
-          <p:cNvPr id="106" name="Rectangle 105"/>
+          <p:cNvPr id="110" name="Rectangle 109"/>
           <p:cNvSpPr/>
           <p:nvPr/>
         </p:nvSpPr>
@@ -8056,7 +8327,7 @@
       </p:sp>
       <p:sp>
         <p:nvSpPr>
-          <p:cNvPr id="107" name="Rectangle 106"/>
+          <p:cNvPr id="111" name="Rectangle 110"/>
           <p:cNvSpPr/>
           <p:nvPr/>
         </p:nvSpPr>
@@ -8100,7 +8371,7 @@
       </p:sp>
       <p:sp>
         <p:nvSpPr>
-          <p:cNvPr id="108" name="Rectangle 107"/>
+          <p:cNvPr id="112" name="Rectangle 111"/>
           <p:cNvSpPr/>
           <p:nvPr/>
         </p:nvSpPr>
@@ -8144,7 +8415,7 @@
       </p:sp>
       <p:sp>
         <p:nvSpPr>
-          <p:cNvPr id="109" name="Rectangle 108"/>
+          <p:cNvPr id="113" name="Rectangle 112"/>
           <p:cNvSpPr/>
           <p:nvPr/>
         </p:nvSpPr>
@@ -8188,7 +8459,7 @@
       </p:sp>
       <p:sp>
         <p:nvSpPr>
-          <p:cNvPr id="110" name="Rectangle 109"/>
+          <p:cNvPr id="114" name="Rectangle 113"/>
           <p:cNvSpPr/>
           <p:nvPr/>
         </p:nvSpPr>
@@ -8232,7 +8503,7 @@
       </p:sp>
       <p:sp>
         <p:nvSpPr>
-          <p:cNvPr id="111" name="Rectangle 110"/>
+          <p:cNvPr id="115" name="Rectangle 114"/>
           <p:cNvSpPr/>
           <p:nvPr/>
         </p:nvSpPr>
@@ -8276,7 +8547,7 @@
       </p:sp>
       <p:sp>
         <p:nvSpPr>
-          <p:cNvPr id="112" name="Rectangle 111"/>
+          <p:cNvPr id="116" name="Rectangle 115"/>
           <p:cNvSpPr/>
           <p:nvPr/>
         </p:nvSpPr>
@@ -8320,7 +8591,7 @@
       </p:sp>
       <p:sp>
         <p:nvSpPr>
-          <p:cNvPr id="113" name="Rectangle 112"/>
+          <p:cNvPr id="117" name="Rectangle 116"/>
           <p:cNvSpPr/>
           <p:nvPr/>
         </p:nvSpPr>
@@ -8364,7 +8635,7 @@
       </p:sp>
       <p:sp>
         <p:nvSpPr>
-          <p:cNvPr id="114" name="Rectangle 113"/>
+          <p:cNvPr id="118" name="Rectangle 117"/>
           <p:cNvSpPr/>
           <p:nvPr/>
         </p:nvSpPr>
@@ -8408,7 +8679,7 @@
       </p:sp>
       <p:sp>
         <p:nvSpPr>
-          <p:cNvPr id="115" name="Rectangle 114"/>
+          <p:cNvPr id="119" name="Rectangle 118"/>
           <p:cNvSpPr/>
           <p:nvPr/>
         </p:nvSpPr>
@@ -8452,7 +8723,7 @@
       </p:sp>
       <p:sp>
         <p:nvSpPr>
-          <p:cNvPr id="116" name="Rectangle 115"/>
+          <p:cNvPr id="120" name="Rectangle 119"/>
           <p:cNvSpPr/>
           <p:nvPr/>
         </p:nvSpPr>
@@ -8496,7 +8767,7 @@
       </p:sp>
       <p:sp>
         <p:nvSpPr>
-          <p:cNvPr id="117" name="Rectangle 116"/>
+          <p:cNvPr id="121" name="Rectangle 120"/>
           <p:cNvSpPr/>
           <p:nvPr/>
         </p:nvSpPr>
@@ -8540,7 +8811,7 @@
       </p:sp>
       <p:sp>
         <p:nvSpPr>
-          <p:cNvPr id="118" name="Rectangle 117"/>
+          <p:cNvPr id="122" name="Rectangle 121"/>
           <p:cNvSpPr/>
           <p:nvPr/>
         </p:nvSpPr>
@@ -8584,7 +8855,7 @@
       </p:sp>
       <p:sp>
         <p:nvSpPr>
-          <p:cNvPr id="119" name="Rectangle 118"/>
+          <p:cNvPr id="123" name="Rectangle 122"/>
           <p:cNvSpPr/>
           <p:nvPr/>
         </p:nvSpPr>
@@ -8628,7 +8899,7 @@
       </p:sp>
       <p:sp>
         <p:nvSpPr>
-          <p:cNvPr id="120" name="Rectangle 119"/>
+          <p:cNvPr id="124" name="Rectangle 123"/>
           <p:cNvSpPr/>
           <p:nvPr/>
         </p:nvSpPr>
@@ -8672,7 +8943,7 @@
       </p:sp>
       <p:sp>
         <p:nvSpPr>
-          <p:cNvPr id="121" name="Rectangle 120"/>
+          <p:cNvPr id="125" name="Rectangle 124"/>
           <p:cNvSpPr/>
           <p:nvPr/>
         </p:nvSpPr>
@@ -8716,7 +8987,7 @@
       </p:sp>
       <p:sp>
         <p:nvSpPr>
-          <p:cNvPr id="122" name="Rectangle 121"/>
+          <p:cNvPr id="126" name="Rectangle 125"/>
           <p:cNvSpPr/>
           <p:nvPr/>
         </p:nvSpPr>
@@ -8760,7 +9031,7 @@
       </p:sp>
       <p:sp>
         <p:nvSpPr>
-          <p:cNvPr id="123" name="Rectangle 122"/>
+          <p:cNvPr id="127" name="Rectangle 126"/>
           <p:cNvSpPr/>
           <p:nvPr/>
         </p:nvSpPr>
@@ -8804,7 +9075,7 @@
       </p:sp>
       <p:sp>
         <p:nvSpPr>
-          <p:cNvPr id="124" name="Rectangle 123"/>
+          <p:cNvPr id="128" name="Rectangle 127"/>
           <p:cNvSpPr/>
           <p:nvPr/>
         </p:nvSpPr>
@@ -8848,7 +9119,7 @@
       </p:sp>
       <p:sp>
         <p:nvSpPr>
-          <p:cNvPr id="125" name="TextBox 124"/>
+          <p:cNvPr id="129" name="TextBox 128"/>
           <p:cNvSpPr txBox="1"/>
           <p:nvPr/>
         </p:nvSpPr>
@@ -8918,7 +9189,7 @@
       </p:sp>
       <p:sp>
         <p:nvSpPr>
-          <p:cNvPr id="126" name="TextBox 125"/>
+          <p:cNvPr id="130" name="TextBox 129"/>
           <p:cNvSpPr txBox="1"/>
           <p:nvPr/>
         </p:nvSpPr>
@@ -8958,7 +9229,7 @@
       </p:sp>
       <p:sp>
         <p:nvSpPr>
-          <p:cNvPr id="127" name="Rectangle 126"/>
+          <p:cNvPr id="131" name="Rectangle 130"/>
           <p:cNvSpPr/>
           <p:nvPr/>
         </p:nvSpPr>
@@ -9002,7 +9273,7 @@
       </p:sp>
       <p:sp>
         <p:nvSpPr>
-          <p:cNvPr id="128" name="TextBox 127"/>
+          <p:cNvPr id="132" name="TextBox 131"/>
           <p:cNvSpPr txBox="1"/>
           <p:nvPr/>
         </p:nvSpPr>
@@ -9042,7 +9313,7 @@
       </p:sp>
       <p:sp>
         <p:nvSpPr>
-          <p:cNvPr id="129" name="TextBox 128"/>
+          <p:cNvPr id="133" name="TextBox 132"/>
           <p:cNvSpPr txBox="1"/>
           <p:nvPr/>
         </p:nvSpPr>
@@ -9082,7 +9353,7 @@
       </p:sp>
       <p:sp>
         <p:nvSpPr>
-          <p:cNvPr id="130" name="Rectangle 129"/>
+          <p:cNvPr id="134" name="Rectangle 133"/>
           <p:cNvSpPr/>
           <p:nvPr/>
         </p:nvSpPr>
@@ -9126,7 +9397,7 @@
       </p:sp>
       <p:sp>
         <p:nvSpPr>
-          <p:cNvPr id="131" name="TextBox 130"/>
+          <p:cNvPr id="135" name="TextBox 134"/>
           <p:cNvSpPr txBox="1"/>
           <p:nvPr/>
         </p:nvSpPr>
@@ -9166,7 +9437,7 @@
       </p:sp>
       <p:sp>
         <p:nvSpPr>
-          <p:cNvPr id="132" name="TextBox 131"/>
+          <p:cNvPr id="136" name="TextBox 135"/>
           <p:cNvSpPr txBox="1"/>
           <p:nvPr/>
         </p:nvSpPr>
@@ -9216,7 +9487,7 @@
       </p:sp>
       <p:sp>
         <p:nvSpPr>
-          <p:cNvPr id="133" name="TextBox 132"/>
+          <p:cNvPr id="137" name="TextBox 136"/>
           <p:cNvSpPr txBox="1"/>
           <p:nvPr/>
         </p:nvSpPr>
@@ -9286,7 +9557,7 @@
       </p:sp>
       <p:sp>
         <p:nvSpPr>
-          <p:cNvPr id="134" name="Rounded Rectangle 133"/>
+          <p:cNvPr id="138" name="Rounded Rectangle 137"/>
           <p:cNvSpPr/>
           <p:nvPr/>
         </p:nvSpPr>
@@ -9332,7 +9603,7 @@
       </p:sp>
       <p:sp>
         <p:nvSpPr>
-          <p:cNvPr id="135" name="TextBox 134"/>
+          <p:cNvPr id="139" name="TextBox 138"/>
           <p:cNvSpPr txBox="1"/>
           <p:nvPr/>
         </p:nvSpPr>
@@ -9372,7 +9643,7 @@
       </p:sp>
       <p:sp>
         <p:nvSpPr>
-          <p:cNvPr id="136" name="TextBox 135"/>
+          <p:cNvPr id="140" name="TextBox 139"/>
           <p:cNvSpPr txBox="1"/>
           <p:nvPr/>
         </p:nvSpPr>
@@ -9412,7 +9683,7 @@
       </p:sp>
       <p:sp>
         <p:nvSpPr>
-          <p:cNvPr id="137" name="Rectangle 136"/>
+          <p:cNvPr id="141" name="Rectangle 140"/>
           <p:cNvSpPr/>
           <p:nvPr/>
         </p:nvSpPr>
@@ -9456,7 +9727,7 @@
       </p:sp>
       <p:sp>
         <p:nvSpPr>
-          <p:cNvPr id="138" name="Rectangle 137"/>
+          <p:cNvPr id="142" name="Rectangle 141"/>
           <p:cNvSpPr/>
           <p:nvPr/>
         </p:nvSpPr>
@@ -9500,7 +9771,7 @@
       </p:sp>
       <p:sp>
         <p:nvSpPr>
-          <p:cNvPr id="139" name="TextBox 138"/>
+          <p:cNvPr id="143" name="TextBox 142"/>
           <p:cNvSpPr txBox="1"/>
           <p:nvPr/>
         </p:nvSpPr>
@@ -9540,7 +9811,7 @@
       </p:sp>
       <p:sp>
         <p:nvSpPr>
-          <p:cNvPr id="140" name="Rounded Rectangle 139"/>
+          <p:cNvPr id="144" name="Rounded Rectangle 143"/>
           <p:cNvSpPr/>
           <p:nvPr/>
         </p:nvSpPr>
@@ -9586,7 +9857,7 @@
       </p:sp>
       <p:sp>
         <p:nvSpPr>
-          <p:cNvPr id="141" name="Rounded Rectangle 140"/>
+          <p:cNvPr id="145" name="Rounded Rectangle 144"/>
           <p:cNvSpPr/>
           <p:nvPr/>
         </p:nvSpPr>
@@ -9632,7 +9903,7 @@
       </p:sp>
       <p:sp>
         <p:nvSpPr>
-          <p:cNvPr id="142" name="Rounded Rectangle 141"/>
+          <p:cNvPr id="146" name="Rounded Rectangle 145"/>
           <p:cNvSpPr/>
           <p:nvPr/>
         </p:nvSpPr>
@@ -9681,7 +9952,7 @@
       </p:sp>
       <p:sp>
         <p:nvSpPr>
-          <p:cNvPr id="143" name="TextBox 142"/>
+          <p:cNvPr id="147" name="TextBox 146"/>
           <p:cNvSpPr txBox="1"/>
           <p:nvPr/>
         </p:nvSpPr>
@@ -9721,7 +9992,7 @@
       </p:sp>
       <p:sp>
         <p:nvSpPr>
-          <p:cNvPr id="144" name="Rounded Rectangle 143"/>
+          <p:cNvPr id="148" name="Rounded Rectangle 147"/>
           <p:cNvSpPr/>
           <p:nvPr/>
         </p:nvSpPr>
@@ -9767,7 +10038,7 @@
       </p:sp>
       <p:sp>
         <p:nvSpPr>
-          <p:cNvPr id="145" name="Rounded Rectangle 144"/>
+          <p:cNvPr id="149" name="Rounded Rectangle 148"/>
           <p:cNvSpPr/>
           <p:nvPr/>
         </p:nvSpPr>
@@ -9813,7 +10084,7 @@
       </p:sp>
       <p:sp>
         <p:nvSpPr>
-          <p:cNvPr id="146" name="TextBox 145"/>
+          <p:cNvPr id="150" name="TextBox 149"/>
           <p:cNvSpPr txBox="1"/>
           <p:nvPr/>
         </p:nvSpPr>
@@ -9853,7 +10124,7 @@
       </p:sp>
       <p:sp>
         <p:nvSpPr>
-          <p:cNvPr id="147" name="TextBox 146"/>
+          <p:cNvPr id="151" name="TextBox 150"/>
           <p:cNvSpPr txBox="1"/>
           <p:nvPr/>
         </p:nvSpPr>
@@ -9893,7 +10164,7 @@
       </p:sp>
       <p:sp>
         <p:nvSpPr>
-          <p:cNvPr id="148" name="Rectangle 147"/>
+          <p:cNvPr id="152" name="Rectangle 151"/>
           <p:cNvSpPr/>
           <p:nvPr/>
         </p:nvSpPr>
@@ -9937,7 +10208,7 @@
       </p:sp>
       <p:sp>
         <p:nvSpPr>
-          <p:cNvPr id="149" name="TextBox 148"/>
+          <p:cNvPr id="153" name="TextBox 152"/>
           <p:cNvSpPr txBox="1"/>
           <p:nvPr/>
         </p:nvSpPr>
@@ -9977,7 +10248,7 @@
       </p:sp>
       <p:sp>
         <p:nvSpPr>
-          <p:cNvPr id="150" name="Rounded Rectangle 149"/>
+          <p:cNvPr id="154" name="Rounded Rectangle 153"/>
           <p:cNvSpPr/>
           <p:nvPr/>
         </p:nvSpPr>
@@ -10023,7 +10294,7 @@
       </p:sp>
       <p:sp>
         <p:nvSpPr>
-          <p:cNvPr id="151" name="Rounded Rectangle 150"/>
+          <p:cNvPr id="155" name="Rounded Rectangle 154"/>
           <p:cNvSpPr/>
           <p:nvPr/>
         </p:nvSpPr>
@@ -10072,7 +10343,7 @@
       </p:sp>
       <p:sp>
         <p:nvSpPr>
-          <p:cNvPr id="152" name="TextBox 151"/>
+          <p:cNvPr id="156" name="TextBox 155"/>
           <p:cNvSpPr txBox="1"/>
           <p:nvPr/>
         </p:nvSpPr>
@@ -10112,7 +10383,7 @@
       </p:sp>
       <p:sp>
         <p:nvSpPr>
-          <p:cNvPr id="153" name="Rounded Rectangle 152"/>
+          <p:cNvPr id="157" name="Rounded Rectangle 156"/>
           <p:cNvSpPr/>
           <p:nvPr/>
         </p:nvSpPr>
@@ -10158,7 +10429,7 @@
       </p:sp>
       <p:sp>
         <p:nvSpPr>
-          <p:cNvPr id="154" name="TextBox 153"/>
+          <p:cNvPr id="158" name="TextBox 157"/>
           <p:cNvSpPr txBox="1"/>
           <p:nvPr/>
         </p:nvSpPr>
@@ -10198,7 +10469,7 @@
       </p:sp>
       <p:sp>
         <p:nvSpPr>
-          <p:cNvPr id="155" name="Rounded Rectangle 154"/>
+          <p:cNvPr id="159" name="Rounded Rectangle 158"/>
           <p:cNvSpPr/>
           <p:nvPr/>
         </p:nvSpPr>
@@ -10244,7 +10515,7 @@
       </p:sp>
       <p:sp>
         <p:nvSpPr>
-          <p:cNvPr id="156" name="Rounded Rectangle 155"/>
+          <p:cNvPr id="160" name="Rounded Rectangle 159"/>
           <p:cNvSpPr/>
           <p:nvPr/>
         </p:nvSpPr>
@@ -10290,7 +10561,7 @@
       </p:sp>
       <p:sp>
         <p:nvSpPr>
-          <p:cNvPr id="157" name="TextBox 156"/>
+          <p:cNvPr id="161" name="TextBox 160"/>
           <p:cNvSpPr txBox="1"/>
           <p:nvPr/>
         </p:nvSpPr>
@@ -10330,7 +10601,7 @@
       </p:sp>
       <p:sp>
         <p:nvSpPr>
-          <p:cNvPr id="158" name="TextBox 157"/>
+          <p:cNvPr id="162" name="TextBox 161"/>
           <p:cNvSpPr txBox="1"/>
           <p:nvPr/>
         </p:nvSpPr>
@@ -10370,7 +10641,7 @@
       </p:sp>
       <p:sp>
         <p:nvSpPr>
-          <p:cNvPr id="159" name="Rectangle 158"/>
+          <p:cNvPr id="163" name="Rectangle 162"/>
           <p:cNvSpPr/>
           <p:nvPr/>
         </p:nvSpPr>
@@ -10414,7 +10685,7 @@
       </p:sp>
       <p:sp>
         <p:nvSpPr>
-          <p:cNvPr id="160" name="TextBox 159"/>
+          <p:cNvPr id="164" name="TextBox 163"/>
           <p:cNvSpPr txBox="1"/>
           <p:nvPr/>
         </p:nvSpPr>
@@ -10454,7 +10725,7 @@
       </p:sp>
       <p:sp>
         <p:nvSpPr>
-          <p:cNvPr id="161" name="Rounded Rectangle 160"/>
+          <p:cNvPr id="165" name="Rounded Rectangle 164"/>
           <p:cNvSpPr/>
           <p:nvPr/>
         </p:nvSpPr>
@@ -10500,7 +10771,7 @@
       </p:sp>
       <p:sp>
         <p:nvSpPr>
-          <p:cNvPr id="162" name="TextBox 161"/>
+          <p:cNvPr id="166" name="TextBox 165"/>
           <p:cNvSpPr txBox="1"/>
           <p:nvPr/>
         </p:nvSpPr>
@@ -10540,7 +10811,7 @@
       </p:sp>
       <p:sp>
         <p:nvSpPr>
-          <p:cNvPr id="163" name="Rounded Rectangle 162"/>
+          <p:cNvPr id="167" name="Rounded Rectangle 166"/>
           <p:cNvSpPr/>
           <p:nvPr/>
         </p:nvSpPr>
@@ -10586,7 +10857,7 @@
       </p:sp>
       <p:sp>
         <p:nvSpPr>
-          <p:cNvPr id="164" name="TextBox 163"/>
+          <p:cNvPr id="168" name="TextBox 167"/>
           <p:cNvSpPr txBox="1"/>
           <p:nvPr/>
         </p:nvSpPr>
@@ -10626,7 +10897,7 @@
       </p:sp>
       <p:sp>
         <p:nvSpPr>
-          <p:cNvPr id="165" name="Rounded Rectangle 164"/>
+          <p:cNvPr id="169" name="Rounded Rectangle 168"/>
           <p:cNvSpPr/>
           <p:nvPr/>
         </p:nvSpPr>
@@ -10672,7 +10943,7 @@
       </p:sp>
       <p:sp>
         <p:nvSpPr>
-          <p:cNvPr id="166" name="TextBox 165"/>
+          <p:cNvPr id="170" name="TextBox 169"/>
           <p:cNvSpPr txBox="1"/>
           <p:nvPr/>
         </p:nvSpPr>
@@ -10712,7 +10983,7 @@
       </p:sp>
       <p:sp>
         <p:nvSpPr>
-          <p:cNvPr id="167" name="Rounded Rectangle 166"/>
+          <p:cNvPr id="171" name="Rounded Rectangle 170"/>
           <p:cNvSpPr/>
           <p:nvPr/>
         </p:nvSpPr>
@@ -10761,7 +11032,7 @@
       </p:sp>
       <p:sp>
         <p:nvSpPr>
-          <p:cNvPr id="168" name="TextBox 167"/>
+          <p:cNvPr id="172" name="TextBox 171"/>
           <p:cNvSpPr txBox="1"/>
           <p:nvPr/>
         </p:nvSpPr>
@@ -10801,7 +11072,7 @@
       </p:sp>
       <p:sp>
         <p:nvSpPr>
-          <p:cNvPr id="169" name="Rounded Rectangle 168"/>
+          <p:cNvPr id="173" name="Rounded Rectangle 172"/>
           <p:cNvSpPr/>
           <p:nvPr/>
         </p:nvSpPr>
@@ -10847,7 +11118,7 @@
       </p:sp>
       <p:sp>
         <p:nvSpPr>
-          <p:cNvPr id="170" name="TextBox 169"/>
+          <p:cNvPr id="174" name="TextBox 173"/>
           <p:cNvSpPr txBox="1"/>
           <p:nvPr/>
         </p:nvSpPr>
@@ -10887,7 +11158,7 @@
       </p:sp>
       <p:sp>
         <p:nvSpPr>
-          <p:cNvPr id="171" name="TextBox 170"/>
+          <p:cNvPr id="175" name="TextBox 174"/>
           <p:cNvSpPr txBox="1"/>
           <p:nvPr/>
         </p:nvSpPr>
@@ -10927,7 +11198,7 @@
       </p:sp>
       <p:sp>
         <p:nvSpPr>
-          <p:cNvPr id="172" name="Rectangle 171"/>
+          <p:cNvPr id="176" name="Rectangle 175"/>
           <p:cNvSpPr/>
           <p:nvPr/>
         </p:nvSpPr>
@@ -10971,7 +11242,7 @@
       </p:sp>
       <p:sp>
         <p:nvSpPr>
-          <p:cNvPr id="173" name="Rectangle 172"/>
+          <p:cNvPr id="177" name="Rectangle 176"/>
           <p:cNvSpPr/>
           <p:nvPr/>
         </p:nvSpPr>
@@ -11015,7 +11286,7 @@
       </p:sp>
       <p:sp>
         <p:nvSpPr>
-          <p:cNvPr id="174" name="TextBox 173"/>
+          <p:cNvPr id="178" name="TextBox 177"/>
           <p:cNvSpPr txBox="1"/>
           <p:nvPr/>
         </p:nvSpPr>
@@ -11055,7 +11326,7 @@
       </p:sp>
       <p:sp>
         <p:nvSpPr>
-          <p:cNvPr id="175" name="Rounded Rectangle 174"/>
+          <p:cNvPr id="179" name="Rounded Rectangle 178"/>
           <p:cNvSpPr/>
           <p:nvPr/>
         </p:nvSpPr>
@@ -11101,7 +11372,7 @@
       </p:sp>
       <p:sp>
         <p:nvSpPr>
-          <p:cNvPr id="176" name="TextBox 175"/>
+          <p:cNvPr id="180" name="TextBox 179"/>
           <p:cNvSpPr txBox="1"/>
           <p:nvPr/>
         </p:nvSpPr>
@@ -11141,7 +11412,7 @@
       </p:sp>
       <p:sp>
         <p:nvSpPr>
-          <p:cNvPr id="177" name="Rounded Rectangle 176"/>
+          <p:cNvPr id="181" name="Rounded Rectangle 180"/>
           <p:cNvSpPr/>
           <p:nvPr/>
         </p:nvSpPr>
@@ -11187,7 +11458,7 @@
       </p:sp>
       <p:sp>
         <p:nvSpPr>
-          <p:cNvPr id="178" name="TextBox 177"/>
+          <p:cNvPr id="182" name="TextBox 181"/>
           <p:cNvSpPr txBox="1"/>
           <p:nvPr/>
         </p:nvSpPr>
@@ -11227,7 +11498,7 @@
       </p:sp>
       <p:sp>
         <p:nvSpPr>
-          <p:cNvPr id="179" name="Rounded Rectangle 178"/>
+          <p:cNvPr id="183" name="Rounded Rectangle 182"/>
           <p:cNvSpPr/>
           <p:nvPr/>
         </p:nvSpPr>
@@ -11276,7 +11547,7 @@
       </p:sp>
       <p:sp>
         <p:nvSpPr>
-          <p:cNvPr id="180" name="TextBox 179"/>
+          <p:cNvPr id="184" name="TextBox 183"/>
           <p:cNvSpPr txBox="1"/>
           <p:nvPr/>
         </p:nvSpPr>
@@ -11316,7 +11587,7 @@
       </p:sp>
       <p:sp>
         <p:nvSpPr>
-          <p:cNvPr id="181" name="Rounded Rectangle 180"/>
+          <p:cNvPr id="185" name="Rounded Rectangle 184"/>
           <p:cNvSpPr/>
           <p:nvPr/>
         </p:nvSpPr>
@@ -11362,7 +11633,7 @@
       </p:sp>
       <p:sp>
         <p:nvSpPr>
-          <p:cNvPr id="182" name="TextBox 181"/>
+          <p:cNvPr id="186" name="TextBox 185"/>
           <p:cNvSpPr txBox="1"/>
           <p:nvPr/>
         </p:nvSpPr>
@@ -11402,7 +11673,7 @@
       </p:sp>
       <p:sp>
         <p:nvSpPr>
-          <p:cNvPr id="183" name="Rectangle 182"/>
+          <p:cNvPr id="187" name="Rectangle 186"/>
           <p:cNvSpPr/>
           <p:nvPr/>
         </p:nvSpPr>
@@ -11446,7 +11717,7 @@
       </p:sp>
       <p:sp>
         <p:nvSpPr>
-          <p:cNvPr id="184" name="TextBox 183"/>
+          <p:cNvPr id="188" name="TextBox 187"/>
           <p:cNvSpPr txBox="1"/>
           <p:nvPr/>
         </p:nvSpPr>
@@ -11486,7 +11757,7 @@
       </p:sp>
       <p:sp>
         <p:nvSpPr>
-          <p:cNvPr id="185" name="TextBox 184"/>
+          <p:cNvPr id="189" name="TextBox 188"/>
           <p:cNvSpPr txBox="1"/>
           <p:nvPr/>
         </p:nvSpPr>
@@ -11526,7 +11797,7 @@
       </p:sp>
       <p:sp>
         <p:nvSpPr>
-          <p:cNvPr id="186" name="TextBox 185"/>
+          <p:cNvPr id="190" name="TextBox 189"/>
           <p:cNvSpPr txBox="1"/>
           <p:nvPr/>
         </p:nvSpPr>
@@ -11559,14 +11830,14 @@
                 <a:latin typeface="Arial"/>
                 <a:ea typeface="Arial"/>
               </a:rPr>
-              <a:t>출처: HBM 과제팀 집계 · 공유 SSD p99 FlashBlox(FAST'17) · GPU당 대역 NVIDIA SuperPOD 가이드(환산) · KV 실측 StorageReview(2026-08) · AI 전용 Kioxia · DapuStor · 에이전트 Google Agent Substrate · Muse 관측(제3자) · 제품군 사양 Kioxia FL6 · LC9, Solidigm PS1010 · PS1030</a:t>
-            </a:r>
-          </a:p>
-        </p:txBody>
-      </p:sp>
-      <p:sp>
-        <p:nvSpPr>
-          <p:cNvPr id="187" name="TextBox 186"/>
+              <a:t>출처: 2030 수요 McKinsey(2024-12, 범용은 산술, 상세 5장) · HBM 과제팀 집계 · 공유 SSD p99 FlashBlox(FAST'17) · GPU당 대역 NVIDIA SuperPOD(환산) · KV 실측 StorageReview(2026-08) · AI 전용 Kioxia · DapuStor · 에이전트 Google · Muse 관측(제3자) · 제품군 Kioxia FL6 · LC9, Solidigm PS1010 · PS1030</a:t>
+            </a:r>
+          </a:p>
+        </p:txBody>
+      </p:sp>
+      <p:sp>
+        <p:nvSpPr>
+          <p:cNvPr id="191" name="TextBox 190"/>
           <p:cNvSpPr txBox="1"/>
           <p:nvPr/>
         </p:nvSpPr>
@@ -11599,7 +11870,7 @@
                 <a:latin typeface="Arial"/>
                 <a:ea typeface="Arial"/>
               </a:rPr>
-              <a:t>1 / 4</a:t>
+              <a:t>1 / 5</a:t>
             </a:r>
           </a:p>
         </p:txBody>
@@ -11667,7 +11938,7 @@
                 <a:latin typeface="Arial"/>
                 <a:ea typeface="Arial"/>
               </a:rPr>
-              <a:t>   2 / 4  핵심 기술</a:t>
+              <a:t>   2 / 5  핵심 기술</a:t>
             </a:r>
           </a:p>
         </p:txBody>
@@ -14925,7 +15196,7 @@
                 <a:latin typeface="Arial"/>
                 <a:ea typeface="Arial"/>
               </a:rPr>
-              <a:t>2 / 4</a:t>
+              <a:t>2 / 5</a:t>
             </a:r>
           </a:p>
         </p:txBody>
@@ -14993,7 +15264,7 @@
                 <a:latin typeface="Arial"/>
                 <a:ea typeface="Arial"/>
               </a:rPr>
-              <a:t>   3 / 4  당위성</a:t>
+              <a:t>   3 / 5  당위성</a:t>
             </a:r>
           </a:p>
         </p:txBody>
@@ -21130,7 +21401,7 @@
                 <a:latin typeface="Arial"/>
                 <a:ea typeface="Arial"/>
               </a:rPr>
-              <a:t>3 / 4</a:t>
+              <a:t>3 / 5</a:t>
             </a:r>
           </a:p>
         </p:txBody>
@@ -21198,7 +21469,7 @@
                 <a:latin typeface="Arial"/>
                 <a:ea typeface="Arial"/>
               </a:rPr>
-              <a:t>   4 / 4  실행 전략</a:t>
+              <a:t>   4 / 5  실행 전략</a:t>
             </a:r>
           </a:p>
         </p:txBody>
@@ -27755,7 +28026,3571 @@
                 <a:latin typeface="Arial"/>
                 <a:ea typeface="Arial"/>
               </a:rPr>
-              <a:t>4 / 4</a:t>
+              <a:t>4 / 5</a:t>
+            </a:r>
+          </a:p>
+        </p:txBody>
+      </p:sp>
+    </p:spTree>
+  </p:cSld>
+  <p:clrMapOvr>
+    <a:masterClrMapping/>
+  </p:clrMapOvr>
+</p:sld>
+</file>
+
+<file path=ppt/slides/slide5.xml><?xml version="1.0" encoding="utf-8"?>
+<p:sld xmlns:a="http://schemas.openxmlformats.org/drawingml/2006/main" xmlns:p="http://schemas.openxmlformats.org/presentationml/2006/main" xmlns:r="http://schemas.openxmlformats.org/officeDocument/2006/relationships">
+  <p:cSld>
+    <p:spTree>
+      <p:nvGrpSpPr>
+        <p:cNvPr id="1" name=""/>
+        <p:cNvGrpSpPr/>
+        <p:nvPr/>
+      </p:nvGrpSpPr>
+      <p:grpSpPr/>
+      <p:sp>
+        <p:nvSpPr>
+          <p:cNvPr id="2" name="TextBox 1"/>
+          <p:cNvSpPr txBox="1"/>
+          <p:nvPr/>
+        </p:nvSpPr>
+        <p:spPr>
+          <a:xfrm>
+            <a:off x="722376" y="365760"/>
+            <a:ext cx="10972800" cy="329184"/>
+          </a:xfrm>
+          <a:prstGeom prst="rect">
+            <a:avLst/>
+          </a:prstGeom>
+          <a:noFill/>
+        </p:spPr>
+        <p:txBody>
+          <a:bodyPr wrap="square" anchor="t" lIns="0" rIns="0" tIns="0" bIns="0">
+            <a:spAutoFit/>
+          </a:bodyPr>
+          <a:lstStyle/>
+          <a:p>
+            <a:pPr algn="l">
+              <a:lnSpc>
+                <a:spcPct val="110000"/>
+              </a:lnSpc>
+            </a:pPr>
+            <a:r>
+              <a:rPr sz="1800" b="1">
+                <a:solidFill>
+                  <a:srgbClr val="1428A0"/>
+                </a:solidFill>
+                <a:latin typeface="Arial"/>
+                <a:ea typeface="Arial"/>
+              </a:rPr>
+              <a:t>불확실성이 높은 미래에 대응하기 위한 고객 협력 전략</a:t>
+            </a:r>
+            <a:r>
+              <a:rPr sz="1800" b="0">
+                <a:solidFill>
+                  <a:srgbClr val="555555"/>
+                </a:solidFill>
+                <a:latin typeface="Arial"/>
+                <a:ea typeface="Arial"/>
+              </a:rPr>
+              <a:t>   5 / 5  참고</a:t>
+            </a:r>
+          </a:p>
+        </p:txBody>
+      </p:sp>
+      <p:sp>
+        <p:nvSpPr>
+          <p:cNvPr id="3" name="TextBox 2"/>
+          <p:cNvSpPr txBox="1"/>
+          <p:nvPr/>
+        </p:nvSpPr>
+        <p:spPr>
+          <a:xfrm>
+            <a:off x="12079224" y="365760"/>
+            <a:ext cx="5486400" cy="329184"/>
+          </a:xfrm>
+          <a:prstGeom prst="rect">
+            <a:avLst/>
+          </a:prstGeom>
+          <a:noFill/>
+        </p:spPr>
+        <p:txBody>
+          <a:bodyPr wrap="square" anchor="t" lIns="0" rIns="0" tIns="0" bIns="0">
+            <a:spAutoFit/>
+          </a:bodyPr>
+          <a:lstStyle/>
+          <a:p>
+            <a:pPr algn="r">
+              <a:lnSpc>
+                <a:spcPct val="110000"/>
+              </a:lnSpc>
+            </a:pPr>
+            <a:r>
+              <a:rPr sz="1800" b="0">
+                <a:solidFill>
+                  <a:srgbClr val="555555"/>
+                </a:solidFill>
+                <a:latin typeface="Arial"/>
+                <a:ea typeface="Arial"/>
+              </a:rPr>
+              <a:t>[문서등급 표기]</a:t>
+            </a:r>
+          </a:p>
+        </p:txBody>
+      </p:sp>
+      <p:sp>
+        <p:nvSpPr>
+          <p:cNvPr id="4" name="TextBox 3"/>
+          <p:cNvSpPr txBox="1"/>
+          <p:nvPr/>
+        </p:nvSpPr>
+        <p:spPr>
+          <a:xfrm>
+            <a:off x="722376" y="786384"/>
+            <a:ext cx="16843248" cy="1024128"/>
+          </a:xfrm>
+          <a:prstGeom prst="rect">
+            <a:avLst/>
+          </a:prstGeom>
+          <a:noFill/>
+        </p:spPr>
+        <p:txBody>
+          <a:bodyPr wrap="square" anchor="ctr" lIns="0" rIns="0" tIns="0" bIns="0">
+            <a:spAutoFit/>
+          </a:bodyPr>
+          <a:lstStyle/>
+          <a:p>
+            <a:pPr algn="l">
+              <a:lnSpc>
+                <a:spcPct val="105000"/>
+              </a:lnSpc>
+            </a:pPr>
+            <a:r>
+              <a:rPr sz="3200" b="1">
+                <a:solidFill>
+                  <a:srgbClr val="1A1A1A"/>
+                </a:solidFill>
+                <a:latin typeface="Arial"/>
+                <a:ea typeface="Arial"/>
+              </a:rPr>
+              <a:t>eSSD 수요는 2030년까지 약 6배로 늘고,</a:t>
+            </a:r>
+          </a:p>
+          <a:p>
+            <a:pPr algn="l">
+              <a:lnSpc>
+                <a:spcPct val="105000"/>
+              </a:lnSpc>
+            </a:pPr>
+            <a:r>
+              <a:rPr sz="3200" b="1">
+                <a:solidFill>
+                  <a:srgbClr val="1A1A1A"/>
+                </a:solidFill>
+                <a:latin typeface="Arial"/>
+                <a:ea typeface="Arial"/>
+              </a:rPr>
+              <a:t>가장 큰 몫은 AI 추론에서 나옵니다</a:t>
+            </a:r>
+          </a:p>
+        </p:txBody>
+      </p:sp>
+      <p:sp>
+        <p:nvSpPr>
+          <p:cNvPr id="5" name="Rectangle 4"/>
+          <p:cNvSpPr/>
+          <p:nvPr/>
+        </p:nvSpPr>
+        <p:spPr>
+          <a:xfrm>
+            <a:off x="722376" y="1938528"/>
+            <a:ext cx="16843248" cy="18288"/>
+          </a:xfrm>
+          <a:prstGeom prst="rect">
+            <a:avLst/>
+          </a:prstGeom>
+          <a:solidFill>
+            <a:srgbClr val="D9D9D9"/>
+          </a:solidFill>
+          <a:ln>
+            <a:noFill/>
+          </a:ln>
+          <a:effectLst/>
+        </p:spPr>
+        <p:style>
+          <a:lnRef idx="1">
+            <a:schemeClr val="accent1"/>
+          </a:lnRef>
+          <a:fillRef idx="3">
+            <a:schemeClr val="accent1"/>
+          </a:fillRef>
+          <a:effectRef idx="2">
+            <a:schemeClr val="accent1"/>
+          </a:effectRef>
+          <a:fontRef idx="minor">
+            <a:schemeClr val="lt1"/>
+          </a:fontRef>
+        </p:style>
+        <p:txBody>
+          <a:bodyPr rtlCol="0" anchor="ctr"/>
+          <a:lstStyle/>
+          <a:p>
+            <a:pPr algn="ctr"/>
+          </a:p>
+        </p:txBody>
+      </p:sp>
+      <p:sp>
+        <p:nvSpPr>
+          <p:cNvPr id="6" name="TextBox 5"/>
+          <p:cNvSpPr txBox="1"/>
+          <p:nvPr/>
+        </p:nvSpPr>
+        <p:spPr>
+          <a:xfrm>
+            <a:off x="722376" y="2139696"/>
+            <a:ext cx="10424160" cy="329184"/>
+          </a:xfrm>
+          <a:prstGeom prst="rect">
+            <a:avLst/>
+          </a:prstGeom>
+          <a:noFill/>
+        </p:spPr>
+        <p:txBody>
+          <a:bodyPr wrap="square" anchor="ctr" lIns="0" rIns="0" tIns="0" bIns="0">
+            <a:spAutoFit/>
+          </a:bodyPr>
+          <a:lstStyle/>
+          <a:p>
+            <a:pPr algn="l">
+              <a:lnSpc>
+                <a:spcPct val="110000"/>
+              </a:lnSpc>
+            </a:pPr>
+            <a:r>
+              <a:rPr sz="2000" b="1">
+                <a:solidFill>
+                  <a:srgbClr val="1A1A1A"/>
+                </a:solidFill>
+                <a:latin typeface="Arial"/>
+                <a:ea typeface="Arial"/>
+              </a:rPr>
+              <a:t>eSSD 수요 (EB/년)</a:t>
+            </a:r>
+            <a:r>
+              <a:rPr sz="1600" b="0">
+                <a:solidFill>
+                  <a:srgbClr val="555555"/>
+                </a:solidFill>
+                <a:latin typeface="Arial"/>
+                <a:ea typeface="Arial"/>
+              </a:rPr>
+              <a:t>   막대 McKinsey 2024 기준 시나리오, 2025~2029는 보간(산술)</a:t>
+            </a:r>
+          </a:p>
+        </p:txBody>
+      </p:sp>
+      <p:sp>
+        <p:nvSpPr>
+          <p:cNvPr id="7" name="Rectangle 6"/>
+          <p:cNvSpPr/>
+          <p:nvPr/>
+        </p:nvSpPr>
+        <p:spPr>
+          <a:xfrm>
+            <a:off x="1636776" y="7877555"/>
+            <a:ext cx="7516367" cy="9144"/>
+          </a:xfrm>
+          <a:prstGeom prst="rect">
+            <a:avLst/>
+          </a:prstGeom>
+          <a:solidFill>
+            <a:srgbClr val="8A8A8A"/>
+          </a:solidFill>
+          <a:ln>
+            <a:noFill/>
+          </a:ln>
+          <a:effectLst/>
+        </p:spPr>
+        <p:style>
+          <a:lnRef idx="1">
+            <a:schemeClr val="accent1"/>
+          </a:lnRef>
+          <a:fillRef idx="3">
+            <a:schemeClr val="accent1"/>
+          </a:fillRef>
+          <a:effectRef idx="2">
+            <a:schemeClr val="accent1"/>
+          </a:effectRef>
+          <a:fontRef idx="minor">
+            <a:schemeClr val="lt1"/>
+          </a:fontRef>
+        </p:style>
+        <p:txBody>
+          <a:bodyPr rtlCol="0" anchor="ctr"/>
+          <a:lstStyle/>
+          <a:p>
+            <a:pPr algn="ctr"/>
+          </a:p>
+        </p:txBody>
+      </p:sp>
+      <p:sp>
+        <p:nvSpPr>
+          <p:cNvPr id="8" name="TextBox 7"/>
+          <p:cNvSpPr txBox="1"/>
+          <p:nvPr/>
+        </p:nvSpPr>
+        <p:spPr>
+          <a:xfrm>
+            <a:off x="722376" y="7735823"/>
+            <a:ext cx="804672" cy="292608"/>
+          </a:xfrm>
+          <a:prstGeom prst="rect">
+            <a:avLst/>
+          </a:prstGeom>
+          <a:noFill/>
+        </p:spPr>
+        <p:txBody>
+          <a:bodyPr wrap="square" anchor="ctr" lIns="0" rIns="0" tIns="0" bIns="0">
+            <a:spAutoFit/>
+          </a:bodyPr>
+          <a:lstStyle/>
+          <a:p>
+            <a:pPr algn="r">
+              <a:lnSpc>
+                <a:spcPct val="110000"/>
+              </a:lnSpc>
+            </a:pPr>
+            <a:r>
+              <a:rPr sz="1600" b="0">
+                <a:solidFill>
+                  <a:srgbClr val="555555"/>
+                </a:solidFill>
+                <a:latin typeface="Arial"/>
+                <a:ea typeface="Arial"/>
+              </a:rPr>
+              <a:t>0</a:t>
+            </a:r>
+          </a:p>
+        </p:txBody>
+      </p:sp>
+      <p:sp>
+        <p:nvSpPr>
+          <p:cNvPr id="9" name="Rectangle 8"/>
+          <p:cNvSpPr/>
+          <p:nvPr/>
+        </p:nvSpPr>
+        <p:spPr>
+          <a:xfrm>
+            <a:off x="1636776" y="6256019"/>
+            <a:ext cx="7516367" cy="9144"/>
+          </a:xfrm>
+          <a:prstGeom prst="rect">
+            <a:avLst/>
+          </a:prstGeom>
+          <a:solidFill>
+            <a:srgbClr val="D9D9D9"/>
+          </a:solidFill>
+          <a:ln>
+            <a:noFill/>
+          </a:ln>
+          <a:effectLst/>
+        </p:spPr>
+        <p:style>
+          <a:lnRef idx="1">
+            <a:schemeClr val="accent1"/>
+          </a:lnRef>
+          <a:fillRef idx="3">
+            <a:schemeClr val="accent1"/>
+          </a:fillRef>
+          <a:effectRef idx="2">
+            <a:schemeClr val="accent1"/>
+          </a:effectRef>
+          <a:fontRef idx="minor">
+            <a:schemeClr val="lt1"/>
+          </a:fontRef>
+        </p:style>
+        <p:txBody>
+          <a:bodyPr rtlCol="0" anchor="ctr"/>
+          <a:lstStyle/>
+          <a:p>
+            <a:pPr algn="ctr"/>
+          </a:p>
+        </p:txBody>
+      </p:sp>
+      <p:sp>
+        <p:nvSpPr>
+          <p:cNvPr id="10" name="TextBox 9"/>
+          <p:cNvSpPr txBox="1"/>
+          <p:nvPr/>
+        </p:nvSpPr>
+        <p:spPr>
+          <a:xfrm>
+            <a:off x="722376" y="6114287"/>
+            <a:ext cx="804672" cy="292608"/>
+          </a:xfrm>
+          <a:prstGeom prst="rect">
+            <a:avLst/>
+          </a:prstGeom>
+          <a:noFill/>
+        </p:spPr>
+        <p:txBody>
+          <a:bodyPr wrap="square" anchor="ctr" lIns="0" rIns="0" tIns="0" bIns="0">
+            <a:spAutoFit/>
+          </a:bodyPr>
+          <a:lstStyle/>
+          <a:p>
+            <a:pPr algn="r">
+              <a:lnSpc>
+                <a:spcPct val="110000"/>
+              </a:lnSpc>
+            </a:pPr>
+            <a:r>
+              <a:rPr sz="1600" b="0">
+                <a:solidFill>
+                  <a:srgbClr val="555555"/>
+                </a:solidFill>
+                <a:latin typeface="Arial"/>
+                <a:ea typeface="Arial"/>
+              </a:rPr>
+              <a:t>500</a:t>
+            </a:r>
+          </a:p>
+        </p:txBody>
+      </p:sp>
+      <p:sp>
+        <p:nvSpPr>
+          <p:cNvPr id="11" name="Rectangle 10"/>
+          <p:cNvSpPr/>
+          <p:nvPr/>
+        </p:nvSpPr>
+        <p:spPr>
+          <a:xfrm>
+            <a:off x="1636776" y="4634484"/>
+            <a:ext cx="7516367" cy="9144"/>
+          </a:xfrm>
+          <a:prstGeom prst="rect">
+            <a:avLst/>
+          </a:prstGeom>
+          <a:solidFill>
+            <a:srgbClr val="D9D9D9"/>
+          </a:solidFill>
+          <a:ln>
+            <a:noFill/>
+          </a:ln>
+          <a:effectLst/>
+        </p:spPr>
+        <p:style>
+          <a:lnRef idx="1">
+            <a:schemeClr val="accent1"/>
+          </a:lnRef>
+          <a:fillRef idx="3">
+            <a:schemeClr val="accent1"/>
+          </a:fillRef>
+          <a:effectRef idx="2">
+            <a:schemeClr val="accent1"/>
+          </a:effectRef>
+          <a:fontRef idx="minor">
+            <a:schemeClr val="lt1"/>
+          </a:fontRef>
+        </p:style>
+        <p:txBody>
+          <a:bodyPr rtlCol="0" anchor="ctr"/>
+          <a:lstStyle/>
+          <a:p>
+            <a:pPr algn="ctr"/>
+          </a:p>
+        </p:txBody>
+      </p:sp>
+      <p:sp>
+        <p:nvSpPr>
+          <p:cNvPr id="12" name="TextBox 11"/>
+          <p:cNvSpPr txBox="1"/>
+          <p:nvPr/>
+        </p:nvSpPr>
+        <p:spPr>
+          <a:xfrm>
+            <a:off x="722376" y="4492752"/>
+            <a:ext cx="804672" cy="292608"/>
+          </a:xfrm>
+          <a:prstGeom prst="rect">
+            <a:avLst/>
+          </a:prstGeom>
+          <a:noFill/>
+        </p:spPr>
+        <p:txBody>
+          <a:bodyPr wrap="square" anchor="ctr" lIns="0" rIns="0" tIns="0" bIns="0">
+            <a:spAutoFit/>
+          </a:bodyPr>
+          <a:lstStyle/>
+          <a:p>
+            <a:pPr algn="r">
+              <a:lnSpc>
+                <a:spcPct val="110000"/>
+              </a:lnSpc>
+            </a:pPr>
+            <a:r>
+              <a:rPr sz="1600" b="0">
+                <a:solidFill>
+                  <a:srgbClr val="555555"/>
+                </a:solidFill>
+                <a:latin typeface="Arial"/>
+                <a:ea typeface="Arial"/>
+              </a:rPr>
+              <a:t>1,000</a:t>
+            </a:r>
+          </a:p>
+        </p:txBody>
+      </p:sp>
+      <p:sp>
+        <p:nvSpPr>
+          <p:cNvPr id="13" name="Rectangle 12"/>
+          <p:cNvSpPr/>
+          <p:nvPr/>
+        </p:nvSpPr>
+        <p:spPr>
+          <a:xfrm>
+            <a:off x="1636776" y="3012948"/>
+            <a:ext cx="7516367" cy="9144"/>
+          </a:xfrm>
+          <a:prstGeom prst="rect">
+            <a:avLst/>
+          </a:prstGeom>
+          <a:solidFill>
+            <a:srgbClr val="D9D9D9"/>
+          </a:solidFill>
+          <a:ln>
+            <a:noFill/>
+          </a:ln>
+          <a:effectLst/>
+        </p:spPr>
+        <p:style>
+          <a:lnRef idx="1">
+            <a:schemeClr val="accent1"/>
+          </a:lnRef>
+          <a:fillRef idx="3">
+            <a:schemeClr val="accent1"/>
+          </a:fillRef>
+          <a:effectRef idx="2">
+            <a:schemeClr val="accent1"/>
+          </a:effectRef>
+          <a:fontRef idx="minor">
+            <a:schemeClr val="lt1"/>
+          </a:fontRef>
+        </p:style>
+        <p:txBody>
+          <a:bodyPr rtlCol="0" anchor="ctr"/>
+          <a:lstStyle/>
+          <a:p>
+            <a:pPr algn="ctr"/>
+          </a:p>
+        </p:txBody>
+      </p:sp>
+      <p:sp>
+        <p:nvSpPr>
+          <p:cNvPr id="14" name="TextBox 13"/>
+          <p:cNvSpPr txBox="1"/>
+          <p:nvPr/>
+        </p:nvSpPr>
+        <p:spPr>
+          <a:xfrm>
+            <a:off x="722376" y="2871215"/>
+            <a:ext cx="804672" cy="292608"/>
+          </a:xfrm>
+          <a:prstGeom prst="rect">
+            <a:avLst/>
+          </a:prstGeom>
+          <a:noFill/>
+        </p:spPr>
+        <p:txBody>
+          <a:bodyPr wrap="square" anchor="ctr" lIns="0" rIns="0" tIns="0" bIns="0">
+            <a:spAutoFit/>
+          </a:bodyPr>
+          <a:lstStyle/>
+          <a:p>
+            <a:pPr algn="r">
+              <a:lnSpc>
+                <a:spcPct val="110000"/>
+              </a:lnSpc>
+            </a:pPr>
+            <a:r>
+              <a:rPr sz="1600" b="0">
+                <a:solidFill>
+                  <a:srgbClr val="555555"/>
+                </a:solidFill>
+                <a:latin typeface="Arial"/>
+                <a:ea typeface="Arial"/>
+              </a:rPr>
+              <a:t>1,500</a:t>
+            </a:r>
+          </a:p>
+        </p:txBody>
+      </p:sp>
+      <p:sp>
+        <p:nvSpPr>
+          <p:cNvPr id="15" name="Rectangle 14"/>
+          <p:cNvSpPr/>
+          <p:nvPr/>
+        </p:nvSpPr>
+        <p:spPr>
+          <a:xfrm>
+            <a:off x="2692908" y="2743200"/>
+            <a:ext cx="9144" cy="5138927"/>
+          </a:xfrm>
+          <a:prstGeom prst="rect">
+            <a:avLst/>
+          </a:prstGeom>
+          <a:solidFill>
+            <a:srgbClr val="8A8A8A"/>
+          </a:solidFill>
+          <a:ln>
+            <a:noFill/>
+          </a:ln>
+          <a:effectLst/>
+        </p:spPr>
+        <p:style>
+          <a:lnRef idx="1">
+            <a:schemeClr val="accent1"/>
+          </a:lnRef>
+          <a:fillRef idx="3">
+            <a:schemeClr val="accent1"/>
+          </a:fillRef>
+          <a:effectRef idx="2">
+            <a:schemeClr val="accent1"/>
+          </a:effectRef>
+          <a:fontRef idx="minor">
+            <a:schemeClr val="lt1"/>
+          </a:fontRef>
+        </p:style>
+        <p:txBody>
+          <a:bodyPr rtlCol="0" anchor="ctr"/>
+          <a:lstStyle/>
+          <a:p>
+            <a:pPr algn="ctr"/>
+          </a:p>
+        </p:txBody>
+      </p:sp>
+      <p:sp>
+        <p:nvSpPr>
+          <p:cNvPr id="16" name="TextBox 15"/>
+          <p:cNvSpPr txBox="1"/>
+          <p:nvPr/>
+        </p:nvSpPr>
+        <p:spPr>
+          <a:xfrm>
+            <a:off x="2752344" y="2706624"/>
+            <a:ext cx="1097280" cy="274320"/>
+          </a:xfrm>
+          <a:prstGeom prst="rect">
+            <a:avLst/>
+          </a:prstGeom>
+          <a:noFill/>
+        </p:spPr>
+        <p:txBody>
+          <a:bodyPr wrap="square" anchor="ctr" lIns="0" rIns="0" tIns="0" bIns="0">
+            <a:spAutoFit/>
+          </a:bodyPr>
+          <a:lstStyle/>
+          <a:p>
+            <a:pPr algn="l">
+              <a:lnSpc>
+                <a:spcPct val="110000"/>
+              </a:lnSpc>
+            </a:pPr>
+            <a:r>
+              <a:rPr sz="1600" b="0">
+                <a:solidFill>
+                  <a:srgbClr val="555555"/>
+                </a:solidFill>
+                <a:latin typeface="Arial"/>
+                <a:ea typeface="Arial"/>
+              </a:rPr>
+              <a:t>전망 →</a:t>
+            </a:r>
+          </a:p>
+        </p:txBody>
+      </p:sp>
+      <p:sp>
+        <p:nvSpPr>
+          <p:cNvPr id="17" name="Rectangle 16"/>
+          <p:cNvSpPr/>
+          <p:nvPr/>
+        </p:nvSpPr>
+        <p:spPr>
+          <a:xfrm>
+            <a:off x="1847088" y="7337291"/>
+            <a:ext cx="640080" cy="544836"/>
+          </a:xfrm>
+          <a:prstGeom prst="rect">
+            <a:avLst/>
+          </a:prstGeom>
+          <a:solidFill>
+            <a:srgbClr val="8A8A8A"/>
+          </a:solidFill>
+          <a:ln>
+            <a:noFill/>
+          </a:ln>
+          <a:effectLst/>
+        </p:spPr>
+        <p:style>
+          <a:lnRef idx="1">
+            <a:schemeClr val="accent1"/>
+          </a:lnRef>
+          <a:fillRef idx="3">
+            <a:schemeClr val="accent1"/>
+          </a:fillRef>
+          <a:effectRef idx="2">
+            <a:schemeClr val="accent1"/>
+          </a:effectRef>
+          <a:fontRef idx="minor">
+            <a:schemeClr val="lt1"/>
+          </a:fontRef>
+        </p:style>
+        <p:txBody>
+          <a:bodyPr rtlCol="0" anchor="ctr"/>
+          <a:lstStyle/>
+          <a:p>
+            <a:pPr algn="ctr"/>
+          </a:p>
+        </p:txBody>
+      </p:sp>
+      <p:sp>
+        <p:nvSpPr>
+          <p:cNvPr id="18" name="Rectangle 17"/>
+          <p:cNvSpPr/>
+          <p:nvPr/>
+        </p:nvSpPr>
+        <p:spPr>
+          <a:xfrm>
+            <a:off x="1847088" y="7314590"/>
+            <a:ext cx="640080" cy="22701"/>
+          </a:xfrm>
+          <a:prstGeom prst="rect">
+            <a:avLst/>
+          </a:prstGeom>
+          <a:solidFill>
+            <a:srgbClr val="AAB8E8"/>
+          </a:solidFill>
+          <a:ln>
+            <a:noFill/>
+          </a:ln>
+          <a:effectLst/>
+        </p:spPr>
+        <p:style>
+          <a:lnRef idx="1">
+            <a:schemeClr val="accent1"/>
+          </a:lnRef>
+          <a:fillRef idx="3">
+            <a:schemeClr val="accent1"/>
+          </a:fillRef>
+          <a:effectRef idx="2">
+            <a:schemeClr val="accent1"/>
+          </a:effectRef>
+          <a:fontRef idx="minor">
+            <a:schemeClr val="lt1"/>
+          </a:fontRef>
+        </p:style>
+        <p:txBody>
+          <a:bodyPr rtlCol="0" anchor="ctr"/>
+          <a:lstStyle/>
+          <a:p>
+            <a:pPr algn="ctr"/>
+          </a:p>
+        </p:txBody>
+      </p:sp>
+      <p:sp>
+        <p:nvSpPr>
+          <p:cNvPr id="19" name="Rectangle 18"/>
+          <p:cNvSpPr/>
+          <p:nvPr/>
+        </p:nvSpPr>
+        <p:spPr>
+          <a:xfrm>
+            <a:off x="1847088" y="7295131"/>
+            <a:ext cx="640080" cy="19458"/>
+          </a:xfrm>
+          <a:prstGeom prst="rect">
+            <a:avLst/>
+          </a:prstGeom>
+          <a:solidFill>
+            <a:srgbClr val="1428A0"/>
+          </a:solidFill>
+          <a:ln>
+            <a:noFill/>
+          </a:ln>
+          <a:effectLst/>
+        </p:spPr>
+        <p:style>
+          <a:lnRef idx="1">
+            <a:schemeClr val="accent1"/>
+          </a:lnRef>
+          <a:fillRef idx="3">
+            <a:schemeClr val="accent1"/>
+          </a:fillRef>
+          <a:effectRef idx="2">
+            <a:schemeClr val="accent1"/>
+          </a:effectRef>
+          <a:fontRef idx="minor">
+            <a:schemeClr val="lt1"/>
+          </a:fontRef>
+        </p:style>
+        <p:txBody>
+          <a:bodyPr rtlCol="0" anchor="ctr"/>
+          <a:lstStyle/>
+          <a:p>
+            <a:pPr algn="ctr"/>
+          </a:p>
+        </p:txBody>
+      </p:sp>
+      <p:sp>
+        <p:nvSpPr>
+          <p:cNvPr id="20" name="TextBox 19"/>
+          <p:cNvSpPr txBox="1"/>
+          <p:nvPr/>
+        </p:nvSpPr>
+        <p:spPr>
+          <a:xfrm>
+            <a:off x="1572768" y="6965947"/>
+            <a:ext cx="1188719" cy="292608"/>
+          </a:xfrm>
+          <a:prstGeom prst="rect">
+            <a:avLst/>
+          </a:prstGeom>
+          <a:noFill/>
+        </p:spPr>
+        <p:txBody>
+          <a:bodyPr wrap="square" anchor="ctr" lIns="0" rIns="0" tIns="0" bIns="0">
+            <a:spAutoFit/>
+          </a:bodyPr>
+          <a:lstStyle/>
+          <a:p>
+            <a:pPr algn="ctr">
+              <a:lnSpc>
+                <a:spcPct val="110000"/>
+              </a:lnSpc>
+            </a:pPr>
+            <a:r>
+              <a:rPr sz="1800" b="0">
+                <a:solidFill>
+                  <a:srgbClr val="1A1A1A"/>
+                </a:solidFill>
+                <a:latin typeface="Arial"/>
+                <a:ea typeface="Arial"/>
+              </a:rPr>
+              <a:t>181</a:t>
+            </a:r>
+          </a:p>
+        </p:txBody>
+      </p:sp>
+      <p:sp>
+        <p:nvSpPr>
+          <p:cNvPr id="21" name="TextBox 20"/>
+          <p:cNvSpPr txBox="1"/>
+          <p:nvPr/>
+        </p:nvSpPr>
+        <p:spPr>
+          <a:xfrm>
+            <a:off x="1618488" y="7936992"/>
+            <a:ext cx="1097280" cy="274320"/>
+          </a:xfrm>
+          <a:prstGeom prst="rect">
+            <a:avLst/>
+          </a:prstGeom>
+          <a:noFill/>
+        </p:spPr>
+        <p:txBody>
+          <a:bodyPr wrap="square" anchor="t" lIns="0" rIns="0" tIns="0" bIns="0">
+            <a:spAutoFit/>
+          </a:bodyPr>
+          <a:lstStyle/>
+          <a:p>
+            <a:pPr algn="ctr">
+              <a:lnSpc>
+                <a:spcPct val="110000"/>
+              </a:lnSpc>
+            </a:pPr>
+            <a:r>
+              <a:rPr sz="1600" b="0">
+                <a:solidFill>
+                  <a:srgbClr val="555555"/>
+                </a:solidFill>
+                <a:latin typeface="Arial"/>
+                <a:ea typeface="Arial"/>
+              </a:rPr>
+              <a:t>2024</a:t>
+            </a:r>
+          </a:p>
+        </p:txBody>
+      </p:sp>
+      <p:sp>
+        <p:nvSpPr>
+          <p:cNvPr id="22" name="Rectangle 21"/>
+          <p:cNvSpPr/>
+          <p:nvPr/>
+        </p:nvSpPr>
+        <p:spPr>
+          <a:xfrm>
+            <a:off x="2907791" y="7227814"/>
+            <a:ext cx="640080" cy="654313"/>
+          </a:xfrm>
+          <a:prstGeom prst="rect">
+            <a:avLst/>
+          </a:prstGeom>
+          <a:solidFill>
+            <a:srgbClr val="8A8A8A"/>
+          </a:solidFill>
+          <a:ln>
+            <a:noFill/>
+          </a:ln>
+          <a:effectLst/>
+        </p:spPr>
+        <p:style>
+          <a:lnRef idx="1">
+            <a:schemeClr val="accent1"/>
+          </a:lnRef>
+          <a:fillRef idx="3">
+            <a:schemeClr val="accent1"/>
+          </a:fillRef>
+          <a:effectRef idx="2">
+            <a:schemeClr val="accent1"/>
+          </a:effectRef>
+          <a:fontRef idx="minor">
+            <a:schemeClr val="lt1"/>
+          </a:fontRef>
+        </p:style>
+        <p:txBody>
+          <a:bodyPr rtlCol="0" anchor="ctr"/>
+          <a:lstStyle/>
+          <a:p>
+            <a:pPr algn="ctr"/>
+          </a:p>
+        </p:txBody>
+      </p:sp>
+      <p:sp>
+        <p:nvSpPr>
+          <p:cNvPr id="23" name="Rectangle 22"/>
+          <p:cNvSpPr/>
+          <p:nvPr/>
+        </p:nvSpPr>
+        <p:spPr>
+          <a:xfrm>
+            <a:off x="2907791" y="7191014"/>
+            <a:ext cx="640080" cy="36799"/>
+          </a:xfrm>
+          <a:prstGeom prst="rect">
+            <a:avLst/>
+          </a:prstGeom>
+          <a:solidFill>
+            <a:srgbClr val="AAB8E8"/>
+          </a:solidFill>
+          <a:ln>
+            <a:noFill/>
+          </a:ln>
+          <a:effectLst/>
+        </p:spPr>
+        <p:style>
+          <a:lnRef idx="1">
+            <a:schemeClr val="accent1"/>
+          </a:lnRef>
+          <a:fillRef idx="3">
+            <a:schemeClr val="accent1"/>
+          </a:fillRef>
+          <a:effectRef idx="2">
+            <a:schemeClr val="accent1"/>
+          </a:effectRef>
+          <a:fontRef idx="minor">
+            <a:schemeClr val="lt1"/>
+          </a:fontRef>
+        </p:style>
+        <p:txBody>
+          <a:bodyPr rtlCol="0" anchor="ctr"/>
+          <a:lstStyle/>
+          <a:p>
+            <a:pPr algn="ctr"/>
+          </a:p>
+        </p:txBody>
+      </p:sp>
+      <p:sp>
+        <p:nvSpPr>
+          <p:cNvPr id="24" name="Rectangle 23"/>
+          <p:cNvSpPr/>
+          <p:nvPr/>
+        </p:nvSpPr>
+        <p:spPr>
+          <a:xfrm>
+            <a:off x="2907791" y="7151100"/>
+            <a:ext cx="640080" cy="39914"/>
+          </a:xfrm>
+          <a:prstGeom prst="rect">
+            <a:avLst/>
+          </a:prstGeom>
+          <a:solidFill>
+            <a:srgbClr val="1428A0"/>
+          </a:solidFill>
+          <a:ln>
+            <a:noFill/>
+          </a:ln>
+          <a:effectLst/>
+        </p:spPr>
+        <p:style>
+          <a:lnRef idx="1">
+            <a:schemeClr val="accent1"/>
+          </a:lnRef>
+          <a:fillRef idx="3">
+            <a:schemeClr val="accent1"/>
+          </a:fillRef>
+          <a:effectRef idx="2">
+            <a:schemeClr val="accent1"/>
+          </a:effectRef>
+          <a:fontRef idx="minor">
+            <a:schemeClr val="lt1"/>
+          </a:fontRef>
+        </p:style>
+        <p:txBody>
+          <a:bodyPr rtlCol="0" anchor="ctr"/>
+          <a:lstStyle/>
+          <a:p>
+            <a:pPr algn="ctr"/>
+          </a:p>
+        </p:txBody>
+      </p:sp>
+      <p:sp>
+        <p:nvSpPr>
+          <p:cNvPr id="25" name="TextBox 24"/>
+          <p:cNvSpPr txBox="1"/>
+          <p:nvPr/>
+        </p:nvSpPr>
+        <p:spPr>
+          <a:xfrm>
+            <a:off x="2633472" y="6821916"/>
+            <a:ext cx="1188719" cy="292608"/>
+          </a:xfrm>
+          <a:prstGeom prst="rect">
+            <a:avLst/>
+          </a:prstGeom>
+          <a:noFill/>
+        </p:spPr>
+        <p:txBody>
+          <a:bodyPr wrap="square" anchor="ctr" lIns="0" rIns="0" tIns="0" bIns="0">
+            <a:spAutoFit/>
+          </a:bodyPr>
+          <a:lstStyle/>
+          <a:p>
+            <a:pPr algn="ctr">
+              <a:lnSpc>
+                <a:spcPct val="110000"/>
+              </a:lnSpc>
+            </a:pPr>
+            <a:r>
+              <a:rPr sz="1800" b="0">
+                <a:solidFill>
+                  <a:srgbClr val="1A1A1A"/>
+                </a:solidFill>
+                <a:latin typeface="Arial"/>
+                <a:ea typeface="Arial"/>
+              </a:rPr>
+              <a:t>225</a:t>
+            </a:r>
+          </a:p>
+        </p:txBody>
+      </p:sp>
+      <p:sp>
+        <p:nvSpPr>
+          <p:cNvPr id="26" name="TextBox 25"/>
+          <p:cNvSpPr txBox="1"/>
+          <p:nvPr/>
+        </p:nvSpPr>
+        <p:spPr>
+          <a:xfrm>
+            <a:off x="2679191" y="7936992"/>
+            <a:ext cx="1097280" cy="274320"/>
+          </a:xfrm>
+          <a:prstGeom prst="rect">
+            <a:avLst/>
+          </a:prstGeom>
+          <a:noFill/>
+        </p:spPr>
+        <p:txBody>
+          <a:bodyPr wrap="square" anchor="t" lIns="0" rIns="0" tIns="0" bIns="0">
+            <a:spAutoFit/>
+          </a:bodyPr>
+          <a:lstStyle/>
+          <a:p>
+            <a:pPr algn="ctr">
+              <a:lnSpc>
+                <a:spcPct val="110000"/>
+              </a:lnSpc>
+            </a:pPr>
+            <a:r>
+              <a:rPr sz="1600" b="0">
+                <a:solidFill>
+                  <a:srgbClr val="555555"/>
+                </a:solidFill>
+                <a:latin typeface="Arial"/>
+                <a:ea typeface="Arial"/>
+              </a:rPr>
+              <a:t>2025</a:t>
+            </a:r>
+          </a:p>
+        </p:txBody>
+      </p:sp>
+      <p:sp>
+        <p:nvSpPr>
+          <p:cNvPr id="27" name="Rectangle 26"/>
+          <p:cNvSpPr/>
+          <p:nvPr/>
+        </p:nvSpPr>
+        <p:spPr>
+          <a:xfrm>
+            <a:off x="3968496" y="7096338"/>
+            <a:ext cx="640080" cy="785789"/>
+          </a:xfrm>
+          <a:prstGeom prst="rect">
+            <a:avLst/>
+          </a:prstGeom>
+          <a:solidFill>
+            <a:srgbClr val="8A8A8A"/>
+          </a:solidFill>
+          <a:ln>
+            <a:noFill/>
+          </a:ln>
+          <a:effectLst/>
+        </p:spPr>
+        <p:style>
+          <a:lnRef idx="1">
+            <a:schemeClr val="accent1"/>
+          </a:lnRef>
+          <a:fillRef idx="3">
+            <a:schemeClr val="accent1"/>
+          </a:fillRef>
+          <a:effectRef idx="2">
+            <a:schemeClr val="accent1"/>
+          </a:effectRef>
+          <a:fontRef idx="minor">
+            <a:schemeClr val="lt1"/>
+          </a:fontRef>
+        </p:style>
+        <p:txBody>
+          <a:bodyPr rtlCol="0" anchor="ctr"/>
+          <a:lstStyle/>
+          <a:p>
+            <a:pPr algn="ctr"/>
+          </a:p>
+        </p:txBody>
+      </p:sp>
+      <p:sp>
+        <p:nvSpPr>
+          <p:cNvPr id="28" name="Rectangle 27"/>
+          <p:cNvSpPr/>
+          <p:nvPr/>
+        </p:nvSpPr>
+        <p:spPr>
+          <a:xfrm>
+            <a:off x="3968496" y="7036686"/>
+            <a:ext cx="640080" cy="59651"/>
+          </a:xfrm>
+          <a:prstGeom prst="rect">
+            <a:avLst/>
+          </a:prstGeom>
+          <a:solidFill>
+            <a:srgbClr val="AAB8E8"/>
+          </a:solidFill>
+          <a:ln>
+            <a:noFill/>
+          </a:ln>
+          <a:effectLst/>
+        </p:spPr>
+        <p:style>
+          <a:lnRef idx="1">
+            <a:schemeClr val="accent1"/>
+          </a:lnRef>
+          <a:fillRef idx="3">
+            <a:schemeClr val="accent1"/>
+          </a:fillRef>
+          <a:effectRef idx="2">
+            <a:schemeClr val="accent1"/>
+          </a:effectRef>
+          <a:fontRef idx="minor">
+            <a:schemeClr val="lt1"/>
+          </a:fontRef>
+        </p:style>
+        <p:txBody>
+          <a:bodyPr rtlCol="0" anchor="ctr"/>
+          <a:lstStyle/>
+          <a:p>
+            <a:pPr algn="ctr"/>
+          </a:p>
+        </p:txBody>
+      </p:sp>
+      <p:sp>
+        <p:nvSpPr>
+          <p:cNvPr id="29" name="Rectangle 28"/>
+          <p:cNvSpPr/>
+          <p:nvPr/>
+        </p:nvSpPr>
+        <p:spPr>
+          <a:xfrm>
+            <a:off x="3968496" y="6954809"/>
+            <a:ext cx="640080" cy="81876"/>
+          </a:xfrm>
+          <a:prstGeom prst="rect">
+            <a:avLst/>
+          </a:prstGeom>
+          <a:solidFill>
+            <a:srgbClr val="1428A0"/>
+          </a:solidFill>
+          <a:ln>
+            <a:noFill/>
+          </a:ln>
+          <a:effectLst/>
+        </p:spPr>
+        <p:style>
+          <a:lnRef idx="1">
+            <a:schemeClr val="accent1"/>
+          </a:lnRef>
+          <a:fillRef idx="3">
+            <a:schemeClr val="accent1"/>
+          </a:fillRef>
+          <a:effectRef idx="2">
+            <a:schemeClr val="accent1"/>
+          </a:effectRef>
+          <a:fontRef idx="minor">
+            <a:schemeClr val="lt1"/>
+          </a:fontRef>
+        </p:style>
+        <p:txBody>
+          <a:bodyPr rtlCol="0" anchor="ctr"/>
+          <a:lstStyle/>
+          <a:p>
+            <a:pPr algn="ctr"/>
+          </a:p>
+        </p:txBody>
+      </p:sp>
+      <p:sp>
+        <p:nvSpPr>
+          <p:cNvPr id="30" name="TextBox 29"/>
+          <p:cNvSpPr txBox="1"/>
+          <p:nvPr/>
+        </p:nvSpPr>
+        <p:spPr>
+          <a:xfrm>
+            <a:off x="3694176" y="6625625"/>
+            <a:ext cx="1188719" cy="292608"/>
+          </a:xfrm>
+          <a:prstGeom prst="rect">
+            <a:avLst/>
+          </a:prstGeom>
+          <a:noFill/>
+        </p:spPr>
+        <p:txBody>
+          <a:bodyPr wrap="square" anchor="ctr" lIns="0" rIns="0" tIns="0" bIns="0">
+            <a:spAutoFit/>
+          </a:bodyPr>
+          <a:lstStyle/>
+          <a:p>
+            <a:pPr algn="ctr">
+              <a:lnSpc>
+                <a:spcPct val="110000"/>
+              </a:lnSpc>
+            </a:pPr>
+            <a:r>
+              <a:rPr sz="1800" b="0">
+                <a:solidFill>
+                  <a:srgbClr val="1A1A1A"/>
+                </a:solidFill>
+                <a:latin typeface="Arial"/>
+                <a:ea typeface="Arial"/>
+              </a:rPr>
+              <a:t>286</a:t>
+            </a:r>
+          </a:p>
+        </p:txBody>
+      </p:sp>
+      <p:sp>
+        <p:nvSpPr>
+          <p:cNvPr id="31" name="TextBox 30"/>
+          <p:cNvSpPr txBox="1"/>
+          <p:nvPr/>
+        </p:nvSpPr>
+        <p:spPr>
+          <a:xfrm>
+            <a:off x="3739896" y="7936992"/>
+            <a:ext cx="1097280" cy="274320"/>
+          </a:xfrm>
+          <a:prstGeom prst="rect">
+            <a:avLst/>
+          </a:prstGeom>
+          <a:noFill/>
+        </p:spPr>
+        <p:txBody>
+          <a:bodyPr wrap="square" anchor="t" lIns="0" rIns="0" tIns="0" bIns="0">
+            <a:spAutoFit/>
+          </a:bodyPr>
+          <a:lstStyle/>
+          <a:p>
+            <a:pPr algn="ctr">
+              <a:lnSpc>
+                <a:spcPct val="110000"/>
+              </a:lnSpc>
+            </a:pPr>
+            <a:r>
+              <a:rPr sz="1600" b="0">
+                <a:solidFill>
+                  <a:srgbClr val="555555"/>
+                </a:solidFill>
+                <a:latin typeface="Arial"/>
+                <a:ea typeface="Arial"/>
+              </a:rPr>
+              <a:t>2026</a:t>
+            </a:r>
+          </a:p>
+        </p:txBody>
+      </p:sp>
+      <p:sp>
+        <p:nvSpPr>
+          <p:cNvPr id="32" name="Rectangle 31"/>
+          <p:cNvSpPr/>
+          <p:nvPr/>
+        </p:nvSpPr>
+        <p:spPr>
+          <a:xfrm>
+            <a:off x="5029200" y="6938444"/>
+            <a:ext cx="640080" cy="943683"/>
+          </a:xfrm>
+          <a:prstGeom prst="rect">
+            <a:avLst/>
+          </a:prstGeom>
+          <a:solidFill>
+            <a:srgbClr val="8A8A8A"/>
+          </a:solidFill>
+          <a:ln>
+            <a:noFill/>
+          </a:ln>
+          <a:effectLst/>
+        </p:spPr>
+        <p:style>
+          <a:lnRef idx="1">
+            <a:schemeClr val="accent1"/>
+          </a:lnRef>
+          <a:fillRef idx="3">
+            <a:schemeClr val="accent1"/>
+          </a:fillRef>
+          <a:effectRef idx="2">
+            <a:schemeClr val="accent1"/>
+          </a:effectRef>
+          <a:fontRef idx="minor">
+            <a:schemeClr val="lt1"/>
+          </a:fontRef>
+        </p:style>
+        <p:txBody>
+          <a:bodyPr rtlCol="0" anchor="ctr"/>
+          <a:lstStyle/>
+          <a:p>
+            <a:pPr algn="ctr"/>
+          </a:p>
+        </p:txBody>
+      </p:sp>
+      <p:sp>
+        <p:nvSpPr>
+          <p:cNvPr id="33" name="Rectangle 32"/>
+          <p:cNvSpPr/>
+          <p:nvPr/>
+        </p:nvSpPr>
+        <p:spPr>
+          <a:xfrm>
+            <a:off x="5029200" y="6841748"/>
+            <a:ext cx="640080" cy="96695"/>
+          </a:xfrm>
+          <a:prstGeom prst="rect">
+            <a:avLst/>
+          </a:prstGeom>
+          <a:solidFill>
+            <a:srgbClr val="AAB8E8"/>
+          </a:solidFill>
+          <a:ln>
+            <a:noFill/>
+          </a:ln>
+          <a:effectLst/>
+        </p:spPr>
+        <p:style>
+          <a:lnRef idx="1">
+            <a:schemeClr val="accent1"/>
+          </a:lnRef>
+          <a:fillRef idx="3">
+            <a:schemeClr val="accent1"/>
+          </a:fillRef>
+          <a:effectRef idx="2">
+            <a:schemeClr val="accent1"/>
+          </a:effectRef>
+          <a:fontRef idx="minor">
+            <a:schemeClr val="lt1"/>
+          </a:fontRef>
+        </p:style>
+        <p:txBody>
+          <a:bodyPr rtlCol="0" anchor="ctr"/>
+          <a:lstStyle/>
+          <a:p>
+            <a:pPr algn="ctr"/>
+          </a:p>
+        </p:txBody>
+      </p:sp>
+      <p:sp>
+        <p:nvSpPr>
+          <p:cNvPr id="34" name="Rectangle 33"/>
+          <p:cNvSpPr/>
+          <p:nvPr/>
+        </p:nvSpPr>
+        <p:spPr>
+          <a:xfrm>
+            <a:off x="5029200" y="6673796"/>
+            <a:ext cx="640080" cy="167952"/>
+          </a:xfrm>
+          <a:prstGeom prst="rect">
+            <a:avLst/>
+          </a:prstGeom>
+          <a:solidFill>
+            <a:srgbClr val="1428A0"/>
+          </a:solidFill>
+          <a:ln>
+            <a:noFill/>
+          </a:ln>
+          <a:effectLst/>
+        </p:spPr>
+        <p:style>
+          <a:lnRef idx="1">
+            <a:schemeClr val="accent1"/>
+          </a:lnRef>
+          <a:fillRef idx="3">
+            <a:schemeClr val="accent1"/>
+          </a:fillRef>
+          <a:effectRef idx="2">
+            <a:schemeClr val="accent1"/>
+          </a:effectRef>
+          <a:fontRef idx="minor">
+            <a:schemeClr val="lt1"/>
+          </a:fontRef>
+        </p:style>
+        <p:txBody>
+          <a:bodyPr rtlCol="0" anchor="ctr"/>
+          <a:lstStyle/>
+          <a:p>
+            <a:pPr algn="ctr"/>
+          </a:p>
+        </p:txBody>
+      </p:sp>
+      <p:sp>
+        <p:nvSpPr>
+          <p:cNvPr id="35" name="TextBox 34"/>
+          <p:cNvSpPr txBox="1"/>
+          <p:nvPr/>
+        </p:nvSpPr>
+        <p:spPr>
+          <a:xfrm>
+            <a:off x="4754880" y="6344612"/>
+            <a:ext cx="1188719" cy="292608"/>
+          </a:xfrm>
+          <a:prstGeom prst="rect">
+            <a:avLst/>
+          </a:prstGeom>
+          <a:noFill/>
+        </p:spPr>
+        <p:txBody>
+          <a:bodyPr wrap="square" anchor="ctr" lIns="0" rIns="0" tIns="0" bIns="0">
+            <a:spAutoFit/>
+          </a:bodyPr>
+          <a:lstStyle/>
+          <a:p>
+            <a:pPr algn="ctr">
+              <a:lnSpc>
+                <a:spcPct val="110000"/>
+              </a:lnSpc>
+            </a:pPr>
+            <a:r>
+              <a:rPr sz="1800" b="0">
+                <a:solidFill>
+                  <a:srgbClr val="1A1A1A"/>
+                </a:solidFill>
+                <a:latin typeface="Arial"/>
+                <a:ea typeface="Arial"/>
+              </a:rPr>
+              <a:t>373</a:t>
+            </a:r>
+          </a:p>
+        </p:txBody>
+      </p:sp>
+      <p:sp>
+        <p:nvSpPr>
+          <p:cNvPr id="36" name="TextBox 35"/>
+          <p:cNvSpPr txBox="1"/>
+          <p:nvPr/>
+        </p:nvSpPr>
+        <p:spPr>
+          <a:xfrm>
+            <a:off x="4800600" y="7936992"/>
+            <a:ext cx="1097280" cy="274320"/>
+          </a:xfrm>
+          <a:prstGeom prst="rect">
+            <a:avLst/>
+          </a:prstGeom>
+          <a:noFill/>
+        </p:spPr>
+        <p:txBody>
+          <a:bodyPr wrap="square" anchor="t" lIns="0" rIns="0" tIns="0" bIns="0">
+            <a:spAutoFit/>
+          </a:bodyPr>
+          <a:lstStyle/>
+          <a:p>
+            <a:pPr algn="ctr">
+              <a:lnSpc>
+                <a:spcPct val="110000"/>
+              </a:lnSpc>
+            </a:pPr>
+            <a:r>
+              <a:rPr sz="1600" b="0">
+                <a:solidFill>
+                  <a:srgbClr val="555555"/>
+                </a:solidFill>
+                <a:latin typeface="Arial"/>
+                <a:ea typeface="Arial"/>
+              </a:rPr>
+              <a:t>2027</a:t>
+            </a:r>
+          </a:p>
+        </p:txBody>
+      </p:sp>
+      <p:sp>
+        <p:nvSpPr>
+          <p:cNvPr id="37" name="Rectangle 36"/>
+          <p:cNvSpPr/>
+          <p:nvPr/>
+        </p:nvSpPr>
+        <p:spPr>
+          <a:xfrm>
+            <a:off x="6089904" y="6748823"/>
+            <a:ext cx="640080" cy="1133304"/>
+          </a:xfrm>
+          <a:prstGeom prst="rect">
+            <a:avLst/>
+          </a:prstGeom>
+          <a:solidFill>
+            <a:srgbClr val="8A8A8A"/>
+          </a:solidFill>
+          <a:ln>
+            <a:noFill/>
+          </a:ln>
+          <a:effectLst/>
+        </p:spPr>
+        <p:style>
+          <a:lnRef idx="1">
+            <a:schemeClr val="accent1"/>
+          </a:lnRef>
+          <a:fillRef idx="3">
+            <a:schemeClr val="accent1"/>
+          </a:fillRef>
+          <a:effectRef idx="2">
+            <a:schemeClr val="accent1"/>
+          </a:effectRef>
+          <a:fontRef idx="minor">
+            <a:schemeClr val="lt1"/>
+          </a:fontRef>
+        </p:style>
+        <p:txBody>
+          <a:bodyPr rtlCol="0" anchor="ctr"/>
+          <a:lstStyle/>
+          <a:p>
+            <a:pPr algn="ctr"/>
+          </a:p>
+        </p:txBody>
+      </p:sp>
+      <p:sp>
+        <p:nvSpPr>
+          <p:cNvPr id="38" name="Rectangle 37"/>
+          <p:cNvSpPr/>
+          <p:nvPr/>
+        </p:nvSpPr>
+        <p:spPr>
+          <a:xfrm>
+            <a:off x="6089904" y="6592078"/>
+            <a:ext cx="640080" cy="156744"/>
+          </a:xfrm>
+          <a:prstGeom prst="rect">
+            <a:avLst/>
+          </a:prstGeom>
+          <a:solidFill>
+            <a:srgbClr val="AAB8E8"/>
+          </a:solidFill>
+          <a:ln>
+            <a:noFill/>
+          </a:ln>
+          <a:effectLst/>
+        </p:spPr>
+        <p:style>
+          <a:lnRef idx="1">
+            <a:schemeClr val="accent1"/>
+          </a:lnRef>
+          <a:fillRef idx="3">
+            <a:schemeClr val="accent1"/>
+          </a:fillRef>
+          <a:effectRef idx="2">
+            <a:schemeClr val="accent1"/>
+          </a:effectRef>
+          <a:fontRef idx="minor">
+            <a:schemeClr val="lt1"/>
+          </a:fontRef>
+        </p:style>
+        <p:txBody>
+          <a:bodyPr rtlCol="0" anchor="ctr"/>
+          <a:lstStyle/>
+          <a:p>
+            <a:pPr algn="ctr"/>
+          </a:p>
+        </p:txBody>
+      </p:sp>
+      <p:sp>
+        <p:nvSpPr>
+          <p:cNvPr id="39" name="Rectangle 38"/>
+          <p:cNvSpPr/>
+          <p:nvPr/>
+        </p:nvSpPr>
+        <p:spPr>
+          <a:xfrm>
+            <a:off x="6089904" y="6247560"/>
+            <a:ext cx="640080" cy="344518"/>
+          </a:xfrm>
+          <a:prstGeom prst="rect">
+            <a:avLst/>
+          </a:prstGeom>
+          <a:solidFill>
+            <a:srgbClr val="1428A0"/>
+          </a:solidFill>
+          <a:ln>
+            <a:noFill/>
+          </a:ln>
+          <a:effectLst/>
+        </p:spPr>
+        <p:style>
+          <a:lnRef idx="1">
+            <a:schemeClr val="accent1"/>
+          </a:lnRef>
+          <a:fillRef idx="3">
+            <a:schemeClr val="accent1"/>
+          </a:fillRef>
+          <a:effectRef idx="2">
+            <a:schemeClr val="accent1"/>
+          </a:effectRef>
+          <a:fontRef idx="minor">
+            <a:schemeClr val="lt1"/>
+          </a:fontRef>
+        </p:style>
+        <p:txBody>
+          <a:bodyPr rtlCol="0" anchor="ctr"/>
+          <a:lstStyle/>
+          <a:p>
+            <a:pPr algn="ctr"/>
+          </a:p>
+        </p:txBody>
+      </p:sp>
+      <p:sp>
+        <p:nvSpPr>
+          <p:cNvPr id="40" name="TextBox 39"/>
+          <p:cNvSpPr txBox="1"/>
+          <p:nvPr/>
+        </p:nvSpPr>
+        <p:spPr>
+          <a:xfrm>
+            <a:off x="5815584" y="5918376"/>
+            <a:ext cx="1188719" cy="292608"/>
+          </a:xfrm>
+          <a:prstGeom prst="rect">
+            <a:avLst/>
+          </a:prstGeom>
+          <a:noFill/>
+        </p:spPr>
+        <p:txBody>
+          <a:bodyPr wrap="square" anchor="ctr" lIns="0" rIns="0" tIns="0" bIns="0">
+            <a:spAutoFit/>
+          </a:bodyPr>
+          <a:lstStyle/>
+          <a:p>
+            <a:pPr algn="ctr">
+              <a:lnSpc>
+                <a:spcPct val="110000"/>
+              </a:lnSpc>
+            </a:pPr>
+            <a:r>
+              <a:rPr sz="1800" b="0">
+                <a:solidFill>
+                  <a:srgbClr val="1A1A1A"/>
+                </a:solidFill>
+                <a:latin typeface="Arial"/>
+                <a:ea typeface="Arial"/>
+              </a:rPr>
+              <a:t>504</a:t>
+            </a:r>
+          </a:p>
+        </p:txBody>
+      </p:sp>
+      <p:sp>
+        <p:nvSpPr>
+          <p:cNvPr id="41" name="TextBox 40"/>
+          <p:cNvSpPr txBox="1"/>
+          <p:nvPr/>
+        </p:nvSpPr>
+        <p:spPr>
+          <a:xfrm>
+            <a:off x="5861304" y="7936992"/>
+            <a:ext cx="1097280" cy="274320"/>
+          </a:xfrm>
+          <a:prstGeom prst="rect">
+            <a:avLst/>
+          </a:prstGeom>
+          <a:noFill/>
+        </p:spPr>
+        <p:txBody>
+          <a:bodyPr wrap="square" anchor="t" lIns="0" rIns="0" tIns="0" bIns="0">
+            <a:spAutoFit/>
+          </a:bodyPr>
+          <a:lstStyle/>
+          <a:p>
+            <a:pPr algn="ctr">
+              <a:lnSpc>
+                <a:spcPct val="110000"/>
+              </a:lnSpc>
+            </a:pPr>
+            <a:r>
+              <a:rPr sz="1600" b="0">
+                <a:solidFill>
+                  <a:srgbClr val="555555"/>
+                </a:solidFill>
+                <a:latin typeface="Arial"/>
+                <a:ea typeface="Arial"/>
+              </a:rPr>
+              <a:t>2028</a:t>
+            </a:r>
+          </a:p>
+        </p:txBody>
+      </p:sp>
+      <p:sp>
+        <p:nvSpPr>
+          <p:cNvPr id="42" name="Rectangle 41"/>
+          <p:cNvSpPr/>
+          <p:nvPr/>
+        </p:nvSpPr>
+        <p:spPr>
+          <a:xfrm>
+            <a:off x="7150608" y="6521100"/>
+            <a:ext cx="640080" cy="1361027"/>
+          </a:xfrm>
+          <a:prstGeom prst="rect">
+            <a:avLst/>
+          </a:prstGeom>
+          <a:solidFill>
+            <a:srgbClr val="8A8A8A"/>
+          </a:solidFill>
+          <a:ln>
+            <a:noFill/>
+          </a:ln>
+          <a:effectLst/>
+        </p:spPr>
+        <p:style>
+          <a:lnRef idx="1">
+            <a:schemeClr val="accent1"/>
+          </a:lnRef>
+          <a:fillRef idx="3">
+            <a:schemeClr val="accent1"/>
+          </a:fillRef>
+          <a:effectRef idx="2">
+            <a:schemeClr val="accent1"/>
+          </a:effectRef>
+          <a:fontRef idx="minor">
+            <a:schemeClr val="lt1"/>
+          </a:fontRef>
+        </p:style>
+        <p:txBody>
+          <a:bodyPr rtlCol="0" anchor="ctr"/>
+          <a:lstStyle/>
+          <a:p>
+            <a:pPr algn="ctr"/>
+          </a:p>
+        </p:txBody>
+      </p:sp>
+      <p:sp>
+        <p:nvSpPr>
+          <p:cNvPr id="43" name="Rectangle 42"/>
+          <p:cNvSpPr/>
+          <p:nvPr/>
+        </p:nvSpPr>
+        <p:spPr>
+          <a:xfrm>
+            <a:off x="7150608" y="6267017"/>
+            <a:ext cx="640080" cy="254083"/>
+          </a:xfrm>
+          <a:prstGeom prst="rect">
+            <a:avLst/>
+          </a:prstGeom>
+          <a:solidFill>
+            <a:srgbClr val="AAB8E8"/>
+          </a:solidFill>
+          <a:ln>
+            <a:noFill/>
+          </a:ln>
+          <a:effectLst/>
+        </p:spPr>
+        <p:style>
+          <a:lnRef idx="1">
+            <a:schemeClr val="accent1"/>
+          </a:lnRef>
+          <a:fillRef idx="3">
+            <a:schemeClr val="accent1"/>
+          </a:fillRef>
+          <a:effectRef idx="2">
+            <a:schemeClr val="accent1"/>
+          </a:effectRef>
+          <a:fontRef idx="minor">
+            <a:schemeClr val="lt1"/>
+          </a:fontRef>
+        </p:style>
+        <p:txBody>
+          <a:bodyPr rtlCol="0" anchor="ctr"/>
+          <a:lstStyle/>
+          <a:p>
+            <a:pPr algn="ctr"/>
+          </a:p>
+        </p:txBody>
+      </p:sp>
+      <p:sp>
+        <p:nvSpPr>
+          <p:cNvPr id="44" name="Rectangle 43"/>
+          <p:cNvSpPr/>
+          <p:nvPr/>
+        </p:nvSpPr>
+        <p:spPr>
+          <a:xfrm>
+            <a:off x="7150608" y="5560312"/>
+            <a:ext cx="640080" cy="706704"/>
+          </a:xfrm>
+          <a:prstGeom prst="rect">
+            <a:avLst/>
+          </a:prstGeom>
+          <a:solidFill>
+            <a:srgbClr val="1428A0"/>
+          </a:solidFill>
+          <a:ln>
+            <a:noFill/>
+          </a:ln>
+          <a:effectLst/>
+        </p:spPr>
+        <p:style>
+          <a:lnRef idx="1">
+            <a:schemeClr val="accent1"/>
+          </a:lnRef>
+          <a:fillRef idx="3">
+            <a:schemeClr val="accent1"/>
+          </a:fillRef>
+          <a:effectRef idx="2">
+            <a:schemeClr val="accent1"/>
+          </a:effectRef>
+          <a:fontRef idx="minor">
+            <a:schemeClr val="lt1"/>
+          </a:fontRef>
+        </p:style>
+        <p:txBody>
+          <a:bodyPr rtlCol="0" anchor="ctr"/>
+          <a:lstStyle/>
+          <a:p>
+            <a:pPr algn="ctr"/>
+          </a:p>
+        </p:txBody>
+      </p:sp>
+      <p:sp>
+        <p:nvSpPr>
+          <p:cNvPr id="45" name="TextBox 44"/>
+          <p:cNvSpPr txBox="1"/>
+          <p:nvPr/>
+        </p:nvSpPr>
+        <p:spPr>
+          <a:xfrm>
+            <a:off x="6876288" y="5231128"/>
+            <a:ext cx="1188719" cy="292608"/>
+          </a:xfrm>
+          <a:prstGeom prst="rect">
+            <a:avLst/>
+          </a:prstGeom>
+          <a:noFill/>
+        </p:spPr>
+        <p:txBody>
+          <a:bodyPr wrap="square" anchor="ctr" lIns="0" rIns="0" tIns="0" bIns="0">
+            <a:spAutoFit/>
+          </a:bodyPr>
+          <a:lstStyle/>
+          <a:p>
+            <a:pPr algn="ctr">
+              <a:lnSpc>
+                <a:spcPct val="110000"/>
+              </a:lnSpc>
+            </a:pPr>
+            <a:r>
+              <a:rPr sz="1800" b="0">
+                <a:solidFill>
+                  <a:srgbClr val="1A1A1A"/>
+                </a:solidFill>
+                <a:latin typeface="Arial"/>
+                <a:ea typeface="Arial"/>
+              </a:rPr>
+              <a:t>716</a:t>
+            </a:r>
+          </a:p>
+        </p:txBody>
+      </p:sp>
+      <p:sp>
+        <p:nvSpPr>
+          <p:cNvPr id="46" name="TextBox 45"/>
+          <p:cNvSpPr txBox="1"/>
+          <p:nvPr/>
+        </p:nvSpPr>
+        <p:spPr>
+          <a:xfrm>
+            <a:off x="6922008" y="7936992"/>
+            <a:ext cx="1097280" cy="274320"/>
+          </a:xfrm>
+          <a:prstGeom prst="rect">
+            <a:avLst/>
+          </a:prstGeom>
+          <a:noFill/>
+        </p:spPr>
+        <p:txBody>
+          <a:bodyPr wrap="square" anchor="t" lIns="0" rIns="0" tIns="0" bIns="0">
+            <a:spAutoFit/>
+          </a:bodyPr>
+          <a:lstStyle/>
+          <a:p>
+            <a:pPr algn="ctr">
+              <a:lnSpc>
+                <a:spcPct val="110000"/>
+              </a:lnSpc>
+            </a:pPr>
+            <a:r>
+              <a:rPr sz="1600" b="0">
+                <a:solidFill>
+                  <a:srgbClr val="555555"/>
+                </a:solidFill>
+                <a:latin typeface="Arial"/>
+                <a:ea typeface="Arial"/>
+              </a:rPr>
+              <a:t>2029</a:t>
+            </a:r>
+          </a:p>
+        </p:txBody>
+      </p:sp>
+      <p:sp>
+        <p:nvSpPr>
+          <p:cNvPr id="47" name="Rectangle 46"/>
+          <p:cNvSpPr/>
+          <p:nvPr/>
+        </p:nvSpPr>
+        <p:spPr>
+          <a:xfrm>
+            <a:off x="8211311" y="6247619"/>
+            <a:ext cx="640080" cy="1634508"/>
+          </a:xfrm>
+          <a:prstGeom prst="rect">
+            <a:avLst/>
+          </a:prstGeom>
+          <a:solidFill>
+            <a:srgbClr val="8A8A8A"/>
+          </a:solidFill>
+          <a:ln>
+            <a:noFill/>
+          </a:ln>
+          <a:effectLst/>
+        </p:spPr>
+        <p:style>
+          <a:lnRef idx="1">
+            <a:schemeClr val="accent1"/>
+          </a:lnRef>
+          <a:fillRef idx="3">
+            <a:schemeClr val="accent1"/>
+          </a:fillRef>
+          <a:effectRef idx="2">
+            <a:schemeClr val="accent1"/>
+          </a:effectRef>
+          <a:fontRef idx="minor">
+            <a:schemeClr val="lt1"/>
+          </a:fontRef>
+        </p:style>
+        <p:txBody>
+          <a:bodyPr rtlCol="0" anchor="ctr"/>
+          <a:lstStyle/>
+          <a:p>
+            <a:pPr algn="ctr"/>
+          </a:p>
+        </p:txBody>
+      </p:sp>
+      <p:sp>
+        <p:nvSpPr>
+          <p:cNvPr id="48" name="Rectangle 47"/>
+          <p:cNvSpPr/>
+          <p:nvPr/>
+        </p:nvSpPr>
+        <p:spPr>
+          <a:xfrm>
+            <a:off x="8211311" y="5835749"/>
+            <a:ext cx="640080" cy="411870"/>
+          </a:xfrm>
+          <a:prstGeom prst="rect">
+            <a:avLst/>
+          </a:prstGeom>
+          <a:solidFill>
+            <a:srgbClr val="AAB8E8"/>
+          </a:solidFill>
+          <a:ln>
+            <a:noFill/>
+          </a:ln>
+          <a:effectLst/>
+        </p:spPr>
+        <p:style>
+          <a:lnRef idx="1">
+            <a:schemeClr val="accent1"/>
+          </a:lnRef>
+          <a:fillRef idx="3">
+            <a:schemeClr val="accent1"/>
+          </a:fillRef>
+          <a:effectRef idx="2">
+            <a:schemeClr val="accent1"/>
+          </a:effectRef>
+          <a:fontRef idx="minor">
+            <a:schemeClr val="lt1"/>
+          </a:fontRef>
+        </p:style>
+        <p:txBody>
+          <a:bodyPr rtlCol="0" anchor="ctr"/>
+          <a:lstStyle/>
+          <a:p>
+            <a:pPr algn="ctr"/>
+          </a:p>
+        </p:txBody>
+      </p:sp>
+      <p:sp>
+        <p:nvSpPr>
+          <p:cNvPr id="49" name="Rectangle 48"/>
+          <p:cNvSpPr/>
+          <p:nvPr/>
+        </p:nvSpPr>
+        <p:spPr>
+          <a:xfrm>
+            <a:off x="8211311" y="4386096"/>
+            <a:ext cx="640080" cy="1449653"/>
+          </a:xfrm>
+          <a:prstGeom prst="rect">
+            <a:avLst/>
+          </a:prstGeom>
+          <a:solidFill>
+            <a:srgbClr val="1428A0"/>
+          </a:solidFill>
+          <a:ln>
+            <a:noFill/>
+          </a:ln>
+          <a:effectLst/>
+        </p:spPr>
+        <p:style>
+          <a:lnRef idx="1">
+            <a:schemeClr val="accent1"/>
+          </a:lnRef>
+          <a:fillRef idx="3">
+            <a:schemeClr val="accent1"/>
+          </a:fillRef>
+          <a:effectRef idx="2">
+            <a:schemeClr val="accent1"/>
+          </a:effectRef>
+          <a:fontRef idx="minor">
+            <a:schemeClr val="lt1"/>
+          </a:fontRef>
+        </p:style>
+        <p:txBody>
+          <a:bodyPr rtlCol="0" anchor="ctr"/>
+          <a:lstStyle/>
+          <a:p>
+            <a:pPr algn="ctr"/>
+          </a:p>
+        </p:txBody>
+      </p:sp>
+      <p:sp>
+        <p:nvSpPr>
+          <p:cNvPr id="50" name="TextBox 49"/>
+          <p:cNvSpPr txBox="1"/>
+          <p:nvPr/>
+        </p:nvSpPr>
+        <p:spPr>
+          <a:xfrm>
+            <a:off x="7936991" y="4056912"/>
+            <a:ext cx="1188719" cy="292608"/>
+          </a:xfrm>
+          <a:prstGeom prst="rect">
+            <a:avLst/>
+          </a:prstGeom>
+          <a:noFill/>
+        </p:spPr>
+        <p:txBody>
+          <a:bodyPr wrap="square" anchor="ctr" lIns="0" rIns="0" tIns="0" bIns="0">
+            <a:spAutoFit/>
+          </a:bodyPr>
+          <a:lstStyle/>
+          <a:p>
+            <a:pPr algn="ctr">
+              <a:lnSpc>
+                <a:spcPct val="110000"/>
+              </a:lnSpc>
+            </a:pPr>
+            <a:r>
+              <a:rPr sz="1800" b="1">
+                <a:solidFill>
+                  <a:srgbClr val="1428A0"/>
+                </a:solidFill>
+                <a:latin typeface="Arial"/>
+                <a:ea typeface="Arial"/>
+              </a:rPr>
+              <a:t>1,078</a:t>
+            </a:r>
+          </a:p>
+        </p:txBody>
+      </p:sp>
+      <p:sp>
+        <p:nvSpPr>
+          <p:cNvPr id="51" name="TextBox 50"/>
+          <p:cNvSpPr txBox="1"/>
+          <p:nvPr/>
+        </p:nvSpPr>
+        <p:spPr>
+          <a:xfrm>
+            <a:off x="7982711" y="7936992"/>
+            <a:ext cx="1097280" cy="274320"/>
+          </a:xfrm>
+          <a:prstGeom prst="rect">
+            <a:avLst/>
+          </a:prstGeom>
+          <a:noFill/>
+        </p:spPr>
+        <p:txBody>
+          <a:bodyPr wrap="square" anchor="t" lIns="0" rIns="0" tIns="0" bIns="0">
+            <a:spAutoFit/>
+          </a:bodyPr>
+          <a:lstStyle/>
+          <a:p>
+            <a:pPr algn="ctr">
+              <a:lnSpc>
+                <a:spcPct val="110000"/>
+              </a:lnSpc>
+            </a:pPr>
+            <a:r>
+              <a:rPr sz="1600" b="1">
+                <a:solidFill>
+                  <a:srgbClr val="1A1A1A"/>
+                </a:solidFill>
+                <a:latin typeface="Arial"/>
+                <a:ea typeface="Arial"/>
+              </a:rPr>
+              <a:t>2030</a:t>
+            </a:r>
+          </a:p>
+        </p:txBody>
+      </p:sp>
+      <p:sp>
+        <p:nvSpPr>
+          <p:cNvPr id="52" name="Rectangle 51"/>
+          <p:cNvSpPr/>
+          <p:nvPr/>
+        </p:nvSpPr>
+        <p:spPr>
+          <a:xfrm>
+            <a:off x="8211311" y="3121298"/>
+            <a:ext cx="640080" cy="1264798"/>
+          </a:xfrm>
+          <a:prstGeom prst="rect">
+            <a:avLst/>
+          </a:prstGeom>
+          <a:noFill/>
+          <a:ln w="15875">
+            <a:solidFill>
+              <a:srgbClr val="555555"/>
+            </a:solidFill>
+            <a:prstDash val="dash"/>
+          </a:ln>
+          <a:effectLst/>
+        </p:spPr>
+        <p:style>
+          <a:lnRef idx="1">
+            <a:schemeClr val="accent1"/>
+          </a:lnRef>
+          <a:fillRef idx="3">
+            <a:schemeClr val="accent1"/>
+          </a:fillRef>
+          <a:effectRef idx="2">
+            <a:schemeClr val="accent1"/>
+          </a:effectRef>
+          <a:fontRef idx="minor">
+            <a:schemeClr val="lt1"/>
+          </a:fontRef>
+        </p:style>
+        <p:txBody>
+          <a:bodyPr rtlCol="0" anchor="ctr"/>
+          <a:lstStyle/>
+          <a:p>
+            <a:pPr algn="ctr"/>
+          </a:p>
+        </p:txBody>
+      </p:sp>
+      <p:sp>
+        <p:nvSpPr>
+          <p:cNvPr id="53" name="TextBox 52"/>
+          <p:cNvSpPr txBox="1"/>
+          <p:nvPr/>
+        </p:nvSpPr>
+        <p:spPr>
+          <a:xfrm>
+            <a:off x="8979407" y="3461089"/>
+            <a:ext cx="2377440" cy="585216"/>
+          </a:xfrm>
+          <a:prstGeom prst="rect">
+            <a:avLst/>
+          </a:prstGeom>
+          <a:noFill/>
+        </p:spPr>
+        <p:txBody>
+          <a:bodyPr wrap="square" anchor="ctr" lIns="0" rIns="0" tIns="0" bIns="0">
+            <a:spAutoFit/>
+          </a:bodyPr>
+          <a:lstStyle/>
+          <a:p>
+            <a:pPr algn="l">
+              <a:lnSpc>
+                <a:spcPct val="100000"/>
+              </a:lnSpc>
+            </a:pPr>
+            <a:r>
+              <a:rPr sz="1800" b="1">
+                <a:solidFill>
+                  <a:srgbClr val="1A1A1A"/>
+                </a:solidFill>
+                <a:latin typeface="Arial"/>
+                <a:ea typeface="Arial"/>
+              </a:rPr>
+              <a:t>HDD 대체 잠재</a:t>
+            </a:r>
+          </a:p>
+          <a:p>
+            <a:pPr algn="l">
+              <a:lnSpc>
+                <a:spcPct val="100000"/>
+              </a:lnSpc>
+            </a:pPr>
+            <a:r>
+              <a:rPr sz="1600" b="0">
+                <a:solidFill>
+                  <a:srgbClr val="555555"/>
+                </a:solidFill>
+                <a:latin typeface="Arial"/>
+                <a:ea typeface="Arial"/>
+              </a:rPr>
+              <a:t>니어라인의 10%, 390</a:t>
+            </a:r>
+          </a:p>
+        </p:txBody>
+      </p:sp>
+      <p:sp>
+        <p:nvSpPr>
+          <p:cNvPr id="54" name="TextBox 53"/>
+          <p:cNvSpPr txBox="1"/>
+          <p:nvPr/>
+        </p:nvSpPr>
+        <p:spPr>
+          <a:xfrm>
+            <a:off x="8979407" y="6772265"/>
+            <a:ext cx="2377440" cy="585216"/>
+          </a:xfrm>
+          <a:prstGeom prst="rect">
+            <a:avLst/>
+          </a:prstGeom>
+          <a:noFill/>
+        </p:spPr>
+        <p:txBody>
+          <a:bodyPr wrap="square" anchor="ctr" lIns="0" rIns="0" tIns="0" bIns="0">
+            <a:spAutoFit/>
+          </a:bodyPr>
+          <a:lstStyle/>
+          <a:p>
+            <a:pPr algn="l">
+              <a:lnSpc>
+                <a:spcPct val="100000"/>
+              </a:lnSpc>
+            </a:pPr>
+            <a:r>
+              <a:rPr sz="1800" b="1">
+                <a:solidFill>
+                  <a:srgbClr val="1A1A1A"/>
+                </a:solidFill>
+                <a:latin typeface="Arial"/>
+                <a:ea typeface="Arial"/>
+              </a:rPr>
+              <a:t>범용 · 엔터프라이즈</a:t>
+            </a:r>
+          </a:p>
+          <a:p>
+            <a:pPr algn="l">
+              <a:lnSpc>
+                <a:spcPct val="100000"/>
+              </a:lnSpc>
+            </a:pPr>
+            <a:r>
+              <a:rPr sz="1600" b="0">
+                <a:solidFill>
+                  <a:srgbClr val="555555"/>
+                </a:solidFill>
+                <a:latin typeface="Arial"/>
+                <a:ea typeface="Arial"/>
+              </a:rPr>
+              <a:t>504 (산술)</a:t>
+            </a:r>
+          </a:p>
+        </p:txBody>
+      </p:sp>
+      <p:sp>
+        <p:nvSpPr>
+          <p:cNvPr id="55" name="TextBox 54"/>
+          <p:cNvSpPr txBox="1"/>
+          <p:nvPr/>
+        </p:nvSpPr>
+        <p:spPr>
+          <a:xfrm>
+            <a:off x="8979407" y="5749076"/>
+            <a:ext cx="2377440" cy="585216"/>
+          </a:xfrm>
+          <a:prstGeom prst="rect">
+            <a:avLst/>
+          </a:prstGeom>
+          <a:noFill/>
+        </p:spPr>
+        <p:txBody>
+          <a:bodyPr wrap="square" anchor="ctr" lIns="0" rIns="0" tIns="0" bIns="0">
+            <a:spAutoFit/>
+          </a:bodyPr>
+          <a:lstStyle/>
+          <a:p>
+            <a:pPr algn="l">
+              <a:lnSpc>
+                <a:spcPct val="100000"/>
+              </a:lnSpc>
+            </a:pPr>
+            <a:r>
+              <a:rPr sz="1800" b="1">
+                <a:solidFill>
+                  <a:srgbClr val="1A1A1A"/>
+                </a:solidFill>
+                <a:latin typeface="Arial"/>
+                <a:ea typeface="Arial"/>
+              </a:rPr>
+              <a:t>AI 학습</a:t>
+            </a:r>
+          </a:p>
+          <a:p>
+            <a:pPr algn="l">
+              <a:lnSpc>
+                <a:spcPct val="100000"/>
+              </a:lnSpc>
+            </a:pPr>
+            <a:r>
+              <a:rPr sz="1600" b="0">
+                <a:solidFill>
+                  <a:srgbClr val="555555"/>
+                </a:solidFill>
+                <a:latin typeface="Arial"/>
+                <a:ea typeface="Arial"/>
+              </a:rPr>
+              <a:t>127</a:t>
+            </a:r>
+          </a:p>
+        </p:txBody>
+      </p:sp>
+      <p:sp>
+        <p:nvSpPr>
+          <p:cNvPr id="56" name="TextBox 55"/>
+          <p:cNvSpPr txBox="1"/>
+          <p:nvPr/>
+        </p:nvSpPr>
+        <p:spPr>
+          <a:xfrm>
+            <a:off x="8979407" y="4818314"/>
+            <a:ext cx="2377440" cy="585216"/>
+          </a:xfrm>
+          <a:prstGeom prst="rect">
+            <a:avLst/>
+          </a:prstGeom>
+          <a:noFill/>
+        </p:spPr>
+        <p:txBody>
+          <a:bodyPr wrap="square" anchor="ctr" lIns="0" rIns="0" tIns="0" bIns="0">
+            <a:spAutoFit/>
+          </a:bodyPr>
+          <a:lstStyle/>
+          <a:p>
+            <a:pPr algn="l">
+              <a:lnSpc>
+                <a:spcPct val="100000"/>
+              </a:lnSpc>
+            </a:pPr>
+            <a:r>
+              <a:rPr sz="1800" b="1">
+                <a:solidFill>
+                  <a:srgbClr val="1428A0"/>
+                </a:solidFill>
+                <a:latin typeface="Arial"/>
+                <a:ea typeface="Arial"/>
+              </a:rPr>
+              <a:t>AI 추론</a:t>
+            </a:r>
+          </a:p>
+          <a:p>
+            <a:pPr algn="l">
+              <a:lnSpc>
+                <a:spcPct val="100000"/>
+              </a:lnSpc>
+            </a:pPr>
+            <a:r>
+              <a:rPr sz="1600" b="1">
+                <a:solidFill>
+                  <a:srgbClr val="1428A0"/>
+                </a:solidFill>
+                <a:latin typeface="Arial"/>
+                <a:ea typeface="Arial"/>
+              </a:rPr>
+              <a:t>447</a:t>
+            </a:r>
+          </a:p>
+        </p:txBody>
+      </p:sp>
+      <p:cxnSp>
+        <p:nvCxnSpPr>
+          <p:cNvPr id="57" name="Connector 56"/>
+          <p:cNvCxnSpPr/>
+          <p:nvPr/>
+        </p:nvCxnSpPr>
+        <p:spPr>
+          <a:xfrm>
+            <a:off x="6409944" y="4963363"/>
+            <a:ext cx="1653589" cy="0"/>
+          </a:xfrm>
+          <a:prstGeom prst="line">
+            <a:avLst/>
+          </a:prstGeom>
+          <a:ln w="22225">
+            <a:solidFill>
+              <a:srgbClr val="3C5AC8"/>
+            </a:solidFill>
+            <a:prstDash val="dash"/>
+          </a:ln>
+        </p:spPr>
+        <p:style>
+          <a:lnRef idx="2">
+            <a:schemeClr val="accent1"/>
+          </a:lnRef>
+          <a:fillRef idx="0">
+            <a:schemeClr val="accent1"/>
+          </a:fillRef>
+          <a:effectRef idx="1">
+            <a:schemeClr val="accent1"/>
+          </a:effectRef>
+          <a:fontRef idx="minor">
+            <a:schemeClr val="tx1"/>
+          </a:fontRef>
+        </p:style>
+      </p:cxnSp>
+      <p:sp>
+        <p:nvSpPr>
+          <p:cNvPr id="58" name="Oval 57"/>
+          <p:cNvSpPr/>
+          <p:nvPr/>
+        </p:nvSpPr>
+        <p:spPr>
+          <a:xfrm>
+            <a:off x="8008669" y="4908499"/>
+            <a:ext cx="109728" cy="109728"/>
+          </a:xfrm>
+          <a:prstGeom prst="ellipse">
+            <a:avLst/>
+          </a:prstGeom>
+          <a:solidFill>
+            <a:srgbClr val="FFFFFF"/>
+          </a:solidFill>
+          <a:ln w="19050">
+            <a:solidFill>
+              <a:srgbClr val="3C5AC8"/>
+            </a:solidFill>
+          </a:ln>
+          <a:effectLst/>
+        </p:spPr>
+        <p:style>
+          <a:lnRef idx="1">
+            <a:schemeClr val="accent1"/>
+          </a:lnRef>
+          <a:fillRef idx="3">
+            <a:schemeClr val="accent1"/>
+          </a:fillRef>
+          <a:effectRef idx="2">
+            <a:schemeClr val="accent1"/>
+          </a:effectRef>
+          <a:fontRef idx="minor">
+            <a:schemeClr val="lt1"/>
+          </a:fontRef>
+        </p:style>
+        <p:txBody>
+          <a:bodyPr rtlCol="0" anchor="ctr"/>
+          <a:lstStyle/>
+          <a:p>
+            <a:pPr algn="ctr"/>
+          </a:p>
+        </p:txBody>
+      </p:sp>
+      <p:sp>
+        <p:nvSpPr>
+          <p:cNvPr id="59" name="Diamond 58"/>
+          <p:cNvSpPr/>
+          <p:nvPr/>
+        </p:nvSpPr>
+        <p:spPr>
+          <a:xfrm>
+            <a:off x="6281928" y="4835347"/>
+            <a:ext cx="256032" cy="256032"/>
+          </a:xfrm>
+          <a:prstGeom prst="diamond">
+            <a:avLst/>
+          </a:prstGeom>
+          <a:solidFill>
+            <a:srgbClr val="3C5AC8"/>
+          </a:solidFill>
+          <a:ln w="12700">
+            <a:solidFill>
+              <a:srgbClr val="FFFFFF"/>
+            </a:solidFill>
+          </a:ln>
+          <a:effectLst/>
+        </p:spPr>
+        <p:style>
+          <a:lnRef idx="1">
+            <a:schemeClr val="accent1"/>
+          </a:lnRef>
+          <a:fillRef idx="3">
+            <a:schemeClr val="accent1"/>
+          </a:fillRef>
+          <a:effectRef idx="2">
+            <a:schemeClr val="accent1"/>
+          </a:effectRef>
+          <a:fontRef idx="minor">
+            <a:schemeClr val="lt1"/>
+          </a:fontRef>
+        </p:style>
+        <p:txBody>
+          <a:bodyPr rtlCol="0" anchor="ctr"/>
+          <a:lstStyle/>
+          <a:p>
+            <a:pPr algn="ctr"/>
+          </a:p>
+        </p:txBody>
+      </p:sp>
+      <p:sp>
+        <p:nvSpPr>
+          <p:cNvPr id="60" name="TextBox 59"/>
+          <p:cNvSpPr txBox="1"/>
+          <p:nvPr/>
+        </p:nvSpPr>
+        <p:spPr>
+          <a:xfrm>
+            <a:off x="4306824" y="4807915"/>
+            <a:ext cx="1920240" cy="310896"/>
+          </a:xfrm>
+          <a:prstGeom prst="rect">
+            <a:avLst/>
+          </a:prstGeom>
+          <a:noFill/>
+        </p:spPr>
+        <p:txBody>
+          <a:bodyPr wrap="square" anchor="ctr" lIns="0" rIns="0" tIns="0" bIns="0">
+            <a:spAutoFit/>
+          </a:bodyPr>
+          <a:lstStyle/>
+          <a:p>
+            <a:pPr algn="r">
+              <a:lnSpc>
+                <a:spcPct val="110000"/>
+              </a:lnSpc>
+            </a:pPr>
+            <a:r>
+              <a:rPr sz="1800" b="1">
+                <a:solidFill>
+                  <a:srgbClr val="3C5AC8"/>
+                </a:solidFill>
+                <a:latin typeface="Arial"/>
+                <a:ea typeface="Arial"/>
+              </a:rPr>
+              <a:t>약 900</a:t>
+            </a:r>
+          </a:p>
+        </p:txBody>
+      </p:sp>
+      <p:sp>
+        <p:nvSpPr>
+          <p:cNvPr id="61" name="TextBox 60"/>
+          <p:cNvSpPr txBox="1"/>
+          <p:nvPr/>
+        </p:nvSpPr>
+        <p:spPr>
+          <a:xfrm>
+            <a:off x="6592824" y="4579315"/>
+            <a:ext cx="1470709" cy="292608"/>
+          </a:xfrm>
+          <a:prstGeom prst="rect">
+            <a:avLst/>
+          </a:prstGeom>
+          <a:noFill/>
+        </p:spPr>
+        <p:txBody>
+          <a:bodyPr wrap="square" anchor="ctr" lIns="0" rIns="0" tIns="0" bIns="0">
+            <a:spAutoFit/>
+          </a:bodyPr>
+          <a:lstStyle/>
+          <a:p>
+            <a:pPr algn="ctr">
+              <a:lnSpc>
+                <a:spcPct val="110000"/>
+              </a:lnSpc>
+            </a:pPr>
+            <a:r>
+              <a:rPr sz="1600" b="1">
+                <a:solidFill>
+                  <a:srgbClr val="3C5AC8"/>
+                </a:solidFill>
+                <a:latin typeface="Arial"/>
+                <a:ea typeface="Arial"/>
+              </a:rPr>
+              <a:t>약 1.5년</a:t>
+            </a:r>
+          </a:p>
+        </p:txBody>
+      </p:sp>
+      <p:sp>
+        <p:nvSpPr>
+          <p:cNvPr id="62" name="TextBox 61"/>
+          <p:cNvSpPr txBox="1"/>
+          <p:nvPr/>
+        </p:nvSpPr>
+        <p:spPr>
+          <a:xfrm>
+            <a:off x="2807208" y="3082381"/>
+            <a:ext cx="4206240" cy="585216"/>
+          </a:xfrm>
+          <a:prstGeom prst="rect">
+            <a:avLst/>
+          </a:prstGeom>
+          <a:noFill/>
+        </p:spPr>
+        <p:txBody>
+          <a:bodyPr wrap="square" anchor="t" lIns="0" rIns="0" tIns="0" bIns="0">
+            <a:spAutoFit/>
+          </a:bodyPr>
+          <a:lstStyle/>
+          <a:p>
+            <a:pPr algn="l">
+              <a:lnSpc>
+                <a:spcPct val="100000"/>
+              </a:lnSpc>
+            </a:pPr>
+            <a:r>
+              <a:rPr sz="1800" b="1">
+                <a:solidFill>
+                  <a:srgbClr val="3C5AC8"/>
+                </a:solidFill>
+                <a:latin typeface="Arial"/>
+                <a:ea typeface="Arial"/>
+              </a:rPr>
+              <a:t>◆ 2026년 최신 전망 (2028)</a:t>
+            </a:r>
+          </a:p>
+          <a:p>
+            <a:pPr algn="l">
+              <a:lnSpc>
+                <a:spcPct val="100000"/>
+              </a:lnSpc>
+            </a:pPr>
+            <a:r>
+              <a:rPr sz="1600" b="0">
+                <a:solidFill>
+                  <a:srgbClr val="555555"/>
+                </a:solidFill>
+                <a:latin typeface="Arial"/>
+                <a:ea typeface="Arial"/>
+              </a:rPr>
+              <a:t>JPM · Kioxia, 정의 차이로 방향만 비교</a:t>
+            </a:r>
+          </a:p>
+        </p:txBody>
+      </p:sp>
+      <p:sp>
+        <p:nvSpPr>
+          <p:cNvPr id="63" name="TextBox 62"/>
+          <p:cNvSpPr txBox="1"/>
+          <p:nvPr/>
+        </p:nvSpPr>
+        <p:spPr>
+          <a:xfrm>
+            <a:off x="12198096" y="2139696"/>
+            <a:ext cx="5367528" cy="329184"/>
+          </a:xfrm>
+          <a:prstGeom prst="rect">
+            <a:avLst/>
+          </a:prstGeom>
+          <a:noFill/>
+        </p:spPr>
+        <p:txBody>
+          <a:bodyPr wrap="square" anchor="ctr" lIns="0" rIns="0" tIns="0" bIns="0">
+            <a:spAutoFit/>
+          </a:bodyPr>
+          <a:lstStyle/>
+          <a:p>
+            <a:pPr algn="l">
+              <a:lnSpc>
+                <a:spcPct val="110000"/>
+              </a:lnSpc>
+            </a:pPr>
+            <a:r>
+              <a:rPr sz="2000" b="1">
+                <a:solidFill>
+                  <a:srgbClr val="1A1A1A"/>
+                </a:solidFill>
+                <a:latin typeface="Arial"/>
+                <a:ea typeface="Arial"/>
+              </a:rPr>
+              <a:t>주요 포인트</a:t>
+            </a:r>
+          </a:p>
+        </p:txBody>
+      </p:sp>
+      <p:sp>
+        <p:nvSpPr>
+          <p:cNvPr id="64" name="Rounded Rectangle 63"/>
+          <p:cNvSpPr/>
+          <p:nvPr/>
+        </p:nvSpPr>
+        <p:spPr>
+          <a:xfrm>
+            <a:off x="12198096" y="2578608"/>
+            <a:ext cx="5367528" cy="1682496"/>
+          </a:xfrm>
+          <a:prstGeom prst="roundRect">
+            <a:avLst>
+              <a:gd name="adj" fmla="val 4347"/>
+            </a:avLst>
+          </a:prstGeom>
+          <a:solidFill>
+            <a:srgbClr val="EEF1FA"/>
+          </a:solidFill>
+          <a:ln>
+            <a:noFill/>
+          </a:ln>
+          <a:effectLst/>
+        </p:spPr>
+        <p:style>
+          <a:lnRef idx="1">
+            <a:schemeClr val="accent1"/>
+          </a:lnRef>
+          <a:fillRef idx="3">
+            <a:schemeClr val="accent1"/>
+          </a:fillRef>
+          <a:effectRef idx="2">
+            <a:schemeClr val="accent1"/>
+          </a:effectRef>
+          <a:fontRef idx="minor">
+            <a:schemeClr val="lt1"/>
+          </a:fontRef>
+        </p:style>
+        <p:txBody>
+          <a:bodyPr rtlCol="0" anchor="ctr"/>
+          <a:lstStyle/>
+          <a:p>
+            <a:pPr algn="ctr"/>
+          </a:p>
+        </p:txBody>
+      </p:sp>
+      <p:sp>
+        <p:nvSpPr>
+          <p:cNvPr id="65" name="TextBox 64"/>
+          <p:cNvSpPr txBox="1"/>
+          <p:nvPr/>
+        </p:nvSpPr>
+        <p:spPr>
+          <a:xfrm>
+            <a:off x="12417552" y="2688336"/>
+            <a:ext cx="4928616" cy="310896"/>
+          </a:xfrm>
+          <a:prstGeom prst="rect">
+            <a:avLst/>
+          </a:prstGeom>
+          <a:noFill/>
+        </p:spPr>
+        <p:txBody>
+          <a:bodyPr wrap="square" anchor="ctr" lIns="0" rIns="0" tIns="0" bIns="0">
+            <a:spAutoFit/>
+          </a:bodyPr>
+          <a:lstStyle/>
+          <a:p>
+            <a:pPr algn="l">
+              <a:lnSpc>
+                <a:spcPct val="110000"/>
+              </a:lnSpc>
+            </a:pPr>
+            <a:r>
+              <a:rPr sz="1800" b="1">
+                <a:solidFill>
+                  <a:srgbClr val="1428A0"/>
+                </a:solidFill>
+                <a:latin typeface="Arial"/>
+                <a:ea typeface="Arial"/>
+              </a:rPr>
+              <a:t>AI 추론</a:t>
+            </a:r>
+          </a:p>
+        </p:txBody>
+      </p:sp>
+      <p:sp>
+        <p:nvSpPr>
+          <p:cNvPr id="66" name="TextBox 65"/>
+          <p:cNvSpPr txBox="1"/>
+          <p:nvPr/>
+        </p:nvSpPr>
+        <p:spPr>
+          <a:xfrm>
+            <a:off x="12417552" y="2980944"/>
+            <a:ext cx="4928616" cy="658368"/>
+          </a:xfrm>
+          <a:prstGeom prst="rect">
+            <a:avLst/>
+          </a:prstGeom>
+          <a:noFill/>
+        </p:spPr>
+        <p:txBody>
+          <a:bodyPr wrap="square" anchor="ctr" lIns="0" rIns="0" tIns="0" bIns="0">
+            <a:spAutoFit/>
+          </a:bodyPr>
+          <a:lstStyle/>
+          <a:p>
+            <a:pPr algn="l">
+              <a:lnSpc>
+                <a:spcPct val="110000"/>
+              </a:lnSpc>
+            </a:pPr>
+            <a:r>
+              <a:rPr sz="4400" b="1">
+                <a:solidFill>
+                  <a:srgbClr val="1428A0"/>
+                </a:solidFill>
+                <a:latin typeface="Arial"/>
+                <a:ea typeface="Arial"/>
+              </a:rPr>
+              <a:t>75</a:t>
+            </a:r>
+            <a:r>
+              <a:rPr sz="2200" b="1">
+                <a:solidFill>
+                  <a:srgbClr val="1428A0"/>
+                </a:solidFill>
+                <a:latin typeface="Arial"/>
+                <a:ea typeface="Arial"/>
+              </a:rPr>
+              <a:t> 배</a:t>
+            </a:r>
+          </a:p>
+        </p:txBody>
+      </p:sp>
+      <p:sp>
+        <p:nvSpPr>
+          <p:cNvPr id="67" name="TextBox 66"/>
+          <p:cNvSpPr txBox="1"/>
+          <p:nvPr/>
+        </p:nvSpPr>
+        <p:spPr>
+          <a:xfrm>
+            <a:off x="12417552" y="3621024"/>
+            <a:ext cx="4928616" cy="585216"/>
+          </a:xfrm>
+          <a:prstGeom prst="rect">
+            <a:avLst/>
+          </a:prstGeom>
+          <a:noFill/>
+        </p:spPr>
+        <p:txBody>
+          <a:bodyPr wrap="square" anchor="t" lIns="0" rIns="0" tIns="0" bIns="0">
+            <a:spAutoFit/>
+          </a:bodyPr>
+          <a:lstStyle/>
+          <a:p>
+            <a:pPr algn="l">
+              <a:lnSpc>
+                <a:spcPct val="100000"/>
+              </a:lnSpc>
+            </a:pPr>
+            <a:r>
+              <a:rPr sz="1600" b="0">
+                <a:solidFill>
+                  <a:srgbClr val="555555"/>
+                </a:solidFill>
+                <a:latin typeface="Arial"/>
+                <a:ea typeface="Arial"/>
+              </a:rPr>
+              <a:t>6 → 447EB</a:t>
+            </a:r>
+          </a:p>
+          <a:p>
+            <a:pPr algn="l">
+              <a:lnSpc>
+                <a:spcPct val="100000"/>
+              </a:lnSpc>
+            </a:pPr>
+            <a:r>
+              <a:rPr sz="1600" b="0">
+                <a:solidFill>
+                  <a:srgbClr val="555555"/>
+                </a:solidFill>
+                <a:latin typeface="Arial"/>
+                <a:ea typeface="Arial"/>
+              </a:rPr>
+              <a:t>2030년 eSSD의 41%</a:t>
+            </a:r>
+          </a:p>
+        </p:txBody>
+      </p:sp>
+      <p:sp>
+        <p:nvSpPr>
+          <p:cNvPr id="68" name="Rounded Rectangle 67"/>
+          <p:cNvSpPr/>
+          <p:nvPr/>
+        </p:nvSpPr>
+        <p:spPr>
+          <a:xfrm>
+            <a:off x="12198096" y="4407408"/>
+            <a:ext cx="5367528" cy="1682496"/>
+          </a:xfrm>
+          <a:prstGeom prst="roundRect">
+            <a:avLst>
+              <a:gd name="adj" fmla="val 4347"/>
+            </a:avLst>
+          </a:prstGeom>
+          <a:solidFill>
+            <a:srgbClr val="F5F5F5"/>
+          </a:solidFill>
+          <a:ln>
+            <a:noFill/>
+          </a:ln>
+          <a:effectLst/>
+        </p:spPr>
+        <p:style>
+          <a:lnRef idx="1">
+            <a:schemeClr val="accent1"/>
+          </a:lnRef>
+          <a:fillRef idx="3">
+            <a:schemeClr val="accent1"/>
+          </a:fillRef>
+          <a:effectRef idx="2">
+            <a:schemeClr val="accent1"/>
+          </a:effectRef>
+          <a:fontRef idx="minor">
+            <a:schemeClr val="lt1"/>
+          </a:fontRef>
+        </p:style>
+        <p:txBody>
+          <a:bodyPr rtlCol="0" anchor="ctr"/>
+          <a:lstStyle/>
+          <a:p>
+            <a:pPr algn="ctr"/>
+          </a:p>
+        </p:txBody>
+      </p:sp>
+      <p:sp>
+        <p:nvSpPr>
+          <p:cNvPr id="69" name="TextBox 68"/>
+          <p:cNvSpPr txBox="1"/>
+          <p:nvPr/>
+        </p:nvSpPr>
+        <p:spPr>
+          <a:xfrm>
+            <a:off x="12417552" y="4517136"/>
+            <a:ext cx="4928616" cy="310896"/>
+          </a:xfrm>
+          <a:prstGeom prst="rect">
+            <a:avLst/>
+          </a:prstGeom>
+          <a:noFill/>
+        </p:spPr>
+        <p:txBody>
+          <a:bodyPr wrap="square" anchor="ctr" lIns="0" rIns="0" tIns="0" bIns="0">
+            <a:spAutoFit/>
+          </a:bodyPr>
+          <a:lstStyle/>
+          <a:p>
+            <a:pPr algn="l">
+              <a:lnSpc>
+                <a:spcPct val="110000"/>
+              </a:lnSpc>
+            </a:pPr>
+            <a:r>
+              <a:rPr sz="1800" b="1">
+                <a:solidFill>
+                  <a:srgbClr val="555555"/>
+                </a:solidFill>
+                <a:latin typeface="Arial"/>
+                <a:ea typeface="Arial"/>
+              </a:rPr>
+              <a:t>최신 전망</a:t>
+            </a:r>
+          </a:p>
+        </p:txBody>
+      </p:sp>
+      <p:sp>
+        <p:nvSpPr>
+          <p:cNvPr id="70" name="TextBox 69"/>
+          <p:cNvSpPr txBox="1"/>
+          <p:nvPr/>
+        </p:nvSpPr>
+        <p:spPr>
+          <a:xfrm>
+            <a:off x="12417552" y="4809744"/>
+            <a:ext cx="4928616" cy="658368"/>
+          </a:xfrm>
+          <a:prstGeom prst="rect">
+            <a:avLst/>
+          </a:prstGeom>
+          <a:noFill/>
+        </p:spPr>
+        <p:txBody>
+          <a:bodyPr wrap="square" anchor="ctr" lIns="0" rIns="0" tIns="0" bIns="0">
+            <a:spAutoFit/>
+          </a:bodyPr>
+          <a:lstStyle/>
+          <a:p>
+            <a:pPr algn="l">
+              <a:lnSpc>
+                <a:spcPct val="110000"/>
+              </a:lnSpc>
+            </a:pPr>
+            <a:r>
+              <a:rPr sz="4400" b="1">
+                <a:solidFill>
+                  <a:srgbClr val="1A1A1A"/>
+                </a:solidFill>
+                <a:latin typeface="Arial"/>
+                <a:ea typeface="Arial"/>
+              </a:rPr>
+              <a:t>1~2</a:t>
+            </a:r>
+            <a:r>
+              <a:rPr sz="2200" b="1">
+                <a:solidFill>
+                  <a:srgbClr val="1A1A1A"/>
+                </a:solidFill>
+                <a:latin typeface="Arial"/>
+                <a:ea typeface="Arial"/>
+              </a:rPr>
+              <a:t> 년 앞당김</a:t>
+            </a:r>
+          </a:p>
+        </p:txBody>
+      </p:sp>
+      <p:sp>
+        <p:nvSpPr>
+          <p:cNvPr id="71" name="TextBox 70"/>
+          <p:cNvSpPr txBox="1"/>
+          <p:nvPr/>
+        </p:nvSpPr>
+        <p:spPr>
+          <a:xfrm>
+            <a:off x="12417552" y="5449824"/>
+            <a:ext cx="4928616" cy="585216"/>
+          </a:xfrm>
+          <a:prstGeom prst="rect">
+            <a:avLst/>
+          </a:prstGeom>
+          <a:noFill/>
+        </p:spPr>
+        <p:txBody>
+          <a:bodyPr wrap="square" anchor="t" lIns="0" rIns="0" tIns="0" bIns="0">
+            <a:spAutoFit/>
+          </a:bodyPr>
+          <a:lstStyle/>
+          <a:p>
+            <a:pPr algn="l">
+              <a:lnSpc>
+                <a:spcPct val="100000"/>
+              </a:lnSpc>
+            </a:pPr>
+            <a:r>
+              <a:rPr sz="1600" b="0">
+                <a:solidFill>
+                  <a:srgbClr val="555555"/>
+                </a:solidFill>
+                <a:latin typeface="Arial"/>
+                <a:ea typeface="Arial"/>
+              </a:rPr>
+              <a:t>2028년 약 900EB</a:t>
+            </a:r>
+          </a:p>
+          <a:p>
+            <a:pPr algn="l">
+              <a:lnSpc>
+                <a:spcPct val="100000"/>
+              </a:lnSpc>
+            </a:pPr>
+            <a:r>
+              <a:rPr sz="1600" b="0">
+                <a:solidFill>
+                  <a:srgbClr val="555555"/>
+                </a:solidFill>
+                <a:latin typeface="Arial"/>
+                <a:ea typeface="Arial"/>
+              </a:rPr>
+              <a:t>2024년 전망으로는 2029~30년</a:t>
+            </a:r>
+          </a:p>
+        </p:txBody>
+      </p:sp>
+      <p:sp>
+        <p:nvSpPr>
+          <p:cNvPr id="72" name="Rounded Rectangle 71"/>
+          <p:cNvSpPr/>
+          <p:nvPr/>
+        </p:nvSpPr>
+        <p:spPr>
+          <a:xfrm>
+            <a:off x="12198096" y="6236208"/>
+            <a:ext cx="5367528" cy="1682496"/>
+          </a:xfrm>
+          <a:prstGeom prst="roundRect">
+            <a:avLst>
+              <a:gd name="adj" fmla="val 4347"/>
+            </a:avLst>
+          </a:prstGeom>
+          <a:solidFill>
+            <a:srgbClr val="F5F5F5"/>
+          </a:solidFill>
+          <a:ln>
+            <a:noFill/>
+          </a:ln>
+          <a:effectLst/>
+        </p:spPr>
+        <p:style>
+          <a:lnRef idx="1">
+            <a:schemeClr val="accent1"/>
+          </a:lnRef>
+          <a:fillRef idx="3">
+            <a:schemeClr val="accent1"/>
+          </a:fillRef>
+          <a:effectRef idx="2">
+            <a:schemeClr val="accent1"/>
+          </a:effectRef>
+          <a:fontRef idx="minor">
+            <a:schemeClr val="lt1"/>
+          </a:fontRef>
+        </p:style>
+        <p:txBody>
+          <a:bodyPr rtlCol="0" anchor="ctr"/>
+          <a:lstStyle/>
+          <a:p>
+            <a:pPr algn="ctr"/>
+          </a:p>
+        </p:txBody>
+      </p:sp>
+      <p:sp>
+        <p:nvSpPr>
+          <p:cNvPr id="73" name="TextBox 72"/>
+          <p:cNvSpPr txBox="1"/>
+          <p:nvPr/>
+        </p:nvSpPr>
+        <p:spPr>
+          <a:xfrm>
+            <a:off x="12417552" y="6345936"/>
+            <a:ext cx="4928616" cy="310896"/>
+          </a:xfrm>
+          <a:prstGeom prst="rect">
+            <a:avLst/>
+          </a:prstGeom>
+          <a:noFill/>
+        </p:spPr>
+        <p:txBody>
+          <a:bodyPr wrap="square" anchor="ctr" lIns="0" rIns="0" tIns="0" bIns="0">
+            <a:spAutoFit/>
+          </a:bodyPr>
+          <a:lstStyle/>
+          <a:p>
+            <a:pPr algn="l">
+              <a:lnSpc>
+                <a:spcPct val="110000"/>
+              </a:lnSpc>
+            </a:pPr>
+            <a:r>
+              <a:rPr sz="1800" b="1">
+                <a:solidFill>
+                  <a:srgbClr val="555555"/>
+                </a:solidFill>
+                <a:latin typeface="Arial"/>
+                <a:ea typeface="Arial"/>
+              </a:rPr>
+              <a:t>빠진 수요: HDD 대체</a:t>
+            </a:r>
+          </a:p>
+        </p:txBody>
+      </p:sp>
+      <p:sp>
+        <p:nvSpPr>
+          <p:cNvPr id="74" name="TextBox 73"/>
+          <p:cNvSpPr txBox="1"/>
+          <p:nvPr/>
+        </p:nvSpPr>
+        <p:spPr>
+          <a:xfrm>
+            <a:off x="12417552" y="6638544"/>
+            <a:ext cx="4928616" cy="658368"/>
+          </a:xfrm>
+          <a:prstGeom prst="rect">
+            <a:avLst/>
+          </a:prstGeom>
+          <a:noFill/>
+        </p:spPr>
+        <p:txBody>
+          <a:bodyPr wrap="square" anchor="ctr" lIns="0" rIns="0" tIns="0" bIns="0">
+            <a:spAutoFit/>
+          </a:bodyPr>
+          <a:lstStyle/>
+          <a:p>
+            <a:pPr algn="l">
+              <a:lnSpc>
+                <a:spcPct val="110000"/>
+              </a:lnSpc>
+            </a:pPr>
+            <a:r>
+              <a:rPr sz="4400" b="1">
+                <a:solidFill>
+                  <a:srgbClr val="1A1A1A"/>
+                </a:solidFill>
+                <a:latin typeface="Arial"/>
+                <a:ea typeface="Arial"/>
+              </a:rPr>
+              <a:t>390</a:t>
+            </a:r>
+            <a:r>
+              <a:rPr sz="2200" b="1">
+                <a:solidFill>
+                  <a:srgbClr val="1A1A1A"/>
+                </a:solidFill>
+                <a:latin typeface="Arial"/>
+                <a:ea typeface="Arial"/>
+              </a:rPr>
+              <a:t> EB</a:t>
+            </a:r>
+          </a:p>
+        </p:txBody>
+      </p:sp>
+      <p:sp>
+        <p:nvSpPr>
+          <p:cNvPr id="75" name="TextBox 74"/>
+          <p:cNvSpPr txBox="1"/>
+          <p:nvPr/>
+        </p:nvSpPr>
+        <p:spPr>
+          <a:xfrm>
+            <a:off x="12417552" y="7278624"/>
+            <a:ext cx="4928616" cy="585216"/>
+          </a:xfrm>
+          <a:prstGeom prst="rect">
+            <a:avLst/>
+          </a:prstGeom>
+          <a:noFill/>
+        </p:spPr>
+        <p:txBody>
+          <a:bodyPr wrap="square" anchor="t" lIns="0" rIns="0" tIns="0" bIns="0">
+            <a:spAutoFit/>
+          </a:bodyPr>
+          <a:lstStyle/>
+          <a:p>
+            <a:pPr algn="l">
+              <a:lnSpc>
+                <a:spcPct val="100000"/>
+              </a:lnSpc>
+            </a:pPr>
+            <a:r>
+              <a:rPr sz="1600" b="0">
+                <a:solidFill>
+                  <a:srgbClr val="555555"/>
+                </a:solidFill>
+                <a:latin typeface="Arial"/>
+                <a:ea typeface="Arial"/>
+              </a:rPr>
+              <a:t>니어라인 HDD 출하의 10%</a:t>
+            </a:r>
+          </a:p>
+          <a:p>
+            <a:pPr algn="l">
+              <a:lnSpc>
+                <a:spcPct val="100000"/>
+              </a:lnSpc>
+            </a:pPr>
+            <a:r>
+              <a:rPr sz="1600" b="0">
+                <a:solidFill>
+                  <a:srgbClr val="555555"/>
+                </a:solidFill>
+                <a:latin typeface="Arial"/>
+                <a:ea typeface="Arial"/>
+              </a:rPr>
+              <a:t>AI 학습 전체의 3배</a:t>
+            </a:r>
+          </a:p>
+        </p:txBody>
+      </p:sp>
+      <p:sp>
+        <p:nvSpPr>
+          <p:cNvPr id="76" name="TextBox 75"/>
+          <p:cNvSpPr txBox="1"/>
+          <p:nvPr/>
+        </p:nvSpPr>
+        <p:spPr>
+          <a:xfrm>
+            <a:off x="12198096" y="8065008"/>
+            <a:ext cx="5367528" cy="329184"/>
+          </a:xfrm>
+          <a:prstGeom prst="rect">
+            <a:avLst/>
+          </a:prstGeom>
+          <a:noFill/>
+        </p:spPr>
+        <p:txBody>
+          <a:bodyPr wrap="square" anchor="ctr" lIns="0" rIns="0" tIns="0" bIns="0">
+            <a:spAutoFit/>
+          </a:bodyPr>
+          <a:lstStyle/>
+          <a:p>
+            <a:pPr algn="l">
+              <a:lnSpc>
+                <a:spcPct val="110000"/>
+              </a:lnSpc>
+            </a:pPr>
+            <a:r>
+              <a:rPr sz="1600" b="0">
+                <a:solidFill>
+                  <a:srgbClr val="555555"/>
+                </a:solidFill>
+                <a:latin typeface="Arial"/>
+                <a:ea typeface="Arial"/>
+              </a:rPr>
+              <a:t>에이전트는 별도 전망 없음 (추론 · 범용에 포함)</a:t>
+            </a:r>
+          </a:p>
+        </p:txBody>
+      </p:sp>
+      <p:sp>
+        <p:nvSpPr>
+          <p:cNvPr id="77" name="Rectangle 76"/>
+          <p:cNvSpPr/>
+          <p:nvPr/>
+        </p:nvSpPr>
+        <p:spPr>
+          <a:xfrm>
+            <a:off x="722376" y="8631936"/>
+            <a:ext cx="16843248" cy="731520"/>
+          </a:xfrm>
+          <a:prstGeom prst="rect">
+            <a:avLst/>
+          </a:prstGeom>
+          <a:solidFill>
+            <a:srgbClr val="1428A0"/>
+          </a:solidFill>
+          <a:ln>
+            <a:noFill/>
+          </a:ln>
+          <a:effectLst/>
+        </p:spPr>
+        <p:style>
+          <a:lnRef idx="1">
+            <a:schemeClr val="accent1"/>
+          </a:lnRef>
+          <a:fillRef idx="3">
+            <a:schemeClr val="accent1"/>
+          </a:fillRef>
+          <a:effectRef idx="2">
+            <a:schemeClr val="accent1"/>
+          </a:effectRef>
+          <a:fontRef idx="minor">
+            <a:schemeClr val="lt1"/>
+          </a:fontRef>
+        </p:style>
+        <p:txBody>
+          <a:bodyPr rtlCol="0" anchor="ctr"/>
+          <a:lstStyle/>
+          <a:p>
+            <a:pPr algn="ctr"/>
+          </a:p>
+        </p:txBody>
+      </p:sp>
+      <p:sp>
+        <p:nvSpPr>
+          <p:cNvPr id="78" name="TextBox 77"/>
+          <p:cNvSpPr txBox="1"/>
+          <p:nvPr/>
+        </p:nvSpPr>
+        <p:spPr>
+          <a:xfrm>
+            <a:off x="1088136" y="8631936"/>
+            <a:ext cx="1234440" cy="731520"/>
+          </a:xfrm>
+          <a:prstGeom prst="rect">
+            <a:avLst/>
+          </a:prstGeom>
+          <a:noFill/>
+        </p:spPr>
+        <p:txBody>
+          <a:bodyPr wrap="square" anchor="ctr" lIns="0" rIns="0" tIns="0" bIns="0">
+            <a:spAutoFit/>
+          </a:bodyPr>
+          <a:lstStyle/>
+          <a:p>
+            <a:pPr algn="l">
+              <a:lnSpc>
+                <a:spcPct val="110000"/>
+              </a:lnSpc>
+            </a:pPr>
+            <a:r>
+              <a:rPr sz="2000" b="0">
+                <a:solidFill>
+                  <a:srgbClr val="AAB8E8"/>
+                </a:solidFill>
+                <a:latin typeface="Arial"/>
+                <a:ea typeface="Arial"/>
+              </a:rPr>
+              <a:t>참고</a:t>
+            </a:r>
+          </a:p>
+        </p:txBody>
+      </p:sp>
+      <p:sp>
+        <p:nvSpPr>
+          <p:cNvPr id="79" name="TextBox 78"/>
+          <p:cNvSpPr txBox="1"/>
+          <p:nvPr/>
+        </p:nvSpPr>
+        <p:spPr>
+          <a:xfrm>
+            <a:off x="2322576" y="8631936"/>
+            <a:ext cx="15060168" cy="731520"/>
+          </a:xfrm>
+          <a:prstGeom prst="rect">
+            <a:avLst/>
+          </a:prstGeom>
+          <a:noFill/>
+        </p:spPr>
+        <p:txBody>
+          <a:bodyPr wrap="square" anchor="ctr" lIns="0" rIns="0" tIns="0" bIns="0">
+            <a:spAutoFit/>
+          </a:bodyPr>
+          <a:lstStyle/>
+          <a:p>
+            <a:pPr algn="l">
+              <a:lnSpc>
+                <a:spcPct val="110000"/>
+              </a:lnSpc>
+            </a:pPr>
+            <a:r>
+              <a:rPr sz="2400" b="1">
+                <a:solidFill>
+                  <a:srgbClr val="FFFFFF"/>
+                </a:solidFill>
+                <a:latin typeface="Arial"/>
+                <a:ea typeface="Arial"/>
+              </a:rPr>
+              <a:t>수요의 중심은 AI 추론이고, 물량으로 가장 큰 잠재 수요는 HDD 대체입니다</a:t>
+            </a:r>
+          </a:p>
+        </p:txBody>
+      </p:sp>
+      <p:sp>
+        <p:nvSpPr>
+          <p:cNvPr id="80" name="TextBox 79"/>
+          <p:cNvSpPr txBox="1"/>
+          <p:nvPr/>
+        </p:nvSpPr>
+        <p:spPr>
+          <a:xfrm>
+            <a:off x="722376" y="9601200"/>
+            <a:ext cx="15453359" cy="566928"/>
+          </a:xfrm>
+          <a:prstGeom prst="rect">
+            <a:avLst/>
+          </a:prstGeom>
+          <a:noFill/>
+        </p:spPr>
+        <p:txBody>
+          <a:bodyPr wrap="square" anchor="t" lIns="0" rIns="0" tIns="0" bIns="0">
+            <a:spAutoFit/>
+          </a:bodyPr>
+          <a:lstStyle/>
+          <a:p>
+            <a:pPr algn="l">
+              <a:lnSpc>
+                <a:spcPct val="105000"/>
+              </a:lnSpc>
+            </a:pPr>
+            <a:r>
+              <a:rPr sz="1500" b="0">
+                <a:solidFill>
+                  <a:srgbClr val="555555"/>
+                </a:solidFill>
+                <a:latin typeface="Arial"/>
+                <a:ea typeface="Arial"/>
+              </a:rPr>
+              <a:t>출처: McKinsey(2024-12, 범용 = 총량 1,078 − 학습 − 추론 산술, 2025~29 보간) · Kioxia(2026-06, TechInsights 인용 DC 플래시) · JPM(2026-01) · HDD 대체 = Seagate · WD 니어라인 가이던스 산술 · 기관마다 정의 다름, 모두 검색 확인</a:t>
+            </a:r>
+          </a:p>
+        </p:txBody>
+      </p:sp>
+      <p:sp>
+        <p:nvSpPr>
+          <p:cNvPr id="81" name="TextBox 80"/>
+          <p:cNvSpPr txBox="1"/>
+          <p:nvPr/>
+        </p:nvSpPr>
+        <p:spPr>
+          <a:xfrm>
+            <a:off x="16468344" y="9601200"/>
+            <a:ext cx="1097280" cy="310896"/>
+          </a:xfrm>
+          <a:prstGeom prst="rect">
+            <a:avLst/>
+          </a:prstGeom>
+          <a:noFill/>
+        </p:spPr>
+        <p:txBody>
+          <a:bodyPr wrap="square" anchor="t" lIns="0" rIns="0" tIns="0" bIns="0">
+            <a:spAutoFit/>
+          </a:bodyPr>
+          <a:lstStyle/>
+          <a:p>
+            <a:pPr algn="r">
+              <a:lnSpc>
+                <a:spcPct val="110000"/>
+              </a:lnSpc>
+            </a:pPr>
+            <a:r>
+              <a:rPr sz="1600" b="0">
+                <a:solidFill>
+                  <a:srgbClr val="555555"/>
+                </a:solidFill>
+                <a:latin typeface="Arial"/>
+                <a:ea typeface="Arial"/>
+              </a:rPr>
+              <a:t>5 / 5</a:t>
             </a:r>
           </a:p>
         </p:txBody>

--- a/outputs/presentation/ssd-future-ready-strategy.pptx
+++ b/outputs/presentation/ssd-future-ready-strategy.pptx
@@ -786,7 +786,7 @@
           <a:lstStyle/>
           <a:p>
             <a:r>
-              <a:t>참고 자료입니다. 1장에서 본 데이터센터 응용 네 가지가 2030년까지 어느 정도의 수요가 되는지 공개 전망으로 정리했습니다. 막대는 McKinsey의 2024년 말 기준 시나리오입니다. eSSD 수요는 2024년 181엑사바이트에서 2030년 1,078엑사바이트로 약 6배가 됩니다. 2030년과 2024년 값은 McKinsey 수치이고, 그 사이 해는 수요처별 연평균 성장률로 이은 과제팀 산술입니다. 가장 큰 몫은 AI 추론입니다. KV 캐시와 RAG를 포함한 추론 수요는 6에서 447엑사바이트로 약 75배 늘어 2030년 eSSD의 41퍼센트가 됩니다. AI 학습은 7에서 127엑사바이트, 범용 클라우드와 엔터프라이즈는 총량에서 학습과 추론을 뺀 값으로 약 500엑사바이트입니다. 에이전트는 따로 떼어 낸 전망이 없습니다. 추론의 KV 캐시와 범용의 VM 디스크에 나뉘어 잡힙니다. 마름모는 2026년에 나온 최신 전망입니다. JPM과 Kioxia는 2028년에 약 900엑사바이트를 봅니다. 2024년 전망 경로로는 2029년과 2030년 사이에야 닿는 규모라 약 1년 반 앞당겨진 셈입니다. SanDisk도 2030년 AI 데이터센터 플래시를 1.2제타바이트로 봅니다. 기관마다 정의가 달라 막대와 정확히 겹쳐 읽을 수는 없고 방향만 비교합니다. 마지막으로 네 응용에 없는 큰 수요가 HDD 대체입니다. 니어라인 HDD는 2030년 연 약 3.9제타바이트가 출하될 전망이라, 그중 10퍼센트만 플래시로 넘어와도 약 390엑사바이트로 AI 학습 전체의 세 배입니다. 다만 QLC 가격이 HDD의 3배 안에 들어야 하는데, 지금 가격 경로로는 2031년에서 2032년 무렵이고, 실제 전환은 전력과 공간이 병목인 AI 데이터센터부터 TCO로 일어날 가능성이 큽니다. 모든 수치는 검색으로 확인한 2차 자료이며 1차 문서 대조가 필요합니다.</a:t>
+              <a:t>참고 자료입니다. 1장에서 본 데이터센터 응용 네 가지가 2030년까지 어느 정도의 수요가 되는지 공개 전망으로 정리했습니다. 막대는 McKinsey의 2024년 말 기준 시나리오입니다. eSSD 수요는 2024년 181엑사바이트에서 2030년 1,078엑사바이트로 약 6배가 됩니다. 2030년과 2024년 값은 McKinsey 수치이고, 그 사이 해는 수요처별 연평균 성장률로 이은 과제팀 산술입니다. 가장 큰 몫은 AI 추론입니다. KV 캐시와 RAG를 포함한 추론 수요는 6에서 447엑사바이트로 약 75배 늘어납니다. AI 학습은 7에서 127엑사바이트, 범용 클라우드와 엔터프라이즈는 총량에서 학습과 추론을 뺀 값으로 약 500엑사바이트입니다. 오른쪽은 올해와 2030년의 수요별 비중입니다. 올해는 범용이 85퍼센트, AI 추론 9퍼센트, AI 학습 6퍼센트입니다. 2030년에는 범용 47퍼센트, 추론 41퍼센트, 학습 12퍼센트가 됩니다. 추론이 32퍼센트포인트, 학습이 6퍼센트포인트 늘고, 범용은 38퍼센트포인트 줄어듭니다. 범용도 물량은 약 두 배로 늘지만 AI 수요가 훨씬 빨리 늘기 때문입니다. 다만 올해 비중은 2024년 전망을 이어 계산한 값입니다. 올해 실제로는 KV 캐시 수요가 앞당겨지고 있어 추론 비중이 이보다 클 수 있습니다. 에이전트는 따로 떼어 낸 전망이 없습니다. 추론의 KV 캐시와 범용의 VM 디스크에 나뉘어 잡힙니다. 마름모는 2026년에 나온 최신 전망입니다. JPM과 Kioxia는 2028년에 약 900엑사바이트를 봅니다. 2024년 전망 경로로는 2029년과 2030년 사이에야 닿는 규모라 약 1년 반 앞당겨진 셈입니다. 기관마다 정의가 달라 막대와 정확히 겹쳐 읽을 수는 없고 방향만 비교합니다. 모든 수치는 검색으로 확인한 2차 자료이며 1차 문서 대조가 필요합니다.</a:t>
             </a:r>
           </a:p>
         </p:txBody>
@@ -28453,7 +28453,7 @@
                 <a:latin typeface="Arial"/>
                 <a:ea typeface="Arial"/>
               </a:rPr>
-              <a:t>500</a:t>
+              <a:t>400</a:t>
             </a:r>
           </a:p>
         </p:txBody>
@@ -28537,7 +28537,7 @@
                 <a:latin typeface="Arial"/>
                 <a:ea typeface="Arial"/>
               </a:rPr>
-              <a:t>1,000</a:t>
+              <a:t>800</a:t>
             </a:r>
           </a:p>
         </p:txBody>
@@ -28621,7 +28621,7 @@
                 <a:latin typeface="Arial"/>
                 <a:ea typeface="Arial"/>
               </a:rPr>
-              <a:t>1,500</a:t>
+              <a:t>1,200</a:t>
             </a:r>
           </a:p>
         </p:txBody>
@@ -28718,8 +28718,8 @@
         </p:nvSpPr>
         <p:spPr>
           <a:xfrm>
-            <a:off x="1847088" y="7337291"/>
-            <a:ext cx="640080" cy="544836"/>
+            <a:off x="1847088" y="7201082"/>
+            <a:ext cx="640080" cy="681045"/>
           </a:xfrm>
           <a:prstGeom prst="rect">
             <a:avLst/>
@@ -28762,8 +28762,8 @@
         </p:nvSpPr>
         <p:spPr>
           <a:xfrm>
-            <a:off x="1847088" y="7314590"/>
-            <a:ext cx="640080" cy="22701"/>
+            <a:off x="1847088" y="7172706"/>
+            <a:ext cx="640080" cy="28376"/>
           </a:xfrm>
           <a:prstGeom prst="rect">
             <a:avLst/>
@@ -28806,8 +28806,8 @@
         </p:nvSpPr>
         <p:spPr>
           <a:xfrm>
-            <a:off x="1847088" y="7295131"/>
-            <a:ext cx="640080" cy="19458"/>
+            <a:off x="1847088" y="7148382"/>
+            <a:ext cx="640080" cy="24323"/>
           </a:xfrm>
           <a:prstGeom prst="rect">
             <a:avLst/>
@@ -28850,7 +28850,7 @@
         </p:nvSpPr>
         <p:spPr>
           <a:xfrm>
-            <a:off x="1572768" y="6965947"/>
+            <a:off x="1572768" y="6819198"/>
             <a:ext cx="1188719" cy="292608"/>
           </a:xfrm>
           <a:prstGeom prst="rect">
@@ -28890,8 +28890,8 @@
         </p:nvSpPr>
         <p:spPr>
           <a:xfrm>
-            <a:off x="1618488" y="7936992"/>
-            <a:ext cx="1097280" cy="274320"/>
+            <a:off x="1572768" y="7936992"/>
+            <a:ext cx="1188719" cy="274320"/>
           </a:xfrm>
           <a:prstGeom prst="rect">
             <a:avLst/>
@@ -28930,8 +28930,8 @@
         </p:nvSpPr>
         <p:spPr>
           <a:xfrm>
-            <a:off x="2907791" y="7227814"/>
-            <a:ext cx="640080" cy="654313"/>
+            <a:off x="2907791" y="7064235"/>
+            <a:ext cx="640080" cy="817892"/>
           </a:xfrm>
           <a:prstGeom prst="rect">
             <a:avLst/>
@@ -28974,8 +28974,8 @@
         </p:nvSpPr>
         <p:spPr>
           <a:xfrm>
-            <a:off x="2907791" y="7191014"/>
-            <a:ext cx="640080" cy="36799"/>
+            <a:off x="2907791" y="7018236"/>
+            <a:ext cx="640080" cy="45999"/>
           </a:xfrm>
           <a:prstGeom prst="rect">
             <a:avLst/>
@@ -29018,8 +29018,8 @@
         </p:nvSpPr>
         <p:spPr>
           <a:xfrm>
-            <a:off x="2907791" y="7151100"/>
-            <a:ext cx="640080" cy="39914"/>
+            <a:off x="2907791" y="6968343"/>
+            <a:ext cx="640080" cy="49893"/>
           </a:xfrm>
           <a:prstGeom prst="rect">
             <a:avLst/>
@@ -29062,7 +29062,7 @@
         </p:nvSpPr>
         <p:spPr>
           <a:xfrm>
-            <a:off x="2633472" y="6821916"/>
+            <a:off x="2633472" y="6639159"/>
             <a:ext cx="1188719" cy="292608"/>
           </a:xfrm>
           <a:prstGeom prst="rect">
@@ -29102,8 +29102,8 @@
         </p:nvSpPr>
         <p:spPr>
           <a:xfrm>
-            <a:off x="2679191" y="7936992"/>
-            <a:ext cx="1097280" cy="274320"/>
+            <a:off x="2633472" y="7936992"/>
+            <a:ext cx="1188719" cy="274320"/>
           </a:xfrm>
           <a:prstGeom prst="rect">
             <a:avLst/>
@@ -29142,8 +29142,8 @@
         </p:nvSpPr>
         <p:spPr>
           <a:xfrm>
-            <a:off x="3968496" y="7096338"/>
-            <a:ext cx="640080" cy="785789"/>
+            <a:off x="3968496" y="6899890"/>
+            <a:ext cx="640080" cy="982237"/>
           </a:xfrm>
           <a:prstGeom prst="rect">
             <a:avLst/>
@@ -29186,8 +29186,8 @@
         </p:nvSpPr>
         <p:spPr>
           <a:xfrm>
-            <a:off x="3968496" y="7036686"/>
-            <a:ext cx="640080" cy="59651"/>
+            <a:off x="3968496" y="6825326"/>
+            <a:ext cx="640080" cy="74564"/>
           </a:xfrm>
           <a:prstGeom prst="rect">
             <a:avLst/>
@@ -29230,8 +29230,8 @@
         </p:nvSpPr>
         <p:spPr>
           <a:xfrm>
-            <a:off x="3968496" y="6954809"/>
-            <a:ext cx="640080" cy="81876"/>
+            <a:off x="3968496" y="6722980"/>
+            <a:ext cx="640080" cy="102345"/>
           </a:xfrm>
           <a:prstGeom prst="rect">
             <a:avLst/>
@@ -29274,7 +29274,7 @@
         </p:nvSpPr>
         <p:spPr>
           <a:xfrm>
-            <a:off x="3694176" y="6625625"/>
+            <a:off x="3694176" y="6393796"/>
             <a:ext cx="1188719" cy="292608"/>
           </a:xfrm>
           <a:prstGeom prst="rect">
@@ -29294,7 +29294,7 @@
               </a:lnSpc>
             </a:pPr>
             <a:r>
-              <a:rPr sz="1800" b="0">
+              <a:rPr sz="1800" b="1">
                 <a:solidFill>
                   <a:srgbClr val="1A1A1A"/>
                 </a:solidFill>
@@ -29314,8 +29314,8 @@
         </p:nvSpPr>
         <p:spPr>
           <a:xfrm>
-            <a:off x="3739896" y="7936992"/>
-            <a:ext cx="1097280" cy="274320"/>
+            <a:off x="3694176" y="7936992"/>
+            <a:ext cx="1188719" cy="274320"/>
           </a:xfrm>
           <a:prstGeom prst="rect">
             <a:avLst/>
@@ -29334,14 +29334,14 @@
               </a:lnSpc>
             </a:pPr>
             <a:r>
-              <a:rPr sz="1600" b="0">
-                <a:solidFill>
-                  <a:srgbClr val="555555"/>
-                </a:solidFill>
-                <a:latin typeface="Arial"/>
-                <a:ea typeface="Arial"/>
-              </a:rPr>
-              <a:t>2026</a:t>
+              <a:rPr sz="1600" b="1">
+                <a:solidFill>
+                  <a:srgbClr val="1A1A1A"/>
+                </a:solidFill>
+                <a:latin typeface="Arial"/>
+                <a:ea typeface="Arial"/>
+              </a:rPr>
+              <a:t>2026 올해</a:t>
             </a:r>
           </a:p>
         </p:txBody>
@@ -29354,8 +29354,8 @@
         </p:nvSpPr>
         <p:spPr>
           <a:xfrm>
-            <a:off x="5029200" y="6938444"/>
-            <a:ext cx="640080" cy="943683"/>
+            <a:off x="5029200" y="6702523"/>
+            <a:ext cx="640080" cy="1179604"/>
           </a:xfrm>
           <a:prstGeom prst="rect">
             <a:avLst/>
@@ -29398,8 +29398,8 @@
         </p:nvSpPr>
         <p:spPr>
           <a:xfrm>
-            <a:off x="5029200" y="6841748"/>
-            <a:ext cx="640080" cy="96695"/>
+            <a:off x="5029200" y="6581653"/>
+            <a:ext cx="640080" cy="120869"/>
           </a:xfrm>
           <a:prstGeom prst="rect">
             <a:avLst/>
@@ -29442,8 +29442,8 @@
         </p:nvSpPr>
         <p:spPr>
           <a:xfrm>
-            <a:off x="5029200" y="6673796"/>
-            <a:ext cx="640080" cy="167952"/>
+            <a:off x="5029200" y="6371713"/>
+            <a:ext cx="640080" cy="209940"/>
           </a:xfrm>
           <a:prstGeom prst="rect">
             <a:avLst/>
@@ -29486,7 +29486,7 @@
         </p:nvSpPr>
         <p:spPr>
           <a:xfrm>
-            <a:off x="4754880" y="6344612"/>
+            <a:off x="4754880" y="6042529"/>
             <a:ext cx="1188719" cy="292608"/>
           </a:xfrm>
           <a:prstGeom prst="rect">
@@ -29526,8 +29526,8 @@
         </p:nvSpPr>
         <p:spPr>
           <a:xfrm>
-            <a:off x="4800600" y="7936992"/>
-            <a:ext cx="1097280" cy="274320"/>
+            <a:off x="4754880" y="7936992"/>
+            <a:ext cx="1188719" cy="274320"/>
           </a:xfrm>
           <a:prstGeom prst="rect">
             <a:avLst/>
@@ -29566,8 +29566,8 @@
         </p:nvSpPr>
         <p:spPr>
           <a:xfrm>
-            <a:off x="6089904" y="6748823"/>
-            <a:ext cx="640080" cy="1133304"/>
+            <a:off x="6089904" y="6465497"/>
+            <a:ext cx="640080" cy="1416630"/>
           </a:xfrm>
           <a:prstGeom prst="rect">
             <a:avLst/>
@@ -29610,8 +29610,8 @@
         </p:nvSpPr>
         <p:spPr>
           <a:xfrm>
-            <a:off x="6089904" y="6592078"/>
-            <a:ext cx="640080" cy="156744"/>
+            <a:off x="6089904" y="6269566"/>
+            <a:ext cx="640080" cy="195930"/>
           </a:xfrm>
           <a:prstGeom prst="rect">
             <a:avLst/>
@@ -29654,8 +29654,8 @@
         </p:nvSpPr>
         <p:spPr>
           <a:xfrm>
-            <a:off x="6089904" y="6247560"/>
-            <a:ext cx="640080" cy="344518"/>
+            <a:off x="6089904" y="5838919"/>
+            <a:ext cx="640080" cy="430647"/>
           </a:xfrm>
           <a:prstGeom prst="rect">
             <a:avLst/>
@@ -29698,7 +29698,7 @@
         </p:nvSpPr>
         <p:spPr>
           <a:xfrm>
-            <a:off x="5815584" y="5918376"/>
+            <a:off x="5815584" y="5509735"/>
             <a:ext cx="1188719" cy="292608"/>
           </a:xfrm>
           <a:prstGeom prst="rect">
@@ -29738,8 +29738,8 @@
         </p:nvSpPr>
         <p:spPr>
           <a:xfrm>
-            <a:off x="5861304" y="7936992"/>
-            <a:ext cx="1097280" cy="274320"/>
+            <a:off x="5815584" y="7936992"/>
+            <a:ext cx="1188719" cy="274320"/>
           </a:xfrm>
           <a:prstGeom prst="rect">
             <a:avLst/>
@@ -29778,8 +29778,8 @@
         </p:nvSpPr>
         <p:spPr>
           <a:xfrm>
-            <a:off x="7150608" y="6521100"/>
-            <a:ext cx="640080" cy="1361027"/>
+            <a:off x="7150608" y="6180843"/>
+            <a:ext cx="640080" cy="1701284"/>
           </a:xfrm>
           <a:prstGeom prst="rect">
             <a:avLst/>
@@ -29822,8 +29822,8 @@
         </p:nvSpPr>
         <p:spPr>
           <a:xfrm>
-            <a:off x="7150608" y="6267017"/>
-            <a:ext cx="640080" cy="254083"/>
+            <a:off x="7150608" y="5863239"/>
+            <a:ext cx="640080" cy="317604"/>
           </a:xfrm>
           <a:prstGeom prst="rect">
             <a:avLst/>
@@ -29866,8 +29866,8 @@
         </p:nvSpPr>
         <p:spPr>
           <a:xfrm>
-            <a:off x="7150608" y="5560312"/>
-            <a:ext cx="640080" cy="706704"/>
+            <a:off x="7150608" y="4979858"/>
+            <a:ext cx="640080" cy="883381"/>
           </a:xfrm>
           <a:prstGeom prst="rect">
             <a:avLst/>
@@ -29910,7 +29910,7 @@
         </p:nvSpPr>
         <p:spPr>
           <a:xfrm>
-            <a:off x="6876288" y="5231128"/>
+            <a:off x="6876288" y="4650674"/>
             <a:ext cx="1188719" cy="292608"/>
           </a:xfrm>
           <a:prstGeom prst="rect">
@@ -29950,8 +29950,8 @@
         </p:nvSpPr>
         <p:spPr>
           <a:xfrm>
-            <a:off x="6922008" y="7936992"/>
-            <a:ext cx="1097280" cy="274320"/>
+            <a:off x="6876288" y="7936992"/>
+            <a:ext cx="1188719" cy="274320"/>
           </a:xfrm>
           <a:prstGeom prst="rect">
             <a:avLst/>
@@ -29990,8 +29990,8 @@
         </p:nvSpPr>
         <p:spPr>
           <a:xfrm>
-            <a:off x="8211311" y="6247619"/>
-            <a:ext cx="640080" cy="1634508"/>
+            <a:off x="8211311" y="5838992"/>
+            <a:ext cx="640080" cy="2043135"/>
           </a:xfrm>
           <a:prstGeom prst="rect">
             <a:avLst/>
@@ -30034,8 +30034,8 @@
         </p:nvSpPr>
         <p:spPr>
           <a:xfrm>
-            <a:off x="8211311" y="5835749"/>
-            <a:ext cx="640080" cy="411870"/>
+            <a:off x="8211311" y="5324154"/>
+            <a:ext cx="640080" cy="514837"/>
           </a:xfrm>
           <a:prstGeom prst="rect">
             <a:avLst/>
@@ -30078,8 +30078,8 @@
         </p:nvSpPr>
         <p:spPr>
           <a:xfrm>
-            <a:off x="8211311" y="4386096"/>
-            <a:ext cx="640080" cy="1449653"/>
+            <a:off x="8211311" y="3512088"/>
+            <a:ext cx="640080" cy="1812066"/>
           </a:xfrm>
           <a:prstGeom prst="rect">
             <a:avLst/>
@@ -30122,7 +30122,7 @@
         </p:nvSpPr>
         <p:spPr>
           <a:xfrm>
-            <a:off x="7936991" y="4056912"/>
+            <a:off x="7936991" y="3182904"/>
             <a:ext cx="1188719" cy="292608"/>
           </a:xfrm>
           <a:prstGeom prst="rect">
@@ -30162,8 +30162,8 @@
         </p:nvSpPr>
         <p:spPr>
           <a:xfrm>
-            <a:off x="7982711" y="7936992"/>
-            <a:ext cx="1097280" cy="274320"/>
+            <a:off x="7936991" y="7936992"/>
+            <a:ext cx="1188719" cy="274320"/>
           </a:xfrm>
           <a:prstGeom prst="rect">
             <a:avLst/>
@@ -30196,59 +30196,14 @@
       </p:sp>
       <p:sp>
         <p:nvSpPr>
-          <p:cNvPr id="52" name="Rectangle 51"/>
-          <p:cNvSpPr/>
-          <p:nvPr/>
-        </p:nvSpPr>
-        <p:spPr>
-          <a:xfrm>
-            <a:off x="8211311" y="3121298"/>
-            <a:ext cx="640080" cy="1264798"/>
-          </a:xfrm>
-          <a:prstGeom prst="rect">
-            <a:avLst/>
-          </a:prstGeom>
-          <a:noFill/>
-          <a:ln w="15875">
-            <a:solidFill>
-              <a:srgbClr val="555555"/>
-            </a:solidFill>
-            <a:prstDash val="dash"/>
-          </a:ln>
-          <a:effectLst/>
-        </p:spPr>
-        <p:style>
-          <a:lnRef idx="1">
-            <a:schemeClr val="accent1"/>
-          </a:lnRef>
-          <a:fillRef idx="3">
-            <a:schemeClr val="accent1"/>
-          </a:fillRef>
-          <a:effectRef idx="2">
-            <a:schemeClr val="accent1"/>
-          </a:effectRef>
-          <a:fontRef idx="minor">
-            <a:schemeClr val="lt1"/>
-          </a:fontRef>
-        </p:style>
-        <p:txBody>
-          <a:bodyPr rtlCol="0" anchor="ctr"/>
-          <a:lstStyle/>
-          <a:p>
-            <a:pPr algn="ctr"/>
-          </a:p>
-        </p:txBody>
-      </p:sp>
-      <p:sp>
-        <p:nvSpPr>
-          <p:cNvPr id="53" name="TextBox 52"/>
+          <p:cNvPr id="52" name="TextBox 51"/>
           <p:cNvSpPr txBox="1"/>
           <p:nvPr/>
         </p:nvSpPr>
         <p:spPr>
           <a:xfrm>
-            <a:off x="8979407" y="3461089"/>
-            <a:ext cx="2377440" cy="585216"/>
+            <a:off x="8979407" y="6567952"/>
+            <a:ext cx="2194560" cy="585216"/>
           </a:xfrm>
           <a:prstGeom prst="rect">
             <a:avLst/>
@@ -30274,7 +30229,7 @@
                 <a:latin typeface="Arial"/>
                 <a:ea typeface="Arial"/>
               </a:rPr>
-              <a:t>HDD 대체 잠재</a:t>
+              <a:t>범용 · 엔터프라이즈</a:t>
             </a:r>
           </a:p>
           <a:p>
@@ -30291,21 +30246,21 @@
                 <a:latin typeface="Arial"/>
                 <a:ea typeface="Arial"/>
               </a:rPr>
-              <a:t>니어라인의 10%, 390</a:t>
-            </a:r>
-          </a:p>
-        </p:txBody>
-      </p:sp>
-      <p:sp>
-        <p:nvSpPr>
-          <p:cNvPr id="54" name="TextBox 53"/>
+              <a:t>504 (산술)</a:t>
+            </a:r>
+          </a:p>
+        </p:txBody>
+      </p:sp>
+      <p:sp>
+        <p:nvSpPr>
+          <p:cNvPr id="53" name="TextBox 52"/>
           <p:cNvSpPr txBox="1"/>
           <p:nvPr/>
         </p:nvSpPr>
         <p:spPr>
           <a:xfrm>
-            <a:off x="8979407" y="6772265"/>
-            <a:ext cx="2377440" cy="585216"/>
+            <a:off x="8979407" y="5288965"/>
+            <a:ext cx="2194560" cy="585216"/>
           </a:xfrm>
           <a:prstGeom prst="rect">
             <a:avLst/>
@@ -30331,7 +30286,7 @@
                 <a:latin typeface="Arial"/>
                 <a:ea typeface="Arial"/>
               </a:rPr>
-              <a:t>범용 · 엔터프라이즈</a:t>
+              <a:t>AI 학습</a:t>
             </a:r>
           </a:p>
           <a:p>
@@ -30348,21 +30303,21 @@
                 <a:latin typeface="Arial"/>
                 <a:ea typeface="Arial"/>
               </a:rPr>
-              <a:t>504 (산술)</a:t>
-            </a:r>
-          </a:p>
-        </p:txBody>
-      </p:sp>
-      <p:sp>
-        <p:nvSpPr>
-          <p:cNvPr id="55" name="TextBox 54"/>
+              <a:t>127</a:t>
+            </a:r>
+          </a:p>
+        </p:txBody>
+      </p:sp>
+      <p:sp>
+        <p:nvSpPr>
+          <p:cNvPr id="54" name="TextBox 53"/>
           <p:cNvSpPr txBox="1"/>
           <p:nvPr/>
         </p:nvSpPr>
         <p:spPr>
           <a:xfrm>
-            <a:off x="8979407" y="5749076"/>
-            <a:ext cx="2377440" cy="585216"/>
+            <a:off x="8979407" y="4125513"/>
+            <a:ext cx="2194560" cy="585216"/>
           </a:xfrm>
           <a:prstGeom prst="rect">
             <a:avLst/>
@@ -30383,63 +30338,6 @@
             <a:r>
               <a:rPr sz="1800" b="1">
                 <a:solidFill>
-                  <a:srgbClr val="1A1A1A"/>
-                </a:solidFill>
-                <a:latin typeface="Arial"/>
-                <a:ea typeface="Arial"/>
-              </a:rPr>
-              <a:t>AI 학습</a:t>
-            </a:r>
-          </a:p>
-          <a:p>
-            <a:pPr algn="l">
-              <a:lnSpc>
-                <a:spcPct val="100000"/>
-              </a:lnSpc>
-            </a:pPr>
-            <a:r>
-              <a:rPr sz="1600" b="0">
-                <a:solidFill>
-                  <a:srgbClr val="555555"/>
-                </a:solidFill>
-                <a:latin typeface="Arial"/>
-                <a:ea typeface="Arial"/>
-              </a:rPr>
-              <a:t>127</a:t>
-            </a:r>
-          </a:p>
-        </p:txBody>
-      </p:sp>
-      <p:sp>
-        <p:nvSpPr>
-          <p:cNvPr id="56" name="TextBox 55"/>
-          <p:cNvSpPr txBox="1"/>
-          <p:nvPr/>
-        </p:nvSpPr>
-        <p:spPr>
-          <a:xfrm>
-            <a:off x="8979407" y="4818314"/>
-            <a:ext cx="2377440" cy="585216"/>
-          </a:xfrm>
-          <a:prstGeom prst="rect">
-            <a:avLst/>
-          </a:prstGeom>
-          <a:noFill/>
-        </p:spPr>
-        <p:txBody>
-          <a:bodyPr wrap="square" anchor="ctr" lIns="0" rIns="0" tIns="0" bIns="0">
-            <a:spAutoFit/>
-          </a:bodyPr>
-          <a:lstStyle/>
-          <a:p>
-            <a:pPr algn="l">
-              <a:lnSpc>
-                <a:spcPct val="100000"/>
-              </a:lnSpc>
-            </a:pPr>
-            <a:r>
-              <a:rPr sz="1800" b="1">
-                <a:solidFill>
                   <a:srgbClr val="1428A0"/>
                 </a:solidFill>
                 <a:latin typeface="Arial"/>
@@ -30469,13 +30367,13 @@
       </p:sp>
       <p:cxnSp>
         <p:nvCxnSpPr>
-          <p:cNvPr id="57" name="Connector 56"/>
+          <p:cNvPr id="55" name="Connector 54"/>
           <p:cNvCxnSpPr/>
           <p:nvPr/>
         </p:nvCxnSpPr>
         <p:spPr>
           <a:xfrm>
-            <a:off x="6409944" y="4963363"/>
+            <a:off x="6409944" y="4233672"/>
             <a:ext cx="1653589" cy="0"/>
           </a:xfrm>
           <a:prstGeom prst="line">
@@ -30505,13 +30403,13 @@
       </p:cxnSp>
       <p:sp>
         <p:nvSpPr>
-          <p:cNvPr id="58" name="Oval 57"/>
+          <p:cNvPr id="56" name="Oval 55"/>
           <p:cNvSpPr/>
           <p:nvPr/>
         </p:nvSpPr>
         <p:spPr>
           <a:xfrm>
-            <a:off x="8008669" y="4908499"/>
+            <a:off x="8008669" y="4178808"/>
             <a:ext cx="109728" cy="109728"/>
           </a:xfrm>
           <a:prstGeom prst="ellipse">
@@ -30551,13 +30449,13 @@
       </p:sp>
       <p:sp>
         <p:nvSpPr>
-          <p:cNvPr id="59" name="Diamond 58"/>
+          <p:cNvPr id="57" name="Diamond 56"/>
           <p:cNvSpPr/>
           <p:nvPr/>
         </p:nvSpPr>
         <p:spPr>
           <a:xfrm>
-            <a:off x="6281928" y="4835347"/>
+            <a:off x="6281928" y="4105656"/>
             <a:ext cx="256032" cy="256032"/>
           </a:xfrm>
           <a:prstGeom prst="diamond">
@@ -30597,13 +30495,13 @@
       </p:sp>
       <p:sp>
         <p:nvSpPr>
-          <p:cNvPr id="60" name="TextBox 59"/>
+          <p:cNvPr id="58" name="TextBox 57"/>
           <p:cNvSpPr txBox="1"/>
           <p:nvPr/>
         </p:nvSpPr>
         <p:spPr>
           <a:xfrm>
-            <a:off x="4306824" y="4807915"/>
+            <a:off x="4306824" y="4078224"/>
             <a:ext cx="1920240" cy="310896"/>
           </a:xfrm>
           <a:prstGeom prst="rect">
@@ -30637,13 +30535,13 @@
       </p:sp>
       <p:sp>
         <p:nvSpPr>
-          <p:cNvPr id="61" name="TextBox 60"/>
+          <p:cNvPr id="59" name="TextBox 58"/>
           <p:cNvSpPr txBox="1"/>
           <p:nvPr/>
         </p:nvSpPr>
         <p:spPr>
           <a:xfrm>
-            <a:off x="6592824" y="4579315"/>
+            <a:off x="6592824" y="3849624"/>
             <a:ext cx="1470709" cy="292608"/>
           </a:xfrm>
           <a:prstGeom prst="rect">
@@ -30670,20 +30568,20 @@
                 <a:latin typeface="Arial"/>
                 <a:ea typeface="Arial"/>
               </a:rPr>
-              <a:t>약 1.5년</a:t>
-            </a:r>
-          </a:p>
-        </p:txBody>
-      </p:sp>
-      <p:sp>
-        <p:nvSpPr>
-          <p:cNvPr id="62" name="TextBox 61"/>
+              <a:t>약 1.5년 앞당김</a:t>
+            </a:r>
+          </a:p>
+        </p:txBody>
+      </p:sp>
+      <p:sp>
+        <p:nvSpPr>
+          <p:cNvPr id="60" name="TextBox 59"/>
           <p:cNvSpPr txBox="1"/>
           <p:nvPr/>
         </p:nvSpPr>
         <p:spPr>
           <a:xfrm>
-            <a:off x="2807208" y="3082381"/>
+            <a:off x="2807208" y="3098596"/>
             <a:ext cx="4206240" cy="585216"/>
           </a:xfrm>
           <a:prstGeom prst="rect">
@@ -30734,7 +30632,7 @@
       </p:sp>
       <p:sp>
         <p:nvSpPr>
-          <p:cNvPr id="63" name="TextBox 62"/>
+          <p:cNvPr id="61" name="TextBox 60"/>
           <p:cNvSpPr txBox="1"/>
           <p:nvPr/>
         </p:nvSpPr>
@@ -30767,32 +30665,42 @@
                 <a:latin typeface="Arial"/>
                 <a:ea typeface="Arial"/>
               </a:rPr>
-              <a:t>주요 포인트</a:t>
-            </a:r>
-          </a:p>
-        </p:txBody>
-      </p:sp>
-      <p:sp>
-        <p:nvSpPr>
-          <p:cNvPr id="64" name="Rounded Rectangle 63"/>
+              <a:t>수요별 비중</a:t>
+            </a:r>
+            <a:r>
+              <a:rPr sz="1600" b="0">
+                <a:solidFill>
+                  <a:srgbClr val="555555"/>
+                </a:solidFill>
+                <a:latin typeface="Arial"/>
+                <a:ea typeface="Arial"/>
+              </a:rPr>
+              <a:t>   2026 → 2030</a:t>
+            </a:r>
+          </a:p>
+        </p:txBody>
+      </p:sp>
+      <p:sp>
+        <p:nvSpPr>
+          <p:cNvPr id="62" name="Rectangle 61"/>
           <p:cNvSpPr/>
           <p:nvPr/>
         </p:nvSpPr>
         <p:spPr>
           <a:xfrm>
-            <a:off x="12198096" y="2578608"/>
-            <a:ext cx="5367528" cy="1682496"/>
-          </a:xfrm>
-          <a:prstGeom prst="roundRect">
-            <a:avLst>
-              <a:gd name="adj" fmla="val 4347"/>
-            </a:avLst>
-          </a:prstGeom>
-          <a:solidFill>
-            <a:srgbClr val="EEF1FA"/>
-          </a:solidFill>
-          <a:ln>
-            <a:noFill/>
+            <a:off x="12289536" y="3747211"/>
+            <a:ext cx="914400" cy="4134916"/>
+          </a:xfrm>
+          <a:prstGeom prst="rect">
+            <a:avLst/>
+          </a:prstGeom>
+          <a:solidFill>
+            <a:srgbClr val="8A8A8A"/>
+          </a:solidFill>
+          <a:ln w="12700">
+            <a:solidFill>
+              <a:srgbClr val="FFFFFF"/>
+            </a:solidFill>
           </a:ln>
           <a:effectLst/>
         </p:spPr>
@@ -30820,14 +30728,14 @@
       </p:sp>
       <p:sp>
         <p:nvSpPr>
-          <p:cNvPr id="65" name="TextBox 64"/>
+          <p:cNvPr id="63" name="TextBox 62"/>
           <p:cNvSpPr txBox="1"/>
           <p:nvPr/>
         </p:nvSpPr>
         <p:spPr>
           <a:xfrm>
-            <a:off x="12417552" y="2688336"/>
-            <a:ext cx="4928616" cy="310896"/>
+            <a:off x="12289536" y="5659221"/>
+            <a:ext cx="914400" cy="310896"/>
           </a:xfrm>
           <a:prstGeom prst="rect">
             <a:avLst/>
@@ -30840,7 +30748,7 @@
           </a:bodyPr>
           <a:lstStyle/>
           <a:p>
-            <a:pPr algn="l">
+            <a:pPr algn="ctr">
               <a:lnSpc>
                 <a:spcPct val="110000"/>
               </a:lnSpc>
@@ -30848,144 +30756,37 @@
             <a:r>
               <a:rPr sz="1800" b="1">
                 <a:solidFill>
-                  <a:srgbClr val="1428A0"/>
-                </a:solidFill>
-                <a:latin typeface="Arial"/>
-                <a:ea typeface="Arial"/>
-              </a:rPr>
-              <a:t>AI 추론</a:t>
-            </a:r>
-          </a:p>
-        </p:txBody>
-      </p:sp>
-      <p:sp>
-        <p:nvSpPr>
-          <p:cNvPr id="66" name="TextBox 65"/>
-          <p:cNvSpPr txBox="1"/>
-          <p:nvPr/>
-        </p:nvSpPr>
-        <p:spPr>
-          <a:xfrm>
-            <a:off x="12417552" y="2980944"/>
-            <a:ext cx="4928616" cy="658368"/>
-          </a:xfrm>
-          <a:prstGeom prst="rect">
-            <a:avLst/>
-          </a:prstGeom>
-          <a:noFill/>
-        </p:spPr>
-        <p:txBody>
-          <a:bodyPr wrap="square" anchor="ctr" lIns="0" rIns="0" tIns="0" bIns="0">
-            <a:spAutoFit/>
-          </a:bodyPr>
-          <a:lstStyle/>
-          <a:p>
-            <a:pPr algn="l">
-              <a:lnSpc>
-                <a:spcPct val="110000"/>
-              </a:lnSpc>
-            </a:pPr>
-            <a:r>
-              <a:rPr sz="4400" b="1">
-                <a:solidFill>
-                  <a:srgbClr val="1428A0"/>
-                </a:solidFill>
-                <a:latin typeface="Arial"/>
-                <a:ea typeface="Arial"/>
-              </a:rPr>
-              <a:t>75</a:t>
-            </a:r>
-            <a:r>
-              <a:rPr sz="2200" b="1">
-                <a:solidFill>
-                  <a:srgbClr val="1428A0"/>
-                </a:solidFill>
-                <a:latin typeface="Arial"/>
-                <a:ea typeface="Arial"/>
-              </a:rPr>
-              <a:t> 배</a:t>
-            </a:r>
-          </a:p>
-        </p:txBody>
-      </p:sp>
-      <p:sp>
-        <p:nvSpPr>
-          <p:cNvPr id="67" name="TextBox 66"/>
-          <p:cNvSpPr txBox="1"/>
-          <p:nvPr/>
-        </p:nvSpPr>
-        <p:spPr>
-          <a:xfrm>
-            <a:off x="12417552" y="3621024"/>
-            <a:ext cx="4928616" cy="585216"/>
-          </a:xfrm>
-          <a:prstGeom prst="rect">
-            <a:avLst/>
-          </a:prstGeom>
-          <a:noFill/>
-        </p:spPr>
-        <p:txBody>
-          <a:bodyPr wrap="square" anchor="t" lIns="0" rIns="0" tIns="0" bIns="0">
-            <a:spAutoFit/>
-          </a:bodyPr>
-          <a:lstStyle/>
-          <a:p>
-            <a:pPr algn="l">
-              <a:lnSpc>
-                <a:spcPct val="100000"/>
-              </a:lnSpc>
-            </a:pPr>
-            <a:r>
-              <a:rPr sz="1600" b="0">
-                <a:solidFill>
-                  <a:srgbClr val="555555"/>
-                </a:solidFill>
-                <a:latin typeface="Arial"/>
-                <a:ea typeface="Arial"/>
-              </a:rPr>
-              <a:t>6 → 447EB</a:t>
-            </a:r>
-          </a:p>
-          <a:p>
-            <a:pPr algn="l">
-              <a:lnSpc>
-                <a:spcPct val="100000"/>
-              </a:lnSpc>
-            </a:pPr>
-            <a:r>
-              <a:rPr sz="1600" b="0">
-                <a:solidFill>
-                  <a:srgbClr val="555555"/>
-                </a:solidFill>
-                <a:latin typeface="Arial"/>
-                <a:ea typeface="Arial"/>
-              </a:rPr>
-              <a:t>2030년 eSSD의 41%</a:t>
-            </a:r>
-          </a:p>
-        </p:txBody>
-      </p:sp>
-      <p:sp>
-        <p:nvSpPr>
-          <p:cNvPr id="68" name="Rounded Rectangle 67"/>
+                  <a:srgbClr val="FFFFFF"/>
+                </a:solidFill>
+                <a:latin typeface="Arial"/>
+                <a:ea typeface="Arial"/>
+              </a:rPr>
+              <a:t>85%</a:t>
+            </a:r>
+          </a:p>
+        </p:txBody>
+      </p:sp>
+      <p:sp>
+        <p:nvSpPr>
+          <p:cNvPr id="64" name="Rectangle 63"/>
           <p:cNvSpPr/>
           <p:nvPr/>
         </p:nvSpPr>
         <p:spPr>
           <a:xfrm>
-            <a:off x="12198096" y="4407408"/>
-            <a:ext cx="5367528" cy="1682496"/>
-          </a:xfrm>
-          <a:prstGeom prst="roundRect">
-            <a:avLst>
-              <a:gd name="adj" fmla="val 4347"/>
-            </a:avLst>
-          </a:prstGeom>
-          <a:solidFill>
-            <a:srgbClr val="F5F5F5"/>
-          </a:solidFill>
-          <a:ln>
-            <a:noFill/>
+            <a:off x="12289536" y="3455334"/>
+            <a:ext cx="914400" cy="291876"/>
+          </a:xfrm>
+          <a:prstGeom prst="rect">
+            <a:avLst/>
+          </a:prstGeom>
+          <a:solidFill>
+            <a:srgbClr val="AAB8E8"/>
+          </a:solidFill>
+          <a:ln w="12700">
+            <a:solidFill>
+              <a:srgbClr val="FFFFFF"/>
+            </a:solidFill>
           </a:ln>
           <a:effectLst/>
         </p:spPr>
@@ -31013,14 +30814,14 @@
       </p:sp>
       <p:sp>
         <p:nvSpPr>
-          <p:cNvPr id="69" name="TextBox 68"/>
+          <p:cNvPr id="65" name="TextBox 64"/>
           <p:cNvSpPr txBox="1"/>
           <p:nvPr/>
         </p:nvSpPr>
         <p:spPr>
           <a:xfrm>
-            <a:off x="12417552" y="4517136"/>
-            <a:ext cx="4928616" cy="310896"/>
+            <a:off x="12289536" y="3445824"/>
+            <a:ext cx="914400" cy="310896"/>
           </a:xfrm>
           <a:prstGeom prst="rect">
             <a:avLst/>
@@ -31033,7 +30834,7 @@
           </a:bodyPr>
           <a:lstStyle/>
           <a:p>
-            <a:pPr algn="l">
+            <a:pPr algn="ctr">
               <a:lnSpc>
                 <a:spcPct val="110000"/>
               </a:lnSpc>
@@ -31041,144 +30842,37 @@
             <a:r>
               <a:rPr sz="1800" b="1">
                 <a:solidFill>
-                  <a:srgbClr val="555555"/>
-                </a:solidFill>
-                <a:latin typeface="Arial"/>
-                <a:ea typeface="Arial"/>
-              </a:rPr>
-              <a:t>최신 전망</a:t>
-            </a:r>
-          </a:p>
-        </p:txBody>
-      </p:sp>
-      <p:sp>
-        <p:nvSpPr>
-          <p:cNvPr id="70" name="TextBox 69"/>
-          <p:cNvSpPr txBox="1"/>
-          <p:nvPr/>
-        </p:nvSpPr>
-        <p:spPr>
-          <a:xfrm>
-            <a:off x="12417552" y="4809744"/>
-            <a:ext cx="4928616" cy="658368"/>
-          </a:xfrm>
-          <a:prstGeom prst="rect">
-            <a:avLst/>
-          </a:prstGeom>
-          <a:noFill/>
-        </p:spPr>
-        <p:txBody>
-          <a:bodyPr wrap="square" anchor="ctr" lIns="0" rIns="0" tIns="0" bIns="0">
-            <a:spAutoFit/>
-          </a:bodyPr>
-          <a:lstStyle/>
-          <a:p>
-            <a:pPr algn="l">
-              <a:lnSpc>
-                <a:spcPct val="110000"/>
-              </a:lnSpc>
-            </a:pPr>
-            <a:r>
-              <a:rPr sz="4400" b="1">
-                <a:solidFill>
                   <a:srgbClr val="1A1A1A"/>
                 </a:solidFill>
                 <a:latin typeface="Arial"/>
                 <a:ea typeface="Arial"/>
               </a:rPr>
-              <a:t>1~2</a:t>
-            </a:r>
-            <a:r>
-              <a:rPr sz="2200" b="1">
-                <a:solidFill>
-                  <a:srgbClr val="1A1A1A"/>
-                </a:solidFill>
-                <a:latin typeface="Arial"/>
-                <a:ea typeface="Arial"/>
-              </a:rPr>
-              <a:t> 년 앞당김</a:t>
-            </a:r>
-          </a:p>
-        </p:txBody>
-      </p:sp>
-      <p:sp>
-        <p:nvSpPr>
-          <p:cNvPr id="71" name="TextBox 70"/>
-          <p:cNvSpPr txBox="1"/>
-          <p:nvPr/>
-        </p:nvSpPr>
-        <p:spPr>
-          <a:xfrm>
-            <a:off x="12417552" y="5449824"/>
-            <a:ext cx="4928616" cy="585216"/>
-          </a:xfrm>
-          <a:prstGeom prst="rect">
-            <a:avLst/>
-          </a:prstGeom>
-          <a:noFill/>
-        </p:spPr>
-        <p:txBody>
-          <a:bodyPr wrap="square" anchor="t" lIns="0" rIns="0" tIns="0" bIns="0">
-            <a:spAutoFit/>
-          </a:bodyPr>
-          <a:lstStyle/>
-          <a:p>
-            <a:pPr algn="l">
-              <a:lnSpc>
-                <a:spcPct val="100000"/>
-              </a:lnSpc>
-            </a:pPr>
-            <a:r>
-              <a:rPr sz="1600" b="0">
-                <a:solidFill>
-                  <a:srgbClr val="555555"/>
-                </a:solidFill>
-                <a:latin typeface="Arial"/>
-                <a:ea typeface="Arial"/>
-              </a:rPr>
-              <a:t>2028년 약 900EB</a:t>
-            </a:r>
-          </a:p>
-          <a:p>
-            <a:pPr algn="l">
-              <a:lnSpc>
-                <a:spcPct val="100000"/>
-              </a:lnSpc>
-            </a:pPr>
-            <a:r>
-              <a:rPr sz="1600" b="0">
-                <a:solidFill>
-                  <a:srgbClr val="555555"/>
-                </a:solidFill>
-                <a:latin typeface="Arial"/>
-                <a:ea typeface="Arial"/>
-              </a:rPr>
-              <a:t>2024년 전망으로는 2029~30년</a:t>
-            </a:r>
-          </a:p>
-        </p:txBody>
-      </p:sp>
-      <p:sp>
-        <p:nvSpPr>
-          <p:cNvPr id="72" name="Rounded Rectangle 71"/>
+              <a:t>6%</a:t>
+            </a:r>
+          </a:p>
+        </p:txBody>
+      </p:sp>
+      <p:sp>
+        <p:nvSpPr>
+          <p:cNvPr id="66" name="Rectangle 65"/>
           <p:cNvSpPr/>
           <p:nvPr/>
         </p:nvSpPr>
         <p:spPr>
           <a:xfrm>
-            <a:off x="12198096" y="6236208"/>
-            <a:ext cx="5367528" cy="1682496"/>
-          </a:xfrm>
-          <a:prstGeom prst="roundRect">
-            <a:avLst>
-              <a:gd name="adj" fmla="val 4347"/>
-            </a:avLst>
-          </a:prstGeom>
-          <a:solidFill>
-            <a:srgbClr val="F5F5F5"/>
-          </a:solidFill>
-          <a:ln>
-            <a:noFill/>
+            <a:off x="12289536" y="3017520"/>
+            <a:ext cx="914400" cy="437814"/>
+          </a:xfrm>
+          <a:prstGeom prst="rect">
+            <a:avLst/>
+          </a:prstGeom>
+          <a:solidFill>
+            <a:srgbClr val="1428A0"/>
+          </a:solidFill>
+          <a:ln w="12700">
+            <a:solidFill>
+              <a:srgbClr val="FFFFFF"/>
+            </a:solidFill>
           </a:ln>
           <a:effectLst/>
         </p:spPr>
@@ -31206,14 +30900,14 @@
       </p:sp>
       <p:sp>
         <p:nvSpPr>
-          <p:cNvPr id="73" name="TextBox 72"/>
+          <p:cNvPr id="67" name="TextBox 66"/>
           <p:cNvSpPr txBox="1"/>
           <p:nvPr/>
         </p:nvSpPr>
         <p:spPr>
           <a:xfrm>
-            <a:off x="12417552" y="6345936"/>
-            <a:ext cx="4928616" cy="310896"/>
+            <a:off x="12289536" y="3080979"/>
+            <a:ext cx="914400" cy="310896"/>
           </a:xfrm>
           <a:prstGeom prst="rect">
             <a:avLst/>
@@ -31226,7 +30920,7 @@
           </a:bodyPr>
           <a:lstStyle/>
           <a:p>
-            <a:pPr algn="l">
+            <a:pPr algn="ctr">
               <a:lnSpc>
                 <a:spcPct val="110000"/>
               </a:lnSpc>
@@ -31234,76 +30928,26 @@
             <a:r>
               <a:rPr sz="1800" b="1">
                 <a:solidFill>
-                  <a:srgbClr val="555555"/>
-                </a:solidFill>
-                <a:latin typeface="Arial"/>
-                <a:ea typeface="Arial"/>
-              </a:rPr>
-              <a:t>빠진 수요: HDD 대체</a:t>
-            </a:r>
-          </a:p>
-        </p:txBody>
-      </p:sp>
-      <p:sp>
-        <p:nvSpPr>
-          <p:cNvPr id="74" name="TextBox 73"/>
+                  <a:srgbClr val="FFFFFF"/>
+                </a:solidFill>
+                <a:latin typeface="Arial"/>
+                <a:ea typeface="Arial"/>
+              </a:rPr>
+              <a:t>9%</a:t>
+            </a:r>
+          </a:p>
+        </p:txBody>
+      </p:sp>
+      <p:sp>
+        <p:nvSpPr>
+          <p:cNvPr id="68" name="TextBox 67"/>
           <p:cNvSpPr txBox="1"/>
           <p:nvPr/>
         </p:nvSpPr>
         <p:spPr>
           <a:xfrm>
-            <a:off x="12417552" y="6638544"/>
-            <a:ext cx="4928616" cy="658368"/>
-          </a:xfrm>
-          <a:prstGeom prst="rect">
-            <a:avLst/>
-          </a:prstGeom>
-          <a:noFill/>
-        </p:spPr>
-        <p:txBody>
-          <a:bodyPr wrap="square" anchor="ctr" lIns="0" rIns="0" tIns="0" bIns="0">
-            <a:spAutoFit/>
-          </a:bodyPr>
-          <a:lstStyle/>
-          <a:p>
-            <a:pPr algn="l">
-              <a:lnSpc>
-                <a:spcPct val="110000"/>
-              </a:lnSpc>
-            </a:pPr>
-            <a:r>
-              <a:rPr sz="4400" b="1">
-                <a:solidFill>
-                  <a:srgbClr val="1A1A1A"/>
-                </a:solidFill>
-                <a:latin typeface="Arial"/>
-                <a:ea typeface="Arial"/>
-              </a:rPr>
-              <a:t>390</a:t>
-            </a:r>
-            <a:r>
-              <a:rPr sz="2200" b="1">
-                <a:solidFill>
-                  <a:srgbClr val="1A1A1A"/>
-                </a:solidFill>
-                <a:latin typeface="Arial"/>
-                <a:ea typeface="Arial"/>
-              </a:rPr>
-              <a:t> EB</a:t>
-            </a:r>
-          </a:p>
-        </p:txBody>
-      </p:sp>
-      <p:sp>
-        <p:nvSpPr>
-          <p:cNvPr id="75" name="TextBox 74"/>
-          <p:cNvSpPr txBox="1"/>
-          <p:nvPr/>
-        </p:nvSpPr>
-        <p:spPr>
-          <a:xfrm>
-            <a:off x="12417552" y="7278624"/>
-            <a:ext cx="4928616" cy="585216"/>
+            <a:off x="12015215" y="7936992"/>
+            <a:ext cx="1463040" cy="274320"/>
           </a:xfrm>
           <a:prstGeom prst="rect">
             <a:avLst/>
@@ -31316,100 +30960,45 @@
           </a:bodyPr>
           <a:lstStyle/>
           <a:p>
-            <a:pPr algn="l">
-              <a:lnSpc>
-                <a:spcPct val="100000"/>
-              </a:lnSpc>
-            </a:pPr>
-            <a:r>
-              <a:rPr sz="1600" b="0">
-                <a:solidFill>
-                  <a:srgbClr val="555555"/>
-                </a:solidFill>
-                <a:latin typeface="Arial"/>
-                <a:ea typeface="Arial"/>
-              </a:rPr>
-              <a:t>니어라인 HDD 출하의 10%</a:t>
-            </a:r>
-          </a:p>
-          <a:p>
-            <a:pPr algn="l">
-              <a:lnSpc>
-                <a:spcPct val="100000"/>
-              </a:lnSpc>
-            </a:pPr>
-            <a:r>
-              <a:rPr sz="1600" b="0">
-                <a:solidFill>
-                  <a:srgbClr val="555555"/>
-                </a:solidFill>
-                <a:latin typeface="Arial"/>
-                <a:ea typeface="Arial"/>
-              </a:rPr>
-              <a:t>AI 학습 전체의 3배</a:t>
-            </a:r>
-          </a:p>
-        </p:txBody>
-      </p:sp>
-      <p:sp>
-        <p:nvSpPr>
-          <p:cNvPr id="76" name="TextBox 75"/>
-          <p:cNvSpPr txBox="1"/>
-          <p:nvPr/>
-        </p:nvSpPr>
-        <p:spPr>
-          <a:xfrm>
-            <a:off x="12198096" y="8065008"/>
-            <a:ext cx="5367528" cy="329184"/>
-          </a:xfrm>
-          <a:prstGeom prst="rect">
-            <a:avLst/>
-          </a:prstGeom>
-          <a:noFill/>
-        </p:spPr>
-        <p:txBody>
-          <a:bodyPr wrap="square" anchor="ctr" lIns="0" rIns="0" tIns="0" bIns="0">
-            <a:spAutoFit/>
-          </a:bodyPr>
-          <a:lstStyle/>
-          <a:p>
-            <a:pPr algn="l">
+            <a:pPr algn="ctr">
               <a:lnSpc>
                 <a:spcPct val="110000"/>
               </a:lnSpc>
             </a:pPr>
             <a:r>
-              <a:rPr sz="1600" b="0">
-                <a:solidFill>
-                  <a:srgbClr val="555555"/>
-                </a:solidFill>
-                <a:latin typeface="Arial"/>
-                <a:ea typeface="Arial"/>
-              </a:rPr>
-              <a:t>에이전트는 별도 전망 없음 (추론 · 범용에 포함)</a:t>
-            </a:r>
-          </a:p>
-        </p:txBody>
-      </p:sp>
-      <p:sp>
-        <p:nvSpPr>
-          <p:cNvPr id="77" name="Rectangle 76"/>
+              <a:rPr sz="1600" b="1">
+                <a:solidFill>
+                  <a:srgbClr val="1A1A1A"/>
+                </a:solidFill>
+                <a:latin typeface="Arial"/>
+                <a:ea typeface="Arial"/>
+              </a:rPr>
+              <a:t>2026 올해</a:t>
+            </a:r>
+          </a:p>
+        </p:txBody>
+      </p:sp>
+      <p:sp>
+        <p:nvSpPr>
+          <p:cNvPr id="69" name="Rectangle 68"/>
           <p:cNvSpPr/>
           <p:nvPr/>
         </p:nvSpPr>
         <p:spPr>
           <a:xfrm>
-            <a:off x="722376" y="8631936"/>
-            <a:ext cx="16843248" cy="731520"/>
-          </a:xfrm>
-          <a:prstGeom prst="rect">
-            <a:avLst/>
-          </a:prstGeom>
-          <a:solidFill>
-            <a:srgbClr val="1428A0"/>
-          </a:solidFill>
-          <a:ln>
-            <a:noFill/>
+            <a:off x="14118336" y="5595762"/>
+            <a:ext cx="914400" cy="2286365"/>
+          </a:xfrm>
+          <a:prstGeom prst="rect">
+            <a:avLst/>
+          </a:prstGeom>
+          <a:solidFill>
+            <a:srgbClr val="8A8A8A"/>
+          </a:solidFill>
+          <a:ln w="12700">
+            <a:solidFill>
+              <a:srgbClr val="FFFFFF"/>
+            </a:solidFill>
           </a:ln>
           <a:effectLst/>
         </p:spPr>
@@ -31437,14 +31026,14 @@
       </p:sp>
       <p:sp>
         <p:nvSpPr>
-          <p:cNvPr id="78" name="TextBox 77"/>
+          <p:cNvPr id="70" name="TextBox 69"/>
           <p:cNvSpPr txBox="1"/>
           <p:nvPr/>
         </p:nvSpPr>
         <p:spPr>
           <a:xfrm>
-            <a:off x="1088136" y="8631936"/>
-            <a:ext cx="1234440" cy="731520"/>
+            <a:off x="14118336" y="6583497"/>
+            <a:ext cx="914400" cy="310896"/>
           </a:xfrm>
           <a:prstGeom prst="rect">
             <a:avLst/>
@@ -31457,34 +31046,80 @@
           </a:bodyPr>
           <a:lstStyle/>
           <a:p>
-            <a:pPr algn="l">
+            <a:pPr algn="ctr">
               <a:lnSpc>
                 <a:spcPct val="110000"/>
               </a:lnSpc>
             </a:pPr>
             <a:r>
-              <a:rPr sz="2000" b="0">
-                <a:solidFill>
-                  <a:srgbClr val="AAB8E8"/>
-                </a:solidFill>
-                <a:latin typeface="Arial"/>
-                <a:ea typeface="Arial"/>
-              </a:rPr>
-              <a:t>참고</a:t>
-            </a:r>
-          </a:p>
-        </p:txBody>
-      </p:sp>
-      <p:sp>
-        <p:nvSpPr>
-          <p:cNvPr id="79" name="TextBox 78"/>
+              <a:rPr sz="1800" b="1">
+                <a:solidFill>
+                  <a:srgbClr val="FFFFFF"/>
+                </a:solidFill>
+                <a:latin typeface="Arial"/>
+                <a:ea typeface="Arial"/>
+              </a:rPr>
+              <a:t>47%</a:t>
+            </a:r>
+          </a:p>
+        </p:txBody>
+      </p:sp>
+      <p:sp>
+        <p:nvSpPr>
+          <p:cNvPr id="71" name="Rectangle 70"/>
+          <p:cNvSpPr/>
+          <p:nvPr/>
+        </p:nvSpPr>
+        <p:spPr>
+          <a:xfrm>
+            <a:off x="14118336" y="5012009"/>
+            <a:ext cx="914400" cy="583752"/>
+          </a:xfrm>
+          <a:prstGeom prst="rect">
+            <a:avLst/>
+          </a:prstGeom>
+          <a:solidFill>
+            <a:srgbClr val="AAB8E8"/>
+          </a:solidFill>
+          <a:ln w="12700">
+            <a:solidFill>
+              <a:srgbClr val="FFFFFF"/>
+            </a:solidFill>
+          </a:ln>
+          <a:effectLst/>
+        </p:spPr>
+        <p:style>
+          <a:lnRef idx="1">
+            <a:schemeClr val="accent1"/>
+          </a:lnRef>
+          <a:fillRef idx="3">
+            <a:schemeClr val="accent1"/>
+          </a:fillRef>
+          <a:effectRef idx="2">
+            <a:schemeClr val="accent1"/>
+          </a:effectRef>
+          <a:fontRef idx="minor">
+            <a:schemeClr val="lt1"/>
+          </a:fontRef>
+        </p:style>
+        <p:txBody>
+          <a:bodyPr rtlCol="0" anchor="ctr"/>
+          <a:lstStyle/>
+          <a:p>
+            <a:pPr algn="ctr"/>
+          </a:p>
+        </p:txBody>
+      </p:sp>
+      <p:sp>
+        <p:nvSpPr>
+          <p:cNvPr id="72" name="TextBox 71"/>
           <p:cNvSpPr txBox="1"/>
           <p:nvPr/>
         </p:nvSpPr>
         <p:spPr>
           <a:xfrm>
-            <a:off x="2322576" y="8631936"/>
-            <a:ext cx="15060168" cy="731520"/>
+            <a:off x="14118336" y="5148437"/>
+            <a:ext cx="914400" cy="310896"/>
           </a:xfrm>
           <a:prstGeom prst="rect">
             <a:avLst/>
@@ -31497,34 +31132,120 @@
           </a:bodyPr>
           <a:lstStyle/>
           <a:p>
-            <a:pPr algn="l">
+            <a:pPr algn="ctr">
               <a:lnSpc>
                 <a:spcPct val="110000"/>
               </a:lnSpc>
             </a:pPr>
             <a:r>
-              <a:rPr sz="2400" b="1">
+              <a:rPr sz="1800" b="1">
+                <a:solidFill>
+                  <a:srgbClr val="1A1A1A"/>
+                </a:solidFill>
+                <a:latin typeface="Arial"/>
+                <a:ea typeface="Arial"/>
+              </a:rPr>
+              <a:t>12%</a:t>
+            </a:r>
+          </a:p>
+        </p:txBody>
+      </p:sp>
+      <p:sp>
+        <p:nvSpPr>
+          <p:cNvPr id="73" name="Rectangle 72"/>
+          <p:cNvSpPr/>
+          <p:nvPr/>
+        </p:nvSpPr>
+        <p:spPr>
+          <a:xfrm>
+            <a:off x="14118336" y="3017520"/>
+            <a:ext cx="914400" cy="1994489"/>
+          </a:xfrm>
+          <a:prstGeom prst="rect">
+            <a:avLst/>
+          </a:prstGeom>
+          <a:solidFill>
+            <a:srgbClr val="1428A0"/>
+          </a:solidFill>
+          <a:ln w="12700">
+            <a:solidFill>
+              <a:srgbClr val="FFFFFF"/>
+            </a:solidFill>
+          </a:ln>
+          <a:effectLst/>
+        </p:spPr>
+        <p:style>
+          <a:lnRef idx="1">
+            <a:schemeClr val="accent1"/>
+          </a:lnRef>
+          <a:fillRef idx="3">
+            <a:schemeClr val="accent1"/>
+          </a:fillRef>
+          <a:effectRef idx="2">
+            <a:schemeClr val="accent1"/>
+          </a:effectRef>
+          <a:fontRef idx="minor">
+            <a:schemeClr val="lt1"/>
+          </a:fontRef>
+        </p:style>
+        <p:txBody>
+          <a:bodyPr rtlCol="0" anchor="ctr"/>
+          <a:lstStyle/>
+          <a:p>
+            <a:pPr algn="ctr"/>
+          </a:p>
+        </p:txBody>
+      </p:sp>
+      <p:sp>
+        <p:nvSpPr>
+          <p:cNvPr id="74" name="TextBox 73"/>
+          <p:cNvSpPr txBox="1"/>
+          <p:nvPr/>
+        </p:nvSpPr>
+        <p:spPr>
+          <a:xfrm>
+            <a:off x="14118336" y="3859316"/>
+            <a:ext cx="914400" cy="310896"/>
+          </a:xfrm>
+          <a:prstGeom prst="rect">
+            <a:avLst/>
+          </a:prstGeom>
+          <a:noFill/>
+        </p:spPr>
+        <p:txBody>
+          <a:bodyPr wrap="square" anchor="ctr" lIns="0" rIns="0" tIns="0" bIns="0">
+            <a:spAutoFit/>
+          </a:bodyPr>
+          <a:lstStyle/>
+          <a:p>
+            <a:pPr algn="ctr">
+              <a:lnSpc>
+                <a:spcPct val="110000"/>
+              </a:lnSpc>
+            </a:pPr>
+            <a:r>
+              <a:rPr sz="1800" b="1">
                 <a:solidFill>
                   <a:srgbClr val="FFFFFF"/>
                 </a:solidFill>
                 <a:latin typeface="Arial"/>
                 <a:ea typeface="Arial"/>
               </a:rPr>
-              <a:t>수요의 중심은 AI 추론이고, 물량으로 가장 큰 잠재 수요는 HDD 대체입니다</a:t>
-            </a:r>
-          </a:p>
-        </p:txBody>
-      </p:sp>
-      <p:sp>
-        <p:nvSpPr>
-          <p:cNvPr id="80" name="TextBox 79"/>
+              <a:t>41%</a:t>
+            </a:r>
+          </a:p>
+        </p:txBody>
+      </p:sp>
+      <p:sp>
+        <p:nvSpPr>
+          <p:cNvPr id="75" name="TextBox 74"/>
           <p:cNvSpPr txBox="1"/>
           <p:nvPr/>
         </p:nvSpPr>
         <p:spPr>
           <a:xfrm>
-            <a:off x="722376" y="9601200"/>
-            <a:ext cx="15453359" cy="566928"/>
+            <a:off x="13844015" y="7936992"/>
+            <a:ext cx="1463040" cy="274320"/>
           </a:xfrm>
           <a:prstGeom prst="rect">
             <a:avLst/>
@@ -31537,8 +31258,485 @@
           </a:bodyPr>
           <a:lstStyle/>
           <a:p>
+            <a:pPr algn="ctr">
+              <a:lnSpc>
+                <a:spcPct val="110000"/>
+              </a:lnSpc>
+            </a:pPr>
+            <a:r>
+              <a:rPr sz="1600" b="1">
+                <a:solidFill>
+                  <a:srgbClr val="1A1A1A"/>
+                </a:solidFill>
+                <a:latin typeface="Arial"/>
+                <a:ea typeface="Arial"/>
+              </a:rPr>
+              <a:t>2030</a:t>
+            </a:r>
+          </a:p>
+        </p:txBody>
+      </p:sp>
+      <p:cxnSp>
+        <p:nvCxnSpPr>
+          <p:cNvPr id="76" name="Connector 75"/>
+          <p:cNvCxnSpPr/>
+          <p:nvPr/>
+        </p:nvCxnSpPr>
+        <p:spPr>
+          <a:xfrm>
+            <a:off x="13203936" y="3747211"/>
+            <a:ext cx="914400" cy="1848551"/>
+          </a:xfrm>
+          <a:prstGeom prst="line">
+            <a:avLst/>
+          </a:prstGeom>
+          <a:ln w="9525">
+            <a:solidFill>
+              <a:srgbClr val="8A8A8A"/>
+            </a:solidFill>
+            <a:prstDash val="dash"/>
+          </a:ln>
+        </p:spPr>
+        <p:style>
+          <a:lnRef idx="2">
+            <a:schemeClr val="accent1"/>
+          </a:lnRef>
+          <a:fillRef idx="0">
+            <a:schemeClr val="accent1"/>
+          </a:fillRef>
+          <a:effectRef idx="1">
+            <a:schemeClr val="accent1"/>
+          </a:effectRef>
+          <a:fontRef idx="minor">
+            <a:schemeClr val="tx1"/>
+          </a:fontRef>
+        </p:style>
+      </p:cxnSp>
+      <p:cxnSp>
+        <p:nvCxnSpPr>
+          <p:cNvPr id="77" name="Connector 76"/>
+          <p:cNvCxnSpPr/>
+          <p:nvPr/>
+        </p:nvCxnSpPr>
+        <p:spPr>
+          <a:xfrm>
+            <a:off x="13203936" y="3455334"/>
+            <a:ext cx="914400" cy="1556675"/>
+          </a:xfrm>
+          <a:prstGeom prst="line">
+            <a:avLst/>
+          </a:prstGeom>
+          <a:ln w="9525">
+            <a:solidFill>
+              <a:srgbClr val="8A8A8A"/>
+            </a:solidFill>
+            <a:prstDash val="dash"/>
+          </a:ln>
+        </p:spPr>
+        <p:style>
+          <a:lnRef idx="2">
+            <a:schemeClr val="accent1"/>
+          </a:lnRef>
+          <a:fillRef idx="0">
+            <a:schemeClr val="accent1"/>
+          </a:fillRef>
+          <a:effectRef idx="1">
+            <a:schemeClr val="accent1"/>
+          </a:effectRef>
+          <a:fontRef idx="minor">
+            <a:schemeClr val="tx1"/>
+          </a:fontRef>
+        </p:style>
+      </p:cxnSp>
+      <p:sp>
+        <p:nvSpPr>
+          <p:cNvPr id="78" name="TextBox 77"/>
+          <p:cNvSpPr txBox="1"/>
+          <p:nvPr/>
+        </p:nvSpPr>
+        <p:spPr>
+          <a:xfrm>
+            <a:off x="15179039" y="6318321"/>
+            <a:ext cx="2386584" cy="841248"/>
+          </a:xfrm>
+          <a:prstGeom prst="rect">
+            <a:avLst/>
+          </a:prstGeom>
+          <a:noFill/>
+        </p:spPr>
+        <p:txBody>
+          <a:bodyPr wrap="square" anchor="ctr" lIns="0" rIns="0" tIns="0" bIns="0">
+            <a:spAutoFit/>
+          </a:bodyPr>
+          <a:lstStyle/>
+          <a:p>
             <a:pPr algn="l">
               <a:lnSpc>
+                <a:spcPct val="100000"/>
+              </a:lnSpc>
+            </a:pPr>
+            <a:r>
+              <a:rPr sz="1600" b="0">
+                <a:solidFill>
+                  <a:srgbClr val="555555"/>
+                </a:solidFill>
+                <a:latin typeface="Arial"/>
+                <a:ea typeface="Arial"/>
+              </a:rPr>
+              <a:t>범용 · 엔터프라이즈</a:t>
+            </a:r>
+          </a:p>
+          <a:p>
+            <a:pPr algn="l">
+              <a:lnSpc>
+                <a:spcPct val="100000"/>
+              </a:lnSpc>
+            </a:pPr>
+            <a:r>
+              <a:rPr sz="2600" b="1">
+                <a:solidFill>
+                  <a:srgbClr val="1A1A1A"/>
+                </a:solidFill>
+                <a:latin typeface="Arial"/>
+                <a:ea typeface="Arial"/>
+              </a:rPr>
+              <a:t>-38%p</a:t>
+            </a:r>
+            <a:r>
+              <a:rPr sz="1600" b="0">
+                <a:solidFill>
+                  <a:srgbClr val="555555"/>
+                </a:solidFill>
+                <a:latin typeface="Arial"/>
+                <a:ea typeface="Arial"/>
+              </a:rPr>
+              <a:t>  85 → 47%</a:t>
+            </a:r>
+          </a:p>
+        </p:txBody>
+      </p:sp>
+      <p:sp>
+        <p:nvSpPr>
+          <p:cNvPr id="79" name="TextBox 78"/>
+          <p:cNvSpPr txBox="1"/>
+          <p:nvPr/>
+        </p:nvSpPr>
+        <p:spPr>
+          <a:xfrm>
+            <a:off x="15179039" y="4883261"/>
+            <a:ext cx="2386584" cy="841248"/>
+          </a:xfrm>
+          <a:prstGeom prst="rect">
+            <a:avLst/>
+          </a:prstGeom>
+          <a:noFill/>
+        </p:spPr>
+        <p:txBody>
+          <a:bodyPr wrap="square" anchor="ctr" lIns="0" rIns="0" tIns="0" bIns="0">
+            <a:spAutoFit/>
+          </a:bodyPr>
+          <a:lstStyle/>
+          <a:p>
+            <a:pPr algn="l">
+              <a:lnSpc>
+                <a:spcPct val="100000"/>
+              </a:lnSpc>
+            </a:pPr>
+            <a:r>
+              <a:rPr sz="1600" b="0">
+                <a:solidFill>
+                  <a:srgbClr val="555555"/>
+                </a:solidFill>
+                <a:latin typeface="Arial"/>
+                <a:ea typeface="Arial"/>
+              </a:rPr>
+              <a:t>AI 학습</a:t>
+            </a:r>
+          </a:p>
+          <a:p>
+            <a:pPr algn="l">
+              <a:lnSpc>
+                <a:spcPct val="100000"/>
+              </a:lnSpc>
+            </a:pPr>
+            <a:r>
+              <a:rPr sz="2600" b="1">
+                <a:solidFill>
+                  <a:srgbClr val="1A1A1A"/>
+                </a:solidFill>
+                <a:latin typeface="Arial"/>
+                <a:ea typeface="Arial"/>
+              </a:rPr>
+              <a:t>+6%p</a:t>
+            </a:r>
+            <a:r>
+              <a:rPr sz="1600" b="0">
+                <a:solidFill>
+                  <a:srgbClr val="555555"/>
+                </a:solidFill>
+                <a:latin typeface="Arial"/>
+                <a:ea typeface="Arial"/>
+              </a:rPr>
+              <a:t>  6 → 12%</a:t>
+            </a:r>
+          </a:p>
+        </p:txBody>
+      </p:sp>
+      <p:sp>
+        <p:nvSpPr>
+          <p:cNvPr id="80" name="TextBox 79"/>
+          <p:cNvSpPr txBox="1"/>
+          <p:nvPr/>
+        </p:nvSpPr>
+        <p:spPr>
+          <a:xfrm>
+            <a:off x="15179039" y="3594140"/>
+            <a:ext cx="2386584" cy="841248"/>
+          </a:xfrm>
+          <a:prstGeom prst="rect">
+            <a:avLst/>
+          </a:prstGeom>
+          <a:noFill/>
+        </p:spPr>
+        <p:txBody>
+          <a:bodyPr wrap="square" anchor="ctr" lIns="0" rIns="0" tIns="0" bIns="0">
+            <a:spAutoFit/>
+          </a:bodyPr>
+          <a:lstStyle/>
+          <a:p>
+            <a:pPr algn="l">
+              <a:lnSpc>
+                <a:spcPct val="100000"/>
+              </a:lnSpc>
+            </a:pPr>
+            <a:r>
+              <a:rPr sz="1600" b="0">
+                <a:solidFill>
+                  <a:srgbClr val="555555"/>
+                </a:solidFill>
+                <a:latin typeface="Arial"/>
+                <a:ea typeface="Arial"/>
+              </a:rPr>
+              <a:t>AI 추론</a:t>
+            </a:r>
+          </a:p>
+          <a:p>
+            <a:pPr algn="l">
+              <a:lnSpc>
+                <a:spcPct val="100000"/>
+              </a:lnSpc>
+            </a:pPr>
+            <a:r>
+              <a:rPr sz="2600" b="1">
+                <a:solidFill>
+                  <a:srgbClr val="1428A0"/>
+                </a:solidFill>
+                <a:latin typeface="Arial"/>
+                <a:ea typeface="Arial"/>
+              </a:rPr>
+              <a:t>+32%p</a:t>
+            </a:r>
+            <a:r>
+              <a:rPr sz="1600" b="0">
+                <a:solidFill>
+                  <a:srgbClr val="555555"/>
+                </a:solidFill>
+                <a:latin typeface="Arial"/>
+                <a:ea typeface="Arial"/>
+              </a:rPr>
+              <a:t>  9 → 41%</a:t>
+            </a:r>
+          </a:p>
+        </p:txBody>
+      </p:sp>
+      <p:sp>
+        <p:nvSpPr>
+          <p:cNvPr id="81" name="TextBox 80"/>
+          <p:cNvSpPr txBox="1"/>
+          <p:nvPr/>
+        </p:nvSpPr>
+        <p:spPr>
+          <a:xfrm>
+            <a:off x="12198096" y="8211312"/>
+            <a:ext cx="5367528" cy="329184"/>
+          </a:xfrm>
+          <a:prstGeom prst="rect">
+            <a:avLst/>
+          </a:prstGeom>
+          <a:noFill/>
+        </p:spPr>
+        <p:txBody>
+          <a:bodyPr wrap="square" anchor="ctr" lIns="0" rIns="0" tIns="0" bIns="0">
+            <a:spAutoFit/>
+          </a:bodyPr>
+          <a:lstStyle/>
+          <a:p>
+            <a:pPr algn="l">
+              <a:lnSpc>
+                <a:spcPct val="110000"/>
+              </a:lnSpc>
+            </a:pPr>
+            <a:r>
+              <a:rPr sz="1600" b="0">
+                <a:solidFill>
+                  <a:srgbClr val="555555"/>
+                </a:solidFill>
+                <a:latin typeface="Arial"/>
+                <a:ea typeface="Arial"/>
+              </a:rPr>
+              <a:t>에이전트는 별도 전망 없음 (추론 · 범용에 포함)</a:t>
+            </a:r>
+          </a:p>
+        </p:txBody>
+      </p:sp>
+      <p:sp>
+        <p:nvSpPr>
+          <p:cNvPr id="82" name="Rectangle 81"/>
+          <p:cNvSpPr/>
+          <p:nvPr/>
+        </p:nvSpPr>
+        <p:spPr>
+          <a:xfrm>
+            <a:off x="722376" y="8631936"/>
+            <a:ext cx="16843248" cy="731520"/>
+          </a:xfrm>
+          <a:prstGeom prst="rect">
+            <a:avLst/>
+          </a:prstGeom>
+          <a:solidFill>
+            <a:srgbClr val="1428A0"/>
+          </a:solidFill>
+          <a:ln>
+            <a:noFill/>
+          </a:ln>
+          <a:effectLst/>
+        </p:spPr>
+        <p:style>
+          <a:lnRef idx="1">
+            <a:schemeClr val="accent1"/>
+          </a:lnRef>
+          <a:fillRef idx="3">
+            <a:schemeClr val="accent1"/>
+          </a:fillRef>
+          <a:effectRef idx="2">
+            <a:schemeClr val="accent1"/>
+          </a:effectRef>
+          <a:fontRef idx="minor">
+            <a:schemeClr val="lt1"/>
+          </a:fontRef>
+        </p:style>
+        <p:txBody>
+          <a:bodyPr rtlCol="0" anchor="ctr"/>
+          <a:lstStyle/>
+          <a:p>
+            <a:pPr algn="ctr"/>
+          </a:p>
+        </p:txBody>
+      </p:sp>
+      <p:sp>
+        <p:nvSpPr>
+          <p:cNvPr id="83" name="TextBox 82"/>
+          <p:cNvSpPr txBox="1"/>
+          <p:nvPr/>
+        </p:nvSpPr>
+        <p:spPr>
+          <a:xfrm>
+            <a:off x="1088136" y="8631936"/>
+            <a:ext cx="1234440" cy="731520"/>
+          </a:xfrm>
+          <a:prstGeom prst="rect">
+            <a:avLst/>
+          </a:prstGeom>
+          <a:noFill/>
+        </p:spPr>
+        <p:txBody>
+          <a:bodyPr wrap="square" anchor="ctr" lIns="0" rIns="0" tIns="0" bIns="0">
+            <a:spAutoFit/>
+          </a:bodyPr>
+          <a:lstStyle/>
+          <a:p>
+            <a:pPr algn="l">
+              <a:lnSpc>
+                <a:spcPct val="110000"/>
+              </a:lnSpc>
+            </a:pPr>
+            <a:r>
+              <a:rPr sz="2000" b="0">
+                <a:solidFill>
+                  <a:srgbClr val="AAB8E8"/>
+                </a:solidFill>
+                <a:latin typeface="Arial"/>
+                <a:ea typeface="Arial"/>
+              </a:rPr>
+              <a:t>참고</a:t>
+            </a:r>
+          </a:p>
+        </p:txBody>
+      </p:sp>
+      <p:sp>
+        <p:nvSpPr>
+          <p:cNvPr id="84" name="TextBox 83"/>
+          <p:cNvSpPr txBox="1"/>
+          <p:nvPr/>
+        </p:nvSpPr>
+        <p:spPr>
+          <a:xfrm>
+            <a:off x="2322576" y="8631936"/>
+            <a:ext cx="15060168" cy="731520"/>
+          </a:xfrm>
+          <a:prstGeom prst="rect">
+            <a:avLst/>
+          </a:prstGeom>
+          <a:noFill/>
+        </p:spPr>
+        <p:txBody>
+          <a:bodyPr wrap="square" anchor="ctr" lIns="0" rIns="0" tIns="0" bIns="0">
+            <a:spAutoFit/>
+          </a:bodyPr>
+          <a:lstStyle/>
+          <a:p>
+            <a:pPr algn="l">
+              <a:lnSpc>
+                <a:spcPct val="110000"/>
+              </a:lnSpc>
+            </a:pPr>
+            <a:r>
+              <a:rPr sz="2400" b="1">
+                <a:solidFill>
+                  <a:srgbClr val="FFFFFF"/>
+                </a:solidFill>
+                <a:latin typeface="Arial"/>
+                <a:ea typeface="Arial"/>
+              </a:rPr>
+              <a:t>2030년 AI 추론은 eSSD 수요의 41%로, 범용과 비슷한 비중이 됩니다</a:t>
+            </a:r>
+          </a:p>
+        </p:txBody>
+      </p:sp>
+      <p:sp>
+        <p:nvSpPr>
+          <p:cNvPr id="85" name="TextBox 84"/>
+          <p:cNvSpPr txBox="1"/>
+          <p:nvPr/>
+        </p:nvSpPr>
+        <p:spPr>
+          <a:xfrm>
+            <a:off x="722376" y="9601200"/>
+            <a:ext cx="15453359" cy="566928"/>
+          </a:xfrm>
+          <a:prstGeom prst="rect">
+            <a:avLst/>
+          </a:prstGeom>
+          <a:noFill/>
+        </p:spPr>
+        <p:txBody>
+          <a:bodyPr wrap="square" anchor="t" lIns="0" rIns="0" tIns="0" bIns="0">
+            <a:spAutoFit/>
+          </a:bodyPr>
+          <a:lstStyle/>
+          <a:p>
+            <a:pPr algn="l">
+              <a:lnSpc>
                 <a:spcPct val="105000"/>
               </a:lnSpc>
             </a:pPr>
@@ -31550,14 +31748,14 @@
                 <a:latin typeface="Arial"/>
                 <a:ea typeface="Arial"/>
               </a:rPr>
-              <a:t>출처: McKinsey(2024-12, 범용 = 총량 1,078 − 학습 − 추론 산술, 2025~29 보간) · Kioxia(2026-06, TechInsights 인용 DC 플래시) · JPM(2026-01) · HDD 대체 = Seagate · WD 니어라인 가이던스 산술 · 기관마다 정의 다름, 모두 검색 확인</a:t>
-            </a:r>
-          </a:p>
-        </p:txBody>
-      </p:sp>
-      <p:sp>
-        <p:nvSpPr>
-          <p:cNvPr id="81" name="TextBox 80"/>
+              <a:t>출처: McKinsey(2024-12, 범용 = 총량 1,078 − 학습 − 추론 산술, 2025~29 연평균 보간 산술, 2026 비중도 보간 기준) · Kioxia(2026-06, TechInsights 인용 DC 플래시) · JPM(2026-01) · 기관마다 정의 다름, 모두 검색 확인</a:t>
+            </a:r>
+          </a:p>
+        </p:txBody>
+      </p:sp>
+      <p:sp>
+        <p:nvSpPr>
+          <p:cNvPr id="86" name="TextBox 85"/>
           <p:cNvSpPr txBox="1"/>
           <p:nvPr/>
         </p:nvSpPr>

--- a/outputs/presentation/ssd-future-ready-strategy.pptx
+++ b/outputs/presentation/ssd-future-ready-strategy.pptx
@@ -506,7 +506,7 @@
           <a:lstStyle/>
           <a:p>
             <a:r>
-              <a:t>1장입니다. HBM에서 삼성 점유율은 2022년 40퍼센트에서 2025년 2분기 17퍼센트로, SK하이닉스는 50에서 62퍼센트로 갈렸습니다. 하나의 수요를 늦게 읽으면 첫 호황을 놓친다는 교훈입니다. 그래서 SSD의 다음 수요를 하나로 단정하지 않고, 하이퍼스케일러의 데이터센터 응용 네 가지를 SSD에 요구하는 특성으로 비교했습니다. 카드 오른쪽 위 숫자는 McKinsey가 본 2030년 eSSD 수요입니다. 범용 클라우드와 엔터프라이즈가 약 500, AI 추론이 약 450, AI 학습이 약 130엑사바이트이고, 에이전트는 따로 떼어 낸 전망이 없습니다. 연도별 상세는 참고 5장에 두었습니다. 첫째, 범용 클라우드입니다. 여러 고객의 VM이 서버의 SSD를 나눠 씁니다. Microsoft의 SSD 50만 대를 보면 실제 쓰기는 0.07에서 0.23 DWPD로 범용 TLC 정격 1 DWPD 안에 들어옵니다. 기존 SSD 기술로 대응할 수 있습니다. 다만 한 고객의 쓰기가 같은 SSD를 쓰는 다른 고객의 지연을 키웁니다. Microsoft 워크로드 실험에서 하드웨어로 격리하면 p99 지연이 최대 3.1배 줄었습니다. 멀티테넌트 QoS와 격리는 여전히 중요한 요구입니다. 둘째, AI 학습입니다. NVIDIA SuperPOD 가이드를 GPU당으로 환산하면, 데이터가 캐시보다 큰 멀티모달 학습은 기본 등급보다 약 3배의 스토리지 대역을 요구합니다. 데이터 로딩에는 고성능 TLC가 맞습니다. 405B 모델은 체크포인트 한 번에 약 5.7테라바이트를 쓰고, 다 쓸 때까지 학습이 멈춥니다. 체크포인트 간격이 짧아지면 고내구 TLC가 필요할 수 있어 점선으로 두었습니다. 셋째, AI 추론의 KV 캐시 오프로드입니다. KV 캐시 계층을 실측하면 드라이브당 3.2 DWPD로 QLC 정격 0.6을 크게 넘고, AI 전용 SSD는 50에서 120 DWPD로 나왔습니다. 반대로 읽기 위주라는 측정도 있습니다. 그래서 같은 KV 캐시라도 쓰기량에 따라 SLC급, 고내구 TLC, 고성능 TLC로 갈리고, 읽기 위주라면 QLC도 후보입니다. 고내구라는 요구에도 필요한 DWPD에 따라 SLC부터 QLC까지 여러 답이 있다는 뜻입니다. 넷째, Meta Muse와 OpenAI Dot 같은 에이전트입니다. 사실을 다시 확인해 보니 이 서비스들은 사용자마다 VM을 하나씩 주는 구조이고, 에이전트는 대부분의 시간을 휴면 상태로 보냅니다. 휴면 상태는 압축 스냅샷으로 오브젝트 스토리지에 보관됩니다. 제3자가 Muse VM을 관측한 결과 메모리 7.75기가바이트에 디스크 100기가바이트로, 디스크가 13배 큽니다. 사용자 1억 명이면 할당 기준 10엑사바이트입니다. 그래서 에이전트 VM 자체에는 고DWPD보다 고용량 QLC가 맞습니다. 다만 실제 사용량은 아직 할당보다 훨씬 작고, 에이전트 VM 디스크의 쓰기량을 공개한 측정은 없습니다. 에이전트가 키우는 고DWPD 수요는 VM이 아니라 추론의 KV 캐시 계층에서 나옵니다. 에이전트가 한꺼번에 깨어날 때 디스크 경합이 생긴다는 Google의 설명이 있어, 고성능 TLC는 점선으로 두었습니다. 아래 표는 이것을 제품군으로 정리한 것입니다. 위에서 아래로 요구 DWPD는 낮아지고 최대 용량은 커집니다. 파란 칸은 지금 쓰는 곳, 점선 칸은 신호에 따라 쓰일 곳입니다. 응용마다 필요한 제품군의 조합이 다르고, 하나의 제품으로 모든 응용에 대응할 수 없습니다. 그래서 다양한 데이터센터 응용에 대응하려면 SLC부터 QLC까지 다양한 제품 포트폴리오가 필요합니다. 다만 지금 예측할 수 있는 범위 안의 준비입니다.</a:t>
+              <a:t>1장입니다. HBM에서 삼성 점유율은 2022년 40퍼센트에서 2025년 2분기 17퍼센트로, SK하이닉스는 50에서 62퍼센트로 갈렸습니다. 하나의 수요를 늦게 읽으면 첫 호황을 놓친다는 교훈입니다. 그래서 SSD의 다음 수요를 하나로 단정하지 않고, 하이퍼스케일러의 데이터센터 응용 네 가지를 SSD에 요구하는 특성으로 비교했습니다. 카드 아래쪽 숫자는 McKinsey가 본 2030년 eSSD 수요와 그 비중입니다. 범용 클라우드와 엔터프라이즈가 약 500엑사바이트로 47퍼센트, AI 추론이 약 450엑사바이트로 41퍼센트, AI 학습이 약 130엑사바이트로 12퍼센트이고, 에이전트는 따로 떼어 낸 전망이 없습니다. 올해 대비 변화는 참고 5장에 두었습니다. 첫째, 범용 클라우드입니다. 여러 고객의 VM이 서버의 SSD를 나눠 씁니다. Microsoft의 SSD 50만 대를 보면 실제 쓰기는 0.07에서 0.23 DWPD로 범용 TLC 정격 1 DWPD 안에 들어옵니다. 기존 SSD 기술로 대응할 수 있습니다. 다만 한 고객의 쓰기가 같은 SSD를 쓰는 다른 고객의 지연을 키웁니다. Microsoft 워크로드 실험에서 하드웨어로 격리하면 p99 지연이 최대 3.1배 줄었습니다. 멀티테넌트 QoS와 격리는 여전히 중요한 요구입니다. 둘째, AI 학습입니다. NVIDIA SuperPOD 가이드를 GPU당으로 환산하면, 데이터가 캐시보다 큰 멀티모달 학습은 기본 등급보다 약 3배의 스토리지 대역을 요구합니다. 데이터 로딩에는 고성능 TLC가 맞습니다. 405B 모델은 체크포인트 한 번에 약 5.7테라바이트를 쓰고, 다 쓸 때까지 학습이 멈춥니다. 체크포인트 간격이 짧아지면 고내구 TLC가 필요할 수 있어 점선으로 두었습니다. 셋째, AI 추론의 KV 캐시 오프로드입니다. KV 캐시 계층을 실측하면 드라이브당 3.2 DWPD로 QLC 정격 0.6을 크게 넘고, AI 전용 SSD는 50에서 120 DWPD로 나왔습니다. 반대로 읽기 위주라는 측정도 있습니다. 그래서 같은 KV 캐시라도 쓰기량에 따라 SLC급, 고내구 TLC, 고성능 TLC로 갈리고, 읽기 위주라면 QLC도 후보입니다. 고내구라는 요구에도 필요한 DWPD에 따라 SLC부터 QLC까지 여러 답이 있다는 뜻입니다. 넷째, Meta Muse와 OpenAI Dot 같은 에이전트입니다. 사실을 다시 확인해 보니 이 서비스들은 사용자마다 VM을 하나씩 주는 구조이고, 에이전트는 대부분의 시간을 휴면 상태로 보냅니다. 휴면 상태는 압축 스냅샷으로 오브젝트 스토리지에 보관됩니다. 제3자가 Muse VM을 관측한 결과 메모리 7.75기가바이트에 디스크 100기가바이트로, 디스크가 13배 큽니다. 사용자 1억 명이면 할당 기준 10엑사바이트입니다. 그래서 에이전트 VM 자체에는 고DWPD보다 고용량 QLC가 맞습니다. 다만 실제 사용량은 아직 할당보다 훨씬 작고, 에이전트 VM 디스크의 쓰기량을 공개한 측정은 없습니다. 에이전트가 키우는 고DWPD 수요는 VM이 아니라 추론의 KV 캐시 계층에서 나옵니다. 에이전트가 한꺼번에 깨어날 때 디스크 경합이 생긴다는 Google의 설명이 있어, 고성능 TLC는 점선으로 두었습니다. 아래 표는 이것을 제품군으로 정리한 것입니다. 위에서 아래로 요구 DWPD는 낮아지고 최대 용량은 커집니다. 파란 칸은 지금 쓰는 곳, 점선 칸은 신호에 따라 쓰일 곳입니다. 응용마다 필요한 제품군의 조합이 다르고, 하나의 제품으로 모든 응용에 대응할 수 없습니다. 그래서 다양한 데이터센터 응용에 대응하려면 SLC부터 QLC까지 다양한 제품 포트폴리오가 필요합니다. 다만 지금 예측할 수 있는 범위 안의 준비입니다.</a:t>
             </a:r>
           </a:p>
         </p:txBody>
@@ -5556,8 +5556,8 @@
         </p:nvSpPr>
         <p:spPr>
           <a:xfrm>
-            <a:off x="4489704" y="4718304"/>
-            <a:ext cx="2839212" cy="329184"/>
+            <a:off x="4489704" y="4736592"/>
+            <a:ext cx="2930652" cy="329184"/>
           </a:xfrm>
           <a:prstGeom prst="rect">
             <a:avLst/>
@@ -5595,6 +5595,16 @@
               </a:rPr>
               <a:t>약 500EB</a:t>
             </a:r>
+            <a:r>
+              <a:rPr sz="2000" b="1">
+                <a:solidFill>
+                  <a:srgbClr val="1A1A1A"/>
+                </a:solidFill>
+                <a:latin typeface="Arial"/>
+                <a:ea typeface="Arial"/>
+              </a:rPr>
+              <a:t>  (47%)</a:t>
+            </a:r>
           </a:p>
         </p:txBody>
       </p:sp>
@@ -5606,8 +5616,8 @@
         </p:nvSpPr>
         <p:spPr>
           <a:xfrm>
-            <a:off x="7840979" y="4718304"/>
-            <a:ext cx="2839212" cy="329184"/>
+            <a:off x="7840979" y="4736592"/>
+            <a:ext cx="2930652" cy="329184"/>
           </a:xfrm>
           <a:prstGeom prst="rect">
             <a:avLst/>
@@ -5645,6 +5655,16 @@
               </a:rPr>
               <a:t>약 130EB</a:t>
             </a:r>
+            <a:r>
+              <a:rPr sz="2000" b="1">
+                <a:solidFill>
+                  <a:srgbClr val="1A1A1A"/>
+                </a:solidFill>
+                <a:latin typeface="Arial"/>
+                <a:ea typeface="Arial"/>
+              </a:rPr>
+              <a:t>  (12%)</a:t>
+            </a:r>
           </a:p>
         </p:txBody>
       </p:sp>
@@ -5656,8 +5676,8 @@
         </p:nvSpPr>
         <p:spPr>
           <a:xfrm>
-            <a:off x="11192256" y="4718304"/>
-            <a:ext cx="2839212" cy="329184"/>
+            <a:off x="11192256" y="4736592"/>
+            <a:ext cx="2930652" cy="329184"/>
           </a:xfrm>
           <a:prstGeom prst="rect">
             <a:avLst/>
@@ -5695,6 +5715,16 @@
               </a:rPr>
               <a:t>약 450EB</a:t>
             </a:r>
+            <a:r>
+              <a:rPr sz="2000" b="1">
+                <a:solidFill>
+                  <a:srgbClr val="1428A0"/>
+                </a:solidFill>
+                <a:latin typeface="Arial"/>
+                <a:ea typeface="Arial"/>
+              </a:rPr>
+              <a:t>  (41%)</a:t>
+            </a:r>
           </a:p>
         </p:txBody>
       </p:sp>
@@ -5706,8 +5736,8 @@
         </p:nvSpPr>
         <p:spPr>
           <a:xfrm>
-            <a:off x="14543532" y="4718304"/>
-            <a:ext cx="2839212" cy="329184"/>
+            <a:off x="14543532" y="4736592"/>
+            <a:ext cx="2930652" cy="329184"/>
           </a:xfrm>
           <a:prstGeom prst="rect">
             <a:avLst/>
@@ -6504,7 +6534,7 @@
         </p:nvSpPr>
         <p:spPr>
           <a:xfrm>
-            <a:off x="6263640" y="4553712"/>
+            <a:off x="6263640" y="4407408"/>
             <a:ext cx="1193292" cy="256032"/>
           </a:xfrm>
           <a:prstGeom prst="rect">
@@ -6544,8 +6574,8 @@
         </p:nvSpPr>
         <p:spPr>
           <a:xfrm>
-            <a:off x="6409944" y="3255263"/>
-            <a:ext cx="365760" cy="987552"/>
+            <a:off x="6409944" y="3236976"/>
+            <a:ext cx="365760" cy="914400"/>
           </a:xfrm>
           <a:prstGeom prst="rect">
             <a:avLst/>
@@ -6588,7 +6618,7 @@
         </p:nvSpPr>
         <p:spPr>
           <a:xfrm>
-            <a:off x="6227064" y="2962656"/>
+            <a:off x="6227064" y="2944368"/>
             <a:ext cx="731520" cy="274320"/>
           </a:xfrm>
           <a:prstGeom prst="rect">
@@ -6628,7 +6658,7 @@
         </p:nvSpPr>
         <p:spPr>
           <a:xfrm>
-            <a:off x="6272783" y="4279392"/>
+            <a:off x="6272783" y="4187952"/>
             <a:ext cx="640080" cy="256032"/>
           </a:xfrm>
           <a:prstGeom prst="rect">
@@ -6668,8 +6698,8 @@
         </p:nvSpPr>
         <p:spPr>
           <a:xfrm>
-            <a:off x="6922008" y="3924250"/>
-            <a:ext cx="365760" cy="318565"/>
+            <a:off x="6922008" y="3856408"/>
+            <a:ext cx="365760" cy="294967"/>
           </a:xfrm>
           <a:prstGeom prst="rect">
             <a:avLst/>
@@ -6712,7 +6742,7 @@
         </p:nvSpPr>
         <p:spPr>
           <a:xfrm>
-            <a:off x="6739128" y="3631642"/>
+            <a:off x="6739128" y="3563800"/>
             <a:ext cx="731520" cy="274320"/>
           </a:xfrm>
           <a:prstGeom prst="rect">
@@ -6752,7 +6782,7 @@
         </p:nvSpPr>
         <p:spPr>
           <a:xfrm>
-            <a:off x="6784848" y="4279392"/>
+            <a:off x="6784848" y="4187952"/>
             <a:ext cx="640080" cy="256032"/>
           </a:xfrm>
           <a:prstGeom prst="rect">
@@ -11830,7 +11860,7 @@
                 <a:latin typeface="Arial"/>
                 <a:ea typeface="Arial"/>
               </a:rPr>
-              <a:t>출처: 2030 수요 McKinsey(2024-12, 범용은 산술, 상세 5장) · HBM 과제팀 집계 · 공유 SSD p99 FlashBlox(FAST'17) · GPU당 대역 NVIDIA SuperPOD(환산) · KV 실측 StorageReview(2026-08) · AI 전용 Kioxia · DapuStor · 에이전트 Google · Muse 관측(제3자) · 제품군 Kioxia FL6 · LC9, Solidigm PS1010 · PS1030</a:t>
+              <a:t>출처: 2030 수요 · (비중) McKinsey(2024-12, 범용은 산술, 상세 5장) · HBM 과제팀 집계 · 공유 SSD p99 FlashBlox(FAST'17) · GPU당 대역 NVIDIA SuperPOD(환산) · KV 실측 StorageReview(2026-08) · AI 전용 Kioxia · DapuStor · 에이전트 Google · Muse 관측(제3자) · 제품군 Kioxia FL6 · LC9, Solidigm PS1010 · PS1030</a:t>
             </a:r>
           </a:p>
         </p:txBody>

--- a/outputs/presentation/ssd-future-ready-strategy.pptx
+++ b/outputs/presentation/ssd-future-ready-strategy.pptx
@@ -506,7 +506,7 @@
           <a:lstStyle/>
           <a:p>
             <a:r>
-              <a:t>1장입니다. HBM에서 삼성 점유율은 2022년 40퍼센트에서 2025년 2분기 17퍼센트로, SK하이닉스는 50에서 62퍼센트로 갈렸습니다. 하나의 수요를 늦게 읽으면 첫 호황을 놓친다는 교훈입니다. 그래서 SSD의 다음 수요를 하나로 단정하지 않고, 하이퍼스케일러의 데이터센터 응용 네 가지를 SSD에 요구하는 특성으로 비교했습니다. 카드 아래쪽 숫자는 McKinsey가 본 2030년 eSSD 수요와 그 비중입니다. 범용 클라우드와 엔터프라이즈가 약 500엑사바이트로 47퍼센트, AI 추론이 약 450엑사바이트로 41퍼센트, AI 학습이 약 130엑사바이트로 12퍼센트이고, 에이전트는 따로 떼어 낸 전망이 없습니다. 올해 대비 변화는 참고 5장에 두었습니다. 첫째, 범용 클라우드입니다. 여러 고객의 VM이 서버의 SSD를 나눠 씁니다. Microsoft의 SSD 50만 대를 보면 실제 쓰기는 0.07에서 0.23 DWPD로 범용 TLC 정격 1 DWPD 안에 들어옵니다. 기존 SSD 기술로 대응할 수 있습니다. 다만 한 고객의 쓰기가 같은 SSD를 쓰는 다른 고객의 지연을 키웁니다. Microsoft 워크로드 실험에서 하드웨어로 격리하면 p99 지연이 최대 3.1배 줄었습니다. 멀티테넌트 QoS와 격리는 여전히 중요한 요구입니다. 둘째, AI 학습입니다. NVIDIA SuperPOD 가이드를 GPU당으로 환산하면, 데이터가 캐시보다 큰 멀티모달 학습은 기본 등급보다 약 3배의 스토리지 대역을 요구합니다. 데이터 로딩에는 고성능 TLC가 맞습니다. 405B 모델은 체크포인트 한 번에 약 5.7테라바이트를 쓰고, 다 쓸 때까지 학습이 멈춥니다. 체크포인트 간격이 짧아지면 고내구 TLC가 필요할 수 있어 점선으로 두었습니다. 셋째, AI 추론의 KV 캐시 오프로드입니다. KV 캐시 계층을 실측하면 드라이브당 3.2 DWPD로 QLC 정격 0.6을 크게 넘고, AI 전용 SSD는 50에서 120 DWPD로 나왔습니다. 반대로 읽기 위주라는 측정도 있습니다. 그래서 같은 KV 캐시라도 쓰기량에 따라 SLC급, 고내구 TLC, 고성능 TLC로 갈리고, 읽기 위주라면 QLC도 후보입니다. 고내구라는 요구에도 필요한 DWPD에 따라 SLC부터 QLC까지 여러 답이 있다는 뜻입니다. 넷째, Meta Muse와 OpenAI Dot 같은 에이전트입니다. 사실을 다시 확인해 보니 이 서비스들은 사용자마다 VM을 하나씩 주는 구조이고, 에이전트는 대부분의 시간을 휴면 상태로 보냅니다. 휴면 상태는 압축 스냅샷으로 오브젝트 스토리지에 보관됩니다. 제3자가 Muse VM을 관측한 결과 메모리 7.75기가바이트에 디스크 100기가바이트로, 디스크가 13배 큽니다. 사용자 1억 명이면 할당 기준 10엑사바이트입니다. 그래서 에이전트 VM 자체에는 고DWPD보다 고용량 QLC가 맞습니다. 다만 실제 사용량은 아직 할당보다 훨씬 작고, 에이전트 VM 디스크의 쓰기량을 공개한 측정은 없습니다. 에이전트가 키우는 고DWPD 수요는 VM이 아니라 추론의 KV 캐시 계층에서 나옵니다. 에이전트가 한꺼번에 깨어날 때 디스크 경합이 생긴다는 Google의 설명이 있어, 고성능 TLC는 점선으로 두었습니다. 아래 표는 이것을 제품군으로 정리한 것입니다. 위에서 아래로 요구 DWPD는 낮아지고 최대 용량은 커집니다. 파란 칸은 지금 쓰는 곳, 점선 칸은 신호에 따라 쓰일 곳입니다. 응용마다 필요한 제품군의 조합이 다르고, 하나의 제품으로 모든 응용에 대응할 수 없습니다. 그래서 다양한 데이터센터 응용에 대응하려면 SLC부터 QLC까지 다양한 제품 포트폴리오가 필요합니다. 다만 지금 예측할 수 있는 범위 안의 준비입니다.</a:t>
+              <a:t>1장입니다. HBM에서 삼성 점유율은 2022년 40퍼센트에서 2025년 2분기 17퍼센트로, SK하이닉스는 50에서 62퍼센트로 갈렸습니다. 하나의 수요를 늦게 읽으면 첫 호황을 놓친다는 교훈입니다. 그래서 SSD의 다음 수요를 하나로 단정하지 않고, 하이퍼스케일러의 데이터센터 응용 네 가지를 SSD에 요구하는 특성으로 비교했습니다. 카드 아래 가로 막대는 eSSD 수요의 응용별 비중입니다. 올해는 범용 클라우드와 엔터프라이즈가 85퍼센트로 대부분이고, AI 학습 6퍼센트, AI 추론 9퍼센트입니다. 2030년에는 전체가 약 1,078엑사바이트로 커지면서 범용 47퍼센트, AI 학습 12퍼센트, AI 추론 41퍼센트가 됩니다. 에이전트는 따로 떼어 낸 전망이 없어 추론과 범용에 포함됩니다. 올해 비중은 McKinsey 전망을 이어 계산한 값이고, 연도별 상세는 참고 5장에 두었습니다. 첫째, 범용 클라우드입니다. 여러 고객의 VM이 서버의 SSD를 나눠 씁니다. Microsoft의 SSD 50만 대를 보면 실제 쓰기는 0.07에서 0.23 DWPD로 범용 TLC 정격 1 DWPD 안에 들어옵니다. 기존 SSD 기술로 대응할 수 있습니다. 다만 한 고객의 쓰기가 같은 SSD를 쓰는 다른 고객의 지연을 키웁니다. Microsoft 워크로드 실험에서 하드웨어로 격리하면 p99 지연이 최대 3.1배 줄었습니다. 멀티테넌트 QoS와 격리는 여전히 중요한 요구입니다. 둘째, AI 학습입니다. NVIDIA SuperPOD 가이드를 GPU당으로 환산하면, 데이터가 캐시보다 큰 멀티모달 학습은 기본 등급보다 약 3배의 스토리지 대역을 요구합니다. 데이터 로딩에는 고성능 TLC가 맞습니다. 405B 모델은 체크포인트 한 번에 약 5.7테라바이트를 쓰고, 다 쓸 때까지 학습이 멈춥니다. 체크포인트 간격이 짧아지면 고내구 TLC가 필요할 수 있어 점선으로 두었습니다. 셋째, AI 추론의 KV 캐시 오프로드입니다. KV 캐시 계층을 실측하면 드라이브당 3.2 DWPD로 QLC 정격 0.6을 크게 넘고, AI 전용 SSD는 50에서 120 DWPD로 나왔습니다. 반대로 읽기 위주라는 측정도 있습니다. 그래서 같은 KV 캐시라도 쓰기량에 따라 SLC급, 고내구 TLC, 고성능 TLC로 갈리고, 읽기 위주라면 QLC도 후보입니다. 고내구라는 요구에도 필요한 DWPD에 따라 SLC부터 QLC까지 여러 답이 있다는 뜻입니다. 넷째, Meta Muse와 OpenAI Dot 같은 에이전트입니다. 사실을 다시 확인해 보니 이 서비스들은 사용자마다 VM을 하나씩 주는 구조이고, 에이전트는 대부분의 시간을 휴면 상태로 보냅니다. 휴면 상태는 압축 스냅샷으로 오브젝트 스토리지에 보관됩니다. 제3자가 Muse VM을 관측한 결과 메모리 7.75기가바이트에 디스크 100기가바이트로, 디스크가 13배 큽니다. 사용자 1억 명이면 할당 기준 10엑사바이트입니다. 그래서 에이전트 VM 자체에는 고DWPD보다 고용량 QLC가 맞습니다. 다만 실제 사용량은 아직 할당보다 훨씬 작고, 에이전트 VM 디스크의 쓰기량을 공개한 측정은 없습니다. 에이전트가 키우는 고DWPD 수요는 VM이 아니라 추론의 KV 캐시 계층에서 나옵니다. 에이전트가 한꺼번에 깨어날 때 디스크 경합이 생긴다는 Google의 설명이 있어, 고성능 TLC는 점선으로 두었습니다. 아래 표는 이것을 제품군으로 정리한 것입니다. 위에서 아래로 요구 DWPD는 낮아지고 최대 용량은 커집니다. 파란 칸은 지금 쓰는 곳, 점선 칸은 신호에 따라 쓰일 곳입니다. 응용마다 필요한 제품군의 조합이 다르고, 하나의 제품으로 모든 응용에 대응할 수 없습니다. 그래서 다양한 데이터센터 응용에 대응하려면 SLC부터 QLC까지 다양한 제품 포트폴리오가 필요합니다. 다만 지금 예측할 수 있는 범위 안의 준비입니다.</a:t>
             </a:r>
           </a:p>
         </p:txBody>
@@ -3992,11 +3992,11 @@
         <p:spPr>
           <a:xfrm>
             <a:off x="722376" y="2121408"/>
-            <a:ext cx="3383280" cy="3474720"/>
+            <a:ext cx="3383280" cy="3090672"/>
           </a:xfrm>
           <a:prstGeom prst="roundRect">
             <a:avLst>
-              <a:gd name="adj" fmla="val 2162"/>
+              <a:gd name="adj" fmla="val 2366"/>
             </a:avLst>
           </a:prstGeom>
           <a:solidFill>
@@ -4134,8 +4134,8 @@
         </p:nvCxnSpPr>
         <p:spPr>
           <a:xfrm flipV="1">
-            <a:off x="1508760" y="3727426"/>
-            <a:ext cx="914400" cy="249382"/>
+            <a:off x="1508760" y="3707476"/>
+            <a:ext cx="914400" cy="209481"/>
           </a:xfrm>
           <a:prstGeom prst="line">
             <a:avLst/>
@@ -4169,7 +4169,7 @@
         </p:nvSpPr>
         <p:spPr>
           <a:xfrm>
-            <a:off x="1444751" y="3912800"/>
+            <a:off x="1444751" y="3852949"/>
             <a:ext cx="128016" cy="128016"/>
           </a:xfrm>
           <a:prstGeom prst="ellipse">
@@ -4213,7 +4213,7 @@
         </p:nvSpPr>
         <p:spPr>
           <a:xfrm>
-            <a:off x="2359152" y="3663418"/>
+            <a:off x="2359152" y="3643468"/>
             <a:ext cx="128016" cy="128016"/>
           </a:xfrm>
           <a:prstGeom prst="ellipse">
@@ -4257,7 +4257,7 @@
         </p:nvSpPr>
         <p:spPr>
           <a:xfrm>
-            <a:off x="868680" y="3711632"/>
+            <a:off x="868680" y="3651781"/>
             <a:ext cx="530352" cy="310896"/>
           </a:xfrm>
           <a:prstGeom prst="rect">
@@ -4297,7 +4297,7 @@
         </p:nvSpPr>
         <p:spPr>
           <a:xfrm>
-            <a:off x="2532888" y="3571978"/>
+            <a:off x="2532888" y="3552028"/>
             <a:ext cx="603504" cy="310896"/>
           </a:xfrm>
           <a:prstGeom prst="rect">
@@ -4345,7 +4345,7 @@
         </p:blipFill>
         <p:spPr>
           <a:xfrm>
-            <a:off x="3154680" y="3608554"/>
+            <a:off x="3154680" y="3588604"/>
             <a:ext cx="452374" cy="237744"/>
           </a:xfrm>
           <a:prstGeom prst="rect">
@@ -4361,8 +4361,8 @@
         </p:nvCxnSpPr>
         <p:spPr>
           <a:xfrm>
-            <a:off x="1508760" y="4184626"/>
-            <a:ext cx="914400" cy="477982"/>
+            <a:off x="1508760" y="4091524"/>
+            <a:ext cx="914400" cy="401505"/>
           </a:xfrm>
           <a:prstGeom prst="line">
             <a:avLst/>
@@ -4396,7 +4396,7 @@
         </p:nvSpPr>
         <p:spPr>
           <a:xfrm>
-            <a:off x="1444751" y="4120618"/>
+            <a:off x="1444751" y="4027516"/>
             <a:ext cx="128016" cy="128016"/>
           </a:xfrm>
           <a:prstGeom prst="ellipse">
@@ -4440,7 +4440,7 @@
         </p:nvSpPr>
         <p:spPr>
           <a:xfrm>
-            <a:off x="2359152" y="4598600"/>
+            <a:off x="2359152" y="4429021"/>
             <a:ext cx="128016" cy="128016"/>
           </a:xfrm>
           <a:prstGeom prst="ellipse">
@@ -4484,7 +4484,7 @@
         </p:nvSpPr>
         <p:spPr>
           <a:xfrm>
-            <a:off x="868680" y="4138906"/>
+            <a:off x="868680" y="4045804"/>
             <a:ext cx="530352" cy="310896"/>
           </a:xfrm>
           <a:prstGeom prst="rect">
@@ -4524,7 +4524,7 @@
         </p:nvSpPr>
         <p:spPr>
           <a:xfrm>
-            <a:off x="2532888" y="4507160"/>
+            <a:off x="2532888" y="4337581"/>
             <a:ext cx="603504" cy="310896"/>
           </a:xfrm>
           <a:prstGeom prst="rect">
@@ -4572,7 +4572,7 @@
         </p:blipFill>
         <p:spPr>
           <a:xfrm>
-            <a:off x="3154680" y="4601936"/>
+            <a:off x="3154680" y="4432356"/>
             <a:ext cx="786384" cy="121345"/>
           </a:xfrm>
           <a:prstGeom prst="rect">
@@ -4588,7 +4588,7 @@
         </p:nvSpPr>
         <p:spPr>
           <a:xfrm>
-            <a:off x="1097280" y="4846320"/>
+            <a:off x="1097280" y="4663440"/>
             <a:ext cx="822960" cy="256032"/>
           </a:xfrm>
           <a:prstGeom prst="rect">
@@ -4628,7 +4628,7 @@
         </p:nvSpPr>
         <p:spPr>
           <a:xfrm>
-            <a:off x="2011680" y="4846320"/>
+            <a:off x="2011680" y="4663440"/>
             <a:ext cx="822960" cy="256032"/>
           </a:xfrm>
           <a:prstGeom prst="rect">
@@ -4668,8 +4668,8 @@
         </p:nvSpPr>
         <p:spPr>
           <a:xfrm>
-            <a:off x="923544" y="5266944"/>
-            <a:ext cx="2980944" cy="274320"/>
+            <a:off x="2788920" y="4663440"/>
+            <a:ext cx="1179575" cy="256032"/>
           </a:xfrm>
           <a:prstGeom prst="rect">
             <a:avLst/>
@@ -4682,7 +4682,7 @@
           </a:bodyPr>
           <a:lstStyle/>
           <a:p>
-            <a:pPr algn="ctr">
+            <a:pPr algn="r">
               <a:lnSpc>
                 <a:spcPct val="110000"/>
               </a:lnSpc>
@@ -4695,7 +4695,7 @@
                 <a:latin typeface="Arial"/>
                 <a:ea typeface="Arial"/>
               </a:rPr>
-              <a:t>HBM 점유율</a:t>
+              <a:t>점유율</a:t>
             </a:r>
           </a:p>
         </p:txBody>
@@ -4709,11 +4709,11 @@
         <p:spPr>
           <a:xfrm>
             <a:off x="4306824" y="2121408"/>
-            <a:ext cx="3204972" cy="3474720"/>
+            <a:ext cx="3204972" cy="3090672"/>
           </a:xfrm>
           <a:prstGeom prst="roundRect">
             <a:avLst>
-              <a:gd name="adj" fmla="val 2282"/>
+              <a:gd name="adj" fmla="val 2366"/>
             </a:avLst>
           </a:prstGeom>
           <a:solidFill>
@@ -4836,7 +4836,7 @@
         </p:nvSpPr>
         <p:spPr>
           <a:xfrm>
-            <a:off x="4489704" y="5065776"/>
+            <a:off x="4489704" y="4681728"/>
             <a:ext cx="2839212" cy="10972"/>
           </a:xfrm>
           <a:prstGeom prst="rect">
@@ -4880,7 +4880,7 @@
         </p:nvSpPr>
         <p:spPr>
           <a:xfrm>
-            <a:off x="4489704" y="5120640"/>
+            <a:off x="4489704" y="4736592"/>
             <a:ext cx="2839212" cy="384048"/>
           </a:xfrm>
           <a:prstGeom prst="rect">
@@ -4921,11 +4921,11 @@
         <p:spPr>
           <a:xfrm>
             <a:off x="7658100" y="2121408"/>
-            <a:ext cx="3204972" cy="3474720"/>
+            <a:ext cx="3204972" cy="3090672"/>
           </a:xfrm>
           <a:prstGeom prst="roundRect">
             <a:avLst>
-              <a:gd name="adj" fmla="val 2282"/>
+              <a:gd name="adj" fmla="val 2366"/>
             </a:avLst>
           </a:prstGeom>
           <a:solidFill>
@@ -5048,7 +5048,7 @@
         </p:nvSpPr>
         <p:spPr>
           <a:xfrm>
-            <a:off x="7840979" y="5065776"/>
+            <a:off x="7840979" y="4681728"/>
             <a:ext cx="2839212" cy="10972"/>
           </a:xfrm>
           <a:prstGeom prst="rect">
@@ -5092,7 +5092,7 @@
         </p:nvSpPr>
         <p:spPr>
           <a:xfrm>
-            <a:off x="7840979" y="5120640"/>
+            <a:off x="7840979" y="4736592"/>
             <a:ext cx="2839212" cy="384048"/>
           </a:xfrm>
           <a:prstGeom prst="rect">
@@ -5133,11 +5133,11 @@
         <p:spPr>
           <a:xfrm>
             <a:off x="11009376" y="2121408"/>
-            <a:ext cx="3204972" cy="3474720"/>
+            <a:ext cx="3204972" cy="3090672"/>
           </a:xfrm>
           <a:prstGeom prst="roundRect">
             <a:avLst>
-              <a:gd name="adj" fmla="val 2282"/>
+              <a:gd name="adj" fmla="val 2366"/>
             </a:avLst>
           </a:prstGeom>
           <a:solidFill>
@@ -5260,7 +5260,7 @@
         </p:nvSpPr>
         <p:spPr>
           <a:xfrm>
-            <a:off x="11192256" y="5065776"/>
+            <a:off x="11192256" y="4681728"/>
             <a:ext cx="2839212" cy="10972"/>
           </a:xfrm>
           <a:prstGeom prst="rect">
@@ -5304,7 +5304,7 @@
         </p:nvSpPr>
         <p:spPr>
           <a:xfrm>
-            <a:off x="11192256" y="5120640"/>
+            <a:off x="11192256" y="4736592"/>
             <a:ext cx="2839212" cy="384048"/>
           </a:xfrm>
           <a:prstGeom prst="rect">
@@ -5345,11 +5345,11 @@
         <p:spPr>
           <a:xfrm>
             <a:off x="14360652" y="2121408"/>
-            <a:ext cx="3204972" cy="3474720"/>
+            <a:ext cx="3204972" cy="3090672"/>
           </a:xfrm>
           <a:prstGeom prst="roundRect">
             <a:avLst>
-              <a:gd name="adj" fmla="val 2282"/>
+              <a:gd name="adj" fmla="val 2366"/>
             </a:avLst>
           </a:prstGeom>
           <a:solidFill>
@@ -5472,7 +5472,7 @@
         </p:nvSpPr>
         <p:spPr>
           <a:xfrm>
-            <a:off x="14543532" y="5065776"/>
+            <a:off x="14543532" y="4681728"/>
             <a:ext cx="2839212" cy="10972"/>
           </a:xfrm>
           <a:prstGeom prst="rect">
@@ -5516,7 +5516,7 @@
         </p:nvSpPr>
         <p:spPr>
           <a:xfrm>
-            <a:off x="14543532" y="5120640"/>
+            <a:off x="14543532" y="4736592"/>
             <a:ext cx="2839212" cy="384048"/>
           </a:xfrm>
           <a:prstGeom prst="rect">
@@ -5548,239 +5548,9 @@
           </a:p>
         </p:txBody>
       </p:sp>
-      <p:sp>
-        <p:nvSpPr>
-          <p:cNvPr id="44" name="TextBox 43"/>
-          <p:cNvSpPr txBox="1"/>
-          <p:nvPr/>
-        </p:nvSpPr>
-        <p:spPr>
-          <a:xfrm>
-            <a:off x="4489704" y="4736592"/>
-            <a:ext cx="2930652" cy="329184"/>
-          </a:xfrm>
-          <a:prstGeom prst="rect">
-            <a:avLst/>
-          </a:prstGeom>
-          <a:noFill/>
-        </p:spPr>
-        <p:txBody>
-          <a:bodyPr wrap="square" anchor="ctr" lIns="0" rIns="0" tIns="0" bIns="0">
-            <a:spAutoFit/>
-          </a:bodyPr>
-          <a:lstStyle/>
-          <a:p>
-            <a:pPr algn="l">
-              <a:lnSpc>
-                <a:spcPct val="110000"/>
-              </a:lnSpc>
-            </a:pPr>
-            <a:r>
-              <a:rPr sz="1600" b="0">
-                <a:solidFill>
-                  <a:srgbClr val="555555"/>
-                </a:solidFill>
-                <a:latin typeface="Arial"/>
-                <a:ea typeface="Arial"/>
-              </a:rPr>
-              <a:t>2030  </a:t>
-            </a:r>
-            <a:r>
-              <a:rPr sz="2000" b="1">
-                <a:solidFill>
-                  <a:srgbClr val="1A1A1A"/>
-                </a:solidFill>
-                <a:latin typeface="Arial"/>
-                <a:ea typeface="Arial"/>
-              </a:rPr>
-              <a:t>약 500EB</a:t>
-            </a:r>
-            <a:r>
-              <a:rPr sz="2000" b="1">
-                <a:solidFill>
-                  <a:srgbClr val="1A1A1A"/>
-                </a:solidFill>
-                <a:latin typeface="Arial"/>
-                <a:ea typeface="Arial"/>
-              </a:rPr>
-              <a:t>  (47%)</a:t>
-            </a:r>
-          </a:p>
-        </p:txBody>
-      </p:sp>
-      <p:sp>
-        <p:nvSpPr>
-          <p:cNvPr id="45" name="TextBox 44"/>
-          <p:cNvSpPr txBox="1"/>
-          <p:nvPr/>
-        </p:nvSpPr>
-        <p:spPr>
-          <a:xfrm>
-            <a:off x="7840979" y="4736592"/>
-            <a:ext cx="2930652" cy="329184"/>
-          </a:xfrm>
-          <a:prstGeom prst="rect">
-            <a:avLst/>
-          </a:prstGeom>
-          <a:noFill/>
-        </p:spPr>
-        <p:txBody>
-          <a:bodyPr wrap="square" anchor="ctr" lIns="0" rIns="0" tIns="0" bIns="0">
-            <a:spAutoFit/>
-          </a:bodyPr>
-          <a:lstStyle/>
-          <a:p>
-            <a:pPr algn="l">
-              <a:lnSpc>
-                <a:spcPct val="110000"/>
-              </a:lnSpc>
-            </a:pPr>
-            <a:r>
-              <a:rPr sz="1600" b="0">
-                <a:solidFill>
-                  <a:srgbClr val="555555"/>
-                </a:solidFill>
-                <a:latin typeface="Arial"/>
-                <a:ea typeface="Arial"/>
-              </a:rPr>
-              <a:t>2030  </a:t>
-            </a:r>
-            <a:r>
-              <a:rPr sz="2000" b="1">
-                <a:solidFill>
-                  <a:srgbClr val="1A1A1A"/>
-                </a:solidFill>
-                <a:latin typeface="Arial"/>
-                <a:ea typeface="Arial"/>
-              </a:rPr>
-              <a:t>약 130EB</a:t>
-            </a:r>
-            <a:r>
-              <a:rPr sz="2000" b="1">
-                <a:solidFill>
-                  <a:srgbClr val="1A1A1A"/>
-                </a:solidFill>
-                <a:latin typeface="Arial"/>
-                <a:ea typeface="Arial"/>
-              </a:rPr>
-              <a:t>  (12%)</a:t>
-            </a:r>
-          </a:p>
-        </p:txBody>
-      </p:sp>
-      <p:sp>
-        <p:nvSpPr>
-          <p:cNvPr id="46" name="TextBox 45"/>
-          <p:cNvSpPr txBox="1"/>
-          <p:nvPr/>
-        </p:nvSpPr>
-        <p:spPr>
-          <a:xfrm>
-            <a:off x="11192256" y="4736592"/>
-            <a:ext cx="2930652" cy="329184"/>
-          </a:xfrm>
-          <a:prstGeom prst="rect">
-            <a:avLst/>
-          </a:prstGeom>
-          <a:noFill/>
-        </p:spPr>
-        <p:txBody>
-          <a:bodyPr wrap="square" anchor="ctr" lIns="0" rIns="0" tIns="0" bIns="0">
-            <a:spAutoFit/>
-          </a:bodyPr>
-          <a:lstStyle/>
-          <a:p>
-            <a:pPr algn="l">
-              <a:lnSpc>
-                <a:spcPct val="110000"/>
-              </a:lnSpc>
-            </a:pPr>
-            <a:r>
-              <a:rPr sz="1600" b="0">
-                <a:solidFill>
-                  <a:srgbClr val="555555"/>
-                </a:solidFill>
-                <a:latin typeface="Arial"/>
-                <a:ea typeface="Arial"/>
-              </a:rPr>
-              <a:t>2030  </a:t>
-            </a:r>
-            <a:r>
-              <a:rPr sz="2000" b="1">
-                <a:solidFill>
-                  <a:srgbClr val="1A1A1A"/>
-                </a:solidFill>
-                <a:latin typeface="Arial"/>
-                <a:ea typeface="Arial"/>
-              </a:rPr>
-              <a:t>약 450EB</a:t>
-            </a:r>
-            <a:r>
-              <a:rPr sz="2000" b="1">
-                <a:solidFill>
-                  <a:srgbClr val="1428A0"/>
-                </a:solidFill>
-                <a:latin typeface="Arial"/>
-                <a:ea typeface="Arial"/>
-              </a:rPr>
-              <a:t>  (41%)</a:t>
-            </a:r>
-          </a:p>
-        </p:txBody>
-      </p:sp>
-      <p:sp>
-        <p:nvSpPr>
-          <p:cNvPr id="47" name="TextBox 46"/>
-          <p:cNvSpPr txBox="1"/>
-          <p:nvPr/>
-        </p:nvSpPr>
-        <p:spPr>
-          <a:xfrm>
-            <a:off x="14543532" y="4736592"/>
-            <a:ext cx="2930652" cy="329184"/>
-          </a:xfrm>
-          <a:prstGeom prst="rect">
-            <a:avLst/>
-          </a:prstGeom>
-          <a:noFill/>
-        </p:spPr>
-        <p:txBody>
-          <a:bodyPr wrap="square" anchor="ctr" lIns="0" rIns="0" tIns="0" bIns="0">
-            <a:spAutoFit/>
-          </a:bodyPr>
-          <a:lstStyle/>
-          <a:p>
-            <a:pPr algn="l">
-              <a:lnSpc>
-                <a:spcPct val="110000"/>
-              </a:lnSpc>
-            </a:pPr>
-            <a:r>
-              <a:rPr sz="1600" b="0">
-                <a:solidFill>
-                  <a:srgbClr val="555555"/>
-                </a:solidFill>
-                <a:latin typeface="Arial"/>
-                <a:ea typeface="Arial"/>
-              </a:rPr>
-              <a:t>2030  </a:t>
-            </a:r>
-            <a:r>
-              <a:rPr sz="1600" b="0">
-                <a:solidFill>
-                  <a:srgbClr val="555555"/>
-                </a:solidFill>
-                <a:latin typeface="Arial"/>
-                <a:ea typeface="Arial"/>
-              </a:rPr>
-              <a:t>별도 전망 없음</a:t>
-            </a:r>
-          </a:p>
-        </p:txBody>
-      </p:sp>
       <p:pic>
         <p:nvPicPr>
-          <p:cNvPr id="48" name="Picture 47" descr="nvidia.png"/>
+          <p:cNvPr id="44" name="Picture 43" descr="nvidia.png"/>
           <p:cNvPicPr>
             <a:picLocks noChangeAspect="1"/>
           </p:cNvPicPr>
@@ -5804,7 +5574,7 @@
       </p:pic>
       <p:pic>
         <p:nvPicPr>
-          <p:cNvPr id="49" name="Picture 48" descr="aws.png"/>
+          <p:cNvPr id="45" name="Picture 44" descr="aws.png"/>
           <p:cNvPicPr>
             <a:picLocks noChangeAspect="1"/>
           </p:cNvPicPr>
@@ -5828,7 +5598,7 @@
       </p:pic>
       <p:pic>
         <p:nvPicPr>
-          <p:cNvPr id="50" name="Picture 49" descr="microsoft.png"/>
+          <p:cNvPr id="46" name="Picture 45" descr="microsoft.png"/>
           <p:cNvPicPr>
             <a:picLocks noChangeAspect="1"/>
           </p:cNvPicPr>
@@ -5852,7 +5622,7 @@
       </p:pic>
       <p:pic>
         <p:nvPicPr>
-          <p:cNvPr id="51" name="Picture 50" descr="google.png"/>
+          <p:cNvPr id="47" name="Picture 46" descr="google.png"/>
           <p:cNvPicPr>
             <a:picLocks noChangeAspect="1"/>
           </p:cNvPicPr>
@@ -5876,7 +5646,7 @@
       </p:pic>
       <p:pic>
         <p:nvPicPr>
-          <p:cNvPr id="52" name="Picture 51" descr="meta.png"/>
+          <p:cNvPr id="48" name="Picture 47" descr="meta.png"/>
           <p:cNvPicPr>
             <a:picLocks noChangeAspect="1"/>
           </p:cNvPicPr>
@@ -5900,7 +5670,7 @@
       </p:pic>
       <p:sp>
         <p:nvSpPr>
-          <p:cNvPr id="53" name="TextBox 52"/>
+          <p:cNvPr id="49" name="TextBox 48"/>
           <p:cNvSpPr txBox="1"/>
           <p:nvPr/>
         </p:nvSpPr>
@@ -5940,7 +5710,7 @@
       </p:sp>
       <p:pic>
         <p:nvPicPr>
-          <p:cNvPr id="54" name="Picture 53" descr="openai.png"/>
+          <p:cNvPr id="50" name="Picture 49" descr="openai.png"/>
           <p:cNvPicPr>
             <a:picLocks noChangeAspect="1"/>
           </p:cNvPicPr>
@@ -5964,7 +5734,7 @@
       </p:pic>
       <p:sp>
         <p:nvSpPr>
-          <p:cNvPr id="55" name="TextBox 54"/>
+          <p:cNvPr id="51" name="TextBox 50"/>
           <p:cNvSpPr txBox="1"/>
           <p:nvPr/>
         </p:nvSpPr>
@@ -6004,7 +5774,7 @@
       </p:sp>
       <p:sp>
         <p:nvSpPr>
-          <p:cNvPr id="56" name="Cloud 55"/>
+          <p:cNvPr id="52" name="Cloud 51"/>
           <p:cNvSpPr/>
           <p:nvPr/>
         </p:nvSpPr>
@@ -6048,13 +5818,189 @@
       </p:sp>
       <p:sp>
         <p:nvSpPr>
+          <p:cNvPr id="53" name="Rectangle 52"/>
+          <p:cNvSpPr/>
+          <p:nvPr/>
+        </p:nvSpPr>
+        <p:spPr>
+          <a:xfrm>
+            <a:off x="4727448" y="3255263"/>
+            <a:ext cx="329184" cy="201168"/>
+          </a:xfrm>
+          <a:prstGeom prst="rect">
+            <a:avLst/>
+          </a:prstGeom>
+          <a:solidFill>
+            <a:srgbClr val="8A8A8A"/>
+          </a:solidFill>
+          <a:ln>
+            <a:noFill/>
+          </a:ln>
+          <a:effectLst/>
+        </p:spPr>
+        <p:style>
+          <a:lnRef idx="1">
+            <a:schemeClr val="accent1"/>
+          </a:lnRef>
+          <a:fillRef idx="3">
+            <a:schemeClr val="accent1"/>
+          </a:fillRef>
+          <a:effectRef idx="2">
+            <a:schemeClr val="accent1"/>
+          </a:effectRef>
+          <a:fontRef idx="minor">
+            <a:schemeClr val="lt1"/>
+          </a:fontRef>
+        </p:style>
+        <p:txBody>
+          <a:bodyPr rtlCol="0" anchor="ctr"/>
+          <a:lstStyle/>
+          <a:p>
+            <a:pPr algn="ctr"/>
+          </a:p>
+        </p:txBody>
+      </p:sp>
+      <p:sp>
+        <p:nvSpPr>
+          <p:cNvPr id="54" name="Rectangle 53"/>
+          <p:cNvSpPr/>
+          <p:nvPr/>
+        </p:nvSpPr>
+        <p:spPr>
+          <a:xfrm>
+            <a:off x="5111496" y="3255263"/>
+            <a:ext cx="329184" cy="201168"/>
+          </a:xfrm>
+          <a:prstGeom prst="rect">
+            <a:avLst/>
+          </a:prstGeom>
+          <a:solidFill>
+            <a:srgbClr val="AAB8E8"/>
+          </a:solidFill>
+          <a:ln>
+            <a:noFill/>
+          </a:ln>
+          <a:effectLst/>
+        </p:spPr>
+        <p:style>
+          <a:lnRef idx="1">
+            <a:schemeClr val="accent1"/>
+          </a:lnRef>
+          <a:fillRef idx="3">
+            <a:schemeClr val="accent1"/>
+          </a:fillRef>
+          <a:effectRef idx="2">
+            <a:schemeClr val="accent1"/>
+          </a:effectRef>
+          <a:fontRef idx="minor">
+            <a:schemeClr val="lt1"/>
+          </a:fontRef>
+        </p:style>
+        <p:txBody>
+          <a:bodyPr rtlCol="0" anchor="ctr"/>
+          <a:lstStyle/>
+          <a:p>
+            <a:pPr algn="ctr"/>
+          </a:p>
+        </p:txBody>
+      </p:sp>
+      <p:sp>
+        <p:nvSpPr>
+          <p:cNvPr id="55" name="Rectangle 54"/>
+          <p:cNvSpPr/>
+          <p:nvPr/>
+        </p:nvSpPr>
+        <p:spPr>
+          <a:xfrm>
+            <a:off x="5495544" y="3255263"/>
+            <a:ext cx="329184" cy="201168"/>
+          </a:xfrm>
+          <a:prstGeom prst="rect">
+            <a:avLst/>
+          </a:prstGeom>
+          <a:solidFill>
+            <a:srgbClr val="8A8A8A"/>
+          </a:solidFill>
+          <a:ln>
+            <a:noFill/>
+          </a:ln>
+          <a:effectLst/>
+        </p:spPr>
+        <p:style>
+          <a:lnRef idx="1">
+            <a:schemeClr val="accent1"/>
+          </a:lnRef>
+          <a:fillRef idx="3">
+            <a:schemeClr val="accent1"/>
+          </a:fillRef>
+          <a:effectRef idx="2">
+            <a:schemeClr val="accent1"/>
+          </a:effectRef>
+          <a:fontRef idx="minor">
+            <a:schemeClr val="lt1"/>
+          </a:fontRef>
+        </p:style>
+        <p:txBody>
+          <a:bodyPr rtlCol="0" anchor="ctr"/>
+          <a:lstStyle/>
+          <a:p>
+            <a:pPr algn="ctr"/>
+          </a:p>
+        </p:txBody>
+      </p:sp>
+      <p:sp>
+        <p:nvSpPr>
+          <p:cNvPr id="56" name="Rectangle 55"/>
+          <p:cNvSpPr/>
+          <p:nvPr/>
+        </p:nvSpPr>
+        <p:spPr>
+          <a:xfrm>
+            <a:off x="4727448" y="3511296"/>
+            <a:ext cx="329184" cy="201168"/>
+          </a:xfrm>
+          <a:prstGeom prst="rect">
+            <a:avLst/>
+          </a:prstGeom>
+          <a:solidFill>
+            <a:srgbClr val="3C5AC8"/>
+          </a:solidFill>
+          <a:ln>
+            <a:noFill/>
+          </a:ln>
+          <a:effectLst/>
+        </p:spPr>
+        <p:style>
+          <a:lnRef idx="1">
+            <a:schemeClr val="accent1"/>
+          </a:lnRef>
+          <a:fillRef idx="3">
+            <a:schemeClr val="accent1"/>
+          </a:fillRef>
+          <a:effectRef idx="2">
+            <a:schemeClr val="accent1"/>
+          </a:effectRef>
+          <a:fontRef idx="minor">
+            <a:schemeClr val="lt1"/>
+          </a:fontRef>
+        </p:style>
+        <p:txBody>
+          <a:bodyPr rtlCol="0" anchor="ctr"/>
+          <a:lstStyle/>
+          <a:p>
+            <a:pPr algn="ctr"/>
+          </a:p>
+        </p:txBody>
+      </p:sp>
+      <p:sp>
+        <p:nvSpPr>
           <p:cNvPr id="57" name="Rectangle 56"/>
           <p:cNvSpPr/>
           <p:nvPr/>
         </p:nvSpPr>
         <p:spPr>
           <a:xfrm>
-            <a:off x="4727448" y="3255263"/>
+            <a:off x="5111496" y="3511296"/>
             <a:ext cx="329184" cy="201168"/>
           </a:xfrm>
           <a:prstGeom prst="rect">
@@ -6098,7 +6044,7 @@
         </p:nvSpPr>
         <p:spPr>
           <a:xfrm>
-            <a:off x="5111496" y="3255263"/>
+            <a:off x="5495544" y="3511296"/>
             <a:ext cx="329184" cy="201168"/>
           </a:xfrm>
           <a:prstGeom prst="rect">
@@ -6142,8 +6088,8 @@
         </p:nvSpPr>
         <p:spPr>
           <a:xfrm>
-            <a:off x="5495544" y="3255263"/>
-            <a:ext cx="329184" cy="201168"/>
+            <a:off x="4882896" y="3749039"/>
+            <a:ext cx="12801" cy="384048"/>
           </a:xfrm>
           <a:prstGeom prst="rect">
             <a:avLst/>
@@ -6186,14 +6132,14 @@
         </p:nvSpPr>
         <p:spPr>
           <a:xfrm>
-            <a:off x="4727448" y="3511296"/>
-            <a:ext cx="329184" cy="201168"/>
-          </a:xfrm>
-          <a:prstGeom prst="rect">
-            <a:avLst/>
-          </a:prstGeom>
-          <a:solidFill>
-            <a:srgbClr val="3C5AC8"/>
+            <a:off x="5266944" y="3749039"/>
+            <a:ext cx="12801" cy="384048"/>
+          </a:xfrm>
+          <a:prstGeom prst="rect">
+            <a:avLst/>
+          </a:prstGeom>
+          <a:solidFill>
+            <a:srgbClr val="8A8A8A"/>
           </a:solidFill>
           <a:ln>
             <a:noFill/>
@@ -6230,8 +6176,8 @@
         </p:nvSpPr>
         <p:spPr>
           <a:xfrm>
-            <a:off x="5111496" y="3511296"/>
-            <a:ext cx="329184" cy="201168"/>
+            <a:off x="5650992" y="3749039"/>
+            <a:ext cx="12801" cy="384048"/>
           </a:xfrm>
           <a:prstGeom prst="rect">
             <a:avLst/>
@@ -6274,14 +6220,14 @@
         </p:nvSpPr>
         <p:spPr>
           <a:xfrm>
-            <a:off x="5495544" y="3511296"/>
-            <a:ext cx="329184" cy="201168"/>
-          </a:xfrm>
-          <a:prstGeom prst="rect">
-            <a:avLst/>
-          </a:prstGeom>
-          <a:solidFill>
-            <a:srgbClr val="AAB8E8"/>
+            <a:off x="4636008" y="4133087"/>
+            <a:ext cx="1316736" cy="274320"/>
+          </a:xfrm>
+          <a:prstGeom prst="rect">
+            <a:avLst/>
+          </a:prstGeom>
+          <a:solidFill>
+            <a:srgbClr val="1A1A1A"/>
           </a:solidFill>
           <a:ln>
             <a:noFill/>
@@ -6312,183 +6258,7 @@
       </p:sp>
       <p:sp>
         <p:nvSpPr>
-          <p:cNvPr id="63" name="Rectangle 62"/>
-          <p:cNvSpPr/>
-          <p:nvPr/>
-        </p:nvSpPr>
-        <p:spPr>
-          <a:xfrm>
-            <a:off x="4882896" y="3749039"/>
-            <a:ext cx="12801" cy="384048"/>
-          </a:xfrm>
-          <a:prstGeom prst="rect">
-            <a:avLst/>
-          </a:prstGeom>
-          <a:solidFill>
-            <a:srgbClr val="8A8A8A"/>
-          </a:solidFill>
-          <a:ln>
-            <a:noFill/>
-          </a:ln>
-          <a:effectLst/>
-        </p:spPr>
-        <p:style>
-          <a:lnRef idx="1">
-            <a:schemeClr val="accent1"/>
-          </a:lnRef>
-          <a:fillRef idx="3">
-            <a:schemeClr val="accent1"/>
-          </a:fillRef>
-          <a:effectRef idx="2">
-            <a:schemeClr val="accent1"/>
-          </a:effectRef>
-          <a:fontRef idx="minor">
-            <a:schemeClr val="lt1"/>
-          </a:fontRef>
-        </p:style>
-        <p:txBody>
-          <a:bodyPr rtlCol="0" anchor="ctr"/>
-          <a:lstStyle/>
-          <a:p>
-            <a:pPr algn="ctr"/>
-          </a:p>
-        </p:txBody>
-      </p:sp>
-      <p:sp>
-        <p:nvSpPr>
-          <p:cNvPr id="64" name="Rectangle 63"/>
-          <p:cNvSpPr/>
-          <p:nvPr/>
-        </p:nvSpPr>
-        <p:spPr>
-          <a:xfrm>
-            <a:off x="5266944" y="3749039"/>
-            <a:ext cx="12801" cy="384048"/>
-          </a:xfrm>
-          <a:prstGeom prst="rect">
-            <a:avLst/>
-          </a:prstGeom>
-          <a:solidFill>
-            <a:srgbClr val="8A8A8A"/>
-          </a:solidFill>
-          <a:ln>
-            <a:noFill/>
-          </a:ln>
-          <a:effectLst/>
-        </p:spPr>
-        <p:style>
-          <a:lnRef idx="1">
-            <a:schemeClr val="accent1"/>
-          </a:lnRef>
-          <a:fillRef idx="3">
-            <a:schemeClr val="accent1"/>
-          </a:fillRef>
-          <a:effectRef idx="2">
-            <a:schemeClr val="accent1"/>
-          </a:effectRef>
-          <a:fontRef idx="minor">
-            <a:schemeClr val="lt1"/>
-          </a:fontRef>
-        </p:style>
-        <p:txBody>
-          <a:bodyPr rtlCol="0" anchor="ctr"/>
-          <a:lstStyle/>
-          <a:p>
-            <a:pPr algn="ctr"/>
-          </a:p>
-        </p:txBody>
-      </p:sp>
-      <p:sp>
-        <p:nvSpPr>
-          <p:cNvPr id="65" name="Rectangle 64"/>
-          <p:cNvSpPr/>
-          <p:nvPr/>
-        </p:nvSpPr>
-        <p:spPr>
-          <a:xfrm>
-            <a:off x="5650992" y="3749039"/>
-            <a:ext cx="12801" cy="384048"/>
-          </a:xfrm>
-          <a:prstGeom prst="rect">
-            <a:avLst/>
-          </a:prstGeom>
-          <a:solidFill>
-            <a:srgbClr val="8A8A8A"/>
-          </a:solidFill>
-          <a:ln>
-            <a:noFill/>
-          </a:ln>
-          <a:effectLst/>
-        </p:spPr>
-        <p:style>
-          <a:lnRef idx="1">
-            <a:schemeClr val="accent1"/>
-          </a:lnRef>
-          <a:fillRef idx="3">
-            <a:schemeClr val="accent1"/>
-          </a:fillRef>
-          <a:effectRef idx="2">
-            <a:schemeClr val="accent1"/>
-          </a:effectRef>
-          <a:fontRef idx="minor">
-            <a:schemeClr val="lt1"/>
-          </a:fontRef>
-        </p:style>
-        <p:txBody>
-          <a:bodyPr rtlCol="0" anchor="ctr"/>
-          <a:lstStyle/>
-          <a:p>
-            <a:pPr algn="ctr"/>
-          </a:p>
-        </p:txBody>
-      </p:sp>
-      <p:sp>
-        <p:nvSpPr>
-          <p:cNvPr id="66" name="Rectangle 65"/>
-          <p:cNvSpPr/>
-          <p:nvPr/>
-        </p:nvSpPr>
-        <p:spPr>
-          <a:xfrm>
-            <a:off x="4636008" y="4133087"/>
-            <a:ext cx="1316736" cy="274320"/>
-          </a:xfrm>
-          <a:prstGeom prst="rect">
-            <a:avLst/>
-          </a:prstGeom>
-          <a:solidFill>
-            <a:srgbClr val="1A1A1A"/>
-          </a:solidFill>
-          <a:ln>
-            <a:noFill/>
-          </a:ln>
-          <a:effectLst/>
-        </p:spPr>
-        <p:style>
-          <a:lnRef idx="1">
-            <a:schemeClr val="accent1"/>
-          </a:lnRef>
-          <a:fillRef idx="3">
-            <a:schemeClr val="accent1"/>
-          </a:fillRef>
-          <a:effectRef idx="2">
-            <a:schemeClr val="accent1"/>
-          </a:effectRef>
-          <a:fontRef idx="minor">
-            <a:schemeClr val="lt1"/>
-          </a:fontRef>
-        </p:style>
-        <p:txBody>
-          <a:bodyPr rtlCol="0" anchor="ctr"/>
-          <a:lstStyle/>
-          <a:p>
-            <a:pPr algn="ctr"/>
-          </a:p>
-        </p:txBody>
-      </p:sp>
-      <p:sp>
-        <p:nvSpPr>
-          <p:cNvPr id="67" name="TextBox 66"/>
+          <p:cNvPr id="63" name="TextBox 62"/>
           <p:cNvSpPr txBox="1"/>
           <p:nvPr/>
         </p:nvSpPr>
@@ -6528,7 +6298,7 @@
       </p:sp>
       <p:sp>
         <p:nvSpPr>
-          <p:cNvPr id="68" name="TextBox 67"/>
+          <p:cNvPr id="64" name="TextBox 63"/>
           <p:cNvSpPr txBox="1"/>
           <p:nvPr/>
         </p:nvSpPr>
@@ -6568,7 +6338,7 @@
       </p:sp>
       <p:sp>
         <p:nvSpPr>
-          <p:cNvPr id="69" name="Rectangle 68"/>
+          <p:cNvPr id="65" name="Rectangle 64"/>
           <p:cNvSpPr/>
           <p:nvPr/>
         </p:nvSpPr>
@@ -6612,7 +6382,7 @@
       </p:sp>
       <p:sp>
         <p:nvSpPr>
-          <p:cNvPr id="70" name="TextBox 69"/>
+          <p:cNvPr id="66" name="TextBox 65"/>
           <p:cNvSpPr txBox="1"/>
           <p:nvPr/>
         </p:nvSpPr>
@@ -6652,7 +6422,7 @@
       </p:sp>
       <p:sp>
         <p:nvSpPr>
-          <p:cNvPr id="71" name="TextBox 70"/>
+          <p:cNvPr id="67" name="TextBox 66"/>
           <p:cNvSpPr txBox="1"/>
           <p:nvPr/>
         </p:nvSpPr>
@@ -6692,7 +6462,7 @@
       </p:sp>
       <p:sp>
         <p:nvSpPr>
-          <p:cNvPr id="72" name="Rectangle 71"/>
+          <p:cNvPr id="68" name="Rectangle 67"/>
           <p:cNvSpPr/>
           <p:nvPr/>
         </p:nvSpPr>
@@ -6736,7 +6506,7 @@
       </p:sp>
       <p:sp>
         <p:nvSpPr>
-          <p:cNvPr id="73" name="TextBox 72"/>
+          <p:cNvPr id="69" name="TextBox 68"/>
           <p:cNvSpPr txBox="1"/>
           <p:nvPr/>
         </p:nvSpPr>
@@ -6776,7 +6546,7 @@
       </p:sp>
       <p:sp>
         <p:nvSpPr>
-          <p:cNvPr id="74" name="TextBox 73"/>
+          <p:cNvPr id="70" name="TextBox 69"/>
           <p:cNvSpPr txBox="1"/>
           <p:nvPr/>
         </p:nvSpPr>
@@ -6816,7 +6586,7 @@
       </p:sp>
       <p:sp>
         <p:nvSpPr>
-          <p:cNvPr id="75" name="Rectangle 74"/>
+          <p:cNvPr id="71" name="Rectangle 70"/>
           <p:cNvSpPr/>
           <p:nvPr/>
         </p:nvSpPr>
@@ -6860,7 +6630,7 @@
       </p:sp>
       <p:sp>
         <p:nvSpPr>
-          <p:cNvPr id="76" name="TextBox 75"/>
+          <p:cNvPr id="72" name="TextBox 71"/>
           <p:cNvSpPr txBox="1"/>
           <p:nvPr/>
         </p:nvSpPr>
@@ -6900,7 +6670,7 @@
       </p:sp>
       <p:sp>
         <p:nvSpPr>
-          <p:cNvPr id="77" name="TextBox 76"/>
+          <p:cNvPr id="73" name="TextBox 72"/>
           <p:cNvSpPr txBox="1"/>
           <p:nvPr/>
         </p:nvSpPr>
@@ -6940,7 +6710,7 @@
       </p:sp>
       <p:sp>
         <p:nvSpPr>
-          <p:cNvPr id="78" name="Rectangle 77"/>
+          <p:cNvPr id="74" name="Rectangle 73"/>
           <p:cNvSpPr/>
           <p:nvPr/>
         </p:nvSpPr>
@@ -6984,7 +6754,7 @@
       </p:sp>
       <p:sp>
         <p:nvSpPr>
-          <p:cNvPr id="79" name="TextBox 78"/>
+          <p:cNvPr id="75" name="TextBox 74"/>
           <p:cNvSpPr txBox="1"/>
           <p:nvPr/>
         </p:nvSpPr>
@@ -7024,7 +6794,7 @@
       </p:sp>
       <p:sp>
         <p:nvSpPr>
-          <p:cNvPr id="80" name="TextBox 79"/>
+          <p:cNvPr id="76" name="TextBox 75"/>
           <p:cNvSpPr txBox="1"/>
           <p:nvPr/>
         </p:nvSpPr>
@@ -7064,7 +6834,7 @@
       </p:sp>
       <p:sp>
         <p:nvSpPr>
-          <p:cNvPr id="81" name="TextBox 80"/>
+          <p:cNvPr id="77" name="TextBox 76"/>
           <p:cNvSpPr txBox="1"/>
           <p:nvPr/>
         </p:nvSpPr>
@@ -7104,7 +6874,7 @@
       </p:sp>
       <p:sp>
         <p:nvSpPr>
-          <p:cNvPr id="82" name="TextBox 81"/>
+          <p:cNvPr id="78" name="TextBox 77"/>
           <p:cNvSpPr txBox="1"/>
           <p:nvPr/>
         </p:nvSpPr>
@@ -7161,7 +6931,7 @@
       </p:sp>
       <p:sp>
         <p:nvSpPr>
-          <p:cNvPr id="83" name="Rectangle 82"/>
+          <p:cNvPr id="79" name="Rectangle 78"/>
           <p:cNvSpPr/>
           <p:nvPr/>
         </p:nvSpPr>
@@ -7205,7 +6975,7 @@
       </p:sp>
       <p:sp>
         <p:nvSpPr>
-          <p:cNvPr id="84" name="TextBox 83"/>
+          <p:cNvPr id="80" name="TextBox 79"/>
           <p:cNvSpPr txBox="1"/>
           <p:nvPr/>
         </p:nvSpPr>
@@ -7245,7 +7015,7 @@
       </p:sp>
       <p:sp>
         <p:nvSpPr>
-          <p:cNvPr id="85" name="Rectangle 84"/>
+          <p:cNvPr id="81" name="Rectangle 80"/>
           <p:cNvSpPr/>
           <p:nvPr/>
         </p:nvSpPr>
@@ -7289,7 +7059,7 @@
       </p:sp>
       <p:sp>
         <p:nvSpPr>
-          <p:cNvPr id="86" name="TextBox 85"/>
+          <p:cNvPr id="82" name="TextBox 81"/>
           <p:cNvSpPr txBox="1"/>
           <p:nvPr/>
         </p:nvSpPr>
@@ -7329,7 +7099,7 @@
       </p:sp>
       <p:sp>
         <p:nvSpPr>
-          <p:cNvPr id="87" name="Rectangle 86"/>
+          <p:cNvPr id="83" name="Rectangle 82"/>
           <p:cNvSpPr/>
           <p:nvPr/>
         </p:nvSpPr>
@@ -7373,7 +7143,7 @@
       </p:sp>
       <p:sp>
         <p:nvSpPr>
-          <p:cNvPr id="88" name="TextBox 87"/>
+          <p:cNvPr id="84" name="TextBox 83"/>
           <p:cNvSpPr txBox="1"/>
           <p:nvPr/>
         </p:nvSpPr>
@@ -7413,7 +7183,7 @@
       </p:sp>
       <p:sp>
         <p:nvSpPr>
-          <p:cNvPr id="89" name="TextBox 88"/>
+          <p:cNvPr id="85" name="TextBox 84"/>
           <p:cNvSpPr txBox="1"/>
           <p:nvPr/>
         </p:nvSpPr>
@@ -7453,7 +7223,7 @@
       </p:sp>
       <p:sp>
         <p:nvSpPr>
-          <p:cNvPr id="90" name="Rectangle 89"/>
+          <p:cNvPr id="86" name="Rectangle 85"/>
           <p:cNvSpPr/>
           <p:nvPr/>
         </p:nvSpPr>
@@ -7497,7 +7267,7 @@
       </p:sp>
       <p:sp>
         <p:nvSpPr>
-          <p:cNvPr id="91" name="TextBox 90"/>
+          <p:cNvPr id="87" name="TextBox 86"/>
           <p:cNvSpPr txBox="1"/>
           <p:nvPr/>
         </p:nvSpPr>
@@ -7537,7 +7307,7 @@
       </p:sp>
       <p:sp>
         <p:nvSpPr>
-          <p:cNvPr id="92" name="TextBox 91"/>
+          <p:cNvPr id="88" name="TextBox 87"/>
           <p:cNvSpPr txBox="1"/>
           <p:nvPr/>
         </p:nvSpPr>
@@ -7577,7 +7347,7 @@
       </p:sp>
       <p:sp>
         <p:nvSpPr>
-          <p:cNvPr id="93" name="Rectangle 92"/>
+          <p:cNvPr id="89" name="Rectangle 88"/>
           <p:cNvSpPr/>
           <p:nvPr/>
         </p:nvSpPr>
@@ -7621,7 +7391,7 @@
       </p:sp>
       <p:sp>
         <p:nvSpPr>
-          <p:cNvPr id="94" name="TextBox 93"/>
+          <p:cNvPr id="90" name="TextBox 89"/>
           <p:cNvSpPr txBox="1"/>
           <p:nvPr/>
         </p:nvSpPr>
@@ -7661,7 +7431,7 @@
       </p:sp>
       <p:sp>
         <p:nvSpPr>
-          <p:cNvPr id="95" name="TextBox 94"/>
+          <p:cNvPr id="91" name="TextBox 90"/>
           <p:cNvSpPr txBox="1"/>
           <p:nvPr/>
         </p:nvSpPr>
@@ -7701,7 +7471,7 @@
       </p:sp>
       <p:sp>
         <p:nvSpPr>
-          <p:cNvPr id="96" name="Rectangle 95"/>
+          <p:cNvPr id="92" name="Rectangle 91"/>
           <p:cNvSpPr/>
           <p:nvPr/>
         </p:nvSpPr>
@@ -7745,7 +7515,7 @@
       </p:sp>
       <p:sp>
         <p:nvSpPr>
-          <p:cNvPr id="97" name="Rectangle 96"/>
+          <p:cNvPr id="93" name="Rectangle 92"/>
           <p:cNvSpPr/>
           <p:nvPr/>
         </p:nvSpPr>
@@ -7789,7 +7559,7 @@
       </p:sp>
       <p:sp>
         <p:nvSpPr>
-          <p:cNvPr id="98" name="TextBox 97"/>
+          <p:cNvPr id="94" name="TextBox 93"/>
           <p:cNvSpPr txBox="1"/>
           <p:nvPr/>
         </p:nvSpPr>
@@ -7829,13 +7599,189 @@
       </p:sp>
       <p:sp>
         <p:nvSpPr>
+          <p:cNvPr id="95" name="Rectangle 94"/>
+          <p:cNvSpPr/>
+          <p:nvPr/>
+        </p:nvSpPr>
+        <p:spPr>
+          <a:xfrm>
+            <a:off x="14561820" y="2926079"/>
+            <a:ext cx="219456" cy="182880"/>
+          </a:xfrm>
+          <a:prstGeom prst="rect">
+            <a:avLst/>
+          </a:prstGeom>
+          <a:solidFill>
+            <a:srgbClr val="D9D9D9"/>
+          </a:solidFill>
+          <a:ln>
+            <a:noFill/>
+          </a:ln>
+          <a:effectLst/>
+        </p:spPr>
+        <p:style>
+          <a:lnRef idx="1">
+            <a:schemeClr val="accent1"/>
+          </a:lnRef>
+          <a:fillRef idx="3">
+            <a:schemeClr val="accent1"/>
+          </a:fillRef>
+          <a:effectRef idx="2">
+            <a:schemeClr val="accent1"/>
+          </a:effectRef>
+          <a:fontRef idx="minor">
+            <a:schemeClr val="lt1"/>
+          </a:fontRef>
+        </p:style>
+        <p:txBody>
+          <a:bodyPr rtlCol="0" anchor="ctr"/>
+          <a:lstStyle/>
+          <a:p>
+            <a:pPr algn="ctr"/>
+          </a:p>
+        </p:txBody>
+      </p:sp>
+      <p:sp>
+        <p:nvSpPr>
+          <p:cNvPr id="96" name="Rectangle 95"/>
+          <p:cNvSpPr/>
+          <p:nvPr/>
+        </p:nvSpPr>
+        <p:spPr>
+          <a:xfrm>
+            <a:off x="14836140" y="2926079"/>
+            <a:ext cx="219456" cy="182880"/>
+          </a:xfrm>
+          <a:prstGeom prst="rect">
+            <a:avLst/>
+          </a:prstGeom>
+          <a:solidFill>
+            <a:srgbClr val="D9D9D9"/>
+          </a:solidFill>
+          <a:ln>
+            <a:noFill/>
+          </a:ln>
+          <a:effectLst/>
+        </p:spPr>
+        <p:style>
+          <a:lnRef idx="1">
+            <a:schemeClr val="accent1"/>
+          </a:lnRef>
+          <a:fillRef idx="3">
+            <a:schemeClr val="accent1"/>
+          </a:fillRef>
+          <a:effectRef idx="2">
+            <a:schemeClr val="accent1"/>
+          </a:effectRef>
+          <a:fontRef idx="minor">
+            <a:schemeClr val="lt1"/>
+          </a:fontRef>
+        </p:style>
+        <p:txBody>
+          <a:bodyPr rtlCol="0" anchor="ctr"/>
+          <a:lstStyle/>
+          <a:p>
+            <a:pPr algn="ctr"/>
+          </a:p>
+        </p:txBody>
+      </p:sp>
+      <p:sp>
+        <p:nvSpPr>
+          <p:cNvPr id="97" name="Rectangle 96"/>
+          <p:cNvSpPr/>
+          <p:nvPr/>
+        </p:nvSpPr>
+        <p:spPr>
+          <a:xfrm>
+            <a:off x="15110460" y="2926079"/>
+            <a:ext cx="219456" cy="182880"/>
+          </a:xfrm>
+          <a:prstGeom prst="rect">
+            <a:avLst/>
+          </a:prstGeom>
+          <a:solidFill>
+            <a:srgbClr val="D9D9D9"/>
+          </a:solidFill>
+          <a:ln>
+            <a:noFill/>
+          </a:ln>
+          <a:effectLst/>
+        </p:spPr>
+        <p:style>
+          <a:lnRef idx="1">
+            <a:schemeClr val="accent1"/>
+          </a:lnRef>
+          <a:fillRef idx="3">
+            <a:schemeClr val="accent1"/>
+          </a:fillRef>
+          <a:effectRef idx="2">
+            <a:schemeClr val="accent1"/>
+          </a:effectRef>
+          <a:fontRef idx="minor">
+            <a:schemeClr val="lt1"/>
+          </a:fontRef>
+        </p:style>
+        <p:txBody>
+          <a:bodyPr rtlCol="0" anchor="ctr"/>
+          <a:lstStyle/>
+          <a:p>
+            <a:pPr algn="ctr"/>
+          </a:p>
+        </p:txBody>
+      </p:sp>
+      <p:sp>
+        <p:nvSpPr>
+          <p:cNvPr id="98" name="Rectangle 97"/>
+          <p:cNvSpPr/>
+          <p:nvPr/>
+        </p:nvSpPr>
+        <p:spPr>
+          <a:xfrm>
+            <a:off x="15384780" y="2926079"/>
+            <a:ext cx="219456" cy="182880"/>
+          </a:xfrm>
+          <a:prstGeom prst="rect">
+            <a:avLst/>
+          </a:prstGeom>
+          <a:solidFill>
+            <a:srgbClr val="1428A0"/>
+          </a:solidFill>
+          <a:ln>
+            <a:noFill/>
+          </a:ln>
+          <a:effectLst/>
+        </p:spPr>
+        <p:style>
+          <a:lnRef idx="1">
+            <a:schemeClr val="accent1"/>
+          </a:lnRef>
+          <a:fillRef idx="3">
+            <a:schemeClr val="accent1"/>
+          </a:fillRef>
+          <a:effectRef idx="2">
+            <a:schemeClr val="accent1"/>
+          </a:effectRef>
+          <a:fontRef idx="minor">
+            <a:schemeClr val="lt1"/>
+          </a:fontRef>
+        </p:style>
+        <p:txBody>
+          <a:bodyPr rtlCol="0" anchor="ctr"/>
+          <a:lstStyle/>
+          <a:p>
+            <a:pPr algn="ctr"/>
+          </a:p>
+        </p:txBody>
+      </p:sp>
+      <p:sp>
+        <p:nvSpPr>
           <p:cNvPr id="99" name="Rectangle 98"/>
           <p:cNvSpPr/>
           <p:nvPr/>
         </p:nvSpPr>
         <p:spPr>
           <a:xfrm>
-            <a:off x="14561820" y="2926079"/>
+            <a:off x="15659100" y="2926079"/>
             <a:ext cx="219456" cy="182880"/>
           </a:xfrm>
           <a:prstGeom prst="rect">
@@ -7879,7 +7825,7 @@
         </p:nvSpPr>
         <p:spPr>
           <a:xfrm>
-            <a:off x="14836140" y="2926079"/>
+            <a:off x="15933420" y="2926079"/>
             <a:ext cx="219456" cy="182880"/>
           </a:xfrm>
           <a:prstGeom prst="rect">
@@ -7923,7 +7869,7 @@
         </p:nvSpPr>
         <p:spPr>
           <a:xfrm>
-            <a:off x="15110460" y="2926079"/>
+            <a:off x="16207740" y="2926079"/>
             <a:ext cx="219456" cy="182880"/>
           </a:xfrm>
           <a:prstGeom prst="rect">
@@ -7967,14 +7913,14 @@
         </p:nvSpPr>
         <p:spPr>
           <a:xfrm>
-            <a:off x="15384780" y="2926079"/>
+            <a:off x="16482060" y="2926079"/>
             <a:ext cx="219456" cy="182880"/>
           </a:xfrm>
           <a:prstGeom prst="rect">
             <a:avLst/>
           </a:prstGeom>
           <a:solidFill>
-            <a:srgbClr val="1428A0"/>
+            <a:srgbClr val="D9D9D9"/>
           </a:solidFill>
           <a:ln>
             <a:noFill/>
@@ -8011,7 +7957,7 @@
         </p:nvSpPr>
         <p:spPr>
           <a:xfrm>
-            <a:off x="15659100" y="2926079"/>
+            <a:off x="16756380" y="2926079"/>
             <a:ext cx="219456" cy="182880"/>
           </a:xfrm>
           <a:prstGeom prst="rect">
@@ -8055,7 +8001,7 @@
         </p:nvSpPr>
         <p:spPr>
           <a:xfrm>
-            <a:off x="15933420" y="2926079"/>
+            <a:off x="17030700" y="2926079"/>
             <a:ext cx="219456" cy="182880"/>
           </a:xfrm>
           <a:prstGeom prst="rect">
@@ -8099,7 +8045,7 @@
         </p:nvSpPr>
         <p:spPr>
           <a:xfrm>
-            <a:off x="16207740" y="2926079"/>
+            <a:off x="14561820" y="3172968"/>
             <a:ext cx="219456" cy="182880"/>
           </a:xfrm>
           <a:prstGeom prst="rect">
@@ -8143,7 +8089,7 @@
         </p:nvSpPr>
         <p:spPr>
           <a:xfrm>
-            <a:off x="16482060" y="2926079"/>
+            <a:off x="14836140" y="3172968"/>
             <a:ext cx="219456" cy="182880"/>
           </a:xfrm>
           <a:prstGeom prst="rect">
@@ -8187,7 +8133,7 @@
         </p:nvSpPr>
         <p:spPr>
           <a:xfrm>
-            <a:off x="16756380" y="2926079"/>
+            <a:off x="15110460" y="3172968"/>
             <a:ext cx="219456" cy="182880"/>
           </a:xfrm>
           <a:prstGeom prst="rect">
@@ -8231,7 +8177,7 @@
         </p:nvSpPr>
         <p:spPr>
           <a:xfrm>
-            <a:off x="17030700" y="2926079"/>
+            <a:off x="15384780" y="3172968"/>
             <a:ext cx="219456" cy="182880"/>
           </a:xfrm>
           <a:prstGeom prst="rect">
@@ -8275,7 +8221,7 @@
         </p:nvSpPr>
         <p:spPr>
           <a:xfrm>
-            <a:off x="14561820" y="3172968"/>
+            <a:off x="15659100" y="3172968"/>
             <a:ext cx="219456" cy="182880"/>
           </a:xfrm>
           <a:prstGeom prst="rect">
@@ -8319,7 +8265,7 @@
         </p:nvSpPr>
         <p:spPr>
           <a:xfrm>
-            <a:off x="14836140" y="3172968"/>
+            <a:off x="15933420" y="3172968"/>
             <a:ext cx="219456" cy="182880"/>
           </a:xfrm>
           <a:prstGeom prst="rect">
@@ -8363,7 +8309,7 @@
         </p:nvSpPr>
         <p:spPr>
           <a:xfrm>
-            <a:off x="15110460" y="3172968"/>
+            <a:off x="16207740" y="3172968"/>
             <a:ext cx="219456" cy="182880"/>
           </a:xfrm>
           <a:prstGeom prst="rect">
@@ -8407,14 +8353,14 @@
         </p:nvSpPr>
         <p:spPr>
           <a:xfrm>
-            <a:off x="15384780" y="3172968"/>
+            <a:off x="16482060" y="3172968"/>
             <a:ext cx="219456" cy="182880"/>
           </a:xfrm>
           <a:prstGeom prst="rect">
             <a:avLst/>
           </a:prstGeom>
           <a:solidFill>
-            <a:srgbClr val="D9D9D9"/>
+            <a:srgbClr val="1428A0"/>
           </a:solidFill>
           <a:ln>
             <a:noFill/>
@@ -8451,7 +8397,7 @@
         </p:nvSpPr>
         <p:spPr>
           <a:xfrm>
-            <a:off x="15659100" y="3172968"/>
+            <a:off x="16756380" y="3172968"/>
             <a:ext cx="219456" cy="182880"/>
           </a:xfrm>
           <a:prstGeom prst="rect">
@@ -8495,7 +8441,7 @@
         </p:nvSpPr>
         <p:spPr>
           <a:xfrm>
-            <a:off x="15933420" y="3172968"/>
+            <a:off x="17030700" y="3172968"/>
             <a:ext cx="219456" cy="182880"/>
           </a:xfrm>
           <a:prstGeom prst="rect">
@@ -8539,7 +8485,7 @@
         </p:nvSpPr>
         <p:spPr>
           <a:xfrm>
-            <a:off x="16207740" y="3172968"/>
+            <a:off x="14561820" y="3419856"/>
             <a:ext cx="219456" cy="182880"/>
           </a:xfrm>
           <a:prstGeom prst="rect">
@@ -8583,7 +8529,7 @@
         </p:nvSpPr>
         <p:spPr>
           <a:xfrm>
-            <a:off x="16482060" y="3172968"/>
+            <a:off x="14836140" y="3419856"/>
             <a:ext cx="219456" cy="182880"/>
           </a:xfrm>
           <a:prstGeom prst="rect">
@@ -8627,7 +8573,7 @@
         </p:nvSpPr>
         <p:spPr>
           <a:xfrm>
-            <a:off x="16756380" y="3172968"/>
+            <a:off x="15110460" y="3419856"/>
             <a:ext cx="219456" cy="182880"/>
           </a:xfrm>
           <a:prstGeom prst="rect">
@@ -8671,7 +8617,7 @@
         </p:nvSpPr>
         <p:spPr>
           <a:xfrm>
-            <a:off x="17030700" y="3172968"/>
+            <a:off x="15384780" y="3419856"/>
             <a:ext cx="219456" cy="182880"/>
           </a:xfrm>
           <a:prstGeom prst="rect">
@@ -8715,7 +8661,7 @@
         </p:nvSpPr>
         <p:spPr>
           <a:xfrm>
-            <a:off x="14561820" y="3419856"/>
+            <a:off x="15659100" y="3419856"/>
             <a:ext cx="219456" cy="182880"/>
           </a:xfrm>
           <a:prstGeom prst="rect">
@@ -8759,14 +8705,14 @@
         </p:nvSpPr>
         <p:spPr>
           <a:xfrm>
-            <a:off x="14836140" y="3419856"/>
+            <a:off x="15933420" y="3419856"/>
             <a:ext cx="219456" cy="182880"/>
           </a:xfrm>
           <a:prstGeom prst="rect">
             <a:avLst/>
           </a:prstGeom>
           <a:solidFill>
-            <a:srgbClr val="1428A0"/>
+            <a:srgbClr val="D9D9D9"/>
           </a:solidFill>
           <a:ln>
             <a:noFill/>
@@ -8803,7 +8749,7 @@
         </p:nvSpPr>
         <p:spPr>
           <a:xfrm>
-            <a:off x="15110460" y="3419856"/>
+            <a:off x="16207740" y="3419856"/>
             <a:ext cx="219456" cy="182880"/>
           </a:xfrm>
           <a:prstGeom prst="rect">
@@ -8847,7 +8793,7 @@
         </p:nvSpPr>
         <p:spPr>
           <a:xfrm>
-            <a:off x="15384780" y="3419856"/>
+            <a:off x="16482060" y="3419856"/>
             <a:ext cx="219456" cy="182880"/>
           </a:xfrm>
           <a:prstGeom prst="rect">
@@ -8891,7 +8837,7 @@
         </p:nvSpPr>
         <p:spPr>
           <a:xfrm>
-            <a:off x="15659100" y="3419856"/>
+            <a:off x="16756380" y="3419856"/>
             <a:ext cx="219456" cy="182880"/>
           </a:xfrm>
           <a:prstGeom prst="rect">
@@ -8935,7 +8881,7 @@
         </p:nvSpPr>
         <p:spPr>
           <a:xfrm>
-            <a:off x="15933420" y="3419856"/>
+            <a:off x="17030700" y="3419856"/>
             <a:ext cx="219456" cy="182880"/>
           </a:xfrm>
           <a:prstGeom prst="rect">
@@ -8973,183 +8919,7 @@
       </p:sp>
       <p:sp>
         <p:nvSpPr>
-          <p:cNvPr id="125" name="Rectangle 124"/>
-          <p:cNvSpPr/>
-          <p:nvPr/>
-        </p:nvSpPr>
-        <p:spPr>
-          <a:xfrm>
-            <a:off x="16207740" y="3419856"/>
-            <a:ext cx="219456" cy="182880"/>
-          </a:xfrm>
-          <a:prstGeom prst="rect">
-            <a:avLst/>
-          </a:prstGeom>
-          <a:solidFill>
-            <a:srgbClr val="D9D9D9"/>
-          </a:solidFill>
-          <a:ln>
-            <a:noFill/>
-          </a:ln>
-          <a:effectLst/>
-        </p:spPr>
-        <p:style>
-          <a:lnRef idx="1">
-            <a:schemeClr val="accent1"/>
-          </a:lnRef>
-          <a:fillRef idx="3">
-            <a:schemeClr val="accent1"/>
-          </a:fillRef>
-          <a:effectRef idx="2">
-            <a:schemeClr val="accent1"/>
-          </a:effectRef>
-          <a:fontRef idx="minor">
-            <a:schemeClr val="lt1"/>
-          </a:fontRef>
-        </p:style>
-        <p:txBody>
-          <a:bodyPr rtlCol="0" anchor="ctr"/>
-          <a:lstStyle/>
-          <a:p>
-            <a:pPr algn="ctr"/>
-          </a:p>
-        </p:txBody>
-      </p:sp>
-      <p:sp>
-        <p:nvSpPr>
-          <p:cNvPr id="126" name="Rectangle 125"/>
-          <p:cNvSpPr/>
-          <p:nvPr/>
-        </p:nvSpPr>
-        <p:spPr>
-          <a:xfrm>
-            <a:off x="16482060" y="3419856"/>
-            <a:ext cx="219456" cy="182880"/>
-          </a:xfrm>
-          <a:prstGeom prst="rect">
-            <a:avLst/>
-          </a:prstGeom>
-          <a:solidFill>
-            <a:srgbClr val="D9D9D9"/>
-          </a:solidFill>
-          <a:ln>
-            <a:noFill/>
-          </a:ln>
-          <a:effectLst/>
-        </p:spPr>
-        <p:style>
-          <a:lnRef idx="1">
-            <a:schemeClr val="accent1"/>
-          </a:lnRef>
-          <a:fillRef idx="3">
-            <a:schemeClr val="accent1"/>
-          </a:fillRef>
-          <a:effectRef idx="2">
-            <a:schemeClr val="accent1"/>
-          </a:effectRef>
-          <a:fontRef idx="minor">
-            <a:schemeClr val="lt1"/>
-          </a:fontRef>
-        </p:style>
-        <p:txBody>
-          <a:bodyPr rtlCol="0" anchor="ctr"/>
-          <a:lstStyle/>
-          <a:p>
-            <a:pPr algn="ctr"/>
-          </a:p>
-        </p:txBody>
-      </p:sp>
-      <p:sp>
-        <p:nvSpPr>
-          <p:cNvPr id="127" name="Rectangle 126"/>
-          <p:cNvSpPr/>
-          <p:nvPr/>
-        </p:nvSpPr>
-        <p:spPr>
-          <a:xfrm>
-            <a:off x="16756380" y="3419856"/>
-            <a:ext cx="219456" cy="182880"/>
-          </a:xfrm>
-          <a:prstGeom prst="rect">
-            <a:avLst/>
-          </a:prstGeom>
-          <a:solidFill>
-            <a:srgbClr val="D9D9D9"/>
-          </a:solidFill>
-          <a:ln>
-            <a:noFill/>
-          </a:ln>
-          <a:effectLst/>
-        </p:spPr>
-        <p:style>
-          <a:lnRef idx="1">
-            <a:schemeClr val="accent1"/>
-          </a:lnRef>
-          <a:fillRef idx="3">
-            <a:schemeClr val="accent1"/>
-          </a:fillRef>
-          <a:effectRef idx="2">
-            <a:schemeClr val="accent1"/>
-          </a:effectRef>
-          <a:fontRef idx="minor">
-            <a:schemeClr val="lt1"/>
-          </a:fontRef>
-        </p:style>
-        <p:txBody>
-          <a:bodyPr rtlCol="0" anchor="ctr"/>
-          <a:lstStyle/>
-          <a:p>
-            <a:pPr algn="ctr"/>
-          </a:p>
-        </p:txBody>
-      </p:sp>
-      <p:sp>
-        <p:nvSpPr>
-          <p:cNvPr id="128" name="Rectangle 127"/>
-          <p:cNvSpPr/>
-          <p:nvPr/>
-        </p:nvSpPr>
-        <p:spPr>
-          <a:xfrm>
-            <a:off x="17030700" y="3419856"/>
-            <a:ext cx="219456" cy="182880"/>
-          </a:xfrm>
-          <a:prstGeom prst="rect">
-            <a:avLst/>
-          </a:prstGeom>
-          <a:solidFill>
-            <a:srgbClr val="D9D9D9"/>
-          </a:solidFill>
-          <a:ln>
-            <a:noFill/>
-          </a:ln>
-          <a:effectLst/>
-        </p:spPr>
-        <p:style>
-          <a:lnRef idx="1">
-            <a:schemeClr val="accent1"/>
-          </a:lnRef>
-          <a:fillRef idx="3">
-            <a:schemeClr val="accent1"/>
-          </a:fillRef>
-          <a:effectRef idx="2">
-            <a:schemeClr val="accent1"/>
-          </a:effectRef>
-          <a:fontRef idx="minor">
-            <a:schemeClr val="lt1"/>
-          </a:fontRef>
-        </p:style>
-        <p:txBody>
-          <a:bodyPr rtlCol="0" anchor="ctr"/>
-          <a:lstStyle/>
-          <a:p>
-            <a:pPr algn="ctr"/>
-          </a:p>
-        </p:txBody>
-      </p:sp>
-      <p:sp>
-        <p:nvSpPr>
-          <p:cNvPr id="129" name="TextBox 128"/>
+          <p:cNvPr id="125" name="TextBox 124"/>
           <p:cNvSpPr txBox="1"/>
           <p:nvPr/>
         </p:nvSpPr>
@@ -9219,7 +8989,7 @@
       </p:sp>
       <p:sp>
         <p:nvSpPr>
-          <p:cNvPr id="130" name="TextBox 129"/>
+          <p:cNvPr id="126" name="TextBox 125"/>
           <p:cNvSpPr txBox="1"/>
           <p:nvPr/>
         </p:nvSpPr>
@@ -9259,7 +9029,7 @@
       </p:sp>
       <p:sp>
         <p:nvSpPr>
-          <p:cNvPr id="131" name="Rectangle 130"/>
+          <p:cNvPr id="127" name="Rectangle 126"/>
           <p:cNvSpPr/>
           <p:nvPr/>
         </p:nvSpPr>
@@ -9303,7 +9073,7 @@
       </p:sp>
       <p:sp>
         <p:nvSpPr>
-          <p:cNvPr id="132" name="TextBox 131"/>
+          <p:cNvPr id="128" name="TextBox 127"/>
           <p:cNvSpPr txBox="1"/>
           <p:nvPr/>
         </p:nvSpPr>
@@ -9343,7 +9113,7 @@
       </p:sp>
       <p:sp>
         <p:nvSpPr>
-          <p:cNvPr id="133" name="TextBox 132"/>
+          <p:cNvPr id="129" name="TextBox 128"/>
           <p:cNvSpPr txBox="1"/>
           <p:nvPr/>
         </p:nvSpPr>
@@ -9383,7 +9153,7 @@
       </p:sp>
       <p:sp>
         <p:nvSpPr>
-          <p:cNvPr id="134" name="Rectangle 133"/>
+          <p:cNvPr id="130" name="Rectangle 129"/>
           <p:cNvSpPr/>
           <p:nvPr/>
         </p:nvSpPr>
@@ -9427,7 +9197,7 @@
       </p:sp>
       <p:sp>
         <p:nvSpPr>
-          <p:cNvPr id="135" name="TextBox 134"/>
+          <p:cNvPr id="131" name="TextBox 130"/>
           <p:cNvSpPr txBox="1"/>
           <p:nvPr/>
         </p:nvSpPr>
@@ -9467,14 +9237,14 @@
       </p:sp>
       <p:sp>
         <p:nvSpPr>
-          <p:cNvPr id="136" name="TextBox 135"/>
+          <p:cNvPr id="132" name="TextBox 131"/>
           <p:cNvSpPr txBox="1"/>
           <p:nvPr/>
         </p:nvSpPr>
         <p:spPr>
           <a:xfrm>
-            <a:off x="722376" y="5724144"/>
-            <a:ext cx="8869680" cy="292608"/>
+            <a:off x="722376" y="5321808"/>
+            <a:ext cx="3383280" cy="274320"/>
           </a:xfrm>
           <a:prstGeom prst="rect">
             <a:avLst/>
@@ -9500,31 +9270,21 @@
                 <a:latin typeface="Arial"/>
                 <a:ea typeface="Arial"/>
               </a:rPr>
-              <a:t>SSD 제품군  </a:t>
-            </a:r>
-            <a:r>
-              <a:rPr sz="1600" b="0">
-                <a:solidFill>
-                  <a:srgbClr val="555555"/>
-                </a:solidFill>
-                <a:latin typeface="Arial"/>
-                <a:ea typeface="Arial"/>
-              </a:rPr>
-              <a:t>DWPD · 최대 용량</a:t>
-            </a:r>
-          </a:p>
-        </p:txBody>
-      </p:sp>
-      <p:sp>
-        <p:nvSpPr>
-          <p:cNvPr id="137" name="TextBox 136"/>
+              <a:t>eSSD 수요 비중</a:t>
+            </a:r>
+          </a:p>
+        </p:txBody>
+      </p:sp>
+      <p:sp>
+        <p:nvSpPr>
+          <p:cNvPr id="133" name="TextBox 132"/>
           <p:cNvSpPr txBox="1"/>
           <p:nvPr/>
         </p:nvSpPr>
         <p:spPr>
           <a:xfrm>
-            <a:off x="12079224" y="5724144"/>
-            <a:ext cx="5486400" cy="292608"/>
+            <a:off x="722376" y="5321808"/>
+            <a:ext cx="3273552" cy="274320"/>
           </a:xfrm>
           <a:prstGeom prst="rect">
             <a:avLst/>
@@ -9545,67 +9305,37 @@
             <a:r>
               <a:rPr sz="1600" b="0">
                 <a:solidFill>
-                  <a:srgbClr val="1428A0"/>
-                </a:solidFill>
-                <a:latin typeface="Arial"/>
-                <a:ea typeface="Arial"/>
-              </a:rPr>
-              <a:t>■</a:t>
-            </a:r>
-            <a:r>
-              <a:rPr sz="1600" b="0">
-                <a:solidFill>
                   <a:srgbClr val="555555"/>
                 </a:solidFill>
                 <a:latin typeface="Arial"/>
                 <a:ea typeface="Arial"/>
               </a:rPr>
-              <a:t> 지금 쓰는 곳   </a:t>
-            </a:r>
-            <a:r>
-              <a:rPr sz="1600" b="0">
-                <a:solidFill>
-                  <a:srgbClr val="1428A0"/>
-                </a:solidFill>
-                <a:latin typeface="Arial"/>
-                <a:ea typeface="Arial"/>
-              </a:rPr>
-              <a:t>▢</a:t>
-            </a:r>
-            <a:r>
-              <a:rPr sz="1600" b="0">
-                <a:solidFill>
-                  <a:srgbClr val="555555"/>
-                </a:solidFill>
-                <a:latin typeface="Arial"/>
-                <a:ea typeface="Arial"/>
-              </a:rPr>
-              <a:t> 신호에 따라 쓰일 곳</a:t>
-            </a:r>
-          </a:p>
-        </p:txBody>
-      </p:sp>
-      <p:sp>
-        <p:nvSpPr>
-          <p:cNvPr id="138" name="Rounded Rectangle 137"/>
+              <a:t>2026 올해</a:t>
+            </a:r>
+          </a:p>
+        </p:txBody>
+      </p:sp>
+      <p:sp>
+        <p:nvSpPr>
+          <p:cNvPr id="134" name="Rectangle 133"/>
           <p:cNvSpPr/>
           <p:nvPr/>
         </p:nvSpPr>
         <p:spPr>
           <a:xfrm>
-            <a:off x="722376" y="6053328"/>
-            <a:ext cx="3383280" cy="566928"/>
-          </a:xfrm>
-          <a:prstGeom prst="roundRect">
-            <a:avLst>
-              <a:gd name="adj" fmla="val 12903"/>
-            </a:avLst>
-          </a:prstGeom>
-          <a:solidFill>
-            <a:srgbClr val="F5F5F5"/>
-          </a:solidFill>
-          <a:ln>
-            <a:noFill/>
+            <a:off x="4306824" y="5321808"/>
+            <a:ext cx="10337292" cy="274320"/>
+          </a:xfrm>
+          <a:prstGeom prst="rect">
+            <a:avLst/>
+          </a:prstGeom>
+          <a:solidFill>
+            <a:srgbClr val="8A8A8A"/>
+          </a:solidFill>
+          <a:ln w="12700">
+            <a:solidFill>
+              <a:srgbClr val="FFFFFF"/>
+            </a:solidFill>
           </a:ln>
           <a:effectLst/>
         </p:spPr>
@@ -9633,14 +9363,14 @@
       </p:sp>
       <p:sp>
         <p:nvSpPr>
-          <p:cNvPr id="139" name="TextBox 138"/>
+          <p:cNvPr id="135" name="TextBox 134"/>
           <p:cNvSpPr txBox="1"/>
           <p:nvPr/>
         </p:nvSpPr>
         <p:spPr>
           <a:xfrm>
-            <a:off x="923544" y="6071616"/>
-            <a:ext cx="2194560" cy="310896"/>
+            <a:off x="4306824" y="5321808"/>
+            <a:ext cx="10337292" cy="274320"/>
           </a:xfrm>
           <a:prstGeom prst="rect">
             <a:avLst/>
@@ -9653,34 +9383,80 @@
           </a:bodyPr>
           <a:lstStyle/>
           <a:p>
-            <a:pPr algn="l">
+            <a:pPr algn="ctr">
               <a:lnSpc>
                 <a:spcPct val="110000"/>
               </a:lnSpc>
             </a:pPr>
             <a:r>
-              <a:rPr sz="1800" b="1">
-                <a:solidFill>
-                  <a:srgbClr val="1A1A1A"/>
-                </a:solidFill>
-                <a:latin typeface="Arial"/>
-                <a:ea typeface="Arial"/>
-              </a:rPr>
-              <a:t>SLC급</a:t>
-            </a:r>
-          </a:p>
-        </p:txBody>
-      </p:sp>
-      <p:sp>
-        <p:nvSpPr>
-          <p:cNvPr id="140" name="TextBox 139"/>
+              <a:rPr sz="1600" b="1">
+                <a:solidFill>
+                  <a:srgbClr val="FFFFFF"/>
+                </a:solidFill>
+                <a:latin typeface="Arial"/>
+                <a:ea typeface="Arial"/>
+              </a:rPr>
+              <a:t>범용 · 엔터프라이즈 85%</a:t>
+            </a:r>
+          </a:p>
+        </p:txBody>
+      </p:sp>
+      <p:sp>
+        <p:nvSpPr>
+          <p:cNvPr id="136" name="Rectangle 135"/>
+          <p:cNvSpPr/>
+          <p:nvPr/>
+        </p:nvSpPr>
+        <p:spPr>
+          <a:xfrm>
+            <a:off x="14644116" y="5321808"/>
+            <a:ext cx="729691" cy="274320"/>
+          </a:xfrm>
+          <a:prstGeom prst="rect">
+            <a:avLst/>
+          </a:prstGeom>
+          <a:solidFill>
+            <a:srgbClr val="AAB8E8"/>
+          </a:solidFill>
+          <a:ln w="12700">
+            <a:solidFill>
+              <a:srgbClr val="FFFFFF"/>
+            </a:solidFill>
+          </a:ln>
+          <a:effectLst/>
+        </p:spPr>
+        <p:style>
+          <a:lnRef idx="1">
+            <a:schemeClr val="accent1"/>
+          </a:lnRef>
+          <a:fillRef idx="3">
+            <a:schemeClr val="accent1"/>
+          </a:fillRef>
+          <a:effectRef idx="2">
+            <a:schemeClr val="accent1"/>
+          </a:effectRef>
+          <a:fontRef idx="minor">
+            <a:schemeClr val="lt1"/>
+          </a:fontRef>
+        </p:style>
+        <p:txBody>
+          <a:bodyPr rtlCol="0" anchor="ctr"/>
+          <a:lstStyle/>
+          <a:p>
+            <a:pPr algn="ctr"/>
+          </a:p>
+        </p:txBody>
+      </p:sp>
+      <p:sp>
+        <p:nvSpPr>
+          <p:cNvPr id="137" name="TextBox 136"/>
           <p:cNvSpPr txBox="1"/>
           <p:nvPr/>
         </p:nvSpPr>
         <p:spPr>
           <a:xfrm>
-            <a:off x="2916936" y="6071616"/>
-            <a:ext cx="1042415" cy="310896"/>
+            <a:off x="14644116" y="5321808"/>
+            <a:ext cx="729691" cy="274320"/>
           </a:xfrm>
           <a:prstGeom prst="rect">
             <a:avLst/>
@@ -9693,34 +9469,34 @@
           </a:bodyPr>
           <a:lstStyle/>
           <a:p>
-            <a:pPr algn="r">
+            <a:pPr algn="ctr">
               <a:lnSpc>
                 <a:spcPct val="110000"/>
               </a:lnSpc>
             </a:pPr>
             <a:r>
-              <a:rPr sz="1500" b="0">
-                <a:solidFill>
-                  <a:srgbClr val="555555"/>
-                </a:solidFill>
-                <a:latin typeface="Arial"/>
-                <a:ea typeface="Arial"/>
-              </a:rPr>
-              <a:t>≤ 3.2TB</a:t>
-            </a:r>
-          </a:p>
-        </p:txBody>
-      </p:sp>
-      <p:sp>
-        <p:nvSpPr>
-          <p:cNvPr id="141" name="Rectangle 140"/>
+              <a:rPr sz="1600" b="1">
+                <a:solidFill>
+                  <a:srgbClr val="1A1A1A"/>
+                </a:solidFill>
+                <a:latin typeface="Arial"/>
+                <a:ea typeface="Arial"/>
+              </a:rPr>
+              <a:t>6%</a:t>
+            </a:r>
+          </a:p>
+        </p:txBody>
+      </p:sp>
+      <p:sp>
+        <p:nvSpPr>
+          <p:cNvPr id="138" name="Rectangle 137"/>
           <p:cNvSpPr/>
           <p:nvPr/>
         </p:nvSpPr>
         <p:spPr>
           <a:xfrm>
-            <a:off x="923544" y="6437376"/>
-            <a:ext cx="2127598" cy="146304"/>
+            <a:off x="15373807" y="5321808"/>
+            <a:ext cx="1094536" cy="274320"/>
           </a:xfrm>
           <a:prstGeom prst="rect">
             <a:avLst/>
@@ -9728,8 +9504,10 @@
           <a:solidFill>
             <a:srgbClr val="1428A0"/>
           </a:solidFill>
-          <a:ln>
-            <a:noFill/>
+          <a:ln w="12700">
+            <a:solidFill>
+              <a:srgbClr val="FFFFFF"/>
+            </a:solidFill>
           </a:ln>
           <a:effectLst/>
         </p:spPr>
@@ -9757,58 +9535,14 @@
       </p:sp>
       <p:sp>
         <p:nvSpPr>
-          <p:cNvPr id="142" name="Rectangle 141"/>
-          <p:cNvSpPr/>
-          <p:nvPr/>
-        </p:nvSpPr>
-        <p:spPr>
-          <a:xfrm>
-            <a:off x="2621425" y="6409944"/>
-            <a:ext cx="27432" cy="201168"/>
-          </a:xfrm>
-          <a:prstGeom prst="rect">
-            <a:avLst/>
-          </a:prstGeom>
-          <a:solidFill>
-            <a:srgbClr val="F5F5F5"/>
-          </a:solidFill>
-          <a:ln>
-            <a:noFill/>
-          </a:ln>
-          <a:effectLst/>
-        </p:spPr>
-        <p:style>
-          <a:lnRef idx="1">
-            <a:schemeClr val="accent1"/>
-          </a:lnRef>
-          <a:fillRef idx="3">
-            <a:schemeClr val="accent1"/>
-          </a:fillRef>
-          <a:effectRef idx="2">
-            <a:schemeClr val="accent1"/>
-          </a:effectRef>
-          <a:fontRef idx="minor">
-            <a:schemeClr val="lt1"/>
-          </a:fontRef>
-        </p:style>
-        <p:txBody>
-          <a:bodyPr rtlCol="0" anchor="ctr"/>
-          <a:lstStyle/>
-          <a:p>
-            <a:pPr algn="ctr"/>
-          </a:p>
-        </p:txBody>
-      </p:sp>
-      <p:sp>
-        <p:nvSpPr>
-          <p:cNvPr id="143" name="TextBox 142"/>
+          <p:cNvPr id="139" name="TextBox 138"/>
           <p:cNvSpPr txBox="1"/>
           <p:nvPr/>
         </p:nvSpPr>
         <p:spPr>
           <a:xfrm>
-            <a:off x="3106006" y="6355080"/>
-            <a:ext cx="914400" cy="292608"/>
+            <a:off x="15373807" y="5321808"/>
+            <a:ext cx="1094536" cy="274320"/>
           </a:xfrm>
           <a:prstGeom prst="rect">
             <a:avLst/>
@@ -9821,12 +9555,92 @@
           </a:bodyPr>
           <a:lstStyle/>
           <a:p>
+            <a:pPr algn="ctr">
+              <a:lnSpc>
+                <a:spcPct val="110000"/>
+              </a:lnSpc>
+            </a:pPr>
+            <a:r>
+              <a:rPr sz="1600" b="1">
+                <a:solidFill>
+                  <a:srgbClr val="FFFFFF"/>
+                </a:solidFill>
+                <a:latin typeface="Arial"/>
+                <a:ea typeface="Arial"/>
+              </a:rPr>
+              <a:t>9%</a:t>
+            </a:r>
+          </a:p>
+        </p:txBody>
+      </p:sp>
+      <p:sp>
+        <p:nvSpPr>
+          <p:cNvPr id="140" name="TextBox 139"/>
+          <p:cNvSpPr txBox="1"/>
+          <p:nvPr/>
+        </p:nvSpPr>
+        <p:spPr>
+          <a:xfrm>
+            <a:off x="16559784" y="5321808"/>
+            <a:ext cx="1005840" cy="274320"/>
+          </a:xfrm>
+          <a:prstGeom prst="rect">
+            <a:avLst/>
+          </a:prstGeom>
+          <a:noFill/>
+        </p:spPr>
+        <p:txBody>
+          <a:bodyPr wrap="square" anchor="ctr" lIns="0" rIns="0" tIns="0" bIns="0">
+            <a:spAutoFit/>
+          </a:bodyPr>
+          <a:lstStyle/>
+          <a:p>
             <a:pPr algn="l">
               <a:lnSpc>
                 <a:spcPct val="110000"/>
               </a:lnSpc>
             </a:pPr>
             <a:r>
+              <a:rPr sz="1600" b="0">
+                <a:solidFill>
+                  <a:srgbClr val="555555"/>
+                </a:solidFill>
+                <a:latin typeface="Arial"/>
+                <a:ea typeface="Arial"/>
+              </a:rPr>
+              <a:t>286EB</a:t>
+            </a:r>
+          </a:p>
+        </p:txBody>
+      </p:sp>
+      <p:sp>
+        <p:nvSpPr>
+          <p:cNvPr id="141" name="TextBox 140"/>
+          <p:cNvSpPr txBox="1"/>
+          <p:nvPr/>
+        </p:nvSpPr>
+        <p:spPr>
+          <a:xfrm>
+            <a:off x="722376" y="5650992"/>
+            <a:ext cx="3273552" cy="274320"/>
+          </a:xfrm>
+          <a:prstGeom prst="rect">
+            <a:avLst/>
+          </a:prstGeom>
+          <a:noFill/>
+        </p:spPr>
+        <p:txBody>
+          <a:bodyPr wrap="square" anchor="ctr" lIns="0" rIns="0" tIns="0" bIns="0">
+            <a:spAutoFit/>
+          </a:bodyPr>
+          <a:lstStyle/>
+          <a:p>
+            <a:pPr algn="r">
+              <a:lnSpc>
+                <a:spcPct val="110000"/>
+              </a:lnSpc>
+            </a:pPr>
+            <a:r>
               <a:rPr sz="1600" b="1">
                 <a:solidFill>
                   <a:srgbClr val="1A1A1A"/>
@@ -9834,25 +9648,697 @@
                 <a:latin typeface="Arial"/>
                 <a:ea typeface="Arial"/>
               </a:rPr>
-              <a:t>30~120</a:t>
-            </a:r>
-          </a:p>
-        </p:txBody>
-      </p:sp>
-      <p:sp>
-        <p:nvSpPr>
-          <p:cNvPr id="144" name="Rounded Rectangle 143"/>
+              <a:t>2030</a:t>
+            </a:r>
+          </a:p>
+        </p:txBody>
+      </p:sp>
+      <p:sp>
+        <p:nvSpPr>
+          <p:cNvPr id="142" name="Rectangle 141"/>
           <p:cNvSpPr/>
           <p:nvPr/>
         </p:nvSpPr>
         <p:spPr>
           <a:xfrm>
-            <a:off x="4306824" y="6053328"/>
-            <a:ext cx="3204972" cy="566928"/>
+            <a:off x="4306824" y="5650992"/>
+            <a:ext cx="5715914" cy="274320"/>
+          </a:xfrm>
+          <a:prstGeom prst="rect">
+            <a:avLst/>
+          </a:prstGeom>
+          <a:solidFill>
+            <a:srgbClr val="8A8A8A"/>
+          </a:solidFill>
+          <a:ln w="12700">
+            <a:solidFill>
+              <a:srgbClr val="FFFFFF"/>
+            </a:solidFill>
+          </a:ln>
+          <a:effectLst/>
+        </p:spPr>
+        <p:style>
+          <a:lnRef idx="1">
+            <a:schemeClr val="accent1"/>
+          </a:lnRef>
+          <a:fillRef idx="3">
+            <a:schemeClr val="accent1"/>
+          </a:fillRef>
+          <a:effectRef idx="2">
+            <a:schemeClr val="accent1"/>
+          </a:effectRef>
+          <a:fontRef idx="minor">
+            <a:schemeClr val="lt1"/>
+          </a:fontRef>
+        </p:style>
+        <p:txBody>
+          <a:bodyPr rtlCol="0" anchor="ctr"/>
+          <a:lstStyle/>
+          <a:p>
+            <a:pPr algn="ctr"/>
+          </a:p>
+        </p:txBody>
+      </p:sp>
+      <p:sp>
+        <p:nvSpPr>
+          <p:cNvPr id="143" name="TextBox 142"/>
+          <p:cNvSpPr txBox="1"/>
+          <p:nvPr/>
+        </p:nvSpPr>
+        <p:spPr>
+          <a:xfrm>
+            <a:off x="4306824" y="5650992"/>
+            <a:ext cx="5715914" cy="274320"/>
+          </a:xfrm>
+          <a:prstGeom prst="rect">
+            <a:avLst/>
+          </a:prstGeom>
+          <a:noFill/>
+        </p:spPr>
+        <p:txBody>
+          <a:bodyPr wrap="square" anchor="ctr" lIns="0" rIns="0" tIns="0" bIns="0">
+            <a:spAutoFit/>
+          </a:bodyPr>
+          <a:lstStyle/>
+          <a:p>
+            <a:pPr algn="ctr">
+              <a:lnSpc>
+                <a:spcPct val="110000"/>
+              </a:lnSpc>
+            </a:pPr>
+            <a:r>
+              <a:rPr sz="1600" b="1">
+                <a:solidFill>
+                  <a:srgbClr val="FFFFFF"/>
+                </a:solidFill>
+                <a:latin typeface="Arial"/>
+                <a:ea typeface="Arial"/>
+              </a:rPr>
+              <a:t>범용 · 엔터프라이즈 47%</a:t>
+            </a:r>
+          </a:p>
+        </p:txBody>
+      </p:sp>
+      <p:sp>
+        <p:nvSpPr>
+          <p:cNvPr id="144" name="Rectangle 143"/>
+          <p:cNvSpPr/>
+          <p:nvPr/>
+        </p:nvSpPr>
+        <p:spPr>
+          <a:xfrm>
+            <a:off x="10022738" y="5650992"/>
+            <a:ext cx="1459382" cy="274320"/>
+          </a:xfrm>
+          <a:prstGeom prst="rect">
+            <a:avLst/>
+          </a:prstGeom>
+          <a:solidFill>
+            <a:srgbClr val="AAB8E8"/>
+          </a:solidFill>
+          <a:ln w="12700">
+            <a:solidFill>
+              <a:srgbClr val="FFFFFF"/>
+            </a:solidFill>
+          </a:ln>
+          <a:effectLst/>
+        </p:spPr>
+        <p:style>
+          <a:lnRef idx="1">
+            <a:schemeClr val="accent1"/>
+          </a:lnRef>
+          <a:fillRef idx="3">
+            <a:schemeClr val="accent1"/>
+          </a:fillRef>
+          <a:effectRef idx="2">
+            <a:schemeClr val="accent1"/>
+          </a:effectRef>
+          <a:fontRef idx="minor">
+            <a:schemeClr val="lt1"/>
+          </a:fontRef>
+        </p:style>
+        <p:txBody>
+          <a:bodyPr rtlCol="0" anchor="ctr"/>
+          <a:lstStyle/>
+          <a:p>
+            <a:pPr algn="ctr"/>
+          </a:p>
+        </p:txBody>
+      </p:sp>
+      <p:sp>
+        <p:nvSpPr>
+          <p:cNvPr id="145" name="TextBox 144"/>
+          <p:cNvSpPr txBox="1"/>
+          <p:nvPr/>
+        </p:nvSpPr>
+        <p:spPr>
+          <a:xfrm>
+            <a:off x="10022738" y="5650992"/>
+            <a:ext cx="1459382" cy="274320"/>
+          </a:xfrm>
+          <a:prstGeom prst="rect">
+            <a:avLst/>
+          </a:prstGeom>
+          <a:noFill/>
+        </p:spPr>
+        <p:txBody>
+          <a:bodyPr wrap="square" anchor="ctr" lIns="0" rIns="0" tIns="0" bIns="0">
+            <a:spAutoFit/>
+          </a:bodyPr>
+          <a:lstStyle/>
+          <a:p>
+            <a:pPr algn="ctr">
+              <a:lnSpc>
+                <a:spcPct val="110000"/>
+              </a:lnSpc>
+            </a:pPr>
+            <a:r>
+              <a:rPr sz="1600" b="1">
+                <a:solidFill>
+                  <a:srgbClr val="1A1A1A"/>
+                </a:solidFill>
+                <a:latin typeface="Arial"/>
+                <a:ea typeface="Arial"/>
+              </a:rPr>
+              <a:t>AI 학습 12%</a:t>
+            </a:r>
+          </a:p>
+        </p:txBody>
+      </p:sp>
+      <p:sp>
+        <p:nvSpPr>
+          <p:cNvPr id="146" name="Rectangle 145"/>
+          <p:cNvSpPr/>
+          <p:nvPr/>
+        </p:nvSpPr>
+        <p:spPr>
+          <a:xfrm>
+            <a:off x="11482120" y="5650992"/>
+            <a:ext cx="4986223" cy="274320"/>
+          </a:xfrm>
+          <a:prstGeom prst="rect">
+            <a:avLst/>
+          </a:prstGeom>
+          <a:solidFill>
+            <a:srgbClr val="1428A0"/>
+          </a:solidFill>
+          <a:ln w="12700">
+            <a:solidFill>
+              <a:srgbClr val="FFFFFF"/>
+            </a:solidFill>
+          </a:ln>
+          <a:effectLst/>
+        </p:spPr>
+        <p:style>
+          <a:lnRef idx="1">
+            <a:schemeClr val="accent1"/>
+          </a:lnRef>
+          <a:fillRef idx="3">
+            <a:schemeClr val="accent1"/>
+          </a:fillRef>
+          <a:effectRef idx="2">
+            <a:schemeClr val="accent1"/>
+          </a:effectRef>
+          <a:fontRef idx="minor">
+            <a:schemeClr val="lt1"/>
+          </a:fontRef>
+        </p:style>
+        <p:txBody>
+          <a:bodyPr rtlCol="0" anchor="ctr"/>
+          <a:lstStyle/>
+          <a:p>
+            <a:pPr algn="ctr"/>
+          </a:p>
+        </p:txBody>
+      </p:sp>
+      <p:sp>
+        <p:nvSpPr>
+          <p:cNvPr id="147" name="TextBox 146"/>
+          <p:cNvSpPr txBox="1"/>
+          <p:nvPr/>
+        </p:nvSpPr>
+        <p:spPr>
+          <a:xfrm>
+            <a:off x="11482120" y="5650992"/>
+            <a:ext cx="4986223" cy="274320"/>
+          </a:xfrm>
+          <a:prstGeom prst="rect">
+            <a:avLst/>
+          </a:prstGeom>
+          <a:noFill/>
+        </p:spPr>
+        <p:txBody>
+          <a:bodyPr wrap="square" anchor="ctr" lIns="0" rIns="0" tIns="0" bIns="0">
+            <a:spAutoFit/>
+          </a:bodyPr>
+          <a:lstStyle/>
+          <a:p>
+            <a:pPr algn="ctr">
+              <a:lnSpc>
+                <a:spcPct val="110000"/>
+              </a:lnSpc>
+            </a:pPr>
+            <a:r>
+              <a:rPr sz="1600" b="1">
+                <a:solidFill>
+                  <a:srgbClr val="FFFFFF"/>
+                </a:solidFill>
+                <a:latin typeface="Arial"/>
+                <a:ea typeface="Arial"/>
+              </a:rPr>
+              <a:t>AI 추론 41%</a:t>
+            </a:r>
+          </a:p>
+        </p:txBody>
+      </p:sp>
+      <p:sp>
+        <p:nvSpPr>
+          <p:cNvPr id="148" name="TextBox 147"/>
+          <p:cNvSpPr txBox="1"/>
+          <p:nvPr/>
+        </p:nvSpPr>
+        <p:spPr>
+          <a:xfrm>
+            <a:off x="16559784" y="5650992"/>
+            <a:ext cx="1005840" cy="274320"/>
+          </a:xfrm>
+          <a:prstGeom prst="rect">
+            <a:avLst/>
+          </a:prstGeom>
+          <a:noFill/>
+        </p:spPr>
+        <p:txBody>
+          <a:bodyPr wrap="square" anchor="ctr" lIns="0" rIns="0" tIns="0" bIns="0">
+            <a:spAutoFit/>
+          </a:bodyPr>
+          <a:lstStyle/>
+          <a:p>
+            <a:pPr algn="l">
+              <a:lnSpc>
+                <a:spcPct val="110000"/>
+              </a:lnSpc>
+            </a:pPr>
+            <a:r>
+              <a:rPr sz="1600" b="1">
+                <a:solidFill>
+                  <a:srgbClr val="1A1A1A"/>
+                </a:solidFill>
+                <a:latin typeface="Arial"/>
+                <a:ea typeface="Arial"/>
+              </a:rPr>
+              <a:t>1,078EB</a:t>
+            </a:r>
+          </a:p>
+        </p:txBody>
+      </p:sp>
+      <p:sp>
+        <p:nvSpPr>
+          <p:cNvPr id="149" name="TextBox 148"/>
+          <p:cNvSpPr txBox="1"/>
+          <p:nvPr/>
+        </p:nvSpPr>
+        <p:spPr>
+          <a:xfrm>
+            <a:off x="722376" y="6035040"/>
+            <a:ext cx="8869680" cy="292608"/>
+          </a:xfrm>
+          <a:prstGeom prst="rect">
+            <a:avLst/>
+          </a:prstGeom>
+          <a:noFill/>
+        </p:spPr>
+        <p:txBody>
+          <a:bodyPr wrap="square" anchor="ctr" lIns="0" rIns="0" tIns="0" bIns="0">
+            <a:spAutoFit/>
+          </a:bodyPr>
+          <a:lstStyle/>
+          <a:p>
+            <a:pPr algn="l">
+              <a:lnSpc>
+                <a:spcPct val="110000"/>
+              </a:lnSpc>
+            </a:pPr>
+            <a:r>
+              <a:rPr sz="1800" b="1">
+                <a:solidFill>
+                  <a:srgbClr val="1A1A1A"/>
+                </a:solidFill>
+                <a:latin typeface="Arial"/>
+                <a:ea typeface="Arial"/>
+              </a:rPr>
+              <a:t>SSD 제품군  </a:t>
+            </a:r>
+            <a:r>
+              <a:rPr sz="1600" b="0">
+                <a:solidFill>
+                  <a:srgbClr val="555555"/>
+                </a:solidFill>
+                <a:latin typeface="Arial"/>
+                <a:ea typeface="Arial"/>
+              </a:rPr>
+              <a:t>DWPD · 최대 용량</a:t>
+            </a:r>
+          </a:p>
+        </p:txBody>
+      </p:sp>
+      <p:sp>
+        <p:nvSpPr>
+          <p:cNvPr id="150" name="TextBox 149"/>
+          <p:cNvSpPr txBox="1"/>
+          <p:nvPr/>
+        </p:nvSpPr>
+        <p:spPr>
+          <a:xfrm>
+            <a:off x="12079224" y="6035040"/>
+            <a:ext cx="5486400" cy="292608"/>
+          </a:xfrm>
+          <a:prstGeom prst="rect">
+            <a:avLst/>
+          </a:prstGeom>
+          <a:noFill/>
+        </p:spPr>
+        <p:txBody>
+          <a:bodyPr wrap="square" anchor="ctr" lIns="0" rIns="0" tIns="0" bIns="0">
+            <a:spAutoFit/>
+          </a:bodyPr>
+          <a:lstStyle/>
+          <a:p>
+            <a:pPr algn="r">
+              <a:lnSpc>
+                <a:spcPct val="110000"/>
+              </a:lnSpc>
+            </a:pPr>
+            <a:r>
+              <a:rPr sz="1600" b="0">
+                <a:solidFill>
+                  <a:srgbClr val="1428A0"/>
+                </a:solidFill>
+                <a:latin typeface="Arial"/>
+                <a:ea typeface="Arial"/>
+              </a:rPr>
+              <a:t>■</a:t>
+            </a:r>
+            <a:r>
+              <a:rPr sz="1600" b="0">
+                <a:solidFill>
+                  <a:srgbClr val="555555"/>
+                </a:solidFill>
+                <a:latin typeface="Arial"/>
+                <a:ea typeface="Arial"/>
+              </a:rPr>
+              <a:t> 지금 쓰는 곳   </a:t>
+            </a:r>
+            <a:r>
+              <a:rPr sz="1600" b="0">
+                <a:solidFill>
+                  <a:srgbClr val="1428A0"/>
+                </a:solidFill>
+                <a:latin typeface="Arial"/>
+                <a:ea typeface="Arial"/>
+              </a:rPr>
+              <a:t>▢</a:t>
+            </a:r>
+            <a:r>
+              <a:rPr sz="1600" b="0">
+                <a:solidFill>
+                  <a:srgbClr val="555555"/>
+                </a:solidFill>
+                <a:latin typeface="Arial"/>
+                <a:ea typeface="Arial"/>
+              </a:rPr>
+              <a:t> 신호에 따라 쓰일 곳</a:t>
+            </a:r>
+          </a:p>
+        </p:txBody>
+      </p:sp>
+      <p:sp>
+        <p:nvSpPr>
+          <p:cNvPr id="151" name="Rounded Rectangle 150"/>
+          <p:cNvSpPr/>
+          <p:nvPr/>
+        </p:nvSpPr>
+        <p:spPr>
+          <a:xfrm>
+            <a:off x="722376" y="6364224"/>
+            <a:ext cx="3383280" cy="512064"/>
           </a:xfrm>
           <a:prstGeom prst="roundRect">
             <a:avLst>
-              <a:gd name="adj" fmla="val 12903"/>
+              <a:gd name="adj" fmla="val 14285"/>
+            </a:avLst>
+          </a:prstGeom>
+          <a:solidFill>
+            <a:srgbClr val="F5F5F5"/>
+          </a:solidFill>
+          <a:ln>
+            <a:noFill/>
+          </a:ln>
+          <a:effectLst/>
+        </p:spPr>
+        <p:style>
+          <a:lnRef idx="1">
+            <a:schemeClr val="accent1"/>
+          </a:lnRef>
+          <a:fillRef idx="3">
+            <a:schemeClr val="accent1"/>
+          </a:fillRef>
+          <a:effectRef idx="2">
+            <a:schemeClr val="accent1"/>
+          </a:effectRef>
+          <a:fontRef idx="minor">
+            <a:schemeClr val="lt1"/>
+          </a:fontRef>
+        </p:style>
+        <p:txBody>
+          <a:bodyPr rtlCol="0" anchor="ctr"/>
+          <a:lstStyle/>
+          <a:p>
+            <a:pPr algn="ctr"/>
+          </a:p>
+        </p:txBody>
+      </p:sp>
+      <p:sp>
+        <p:nvSpPr>
+          <p:cNvPr id="152" name="TextBox 151"/>
+          <p:cNvSpPr txBox="1"/>
+          <p:nvPr/>
+        </p:nvSpPr>
+        <p:spPr>
+          <a:xfrm>
+            <a:off x="923544" y="6382512"/>
+            <a:ext cx="2194560" cy="310896"/>
+          </a:xfrm>
+          <a:prstGeom prst="rect">
+            <a:avLst/>
+          </a:prstGeom>
+          <a:noFill/>
+        </p:spPr>
+        <p:txBody>
+          <a:bodyPr wrap="square" anchor="ctr" lIns="0" rIns="0" tIns="0" bIns="0">
+            <a:spAutoFit/>
+          </a:bodyPr>
+          <a:lstStyle/>
+          <a:p>
+            <a:pPr algn="l">
+              <a:lnSpc>
+                <a:spcPct val="110000"/>
+              </a:lnSpc>
+            </a:pPr>
+            <a:r>
+              <a:rPr sz="1800" b="1">
+                <a:solidFill>
+                  <a:srgbClr val="1A1A1A"/>
+                </a:solidFill>
+                <a:latin typeface="Arial"/>
+                <a:ea typeface="Arial"/>
+              </a:rPr>
+              <a:t>SLC급</a:t>
+            </a:r>
+          </a:p>
+        </p:txBody>
+      </p:sp>
+      <p:sp>
+        <p:nvSpPr>
+          <p:cNvPr id="153" name="TextBox 152"/>
+          <p:cNvSpPr txBox="1"/>
+          <p:nvPr/>
+        </p:nvSpPr>
+        <p:spPr>
+          <a:xfrm>
+            <a:off x="2916936" y="6382512"/>
+            <a:ext cx="1042415" cy="310896"/>
+          </a:xfrm>
+          <a:prstGeom prst="rect">
+            <a:avLst/>
+          </a:prstGeom>
+          <a:noFill/>
+        </p:spPr>
+        <p:txBody>
+          <a:bodyPr wrap="square" anchor="ctr" lIns="0" rIns="0" tIns="0" bIns="0">
+            <a:spAutoFit/>
+          </a:bodyPr>
+          <a:lstStyle/>
+          <a:p>
+            <a:pPr algn="r">
+              <a:lnSpc>
+                <a:spcPct val="110000"/>
+              </a:lnSpc>
+            </a:pPr>
+            <a:r>
+              <a:rPr sz="1500" b="0">
+                <a:solidFill>
+                  <a:srgbClr val="555555"/>
+                </a:solidFill>
+                <a:latin typeface="Arial"/>
+                <a:ea typeface="Arial"/>
+              </a:rPr>
+              <a:t>≤ 3.2TB</a:t>
+            </a:r>
+          </a:p>
+        </p:txBody>
+      </p:sp>
+      <p:sp>
+        <p:nvSpPr>
+          <p:cNvPr id="154" name="Rectangle 153"/>
+          <p:cNvSpPr/>
+          <p:nvPr/>
+        </p:nvSpPr>
+        <p:spPr>
+          <a:xfrm>
+            <a:off x="923544" y="6702552"/>
+            <a:ext cx="2127598" cy="128016"/>
+          </a:xfrm>
+          <a:prstGeom prst="rect">
+            <a:avLst/>
+          </a:prstGeom>
+          <a:solidFill>
+            <a:srgbClr val="1428A0"/>
+          </a:solidFill>
+          <a:ln>
+            <a:noFill/>
+          </a:ln>
+          <a:effectLst/>
+        </p:spPr>
+        <p:style>
+          <a:lnRef idx="1">
+            <a:schemeClr val="accent1"/>
+          </a:lnRef>
+          <a:fillRef idx="3">
+            <a:schemeClr val="accent1"/>
+          </a:fillRef>
+          <a:effectRef idx="2">
+            <a:schemeClr val="accent1"/>
+          </a:effectRef>
+          <a:fontRef idx="minor">
+            <a:schemeClr val="lt1"/>
+          </a:fontRef>
+        </p:style>
+        <p:txBody>
+          <a:bodyPr rtlCol="0" anchor="ctr"/>
+          <a:lstStyle/>
+          <a:p>
+            <a:pPr algn="ctr"/>
+          </a:p>
+        </p:txBody>
+      </p:sp>
+      <p:sp>
+        <p:nvSpPr>
+          <p:cNvPr id="155" name="Rectangle 154"/>
+          <p:cNvSpPr/>
+          <p:nvPr/>
+        </p:nvSpPr>
+        <p:spPr>
+          <a:xfrm>
+            <a:off x="2621425" y="6675120"/>
+            <a:ext cx="27432" cy="182880"/>
+          </a:xfrm>
+          <a:prstGeom prst="rect">
+            <a:avLst/>
+          </a:prstGeom>
+          <a:solidFill>
+            <a:srgbClr val="F5F5F5"/>
+          </a:solidFill>
+          <a:ln>
+            <a:noFill/>
+          </a:ln>
+          <a:effectLst/>
+        </p:spPr>
+        <p:style>
+          <a:lnRef idx="1">
+            <a:schemeClr val="accent1"/>
+          </a:lnRef>
+          <a:fillRef idx="3">
+            <a:schemeClr val="accent1"/>
+          </a:fillRef>
+          <a:effectRef idx="2">
+            <a:schemeClr val="accent1"/>
+          </a:effectRef>
+          <a:fontRef idx="minor">
+            <a:schemeClr val="lt1"/>
+          </a:fontRef>
+        </p:style>
+        <p:txBody>
+          <a:bodyPr rtlCol="0" anchor="ctr"/>
+          <a:lstStyle/>
+          <a:p>
+            <a:pPr algn="ctr"/>
+          </a:p>
+        </p:txBody>
+      </p:sp>
+      <p:sp>
+        <p:nvSpPr>
+          <p:cNvPr id="156" name="TextBox 155"/>
+          <p:cNvSpPr txBox="1"/>
+          <p:nvPr/>
+        </p:nvSpPr>
+        <p:spPr>
+          <a:xfrm>
+            <a:off x="3106006" y="6620256"/>
+            <a:ext cx="914400" cy="292608"/>
+          </a:xfrm>
+          <a:prstGeom prst="rect">
+            <a:avLst/>
+          </a:prstGeom>
+          <a:noFill/>
+        </p:spPr>
+        <p:txBody>
+          <a:bodyPr wrap="square" anchor="ctr" lIns="0" rIns="0" tIns="0" bIns="0">
+            <a:spAutoFit/>
+          </a:bodyPr>
+          <a:lstStyle/>
+          <a:p>
+            <a:pPr algn="l">
+              <a:lnSpc>
+                <a:spcPct val="110000"/>
+              </a:lnSpc>
+            </a:pPr>
+            <a:r>
+              <a:rPr sz="1600" b="1">
+                <a:solidFill>
+                  <a:srgbClr val="1A1A1A"/>
+                </a:solidFill>
+                <a:latin typeface="Arial"/>
+                <a:ea typeface="Arial"/>
+              </a:rPr>
+              <a:t>30~120</a:t>
+            </a:r>
+          </a:p>
+        </p:txBody>
+      </p:sp>
+      <p:sp>
+        <p:nvSpPr>
+          <p:cNvPr id="157" name="Rounded Rectangle 156"/>
+          <p:cNvSpPr/>
+          <p:nvPr/>
+        </p:nvSpPr>
+        <p:spPr>
+          <a:xfrm>
+            <a:off x="4306824" y="6364224"/>
+            <a:ext cx="3204972" cy="512064"/>
+          </a:xfrm>
+          <a:prstGeom prst="roundRect">
+            <a:avLst>
+              <a:gd name="adj" fmla="val 14285"/>
             </a:avLst>
           </a:prstGeom>
           <a:noFill/>
@@ -9887,18 +10373,18 @@
       </p:sp>
       <p:sp>
         <p:nvSpPr>
-          <p:cNvPr id="145" name="Rounded Rectangle 144"/>
+          <p:cNvPr id="158" name="Rounded Rectangle 157"/>
           <p:cNvSpPr/>
           <p:nvPr/>
         </p:nvSpPr>
         <p:spPr>
           <a:xfrm>
-            <a:off x="7658100" y="6053328"/>
-            <a:ext cx="3204972" cy="566928"/>
+            <a:off x="7658100" y="6364224"/>
+            <a:ext cx="3204972" cy="512064"/>
           </a:xfrm>
           <a:prstGeom prst="roundRect">
             <a:avLst>
-              <a:gd name="adj" fmla="val 12903"/>
+              <a:gd name="adj" fmla="val 14285"/>
             </a:avLst>
           </a:prstGeom>
           <a:noFill/>
@@ -9933,18 +10419,18 @@
       </p:sp>
       <p:sp>
         <p:nvSpPr>
-          <p:cNvPr id="146" name="Rounded Rectangle 145"/>
+          <p:cNvPr id="159" name="Rounded Rectangle 158"/>
           <p:cNvSpPr/>
           <p:nvPr/>
         </p:nvSpPr>
         <p:spPr>
           <a:xfrm>
-            <a:off x="11009376" y="6053328"/>
-            <a:ext cx="3204972" cy="566928"/>
+            <a:off x="11009376" y="6364224"/>
+            <a:ext cx="3204972" cy="512064"/>
           </a:xfrm>
           <a:prstGeom prst="roundRect">
             <a:avLst>
-              <a:gd name="adj" fmla="val 12903"/>
+              <a:gd name="adj" fmla="val 14285"/>
             </a:avLst>
           </a:prstGeom>
           <a:solidFill>
@@ -9982,14 +10468,14 @@
       </p:sp>
       <p:sp>
         <p:nvSpPr>
-          <p:cNvPr id="147" name="TextBox 146"/>
+          <p:cNvPr id="160" name="TextBox 159"/>
           <p:cNvSpPr txBox="1"/>
           <p:nvPr/>
         </p:nvSpPr>
         <p:spPr>
           <a:xfrm>
-            <a:off x="11064240" y="6053328"/>
-            <a:ext cx="3095244" cy="566928"/>
+            <a:off x="11064240" y="6364224"/>
+            <a:ext cx="3095244" cy="512064"/>
           </a:xfrm>
           <a:prstGeom prst="rect">
             <a:avLst/>
@@ -10022,18 +10508,18 @@
       </p:sp>
       <p:sp>
         <p:nvSpPr>
-          <p:cNvPr id="148" name="Rounded Rectangle 147"/>
+          <p:cNvPr id="161" name="Rounded Rectangle 160"/>
           <p:cNvSpPr/>
           <p:nvPr/>
         </p:nvSpPr>
         <p:spPr>
           <a:xfrm>
-            <a:off x="14360652" y="6053328"/>
-            <a:ext cx="3204972" cy="566928"/>
+            <a:off x="14360652" y="6364224"/>
+            <a:ext cx="3204972" cy="512064"/>
           </a:xfrm>
           <a:prstGeom prst="roundRect">
             <a:avLst>
-              <a:gd name="adj" fmla="val 12903"/>
+              <a:gd name="adj" fmla="val 14285"/>
             </a:avLst>
           </a:prstGeom>
           <a:noFill/>
@@ -10068,18 +10554,18 @@
       </p:sp>
       <p:sp>
         <p:nvSpPr>
-          <p:cNvPr id="149" name="Rounded Rectangle 148"/>
+          <p:cNvPr id="162" name="Rounded Rectangle 161"/>
           <p:cNvSpPr/>
           <p:nvPr/>
         </p:nvSpPr>
         <p:spPr>
           <a:xfrm>
-            <a:off x="722376" y="6684264"/>
-            <a:ext cx="3383280" cy="566928"/>
+            <a:off x="722376" y="6931152"/>
+            <a:ext cx="3383280" cy="512064"/>
           </a:xfrm>
           <a:prstGeom prst="roundRect">
             <a:avLst>
-              <a:gd name="adj" fmla="val 12903"/>
+              <a:gd name="adj" fmla="val 14285"/>
             </a:avLst>
           </a:prstGeom>
           <a:solidFill>
@@ -10114,13 +10600,13 @@
       </p:sp>
       <p:sp>
         <p:nvSpPr>
-          <p:cNvPr id="150" name="TextBox 149"/>
+          <p:cNvPr id="163" name="TextBox 162"/>
           <p:cNvSpPr txBox="1"/>
           <p:nvPr/>
         </p:nvSpPr>
         <p:spPr>
           <a:xfrm>
-            <a:off x="923544" y="6702552"/>
+            <a:off x="923544" y="6949440"/>
             <a:ext cx="2194560" cy="310896"/>
           </a:xfrm>
           <a:prstGeom prst="rect">
@@ -10154,13 +10640,13 @@
       </p:sp>
       <p:sp>
         <p:nvSpPr>
-          <p:cNvPr id="151" name="TextBox 150"/>
+          <p:cNvPr id="164" name="TextBox 163"/>
           <p:cNvSpPr txBox="1"/>
           <p:nvPr/>
         </p:nvSpPr>
         <p:spPr>
           <a:xfrm>
-            <a:off x="2916936" y="6702552"/>
+            <a:off x="2916936" y="6949440"/>
             <a:ext cx="1042415" cy="310896"/>
           </a:xfrm>
           <a:prstGeom prst="rect">
@@ -10194,14 +10680,14 @@
       </p:sp>
       <p:sp>
         <p:nvSpPr>
-          <p:cNvPr id="152" name="Rectangle 151"/>
+          <p:cNvPr id="165" name="Rectangle 164"/>
           <p:cNvSpPr/>
           <p:nvPr/>
         </p:nvSpPr>
         <p:spPr>
           <a:xfrm>
-            <a:off x="923544" y="7068312"/>
-            <a:ext cx="1020635" cy="146304"/>
+            <a:off x="923544" y="7269480"/>
+            <a:ext cx="1020635" cy="128016"/>
           </a:xfrm>
           <a:prstGeom prst="rect">
             <a:avLst/>
@@ -10238,13 +10724,13 @@
       </p:sp>
       <p:sp>
         <p:nvSpPr>
-          <p:cNvPr id="153" name="TextBox 152"/>
+          <p:cNvPr id="166" name="TextBox 165"/>
           <p:cNvSpPr txBox="1"/>
           <p:nvPr/>
         </p:nvSpPr>
         <p:spPr>
           <a:xfrm>
-            <a:off x="1999043" y="6986016"/>
+            <a:off x="1999043" y="7187184"/>
             <a:ext cx="914400" cy="292608"/>
           </a:xfrm>
           <a:prstGeom prst="rect">
@@ -10278,18 +10764,18 @@
       </p:sp>
       <p:sp>
         <p:nvSpPr>
-          <p:cNvPr id="154" name="Rounded Rectangle 153"/>
+          <p:cNvPr id="167" name="Rounded Rectangle 166"/>
           <p:cNvSpPr/>
           <p:nvPr/>
         </p:nvSpPr>
         <p:spPr>
           <a:xfrm>
-            <a:off x="4306824" y="6684264"/>
-            <a:ext cx="3204972" cy="566928"/>
+            <a:off x="4306824" y="6931152"/>
+            <a:ext cx="3204972" cy="512064"/>
           </a:xfrm>
           <a:prstGeom prst="roundRect">
             <a:avLst>
-              <a:gd name="adj" fmla="val 12903"/>
+              <a:gd name="adj" fmla="val 14285"/>
             </a:avLst>
           </a:prstGeom>
           <a:noFill/>
@@ -10324,18 +10810,18 @@
       </p:sp>
       <p:sp>
         <p:nvSpPr>
-          <p:cNvPr id="155" name="Rounded Rectangle 154"/>
+          <p:cNvPr id="168" name="Rounded Rectangle 167"/>
           <p:cNvSpPr/>
           <p:nvPr/>
         </p:nvSpPr>
         <p:spPr>
           <a:xfrm>
-            <a:off x="7658100" y="6684264"/>
-            <a:ext cx="3204972" cy="566928"/>
+            <a:off x="7658100" y="6931152"/>
+            <a:ext cx="3204972" cy="512064"/>
           </a:xfrm>
           <a:prstGeom prst="roundRect">
             <a:avLst>
-              <a:gd name="adj" fmla="val 12903"/>
+              <a:gd name="adj" fmla="val 14285"/>
             </a:avLst>
           </a:prstGeom>
           <a:solidFill>
@@ -10373,14 +10859,14 @@
       </p:sp>
       <p:sp>
         <p:nvSpPr>
-          <p:cNvPr id="156" name="TextBox 155"/>
+          <p:cNvPr id="169" name="TextBox 168"/>
           <p:cNvSpPr txBox="1"/>
           <p:nvPr/>
         </p:nvSpPr>
         <p:spPr>
           <a:xfrm>
-            <a:off x="7712964" y="6684264"/>
-            <a:ext cx="3095244" cy="566928"/>
+            <a:off x="7712964" y="6931152"/>
+            <a:ext cx="3095244" cy="512064"/>
           </a:xfrm>
           <a:prstGeom prst="rect">
             <a:avLst/>
@@ -10413,18 +10899,18 @@
       </p:sp>
       <p:sp>
         <p:nvSpPr>
-          <p:cNvPr id="157" name="Rounded Rectangle 156"/>
+          <p:cNvPr id="170" name="Rounded Rectangle 169"/>
           <p:cNvSpPr/>
           <p:nvPr/>
         </p:nvSpPr>
         <p:spPr>
           <a:xfrm>
-            <a:off x="11009376" y="6684264"/>
-            <a:ext cx="3204972" cy="566928"/>
+            <a:off x="11009376" y="6931152"/>
+            <a:ext cx="3204972" cy="512064"/>
           </a:xfrm>
           <a:prstGeom prst="roundRect">
             <a:avLst>
-              <a:gd name="adj" fmla="val 12903"/>
+              <a:gd name="adj" fmla="val 14285"/>
             </a:avLst>
           </a:prstGeom>
           <a:solidFill>
@@ -10459,14 +10945,14 @@
       </p:sp>
       <p:sp>
         <p:nvSpPr>
-          <p:cNvPr id="158" name="TextBox 157"/>
+          <p:cNvPr id="171" name="TextBox 170"/>
           <p:cNvSpPr txBox="1"/>
           <p:nvPr/>
         </p:nvSpPr>
         <p:spPr>
           <a:xfrm>
-            <a:off x="11064240" y="6684264"/>
-            <a:ext cx="3095244" cy="566928"/>
+            <a:off x="11064240" y="6931152"/>
+            <a:ext cx="3095244" cy="512064"/>
           </a:xfrm>
           <a:prstGeom prst="rect">
             <a:avLst/>
@@ -10499,18 +10985,18 @@
       </p:sp>
       <p:sp>
         <p:nvSpPr>
-          <p:cNvPr id="159" name="Rounded Rectangle 158"/>
+          <p:cNvPr id="172" name="Rounded Rectangle 171"/>
           <p:cNvSpPr/>
           <p:nvPr/>
         </p:nvSpPr>
         <p:spPr>
           <a:xfrm>
-            <a:off x="14360652" y="6684264"/>
-            <a:ext cx="3204972" cy="566928"/>
+            <a:off x="14360652" y="6931152"/>
+            <a:ext cx="3204972" cy="512064"/>
           </a:xfrm>
           <a:prstGeom prst="roundRect">
             <a:avLst>
-              <a:gd name="adj" fmla="val 12903"/>
+              <a:gd name="adj" fmla="val 14285"/>
             </a:avLst>
           </a:prstGeom>
           <a:noFill/>
@@ -10545,18 +11031,18 @@
       </p:sp>
       <p:sp>
         <p:nvSpPr>
-          <p:cNvPr id="160" name="Rounded Rectangle 159"/>
+          <p:cNvPr id="173" name="Rounded Rectangle 172"/>
           <p:cNvSpPr/>
           <p:nvPr/>
         </p:nvSpPr>
         <p:spPr>
           <a:xfrm>
-            <a:off x="722376" y="7315200"/>
-            <a:ext cx="3383280" cy="566928"/>
+            <a:off x="722376" y="7498079"/>
+            <a:ext cx="3383280" cy="512064"/>
           </a:xfrm>
           <a:prstGeom prst="roundRect">
             <a:avLst>
-              <a:gd name="adj" fmla="val 12903"/>
+              <a:gd name="adj" fmla="val 14285"/>
             </a:avLst>
           </a:prstGeom>
           <a:solidFill>
@@ -10591,13 +11077,13 @@
       </p:sp>
       <p:sp>
         <p:nvSpPr>
-          <p:cNvPr id="161" name="TextBox 160"/>
+          <p:cNvPr id="174" name="TextBox 173"/>
           <p:cNvSpPr txBox="1"/>
           <p:nvPr/>
         </p:nvSpPr>
         <p:spPr>
           <a:xfrm>
-            <a:off x="923544" y="7333488"/>
+            <a:off x="923544" y="7516367"/>
             <a:ext cx="2194560" cy="310896"/>
           </a:xfrm>
           <a:prstGeom prst="rect">
@@ -10631,13 +11117,13 @@
       </p:sp>
       <p:sp>
         <p:nvSpPr>
-          <p:cNvPr id="162" name="TextBox 161"/>
+          <p:cNvPr id="175" name="TextBox 174"/>
           <p:cNvSpPr txBox="1"/>
           <p:nvPr/>
         </p:nvSpPr>
         <p:spPr>
           <a:xfrm>
-            <a:off x="2916936" y="7333488"/>
+            <a:off x="2916936" y="7516367"/>
             <a:ext cx="1042415" cy="310896"/>
           </a:xfrm>
           <a:prstGeom prst="rect">
@@ -10671,14 +11157,14 @@
       </p:sp>
       <p:sp>
         <p:nvSpPr>
-          <p:cNvPr id="163" name="Rectangle 162"/>
+          <p:cNvPr id="176" name="Rectangle 175"/>
           <p:cNvSpPr/>
           <p:nvPr/>
         </p:nvSpPr>
         <p:spPr>
           <a:xfrm>
-            <a:off x="923544" y="7699248"/>
-            <a:ext cx="690962" cy="146304"/>
+            <a:off x="923544" y="7836407"/>
+            <a:ext cx="690962" cy="128016"/>
           </a:xfrm>
           <a:prstGeom prst="rect">
             <a:avLst/>
@@ -10715,13 +11201,13 @@
       </p:sp>
       <p:sp>
         <p:nvSpPr>
-          <p:cNvPr id="164" name="TextBox 163"/>
+          <p:cNvPr id="177" name="TextBox 176"/>
           <p:cNvSpPr txBox="1"/>
           <p:nvPr/>
         </p:nvSpPr>
         <p:spPr>
           <a:xfrm>
-            <a:off x="1669370" y="7616952"/>
+            <a:off x="1669370" y="7754111"/>
             <a:ext cx="914400" cy="292608"/>
           </a:xfrm>
           <a:prstGeom prst="rect">
@@ -10755,18 +11241,18 @@
       </p:sp>
       <p:sp>
         <p:nvSpPr>
-          <p:cNvPr id="165" name="Rounded Rectangle 164"/>
+          <p:cNvPr id="178" name="Rounded Rectangle 177"/>
           <p:cNvSpPr/>
           <p:nvPr/>
         </p:nvSpPr>
         <p:spPr>
           <a:xfrm>
-            <a:off x="4306824" y="7315200"/>
-            <a:ext cx="3204972" cy="566928"/>
+            <a:off x="4306824" y="7498079"/>
+            <a:ext cx="3204972" cy="512064"/>
           </a:xfrm>
           <a:prstGeom prst="roundRect">
             <a:avLst>
-              <a:gd name="adj" fmla="val 12903"/>
+              <a:gd name="adj" fmla="val 14285"/>
             </a:avLst>
           </a:prstGeom>
           <a:solidFill>
@@ -10801,14 +11287,14 @@
       </p:sp>
       <p:sp>
         <p:nvSpPr>
-          <p:cNvPr id="166" name="TextBox 165"/>
+          <p:cNvPr id="179" name="TextBox 178"/>
           <p:cNvSpPr txBox="1"/>
           <p:nvPr/>
         </p:nvSpPr>
         <p:spPr>
           <a:xfrm>
-            <a:off x="4361688" y="7315200"/>
-            <a:ext cx="3095244" cy="566928"/>
+            <a:off x="4361688" y="7498079"/>
+            <a:ext cx="3095244" cy="512064"/>
           </a:xfrm>
           <a:prstGeom prst="rect">
             <a:avLst/>
@@ -10841,18 +11327,18 @@
       </p:sp>
       <p:sp>
         <p:nvSpPr>
-          <p:cNvPr id="167" name="Rounded Rectangle 166"/>
+          <p:cNvPr id="180" name="Rounded Rectangle 179"/>
           <p:cNvSpPr/>
           <p:nvPr/>
         </p:nvSpPr>
         <p:spPr>
           <a:xfrm>
-            <a:off x="7658100" y="7315200"/>
-            <a:ext cx="3204972" cy="566928"/>
+            <a:off x="7658100" y="7498079"/>
+            <a:ext cx="3204972" cy="512064"/>
           </a:xfrm>
           <a:prstGeom prst="roundRect">
             <a:avLst>
-              <a:gd name="adj" fmla="val 12903"/>
+              <a:gd name="adj" fmla="val 14285"/>
             </a:avLst>
           </a:prstGeom>
           <a:solidFill>
@@ -10887,14 +11373,14 @@
       </p:sp>
       <p:sp>
         <p:nvSpPr>
-          <p:cNvPr id="168" name="TextBox 167"/>
+          <p:cNvPr id="181" name="TextBox 180"/>
           <p:cNvSpPr txBox="1"/>
           <p:nvPr/>
         </p:nvSpPr>
         <p:spPr>
           <a:xfrm>
-            <a:off x="7712964" y="7315200"/>
-            <a:ext cx="3095244" cy="566928"/>
+            <a:off x="7712964" y="7498079"/>
+            <a:ext cx="3095244" cy="512064"/>
           </a:xfrm>
           <a:prstGeom prst="rect">
             <a:avLst/>
@@ -10927,18 +11413,18 @@
       </p:sp>
       <p:sp>
         <p:nvSpPr>
-          <p:cNvPr id="169" name="Rounded Rectangle 168"/>
+          <p:cNvPr id="182" name="Rounded Rectangle 181"/>
           <p:cNvSpPr/>
           <p:nvPr/>
         </p:nvSpPr>
         <p:spPr>
           <a:xfrm>
-            <a:off x="11009376" y="7315200"/>
-            <a:ext cx="3204972" cy="566928"/>
+            <a:off x="11009376" y="7498079"/>
+            <a:ext cx="3204972" cy="512064"/>
           </a:xfrm>
           <a:prstGeom prst="roundRect">
             <a:avLst>
-              <a:gd name="adj" fmla="val 12903"/>
+              <a:gd name="adj" fmla="val 14285"/>
             </a:avLst>
           </a:prstGeom>
           <a:solidFill>
@@ -10973,14 +11459,14 @@
       </p:sp>
       <p:sp>
         <p:nvSpPr>
-          <p:cNvPr id="170" name="TextBox 169"/>
+          <p:cNvPr id="183" name="TextBox 182"/>
           <p:cNvSpPr txBox="1"/>
           <p:nvPr/>
         </p:nvSpPr>
         <p:spPr>
           <a:xfrm>
-            <a:off x="11064240" y="7315200"/>
-            <a:ext cx="3095244" cy="566928"/>
+            <a:off x="11064240" y="7498079"/>
+            <a:ext cx="3095244" cy="512064"/>
           </a:xfrm>
           <a:prstGeom prst="rect">
             <a:avLst/>
@@ -11013,18 +11499,18 @@
       </p:sp>
       <p:sp>
         <p:nvSpPr>
-          <p:cNvPr id="171" name="Rounded Rectangle 170"/>
+          <p:cNvPr id="184" name="Rounded Rectangle 183"/>
           <p:cNvSpPr/>
           <p:nvPr/>
         </p:nvSpPr>
         <p:spPr>
           <a:xfrm>
-            <a:off x="14360652" y="7315200"/>
-            <a:ext cx="3204972" cy="566928"/>
+            <a:off x="14360652" y="7498079"/>
+            <a:ext cx="3204972" cy="512064"/>
           </a:xfrm>
           <a:prstGeom prst="roundRect">
             <a:avLst>
-              <a:gd name="adj" fmla="val 12903"/>
+              <a:gd name="adj" fmla="val 14285"/>
             </a:avLst>
           </a:prstGeom>
           <a:solidFill>
@@ -11062,14 +11548,14 @@
       </p:sp>
       <p:sp>
         <p:nvSpPr>
-          <p:cNvPr id="172" name="TextBox 171"/>
+          <p:cNvPr id="185" name="TextBox 184"/>
           <p:cNvSpPr txBox="1"/>
           <p:nvPr/>
         </p:nvSpPr>
         <p:spPr>
           <a:xfrm>
-            <a:off x="14415516" y="7315200"/>
-            <a:ext cx="3095244" cy="566928"/>
+            <a:off x="14415516" y="7498079"/>
+            <a:ext cx="3095244" cy="512064"/>
           </a:xfrm>
           <a:prstGeom prst="rect">
             <a:avLst/>
@@ -11102,18 +11588,18 @@
       </p:sp>
       <p:sp>
         <p:nvSpPr>
-          <p:cNvPr id="173" name="Rounded Rectangle 172"/>
+          <p:cNvPr id="186" name="Rounded Rectangle 185"/>
           <p:cNvSpPr/>
           <p:nvPr/>
         </p:nvSpPr>
         <p:spPr>
           <a:xfrm>
-            <a:off x="722376" y="7946136"/>
-            <a:ext cx="3383280" cy="566928"/>
+            <a:off x="722376" y="8065008"/>
+            <a:ext cx="3383280" cy="512064"/>
           </a:xfrm>
           <a:prstGeom prst="roundRect">
             <a:avLst>
-              <a:gd name="adj" fmla="val 12903"/>
+              <a:gd name="adj" fmla="val 14285"/>
             </a:avLst>
           </a:prstGeom>
           <a:solidFill>
@@ -11148,13 +11634,13 @@
       </p:sp>
       <p:sp>
         <p:nvSpPr>
-          <p:cNvPr id="174" name="TextBox 173"/>
+          <p:cNvPr id="187" name="TextBox 186"/>
           <p:cNvSpPr txBox="1"/>
           <p:nvPr/>
         </p:nvSpPr>
         <p:spPr>
           <a:xfrm>
-            <a:off x="923544" y="7964423"/>
+            <a:off x="923544" y="8083296"/>
             <a:ext cx="2194560" cy="310896"/>
           </a:xfrm>
           <a:prstGeom prst="rect">
@@ -11188,13 +11674,13 @@
       </p:sp>
       <p:sp>
         <p:nvSpPr>
-          <p:cNvPr id="175" name="TextBox 174"/>
+          <p:cNvPr id="188" name="TextBox 187"/>
           <p:cNvSpPr txBox="1"/>
           <p:nvPr/>
         </p:nvSpPr>
         <p:spPr>
           <a:xfrm>
-            <a:off x="2916936" y="7964423"/>
+            <a:off x="2916936" y="8083296"/>
             <a:ext cx="1042415" cy="310896"/>
           </a:xfrm>
           <a:prstGeom prst="rect">
@@ -11228,14 +11714,14 @@
       </p:sp>
       <p:sp>
         <p:nvSpPr>
-          <p:cNvPr id="176" name="Rectangle 175"/>
+          <p:cNvPr id="189" name="Rectangle 188"/>
           <p:cNvSpPr/>
           <p:nvPr/>
         </p:nvSpPr>
         <p:spPr>
           <a:xfrm>
-            <a:off x="923544" y="8330183"/>
-            <a:ext cx="537673" cy="146304"/>
+            <a:off x="923544" y="8403336"/>
+            <a:ext cx="537673" cy="128016"/>
           </a:xfrm>
           <a:prstGeom prst="rect">
             <a:avLst/>
@@ -11272,14 +11758,14 @@
       </p:sp>
       <p:sp>
         <p:nvSpPr>
-          <p:cNvPr id="177" name="Rectangle 176"/>
+          <p:cNvPr id="190" name="Rectangle 189"/>
           <p:cNvSpPr/>
           <p:nvPr/>
         </p:nvSpPr>
         <p:spPr>
           <a:xfrm>
-            <a:off x="1239500" y="8302752"/>
-            <a:ext cx="27432" cy="201168"/>
+            <a:off x="1239500" y="8375904"/>
+            <a:ext cx="27432" cy="182880"/>
           </a:xfrm>
           <a:prstGeom prst="rect">
             <a:avLst/>
@@ -11316,13 +11802,13 @@
       </p:sp>
       <p:sp>
         <p:nvSpPr>
-          <p:cNvPr id="178" name="TextBox 177"/>
+          <p:cNvPr id="191" name="TextBox 190"/>
           <p:cNvSpPr txBox="1"/>
           <p:nvPr/>
         </p:nvSpPr>
         <p:spPr>
           <a:xfrm>
-            <a:off x="1516081" y="8247888"/>
+            <a:off x="1516081" y="8321040"/>
             <a:ext cx="914400" cy="292608"/>
           </a:xfrm>
           <a:prstGeom prst="rect">
@@ -11356,18 +11842,18 @@
       </p:sp>
       <p:sp>
         <p:nvSpPr>
-          <p:cNvPr id="179" name="Rounded Rectangle 178"/>
+          <p:cNvPr id="192" name="Rounded Rectangle 191"/>
           <p:cNvSpPr/>
           <p:nvPr/>
         </p:nvSpPr>
         <p:spPr>
           <a:xfrm>
-            <a:off x="4306824" y="7946136"/>
-            <a:ext cx="3204972" cy="566928"/>
+            <a:off x="4306824" y="8065008"/>
+            <a:ext cx="3204972" cy="512064"/>
           </a:xfrm>
           <a:prstGeom prst="roundRect">
             <a:avLst>
-              <a:gd name="adj" fmla="val 12903"/>
+              <a:gd name="adj" fmla="val 14285"/>
             </a:avLst>
           </a:prstGeom>
           <a:solidFill>
@@ -11402,14 +11888,14 @@
       </p:sp>
       <p:sp>
         <p:nvSpPr>
-          <p:cNvPr id="180" name="TextBox 179"/>
+          <p:cNvPr id="193" name="TextBox 192"/>
           <p:cNvSpPr txBox="1"/>
           <p:nvPr/>
         </p:nvSpPr>
         <p:spPr>
           <a:xfrm>
-            <a:off x="4361688" y="7946136"/>
-            <a:ext cx="3095244" cy="566928"/>
+            <a:off x="4361688" y="8065008"/>
+            <a:ext cx="3095244" cy="512064"/>
           </a:xfrm>
           <a:prstGeom prst="rect">
             <a:avLst/>
@@ -11442,18 +11928,18 @@
       </p:sp>
       <p:sp>
         <p:nvSpPr>
-          <p:cNvPr id="181" name="Rounded Rectangle 180"/>
+          <p:cNvPr id="194" name="Rounded Rectangle 193"/>
           <p:cNvSpPr/>
           <p:nvPr/>
         </p:nvSpPr>
         <p:spPr>
           <a:xfrm>
-            <a:off x="7658100" y="7946136"/>
-            <a:ext cx="3204972" cy="566928"/>
+            <a:off x="7658100" y="8065008"/>
+            <a:ext cx="3204972" cy="512064"/>
           </a:xfrm>
           <a:prstGeom prst="roundRect">
             <a:avLst>
-              <a:gd name="adj" fmla="val 12903"/>
+              <a:gd name="adj" fmla="val 14285"/>
             </a:avLst>
           </a:prstGeom>
           <a:solidFill>
@@ -11488,14 +11974,14 @@
       </p:sp>
       <p:sp>
         <p:nvSpPr>
-          <p:cNvPr id="182" name="TextBox 181"/>
+          <p:cNvPr id="195" name="TextBox 194"/>
           <p:cNvSpPr txBox="1"/>
           <p:nvPr/>
         </p:nvSpPr>
         <p:spPr>
           <a:xfrm>
-            <a:off x="7712964" y="7946136"/>
-            <a:ext cx="3095244" cy="566928"/>
+            <a:off x="7712964" y="8065008"/>
+            <a:ext cx="3095244" cy="512064"/>
           </a:xfrm>
           <a:prstGeom prst="rect">
             <a:avLst/>
@@ -11528,18 +12014,18 @@
       </p:sp>
       <p:sp>
         <p:nvSpPr>
-          <p:cNvPr id="183" name="Rounded Rectangle 182"/>
+          <p:cNvPr id="196" name="Rounded Rectangle 195"/>
           <p:cNvSpPr/>
           <p:nvPr/>
         </p:nvSpPr>
         <p:spPr>
           <a:xfrm>
-            <a:off x="11009376" y="7946136"/>
-            <a:ext cx="3204972" cy="566928"/>
+            <a:off x="11009376" y="8065008"/>
+            <a:ext cx="3204972" cy="512064"/>
           </a:xfrm>
           <a:prstGeom prst="roundRect">
             <a:avLst>
-              <a:gd name="adj" fmla="val 12903"/>
+              <a:gd name="adj" fmla="val 14285"/>
             </a:avLst>
           </a:prstGeom>
           <a:solidFill>
@@ -11577,14 +12063,14 @@
       </p:sp>
       <p:sp>
         <p:nvSpPr>
-          <p:cNvPr id="184" name="TextBox 183"/>
+          <p:cNvPr id="197" name="TextBox 196"/>
           <p:cNvSpPr txBox="1"/>
           <p:nvPr/>
         </p:nvSpPr>
         <p:spPr>
           <a:xfrm>
-            <a:off x="11064240" y="7946136"/>
-            <a:ext cx="3095244" cy="566928"/>
+            <a:off x="11064240" y="8065008"/>
+            <a:ext cx="3095244" cy="512064"/>
           </a:xfrm>
           <a:prstGeom prst="rect">
             <a:avLst/>
@@ -11617,18 +12103,18 @@
       </p:sp>
       <p:sp>
         <p:nvSpPr>
-          <p:cNvPr id="185" name="Rounded Rectangle 184"/>
+          <p:cNvPr id="198" name="Rounded Rectangle 197"/>
           <p:cNvSpPr/>
           <p:nvPr/>
         </p:nvSpPr>
         <p:spPr>
           <a:xfrm>
-            <a:off x="14360652" y="7946136"/>
-            <a:ext cx="3204972" cy="566928"/>
+            <a:off x="14360652" y="8065008"/>
+            <a:ext cx="3204972" cy="512064"/>
           </a:xfrm>
           <a:prstGeom prst="roundRect">
             <a:avLst>
-              <a:gd name="adj" fmla="val 12903"/>
+              <a:gd name="adj" fmla="val 14285"/>
             </a:avLst>
           </a:prstGeom>
           <a:solidFill>
@@ -11663,14 +12149,14 @@
       </p:sp>
       <p:sp>
         <p:nvSpPr>
-          <p:cNvPr id="186" name="TextBox 185"/>
+          <p:cNvPr id="199" name="TextBox 198"/>
           <p:cNvSpPr txBox="1"/>
           <p:nvPr/>
         </p:nvSpPr>
         <p:spPr>
           <a:xfrm>
-            <a:off x="14415516" y="7946136"/>
-            <a:ext cx="3095244" cy="566928"/>
+            <a:off x="14415516" y="8065008"/>
+            <a:ext cx="3095244" cy="512064"/>
           </a:xfrm>
           <a:prstGeom prst="rect">
             <a:avLst/>
@@ -11703,7 +12189,7 @@
       </p:sp>
       <p:sp>
         <p:nvSpPr>
-          <p:cNvPr id="187" name="Rectangle 186"/>
+          <p:cNvPr id="200" name="Rectangle 199"/>
           <p:cNvSpPr/>
           <p:nvPr/>
         </p:nvSpPr>
@@ -11747,7 +12233,7 @@
       </p:sp>
       <p:sp>
         <p:nvSpPr>
-          <p:cNvPr id="188" name="TextBox 187"/>
+          <p:cNvPr id="201" name="TextBox 200"/>
           <p:cNvSpPr txBox="1"/>
           <p:nvPr/>
         </p:nvSpPr>
@@ -11787,7 +12273,7 @@
       </p:sp>
       <p:sp>
         <p:nvSpPr>
-          <p:cNvPr id="189" name="TextBox 188"/>
+          <p:cNvPr id="202" name="TextBox 201"/>
           <p:cNvSpPr txBox="1"/>
           <p:nvPr/>
         </p:nvSpPr>
@@ -11827,7 +12313,7 @@
       </p:sp>
       <p:sp>
         <p:nvSpPr>
-          <p:cNvPr id="190" name="TextBox 189"/>
+          <p:cNvPr id="203" name="TextBox 202"/>
           <p:cNvSpPr txBox="1"/>
           <p:nvPr/>
         </p:nvSpPr>
@@ -11860,14 +12346,14 @@
                 <a:latin typeface="Arial"/>
                 <a:ea typeface="Arial"/>
               </a:rPr>
-              <a:t>출처: 2030 수요 · (비중) McKinsey(2024-12, 범용은 산술, 상세 5장) · HBM 과제팀 집계 · 공유 SSD p99 FlashBlox(FAST'17) · GPU당 대역 NVIDIA SuperPOD(환산) · KV 실측 StorageReview(2026-08) · AI 전용 Kioxia · DapuStor · 에이전트 Google · Muse 관측(제3자) · 제품군 Kioxia FL6 · LC9, Solidigm PS1010 · PS1030</a:t>
-            </a:r>
-          </a:p>
-        </p:txBody>
-      </p:sp>
-      <p:sp>
-        <p:nvSpPr>
-          <p:cNvPr id="191" name="TextBox 190"/>
+              <a:t>출처: 수요 비중 McKinsey(2024-12, 2026은 보간 · 범용은 산술, 상세 5장) · HBM 과제팀 집계 · 공유 SSD p99 FlashBlox(FAST'17) · GPU당 대역 NVIDIA SuperPOD(환산) · KV 실측 StorageReview(2026-08) · AI 전용 Kioxia · DapuStor · 에이전트 Google · Muse 관측(제3자) · 제품군 Kioxia FL6 · LC9, Solidigm PS1010 · PS1030</a:t>
+            </a:r>
+          </a:p>
+        </p:txBody>
+      </p:sp>
+      <p:sp>
+        <p:nvSpPr>
+          <p:cNvPr id="204" name="TextBox 203"/>
           <p:cNvSpPr txBox="1"/>
           <p:nvPr/>
         </p:nvSpPr>

--- a/outputs/presentation/ssd-future-ready-strategy.pptx
+++ b/outputs/presentation/ssd-future-ready-strategy.pptx
@@ -9283,8 +9283,8 @@
         </p:nvSpPr>
         <p:spPr>
           <a:xfrm>
-            <a:off x="722376" y="5321808"/>
-            <a:ext cx="3273552" cy="274320"/>
+            <a:off x="722376" y="5650992"/>
+            <a:ext cx="2651760" cy="274320"/>
           </a:xfrm>
           <a:prstGeom prst="rect">
             <a:avLst/>
@@ -9297,6 +9297,46 @@
           </a:bodyPr>
           <a:lstStyle/>
           <a:p>
+            <a:pPr algn="l">
+              <a:lnSpc>
+                <a:spcPct val="110000"/>
+              </a:lnSpc>
+            </a:pPr>
+            <a:r>
+              <a:rPr sz="1500" b="0">
+                <a:solidFill>
+                  <a:srgbClr val="555555"/>
+                </a:solidFill>
+                <a:latin typeface="Arial"/>
+                <a:ea typeface="Arial"/>
+              </a:rPr>
+              <a:t>출처: McKinsey 2024-12</a:t>
+            </a:r>
+          </a:p>
+        </p:txBody>
+      </p:sp>
+      <p:sp>
+        <p:nvSpPr>
+          <p:cNvPr id="134" name="TextBox 133"/>
+          <p:cNvSpPr txBox="1"/>
+          <p:nvPr/>
+        </p:nvSpPr>
+        <p:spPr>
+          <a:xfrm>
+            <a:off x="722376" y="5321808"/>
+            <a:ext cx="3273552" cy="274320"/>
+          </a:xfrm>
+          <a:prstGeom prst="rect">
+            <a:avLst/>
+          </a:prstGeom>
+          <a:noFill/>
+        </p:spPr>
+        <p:txBody>
+          <a:bodyPr wrap="square" anchor="ctr" lIns="0" rIns="0" tIns="0" bIns="0">
+            <a:spAutoFit/>
+          </a:bodyPr>
+          <a:lstStyle/>
+          <a:p>
             <a:pPr algn="r">
               <a:lnSpc>
                 <a:spcPct val="110000"/>
@@ -9317,7 +9357,7 @@
       </p:sp>
       <p:sp>
         <p:nvSpPr>
-          <p:cNvPr id="134" name="Rectangle 133"/>
+          <p:cNvPr id="135" name="Rectangle 134"/>
           <p:cNvSpPr/>
           <p:nvPr/>
         </p:nvSpPr>
@@ -9363,7 +9403,7 @@
       </p:sp>
       <p:sp>
         <p:nvSpPr>
-          <p:cNvPr id="135" name="TextBox 134"/>
+          <p:cNvPr id="136" name="TextBox 135"/>
           <p:cNvSpPr txBox="1"/>
           <p:nvPr/>
         </p:nvSpPr>
@@ -9403,7 +9443,7 @@
       </p:sp>
       <p:sp>
         <p:nvSpPr>
-          <p:cNvPr id="136" name="Rectangle 135"/>
+          <p:cNvPr id="137" name="Rectangle 136"/>
           <p:cNvSpPr/>
           <p:nvPr/>
         </p:nvSpPr>
@@ -9449,7 +9489,7 @@
       </p:sp>
       <p:sp>
         <p:nvSpPr>
-          <p:cNvPr id="137" name="TextBox 136"/>
+          <p:cNvPr id="138" name="TextBox 137"/>
           <p:cNvSpPr txBox="1"/>
           <p:nvPr/>
         </p:nvSpPr>
@@ -9489,7 +9529,7 @@
       </p:sp>
       <p:sp>
         <p:nvSpPr>
-          <p:cNvPr id="138" name="Rectangle 137"/>
+          <p:cNvPr id="139" name="Rectangle 138"/>
           <p:cNvSpPr/>
           <p:nvPr/>
         </p:nvSpPr>
@@ -9535,7 +9575,7 @@
       </p:sp>
       <p:sp>
         <p:nvSpPr>
-          <p:cNvPr id="139" name="TextBox 138"/>
+          <p:cNvPr id="140" name="TextBox 139"/>
           <p:cNvSpPr txBox="1"/>
           <p:nvPr/>
         </p:nvSpPr>
@@ -9575,7 +9615,7 @@
       </p:sp>
       <p:sp>
         <p:nvSpPr>
-          <p:cNvPr id="140" name="TextBox 139"/>
+          <p:cNvPr id="141" name="TextBox 140"/>
           <p:cNvSpPr txBox="1"/>
           <p:nvPr/>
         </p:nvSpPr>
@@ -9615,7 +9655,7 @@
       </p:sp>
       <p:sp>
         <p:nvSpPr>
-          <p:cNvPr id="141" name="TextBox 140"/>
+          <p:cNvPr id="142" name="TextBox 141"/>
           <p:cNvSpPr txBox="1"/>
           <p:nvPr/>
         </p:nvSpPr>
@@ -9655,7 +9695,7 @@
       </p:sp>
       <p:sp>
         <p:nvSpPr>
-          <p:cNvPr id="142" name="Rectangle 141"/>
+          <p:cNvPr id="143" name="Rectangle 142"/>
           <p:cNvSpPr/>
           <p:nvPr/>
         </p:nvSpPr>
@@ -9701,7 +9741,7 @@
       </p:sp>
       <p:sp>
         <p:nvSpPr>
-          <p:cNvPr id="143" name="TextBox 142"/>
+          <p:cNvPr id="144" name="TextBox 143"/>
           <p:cNvSpPr txBox="1"/>
           <p:nvPr/>
         </p:nvSpPr>
@@ -9741,7 +9781,7 @@
       </p:sp>
       <p:sp>
         <p:nvSpPr>
-          <p:cNvPr id="144" name="Rectangle 143"/>
+          <p:cNvPr id="145" name="Rectangle 144"/>
           <p:cNvSpPr/>
           <p:nvPr/>
         </p:nvSpPr>
@@ -9787,7 +9827,7 @@
       </p:sp>
       <p:sp>
         <p:nvSpPr>
-          <p:cNvPr id="145" name="TextBox 144"/>
+          <p:cNvPr id="146" name="TextBox 145"/>
           <p:cNvSpPr txBox="1"/>
           <p:nvPr/>
         </p:nvSpPr>
@@ -9827,7 +9867,7 @@
       </p:sp>
       <p:sp>
         <p:nvSpPr>
-          <p:cNvPr id="146" name="Rectangle 145"/>
+          <p:cNvPr id="147" name="Rectangle 146"/>
           <p:cNvSpPr/>
           <p:nvPr/>
         </p:nvSpPr>
@@ -9873,7 +9913,7 @@
       </p:sp>
       <p:sp>
         <p:nvSpPr>
-          <p:cNvPr id="147" name="TextBox 146"/>
+          <p:cNvPr id="148" name="TextBox 147"/>
           <p:cNvSpPr txBox="1"/>
           <p:nvPr/>
         </p:nvSpPr>
@@ -9913,7 +9953,7 @@
       </p:sp>
       <p:sp>
         <p:nvSpPr>
-          <p:cNvPr id="148" name="TextBox 147"/>
+          <p:cNvPr id="149" name="TextBox 148"/>
           <p:cNvSpPr txBox="1"/>
           <p:nvPr/>
         </p:nvSpPr>
@@ -9953,7 +9993,7 @@
       </p:sp>
       <p:sp>
         <p:nvSpPr>
-          <p:cNvPr id="149" name="TextBox 148"/>
+          <p:cNvPr id="150" name="TextBox 149"/>
           <p:cNvSpPr txBox="1"/>
           <p:nvPr/>
         </p:nvSpPr>
@@ -10003,7 +10043,7 @@
       </p:sp>
       <p:sp>
         <p:nvSpPr>
-          <p:cNvPr id="150" name="TextBox 149"/>
+          <p:cNvPr id="151" name="TextBox 150"/>
           <p:cNvSpPr txBox="1"/>
           <p:nvPr/>
         </p:nvSpPr>
@@ -10073,7 +10113,7 @@
       </p:sp>
       <p:sp>
         <p:nvSpPr>
-          <p:cNvPr id="151" name="Rounded Rectangle 150"/>
+          <p:cNvPr id="152" name="Rounded Rectangle 151"/>
           <p:cNvSpPr/>
           <p:nvPr/>
         </p:nvSpPr>
@@ -10119,7 +10159,7 @@
       </p:sp>
       <p:sp>
         <p:nvSpPr>
-          <p:cNvPr id="152" name="TextBox 151"/>
+          <p:cNvPr id="153" name="TextBox 152"/>
           <p:cNvSpPr txBox="1"/>
           <p:nvPr/>
         </p:nvSpPr>
@@ -10159,7 +10199,7 @@
       </p:sp>
       <p:sp>
         <p:nvSpPr>
-          <p:cNvPr id="153" name="TextBox 152"/>
+          <p:cNvPr id="154" name="TextBox 153"/>
           <p:cNvSpPr txBox="1"/>
           <p:nvPr/>
         </p:nvSpPr>
@@ -10199,7 +10239,7 @@
       </p:sp>
       <p:sp>
         <p:nvSpPr>
-          <p:cNvPr id="154" name="Rectangle 153"/>
+          <p:cNvPr id="155" name="Rectangle 154"/>
           <p:cNvSpPr/>
           <p:nvPr/>
         </p:nvSpPr>
@@ -10243,7 +10283,7 @@
       </p:sp>
       <p:sp>
         <p:nvSpPr>
-          <p:cNvPr id="155" name="Rectangle 154"/>
+          <p:cNvPr id="156" name="Rectangle 155"/>
           <p:cNvSpPr/>
           <p:nvPr/>
         </p:nvSpPr>
@@ -10287,7 +10327,7 @@
       </p:sp>
       <p:sp>
         <p:nvSpPr>
-          <p:cNvPr id="156" name="TextBox 155"/>
+          <p:cNvPr id="157" name="TextBox 156"/>
           <p:cNvSpPr txBox="1"/>
           <p:nvPr/>
         </p:nvSpPr>
@@ -10327,7 +10367,7 @@
       </p:sp>
       <p:sp>
         <p:nvSpPr>
-          <p:cNvPr id="157" name="Rounded Rectangle 156"/>
+          <p:cNvPr id="158" name="Rounded Rectangle 157"/>
           <p:cNvSpPr/>
           <p:nvPr/>
         </p:nvSpPr>
@@ -10373,7 +10413,7 @@
       </p:sp>
       <p:sp>
         <p:nvSpPr>
-          <p:cNvPr id="158" name="Rounded Rectangle 157"/>
+          <p:cNvPr id="159" name="Rounded Rectangle 158"/>
           <p:cNvSpPr/>
           <p:nvPr/>
         </p:nvSpPr>
@@ -10419,7 +10459,7 @@
       </p:sp>
       <p:sp>
         <p:nvSpPr>
-          <p:cNvPr id="159" name="Rounded Rectangle 158"/>
+          <p:cNvPr id="160" name="Rounded Rectangle 159"/>
           <p:cNvSpPr/>
           <p:nvPr/>
         </p:nvSpPr>
@@ -10468,7 +10508,7 @@
       </p:sp>
       <p:sp>
         <p:nvSpPr>
-          <p:cNvPr id="160" name="TextBox 159"/>
+          <p:cNvPr id="161" name="TextBox 160"/>
           <p:cNvSpPr txBox="1"/>
           <p:nvPr/>
         </p:nvSpPr>
@@ -10508,7 +10548,7 @@
       </p:sp>
       <p:sp>
         <p:nvSpPr>
-          <p:cNvPr id="161" name="Rounded Rectangle 160"/>
+          <p:cNvPr id="162" name="Rounded Rectangle 161"/>
           <p:cNvSpPr/>
           <p:nvPr/>
         </p:nvSpPr>
@@ -10554,7 +10594,7 @@
       </p:sp>
       <p:sp>
         <p:nvSpPr>
-          <p:cNvPr id="162" name="Rounded Rectangle 161"/>
+          <p:cNvPr id="163" name="Rounded Rectangle 162"/>
           <p:cNvSpPr/>
           <p:nvPr/>
         </p:nvSpPr>
@@ -10600,7 +10640,7 @@
       </p:sp>
       <p:sp>
         <p:nvSpPr>
-          <p:cNvPr id="163" name="TextBox 162"/>
+          <p:cNvPr id="164" name="TextBox 163"/>
           <p:cNvSpPr txBox="1"/>
           <p:nvPr/>
         </p:nvSpPr>
@@ -10640,7 +10680,7 @@
       </p:sp>
       <p:sp>
         <p:nvSpPr>
-          <p:cNvPr id="164" name="TextBox 163"/>
+          <p:cNvPr id="165" name="TextBox 164"/>
           <p:cNvSpPr txBox="1"/>
           <p:nvPr/>
         </p:nvSpPr>
@@ -10680,7 +10720,7 @@
       </p:sp>
       <p:sp>
         <p:nvSpPr>
-          <p:cNvPr id="165" name="Rectangle 164"/>
+          <p:cNvPr id="166" name="Rectangle 165"/>
           <p:cNvSpPr/>
           <p:nvPr/>
         </p:nvSpPr>
@@ -10724,7 +10764,7 @@
       </p:sp>
       <p:sp>
         <p:nvSpPr>
-          <p:cNvPr id="166" name="TextBox 165"/>
+          <p:cNvPr id="167" name="TextBox 166"/>
           <p:cNvSpPr txBox="1"/>
           <p:nvPr/>
         </p:nvSpPr>
@@ -10764,7 +10804,7 @@
       </p:sp>
       <p:sp>
         <p:nvSpPr>
-          <p:cNvPr id="167" name="Rounded Rectangle 166"/>
+          <p:cNvPr id="168" name="Rounded Rectangle 167"/>
           <p:cNvSpPr/>
           <p:nvPr/>
         </p:nvSpPr>
@@ -10810,7 +10850,7 @@
       </p:sp>
       <p:sp>
         <p:nvSpPr>
-          <p:cNvPr id="168" name="Rounded Rectangle 167"/>
+          <p:cNvPr id="169" name="Rounded Rectangle 168"/>
           <p:cNvSpPr/>
           <p:nvPr/>
         </p:nvSpPr>
@@ -10859,7 +10899,7 @@
       </p:sp>
       <p:sp>
         <p:nvSpPr>
-          <p:cNvPr id="169" name="TextBox 168"/>
+          <p:cNvPr id="170" name="TextBox 169"/>
           <p:cNvSpPr txBox="1"/>
           <p:nvPr/>
         </p:nvSpPr>
@@ -10899,7 +10939,7 @@
       </p:sp>
       <p:sp>
         <p:nvSpPr>
-          <p:cNvPr id="170" name="Rounded Rectangle 169"/>
+          <p:cNvPr id="171" name="Rounded Rectangle 170"/>
           <p:cNvSpPr/>
           <p:nvPr/>
         </p:nvSpPr>
@@ -10945,7 +10985,7 @@
       </p:sp>
       <p:sp>
         <p:nvSpPr>
-          <p:cNvPr id="171" name="TextBox 170"/>
+          <p:cNvPr id="172" name="TextBox 171"/>
           <p:cNvSpPr txBox="1"/>
           <p:nvPr/>
         </p:nvSpPr>
@@ -10985,7 +11025,7 @@
       </p:sp>
       <p:sp>
         <p:nvSpPr>
-          <p:cNvPr id="172" name="Rounded Rectangle 171"/>
+          <p:cNvPr id="173" name="Rounded Rectangle 172"/>
           <p:cNvSpPr/>
           <p:nvPr/>
         </p:nvSpPr>
@@ -11031,7 +11071,7 @@
       </p:sp>
       <p:sp>
         <p:nvSpPr>
-          <p:cNvPr id="173" name="Rounded Rectangle 172"/>
+          <p:cNvPr id="174" name="Rounded Rectangle 173"/>
           <p:cNvSpPr/>
           <p:nvPr/>
         </p:nvSpPr>
@@ -11077,7 +11117,7 @@
       </p:sp>
       <p:sp>
         <p:nvSpPr>
-          <p:cNvPr id="174" name="TextBox 173"/>
+          <p:cNvPr id="175" name="TextBox 174"/>
           <p:cNvSpPr txBox="1"/>
           <p:nvPr/>
         </p:nvSpPr>
@@ -11117,7 +11157,7 @@
       </p:sp>
       <p:sp>
         <p:nvSpPr>
-          <p:cNvPr id="175" name="TextBox 174"/>
+          <p:cNvPr id="176" name="TextBox 175"/>
           <p:cNvSpPr txBox="1"/>
           <p:nvPr/>
         </p:nvSpPr>
@@ -11157,7 +11197,7 @@
       </p:sp>
       <p:sp>
         <p:nvSpPr>
-          <p:cNvPr id="176" name="Rectangle 175"/>
+          <p:cNvPr id="177" name="Rectangle 176"/>
           <p:cNvSpPr/>
           <p:nvPr/>
         </p:nvSpPr>
@@ -11201,7 +11241,7 @@
       </p:sp>
       <p:sp>
         <p:nvSpPr>
-          <p:cNvPr id="177" name="TextBox 176"/>
+          <p:cNvPr id="178" name="TextBox 177"/>
           <p:cNvSpPr txBox="1"/>
           <p:nvPr/>
         </p:nvSpPr>
@@ -11241,7 +11281,7 @@
       </p:sp>
       <p:sp>
         <p:nvSpPr>
-          <p:cNvPr id="178" name="Rounded Rectangle 177"/>
+          <p:cNvPr id="179" name="Rounded Rectangle 178"/>
           <p:cNvSpPr/>
           <p:nvPr/>
         </p:nvSpPr>
@@ -11287,7 +11327,7 @@
       </p:sp>
       <p:sp>
         <p:nvSpPr>
-          <p:cNvPr id="179" name="TextBox 178"/>
+          <p:cNvPr id="180" name="TextBox 179"/>
           <p:cNvSpPr txBox="1"/>
           <p:nvPr/>
         </p:nvSpPr>
@@ -11327,7 +11367,7 @@
       </p:sp>
       <p:sp>
         <p:nvSpPr>
-          <p:cNvPr id="180" name="Rounded Rectangle 179"/>
+          <p:cNvPr id="181" name="Rounded Rectangle 180"/>
           <p:cNvSpPr/>
           <p:nvPr/>
         </p:nvSpPr>
@@ -11373,7 +11413,7 @@
       </p:sp>
       <p:sp>
         <p:nvSpPr>
-          <p:cNvPr id="181" name="TextBox 180"/>
+          <p:cNvPr id="182" name="TextBox 181"/>
           <p:cNvSpPr txBox="1"/>
           <p:nvPr/>
         </p:nvSpPr>
@@ -11413,7 +11453,7 @@
       </p:sp>
       <p:sp>
         <p:nvSpPr>
-          <p:cNvPr id="182" name="Rounded Rectangle 181"/>
+          <p:cNvPr id="183" name="Rounded Rectangle 182"/>
           <p:cNvSpPr/>
           <p:nvPr/>
         </p:nvSpPr>
@@ -11459,7 +11499,7 @@
       </p:sp>
       <p:sp>
         <p:nvSpPr>
-          <p:cNvPr id="183" name="TextBox 182"/>
+          <p:cNvPr id="184" name="TextBox 183"/>
           <p:cNvSpPr txBox="1"/>
           <p:nvPr/>
         </p:nvSpPr>
@@ -11499,7 +11539,7 @@
       </p:sp>
       <p:sp>
         <p:nvSpPr>
-          <p:cNvPr id="184" name="Rounded Rectangle 183"/>
+          <p:cNvPr id="185" name="Rounded Rectangle 184"/>
           <p:cNvSpPr/>
           <p:nvPr/>
         </p:nvSpPr>
@@ -11548,7 +11588,7 @@
       </p:sp>
       <p:sp>
         <p:nvSpPr>
-          <p:cNvPr id="185" name="TextBox 184"/>
+          <p:cNvPr id="186" name="TextBox 185"/>
           <p:cNvSpPr txBox="1"/>
           <p:nvPr/>
         </p:nvSpPr>
@@ -11588,7 +11628,7 @@
       </p:sp>
       <p:sp>
         <p:nvSpPr>
-          <p:cNvPr id="186" name="Rounded Rectangle 185"/>
+          <p:cNvPr id="187" name="Rounded Rectangle 186"/>
           <p:cNvSpPr/>
           <p:nvPr/>
         </p:nvSpPr>
@@ -11634,7 +11674,7 @@
       </p:sp>
       <p:sp>
         <p:nvSpPr>
-          <p:cNvPr id="187" name="TextBox 186"/>
+          <p:cNvPr id="188" name="TextBox 187"/>
           <p:cNvSpPr txBox="1"/>
           <p:nvPr/>
         </p:nvSpPr>
@@ -11674,7 +11714,7 @@
       </p:sp>
       <p:sp>
         <p:nvSpPr>
-          <p:cNvPr id="188" name="TextBox 187"/>
+          <p:cNvPr id="189" name="TextBox 188"/>
           <p:cNvSpPr txBox="1"/>
           <p:nvPr/>
         </p:nvSpPr>
@@ -11714,7 +11754,7 @@
       </p:sp>
       <p:sp>
         <p:nvSpPr>
-          <p:cNvPr id="189" name="Rectangle 188"/>
+          <p:cNvPr id="190" name="Rectangle 189"/>
           <p:cNvSpPr/>
           <p:nvPr/>
         </p:nvSpPr>
@@ -11758,7 +11798,7 @@
       </p:sp>
       <p:sp>
         <p:nvSpPr>
-          <p:cNvPr id="190" name="Rectangle 189"/>
+          <p:cNvPr id="191" name="Rectangle 190"/>
           <p:cNvSpPr/>
           <p:nvPr/>
         </p:nvSpPr>
@@ -11802,7 +11842,7 @@
       </p:sp>
       <p:sp>
         <p:nvSpPr>
-          <p:cNvPr id="191" name="TextBox 190"/>
+          <p:cNvPr id="192" name="TextBox 191"/>
           <p:cNvSpPr txBox="1"/>
           <p:nvPr/>
         </p:nvSpPr>
@@ -11842,7 +11882,7 @@
       </p:sp>
       <p:sp>
         <p:nvSpPr>
-          <p:cNvPr id="192" name="Rounded Rectangle 191"/>
+          <p:cNvPr id="193" name="Rounded Rectangle 192"/>
           <p:cNvSpPr/>
           <p:nvPr/>
         </p:nvSpPr>
@@ -11888,7 +11928,7 @@
       </p:sp>
       <p:sp>
         <p:nvSpPr>
-          <p:cNvPr id="193" name="TextBox 192"/>
+          <p:cNvPr id="194" name="TextBox 193"/>
           <p:cNvSpPr txBox="1"/>
           <p:nvPr/>
         </p:nvSpPr>
@@ -11928,7 +11968,7 @@
       </p:sp>
       <p:sp>
         <p:nvSpPr>
-          <p:cNvPr id="194" name="Rounded Rectangle 193"/>
+          <p:cNvPr id="195" name="Rounded Rectangle 194"/>
           <p:cNvSpPr/>
           <p:nvPr/>
         </p:nvSpPr>
@@ -11974,7 +12014,7 @@
       </p:sp>
       <p:sp>
         <p:nvSpPr>
-          <p:cNvPr id="195" name="TextBox 194"/>
+          <p:cNvPr id="196" name="TextBox 195"/>
           <p:cNvSpPr txBox="1"/>
           <p:nvPr/>
         </p:nvSpPr>
@@ -12014,7 +12054,7 @@
       </p:sp>
       <p:sp>
         <p:nvSpPr>
-          <p:cNvPr id="196" name="Rounded Rectangle 195"/>
+          <p:cNvPr id="197" name="Rounded Rectangle 196"/>
           <p:cNvSpPr/>
           <p:nvPr/>
         </p:nvSpPr>
@@ -12063,7 +12103,7 @@
       </p:sp>
       <p:sp>
         <p:nvSpPr>
-          <p:cNvPr id="197" name="TextBox 196"/>
+          <p:cNvPr id="198" name="TextBox 197"/>
           <p:cNvSpPr txBox="1"/>
           <p:nvPr/>
         </p:nvSpPr>
@@ -12103,7 +12143,7 @@
       </p:sp>
       <p:sp>
         <p:nvSpPr>
-          <p:cNvPr id="198" name="Rounded Rectangle 197"/>
+          <p:cNvPr id="199" name="Rounded Rectangle 198"/>
           <p:cNvSpPr/>
           <p:nvPr/>
         </p:nvSpPr>
@@ -12149,7 +12189,7 @@
       </p:sp>
       <p:sp>
         <p:nvSpPr>
-          <p:cNvPr id="199" name="TextBox 198"/>
+          <p:cNvPr id="200" name="TextBox 199"/>
           <p:cNvSpPr txBox="1"/>
           <p:nvPr/>
         </p:nvSpPr>
@@ -12189,7 +12229,7 @@
       </p:sp>
       <p:sp>
         <p:nvSpPr>
-          <p:cNvPr id="200" name="Rectangle 199"/>
+          <p:cNvPr id="201" name="Rectangle 200"/>
           <p:cNvSpPr/>
           <p:nvPr/>
         </p:nvSpPr>
@@ -12233,7 +12273,7 @@
       </p:sp>
       <p:sp>
         <p:nvSpPr>
-          <p:cNvPr id="201" name="TextBox 200"/>
+          <p:cNvPr id="202" name="TextBox 201"/>
           <p:cNvSpPr txBox="1"/>
           <p:nvPr/>
         </p:nvSpPr>
@@ -12273,7 +12313,7 @@
       </p:sp>
       <p:sp>
         <p:nvSpPr>
-          <p:cNvPr id="202" name="TextBox 201"/>
+          <p:cNvPr id="203" name="TextBox 202"/>
           <p:cNvSpPr txBox="1"/>
           <p:nvPr/>
         </p:nvSpPr>
@@ -12313,7 +12353,7 @@
       </p:sp>
       <p:sp>
         <p:nvSpPr>
-          <p:cNvPr id="203" name="TextBox 202"/>
+          <p:cNvPr id="204" name="TextBox 203"/>
           <p:cNvSpPr txBox="1"/>
           <p:nvPr/>
         </p:nvSpPr>
@@ -12353,7 +12393,7 @@
       </p:sp>
       <p:sp>
         <p:nvSpPr>
-          <p:cNvPr id="204" name="TextBox 203"/>
+          <p:cNvPr id="205" name="TextBox 204"/>
           <p:cNvSpPr txBox="1"/>
           <p:nvPr/>
         </p:nvSpPr>

--- a/outputs/presentation/ssd-future-ready-strategy.pptx
+++ b/outputs/presentation/ssd-future-ready-strategy.pptx
@@ -717,7 +717,7 @@
           <a:lstStyle/>
           <a:p>
             <a:r>
-              <a:t>4장은 이 전략에서 사업적으로 가장 큰 기회입니다. 질문은 하나입니다. QLC가 1 DWPD에 닿으면, 지금 TLC 수요 가운데 어디까지 들어갈 수 있는가입니다. 그래서 TLC 수요를 왜 TLC를 샀는지로 나눴습니다. 공개된 분할 자료는 없어서 과제팀이 범위로 계산했고, 막대는 중앙 가정입니다. 첫째, 내구 규격만 때문에 TLC인 수요입니다. 오브젝트, 데이터 레이크, CDN, 백업, 배치 분석, AI 학습 데이터처럼 읽기 중심이라 성능은 QLC로 충분한데, 조달 규격이 1 DWPD라서 정격 0.3에서 0.6인 QLC가 빠지는 몫입니다. 2026년 약 100, 2030년 약 190엑사바이트, 시나리오에 따라 2030년 46에서 509엑사바이트입니다. Meta는 지금 TLC 위에 있는 15에서 20 MB/s/TB의 배치 워크로드를 QLC 후보로 꼽았고, 이 부하의 실제 쓰기는 0.26에서 0.35 DWPD 수준입니다. 둘째, 관행과 가격으로 TLC인 몫입니다. Micron 6500 ION처럼 QLC급 가격의 대용량 TLC가 이미 있어 정격보다 가격과 공급, 인증이 결정합니다. 셋째, 성능 때문에 TLC인 몫입니다. 데이터베이스, VM 디스크, 블록 스토리지처럼 지연과 랜덤 쓰기가 중요한 수요로, 가장 큽니다. 고객과 함께 격차를 줄이면 그 가운데 20에서 40퍼센트가 열린다고 보고 점선으로 표시했습니다. 고내구 3 DWPD 이상과 KV 캐시는 이번 대상이 아닙니다. 가운데는 내구입니다. 같은 Micron 6600 ION QLC도 4킬로바이트 랜덤 쓰기면 0.075, 16킬로바이트 랜덤이면 0.3, 128킬로바이트 순차면 1.0 DWPD로 정격이 13배 달라집니다. 고객과 함께 FDP로 쓰기를 크게, 순차로, 수명별로 모으면 QLC가 1 DWPD에 닿습니다. 순차 정격을 실제 부하에서 지키는 것이 과제입니다. 오른쪽은 성능입니다. 내구 규격만 문제인 수요는 성능이 걸림돌이 아닙니다. RAG 검색의 지연 예산은 약 100밀리초인데 QLC 읽기는 약 0.1밀리초라 약 1,000배 여유가 있습니다. 성능 때문에 TLC를 쓰는 수요는 다릅니다. 같은 컨트롤러의 NetApp 어레이에서 TLC는 약 0.5밀리초, QLC는 2에서 4밀리초입니다. 이 격차는 FDP로 GC 간섭을 줄이고, pSLC 버퍼로 쓰기를 흡수해 고객 시스템과 함께 줄입니다. 다만 이 개선의 실측은 TLC 드라이브 기준이고, QLC 위 실측은 고객과 함께 할 첫 검증 과제입니다. 정리하면, 성능이 아니라 규격 때문에 TLC를 쓰던 수요부터 QLC의 원가 우위로 가져옵니다.</a:t>
+              <a:t>4장은 이 전략에서 사업적으로 가장 큰 기회와, 그것을 2장의 핵심 기술 중 무엇으로 여는지입니다. 왼쪽은 TLC 수요를 왜 TLC를 샀는지로 나눈 것입니다. 공개된 분할 자료가 없어 과제팀이 범위로 계산했고, 막대는 중앙 가정입니다. 성능은 QLC로 충분한데 조달 규격이 1 DWPD라서 TLC를 쓰는 몫, 곧 내구 규격만 때문인 수요가 2026년 약 100, 2030년 약 190엑사바이트입니다. 시나리오에 따라 2030년 46에서 509엑사바이트까지 넓습니다. 이 수요는 성능이 걸림돌이 아닙니다. RAG 검색의 지연 예산이 약 100밀리초인데 QLC 읽기는 약 0.1밀리초라 약 1,000배 여유가 있습니다. 성능 때문에 TLC를 쓰는 몫은 격차를 줄이면 일부가 열리고, 고내구와 KV 캐시는 이번 대상이 아닙니다. 오른쪽은 어떻게 QLC를 1 DWPD로 올리는지입니다. 같은 Micron 6600 ION QLC도 4킬로바이트 랜덤이면 0.075, 큰 단위면 0.3, 순차면 1.0 DWPD로 정격이 쓰기 모양에 따라 달라집니다. 이 계단을 2장의 핵심 기술 두 가지로 오릅니다. 첫째, Mixed Media입니다. 작은 쓰기를 pSLC 영역에 모았다가 큰 덩어리로 QLC에 내려, 매핑 단위보다 작은 쓰기의 증폭을 없앱니다. CSAL 백서에서는 4킬로바이트 쓰기의 WAF가 70 이상에서 1.02로 내려갔고, 고객이 요구한 pSLC 비율은 QLC 용량의 0.5에서 2퍼센트입니다. pSLC가 쓰기 지연과 대역도 흡수합니다. Mixed Media는 표준 네임스페이스와 출하 시 정하는 비율로 동작해 스펙으로 협력할 수 있으므로, 2026년과 2027년에 바로 실행할 수 있는 단기 전략입니다. 둘째, FDP입니다. 고객 호스트가 데이터의 수명을 알려 주면 같은 수명의 데이터끼리 같은 블록에 모여 GC가 옮길 데이터가 거의 사라집니다. WAF를 근원적으로 1에 가깝게 낮추는 기술이고, CacheLib에서 3.22가 1.03이 됐습니다. GC 간섭이 줄어 꼬리 지연도 줄어듭니다. 다만 FDP의 효과는 고객 소프트웨어가 수명을 얼마나 잘 나누는지에 달려 있어 고객과 함께 설계해야 하므로, 2028년 전후의 중장기에 기여합니다. 보조로 Large Mapping과 Multi-Tenant QoS가 함께 쓰이고, Fault Tolerant와 Confidential Storage는 이 기회와 직접 관계가 없습니다. 계단과 기술의 대응은 과제팀의 해석이며, QLC 위에서의 실측은 고객과 함께 할 첫 검증 과제입니다. 정리하면, 단기에는 Mixed Media로 모아 쓰고, 중장기에는 고객과 FDP로 WAF를 근원적으로 낮춰, 규격 때문에 TLC를 쓰던 수요부터 QLC의 원가 우위로 가져옵니다.</a:t>
             </a:r>
           </a:p>
         </p:txBody>
@@ -22176,7 +22176,7 @@
                 <a:latin typeface="Arial"/>
                 <a:ea typeface="Arial"/>
               </a:rPr>
-              <a:t>TLC 수요의 약 4분의 1은 성능이 아니라 내구 규격 때문에 TLC이므로,</a:t>
+              <a:t>TLC 수요의 약 4분의 1은 내구 규격 때문에 TLC이므로,</a:t>
             </a:r>
           </a:p>
           <a:p>
@@ -22193,7 +22193,7 @@
                 <a:latin typeface="Arial"/>
                 <a:ea typeface="Arial"/>
               </a:rPr>
-              <a:t>QLC를 고객과 함께 1 DWPD로 올리면 이 몫부터 열립니다</a:t>
+              <a:t>Mixed Media로 모아 쓰고 FDP로 WAF를 낮춰 QLC를 1 DWPD로 올립니다</a:t>
             </a:r>
           </a:p>
         </p:txBody>
@@ -22335,7 +22335,7 @@
         <p:spPr>
           <a:xfrm>
             <a:off x="1307592" y="2103120"/>
-            <a:ext cx="6821423" cy="512063"/>
+            <a:ext cx="5541264" cy="512063"/>
           </a:xfrm>
           <a:prstGeom prst="rect">
             <a:avLst/>
@@ -22375,7 +22375,7 @@
         <p:spPr>
           <a:xfrm>
             <a:off x="722376" y="2743200"/>
-            <a:ext cx="7406640" cy="329184"/>
+            <a:ext cx="6126480" cy="329184"/>
           </a:xfrm>
           <a:prstGeom prst="rect">
             <a:avLst/>
@@ -22411,7 +22411,7 @@
                 <a:latin typeface="Arial"/>
                 <a:ea typeface="Arial"/>
               </a:rPr>
-              <a:t>중앙 가정 · 과제팀 산술</a:t>
+              <a:t>중앙 가정 · 산술</a:t>
             </a:r>
           </a:p>
         </p:txBody>
@@ -22424,8 +22424,8 @@
         </p:nvSpPr>
         <p:spPr>
           <a:xfrm>
-            <a:off x="996696" y="7504700"/>
-            <a:ext cx="1188720" cy="523731"/>
+            <a:off x="905256" y="7065733"/>
+            <a:ext cx="960120" cy="468922"/>
           </a:xfrm>
           <a:prstGeom prst="rect">
             <a:avLst/>
@@ -22470,8 +22470,8 @@
         </p:nvSpPr>
         <p:spPr>
           <a:xfrm>
-            <a:off x="996696" y="7504700"/>
-            <a:ext cx="1188720" cy="523731"/>
+            <a:off x="905256" y="7065733"/>
+            <a:ext cx="960120" cy="468922"/>
           </a:xfrm>
           <a:prstGeom prst="rect">
             <a:avLst/>
@@ -22510,8 +22510,8 @@
         </p:nvSpPr>
         <p:spPr>
           <a:xfrm>
-            <a:off x="996696" y="7280318"/>
-            <a:ext cx="1188720" cy="224381"/>
+            <a:off x="905256" y="6864833"/>
+            <a:ext cx="960120" cy="200899"/>
           </a:xfrm>
           <a:prstGeom prst="rect">
             <a:avLst/>
@@ -22556,8 +22556,8 @@
         </p:nvSpPr>
         <p:spPr>
           <a:xfrm>
-            <a:off x="996696" y="6366016"/>
-            <a:ext cx="1188720" cy="914302"/>
+            <a:off x="905256" y="6046213"/>
+            <a:ext cx="960120" cy="818619"/>
           </a:xfrm>
           <a:prstGeom prst="rect">
             <a:avLst/>
@@ -22602,8 +22602,8 @@
         </p:nvSpPr>
         <p:spPr>
           <a:xfrm>
-            <a:off x="1051560" y="6942029"/>
-            <a:ext cx="1078992" cy="310856"/>
+            <a:off x="960120" y="6564817"/>
+            <a:ext cx="850392" cy="272583"/>
           </a:xfrm>
           <a:prstGeom prst="rect">
             <a:avLst/>
@@ -22647,8 +22647,8 @@
         </p:nvSpPr>
         <p:spPr>
           <a:xfrm>
-            <a:off x="996696" y="6025774"/>
-            <a:ext cx="1188720" cy="340242"/>
+            <a:off x="905256" y="5741578"/>
+            <a:ext cx="960120" cy="304635"/>
           </a:xfrm>
           <a:prstGeom prst="rect">
             <a:avLst/>
@@ -22693,8 +22693,8 @@
         </p:nvSpPr>
         <p:spPr>
           <a:xfrm>
-            <a:off x="996696" y="5842284"/>
-            <a:ext cx="1188720" cy="183489"/>
+            <a:off x="905256" y="5577291"/>
+            <a:ext cx="960120" cy="164287"/>
           </a:xfrm>
           <a:prstGeom prst="rect">
             <a:avLst/>
@@ -22739,8 +22739,8 @@
         </p:nvSpPr>
         <p:spPr>
           <a:xfrm>
-            <a:off x="722376" y="5476524"/>
-            <a:ext cx="1737360" cy="329184"/>
+            <a:off x="630936" y="5211531"/>
+            <a:ext cx="1508760" cy="329184"/>
           </a:xfrm>
           <a:prstGeom prst="rect">
             <a:avLst/>
@@ -22779,8 +22779,8 @@
         </p:nvSpPr>
         <p:spPr>
           <a:xfrm>
-            <a:off x="722376" y="8065007"/>
-            <a:ext cx="1737360" cy="274320"/>
+            <a:off x="630936" y="7571231"/>
+            <a:ext cx="1508760" cy="274320"/>
           </a:xfrm>
           <a:prstGeom prst="rect">
             <a:avLst/>
@@ -22819,8 +22819,8 @@
         </p:nvSpPr>
         <p:spPr>
           <a:xfrm>
-            <a:off x="3328416" y="7020811"/>
-            <a:ext cx="1188720" cy="1007620"/>
+            <a:off x="2825496" y="6632484"/>
+            <a:ext cx="960120" cy="902171"/>
           </a:xfrm>
           <a:prstGeom prst="rect">
             <a:avLst/>
@@ -22865,8 +22865,8 @@
         </p:nvSpPr>
         <p:spPr>
           <a:xfrm>
-            <a:off x="3328416" y="7020811"/>
-            <a:ext cx="1188720" cy="1007620"/>
+            <a:off x="2825496" y="6632484"/>
+            <a:ext cx="960120" cy="902171"/>
           </a:xfrm>
           <a:prstGeom prst="rect">
             <a:avLst/>
@@ -22905,8 +22905,8 @@
         </p:nvSpPr>
         <p:spPr>
           <a:xfrm>
-            <a:off x="3328416" y="6684763"/>
-            <a:ext cx="1188720" cy="336048"/>
+            <a:off x="2825496" y="6331604"/>
+            <a:ext cx="960120" cy="300880"/>
           </a:xfrm>
           <a:prstGeom prst="rect">
             <a:avLst/>
@@ -22951,8 +22951,8 @@
         </p:nvSpPr>
         <p:spPr>
           <a:xfrm>
-            <a:off x="3328416" y="5042794"/>
-            <a:ext cx="1188720" cy="1641969"/>
+            <a:off x="2825496" y="4861468"/>
+            <a:ext cx="960120" cy="1470135"/>
           </a:xfrm>
           <a:prstGeom prst="rect">
             <a:avLst/>
@@ -22997,8 +22997,8 @@
         </p:nvSpPr>
         <p:spPr>
           <a:xfrm>
-            <a:off x="3383280" y="6055407"/>
-            <a:ext cx="1078992" cy="601923"/>
+            <a:off x="2880360" y="5770982"/>
+            <a:ext cx="850392" cy="533190"/>
           </a:xfrm>
           <a:prstGeom prst="rect">
             <a:avLst/>
@@ -23042,8 +23042,8 @@
         </p:nvSpPr>
         <p:spPr>
           <a:xfrm>
-            <a:off x="3328416" y="4515916"/>
-            <a:ext cx="1188720" cy="526877"/>
+            <a:off x="2825496" y="4389729"/>
+            <a:ext cx="960120" cy="471738"/>
           </a:xfrm>
           <a:prstGeom prst="rect">
             <a:avLst/>
@@ -23088,8 +23088,8 @@
         </p:nvSpPr>
         <p:spPr>
           <a:xfrm>
-            <a:off x="3328416" y="3467404"/>
-            <a:ext cx="1188720" cy="1048511"/>
+            <a:off x="2825496" y="3450945"/>
+            <a:ext cx="960120" cy="938783"/>
           </a:xfrm>
           <a:prstGeom prst="rect">
             <a:avLst/>
@@ -23134,8 +23134,8 @@
         </p:nvSpPr>
         <p:spPr>
           <a:xfrm>
-            <a:off x="3054096" y="3101644"/>
-            <a:ext cx="1737360" cy="329184"/>
+            <a:off x="2551176" y="3085185"/>
+            <a:ext cx="1508760" cy="329184"/>
           </a:xfrm>
           <a:prstGeom prst="rect">
             <a:avLst/>
@@ -23174,8 +23174,8 @@
         </p:nvSpPr>
         <p:spPr>
           <a:xfrm>
-            <a:off x="3054096" y="8065007"/>
-            <a:ext cx="1737360" cy="274320"/>
+            <a:off x="2551176" y="7571231"/>
+            <a:ext cx="1508760" cy="274320"/>
           </a:xfrm>
           <a:prstGeom prst="rect">
             <a:avLst/>
@@ -23214,8 +23214,8 @@
         </p:nvSpPr>
         <p:spPr>
           <a:xfrm>
-            <a:off x="2276856" y="7110984"/>
-            <a:ext cx="27432" cy="692017"/>
+            <a:off x="1956816" y="6713220"/>
+            <a:ext cx="27432" cy="619597"/>
           </a:xfrm>
           <a:prstGeom prst="rect">
             <a:avLst/>
@@ -23258,7 +23258,7 @@
         </p:nvSpPr>
         <p:spPr>
           <a:xfrm>
-            <a:off x="2221992" y="7110984"/>
+            <a:off x="1901952" y="6713220"/>
             <a:ext cx="137160" cy="27432"/>
           </a:xfrm>
           <a:prstGeom prst="rect">
@@ -23302,7 +23302,7 @@
         </p:nvSpPr>
         <p:spPr>
           <a:xfrm>
-            <a:off x="2221992" y="7775569"/>
+            <a:off x="1901952" y="7305385"/>
             <a:ext cx="137160" cy="27432"/>
           </a:xfrm>
           <a:prstGeom prst="rect">
@@ -23346,7 +23346,7 @@
         </p:nvSpPr>
         <p:spPr>
           <a:xfrm>
-            <a:off x="2386584" y="7092696"/>
+            <a:off x="2066544" y="6694932"/>
             <a:ext cx="822960" cy="274320"/>
           </a:xfrm>
           <a:prstGeom prst="rect">
@@ -23386,8 +23386,8 @@
         </p:nvSpPr>
         <p:spPr>
           <a:xfrm>
-            <a:off x="4608576" y="5359968"/>
-            <a:ext cx="27432" cy="2427305"/>
+            <a:off x="3877055" y="5145450"/>
+            <a:ext cx="27432" cy="2173284"/>
           </a:xfrm>
           <a:prstGeom prst="rect">
             <a:avLst/>
@@ -23430,7 +23430,7 @@
         </p:nvSpPr>
         <p:spPr>
           <a:xfrm>
-            <a:off x="4553712" y="5359968"/>
+            <a:off x="3822191" y="5145450"/>
             <a:ext cx="137160" cy="27432"/>
           </a:xfrm>
           <a:prstGeom prst="rect">
@@ -23474,7 +23474,7 @@
         </p:nvSpPr>
         <p:spPr>
           <a:xfrm>
-            <a:off x="4553712" y="7759842"/>
+            <a:off x="3822191" y="7291303"/>
             <a:ext cx="137160" cy="27432"/>
           </a:xfrm>
           <a:prstGeom prst="rect">
@@ -23518,7 +23518,7 @@
         </p:nvSpPr>
         <p:spPr>
           <a:xfrm>
-            <a:off x="4718304" y="5341680"/>
+            <a:off x="3986783" y="5127162"/>
             <a:ext cx="822960" cy="274320"/>
           </a:xfrm>
           <a:prstGeom prst="rect">
@@ -23558,8 +23558,8 @@
         </p:nvSpPr>
         <p:spPr>
           <a:xfrm>
-            <a:off x="5614416" y="7250301"/>
-            <a:ext cx="2514600" cy="548640"/>
+            <a:off x="4946904" y="6809250"/>
+            <a:ext cx="1901952" cy="548640"/>
           </a:xfrm>
           <a:prstGeom prst="rect">
             <a:avLst/>
@@ -23615,7 +23615,7 @@
         </p:nvSpPr>
         <p:spPr>
           <a:xfrm>
-            <a:off x="5468112" y="7360029"/>
+            <a:off x="4800600" y="6918978"/>
             <a:ext cx="91440" cy="91440"/>
           </a:xfrm>
           <a:prstGeom prst="rect">
@@ -23659,8 +23659,8 @@
         </p:nvSpPr>
         <p:spPr>
           <a:xfrm>
-            <a:off x="5614416" y="6578467"/>
-            <a:ext cx="2514600" cy="548640"/>
+            <a:off x="4946904" y="6207724"/>
+            <a:ext cx="1901952" cy="548640"/>
           </a:xfrm>
           <a:prstGeom prst="rect">
             <a:avLst/>
@@ -23716,7 +23716,7 @@
         </p:nvSpPr>
         <p:spPr>
           <a:xfrm>
-            <a:off x="5468112" y="6688195"/>
+            <a:off x="4800600" y="6317452"/>
             <a:ext cx="91440" cy="91440"/>
           </a:xfrm>
           <a:prstGeom prst="rect">
@@ -23760,8 +23760,8 @@
         </p:nvSpPr>
         <p:spPr>
           <a:xfrm>
-            <a:off x="5614416" y="5589458"/>
-            <a:ext cx="2514600" cy="548640"/>
+            <a:off x="4946904" y="5322216"/>
+            <a:ext cx="1901952" cy="548640"/>
           </a:xfrm>
           <a:prstGeom prst="rect">
             <a:avLst/>
@@ -23804,7 +23804,7 @@
                 <a:latin typeface="Arial"/>
                 <a:ea typeface="Arial"/>
               </a:rPr>
-              <a:t>313 · 점선 20~40% 극복</a:t>
+              <a:t>313 · 점선 일부</a:t>
             </a:r>
           </a:p>
         </p:txBody>
@@ -23817,7 +23817,7 @@
         </p:nvSpPr>
         <p:spPr>
           <a:xfrm>
-            <a:off x="5468112" y="5699186"/>
+            <a:off x="4800600" y="5431944"/>
             <a:ext cx="91440" cy="91440"/>
           </a:xfrm>
           <a:prstGeom prst="rect">
@@ -23861,8 +23861,8 @@
         </p:nvSpPr>
         <p:spPr>
           <a:xfrm>
-            <a:off x="5614416" y="4505035"/>
-            <a:ext cx="2514600" cy="548640"/>
+            <a:off x="4946904" y="4351279"/>
+            <a:ext cx="1901952" cy="548640"/>
           </a:xfrm>
           <a:prstGeom prst="rect">
             <a:avLst/>
@@ -23918,7 +23918,7 @@
         </p:nvSpPr>
         <p:spPr>
           <a:xfrm>
-            <a:off x="5468112" y="4614763"/>
+            <a:off x="4800600" y="4461007"/>
             <a:ext cx="91440" cy="91440"/>
           </a:xfrm>
           <a:prstGeom prst="rect">
@@ -23962,8 +23962,8 @@
         </p:nvSpPr>
         <p:spPr>
           <a:xfrm>
-            <a:off x="5614416" y="3717340"/>
-            <a:ext cx="2514600" cy="548640"/>
+            <a:off x="4946904" y="3646017"/>
+            <a:ext cx="1901952" cy="548640"/>
           </a:xfrm>
           <a:prstGeom prst="rect">
             <a:avLst/>
@@ -24019,7 +24019,7 @@
         </p:nvSpPr>
         <p:spPr>
           <a:xfrm>
-            <a:off x="5468112" y="3827068"/>
+            <a:off x="4800600" y="3755745"/>
             <a:ext cx="91440" cy="91440"/>
           </a:xfrm>
           <a:prstGeom prst="rect">
@@ -24057,13 +24057,103 @@
       </p:sp>
       <p:sp>
         <p:nvSpPr>
-          <p:cNvPr id="46" name="Oval 45"/>
-          <p:cNvSpPr/>
-          <p:nvPr/>
-        </p:nvSpPr>
-        <p:spPr>
-          <a:xfrm>
-            <a:off x="8403336" y="2139696"/>
+          <p:cNvPr id="46" name="TextBox 45"/>
+          <p:cNvSpPr txBox="1"/>
+          <p:nvPr/>
+        </p:nvSpPr>
+        <p:spPr>
+          <a:xfrm>
+            <a:off x="722376" y="7991856"/>
+            <a:ext cx="6126480" cy="365760"/>
+          </a:xfrm>
+          <a:prstGeom prst="rect">
+            <a:avLst/>
+          </a:prstGeom>
+          <a:noFill/>
+        </p:spPr>
+        <p:txBody>
+          <a:bodyPr wrap="square" anchor="ctr" lIns="0" rIns="0" tIns="0" bIns="0">
+            <a:spAutoFit/>
+          </a:bodyPr>
+          <a:lstStyle/>
+          <a:p>
+            <a:pPr algn="l">
+              <a:lnSpc>
+                <a:spcPct val="110000"/>
+              </a:lnSpc>
+            </a:pPr>
+            <a:r>
+              <a:rPr sz="1600" b="0">
+                <a:solidFill>
+                  <a:srgbClr val="555555"/>
+                </a:solidFill>
+                <a:latin typeface="Arial"/>
+                <a:ea typeface="Arial"/>
+              </a:rPr>
+              <a:t>내구 규격만 수요의 성능 여유  </a:t>
+            </a:r>
+            <a:r>
+              <a:rPr sz="1800" b="1">
+                <a:solidFill>
+                  <a:srgbClr val="1428A0"/>
+                </a:solidFill>
+                <a:latin typeface="Arial"/>
+                <a:ea typeface="Arial"/>
+              </a:rPr>
+              <a:t>약 1,000배</a:t>
+            </a:r>
+          </a:p>
+        </p:txBody>
+      </p:sp>
+      <p:sp>
+        <p:nvSpPr>
+          <p:cNvPr id="47" name="TextBox 46"/>
+          <p:cNvSpPr txBox="1"/>
+          <p:nvPr/>
+        </p:nvSpPr>
+        <p:spPr>
+          <a:xfrm>
+            <a:off x="722376" y="8266175"/>
+            <a:ext cx="6126480" cy="292608"/>
+          </a:xfrm>
+          <a:prstGeom prst="rect">
+            <a:avLst/>
+          </a:prstGeom>
+          <a:noFill/>
+        </p:spPr>
+        <p:txBody>
+          <a:bodyPr wrap="square" anchor="ctr" lIns="0" rIns="0" tIns="0" bIns="0">
+            <a:spAutoFit/>
+          </a:bodyPr>
+          <a:lstStyle/>
+          <a:p>
+            <a:pPr algn="l">
+              <a:lnSpc>
+                <a:spcPct val="110000"/>
+              </a:lnSpc>
+            </a:pPr>
+            <a:r>
+              <a:rPr sz="1500" b="0">
+                <a:solidFill>
+                  <a:srgbClr val="555555"/>
+                </a:solidFill>
+                <a:latin typeface="Arial"/>
+                <a:ea typeface="Arial"/>
+              </a:rPr>
+              <a:t>RAG 지연 예산 100ms 대 QLC 읽기 0.1ms</a:t>
+            </a:r>
+          </a:p>
+        </p:txBody>
+      </p:sp>
+      <p:sp>
+        <p:nvSpPr>
+          <p:cNvPr id="48" name="Oval 47"/>
+          <p:cNvSpPr/>
+          <p:nvPr/>
+        </p:nvSpPr>
+        <p:spPr>
+          <a:xfrm>
+            <a:off x="7168896" y="2139696"/>
             <a:ext cx="438912" cy="438912"/>
           </a:xfrm>
           <a:prstGeom prst="ellipse">
@@ -24101,13 +24191,13 @@
       </p:sp>
       <p:sp>
         <p:nvSpPr>
-          <p:cNvPr id="47" name="TextBox 46"/>
+          <p:cNvPr id="49" name="TextBox 48"/>
           <p:cNvSpPr txBox="1"/>
           <p:nvPr/>
         </p:nvSpPr>
         <p:spPr>
           <a:xfrm>
-            <a:off x="8403336" y="2139696"/>
+            <a:off x="7168896" y="2139696"/>
             <a:ext cx="438912" cy="438912"/>
           </a:xfrm>
           <a:prstGeom prst="rect">
@@ -24141,14 +24231,14 @@
       </p:sp>
       <p:sp>
         <p:nvSpPr>
-          <p:cNvPr id="48" name="TextBox 47"/>
+          <p:cNvPr id="50" name="TextBox 49"/>
           <p:cNvSpPr txBox="1"/>
           <p:nvPr/>
         </p:nvSpPr>
         <p:spPr>
           <a:xfrm>
-            <a:off x="8988552" y="2103120"/>
-            <a:ext cx="3803904" cy="512063"/>
+            <a:off x="7754112" y="2103120"/>
+            <a:ext cx="9811512" cy="512063"/>
           </a:xfrm>
           <a:prstGeom prst="rect">
             <a:avLst/>
@@ -24174,21 +24264,21 @@
                 <a:latin typeface="Arial"/>
                 <a:ea typeface="Arial"/>
               </a:rPr>
-              <a:t>내구: 쓰기 모양이 바꾼다</a:t>
-            </a:r>
-          </a:p>
-        </p:txBody>
-      </p:sp>
-      <p:sp>
-        <p:nvSpPr>
-          <p:cNvPr id="49" name="TextBox 48"/>
+              <a:t>기술: 모아 쓰고, 수명별로 배치</a:t>
+            </a:r>
+          </a:p>
+        </p:txBody>
+      </p:sp>
+      <p:sp>
+        <p:nvSpPr>
+          <p:cNvPr id="51" name="TextBox 50"/>
           <p:cNvSpPr txBox="1"/>
           <p:nvPr/>
         </p:nvSpPr>
         <p:spPr>
           <a:xfrm>
-            <a:off x="8403336" y="2743200"/>
-            <a:ext cx="4389120" cy="329184"/>
+            <a:off x="7168896" y="2743200"/>
+            <a:ext cx="10396728" cy="329184"/>
           </a:xfrm>
           <a:prstGeom prst="rect">
             <a:avLst/>
@@ -24207,44 +24297,96 @@
               </a:lnSpc>
             </a:pPr>
             <a:r>
-              <a:rPr sz="1800" b="1">
+              <a:rPr sz="1600" b="1">
                 <a:solidFill>
                   <a:srgbClr val="1A1A1A"/>
                 </a:solidFill>
                 <a:latin typeface="Arial"/>
                 <a:ea typeface="Arial"/>
               </a:rPr>
-              <a:t>같은 QLC의 정격 DWPD  </a:t>
+              <a:t>2장 핵심 기술 중  </a:t>
             </a:r>
             <a:r>
               <a:rPr sz="1600" b="0">
                 <a:solidFill>
+                  <a:srgbClr val="1428A0"/>
+                </a:solidFill>
+                <a:latin typeface="Arial"/>
+                <a:ea typeface="Arial"/>
+              </a:rPr>
+              <a:t>■</a:t>
+            </a:r>
+            <a:r>
+              <a:rPr sz="1600" b="0">
+                <a:solidFill>
                   <a:srgbClr val="555555"/>
                 </a:solidFill>
                 <a:latin typeface="Arial"/>
                 <a:ea typeface="Arial"/>
               </a:rPr>
-              <a:t>Micron 6600 ION</a:t>
-            </a:r>
-          </a:p>
-        </p:txBody>
-      </p:sp>
-      <p:sp>
-        <p:nvSpPr>
-          <p:cNvPr id="50" name="Rectangle 49"/>
-          <p:cNvSpPr/>
-          <p:nvPr/>
-        </p:nvSpPr>
-        <p:spPr>
-          <a:xfrm>
-            <a:off x="10044684" y="3218688"/>
-            <a:ext cx="9144" cy="1883664"/>
-          </a:xfrm>
-          <a:prstGeom prst="rect">
-            <a:avLst/>
-          </a:prstGeom>
-          <a:solidFill>
-            <a:srgbClr val="D9D9D9"/>
+              <a:t> 핵심   </a:t>
+            </a:r>
+            <a:r>
+              <a:rPr sz="1600" b="0">
+                <a:solidFill>
+                  <a:srgbClr val="AAB8E8"/>
+                </a:solidFill>
+                <a:latin typeface="Arial"/>
+                <a:ea typeface="Arial"/>
+              </a:rPr>
+              <a:t>■</a:t>
+            </a:r>
+            <a:r>
+              <a:rPr sz="1600" b="0">
+                <a:solidFill>
+                  <a:srgbClr val="555555"/>
+                </a:solidFill>
+                <a:latin typeface="Arial"/>
+                <a:ea typeface="Arial"/>
+              </a:rPr>
+              <a:t> 보조   </a:t>
+            </a:r>
+            <a:r>
+              <a:rPr sz="1600" b="0">
+                <a:solidFill>
+                  <a:srgbClr val="8A8A8A"/>
+                </a:solidFill>
+                <a:latin typeface="Arial"/>
+                <a:ea typeface="Arial"/>
+              </a:rPr>
+              <a:t>▢</a:t>
+            </a:r>
+            <a:r>
+              <a:rPr sz="1600" b="0">
+                <a:solidFill>
+                  <a:srgbClr val="555555"/>
+                </a:solidFill>
+                <a:latin typeface="Arial"/>
+                <a:ea typeface="Arial"/>
+              </a:rPr>
+              <a:t> 해당 없음</a:t>
+            </a:r>
+          </a:p>
+        </p:txBody>
+      </p:sp>
+      <p:sp>
+        <p:nvSpPr>
+          <p:cNvPr id="52" name="Rounded Rectangle 51"/>
+          <p:cNvSpPr/>
+          <p:nvPr/>
+        </p:nvSpPr>
+        <p:spPr>
+          <a:xfrm>
+            <a:off x="7168896" y="3127248"/>
+            <a:ext cx="1516075" cy="402336"/>
+          </a:xfrm>
+          <a:prstGeom prst="roundRect">
+            <a:avLst>
+              <a:gd name="adj" fmla="val 18181"/>
+            </a:avLst>
+          </a:prstGeom>
+          <a:solidFill>
+            <a:srgbClr val="1428A0"/>
           </a:solidFill>
           <a:ln>
             <a:noFill/>
@@ -24275,14 +24417,14 @@
       </p:sp>
       <p:sp>
         <p:nvSpPr>
-          <p:cNvPr id="51" name="TextBox 50"/>
+          <p:cNvPr id="53" name="TextBox 52"/>
           <p:cNvSpPr txBox="1"/>
           <p:nvPr/>
         </p:nvSpPr>
         <p:spPr>
           <a:xfrm>
-            <a:off x="9683496" y="5102352"/>
-            <a:ext cx="731520" cy="256032"/>
+            <a:off x="7223759" y="3127248"/>
+            <a:ext cx="1406347" cy="402336"/>
           </a:xfrm>
           <a:prstGeom prst="rect">
             <a:avLst/>
@@ -24290,7 +24432,7 @@
           <a:noFill/>
         </p:spPr>
         <p:txBody>
-          <a:bodyPr wrap="square" anchor="t" lIns="0" rIns="0" tIns="0" bIns="0">
+          <a:bodyPr wrap="square" anchor="ctr" lIns="0" rIns="0" tIns="0" bIns="0">
             <a:spAutoFit/>
           </a:bodyPr>
           <a:lstStyle/>
@@ -24301,34 +24443,36 @@
               </a:lnSpc>
             </a:pPr>
             <a:r>
-              <a:rPr sz="1500" b="0">
-                <a:solidFill>
-                  <a:srgbClr val="555555"/>
-                </a:solidFill>
-                <a:latin typeface="Arial"/>
-                <a:ea typeface="Arial"/>
-              </a:rPr>
-              <a:t>0</a:t>
-            </a:r>
-          </a:p>
-        </p:txBody>
-      </p:sp>
-      <p:sp>
-        <p:nvSpPr>
-          <p:cNvPr id="52" name="Rectangle 51"/>
-          <p:cNvSpPr/>
-          <p:nvPr/>
-        </p:nvSpPr>
-        <p:spPr>
-          <a:xfrm>
-            <a:off x="10959084" y="3218688"/>
-            <a:ext cx="9144" cy="1883664"/>
-          </a:xfrm>
-          <a:prstGeom prst="rect">
-            <a:avLst/>
-          </a:prstGeom>
-          <a:solidFill>
-            <a:srgbClr val="D9D9D9"/>
+              <a:rPr sz="1500" b="1">
+                <a:solidFill>
+                  <a:srgbClr val="FFFFFF"/>
+                </a:solidFill>
+                <a:latin typeface="Arial"/>
+                <a:ea typeface="Arial"/>
+              </a:rPr>
+              <a:t>Mixed Media</a:t>
+            </a:r>
+          </a:p>
+        </p:txBody>
+      </p:sp>
+      <p:sp>
+        <p:nvSpPr>
+          <p:cNvPr id="54" name="Rounded Rectangle 53"/>
+          <p:cNvSpPr/>
+          <p:nvPr/>
+        </p:nvSpPr>
+        <p:spPr>
+          <a:xfrm>
+            <a:off x="8707648" y="3127248"/>
+            <a:ext cx="652881" cy="402336"/>
+          </a:xfrm>
+          <a:prstGeom prst="roundRect">
+            <a:avLst>
+              <a:gd name="adj" fmla="val 18181"/>
+            </a:avLst>
+          </a:prstGeom>
+          <a:solidFill>
+            <a:srgbClr val="1428A0"/>
           </a:solidFill>
           <a:ln>
             <a:noFill/>
@@ -24359,14 +24503,14 @@
       </p:sp>
       <p:sp>
         <p:nvSpPr>
-          <p:cNvPr id="53" name="TextBox 52"/>
+          <p:cNvPr id="55" name="TextBox 54"/>
           <p:cNvSpPr txBox="1"/>
           <p:nvPr/>
         </p:nvSpPr>
         <p:spPr>
           <a:xfrm>
-            <a:off x="10597896" y="5102352"/>
-            <a:ext cx="731520" cy="256032"/>
+            <a:off x="8762512" y="3127248"/>
+            <a:ext cx="543153" cy="402336"/>
           </a:xfrm>
           <a:prstGeom prst="rect">
             <a:avLst/>
@@ -24374,7 +24518,7 @@
           <a:noFill/>
         </p:spPr>
         <p:txBody>
-          <a:bodyPr wrap="square" anchor="t" lIns="0" rIns="0" tIns="0" bIns="0">
+          <a:bodyPr wrap="square" anchor="ctr" lIns="0" rIns="0" tIns="0" bIns="0">
             <a:spAutoFit/>
           </a:bodyPr>
           <a:lstStyle/>
@@ -24385,34 +24529,36 @@
               </a:lnSpc>
             </a:pPr>
             <a:r>
-              <a:rPr sz="1500" b="0">
-                <a:solidFill>
-                  <a:srgbClr val="555555"/>
-                </a:solidFill>
-                <a:latin typeface="Arial"/>
-                <a:ea typeface="Arial"/>
-              </a:rPr>
-              <a:t>0.5</a:t>
-            </a:r>
-          </a:p>
-        </p:txBody>
-      </p:sp>
-      <p:sp>
-        <p:nvSpPr>
-          <p:cNvPr id="54" name="Rectangle 53"/>
-          <p:cNvSpPr/>
-          <p:nvPr/>
-        </p:nvSpPr>
-        <p:spPr>
-          <a:xfrm>
-            <a:off x="11873484" y="3218688"/>
-            <a:ext cx="9144" cy="1883664"/>
-          </a:xfrm>
-          <a:prstGeom prst="rect">
-            <a:avLst/>
-          </a:prstGeom>
-          <a:solidFill>
-            <a:srgbClr val="D9D9D9"/>
+              <a:rPr sz="1500" b="1">
+                <a:solidFill>
+                  <a:srgbClr val="FFFFFF"/>
+                </a:solidFill>
+                <a:latin typeface="Arial"/>
+                <a:ea typeface="Arial"/>
+              </a:rPr>
+              <a:t>FDP</a:t>
+            </a:r>
+          </a:p>
+        </p:txBody>
+      </p:sp>
+      <p:sp>
+        <p:nvSpPr>
+          <p:cNvPr id="56" name="Rounded Rectangle 55"/>
+          <p:cNvSpPr/>
+          <p:nvPr/>
+        </p:nvSpPr>
+        <p:spPr>
+          <a:xfrm>
+            <a:off x="9383207" y="3127248"/>
+            <a:ext cx="1731873" cy="402336"/>
+          </a:xfrm>
+          <a:prstGeom prst="roundRect">
+            <a:avLst>
+              <a:gd name="adj" fmla="val 18181"/>
+            </a:avLst>
+          </a:prstGeom>
+          <a:solidFill>
+            <a:srgbClr val="AAB8E8"/>
           </a:solidFill>
           <a:ln>
             <a:noFill/>
@@ -24443,14 +24589,14 @@
       </p:sp>
       <p:sp>
         <p:nvSpPr>
-          <p:cNvPr id="55" name="TextBox 54"/>
+          <p:cNvPr id="57" name="TextBox 56"/>
           <p:cNvSpPr txBox="1"/>
           <p:nvPr/>
         </p:nvSpPr>
         <p:spPr>
           <a:xfrm>
-            <a:off x="11512296" y="5102352"/>
-            <a:ext cx="731520" cy="256032"/>
+            <a:off x="9438071" y="3127248"/>
+            <a:ext cx="1622145" cy="402336"/>
           </a:xfrm>
           <a:prstGeom prst="rect">
             <a:avLst/>
@@ -24458,7 +24604,7 @@
           <a:noFill/>
         </p:spPr>
         <p:txBody>
-          <a:bodyPr wrap="square" anchor="t" lIns="0" rIns="0" tIns="0" bIns="0">
+          <a:bodyPr wrap="square" anchor="ctr" lIns="0" rIns="0" tIns="0" bIns="0">
             <a:spAutoFit/>
           </a:bodyPr>
           <a:lstStyle/>
@@ -24469,6 +24615,181 @@
               </a:lnSpc>
             </a:pPr>
             <a:r>
+              <a:rPr sz="1500" b="1">
+                <a:solidFill>
+                  <a:srgbClr val="1428A0"/>
+                </a:solidFill>
+                <a:latin typeface="Arial"/>
+                <a:ea typeface="Arial"/>
+              </a:rPr>
+              <a:t>Large Mapping</a:t>
+            </a:r>
+          </a:p>
+        </p:txBody>
+      </p:sp>
+      <p:sp>
+        <p:nvSpPr>
+          <p:cNvPr id="58" name="Rounded Rectangle 57"/>
+          <p:cNvSpPr/>
+          <p:nvPr/>
+        </p:nvSpPr>
+        <p:spPr>
+          <a:xfrm>
+            <a:off x="11137757" y="3127248"/>
+            <a:ext cx="2055571" cy="402336"/>
+          </a:xfrm>
+          <a:prstGeom prst="roundRect">
+            <a:avLst>
+              <a:gd name="adj" fmla="val 18181"/>
+            </a:avLst>
+          </a:prstGeom>
+          <a:solidFill>
+            <a:srgbClr val="AAB8E8"/>
+          </a:solidFill>
+          <a:ln>
+            <a:noFill/>
+          </a:ln>
+          <a:effectLst/>
+        </p:spPr>
+        <p:style>
+          <a:lnRef idx="1">
+            <a:schemeClr val="accent1"/>
+          </a:lnRef>
+          <a:fillRef idx="3">
+            <a:schemeClr val="accent1"/>
+          </a:fillRef>
+          <a:effectRef idx="2">
+            <a:schemeClr val="accent1"/>
+          </a:effectRef>
+          <a:fontRef idx="minor">
+            <a:schemeClr val="lt1"/>
+          </a:fontRef>
+        </p:style>
+        <p:txBody>
+          <a:bodyPr rtlCol="0" anchor="ctr"/>
+          <a:lstStyle/>
+          <a:p>
+            <a:pPr algn="ctr"/>
+          </a:p>
+        </p:txBody>
+      </p:sp>
+      <p:sp>
+        <p:nvSpPr>
+          <p:cNvPr id="59" name="TextBox 58"/>
+          <p:cNvSpPr txBox="1"/>
+          <p:nvPr/>
+        </p:nvSpPr>
+        <p:spPr>
+          <a:xfrm>
+            <a:off x="11192621" y="3127248"/>
+            <a:ext cx="1945843" cy="402336"/>
+          </a:xfrm>
+          <a:prstGeom prst="rect">
+            <a:avLst/>
+          </a:prstGeom>
+          <a:noFill/>
+        </p:spPr>
+        <p:txBody>
+          <a:bodyPr wrap="square" anchor="ctr" lIns="0" rIns="0" tIns="0" bIns="0">
+            <a:spAutoFit/>
+          </a:bodyPr>
+          <a:lstStyle/>
+          <a:p>
+            <a:pPr algn="ctr">
+              <a:lnSpc>
+                <a:spcPct val="110000"/>
+              </a:lnSpc>
+            </a:pPr>
+            <a:r>
+              <a:rPr sz="1500" b="1">
+                <a:solidFill>
+                  <a:srgbClr val="1428A0"/>
+                </a:solidFill>
+                <a:latin typeface="Arial"/>
+                <a:ea typeface="Arial"/>
+              </a:rPr>
+              <a:t>Multi-Tenant QoS</a:t>
+            </a:r>
+          </a:p>
+        </p:txBody>
+      </p:sp>
+      <p:sp>
+        <p:nvSpPr>
+          <p:cNvPr id="60" name="Rounded Rectangle 59"/>
+          <p:cNvSpPr/>
+          <p:nvPr/>
+        </p:nvSpPr>
+        <p:spPr>
+          <a:xfrm>
+            <a:off x="13216006" y="3127248"/>
+            <a:ext cx="1839772" cy="402336"/>
+          </a:xfrm>
+          <a:prstGeom prst="roundRect">
+            <a:avLst>
+              <a:gd name="adj" fmla="val 18181"/>
+            </a:avLst>
+          </a:prstGeom>
+          <a:solidFill>
+            <a:srgbClr val="FFFFFF"/>
+          </a:solidFill>
+          <a:ln w="12700">
+            <a:solidFill>
+              <a:srgbClr val="8A8A8A"/>
+            </a:solidFill>
+            <a:prstDash val="dash"/>
+          </a:ln>
+          <a:effectLst/>
+        </p:spPr>
+        <p:style>
+          <a:lnRef idx="1">
+            <a:schemeClr val="accent1"/>
+          </a:lnRef>
+          <a:fillRef idx="3">
+            <a:schemeClr val="accent1"/>
+          </a:fillRef>
+          <a:effectRef idx="2">
+            <a:schemeClr val="accent1"/>
+          </a:effectRef>
+          <a:fontRef idx="minor">
+            <a:schemeClr val="lt1"/>
+          </a:fontRef>
+        </p:style>
+        <p:txBody>
+          <a:bodyPr rtlCol="0" anchor="ctr"/>
+          <a:lstStyle/>
+          <a:p>
+            <a:pPr algn="ctr"/>
+          </a:p>
+        </p:txBody>
+      </p:sp>
+      <p:sp>
+        <p:nvSpPr>
+          <p:cNvPr id="61" name="TextBox 60"/>
+          <p:cNvSpPr txBox="1"/>
+          <p:nvPr/>
+        </p:nvSpPr>
+        <p:spPr>
+          <a:xfrm>
+            <a:off x="13270870" y="3127248"/>
+            <a:ext cx="1730044" cy="402336"/>
+          </a:xfrm>
+          <a:prstGeom prst="rect">
+            <a:avLst/>
+          </a:prstGeom>
+          <a:noFill/>
+        </p:spPr>
+        <p:txBody>
+          <a:bodyPr wrap="square" anchor="ctr" lIns="0" rIns="0" tIns="0" bIns="0">
+            <a:spAutoFit/>
+          </a:bodyPr>
+          <a:lstStyle/>
+          <a:p>
+            <a:pPr algn="ctr">
+              <a:lnSpc>
+                <a:spcPct val="110000"/>
+              </a:lnSpc>
+            </a:pPr>
+            <a:r>
               <a:rPr sz="1500" b="0">
                 <a:solidFill>
                   <a:srgbClr val="555555"/>
@@ -24476,21 +24797,146 @@
                 <a:latin typeface="Arial"/>
                 <a:ea typeface="Arial"/>
               </a:rPr>
-              <a:t>1</a:t>
-            </a:r>
-          </a:p>
-        </p:txBody>
-      </p:sp>
-      <p:sp>
-        <p:nvSpPr>
-          <p:cNvPr id="56" name="TextBox 55"/>
+              <a:t>Fault Tolerant</a:t>
+            </a:r>
+          </a:p>
+        </p:txBody>
+      </p:sp>
+      <p:sp>
+        <p:nvSpPr>
+          <p:cNvPr id="62" name="Rounded Rectangle 61"/>
+          <p:cNvSpPr/>
+          <p:nvPr/>
+        </p:nvSpPr>
+        <p:spPr>
+          <a:xfrm>
+            <a:off x="15078456" y="3127248"/>
+            <a:ext cx="2487168" cy="402336"/>
+          </a:xfrm>
+          <a:prstGeom prst="roundRect">
+            <a:avLst>
+              <a:gd name="adj" fmla="val 18181"/>
+            </a:avLst>
+          </a:prstGeom>
+          <a:solidFill>
+            <a:srgbClr val="FFFFFF"/>
+          </a:solidFill>
+          <a:ln w="12700">
+            <a:solidFill>
+              <a:srgbClr val="8A8A8A"/>
+            </a:solidFill>
+            <a:prstDash val="dash"/>
+          </a:ln>
+          <a:effectLst/>
+        </p:spPr>
+        <p:style>
+          <a:lnRef idx="1">
+            <a:schemeClr val="accent1"/>
+          </a:lnRef>
+          <a:fillRef idx="3">
+            <a:schemeClr val="accent1"/>
+          </a:fillRef>
+          <a:effectRef idx="2">
+            <a:schemeClr val="accent1"/>
+          </a:effectRef>
+          <a:fontRef idx="minor">
+            <a:schemeClr val="lt1"/>
+          </a:fontRef>
+        </p:style>
+        <p:txBody>
+          <a:bodyPr rtlCol="0" anchor="ctr"/>
+          <a:lstStyle/>
+          <a:p>
+            <a:pPr algn="ctr"/>
+          </a:p>
+        </p:txBody>
+      </p:sp>
+      <p:sp>
+        <p:nvSpPr>
+          <p:cNvPr id="63" name="TextBox 62"/>
           <p:cNvSpPr txBox="1"/>
           <p:nvPr/>
         </p:nvSpPr>
         <p:spPr>
           <a:xfrm>
-            <a:off x="8403336" y="3273552"/>
-            <a:ext cx="1591056" cy="420624"/>
+            <a:off x="15133320" y="3127248"/>
+            <a:ext cx="2377439" cy="402336"/>
+          </a:xfrm>
+          <a:prstGeom prst="rect">
+            <a:avLst/>
+          </a:prstGeom>
+          <a:noFill/>
+        </p:spPr>
+        <p:txBody>
+          <a:bodyPr wrap="square" anchor="ctr" lIns="0" rIns="0" tIns="0" bIns="0">
+            <a:spAutoFit/>
+          </a:bodyPr>
+          <a:lstStyle/>
+          <a:p>
+            <a:pPr algn="ctr">
+              <a:lnSpc>
+                <a:spcPct val="110000"/>
+              </a:lnSpc>
+            </a:pPr>
+            <a:r>
+              <a:rPr sz="1500" b="0">
+                <a:solidFill>
+                  <a:srgbClr val="555555"/>
+                </a:solidFill>
+                <a:latin typeface="Arial"/>
+                <a:ea typeface="Arial"/>
+              </a:rPr>
+              <a:t>Confidential Storage</a:t>
+            </a:r>
+          </a:p>
+        </p:txBody>
+      </p:sp>
+      <p:cxnSp>
+        <p:nvCxnSpPr>
+          <p:cNvPr id="64" name="Connector 63"/>
+          <p:cNvCxnSpPr/>
+          <p:nvPr/>
+        </p:nvCxnSpPr>
+        <p:spPr>
+          <a:xfrm>
+            <a:off x="7168896" y="4041648"/>
+            <a:ext cx="10396728" cy="0"/>
+          </a:xfrm>
+          <a:prstGeom prst="line">
+            <a:avLst/>
+          </a:prstGeom>
+          <a:ln w="12700">
+            <a:solidFill>
+              <a:srgbClr val="555555"/>
+            </a:solidFill>
+            <a:prstDash val="dash"/>
+          </a:ln>
+        </p:spPr>
+        <p:style>
+          <a:lnRef idx="2">
+            <a:schemeClr val="accent1"/>
+          </a:lnRef>
+          <a:fillRef idx="0">
+            <a:schemeClr val="accent1"/>
+          </a:fillRef>
+          <a:effectRef idx="1">
+            <a:schemeClr val="accent1"/>
+          </a:effectRef>
+          <a:fontRef idx="minor">
+            <a:schemeClr val="tx1"/>
+          </a:fontRef>
+        </p:style>
+      </p:cxnSp>
+      <p:sp>
+        <p:nvSpPr>
+          <p:cNvPr id="65" name="TextBox 64"/>
+          <p:cNvSpPr txBox="1"/>
+          <p:nvPr/>
+        </p:nvSpPr>
+        <p:spPr>
+          <a:xfrm>
+            <a:off x="7168896" y="3712463"/>
+            <a:ext cx="2011680" cy="292608"/>
           </a:xfrm>
           <a:prstGeom prst="rect">
             <a:avLst/>
@@ -24509,28 +24955,28 @@
               </a:lnSpc>
             </a:pPr>
             <a:r>
-              <a:rPr sz="1800" b="1">
-                <a:solidFill>
-                  <a:srgbClr val="1A1A1A"/>
-                </a:solidFill>
-                <a:latin typeface="Arial"/>
-                <a:ea typeface="Arial"/>
-              </a:rPr>
-              <a:t>4KB 랜덤</a:t>
-            </a:r>
-          </a:p>
-        </p:txBody>
-      </p:sp>
-      <p:sp>
-        <p:nvSpPr>
-          <p:cNvPr id="57" name="Rectangle 56"/>
-          <p:cNvSpPr/>
-          <p:nvPr/>
-        </p:nvSpPr>
-        <p:spPr>
-          <a:xfrm>
-            <a:off x="10049256" y="3346704"/>
-            <a:ext cx="137160" cy="274320"/>
+              <a:rPr sz="1500" b="1">
+                <a:solidFill>
+                  <a:srgbClr val="555555"/>
+                </a:solidFill>
+                <a:latin typeface="Arial"/>
+                <a:ea typeface="Arial"/>
+              </a:rPr>
+              <a:t>TLC 범용 정격 1</a:t>
+            </a:r>
+          </a:p>
+        </p:txBody>
+      </p:sp>
+      <p:sp>
+        <p:nvSpPr>
+          <p:cNvPr id="66" name="Rectangle 65"/>
+          <p:cNvSpPr/>
+          <p:nvPr/>
+        </p:nvSpPr>
+        <p:spPr>
+          <a:xfrm>
+            <a:off x="7717536" y="5547207"/>
+            <a:ext cx="1005840" cy="122072"/>
           </a:xfrm>
           <a:prstGeom prst="rect">
             <a:avLst/>
@@ -24567,14 +25013,3720 @@
       </p:sp>
       <p:sp>
         <p:nvSpPr>
-          <p:cNvPr id="58" name="TextBox 57"/>
+          <p:cNvPr id="67" name="TextBox 66"/>
           <p:cNvSpPr txBox="1"/>
           <p:nvPr/>
         </p:nvSpPr>
         <p:spPr>
           <a:xfrm>
-            <a:off x="10241280" y="3273552"/>
-            <a:ext cx="731520" cy="420624"/>
+            <a:off x="7351775" y="5126583"/>
+            <a:ext cx="1737360" cy="384048"/>
+          </a:xfrm>
+          <a:prstGeom prst="rect">
+            <a:avLst/>
+          </a:prstGeom>
+          <a:noFill/>
+        </p:spPr>
+        <p:txBody>
+          <a:bodyPr wrap="square" anchor="ctr" lIns="0" rIns="0" tIns="0" bIns="0">
+            <a:spAutoFit/>
+          </a:bodyPr>
+          <a:lstStyle/>
+          <a:p>
+            <a:pPr algn="ctr">
+              <a:lnSpc>
+                <a:spcPct val="110000"/>
+              </a:lnSpc>
+            </a:pPr>
+            <a:r>
+              <a:rPr sz="2000" b="1">
+                <a:solidFill>
+                  <a:srgbClr val="1A1A1A"/>
+                </a:solidFill>
+                <a:latin typeface="Arial"/>
+                <a:ea typeface="Arial"/>
+              </a:rPr>
+              <a:t>0.075</a:t>
+            </a:r>
+          </a:p>
+        </p:txBody>
+      </p:sp>
+      <p:sp>
+        <p:nvSpPr>
+          <p:cNvPr id="68" name="TextBox 67"/>
+          <p:cNvSpPr txBox="1"/>
+          <p:nvPr/>
+        </p:nvSpPr>
+        <p:spPr>
+          <a:xfrm>
+            <a:off x="7168896" y="5705856"/>
+            <a:ext cx="2103120" cy="310896"/>
+          </a:xfrm>
+          <a:prstGeom prst="rect">
+            <a:avLst/>
+          </a:prstGeom>
+          <a:noFill/>
+        </p:spPr>
+        <p:txBody>
+          <a:bodyPr wrap="square" anchor="ctr" lIns="0" rIns="0" tIns="0" bIns="0">
+            <a:spAutoFit/>
+          </a:bodyPr>
+          <a:lstStyle/>
+          <a:p>
+            <a:pPr algn="ctr">
+              <a:lnSpc>
+                <a:spcPct val="110000"/>
+              </a:lnSpc>
+            </a:pPr>
+            <a:r>
+              <a:rPr sz="1600" b="0">
+                <a:solidFill>
+                  <a:srgbClr val="555555"/>
+                </a:solidFill>
+                <a:latin typeface="Arial"/>
+                <a:ea typeface="Arial"/>
+              </a:rPr>
+              <a:t>4KB 랜덤 쓰기</a:t>
+            </a:r>
+          </a:p>
+        </p:txBody>
+      </p:sp>
+      <p:sp>
+        <p:nvSpPr>
+          <p:cNvPr id="69" name="Rectangle 68"/>
+          <p:cNvSpPr/>
+          <p:nvPr/>
+        </p:nvSpPr>
+        <p:spPr>
+          <a:xfrm>
+            <a:off x="10769346" y="5180990"/>
+            <a:ext cx="1280160" cy="488289"/>
+          </a:xfrm>
+          <a:prstGeom prst="rect">
+            <a:avLst/>
+          </a:prstGeom>
+          <a:solidFill>
+            <a:srgbClr val="3C5AC8"/>
+          </a:solidFill>
+          <a:ln>
+            <a:noFill/>
+          </a:ln>
+          <a:effectLst/>
+        </p:spPr>
+        <p:style>
+          <a:lnRef idx="1">
+            <a:schemeClr val="accent1"/>
+          </a:lnRef>
+          <a:fillRef idx="3">
+            <a:schemeClr val="accent1"/>
+          </a:fillRef>
+          <a:effectRef idx="2">
+            <a:schemeClr val="accent1"/>
+          </a:effectRef>
+          <a:fontRef idx="minor">
+            <a:schemeClr val="lt1"/>
+          </a:fontRef>
+        </p:style>
+        <p:txBody>
+          <a:bodyPr rtlCol="0" anchor="ctr"/>
+          <a:lstStyle/>
+          <a:p>
+            <a:pPr algn="ctr"/>
+          </a:p>
+        </p:txBody>
+      </p:sp>
+      <p:sp>
+        <p:nvSpPr>
+          <p:cNvPr id="70" name="TextBox 69"/>
+          <p:cNvSpPr txBox="1"/>
+          <p:nvPr/>
+        </p:nvSpPr>
+        <p:spPr>
+          <a:xfrm>
+            <a:off x="10403586" y="4760366"/>
+            <a:ext cx="2011680" cy="384048"/>
+          </a:xfrm>
+          <a:prstGeom prst="rect">
+            <a:avLst/>
+          </a:prstGeom>
+          <a:noFill/>
+        </p:spPr>
+        <p:txBody>
+          <a:bodyPr wrap="square" anchor="ctr" lIns="0" rIns="0" tIns="0" bIns="0">
+            <a:spAutoFit/>
+          </a:bodyPr>
+          <a:lstStyle/>
+          <a:p>
+            <a:pPr algn="ctr">
+              <a:lnSpc>
+                <a:spcPct val="110000"/>
+              </a:lnSpc>
+            </a:pPr>
+            <a:r>
+              <a:rPr sz="2400" b="1">
+                <a:solidFill>
+                  <a:srgbClr val="1428A0"/>
+                </a:solidFill>
+                <a:latin typeface="Arial"/>
+                <a:ea typeface="Arial"/>
+              </a:rPr>
+              <a:t>0.3</a:t>
+            </a:r>
+          </a:p>
+        </p:txBody>
+      </p:sp>
+      <p:sp>
+        <p:nvSpPr>
+          <p:cNvPr id="71" name="TextBox 70"/>
+          <p:cNvSpPr txBox="1"/>
+          <p:nvPr/>
+        </p:nvSpPr>
+        <p:spPr>
+          <a:xfrm>
+            <a:off x="9400032" y="5705856"/>
+            <a:ext cx="4018788" cy="310896"/>
+          </a:xfrm>
+          <a:prstGeom prst="rect">
+            <a:avLst/>
+          </a:prstGeom>
+          <a:noFill/>
+        </p:spPr>
+        <p:txBody>
+          <a:bodyPr wrap="square" anchor="ctr" lIns="0" rIns="0" tIns="0" bIns="0">
+            <a:spAutoFit/>
+          </a:bodyPr>
+          <a:lstStyle/>
+          <a:p>
+            <a:pPr algn="ctr">
+              <a:lnSpc>
+                <a:spcPct val="110000"/>
+              </a:lnSpc>
+            </a:pPr>
+            <a:r>
+              <a:rPr sz="1600" b="1">
+                <a:solidFill>
+                  <a:srgbClr val="1428A0"/>
+                </a:solidFill>
+                <a:latin typeface="Arial"/>
+                <a:ea typeface="Arial"/>
+              </a:rPr>
+              <a:t>큰 단위로 모아 쓰기</a:t>
+            </a:r>
+          </a:p>
+        </p:txBody>
+      </p:sp>
+      <p:sp>
+        <p:nvSpPr>
+          <p:cNvPr id="72" name="Right Arrow 71"/>
+          <p:cNvSpPr/>
+          <p:nvPr/>
+        </p:nvSpPr>
+        <p:spPr>
+          <a:xfrm>
+            <a:off x="9180576" y="5102352"/>
+            <a:ext cx="274320" cy="274320"/>
+          </a:xfrm>
+          <a:prstGeom prst="rightArrow">
+            <a:avLst/>
+          </a:prstGeom>
+          <a:solidFill>
+            <a:srgbClr val="AAB8E8"/>
+          </a:solidFill>
+          <a:ln>
+            <a:noFill/>
+          </a:ln>
+          <a:effectLst/>
+        </p:spPr>
+        <p:style>
+          <a:lnRef idx="1">
+            <a:schemeClr val="accent1"/>
+          </a:lnRef>
+          <a:fillRef idx="3">
+            <a:schemeClr val="accent1"/>
+          </a:fillRef>
+          <a:effectRef idx="2">
+            <a:schemeClr val="accent1"/>
+          </a:effectRef>
+          <a:fontRef idx="minor">
+            <a:schemeClr val="lt1"/>
+          </a:fontRef>
+        </p:style>
+        <p:txBody>
+          <a:bodyPr rtlCol="0" anchor="ctr"/>
+          <a:lstStyle/>
+          <a:p>
+            <a:pPr algn="ctr"/>
+          </a:p>
+        </p:txBody>
+      </p:sp>
+      <p:sp>
+        <p:nvSpPr>
+          <p:cNvPr id="73" name="Rectangle 72"/>
+          <p:cNvSpPr/>
+          <p:nvPr/>
+        </p:nvSpPr>
+        <p:spPr>
+          <a:xfrm>
+            <a:off x="14916150" y="4041648"/>
+            <a:ext cx="1280160" cy="1627632"/>
+          </a:xfrm>
+          <a:prstGeom prst="rect">
+            <a:avLst/>
+          </a:prstGeom>
+          <a:solidFill>
+            <a:srgbClr val="1428A0"/>
+          </a:solidFill>
+          <a:ln>
+            <a:noFill/>
+          </a:ln>
+          <a:effectLst/>
+        </p:spPr>
+        <p:style>
+          <a:lnRef idx="1">
+            <a:schemeClr val="accent1"/>
+          </a:lnRef>
+          <a:fillRef idx="3">
+            <a:schemeClr val="accent1"/>
+          </a:fillRef>
+          <a:effectRef idx="2">
+            <a:schemeClr val="accent1"/>
+          </a:effectRef>
+          <a:fontRef idx="minor">
+            <a:schemeClr val="lt1"/>
+          </a:fontRef>
+        </p:style>
+        <p:txBody>
+          <a:bodyPr rtlCol="0" anchor="ctr"/>
+          <a:lstStyle/>
+          <a:p>
+            <a:pPr algn="ctr"/>
+          </a:p>
+        </p:txBody>
+      </p:sp>
+      <p:sp>
+        <p:nvSpPr>
+          <p:cNvPr id="74" name="TextBox 73"/>
+          <p:cNvSpPr txBox="1"/>
+          <p:nvPr/>
+        </p:nvSpPr>
+        <p:spPr>
+          <a:xfrm>
+            <a:off x="14916150" y="4096511"/>
+            <a:ext cx="1280160" cy="420624"/>
+          </a:xfrm>
+          <a:prstGeom prst="rect">
+            <a:avLst/>
+          </a:prstGeom>
+          <a:noFill/>
+        </p:spPr>
+        <p:txBody>
+          <a:bodyPr wrap="square" anchor="ctr" lIns="0" rIns="0" tIns="0" bIns="0">
+            <a:spAutoFit/>
+          </a:bodyPr>
+          <a:lstStyle/>
+          <a:p>
+            <a:pPr algn="ctr">
+              <a:lnSpc>
+                <a:spcPct val="110000"/>
+              </a:lnSpc>
+            </a:pPr>
+            <a:r>
+              <a:rPr sz="2400" b="1">
+                <a:solidFill>
+                  <a:srgbClr val="FFFFFF"/>
+                </a:solidFill>
+                <a:latin typeface="Arial"/>
+                <a:ea typeface="Arial"/>
+              </a:rPr>
+              <a:t>1.0</a:t>
+            </a:r>
+          </a:p>
+        </p:txBody>
+      </p:sp>
+      <p:sp>
+        <p:nvSpPr>
+          <p:cNvPr id="75" name="TextBox 74"/>
+          <p:cNvSpPr txBox="1"/>
+          <p:nvPr/>
+        </p:nvSpPr>
+        <p:spPr>
+          <a:xfrm>
+            <a:off x="13546836" y="5705856"/>
+            <a:ext cx="4018788" cy="310896"/>
+          </a:xfrm>
+          <a:prstGeom prst="rect">
+            <a:avLst/>
+          </a:prstGeom>
+          <a:noFill/>
+        </p:spPr>
+        <p:txBody>
+          <a:bodyPr wrap="square" anchor="ctr" lIns="0" rIns="0" tIns="0" bIns="0">
+            <a:spAutoFit/>
+          </a:bodyPr>
+          <a:lstStyle/>
+          <a:p>
+            <a:pPr algn="ctr">
+              <a:lnSpc>
+                <a:spcPct val="110000"/>
+              </a:lnSpc>
+            </a:pPr>
+            <a:r>
+              <a:rPr sz="1600" b="1">
+                <a:solidFill>
+                  <a:srgbClr val="1428A0"/>
+                </a:solidFill>
+                <a:latin typeface="Arial"/>
+                <a:ea typeface="Arial"/>
+              </a:rPr>
+              <a:t>수명별 순차 쓰기</a:t>
+            </a:r>
+          </a:p>
+        </p:txBody>
+      </p:sp>
+      <p:sp>
+        <p:nvSpPr>
+          <p:cNvPr id="76" name="Right Arrow 75"/>
+          <p:cNvSpPr/>
+          <p:nvPr/>
+        </p:nvSpPr>
+        <p:spPr>
+          <a:xfrm>
+            <a:off x="13327380" y="5102352"/>
+            <a:ext cx="274320" cy="274320"/>
+          </a:xfrm>
+          <a:prstGeom prst="rightArrow">
+            <a:avLst/>
+          </a:prstGeom>
+          <a:solidFill>
+            <a:srgbClr val="AAB8E8"/>
+          </a:solidFill>
+          <a:ln>
+            <a:noFill/>
+          </a:ln>
+          <a:effectLst/>
+        </p:spPr>
+        <p:style>
+          <a:lnRef idx="1">
+            <a:schemeClr val="accent1"/>
+          </a:lnRef>
+          <a:fillRef idx="3">
+            <a:schemeClr val="accent1"/>
+          </a:fillRef>
+          <a:effectRef idx="2">
+            <a:schemeClr val="accent1"/>
+          </a:effectRef>
+          <a:fontRef idx="minor">
+            <a:schemeClr val="lt1"/>
+          </a:fontRef>
+        </p:style>
+        <p:txBody>
+          <a:bodyPr rtlCol="0" anchor="ctr"/>
+          <a:lstStyle/>
+          <a:p>
+            <a:pPr algn="ctr"/>
+          </a:p>
+        </p:txBody>
+      </p:sp>
+      <p:sp>
+        <p:nvSpPr>
+          <p:cNvPr id="77" name="TextBox 76"/>
+          <p:cNvSpPr txBox="1"/>
+          <p:nvPr/>
+        </p:nvSpPr>
+        <p:spPr>
+          <a:xfrm>
+            <a:off x="9272016" y="3712463"/>
+            <a:ext cx="4091939" cy="292608"/>
+          </a:xfrm>
+          <a:prstGeom prst="rect">
+            <a:avLst/>
+          </a:prstGeom>
+          <a:noFill/>
+        </p:spPr>
+        <p:txBody>
+          <a:bodyPr wrap="square" anchor="ctr" lIns="0" rIns="0" tIns="0" bIns="0">
+            <a:spAutoFit/>
+          </a:bodyPr>
+          <a:lstStyle/>
+          <a:p>
+            <a:pPr algn="r">
+              <a:lnSpc>
+                <a:spcPct val="110000"/>
+              </a:lnSpc>
+            </a:pPr>
+            <a:r>
+              <a:rPr sz="1500" b="0">
+                <a:solidFill>
+                  <a:srgbClr val="555555"/>
+                </a:solidFill>
+                <a:latin typeface="Arial"/>
+                <a:ea typeface="Arial"/>
+              </a:rPr>
+              <a:t>같은 QLC 정격, Micron 6600 ION</a:t>
+            </a:r>
+          </a:p>
+        </p:txBody>
+      </p:sp>
+      <p:sp>
+        <p:nvSpPr>
+          <p:cNvPr id="78" name="Rectangle 77"/>
+          <p:cNvSpPr/>
+          <p:nvPr/>
+        </p:nvSpPr>
+        <p:spPr>
+          <a:xfrm>
+            <a:off x="7443216" y="6291072"/>
+            <a:ext cx="201168" cy="201168"/>
+          </a:xfrm>
+          <a:prstGeom prst="rect">
+            <a:avLst/>
+          </a:prstGeom>
+          <a:solidFill>
+            <a:srgbClr val="3C5AC8"/>
+          </a:solidFill>
+          <a:ln>
+            <a:noFill/>
+          </a:ln>
+          <a:effectLst/>
+        </p:spPr>
+        <p:style>
+          <a:lnRef idx="1">
+            <a:schemeClr val="accent1"/>
+          </a:lnRef>
+          <a:fillRef idx="3">
+            <a:schemeClr val="accent1"/>
+          </a:fillRef>
+          <a:effectRef idx="2">
+            <a:schemeClr val="accent1"/>
+          </a:effectRef>
+          <a:fontRef idx="minor">
+            <a:schemeClr val="lt1"/>
+          </a:fontRef>
+        </p:style>
+        <p:txBody>
+          <a:bodyPr rtlCol="0" anchor="ctr"/>
+          <a:lstStyle/>
+          <a:p>
+            <a:pPr algn="ctr"/>
+          </a:p>
+        </p:txBody>
+      </p:sp>
+      <p:sp>
+        <p:nvSpPr>
+          <p:cNvPr id="79" name="Rectangle 78"/>
+          <p:cNvSpPr/>
+          <p:nvPr/>
+        </p:nvSpPr>
+        <p:spPr>
+          <a:xfrm>
+            <a:off x="7717536" y="6291072"/>
+            <a:ext cx="201168" cy="201168"/>
+          </a:xfrm>
+          <a:prstGeom prst="rect">
+            <a:avLst/>
+          </a:prstGeom>
+          <a:solidFill>
+            <a:srgbClr val="8A8A8A"/>
+          </a:solidFill>
+          <a:ln>
+            <a:noFill/>
+          </a:ln>
+          <a:effectLst/>
+        </p:spPr>
+        <p:style>
+          <a:lnRef idx="1">
+            <a:schemeClr val="accent1"/>
+          </a:lnRef>
+          <a:fillRef idx="3">
+            <a:schemeClr val="accent1"/>
+          </a:fillRef>
+          <a:effectRef idx="2">
+            <a:schemeClr val="accent1"/>
+          </a:effectRef>
+          <a:fontRef idx="minor">
+            <a:schemeClr val="lt1"/>
+          </a:fontRef>
+        </p:style>
+        <p:txBody>
+          <a:bodyPr rtlCol="0" anchor="ctr"/>
+          <a:lstStyle/>
+          <a:p>
+            <a:pPr algn="ctr"/>
+          </a:p>
+        </p:txBody>
+      </p:sp>
+      <p:sp>
+        <p:nvSpPr>
+          <p:cNvPr id="80" name="Rectangle 79"/>
+          <p:cNvSpPr/>
+          <p:nvPr/>
+        </p:nvSpPr>
+        <p:spPr>
+          <a:xfrm>
+            <a:off x="7991856" y="6291072"/>
+            <a:ext cx="201168" cy="201168"/>
+          </a:xfrm>
+          <a:prstGeom prst="rect">
+            <a:avLst/>
+          </a:prstGeom>
+          <a:solidFill>
+            <a:srgbClr val="AAB8E8"/>
+          </a:solidFill>
+          <a:ln>
+            <a:noFill/>
+          </a:ln>
+          <a:effectLst/>
+        </p:spPr>
+        <p:style>
+          <a:lnRef idx="1">
+            <a:schemeClr val="accent1"/>
+          </a:lnRef>
+          <a:fillRef idx="3">
+            <a:schemeClr val="accent1"/>
+          </a:fillRef>
+          <a:effectRef idx="2">
+            <a:schemeClr val="accent1"/>
+          </a:effectRef>
+          <a:fontRef idx="minor">
+            <a:schemeClr val="lt1"/>
+          </a:fontRef>
+        </p:style>
+        <p:txBody>
+          <a:bodyPr rtlCol="0" anchor="ctr"/>
+          <a:lstStyle/>
+          <a:p>
+            <a:pPr algn="ctr"/>
+          </a:p>
+        </p:txBody>
+      </p:sp>
+      <p:sp>
+        <p:nvSpPr>
+          <p:cNvPr id="81" name="Rectangle 80"/>
+          <p:cNvSpPr/>
+          <p:nvPr/>
+        </p:nvSpPr>
+        <p:spPr>
+          <a:xfrm>
+            <a:off x="8266176" y="6291072"/>
+            <a:ext cx="201168" cy="201168"/>
+          </a:xfrm>
+          <a:prstGeom prst="rect">
+            <a:avLst/>
+          </a:prstGeom>
+          <a:solidFill>
+            <a:srgbClr val="8A8A8A"/>
+          </a:solidFill>
+          <a:ln>
+            <a:noFill/>
+          </a:ln>
+          <a:effectLst/>
+        </p:spPr>
+        <p:style>
+          <a:lnRef idx="1">
+            <a:schemeClr val="accent1"/>
+          </a:lnRef>
+          <a:fillRef idx="3">
+            <a:schemeClr val="accent1"/>
+          </a:fillRef>
+          <a:effectRef idx="2">
+            <a:schemeClr val="accent1"/>
+          </a:effectRef>
+          <a:fontRef idx="minor">
+            <a:schemeClr val="lt1"/>
+          </a:fontRef>
+        </p:style>
+        <p:txBody>
+          <a:bodyPr rtlCol="0" anchor="ctr"/>
+          <a:lstStyle/>
+          <a:p>
+            <a:pPr algn="ctr"/>
+          </a:p>
+        </p:txBody>
+      </p:sp>
+      <p:sp>
+        <p:nvSpPr>
+          <p:cNvPr id="82" name="Rectangle 81"/>
+          <p:cNvSpPr/>
+          <p:nvPr/>
+        </p:nvSpPr>
+        <p:spPr>
+          <a:xfrm>
+            <a:off x="8540496" y="6291072"/>
+            <a:ext cx="201168" cy="201168"/>
+          </a:xfrm>
+          <a:prstGeom prst="rect">
+            <a:avLst/>
+          </a:prstGeom>
+          <a:solidFill>
+            <a:srgbClr val="3C5AC8"/>
+          </a:solidFill>
+          <a:ln>
+            <a:noFill/>
+          </a:ln>
+          <a:effectLst/>
+        </p:spPr>
+        <p:style>
+          <a:lnRef idx="1">
+            <a:schemeClr val="accent1"/>
+          </a:lnRef>
+          <a:fillRef idx="3">
+            <a:schemeClr val="accent1"/>
+          </a:fillRef>
+          <a:effectRef idx="2">
+            <a:schemeClr val="accent1"/>
+          </a:effectRef>
+          <a:fontRef idx="minor">
+            <a:schemeClr val="lt1"/>
+          </a:fontRef>
+        </p:style>
+        <p:txBody>
+          <a:bodyPr rtlCol="0" anchor="ctr"/>
+          <a:lstStyle/>
+          <a:p>
+            <a:pPr algn="ctr"/>
+          </a:p>
+        </p:txBody>
+      </p:sp>
+      <p:sp>
+        <p:nvSpPr>
+          <p:cNvPr id="83" name="Rectangle 82"/>
+          <p:cNvSpPr/>
+          <p:nvPr/>
+        </p:nvSpPr>
+        <p:spPr>
+          <a:xfrm>
+            <a:off x="8814816" y="6291072"/>
+            <a:ext cx="201168" cy="201168"/>
+          </a:xfrm>
+          <a:prstGeom prst="rect">
+            <a:avLst/>
+          </a:prstGeom>
+          <a:solidFill>
+            <a:srgbClr val="AAB8E8"/>
+          </a:solidFill>
+          <a:ln>
+            <a:noFill/>
+          </a:ln>
+          <a:effectLst/>
+        </p:spPr>
+        <p:style>
+          <a:lnRef idx="1">
+            <a:schemeClr val="accent1"/>
+          </a:lnRef>
+          <a:fillRef idx="3">
+            <a:schemeClr val="accent1"/>
+          </a:fillRef>
+          <a:effectRef idx="2">
+            <a:schemeClr val="accent1"/>
+          </a:effectRef>
+          <a:fontRef idx="minor">
+            <a:schemeClr val="lt1"/>
+          </a:fontRef>
+        </p:style>
+        <p:txBody>
+          <a:bodyPr rtlCol="0" anchor="ctr"/>
+          <a:lstStyle/>
+          <a:p>
+            <a:pPr algn="ctr"/>
+          </a:p>
+        </p:txBody>
+      </p:sp>
+      <p:sp>
+        <p:nvSpPr>
+          <p:cNvPr id="84" name="Rectangle 83"/>
+          <p:cNvSpPr/>
+          <p:nvPr/>
+        </p:nvSpPr>
+        <p:spPr>
+          <a:xfrm>
+            <a:off x="7443216" y="6565392"/>
+            <a:ext cx="201168" cy="201168"/>
+          </a:xfrm>
+          <a:prstGeom prst="rect">
+            <a:avLst/>
+          </a:prstGeom>
+          <a:solidFill>
+            <a:srgbClr val="8A8A8A"/>
+          </a:solidFill>
+          <a:ln>
+            <a:noFill/>
+          </a:ln>
+          <a:effectLst/>
+        </p:spPr>
+        <p:style>
+          <a:lnRef idx="1">
+            <a:schemeClr val="accent1"/>
+          </a:lnRef>
+          <a:fillRef idx="3">
+            <a:schemeClr val="accent1"/>
+          </a:fillRef>
+          <a:effectRef idx="2">
+            <a:schemeClr val="accent1"/>
+          </a:effectRef>
+          <a:fontRef idx="minor">
+            <a:schemeClr val="lt1"/>
+          </a:fontRef>
+        </p:style>
+        <p:txBody>
+          <a:bodyPr rtlCol="0" anchor="ctr"/>
+          <a:lstStyle/>
+          <a:p>
+            <a:pPr algn="ctr"/>
+          </a:p>
+        </p:txBody>
+      </p:sp>
+      <p:sp>
+        <p:nvSpPr>
+          <p:cNvPr id="85" name="Rectangle 84"/>
+          <p:cNvSpPr/>
+          <p:nvPr/>
+        </p:nvSpPr>
+        <p:spPr>
+          <a:xfrm>
+            <a:off x="7717536" y="6565392"/>
+            <a:ext cx="201168" cy="201168"/>
+          </a:xfrm>
+          <a:prstGeom prst="rect">
+            <a:avLst/>
+          </a:prstGeom>
+          <a:solidFill>
+            <a:srgbClr val="3C5AC8"/>
+          </a:solidFill>
+          <a:ln>
+            <a:noFill/>
+          </a:ln>
+          <a:effectLst/>
+        </p:spPr>
+        <p:style>
+          <a:lnRef idx="1">
+            <a:schemeClr val="accent1"/>
+          </a:lnRef>
+          <a:fillRef idx="3">
+            <a:schemeClr val="accent1"/>
+          </a:fillRef>
+          <a:effectRef idx="2">
+            <a:schemeClr val="accent1"/>
+          </a:effectRef>
+          <a:fontRef idx="minor">
+            <a:schemeClr val="lt1"/>
+          </a:fontRef>
+        </p:style>
+        <p:txBody>
+          <a:bodyPr rtlCol="0" anchor="ctr"/>
+          <a:lstStyle/>
+          <a:p>
+            <a:pPr algn="ctr"/>
+          </a:p>
+        </p:txBody>
+      </p:sp>
+      <p:sp>
+        <p:nvSpPr>
+          <p:cNvPr id="86" name="Rectangle 85"/>
+          <p:cNvSpPr/>
+          <p:nvPr/>
+        </p:nvSpPr>
+        <p:spPr>
+          <a:xfrm>
+            <a:off x="7991856" y="6565392"/>
+            <a:ext cx="201168" cy="201168"/>
+          </a:xfrm>
+          <a:prstGeom prst="rect">
+            <a:avLst/>
+          </a:prstGeom>
+          <a:solidFill>
+            <a:srgbClr val="AAB8E8"/>
+          </a:solidFill>
+          <a:ln>
+            <a:noFill/>
+          </a:ln>
+          <a:effectLst/>
+        </p:spPr>
+        <p:style>
+          <a:lnRef idx="1">
+            <a:schemeClr val="accent1"/>
+          </a:lnRef>
+          <a:fillRef idx="3">
+            <a:schemeClr val="accent1"/>
+          </a:fillRef>
+          <a:effectRef idx="2">
+            <a:schemeClr val="accent1"/>
+          </a:effectRef>
+          <a:fontRef idx="minor">
+            <a:schemeClr val="lt1"/>
+          </a:fontRef>
+        </p:style>
+        <p:txBody>
+          <a:bodyPr rtlCol="0" anchor="ctr"/>
+          <a:lstStyle/>
+          <a:p>
+            <a:pPr algn="ctr"/>
+          </a:p>
+        </p:txBody>
+      </p:sp>
+      <p:sp>
+        <p:nvSpPr>
+          <p:cNvPr id="87" name="Rectangle 86"/>
+          <p:cNvSpPr/>
+          <p:nvPr/>
+        </p:nvSpPr>
+        <p:spPr>
+          <a:xfrm>
+            <a:off x="8266176" y="6565392"/>
+            <a:ext cx="201168" cy="201168"/>
+          </a:xfrm>
+          <a:prstGeom prst="rect">
+            <a:avLst/>
+          </a:prstGeom>
+          <a:solidFill>
+            <a:srgbClr val="8A8A8A"/>
+          </a:solidFill>
+          <a:ln>
+            <a:noFill/>
+          </a:ln>
+          <a:effectLst/>
+        </p:spPr>
+        <p:style>
+          <a:lnRef idx="1">
+            <a:schemeClr val="accent1"/>
+          </a:lnRef>
+          <a:fillRef idx="3">
+            <a:schemeClr val="accent1"/>
+          </a:fillRef>
+          <a:effectRef idx="2">
+            <a:schemeClr val="accent1"/>
+          </a:effectRef>
+          <a:fontRef idx="minor">
+            <a:schemeClr val="lt1"/>
+          </a:fontRef>
+        </p:style>
+        <p:txBody>
+          <a:bodyPr rtlCol="0" anchor="ctr"/>
+          <a:lstStyle/>
+          <a:p>
+            <a:pPr algn="ctr"/>
+          </a:p>
+        </p:txBody>
+      </p:sp>
+      <p:sp>
+        <p:nvSpPr>
+          <p:cNvPr id="88" name="Rectangle 87"/>
+          <p:cNvSpPr/>
+          <p:nvPr/>
+        </p:nvSpPr>
+        <p:spPr>
+          <a:xfrm>
+            <a:off x="8540496" y="6565392"/>
+            <a:ext cx="201168" cy="201168"/>
+          </a:xfrm>
+          <a:prstGeom prst="rect">
+            <a:avLst/>
+          </a:prstGeom>
+          <a:solidFill>
+            <a:srgbClr val="3C5AC8"/>
+          </a:solidFill>
+          <a:ln>
+            <a:noFill/>
+          </a:ln>
+          <a:effectLst/>
+        </p:spPr>
+        <p:style>
+          <a:lnRef idx="1">
+            <a:schemeClr val="accent1"/>
+          </a:lnRef>
+          <a:fillRef idx="3">
+            <a:schemeClr val="accent1"/>
+          </a:fillRef>
+          <a:effectRef idx="2">
+            <a:schemeClr val="accent1"/>
+          </a:effectRef>
+          <a:fontRef idx="minor">
+            <a:schemeClr val="lt1"/>
+          </a:fontRef>
+        </p:style>
+        <p:txBody>
+          <a:bodyPr rtlCol="0" anchor="ctr"/>
+          <a:lstStyle/>
+          <a:p>
+            <a:pPr algn="ctr"/>
+          </a:p>
+        </p:txBody>
+      </p:sp>
+      <p:sp>
+        <p:nvSpPr>
+          <p:cNvPr id="89" name="Rectangle 88"/>
+          <p:cNvSpPr/>
+          <p:nvPr/>
+        </p:nvSpPr>
+        <p:spPr>
+          <a:xfrm>
+            <a:off x="8814816" y="6565392"/>
+            <a:ext cx="201168" cy="201168"/>
+          </a:xfrm>
+          <a:prstGeom prst="rect">
+            <a:avLst/>
+          </a:prstGeom>
+          <a:solidFill>
+            <a:srgbClr val="8A8A8A"/>
+          </a:solidFill>
+          <a:ln>
+            <a:noFill/>
+          </a:ln>
+          <a:effectLst/>
+        </p:spPr>
+        <p:style>
+          <a:lnRef idx="1">
+            <a:schemeClr val="accent1"/>
+          </a:lnRef>
+          <a:fillRef idx="3">
+            <a:schemeClr val="accent1"/>
+          </a:fillRef>
+          <a:effectRef idx="2">
+            <a:schemeClr val="accent1"/>
+          </a:effectRef>
+          <a:fontRef idx="minor">
+            <a:schemeClr val="lt1"/>
+          </a:fontRef>
+        </p:style>
+        <p:txBody>
+          <a:bodyPr rtlCol="0" anchor="ctr"/>
+          <a:lstStyle/>
+          <a:p>
+            <a:pPr algn="ctr"/>
+          </a:p>
+        </p:txBody>
+      </p:sp>
+      <p:sp>
+        <p:nvSpPr>
+          <p:cNvPr id="90" name="TextBox 89"/>
+          <p:cNvSpPr txBox="1"/>
+          <p:nvPr/>
+        </p:nvSpPr>
+        <p:spPr>
+          <a:xfrm>
+            <a:off x="7168896" y="6894576"/>
+            <a:ext cx="2103120" cy="292608"/>
+          </a:xfrm>
+          <a:prstGeom prst="rect">
+            <a:avLst/>
+          </a:prstGeom>
+          <a:noFill/>
+        </p:spPr>
+        <p:txBody>
+          <a:bodyPr wrap="square" anchor="ctr" lIns="0" rIns="0" tIns="0" bIns="0">
+            <a:spAutoFit/>
+          </a:bodyPr>
+          <a:lstStyle/>
+          <a:p>
+            <a:pPr algn="ctr">
+              <a:lnSpc>
+                <a:spcPct val="110000"/>
+              </a:lnSpc>
+            </a:pPr>
+            <a:r>
+              <a:rPr sz="1500" b="0">
+                <a:solidFill>
+                  <a:srgbClr val="555555"/>
+                </a:solidFill>
+                <a:latin typeface="Arial"/>
+                <a:ea typeface="Arial"/>
+              </a:rPr>
+              <a:t>섞인 수명 · 작은 쓰기</a:t>
+            </a:r>
+          </a:p>
+        </p:txBody>
+      </p:sp>
+      <p:sp>
+        <p:nvSpPr>
+          <p:cNvPr id="91" name="Rectangle 90"/>
+          <p:cNvSpPr/>
+          <p:nvPr/>
+        </p:nvSpPr>
+        <p:spPr>
+          <a:xfrm>
+            <a:off x="9528048" y="6309360"/>
+            <a:ext cx="146304" cy="146304"/>
+          </a:xfrm>
+          <a:prstGeom prst="rect">
+            <a:avLst/>
+          </a:prstGeom>
+          <a:solidFill>
+            <a:srgbClr val="8A8A8A"/>
+          </a:solidFill>
+          <a:ln>
+            <a:noFill/>
+          </a:ln>
+          <a:effectLst/>
+        </p:spPr>
+        <p:style>
+          <a:lnRef idx="1">
+            <a:schemeClr val="accent1"/>
+          </a:lnRef>
+          <a:fillRef idx="3">
+            <a:schemeClr val="accent1"/>
+          </a:fillRef>
+          <a:effectRef idx="2">
+            <a:schemeClr val="accent1"/>
+          </a:effectRef>
+          <a:fontRef idx="minor">
+            <a:schemeClr val="lt1"/>
+          </a:fontRef>
+        </p:style>
+        <p:txBody>
+          <a:bodyPr rtlCol="0" anchor="ctr"/>
+          <a:lstStyle/>
+          <a:p>
+            <a:pPr algn="ctr"/>
+          </a:p>
+        </p:txBody>
+      </p:sp>
+      <p:sp>
+        <p:nvSpPr>
+          <p:cNvPr id="92" name="Rectangle 91"/>
+          <p:cNvSpPr/>
+          <p:nvPr/>
+        </p:nvSpPr>
+        <p:spPr>
+          <a:xfrm>
+            <a:off x="9729216" y="6309360"/>
+            <a:ext cx="146304" cy="146304"/>
+          </a:xfrm>
+          <a:prstGeom prst="rect">
+            <a:avLst/>
+          </a:prstGeom>
+          <a:solidFill>
+            <a:srgbClr val="8A8A8A"/>
+          </a:solidFill>
+          <a:ln>
+            <a:noFill/>
+          </a:ln>
+          <a:effectLst/>
+        </p:spPr>
+        <p:style>
+          <a:lnRef idx="1">
+            <a:schemeClr val="accent1"/>
+          </a:lnRef>
+          <a:fillRef idx="3">
+            <a:schemeClr val="accent1"/>
+          </a:fillRef>
+          <a:effectRef idx="2">
+            <a:schemeClr val="accent1"/>
+          </a:effectRef>
+          <a:fontRef idx="minor">
+            <a:schemeClr val="lt1"/>
+          </a:fontRef>
+        </p:style>
+        <p:txBody>
+          <a:bodyPr rtlCol="0" anchor="ctr"/>
+          <a:lstStyle/>
+          <a:p>
+            <a:pPr algn="ctr"/>
+          </a:p>
+        </p:txBody>
+      </p:sp>
+      <p:sp>
+        <p:nvSpPr>
+          <p:cNvPr id="93" name="Rectangle 92"/>
+          <p:cNvSpPr/>
+          <p:nvPr/>
+        </p:nvSpPr>
+        <p:spPr>
+          <a:xfrm>
+            <a:off x="9930384" y="6309360"/>
+            <a:ext cx="146304" cy="146304"/>
+          </a:xfrm>
+          <a:prstGeom prst="rect">
+            <a:avLst/>
+          </a:prstGeom>
+          <a:solidFill>
+            <a:srgbClr val="8A8A8A"/>
+          </a:solidFill>
+          <a:ln>
+            <a:noFill/>
+          </a:ln>
+          <a:effectLst/>
+        </p:spPr>
+        <p:style>
+          <a:lnRef idx="1">
+            <a:schemeClr val="accent1"/>
+          </a:lnRef>
+          <a:fillRef idx="3">
+            <a:schemeClr val="accent1"/>
+          </a:fillRef>
+          <a:effectRef idx="2">
+            <a:schemeClr val="accent1"/>
+          </a:effectRef>
+          <a:fontRef idx="minor">
+            <a:schemeClr val="lt1"/>
+          </a:fontRef>
+        </p:style>
+        <p:txBody>
+          <a:bodyPr rtlCol="0" anchor="ctr"/>
+          <a:lstStyle/>
+          <a:p>
+            <a:pPr algn="ctr"/>
+          </a:p>
+        </p:txBody>
+      </p:sp>
+      <p:sp>
+        <p:nvSpPr>
+          <p:cNvPr id="94" name="Rectangle 93"/>
+          <p:cNvSpPr/>
+          <p:nvPr/>
+        </p:nvSpPr>
+        <p:spPr>
+          <a:xfrm>
+            <a:off x="9528048" y="6528816"/>
+            <a:ext cx="146304" cy="146304"/>
+          </a:xfrm>
+          <a:prstGeom prst="rect">
+            <a:avLst/>
+          </a:prstGeom>
+          <a:solidFill>
+            <a:srgbClr val="8A8A8A"/>
+          </a:solidFill>
+          <a:ln>
+            <a:noFill/>
+          </a:ln>
+          <a:effectLst/>
+        </p:spPr>
+        <p:style>
+          <a:lnRef idx="1">
+            <a:schemeClr val="accent1"/>
+          </a:lnRef>
+          <a:fillRef idx="3">
+            <a:schemeClr val="accent1"/>
+          </a:fillRef>
+          <a:effectRef idx="2">
+            <a:schemeClr val="accent1"/>
+          </a:effectRef>
+          <a:fontRef idx="minor">
+            <a:schemeClr val="lt1"/>
+          </a:fontRef>
+        </p:style>
+        <p:txBody>
+          <a:bodyPr rtlCol="0" anchor="ctr"/>
+          <a:lstStyle/>
+          <a:p>
+            <a:pPr algn="ctr"/>
+          </a:p>
+        </p:txBody>
+      </p:sp>
+      <p:sp>
+        <p:nvSpPr>
+          <p:cNvPr id="95" name="Rectangle 94"/>
+          <p:cNvSpPr/>
+          <p:nvPr/>
+        </p:nvSpPr>
+        <p:spPr>
+          <a:xfrm>
+            <a:off x="9729216" y="6528816"/>
+            <a:ext cx="146304" cy="146304"/>
+          </a:xfrm>
+          <a:prstGeom prst="rect">
+            <a:avLst/>
+          </a:prstGeom>
+          <a:solidFill>
+            <a:srgbClr val="8A8A8A"/>
+          </a:solidFill>
+          <a:ln>
+            <a:noFill/>
+          </a:ln>
+          <a:effectLst/>
+        </p:spPr>
+        <p:style>
+          <a:lnRef idx="1">
+            <a:schemeClr val="accent1"/>
+          </a:lnRef>
+          <a:fillRef idx="3">
+            <a:schemeClr val="accent1"/>
+          </a:fillRef>
+          <a:effectRef idx="2">
+            <a:schemeClr val="accent1"/>
+          </a:effectRef>
+          <a:fontRef idx="minor">
+            <a:schemeClr val="lt1"/>
+          </a:fontRef>
+        </p:style>
+        <p:txBody>
+          <a:bodyPr rtlCol="0" anchor="ctr"/>
+          <a:lstStyle/>
+          <a:p>
+            <a:pPr algn="ctr"/>
+          </a:p>
+        </p:txBody>
+      </p:sp>
+      <p:sp>
+        <p:nvSpPr>
+          <p:cNvPr id="96" name="Rectangle 95"/>
+          <p:cNvSpPr/>
+          <p:nvPr/>
+        </p:nvSpPr>
+        <p:spPr>
+          <a:xfrm>
+            <a:off x="9930384" y="6528816"/>
+            <a:ext cx="146304" cy="146304"/>
+          </a:xfrm>
+          <a:prstGeom prst="rect">
+            <a:avLst/>
+          </a:prstGeom>
+          <a:solidFill>
+            <a:srgbClr val="8A8A8A"/>
+          </a:solidFill>
+          <a:ln>
+            <a:noFill/>
+          </a:ln>
+          <a:effectLst/>
+        </p:spPr>
+        <p:style>
+          <a:lnRef idx="1">
+            <a:schemeClr val="accent1"/>
+          </a:lnRef>
+          <a:fillRef idx="3">
+            <a:schemeClr val="accent1"/>
+          </a:fillRef>
+          <a:effectRef idx="2">
+            <a:schemeClr val="accent1"/>
+          </a:effectRef>
+          <a:fontRef idx="minor">
+            <a:schemeClr val="lt1"/>
+          </a:fontRef>
+        </p:style>
+        <p:txBody>
+          <a:bodyPr rtlCol="0" anchor="ctr"/>
+          <a:lstStyle/>
+          <a:p>
+            <a:pPr algn="ctr"/>
+          </a:p>
+        </p:txBody>
+      </p:sp>
+      <p:sp>
+        <p:nvSpPr>
+          <p:cNvPr id="97" name="Right Arrow 96"/>
+          <p:cNvSpPr/>
+          <p:nvPr/>
+        </p:nvSpPr>
+        <p:spPr>
+          <a:xfrm>
+            <a:off x="10186416" y="6419088"/>
+            <a:ext cx="237744" cy="182880"/>
+          </a:xfrm>
+          <a:prstGeom prst="rightArrow">
+            <a:avLst/>
+          </a:prstGeom>
+          <a:solidFill>
+            <a:srgbClr val="8A8A8A"/>
+          </a:solidFill>
+          <a:ln>
+            <a:noFill/>
+          </a:ln>
+          <a:effectLst/>
+        </p:spPr>
+        <p:style>
+          <a:lnRef idx="1">
+            <a:schemeClr val="accent1"/>
+          </a:lnRef>
+          <a:fillRef idx="3">
+            <a:schemeClr val="accent1"/>
+          </a:fillRef>
+          <a:effectRef idx="2">
+            <a:schemeClr val="accent1"/>
+          </a:effectRef>
+          <a:fontRef idx="minor">
+            <a:schemeClr val="lt1"/>
+          </a:fontRef>
+        </p:style>
+        <p:txBody>
+          <a:bodyPr rtlCol="0" anchor="ctr"/>
+          <a:lstStyle/>
+          <a:p>
+            <a:pPr algn="ctr"/>
+          </a:p>
+        </p:txBody>
+      </p:sp>
+      <p:sp>
+        <p:nvSpPr>
+          <p:cNvPr id="98" name="Rounded Rectangle 97"/>
+          <p:cNvSpPr/>
+          <p:nvPr/>
+        </p:nvSpPr>
+        <p:spPr>
+          <a:xfrm>
+            <a:off x="10479024" y="6217920"/>
+            <a:ext cx="1005840" cy="566928"/>
+          </a:xfrm>
+          <a:prstGeom prst="roundRect">
+            <a:avLst>
+              <a:gd name="adj" fmla="val 12903"/>
+            </a:avLst>
+          </a:prstGeom>
+          <a:solidFill>
+            <a:srgbClr val="3C5AC8"/>
+          </a:solidFill>
+          <a:ln>
+            <a:noFill/>
+          </a:ln>
+          <a:effectLst/>
+        </p:spPr>
+        <p:style>
+          <a:lnRef idx="1">
+            <a:schemeClr val="accent1"/>
+          </a:lnRef>
+          <a:fillRef idx="3">
+            <a:schemeClr val="accent1"/>
+          </a:fillRef>
+          <a:effectRef idx="2">
+            <a:schemeClr val="accent1"/>
+          </a:effectRef>
+          <a:fontRef idx="minor">
+            <a:schemeClr val="lt1"/>
+          </a:fontRef>
+        </p:style>
+        <p:txBody>
+          <a:bodyPr rtlCol="0" anchor="ctr"/>
+          <a:lstStyle/>
+          <a:p>
+            <a:pPr algn="ctr"/>
+          </a:p>
+        </p:txBody>
+      </p:sp>
+      <p:sp>
+        <p:nvSpPr>
+          <p:cNvPr id="99" name="TextBox 98"/>
+          <p:cNvSpPr txBox="1"/>
+          <p:nvPr/>
+        </p:nvSpPr>
+        <p:spPr>
+          <a:xfrm>
+            <a:off x="10533888" y="6217920"/>
+            <a:ext cx="896112" cy="566928"/>
+          </a:xfrm>
+          <a:prstGeom prst="rect">
+            <a:avLst/>
+          </a:prstGeom>
+          <a:noFill/>
+        </p:spPr>
+        <p:txBody>
+          <a:bodyPr wrap="square" anchor="ctr" lIns="0" rIns="0" tIns="0" bIns="0">
+            <a:spAutoFit/>
+          </a:bodyPr>
+          <a:lstStyle/>
+          <a:p>
+            <a:pPr algn="ctr">
+              <a:lnSpc>
+                <a:spcPct val="110000"/>
+              </a:lnSpc>
+            </a:pPr>
+            <a:r>
+              <a:rPr sz="1700" b="1">
+                <a:solidFill>
+                  <a:srgbClr val="FFFFFF"/>
+                </a:solidFill>
+                <a:latin typeface="Arial"/>
+                <a:ea typeface="Arial"/>
+              </a:rPr>
+              <a:t>pSLC</a:t>
+            </a:r>
+          </a:p>
+        </p:txBody>
+      </p:sp>
+      <p:sp>
+        <p:nvSpPr>
+          <p:cNvPr id="100" name="Right Arrow 99"/>
+          <p:cNvSpPr/>
+          <p:nvPr/>
+        </p:nvSpPr>
+        <p:spPr>
+          <a:xfrm>
+            <a:off x="11539728" y="6419088"/>
+            <a:ext cx="237744" cy="182880"/>
+          </a:xfrm>
+          <a:prstGeom prst="rightArrow">
+            <a:avLst/>
+          </a:prstGeom>
+          <a:solidFill>
+            <a:srgbClr val="8A8A8A"/>
+          </a:solidFill>
+          <a:ln>
+            <a:noFill/>
+          </a:ln>
+          <a:effectLst/>
+        </p:spPr>
+        <p:style>
+          <a:lnRef idx="1">
+            <a:schemeClr val="accent1"/>
+          </a:lnRef>
+          <a:fillRef idx="3">
+            <a:schemeClr val="accent1"/>
+          </a:fillRef>
+          <a:effectRef idx="2">
+            <a:schemeClr val="accent1"/>
+          </a:effectRef>
+          <a:fontRef idx="minor">
+            <a:schemeClr val="lt1"/>
+          </a:fontRef>
+        </p:style>
+        <p:txBody>
+          <a:bodyPr rtlCol="0" anchor="ctr"/>
+          <a:lstStyle/>
+          <a:p>
+            <a:pPr algn="ctr"/>
+          </a:p>
+        </p:txBody>
+      </p:sp>
+      <p:sp>
+        <p:nvSpPr>
+          <p:cNvPr id="101" name="Rounded Rectangle 100"/>
+          <p:cNvSpPr/>
+          <p:nvPr/>
+        </p:nvSpPr>
+        <p:spPr>
+          <a:xfrm>
+            <a:off x="11832336" y="6217920"/>
+            <a:ext cx="1549908" cy="566928"/>
+          </a:xfrm>
+          <a:prstGeom prst="roundRect">
+            <a:avLst>
+              <a:gd name="adj" fmla="val 12903"/>
+            </a:avLst>
+          </a:prstGeom>
+          <a:solidFill>
+            <a:srgbClr val="1428A0"/>
+          </a:solidFill>
+          <a:ln>
+            <a:noFill/>
+          </a:ln>
+          <a:effectLst/>
+        </p:spPr>
+        <p:style>
+          <a:lnRef idx="1">
+            <a:schemeClr val="accent1"/>
+          </a:lnRef>
+          <a:fillRef idx="3">
+            <a:schemeClr val="accent1"/>
+          </a:fillRef>
+          <a:effectRef idx="2">
+            <a:schemeClr val="accent1"/>
+          </a:effectRef>
+          <a:fontRef idx="minor">
+            <a:schemeClr val="lt1"/>
+          </a:fontRef>
+        </p:style>
+        <p:txBody>
+          <a:bodyPr rtlCol="0" anchor="ctr"/>
+          <a:lstStyle/>
+          <a:p>
+            <a:pPr algn="ctr"/>
+          </a:p>
+        </p:txBody>
+      </p:sp>
+      <p:sp>
+        <p:nvSpPr>
+          <p:cNvPr id="102" name="TextBox 101"/>
+          <p:cNvSpPr txBox="1"/>
+          <p:nvPr/>
+        </p:nvSpPr>
+        <p:spPr>
+          <a:xfrm>
+            <a:off x="11887200" y="6217920"/>
+            <a:ext cx="1440180" cy="566928"/>
+          </a:xfrm>
+          <a:prstGeom prst="rect">
+            <a:avLst/>
+          </a:prstGeom>
+          <a:noFill/>
+        </p:spPr>
+        <p:txBody>
+          <a:bodyPr wrap="square" anchor="ctr" lIns="0" rIns="0" tIns="0" bIns="0">
+            <a:spAutoFit/>
+          </a:bodyPr>
+          <a:lstStyle/>
+          <a:p>
+            <a:pPr algn="ctr">
+              <a:lnSpc>
+                <a:spcPct val="110000"/>
+              </a:lnSpc>
+            </a:pPr>
+            <a:r>
+              <a:rPr sz="1600" b="1">
+                <a:solidFill>
+                  <a:srgbClr val="FFFFFF"/>
+                </a:solidFill>
+                <a:latin typeface="Arial"/>
+                <a:ea typeface="Arial"/>
+              </a:rPr>
+              <a:t>QLC 큰 덩어리</a:t>
+            </a:r>
+          </a:p>
+        </p:txBody>
+      </p:sp>
+      <p:sp>
+        <p:nvSpPr>
+          <p:cNvPr id="103" name="TextBox 102"/>
+          <p:cNvSpPr txBox="1"/>
+          <p:nvPr/>
+        </p:nvSpPr>
+        <p:spPr>
+          <a:xfrm>
+            <a:off x="9400032" y="6894576"/>
+            <a:ext cx="4018788" cy="292608"/>
+          </a:xfrm>
+          <a:prstGeom prst="rect">
+            <a:avLst/>
+          </a:prstGeom>
+          <a:noFill/>
+        </p:spPr>
+        <p:txBody>
+          <a:bodyPr wrap="square" anchor="ctr" lIns="0" rIns="0" tIns="0" bIns="0">
+            <a:spAutoFit/>
+          </a:bodyPr>
+          <a:lstStyle/>
+          <a:p>
+            <a:pPr algn="ctr">
+              <a:lnSpc>
+                <a:spcPct val="110000"/>
+              </a:lnSpc>
+            </a:pPr>
+            <a:r>
+              <a:rPr sz="1500" b="0">
+                <a:solidFill>
+                  <a:srgbClr val="555555"/>
+                </a:solidFill>
+                <a:latin typeface="Arial"/>
+                <a:ea typeface="Arial"/>
+              </a:rPr>
+              <a:t>4KB 쓰기 WAF </a:t>
+            </a:r>
+            <a:r>
+              <a:rPr sz="1700" b="1">
+                <a:solidFill>
+                  <a:srgbClr val="1428A0"/>
+                </a:solidFill>
+                <a:latin typeface="Arial"/>
+                <a:ea typeface="Arial"/>
+              </a:rPr>
+              <a:t>70+ → 1.02</a:t>
+            </a:r>
+            <a:r>
+              <a:rPr sz="1500" b="0">
+                <a:solidFill>
+                  <a:srgbClr val="555555"/>
+                </a:solidFill>
+                <a:latin typeface="Arial"/>
+                <a:ea typeface="Arial"/>
+              </a:rPr>
+              <a:t>  pSLC 0.5~2%</a:t>
+            </a:r>
+          </a:p>
+        </p:txBody>
+      </p:sp>
+      <p:sp>
+        <p:nvSpPr>
+          <p:cNvPr id="104" name="Rounded Rectangle 103"/>
+          <p:cNvSpPr/>
+          <p:nvPr/>
+        </p:nvSpPr>
+        <p:spPr>
+          <a:xfrm>
+            <a:off x="13601700" y="6181344"/>
+            <a:ext cx="1005840" cy="640080"/>
+          </a:xfrm>
+          <a:prstGeom prst="roundRect">
+            <a:avLst>
+              <a:gd name="adj" fmla="val 11428"/>
+            </a:avLst>
+          </a:prstGeom>
+          <a:solidFill>
+            <a:srgbClr val="F5F5F5"/>
+          </a:solidFill>
+          <a:ln>
+            <a:noFill/>
+          </a:ln>
+          <a:effectLst/>
+        </p:spPr>
+        <p:style>
+          <a:lnRef idx="1">
+            <a:schemeClr val="accent1"/>
+          </a:lnRef>
+          <a:fillRef idx="3">
+            <a:schemeClr val="accent1"/>
+          </a:fillRef>
+          <a:effectRef idx="2">
+            <a:schemeClr val="accent1"/>
+          </a:effectRef>
+          <a:fontRef idx="minor">
+            <a:schemeClr val="lt1"/>
+          </a:fontRef>
+        </p:style>
+        <p:txBody>
+          <a:bodyPr rtlCol="0" anchor="ctr"/>
+          <a:lstStyle/>
+          <a:p>
+            <a:pPr algn="ctr"/>
+          </a:p>
+        </p:txBody>
+      </p:sp>
+      <p:sp>
+        <p:nvSpPr>
+          <p:cNvPr id="105" name="TextBox 104"/>
+          <p:cNvSpPr txBox="1"/>
+          <p:nvPr/>
+        </p:nvSpPr>
+        <p:spPr>
+          <a:xfrm>
+            <a:off x="13656564" y="6181344"/>
+            <a:ext cx="896112" cy="640080"/>
+          </a:xfrm>
+          <a:prstGeom prst="rect">
+            <a:avLst/>
+          </a:prstGeom>
+          <a:noFill/>
+        </p:spPr>
+        <p:txBody>
+          <a:bodyPr wrap="square" anchor="ctr" lIns="0" rIns="0" tIns="0" bIns="0">
+            <a:spAutoFit/>
+          </a:bodyPr>
+          <a:lstStyle/>
+          <a:p>
+            <a:pPr algn="ctr">
+              <a:lnSpc>
+                <a:spcPct val="110000"/>
+              </a:lnSpc>
+            </a:pPr>
+            <a:r>
+              <a:rPr sz="1500" b="1">
+                <a:solidFill>
+                  <a:srgbClr val="1A1A1A"/>
+                </a:solidFill>
+                <a:latin typeface="Arial"/>
+                <a:ea typeface="Arial"/>
+              </a:rPr>
+              <a:t>고객</a:t>
+            </a:r>
+          </a:p>
+          <a:p>
+            <a:pPr algn="ctr">
+              <a:lnSpc>
+                <a:spcPct val="110000"/>
+              </a:lnSpc>
+            </a:pPr>
+            <a:r>
+              <a:rPr sz="1500" b="1">
+                <a:solidFill>
+                  <a:srgbClr val="1A1A1A"/>
+                </a:solidFill>
+                <a:latin typeface="Arial"/>
+                <a:ea typeface="Arial"/>
+              </a:rPr>
+              <a:t>호스트</a:t>
+            </a:r>
+          </a:p>
+        </p:txBody>
+      </p:sp>
+      <p:sp>
+        <p:nvSpPr>
+          <p:cNvPr id="106" name="Right Arrow 105"/>
+          <p:cNvSpPr/>
+          <p:nvPr/>
+        </p:nvSpPr>
+        <p:spPr>
+          <a:xfrm>
+            <a:off x="14662404" y="6217920"/>
+            <a:ext cx="274320" cy="146304"/>
+          </a:xfrm>
+          <a:prstGeom prst="rightArrow">
+            <a:avLst/>
+          </a:prstGeom>
+          <a:solidFill>
+            <a:srgbClr val="1428A0"/>
+          </a:solidFill>
+          <a:ln>
+            <a:noFill/>
+          </a:ln>
+          <a:effectLst/>
+        </p:spPr>
+        <p:style>
+          <a:lnRef idx="1">
+            <a:schemeClr val="accent1"/>
+          </a:lnRef>
+          <a:fillRef idx="3">
+            <a:schemeClr val="accent1"/>
+          </a:fillRef>
+          <a:effectRef idx="2">
+            <a:schemeClr val="accent1"/>
+          </a:effectRef>
+          <a:fontRef idx="minor">
+            <a:schemeClr val="lt1"/>
+          </a:fontRef>
+        </p:style>
+        <p:txBody>
+          <a:bodyPr rtlCol="0" anchor="ctr"/>
+          <a:lstStyle/>
+          <a:p>
+            <a:pPr algn="ctr"/>
+          </a:p>
+        </p:txBody>
+      </p:sp>
+      <p:sp>
+        <p:nvSpPr>
+          <p:cNvPr id="107" name="Rectangle 106"/>
+          <p:cNvSpPr/>
+          <p:nvPr/>
+        </p:nvSpPr>
+        <p:spPr>
+          <a:xfrm>
+            <a:off x="15009876" y="6217920"/>
+            <a:ext cx="201168" cy="146304"/>
+          </a:xfrm>
+          <a:prstGeom prst="rect">
+            <a:avLst/>
+          </a:prstGeom>
+          <a:solidFill>
+            <a:srgbClr val="1428A0"/>
+          </a:solidFill>
+          <a:ln>
+            <a:noFill/>
+          </a:ln>
+          <a:effectLst/>
+        </p:spPr>
+        <p:style>
+          <a:lnRef idx="1">
+            <a:schemeClr val="accent1"/>
+          </a:lnRef>
+          <a:fillRef idx="3">
+            <a:schemeClr val="accent1"/>
+          </a:fillRef>
+          <a:effectRef idx="2">
+            <a:schemeClr val="accent1"/>
+          </a:effectRef>
+          <a:fontRef idx="minor">
+            <a:schemeClr val="lt1"/>
+          </a:fontRef>
+        </p:style>
+        <p:txBody>
+          <a:bodyPr rtlCol="0" anchor="ctr"/>
+          <a:lstStyle/>
+          <a:p>
+            <a:pPr algn="ctr"/>
+          </a:p>
+        </p:txBody>
+      </p:sp>
+      <p:sp>
+        <p:nvSpPr>
+          <p:cNvPr id="108" name="Rectangle 107"/>
+          <p:cNvSpPr/>
+          <p:nvPr/>
+        </p:nvSpPr>
+        <p:spPr>
+          <a:xfrm>
+            <a:off x="15247620" y="6217920"/>
+            <a:ext cx="201168" cy="146304"/>
+          </a:xfrm>
+          <a:prstGeom prst="rect">
+            <a:avLst/>
+          </a:prstGeom>
+          <a:solidFill>
+            <a:srgbClr val="1428A0"/>
+          </a:solidFill>
+          <a:ln>
+            <a:noFill/>
+          </a:ln>
+          <a:effectLst/>
+        </p:spPr>
+        <p:style>
+          <a:lnRef idx="1">
+            <a:schemeClr val="accent1"/>
+          </a:lnRef>
+          <a:fillRef idx="3">
+            <a:schemeClr val="accent1"/>
+          </a:fillRef>
+          <a:effectRef idx="2">
+            <a:schemeClr val="accent1"/>
+          </a:effectRef>
+          <a:fontRef idx="minor">
+            <a:schemeClr val="lt1"/>
+          </a:fontRef>
+        </p:style>
+        <p:txBody>
+          <a:bodyPr rtlCol="0" anchor="ctr"/>
+          <a:lstStyle/>
+          <a:p>
+            <a:pPr algn="ctr"/>
+          </a:p>
+        </p:txBody>
+      </p:sp>
+      <p:sp>
+        <p:nvSpPr>
+          <p:cNvPr id="109" name="Rectangle 108"/>
+          <p:cNvSpPr/>
+          <p:nvPr/>
+        </p:nvSpPr>
+        <p:spPr>
+          <a:xfrm>
+            <a:off x="15485363" y="6217920"/>
+            <a:ext cx="201168" cy="146304"/>
+          </a:xfrm>
+          <a:prstGeom prst="rect">
+            <a:avLst/>
+          </a:prstGeom>
+          <a:solidFill>
+            <a:srgbClr val="1428A0"/>
+          </a:solidFill>
+          <a:ln>
+            <a:noFill/>
+          </a:ln>
+          <a:effectLst/>
+        </p:spPr>
+        <p:style>
+          <a:lnRef idx="1">
+            <a:schemeClr val="accent1"/>
+          </a:lnRef>
+          <a:fillRef idx="3">
+            <a:schemeClr val="accent1"/>
+          </a:fillRef>
+          <a:effectRef idx="2">
+            <a:schemeClr val="accent1"/>
+          </a:effectRef>
+          <a:fontRef idx="minor">
+            <a:schemeClr val="lt1"/>
+          </a:fontRef>
+        </p:style>
+        <p:txBody>
+          <a:bodyPr rtlCol="0" anchor="ctr"/>
+          <a:lstStyle/>
+          <a:p>
+            <a:pPr algn="ctr"/>
+          </a:p>
+        </p:txBody>
+      </p:sp>
+      <p:sp>
+        <p:nvSpPr>
+          <p:cNvPr id="110" name="Rectangle 109"/>
+          <p:cNvSpPr/>
+          <p:nvPr/>
+        </p:nvSpPr>
+        <p:spPr>
+          <a:xfrm>
+            <a:off x="15723108" y="6217920"/>
+            <a:ext cx="201168" cy="146304"/>
+          </a:xfrm>
+          <a:prstGeom prst="rect">
+            <a:avLst/>
+          </a:prstGeom>
+          <a:solidFill>
+            <a:srgbClr val="1428A0"/>
+          </a:solidFill>
+          <a:ln>
+            <a:noFill/>
+          </a:ln>
+          <a:effectLst/>
+        </p:spPr>
+        <p:style>
+          <a:lnRef idx="1">
+            <a:schemeClr val="accent1"/>
+          </a:lnRef>
+          <a:fillRef idx="3">
+            <a:schemeClr val="accent1"/>
+          </a:fillRef>
+          <a:effectRef idx="2">
+            <a:schemeClr val="accent1"/>
+          </a:effectRef>
+          <a:fontRef idx="minor">
+            <a:schemeClr val="lt1"/>
+          </a:fontRef>
+        </p:style>
+        <p:txBody>
+          <a:bodyPr rtlCol="0" anchor="ctr"/>
+          <a:lstStyle/>
+          <a:p>
+            <a:pPr algn="ctr"/>
+          </a:p>
+        </p:txBody>
+      </p:sp>
+      <p:sp>
+        <p:nvSpPr>
+          <p:cNvPr id="111" name="Rectangle 110"/>
+          <p:cNvSpPr/>
+          <p:nvPr/>
+        </p:nvSpPr>
+        <p:spPr>
+          <a:xfrm>
+            <a:off x="15960851" y="6217920"/>
+            <a:ext cx="201168" cy="146304"/>
+          </a:xfrm>
+          <a:prstGeom prst="rect">
+            <a:avLst/>
+          </a:prstGeom>
+          <a:solidFill>
+            <a:srgbClr val="1428A0"/>
+          </a:solidFill>
+          <a:ln>
+            <a:noFill/>
+          </a:ln>
+          <a:effectLst/>
+        </p:spPr>
+        <p:style>
+          <a:lnRef idx="1">
+            <a:schemeClr val="accent1"/>
+          </a:lnRef>
+          <a:fillRef idx="3">
+            <a:schemeClr val="accent1"/>
+          </a:fillRef>
+          <a:effectRef idx="2">
+            <a:schemeClr val="accent1"/>
+          </a:effectRef>
+          <a:fontRef idx="minor">
+            <a:schemeClr val="lt1"/>
+          </a:fontRef>
+        </p:style>
+        <p:txBody>
+          <a:bodyPr rtlCol="0" anchor="ctr"/>
+          <a:lstStyle/>
+          <a:p>
+            <a:pPr algn="ctr"/>
+          </a:p>
+        </p:txBody>
+      </p:sp>
+      <p:sp>
+        <p:nvSpPr>
+          <p:cNvPr id="112" name="Rectangle 111"/>
+          <p:cNvSpPr/>
+          <p:nvPr/>
+        </p:nvSpPr>
+        <p:spPr>
+          <a:xfrm>
+            <a:off x="16198596" y="6217920"/>
+            <a:ext cx="201168" cy="146304"/>
+          </a:xfrm>
+          <a:prstGeom prst="rect">
+            <a:avLst/>
+          </a:prstGeom>
+          <a:solidFill>
+            <a:srgbClr val="1428A0"/>
+          </a:solidFill>
+          <a:ln>
+            <a:noFill/>
+          </a:ln>
+          <a:effectLst/>
+        </p:spPr>
+        <p:style>
+          <a:lnRef idx="1">
+            <a:schemeClr val="accent1"/>
+          </a:lnRef>
+          <a:fillRef idx="3">
+            <a:schemeClr val="accent1"/>
+          </a:fillRef>
+          <a:effectRef idx="2">
+            <a:schemeClr val="accent1"/>
+          </a:effectRef>
+          <a:fontRef idx="minor">
+            <a:schemeClr val="lt1"/>
+          </a:fontRef>
+        </p:style>
+        <p:txBody>
+          <a:bodyPr rtlCol="0" anchor="ctr"/>
+          <a:lstStyle/>
+          <a:p>
+            <a:pPr algn="ctr"/>
+          </a:p>
+        </p:txBody>
+      </p:sp>
+      <p:sp>
+        <p:nvSpPr>
+          <p:cNvPr id="113" name="Rectangle 112"/>
+          <p:cNvSpPr/>
+          <p:nvPr/>
+        </p:nvSpPr>
+        <p:spPr>
+          <a:xfrm>
+            <a:off x="16436339" y="6217920"/>
+            <a:ext cx="201168" cy="146304"/>
+          </a:xfrm>
+          <a:prstGeom prst="rect">
+            <a:avLst/>
+          </a:prstGeom>
+          <a:solidFill>
+            <a:srgbClr val="1428A0"/>
+          </a:solidFill>
+          <a:ln>
+            <a:noFill/>
+          </a:ln>
+          <a:effectLst/>
+        </p:spPr>
+        <p:style>
+          <a:lnRef idx="1">
+            <a:schemeClr val="accent1"/>
+          </a:lnRef>
+          <a:fillRef idx="3">
+            <a:schemeClr val="accent1"/>
+          </a:fillRef>
+          <a:effectRef idx="2">
+            <a:schemeClr val="accent1"/>
+          </a:effectRef>
+          <a:fontRef idx="minor">
+            <a:schemeClr val="lt1"/>
+          </a:fontRef>
+        </p:style>
+        <p:txBody>
+          <a:bodyPr rtlCol="0" anchor="ctr"/>
+          <a:lstStyle/>
+          <a:p>
+            <a:pPr algn="ctr"/>
+          </a:p>
+        </p:txBody>
+      </p:sp>
+      <p:sp>
+        <p:nvSpPr>
+          <p:cNvPr id="114" name="Rectangle 113"/>
+          <p:cNvSpPr/>
+          <p:nvPr/>
+        </p:nvSpPr>
+        <p:spPr>
+          <a:xfrm>
+            <a:off x="16674084" y="6217920"/>
+            <a:ext cx="201168" cy="146304"/>
+          </a:xfrm>
+          <a:prstGeom prst="rect">
+            <a:avLst/>
+          </a:prstGeom>
+          <a:solidFill>
+            <a:srgbClr val="1428A0"/>
+          </a:solidFill>
+          <a:ln>
+            <a:noFill/>
+          </a:ln>
+          <a:effectLst/>
+        </p:spPr>
+        <p:style>
+          <a:lnRef idx="1">
+            <a:schemeClr val="accent1"/>
+          </a:lnRef>
+          <a:fillRef idx="3">
+            <a:schemeClr val="accent1"/>
+          </a:fillRef>
+          <a:effectRef idx="2">
+            <a:schemeClr val="accent1"/>
+          </a:effectRef>
+          <a:fontRef idx="minor">
+            <a:schemeClr val="lt1"/>
+          </a:fontRef>
+        </p:style>
+        <p:txBody>
+          <a:bodyPr rtlCol="0" anchor="ctr"/>
+          <a:lstStyle/>
+          <a:p>
+            <a:pPr algn="ctr"/>
+          </a:p>
+        </p:txBody>
+      </p:sp>
+      <p:sp>
+        <p:nvSpPr>
+          <p:cNvPr id="115" name="Rectangle 114"/>
+          <p:cNvSpPr/>
+          <p:nvPr/>
+        </p:nvSpPr>
+        <p:spPr>
+          <a:xfrm>
+            <a:off x="16911827" y="6217920"/>
+            <a:ext cx="201168" cy="146304"/>
+          </a:xfrm>
+          <a:prstGeom prst="rect">
+            <a:avLst/>
+          </a:prstGeom>
+          <a:solidFill>
+            <a:srgbClr val="1428A0"/>
+          </a:solidFill>
+          <a:ln>
+            <a:noFill/>
+          </a:ln>
+          <a:effectLst/>
+        </p:spPr>
+        <p:style>
+          <a:lnRef idx="1">
+            <a:schemeClr val="accent1"/>
+          </a:lnRef>
+          <a:fillRef idx="3">
+            <a:schemeClr val="accent1"/>
+          </a:fillRef>
+          <a:effectRef idx="2">
+            <a:schemeClr val="accent1"/>
+          </a:effectRef>
+          <a:fontRef idx="minor">
+            <a:schemeClr val="lt1"/>
+          </a:fontRef>
+        </p:style>
+        <p:txBody>
+          <a:bodyPr rtlCol="0" anchor="ctr"/>
+          <a:lstStyle/>
+          <a:p>
+            <a:pPr algn="ctr"/>
+          </a:p>
+        </p:txBody>
+      </p:sp>
+      <p:sp>
+        <p:nvSpPr>
+          <p:cNvPr id="116" name="Rectangle 115"/>
+          <p:cNvSpPr/>
+          <p:nvPr/>
+        </p:nvSpPr>
+        <p:spPr>
+          <a:xfrm>
+            <a:off x="17149572" y="6217920"/>
+            <a:ext cx="201168" cy="146304"/>
+          </a:xfrm>
+          <a:prstGeom prst="rect">
+            <a:avLst/>
+          </a:prstGeom>
+          <a:solidFill>
+            <a:srgbClr val="1428A0"/>
+          </a:solidFill>
+          <a:ln>
+            <a:noFill/>
+          </a:ln>
+          <a:effectLst/>
+        </p:spPr>
+        <p:style>
+          <a:lnRef idx="1">
+            <a:schemeClr val="accent1"/>
+          </a:lnRef>
+          <a:fillRef idx="3">
+            <a:schemeClr val="accent1"/>
+          </a:fillRef>
+          <a:effectRef idx="2">
+            <a:schemeClr val="accent1"/>
+          </a:effectRef>
+          <a:fontRef idx="minor">
+            <a:schemeClr val="lt1"/>
+          </a:fontRef>
+        </p:style>
+        <p:txBody>
+          <a:bodyPr rtlCol="0" anchor="ctr"/>
+          <a:lstStyle/>
+          <a:p>
+            <a:pPr algn="ctr"/>
+          </a:p>
+        </p:txBody>
+      </p:sp>
+      <p:sp>
+        <p:nvSpPr>
+          <p:cNvPr id="117" name="Right Arrow 116"/>
+          <p:cNvSpPr/>
+          <p:nvPr/>
+        </p:nvSpPr>
+        <p:spPr>
+          <a:xfrm>
+            <a:off x="14662404" y="6419088"/>
+            <a:ext cx="274320" cy="146304"/>
+          </a:xfrm>
+          <a:prstGeom prst="rightArrow">
+            <a:avLst/>
+          </a:prstGeom>
+          <a:solidFill>
+            <a:srgbClr val="3C5AC8"/>
+          </a:solidFill>
+          <a:ln>
+            <a:noFill/>
+          </a:ln>
+          <a:effectLst/>
+        </p:spPr>
+        <p:style>
+          <a:lnRef idx="1">
+            <a:schemeClr val="accent1"/>
+          </a:lnRef>
+          <a:fillRef idx="3">
+            <a:schemeClr val="accent1"/>
+          </a:fillRef>
+          <a:effectRef idx="2">
+            <a:schemeClr val="accent1"/>
+          </a:effectRef>
+          <a:fontRef idx="minor">
+            <a:schemeClr val="lt1"/>
+          </a:fontRef>
+        </p:style>
+        <p:txBody>
+          <a:bodyPr rtlCol="0" anchor="ctr"/>
+          <a:lstStyle/>
+          <a:p>
+            <a:pPr algn="ctr"/>
+          </a:p>
+        </p:txBody>
+      </p:sp>
+      <p:sp>
+        <p:nvSpPr>
+          <p:cNvPr id="118" name="Rectangle 117"/>
+          <p:cNvSpPr/>
+          <p:nvPr/>
+        </p:nvSpPr>
+        <p:spPr>
+          <a:xfrm>
+            <a:off x="15009876" y="6419088"/>
+            <a:ext cx="201168" cy="146304"/>
+          </a:xfrm>
+          <a:prstGeom prst="rect">
+            <a:avLst/>
+          </a:prstGeom>
+          <a:solidFill>
+            <a:srgbClr val="3C5AC8"/>
+          </a:solidFill>
+          <a:ln>
+            <a:noFill/>
+          </a:ln>
+          <a:effectLst/>
+        </p:spPr>
+        <p:style>
+          <a:lnRef idx="1">
+            <a:schemeClr val="accent1"/>
+          </a:lnRef>
+          <a:fillRef idx="3">
+            <a:schemeClr val="accent1"/>
+          </a:fillRef>
+          <a:effectRef idx="2">
+            <a:schemeClr val="accent1"/>
+          </a:effectRef>
+          <a:fontRef idx="minor">
+            <a:schemeClr val="lt1"/>
+          </a:fontRef>
+        </p:style>
+        <p:txBody>
+          <a:bodyPr rtlCol="0" anchor="ctr"/>
+          <a:lstStyle/>
+          <a:p>
+            <a:pPr algn="ctr"/>
+          </a:p>
+        </p:txBody>
+      </p:sp>
+      <p:sp>
+        <p:nvSpPr>
+          <p:cNvPr id="119" name="Rectangle 118"/>
+          <p:cNvSpPr/>
+          <p:nvPr/>
+        </p:nvSpPr>
+        <p:spPr>
+          <a:xfrm>
+            <a:off x="15247620" y="6419088"/>
+            <a:ext cx="201168" cy="146304"/>
+          </a:xfrm>
+          <a:prstGeom prst="rect">
+            <a:avLst/>
+          </a:prstGeom>
+          <a:solidFill>
+            <a:srgbClr val="3C5AC8"/>
+          </a:solidFill>
+          <a:ln>
+            <a:noFill/>
+          </a:ln>
+          <a:effectLst/>
+        </p:spPr>
+        <p:style>
+          <a:lnRef idx="1">
+            <a:schemeClr val="accent1"/>
+          </a:lnRef>
+          <a:fillRef idx="3">
+            <a:schemeClr val="accent1"/>
+          </a:fillRef>
+          <a:effectRef idx="2">
+            <a:schemeClr val="accent1"/>
+          </a:effectRef>
+          <a:fontRef idx="minor">
+            <a:schemeClr val="lt1"/>
+          </a:fontRef>
+        </p:style>
+        <p:txBody>
+          <a:bodyPr rtlCol="0" anchor="ctr"/>
+          <a:lstStyle/>
+          <a:p>
+            <a:pPr algn="ctr"/>
+          </a:p>
+        </p:txBody>
+      </p:sp>
+      <p:sp>
+        <p:nvSpPr>
+          <p:cNvPr id="120" name="Rectangle 119"/>
+          <p:cNvSpPr/>
+          <p:nvPr/>
+        </p:nvSpPr>
+        <p:spPr>
+          <a:xfrm>
+            <a:off x="15485363" y="6419088"/>
+            <a:ext cx="201168" cy="146304"/>
+          </a:xfrm>
+          <a:prstGeom prst="rect">
+            <a:avLst/>
+          </a:prstGeom>
+          <a:solidFill>
+            <a:srgbClr val="3C5AC8"/>
+          </a:solidFill>
+          <a:ln>
+            <a:noFill/>
+          </a:ln>
+          <a:effectLst/>
+        </p:spPr>
+        <p:style>
+          <a:lnRef idx="1">
+            <a:schemeClr val="accent1"/>
+          </a:lnRef>
+          <a:fillRef idx="3">
+            <a:schemeClr val="accent1"/>
+          </a:fillRef>
+          <a:effectRef idx="2">
+            <a:schemeClr val="accent1"/>
+          </a:effectRef>
+          <a:fontRef idx="minor">
+            <a:schemeClr val="lt1"/>
+          </a:fontRef>
+        </p:style>
+        <p:txBody>
+          <a:bodyPr rtlCol="0" anchor="ctr"/>
+          <a:lstStyle/>
+          <a:p>
+            <a:pPr algn="ctr"/>
+          </a:p>
+        </p:txBody>
+      </p:sp>
+      <p:sp>
+        <p:nvSpPr>
+          <p:cNvPr id="121" name="Rectangle 120"/>
+          <p:cNvSpPr/>
+          <p:nvPr/>
+        </p:nvSpPr>
+        <p:spPr>
+          <a:xfrm>
+            <a:off x="15723108" y="6419088"/>
+            <a:ext cx="201168" cy="146304"/>
+          </a:xfrm>
+          <a:prstGeom prst="rect">
+            <a:avLst/>
+          </a:prstGeom>
+          <a:solidFill>
+            <a:srgbClr val="3C5AC8"/>
+          </a:solidFill>
+          <a:ln>
+            <a:noFill/>
+          </a:ln>
+          <a:effectLst/>
+        </p:spPr>
+        <p:style>
+          <a:lnRef idx="1">
+            <a:schemeClr val="accent1"/>
+          </a:lnRef>
+          <a:fillRef idx="3">
+            <a:schemeClr val="accent1"/>
+          </a:fillRef>
+          <a:effectRef idx="2">
+            <a:schemeClr val="accent1"/>
+          </a:effectRef>
+          <a:fontRef idx="minor">
+            <a:schemeClr val="lt1"/>
+          </a:fontRef>
+        </p:style>
+        <p:txBody>
+          <a:bodyPr rtlCol="0" anchor="ctr"/>
+          <a:lstStyle/>
+          <a:p>
+            <a:pPr algn="ctr"/>
+          </a:p>
+        </p:txBody>
+      </p:sp>
+      <p:sp>
+        <p:nvSpPr>
+          <p:cNvPr id="122" name="Rectangle 121"/>
+          <p:cNvSpPr/>
+          <p:nvPr/>
+        </p:nvSpPr>
+        <p:spPr>
+          <a:xfrm>
+            <a:off x="15960851" y="6419088"/>
+            <a:ext cx="201168" cy="146304"/>
+          </a:xfrm>
+          <a:prstGeom prst="rect">
+            <a:avLst/>
+          </a:prstGeom>
+          <a:solidFill>
+            <a:srgbClr val="3C5AC8"/>
+          </a:solidFill>
+          <a:ln>
+            <a:noFill/>
+          </a:ln>
+          <a:effectLst/>
+        </p:spPr>
+        <p:style>
+          <a:lnRef idx="1">
+            <a:schemeClr val="accent1"/>
+          </a:lnRef>
+          <a:fillRef idx="3">
+            <a:schemeClr val="accent1"/>
+          </a:fillRef>
+          <a:effectRef idx="2">
+            <a:schemeClr val="accent1"/>
+          </a:effectRef>
+          <a:fontRef idx="minor">
+            <a:schemeClr val="lt1"/>
+          </a:fontRef>
+        </p:style>
+        <p:txBody>
+          <a:bodyPr rtlCol="0" anchor="ctr"/>
+          <a:lstStyle/>
+          <a:p>
+            <a:pPr algn="ctr"/>
+          </a:p>
+        </p:txBody>
+      </p:sp>
+      <p:sp>
+        <p:nvSpPr>
+          <p:cNvPr id="123" name="Rectangle 122"/>
+          <p:cNvSpPr/>
+          <p:nvPr/>
+        </p:nvSpPr>
+        <p:spPr>
+          <a:xfrm>
+            <a:off x="16198596" y="6419088"/>
+            <a:ext cx="201168" cy="146304"/>
+          </a:xfrm>
+          <a:prstGeom prst="rect">
+            <a:avLst/>
+          </a:prstGeom>
+          <a:solidFill>
+            <a:srgbClr val="3C5AC8"/>
+          </a:solidFill>
+          <a:ln>
+            <a:noFill/>
+          </a:ln>
+          <a:effectLst/>
+        </p:spPr>
+        <p:style>
+          <a:lnRef idx="1">
+            <a:schemeClr val="accent1"/>
+          </a:lnRef>
+          <a:fillRef idx="3">
+            <a:schemeClr val="accent1"/>
+          </a:fillRef>
+          <a:effectRef idx="2">
+            <a:schemeClr val="accent1"/>
+          </a:effectRef>
+          <a:fontRef idx="minor">
+            <a:schemeClr val="lt1"/>
+          </a:fontRef>
+        </p:style>
+        <p:txBody>
+          <a:bodyPr rtlCol="0" anchor="ctr"/>
+          <a:lstStyle/>
+          <a:p>
+            <a:pPr algn="ctr"/>
+          </a:p>
+        </p:txBody>
+      </p:sp>
+      <p:sp>
+        <p:nvSpPr>
+          <p:cNvPr id="124" name="Rectangle 123"/>
+          <p:cNvSpPr/>
+          <p:nvPr/>
+        </p:nvSpPr>
+        <p:spPr>
+          <a:xfrm>
+            <a:off x="16436339" y="6419088"/>
+            <a:ext cx="201168" cy="146304"/>
+          </a:xfrm>
+          <a:prstGeom prst="rect">
+            <a:avLst/>
+          </a:prstGeom>
+          <a:solidFill>
+            <a:srgbClr val="3C5AC8"/>
+          </a:solidFill>
+          <a:ln>
+            <a:noFill/>
+          </a:ln>
+          <a:effectLst/>
+        </p:spPr>
+        <p:style>
+          <a:lnRef idx="1">
+            <a:schemeClr val="accent1"/>
+          </a:lnRef>
+          <a:fillRef idx="3">
+            <a:schemeClr val="accent1"/>
+          </a:fillRef>
+          <a:effectRef idx="2">
+            <a:schemeClr val="accent1"/>
+          </a:effectRef>
+          <a:fontRef idx="minor">
+            <a:schemeClr val="lt1"/>
+          </a:fontRef>
+        </p:style>
+        <p:txBody>
+          <a:bodyPr rtlCol="0" anchor="ctr"/>
+          <a:lstStyle/>
+          <a:p>
+            <a:pPr algn="ctr"/>
+          </a:p>
+        </p:txBody>
+      </p:sp>
+      <p:sp>
+        <p:nvSpPr>
+          <p:cNvPr id="125" name="Rectangle 124"/>
+          <p:cNvSpPr/>
+          <p:nvPr/>
+        </p:nvSpPr>
+        <p:spPr>
+          <a:xfrm>
+            <a:off x="16674084" y="6419088"/>
+            <a:ext cx="201168" cy="146304"/>
+          </a:xfrm>
+          <a:prstGeom prst="rect">
+            <a:avLst/>
+          </a:prstGeom>
+          <a:solidFill>
+            <a:srgbClr val="3C5AC8"/>
+          </a:solidFill>
+          <a:ln>
+            <a:noFill/>
+          </a:ln>
+          <a:effectLst/>
+        </p:spPr>
+        <p:style>
+          <a:lnRef idx="1">
+            <a:schemeClr val="accent1"/>
+          </a:lnRef>
+          <a:fillRef idx="3">
+            <a:schemeClr val="accent1"/>
+          </a:fillRef>
+          <a:effectRef idx="2">
+            <a:schemeClr val="accent1"/>
+          </a:effectRef>
+          <a:fontRef idx="minor">
+            <a:schemeClr val="lt1"/>
+          </a:fontRef>
+        </p:style>
+        <p:txBody>
+          <a:bodyPr rtlCol="0" anchor="ctr"/>
+          <a:lstStyle/>
+          <a:p>
+            <a:pPr algn="ctr"/>
+          </a:p>
+        </p:txBody>
+      </p:sp>
+      <p:sp>
+        <p:nvSpPr>
+          <p:cNvPr id="126" name="Rectangle 125"/>
+          <p:cNvSpPr/>
+          <p:nvPr/>
+        </p:nvSpPr>
+        <p:spPr>
+          <a:xfrm>
+            <a:off x="16911827" y="6419088"/>
+            <a:ext cx="201168" cy="146304"/>
+          </a:xfrm>
+          <a:prstGeom prst="rect">
+            <a:avLst/>
+          </a:prstGeom>
+          <a:solidFill>
+            <a:srgbClr val="3C5AC8"/>
+          </a:solidFill>
+          <a:ln>
+            <a:noFill/>
+          </a:ln>
+          <a:effectLst/>
+        </p:spPr>
+        <p:style>
+          <a:lnRef idx="1">
+            <a:schemeClr val="accent1"/>
+          </a:lnRef>
+          <a:fillRef idx="3">
+            <a:schemeClr val="accent1"/>
+          </a:fillRef>
+          <a:effectRef idx="2">
+            <a:schemeClr val="accent1"/>
+          </a:effectRef>
+          <a:fontRef idx="minor">
+            <a:schemeClr val="lt1"/>
+          </a:fontRef>
+        </p:style>
+        <p:txBody>
+          <a:bodyPr rtlCol="0" anchor="ctr"/>
+          <a:lstStyle/>
+          <a:p>
+            <a:pPr algn="ctr"/>
+          </a:p>
+        </p:txBody>
+      </p:sp>
+      <p:sp>
+        <p:nvSpPr>
+          <p:cNvPr id="127" name="Rectangle 126"/>
+          <p:cNvSpPr/>
+          <p:nvPr/>
+        </p:nvSpPr>
+        <p:spPr>
+          <a:xfrm>
+            <a:off x="17149572" y="6419088"/>
+            <a:ext cx="201168" cy="146304"/>
+          </a:xfrm>
+          <a:prstGeom prst="rect">
+            <a:avLst/>
+          </a:prstGeom>
+          <a:solidFill>
+            <a:srgbClr val="3C5AC8"/>
+          </a:solidFill>
+          <a:ln>
+            <a:noFill/>
+          </a:ln>
+          <a:effectLst/>
+        </p:spPr>
+        <p:style>
+          <a:lnRef idx="1">
+            <a:schemeClr val="accent1"/>
+          </a:lnRef>
+          <a:fillRef idx="3">
+            <a:schemeClr val="accent1"/>
+          </a:fillRef>
+          <a:effectRef idx="2">
+            <a:schemeClr val="accent1"/>
+          </a:effectRef>
+          <a:fontRef idx="minor">
+            <a:schemeClr val="lt1"/>
+          </a:fontRef>
+        </p:style>
+        <p:txBody>
+          <a:bodyPr rtlCol="0" anchor="ctr"/>
+          <a:lstStyle/>
+          <a:p>
+            <a:pPr algn="ctr"/>
+          </a:p>
+        </p:txBody>
+      </p:sp>
+      <p:sp>
+        <p:nvSpPr>
+          <p:cNvPr id="128" name="Right Arrow 127"/>
+          <p:cNvSpPr/>
+          <p:nvPr/>
+        </p:nvSpPr>
+        <p:spPr>
+          <a:xfrm>
+            <a:off x="14662404" y="6620256"/>
+            <a:ext cx="274320" cy="146304"/>
+          </a:xfrm>
+          <a:prstGeom prst="rightArrow">
+            <a:avLst/>
+          </a:prstGeom>
+          <a:solidFill>
+            <a:srgbClr val="AAB8E8"/>
+          </a:solidFill>
+          <a:ln>
+            <a:noFill/>
+          </a:ln>
+          <a:effectLst/>
+        </p:spPr>
+        <p:style>
+          <a:lnRef idx="1">
+            <a:schemeClr val="accent1"/>
+          </a:lnRef>
+          <a:fillRef idx="3">
+            <a:schemeClr val="accent1"/>
+          </a:fillRef>
+          <a:effectRef idx="2">
+            <a:schemeClr val="accent1"/>
+          </a:effectRef>
+          <a:fontRef idx="minor">
+            <a:schemeClr val="lt1"/>
+          </a:fontRef>
+        </p:style>
+        <p:txBody>
+          <a:bodyPr rtlCol="0" anchor="ctr"/>
+          <a:lstStyle/>
+          <a:p>
+            <a:pPr algn="ctr"/>
+          </a:p>
+        </p:txBody>
+      </p:sp>
+      <p:sp>
+        <p:nvSpPr>
+          <p:cNvPr id="129" name="Rectangle 128"/>
+          <p:cNvSpPr/>
+          <p:nvPr/>
+        </p:nvSpPr>
+        <p:spPr>
+          <a:xfrm>
+            <a:off x="15009876" y="6620256"/>
+            <a:ext cx="201168" cy="146304"/>
+          </a:xfrm>
+          <a:prstGeom prst="rect">
+            <a:avLst/>
+          </a:prstGeom>
+          <a:solidFill>
+            <a:srgbClr val="AAB8E8"/>
+          </a:solidFill>
+          <a:ln>
+            <a:noFill/>
+          </a:ln>
+          <a:effectLst/>
+        </p:spPr>
+        <p:style>
+          <a:lnRef idx="1">
+            <a:schemeClr val="accent1"/>
+          </a:lnRef>
+          <a:fillRef idx="3">
+            <a:schemeClr val="accent1"/>
+          </a:fillRef>
+          <a:effectRef idx="2">
+            <a:schemeClr val="accent1"/>
+          </a:effectRef>
+          <a:fontRef idx="minor">
+            <a:schemeClr val="lt1"/>
+          </a:fontRef>
+        </p:style>
+        <p:txBody>
+          <a:bodyPr rtlCol="0" anchor="ctr"/>
+          <a:lstStyle/>
+          <a:p>
+            <a:pPr algn="ctr"/>
+          </a:p>
+        </p:txBody>
+      </p:sp>
+      <p:sp>
+        <p:nvSpPr>
+          <p:cNvPr id="130" name="Rectangle 129"/>
+          <p:cNvSpPr/>
+          <p:nvPr/>
+        </p:nvSpPr>
+        <p:spPr>
+          <a:xfrm>
+            <a:off x="15247620" y="6620256"/>
+            <a:ext cx="201168" cy="146304"/>
+          </a:xfrm>
+          <a:prstGeom prst="rect">
+            <a:avLst/>
+          </a:prstGeom>
+          <a:solidFill>
+            <a:srgbClr val="AAB8E8"/>
+          </a:solidFill>
+          <a:ln>
+            <a:noFill/>
+          </a:ln>
+          <a:effectLst/>
+        </p:spPr>
+        <p:style>
+          <a:lnRef idx="1">
+            <a:schemeClr val="accent1"/>
+          </a:lnRef>
+          <a:fillRef idx="3">
+            <a:schemeClr val="accent1"/>
+          </a:fillRef>
+          <a:effectRef idx="2">
+            <a:schemeClr val="accent1"/>
+          </a:effectRef>
+          <a:fontRef idx="minor">
+            <a:schemeClr val="lt1"/>
+          </a:fontRef>
+        </p:style>
+        <p:txBody>
+          <a:bodyPr rtlCol="0" anchor="ctr"/>
+          <a:lstStyle/>
+          <a:p>
+            <a:pPr algn="ctr"/>
+          </a:p>
+        </p:txBody>
+      </p:sp>
+      <p:sp>
+        <p:nvSpPr>
+          <p:cNvPr id="131" name="Rectangle 130"/>
+          <p:cNvSpPr/>
+          <p:nvPr/>
+        </p:nvSpPr>
+        <p:spPr>
+          <a:xfrm>
+            <a:off x="15485363" y="6620256"/>
+            <a:ext cx="201168" cy="146304"/>
+          </a:xfrm>
+          <a:prstGeom prst="rect">
+            <a:avLst/>
+          </a:prstGeom>
+          <a:solidFill>
+            <a:srgbClr val="AAB8E8"/>
+          </a:solidFill>
+          <a:ln>
+            <a:noFill/>
+          </a:ln>
+          <a:effectLst/>
+        </p:spPr>
+        <p:style>
+          <a:lnRef idx="1">
+            <a:schemeClr val="accent1"/>
+          </a:lnRef>
+          <a:fillRef idx="3">
+            <a:schemeClr val="accent1"/>
+          </a:fillRef>
+          <a:effectRef idx="2">
+            <a:schemeClr val="accent1"/>
+          </a:effectRef>
+          <a:fontRef idx="minor">
+            <a:schemeClr val="lt1"/>
+          </a:fontRef>
+        </p:style>
+        <p:txBody>
+          <a:bodyPr rtlCol="0" anchor="ctr"/>
+          <a:lstStyle/>
+          <a:p>
+            <a:pPr algn="ctr"/>
+          </a:p>
+        </p:txBody>
+      </p:sp>
+      <p:sp>
+        <p:nvSpPr>
+          <p:cNvPr id="132" name="Rectangle 131"/>
+          <p:cNvSpPr/>
+          <p:nvPr/>
+        </p:nvSpPr>
+        <p:spPr>
+          <a:xfrm>
+            <a:off x="15723108" y="6620256"/>
+            <a:ext cx="201168" cy="146304"/>
+          </a:xfrm>
+          <a:prstGeom prst="rect">
+            <a:avLst/>
+          </a:prstGeom>
+          <a:solidFill>
+            <a:srgbClr val="AAB8E8"/>
+          </a:solidFill>
+          <a:ln>
+            <a:noFill/>
+          </a:ln>
+          <a:effectLst/>
+        </p:spPr>
+        <p:style>
+          <a:lnRef idx="1">
+            <a:schemeClr val="accent1"/>
+          </a:lnRef>
+          <a:fillRef idx="3">
+            <a:schemeClr val="accent1"/>
+          </a:fillRef>
+          <a:effectRef idx="2">
+            <a:schemeClr val="accent1"/>
+          </a:effectRef>
+          <a:fontRef idx="minor">
+            <a:schemeClr val="lt1"/>
+          </a:fontRef>
+        </p:style>
+        <p:txBody>
+          <a:bodyPr rtlCol="0" anchor="ctr"/>
+          <a:lstStyle/>
+          <a:p>
+            <a:pPr algn="ctr"/>
+          </a:p>
+        </p:txBody>
+      </p:sp>
+      <p:sp>
+        <p:nvSpPr>
+          <p:cNvPr id="133" name="Rectangle 132"/>
+          <p:cNvSpPr/>
+          <p:nvPr/>
+        </p:nvSpPr>
+        <p:spPr>
+          <a:xfrm>
+            <a:off x="15960851" y="6620256"/>
+            <a:ext cx="201168" cy="146304"/>
+          </a:xfrm>
+          <a:prstGeom prst="rect">
+            <a:avLst/>
+          </a:prstGeom>
+          <a:solidFill>
+            <a:srgbClr val="AAB8E8"/>
+          </a:solidFill>
+          <a:ln>
+            <a:noFill/>
+          </a:ln>
+          <a:effectLst/>
+        </p:spPr>
+        <p:style>
+          <a:lnRef idx="1">
+            <a:schemeClr val="accent1"/>
+          </a:lnRef>
+          <a:fillRef idx="3">
+            <a:schemeClr val="accent1"/>
+          </a:fillRef>
+          <a:effectRef idx="2">
+            <a:schemeClr val="accent1"/>
+          </a:effectRef>
+          <a:fontRef idx="minor">
+            <a:schemeClr val="lt1"/>
+          </a:fontRef>
+        </p:style>
+        <p:txBody>
+          <a:bodyPr rtlCol="0" anchor="ctr"/>
+          <a:lstStyle/>
+          <a:p>
+            <a:pPr algn="ctr"/>
+          </a:p>
+        </p:txBody>
+      </p:sp>
+      <p:sp>
+        <p:nvSpPr>
+          <p:cNvPr id="134" name="Rectangle 133"/>
+          <p:cNvSpPr/>
+          <p:nvPr/>
+        </p:nvSpPr>
+        <p:spPr>
+          <a:xfrm>
+            <a:off x="16198596" y="6620256"/>
+            <a:ext cx="201168" cy="146304"/>
+          </a:xfrm>
+          <a:prstGeom prst="rect">
+            <a:avLst/>
+          </a:prstGeom>
+          <a:solidFill>
+            <a:srgbClr val="AAB8E8"/>
+          </a:solidFill>
+          <a:ln>
+            <a:noFill/>
+          </a:ln>
+          <a:effectLst/>
+        </p:spPr>
+        <p:style>
+          <a:lnRef idx="1">
+            <a:schemeClr val="accent1"/>
+          </a:lnRef>
+          <a:fillRef idx="3">
+            <a:schemeClr val="accent1"/>
+          </a:fillRef>
+          <a:effectRef idx="2">
+            <a:schemeClr val="accent1"/>
+          </a:effectRef>
+          <a:fontRef idx="minor">
+            <a:schemeClr val="lt1"/>
+          </a:fontRef>
+        </p:style>
+        <p:txBody>
+          <a:bodyPr rtlCol="0" anchor="ctr"/>
+          <a:lstStyle/>
+          <a:p>
+            <a:pPr algn="ctr"/>
+          </a:p>
+        </p:txBody>
+      </p:sp>
+      <p:sp>
+        <p:nvSpPr>
+          <p:cNvPr id="135" name="Rectangle 134"/>
+          <p:cNvSpPr/>
+          <p:nvPr/>
+        </p:nvSpPr>
+        <p:spPr>
+          <a:xfrm>
+            <a:off x="16436339" y="6620256"/>
+            <a:ext cx="201168" cy="146304"/>
+          </a:xfrm>
+          <a:prstGeom prst="rect">
+            <a:avLst/>
+          </a:prstGeom>
+          <a:solidFill>
+            <a:srgbClr val="AAB8E8"/>
+          </a:solidFill>
+          <a:ln>
+            <a:noFill/>
+          </a:ln>
+          <a:effectLst/>
+        </p:spPr>
+        <p:style>
+          <a:lnRef idx="1">
+            <a:schemeClr val="accent1"/>
+          </a:lnRef>
+          <a:fillRef idx="3">
+            <a:schemeClr val="accent1"/>
+          </a:fillRef>
+          <a:effectRef idx="2">
+            <a:schemeClr val="accent1"/>
+          </a:effectRef>
+          <a:fontRef idx="minor">
+            <a:schemeClr val="lt1"/>
+          </a:fontRef>
+        </p:style>
+        <p:txBody>
+          <a:bodyPr rtlCol="0" anchor="ctr"/>
+          <a:lstStyle/>
+          <a:p>
+            <a:pPr algn="ctr"/>
+          </a:p>
+        </p:txBody>
+      </p:sp>
+      <p:sp>
+        <p:nvSpPr>
+          <p:cNvPr id="136" name="Rectangle 135"/>
+          <p:cNvSpPr/>
+          <p:nvPr/>
+        </p:nvSpPr>
+        <p:spPr>
+          <a:xfrm>
+            <a:off x="16674084" y="6620256"/>
+            <a:ext cx="201168" cy="146304"/>
+          </a:xfrm>
+          <a:prstGeom prst="rect">
+            <a:avLst/>
+          </a:prstGeom>
+          <a:solidFill>
+            <a:srgbClr val="AAB8E8"/>
+          </a:solidFill>
+          <a:ln>
+            <a:noFill/>
+          </a:ln>
+          <a:effectLst/>
+        </p:spPr>
+        <p:style>
+          <a:lnRef idx="1">
+            <a:schemeClr val="accent1"/>
+          </a:lnRef>
+          <a:fillRef idx="3">
+            <a:schemeClr val="accent1"/>
+          </a:fillRef>
+          <a:effectRef idx="2">
+            <a:schemeClr val="accent1"/>
+          </a:effectRef>
+          <a:fontRef idx="minor">
+            <a:schemeClr val="lt1"/>
+          </a:fontRef>
+        </p:style>
+        <p:txBody>
+          <a:bodyPr rtlCol="0" anchor="ctr"/>
+          <a:lstStyle/>
+          <a:p>
+            <a:pPr algn="ctr"/>
+          </a:p>
+        </p:txBody>
+      </p:sp>
+      <p:sp>
+        <p:nvSpPr>
+          <p:cNvPr id="137" name="Rectangle 136"/>
+          <p:cNvSpPr/>
+          <p:nvPr/>
+        </p:nvSpPr>
+        <p:spPr>
+          <a:xfrm>
+            <a:off x="16911827" y="6620256"/>
+            <a:ext cx="201168" cy="146304"/>
+          </a:xfrm>
+          <a:prstGeom prst="rect">
+            <a:avLst/>
+          </a:prstGeom>
+          <a:solidFill>
+            <a:srgbClr val="AAB8E8"/>
+          </a:solidFill>
+          <a:ln>
+            <a:noFill/>
+          </a:ln>
+          <a:effectLst/>
+        </p:spPr>
+        <p:style>
+          <a:lnRef idx="1">
+            <a:schemeClr val="accent1"/>
+          </a:lnRef>
+          <a:fillRef idx="3">
+            <a:schemeClr val="accent1"/>
+          </a:fillRef>
+          <a:effectRef idx="2">
+            <a:schemeClr val="accent1"/>
+          </a:effectRef>
+          <a:fontRef idx="minor">
+            <a:schemeClr val="lt1"/>
+          </a:fontRef>
+        </p:style>
+        <p:txBody>
+          <a:bodyPr rtlCol="0" anchor="ctr"/>
+          <a:lstStyle/>
+          <a:p>
+            <a:pPr algn="ctr"/>
+          </a:p>
+        </p:txBody>
+      </p:sp>
+      <p:sp>
+        <p:nvSpPr>
+          <p:cNvPr id="138" name="Rectangle 137"/>
+          <p:cNvSpPr/>
+          <p:nvPr/>
+        </p:nvSpPr>
+        <p:spPr>
+          <a:xfrm>
+            <a:off x="17149572" y="6620256"/>
+            <a:ext cx="201168" cy="146304"/>
+          </a:xfrm>
+          <a:prstGeom prst="rect">
+            <a:avLst/>
+          </a:prstGeom>
+          <a:solidFill>
+            <a:srgbClr val="AAB8E8"/>
+          </a:solidFill>
+          <a:ln>
+            <a:noFill/>
+          </a:ln>
+          <a:effectLst/>
+        </p:spPr>
+        <p:style>
+          <a:lnRef idx="1">
+            <a:schemeClr val="accent1"/>
+          </a:lnRef>
+          <a:fillRef idx="3">
+            <a:schemeClr val="accent1"/>
+          </a:fillRef>
+          <a:effectRef idx="2">
+            <a:schemeClr val="accent1"/>
+          </a:effectRef>
+          <a:fontRef idx="minor">
+            <a:schemeClr val="lt1"/>
+          </a:fontRef>
+        </p:style>
+        <p:txBody>
+          <a:bodyPr rtlCol="0" anchor="ctr"/>
+          <a:lstStyle/>
+          <a:p>
+            <a:pPr algn="ctr"/>
+          </a:p>
+        </p:txBody>
+      </p:sp>
+      <p:sp>
+        <p:nvSpPr>
+          <p:cNvPr id="139" name="TextBox 138"/>
+          <p:cNvSpPr txBox="1"/>
+          <p:nvPr/>
+        </p:nvSpPr>
+        <p:spPr>
+          <a:xfrm>
+            <a:off x="13546836" y="6894576"/>
+            <a:ext cx="4018788" cy="292608"/>
+          </a:xfrm>
+          <a:prstGeom prst="rect">
+            <a:avLst/>
+          </a:prstGeom>
+          <a:noFill/>
+        </p:spPr>
+        <p:txBody>
+          <a:bodyPr wrap="square" anchor="ctr" lIns="0" rIns="0" tIns="0" bIns="0">
+            <a:spAutoFit/>
+          </a:bodyPr>
+          <a:lstStyle/>
+          <a:p>
+            <a:pPr algn="ctr">
+              <a:lnSpc>
+                <a:spcPct val="110000"/>
+              </a:lnSpc>
+            </a:pPr>
+            <a:r>
+              <a:rPr sz="1500" b="0">
+                <a:solidFill>
+                  <a:srgbClr val="555555"/>
+                </a:solidFill>
+                <a:latin typeface="Arial"/>
+                <a:ea typeface="Arial"/>
+              </a:rPr>
+              <a:t>CacheLib WAF </a:t>
+            </a:r>
+            <a:r>
+              <a:rPr sz="1700" b="1">
+                <a:solidFill>
+                  <a:srgbClr val="1428A0"/>
+                </a:solidFill>
+                <a:latin typeface="Arial"/>
+                <a:ea typeface="Arial"/>
+              </a:rPr>
+              <a:t>3.22 → 1.03</a:t>
+            </a:r>
+          </a:p>
+        </p:txBody>
+      </p:sp>
+      <p:sp>
+        <p:nvSpPr>
+          <p:cNvPr id="140" name="Rounded Rectangle 139"/>
+          <p:cNvSpPr/>
+          <p:nvPr/>
+        </p:nvSpPr>
+        <p:spPr>
+          <a:xfrm>
+            <a:off x="7168896" y="7242048"/>
+            <a:ext cx="2103120" cy="457200"/>
+          </a:xfrm>
+          <a:prstGeom prst="roundRect">
+            <a:avLst>
+              <a:gd name="adj" fmla="val 16000"/>
+            </a:avLst>
+          </a:prstGeom>
+          <a:solidFill>
+            <a:srgbClr val="F5F5F5"/>
+          </a:solidFill>
+          <a:ln>
+            <a:noFill/>
+          </a:ln>
+          <a:effectLst/>
+        </p:spPr>
+        <p:style>
+          <a:lnRef idx="1">
+            <a:schemeClr val="accent1"/>
+          </a:lnRef>
+          <a:fillRef idx="3">
+            <a:schemeClr val="accent1"/>
+          </a:fillRef>
+          <a:effectRef idx="2">
+            <a:schemeClr val="accent1"/>
+          </a:effectRef>
+          <a:fontRef idx="minor">
+            <a:schemeClr val="lt1"/>
+          </a:fontRef>
+        </p:style>
+        <p:txBody>
+          <a:bodyPr rtlCol="0" anchor="ctr"/>
+          <a:lstStyle/>
+          <a:p>
+            <a:pPr algn="ctr"/>
+          </a:p>
+        </p:txBody>
+      </p:sp>
+      <p:sp>
+        <p:nvSpPr>
+          <p:cNvPr id="141" name="TextBox 140"/>
+          <p:cNvSpPr txBox="1"/>
+          <p:nvPr/>
+        </p:nvSpPr>
+        <p:spPr>
+          <a:xfrm>
+            <a:off x="7223759" y="7242048"/>
+            <a:ext cx="1993391" cy="457200"/>
+          </a:xfrm>
+          <a:prstGeom prst="rect">
+            <a:avLst/>
+          </a:prstGeom>
+          <a:noFill/>
+        </p:spPr>
+        <p:txBody>
+          <a:bodyPr wrap="square" anchor="ctr" lIns="0" rIns="0" tIns="0" bIns="0">
+            <a:spAutoFit/>
+          </a:bodyPr>
+          <a:lstStyle/>
+          <a:p>
+            <a:pPr algn="ctr">
+              <a:lnSpc>
+                <a:spcPct val="110000"/>
+              </a:lnSpc>
+            </a:pPr>
+            <a:r>
+              <a:rPr sz="1700" b="1">
+                <a:solidFill>
+                  <a:srgbClr val="555555"/>
+                </a:solidFill>
+                <a:latin typeface="Arial"/>
+                <a:ea typeface="Arial"/>
+              </a:rPr>
+              <a:t>지금</a:t>
+            </a:r>
+          </a:p>
+        </p:txBody>
+      </p:sp>
+      <p:sp>
+        <p:nvSpPr>
+          <p:cNvPr id="142" name="Rounded Rectangle 141"/>
+          <p:cNvSpPr/>
+          <p:nvPr/>
+        </p:nvSpPr>
+        <p:spPr>
+          <a:xfrm>
+            <a:off x="9400032" y="7242048"/>
+            <a:ext cx="4018788" cy="457200"/>
+          </a:xfrm>
+          <a:prstGeom prst="roundRect">
+            <a:avLst>
+              <a:gd name="adj" fmla="val 16000"/>
+            </a:avLst>
+          </a:prstGeom>
+          <a:solidFill>
+            <a:srgbClr val="3C5AC8"/>
+          </a:solidFill>
+          <a:ln>
+            <a:noFill/>
+          </a:ln>
+          <a:effectLst/>
+        </p:spPr>
+        <p:style>
+          <a:lnRef idx="1">
+            <a:schemeClr val="accent1"/>
+          </a:lnRef>
+          <a:fillRef idx="3">
+            <a:schemeClr val="accent1"/>
+          </a:fillRef>
+          <a:effectRef idx="2">
+            <a:schemeClr val="accent1"/>
+          </a:effectRef>
+          <a:fontRef idx="minor">
+            <a:schemeClr val="lt1"/>
+          </a:fontRef>
+        </p:style>
+        <p:txBody>
+          <a:bodyPr rtlCol="0" anchor="ctr"/>
+          <a:lstStyle/>
+          <a:p>
+            <a:pPr algn="ctr"/>
+          </a:p>
+        </p:txBody>
+      </p:sp>
+      <p:sp>
+        <p:nvSpPr>
+          <p:cNvPr id="143" name="TextBox 142"/>
+          <p:cNvSpPr txBox="1"/>
+          <p:nvPr/>
+        </p:nvSpPr>
+        <p:spPr>
+          <a:xfrm>
+            <a:off x="9454896" y="7242048"/>
+            <a:ext cx="3909060" cy="457200"/>
+          </a:xfrm>
+          <a:prstGeom prst="rect">
+            <a:avLst/>
+          </a:prstGeom>
+          <a:noFill/>
+        </p:spPr>
+        <p:txBody>
+          <a:bodyPr wrap="square" anchor="ctr" lIns="0" rIns="0" tIns="0" bIns="0">
+            <a:spAutoFit/>
+          </a:bodyPr>
+          <a:lstStyle/>
+          <a:p>
+            <a:pPr algn="ctr">
+              <a:lnSpc>
+                <a:spcPct val="110000"/>
+              </a:lnSpc>
+            </a:pPr>
+            <a:r>
+              <a:rPr sz="1700" b="1">
+                <a:solidFill>
+                  <a:srgbClr val="FFFFFF"/>
+                </a:solidFill>
+                <a:latin typeface="Arial"/>
+                <a:ea typeface="Arial"/>
+              </a:rPr>
+              <a:t>단기 2026~27  </a:t>
+            </a:r>
+            <a:r>
+              <a:rPr sz="1600" b="0">
+                <a:solidFill>
+                  <a:srgbClr val="FFFFFF"/>
+                </a:solidFill>
+                <a:latin typeface="Arial"/>
+                <a:ea typeface="Arial"/>
+              </a:rPr>
+              <a:t>스펙으로 협력</a:t>
+            </a:r>
+          </a:p>
+        </p:txBody>
+      </p:sp>
+      <p:sp>
+        <p:nvSpPr>
+          <p:cNvPr id="144" name="Rounded Rectangle 143"/>
+          <p:cNvSpPr/>
+          <p:nvPr/>
+        </p:nvSpPr>
+        <p:spPr>
+          <a:xfrm>
+            <a:off x="13546836" y="7242048"/>
+            <a:ext cx="4018788" cy="457200"/>
+          </a:xfrm>
+          <a:prstGeom prst="roundRect">
+            <a:avLst>
+              <a:gd name="adj" fmla="val 16000"/>
+            </a:avLst>
+          </a:prstGeom>
+          <a:solidFill>
+            <a:srgbClr val="1428A0"/>
+          </a:solidFill>
+          <a:ln>
+            <a:noFill/>
+          </a:ln>
+          <a:effectLst/>
+        </p:spPr>
+        <p:style>
+          <a:lnRef idx="1">
+            <a:schemeClr val="accent1"/>
+          </a:lnRef>
+          <a:fillRef idx="3">
+            <a:schemeClr val="accent1"/>
+          </a:fillRef>
+          <a:effectRef idx="2">
+            <a:schemeClr val="accent1"/>
+          </a:effectRef>
+          <a:fontRef idx="minor">
+            <a:schemeClr val="lt1"/>
+          </a:fontRef>
+        </p:style>
+        <p:txBody>
+          <a:bodyPr rtlCol="0" anchor="ctr"/>
+          <a:lstStyle/>
+          <a:p>
+            <a:pPr algn="ctr"/>
+          </a:p>
+        </p:txBody>
+      </p:sp>
+      <p:sp>
+        <p:nvSpPr>
+          <p:cNvPr id="145" name="TextBox 144"/>
+          <p:cNvSpPr txBox="1"/>
+          <p:nvPr/>
+        </p:nvSpPr>
+        <p:spPr>
+          <a:xfrm>
+            <a:off x="13601700" y="7242048"/>
+            <a:ext cx="3909060" cy="457200"/>
+          </a:xfrm>
+          <a:prstGeom prst="rect">
+            <a:avLst/>
+          </a:prstGeom>
+          <a:noFill/>
+        </p:spPr>
+        <p:txBody>
+          <a:bodyPr wrap="square" anchor="ctr" lIns="0" rIns="0" tIns="0" bIns="0">
+            <a:spAutoFit/>
+          </a:bodyPr>
+          <a:lstStyle/>
+          <a:p>
+            <a:pPr algn="ctr">
+              <a:lnSpc>
+                <a:spcPct val="110000"/>
+              </a:lnSpc>
+            </a:pPr>
+            <a:r>
+              <a:rPr sz="1700" b="1">
+                <a:solidFill>
+                  <a:srgbClr val="FFFFFF"/>
+                </a:solidFill>
+                <a:latin typeface="Arial"/>
+                <a:ea typeface="Arial"/>
+              </a:rPr>
+              <a:t>중장기 2028~  </a:t>
+            </a:r>
+            <a:r>
+              <a:rPr sz="1600" b="0">
+                <a:solidFill>
+                  <a:srgbClr val="AAB8E8"/>
+                </a:solidFill>
+                <a:latin typeface="Arial"/>
+                <a:ea typeface="Arial"/>
+              </a:rPr>
+              <a:t>고객과 공동 설계</a:t>
+            </a:r>
+          </a:p>
+        </p:txBody>
+      </p:sp>
+      <p:sp>
+        <p:nvSpPr>
+          <p:cNvPr id="146" name="TextBox 145"/>
+          <p:cNvSpPr txBox="1"/>
+          <p:nvPr/>
+        </p:nvSpPr>
+        <p:spPr>
+          <a:xfrm>
+            <a:off x="7168896" y="7772400"/>
+            <a:ext cx="2103120" cy="603504"/>
+          </a:xfrm>
+          <a:prstGeom prst="rect">
+            <a:avLst/>
+          </a:prstGeom>
+          <a:noFill/>
+        </p:spPr>
+        <p:txBody>
+          <a:bodyPr wrap="square" anchor="t" lIns="0" rIns="0" tIns="0" bIns="0">
+            <a:spAutoFit/>
+          </a:bodyPr>
+          <a:lstStyle/>
+          <a:p>
+            <a:pPr algn="ctr">
+              <a:lnSpc>
+                <a:spcPct val="100000"/>
+              </a:lnSpc>
+            </a:pPr>
+            <a:r>
+              <a:rPr sz="1500" b="0">
+                <a:solidFill>
+                  <a:srgbClr val="555555"/>
+                </a:solidFill>
+                <a:latin typeface="Arial"/>
+                <a:ea typeface="Arial"/>
+              </a:rPr>
+              <a:t>QLC 정격</a:t>
+            </a:r>
+          </a:p>
+          <a:p>
+            <a:pPr algn="ctr">
+              <a:lnSpc>
+                <a:spcPct val="100000"/>
+              </a:lnSpc>
+            </a:pPr>
+            <a:r>
+              <a:rPr sz="1600" b="1">
+                <a:solidFill>
+                  <a:srgbClr val="1A1A1A"/>
+                </a:solidFill>
+                <a:latin typeface="Arial"/>
+                <a:ea typeface="Arial"/>
+              </a:rPr>
+              <a:t>0.3~0.6</a:t>
+            </a:r>
+          </a:p>
+        </p:txBody>
+      </p:sp>
+      <p:sp>
+        <p:nvSpPr>
+          <p:cNvPr id="147" name="TextBox 146"/>
+          <p:cNvSpPr txBox="1"/>
+          <p:nvPr/>
+        </p:nvSpPr>
+        <p:spPr>
+          <a:xfrm>
+            <a:off x="9400032" y="7772400"/>
+            <a:ext cx="4018788" cy="603504"/>
+          </a:xfrm>
+          <a:prstGeom prst="rect">
+            <a:avLst/>
+          </a:prstGeom>
+          <a:noFill/>
+        </p:spPr>
+        <p:txBody>
+          <a:bodyPr wrap="square" anchor="t" lIns="0" rIns="0" tIns="0" bIns="0">
+            <a:spAutoFit/>
+          </a:bodyPr>
+          <a:lstStyle/>
+          <a:p>
+            <a:pPr algn="ctr">
+              <a:lnSpc>
+                <a:spcPct val="100000"/>
+              </a:lnSpc>
+            </a:pPr>
+            <a:r>
+              <a:rPr sz="1600" b="1">
+                <a:solidFill>
+                  <a:srgbClr val="1A1A1A"/>
+                </a:solidFill>
+                <a:latin typeface="Arial"/>
+                <a:ea typeface="Arial"/>
+              </a:rPr>
+              <a:t>작은 쓰기 증폭 제거</a:t>
+            </a:r>
+          </a:p>
+          <a:p>
+            <a:pPr algn="ctr">
+              <a:lnSpc>
+                <a:spcPct val="100000"/>
+              </a:lnSpc>
+            </a:pPr>
+            <a:r>
+              <a:rPr sz="1500" b="0">
+                <a:solidFill>
+                  <a:srgbClr val="555555"/>
+                </a:solidFill>
+                <a:latin typeface="Arial"/>
+                <a:ea typeface="Arial"/>
+              </a:rPr>
+              <a:t>pSLC가 쓰기 지연 · 대역 흡수</a:t>
+            </a:r>
+          </a:p>
+        </p:txBody>
+      </p:sp>
+      <p:sp>
+        <p:nvSpPr>
+          <p:cNvPr id="148" name="TextBox 147"/>
+          <p:cNvSpPr txBox="1"/>
+          <p:nvPr/>
+        </p:nvSpPr>
+        <p:spPr>
+          <a:xfrm>
+            <a:off x="13546836" y="7772400"/>
+            <a:ext cx="4018788" cy="603504"/>
+          </a:xfrm>
+          <a:prstGeom prst="rect">
+            <a:avLst/>
+          </a:prstGeom>
+          <a:noFill/>
+        </p:spPr>
+        <p:txBody>
+          <a:bodyPr wrap="square" anchor="t" lIns="0" rIns="0" tIns="0" bIns="0">
+            <a:spAutoFit/>
+          </a:bodyPr>
+          <a:lstStyle/>
+          <a:p>
+            <a:pPr algn="ctr">
+              <a:lnSpc>
+                <a:spcPct val="100000"/>
+              </a:lnSpc>
+            </a:pPr>
+            <a:r>
+              <a:rPr sz="1600" b="1">
+                <a:solidFill>
+                  <a:srgbClr val="1428A0"/>
+                </a:solidFill>
+                <a:latin typeface="Arial"/>
+                <a:ea typeface="Arial"/>
+              </a:rPr>
+              <a:t>WAF를 근원적으로 ≈ 1</a:t>
+            </a:r>
+          </a:p>
+          <a:p>
+            <a:pPr algn="ctr">
+              <a:lnSpc>
+                <a:spcPct val="100000"/>
+              </a:lnSpc>
+            </a:pPr>
+            <a:r>
+              <a:rPr sz="1500" b="0">
+                <a:solidFill>
+                  <a:srgbClr val="555555"/>
+                </a:solidFill>
+                <a:latin typeface="Arial"/>
+                <a:ea typeface="Arial"/>
+              </a:rPr>
+              <a:t>GC 간섭 ↓, p99.9 -55% (TLC)</a:t>
+            </a:r>
+          </a:p>
+        </p:txBody>
+      </p:sp>
+      <p:sp>
+        <p:nvSpPr>
+          <p:cNvPr id="149" name="Rectangle 148"/>
+          <p:cNvSpPr/>
+          <p:nvPr/>
+        </p:nvSpPr>
+        <p:spPr>
+          <a:xfrm>
+            <a:off x="722376" y="8631936"/>
+            <a:ext cx="16843248" cy="731520"/>
+          </a:xfrm>
+          <a:prstGeom prst="rect">
+            <a:avLst/>
+          </a:prstGeom>
+          <a:solidFill>
+            <a:srgbClr val="1428A0"/>
+          </a:solidFill>
+          <a:ln>
+            <a:noFill/>
+          </a:ln>
+          <a:effectLst/>
+        </p:spPr>
+        <p:style>
+          <a:lnRef idx="1">
+            <a:schemeClr val="accent1"/>
+          </a:lnRef>
+          <a:fillRef idx="3">
+            <a:schemeClr val="accent1"/>
+          </a:fillRef>
+          <a:effectRef idx="2">
+            <a:schemeClr val="accent1"/>
+          </a:effectRef>
+          <a:fontRef idx="minor">
+            <a:schemeClr val="lt1"/>
+          </a:fontRef>
+        </p:style>
+        <p:txBody>
+          <a:bodyPr rtlCol="0" anchor="ctr"/>
+          <a:lstStyle/>
+          <a:p>
+            <a:pPr algn="ctr"/>
+          </a:p>
+        </p:txBody>
+      </p:sp>
+      <p:sp>
+        <p:nvSpPr>
+          <p:cNvPr id="150" name="TextBox 149"/>
+          <p:cNvSpPr txBox="1"/>
+          <p:nvPr/>
+        </p:nvSpPr>
+        <p:spPr>
+          <a:xfrm>
+            <a:off x="1088136" y="8631936"/>
+            <a:ext cx="1234440" cy="731520"/>
           </a:xfrm>
           <a:prstGeom prst="rect">
             <a:avLst/>
@@ -24593,28 +28745,28 @@
               </a:lnSpc>
             </a:pPr>
             <a:r>
-              <a:rPr sz="1800" b="1">
-                <a:solidFill>
-                  <a:srgbClr val="1A1A1A"/>
-                </a:solidFill>
-                <a:latin typeface="Arial"/>
-                <a:ea typeface="Arial"/>
-              </a:rPr>
-              <a:t>0.075</a:t>
-            </a:r>
-          </a:p>
-        </p:txBody>
-      </p:sp>
-      <p:sp>
-        <p:nvSpPr>
-          <p:cNvPr id="59" name="TextBox 58"/>
+              <a:rPr sz="2000" b="0">
+                <a:solidFill>
+                  <a:srgbClr val="AAB8E8"/>
+                </a:solidFill>
+                <a:latin typeface="Arial"/>
+                <a:ea typeface="Arial"/>
+              </a:rPr>
+              <a:t>기회</a:t>
+            </a:r>
+          </a:p>
+        </p:txBody>
+      </p:sp>
+      <p:sp>
+        <p:nvSpPr>
+          <p:cNvPr id="151" name="TextBox 150"/>
           <p:cNvSpPr txBox="1"/>
           <p:nvPr/>
         </p:nvSpPr>
         <p:spPr>
           <a:xfrm>
-            <a:off x="8403336" y="3858768"/>
-            <a:ext cx="1591056" cy="420624"/>
+            <a:off x="2322576" y="8631936"/>
+            <a:ext cx="15060168" cy="731520"/>
           </a:xfrm>
           <a:prstGeom prst="rect">
             <a:avLst/>
@@ -24633,2219 +28785,21 @@
               </a:lnSpc>
             </a:pPr>
             <a:r>
-              <a:rPr sz="1800" b="1">
-                <a:solidFill>
-                  <a:srgbClr val="1A1A1A"/>
-                </a:solidFill>
-                <a:latin typeface="Arial"/>
-                <a:ea typeface="Arial"/>
-              </a:rPr>
-              <a:t>16KB 랜덤</a:t>
-            </a:r>
-          </a:p>
-        </p:txBody>
-      </p:sp>
-      <p:sp>
-        <p:nvSpPr>
-          <p:cNvPr id="60" name="Rectangle 59"/>
-          <p:cNvSpPr/>
-          <p:nvPr/>
-        </p:nvSpPr>
-        <p:spPr>
-          <a:xfrm>
-            <a:off x="10049256" y="3931920"/>
-            <a:ext cx="548640" cy="274320"/>
-          </a:xfrm>
-          <a:prstGeom prst="rect">
-            <a:avLst/>
-          </a:prstGeom>
-          <a:solidFill>
-            <a:srgbClr val="8A8A8A"/>
-          </a:solidFill>
-          <a:ln>
-            <a:noFill/>
-          </a:ln>
-          <a:effectLst/>
-        </p:spPr>
-        <p:style>
-          <a:lnRef idx="1">
-            <a:schemeClr val="accent1"/>
-          </a:lnRef>
-          <a:fillRef idx="3">
-            <a:schemeClr val="accent1"/>
-          </a:fillRef>
-          <a:effectRef idx="2">
-            <a:schemeClr val="accent1"/>
-          </a:effectRef>
-          <a:fontRef idx="minor">
-            <a:schemeClr val="lt1"/>
-          </a:fontRef>
-        </p:style>
-        <p:txBody>
-          <a:bodyPr rtlCol="0" anchor="ctr"/>
-          <a:lstStyle/>
-          <a:p>
-            <a:pPr algn="ctr"/>
-          </a:p>
-        </p:txBody>
-      </p:sp>
-      <p:sp>
-        <p:nvSpPr>
-          <p:cNvPr id="61" name="TextBox 60"/>
-          <p:cNvSpPr txBox="1"/>
-          <p:nvPr/>
-        </p:nvSpPr>
-        <p:spPr>
-          <a:xfrm>
-            <a:off x="10652760" y="3858768"/>
-            <a:ext cx="731520" cy="420624"/>
-          </a:xfrm>
-          <a:prstGeom prst="rect">
-            <a:avLst/>
-          </a:prstGeom>
-          <a:noFill/>
-        </p:spPr>
-        <p:txBody>
-          <a:bodyPr wrap="square" anchor="ctr" lIns="0" rIns="0" tIns="0" bIns="0">
-            <a:spAutoFit/>
-          </a:bodyPr>
-          <a:lstStyle/>
-          <a:p>
-            <a:pPr algn="l">
-              <a:lnSpc>
-                <a:spcPct val="110000"/>
-              </a:lnSpc>
-            </a:pPr>
-            <a:r>
-              <a:rPr sz="1800" b="1">
-                <a:solidFill>
-                  <a:srgbClr val="1A1A1A"/>
-                </a:solidFill>
-                <a:latin typeface="Arial"/>
-                <a:ea typeface="Arial"/>
-              </a:rPr>
-              <a:t>0.3</a:t>
-            </a:r>
-          </a:p>
-        </p:txBody>
-      </p:sp>
-      <p:sp>
-        <p:nvSpPr>
-          <p:cNvPr id="62" name="TextBox 61"/>
-          <p:cNvSpPr txBox="1"/>
-          <p:nvPr/>
-        </p:nvSpPr>
-        <p:spPr>
-          <a:xfrm>
-            <a:off x="8403336" y="4443984"/>
-            <a:ext cx="1591056" cy="420624"/>
-          </a:xfrm>
-          <a:prstGeom prst="rect">
-            <a:avLst/>
-          </a:prstGeom>
-          <a:noFill/>
-        </p:spPr>
-        <p:txBody>
-          <a:bodyPr wrap="square" anchor="ctr" lIns="0" rIns="0" tIns="0" bIns="0">
-            <a:spAutoFit/>
-          </a:bodyPr>
-          <a:lstStyle/>
-          <a:p>
-            <a:pPr algn="l">
-              <a:lnSpc>
-                <a:spcPct val="110000"/>
-              </a:lnSpc>
-            </a:pPr>
-            <a:r>
-              <a:rPr sz="1800" b="1">
-                <a:solidFill>
-                  <a:srgbClr val="1428A0"/>
-                </a:solidFill>
-                <a:latin typeface="Arial"/>
-                <a:ea typeface="Arial"/>
-              </a:rPr>
-              <a:t>128KB 순차</a:t>
-            </a:r>
-          </a:p>
-        </p:txBody>
-      </p:sp>
-      <p:sp>
-        <p:nvSpPr>
-          <p:cNvPr id="63" name="Rectangle 62"/>
-          <p:cNvSpPr/>
-          <p:nvPr/>
-        </p:nvSpPr>
-        <p:spPr>
-          <a:xfrm>
-            <a:off x="10049256" y="4517136"/>
-            <a:ext cx="1828800" cy="274320"/>
-          </a:xfrm>
-          <a:prstGeom prst="rect">
-            <a:avLst/>
-          </a:prstGeom>
-          <a:solidFill>
-            <a:srgbClr val="1428A0"/>
-          </a:solidFill>
-          <a:ln>
-            <a:noFill/>
-          </a:ln>
-          <a:effectLst/>
-        </p:spPr>
-        <p:style>
-          <a:lnRef idx="1">
-            <a:schemeClr val="accent1"/>
-          </a:lnRef>
-          <a:fillRef idx="3">
-            <a:schemeClr val="accent1"/>
-          </a:fillRef>
-          <a:effectRef idx="2">
-            <a:schemeClr val="accent1"/>
-          </a:effectRef>
-          <a:fontRef idx="minor">
-            <a:schemeClr val="lt1"/>
-          </a:fontRef>
-        </p:style>
-        <p:txBody>
-          <a:bodyPr rtlCol="0" anchor="ctr"/>
-          <a:lstStyle/>
-          <a:p>
-            <a:pPr algn="ctr"/>
-          </a:p>
-        </p:txBody>
-      </p:sp>
-      <p:sp>
-        <p:nvSpPr>
-          <p:cNvPr id="64" name="TextBox 63"/>
-          <p:cNvSpPr txBox="1"/>
-          <p:nvPr/>
-        </p:nvSpPr>
-        <p:spPr>
-          <a:xfrm>
-            <a:off x="11932920" y="4443984"/>
-            <a:ext cx="731520" cy="420624"/>
-          </a:xfrm>
-          <a:prstGeom prst="rect">
-            <a:avLst/>
-          </a:prstGeom>
-          <a:noFill/>
-        </p:spPr>
-        <p:txBody>
-          <a:bodyPr wrap="square" anchor="ctr" lIns="0" rIns="0" tIns="0" bIns="0">
-            <a:spAutoFit/>
-          </a:bodyPr>
-          <a:lstStyle/>
-          <a:p>
-            <a:pPr algn="l">
-              <a:lnSpc>
-                <a:spcPct val="110000"/>
-              </a:lnSpc>
-            </a:pPr>
-            <a:r>
-              <a:rPr sz="1800" b="1">
-                <a:solidFill>
-                  <a:srgbClr val="1428A0"/>
-                </a:solidFill>
-                <a:latin typeface="Arial"/>
-                <a:ea typeface="Arial"/>
-              </a:rPr>
-              <a:t>1</a:t>
-            </a:r>
-          </a:p>
-        </p:txBody>
-      </p:sp>
-      <p:sp>
-        <p:nvSpPr>
-          <p:cNvPr id="65" name="TextBox 64"/>
-          <p:cNvSpPr txBox="1"/>
-          <p:nvPr/>
-        </p:nvSpPr>
-        <p:spPr>
-          <a:xfrm>
-            <a:off x="11420856" y="3877055"/>
-            <a:ext cx="731520" cy="384048"/>
-          </a:xfrm>
-          <a:prstGeom prst="rect">
-            <a:avLst/>
-          </a:prstGeom>
-          <a:noFill/>
-        </p:spPr>
-        <p:txBody>
-          <a:bodyPr wrap="square" anchor="ctr" lIns="0" rIns="0" tIns="0" bIns="0">
-            <a:spAutoFit/>
-          </a:bodyPr>
-          <a:lstStyle/>
-          <a:p>
-            <a:pPr algn="l">
-              <a:lnSpc>
-                <a:spcPct val="110000"/>
-              </a:lnSpc>
-            </a:pPr>
-            <a:r>
-              <a:rPr sz="2200" b="1">
-                <a:solidFill>
-                  <a:srgbClr val="1428A0"/>
-                </a:solidFill>
-                <a:latin typeface="Arial"/>
-                <a:ea typeface="Arial"/>
-              </a:rPr>
-              <a:t>×13</a:t>
-            </a:r>
-          </a:p>
-        </p:txBody>
-      </p:sp>
-      <p:sp>
-        <p:nvSpPr>
-          <p:cNvPr id="66" name="Rectangle 65"/>
-          <p:cNvSpPr/>
-          <p:nvPr/>
-        </p:nvSpPr>
-        <p:spPr>
-          <a:xfrm>
-            <a:off x="8403336" y="5486400"/>
-            <a:ext cx="4389120" cy="10972"/>
-          </a:xfrm>
-          <a:prstGeom prst="rect">
-            <a:avLst/>
-          </a:prstGeom>
-          <a:solidFill>
-            <a:srgbClr val="D9D9D9"/>
-          </a:solidFill>
-          <a:ln>
-            <a:noFill/>
-          </a:ln>
-          <a:effectLst/>
-        </p:spPr>
-        <p:style>
-          <a:lnRef idx="1">
-            <a:schemeClr val="accent1"/>
-          </a:lnRef>
-          <a:fillRef idx="3">
-            <a:schemeClr val="accent1"/>
-          </a:fillRef>
-          <a:effectRef idx="2">
-            <a:schemeClr val="accent1"/>
-          </a:effectRef>
-          <a:fontRef idx="minor">
-            <a:schemeClr val="lt1"/>
-          </a:fontRef>
-        </p:style>
-        <p:txBody>
-          <a:bodyPr rtlCol="0" anchor="ctr"/>
-          <a:lstStyle/>
-          <a:p>
-            <a:pPr algn="ctr"/>
-          </a:p>
-        </p:txBody>
-      </p:sp>
-      <p:sp>
-        <p:nvSpPr>
-          <p:cNvPr id="67" name="TextBox 66"/>
-          <p:cNvSpPr txBox="1"/>
-          <p:nvPr/>
-        </p:nvSpPr>
-        <p:spPr>
-          <a:xfrm>
-            <a:off x="8403336" y="5577840"/>
-            <a:ext cx="4389120" cy="329184"/>
-          </a:xfrm>
-          <a:prstGeom prst="rect">
-            <a:avLst/>
-          </a:prstGeom>
-          <a:noFill/>
-        </p:spPr>
-        <p:txBody>
-          <a:bodyPr wrap="square" anchor="ctr" lIns="0" rIns="0" tIns="0" bIns="0">
-            <a:spAutoFit/>
-          </a:bodyPr>
-          <a:lstStyle/>
-          <a:p>
-            <a:pPr algn="l">
-              <a:lnSpc>
-                <a:spcPct val="110000"/>
-              </a:lnSpc>
-            </a:pPr>
-            <a:r>
-              <a:rPr sz="1800" b="1">
-                <a:solidFill>
-                  <a:srgbClr val="1A1A1A"/>
-                </a:solidFill>
-                <a:latin typeface="Arial"/>
-                <a:ea typeface="Arial"/>
-              </a:rPr>
-              <a:t>쓰기를 크게 · 순차로 · 수명별로</a:t>
-            </a:r>
-          </a:p>
-        </p:txBody>
-      </p:sp>
-      <p:sp>
-        <p:nvSpPr>
-          <p:cNvPr id="68" name="Rounded Rectangle 67"/>
-          <p:cNvSpPr/>
-          <p:nvPr/>
-        </p:nvSpPr>
-        <p:spPr>
-          <a:xfrm>
-            <a:off x="8403336" y="5998464"/>
-            <a:ext cx="2011679" cy="731520"/>
-          </a:xfrm>
-          <a:prstGeom prst="roundRect">
-            <a:avLst>
-              <a:gd name="adj" fmla="val 10000"/>
-            </a:avLst>
-          </a:prstGeom>
-          <a:solidFill>
-            <a:srgbClr val="F5F5F5"/>
-          </a:solidFill>
-          <a:ln>
-            <a:noFill/>
-          </a:ln>
-          <a:effectLst/>
-        </p:spPr>
-        <p:style>
-          <a:lnRef idx="1">
-            <a:schemeClr val="accent1"/>
-          </a:lnRef>
-          <a:fillRef idx="3">
-            <a:schemeClr val="accent1"/>
-          </a:fillRef>
-          <a:effectRef idx="2">
-            <a:schemeClr val="accent1"/>
-          </a:effectRef>
-          <a:fontRef idx="minor">
-            <a:schemeClr val="lt1"/>
-          </a:fontRef>
-        </p:style>
-        <p:txBody>
-          <a:bodyPr rtlCol="0" anchor="ctr"/>
-          <a:lstStyle/>
-          <a:p>
-            <a:pPr algn="ctr"/>
-          </a:p>
-        </p:txBody>
-      </p:sp>
-      <p:sp>
-        <p:nvSpPr>
-          <p:cNvPr id="69" name="TextBox 68"/>
-          <p:cNvSpPr txBox="1"/>
-          <p:nvPr/>
-        </p:nvSpPr>
-        <p:spPr>
-          <a:xfrm>
-            <a:off x="8458200" y="5998464"/>
-            <a:ext cx="1901951" cy="731520"/>
-          </a:xfrm>
-          <a:prstGeom prst="rect">
-            <a:avLst/>
-          </a:prstGeom>
-          <a:noFill/>
-        </p:spPr>
-        <p:txBody>
-          <a:bodyPr wrap="square" anchor="ctr" lIns="0" rIns="0" tIns="0" bIns="0">
-            <a:spAutoFit/>
-          </a:bodyPr>
-          <a:lstStyle/>
-          <a:p>
-            <a:pPr algn="ctr">
-              <a:lnSpc>
-                <a:spcPct val="110000"/>
-              </a:lnSpc>
-            </a:pPr>
-            <a:r>
-              <a:rPr sz="1700" b="1">
-                <a:solidFill>
-                  <a:srgbClr val="1A1A1A"/>
-                </a:solidFill>
-                <a:latin typeface="Arial"/>
-                <a:ea typeface="Arial"/>
-              </a:rPr>
-              <a:t>작은 랜덤 쓰기</a:t>
-            </a:r>
-          </a:p>
-          <a:p>
-            <a:pPr algn="ctr">
-              <a:lnSpc>
-                <a:spcPct val="110000"/>
-              </a:lnSpc>
-            </a:pPr>
-            <a:r>
-              <a:rPr sz="1500" b="0">
-                <a:solidFill>
-                  <a:srgbClr val="555555"/>
-                </a:solidFill>
-                <a:latin typeface="Arial"/>
-                <a:ea typeface="Arial"/>
-              </a:rPr>
-              <a:t>섞인 수명</a:t>
-            </a:r>
-          </a:p>
-        </p:txBody>
-      </p:sp>
-      <p:sp>
-        <p:nvSpPr>
-          <p:cNvPr id="70" name="Right Arrow 69"/>
-          <p:cNvSpPr/>
-          <p:nvPr/>
-        </p:nvSpPr>
-        <p:spPr>
-          <a:xfrm>
-            <a:off x="10469880" y="6254496"/>
-            <a:ext cx="256032" cy="219456"/>
-          </a:xfrm>
-          <a:prstGeom prst="rightArrow">
-            <a:avLst/>
-          </a:prstGeom>
-          <a:solidFill>
-            <a:srgbClr val="8A8A8A"/>
-          </a:solidFill>
-          <a:ln>
-            <a:noFill/>
-          </a:ln>
-          <a:effectLst/>
-        </p:spPr>
-        <p:style>
-          <a:lnRef idx="1">
-            <a:schemeClr val="accent1"/>
-          </a:lnRef>
-          <a:fillRef idx="3">
-            <a:schemeClr val="accent1"/>
-          </a:fillRef>
-          <a:effectRef idx="2">
-            <a:schemeClr val="accent1"/>
-          </a:effectRef>
-          <a:fontRef idx="minor">
-            <a:schemeClr val="lt1"/>
-          </a:fontRef>
-        </p:style>
-        <p:txBody>
-          <a:bodyPr rtlCol="0" anchor="ctr"/>
-          <a:lstStyle/>
-          <a:p>
-            <a:pPr algn="ctr"/>
-          </a:p>
-        </p:txBody>
-      </p:sp>
-      <p:sp>
-        <p:nvSpPr>
-          <p:cNvPr id="71" name="Rounded Rectangle 70"/>
-          <p:cNvSpPr/>
-          <p:nvPr/>
-        </p:nvSpPr>
-        <p:spPr>
-          <a:xfrm>
-            <a:off x="10780776" y="5998464"/>
-            <a:ext cx="2011679" cy="731520"/>
-          </a:xfrm>
-          <a:prstGeom prst="roundRect">
-            <a:avLst>
-              <a:gd name="adj" fmla="val 10000"/>
-            </a:avLst>
-          </a:prstGeom>
-          <a:solidFill>
-            <a:srgbClr val="1428A0"/>
-          </a:solidFill>
-          <a:ln>
-            <a:noFill/>
-          </a:ln>
-          <a:effectLst/>
-        </p:spPr>
-        <p:style>
-          <a:lnRef idx="1">
-            <a:schemeClr val="accent1"/>
-          </a:lnRef>
-          <a:fillRef idx="3">
-            <a:schemeClr val="accent1"/>
-          </a:fillRef>
-          <a:effectRef idx="2">
-            <a:schemeClr val="accent1"/>
-          </a:effectRef>
-          <a:fontRef idx="minor">
-            <a:schemeClr val="lt1"/>
-          </a:fontRef>
-        </p:style>
-        <p:txBody>
-          <a:bodyPr rtlCol="0" anchor="ctr"/>
-          <a:lstStyle/>
-          <a:p>
-            <a:pPr algn="ctr"/>
-          </a:p>
-        </p:txBody>
-      </p:sp>
-      <p:sp>
-        <p:nvSpPr>
-          <p:cNvPr id="72" name="TextBox 71"/>
-          <p:cNvSpPr txBox="1"/>
-          <p:nvPr/>
-        </p:nvSpPr>
-        <p:spPr>
-          <a:xfrm>
-            <a:off x="10835640" y="5998464"/>
-            <a:ext cx="1901951" cy="731520"/>
-          </a:xfrm>
-          <a:prstGeom prst="rect">
-            <a:avLst/>
-          </a:prstGeom>
-          <a:noFill/>
-        </p:spPr>
-        <p:txBody>
-          <a:bodyPr wrap="square" anchor="ctr" lIns="0" rIns="0" tIns="0" bIns="0">
-            <a:spAutoFit/>
-          </a:bodyPr>
-          <a:lstStyle/>
-          <a:p>
-            <a:pPr algn="ctr">
-              <a:lnSpc>
-                <a:spcPct val="110000"/>
-              </a:lnSpc>
-            </a:pPr>
-            <a:r>
-              <a:rPr sz="1700" b="1">
+              <a:rPr sz="2300" b="1">
                 <a:solidFill>
                   <a:srgbClr val="FFFFFF"/>
                 </a:solidFill>
                 <a:latin typeface="Arial"/>
                 <a:ea typeface="Arial"/>
               </a:rPr>
-              <a:t>FDP 배치</a:t>
-            </a:r>
-          </a:p>
-          <a:p>
-            <a:pPr algn="ctr">
-              <a:lnSpc>
-                <a:spcPct val="110000"/>
-              </a:lnSpc>
-            </a:pPr>
-            <a:r>
-              <a:rPr sz="1500" b="0">
-                <a:solidFill>
-                  <a:srgbClr val="AAB8E8"/>
-                </a:solidFill>
-                <a:latin typeface="Arial"/>
-                <a:ea typeface="Arial"/>
-              </a:rPr>
-              <a:t>큰 순차 · 같은 수명</a:t>
-            </a:r>
-          </a:p>
-        </p:txBody>
-      </p:sp>
-      <p:sp>
-        <p:nvSpPr>
-          <p:cNvPr id="73" name="TextBox 72"/>
-          <p:cNvSpPr txBox="1"/>
-          <p:nvPr/>
-        </p:nvSpPr>
-        <p:spPr>
-          <a:xfrm>
-            <a:off x="8403336" y="6858000"/>
-            <a:ext cx="4389120" cy="329184"/>
-          </a:xfrm>
-          <a:prstGeom prst="rect">
-            <a:avLst/>
-          </a:prstGeom>
-          <a:noFill/>
-        </p:spPr>
-        <p:txBody>
-          <a:bodyPr wrap="square" anchor="ctr" lIns="0" rIns="0" tIns="0" bIns="0">
-            <a:spAutoFit/>
-          </a:bodyPr>
-          <a:lstStyle/>
-          <a:p>
-            <a:pPr algn="l">
-              <a:lnSpc>
-                <a:spcPct val="110000"/>
-              </a:lnSpc>
-            </a:pPr>
-            <a:r>
-              <a:rPr sz="1600" b="0">
-                <a:solidFill>
-                  <a:srgbClr val="555555"/>
-                </a:solidFill>
-                <a:latin typeface="Arial"/>
-                <a:ea typeface="Arial"/>
-              </a:rPr>
-              <a:t>배치 부하 실제 쓰기  </a:t>
-            </a:r>
-            <a:r>
-              <a:rPr sz="1800" b="1">
-                <a:solidFill>
-                  <a:srgbClr val="1428A0"/>
-                </a:solidFill>
-                <a:latin typeface="Arial"/>
-                <a:ea typeface="Arial"/>
-              </a:rPr>
-              <a:t>0.26~0.35 DWPD</a:t>
-            </a:r>
-          </a:p>
-        </p:txBody>
-      </p:sp>
-      <p:sp>
-        <p:nvSpPr>
-          <p:cNvPr id="74" name="TextBox 73"/>
-          <p:cNvSpPr txBox="1"/>
-          <p:nvPr/>
-        </p:nvSpPr>
-        <p:spPr>
-          <a:xfrm>
-            <a:off x="8403336" y="7187184"/>
-            <a:ext cx="4389120" cy="329184"/>
-          </a:xfrm>
-          <a:prstGeom prst="rect">
-            <a:avLst/>
-          </a:prstGeom>
-          <a:noFill/>
-        </p:spPr>
-        <p:txBody>
-          <a:bodyPr wrap="square" anchor="ctr" lIns="0" rIns="0" tIns="0" bIns="0">
-            <a:spAutoFit/>
-          </a:bodyPr>
-          <a:lstStyle/>
-          <a:p>
-            <a:pPr algn="l">
-              <a:lnSpc>
-                <a:spcPct val="110000"/>
-              </a:lnSpc>
-            </a:pPr>
-            <a:r>
-              <a:rPr sz="1600" b="0">
-                <a:solidFill>
-                  <a:srgbClr val="555555"/>
-                </a:solidFill>
-                <a:latin typeface="Arial"/>
-                <a:ea typeface="Arial"/>
-              </a:rPr>
-              <a:t>1 DWPD = 쓰기 11.6 MB/s/TB</a:t>
-            </a:r>
-          </a:p>
-        </p:txBody>
-      </p:sp>
-      <p:sp>
-        <p:nvSpPr>
-          <p:cNvPr id="75" name="TextBox 74"/>
-          <p:cNvSpPr txBox="1"/>
-          <p:nvPr/>
-        </p:nvSpPr>
-        <p:spPr>
-          <a:xfrm>
-            <a:off x="8403336" y="7589520"/>
-            <a:ext cx="4389120" cy="457200"/>
-          </a:xfrm>
-          <a:prstGeom prst="rect">
-            <a:avLst/>
-          </a:prstGeom>
-          <a:noFill/>
-        </p:spPr>
-        <p:txBody>
-          <a:bodyPr wrap="square" anchor="ctr" lIns="0" rIns="0" tIns="0" bIns="0">
-            <a:spAutoFit/>
-          </a:bodyPr>
-          <a:lstStyle/>
-          <a:p>
-            <a:pPr algn="l">
-              <a:lnSpc>
-                <a:spcPct val="110000"/>
-              </a:lnSpc>
-            </a:pPr>
-            <a:r>
-              <a:rPr sz="1600" b="1">
-                <a:solidFill>
-                  <a:srgbClr val="1428A0"/>
-                </a:solidFill>
-                <a:latin typeface="Arial"/>
-                <a:ea typeface="Arial"/>
-              </a:rPr>
-              <a:t>순차 정격 1.0을 실제 부하에서 지키는 것이 과제</a:t>
-            </a:r>
-          </a:p>
-        </p:txBody>
-      </p:sp>
-      <p:sp>
-        <p:nvSpPr>
-          <p:cNvPr id="76" name="Oval 75"/>
-          <p:cNvSpPr/>
-          <p:nvPr/>
-        </p:nvSpPr>
-        <p:spPr>
-          <a:xfrm>
-            <a:off x="13066776" y="2139696"/>
-            <a:ext cx="438912" cy="438912"/>
-          </a:xfrm>
-          <a:prstGeom prst="ellipse">
-            <a:avLst/>
-          </a:prstGeom>
-          <a:solidFill>
-            <a:srgbClr val="1428A0"/>
-          </a:solidFill>
-          <a:ln>
-            <a:noFill/>
-          </a:ln>
-          <a:effectLst/>
-        </p:spPr>
-        <p:style>
-          <a:lnRef idx="1">
-            <a:schemeClr val="accent1"/>
-          </a:lnRef>
-          <a:fillRef idx="3">
-            <a:schemeClr val="accent1"/>
-          </a:fillRef>
-          <a:effectRef idx="2">
-            <a:schemeClr val="accent1"/>
-          </a:effectRef>
-          <a:fontRef idx="minor">
-            <a:schemeClr val="lt1"/>
-          </a:fontRef>
-        </p:style>
-        <p:txBody>
-          <a:bodyPr rtlCol="0" anchor="ctr"/>
-          <a:lstStyle/>
-          <a:p>
-            <a:pPr algn="ctr"/>
-          </a:p>
-        </p:txBody>
-      </p:sp>
-      <p:sp>
-        <p:nvSpPr>
-          <p:cNvPr id="77" name="TextBox 76"/>
-          <p:cNvSpPr txBox="1"/>
-          <p:nvPr/>
-        </p:nvSpPr>
-        <p:spPr>
-          <a:xfrm>
-            <a:off x="13066776" y="2139696"/>
-            <a:ext cx="438912" cy="438912"/>
-          </a:xfrm>
-          <a:prstGeom prst="rect">
-            <a:avLst/>
-          </a:prstGeom>
-          <a:noFill/>
-        </p:spPr>
-        <p:txBody>
-          <a:bodyPr wrap="square" anchor="ctr" lIns="0" rIns="0" tIns="0" bIns="0">
-            <a:spAutoFit/>
-          </a:bodyPr>
-          <a:lstStyle/>
-          <a:p>
-            <a:pPr algn="ctr">
-              <a:lnSpc>
-                <a:spcPct val="110000"/>
-              </a:lnSpc>
-            </a:pPr>
-            <a:r>
-              <a:rPr sz="2000" b="1">
-                <a:solidFill>
-                  <a:srgbClr val="FFFFFF"/>
-                </a:solidFill>
-                <a:latin typeface="Arial"/>
-                <a:ea typeface="Arial"/>
-              </a:rPr>
-              <a:t>3</a:t>
-            </a:r>
-          </a:p>
-        </p:txBody>
-      </p:sp>
-      <p:sp>
-        <p:nvSpPr>
-          <p:cNvPr id="78" name="TextBox 77"/>
-          <p:cNvSpPr txBox="1"/>
-          <p:nvPr/>
-        </p:nvSpPr>
-        <p:spPr>
-          <a:xfrm>
-            <a:off x="13651992" y="2103120"/>
-            <a:ext cx="3913631" cy="512063"/>
-          </a:xfrm>
-          <a:prstGeom prst="rect">
-            <a:avLst/>
-          </a:prstGeom>
-          <a:noFill/>
-        </p:spPr>
-        <p:txBody>
-          <a:bodyPr wrap="square" anchor="ctr" lIns="0" rIns="0" tIns="0" bIns="0">
-            <a:spAutoFit/>
-          </a:bodyPr>
-          <a:lstStyle/>
-          <a:p>
-            <a:pPr algn="l">
-              <a:lnSpc>
-                <a:spcPct val="110000"/>
-              </a:lnSpc>
-            </a:pPr>
-            <a:r>
-              <a:rPr sz="2400" b="1">
-                <a:solidFill>
-                  <a:srgbClr val="1A1A1A"/>
-                </a:solidFill>
-                <a:latin typeface="Arial"/>
-                <a:ea typeface="Arial"/>
-              </a:rPr>
-              <a:t>성능: 필요한 만큼만</a:t>
-            </a:r>
-          </a:p>
-        </p:txBody>
-      </p:sp>
-      <p:sp>
-        <p:nvSpPr>
-          <p:cNvPr id="79" name="TextBox 78"/>
-          <p:cNvSpPr txBox="1"/>
-          <p:nvPr/>
-        </p:nvSpPr>
-        <p:spPr>
-          <a:xfrm>
-            <a:off x="13066776" y="2743200"/>
-            <a:ext cx="4498847" cy="329184"/>
-          </a:xfrm>
-          <a:prstGeom prst="rect">
-            <a:avLst/>
-          </a:prstGeom>
-          <a:noFill/>
-        </p:spPr>
-        <p:txBody>
-          <a:bodyPr wrap="square" anchor="ctr" lIns="0" rIns="0" tIns="0" bIns="0">
-            <a:spAutoFit/>
-          </a:bodyPr>
-          <a:lstStyle/>
-          <a:p>
-            <a:pPr algn="l">
-              <a:lnSpc>
-                <a:spcPct val="110000"/>
-              </a:lnSpc>
-            </a:pPr>
-            <a:r>
-              <a:rPr sz="1800" b="1">
-                <a:solidFill>
-                  <a:srgbClr val="1A1A1A"/>
-                </a:solidFill>
-                <a:latin typeface="Arial"/>
-                <a:ea typeface="Arial"/>
-              </a:rPr>
-              <a:t>지연 ms  </a:t>
-            </a:r>
-            <a:r>
-              <a:rPr sz="1600" b="0">
-                <a:solidFill>
-                  <a:srgbClr val="555555"/>
-                </a:solidFill>
-                <a:latin typeface="Arial"/>
-                <a:ea typeface="Arial"/>
-              </a:rPr>
-              <a:t>로그 축, 예산 대 QLC</a:t>
-            </a:r>
-          </a:p>
-        </p:txBody>
-      </p:sp>
-      <p:sp>
-        <p:nvSpPr>
-          <p:cNvPr id="80" name="Rectangle 79"/>
-          <p:cNvSpPr/>
-          <p:nvPr/>
-        </p:nvSpPr>
-        <p:spPr>
-          <a:xfrm>
-            <a:off x="14847466" y="3218688"/>
-            <a:ext cx="9144" cy="1975104"/>
-          </a:xfrm>
-          <a:prstGeom prst="rect">
-            <a:avLst/>
-          </a:prstGeom>
-          <a:solidFill>
-            <a:srgbClr val="D9D9D9"/>
-          </a:solidFill>
-          <a:ln>
-            <a:noFill/>
-          </a:ln>
-          <a:effectLst/>
-        </p:spPr>
-        <p:style>
-          <a:lnRef idx="1">
-            <a:schemeClr val="accent1"/>
-          </a:lnRef>
-          <a:fillRef idx="3">
-            <a:schemeClr val="accent1"/>
-          </a:fillRef>
-          <a:effectRef idx="2">
-            <a:schemeClr val="accent1"/>
-          </a:effectRef>
-          <a:fontRef idx="minor">
-            <a:schemeClr val="lt1"/>
-          </a:fontRef>
-        </p:style>
-        <p:txBody>
-          <a:bodyPr rtlCol="0" anchor="ctr"/>
-          <a:lstStyle/>
-          <a:p>
-            <a:pPr algn="ctr"/>
-          </a:p>
-        </p:txBody>
-      </p:sp>
-      <p:sp>
-        <p:nvSpPr>
-          <p:cNvPr id="81" name="TextBox 80"/>
-          <p:cNvSpPr txBox="1"/>
-          <p:nvPr/>
-        </p:nvSpPr>
-        <p:spPr>
-          <a:xfrm>
-            <a:off x="14486278" y="5193792"/>
-            <a:ext cx="731520" cy="256032"/>
-          </a:xfrm>
-          <a:prstGeom prst="rect">
-            <a:avLst/>
-          </a:prstGeom>
-          <a:noFill/>
-        </p:spPr>
-        <p:txBody>
-          <a:bodyPr wrap="square" anchor="t" lIns="0" rIns="0" tIns="0" bIns="0">
-            <a:spAutoFit/>
-          </a:bodyPr>
-          <a:lstStyle/>
-          <a:p>
-            <a:pPr algn="ctr">
-              <a:lnSpc>
-                <a:spcPct val="110000"/>
-              </a:lnSpc>
-            </a:pPr>
-            <a:r>
-              <a:rPr sz="1500" b="0">
-                <a:solidFill>
-                  <a:srgbClr val="555555"/>
-                </a:solidFill>
-                <a:latin typeface="Arial"/>
-                <a:ea typeface="Arial"/>
-              </a:rPr>
-              <a:t>0.1</a:t>
-            </a:r>
-          </a:p>
-        </p:txBody>
-      </p:sp>
-      <p:sp>
-        <p:nvSpPr>
-          <p:cNvPr id="82" name="Rectangle 81"/>
-          <p:cNvSpPr/>
-          <p:nvPr/>
-        </p:nvSpPr>
-        <p:spPr>
-          <a:xfrm>
-            <a:off x="15614107" y="3218688"/>
-            <a:ext cx="9144" cy="1975104"/>
-          </a:xfrm>
-          <a:prstGeom prst="rect">
-            <a:avLst/>
-          </a:prstGeom>
-          <a:solidFill>
-            <a:srgbClr val="D9D9D9"/>
-          </a:solidFill>
-          <a:ln>
-            <a:noFill/>
-          </a:ln>
-          <a:effectLst/>
-        </p:spPr>
-        <p:style>
-          <a:lnRef idx="1">
-            <a:schemeClr val="accent1"/>
-          </a:lnRef>
-          <a:fillRef idx="3">
-            <a:schemeClr val="accent1"/>
-          </a:fillRef>
-          <a:effectRef idx="2">
-            <a:schemeClr val="accent1"/>
-          </a:effectRef>
-          <a:fontRef idx="minor">
-            <a:schemeClr val="lt1"/>
-          </a:fontRef>
-        </p:style>
-        <p:txBody>
-          <a:bodyPr rtlCol="0" anchor="ctr"/>
-          <a:lstStyle/>
-          <a:p>
-            <a:pPr algn="ctr"/>
-          </a:p>
-        </p:txBody>
-      </p:sp>
-      <p:sp>
-        <p:nvSpPr>
-          <p:cNvPr id="83" name="TextBox 82"/>
-          <p:cNvSpPr txBox="1"/>
-          <p:nvPr/>
-        </p:nvSpPr>
-        <p:spPr>
-          <a:xfrm>
-            <a:off x="15252919" y="5193792"/>
-            <a:ext cx="731520" cy="256032"/>
-          </a:xfrm>
-          <a:prstGeom prst="rect">
-            <a:avLst/>
-          </a:prstGeom>
-          <a:noFill/>
-        </p:spPr>
-        <p:txBody>
-          <a:bodyPr wrap="square" anchor="t" lIns="0" rIns="0" tIns="0" bIns="0">
-            <a:spAutoFit/>
-          </a:bodyPr>
-          <a:lstStyle/>
-          <a:p>
-            <a:pPr algn="ctr">
-              <a:lnSpc>
-                <a:spcPct val="110000"/>
-              </a:lnSpc>
-            </a:pPr>
-            <a:r>
-              <a:rPr sz="1500" b="0">
-                <a:solidFill>
-                  <a:srgbClr val="555555"/>
-                </a:solidFill>
-                <a:latin typeface="Arial"/>
-                <a:ea typeface="Arial"/>
-              </a:rPr>
-              <a:t>1</a:t>
-            </a:r>
-          </a:p>
-        </p:txBody>
-      </p:sp>
-      <p:sp>
-        <p:nvSpPr>
-          <p:cNvPr id="84" name="Rectangle 83"/>
-          <p:cNvSpPr/>
-          <p:nvPr/>
-        </p:nvSpPr>
-        <p:spPr>
-          <a:xfrm>
-            <a:off x="16380748" y="3218688"/>
-            <a:ext cx="9144" cy="1975104"/>
-          </a:xfrm>
-          <a:prstGeom prst="rect">
-            <a:avLst/>
-          </a:prstGeom>
-          <a:solidFill>
-            <a:srgbClr val="D9D9D9"/>
-          </a:solidFill>
-          <a:ln>
-            <a:noFill/>
-          </a:ln>
-          <a:effectLst/>
-        </p:spPr>
-        <p:style>
-          <a:lnRef idx="1">
-            <a:schemeClr val="accent1"/>
-          </a:lnRef>
-          <a:fillRef idx="3">
-            <a:schemeClr val="accent1"/>
-          </a:fillRef>
-          <a:effectRef idx="2">
-            <a:schemeClr val="accent1"/>
-          </a:effectRef>
-          <a:fontRef idx="minor">
-            <a:schemeClr val="lt1"/>
-          </a:fontRef>
-        </p:style>
-        <p:txBody>
-          <a:bodyPr rtlCol="0" anchor="ctr"/>
-          <a:lstStyle/>
-          <a:p>
-            <a:pPr algn="ctr"/>
-          </a:p>
-        </p:txBody>
-      </p:sp>
-      <p:sp>
-        <p:nvSpPr>
-          <p:cNvPr id="85" name="TextBox 84"/>
-          <p:cNvSpPr txBox="1"/>
-          <p:nvPr/>
-        </p:nvSpPr>
-        <p:spPr>
-          <a:xfrm>
-            <a:off x="16019560" y="5193792"/>
-            <a:ext cx="731520" cy="256032"/>
-          </a:xfrm>
-          <a:prstGeom prst="rect">
-            <a:avLst/>
-          </a:prstGeom>
-          <a:noFill/>
-        </p:spPr>
-        <p:txBody>
-          <a:bodyPr wrap="square" anchor="t" lIns="0" rIns="0" tIns="0" bIns="0">
-            <a:spAutoFit/>
-          </a:bodyPr>
-          <a:lstStyle/>
-          <a:p>
-            <a:pPr algn="ctr">
-              <a:lnSpc>
-                <a:spcPct val="110000"/>
-              </a:lnSpc>
-            </a:pPr>
-            <a:r>
-              <a:rPr sz="1500" b="0">
-                <a:solidFill>
-                  <a:srgbClr val="555555"/>
-                </a:solidFill>
-                <a:latin typeface="Arial"/>
-                <a:ea typeface="Arial"/>
-              </a:rPr>
-              <a:t>10</a:t>
-            </a:r>
-          </a:p>
-        </p:txBody>
-      </p:sp>
-      <p:sp>
-        <p:nvSpPr>
-          <p:cNvPr id="86" name="Rectangle 85"/>
-          <p:cNvSpPr/>
-          <p:nvPr/>
-        </p:nvSpPr>
-        <p:spPr>
-          <a:xfrm>
-            <a:off x="17147389" y="3218688"/>
-            <a:ext cx="9144" cy="1975104"/>
-          </a:xfrm>
-          <a:prstGeom prst="rect">
-            <a:avLst/>
-          </a:prstGeom>
-          <a:solidFill>
-            <a:srgbClr val="D9D9D9"/>
-          </a:solidFill>
-          <a:ln>
-            <a:noFill/>
-          </a:ln>
-          <a:effectLst/>
-        </p:spPr>
-        <p:style>
-          <a:lnRef idx="1">
-            <a:schemeClr val="accent1"/>
-          </a:lnRef>
-          <a:fillRef idx="3">
-            <a:schemeClr val="accent1"/>
-          </a:fillRef>
-          <a:effectRef idx="2">
-            <a:schemeClr val="accent1"/>
-          </a:effectRef>
-          <a:fontRef idx="minor">
-            <a:schemeClr val="lt1"/>
-          </a:fontRef>
-        </p:style>
-        <p:txBody>
-          <a:bodyPr rtlCol="0" anchor="ctr"/>
-          <a:lstStyle/>
-          <a:p>
-            <a:pPr algn="ctr"/>
-          </a:p>
-        </p:txBody>
-      </p:sp>
-      <p:sp>
-        <p:nvSpPr>
-          <p:cNvPr id="87" name="TextBox 86"/>
-          <p:cNvSpPr txBox="1"/>
-          <p:nvPr/>
-        </p:nvSpPr>
-        <p:spPr>
-          <a:xfrm>
-            <a:off x="16786201" y="5193792"/>
-            <a:ext cx="731520" cy="256032"/>
-          </a:xfrm>
-          <a:prstGeom prst="rect">
-            <a:avLst/>
-          </a:prstGeom>
-          <a:noFill/>
-        </p:spPr>
-        <p:txBody>
-          <a:bodyPr wrap="square" anchor="t" lIns="0" rIns="0" tIns="0" bIns="0">
-            <a:spAutoFit/>
-          </a:bodyPr>
-          <a:lstStyle/>
-          <a:p>
-            <a:pPr algn="ctr">
-              <a:lnSpc>
-                <a:spcPct val="110000"/>
-              </a:lnSpc>
-            </a:pPr>
-            <a:r>
-              <a:rPr sz="1500" b="0">
-                <a:solidFill>
-                  <a:srgbClr val="555555"/>
-                </a:solidFill>
-                <a:latin typeface="Arial"/>
-                <a:ea typeface="Arial"/>
-              </a:rPr>
-              <a:t>100</a:t>
-            </a:r>
-          </a:p>
-        </p:txBody>
-      </p:sp>
-      <p:sp>
-        <p:nvSpPr>
-          <p:cNvPr id="88" name="TextBox 87"/>
-          <p:cNvSpPr txBox="1"/>
-          <p:nvPr/>
-        </p:nvSpPr>
-        <p:spPr>
-          <a:xfrm>
-            <a:off x="13066776" y="3310128"/>
-            <a:ext cx="1499616" cy="365760"/>
-          </a:xfrm>
-          <a:prstGeom prst="rect">
-            <a:avLst/>
-          </a:prstGeom>
-          <a:noFill/>
-        </p:spPr>
-        <p:txBody>
-          <a:bodyPr wrap="square" anchor="ctr" lIns="0" rIns="0" tIns="0" bIns="0">
-            <a:spAutoFit/>
-          </a:bodyPr>
-          <a:lstStyle/>
-          <a:p>
-            <a:pPr algn="l">
-              <a:lnSpc>
-                <a:spcPct val="110000"/>
-              </a:lnSpc>
-            </a:pPr>
-            <a:r>
-              <a:rPr sz="1700" b="1">
-                <a:solidFill>
-                  <a:srgbClr val="1428A0"/>
-                </a:solidFill>
-                <a:latin typeface="Arial"/>
-                <a:ea typeface="Arial"/>
-              </a:rPr>
-              <a:t>내구 규격만</a:t>
-            </a:r>
-          </a:p>
-        </p:txBody>
-      </p:sp>
-      <p:sp>
-        <p:nvSpPr>
-          <p:cNvPr id="89" name="TextBox 88"/>
-          <p:cNvSpPr txBox="1"/>
-          <p:nvPr/>
-        </p:nvSpPr>
-        <p:spPr>
-          <a:xfrm>
-            <a:off x="13066776" y="3639312"/>
-            <a:ext cx="1499616" cy="274320"/>
-          </a:xfrm>
-          <a:prstGeom prst="rect">
-            <a:avLst/>
-          </a:prstGeom>
-          <a:noFill/>
-        </p:spPr>
-        <p:txBody>
-          <a:bodyPr wrap="square" anchor="ctr" lIns="0" rIns="0" tIns="0" bIns="0">
-            <a:spAutoFit/>
-          </a:bodyPr>
-          <a:lstStyle/>
-          <a:p>
-            <a:pPr algn="l">
-              <a:lnSpc>
-                <a:spcPct val="110000"/>
-              </a:lnSpc>
-            </a:pPr>
-            <a:r>
-              <a:rPr sz="1500" b="0">
-                <a:solidFill>
-                  <a:srgbClr val="555555"/>
-                </a:solidFill>
-                <a:latin typeface="Arial"/>
-                <a:ea typeface="Arial"/>
-              </a:rPr>
-              <a:t>RAG 검색 예산</a:t>
-            </a:r>
-          </a:p>
-        </p:txBody>
-      </p:sp>
-      <p:sp>
-        <p:nvSpPr>
-          <p:cNvPr id="90" name="Rectangle 89"/>
-          <p:cNvSpPr/>
-          <p:nvPr/>
-        </p:nvSpPr>
-        <p:spPr>
-          <a:xfrm>
-            <a:off x="14852038" y="3438144"/>
-            <a:ext cx="2299923" cy="146304"/>
-          </a:xfrm>
-          <a:prstGeom prst="rect">
-            <a:avLst/>
-          </a:prstGeom>
-          <a:solidFill>
-            <a:srgbClr val="AAB8E8"/>
-          </a:solidFill>
-          <a:ln>
-            <a:noFill/>
-          </a:ln>
-          <a:effectLst/>
-        </p:spPr>
-        <p:style>
-          <a:lnRef idx="1">
-            <a:schemeClr val="accent1"/>
-          </a:lnRef>
-          <a:fillRef idx="3">
-            <a:schemeClr val="accent1"/>
-          </a:fillRef>
-          <a:effectRef idx="2">
-            <a:schemeClr val="accent1"/>
-          </a:effectRef>
-          <a:fontRef idx="minor">
-            <a:schemeClr val="lt1"/>
-          </a:fontRef>
-        </p:style>
-        <p:txBody>
-          <a:bodyPr rtlCol="0" anchor="ctr"/>
-          <a:lstStyle/>
-          <a:p>
-            <a:pPr algn="ctr"/>
-          </a:p>
-        </p:txBody>
-      </p:sp>
-      <p:sp>
-        <p:nvSpPr>
-          <p:cNvPr id="91" name="Oval 90"/>
-          <p:cNvSpPr/>
-          <p:nvPr/>
-        </p:nvSpPr>
-        <p:spPr>
-          <a:xfrm>
-            <a:off x="14778886" y="3401568"/>
-            <a:ext cx="146304" cy="219456"/>
-          </a:xfrm>
-          <a:prstGeom prst="ellipse">
-            <a:avLst/>
-          </a:prstGeom>
-          <a:solidFill>
-            <a:srgbClr val="1428A0"/>
-          </a:solidFill>
-          <a:ln>
-            <a:noFill/>
-          </a:ln>
-          <a:effectLst/>
-        </p:spPr>
-        <p:style>
-          <a:lnRef idx="1">
-            <a:schemeClr val="accent1"/>
-          </a:lnRef>
-          <a:fillRef idx="3">
-            <a:schemeClr val="accent1"/>
-          </a:fillRef>
-          <a:effectRef idx="2">
-            <a:schemeClr val="accent1"/>
-          </a:effectRef>
-          <a:fontRef idx="minor">
-            <a:schemeClr val="lt1"/>
-          </a:fontRef>
-        </p:style>
-        <p:txBody>
-          <a:bodyPr rtlCol="0" anchor="ctr"/>
-          <a:lstStyle/>
-          <a:p>
-            <a:pPr algn="ctr"/>
-          </a:p>
-        </p:txBody>
-      </p:sp>
-      <p:sp>
-        <p:nvSpPr>
-          <p:cNvPr id="92" name="Rectangle 91"/>
-          <p:cNvSpPr/>
-          <p:nvPr/>
-        </p:nvSpPr>
-        <p:spPr>
-          <a:xfrm>
-            <a:off x="17124529" y="3346704"/>
-            <a:ext cx="54864" cy="329184"/>
-          </a:xfrm>
-          <a:prstGeom prst="rect">
-            <a:avLst/>
-          </a:prstGeom>
-          <a:solidFill>
-            <a:srgbClr val="555555"/>
-          </a:solidFill>
-          <a:ln>
-            <a:noFill/>
-          </a:ln>
-          <a:effectLst/>
-        </p:spPr>
-        <p:style>
-          <a:lnRef idx="1">
-            <a:schemeClr val="accent1"/>
-          </a:lnRef>
-          <a:fillRef idx="3">
-            <a:schemeClr val="accent1"/>
-          </a:fillRef>
-          <a:effectRef idx="2">
-            <a:schemeClr val="accent1"/>
-          </a:effectRef>
-          <a:fontRef idx="minor">
-            <a:schemeClr val="lt1"/>
-          </a:fontRef>
-        </p:style>
-        <p:txBody>
-          <a:bodyPr rtlCol="0" anchor="ctr"/>
-          <a:lstStyle/>
-          <a:p>
-            <a:pPr algn="ctr"/>
-          </a:p>
-        </p:txBody>
-      </p:sp>
-      <p:sp>
-        <p:nvSpPr>
-          <p:cNvPr id="93" name="TextBox 92"/>
-          <p:cNvSpPr txBox="1"/>
-          <p:nvPr/>
-        </p:nvSpPr>
-        <p:spPr>
-          <a:xfrm>
-            <a:off x="14943478" y="3657600"/>
-            <a:ext cx="2194560" cy="292608"/>
-          </a:xfrm>
-          <a:prstGeom prst="rect">
-            <a:avLst/>
-          </a:prstGeom>
-          <a:noFill/>
-        </p:spPr>
-        <p:txBody>
-          <a:bodyPr wrap="square" anchor="ctr" lIns="0" rIns="0" tIns="0" bIns="0">
-            <a:spAutoFit/>
-          </a:bodyPr>
-          <a:lstStyle/>
-          <a:p>
-            <a:pPr algn="l">
-              <a:lnSpc>
-                <a:spcPct val="110000"/>
-              </a:lnSpc>
-            </a:pPr>
-            <a:r>
-              <a:rPr sz="1600" b="1">
-                <a:solidFill>
-                  <a:srgbClr val="1428A0"/>
-                </a:solidFill>
-                <a:latin typeface="Arial"/>
-                <a:ea typeface="Arial"/>
-              </a:rPr>
-              <a:t>여유 약 1,000배</a:t>
-            </a:r>
-          </a:p>
-        </p:txBody>
-      </p:sp>
-      <p:sp>
-        <p:nvSpPr>
-          <p:cNvPr id="94" name="TextBox 93"/>
-          <p:cNvSpPr txBox="1"/>
-          <p:nvPr/>
-        </p:nvSpPr>
-        <p:spPr>
-          <a:xfrm>
-            <a:off x="13066776" y="4297680"/>
-            <a:ext cx="1499616" cy="365760"/>
-          </a:xfrm>
-          <a:prstGeom prst="rect">
-            <a:avLst/>
-          </a:prstGeom>
-          <a:noFill/>
-        </p:spPr>
-        <p:txBody>
-          <a:bodyPr wrap="square" anchor="ctr" lIns="0" rIns="0" tIns="0" bIns="0">
-            <a:spAutoFit/>
-          </a:bodyPr>
-          <a:lstStyle/>
-          <a:p>
-            <a:pPr algn="l">
-              <a:lnSpc>
-                <a:spcPct val="110000"/>
-              </a:lnSpc>
-            </a:pPr>
-            <a:r>
-              <a:rPr sz="1700" b="1">
-                <a:solidFill>
-                  <a:srgbClr val="1A1A1A"/>
-                </a:solidFill>
-                <a:latin typeface="Arial"/>
-                <a:ea typeface="Arial"/>
-              </a:rPr>
-              <a:t>성능 (RI)</a:t>
-            </a:r>
-          </a:p>
-        </p:txBody>
-      </p:sp>
-      <p:sp>
-        <p:nvSpPr>
-          <p:cNvPr id="95" name="TextBox 94"/>
-          <p:cNvSpPr txBox="1"/>
-          <p:nvPr/>
-        </p:nvSpPr>
-        <p:spPr>
-          <a:xfrm>
-            <a:off x="13066776" y="4626864"/>
-            <a:ext cx="1499616" cy="274320"/>
-          </a:xfrm>
-          <a:prstGeom prst="rect">
-            <a:avLst/>
-          </a:prstGeom>
-          <a:noFill/>
-        </p:spPr>
-        <p:txBody>
-          <a:bodyPr wrap="square" anchor="ctr" lIns="0" rIns="0" tIns="0" bIns="0">
-            <a:spAutoFit/>
-          </a:bodyPr>
-          <a:lstStyle/>
-          <a:p>
-            <a:pPr algn="l">
-              <a:lnSpc>
-                <a:spcPct val="110000"/>
-              </a:lnSpc>
-            </a:pPr>
-            <a:r>
-              <a:rPr sz="1500" b="0">
-                <a:solidFill>
-                  <a:srgbClr val="555555"/>
-                </a:solidFill>
-                <a:latin typeface="Arial"/>
-                <a:ea typeface="Arial"/>
-              </a:rPr>
-              <a:t>어레이 응답</a:t>
-            </a:r>
-          </a:p>
-        </p:txBody>
-      </p:sp>
-      <p:sp>
-        <p:nvSpPr>
-          <p:cNvPr id="96" name="Oval 95"/>
-          <p:cNvSpPr/>
-          <p:nvPr/>
-        </p:nvSpPr>
-        <p:spPr>
-          <a:xfrm>
-            <a:off x="15314745" y="4389120"/>
-            <a:ext cx="146304" cy="219456"/>
-          </a:xfrm>
-          <a:prstGeom prst="ellipse">
-            <a:avLst/>
-          </a:prstGeom>
-          <a:solidFill>
-            <a:srgbClr val="8A8A8A"/>
-          </a:solidFill>
-          <a:ln>
-            <a:noFill/>
-          </a:ln>
-          <a:effectLst/>
-        </p:spPr>
-        <p:style>
-          <a:lnRef idx="1">
-            <a:schemeClr val="accent1"/>
-          </a:lnRef>
-          <a:fillRef idx="3">
-            <a:schemeClr val="accent1"/>
-          </a:fillRef>
-          <a:effectRef idx="2">
-            <a:schemeClr val="accent1"/>
-          </a:effectRef>
-          <a:fontRef idx="minor">
-            <a:schemeClr val="lt1"/>
-          </a:fontRef>
-        </p:style>
-        <p:txBody>
-          <a:bodyPr rtlCol="0" anchor="ctr"/>
-          <a:lstStyle/>
-          <a:p>
-            <a:pPr algn="ctr"/>
-          </a:p>
-        </p:txBody>
-      </p:sp>
-      <p:sp>
-        <p:nvSpPr>
-          <p:cNvPr id="97" name="Rectangle 96"/>
-          <p:cNvSpPr/>
-          <p:nvPr/>
-        </p:nvSpPr>
-        <p:spPr>
-          <a:xfrm>
-            <a:off x="15849461" y="4407408"/>
-            <a:ext cx="230782" cy="182880"/>
-          </a:xfrm>
-          <a:prstGeom prst="rect">
-            <a:avLst/>
-          </a:prstGeom>
-          <a:solidFill>
-            <a:srgbClr val="1428A0"/>
-          </a:solidFill>
-          <a:ln>
-            <a:noFill/>
-          </a:ln>
-          <a:effectLst/>
-        </p:spPr>
-        <p:style>
-          <a:lnRef idx="1">
-            <a:schemeClr val="accent1"/>
-          </a:lnRef>
-          <a:fillRef idx="3">
-            <a:schemeClr val="accent1"/>
-          </a:fillRef>
-          <a:effectRef idx="2">
-            <a:schemeClr val="accent1"/>
-          </a:effectRef>
-          <a:fontRef idx="minor">
-            <a:schemeClr val="lt1"/>
-          </a:fontRef>
-        </p:style>
-        <p:txBody>
-          <a:bodyPr rtlCol="0" anchor="ctr"/>
-          <a:lstStyle/>
-          <a:p>
-            <a:pPr algn="ctr"/>
-          </a:p>
-        </p:txBody>
-      </p:sp>
-      <p:cxnSp>
-        <p:nvCxnSpPr>
-          <p:cNvPr id="98" name="Connector 97"/>
-          <p:cNvCxnSpPr/>
-          <p:nvPr/>
-        </p:nvCxnSpPr>
-        <p:spPr>
-          <a:xfrm>
-            <a:off x="15461049" y="4498848"/>
-            <a:ext cx="388412" cy="0"/>
-          </a:xfrm>
-          <a:prstGeom prst="line">
-            <a:avLst/>
-          </a:prstGeom>
-          <a:ln>
-            <a:solidFill>
-              <a:srgbClr val="8A8A8A"/>
-            </a:solidFill>
-            <a:prstDash val="dash"/>
-          </a:ln>
-        </p:spPr>
-        <p:style>
-          <a:lnRef idx="2">
-            <a:schemeClr val="accent1"/>
-          </a:lnRef>
-          <a:fillRef idx="0">
-            <a:schemeClr val="accent1"/>
-          </a:fillRef>
-          <a:effectRef idx="1">
-            <a:schemeClr val="accent1"/>
-          </a:effectRef>
-          <a:fontRef idx="minor">
-            <a:schemeClr val="tx1"/>
-          </a:fontRef>
-        </p:style>
-      </p:cxnSp>
-      <p:sp>
-        <p:nvSpPr>
-          <p:cNvPr id="99" name="TextBox 98"/>
-          <p:cNvSpPr txBox="1"/>
-          <p:nvPr/>
-        </p:nvSpPr>
-        <p:spPr>
-          <a:xfrm>
-            <a:off x="14930697" y="4645152"/>
-            <a:ext cx="914400" cy="274320"/>
-          </a:xfrm>
-          <a:prstGeom prst="rect">
-            <a:avLst/>
-          </a:prstGeom>
-          <a:noFill/>
-        </p:spPr>
-        <p:txBody>
-          <a:bodyPr wrap="square" anchor="ctr" lIns="0" rIns="0" tIns="0" bIns="0">
-            <a:spAutoFit/>
-          </a:bodyPr>
-          <a:lstStyle/>
-          <a:p>
-            <a:pPr algn="ctr">
-              <a:lnSpc>
-                <a:spcPct val="110000"/>
-              </a:lnSpc>
-            </a:pPr>
-            <a:r>
-              <a:rPr sz="1500" b="1">
-                <a:solidFill>
-                  <a:srgbClr val="555555"/>
-                </a:solidFill>
-                <a:latin typeface="Arial"/>
-                <a:ea typeface="Arial"/>
-              </a:rPr>
-              <a:t>TLC</a:t>
-            </a:r>
-          </a:p>
-        </p:txBody>
-      </p:sp>
-      <p:sp>
-        <p:nvSpPr>
-          <p:cNvPr id="100" name="TextBox 99"/>
-          <p:cNvSpPr txBox="1"/>
-          <p:nvPr/>
-        </p:nvSpPr>
-        <p:spPr>
-          <a:xfrm>
-            <a:off x="15666581" y="4645152"/>
-            <a:ext cx="1828800" cy="274320"/>
-          </a:xfrm>
-          <a:prstGeom prst="rect">
-            <a:avLst/>
-          </a:prstGeom>
-          <a:noFill/>
-        </p:spPr>
-        <p:txBody>
-          <a:bodyPr wrap="square" anchor="ctr" lIns="0" rIns="0" tIns="0" bIns="0">
-            <a:spAutoFit/>
-          </a:bodyPr>
-          <a:lstStyle/>
-          <a:p>
-            <a:pPr algn="l">
-              <a:lnSpc>
-                <a:spcPct val="110000"/>
-              </a:lnSpc>
-            </a:pPr>
-            <a:r>
-              <a:rPr sz="1600" b="1">
-                <a:solidFill>
-                  <a:srgbClr val="1428A0"/>
-                </a:solidFill>
-                <a:latin typeface="Arial"/>
-                <a:ea typeface="Arial"/>
-              </a:rPr>
-              <a:t>QLC 4~8배</a:t>
-            </a:r>
-          </a:p>
-        </p:txBody>
-      </p:sp>
-      <p:sp>
-        <p:nvSpPr>
-          <p:cNvPr id="101" name="Rectangle 100"/>
-          <p:cNvSpPr/>
-          <p:nvPr/>
-        </p:nvSpPr>
-        <p:spPr>
-          <a:xfrm>
-            <a:off x="13066776" y="5486400"/>
-            <a:ext cx="4498847" cy="10972"/>
-          </a:xfrm>
-          <a:prstGeom prst="rect">
-            <a:avLst/>
-          </a:prstGeom>
-          <a:solidFill>
-            <a:srgbClr val="D9D9D9"/>
-          </a:solidFill>
-          <a:ln>
-            <a:noFill/>
-          </a:ln>
-          <a:effectLst/>
-        </p:spPr>
-        <p:style>
-          <a:lnRef idx="1">
-            <a:schemeClr val="accent1"/>
-          </a:lnRef>
-          <a:fillRef idx="3">
-            <a:schemeClr val="accent1"/>
-          </a:fillRef>
-          <a:effectRef idx="2">
-            <a:schemeClr val="accent1"/>
-          </a:effectRef>
-          <a:fontRef idx="minor">
-            <a:schemeClr val="lt1"/>
-          </a:fontRef>
-        </p:style>
-        <p:txBody>
-          <a:bodyPr rtlCol="0" anchor="ctr"/>
-          <a:lstStyle/>
-          <a:p>
-            <a:pPr algn="ctr"/>
-          </a:p>
-        </p:txBody>
-      </p:sp>
-      <p:sp>
-        <p:nvSpPr>
-          <p:cNvPr id="102" name="TextBox 101"/>
-          <p:cNvSpPr txBox="1"/>
-          <p:nvPr/>
-        </p:nvSpPr>
-        <p:spPr>
-          <a:xfrm>
-            <a:off x="13066776" y="5577840"/>
-            <a:ext cx="4498847" cy="329184"/>
-          </a:xfrm>
-          <a:prstGeom prst="rect">
-            <a:avLst/>
-          </a:prstGeom>
-          <a:noFill/>
-        </p:spPr>
-        <p:txBody>
-          <a:bodyPr wrap="square" anchor="ctr" lIns="0" rIns="0" tIns="0" bIns="0">
-            <a:spAutoFit/>
-          </a:bodyPr>
-          <a:lstStyle/>
-          <a:p>
-            <a:pPr algn="l">
-              <a:lnSpc>
-                <a:spcPct val="110000"/>
-              </a:lnSpc>
-            </a:pPr>
-            <a:r>
-              <a:rPr sz="1800" b="1">
-                <a:solidFill>
-                  <a:srgbClr val="1A1A1A"/>
-                </a:solidFill>
-                <a:latin typeface="Arial"/>
-                <a:ea typeface="Arial"/>
-              </a:rPr>
-              <a:t>격차는 고객 시스템과 함께 줄인다</a:t>
-            </a:r>
-          </a:p>
-        </p:txBody>
-      </p:sp>
-      <p:sp>
-        <p:nvSpPr>
-          <p:cNvPr id="103" name="Rounded Rectangle 102"/>
-          <p:cNvSpPr/>
-          <p:nvPr/>
-        </p:nvSpPr>
-        <p:spPr>
-          <a:xfrm>
-            <a:off x="13066776" y="5998464"/>
-            <a:ext cx="4498847" cy="621792"/>
-          </a:xfrm>
-          <a:prstGeom prst="roundRect">
-            <a:avLst>
-              <a:gd name="adj" fmla="val 11764"/>
-            </a:avLst>
-          </a:prstGeom>
-          <a:solidFill>
-            <a:srgbClr val="F5F5F5"/>
-          </a:solidFill>
-          <a:ln>
-            <a:noFill/>
-          </a:ln>
-          <a:effectLst/>
-        </p:spPr>
-        <p:style>
-          <a:lnRef idx="1">
-            <a:schemeClr val="accent1"/>
-          </a:lnRef>
-          <a:fillRef idx="3">
-            <a:schemeClr val="accent1"/>
-          </a:fillRef>
-          <a:effectRef idx="2">
-            <a:schemeClr val="accent1"/>
-          </a:effectRef>
-          <a:fontRef idx="minor">
-            <a:schemeClr val="lt1"/>
-          </a:fontRef>
-        </p:style>
-        <p:txBody>
-          <a:bodyPr rtlCol="0" anchor="ctr"/>
-          <a:lstStyle/>
-          <a:p>
-            <a:pPr algn="ctr"/>
-          </a:p>
-        </p:txBody>
-      </p:sp>
-      <p:sp>
-        <p:nvSpPr>
-          <p:cNvPr id="104" name="TextBox 103"/>
-          <p:cNvSpPr txBox="1"/>
-          <p:nvPr/>
-        </p:nvSpPr>
-        <p:spPr>
-          <a:xfrm>
-            <a:off x="13194792" y="5998464"/>
-            <a:ext cx="4242815" cy="621792"/>
-          </a:xfrm>
-          <a:prstGeom prst="rect">
-            <a:avLst/>
-          </a:prstGeom>
-          <a:noFill/>
-        </p:spPr>
-        <p:txBody>
-          <a:bodyPr wrap="square" anchor="ctr" lIns="0" rIns="0" tIns="0" bIns="0">
-            <a:spAutoFit/>
-          </a:bodyPr>
-          <a:lstStyle/>
-          <a:p>
-            <a:pPr algn="l">
-              <a:lnSpc>
-                <a:spcPct val="110000"/>
-              </a:lnSpc>
-            </a:pPr>
-            <a:r>
-              <a:rPr sz="1700" b="1">
-                <a:solidFill>
-                  <a:srgbClr val="1A1A1A"/>
-                </a:solidFill>
-                <a:latin typeface="Arial"/>
-                <a:ea typeface="Arial"/>
-              </a:rPr>
-              <a:t>FDP로 GC 간섭 ↓  </a:t>
-            </a:r>
-            <a:r>
-              <a:rPr sz="1500" b="0">
-                <a:solidFill>
-                  <a:srgbClr val="555555"/>
-                </a:solidFill>
-                <a:latin typeface="Arial"/>
-                <a:ea typeface="Arial"/>
-              </a:rPr>
-              <a:t>p99.9 -55% (TLC)</a:t>
-            </a:r>
-          </a:p>
-        </p:txBody>
-      </p:sp>
-      <p:sp>
-        <p:nvSpPr>
-          <p:cNvPr id="105" name="Rounded Rectangle 104"/>
-          <p:cNvSpPr/>
-          <p:nvPr/>
-        </p:nvSpPr>
-        <p:spPr>
-          <a:xfrm>
-            <a:off x="13066776" y="6711696"/>
-            <a:ext cx="4498847" cy="621792"/>
-          </a:xfrm>
-          <a:prstGeom prst="roundRect">
-            <a:avLst>
-              <a:gd name="adj" fmla="val 11764"/>
-            </a:avLst>
-          </a:prstGeom>
-          <a:solidFill>
-            <a:srgbClr val="F5F5F5"/>
-          </a:solidFill>
-          <a:ln>
-            <a:noFill/>
-          </a:ln>
-          <a:effectLst/>
-        </p:spPr>
-        <p:style>
-          <a:lnRef idx="1">
-            <a:schemeClr val="accent1"/>
-          </a:lnRef>
-          <a:fillRef idx="3">
-            <a:schemeClr val="accent1"/>
-          </a:fillRef>
-          <a:effectRef idx="2">
-            <a:schemeClr val="accent1"/>
-          </a:effectRef>
-          <a:fontRef idx="minor">
-            <a:schemeClr val="lt1"/>
-          </a:fontRef>
-        </p:style>
-        <p:txBody>
-          <a:bodyPr rtlCol="0" anchor="ctr"/>
-          <a:lstStyle/>
-          <a:p>
-            <a:pPr algn="ctr"/>
-          </a:p>
-        </p:txBody>
-      </p:sp>
-      <p:sp>
-        <p:nvSpPr>
-          <p:cNvPr id="106" name="TextBox 105"/>
-          <p:cNvSpPr txBox="1"/>
-          <p:nvPr/>
-        </p:nvSpPr>
-        <p:spPr>
-          <a:xfrm>
-            <a:off x="13194792" y="6711696"/>
-            <a:ext cx="4242815" cy="621792"/>
-          </a:xfrm>
-          <a:prstGeom prst="rect">
-            <a:avLst/>
-          </a:prstGeom>
-          <a:noFill/>
-        </p:spPr>
-        <p:txBody>
-          <a:bodyPr wrap="square" anchor="ctr" lIns="0" rIns="0" tIns="0" bIns="0">
-            <a:spAutoFit/>
-          </a:bodyPr>
-          <a:lstStyle/>
-          <a:p>
-            <a:pPr algn="l">
-              <a:lnSpc>
-                <a:spcPct val="110000"/>
-              </a:lnSpc>
-            </a:pPr>
-            <a:r>
-              <a:rPr sz="1700" b="1">
-                <a:solidFill>
-                  <a:srgbClr val="1A1A1A"/>
-                </a:solidFill>
-                <a:latin typeface="Arial"/>
-                <a:ea typeface="Arial"/>
-              </a:rPr>
-              <a:t>pSLC 버퍼  </a:t>
-            </a:r>
-            <a:r>
-              <a:rPr sz="1500" b="0">
-                <a:solidFill>
-                  <a:srgbClr val="555555"/>
-                </a:solidFill>
-                <a:latin typeface="Arial"/>
-                <a:ea typeface="Arial"/>
-              </a:rPr>
-              <a:t>CSAL WAF ≈ 1 (벤더)</a:t>
-            </a:r>
-          </a:p>
-        </p:txBody>
-      </p:sp>
-      <p:sp>
-        <p:nvSpPr>
-          <p:cNvPr id="107" name="TextBox 106"/>
-          <p:cNvSpPr txBox="1"/>
-          <p:nvPr/>
-        </p:nvSpPr>
-        <p:spPr>
-          <a:xfrm>
-            <a:off x="13066776" y="7589520"/>
-            <a:ext cx="4498847" cy="457200"/>
-          </a:xfrm>
-          <a:prstGeom prst="rect">
-            <a:avLst/>
-          </a:prstGeom>
-          <a:noFill/>
-        </p:spPr>
-        <p:txBody>
-          <a:bodyPr wrap="square" anchor="ctr" lIns="0" rIns="0" tIns="0" bIns="0">
-            <a:spAutoFit/>
-          </a:bodyPr>
-          <a:lstStyle/>
-          <a:p>
-            <a:pPr algn="l">
-              <a:lnSpc>
-                <a:spcPct val="110000"/>
-              </a:lnSpc>
-            </a:pPr>
-            <a:r>
-              <a:rPr sz="1600" b="1">
-                <a:solidFill>
-                  <a:srgbClr val="1428A0"/>
-                </a:solidFill>
-                <a:latin typeface="Arial"/>
-                <a:ea typeface="Arial"/>
-              </a:rPr>
-              <a:t>QLC 위 실측은 첫 공동 검증 과제</a:t>
-            </a:r>
-          </a:p>
-        </p:txBody>
-      </p:sp>
-      <p:sp>
-        <p:nvSpPr>
-          <p:cNvPr id="108" name="Rectangle 107"/>
-          <p:cNvSpPr/>
-          <p:nvPr/>
-        </p:nvSpPr>
-        <p:spPr>
-          <a:xfrm>
-            <a:off x="722376" y="8631936"/>
-            <a:ext cx="16843248" cy="731520"/>
-          </a:xfrm>
-          <a:prstGeom prst="rect">
-            <a:avLst/>
-          </a:prstGeom>
-          <a:solidFill>
-            <a:srgbClr val="1428A0"/>
-          </a:solidFill>
-          <a:ln>
-            <a:noFill/>
-          </a:ln>
-          <a:effectLst/>
-        </p:spPr>
-        <p:style>
-          <a:lnRef idx="1">
-            <a:schemeClr val="accent1"/>
-          </a:lnRef>
-          <a:fillRef idx="3">
-            <a:schemeClr val="accent1"/>
-          </a:fillRef>
-          <a:effectRef idx="2">
-            <a:schemeClr val="accent1"/>
-          </a:effectRef>
-          <a:fontRef idx="minor">
-            <a:schemeClr val="lt1"/>
-          </a:fontRef>
-        </p:style>
-        <p:txBody>
-          <a:bodyPr rtlCol="0" anchor="ctr"/>
-          <a:lstStyle/>
-          <a:p>
-            <a:pPr algn="ctr"/>
-          </a:p>
-        </p:txBody>
-      </p:sp>
-      <p:sp>
-        <p:nvSpPr>
-          <p:cNvPr id="109" name="TextBox 108"/>
-          <p:cNvSpPr txBox="1"/>
-          <p:nvPr/>
-        </p:nvSpPr>
-        <p:spPr>
-          <a:xfrm>
-            <a:off x="1088136" y="8631936"/>
-            <a:ext cx="1234440" cy="731520"/>
-          </a:xfrm>
-          <a:prstGeom prst="rect">
-            <a:avLst/>
-          </a:prstGeom>
-          <a:noFill/>
-        </p:spPr>
-        <p:txBody>
-          <a:bodyPr wrap="square" anchor="ctr" lIns="0" rIns="0" tIns="0" bIns="0">
-            <a:spAutoFit/>
-          </a:bodyPr>
-          <a:lstStyle/>
-          <a:p>
-            <a:pPr algn="l">
-              <a:lnSpc>
-                <a:spcPct val="110000"/>
-              </a:lnSpc>
-            </a:pPr>
-            <a:r>
-              <a:rPr sz="2000" b="0">
-                <a:solidFill>
-                  <a:srgbClr val="AAB8E8"/>
-                </a:solidFill>
-                <a:latin typeface="Arial"/>
-                <a:ea typeface="Arial"/>
-              </a:rPr>
-              <a:t>기회</a:t>
-            </a:r>
-          </a:p>
-        </p:txBody>
-      </p:sp>
-      <p:sp>
-        <p:nvSpPr>
-          <p:cNvPr id="110" name="TextBox 109"/>
-          <p:cNvSpPr txBox="1"/>
-          <p:nvPr/>
-        </p:nvSpPr>
-        <p:spPr>
-          <a:xfrm>
-            <a:off x="2322576" y="8631936"/>
-            <a:ext cx="15060168" cy="731520"/>
-          </a:xfrm>
-          <a:prstGeom prst="rect">
-            <a:avLst/>
-          </a:prstGeom>
-          <a:noFill/>
-        </p:spPr>
-        <p:txBody>
-          <a:bodyPr wrap="square" anchor="ctr" lIns="0" rIns="0" tIns="0" bIns="0">
-            <a:spAutoFit/>
-          </a:bodyPr>
-          <a:lstStyle/>
-          <a:p>
-            <a:pPr algn="l">
-              <a:lnSpc>
-                <a:spcPct val="110000"/>
-              </a:lnSpc>
-            </a:pPr>
-            <a:r>
-              <a:rPr sz="2400" b="1">
-                <a:solidFill>
-                  <a:srgbClr val="FFFFFF"/>
-                </a:solidFill>
-                <a:latin typeface="Arial"/>
-                <a:ea typeface="Arial"/>
-              </a:rPr>
-              <a:t>성능이 아니라 규격 때문에 TLC를 쓰던 수요부터, QLC의 원가 우위로 가져옵니다</a:t>
-            </a:r>
-          </a:p>
-        </p:txBody>
-      </p:sp>
-      <p:sp>
-        <p:nvSpPr>
-          <p:cNvPr id="111" name="TextBox 110"/>
+              <a:t>단기에는 Mixed Media로 모아 쓰고, 중장기에는 고객과 FDP로 WAF를 근원적으로 낮춥니다</a:t>
+            </a:r>
+          </a:p>
+        </p:txBody>
+      </p:sp>
+      <p:sp>
+        <p:nvSpPr>
+          <p:cNvPr id="152" name="TextBox 151"/>
           <p:cNvSpPr txBox="1"/>
           <p:nvPr/>
         </p:nvSpPr>
@@ -26878,14 +28832,14 @@
                 <a:latin typeface="Arial"/>
                 <a:ea typeface="Arial"/>
               </a:rPr>
-              <a:t>출처: 분할은 과제팀 산술(TLC eSSD 2026 353~435 · 2030 540~1,200EB, 용량형 비중 30~60% · 관행 비중 15~40%는 근거 없는 가정, 범위 = L~H 시나리오) · Forward Insights(재인용) · Meta QLC 블로그 · Micron 6600 ION 사양 · NetApp AFF A/C · RAG 지연 연구 · 삼성 PM9D3a · Solidigm CSAL · 모두 검색 확인 등급</a:t>
-            </a:r>
-          </a:p>
-        </p:txBody>
-      </p:sp>
-      <p:sp>
-        <p:nvSpPr>
-          <p:cNvPr id="112" name="TextBox 111"/>
+              <a:t>출처: 분할은 과제팀 산술(TLC eSSD 2026 353~435 · 2030 540~1,200EB, 용량형 30~60% · 관행 15~40%는 근거 없는 가정, 범위 = L~H) · Micron 6600 ION 사양 · CSAL 백서(별도 캐시 구성) · Kioxia pSLC VoC · CacheLib FDP · 삼성 PM9D3a · 계단 대응은 과제팀 해석 · 모두 검색 확인 등급</a:t>
+            </a:r>
+          </a:p>
+        </p:txBody>
+      </p:sp>
+      <p:sp>
+        <p:nvSpPr>
+          <p:cNvPr id="153" name="TextBox 152"/>
           <p:cNvSpPr txBox="1"/>
           <p:nvPr/>
         </p:nvSpPr>

--- a/outputs/presentation/ssd-future-ready-strategy.pptx
+++ b/outputs/presentation/ssd-future-ready-strategy.pptx
@@ -717,7 +717,7 @@
           <a:lstStyle/>
           <a:p>
             <a:r>
-              <a:t>4장은 이 전략에서 사업적으로 가장 큰 기회와, 그것을 2장의 핵심 기술 중 무엇으로 여는지입니다. 왼쪽은 TLC 수요를 왜 TLC를 샀는지로 나눈 것입니다. 공개된 분할 자료가 없어 과제팀이 범위로 계산했고, 막대는 중앙 가정입니다. 성능은 QLC로 충분한데 조달 규격이 1 DWPD라서 TLC를 쓰는 몫, 곧 내구 규격만 때문인 수요가 2026년 약 100, 2030년 약 190엑사바이트입니다. 시나리오에 따라 2030년 46에서 509엑사바이트까지 넓습니다. 이 수요는 성능이 걸림돌이 아닙니다. RAG 검색의 지연 예산이 약 100밀리초인데 QLC 읽기는 약 0.1밀리초라 약 1,000배 여유가 있습니다. 성능 때문에 TLC를 쓰는 몫은 격차를 줄이면 일부가 열리고, 고내구와 KV 캐시는 이번 대상이 아닙니다. 오른쪽은 어떻게 QLC를 1 DWPD로 올리는지입니다. 같은 Micron 6600 ION QLC도 4킬로바이트 랜덤이면 0.075, 큰 단위면 0.3, 순차면 1.0 DWPD로 정격이 쓰기 모양에 따라 달라집니다. 이 계단을 2장의 핵심 기술 두 가지로 오릅니다. 첫째, Mixed Media입니다. 작은 쓰기를 pSLC 영역에 모았다가 큰 덩어리로 QLC에 내려, 매핑 단위보다 작은 쓰기의 증폭을 없앱니다. CSAL 백서에서는 4킬로바이트 쓰기의 WAF가 70 이상에서 1.02로 내려갔고, 고객이 요구한 pSLC 비율은 QLC 용량의 0.5에서 2퍼센트입니다. pSLC가 쓰기 지연과 대역도 흡수합니다. Mixed Media는 표준 네임스페이스와 출하 시 정하는 비율로 동작해 스펙으로 협력할 수 있으므로, 2026년과 2027년에 바로 실행할 수 있는 단기 전략입니다. 둘째, FDP입니다. 고객 호스트가 데이터의 수명을 알려 주면 같은 수명의 데이터끼리 같은 블록에 모여 GC가 옮길 데이터가 거의 사라집니다. WAF를 근원적으로 1에 가깝게 낮추는 기술이고, CacheLib에서 3.22가 1.03이 됐습니다. GC 간섭이 줄어 꼬리 지연도 줄어듭니다. 다만 FDP의 효과는 고객 소프트웨어가 수명을 얼마나 잘 나누는지에 달려 있어 고객과 함께 설계해야 하므로, 2028년 전후의 중장기에 기여합니다. 보조로 Large Mapping과 Multi-Tenant QoS가 함께 쓰이고, Fault Tolerant와 Confidential Storage는 이 기회와 직접 관계가 없습니다. 계단과 기술의 대응은 과제팀의 해석이며, QLC 위에서의 실측은 고객과 함께 할 첫 검증 과제입니다. 정리하면, 단기에는 Mixed Media로 모아 쓰고, 중장기에는 고객과 FDP로 WAF를 근원적으로 낮춰, 규격 때문에 TLC를 쓰던 수요부터 QLC의 원가 우위로 가져옵니다.</a:t>
+              <a:t>4장은 이 전략에서 사업적으로 가장 큰 기회입니다. 질문은 하나입니다. WAF를 낮춰 QLC를 1 DWPD로 올리면 QLC 시장이 어디까지 넓어지는가입니다. 2030년 eSSD 수요를 McKinsey와 SK하이닉스 전망의 중간인 약 1,500엑사바이트로 보면, 지금 경로의 QLC는 약 636엑사바이트, 약 42퍼센트입니다. 여기에 세 몫이 더해집니다. 첫째, 성능은 QLC로 충분한데 조달 규격이 1 DWPD라서 TLC를 쓰던 내구 규격만 수요가 약 192엑사바이트입니다. 시나리오에 따라 46에서 509엑사바이트로 넓습니다. WAF를 낮춰 QLC 정격이 1 DWPD에 닿으면 바로 들어갈 몫입니다. 둘째, 관행과 가격으로 TLC를 쓰던 약 64엑사바이트는 원가와 공급, 인증으로 가져옵니다. 셋째, 성능 때문에 TLC를 쓰던 수요 가운데 꼬리 지연을 극복해 20에서 40퍼센트를 가져오면 63에서 125엑사바이트가 더해집니다. 그러면 QLC는 약 955에서 1,017엑사바이트, eSSD의 63에서 68퍼센트까지 넓어집니다. 성능이 결정적인 수요와 고내구, KV 캐시 약 490에서 550엑사바이트는 TLC로 남습니다. 오른쪽은 비중입니다. QLC 비중은 2026년 지금 경로 18퍼센트에서 잠재 53에서 60퍼센트, 2030년 42퍼센트에서 63에서 68퍼센트입니다. 2026년 값은 공급 부족을 무시한 잠재치입니다. WAF를 낮추는 기술은 2장의 두 가지입니다. 단기에는 Mixed Media로 작은 쓰기를 모아 쓰고, 중장기에는 고객과 FDP로 WAF를 근원적으로 낮춥니다. TLC 분할 비율은 공개 자료가 없어 과제팀이 가정한 값이며, 실제 범위는 넓습니다. 그래도 방향은 분명합니다. WAF를 낮추는 것이 곧 QLC 시장을 넓히는 일이고, 그 원가 우위가 수익성입니다.</a:t>
             </a:r>
           </a:p>
         </p:txBody>
@@ -22176,7 +22176,7 @@
                 <a:latin typeface="Arial"/>
                 <a:ea typeface="Arial"/>
               </a:rPr>
-              <a:t>TLC 수요의 약 4분의 1은 내구 규격 때문에 TLC이므로,</a:t>
+              <a:t>WAF를 낮춰 QLC를 1 DWPD로 올리면,</a:t>
             </a:r>
           </a:p>
           <a:p>
@@ -22193,7 +22193,7 @@
                 <a:latin typeface="Arial"/>
                 <a:ea typeface="Arial"/>
               </a:rPr>
-              <a:t>Mixed Media로 모아 쓰고 FDP로 WAF를 낮춰 QLC를 1 DWPD로 올립니다</a:t>
+              <a:t>2030년 QLC는 eSSD의 약 42%에서 약 65%까지 넓어집니다</a:t>
             </a:r>
           </a:p>
         </p:txBody>
@@ -22335,7 +22335,7 @@
         <p:spPr>
           <a:xfrm>
             <a:off x="1307592" y="2103120"/>
-            <a:ext cx="5541264" cy="512063"/>
+            <a:ext cx="10296144" cy="512063"/>
           </a:xfrm>
           <a:prstGeom prst="rect">
             <a:avLst/>
@@ -22361,7 +22361,7 @@
                 <a:latin typeface="Arial"/>
                 <a:ea typeface="Arial"/>
               </a:rPr>
-              <a:t>시장: 왜 TLC를 샀나</a:t>
+              <a:t>2030 QLC 시장, 어디까지 넓어지나</a:t>
             </a:r>
           </a:p>
         </p:txBody>
@@ -22375,7 +22375,7 @@
         <p:spPr>
           <a:xfrm>
             <a:off x="722376" y="2743200"/>
-            <a:ext cx="6126480" cy="329184"/>
+            <a:ext cx="10881360" cy="329184"/>
           </a:xfrm>
           <a:prstGeom prst="rect">
             <a:avLst/>
@@ -22401,7 +22401,7 @@
                 <a:latin typeface="Arial"/>
                 <a:ea typeface="Arial"/>
               </a:rPr>
-              <a:t>TLC eSSD, EB/년  </a:t>
+              <a:t>eSSD EB/년, 2030  </a:t>
             </a:r>
             <a:r>
               <a:rPr sz="1600" b="0">
@@ -22411,7 +22411,7 @@
                 <a:latin typeface="Arial"/>
                 <a:ea typeface="Arial"/>
               </a:rPr>
-              <a:t>중앙 가정 · 산술</a:t>
+              <a:t>중앙 가정 · 과제팀 산술, 진한 = 하단 · 연한 = 상단</a:t>
             </a:r>
           </a:p>
         </p:txBody>
@@ -22424,19 +22424,17 @@
         </p:nvSpPr>
         <p:spPr>
           <a:xfrm>
-            <a:off x="905256" y="7065733"/>
-            <a:ext cx="960120" cy="468922"/>
-          </a:xfrm>
-          <a:prstGeom prst="rect">
-            <a:avLst/>
-          </a:prstGeom>
-          <a:solidFill>
-            <a:srgbClr val="1428A0"/>
-          </a:solidFill>
-          <a:ln w="12700">
-            <a:solidFill>
-              <a:srgbClr val="FFFFFF"/>
-            </a:solidFill>
+            <a:off x="1408176" y="6780276"/>
+            <a:ext cx="10195560" cy="9144"/>
+          </a:xfrm>
+          <a:prstGeom prst="rect">
+            <a:avLst/>
+          </a:prstGeom>
+          <a:solidFill>
+            <a:srgbClr val="8A8A8A"/>
+          </a:solidFill>
+          <a:ln>
+            <a:noFill/>
           </a:ln>
           <a:effectLst/>
         </p:spPr>
@@ -22470,8 +22468,8 @@
         </p:nvSpPr>
         <p:spPr>
           <a:xfrm>
-            <a:off x="905256" y="7065733"/>
-            <a:ext cx="960120" cy="468922"/>
+            <a:off x="722376" y="6647688"/>
+            <a:ext cx="594360" cy="274320"/>
           </a:xfrm>
           <a:prstGeom prst="rect">
             <a:avLst/>
@@ -22484,20 +22482,20 @@
           </a:bodyPr>
           <a:lstStyle/>
           <a:p>
-            <a:pPr algn="ctr">
+            <a:pPr algn="r">
               <a:lnSpc>
                 <a:spcPct val="110000"/>
               </a:lnSpc>
             </a:pPr>
             <a:r>
-              <a:rPr sz="2000" b="1">
-                <a:solidFill>
-                  <a:srgbClr val="FFFFFF"/>
-                </a:solidFill>
-                <a:latin typeface="Arial"/>
-                <a:ea typeface="Arial"/>
-              </a:rPr>
-              <a:t>100</a:t>
+              <a:rPr sz="1500" b="0">
+                <a:solidFill>
+                  <a:srgbClr val="555555"/>
+                </a:solidFill>
+                <a:latin typeface="Arial"/>
+                <a:ea typeface="Arial"/>
+              </a:rPr>
+              <a:t>0</a:t>
             </a:r>
           </a:p>
         </p:txBody>
@@ -22510,19 +22508,17 @@
         </p:nvSpPr>
         <p:spPr>
           <a:xfrm>
-            <a:off x="905256" y="6864833"/>
-            <a:ext cx="960120" cy="200899"/>
-          </a:xfrm>
-          <a:prstGeom prst="rect">
-            <a:avLst/>
-          </a:prstGeom>
-          <a:solidFill>
-            <a:srgbClr val="AAB8E8"/>
-          </a:solidFill>
-          <a:ln w="12700">
-            <a:solidFill>
-              <a:srgbClr val="FFFFFF"/>
-            </a:solidFill>
+            <a:off x="1408176" y="5275672"/>
+            <a:ext cx="10195560" cy="9144"/>
+          </a:xfrm>
+          <a:prstGeom prst="rect">
+            <a:avLst/>
+          </a:prstGeom>
+          <a:solidFill>
+            <a:srgbClr val="D9D9D9"/>
+          </a:solidFill>
+          <a:ln>
+            <a:noFill/>
           </a:ln>
           <a:effectLst/>
         </p:spPr>
@@ -22550,25 +22546,63 @@
       </p:sp>
       <p:sp>
         <p:nvSpPr>
-          <p:cNvPr id="13" name="Rectangle 12"/>
+          <p:cNvPr id="13" name="TextBox 12"/>
+          <p:cNvSpPr txBox="1"/>
+          <p:nvPr/>
+        </p:nvSpPr>
+        <p:spPr>
+          <a:xfrm>
+            <a:off x="722376" y="5143084"/>
+            <a:ext cx="594360" cy="274320"/>
+          </a:xfrm>
+          <a:prstGeom prst="rect">
+            <a:avLst/>
+          </a:prstGeom>
+          <a:noFill/>
+        </p:spPr>
+        <p:txBody>
+          <a:bodyPr wrap="square" anchor="ctr" lIns="0" rIns="0" tIns="0" bIns="0">
+            <a:spAutoFit/>
+          </a:bodyPr>
+          <a:lstStyle/>
+          <a:p>
+            <a:pPr algn="r">
+              <a:lnSpc>
+                <a:spcPct val="110000"/>
+              </a:lnSpc>
+            </a:pPr>
+            <a:r>
+              <a:rPr sz="1500" b="0">
+                <a:solidFill>
+                  <a:srgbClr val="555555"/>
+                </a:solidFill>
+                <a:latin typeface="Arial"/>
+                <a:ea typeface="Arial"/>
+              </a:rPr>
+              <a:t>500</a:t>
+            </a:r>
+          </a:p>
+        </p:txBody>
+      </p:sp>
+      <p:sp>
+        <p:nvSpPr>
+          <p:cNvPr id="14" name="Rectangle 13"/>
           <p:cNvSpPr/>
           <p:nvPr/>
         </p:nvSpPr>
         <p:spPr>
           <a:xfrm>
-            <a:off x="905256" y="6046213"/>
-            <a:ext cx="960120" cy="818619"/>
-          </a:xfrm>
-          <a:prstGeom prst="rect">
-            <a:avLst/>
-          </a:prstGeom>
-          <a:solidFill>
-            <a:srgbClr val="8A8A8A"/>
-          </a:solidFill>
-          <a:ln w="12700">
-            <a:solidFill>
-              <a:srgbClr val="FFFFFF"/>
-            </a:solidFill>
+            <a:off x="1408176" y="3771068"/>
+            <a:ext cx="10195560" cy="9144"/>
+          </a:xfrm>
+          <a:prstGeom prst="rect">
+            <a:avLst/>
+          </a:prstGeom>
+          <a:solidFill>
+            <a:srgbClr val="D9D9D9"/>
+          </a:solidFill>
+          <a:ln>
+            <a:noFill/>
           </a:ln>
           <a:effectLst/>
         </p:spPr>
@@ -22596,20 +22630,704 @@
       </p:sp>
       <p:sp>
         <p:nvSpPr>
-          <p:cNvPr id="14" name="Rectangle 13"/>
+          <p:cNvPr id="15" name="TextBox 14"/>
+          <p:cNvSpPr txBox="1"/>
+          <p:nvPr/>
+        </p:nvSpPr>
+        <p:spPr>
+          <a:xfrm>
+            <a:off x="722376" y="3638480"/>
+            <a:ext cx="594360" cy="274320"/>
+          </a:xfrm>
+          <a:prstGeom prst="rect">
+            <a:avLst/>
+          </a:prstGeom>
+          <a:noFill/>
+        </p:spPr>
+        <p:txBody>
+          <a:bodyPr wrap="square" anchor="ctr" lIns="0" rIns="0" tIns="0" bIns="0">
+            <a:spAutoFit/>
+          </a:bodyPr>
+          <a:lstStyle/>
+          <a:p>
+            <a:pPr algn="r">
+              <a:lnSpc>
+                <a:spcPct val="110000"/>
+              </a:lnSpc>
+            </a:pPr>
+            <a:r>
+              <a:rPr sz="1500" b="0">
+                <a:solidFill>
+                  <a:srgbClr val="555555"/>
+                </a:solidFill>
+                <a:latin typeface="Arial"/>
+                <a:ea typeface="Arial"/>
+              </a:rPr>
+              <a:t>1,000</a:t>
+            </a:r>
+          </a:p>
+        </p:txBody>
+      </p:sp>
+      <p:sp>
+        <p:nvSpPr>
+          <p:cNvPr id="16" name="Rectangle 15"/>
           <p:cNvSpPr/>
           <p:nvPr/>
         </p:nvSpPr>
         <p:spPr>
           <a:xfrm>
-            <a:off x="960120" y="6564817"/>
-            <a:ext cx="850392" cy="272583"/>
-          </a:xfrm>
-          <a:prstGeom prst="rect">
-            <a:avLst/>
-          </a:prstGeom>
-          <a:noFill/>
-          <a:ln w="19050">
+            <a:off x="1591056" y="4870992"/>
+            <a:ext cx="1188720" cy="1913855"/>
+          </a:xfrm>
+          <a:prstGeom prst="rect">
+            <a:avLst/>
+          </a:prstGeom>
+          <a:solidFill>
+            <a:srgbClr val="8A8A8A"/>
+          </a:solidFill>
+          <a:ln>
+            <a:noFill/>
+          </a:ln>
+          <a:effectLst/>
+        </p:spPr>
+        <p:style>
+          <a:lnRef idx="1">
+            <a:schemeClr val="accent1"/>
+          </a:lnRef>
+          <a:fillRef idx="3">
+            <a:schemeClr val="accent1"/>
+          </a:fillRef>
+          <a:effectRef idx="2">
+            <a:schemeClr val="accent1"/>
+          </a:effectRef>
+          <a:fontRef idx="minor">
+            <a:schemeClr val="lt1"/>
+          </a:fontRef>
+        </p:style>
+        <p:txBody>
+          <a:bodyPr rtlCol="0" anchor="ctr"/>
+          <a:lstStyle/>
+          <a:p>
+            <a:pPr algn="ctr"/>
+          </a:p>
+        </p:txBody>
+      </p:sp>
+      <p:sp>
+        <p:nvSpPr>
+          <p:cNvPr id="17" name="TextBox 16"/>
+          <p:cNvSpPr txBox="1"/>
+          <p:nvPr/>
+        </p:nvSpPr>
+        <p:spPr>
+          <a:xfrm>
+            <a:off x="1179576" y="4468656"/>
+            <a:ext cx="2011680" cy="365760"/>
+          </a:xfrm>
+          <a:prstGeom prst="rect">
+            <a:avLst/>
+          </a:prstGeom>
+          <a:noFill/>
+        </p:spPr>
+        <p:txBody>
+          <a:bodyPr wrap="square" anchor="ctr" lIns="0" rIns="0" tIns="0" bIns="0">
+            <a:spAutoFit/>
+          </a:bodyPr>
+          <a:lstStyle/>
+          <a:p>
+            <a:pPr algn="ctr">
+              <a:lnSpc>
+                <a:spcPct val="110000"/>
+              </a:lnSpc>
+            </a:pPr>
+            <a:r>
+              <a:rPr sz="2000" b="1">
+                <a:solidFill>
+                  <a:srgbClr val="1A1A1A"/>
+                </a:solidFill>
+                <a:latin typeface="Arial"/>
+                <a:ea typeface="Arial"/>
+              </a:rPr>
+              <a:t>636</a:t>
+            </a:r>
+          </a:p>
+        </p:txBody>
+      </p:sp>
+      <p:sp>
+        <p:nvSpPr>
+          <p:cNvPr id="18" name="TextBox 17"/>
+          <p:cNvSpPr txBox="1"/>
+          <p:nvPr/>
+        </p:nvSpPr>
+        <p:spPr>
+          <a:xfrm>
+            <a:off x="1316736" y="6839712"/>
+            <a:ext cx="1737360" cy="566928"/>
+          </a:xfrm>
+          <a:prstGeom prst="rect">
+            <a:avLst/>
+          </a:prstGeom>
+          <a:noFill/>
+        </p:spPr>
+        <p:txBody>
+          <a:bodyPr wrap="square" anchor="t" lIns="0" rIns="0" tIns="0" bIns="0">
+            <a:spAutoFit/>
+          </a:bodyPr>
+          <a:lstStyle/>
+          <a:p>
+            <a:pPr algn="ctr">
+              <a:lnSpc>
+                <a:spcPct val="100000"/>
+              </a:lnSpc>
+            </a:pPr>
+            <a:r>
+              <a:rPr sz="1700" b="0">
+                <a:solidFill>
+                  <a:srgbClr val="1A1A1A"/>
+                </a:solidFill>
+                <a:latin typeface="Arial"/>
+                <a:ea typeface="Arial"/>
+              </a:rPr>
+              <a:t>QLC</a:t>
+            </a:r>
+          </a:p>
+          <a:p>
+            <a:pPr algn="ctr">
+              <a:lnSpc>
+                <a:spcPct val="100000"/>
+              </a:lnSpc>
+            </a:pPr>
+            <a:r>
+              <a:rPr sz="1700" b="0">
+                <a:solidFill>
+                  <a:srgbClr val="1A1A1A"/>
+                </a:solidFill>
+                <a:latin typeface="Arial"/>
+                <a:ea typeface="Arial"/>
+              </a:rPr>
+              <a:t>지금 경로</a:t>
+            </a:r>
+          </a:p>
+        </p:txBody>
+      </p:sp>
+      <p:sp>
+        <p:nvSpPr>
+          <p:cNvPr id="19" name="TextBox 18"/>
+          <p:cNvSpPr txBox="1"/>
+          <p:nvPr/>
+        </p:nvSpPr>
+        <p:spPr>
+          <a:xfrm>
+            <a:off x="1280160" y="7388352"/>
+            <a:ext cx="1810512" cy="292608"/>
+          </a:xfrm>
+          <a:prstGeom prst="rect">
+            <a:avLst/>
+          </a:prstGeom>
+          <a:noFill/>
+        </p:spPr>
+        <p:txBody>
+          <a:bodyPr wrap="square" anchor="ctr" lIns="0" rIns="0" tIns="0" bIns="0">
+            <a:spAutoFit/>
+          </a:bodyPr>
+          <a:lstStyle/>
+          <a:p>
+            <a:pPr algn="ctr">
+              <a:lnSpc>
+                <a:spcPct val="110000"/>
+              </a:lnSpc>
+            </a:pPr>
+            <a:r>
+              <a:rPr sz="1500" b="0">
+                <a:solidFill>
+                  <a:srgbClr val="555555"/>
+                </a:solidFill>
+                <a:latin typeface="Arial"/>
+                <a:ea typeface="Arial"/>
+              </a:rPr>
+              <a:t>QLC 정격 0.3~0.6</a:t>
+            </a:r>
+          </a:p>
+        </p:txBody>
+      </p:sp>
+      <p:sp>
+        <p:nvSpPr>
+          <p:cNvPr id="20" name="Rectangle 19"/>
+          <p:cNvSpPr/>
+          <p:nvPr/>
+        </p:nvSpPr>
+        <p:spPr>
+          <a:xfrm>
+            <a:off x="3310128" y="4293224"/>
+            <a:ext cx="1188720" cy="577767"/>
+          </a:xfrm>
+          <a:prstGeom prst="rect">
+            <a:avLst/>
+          </a:prstGeom>
+          <a:solidFill>
+            <a:srgbClr val="1428A0"/>
+          </a:solidFill>
+          <a:ln>
+            <a:noFill/>
+          </a:ln>
+          <a:effectLst/>
+        </p:spPr>
+        <p:style>
+          <a:lnRef idx="1">
+            <a:schemeClr val="accent1"/>
+          </a:lnRef>
+          <a:fillRef idx="3">
+            <a:schemeClr val="accent1"/>
+          </a:fillRef>
+          <a:effectRef idx="2">
+            <a:schemeClr val="accent1"/>
+          </a:effectRef>
+          <a:fontRef idx="minor">
+            <a:schemeClr val="lt1"/>
+          </a:fontRef>
+        </p:style>
+        <p:txBody>
+          <a:bodyPr rtlCol="0" anchor="ctr"/>
+          <a:lstStyle/>
+          <a:p>
+            <a:pPr algn="ctr"/>
+          </a:p>
+        </p:txBody>
+      </p:sp>
+      <p:sp>
+        <p:nvSpPr>
+          <p:cNvPr id="21" name="TextBox 20"/>
+          <p:cNvSpPr txBox="1"/>
+          <p:nvPr/>
+        </p:nvSpPr>
+        <p:spPr>
+          <a:xfrm>
+            <a:off x="2898648" y="3890888"/>
+            <a:ext cx="2011680" cy="365760"/>
+          </a:xfrm>
+          <a:prstGeom prst="rect">
+            <a:avLst/>
+          </a:prstGeom>
+          <a:noFill/>
+        </p:spPr>
+        <p:txBody>
+          <a:bodyPr wrap="square" anchor="ctr" lIns="0" rIns="0" tIns="0" bIns="0">
+            <a:spAutoFit/>
+          </a:bodyPr>
+          <a:lstStyle/>
+          <a:p>
+            <a:pPr algn="ctr">
+              <a:lnSpc>
+                <a:spcPct val="110000"/>
+              </a:lnSpc>
+            </a:pPr>
+            <a:r>
+              <a:rPr sz="2000" b="1">
+                <a:solidFill>
+                  <a:srgbClr val="1428A0"/>
+                </a:solidFill>
+                <a:latin typeface="Arial"/>
+                <a:ea typeface="Arial"/>
+              </a:rPr>
+              <a:t>+192</a:t>
+            </a:r>
+          </a:p>
+        </p:txBody>
+      </p:sp>
+      <p:sp>
+        <p:nvSpPr>
+          <p:cNvPr id="22" name="TextBox 21"/>
+          <p:cNvSpPr txBox="1"/>
+          <p:nvPr/>
+        </p:nvSpPr>
+        <p:spPr>
+          <a:xfrm>
+            <a:off x="3035808" y="6839712"/>
+            <a:ext cx="1737360" cy="566928"/>
+          </a:xfrm>
+          <a:prstGeom prst="rect">
+            <a:avLst/>
+          </a:prstGeom>
+          <a:noFill/>
+        </p:spPr>
+        <p:txBody>
+          <a:bodyPr wrap="square" anchor="t" lIns="0" rIns="0" tIns="0" bIns="0">
+            <a:spAutoFit/>
+          </a:bodyPr>
+          <a:lstStyle/>
+          <a:p>
+            <a:pPr algn="ctr">
+              <a:lnSpc>
+                <a:spcPct val="100000"/>
+              </a:lnSpc>
+            </a:pPr>
+            <a:r>
+              <a:rPr sz="1700" b="1">
+                <a:solidFill>
+                  <a:srgbClr val="1428A0"/>
+                </a:solidFill>
+                <a:latin typeface="Arial"/>
+                <a:ea typeface="Arial"/>
+              </a:rPr>
+              <a:t>내구</a:t>
+            </a:r>
+          </a:p>
+          <a:p>
+            <a:pPr algn="ctr">
+              <a:lnSpc>
+                <a:spcPct val="100000"/>
+              </a:lnSpc>
+            </a:pPr>
+            <a:r>
+              <a:rPr sz="1700" b="1">
+                <a:solidFill>
+                  <a:srgbClr val="1428A0"/>
+                </a:solidFill>
+                <a:latin typeface="Arial"/>
+                <a:ea typeface="Arial"/>
+              </a:rPr>
+              <a:t>규격만</a:t>
+            </a:r>
+          </a:p>
+        </p:txBody>
+      </p:sp>
+      <p:sp>
+        <p:nvSpPr>
+          <p:cNvPr id="23" name="TextBox 22"/>
+          <p:cNvSpPr txBox="1"/>
+          <p:nvPr/>
+        </p:nvSpPr>
+        <p:spPr>
+          <a:xfrm>
+            <a:off x="2999232" y="7388352"/>
+            <a:ext cx="1810512" cy="292608"/>
+          </a:xfrm>
+          <a:prstGeom prst="rect">
+            <a:avLst/>
+          </a:prstGeom>
+          <a:noFill/>
+        </p:spPr>
+        <p:txBody>
+          <a:bodyPr wrap="square" anchor="ctr" lIns="0" rIns="0" tIns="0" bIns="0">
+            <a:spAutoFit/>
+          </a:bodyPr>
+          <a:lstStyle/>
+          <a:p>
+            <a:pPr algn="ctr">
+              <a:lnSpc>
+                <a:spcPct val="110000"/>
+              </a:lnSpc>
+            </a:pPr>
+            <a:r>
+              <a:rPr sz="1500" b="0">
+                <a:solidFill>
+                  <a:srgbClr val="1428A0"/>
+                </a:solidFill>
+                <a:latin typeface="Arial"/>
+                <a:ea typeface="Arial"/>
+              </a:rPr>
+              <a:t>1 DWPD 정격</a:t>
+            </a:r>
+          </a:p>
+        </p:txBody>
+      </p:sp>
+      <p:cxnSp>
+        <p:nvCxnSpPr>
+          <p:cNvPr id="24" name="Connector 23"/>
+          <p:cNvCxnSpPr/>
+          <p:nvPr/>
+        </p:nvCxnSpPr>
+        <p:spPr>
+          <a:xfrm>
+            <a:off x="2779776" y="4870992"/>
+            <a:ext cx="530352" cy="0"/>
+          </a:xfrm>
+          <a:prstGeom prst="line">
+            <a:avLst/>
+          </a:prstGeom>
+          <a:ln>
+            <a:solidFill>
+              <a:srgbClr val="8A8A8A"/>
+            </a:solidFill>
+            <a:prstDash val="dash"/>
+          </a:ln>
+        </p:spPr>
+        <p:style>
+          <a:lnRef idx="2">
+            <a:schemeClr val="accent1"/>
+          </a:lnRef>
+          <a:fillRef idx="0">
+            <a:schemeClr val="accent1"/>
+          </a:fillRef>
+          <a:effectRef idx="1">
+            <a:schemeClr val="accent1"/>
+          </a:effectRef>
+          <a:fontRef idx="minor">
+            <a:schemeClr val="tx1"/>
+          </a:fontRef>
+        </p:style>
+      </p:cxnSp>
+      <p:sp>
+        <p:nvSpPr>
+          <p:cNvPr id="25" name="Rectangle 24"/>
+          <p:cNvSpPr/>
+          <p:nvPr/>
+        </p:nvSpPr>
+        <p:spPr>
+          <a:xfrm>
+            <a:off x="5029200" y="4100635"/>
+            <a:ext cx="1188720" cy="192589"/>
+          </a:xfrm>
+          <a:prstGeom prst="rect">
+            <a:avLst/>
+          </a:prstGeom>
+          <a:solidFill>
+            <a:srgbClr val="AAB8E8"/>
+          </a:solidFill>
+          <a:ln>
+            <a:noFill/>
+          </a:ln>
+          <a:effectLst/>
+        </p:spPr>
+        <p:style>
+          <a:lnRef idx="1">
+            <a:schemeClr val="accent1"/>
+          </a:lnRef>
+          <a:fillRef idx="3">
+            <a:schemeClr val="accent1"/>
+          </a:fillRef>
+          <a:effectRef idx="2">
+            <a:schemeClr val="accent1"/>
+          </a:effectRef>
+          <a:fontRef idx="minor">
+            <a:schemeClr val="lt1"/>
+          </a:fontRef>
+        </p:style>
+        <p:txBody>
+          <a:bodyPr rtlCol="0" anchor="ctr"/>
+          <a:lstStyle/>
+          <a:p>
+            <a:pPr algn="ctr"/>
+          </a:p>
+        </p:txBody>
+      </p:sp>
+      <p:sp>
+        <p:nvSpPr>
+          <p:cNvPr id="26" name="TextBox 25"/>
+          <p:cNvSpPr txBox="1"/>
+          <p:nvPr/>
+        </p:nvSpPr>
+        <p:spPr>
+          <a:xfrm>
+            <a:off x="4617720" y="3698299"/>
+            <a:ext cx="2011680" cy="365760"/>
+          </a:xfrm>
+          <a:prstGeom prst="rect">
+            <a:avLst/>
+          </a:prstGeom>
+          <a:noFill/>
+        </p:spPr>
+        <p:txBody>
+          <a:bodyPr wrap="square" anchor="ctr" lIns="0" rIns="0" tIns="0" bIns="0">
+            <a:spAutoFit/>
+          </a:bodyPr>
+          <a:lstStyle/>
+          <a:p>
+            <a:pPr algn="ctr">
+              <a:lnSpc>
+                <a:spcPct val="110000"/>
+              </a:lnSpc>
+            </a:pPr>
+            <a:r>
+              <a:rPr sz="2000" b="1">
+                <a:solidFill>
+                  <a:srgbClr val="1428A0"/>
+                </a:solidFill>
+                <a:latin typeface="Arial"/>
+                <a:ea typeface="Arial"/>
+              </a:rPr>
+              <a:t>+64</a:t>
+            </a:r>
+          </a:p>
+        </p:txBody>
+      </p:sp>
+      <p:sp>
+        <p:nvSpPr>
+          <p:cNvPr id="27" name="TextBox 26"/>
+          <p:cNvSpPr txBox="1"/>
+          <p:nvPr/>
+        </p:nvSpPr>
+        <p:spPr>
+          <a:xfrm>
+            <a:off x="4754880" y="6839712"/>
+            <a:ext cx="1737360" cy="566928"/>
+          </a:xfrm>
+          <a:prstGeom prst="rect">
+            <a:avLst/>
+          </a:prstGeom>
+          <a:noFill/>
+        </p:spPr>
+        <p:txBody>
+          <a:bodyPr wrap="square" anchor="t" lIns="0" rIns="0" tIns="0" bIns="0">
+            <a:spAutoFit/>
+          </a:bodyPr>
+          <a:lstStyle/>
+          <a:p>
+            <a:pPr algn="ctr">
+              <a:lnSpc>
+                <a:spcPct val="100000"/>
+              </a:lnSpc>
+            </a:pPr>
+            <a:r>
+              <a:rPr sz="1700" b="0">
+                <a:solidFill>
+                  <a:srgbClr val="1A1A1A"/>
+                </a:solidFill>
+                <a:latin typeface="Arial"/>
+                <a:ea typeface="Arial"/>
+              </a:rPr>
+              <a:t>관행 · 가격</a:t>
+            </a:r>
+          </a:p>
+        </p:txBody>
+      </p:sp>
+      <p:sp>
+        <p:nvSpPr>
+          <p:cNvPr id="28" name="TextBox 27"/>
+          <p:cNvSpPr txBox="1"/>
+          <p:nvPr/>
+        </p:nvSpPr>
+        <p:spPr>
+          <a:xfrm>
+            <a:off x="4718304" y="7388352"/>
+            <a:ext cx="1810512" cy="292608"/>
+          </a:xfrm>
+          <a:prstGeom prst="rect">
+            <a:avLst/>
+          </a:prstGeom>
+          <a:noFill/>
+        </p:spPr>
+        <p:txBody>
+          <a:bodyPr wrap="square" anchor="ctr" lIns="0" rIns="0" tIns="0" bIns="0">
+            <a:spAutoFit/>
+          </a:bodyPr>
+          <a:lstStyle/>
+          <a:p>
+            <a:pPr algn="ctr">
+              <a:lnSpc>
+                <a:spcPct val="110000"/>
+              </a:lnSpc>
+            </a:pPr>
+            <a:r>
+              <a:rPr sz="1500" b="0">
+                <a:solidFill>
+                  <a:srgbClr val="555555"/>
+                </a:solidFill>
+                <a:latin typeface="Arial"/>
+                <a:ea typeface="Arial"/>
+              </a:rPr>
+              <a:t>원가 · 공급 · 인증</a:t>
+            </a:r>
+          </a:p>
+        </p:txBody>
+      </p:sp>
+      <p:cxnSp>
+        <p:nvCxnSpPr>
+          <p:cNvPr id="29" name="Connector 28"/>
+          <p:cNvCxnSpPr/>
+          <p:nvPr/>
+        </p:nvCxnSpPr>
+        <p:spPr>
+          <a:xfrm>
+            <a:off x="4498848" y="4293224"/>
+            <a:ext cx="530352" cy="0"/>
+          </a:xfrm>
+          <a:prstGeom prst="line">
+            <a:avLst/>
+          </a:prstGeom>
+          <a:ln>
+            <a:solidFill>
+              <a:srgbClr val="8A8A8A"/>
+            </a:solidFill>
+            <a:prstDash val="dash"/>
+          </a:ln>
+        </p:spPr>
+        <p:style>
+          <a:lnRef idx="2">
+            <a:schemeClr val="accent1"/>
+          </a:lnRef>
+          <a:fillRef idx="0">
+            <a:schemeClr val="accent1"/>
+          </a:fillRef>
+          <a:effectRef idx="1">
+            <a:schemeClr val="accent1"/>
+          </a:effectRef>
+          <a:fontRef idx="minor">
+            <a:schemeClr val="tx1"/>
+          </a:fontRef>
+        </p:style>
+      </p:cxnSp>
+      <p:sp>
+        <p:nvSpPr>
+          <p:cNvPr id="30" name="Rectangle 29"/>
+          <p:cNvSpPr/>
+          <p:nvPr/>
+        </p:nvSpPr>
+        <p:spPr>
+          <a:xfrm>
+            <a:off x="6748272" y="3911055"/>
+            <a:ext cx="1188720" cy="189580"/>
+          </a:xfrm>
+          <a:prstGeom prst="rect">
+            <a:avLst/>
+          </a:prstGeom>
+          <a:solidFill>
+            <a:srgbClr val="1428A0"/>
+          </a:solidFill>
+          <a:ln>
+            <a:noFill/>
+          </a:ln>
+          <a:effectLst/>
+        </p:spPr>
+        <p:style>
+          <a:lnRef idx="1">
+            <a:schemeClr val="accent1"/>
+          </a:lnRef>
+          <a:fillRef idx="3">
+            <a:schemeClr val="accent1"/>
+          </a:fillRef>
+          <a:effectRef idx="2">
+            <a:schemeClr val="accent1"/>
+          </a:effectRef>
+          <a:fontRef idx="minor">
+            <a:schemeClr val="lt1"/>
+          </a:fontRef>
+        </p:style>
+        <p:txBody>
+          <a:bodyPr rtlCol="0" anchor="ctr"/>
+          <a:lstStyle/>
+          <a:p>
+            <a:pPr algn="ctr"/>
+          </a:p>
+        </p:txBody>
+      </p:sp>
+      <p:sp>
+        <p:nvSpPr>
+          <p:cNvPr id="31" name="Rectangle 30"/>
+          <p:cNvSpPr/>
+          <p:nvPr/>
+        </p:nvSpPr>
+        <p:spPr>
+          <a:xfrm>
+            <a:off x="6748272" y="3724484"/>
+            <a:ext cx="1188720" cy="186570"/>
+          </a:xfrm>
+          <a:prstGeom prst="rect">
+            <a:avLst/>
+          </a:prstGeom>
+          <a:solidFill>
+            <a:srgbClr val="AAB8E8"/>
+          </a:solidFill>
+          <a:ln w="15875">
             <a:solidFill>
               <a:srgbClr val="1428A0"/>
             </a:solidFill>
@@ -22641,25 +23359,179 @@
       </p:sp>
       <p:sp>
         <p:nvSpPr>
-          <p:cNvPr id="15" name="Rectangle 14"/>
+          <p:cNvPr id="32" name="TextBox 31"/>
+          <p:cNvSpPr txBox="1"/>
+          <p:nvPr/>
+        </p:nvSpPr>
+        <p:spPr>
+          <a:xfrm>
+            <a:off x="6336792" y="3322148"/>
+            <a:ext cx="2011680" cy="365760"/>
+          </a:xfrm>
+          <a:prstGeom prst="rect">
+            <a:avLst/>
+          </a:prstGeom>
+          <a:noFill/>
+        </p:spPr>
+        <p:txBody>
+          <a:bodyPr wrap="square" anchor="ctr" lIns="0" rIns="0" tIns="0" bIns="0">
+            <a:spAutoFit/>
+          </a:bodyPr>
+          <a:lstStyle/>
+          <a:p>
+            <a:pPr algn="ctr">
+              <a:lnSpc>
+                <a:spcPct val="110000"/>
+              </a:lnSpc>
+            </a:pPr>
+            <a:r>
+              <a:rPr sz="2000" b="1">
+                <a:solidFill>
+                  <a:srgbClr val="1428A0"/>
+                </a:solidFill>
+                <a:latin typeface="Arial"/>
+                <a:ea typeface="Arial"/>
+              </a:rPr>
+              <a:t>+63~125</a:t>
+            </a:r>
+          </a:p>
+        </p:txBody>
+      </p:sp>
+      <p:sp>
+        <p:nvSpPr>
+          <p:cNvPr id="33" name="TextBox 32"/>
+          <p:cNvSpPr txBox="1"/>
+          <p:nvPr/>
+        </p:nvSpPr>
+        <p:spPr>
+          <a:xfrm>
+            <a:off x="6473952" y="6839712"/>
+            <a:ext cx="1737360" cy="566928"/>
+          </a:xfrm>
+          <a:prstGeom prst="rect">
+            <a:avLst/>
+          </a:prstGeom>
+          <a:noFill/>
+        </p:spPr>
+        <p:txBody>
+          <a:bodyPr wrap="square" anchor="t" lIns="0" rIns="0" tIns="0" bIns="0">
+            <a:spAutoFit/>
+          </a:bodyPr>
+          <a:lstStyle/>
+          <a:p>
+            <a:pPr algn="ctr">
+              <a:lnSpc>
+                <a:spcPct val="100000"/>
+              </a:lnSpc>
+            </a:pPr>
+            <a:r>
+              <a:rPr sz="1700" b="0">
+                <a:solidFill>
+                  <a:srgbClr val="1A1A1A"/>
+                </a:solidFill>
+                <a:latin typeface="Arial"/>
+                <a:ea typeface="Arial"/>
+              </a:rPr>
+              <a:t>성능 일부</a:t>
+            </a:r>
+          </a:p>
+        </p:txBody>
+      </p:sp>
+      <p:sp>
+        <p:nvSpPr>
+          <p:cNvPr id="34" name="TextBox 33"/>
+          <p:cNvSpPr txBox="1"/>
+          <p:nvPr/>
+        </p:nvSpPr>
+        <p:spPr>
+          <a:xfrm>
+            <a:off x="6437376" y="7388352"/>
+            <a:ext cx="1810512" cy="292608"/>
+          </a:xfrm>
+          <a:prstGeom prst="rect">
+            <a:avLst/>
+          </a:prstGeom>
+          <a:noFill/>
+        </p:spPr>
+        <p:txBody>
+          <a:bodyPr wrap="square" anchor="ctr" lIns="0" rIns="0" tIns="0" bIns="0">
+            <a:spAutoFit/>
+          </a:bodyPr>
+          <a:lstStyle/>
+          <a:p>
+            <a:pPr algn="ctr">
+              <a:lnSpc>
+                <a:spcPct val="110000"/>
+              </a:lnSpc>
+            </a:pPr>
+            <a:r>
+              <a:rPr sz="1500" b="0">
+                <a:solidFill>
+                  <a:srgbClr val="1428A0"/>
+                </a:solidFill>
+                <a:latin typeface="Arial"/>
+                <a:ea typeface="Arial"/>
+              </a:rPr>
+              <a:t>꼬리 지연 극복</a:t>
+            </a:r>
+          </a:p>
+        </p:txBody>
+      </p:sp>
+      <p:cxnSp>
+        <p:nvCxnSpPr>
+          <p:cNvPr id="35" name="Connector 34"/>
+          <p:cNvCxnSpPr/>
+          <p:nvPr/>
+        </p:nvCxnSpPr>
+        <p:spPr>
+          <a:xfrm>
+            <a:off x="6217920" y="4100635"/>
+            <a:ext cx="530352" cy="0"/>
+          </a:xfrm>
+          <a:prstGeom prst="line">
+            <a:avLst/>
+          </a:prstGeom>
+          <a:ln>
+            <a:solidFill>
+              <a:srgbClr val="8A8A8A"/>
+            </a:solidFill>
+            <a:prstDash val="dash"/>
+          </a:ln>
+        </p:spPr>
+        <p:style>
+          <a:lnRef idx="2">
+            <a:schemeClr val="accent1"/>
+          </a:lnRef>
+          <a:fillRef idx="0">
+            <a:schemeClr val="accent1"/>
+          </a:fillRef>
+          <a:effectRef idx="1">
+            <a:schemeClr val="accent1"/>
+          </a:effectRef>
+          <a:fontRef idx="minor">
+            <a:schemeClr val="tx1"/>
+          </a:fontRef>
+        </p:style>
+      </p:cxnSp>
+      <p:sp>
+        <p:nvSpPr>
+          <p:cNvPr id="36" name="Rectangle 35"/>
           <p:cNvSpPr/>
           <p:nvPr/>
         </p:nvSpPr>
         <p:spPr>
           <a:xfrm>
-            <a:off x="905256" y="5741578"/>
-            <a:ext cx="960120" cy="304635"/>
-          </a:xfrm>
-          <a:prstGeom prst="rect">
-            <a:avLst/>
-          </a:prstGeom>
-          <a:solidFill>
-            <a:srgbClr val="555555"/>
-          </a:solidFill>
-          <a:ln w="12700">
-            <a:solidFill>
-              <a:srgbClr val="FFFFFF"/>
-            </a:solidFill>
+            <a:off x="8467344" y="3911055"/>
+            <a:ext cx="1188720" cy="2873792"/>
+          </a:xfrm>
+          <a:prstGeom prst="rect">
+            <a:avLst/>
+          </a:prstGeom>
+          <a:solidFill>
+            <a:srgbClr val="1428A0"/>
+          </a:solidFill>
+          <a:ln>
+            <a:noFill/>
           </a:ln>
           <a:effectLst/>
         </p:spPr>
@@ -22687,226 +23559,14 @@
       </p:sp>
       <p:sp>
         <p:nvSpPr>
-          <p:cNvPr id="16" name="Rectangle 15"/>
+          <p:cNvPr id="37" name="Rectangle 36"/>
           <p:cNvSpPr/>
           <p:nvPr/>
         </p:nvSpPr>
         <p:spPr>
           <a:xfrm>
-            <a:off x="905256" y="5577291"/>
-            <a:ext cx="960120" cy="164287"/>
-          </a:xfrm>
-          <a:prstGeom prst="rect">
-            <a:avLst/>
-          </a:prstGeom>
-          <a:solidFill>
-            <a:srgbClr val="D9D9D9"/>
-          </a:solidFill>
-          <a:ln w="12700">
-            <a:solidFill>
-              <a:srgbClr val="FFFFFF"/>
-            </a:solidFill>
-          </a:ln>
-          <a:effectLst/>
-        </p:spPr>
-        <p:style>
-          <a:lnRef idx="1">
-            <a:schemeClr val="accent1"/>
-          </a:lnRef>
-          <a:fillRef idx="3">
-            <a:schemeClr val="accent1"/>
-          </a:fillRef>
-          <a:effectRef idx="2">
-            <a:schemeClr val="accent1"/>
-          </a:effectRef>
-          <a:fontRef idx="minor">
-            <a:schemeClr val="lt1"/>
-          </a:fontRef>
-        </p:style>
-        <p:txBody>
-          <a:bodyPr rtlCol="0" anchor="ctr"/>
-          <a:lstStyle/>
-          <a:p>
-            <a:pPr algn="ctr"/>
-          </a:p>
-        </p:txBody>
-      </p:sp>
-      <p:sp>
-        <p:nvSpPr>
-          <p:cNvPr id="17" name="TextBox 16"/>
-          <p:cNvSpPr txBox="1"/>
-          <p:nvPr/>
-        </p:nvSpPr>
-        <p:spPr>
-          <a:xfrm>
-            <a:off x="630936" y="5211531"/>
-            <a:ext cx="1508760" cy="329184"/>
-          </a:xfrm>
-          <a:prstGeom prst="rect">
-            <a:avLst/>
-          </a:prstGeom>
-          <a:noFill/>
-        </p:spPr>
-        <p:txBody>
-          <a:bodyPr wrap="square" anchor="ctr" lIns="0" rIns="0" tIns="0" bIns="0">
-            <a:spAutoFit/>
-          </a:bodyPr>
-          <a:lstStyle/>
-          <a:p>
-            <a:pPr algn="ctr">
-              <a:lnSpc>
-                <a:spcPct val="110000"/>
-              </a:lnSpc>
-            </a:pPr>
-            <a:r>
-              <a:rPr sz="1800" b="1">
-                <a:solidFill>
-                  <a:srgbClr val="1A1A1A"/>
-                </a:solidFill>
-                <a:latin typeface="Arial"/>
-                <a:ea typeface="Arial"/>
-              </a:rPr>
-              <a:t>417</a:t>
-            </a:r>
-          </a:p>
-        </p:txBody>
-      </p:sp>
-      <p:sp>
-        <p:nvSpPr>
-          <p:cNvPr id="18" name="TextBox 17"/>
-          <p:cNvSpPr txBox="1"/>
-          <p:nvPr/>
-        </p:nvSpPr>
-        <p:spPr>
-          <a:xfrm>
-            <a:off x="630936" y="7571231"/>
-            <a:ext cx="1508760" cy="274320"/>
-          </a:xfrm>
-          <a:prstGeom prst="rect">
-            <a:avLst/>
-          </a:prstGeom>
-          <a:noFill/>
-        </p:spPr>
-        <p:txBody>
-          <a:bodyPr wrap="square" anchor="t" lIns="0" rIns="0" tIns="0" bIns="0">
-            <a:spAutoFit/>
-          </a:bodyPr>
-          <a:lstStyle/>
-          <a:p>
-            <a:pPr algn="ctr">
-              <a:lnSpc>
-                <a:spcPct val="110000"/>
-              </a:lnSpc>
-            </a:pPr>
-            <a:r>
-              <a:rPr sz="1600" b="0">
-                <a:solidFill>
-                  <a:srgbClr val="555555"/>
-                </a:solidFill>
-                <a:latin typeface="Arial"/>
-                <a:ea typeface="Arial"/>
-              </a:rPr>
-              <a:t>2026</a:t>
-            </a:r>
-          </a:p>
-        </p:txBody>
-      </p:sp>
-      <p:sp>
-        <p:nvSpPr>
-          <p:cNvPr id="19" name="Rectangle 18"/>
-          <p:cNvSpPr/>
-          <p:nvPr/>
-        </p:nvSpPr>
-        <p:spPr>
-          <a:xfrm>
-            <a:off x="2825496" y="6632484"/>
-            <a:ext cx="960120" cy="902171"/>
-          </a:xfrm>
-          <a:prstGeom prst="rect">
-            <a:avLst/>
-          </a:prstGeom>
-          <a:solidFill>
-            <a:srgbClr val="1428A0"/>
-          </a:solidFill>
-          <a:ln w="12700">
-            <a:solidFill>
-              <a:srgbClr val="FFFFFF"/>
-            </a:solidFill>
-          </a:ln>
-          <a:effectLst/>
-        </p:spPr>
-        <p:style>
-          <a:lnRef idx="1">
-            <a:schemeClr val="accent1"/>
-          </a:lnRef>
-          <a:fillRef idx="3">
-            <a:schemeClr val="accent1"/>
-          </a:fillRef>
-          <a:effectRef idx="2">
-            <a:schemeClr val="accent1"/>
-          </a:effectRef>
-          <a:fontRef idx="minor">
-            <a:schemeClr val="lt1"/>
-          </a:fontRef>
-        </p:style>
-        <p:txBody>
-          <a:bodyPr rtlCol="0" anchor="ctr"/>
-          <a:lstStyle/>
-          <a:p>
-            <a:pPr algn="ctr"/>
-          </a:p>
-        </p:txBody>
-      </p:sp>
-      <p:sp>
-        <p:nvSpPr>
-          <p:cNvPr id="20" name="TextBox 19"/>
-          <p:cNvSpPr txBox="1"/>
-          <p:nvPr/>
-        </p:nvSpPr>
-        <p:spPr>
-          <a:xfrm>
-            <a:off x="2825496" y="6632484"/>
-            <a:ext cx="960120" cy="902171"/>
-          </a:xfrm>
-          <a:prstGeom prst="rect">
-            <a:avLst/>
-          </a:prstGeom>
-          <a:noFill/>
-        </p:spPr>
-        <p:txBody>
-          <a:bodyPr wrap="square" anchor="ctr" lIns="0" rIns="0" tIns="0" bIns="0">
-            <a:spAutoFit/>
-          </a:bodyPr>
-          <a:lstStyle/>
-          <a:p>
-            <a:pPr algn="ctr">
-              <a:lnSpc>
-                <a:spcPct val="110000"/>
-              </a:lnSpc>
-            </a:pPr>
-            <a:r>
-              <a:rPr sz="2000" b="1">
-                <a:solidFill>
-                  <a:srgbClr val="FFFFFF"/>
-                </a:solidFill>
-                <a:latin typeface="Arial"/>
-                <a:ea typeface="Arial"/>
-              </a:rPr>
-              <a:t>192</a:t>
-            </a:r>
-          </a:p>
-        </p:txBody>
-      </p:sp>
-      <p:sp>
-        <p:nvSpPr>
-          <p:cNvPr id="21" name="Rectangle 20"/>
-          <p:cNvSpPr/>
-          <p:nvPr/>
-        </p:nvSpPr>
-        <p:spPr>
-          <a:xfrm>
-            <a:off x="2825496" y="6331604"/>
-            <a:ext cx="960120" cy="300880"/>
+            <a:off x="8467344" y="3724484"/>
+            <a:ext cx="1188720" cy="186570"/>
           </a:xfrm>
           <a:prstGeom prst="rect">
             <a:avLst/>
@@ -22914,97 +23574,7 @@
           <a:solidFill>
             <a:srgbClr val="AAB8E8"/>
           </a:solidFill>
-          <a:ln w="12700">
-            <a:solidFill>
-              <a:srgbClr val="FFFFFF"/>
-            </a:solidFill>
-          </a:ln>
-          <a:effectLst/>
-        </p:spPr>
-        <p:style>
-          <a:lnRef idx="1">
-            <a:schemeClr val="accent1"/>
-          </a:lnRef>
-          <a:fillRef idx="3">
-            <a:schemeClr val="accent1"/>
-          </a:fillRef>
-          <a:effectRef idx="2">
-            <a:schemeClr val="accent1"/>
-          </a:effectRef>
-          <a:fontRef idx="minor">
-            <a:schemeClr val="lt1"/>
-          </a:fontRef>
-        </p:style>
-        <p:txBody>
-          <a:bodyPr rtlCol="0" anchor="ctr"/>
-          <a:lstStyle/>
-          <a:p>
-            <a:pPr algn="ctr"/>
-          </a:p>
-        </p:txBody>
-      </p:sp>
-      <p:sp>
-        <p:nvSpPr>
-          <p:cNvPr id="22" name="Rectangle 21"/>
-          <p:cNvSpPr/>
-          <p:nvPr/>
-        </p:nvSpPr>
-        <p:spPr>
-          <a:xfrm>
-            <a:off x="2825496" y="4861468"/>
-            <a:ext cx="960120" cy="1470135"/>
-          </a:xfrm>
-          <a:prstGeom prst="rect">
-            <a:avLst/>
-          </a:prstGeom>
-          <a:solidFill>
-            <a:srgbClr val="8A8A8A"/>
-          </a:solidFill>
-          <a:ln w="12700">
-            <a:solidFill>
-              <a:srgbClr val="FFFFFF"/>
-            </a:solidFill>
-          </a:ln>
-          <a:effectLst/>
-        </p:spPr>
-        <p:style>
-          <a:lnRef idx="1">
-            <a:schemeClr val="accent1"/>
-          </a:lnRef>
-          <a:fillRef idx="3">
-            <a:schemeClr val="accent1"/>
-          </a:fillRef>
-          <a:effectRef idx="2">
-            <a:schemeClr val="accent1"/>
-          </a:effectRef>
-          <a:fontRef idx="minor">
-            <a:schemeClr val="lt1"/>
-          </a:fontRef>
-        </p:style>
-        <p:txBody>
-          <a:bodyPr rtlCol="0" anchor="ctr"/>
-          <a:lstStyle/>
-          <a:p>
-            <a:pPr algn="ctr"/>
-          </a:p>
-        </p:txBody>
-      </p:sp>
-      <p:sp>
-        <p:nvSpPr>
-          <p:cNvPr id="23" name="Rectangle 22"/>
-          <p:cNvSpPr/>
-          <p:nvPr/>
-        </p:nvSpPr>
-        <p:spPr>
-          <a:xfrm>
-            <a:off x="2880360" y="5770982"/>
-            <a:ext cx="850392" cy="533190"/>
-          </a:xfrm>
-          <a:prstGeom prst="rect">
-            <a:avLst/>
-          </a:prstGeom>
-          <a:noFill/>
-          <a:ln w="19050">
+          <a:ln w="15875">
             <a:solidFill>
               <a:srgbClr val="1428A0"/>
             </a:solidFill>
@@ -23036,25 +23606,120 @@
       </p:sp>
       <p:sp>
         <p:nvSpPr>
-          <p:cNvPr id="24" name="Rectangle 23"/>
+          <p:cNvPr id="38" name="TextBox 37"/>
+          <p:cNvSpPr txBox="1"/>
+          <p:nvPr/>
+        </p:nvSpPr>
+        <p:spPr>
+          <a:xfrm>
+            <a:off x="8055864" y="3322148"/>
+            <a:ext cx="2011680" cy="365760"/>
+          </a:xfrm>
+          <a:prstGeom prst="rect">
+            <a:avLst/>
+          </a:prstGeom>
+          <a:noFill/>
+        </p:spPr>
+        <p:txBody>
+          <a:bodyPr wrap="square" anchor="ctr" lIns="0" rIns="0" tIns="0" bIns="0">
+            <a:spAutoFit/>
+          </a:bodyPr>
+          <a:lstStyle/>
+          <a:p>
+            <a:pPr algn="ctr">
+              <a:lnSpc>
+                <a:spcPct val="110000"/>
+              </a:lnSpc>
+            </a:pPr>
+            <a:r>
+              <a:rPr sz="2200" b="1">
+                <a:solidFill>
+                  <a:srgbClr val="1428A0"/>
+                </a:solidFill>
+                <a:latin typeface="Arial"/>
+                <a:ea typeface="Arial"/>
+              </a:rPr>
+              <a:t>955~1,017</a:t>
+            </a:r>
+          </a:p>
+        </p:txBody>
+      </p:sp>
+      <p:sp>
+        <p:nvSpPr>
+          <p:cNvPr id="39" name="TextBox 38"/>
+          <p:cNvSpPr txBox="1"/>
+          <p:nvPr/>
+        </p:nvSpPr>
+        <p:spPr>
+          <a:xfrm>
+            <a:off x="8193023" y="6839712"/>
+            <a:ext cx="1737360" cy="566928"/>
+          </a:xfrm>
+          <a:prstGeom prst="rect">
+            <a:avLst/>
+          </a:prstGeom>
+          <a:noFill/>
+        </p:spPr>
+        <p:txBody>
+          <a:bodyPr wrap="square" anchor="t" lIns="0" rIns="0" tIns="0" bIns="0">
+            <a:spAutoFit/>
+          </a:bodyPr>
+          <a:lstStyle/>
+          <a:p>
+            <a:pPr algn="ctr">
+              <a:lnSpc>
+                <a:spcPct val="100000"/>
+              </a:lnSpc>
+            </a:pPr>
+            <a:r>
+              <a:rPr sz="1700" b="1">
+                <a:solidFill>
+                  <a:srgbClr val="1428A0"/>
+                </a:solidFill>
+                <a:latin typeface="Arial"/>
+                <a:ea typeface="Arial"/>
+              </a:rPr>
+              <a:t>QLC</a:t>
+            </a:r>
+          </a:p>
+          <a:p>
+            <a:pPr algn="ctr">
+              <a:lnSpc>
+                <a:spcPct val="100000"/>
+              </a:lnSpc>
+            </a:pPr>
+            <a:r>
+              <a:rPr sz="1700" b="1">
+                <a:solidFill>
+                  <a:srgbClr val="1428A0"/>
+                </a:solidFill>
+                <a:latin typeface="Arial"/>
+                <a:ea typeface="Arial"/>
+              </a:rPr>
+              <a:t>확장</a:t>
+            </a:r>
+          </a:p>
+        </p:txBody>
+      </p:sp>
+      <p:sp>
+        <p:nvSpPr>
+          <p:cNvPr id="40" name="Rectangle 39"/>
           <p:cNvSpPr/>
           <p:nvPr/>
         </p:nvSpPr>
         <p:spPr>
           <a:xfrm>
-            <a:off x="2825496" y="4389729"/>
-            <a:ext cx="960120" cy="471738"/>
-          </a:xfrm>
-          <a:prstGeom prst="rect">
-            <a:avLst/>
-          </a:prstGeom>
-          <a:solidFill>
-            <a:srgbClr val="555555"/>
-          </a:solidFill>
-          <a:ln w="12700">
-            <a:solidFill>
-              <a:srgbClr val="FFFFFF"/>
-            </a:solidFill>
+            <a:off x="9912096" y="3625180"/>
+            <a:ext cx="18288" cy="3159667"/>
+          </a:xfrm>
+          <a:prstGeom prst="rect">
+            <a:avLst/>
+          </a:prstGeom>
+          <a:solidFill>
+            <a:srgbClr val="D9D9D9"/>
+          </a:solidFill>
+          <a:ln>
+            <a:noFill/>
           </a:ln>
           <a:effectLst/>
         </p:spPr>
@@ -23082,25 +23747,23 @@
       </p:sp>
       <p:sp>
         <p:nvSpPr>
-          <p:cNvPr id="25" name="Rectangle 24"/>
+          <p:cNvPr id="41" name="Rectangle 40"/>
           <p:cNvSpPr/>
           <p:nvPr/>
         </p:nvSpPr>
         <p:spPr>
           <a:xfrm>
-            <a:off x="2825496" y="3450945"/>
-            <a:ext cx="960120" cy="938783"/>
-          </a:xfrm>
-          <a:prstGeom prst="rect">
-            <a:avLst/>
-          </a:prstGeom>
-          <a:solidFill>
-            <a:srgbClr val="D9D9D9"/>
-          </a:solidFill>
-          <a:ln w="12700">
-            <a:solidFill>
-              <a:srgbClr val="FFFFFF"/>
-            </a:solidFill>
+            <a:off x="10186415" y="5313345"/>
+            <a:ext cx="1188720" cy="1471502"/>
+          </a:xfrm>
+          <a:prstGeom prst="rect">
+            <a:avLst/>
+          </a:prstGeom>
+          <a:solidFill>
+            <a:srgbClr val="555555"/>
+          </a:solidFill>
+          <a:ln>
+            <a:noFill/>
           </a:ln>
           <a:effectLst/>
         </p:spPr>
@@ -23128,103 +23791,26 @@
       </p:sp>
       <p:sp>
         <p:nvSpPr>
-          <p:cNvPr id="26" name="TextBox 25"/>
-          <p:cNvSpPr txBox="1"/>
-          <p:nvPr/>
-        </p:nvSpPr>
-        <p:spPr>
-          <a:xfrm>
-            <a:off x="2551176" y="3085185"/>
-            <a:ext cx="1508760" cy="329184"/>
-          </a:xfrm>
-          <a:prstGeom prst="rect">
-            <a:avLst/>
-          </a:prstGeom>
-          <a:noFill/>
-        </p:spPr>
-        <p:txBody>
-          <a:bodyPr wrap="square" anchor="ctr" lIns="0" rIns="0" tIns="0" bIns="0">
-            <a:spAutoFit/>
-          </a:bodyPr>
-          <a:lstStyle/>
-          <a:p>
-            <a:pPr algn="ctr">
-              <a:lnSpc>
-                <a:spcPct val="110000"/>
-              </a:lnSpc>
-            </a:pPr>
-            <a:r>
-              <a:rPr sz="1800" b="1">
-                <a:solidFill>
-                  <a:srgbClr val="1A1A1A"/>
-                </a:solidFill>
-                <a:latin typeface="Arial"/>
-                <a:ea typeface="Arial"/>
-              </a:rPr>
-              <a:t>870</a:t>
-            </a:r>
-          </a:p>
-        </p:txBody>
-      </p:sp>
-      <p:sp>
-        <p:nvSpPr>
-          <p:cNvPr id="27" name="TextBox 26"/>
-          <p:cNvSpPr txBox="1"/>
-          <p:nvPr/>
-        </p:nvSpPr>
-        <p:spPr>
-          <a:xfrm>
-            <a:off x="2551176" y="7571231"/>
-            <a:ext cx="1508760" cy="274320"/>
-          </a:xfrm>
-          <a:prstGeom prst="rect">
-            <a:avLst/>
-          </a:prstGeom>
-          <a:noFill/>
-        </p:spPr>
-        <p:txBody>
-          <a:bodyPr wrap="square" anchor="t" lIns="0" rIns="0" tIns="0" bIns="0">
-            <a:spAutoFit/>
-          </a:bodyPr>
-          <a:lstStyle/>
-          <a:p>
-            <a:pPr algn="ctr">
-              <a:lnSpc>
-                <a:spcPct val="110000"/>
-              </a:lnSpc>
-            </a:pPr>
-            <a:r>
-              <a:rPr sz="1600" b="1">
-                <a:solidFill>
-                  <a:srgbClr val="1A1A1A"/>
-                </a:solidFill>
-                <a:latin typeface="Arial"/>
-                <a:ea typeface="Arial"/>
-              </a:rPr>
-              <a:t>2030</a:t>
-            </a:r>
-          </a:p>
-        </p:txBody>
-      </p:sp>
-      <p:sp>
-        <p:nvSpPr>
-          <p:cNvPr id="28" name="Rectangle 27"/>
+          <p:cNvPr id="42" name="Rectangle 41"/>
           <p:cNvSpPr/>
           <p:nvPr/>
         </p:nvSpPr>
         <p:spPr>
           <a:xfrm>
-            <a:off x="1956816" y="6713220"/>
-            <a:ext cx="27432" cy="619597"/>
-          </a:xfrm>
-          <a:prstGeom prst="rect">
-            <a:avLst/>
-          </a:prstGeom>
-          <a:solidFill>
-            <a:srgbClr val="1428A0"/>
-          </a:solidFill>
-          <a:ln>
-            <a:noFill/>
+            <a:off x="10186415" y="5126774"/>
+            <a:ext cx="1188720" cy="186570"/>
+          </a:xfrm>
+          <a:prstGeom prst="rect">
+            <a:avLst/>
+          </a:prstGeom>
+          <a:solidFill>
+            <a:srgbClr val="D9D9D9"/>
+          </a:solidFill>
+          <a:ln w="15875">
+            <a:solidFill>
+              <a:srgbClr val="555555"/>
+            </a:solidFill>
+            <a:prstDash val="dash"/>
           </a:ln>
           <a:effectLst/>
         </p:spPr>
@@ -23252,16 +23838,193 @@
       </p:sp>
       <p:sp>
         <p:nvSpPr>
-          <p:cNvPr id="29" name="Rectangle 28"/>
+          <p:cNvPr id="43" name="TextBox 42"/>
+          <p:cNvSpPr txBox="1"/>
+          <p:nvPr/>
+        </p:nvSpPr>
+        <p:spPr>
+          <a:xfrm>
+            <a:off x="9774936" y="4724438"/>
+            <a:ext cx="2011680" cy="365760"/>
+          </a:xfrm>
+          <a:prstGeom prst="rect">
+            <a:avLst/>
+          </a:prstGeom>
+          <a:noFill/>
+        </p:spPr>
+        <p:txBody>
+          <a:bodyPr wrap="square" anchor="ctr" lIns="0" rIns="0" tIns="0" bIns="0">
+            <a:spAutoFit/>
+          </a:bodyPr>
+          <a:lstStyle/>
+          <a:p>
+            <a:pPr algn="ctr">
+              <a:lnSpc>
+                <a:spcPct val="110000"/>
+              </a:lnSpc>
+            </a:pPr>
+            <a:r>
+              <a:rPr sz="2000" b="1">
+                <a:solidFill>
+                  <a:srgbClr val="1A1A1A"/>
+                </a:solidFill>
+                <a:latin typeface="Arial"/>
+                <a:ea typeface="Arial"/>
+              </a:rPr>
+              <a:t>489~551</a:t>
+            </a:r>
+          </a:p>
+        </p:txBody>
+      </p:sp>
+      <p:sp>
+        <p:nvSpPr>
+          <p:cNvPr id="44" name="TextBox 43"/>
+          <p:cNvSpPr txBox="1"/>
+          <p:nvPr/>
+        </p:nvSpPr>
+        <p:spPr>
+          <a:xfrm>
+            <a:off x="9912095" y="6839712"/>
+            <a:ext cx="1737360" cy="566928"/>
+          </a:xfrm>
+          <a:prstGeom prst="rect">
+            <a:avLst/>
+          </a:prstGeom>
+          <a:noFill/>
+        </p:spPr>
+        <p:txBody>
+          <a:bodyPr wrap="square" anchor="t" lIns="0" rIns="0" tIns="0" bIns="0">
+            <a:spAutoFit/>
+          </a:bodyPr>
+          <a:lstStyle/>
+          <a:p>
+            <a:pPr algn="ctr">
+              <a:lnSpc>
+                <a:spcPct val="100000"/>
+              </a:lnSpc>
+            </a:pPr>
+            <a:r>
+              <a:rPr sz="1700" b="0">
+                <a:solidFill>
+                  <a:srgbClr val="1A1A1A"/>
+                </a:solidFill>
+                <a:latin typeface="Arial"/>
+                <a:ea typeface="Arial"/>
+              </a:rPr>
+              <a:t>TLC로</a:t>
+            </a:r>
+          </a:p>
+          <a:p>
+            <a:pPr algn="ctr">
+              <a:lnSpc>
+                <a:spcPct val="100000"/>
+              </a:lnSpc>
+            </a:pPr>
+            <a:r>
+              <a:rPr sz="1700" b="0">
+                <a:solidFill>
+                  <a:srgbClr val="1A1A1A"/>
+                </a:solidFill>
+                <a:latin typeface="Arial"/>
+                <a:ea typeface="Arial"/>
+              </a:rPr>
+              <a:t>남음</a:t>
+            </a:r>
+          </a:p>
+        </p:txBody>
+      </p:sp>
+      <p:sp>
+        <p:nvSpPr>
+          <p:cNvPr id="45" name="TextBox 44"/>
+          <p:cNvSpPr txBox="1"/>
+          <p:nvPr/>
+        </p:nvSpPr>
+        <p:spPr>
+          <a:xfrm>
+            <a:off x="9875519" y="7388352"/>
+            <a:ext cx="1810512" cy="292608"/>
+          </a:xfrm>
+          <a:prstGeom prst="rect">
+            <a:avLst/>
+          </a:prstGeom>
+          <a:noFill/>
+        </p:spPr>
+        <p:txBody>
+          <a:bodyPr wrap="square" anchor="ctr" lIns="0" rIns="0" tIns="0" bIns="0">
+            <a:spAutoFit/>
+          </a:bodyPr>
+          <a:lstStyle/>
+          <a:p>
+            <a:pPr algn="ctr">
+              <a:lnSpc>
+                <a:spcPct val="110000"/>
+              </a:lnSpc>
+            </a:pPr>
+            <a:r>
+              <a:rPr sz="1500" b="0">
+                <a:solidFill>
+                  <a:srgbClr val="555555"/>
+                </a:solidFill>
+                <a:latin typeface="Arial"/>
+                <a:ea typeface="Arial"/>
+              </a:rPr>
+              <a:t>성능 · 고내구 · KV</a:t>
+            </a:r>
+          </a:p>
+        </p:txBody>
+      </p:sp>
+      <p:sp>
+        <p:nvSpPr>
+          <p:cNvPr id="46" name="TextBox 45"/>
+          <p:cNvSpPr txBox="1"/>
+          <p:nvPr/>
+        </p:nvSpPr>
+        <p:spPr>
+          <a:xfrm>
+            <a:off x="2944368" y="3561704"/>
+            <a:ext cx="1920240" cy="310896"/>
+          </a:xfrm>
+          <a:prstGeom prst="rect">
+            <a:avLst/>
+          </a:prstGeom>
+          <a:noFill/>
+        </p:spPr>
+        <p:txBody>
+          <a:bodyPr wrap="square" anchor="ctr" lIns="0" rIns="0" tIns="0" bIns="0">
+            <a:spAutoFit/>
+          </a:bodyPr>
+          <a:lstStyle/>
+          <a:p>
+            <a:pPr algn="ctr">
+              <a:lnSpc>
+                <a:spcPct val="110000"/>
+              </a:lnSpc>
+            </a:pPr>
+            <a:r>
+              <a:rPr sz="1500" b="0">
+                <a:solidFill>
+                  <a:srgbClr val="1428A0"/>
+                </a:solidFill>
+                <a:latin typeface="Arial"/>
+                <a:ea typeface="Arial"/>
+              </a:rPr>
+              <a:t>범위 46~509</a:t>
+            </a:r>
+          </a:p>
+        </p:txBody>
+      </p:sp>
+      <p:sp>
+        <p:nvSpPr>
+          <p:cNvPr id="47" name="Oval 46"/>
           <p:cNvSpPr/>
           <p:nvPr/>
         </p:nvSpPr>
         <p:spPr>
           <a:xfrm>
-            <a:off x="1901952" y="6713220"/>
-            <a:ext cx="137160" cy="27432"/>
-          </a:xfrm>
-          <a:prstGeom prst="rect">
+            <a:off x="11969496" y="2139696"/>
+            <a:ext cx="438912" cy="438912"/>
+          </a:xfrm>
+          <a:prstGeom prst="ellipse">
             <a:avLst/>
           </a:prstGeom>
           <a:solidFill>
@@ -23296,20 +24059,150 @@
       </p:sp>
       <p:sp>
         <p:nvSpPr>
-          <p:cNvPr id="30" name="Rectangle 29"/>
+          <p:cNvPr id="48" name="TextBox 47"/>
+          <p:cNvSpPr txBox="1"/>
+          <p:nvPr/>
+        </p:nvSpPr>
+        <p:spPr>
+          <a:xfrm>
+            <a:off x="11969496" y="2139696"/>
+            <a:ext cx="438912" cy="438912"/>
+          </a:xfrm>
+          <a:prstGeom prst="rect">
+            <a:avLst/>
+          </a:prstGeom>
+          <a:noFill/>
+        </p:spPr>
+        <p:txBody>
+          <a:bodyPr wrap="square" anchor="ctr" lIns="0" rIns="0" tIns="0" bIns="0">
+            <a:spAutoFit/>
+          </a:bodyPr>
+          <a:lstStyle/>
+          <a:p>
+            <a:pPr algn="ctr">
+              <a:lnSpc>
+                <a:spcPct val="110000"/>
+              </a:lnSpc>
+            </a:pPr>
+            <a:r>
+              <a:rPr sz="2000" b="1">
+                <a:solidFill>
+                  <a:srgbClr val="FFFFFF"/>
+                </a:solidFill>
+                <a:latin typeface="Arial"/>
+                <a:ea typeface="Arial"/>
+              </a:rPr>
+              <a:t>2</a:t>
+            </a:r>
+          </a:p>
+        </p:txBody>
+      </p:sp>
+      <p:sp>
+        <p:nvSpPr>
+          <p:cNvPr id="49" name="TextBox 48"/>
+          <p:cNvSpPr txBox="1"/>
+          <p:nvPr/>
+        </p:nvSpPr>
+        <p:spPr>
+          <a:xfrm>
+            <a:off x="12554712" y="2103120"/>
+            <a:ext cx="5010911" cy="512063"/>
+          </a:xfrm>
+          <a:prstGeom prst="rect">
+            <a:avLst/>
+          </a:prstGeom>
+          <a:noFill/>
+        </p:spPr>
+        <p:txBody>
+          <a:bodyPr wrap="square" anchor="ctr" lIns="0" rIns="0" tIns="0" bIns="0">
+            <a:spAutoFit/>
+          </a:bodyPr>
+          <a:lstStyle/>
+          <a:p>
+            <a:pPr algn="l">
+              <a:lnSpc>
+                <a:spcPct val="110000"/>
+              </a:lnSpc>
+            </a:pPr>
+            <a:r>
+              <a:rPr sz="2400" b="1">
+                <a:solidFill>
+                  <a:srgbClr val="1A1A1A"/>
+                </a:solidFill>
+                <a:latin typeface="Arial"/>
+                <a:ea typeface="Arial"/>
+              </a:rPr>
+              <a:t>eSSD 중 QLC 비중</a:t>
+            </a:r>
+          </a:p>
+        </p:txBody>
+      </p:sp>
+      <p:sp>
+        <p:nvSpPr>
+          <p:cNvPr id="50" name="TextBox 49"/>
+          <p:cNvSpPr txBox="1"/>
+          <p:nvPr/>
+        </p:nvSpPr>
+        <p:spPr>
+          <a:xfrm>
+            <a:off x="11969496" y="2743200"/>
+            <a:ext cx="5596127" cy="329184"/>
+          </a:xfrm>
+          <a:prstGeom prst="rect">
+            <a:avLst/>
+          </a:prstGeom>
+          <a:noFill/>
+        </p:spPr>
+        <p:txBody>
+          <a:bodyPr wrap="square" anchor="ctr" lIns="0" rIns="0" tIns="0" bIns="0">
+            <a:spAutoFit/>
+          </a:bodyPr>
+          <a:lstStyle/>
+          <a:p>
+            <a:pPr algn="l">
+              <a:lnSpc>
+                <a:spcPct val="110000"/>
+              </a:lnSpc>
+            </a:pPr>
+            <a:r>
+              <a:rPr sz="1800" b="1">
+                <a:solidFill>
+                  <a:srgbClr val="1A1A1A"/>
+                </a:solidFill>
+                <a:latin typeface="Arial"/>
+                <a:ea typeface="Arial"/>
+              </a:rPr>
+              <a:t>지금 경로 → WAF ↓ 후  </a:t>
+            </a:r>
+            <a:r>
+              <a:rPr sz="1600" b="0">
+                <a:solidFill>
+                  <a:srgbClr val="555555"/>
+                </a:solidFill>
+                <a:latin typeface="Arial"/>
+                <a:ea typeface="Arial"/>
+              </a:rPr>
+              <a:t>잠재</a:t>
+            </a:r>
+          </a:p>
+        </p:txBody>
+      </p:sp>
+      <p:sp>
+        <p:nvSpPr>
+          <p:cNvPr id="51" name="Rectangle 50"/>
           <p:cNvSpPr/>
           <p:nvPr/>
         </p:nvSpPr>
         <p:spPr>
           <a:xfrm>
-            <a:off x="1901952" y="7305385"/>
-            <a:ext cx="137160" cy="27432"/>
-          </a:xfrm>
-          <a:prstGeom prst="rect">
-            <a:avLst/>
-          </a:prstGeom>
-          <a:solidFill>
-            <a:srgbClr val="1428A0"/>
+            <a:off x="12152376" y="3474720"/>
+            <a:ext cx="841248" cy="3310128"/>
+          </a:xfrm>
+          <a:prstGeom prst="rect">
+            <a:avLst/>
+          </a:prstGeom>
+          <a:solidFill>
+            <a:srgbClr val="F5F5F5"/>
           </a:solidFill>
           <a:ln>
             <a:noFill/>
@@ -23340,60 +24233,20 @@
       </p:sp>
       <p:sp>
         <p:nvSpPr>
-          <p:cNvPr id="31" name="TextBox 30"/>
-          <p:cNvSpPr txBox="1"/>
-          <p:nvPr/>
-        </p:nvSpPr>
-        <p:spPr>
-          <a:xfrm>
-            <a:off x="2066544" y="6694932"/>
-            <a:ext cx="822960" cy="274320"/>
-          </a:xfrm>
-          <a:prstGeom prst="rect">
-            <a:avLst/>
-          </a:prstGeom>
-          <a:noFill/>
-        </p:spPr>
-        <p:txBody>
-          <a:bodyPr wrap="square" anchor="ctr" lIns="0" rIns="0" tIns="0" bIns="0">
-            <a:spAutoFit/>
-          </a:bodyPr>
-          <a:lstStyle/>
-          <a:p>
-            <a:pPr algn="l">
-              <a:lnSpc>
-                <a:spcPct val="110000"/>
-              </a:lnSpc>
-            </a:pPr>
-            <a:r>
-              <a:rPr sz="1500" b="1">
-                <a:solidFill>
-                  <a:srgbClr val="1428A0"/>
-                </a:solidFill>
-                <a:latin typeface="Arial"/>
-                <a:ea typeface="Arial"/>
-              </a:rPr>
-              <a:t>43~175</a:t>
-            </a:r>
-          </a:p>
-        </p:txBody>
-      </p:sp>
-      <p:sp>
-        <p:nvSpPr>
-          <p:cNvPr id="32" name="Rectangle 31"/>
+          <p:cNvPr id="52" name="Rectangle 51"/>
           <p:cNvSpPr/>
           <p:nvPr/>
         </p:nvSpPr>
         <p:spPr>
           <a:xfrm>
-            <a:off x="3877055" y="5145450"/>
-            <a:ext cx="27432" cy="2173284"/>
-          </a:xfrm>
-          <a:prstGeom prst="rect">
-            <a:avLst/>
-          </a:prstGeom>
-          <a:solidFill>
-            <a:srgbClr val="1428A0"/>
+            <a:off x="12152376" y="6189024"/>
+            <a:ext cx="841248" cy="595823"/>
+          </a:xfrm>
+          <a:prstGeom prst="rect">
+            <a:avLst/>
+          </a:prstGeom>
+          <a:solidFill>
+            <a:srgbClr val="8A8A8A"/>
           </a:solidFill>
           <a:ln>
             <a:noFill/>
@@ -23424,20 +24277,60 @@
       </p:sp>
       <p:sp>
         <p:nvSpPr>
-          <p:cNvPr id="33" name="Rectangle 32"/>
+          <p:cNvPr id="53" name="TextBox 52"/>
+          <p:cNvSpPr txBox="1"/>
+          <p:nvPr/>
+        </p:nvSpPr>
+        <p:spPr>
+          <a:xfrm>
+            <a:off x="11786616" y="5804976"/>
+            <a:ext cx="1572768" cy="347472"/>
+          </a:xfrm>
+          <a:prstGeom prst="rect">
+            <a:avLst/>
+          </a:prstGeom>
+          <a:noFill/>
+        </p:spPr>
+        <p:txBody>
+          <a:bodyPr wrap="square" anchor="ctr" lIns="0" rIns="0" tIns="0" bIns="0">
+            <a:spAutoFit/>
+          </a:bodyPr>
+          <a:lstStyle/>
+          <a:p>
+            <a:pPr algn="ctr">
+              <a:lnSpc>
+                <a:spcPct val="110000"/>
+              </a:lnSpc>
+            </a:pPr>
+            <a:r>
+              <a:rPr sz="1700" b="1">
+                <a:solidFill>
+                  <a:srgbClr val="1A1A1A"/>
+                </a:solidFill>
+                <a:latin typeface="Arial"/>
+                <a:ea typeface="Arial"/>
+              </a:rPr>
+              <a:t>18%</a:t>
+            </a:r>
+          </a:p>
+        </p:txBody>
+      </p:sp>
+      <p:sp>
+        <p:nvSpPr>
+          <p:cNvPr id="54" name="Rectangle 53"/>
           <p:cNvSpPr/>
           <p:nvPr/>
         </p:nvSpPr>
         <p:spPr>
           <a:xfrm>
-            <a:off x="3822191" y="5145450"/>
-            <a:ext cx="137160" cy="27432"/>
-          </a:xfrm>
-          <a:prstGeom prst="rect">
-            <a:avLst/>
-          </a:prstGeom>
-          <a:solidFill>
-            <a:srgbClr val="1428A0"/>
+            <a:off x="13213080" y="3474720"/>
+            <a:ext cx="841248" cy="3310128"/>
+          </a:xfrm>
+          <a:prstGeom prst="rect">
+            <a:avLst/>
+          </a:prstGeom>
+          <a:solidFill>
+            <a:srgbClr val="F5F5F5"/>
           </a:solidFill>
           <a:ln>
             <a:noFill/>
@@ -23468,14 +24361,14 @@
       </p:sp>
       <p:sp>
         <p:nvSpPr>
-          <p:cNvPr id="34" name="Rectangle 33"/>
+          <p:cNvPr id="55" name="Rectangle 54"/>
           <p:cNvSpPr/>
           <p:nvPr/>
         </p:nvSpPr>
         <p:spPr>
           <a:xfrm>
-            <a:off x="3822191" y="7291303"/>
-            <a:ext cx="137160" cy="27432"/>
+            <a:off x="13213080" y="5030480"/>
+            <a:ext cx="841248" cy="1754367"/>
           </a:xfrm>
           <a:prstGeom prst="rect">
             <a:avLst/>
@@ -23512,120 +24405,26 @@
       </p:sp>
       <p:sp>
         <p:nvSpPr>
-          <p:cNvPr id="35" name="TextBox 34"/>
-          <p:cNvSpPr txBox="1"/>
-          <p:nvPr/>
-        </p:nvSpPr>
-        <p:spPr>
-          <a:xfrm>
-            <a:off x="3986783" y="5127162"/>
-            <a:ext cx="822960" cy="274320"/>
-          </a:xfrm>
-          <a:prstGeom prst="rect">
-            <a:avLst/>
-          </a:prstGeom>
-          <a:noFill/>
-        </p:spPr>
-        <p:txBody>
-          <a:bodyPr wrap="square" anchor="ctr" lIns="0" rIns="0" tIns="0" bIns="0">
-            <a:spAutoFit/>
-          </a:bodyPr>
-          <a:lstStyle/>
-          <a:p>
-            <a:pPr algn="l">
-              <a:lnSpc>
-                <a:spcPct val="110000"/>
-              </a:lnSpc>
-            </a:pPr>
-            <a:r>
-              <a:rPr sz="1500" b="1">
-                <a:solidFill>
-                  <a:srgbClr val="1428A0"/>
-                </a:solidFill>
-                <a:latin typeface="Arial"/>
-                <a:ea typeface="Arial"/>
-              </a:rPr>
-              <a:t>46~509</a:t>
-            </a:r>
-          </a:p>
-        </p:txBody>
-      </p:sp>
-      <p:sp>
-        <p:nvSpPr>
-          <p:cNvPr id="36" name="TextBox 35"/>
-          <p:cNvSpPr txBox="1"/>
-          <p:nvPr/>
-        </p:nvSpPr>
-        <p:spPr>
-          <a:xfrm>
-            <a:off x="4946904" y="6809250"/>
-            <a:ext cx="1901952" cy="548640"/>
-          </a:xfrm>
-          <a:prstGeom prst="rect">
-            <a:avLst/>
-          </a:prstGeom>
-          <a:noFill/>
-        </p:spPr>
-        <p:txBody>
-          <a:bodyPr wrap="square" anchor="ctr" lIns="0" rIns="0" tIns="0" bIns="0">
-            <a:spAutoFit/>
-          </a:bodyPr>
-          <a:lstStyle/>
-          <a:p>
-            <a:pPr algn="l">
-              <a:lnSpc>
-                <a:spcPct val="100000"/>
-              </a:lnSpc>
-            </a:pPr>
-            <a:r>
-              <a:rPr sz="1700" b="1">
-                <a:solidFill>
-                  <a:srgbClr val="1428A0"/>
-                </a:solidFill>
-                <a:latin typeface="Arial"/>
-                <a:ea typeface="Arial"/>
-              </a:rPr>
-              <a:t>내구 규격만</a:t>
-            </a:r>
-          </a:p>
-          <a:p>
-            <a:pPr algn="l">
-              <a:lnSpc>
-                <a:spcPct val="100000"/>
-              </a:lnSpc>
-            </a:pPr>
-            <a:r>
-              <a:rPr sz="1500" b="1">
-                <a:solidFill>
-                  <a:srgbClr val="1428A0"/>
-                </a:solidFill>
-                <a:latin typeface="Arial"/>
-                <a:ea typeface="Arial"/>
-              </a:rPr>
-              <a:t>192 · 바로 진입</a:t>
-            </a:r>
-          </a:p>
-        </p:txBody>
-      </p:sp>
-      <p:sp>
-        <p:nvSpPr>
-          <p:cNvPr id="37" name="Rectangle 36"/>
+          <p:cNvPr id="56" name="Rectangle 55"/>
           <p:cNvSpPr/>
           <p:nvPr/>
         </p:nvSpPr>
         <p:spPr>
           <a:xfrm>
-            <a:off x="4800600" y="6918978"/>
-            <a:ext cx="91440" cy="91440"/>
-          </a:xfrm>
-          <a:prstGeom prst="rect">
-            <a:avLst/>
-          </a:prstGeom>
-          <a:solidFill>
-            <a:srgbClr val="1428A0"/>
-          </a:solidFill>
-          <a:ln>
-            <a:noFill/>
+            <a:off x="13213080" y="4798771"/>
+            <a:ext cx="841248" cy="231708"/>
+          </a:xfrm>
+          <a:prstGeom prst="rect">
+            <a:avLst/>
+          </a:prstGeom>
+          <a:solidFill>
+            <a:srgbClr val="AAB8E8"/>
+          </a:solidFill>
+          <a:ln w="12700">
+            <a:solidFill>
+              <a:srgbClr val="1428A0"/>
+            </a:solidFill>
+            <a:prstDash val="dash"/>
           </a:ln>
           <a:effectLst/>
         </p:spPr>
@@ -23653,14 +24452,14 @@
       </p:sp>
       <p:sp>
         <p:nvSpPr>
-          <p:cNvPr id="38" name="TextBox 37"/>
+          <p:cNvPr id="57" name="TextBox 56"/>
           <p:cNvSpPr txBox="1"/>
           <p:nvPr/>
         </p:nvSpPr>
         <p:spPr>
           <a:xfrm>
-            <a:off x="4946904" y="6207724"/>
-            <a:ext cx="1901952" cy="548640"/>
+            <a:off x="12847320" y="4414723"/>
+            <a:ext cx="1572768" cy="347472"/>
           </a:xfrm>
           <a:prstGeom prst="rect">
             <a:avLst/>
@@ -23673,26 +24472,89 @@
           </a:bodyPr>
           <a:lstStyle/>
           <a:p>
-            <a:pPr algn="l">
-              <a:lnSpc>
-                <a:spcPct val="100000"/>
-              </a:lnSpc>
-            </a:pPr>
-            <a:r>
-              <a:rPr sz="1700" b="1">
+            <a:pPr algn="ctr">
+              <a:lnSpc>
+                <a:spcPct val="110000"/>
+              </a:lnSpc>
+            </a:pPr>
+            <a:r>
+              <a:rPr sz="1800" b="1">
+                <a:solidFill>
+                  <a:srgbClr val="1428A0"/>
+                </a:solidFill>
+                <a:latin typeface="Arial"/>
+                <a:ea typeface="Arial"/>
+              </a:rPr>
+              <a:t>53~60%</a:t>
+            </a:r>
+          </a:p>
+        </p:txBody>
+      </p:sp>
+      <p:sp>
+        <p:nvSpPr>
+          <p:cNvPr id="58" name="TextBox 57"/>
+          <p:cNvSpPr txBox="1"/>
+          <p:nvPr/>
+        </p:nvSpPr>
+        <p:spPr>
+          <a:xfrm>
+            <a:off x="12152376" y="6839712"/>
+            <a:ext cx="1901952" cy="310896"/>
+          </a:xfrm>
+          <a:prstGeom prst="rect">
+            <a:avLst/>
+          </a:prstGeom>
+          <a:noFill/>
+        </p:spPr>
+        <p:txBody>
+          <a:bodyPr wrap="square" anchor="ctr" lIns="0" rIns="0" tIns="0" bIns="0">
+            <a:spAutoFit/>
+          </a:bodyPr>
+          <a:lstStyle/>
+          <a:p>
+            <a:pPr algn="ctr">
+              <a:lnSpc>
+                <a:spcPct val="110000"/>
+              </a:lnSpc>
+            </a:pPr>
+            <a:r>
+              <a:rPr sz="1800" b="1">
                 <a:solidFill>
                   <a:srgbClr val="1A1A1A"/>
                 </a:solidFill>
                 <a:latin typeface="Arial"/>
                 <a:ea typeface="Arial"/>
               </a:rPr>
-              <a:t>관행 · 가격</a:t>
-            </a:r>
-          </a:p>
-          <a:p>
-            <a:pPr algn="l">
-              <a:lnSpc>
-                <a:spcPct val="100000"/>
+              <a:t>2026</a:t>
+            </a:r>
+          </a:p>
+        </p:txBody>
+      </p:sp>
+      <p:sp>
+        <p:nvSpPr>
+          <p:cNvPr id="59" name="TextBox 58"/>
+          <p:cNvSpPr txBox="1"/>
+          <p:nvPr/>
+        </p:nvSpPr>
+        <p:spPr>
+          <a:xfrm>
+            <a:off x="12152376" y="7150608"/>
+            <a:ext cx="1901952" cy="274320"/>
+          </a:xfrm>
+          <a:prstGeom prst="rect">
+            <a:avLst/>
+          </a:prstGeom>
+          <a:noFill/>
+        </p:spPr>
+        <p:txBody>
+          <a:bodyPr wrap="square" anchor="ctr" lIns="0" rIns="0" tIns="0" bIns="0">
+            <a:spAutoFit/>
+          </a:bodyPr>
+          <a:lstStyle/>
+          <a:p>
+            <a:pPr algn="ctr">
+              <a:lnSpc>
+                <a:spcPct val="110000"/>
               </a:lnSpc>
             </a:pPr>
             <a:r>
@@ -23703,27 +24565,37 @@
                 <a:latin typeface="Arial"/>
                 <a:ea typeface="Arial"/>
               </a:rPr>
-              <a:t>64 · 가격 · 공급</a:t>
-            </a:r>
-          </a:p>
-        </p:txBody>
-      </p:sp>
-      <p:sp>
-        <p:nvSpPr>
-          <p:cNvPr id="39" name="Rectangle 38"/>
+              <a:t>지금 · </a:t>
+            </a:r>
+            <a:r>
+              <a:rPr sz="1500" b="1">
+                <a:solidFill>
+                  <a:srgbClr val="1428A0"/>
+                </a:solidFill>
+                <a:latin typeface="Arial"/>
+                <a:ea typeface="Arial"/>
+              </a:rPr>
+              <a:t>WAF ↓ 후</a:t>
+            </a:r>
+          </a:p>
+        </p:txBody>
+      </p:sp>
+      <p:sp>
+        <p:nvSpPr>
+          <p:cNvPr id="60" name="Rectangle 59"/>
           <p:cNvSpPr/>
           <p:nvPr/>
         </p:nvSpPr>
         <p:spPr>
           <a:xfrm>
-            <a:off x="4800600" y="6317452"/>
-            <a:ext cx="91440" cy="91440"/>
-          </a:xfrm>
-          <a:prstGeom prst="rect">
-            <a:avLst/>
-          </a:prstGeom>
-          <a:solidFill>
-            <a:srgbClr val="AAB8E8"/>
+            <a:off x="14950440" y="3474720"/>
+            <a:ext cx="841248" cy="3310128"/>
+          </a:xfrm>
+          <a:prstGeom prst="rect">
+            <a:avLst/>
+          </a:prstGeom>
+          <a:solidFill>
+            <a:srgbClr val="F5F5F5"/>
           </a:solidFill>
           <a:ln>
             <a:noFill/>
@@ -23754,71 +24626,14 @@
       </p:sp>
       <p:sp>
         <p:nvSpPr>
-          <p:cNvPr id="40" name="TextBox 39"/>
-          <p:cNvSpPr txBox="1"/>
-          <p:nvPr/>
-        </p:nvSpPr>
-        <p:spPr>
-          <a:xfrm>
-            <a:off x="4946904" y="5322216"/>
-            <a:ext cx="1901952" cy="548640"/>
-          </a:xfrm>
-          <a:prstGeom prst="rect">
-            <a:avLst/>
-          </a:prstGeom>
-          <a:noFill/>
-        </p:spPr>
-        <p:txBody>
-          <a:bodyPr wrap="square" anchor="ctr" lIns="0" rIns="0" tIns="0" bIns="0">
-            <a:spAutoFit/>
-          </a:bodyPr>
-          <a:lstStyle/>
-          <a:p>
-            <a:pPr algn="l">
-              <a:lnSpc>
-                <a:spcPct val="100000"/>
-              </a:lnSpc>
-            </a:pPr>
-            <a:r>
-              <a:rPr sz="1700" b="1">
-                <a:solidFill>
-                  <a:srgbClr val="1A1A1A"/>
-                </a:solidFill>
-                <a:latin typeface="Arial"/>
-                <a:ea typeface="Arial"/>
-              </a:rPr>
-              <a:t>성능 (RI)</a:t>
-            </a:r>
-          </a:p>
-          <a:p>
-            <a:pPr algn="l">
-              <a:lnSpc>
-                <a:spcPct val="100000"/>
-              </a:lnSpc>
-            </a:pPr>
-            <a:r>
-              <a:rPr sz="1500" b="0">
-                <a:solidFill>
-                  <a:srgbClr val="555555"/>
-                </a:solidFill>
-                <a:latin typeface="Arial"/>
-                <a:ea typeface="Arial"/>
-              </a:rPr>
-              <a:t>313 · 점선 일부</a:t>
-            </a:r>
-          </a:p>
-        </p:txBody>
-      </p:sp>
-      <p:sp>
-        <p:nvSpPr>
-          <p:cNvPr id="41" name="Rectangle 40"/>
+          <p:cNvPr id="61" name="Rectangle 60"/>
           <p:cNvSpPr/>
           <p:nvPr/>
         </p:nvSpPr>
         <p:spPr>
           <a:xfrm>
-            <a:off x="4800600" y="5431944"/>
-            <a:ext cx="91440" cy="91440"/>
+            <a:off x="14950440" y="5394594"/>
+            <a:ext cx="841248" cy="1390253"/>
           </a:xfrm>
           <a:prstGeom prst="rect">
             <a:avLst/>
@@ -23855,14 +24670,14 @@
       </p:sp>
       <p:sp>
         <p:nvSpPr>
-          <p:cNvPr id="42" name="TextBox 41"/>
+          <p:cNvPr id="62" name="TextBox 61"/>
           <p:cNvSpPr txBox="1"/>
           <p:nvPr/>
         </p:nvSpPr>
         <p:spPr>
           <a:xfrm>
-            <a:off x="4946904" y="4351279"/>
-            <a:ext cx="1901952" cy="548640"/>
+            <a:off x="14584680" y="5010546"/>
+            <a:ext cx="1572768" cy="347472"/>
           </a:xfrm>
           <a:prstGeom prst="rect">
             <a:avLst/>
@@ -23875,9 +24690,9 @@
           </a:bodyPr>
           <a:lstStyle/>
           <a:p>
-            <a:pPr algn="l">
-              <a:lnSpc>
-                <a:spcPct val="100000"/>
+            <a:pPr algn="ctr">
+              <a:lnSpc>
+                <a:spcPct val="110000"/>
               </a:lnSpc>
             </a:pPr>
             <a:r>
@@ -23888,44 +24703,27 @@
                 <a:latin typeface="Arial"/>
                 <a:ea typeface="Arial"/>
               </a:rPr>
-              <a:t>고내구 3 DWPD+</a:t>
-            </a:r>
-          </a:p>
-          <a:p>
-            <a:pPr algn="l">
-              <a:lnSpc>
-                <a:spcPct val="100000"/>
-              </a:lnSpc>
-            </a:pPr>
-            <a:r>
-              <a:rPr sz="1500" b="0">
-                <a:solidFill>
-                  <a:srgbClr val="555555"/>
-                </a:solidFill>
-                <a:latin typeface="Arial"/>
-                <a:ea typeface="Arial"/>
-              </a:rPr>
-              <a:t>101 · 대상 아님</a:t>
-            </a:r>
-          </a:p>
-        </p:txBody>
-      </p:sp>
-      <p:sp>
-        <p:nvSpPr>
-          <p:cNvPr id="43" name="Rectangle 42"/>
+              <a:t>42%</a:t>
+            </a:r>
+          </a:p>
+        </p:txBody>
+      </p:sp>
+      <p:sp>
+        <p:nvSpPr>
+          <p:cNvPr id="63" name="Rectangle 62"/>
           <p:cNvSpPr/>
           <p:nvPr/>
         </p:nvSpPr>
         <p:spPr>
           <a:xfrm>
-            <a:off x="4800600" y="4461007"/>
-            <a:ext cx="91440" cy="91440"/>
-          </a:xfrm>
-          <a:prstGeom prst="rect">
-            <a:avLst/>
-          </a:prstGeom>
-          <a:solidFill>
-            <a:srgbClr val="555555"/>
+            <a:off x="16011144" y="3474720"/>
+            <a:ext cx="841248" cy="3310128"/>
+          </a:xfrm>
+          <a:prstGeom prst="rect">
+            <a:avLst/>
+          </a:prstGeom>
+          <a:solidFill>
+            <a:srgbClr val="F5F5F5"/>
           </a:solidFill>
           <a:ln>
             <a:noFill/>
@@ -23956,77 +24754,20 @@
       </p:sp>
       <p:sp>
         <p:nvSpPr>
-          <p:cNvPr id="44" name="TextBox 43"/>
-          <p:cNvSpPr txBox="1"/>
-          <p:nvPr/>
-        </p:nvSpPr>
-        <p:spPr>
-          <a:xfrm>
-            <a:off x="4946904" y="3646017"/>
-            <a:ext cx="1901952" cy="548640"/>
-          </a:xfrm>
-          <a:prstGeom prst="rect">
-            <a:avLst/>
-          </a:prstGeom>
-          <a:noFill/>
-        </p:spPr>
-        <p:txBody>
-          <a:bodyPr wrap="square" anchor="ctr" lIns="0" rIns="0" tIns="0" bIns="0">
-            <a:spAutoFit/>
-          </a:bodyPr>
-          <a:lstStyle/>
-          <a:p>
-            <a:pPr algn="l">
-              <a:lnSpc>
-                <a:spcPct val="100000"/>
-              </a:lnSpc>
-            </a:pPr>
-            <a:r>
-              <a:rPr sz="1700" b="1">
-                <a:solidFill>
-                  <a:srgbClr val="1A1A1A"/>
-                </a:solidFill>
-                <a:latin typeface="Arial"/>
-                <a:ea typeface="Arial"/>
-              </a:rPr>
-              <a:t>KV 캐시</a:t>
-            </a:r>
-          </a:p>
-          <a:p>
-            <a:pPr algn="l">
-              <a:lnSpc>
-                <a:spcPct val="100000"/>
-              </a:lnSpc>
-            </a:pPr>
-            <a:r>
-              <a:rPr sz="1500" b="0">
-                <a:solidFill>
-                  <a:srgbClr val="555555"/>
-                </a:solidFill>
-                <a:latin typeface="Arial"/>
-                <a:ea typeface="Arial"/>
-              </a:rPr>
-              <a:t>200 · 대상 아님</a:t>
-            </a:r>
-          </a:p>
-        </p:txBody>
-      </p:sp>
-      <p:sp>
-        <p:nvSpPr>
-          <p:cNvPr id="45" name="Rectangle 44"/>
+          <p:cNvPr id="64" name="Rectangle 63"/>
           <p:cNvSpPr/>
           <p:nvPr/>
         </p:nvSpPr>
         <p:spPr>
           <a:xfrm>
-            <a:off x="4800600" y="3755745"/>
-            <a:ext cx="91440" cy="91440"/>
-          </a:xfrm>
-          <a:prstGeom prst="rect">
-            <a:avLst/>
-          </a:prstGeom>
-          <a:solidFill>
-            <a:srgbClr val="8A8A8A"/>
+            <a:off x="16011144" y="4699467"/>
+            <a:ext cx="841248" cy="2085380"/>
+          </a:xfrm>
+          <a:prstGeom prst="rect">
+            <a:avLst/>
+          </a:prstGeom>
+          <a:solidFill>
+            <a:srgbClr val="1428A0"/>
           </a:solidFill>
           <a:ln>
             <a:noFill/>
@@ -24057,113 +24798,26 @@
       </p:sp>
       <p:sp>
         <p:nvSpPr>
-          <p:cNvPr id="46" name="TextBox 45"/>
-          <p:cNvSpPr txBox="1"/>
-          <p:nvPr/>
-        </p:nvSpPr>
-        <p:spPr>
-          <a:xfrm>
-            <a:off x="722376" y="7991856"/>
-            <a:ext cx="6126480" cy="365760"/>
-          </a:xfrm>
-          <a:prstGeom prst="rect">
-            <a:avLst/>
-          </a:prstGeom>
-          <a:noFill/>
-        </p:spPr>
-        <p:txBody>
-          <a:bodyPr wrap="square" anchor="ctr" lIns="0" rIns="0" tIns="0" bIns="0">
-            <a:spAutoFit/>
-          </a:bodyPr>
-          <a:lstStyle/>
-          <a:p>
-            <a:pPr algn="l">
-              <a:lnSpc>
-                <a:spcPct val="110000"/>
-              </a:lnSpc>
-            </a:pPr>
-            <a:r>
-              <a:rPr sz="1600" b="0">
-                <a:solidFill>
-                  <a:srgbClr val="555555"/>
-                </a:solidFill>
-                <a:latin typeface="Arial"/>
-                <a:ea typeface="Arial"/>
-              </a:rPr>
-              <a:t>내구 규격만 수요의 성능 여유  </a:t>
-            </a:r>
-            <a:r>
-              <a:rPr sz="1800" b="1">
-                <a:solidFill>
-                  <a:srgbClr val="1428A0"/>
-                </a:solidFill>
-                <a:latin typeface="Arial"/>
-                <a:ea typeface="Arial"/>
-              </a:rPr>
-              <a:t>약 1,000배</a:t>
-            </a:r>
-          </a:p>
-        </p:txBody>
-      </p:sp>
-      <p:sp>
-        <p:nvSpPr>
-          <p:cNvPr id="47" name="TextBox 46"/>
-          <p:cNvSpPr txBox="1"/>
-          <p:nvPr/>
-        </p:nvSpPr>
-        <p:spPr>
-          <a:xfrm>
-            <a:off x="722376" y="8266175"/>
-            <a:ext cx="6126480" cy="292608"/>
-          </a:xfrm>
-          <a:prstGeom prst="rect">
-            <a:avLst/>
-          </a:prstGeom>
-          <a:noFill/>
-        </p:spPr>
-        <p:txBody>
-          <a:bodyPr wrap="square" anchor="ctr" lIns="0" rIns="0" tIns="0" bIns="0">
-            <a:spAutoFit/>
-          </a:bodyPr>
-          <a:lstStyle/>
-          <a:p>
-            <a:pPr algn="l">
-              <a:lnSpc>
-                <a:spcPct val="110000"/>
-              </a:lnSpc>
-            </a:pPr>
-            <a:r>
-              <a:rPr sz="1500" b="0">
-                <a:solidFill>
-                  <a:srgbClr val="555555"/>
-                </a:solidFill>
-                <a:latin typeface="Arial"/>
-                <a:ea typeface="Arial"/>
-              </a:rPr>
-              <a:t>RAG 지연 예산 100ms 대 QLC 읽기 0.1ms</a:t>
-            </a:r>
-          </a:p>
-        </p:txBody>
-      </p:sp>
-      <p:sp>
-        <p:nvSpPr>
-          <p:cNvPr id="48" name="Oval 47"/>
+          <p:cNvPr id="65" name="Rectangle 64"/>
           <p:cNvSpPr/>
           <p:nvPr/>
         </p:nvSpPr>
         <p:spPr>
           <a:xfrm>
-            <a:off x="7168896" y="2139696"/>
-            <a:ext cx="438912" cy="438912"/>
-          </a:xfrm>
-          <a:prstGeom prst="ellipse">
-            <a:avLst/>
-          </a:prstGeom>
-          <a:solidFill>
-            <a:srgbClr val="1428A0"/>
-          </a:solidFill>
-          <a:ln>
-            <a:noFill/>
+            <a:off x="16011144" y="4533960"/>
+            <a:ext cx="841248" cy="165506"/>
+          </a:xfrm>
+          <a:prstGeom prst="rect">
+            <a:avLst/>
+          </a:prstGeom>
+          <a:solidFill>
+            <a:srgbClr val="AAB8E8"/>
+          </a:solidFill>
+          <a:ln w="12700">
+            <a:solidFill>
+              <a:srgbClr val="1428A0"/>
+            </a:solidFill>
+            <a:prstDash val="dash"/>
           </a:ln>
           <a:effectLst/>
         </p:spPr>
@@ -24191,14 +24845,14 @@
       </p:sp>
       <p:sp>
         <p:nvSpPr>
-          <p:cNvPr id="49" name="TextBox 48"/>
+          <p:cNvPr id="66" name="TextBox 65"/>
           <p:cNvSpPr txBox="1"/>
           <p:nvPr/>
         </p:nvSpPr>
         <p:spPr>
           <a:xfrm>
-            <a:off x="7168896" y="2139696"/>
-            <a:ext cx="438912" cy="438912"/>
+            <a:off x="15645384" y="4149912"/>
+            <a:ext cx="1572768" cy="347472"/>
           </a:xfrm>
           <a:prstGeom prst="rect">
             <a:avLst/>
@@ -24217,28 +24871,28 @@
               </a:lnSpc>
             </a:pPr>
             <a:r>
-              <a:rPr sz="2000" b="1">
-                <a:solidFill>
-                  <a:srgbClr val="FFFFFF"/>
-                </a:solidFill>
-                <a:latin typeface="Arial"/>
-                <a:ea typeface="Arial"/>
-              </a:rPr>
-              <a:t>2</a:t>
-            </a:r>
-          </a:p>
-        </p:txBody>
-      </p:sp>
-      <p:sp>
-        <p:nvSpPr>
-          <p:cNvPr id="50" name="TextBox 49"/>
+              <a:rPr sz="1800" b="1">
+                <a:solidFill>
+                  <a:srgbClr val="1428A0"/>
+                </a:solidFill>
+                <a:latin typeface="Arial"/>
+                <a:ea typeface="Arial"/>
+              </a:rPr>
+              <a:t>63~68%</a:t>
+            </a:r>
+          </a:p>
+        </p:txBody>
+      </p:sp>
+      <p:sp>
+        <p:nvSpPr>
+          <p:cNvPr id="67" name="TextBox 66"/>
           <p:cNvSpPr txBox="1"/>
           <p:nvPr/>
         </p:nvSpPr>
         <p:spPr>
           <a:xfrm>
-            <a:off x="7754112" y="2103120"/>
-            <a:ext cx="9811512" cy="512063"/>
+            <a:off x="14950440" y="6839712"/>
+            <a:ext cx="1901952" cy="310896"/>
           </a:xfrm>
           <a:prstGeom prst="rect">
             <a:avLst/>
@@ -24251,34 +24905,34 @@
           </a:bodyPr>
           <a:lstStyle/>
           <a:p>
-            <a:pPr algn="l">
+            <a:pPr algn="ctr">
               <a:lnSpc>
                 <a:spcPct val="110000"/>
               </a:lnSpc>
             </a:pPr>
             <a:r>
-              <a:rPr sz="2400" b="1">
+              <a:rPr sz="1800" b="1">
                 <a:solidFill>
                   <a:srgbClr val="1A1A1A"/>
                 </a:solidFill>
                 <a:latin typeface="Arial"/>
                 <a:ea typeface="Arial"/>
               </a:rPr>
-              <a:t>기술: 모아 쓰고, 수명별로 배치</a:t>
-            </a:r>
-          </a:p>
-        </p:txBody>
-      </p:sp>
-      <p:sp>
-        <p:nvSpPr>
-          <p:cNvPr id="51" name="TextBox 50"/>
+              <a:t>2030</a:t>
+            </a:r>
+          </a:p>
+        </p:txBody>
+      </p:sp>
+      <p:sp>
+        <p:nvSpPr>
+          <p:cNvPr id="68" name="TextBox 67"/>
           <p:cNvSpPr txBox="1"/>
           <p:nvPr/>
         </p:nvSpPr>
         <p:spPr>
           <a:xfrm>
-            <a:off x="7168896" y="2743200"/>
-            <a:ext cx="10396728" cy="329184"/>
+            <a:off x="14950440" y="7150608"/>
+            <a:ext cx="1901952" cy="274320"/>
           </a:xfrm>
           <a:prstGeom prst="rect">
             <a:avLst/>
@@ -24291,102 +24945,52 @@
           </a:bodyPr>
           <a:lstStyle/>
           <a:p>
-            <a:pPr algn="l">
+            <a:pPr algn="ctr">
               <a:lnSpc>
                 <a:spcPct val="110000"/>
               </a:lnSpc>
             </a:pPr>
             <a:r>
-              <a:rPr sz="1600" b="1">
-                <a:solidFill>
-                  <a:srgbClr val="1A1A1A"/>
-                </a:solidFill>
-                <a:latin typeface="Arial"/>
-                <a:ea typeface="Arial"/>
-              </a:rPr>
-              <a:t>2장 핵심 기술 중  </a:t>
-            </a:r>
-            <a:r>
-              <a:rPr sz="1600" b="0">
+              <a:rPr sz="1500" b="0">
+                <a:solidFill>
+                  <a:srgbClr val="555555"/>
+                </a:solidFill>
+                <a:latin typeface="Arial"/>
+                <a:ea typeface="Arial"/>
+              </a:rPr>
+              <a:t>지금 · </a:t>
+            </a:r>
+            <a:r>
+              <a:rPr sz="1500" b="1">
                 <a:solidFill>
                   <a:srgbClr val="1428A0"/>
                 </a:solidFill>
                 <a:latin typeface="Arial"/>
                 <a:ea typeface="Arial"/>
               </a:rPr>
-              <a:t>■</a:t>
-            </a:r>
-            <a:r>
-              <a:rPr sz="1600" b="0">
-                <a:solidFill>
-                  <a:srgbClr val="555555"/>
-                </a:solidFill>
-                <a:latin typeface="Arial"/>
-                <a:ea typeface="Arial"/>
-              </a:rPr>
-              <a:t> 핵심   </a:t>
-            </a:r>
-            <a:r>
-              <a:rPr sz="1600" b="0">
-                <a:solidFill>
-                  <a:srgbClr val="AAB8E8"/>
-                </a:solidFill>
-                <a:latin typeface="Arial"/>
-                <a:ea typeface="Arial"/>
-              </a:rPr>
-              <a:t>■</a:t>
-            </a:r>
-            <a:r>
-              <a:rPr sz="1600" b="0">
-                <a:solidFill>
-                  <a:srgbClr val="555555"/>
-                </a:solidFill>
-                <a:latin typeface="Arial"/>
-                <a:ea typeface="Arial"/>
-              </a:rPr>
-              <a:t> 보조   </a:t>
-            </a:r>
-            <a:r>
-              <a:rPr sz="1600" b="0">
-                <a:solidFill>
-                  <a:srgbClr val="8A8A8A"/>
-                </a:solidFill>
-                <a:latin typeface="Arial"/>
-                <a:ea typeface="Arial"/>
-              </a:rPr>
-              <a:t>▢</a:t>
-            </a:r>
-            <a:r>
-              <a:rPr sz="1600" b="0">
-                <a:solidFill>
-                  <a:srgbClr val="555555"/>
-                </a:solidFill>
-                <a:latin typeface="Arial"/>
-                <a:ea typeface="Arial"/>
-              </a:rPr>
-              <a:t> 해당 없음</a:t>
-            </a:r>
-          </a:p>
-        </p:txBody>
-      </p:sp>
-      <p:sp>
-        <p:nvSpPr>
-          <p:cNvPr id="52" name="Rounded Rectangle 51"/>
+              <a:t>WAF ↓ 후</a:t>
+            </a:r>
+          </a:p>
+        </p:txBody>
+      </p:sp>
+      <p:sp>
+        <p:nvSpPr>
+          <p:cNvPr id="69" name="Rounded Rectangle 68"/>
           <p:cNvSpPr/>
           <p:nvPr/>
         </p:nvSpPr>
         <p:spPr>
           <a:xfrm>
-            <a:off x="7168896" y="3127248"/>
-            <a:ext cx="1516075" cy="402336"/>
+            <a:off x="722376" y="8046720"/>
+            <a:ext cx="16843248" cy="475488"/>
           </a:xfrm>
           <a:prstGeom prst="roundRect">
             <a:avLst>
-              <a:gd name="adj" fmla="val 18181"/>
+              <a:gd name="adj" fmla="val 15384"/>
             </a:avLst>
           </a:prstGeom>
           <a:solidFill>
-            <a:srgbClr val="1428A0"/>
+            <a:srgbClr val="EEF1FA"/>
           </a:solidFill>
           <a:ln>
             <a:noFill/>
@@ -24417,14 +25021,14 @@
       </p:sp>
       <p:sp>
         <p:nvSpPr>
-          <p:cNvPr id="53" name="TextBox 52"/>
+          <p:cNvPr id="70" name="TextBox 69"/>
           <p:cNvSpPr txBox="1"/>
           <p:nvPr/>
         </p:nvSpPr>
         <p:spPr>
           <a:xfrm>
-            <a:off x="7223759" y="3127248"/>
-            <a:ext cx="1406347" cy="402336"/>
+            <a:off x="941832" y="8046720"/>
+            <a:ext cx="2377440" cy="475488"/>
           </a:xfrm>
           <a:prstGeom prst="rect">
             <a:avLst/>
@@ -24437,42 +25041,42 @@
           </a:bodyPr>
           <a:lstStyle/>
           <a:p>
-            <a:pPr algn="ctr">
+            <a:pPr algn="l">
               <a:lnSpc>
                 <a:spcPct val="110000"/>
               </a:lnSpc>
             </a:pPr>
             <a:r>
-              <a:rPr sz="1500" b="1">
-                <a:solidFill>
-                  <a:srgbClr val="FFFFFF"/>
-                </a:solidFill>
-                <a:latin typeface="Arial"/>
-                <a:ea typeface="Arial"/>
-              </a:rPr>
-              <a:t>Mixed Media</a:t>
-            </a:r>
-          </a:p>
-        </p:txBody>
-      </p:sp>
-      <p:sp>
-        <p:nvSpPr>
-          <p:cNvPr id="54" name="Rounded Rectangle 53"/>
+              <a:rPr sz="1800" b="1">
+                <a:solidFill>
+                  <a:srgbClr val="1A1A1A"/>
+                </a:solidFill>
+                <a:latin typeface="Arial"/>
+                <a:ea typeface="Arial"/>
+              </a:rPr>
+              <a:t>WAF를 낮추는 기술</a:t>
+            </a:r>
+          </a:p>
+        </p:txBody>
+      </p:sp>
+      <p:sp>
+        <p:nvSpPr>
+          <p:cNvPr id="71" name="Rounded Rectangle 70"/>
           <p:cNvSpPr/>
           <p:nvPr/>
         </p:nvSpPr>
         <p:spPr>
           <a:xfrm>
-            <a:off x="8707648" y="3127248"/>
-            <a:ext cx="652881" cy="402336"/>
+            <a:off x="3465576" y="8110728"/>
+            <a:ext cx="1636776" cy="347472"/>
           </a:xfrm>
           <a:prstGeom prst="roundRect">
             <a:avLst>
-              <a:gd name="adj" fmla="val 18181"/>
+              <a:gd name="adj" fmla="val 21052"/>
             </a:avLst>
           </a:prstGeom>
           <a:solidFill>
-            <a:srgbClr val="1428A0"/>
+            <a:srgbClr val="3C5AC8"/>
           </a:solidFill>
           <a:ln>
             <a:noFill/>
@@ -24503,14 +25107,14 @@
       </p:sp>
       <p:sp>
         <p:nvSpPr>
-          <p:cNvPr id="55" name="TextBox 54"/>
+          <p:cNvPr id="72" name="TextBox 71"/>
           <p:cNvSpPr txBox="1"/>
           <p:nvPr/>
         </p:nvSpPr>
         <p:spPr>
           <a:xfrm>
-            <a:off x="8762512" y="3127248"/>
-            <a:ext cx="543153" cy="402336"/>
+            <a:off x="3520440" y="8110728"/>
+            <a:ext cx="1527048" cy="347472"/>
           </a:xfrm>
           <a:prstGeom prst="rect">
             <a:avLst/>
@@ -24529,36 +25133,76 @@
               </a:lnSpc>
             </a:pPr>
             <a:r>
-              <a:rPr sz="1500" b="1">
+              <a:rPr sz="1600" b="1">
                 <a:solidFill>
                   <a:srgbClr val="FFFFFF"/>
                 </a:solidFill>
                 <a:latin typeface="Arial"/>
                 <a:ea typeface="Arial"/>
               </a:rPr>
-              <a:t>FDP</a:t>
-            </a:r>
-          </a:p>
-        </p:txBody>
-      </p:sp>
-      <p:sp>
-        <p:nvSpPr>
-          <p:cNvPr id="56" name="Rounded Rectangle 55"/>
+              <a:t>Mixed Media</a:t>
+            </a:r>
+          </a:p>
+        </p:txBody>
+      </p:sp>
+      <p:sp>
+        <p:nvSpPr>
+          <p:cNvPr id="73" name="TextBox 72"/>
+          <p:cNvSpPr txBox="1"/>
+          <p:nvPr/>
+        </p:nvSpPr>
+        <p:spPr>
+          <a:xfrm>
+            <a:off x="5212080" y="8046720"/>
+            <a:ext cx="4572000" cy="475488"/>
+          </a:xfrm>
+          <a:prstGeom prst="rect">
+            <a:avLst/>
+          </a:prstGeom>
+          <a:noFill/>
+        </p:spPr>
+        <p:txBody>
+          <a:bodyPr wrap="square" anchor="ctr" lIns="0" rIns="0" tIns="0" bIns="0">
+            <a:spAutoFit/>
+          </a:bodyPr>
+          <a:lstStyle/>
+          <a:p>
+            <a:pPr algn="l">
+              <a:lnSpc>
+                <a:spcPct val="110000"/>
+              </a:lnSpc>
+            </a:pPr>
+            <a:r>
+              <a:rPr sz="1700" b="1">
+                <a:solidFill>
+                  <a:srgbClr val="1428A0"/>
+                </a:solidFill>
+                <a:latin typeface="Arial"/>
+                <a:ea typeface="Arial"/>
+              </a:rPr>
+              <a:t>모아쓰기 · 단기 2026~27</a:t>
+            </a:r>
+          </a:p>
+        </p:txBody>
+      </p:sp>
+      <p:sp>
+        <p:nvSpPr>
+          <p:cNvPr id="74" name="Rounded Rectangle 73"/>
           <p:cNvSpPr/>
           <p:nvPr/>
         </p:nvSpPr>
         <p:spPr>
           <a:xfrm>
-            <a:off x="9383207" y="3127248"/>
-            <a:ext cx="1731873" cy="402336"/>
+            <a:off x="9317736" y="8110728"/>
+            <a:ext cx="685800" cy="347472"/>
           </a:xfrm>
           <a:prstGeom prst="roundRect">
             <a:avLst>
-              <a:gd name="adj" fmla="val 18181"/>
+              <a:gd name="adj" fmla="val 21052"/>
             </a:avLst>
           </a:prstGeom>
           <a:solidFill>
-            <a:srgbClr val="AAB8E8"/>
+            <a:srgbClr val="1428A0"/>
           </a:solidFill>
           <a:ln>
             <a:noFill/>
@@ -24589,14 +25233,14 @@
       </p:sp>
       <p:sp>
         <p:nvSpPr>
-          <p:cNvPr id="57" name="TextBox 56"/>
+          <p:cNvPr id="75" name="TextBox 74"/>
           <p:cNvSpPr txBox="1"/>
           <p:nvPr/>
         </p:nvSpPr>
         <p:spPr>
           <a:xfrm>
-            <a:off x="9438071" y="3127248"/>
-            <a:ext cx="1622145" cy="402336"/>
+            <a:off x="9372600" y="8110728"/>
+            <a:ext cx="576072" cy="347472"/>
           </a:xfrm>
           <a:prstGeom prst="rect">
             <a:avLst/>
@@ -24615,36 +25259,114 @@
               </a:lnSpc>
             </a:pPr>
             <a:r>
-              <a:rPr sz="1500" b="1">
+              <a:rPr sz="1600" b="1">
+                <a:solidFill>
+                  <a:srgbClr val="FFFFFF"/>
+                </a:solidFill>
+                <a:latin typeface="Arial"/>
+                <a:ea typeface="Arial"/>
+              </a:rPr>
+              <a:t>FDP</a:t>
+            </a:r>
+          </a:p>
+        </p:txBody>
+      </p:sp>
+      <p:sp>
+        <p:nvSpPr>
+          <p:cNvPr id="76" name="TextBox 75"/>
+          <p:cNvSpPr txBox="1"/>
+          <p:nvPr/>
+        </p:nvSpPr>
+        <p:spPr>
+          <a:xfrm>
+            <a:off x="10113264" y="8046720"/>
+            <a:ext cx="4572000" cy="475488"/>
+          </a:xfrm>
+          <a:prstGeom prst="rect">
+            <a:avLst/>
+          </a:prstGeom>
+          <a:noFill/>
+        </p:spPr>
+        <p:txBody>
+          <a:bodyPr wrap="square" anchor="ctr" lIns="0" rIns="0" tIns="0" bIns="0">
+            <a:spAutoFit/>
+          </a:bodyPr>
+          <a:lstStyle/>
+          <a:p>
+            <a:pPr algn="l">
+              <a:lnSpc>
+                <a:spcPct val="110000"/>
+              </a:lnSpc>
+            </a:pPr>
+            <a:r>
+              <a:rPr sz="1700" b="1">
                 <a:solidFill>
                   <a:srgbClr val="1428A0"/>
                 </a:solidFill>
                 <a:latin typeface="Arial"/>
                 <a:ea typeface="Arial"/>
               </a:rPr>
-              <a:t>Large Mapping</a:t>
-            </a:r>
-          </a:p>
-        </p:txBody>
-      </p:sp>
-      <p:sp>
-        <p:nvSpPr>
-          <p:cNvPr id="58" name="Rounded Rectangle 57"/>
+              <a:t>근원적 WAF ↓ · 고객과 중장기 2028~</a:t>
+            </a:r>
+          </a:p>
+        </p:txBody>
+      </p:sp>
+      <p:sp>
+        <p:nvSpPr>
+          <p:cNvPr id="77" name="TextBox 76"/>
+          <p:cNvSpPr txBox="1"/>
+          <p:nvPr/>
+        </p:nvSpPr>
+        <p:spPr>
+          <a:xfrm>
+            <a:off x="14456664" y="8046720"/>
+            <a:ext cx="2926080" cy="475488"/>
+          </a:xfrm>
+          <a:prstGeom prst="rect">
+            <a:avLst/>
+          </a:prstGeom>
+          <a:noFill/>
+        </p:spPr>
+        <p:txBody>
+          <a:bodyPr wrap="square" anchor="ctr" lIns="0" rIns="0" tIns="0" bIns="0">
+            <a:spAutoFit/>
+          </a:bodyPr>
+          <a:lstStyle/>
+          <a:p>
+            <a:pPr algn="r">
+              <a:lnSpc>
+                <a:spcPct val="110000"/>
+              </a:lnSpc>
+            </a:pPr>
+            <a:r>
+              <a:rPr sz="1500" b="0">
+                <a:solidFill>
+                  <a:srgbClr val="555555"/>
+                </a:solidFill>
+                <a:latin typeface="Arial"/>
+                <a:ea typeface="Arial"/>
+              </a:rPr>
+              <a:t>상세는 2장 핵심 기술</a:t>
+            </a:r>
+          </a:p>
+        </p:txBody>
+      </p:sp>
+      <p:sp>
+        <p:nvSpPr>
+          <p:cNvPr id="78" name="Rectangle 77"/>
           <p:cNvSpPr/>
           <p:nvPr/>
         </p:nvSpPr>
         <p:spPr>
           <a:xfrm>
-            <a:off x="11137757" y="3127248"/>
-            <a:ext cx="2055571" cy="402336"/>
-          </a:xfrm>
-          <a:prstGeom prst="roundRect">
-            <a:avLst>
-              <a:gd name="adj" fmla="val 18181"/>
-            </a:avLst>
-          </a:prstGeom>
-          <a:solidFill>
-            <a:srgbClr val="AAB8E8"/>
+            <a:off x="722376" y="8631936"/>
+            <a:ext cx="16843248" cy="731520"/>
+          </a:xfrm>
+          <a:prstGeom prst="rect">
+            <a:avLst/>
+          </a:prstGeom>
+          <a:solidFill>
+            <a:srgbClr val="1428A0"/>
           </a:solidFill>
           <a:ln>
             <a:noFill/>
@@ -24675,14 +25397,14 @@
       </p:sp>
       <p:sp>
         <p:nvSpPr>
-          <p:cNvPr id="59" name="TextBox 58"/>
+          <p:cNvPr id="79" name="TextBox 78"/>
           <p:cNvSpPr txBox="1"/>
           <p:nvPr/>
         </p:nvSpPr>
         <p:spPr>
           <a:xfrm>
-            <a:off x="11192621" y="3127248"/>
-            <a:ext cx="1945843" cy="402336"/>
+            <a:off x="1088136" y="8631936"/>
+            <a:ext cx="1234440" cy="731520"/>
           </a:xfrm>
           <a:prstGeom prst="rect">
             <a:avLst/>
@@ -24695,83 +25417,34 @@
           </a:bodyPr>
           <a:lstStyle/>
           <a:p>
-            <a:pPr algn="ctr">
+            <a:pPr algn="l">
               <a:lnSpc>
                 <a:spcPct val="110000"/>
               </a:lnSpc>
             </a:pPr>
             <a:r>
-              <a:rPr sz="1500" b="1">
-                <a:solidFill>
-                  <a:srgbClr val="1428A0"/>
-                </a:solidFill>
-                <a:latin typeface="Arial"/>
-                <a:ea typeface="Arial"/>
-              </a:rPr>
-              <a:t>Multi-Tenant QoS</a:t>
-            </a:r>
-          </a:p>
-        </p:txBody>
-      </p:sp>
-      <p:sp>
-        <p:nvSpPr>
-          <p:cNvPr id="60" name="Rounded Rectangle 59"/>
-          <p:cNvSpPr/>
-          <p:nvPr/>
-        </p:nvSpPr>
-        <p:spPr>
-          <a:xfrm>
-            <a:off x="13216006" y="3127248"/>
-            <a:ext cx="1839772" cy="402336"/>
-          </a:xfrm>
-          <a:prstGeom prst="roundRect">
-            <a:avLst>
-              <a:gd name="adj" fmla="val 18181"/>
-            </a:avLst>
-          </a:prstGeom>
-          <a:solidFill>
-            <a:srgbClr val="FFFFFF"/>
-          </a:solidFill>
-          <a:ln w="12700">
-            <a:solidFill>
-              <a:srgbClr val="8A8A8A"/>
-            </a:solidFill>
-            <a:prstDash val="dash"/>
-          </a:ln>
-          <a:effectLst/>
-        </p:spPr>
-        <p:style>
-          <a:lnRef idx="1">
-            <a:schemeClr val="accent1"/>
-          </a:lnRef>
-          <a:fillRef idx="3">
-            <a:schemeClr val="accent1"/>
-          </a:fillRef>
-          <a:effectRef idx="2">
-            <a:schemeClr val="accent1"/>
-          </a:effectRef>
-          <a:fontRef idx="minor">
-            <a:schemeClr val="lt1"/>
-          </a:fontRef>
-        </p:style>
-        <p:txBody>
-          <a:bodyPr rtlCol="0" anchor="ctr"/>
-          <a:lstStyle/>
-          <a:p>
-            <a:pPr algn="ctr"/>
-          </a:p>
-        </p:txBody>
-      </p:sp>
-      <p:sp>
-        <p:nvSpPr>
-          <p:cNvPr id="61" name="TextBox 60"/>
+              <a:rPr sz="2000" b="0">
+                <a:solidFill>
+                  <a:srgbClr val="AAB8E8"/>
+                </a:solidFill>
+                <a:latin typeface="Arial"/>
+                <a:ea typeface="Arial"/>
+              </a:rPr>
+              <a:t>기회</a:t>
+            </a:r>
+          </a:p>
+        </p:txBody>
+      </p:sp>
+      <p:sp>
+        <p:nvSpPr>
+          <p:cNvPr id="80" name="TextBox 79"/>
           <p:cNvSpPr txBox="1"/>
           <p:nvPr/>
         </p:nvSpPr>
         <p:spPr>
           <a:xfrm>
-            <a:off x="13270870" y="3127248"/>
-            <a:ext cx="1730044" cy="402336"/>
+            <a:off x="2322576" y="8631936"/>
+            <a:ext cx="15060168" cy="731520"/>
           </a:xfrm>
           <a:prstGeom prst="rect">
             <a:avLst/>
@@ -24784,3734 +25457,34 @@
           </a:bodyPr>
           <a:lstStyle/>
           <a:p>
-            <a:pPr algn="ctr">
+            <a:pPr algn="l">
               <a:lnSpc>
                 <a:spcPct val="110000"/>
               </a:lnSpc>
             </a:pPr>
             <a:r>
-              <a:rPr sz="1500" b="0">
-                <a:solidFill>
-                  <a:srgbClr val="555555"/>
-                </a:solidFill>
-                <a:latin typeface="Arial"/>
-                <a:ea typeface="Arial"/>
-              </a:rPr>
-              <a:t>Fault Tolerant</a:t>
-            </a:r>
-          </a:p>
-        </p:txBody>
-      </p:sp>
-      <p:sp>
-        <p:nvSpPr>
-          <p:cNvPr id="62" name="Rounded Rectangle 61"/>
-          <p:cNvSpPr/>
-          <p:nvPr/>
-        </p:nvSpPr>
-        <p:spPr>
-          <a:xfrm>
-            <a:off x="15078456" y="3127248"/>
-            <a:ext cx="2487168" cy="402336"/>
-          </a:xfrm>
-          <a:prstGeom prst="roundRect">
-            <a:avLst>
-              <a:gd name="adj" fmla="val 18181"/>
-            </a:avLst>
-          </a:prstGeom>
-          <a:solidFill>
-            <a:srgbClr val="FFFFFF"/>
-          </a:solidFill>
-          <a:ln w="12700">
-            <a:solidFill>
-              <a:srgbClr val="8A8A8A"/>
-            </a:solidFill>
-            <a:prstDash val="dash"/>
-          </a:ln>
-          <a:effectLst/>
-        </p:spPr>
-        <p:style>
-          <a:lnRef idx="1">
-            <a:schemeClr val="accent1"/>
-          </a:lnRef>
-          <a:fillRef idx="3">
-            <a:schemeClr val="accent1"/>
-          </a:fillRef>
-          <a:effectRef idx="2">
-            <a:schemeClr val="accent1"/>
-          </a:effectRef>
-          <a:fontRef idx="minor">
-            <a:schemeClr val="lt1"/>
-          </a:fontRef>
-        </p:style>
-        <p:txBody>
-          <a:bodyPr rtlCol="0" anchor="ctr"/>
-          <a:lstStyle/>
-          <a:p>
-            <a:pPr algn="ctr"/>
-          </a:p>
-        </p:txBody>
-      </p:sp>
-      <p:sp>
-        <p:nvSpPr>
-          <p:cNvPr id="63" name="TextBox 62"/>
+              <a:rPr sz="2300" b="1">
+                <a:solidFill>
+                  <a:srgbClr val="FFFFFF"/>
+                </a:solidFill>
+                <a:latin typeface="Arial"/>
+                <a:ea typeface="Arial"/>
+              </a:rPr>
+              <a:t>WAF를 낮추는 것이 곧 QLC 시장을 넓히는 일이고, 그 원가 우위가 수익성입니다</a:t>
+            </a:r>
+          </a:p>
+        </p:txBody>
+      </p:sp>
+      <p:sp>
+        <p:nvSpPr>
+          <p:cNvPr id="81" name="TextBox 80"/>
           <p:cNvSpPr txBox="1"/>
           <p:nvPr/>
         </p:nvSpPr>
         <p:spPr>
           <a:xfrm>
-            <a:off x="15133320" y="3127248"/>
-            <a:ext cx="2377439" cy="402336"/>
-          </a:xfrm>
-          <a:prstGeom prst="rect">
-            <a:avLst/>
-          </a:prstGeom>
-          <a:noFill/>
-        </p:spPr>
-        <p:txBody>
-          <a:bodyPr wrap="square" anchor="ctr" lIns="0" rIns="0" tIns="0" bIns="0">
-            <a:spAutoFit/>
-          </a:bodyPr>
-          <a:lstStyle/>
-          <a:p>
-            <a:pPr algn="ctr">
-              <a:lnSpc>
-                <a:spcPct val="110000"/>
-              </a:lnSpc>
-            </a:pPr>
-            <a:r>
-              <a:rPr sz="1500" b="0">
-                <a:solidFill>
-                  <a:srgbClr val="555555"/>
-                </a:solidFill>
-                <a:latin typeface="Arial"/>
-                <a:ea typeface="Arial"/>
-              </a:rPr>
-              <a:t>Confidential Storage</a:t>
-            </a:r>
-          </a:p>
-        </p:txBody>
-      </p:sp>
-      <p:cxnSp>
-        <p:nvCxnSpPr>
-          <p:cNvPr id="64" name="Connector 63"/>
-          <p:cNvCxnSpPr/>
-          <p:nvPr/>
-        </p:nvCxnSpPr>
-        <p:spPr>
-          <a:xfrm>
-            <a:off x="7168896" y="4041648"/>
-            <a:ext cx="10396728" cy="0"/>
-          </a:xfrm>
-          <a:prstGeom prst="line">
-            <a:avLst/>
-          </a:prstGeom>
-          <a:ln w="12700">
-            <a:solidFill>
-              <a:srgbClr val="555555"/>
-            </a:solidFill>
-            <a:prstDash val="dash"/>
-          </a:ln>
-        </p:spPr>
-        <p:style>
-          <a:lnRef idx="2">
-            <a:schemeClr val="accent1"/>
-          </a:lnRef>
-          <a:fillRef idx="0">
-            <a:schemeClr val="accent1"/>
-          </a:fillRef>
-          <a:effectRef idx="1">
-            <a:schemeClr val="accent1"/>
-          </a:effectRef>
-          <a:fontRef idx="minor">
-            <a:schemeClr val="tx1"/>
-          </a:fontRef>
-        </p:style>
-      </p:cxnSp>
-      <p:sp>
-        <p:nvSpPr>
-          <p:cNvPr id="65" name="TextBox 64"/>
-          <p:cNvSpPr txBox="1"/>
-          <p:nvPr/>
-        </p:nvSpPr>
-        <p:spPr>
-          <a:xfrm>
-            <a:off x="7168896" y="3712463"/>
-            <a:ext cx="2011680" cy="292608"/>
-          </a:xfrm>
-          <a:prstGeom prst="rect">
-            <a:avLst/>
-          </a:prstGeom>
-          <a:noFill/>
-        </p:spPr>
-        <p:txBody>
-          <a:bodyPr wrap="square" anchor="ctr" lIns="0" rIns="0" tIns="0" bIns="0">
-            <a:spAutoFit/>
-          </a:bodyPr>
-          <a:lstStyle/>
-          <a:p>
-            <a:pPr algn="l">
-              <a:lnSpc>
-                <a:spcPct val="110000"/>
-              </a:lnSpc>
-            </a:pPr>
-            <a:r>
-              <a:rPr sz="1500" b="1">
-                <a:solidFill>
-                  <a:srgbClr val="555555"/>
-                </a:solidFill>
-                <a:latin typeface="Arial"/>
-                <a:ea typeface="Arial"/>
-              </a:rPr>
-              <a:t>TLC 범용 정격 1</a:t>
-            </a:r>
-          </a:p>
-        </p:txBody>
-      </p:sp>
-      <p:sp>
-        <p:nvSpPr>
-          <p:cNvPr id="66" name="Rectangle 65"/>
-          <p:cNvSpPr/>
-          <p:nvPr/>
-        </p:nvSpPr>
-        <p:spPr>
-          <a:xfrm>
-            <a:off x="7717536" y="5547207"/>
-            <a:ext cx="1005840" cy="122072"/>
-          </a:xfrm>
-          <a:prstGeom prst="rect">
-            <a:avLst/>
-          </a:prstGeom>
-          <a:solidFill>
-            <a:srgbClr val="8A8A8A"/>
-          </a:solidFill>
-          <a:ln>
-            <a:noFill/>
-          </a:ln>
-          <a:effectLst/>
-        </p:spPr>
-        <p:style>
-          <a:lnRef idx="1">
-            <a:schemeClr val="accent1"/>
-          </a:lnRef>
-          <a:fillRef idx="3">
-            <a:schemeClr val="accent1"/>
-          </a:fillRef>
-          <a:effectRef idx="2">
-            <a:schemeClr val="accent1"/>
-          </a:effectRef>
-          <a:fontRef idx="minor">
-            <a:schemeClr val="lt1"/>
-          </a:fontRef>
-        </p:style>
-        <p:txBody>
-          <a:bodyPr rtlCol="0" anchor="ctr"/>
-          <a:lstStyle/>
-          <a:p>
-            <a:pPr algn="ctr"/>
-          </a:p>
-        </p:txBody>
-      </p:sp>
-      <p:sp>
-        <p:nvSpPr>
-          <p:cNvPr id="67" name="TextBox 66"/>
-          <p:cNvSpPr txBox="1"/>
-          <p:nvPr/>
-        </p:nvSpPr>
-        <p:spPr>
-          <a:xfrm>
-            <a:off x="7351775" y="5126583"/>
-            <a:ext cx="1737360" cy="384048"/>
-          </a:xfrm>
-          <a:prstGeom prst="rect">
-            <a:avLst/>
-          </a:prstGeom>
-          <a:noFill/>
-        </p:spPr>
-        <p:txBody>
-          <a:bodyPr wrap="square" anchor="ctr" lIns="0" rIns="0" tIns="0" bIns="0">
-            <a:spAutoFit/>
-          </a:bodyPr>
-          <a:lstStyle/>
-          <a:p>
-            <a:pPr algn="ctr">
-              <a:lnSpc>
-                <a:spcPct val="110000"/>
-              </a:lnSpc>
-            </a:pPr>
-            <a:r>
-              <a:rPr sz="2000" b="1">
-                <a:solidFill>
-                  <a:srgbClr val="1A1A1A"/>
-                </a:solidFill>
-                <a:latin typeface="Arial"/>
-                <a:ea typeface="Arial"/>
-              </a:rPr>
-              <a:t>0.075</a:t>
-            </a:r>
-          </a:p>
-        </p:txBody>
-      </p:sp>
-      <p:sp>
-        <p:nvSpPr>
-          <p:cNvPr id="68" name="TextBox 67"/>
-          <p:cNvSpPr txBox="1"/>
-          <p:nvPr/>
-        </p:nvSpPr>
-        <p:spPr>
-          <a:xfrm>
-            <a:off x="7168896" y="5705856"/>
-            <a:ext cx="2103120" cy="310896"/>
-          </a:xfrm>
-          <a:prstGeom prst="rect">
-            <a:avLst/>
-          </a:prstGeom>
-          <a:noFill/>
-        </p:spPr>
-        <p:txBody>
-          <a:bodyPr wrap="square" anchor="ctr" lIns="0" rIns="0" tIns="0" bIns="0">
-            <a:spAutoFit/>
-          </a:bodyPr>
-          <a:lstStyle/>
-          <a:p>
-            <a:pPr algn="ctr">
-              <a:lnSpc>
-                <a:spcPct val="110000"/>
-              </a:lnSpc>
-            </a:pPr>
-            <a:r>
-              <a:rPr sz="1600" b="0">
-                <a:solidFill>
-                  <a:srgbClr val="555555"/>
-                </a:solidFill>
-                <a:latin typeface="Arial"/>
-                <a:ea typeface="Arial"/>
-              </a:rPr>
-              <a:t>4KB 랜덤 쓰기</a:t>
-            </a:r>
-          </a:p>
-        </p:txBody>
-      </p:sp>
-      <p:sp>
-        <p:nvSpPr>
-          <p:cNvPr id="69" name="Rectangle 68"/>
-          <p:cNvSpPr/>
-          <p:nvPr/>
-        </p:nvSpPr>
-        <p:spPr>
-          <a:xfrm>
-            <a:off x="10769346" y="5180990"/>
-            <a:ext cx="1280160" cy="488289"/>
-          </a:xfrm>
-          <a:prstGeom prst="rect">
-            <a:avLst/>
-          </a:prstGeom>
-          <a:solidFill>
-            <a:srgbClr val="3C5AC8"/>
-          </a:solidFill>
-          <a:ln>
-            <a:noFill/>
-          </a:ln>
-          <a:effectLst/>
-        </p:spPr>
-        <p:style>
-          <a:lnRef idx="1">
-            <a:schemeClr val="accent1"/>
-          </a:lnRef>
-          <a:fillRef idx="3">
-            <a:schemeClr val="accent1"/>
-          </a:fillRef>
-          <a:effectRef idx="2">
-            <a:schemeClr val="accent1"/>
-          </a:effectRef>
-          <a:fontRef idx="minor">
-            <a:schemeClr val="lt1"/>
-          </a:fontRef>
-        </p:style>
-        <p:txBody>
-          <a:bodyPr rtlCol="0" anchor="ctr"/>
-          <a:lstStyle/>
-          <a:p>
-            <a:pPr algn="ctr"/>
-          </a:p>
-        </p:txBody>
-      </p:sp>
-      <p:sp>
-        <p:nvSpPr>
-          <p:cNvPr id="70" name="TextBox 69"/>
-          <p:cNvSpPr txBox="1"/>
-          <p:nvPr/>
-        </p:nvSpPr>
-        <p:spPr>
-          <a:xfrm>
-            <a:off x="10403586" y="4760366"/>
-            <a:ext cx="2011680" cy="384048"/>
-          </a:xfrm>
-          <a:prstGeom prst="rect">
-            <a:avLst/>
-          </a:prstGeom>
-          <a:noFill/>
-        </p:spPr>
-        <p:txBody>
-          <a:bodyPr wrap="square" anchor="ctr" lIns="0" rIns="0" tIns="0" bIns="0">
-            <a:spAutoFit/>
-          </a:bodyPr>
-          <a:lstStyle/>
-          <a:p>
-            <a:pPr algn="ctr">
-              <a:lnSpc>
-                <a:spcPct val="110000"/>
-              </a:lnSpc>
-            </a:pPr>
-            <a:r>
-              <a:rPr sz="2400" b="1">
-                <a:solidFill>
-                  <a:srgbClr val="1428A0"/>
-                </a:solidFill>
-                <a:latin typeface="Arial"/>
-                <a:ea typeface="Arial"/>
-              </a:rPr>
-              <a:t>0.3</a:t>
-            </a:r>
-          </a:p>
-        </p:txBody>
-      </p:sp>
-      <p:sp>
-        <p:nvSpPr>
-          <p:cNvPr id="71" name="TextBox 70"/>
-          <p:cNvSpPr txBox="1"/>
-          <p:nvPr/>
-        </p:nvSpPr>
-        <p:spPr>
-          <a:xfrm>
-            <a:off x="9400032" y="5705856"/>
-            <a:ext cx="4018788" cy="310896"/>
-          </a:xfrm>
-          <a:prstGeom prst="rect">
-            <a:avLst/>
-          </a:prstGeom>
-          <a:noFill/>
-        </p:spPr>
-        <p:txBody>
-          <a:bodyPr wrap="square" anchor="ctr" lIns="0" rIns="0" tIns="0" bIns="0">
-            <a:spAutoFit/>
-          </a:bodyPr>
-          <a:lstStyle/>
-          <a:p>
-            <a:pPr algn="ctr">
-              <a:lnSpc>
-                <a:spcPct val="110000"/>
-              </a:lnSpc>
-            </a:pPr>
-            <a:r>
-              <a:rPr sz="1600" b="1">
-                <a:solidFill>
-                  <a:srgbClr val="1428A0"/>
-                </a:solidFill>
-                <a:latin typeface="Arial"/>
-                <a:ea typeface="Arial"/>
-              </a:rPr>
-              <a:t>큰 단위로 모아 쓰기</a:t>
-            </a:r>
-          </a:p>
-        </p:txBody>
-      </p:sp>
-      <p:sp>
-        <p:nvSpPr>
-          <p:cNvPr id="72" name="Right Arrow 71"/>
-          <p:cNvSpPr/>
-          <p:nvPr/>
-        </p:nvSpPr>
-        <p:spPr>
-          <a:xfrm>
-            <a:off x="9180576" y="5102352"/>
-            <a:ext cx="274320" cy="274320"/>
-          </a:xfrm>
-          <a:prstGeom prst="rightArrow">
-            <a:avLst/>
-          </a:prstGeom>
-          <a:solidFill>
-            <a:srgbClr val="AAB8E8"/>
-          </a:solidFill>
-          <a:ln>
-            <a:noFill/>
-          </a:ln>
-          <a:effectLst/>
-        </p:spPr>
-        <p:style>
-          <a:lnRef idx="1">
-            <a:schemeClr val="accent1"/>
-          </a:lnRef>
-          <a:fillRef idx="3">
-            <a:schemeClr val="accent1"/>
-          </a:fillRef>
-          <a:effectRef idx="2">
-            <a:schemeClr val="accent1"/>
-          </a:effectRef>
-          <a:fontRef idx="minor">
-            <a:schemeClr val="lt1"/>
-          </a:fontRef>
-        </p:style>
-        <p:txBody>
-          <a:bodyPr rtlCol="0" anchor="ctr"/>
-          <a:lstStyle/>
-          <a:p>
-            <a:pPr algn="ctr"/>
-          </a:p>
-        </p:txBody>
-      </p:sp>
-      <p:sp>
-        <p:nvSpPr>
-          <p:cNvPr id="73" name="Rectangle 72"/>
-          <p:cNvSpPr/>
-          <p:nvPr/>
-        </p:nvSpPr>
-        <p:spPr>
-          <a:xfrm>
-            <a:off x="14916150" y="4041648"/>
-            <a:ext cx="1280160" cy="1627632"/>
-          </a:xfrm>
-          <a:prstGeom prst="rect">
-            <a:avLst/>
-          </a:prstGeom>
-          <a:solidFill>
-            <a:srgbClr val="1428A0"/>
-          </a:solidFill>
-          <a:ln>
-            <a:noFill/>
-          </a:ln>
-          <a:effectLst/>
-        </p:spPr>
-        <p:style>
-          <a:lnRef idx="1">
-            <a:schemeClr val="accent1"/>
-          </a:lnRef>
-          <a:fillRef idx="3">
-            <a:schemeClr val="accent1"/>
-          </a:fillRef>
-          <a:effectRef idx="2">
-            <a:schemeClr val="accent1"/>
-          </a:effectRef>
-          <a:fontRef idx="minor">
-            <a:schemeClr val="lt1"/>
-          </a:fontRef>
-        </p:style>
-        <p:txBody>
-          <a:bodyPr rtlCol="0" anchor="ctr"/>
-          <a:lstStyle/>
-          <a:p>
-            <a:pPr algn="ctr"/>
-          </a:p>
-        </p:txBody>
-      </p:sp>
-      <p:sp>
-        <p:nvSpPr>
-          <p:cNvPr id="74" name="TextBox 73"/>
-          <p:cNvSpPr txBox="1"/>
-          <p:nvPr/>
-        </p:nvSpPr>
-        <p:spPr>
-          <a:xfrm>
-            <a:off x="14916150" y="4096511"/>
-            <a:ext cx="1280160" cy="420624"/>
-          </a:xfrm>
-          <a:prstGeom prst="rect">
-            <a:avLst/>
-          </a:prstGeom>
-          <a:noFill/>
-        </p:spPr>
-        <p:txBody>
-          <a:bodyPr wrap="square" anchor="ctr" lIns="0" rIns="0" tIns="0" bIns="0">
-            <a:spAutoFit/>
-          </a:bodyPr>
-          <a:lstStyle/>
-          <a:p>
-            <a:pPr algn="ctr">
-              <a:lnSpc>
-                <a:spcPct val="110000"/>
-              </a:lnSpc>
-            </a:pPr>
-            <a:r>
-              <a:rPr sz="2400" b="1">
-                <a:solidFill>
-                  <a:srgbClr val="FFFFFF"/>
-                </a:solidFill>
-                <a:latin typeface="Arial"/>
-                <a:ea typeface="Arial"/>
-              </a:rPr>
-              <a:t>1.0</a:t>
-            </a:r>
-          </a:p>
-        </p:txBody>
-      </p:sp>
-      <p:sp>
-        <p:nvSpPr>
-          <p:cNvPr id="75" name="TextBox 74"/>
-          <p:cNvSpPr txBox="1"/>
-          <p:nvPr/>
-        </p:nvSpPr>
-        <p:spPr>
-          <a:xfrm>
-            <a:off x="13546836" y="5705856"/>
-            <a:ext cx="4018788" cy="310896"/>
-          </a:xfrm>
-          <a:prstGeom prst="rect">
-            <a:avLst/>
-          </a:prstGeom>
-          <a:noFill/>
-        </p:spPr>
-        <p:txBody>
-          <a:bodyPr wrap="square" anchor="ctr" lIns="0" rIns="0" tIns="0" bIns="0">
-            <a:spAutoFit/>
-          </a:bodyPr>
-          <a:lstStyle/>
-          <a:p>
-            <a:pPr algn="ctr">
-              <a:lnSpc>
-                <a:spcPct val="110000"/>
-              </a:lnSpc>
-            </a:pPr>
-            <a:r>
-              <a:rPr sz="1600" b="1">
-                <a:solidFill>
-                  <a:srgbClr val="1428A0"/>
-                </a:solidFill>
-                <a:latin typeface="Arial"/>
-                <a:ea typeface="Arial"/>
-              </a:rPr>
-              <a:t>수명별 순차 쓰기</a:t>
-            </a:r>
-          </a:p>
-        </p:txBody>
-      </p:sp>
-      <p:sp>
-        <p:nvSpPr>
-          <p:cNvPr id="76" name="Right Arrow 75"/>
-          <p:cNvSpPr/>
-          <p:nvPr/>
-        </p:nvSpPr>
-        <p:spPr>
-          <a:xfrm>
-            <a:off x="13327380" y="5102352"/>
-            <a:ext cx="274320" cy="274320"/>
-          </a:xfrm>
-          <a:prstGeom prst="rightArrow">
-            <a:avLst/>
-          </a:prstGeom>
-          <a:solidFill>
-            <a:srgbClr val="AAB8E8"/>
-          </a:solidFill>
-          <a:ln>
-            <a:noFill/>
-          </a:ln>
-          <a:effectLst/>
-        </p:spPr>
-        <p:style>
-          <a:lnRef idx="1">
-            <a:schemeClr val="accent1"/>
-          </a:lnRef>
-          <a:fillRef idx="3">
-            <a:schemeClr val="accent1"/>
-          </a:fillRef>
-          <a:effectRef idx="2">
-            <a:schemeClr val="accent1"/>
-          </a:effectRef>
-          <a:fontRef idx="minor">
-            <a:schemeClr val="lt1"/>
-          </a:fontRef>
-        </p:style>
-        <p:txBody>
-          <a:bodyPr rtlCol="0" anchor="ctr"/>
-          <a:lstStyle/>
-          <a:p>
-            <a:pPr algn="ctr"/>
-          </a:p>
-        </p:txBody>
-      </p:sp>
-      <p:sp>
-        <p:nvSpPr>
-          <p:cNvPr id="77" name="TextBox 76"/>
-          <p:cNvSpPr txBox="1"/>
-          <p:nvPr/>
-        </p:nvSpPr>
-        <p:spPr>
-          <a:xfrm>
-            <a:off x="9272016" y="3712463"/>
-            <a:ext cx="4091939" cy="292608"/>
-          </a:xfrm>
-          <a:prstGeom prst="rect">
-            <a:avLst/>
-          </a:prstGeom>
-          <a:noFill/>
-        </p:spPr>
-        <p:txBody>
-          <a:bodyPr wrap="square" anchor="ctr" lIns="0" rIns="0" tIns="0" bIns="0">
-            <a:spAutoFit/>
-          </a:bodyPr>
-          <a:lstStyle/>
-          <a:p>
-            <a:pPr algn="r">
-              <a:lnSpc>
-                <a:spcPct val="110000"/>
-              </a:lnSpc>
-            </a:pPr>
-            <a:r>
-              <a:rPr sz="1500" b="0">
-                <a:solidFill>
-                  <a:srgbClr val="555555"/>
-                </a:solidFill>
-                <a:latin typeface="Arial"/>
-                <a:ea typeface="Arial"/>
-              </a:rPr>
-              <a:t>같은 QLC 정격, Micron 6600 ION</a:t>
-            </a:r>
-          </a:p>
-        </p:txBody>
-      </p:sp>
-      <p:sp>
-        <p:nvSpPr>
-          <p:cNvPr id="78" name="Rectangle 77"/>
-          <p:cNvSpPr/>
-          <p:nvPr/>
-        </p:nvSpPr>
-        <p:spPr>
-          <a:xfrm>
-            <a:off x="7443216" y="6291072"/>
-            <a:ext cx="201168" cy="201168"/>
-          </a:xfrm>
-          <a:prstGeom prst="rect">
-            <a:avLst/>
-          </a:prstGeom>
-          <a:solidFill>
-            <a:srgbClr val="3C5AC8"/>
-          </a:solidFill>
-          <a:ln>
-            <a:noFill/>
-          </a:ln>
-          <a:effectLst/>
-        </p:spPr>
-        <p:style>
-          <a:lnRef idx="1">
-            <a:schemeClr val="accent1"/>
-          </a:lnRef>
-          <a:fillRef idx="3">
-            <a:schemeClr val="accent1"/>
-          </a:fillRef>
-          <a:effectRef idx="2">
-            <a:schemeClr val="accent1"/>
-          </a:effectRef>
-          <a:fontRef idx="minor">
-            <a:schemeClr val="lt1"/>
-          </a:fontRef>
-        </p:style>
-        <p:txBody>
-          <a:bodyPr rtlCol="0" anchor="ctr"/>
-          <a:lstStyle/>
-          <a:p>
-            <a:pPr algn="ctr"/>
-          </a:p>
-        </p:txBody>
-      </p:sp>
-      <p:sp>
-        <p:nvSpPr>
-          <p:cNvPr id="79" name="Rectangle 78"/>
-          <p:cNvSpPr/>
-          <p:nvPr/>
-        </p:nvSpPr>
-        <p:spPr>
-          <a:xfrm>
-            <a:off x="7717536" y="6291072"/>
-            <a:ext cx="201168" cy="201168"/>
-          </a:xfrm>
-          <a:prstGeom prst="rect">
-            <a:avLst/>
-          </a:prstGeom>
-          <a:solidFill>
-            <a:srgbClr val="8A8A8A"/>
-          </a:solidFill>
-          <a:ln>
-            <a:noFill/>
-          </a:ln>
-          <a:effectLst/>
-        </p:spPr>
-        <p:style>
-          <a:lnRef idx="1">
-            <a:schemeClr val="accent1"/>
-          </a:lnRef>
-          <a:fillRef idx="3">
-            <a:schemeClr val="accent1"/>
-          </a:fillRef>
-          <a:effectRef idx="2">
-            <a:schemeClr val="accent1"/>
-          </a:effectRef>
-          <a:fontRef idx="minor">
-            <a:schemeClr val="lt1"/>
-          </a:fontRef>
-        </p:style>
-        <p:txBody>
-          <a:bodyPr rtlCol="0" anchor="ctr"/>
-          <a:lstStyle/>
-          <a:p>
-            <a:pPr algn="ctr"/>
-          </a:p>
-        </p:txBody>
-      </p:sp>
-      <p:sp>
-        <p:nvSpPr>
-          <p:cNvPr id="80" name="Rectangle 79"/>
-          <p:cNvSpPr/>
-          <p:nvPr/>
-        </p:nvSpPr>
-        <p:spPr>
-          <a:xfrm>
-            <a:off x="7991856" y="6291072"/>
-            <a:ext cx="201168" cy="201168"/>
-          </a:xfrm>
-          <a:prstGeom prst="rect">
-            <a:avLst/>
-          </a:prstGeom>
-          <a:solidFill>
-            <a:srgbClr val="AAB8E8"/>
-          </a:solidFill>
-          <a:ln>
-            <a:noFill/>
-          </a:ln>
-          <a:effectLst/>
-        </p:spPr>
-        <p:style>
-          <a:lnRef idx="1">
-            <a:schemeClr val="accent1"/>
-          </a:lnRef>
-          <a:fillRef idx="3">
-            <a:schemeClr val="accent1"/>
-          </a:fillRef>
-          <a:effectRef idx="2">
-            <a:schemeClr val="accent1"/>
-          </a:effectRef>
-          <a:fontRef idx="minor">
-            <a:schemeClr val="lt1"/>
-          </a:fontRef>
-        </p:style>
-        <p:txBody>
-          <a:bodyPr rtlCol="0" anchor="ctr"/>
-          <a:lstStyle/>
-          <a:p>
-            <a:pPr algn="ctr"/>
-          </a:p>
-        </p:txBody>
-      </p:sp>
-      <p:sp>
-        <p:nvSpPr>
-          <p:cNvPr id="81" name="Rectangle 80"/>
-          <p:cNvSpPr/>
-          <p:nvPr/>
-        </p:nvSpPr>
-        <p:spPr>
-          <a:xfrm>
-            <a:off x="8266176" y="6291072"/>
-            <a:ext cx="201168" cy="201168"/>
-          </a:xfrm>
-          <a:prstGeom prst="rect">
-            <a:avLst/>
-          </a:prstGeom>
-          <a:solidFill>
-            <a:srgbClr val="8A8A8A"/>
-          </a:solidFill>
-          <a:ln>
-            <a:noFill/>
-          </a:ln>
-          <a:effectLst/>
-        </p:spPr>
-        <p:style>
-          <a:lnRef idx="1">
-            <a:schemeClr val="accent1"/>
-          </a:lnRef>
-          <a:fillRef idx="3">
-            <a:schemeClr val="accent1"/>
-          </a:fillRef>
-          <a:effectRef idx="2">
-            <a:schemeClr val="accent1"/>
-          </a:effectRef>
-          <a:fontRef idx="minor">
-            <a:schemeClr val="lt1"/>
-          </a:fontRef>
-        </p:style>
-        <p:txBody>
-          <a:bodyPr rtlCol="0" anchor="ctr"/>
-          <a:lstStyle/>
-          <a:p>
-            <a:pPr algn="ctr"/>
-          </a:p>
-        </p:txBody>
-      </p:sp>
-      <p:sp>
-        <p:nvSpPr>
-          <p:cNvPr id="82" name="Rectangle 81"/>
-          <p:cNvSpPr/>
-          <p:nvPr/>
-        </p:nvSpPr>
-        <p:spPr>
-          <a:xfrm>
-            <a:off x="8540496" y="6291072"/>
-            <a:ext cx="201168" cy="201168"/>
-          </a:xfrm>
-          <a:prstGeom prst="rect">
-            <a:avLst/>
-          </a:prstGeom>
-          <a:solidFill>
-            <a:srgbClr val="3C5AC8"/>
-          </a:solidFill>
-          <a:ln>
-            <a:noFill/>
-          </a:ln>
-          <a:effectLst/>
-        </p:spPr>
-        <p:style>
-          <a:lnRef idx="1">
-            <a:schemeClr val="accent1"/>
-          </a:lnRef>
-          <a:fillRef idx="3">
-            <a:schemeClr val="accent1"/>
-          </a:fillRef>
-          <a:effectRef idx="2">
-            <a:schemeClr val="accent1"/>
-          </a:effectRef>
-          <a:fontRef idx="minor">
-            <a:schemeClr val="lt1"/>
-          </a:fontRef>
-        </p:style>
-        <p:txBody>
-          <a:bodyPr rtlCol="0" anchor="ctr"/>
-          <a:lstStyle/>
-          <a:p>
-            <a:pPr algn="ctr"/>
-          </a:p>
-        </p:txBody>
-      </p:sp>
-      <p:sp>
-        <p:nvSpPr>
-          <p:cNvPr id="83" name="Rectangle 82"/>
-          <p:cNvSpPr/>
-          <p:nvPr/>
-        </p:nvSpPr>
-        <p:spPr>
-          <a:xfrm>
-            <a:off x="8814816" y="6291072"/>
-            <a:ext cx="201168" cy="201168"/>
-          </a:xfrm>
-          <a:prstGeom prst="rect">
-            <a:avLst/>
-          </a:prstGeom>
-          <a:solidFill>
-            <a:srgbClr val="AAB8E8"/>
-          </a:solidFill>
-          <a:ln>
-            <a:noFill/>
-          </a:ln>
-          <a:effectLst/>
-        </p:spPr>
-        <p:style>
-          <a:lnRef idx="1">
-            <a:schemeClr val="accent1"/>
-          </a:lnRef>
-          <a:fillRef idx="3">
-            <a:schemeClr val="accent1"/>
-          </a:fillRef>
-          <a:effectRef idx="2">
-            <a:schemeClr val="accent1"/>
-          </a:effectRef>
-          <a:fontRef idx="minor">
-            <a:schemeClr val="lt1"/>
-          </a:fontRef>
-        </p:style>
-        <p:txBody>
-          <a:bodyPr rtlCol="0" anchor="ctr"/>
-          <a:lstStyle/>
-          <a:p>
-            <a:pPr algn="ctr"/>
-          </a:p>
-        </p:txBody>
-      </p:sp>
-      <p:sp>
-        <p:nvSpPr>
-          <p:cNvPr id="84" name="Rectangle 83"/>
-          <p:cNvSpPr/>
-          <p:nvPr/>
-        </p:nvSpPr>
-        <p:spPr>
-          <a:xfrm>
-            <a:off x="7443216" y="6565392"/>
-            <a:ext cx="201168" cy="201168"/>
-          </a:xfrm>
-          <a:prstGeom prst="rect">
-            <a:avLst/>
-          </a:prstGeom>
-          <a:solidFill>
-            <a:srgbClr val="8A8A8A"/>
-          </a:solidFill>
-          <a:ln>
-            <a:noFill/>
-          </a:ln>
-          <a:effectLst/>
-        </p:spPr>
-        <p:style>
-          <a:lnRef idx="1">
-            <a:schemeClr val="accent1"/>
-          </a:lnRef>
-          <a:fillRef idx="3">
-            <a:schemeClr val="accent1"/>
-          </a:fillRef>
-          <a:effectRef idx="2">
-            <a:schemeClr val="accent1"/>
-          </a:effectRef>
-          <a:fontRef idx="minor">
-            <a:schemeClr val="lt1"/>
-          </a:fontRef>
-        </p:style>
-        <p:txBody>
-          <a:bodyPr rtlCol="0" anchor="ctr"/>
-          <a:lstStyle/>
-          <a:p>
-            <a:pPr algn="ctr"/>
-          </a:p>
-        </p:txBody>
-      </p:sp>
-      <p:sp>
-        <p:nvSpPr>
-          <p:cNvPr id="85" name="Rectangle 84"/>
-          <p:cNvSpPr/>
-          <p:nvPr/>
-        </p:nvSpPr>
-        <p:spPr>
-          <a:xfrm>
-            <a:off x="7717536" y="6565392"/>
-            <a:ext cx="201168" cy="201168"/>
-          </a:xfrm>
-          <a:prstGeom prst="rect">
-            <a:avLst/>
-          </a:prstGeom>
-          <a:solidFill>
-            <a:srgbClr val="3C5AC8"/>
-          </a:solidFill>
-          <a:ln>
-            <a:noFill/>
-          </a:ln>
-          <a:effectLst/>
-        </p:spPr>
-        <p:style>
-          <a:lnRef idx="1">
-            <a:schemeClr val="accent1"/>
-          </a:lnRef>
-          <a:fillRef idx="3">
-            <a:schemeClr val="accent1"/>
-          </a:fillRef>
-          <a:effectRef idx="2">
-            <a:schemeClr val="accent1"/>
-          </a:effectRef>
-          <a:fontRef idx="minor">
-            <a:schemeClr val="lt1"/>
-          </a:fontRef>
-        </p:style>
-        <p:txBody>
-          <a:bodyPr rtlCol="0" anchor="ctr"/>
-          <a:lstStyle/>
-          <a:p>
-            <a:pPr algn="ctr"/>
-          </a:p>
-        </p:txBody>
-      </p:sp>
-      <p:sp>
-        <p:nvSpPr>
-          <p:cNvPr id="86" name="Rectangle 85"/>
-          <p:cNvSpPr/>
-          <p:nvPr/>
-        </p:nvSpPr>
-        <p:spPr>
-          <a:xfrm>
-            <a:off x="7991856" y="6565392"/>
-            <a:ext cx="201168" cy="201168"/>
-          </a:xfrm>
-          <a:prstGeom prst="rect">
-            <a:avLst/>
-          </a:prstGeom>
-          <a:solidFill>
-            <a:srgbClr val="AAB8E8"/>
-          </a:solidFill>
-          <a:ln>
-            <a:noFill/>
-          </a:ln>
-          <a:effectLst/>
-        </p:spPr>
-        <p:style>
-          <a:lnRef idx="1">
-            <a:schemeClr val="accent1"/>
-          </a:lnRef>
-          <a:fillRef idx="3">
-            <a:schemeClr val="accent1"/>
-          </a:fillRef>
-          <a:effectRef idx="2">
-            <a:schemeClr val="accent1"/>
-          </a:effectRef>
-          <a:fontRef idx="minor">
-            <a:schemeClr val="lt1"/>
-          </a:fontRef>
-        </p:style>
-        <p:txBody>
-          <a:bodyPr rtlCol="0" anchor="ctr"/>
-          <a:lstStyle/>
-          <a:p>
-            <a:pPr algn="ctr"/>
-          </a:p>
-        </p:txBody>
-      </p:sp>
-      <p:sp>
-        <p:nvSpPr>
-          <p:cNvPr id="87" name="Rectangle 86"/>
-          <p:cNvSpPr/>
-          <p:nvPr/>
-        </p:nvSpPr>
-        <p:spPr>
-          <a:xfrm>
-            <a:off x="8266176" y="6565392"/>
-            <a:ext cx="201168" cy="201168"/>
-          </a:xfrm>
-          <a:prstGeom prst="rect">
-            <a:avLst/>
-          </a:prstGeom>
-          <a:solidFill>
-            <a:srgbClr val="8A8A8A"/>
-          </a:solidFill>
-          <a:ln>
-            <a:noFill/>
-          </a:ln>
-          <a:effectLst/>
-        </p:spPr>
-        <p:style>
-          <a:lnRef idx="1">
-            <a:schemeClr val="accent1"/>
-          </a:lnRef>
-          <a:fillRef idx="3">
-            <a:schemeClr val="accent1"/>
-          </a:fillRef>
-          <a:effectRef idx="2">
-            <a:schemeClr val="accent1"/>
-          </a:effectRef>
-          <a:fontRef idx="minor">
-            <a:schemeClr val="lt1"/>
-          </a:fontRef>
-        </p:style>
-        <p:txBody>
-          <a:bodyPr rtlCol="0" anchor="ctr"/>
-          <a:lstStyle/>
-          <a:p>
-            <a:pPr algn="ctr"/>
-          </a:p>
-        </p:txBody>
-      </p:sp>
-      <p:sp>
-        <p:nvSpPr>
-          <p:cNvPr id="88" name="Rectangle 87"/>
-          <p:cNvSpPr/>
-          <p:nvPr/>
-        </p:nvSpPr>
-        <p:spPr>
-          <a:xfrm>
-            <a:off x="8540496" y="6565392"/>
-            <a:ext cx="201168" cy="201168"/>
-          </a:xfrm>
-          <a:prstGeom prst="rect">
-            <a:avLst/>
-          </a:prstGeom>
-          <a:solidFill>
-            <a:srgbClr val="3C5AC8"/>
-          </a:solidFill>
-          <a:ln>
-            <a:noFill/>
-          </a:ln>
-          <a:effectLst/>
-        </p:spPr>
-        <p:style>
-          <a:lnRef idx="1">
-            <a:schemeClr val="accent1"/>
-          </a:lnRef>
-          <a:fillRef idx="3">
-            <a:schemeClr val="accent1"/>
-          </a:fillRef>
-          <a:effectRef idx="2">
-            <a:schemeClr val="accent1"/>
-          </a:effectRef>
-          <a:fontRef idx="minor">
-            <a:schemeClr val="lt1"/>
-          </a:fontRef>
-        </p:style>
-        <p:txBody>
-          <a:bodyPr rtlCol="0" anchor="ctr"/>
-          <a:lstStyle/>
-          <a:p>
-            <a:pPr algn="ctr"/>
-          </a:p>
-        </p:txBody>
-      </p:sp>
-      <p:sp>
-        <p:nvSpPr>
-          <p:cNvPr id="89" name="Rectangle 88"/>
-          <p:cNvSpPr/>
-          <p:nvPr/>
-        </p:nvSpPr>
-        <p:spPr>
-          <a:xfrm>
-            <a:off x="8814816" y="6565392"/>
-            <a:ext cx="201168" cy="201168"/>
-          </a:xfrm>
-          <a:prstGeom prst="rect">
-            <a:avLst/>
-          </a:prstGeom>
-          <a:solidFill>
-            <a:srgbClr val="8A8A8A"/>
-          </a:solidFill>
-          <a:ln>
-            <a:noFill/>
-          </a:ln>
-          <a:effectLst/>
-        </p:spPr>
-        <p:style>
-          <a:lnRef idx="1">
-            <a:schemeClr val="accent1"/>
-          </a:lnRef>
-          <a:fillRef idx="3">
-            <a:schemeClr val="accent1"/>
-          </a:fillRef>
-          <a:effectRef idx="2">
-            <a:schemeClr val="accent1"/>
-          </a:effectRef>
-          <a:fontRef idx="minor">
-            <a:schemeClr val="lt1"/>
-          </a:fontRef>
-        </p:style>
-        <p:txBody>
-          <a:bodyPr rtlCol="0" anchor="ctr"/>
-          <a:lstStyle/>
-          <a:p>
-            <a:pPr algn="ctr"/>
-          </a:p>
-        </p:txBody>
-      </p:sp>
-      <p:sp>
-        <p:nvSpPr>
-          <p:cNvPr id="90" name="TextBox 89"/>
-          <p:cNvSpPr txBox="1"/>
-          <p:nvPr/>
-        </p:nvSpPr>
-        <p:spPr>
-          <a:xfrm>
-            <a:off x="7168896" y="6894576"/>
-            <a:ext cx="2103120" cy="292608"/>
-          </a:xfrm>
-          <a:prstGeom prst="rect">
-            <a:avLst/>
-          </a:prstGeom>
-          <a:noFill/>
-        </p:spPr>
-        <p:txBody>
-          <a:bodyPr wrap="square" anchor="ctr" lIns="0" rIns="0" tIns="0" bIns="0">
-            <a:spAutoFit/>
-          </a:bodyPr>
-          <a:lstStyle/>
-          <a:p>
-            <a:pPr algn="ctr">
-              <a:lnSpc>
-                <a:spcPct val="110000"/>
-              </a:lnSpc>
-            </a:pPr>
-            <a:r>
-              <a:rPr sz="1500" b="0">
-                <a:solidFill>
-                  <a:srgbClr val="555555"/>
-                </a:solidFill>
-                <a:latin typeface="Arial"/>
-                <a:ea typeface="Arial"/>
-              </a:rPr>
-              <a:t>섞인 수명 · 작은 쓰기</a:t>
-            </a:r>
-          </a:p>
-        </p:txBody>
-      </p:sp>
-      <p:sp>
-        <p:nvSpPr>
-          <p:cNvPr id="91" name="Rectangle 90"/>
-          <p:cNvSpPr/>
-          <p:nvPr/>
-        </p:nvSpPr>
-        <p:spPr>
-          <a:xfrm>
-            <a:off x="9528048" y="6309360"/>
-            <a:ext cx="146304" cy="146304"/>
-          </a:xfrm>
-          <a:prstGeom prst="rect">
-            <a:avLst/>
-          </a:prstGeom>
-          <a:solidFill>
-            <a:srgbClr val="8A8A8A"/>
-          </a:solidFill>
-          <a:ln>
-            <a:noFill/>
-          </a:ln>
-          <a:effectLst/>
-        </p:spPr>
-        <p:style>
-          <a:lnRef idx="1">
-            <a:schemeClr val="accent1"/>
-          </a:lnRef>
-          <a:fillRef idx="3">
-            <a:schemeClr val="accent1"/>
-          </a:fillRef>
-          <a:effectRef idx="2">
-            <a:schemeClr val="accent1"/>
-          </a:effectRef>
-          <a:fontRef idx="minor">
-            <a:schemeClr val="lt1"/>
-          </a:fontRef>
-        </p:style>
-        <p:txBody>
-          <a:bodyPr rtlCol="0" anchor="ctr"/>
-          <a:lstStyle/>
-          <a:p>
-            <a:pPr algn="ctr"/>
-          </a:p>
-        </p:txBody>
-      </p:sp>
-      <p:sp>
-        <p:nvSpPr>
-          <p:cNvPr id="92" name="Rectangle 91"/>
-          <p:cNvSpPr/>
-          <p:nvPr/>
-        </p:nvSpPr>
-        <p:spPr>
-          <a:xfrm>
-            <a:off x="9729216" y="6309360"/>
-            <a:ext cx="146304" cy="146304"/>
-          </a:xfrm>
-          <a:prstGeom prst="rect">
-            <a:avLst/>
-          </a:prstGeom>
-          <a:solidFill>
-            <a:srgbClr val="8A8A8A"/>
-          </a:solidFill>
-          <a:ln>
-            <a:noFill/>
-          </a:ln>
-          <a:effectLst/>
-        </p:spPr>
-        <p:style>
-          <a:lnRef idx="1">
-            <a:schemeClr val="accent1"/>
-          </a:lnRef>
-          <a:fillRef idx="3">
-            <a:schemeClr val="accent1"/>
-          </a:fillRef>
-          <a:effectRef idx="2">
-            <a:schemeClr val="accent1"/>
-          </a:effectRef>
-          <a:fontRef idx="minor">
-            <a:schemeClr val="lt1"/>
-          </a:fontRef>
-        </p:style>
-        <p:txBody>
-          <a:bodyPr rtlCol="0" anchor="ctr"/>
-          <a:lstStyle/>
-          <a:p>
-            <a:pPr algn="ctr"/>
-          </a:p>
-        </p:txBody>
-      </p:sp>
-      <p:sp>
-        <p:nvSpPr>
-          <p:cNvPr id="93" name="Rectangle 92"/>
-          <p:cNvSpPr/>
-          <p:nvPr/>
-        </p:nvSpPr>
-        <p:spPr>
-          <a:xfrm>
-            <a:off x="9930384" y="6309360"/>
-            <a:ext cx="146304" cy="146304"/>
-          </a:xfrm>
-          <a:prstGeom prst="rect">
-            <a:avLst/>
-          </a:prstGeom>
-          <a:solidFill>
-            <a:srgbClr val="8A8A8A"/>
-          </a:solidFill>
-          <a:ln>
-            <a:noFill/>
-          </a:ln>
-          <a:effectLst/>
-        </p:spPr>
-        <p:style>
-          <a:lnRef idx="1">
-            <a:schemeClr val="accent1"/>
-          </a:lnRef>
-          <a:fillRef idx="3">
-            <a:schemeClr val="accent1"/>
-          </a:fillRef>
-          <a:effectRef idx="2">
-            <a:schemeClr val="accent1"/>
-          </a:effectRef>
-          <a:fontRef idx="minor">
-            <a:schemeClr val="lt1"/>
-          </a:fontRef>
-        </p:style>
-        <p:txBody>
-          <a:bodyPr rtlCol="0" anchor="ctr"/>
-          <a:lstStyle/>
-          <a:p>
-            <a:pPr algn="ctr"/>
-          </a:p>
-        </p:txBody>
-      </p:sp>
-      <p:sp>
-        <p:nvSpPr>
-          <p:cNvPr id="94" name="Rectangle 93"/>
-          <p:cNvSpPr/>
-          <p:nvPr/>
-        </p:nvSpPr>
-        <p:spPr>
-          <a:xfrm>
-            <a:off x="9528048" y="6528816"/>
-            <a:ext cx="146304" cy="146304"/>
-          </a:xfrm>
-          <a:prstGeom prst="rect">
-            <a:avLst/>
-          </a:prstGeom>
-          <a:solidFill>
-            <a:srgbClr val="8A8A8A"/>
-          </a:solidFill>
-          <a:ln>
-            <a:noFill/>
-          </a:ln>
-          <a:effectLst/>
-        </p:spPr>
-        <p:style>
-          <a:lnRef idx="1">
-            <a:schemeClr val="accent1"/>
-          </a:lnRef>
-          <a:fillRef idx="3">
-            <a:schemeClr val="accent1"/>
-          </a:fillRef>
-          <a:effectRef idx="2">
-            <a:schemeClr val="accent1"/>
-          </a:effectRef>
-          <a:fontRef idx="minor">
-            <a:schemeClr val="lt1"/>
-          </a:fontRef>
-        </p:style>
-        <p:txBody>
-          <a:bodyPr rtlCol="0" anchor="ctr"/>
-          <a:lstStyle/>
-          <a:p>
-            <a:pPr algn="ctr"/>
-          </a:p>
-        </p:txBody>
-      </p:sp>
-      <p:sp>
-        <p:nvSpPr>
-          <p:cNvPr id="95" name="Rectangle 94"/>
-          <p:cNvSpPr/>
-          <p:nvPr/>
-        </p:nvSpPr>
-        <p:spPr>
-          <a:xfrm>
-            <a:off x="9729216" y="6528816"/>
-            <a:ext cx="146304" cy="146304"/>
-          </a:xfrm>
-          <a:prstGeom prst="rect">
-            <a:avLst/>
-          </a:prstGeom>
-          <a:solidFill>
-            <a:srgbClr val="8A8A8A"/>
-          </a:solidFill>
-          <a:ln>
-            <a:noFill/>
-          </a:ln>
-          <a:effectLst/>
-        </p:spPr>
-        <p:style>
-          <a:lnRef idx="1">
-            <a:schemeClr val="accent1"/>
-          </a:lnRef>
-          <a:fillRef idx="3">
-            <a:schemeClr val="accent1"/>
-          </a:fillRef>
-          <a:effectRef idx="2">
-            <a:schemeClr val="accent1"/>
-          </a:effectRef>
-          <a:fontRef idx="minor">
-            <a:schemeClr val="lt1"/>
-          </a:fontRef>
-        </p:style>
-        <p:txBody>
-          <a:bodyPr rtlCol="0" anchor="ctr"/>
-          <a:lstStyle/>
-          <a:p>
-            <a:pPr algn="ctr"/>
-          </a:p>
-        </p:txBody>
-      </p:sp>
-      <p:sp>
-        <p:nvSpPr>
-          <p:cNvPr id="96" name="Rectangle 95"/>
-          <p:cNvSpPr/>
-          <p:nvPr/>
-        </p:nvSpPr>
-        <p:spPr>
-          <a:xfrm>
-            <a:off x="9930384" y="6528816"/>
-            <a:ext cx="146304" cy="146304"/>
-          </a:xfrm>
-          <a:prstGeom prst="rect">
-            <a:avLst/>
-          </a:prstGeom>
-          <a:solidFill>
-            <a:srgbClr val="8A8A8A"/>
-          </a:solidFill>
-          <a:ln>
-            <a:noFill/>
-          </a:ln>
-          <a:effectLst/>
-        </p:spPr>
-        <p:style>
-          <a:lnRef idx="1">
-            <a:schemeClr val="accent1"/>
-          </a:lnRef>
-          <a:fillRef idx="3">
-            <a:schemeClr val="accent1"/>
-          </a:fillRef>
-          <a:effectRef idx="2">
-            <a:schemeClr val="accent1"/>
-          </a:effectRef>
-          <a:fontRef idx="minor">
-            <a:schemeClr val="lt1"/>
-          </a:fontRef>
-        </p:style>
-        <p:txBody>
-          <a:bodyPr rtlCol="0" anchor="ctr"/>
-          <a:lstStyle/>
-          <a:p>
-            <a:pPr algn="ctr"/>
-          </a:p>
-        </p:txBody>
-      </p:sp>
-      <p:sp>
-        <p:nvSpPr>
-          <p:cNvPr id="97" name="Right Arrow 96"/>
-          <p:cNvSpPr/>
-          <p:nvPr/>
-        </p:nvSpPr>
-        <p:spPr>
-          <a:xfrm>
-            <a:off x="10186416" y="6419088"/>
-            <a:ext cx="237744" cy="182880"/>
-          </a:xfrm>
-          <a:prstGeom prst="rightArrow">
-            <a:avLst/>
-          </a:prstGeom>
-          <a:solidFill>
-            <a:srgbClr val="8A8A8A"/>
-          </a:solidFill>
-          <a:ln>
-            <a:noFill/>
-          </a:ln>
-          <a:effectLst/>
-        </p:spPr>
-        <p:style>
-          <a:lnRef idx="1">
-            <a:schemeClr val="accent1"/>
-          </a:lnRef>
-          <a:fillRef idx="3">
-            <a:schemeClr val="accent1"/>
-          </a:fillRef>
-          <a:effectRef idx="2">
-            <a:schemeClr val="accent1"/>
-          </a:effectRef>
-          <a:fontRef idx="minor">
-            <a:schemeClr val="lt1"/>
-          </a:fontRef>
-        </p:style>
-        <p:txBody>
-          <a:bodyPr rtlCol="0" anchor="ctr"/>
-          <a:lstStyle/>
-          <a:p>
-            <a:pPr algn="ctr"/>
-          </a:p>
-        </p:txBody>
-      </p:sp>
-      <p:sp>
-        <p:nvSpPr>
-          <p:cNvPr id="98" name="Rounded Rectangle 97"/>
-          <p:cNvSpPr/>
-          <p:nvPr/>
-        </p:nvSpPr>
-        <p:spPr>
-          <a:xfrm>
-            <a:off x="10479024" y="6217920"/>
-            <a:ext cx="1005840" cy="566928"/>
-          </a:xfrm>
-          <a:prstGeom prst="roundRect">
-            <a:avLst>
-              <a:gd name="adj" fmla="val 12903"/>
-            </a:avLst>
-          </a:prstGeom>
-          <a:solidFill>
-            <a:srgbClr val="3C5AC8"/>
-          </a:solidFill>
-          <a:ln>
-            <a:noFill/>
-          </a:ln>
-          <a:effectLst/>
-        </p:spPr>
-        <p:style>
-          <a:lnRef idx="1">
-            <a:schemeClr val="accent1"/>
-          </a:lnRef>
-          <a:fillRef idx="3">
-            <a:schemeClr val="accent1"/>
-          </a:fillRef>
-          <a:effectRef idx="2">
-            <a:schemeClr val="accent1"/>
-          </a:effectRef>
-          <a:fontRef idx="minor">
-            <a:schemeClr val="lt1"/>
-          </a:fontRef>
-        </p:style>
-        <p:txBody>
-          <a:bodyPr rtlCol="0" anchor="ctr"/>
-          <a:lstStyle/>
-          <a:p>
-            <a:pPr algn="ctr"/>
-          </a:p>
-        </p:txBody>
-      </p:sp>
-      <p:sp>
-        <p:nvSpPr>
-          <p:cNvPr id="99" name="TextBox 98"/>
-          <p:cNvSpPr txBox="1"/>
-          <p:nvPr/>
-        </p:nvSpPr>
-        <p:spPr>
-          <a:xfrm>
-            <a:off x="10533888" y="6217920"/>
-            <a:ext cx="896112" cy="566928"/>
-          </a:xfrm>
-          <a:prstGeom prst="rect">
-            <a:avLst/>
-          </a:prstGeom>
-          <a:noFill/>
-        </p:spPr>
-        <p:txBody>
-          <a:bodyPr wrap="square" anchor="ctr" lIns="0" rIns="0" tIns="0" bIns="0">
-            <a:spAutoFit/>
-          </a:bodyPr>
-          <a:lstStyle/>
-          <a:p>
-            <a:pPr algn="ctr">
-              <a:lnSpc>
-                <a:spcPct val="110000"/>
-              </a:lnSpc>
-            </a:pPr>
-            <a:r>
-              <a:rPr sz="1700" b="1">
-                <a:solidFill>
-                  <a:srgbClr val="FFFFFF"/>
-                </a:solidFill>
-                <a:latin typeface="Arial"/>
-                <a:ea typeface="Arial"/>
-              </a:rPr>
-              <a:t>pSLC</a:t>
-            </a:r>
-          </a:p>
-        </p:txBody>
-      </p:sp>
-      <p:sp>
-        <p:nvSpPr>
-          <p:cNvPr id="100" name="Right Arrow 99"/>
-          <p:cNvSpPr/>
-          <p:nvPr/>
-        </p:nvSpPr>
-        <p:spPr>
-          <a:xfrm>
-            <a:off x="11539728" y="6419088"/>
-            <a:ext cx="237744" cy="182880"/>
-          </a:xfrm>
-          <a:prstGeom prst="rightArrow">
-            <a:avLst/>
-          </a:prstGeom>
-          <a:solidFill>
-            <a:srgbClr val="8A8A8A"/>
-          </a:solidFill>
-          <a:ln>
-            <a:noFill/>
-          </a:ln>
-          <a:effectLst/>
-        </p:spPr>
-        <p:style>
-          <a:lnRef idx="1">
-            <a:schemeClr val="accent1"/>
-          </a:lnRef>
-          <a:fillRef idx="3">
-            <a:schemeClr val="accent1"/>
-          </a:fillRef>
-          <a:effectRef idx="2">
-            <a:schemeClr val="accent1"/>
-          </a:effectRef>
-          <a:fontRef idx="minor">
-            <a:schemeClr val="lt1"/>
-          </a:fontRef>
-        </p:style>
-        <p:txBody>
-          <a:bodyPr rtlCol="0" anchor="ctr"/>
-          <a:lstStyle/>
-          <a:p>
-            <a:pPr algn="ctr"/>
-          </a:p>
-        </p:txBody>
-      </p:sp>
-      <p:sp>
-        <p:nvSpPr>
-          <p:cNvPr id="101" name="Rounded Rectangle 100"/>
-          <p:cNvSpPr/>
-          <p:nvPr/>
-        </p:nvSpPr>
-        <p:spPr>
-          <a:xfrm>
-            <a:off x="11832336" y="6217920"/>
-            <a:ext cx="1549908" cy="566928"/>
-          </a:xfrm>
-          <a:prstGeom prst="roundRect">
-            <a:avLst>
-              <a:gd name="adj" fmla="val 12903"/>
-            </a:avLst>
-          </a:prstGeom>
-          <a:solidFill>
-            <a:srgbClr val="1428A0"/>
-          </a:solidFill>
-          <a:ln>
-            <a:noFill/>
-          </a:ln>
-          <a:effectLst/>
-        </p:spPr>
-        <p:style>
-          <a:lnRef idx="1">
-            <a:schemeClr val="accent1"/>
-          </a:lnRef>
-          <a:fillRef idx="3">
-            <a:schemeClr val="accent1"/>
-          </a:fillRef>
-          <a:effectRef idx="2">
-            <a:schemeClr val="accent1"/>
-          </a:effectRef>
-          <a:fontRef idx="minor">
-            <a:schemeClr val="lt1"/>
-          </a:fontRef>
-        </p:style>
-        <p:txBody>
-          <a:bodyPr rtlCol="0" anchor="ctr"/>
-          <a:lstStyle/>
-          <a:p>
-            <a:pPr algn="ctr"/>
-          </a:p>
-        </p:txBody>
-      </p:sp>
-      <p:sp>
-        <p:nvSpPr>
-          <p:cNvPr id="102" name="TextBox 101"/>
-          <p:cNvSpPr txBox="1"/>
-          <p:nvPr/>
-        </p:nvSpPr>
-        <p:spPr>
-          <a:xfrm>
-            <a:off x="11887200" y="6217920"/>
-            <a:ext cx="1440180" cy="566928"/>
-          </a:xfrm>
-          <a:prstGeom prst="rect">
-            <a:avLst/>
-          </a:prstGeom>
-          <a:noFill/>
-        </p:spPr>
-        <p:txBody>
-          <a:bodyPr wrap="square" anchor="ctr" lIns="0" rIns="0" tIns="0" bIns="0">
-            <a:spAutoFit/>
-          </a:bodyPr>
-          <a:lstStyle/>
-          <a:p>
-            <a:pPr algn="ctr">
-              <a:lnSpc>
-                <a:spcPct val="110000"/>
-              </a:lnSpc>
-            </a:pPr>
-            <a:r>
-              <a:rPr sz="1600" b="1">
-                <a:solidFill>
-                  <a:srgbClr val="FFFFFF"/>
-                </a:solidFill>
-                <a:latin typeface="Arial"/>
-                <a:ea typeface="Arial"/>
-              </a:rPr>
-              <a:t>QLC 큰 덩어리</a:t>
-            </a:r>
-          </a:p>
-        </p:txBody>
-      </p:sp>
-      <p:sp>
-        <p:nvSpPr>
-          <p:cNvPr id="103" name="TextBox 102"/>
-          <p:cNvSpPr txBox="1"/>
-          <p:nvPr/>
-        </p:nvSpPr>
-        <p:spPr>
-          <a:xfrm>
-            <a:off x="9400032" y="6894576"/>
-            <a:ext cx="4018788" cy="292608"/>
-          </a:xfrm>
-          <a:prstGeom prst="rect">
-            <a:avLst/>
-          </a:prstGeom>
-          <a:noFill/>
-        </p:spPr>
-        <p:txBody>
-          <a:bodyPr wrap="square" anchor="ctr" lIns="0" rIns="0" tIns="0" bIns="0">
-            <a:spAutoFit/>
-          </a:bodyPr>
-          <a:lstStyle/>
-          <a:p>
-            <a:pPr algn="ctr">
-              <a:lnSpc>
-                <a:spcPct val="110000"/>
-              </a:lnSpc>
-            </a:pPr>
-            <a:r>
-              <a:rPr sz="1500" b="0">
-                <a:solidFill>
-                  <a:srgbClr val="555555"/>
-                </a:solidFill>
-                <a:latin typeface="Arial"/>
-                <a:ea typeface="Arial"/>
-              </a:rPr>
-              <a:t>4KB 쓰기 WAF </a:t>
-            </a:r>
-            <a:r>
-              <a:rPr sz="1700" b="1">
-                <a:solidFill>
-                  <a:srgbClr val="1428A0"/>
-                </a:solidFill>
-                <a:latin typeface="Arial"/>
-                <a:ea typeface="Arial"/>
-              </a:rPr>
-              <a:t>70+ → 1.02</a:t>
-            </a:r>
-            <a:r>
-              <a:rPr sz="1500" b="0">
-                <a:solidFill>
-                  <a:srgbClr val="555555"/>
-                </a:solidFill>
-                <a:latin typeface="Arial"/>
-                <a:ea typeface="Arial"/>
-              </a:rPr>
-              <a:t>  pSLC 0.5~2%</a:t>
-            </a:r>
-          </a:p>
-        </p:txBody>
-      </p:sp>
-      <p:sp>
-        <p:nvSpPr>
-          <p:cNvPr id="104" name="Rounded Rectangle 103"/>
-          <p:cNvSpPr/>
-          <p:nvPr/>
-        </p:nvSpPr>
-        <p:spPr>
-          <a:xfrm>
-            <a:off x="13601700" y="6181344"/>
-            <a:ext cx="1005840" cy="640080"/>
-          </a:xfrm>
-          <a:prstGeom prst="roundRect">
-            <a:avLst>
-              <a:gd name="adj" fmla="val 11428"/>
-            </a:avLst>
-          </a:prstGeom>
-          <a:solidFill>
-            <a:srgbClr val="F5F5F5"/>
-          </a:solidFill>
-          <a:ln>
-            <a:noFill/>
-          </a:ln>
-          <a:effectLst/>
-        </p:spPr>
-        <p:style>
-          <a:lnRef idx="1">
-            <a:schemeClr val="accent1"/>
-          </a:lnRef>
-          <a:fillRef idx="3">
-            <a:schemeClr val="accent1"/>
-          </a:fillRef>
-          <a:effectRef idx="2">
-            <a:schemeClr val="accent1"/>
-          </a:effectRef>
-          <a:fontRef idx="minor">
-            <a:schemeClr val="lt1"/>
-          </a:fontRef>
-        </p:style>
-        <p:txBody>
-          <a:bodyPr rtlCol="0" anchor="ctr"/>
-          <a:lstStyle/>
-          <a:p>
-            <a:pPr algn="ctr"/>
-          </a:p>
-        </p:txBody>
-      </p:sp>
-      <p:sp>
-        <p:nvSpPr>
-          <p:cNvPr id="105" name="TextBox 104"/>
-          <p:cNvSpPr txBox="1"/>
-          <p:nvPr/>
-        </p:nvSpPr>
-        <p:spPr>
-          <a:xfrm>
-            <a:off x="13656564" y="6181344"/>
-            <a:ext cx="896112" cy="640080"/>
-          </a:xfrm>
-          <a:prstGeom prst="rect">
-            <a:avLst/>
-          </a:prstGeom>
-          <a:noFill/>
-        </p:spPr>
-        <p:txBody>
-          <a:bodyPr wrap="square" anchor="ctr" lIns="0" rIns="0" tIns="0" bIns="0">
-            <a:spAutoFit/>
-          </a:bodyPr>
-          <a:lstStyle/>
-          <a:p>
-            <a:pPr algn="ctr">
-              <a:lnSpc>
-                <a:spcPct val="110000"/>
-              </a:lnSpc>
-            </a:pPr>
-            <a:r>
-              <a:rPr sz="1500" b="1">
-                <a:solidFill>
-                  <a:srgbClr val="1A1A1A"/>
-                </a:solidFill>
-                <a:latin typeface="Arial"/>
-                <a:ea typeface="Arial"/>
-              </a:rPr>
-              <a:t>고객</a:t>
-            </a:r>
-          </a:p>
-          <a:p>
-            <a:pPr algn="ctr">
-              <a:lnSpc>
-                <a:spcPct val="110000"/>
-              </a:lnSpc>
-            </a:pPr>
-            <a:r>
-              <a:rPr sz="1500" b="1">
-                <a:solidFill>
-                  <a:srgbClr val="1A1A1A"/>
-                </a:solidFill>
-                <a:latin typeface="Arial"/>
-                <a:ea typeface="Arial"/>
-              </a:rPr>
-              <a:t>호스트</a:t>
-            </a:r>
-          </a:p>
-        </p:txBody>
-      </p:sp>
-      <p:sp>
-        <p:nvSpPr>
-          <p:cNvPr id="106" name="Right Arrow 105"/>
-          <p:cNvSpPr/>
-          <p:nvPr/>
-        </p:nvSpPr>
-        <p:spPr>
-          <a:xfrm>
-            <a:off x="14662404" y="6217920"/>
-            <a:ext cx="274320" cy="146304"/>
-          </a:xfrm>
-          <a:prstGeom prst="rightArrow">
-            <a:avLst/>
-          </a:prstGeom>
-          <a:solidFill>
-            <a:srgbClr val="1428A0"/>
-          </a:solidFill>
-          <a:ln>
-            <a:noFill/>
-          </a:ln>
-          <a:effectLst/>
-        </p:spPr>
-        <p:style>
-          <a:lnRef idx="1">
-            <a:schemeClr val="accent1"/>
-          </a:lnRef>
-          <a:fillRef idx="3">
-            <a:schemeClr val="accent1"/>
-          </a:fillRef>
-          <a:effectRef idx="2">
-            <a:schemeClr val="accent1"/>
-          </a:effectRef>
-          <a:fontRef idx="minor">
-            <a:schemeClr val="lt1"/>
-          </a:fontRef>
-        </p:style>
-        <p:txBody>
-          <a:bodyPr rtlCol="0" anchor="ctr"/>
-          <a:lstStyle/>
-          <a:p>
-            <a:pPr algn="ctr"/>
-          </a:p>
-        </p:txBody>
-      </p:sp>
-      <p:sp>
-        <p:nvSpPr>
-          <p:cNvPr id="107" name="Rectangle 106"/>
-          <p:cNvSpPr/>
-          <p:nvPr/>
-        </p:nvSpPr>
-        <p:spPr>
-          <a:xfrm>
-            <a:off x="15009876" y="6217920"/>
-            <a:ext cx="201168" cy="146304"/>
-          </a:xfrm>
-          <a:prstGeom prst="rect">
-            <a:avLst/>
-          </a:prstGeom>
-          <a:solidFill>
-            <a:srgbClr val="1428A0"/>
-          </a:solidFill>
-          <a:ln>
-            <a:noFill/>
-          </a:ln>
-          <a:effectLst/>
-        </p:spPr>
-        <p:style>
-          <a:lnRef idx="1">
-            <a:schemeClr val="accent1"/>
-          </a:lnRef>
-          <a:fillRef idx="3">
-            <a:schemeClr val="accent1"/>
-          </a:fillRef>
-          <a:effectRef idx="2">
-            <a:schemeClr val="accent1"/>
-          </a:effectRef>
-          <a:fontRef idx="minor">
-            <a:schemeClr val="lt1"/>
-          </a:fontRef>
-        </p:style>
-        <p:txBody>
-          <a:bodyPr rtlCol="0" anchor="ctr"/>
-          <a:lstStyle/>
-          <a:p>
-            <a:pPr algn="ctr"/>
-          </a:p>
-        </p:txBody>
-      </p:sp>
-      <p:sp>
-        <p:nvSpPr>
-          <p:cNvPr id="108" name="Rectangle 107"/>
-          <p:cNvSpPr/>
-          <p:nvPr/>
-        </p:nvSpPr>
-        <p:spPr>
-          <a:xfrm>
-            <a:off x="15247620" y="6217920"/>
-            <a:ext cx="201168" cy="146304"/>
-          </a:xfrm>
-          <a:prstGeom prst="rect">
-            <a:avLst/>
-          </a:prstGeom>
-          <a:solidFill>
-            <a:srgbClr val="1428A0"/>
-          </a:solidFill>
-          <a:ln>
-            <a:noFill/>
-          </a:ln>
-          <a:effectLst/>
-        </p:spPr>
-        <p:style>
-          <a:lnRef idx="1">
-            <a:schemeClr val="accent1"/>
-          </a:lnRef>
-          <a:fillRef idx="3">
-            <a:schemeClr val="accent1"/>
-          </a:fillRef>
-          <a:effectRef idx="2">
-            <a:schemeClr val="accent1"/>
-          </a:effectRef>
-          <a:fontRef idx="minor">
-            <a:schemeClr val="lt1"/>
-          </a:fontRef>
-        </p:style>
-        <p:txBody>
-          <a:bodyPr rtlCol="0" anchor="ctr"/>
-          <a:lstStyle/>
-          <a:p>
-            <a:pPr algn="ctr"/>
-          </a:p>
-        </p:txBody>
-      </p:sp>
-      <p:sp>
-        <p:nvSpPr>
-          <p:cNvPr id="109" name="Rectangle 108"/>
-          <p:cNvSpPr/>
-          <p:nvPr/>
-        </p:nvSpPr>
-        <p:spPr>
-          <a:xfrm>
-            <a:off x="15485363" y="6217920"/>
-            <a:ext cx="201168" cy="146304"/>
-          </a:xfrm>
-          <a:prstGeom prst="rect">
-            <a:avLst/>
-          </a:prstGeom>
-          <a:solidFill>
-            <a:srgbClr val="1428A0"/>
-          </a:solidFill>
-          <a:ln>
-            <a:noFill/>
-          </a:ln>
-          <a:effectLst/>
-        </p:spPr>
-        <p:style>
-          <a:lnRef idx="1">
-            <a:schemeClr val="accent1"/>
-          </a:lnRef>
-          <a:fillRef idx="3">
-            <a:schemeClr val="accent1"/>
-          </a:fillRef>
-          <a:effectRef idx="2">
-            <a:schemeClr val="accent1"/>
-          </a:effectRef>
-          <a:fontRef idx="minor">
-            <a:schemeClr val="lt1"/>
-          </a:fontRef>
-        </p:style>
-        <p:txBody>
-          <a:bodyPr rtlCol="0" anchor="ctr"/>
-          <a:lstStyle/>
-          <a:p>
-            <a:pPr algn="ctr"/>
-          </a:p>
-        </p:txBody>
-      </p:sp>
-      <p:sp>
-        <p:nvSpPr>
-          <p:cNvPr id="110" name="Rectangle 109"/>
-          <p:cNvSpPr/>
-          <p:nvPr/>
-        </p:nvSpPr>
-        <p:spPr>
-          <a:xfrm>
-            <a:off x="15723108" y="6217920"/>
-            <a:ext cx="201168" cy="146304"/>
-          </a:xfrm>
-          <a:prstGeom prst="rect">
-            <a:avLst/>
-          </a:prstGeom>
-          <a:solidFill>
-            <a:srgbClr val="1428A0"/>
-          </a:solidFill>
-          <a:ln>
-            <a:noFill/>
-          </a:ln>
-          <a:effectLst/>
-        </p:spPr>
-        <p:style>
-          <a:lnRef idx="1">
-            <a:schemeClr val="accent1"/>
-          </a:lnRef>
-          <a:fillRef idx="3">
-            <a:schemeClr val="accent1"/>
-          </a:fillRef>
-          <a:effectRef idx="2">
-            <a:schemeClr val="accent1"/>
-          </a:effectRef>
-          <a:fontRef idx="minor">
-            <a:schemeClr val="lt1"/>
-          </a:fontRef>
-        </p:style>
-        <p:txBody>
-          <a:bodyPr rtlCol="0" anchor="ctr"/>
-          <a:lstStyle/>
-          <a:p>
-            <a:pPr algn="ctr"/>
-          </a:p>
-        </p:txBody>
-      </p:sp>
-      <p:sp>
-        <p:nvSpPr>
-          <p:cNvPr id="111" name="Rectangle 110"/>
-          <p:cNvSpPr/>
-          <p:nvPr/>
-        </p:nvSpPr>
-        <p:spPr>
-          <a:xfrm>
-            <a:off x="15960851" y="6217920"/>
-            <a:ext cx="201168" cy="146304"/>
-          </a:xfrm>
-          <a:prstGeom prst="rect">
-            <a:avLst/>
-          </a:prstGeom>
-          <a:solidFill>
-            <a:srgbClr val="1428A0"/>
-          </a:solidFill>
-          <a:ln>
-            <a:noFill/>
-          </a:ln>
-          <a:effectLst/>
-        </p:spPr>
-        <p:style>
-          <a:lnRef idx="1">
-            <a:schemeClr val="accent1"/>
-          </a:lnRef>
-          <a:fillRef idx="3">
-            <a:schemeClr val="accent1"/>
-          </a:fillRef>
-          <a:effectRef idx="2">
-            <a:schemeClr val="accent1"/>
-          </a:effectRef>
-          <a:fontRef idx="minor">
-            <a:schemeClr val="lt1"/>
-          </a:fontRef>
-        </p:style>
-        <p:txBody>
-          <a:bodyPr rtlCol="0" anchor="ctr"/>
-          <a:lstStyle/>
-          <a:p>
-            <a:pPr algn="ctr"/>
-          </a:p>
-        </p:txBody>
-      </p:sp>
-      <p:sp>
-        <p:nvSpPr>
-          <p:cNvPr id="112" name="Rectangle 111"/>
-          <p:cNvSpPr/>
-          <p:nvPr/>
-        </p:nvSpPr>
-        <p:spPr>
-          <a:xfrm>
-            <a:off x="16198596" y="6217920"/>
-            <a:ext cx="201168" cy="146304"/>
-          </a:xfrm>
-          <a:prstGeom prst="rect">
-            <a:avLst/>
-          </a:prstGeom>
-          <a:solidFill>
-            <a:srgbClr val="1428A0"/>
-          </a:solidFill>
-          <a:ln>
-            <a:noFill/>
-          </a:ln>
-          <a:effectLst/>
-        </p:spPr>
-        <p:style>
-          <a:lnRef idx="1">
-            <a:schemeClr val="accent1"/>
-          </a:lnRef>
-          <a:fillRef idx="3">
-            <a:schemeClr val="accent1"/>
-          </a:fillRef>
-          <a:effectRef idx="2">
-            <a:schemeClr val="accent1"/>
-          </a:effectRef>
-          <a:fontRef idx="minor">
-            <a:schemeClr val="lt1"/>
-          </a:fontRef>
-        </p:style>
-        <p:txBody>
-          <a:bodyPr rtlCol="0" anchor="ctr"/>
-          <a:lstStyle/>
-          <a:p>
-            <a:pPr algn="ctr"/>
-          </a:p>
-        </p:txBody>
-      </p:sp>
-      <p:sp>
-        <p:nvSpPr>
-          <p:cNvPr id="113" name="Rectangle 112"/>
-          <p:cNvSpPr/>
-          <p:nvPr/>
-        </p:nvSpPr>
-        <p:spPr>
-          <a:xfrm>
-            <a:off x="16436339" y="6217920"/>
-            <a:ext cx="201168" cy="146304"/>
-          </a:xfrm>
-          <a:prstGeom prst="rect">
-            <a:avLst/>
-          </a:prstGeom>
-          <a:solidFill>
-            <a:srgbClr val="1428A0"/>
-          </a:solidFill>
-          <a:ln>
-            <a:noFill/>
-          </a:ln>
-          <a:effectLst/>
-        </p:spPr>
-        <p:style>
-          <a:lnRef idx="1">
-            <a:schemeClr val="accent1"/>
-          </a:lnRef>
-          <a:fillRef idx="3">
-            <a:schemeClr val="accent1"/>
-          </a:fillRef>
-          <a:effectRef idx="2">
-            <a:schemeClr val="accent1"/>
-          </a:effectRef>
-          <a:fontRef idx="minor">
-            <a:schemeClr val="lt1"/>
-          </a:fontRef>
-        </p:style>
-        <p:txBody>
-          <a:bodyPr rtlCol="0" anchor="ctr"/>
-          <a:lstStyle/>
-          <a:p>
-            <a:pPr algn="ctr"/>
-          </a:p>
-        </p:txBody>
-      </p:sp>
-      <p:sp>
-        <p:nvSpPr>
-          <p:cNvPr id="114" name="Rectangle 113"/>
-          <p:cNvSpPr/>
-          <p:nvPr/>
-        </p:nvSpPr>
-        <p:spPr>
-          <a:xfrm>
-            <a:off x="16674084" y="6217920"/>
-            <a:ext cx="201168" cy="146304"/>
-          </a:xfrm>
-          <a:prstGeom prst="rect">
-            <a:avLst/>
-          </a:prstGeom>
-          <a:solidFill>
-            <a:srgbClr val="1428A0"/>
-          </a:solidFill>
-          <a:ln>
-            <a:noFill/>
-          </a:ln>
-          <a:effectLst/>
-        </p:spPr>
-        <p:style>
-          <a:lnRef idx="1">
-            <a:schemeClr val="accent1"/>
-          </a:lnRef>
-          <a:fillRef idx="3">
-            <a:schemeClr val="accent1"/>
-          </a:fillRef>
-          <a:effectRef idx="2">
-            <a:schemeClr val="accent1"/>
-          </a:effectRef>
-          <a:fontRef idx="minor">
-            <a:schemeClr val="lt1"/>
-          </a:fontRef>
-        </p:style>
-        <p:txBody>
-          <a:bodyPr rtlCol="0" anchor="ctr"/>
-          <a:lstStyle/>
-          <a:p>
-            <a:pPr algn="ctr"/>
-          </a:p>
-        </p:txBody>
-      </p:sp>
-      <p:sp>
-        <p:nvSpPr>
-          <p:cNvPr id="115" name="Rectangle 114"/>
-          <p:cNvSpPr/>
-          <p:nvPr/>
-        </p:nvSpPr>
-        <p:spPr>
-          <a:xfrm>
-            <a:off x="16911827" y="6217920"/>
-            <a:ext cx="201168" cy="146304"/>
-          </a:xfrm>
-          <a:prstGeom prst="rect">
-            <a:avLst/>
-          </a:prstGeom>
-          <a:solidFill>
-            <a:srgbClr val="1428A0"/>
-          </a:solidFill>
-          <a:ln>
-            <a:noFill/>
-          </a:ln>
-          <a:effectLst/>
-        </p:spPr>
-        <p:style>
-          <a:lnRef idx="1">
-            <a:schemeClr val="accent1"/>
-          </a:lnRef>
-          <a:fillRef idx="3">
-            <a:schemeClr val="accent1"/>
-          </a:fillRef>
-          <a:effectRef idx="2">
-            <a:schemeClr val="accent1"/>
-          </a:effectRef>
-          <a:fontRef idx="minor">
-            <a:schemeClr val="lt1"/>
-          </a:fontRef>
-        </p:style>
-        <p:txBody>
-          <a:bodyPr rtlCol="0" anchor="ctr"/>
-          <a:lstStyle/>
-          <a:p>
-            <a:pPr algn="ctr"/>
-          </a:p>
-        </p:txBody>
-      </p:sp>
-      <p:sp>
-        <p:nvSpPr>
-          <p:cNvPr id="116" name="Rectangle 115"/>
-          <p:cNvSpPr/>
-          <p:nvPr/>
-        </p:nvSpPr>
-        <p:spPr>
-          <a:xfrm>
-            <a:off x="17149572" y="6217920"/>
-            <a:ext cx="201168" cy="146304"/>
-          </a:xfrm>
-          <a:prstGeom prst="rect">
-            <a:avLst/>
-          </a:prstGeom>
-          <a:solidFill>
-            <a:srgbClr val="1428A0"/>
-          </a:solidFill>
-          <a:ln>
-            <a:noFill/>
-          </a:ln>
-          <a:effectLst/>
-        </p:spPr>
-        <p:style>
-          <a:lnRef idx="1">
-            <a:schemeClr val="accent1"/>
-          </a:lnRef>
-          <a:fillRef idx="3">
-            <a:schemeClr val="accent1"/>
-          </a:fillRef>
-          <a:effectRef idx="2">
-            <a:schemeClr val="accent1"/>
-          </a:effectRef>
-          <a:fontRef idx="minor">
-            <a:schemeClr val="lt1"/>
-          </a:fontRef>
-        </p:style>
-        <p:txBody>
-          <a:bodyPr rtlCol="0" anchor="ctr"/>
-          <a:lstStyle/>
-          <a:p>
-            <a:pPr algn="ctr"/>
-          </a:p>
-        </p:txBody>
-      </p:sp>
-      <p:sp>
-        <p:nvSpPr>
-          <p:cNvPr id="117" name="Right Arrow 116"/>
-          <p:cNvSpPr/>
-          <p:nvPr/>
-        </p:nvSpPr>
-        <p:spPr>
-          <a:xfrm>
-            <a:off x="14662404" y="6419088"/>
-            <a:ext cx="274320" cy="146304"/>
-          </a:xfrm>
-          <a:prstGeom prst="rightArrow">
-            <a:avLst/>
-          </a:prstGeom>
-          <a:solidFill>
-            <a:srgbClr val="3C5AC8"/>
-          </a:solidFill>
-          <a:ln>
-            <a:noFill/>
-          </a:ln>
-          <a:effectLst/>
-        </p:spPr>
-        <p:style>
-          <a:lnRef idx="1">
-            <a:schemeClr val="accent1"/>
-          </a:lnRef>
-          <a:fillRef idx="3">
-            <a:schemeClr val="accent1"/>
-          </a:fillRef>
-          <a:effectRef idx="2">
-            <a:schemeClr val="accent1"/>
-          </a:effectRef>
-          <a:fontRef idx="minor">
-            <a:schemeClr val="lt1"/>
-          </a:fontRef>
-        </p:style>
-        <p:txBody>
-          <a:bodyPr rtlCol="0" anchor="ctr"/>
-          <a:lstStyle/>
-          <a:p>
-            <a:pPr algn="ctr"/>
-          </a:p>
-        </p:txBody>
-      </p:sp>
-      <p:sp>
-        <p:nvSpPr>
-          <p:cNvPr id="118" name="Rectangle 117"/>
-          <p:cNvSpPr/>
-          <p:nvPr/>
-        </p:nvSpPr>
-        <p:spPr>
-          <a:xfrm>
-            <a:off x="15009876" y="6419088"/>
-            <a:ext cx="201168" cy="146304"/>
-          </a:xfrm>
-          <a:prstGeom prst="rect">
-            <a:avLst/>
-          </a:prstGeom>
-          <a:solidFill>
-            <a:srgbClr val="3C5AC8"/>
-          </a:solidFill>
-          <a:ln>
-            <a:noFill/>
-          </a:ln>
-          <a:effectLst/>
-        </p:spPr>
-        <p:style>
-          <a:lnRef idx="1">
-            <a:schemeClr val="accent1"/>
-          </a:lnRef>
-          <a:fillRef idx="3">
-            <a:schemeClr val="accent1"/>
-          </a:fillRef>
-          <a:effectRef idx="2">
-            <a:schemeClr val="accent1"/>
-          </a:effectRef>
-          <a:fontRef idx="minor">
-            <a:schemeClr val="lt1"/>
-          </a:fontRef>
-        </p:style>
-        <p:txBody>
-          <a:bodyPr rtlCol="0" anchor="ctr"/>
-          <a:lstStyle/>
-          <a:p>
-            <a:pPr algn="ctr"/>
-          </a:p>
-        </p:txBody>
-      </p:sp>
-      <p:sp>
-        <p:nvSpPr>
-          <p:cNvPr id="119" name="Rectangle 118"/>
-          <p:cNvSpPr/>
-          <p:nvPr/>
-        </p:nvSpPr>
-        <p:spPr>
-          <a:xfrm>
-            <a:off x="15247620" y="6419088"/>
-            <a:ext cx="201168" cy="146304"/>
-          </a:xfrm>
-          <a:prstGeom prst="rect">
-            <a:avLst/>
-          </a:prstGeom>
-          <a:solidFill>
-            <a:srgbClr val="3C5AC8"/>
-          </a:solidFill>
-          <a:ln>
-            <a:noFill/>
-          </a:ln>
-          <a:effectLst/>
-        </p:spPr>
-        <p:style>
-          <a:lnRef idx="1">
-            <a:schemeClr val="accent1"/>
-          </a:lnRef>
-          <a:fillRef idx="3">
-            <a:schemeClr val="accent1"/>
-          </a:fillRef>
-          <a:effectRef idx="2">
-            <a:schemeClr val="accent1"/>
-          </a:effectRef>
-          <a:fontRef idx="minor">
-            <a:schemeClr val="lt1"/>
-          </a:fontRef>
-        </p:style>
-        <p:txBody>
-          <a:bodyPr rtlCol="0" anchor="ctr"/>
-          <a:lstStyle/>
-          <a:p>
-            <a:pPr algn="ctr"/>
-          </a:p>
-        </p:txBody>
-      </p:sp>
-      <p:sp>
-        <p:nvSpPr>
-          <p:cNvPr id="120" name="Rectangle 119"/>
-          <p:cNvSpPr/>
-          <p:nvPr/>
-        </p:nvSpPr>
-        <p:spPr>
-          <a:xfrm>
-            <a:off x="15485363" y="6419088"/>
-            <a:ext cx="201168" cy="146304"/>
-          </a:xfrm>
-          <a:prstGeom prst="rect">
-            <a:avLst/>
-          </a:prstGeom>
-          <a:solidFill>
-            <a:srgbClr val="3C5AC8"/>
-          </a:solidFill>
-          <a:ln>
-            <a:noFill/>
-          </a:ln>
-          <a:effectLst/>
-        </p:spPr>
-        <p:style>
-          <a:lnRef idx="1">
-            <a:schemeClr val="accent1"/>
-          </a:lnRef>
-          <a:fillRef idx="3">
-            <a:schemeClr val="accent1"/>
-          </a:fillRef>
-          <a:effectRef idx="2">
-            <a:schemeClr val="accent1"/>
-          </a:effectRef>
-          <a:fontRef idx="minor">
-            <a:schemeClr val="lt1"/>
-          </a:fontRef>
-        </p:style>
-        <p:txBody>
-          <a:bodyPr rtlCol="0" anchor="ctr"/>
-          <a:lstStyle/>
-          <a:p>
-            <a:pPr algn="ctr"/>
-          </a:p>
-        </p:txBody>
-      </p:sp>
-      <p:sp>
-        <p:nvSpPr>
-          <p:cNvPr id="121" name="Rectangle 120"/>
-          <p:cNvSpPr/>
-          <p:nvPr/>
-        </p:nvSpPr>
-        <p:spPr>
-          <a:xfrm>
-            <a:off x="15723108" y="6419088"/>
-            <a:ext cx="201168" cy="146304"/>
-          </a:xfrm>
-          <a:prstGeom prst="rect">
-            <a:avLst/>
-          </a:prstGeom>
-          <a:solidFill>
-            <a:srgbClr val="3C5AC8"/>
-          </a:solidFill>
-          <a:ln>
-            <a:noFill/>
-          </a:ln>
-          <a:effectLst/>
-        </p:spPr>
-        <p:style>
-          <a:lnRef idx="1">
-            <a:schemeClr val="accent1"/>
-          </a:lnRef>
-          <a:fillRef idx="3">
-            <a:schemeClr val="accent1"/>
-          </a:fillRef>
-          <a:effectRef idx="2">
-            <a:schemeClr val="accent1"/>
-          </a:effectRef>
-          <a:fontRef idx="minor">
-            <a:schemeClr val="lt1"/>
-          </a:fontRef>
-        </p:style>
-        <p:txBody>
-          <a:bodyPr rtlCol="0" anchor="ctr"/>
-          <a:lstStyle/>
-          <a:p>
-            <a:pPr algn="ctr"/>
-          </a:p>
-        </p:txBody>
-      </p:sp>
-      <p:sp>
-        <p:nvSpPr>
-          <p:cNvPr id="122" name="Rectangle 121"/>
-          <p:cNvSpPr/>
-          <p:nvPr/>
-        </p:nvSpPr>
-        <p:spPr>
-          <a:xfrm>
-            <a:off x="15960851" y="6419088"/>
-            <a:ext cx="201168" cy="146304"/>
-          </a:xfrm>
-          <a:prstGeom prst="rect">
-            <a:avLst/>
-          </a:prstGeom>
-          <a:solidFill>
-            <a:srgbClr val="3C5AC8"/>
-          </a:solidFill>
-          <a:ln>
-            <a:noFill/>
-          </a:ln>
-          <a:effectLst/>
-        </p:spPr>
-        <p:style>
-          <a:lnRef idx="1">
-            <a:schemeClr val="accent1"/>
-          </a:lnRef>
-          <a:fillRef idx="3">
-            <a:schemeClr val="accent1"/>
-          </a:fillRef>
-          <a:effectRef idx="2">
-            <a:schemeClr val="accent1"/>
-          </a:effectRef>
-          <a:fontRef idx="minor">
-            <a:schemeClr val="lt1"/>
-          </a:fontRef>
-        </p:style>
-        <p:txBody>
-          <a:bodyPr rtlCol="0" anchor="ctr"/>
-          <a:lstStyle/>
-          <a:p>
-            <a:pPr algn="ctr"/>
-          </a:p>
-        </p:txBody>
-      </p:sp>
-      <p:sp>
-        <p:nvSpPr>
-          <p:cNvPr id="123" name="Rectangle 122"/>
-          <p:cNvSpPr/>
-          <p:nvPr/>
-        </p:nvSpPr>
-        <p:spPr>
-          <a:xfrm>
-            <a:off x="16198596" y="6419088"/>
-            <a:ext cx="201168" cy="146304"/>
-          </a:xfrm>
-          <a:prstGeom prst="rect">
-            <a:avLst/>
-          </a:prstGeom>
-          <a:solidFill>
-            <a:srgbClr val="3C5AC8"/>
-          </a:solidFill>
-          <a:ln>
-            <a:noFill/>
-          </a:ln>
-          <a:effectLst/>
-        </p:spPr>
-        <p:style>
-          <a:lnRef idx="1">
-            <a:schemeClr val="accent1"/>
-          </a:lnRef>
-          <a:fillRef idx="3">
-            <a:schemeClr val="accent1"/>
-          </a:fillRef>
-          <a:effectRef idx="2">
-            <a:schemeClr val="accent1"/>
-          </a:effectRef>
-          <a:fontRef idx="minor">
-            <a:schemeClr val="lt1"/>
-          </a:fontRef>
-        </p:style>
-        <p:txBody>
-          <a:bodyPr rtlCol="0" anchor="ctr"/>
-          <a:lstStyle/>
-          <a:p>
-            <a:pPr algn="ctr"/>
-          </a:p>
-        </p:txBody>
-      </p:sp>
-      <p:sp>
-        <p:nvSpPr>
-          <p:cNvPr id="124" name="Rectangle 123"/>
-          <p:cNvSpPr/>
-          <p:nvPr/>
-        </p:nvSpPr>
-        <p:spPr>
-          <a:xfrm>
-            <a:off x="16436339" y="6419088"/>
-            <a:ext cx="201168" cy="146304"/>
-          </a:xfrm>
-          <a:prstGeom prst="rect">
-            <a:avLst/>
-          </a:prstGeom>
-          <a:solidFill>
-            <a:srgbClr val="3C5AC8"/>
-          </a:solidFill>
-          <a:ln>
-            <a:noFill/>
-          </a:ln>
-          <a:effectLst/>
-        </p:spPr>
-        <p:style>
-          <a:lnRef idx="1">
-            <a:schemeClr val="accent1"/>
-          </a:lnRef>
-          <a:fillRef idx="3">
-            <a:schemeClr val="accent1"/>
-          </a:fillRef>
-          <a:effectRef idx="2">
-            <a:schemeClr val="accent1"/>
-          </a:effectRef>
-          <a:fontRef idx="minor">
-            <a:schemeClr val="lt1"/>
-          </a:fontRef>
-        </p:style>
-        <p:txBody>
-          <a:bodyPr rtlCol="0" anchor="ctr"/>
-          <a:lstStyle/>
-          <a:p>
-            <a:pPr algn="ctr"/>
-          </a:p>
-        </p:txBody>
-      </p:sp>
-      <p:sp>
-        <p:nvSpPr>
-          <p:cNvPr id="125" name="Rectangle 124"/>
-          <p:cNvSpPr/>
-          <p:nvPr/>
-        </p:nvSpPr>
-        <p:spPr>
-          <a:xfrm>
-            <a:off x="16674084" y="6419088"/>
-            <a:ext cx="201168" cy="146304"/>
-          </a:xfrm>
-          <a:prstGeom prst="rect">
-            <a:avLst/>
-          </a:prstGeom>
-          <a:solidFill>
-            <a:srgbClr val="3C5AC8"/>
-          </a:solidFill>
-          <a:ln>
-            <a:noFill/>
-          </a:ln>
-          <a:effectLst/>
-        </p:spPr>
-        <p:style>
-          <a:lnRef idx="1">
-            <a:schemeClr val="accent1"/>
-          </a:lnRef>
-          <a:fillRef idx="3">
-            <a:schemeClr val="accent1"/>
-          </a:fillRef>
-          <a:effectRef idx="2">
-            <a:schemeClr val="accent1"/>
-          </a:effectRef>
-          <a:fontRef idx="minor">
-            <a:schemeClr val="lt1"/>
-          </a:fontRef>
-        </p:style>
-        <p:txBody>
-          <a:bodyPr rtlCol="0" anchor="ctr"/>
-          <a:lstStyle/>
-          <a:p>
-            <a:pPr algn="ctr"/>
-          </a:p>
-        </p:txBody>
-      </p:sp>
-      <p:sp>
-        <p:nvSpPr>
-          <p:cNvPr id="126" name="Rectangle 125"/>
-          <p:cNvSpPr/>
-          <p:nvPr/>
-        </p:nvSpPr>
-        <p:spPr>
-          <a:xfrm>
-            <a:off x="16911827" y="6419088"/>
-            <a:ext cx="201168" cy="146304"/>
-          </a:xfrm>
-          <a:prstGeom prst="rect">
-            <a:avLst/>
-          </a:prstGeom>
-          <a:solidFill>
-            <a:srgbClr val="3C5AC8"/>
-          </a:solidFill>
-          <a:ln>
-            <a:noFill/>
-          </a:ln>
-          <a:effectLst/>
-        </p:spPr>
-        <p:style>
-          <a:lnRef idx="1">
-            <a:schemeClr val="accent1"/>
-          </a:lnRef>
-          <a:fillRef idx="3">
-            <a:schemeClr val="accent1"/>
-          </a:fillRef>
-          <a:effectRef idx="2">
-            <a:schemeClr val="accent1"/>
-          </a:effectRef>
-          <a:fontRef idx="minor">
-            <a:schemeClr val="lt1"/>
-          </a:fontRef>
-        </p:style>
-        <p:txBody>
-          <a:bodyPr rtlCol="0" anchor="ctr"/>
-          <a:lstStyle/>
-          <a:p>
-            <a:pPr algn="ctr"/>
-          </a:p>
-        </p:txBody>
-      </p:sp>
-      <p:sp>
-        <p:nvSpPr>
-          <p:cNvPr id="127" name="Rectangle 126"/>
-          <p:cNvSpPr/>
-          <p:nvPr/>
-        </p:nvSpPr>
-        <p:spPr>
-          <a:xfrm>
-            <a:off x="17149572" y="6419088"/>
-            <a:ext cx="201168" cy="146304"/>
-          </a:xfrm>
-          <a:prstGeom prst="rect">
-            <a:avLst/>
-          </a:prstGeom>
-          <a:solidFill>
-            <a:srgbClr val="3C5AC8"/>
-          </a:solidFill>
-          <a:ln>
-            <a:noFill/>
-          </a:ln>
-          <a:effectLst/>
-        </p:spPr>
-        <p:style>
-          <a:lnRef idx="1">
-            <a:schemeClr val="accent1"/>
-          </a:lnRef>
-          <a:fillRef idx="3">
-            <a:schemeClr val="accent1"/>
-          </a:fillRef>
-          <a:effectRef idx="2">
-            <a:schemeClr val="accent1"/>
-          </a:effectRef>
-          <a:fontRef idx="minor">
-            <a:schemeClr val="lt1"/>
-          </a:fontRef>
-        </p:style>
-        <p:txBody>
-          <a:bodyPr rtlCol="0" anchor="ctr"/>
-          <a:lstStyle/>
-          <a:p>
-            <a:pPr algn="ctr"/>
-          </a:p>
-        </p:txBody>
-      </p:sp>
-      <p:sp>
-        <p:nvSpPr>
-          <p:cNvPr id="128" name="Right Arrow 127"/>
-          <p:cNvSpPr/>
-          <p:nvPr/>
-        </p:nvSpPr>
-        <p:spPr>
-          <a:xfrm>
-            <a:off x="14662404" y="6620256"/>
-            <a:ext cx="274320" cy="146304"/>
-          </a:xfrm>
-          <a:prstGeom prst="rightArrow">
-            <a:avLst/>
-          </a:prstGeom>
-          <a:solidFill>
-            <a:srgbClr val="AAB8E8"/>
-          </a:solidFill>
-          <a:ln>
-            <a:noFill/>
-          </a:ln>
-          <a:effectLst/>
-        </p:spPr>
-        <p:style>
-          <a:lnRef idx="1">
-            <a:schemeClr val="accent1"/>
-          </a:lnRef>
-          <a:fillRef idx="3">
-            <a:schemeClr val="accent1"/>
-          </a:fillRef>
-          <a:effectRef idx="2">
-            <a:schemeClr val="accent1"/>
-          </a:effectRef>
-          <a:fontRef idx="minor">
-            <a:schemeClr val="lt1"/>
-          </a:fontRef>
-        </p:style>
-        <p:txBody>
-          <a:bodyPr rtlCol="0" anchor="ctr"/>
-          <a:lstStyle/>
-          <a:p>
-            <a:pPr algn="ctr"/>
-          </a:p>
-        </p:txBody>
-      </p:sp>
-      <p:sp>
-        <p:nvSpPr>
-          <p:cNvPr id="129" name="Rectangle 128"/>
-          <p:cNvSpPr/>
-          <p:nvPr/>
-        </p:nvSpPr>
-        <p:spPr>
-          <a:xfrm>
-            <a:off x="15009876" y="6620256"/>
-            <a:ext cx="201168" cy="146304"/>
-          </a:xfrm>
-          <a:prstGeom prst="rect">
-            <a:avLst/>
-          </a:prstGeom>
-          <a:solidFill>
-            <a:srgbClr val="AAB8E8"/>
-          </a:solidFill>
-          <a:ln>
-            <a:noFill/>
-          </a:ln>
-          <a:effectLst/>
-        </p:spPr>
-        <p:style>
-          <a:lnRef idx="1">
-            <a:schemeClr val="accent1"/>
-          </a:lnRef>
-          <a:fillRef idx="3">
-            <a:schemeClr val="accent1"/>
-          </a:fillRef>
-          <a:effectRef idx="2">
-            <a:schemeClr val="accent1"/>
-          </a:effectRef>
-          <a:fontRef idx="minor">
-            <a:schemeClr val="lt1"/>
-          </a:fontRef>
-        </p:style>
-        <p:txBody>
-          <a:bodyPr rtlCol="0" anchor="ctr"/>
-          <a:lstStyle/>
-          <a:p>
-            <a:pPr algn="ctr"/>
-          </a:p>
-        </p:txBody>
-      </p:sp>
-      <p:sp>
-        <p:nvSpPr>
-          <p:cNvPr id="130" name="Rectangle 129"/>
-          <p:cNvSpPr/>
-          <p:nvPr/>
-        </p:nvSpPr>
-        <p:spPr>
-          <a:xfrm>
-            <a:off x="15247620" y="6620256"/>
-            <a:ext cx="201168" cy="146304"/>
-          </a:xfrm>
-          <a:prstGeom prst="rect">
-            <a:avLst/>
-          </a:prstGeom>
-          <a:solidFill>
-            <a:srgbClr val="AAB8E8"/>
-          </a:solidFill>
-          <a:ln>
-            <a:noFill/>
-          </a:ln>
-          <a:effectLst/>
-        </p:spPr>
-        <p:style>
-          <a:lnRef idx="1">
-            <a:schemeClr val="accent1"/>
-          </a:lnRef>
-          <a:fillRef idx="3">
-            <a:schemeClr val="accent1"/>
-          </a:fillRef>
-          <a:effectRef idx="2">
-            <a:schemeClr val="accent1"/>
-          </a:effectRef>
-          <a:fontRef idx="minor">
-            <a:schemeClr val="lt1"/>
-          </a:fontRef>
-        </p:style>
-        <p:txBody>
-          <a:bodyPr rtlCol="0" anchor="ctr"/>
-          <a:lstStyle/>
-          <a:p>
-            <a:pPr algn="ctr"/>
-          </a:p>
-        </p:txBody>
-      </p:sp>
-      <p:sp>
-        <p:nvSpPr>
-          <p:cNvPr id="131" name="Rectangle 130"/>
-          <p:cNvSpPr/>
-          <p:nvPr/>
-        </p:nvSpPr>
-        <p:spPr>
-          <a:xfrm>
-            <a:off x="15485363" y="6620256"/>
-            <a:ext cx="201168" cy="146304"/>
-          </a:xfrm>
-          <a:prstGeom prst="rect">
-            <a:avLst/>
-          </a:prstGeom>
-          <a:solidFill>
-            <a:srgbClr val="AAB8E8"/>
-          </a:solidFill>
-          <a:ln>
-            <a:noFill/>
-          </a:ln>
-          <a:effectLst/>
-        </p:spPr>
-        <p:style>
-          <a:lnRef idx="1">
-            <a:schemeClr val="accent1"/>
-          </a:lnRef>
-          <a:fillRef idx="3">
-            <a:schemeClr val="accent1"/>
-          </a:fillRef>
-          <a:effectRef idx="2">
-            <a:schemeClr val="accent1"/>
-          </a:effectRef>
-          <a:fontRef idx="minor">
-            <a:schemeClr val="lt1"/>
-          </a:fontRef>
-        </p:style>
-        <p:txBody>
-          <a:bodyPr rtlCol="0" anchor="ctr"/>
-          <a:lstStyle/>
-          <a:p>
-            <a:pPr algn="ctr"/>
-          </a:p>
-        </p:txBody>
-      </p:sp>
-      <p:sp>
-        <p:nvSpPr>
-          <p:cNvPr id="132" name="Rectangle 131"/>
-          <p:cNvSpPr/>
-          <p:nvPr/>
-        </p:nvSpPr>
-        <p:spPr>
-          <a:xfrm>
-            <a:off x="15723108" y="6620256"/>
-            <a:ext cx="201168" cy="146304"/>
-          </a:xfrm>
-          <a:prstGeom prst="rect">
-            <a:avLst/>
-          </a:prstGeom>
-          <a:solidFill>
-            <a:srgbClr val="AAB8E8"/>
-          </a:solidFill>
-          <a:ln>
-            <a:noFill/>
-          </a:ln>
-          <a:effectLst/>
-        </p:spPr>
-        <p:style>
-          <a:lnRef idx="1">
-            <a:schemeClr val="accent1"/>
-          </a:lnRef>
-          <a:fillRef idx="3">
-            <a:schemeClr val="accent1"/>
-          </a:fillRef>
-          <a:effectRef idx="2">
-            <a:schemeClr val="accent1"/>
-          </a:effectRef>
-          <a:fontRef idx="minor">
-            <a:schemeClr val="lt1"/>
-          </a:fontRef>
-        </p:style>
-        <p:txBody>
-          <a:bodyPr rtlCol="0" anchor="ctr"/>
-          <a:lstStyle/>
-          <a:p>
-            <a:pPr algn="ctr"/>
-          </a:p>
-        </p:txBody>
-      </p:sp>
-      <p:sp>
-        <p:nvSpPr>
-          <p:cNvPr id="133" name="Rectangle 132"/>
-          <p:cNvSpPr/>
-          <p:nvPr/>
-        </p:nvSpPr>
-        <p:spPr>
-          <a:xfrm>
-            <a:off x="15960851" y="6620256"/>
-            <a:ext cx="201168" cy="146304"/>
-          </a:xfrm>
-          <a:prstGeom prst="rect">
-            <a:avLst/>
-          </a:prstGeom>
-          <a:solidFill>
-            <a:srgbClr val="AAB8E8"/>
-          </a:solidFill>
-          <a:ln>
-            <a:noFill/>
-          </a:ln>
-          <a:effectLst/>
-        </p:spPr>
-        <p:style>
-          <a:lnRef idx="1">
-            <a:schemeClr val="accent1"/>
-          </a:lnRef>
-          <a:fillRef idx="3">
-            <a:schemeClr val="accent1"/>
-          </a:fillRef>
-          <a:effectRef idx="2">
-            <a:schemeClr val="accent1"/>
-          </a:effectRef>
-          <a:fontRef idx="minor">
-            <a:schemeClr val="lt1"/>
-          </a:fontRef>
-        </p:style>
-        <p:txBody>
-          <a:bodyPr rtlCol="0" anchor="ctr"/>
-          <a:lstStyle/>
-          <a:p>
-            <a:pPr algn="ctr"/>
-          </a:p>
-        </p:txBody>
-      </p:sp>
-      <p:sp>
-        <p:nvSpPr>
-          <p:cNvPr id="134" name="Rectangle 133"/>
-          <p:cNvSpPr/>
-          <p:nvPr/>
-        </p:nvSpPr>
-        <p:spPr>
-          <a:xfrm>
-            <a:off x="16198596" y="6620256"/>
-            <a:ext cx="201168" cy="146304"/>
-          </a:xfrm>
-          <a:prstGeom prst="rect">
-            <a:avLst/>
-          </a:prstGeom>
-          <a:solidFill>
-            <a:srgbClr val="AAB8E8"/>
-          </a:solidFill>
-          <a:ln>
-            <a:noFill/>
-          </a:ln>
-          <a:effectLst/>
-        </p:spPr>
-        <p:style>
-          <a:lnRef idx="1">
-            <a:schemeClr val="accent1"/>
-          </a:lnRef>
-          <a:fillRef idx="3">
-            <a:schemeClr val="accent1"/>
-          </a:fillRef>
-          <a:effectRef idx="2">
-            <a:schemeClr val="accent1"/>
-          </a:effectRef>
-          <a:fontRef idx="minor">
-            <a:schemeClr val="lt1"/>
-          </a:fontRef>
-        </p:style>
-        <p:txBody>
-          <a:bodyPr rtlCol="0" anchor="ctr"/>
-          <a:lstStyle/>
-          <a:p>
-            <a:pPr algn="ctr"/>
-          </a:p>
-        </p:txBody>
-      </p:sp>
-      <p:sp>
-        <p:nvSpPr>
-          <p:cNvPr id="135" name="Rectangle 134"/>
-          <p:cNvSpPr/>
-          <p:nvPr/>
-        </p:nvSpPr>
-        <p:spPr>
-          <a:xfrm>
-            <a:off x="16436339" y="6620256"/>
-            <a:ext cx="201168" cy="146304"/>
-          </a:xfrm>
-          <a:prstGeom prst="rect">
-            <a:avLst/>
-          </a:prstGeom>
-          <a:solidFill>
-            <a:srgbClr val="AAB8E8"/>
-          </a:solidFill>
-          <a:ln>
-            <a:noFill/>
-          </a:ln>
-          <a:effectLst/>
-        </p:spPr>
-        <p:style>
-          <a:lnRef idx="1">
-            <a:schemeClr val="accent1"/>
-          </a:lnRef>
-          <a:fillRef idx="3">
-            <a:schemeClr val="accent1"/>
-          </a:fillRef>
-          <a:effectRef idx="2">
-            <a:schemeClr val="accent1"/>
-          </a:effectRef>
-          <a:fontRef idx="minor">
-            <a:schemeClr val="lt1"/>
-          </a:fontRef>
-        </p:style>
-        <p:txBody>
-          <a:bodyPr rtlCol="0" anchor="ctr"/>
-          <a:lstStyle/>
-          <a:p>
-            <a:pPr algn="ctr"/>
-          </a:p>
-        </p:txBody>
-      </p:sp>
-      <p:sp>
-        <p:nvSpPr>
-          <p:cNvPr id="136" name="Rectangle 135"/>
-          <p:cNvSpPr/>
-          <p:nvPr/>
-        </p:nvSpPr>
-        <p:spPr>
-          <a:xfrm>
-            <a:off x="16674084" y="6620256"/>
-            <a:ext cx="201168" cy="146304"/>
-          </a:xfrm>
-          <a:prstGeom prst="rect">
-            <a:avLst/>
-          </a:prstGeom>
-          <a:solidFill>
-            <a:srgbClr val="AAB8E8"/>
-          </a:solidFill>
-          <a:ln>
-            <a:noFill/>
-          </a:ln>
-          <a:effectLst/>
-        </p:spPr>
-        <p:style>
-          <a:lnRef idx="1">
-            <a:schemeClr val="accent1"/>
-          </a:lnRef>
-          <a:fillRef idx="3">
-            <a:schemeClr val="accent1"/>
-          </a:fillRef>
-          <a:effectRef idx="2">
-            <a:schemeClr val="accent1"/>
-          </a:effectRef>
-          <a:fontRef idx="minor">
-            <a:schemeClr val="lt1"/>
-          </a:fontRef>
-        </p:style>
-        <p:txBody>
-          <a:bodyPr rtlCol="0" anchor="ctr"/>
-          <a:lstStyle/>
-          <a:p>
-            <a:pPr algn="ctr"/>
-          </a:p>
-        </p:txBody>
-      </p:sp>
-      <p:sp>
-        <p:nvSpPr>
-          <p:cNvPr id="137" name="Rectangle 136"/>
-          <p:cNvSpPr/>
-          <p:nvPr/>
-        </p:nvSpPr>
-        <p:spPr>
-          <a:xfrm>
-            <a:off x="16911827" y="6620256"/>
-            <a:ext cx="201168" cy="146304"/>
-          </a:xfrm>
-          <a:prstGeom prst="rect">
-            <a:avLst/>
-          </a:prstGeom>
-          <a:solidFill>
-            <a:srgbClr val="AAB8E8"/>
-          </a:solidFill>
-          <a:ln>
-            <a:noFill/>
-          </a:ln>
-          <a:effectLst/>
-        </p:spPr>
-        <p:style>
-          <a:lnRef idx="1">
-            <a:schemeClr val="accent1"/>
-          </a:lnRef>
-          <a:fillRef idx="3">
-            <a:schemeClr val="accent1"/>
-          </a:fillRef>
-          <a:effectRef idx="2">
-            <a:schemeClr val="accent1"/>
-          </a:effectRef>
-          <a:fontRef idx="minor">
-            <a:schemeClr val="lt1"/>
-          </a:fontRef>
-        </p:style>
-        <p:txBody>
-          <a:bodyPr rtlCol="0" anchor="ctr"/>
-          <a:lstStyle/>
-          <a:p>
-            <a:pPr algn="ctr"/>
-          </a:p>
-        </p:txBody>
-      </p:sp>
-      <p:sp>
-        <p:nvSpPr>
-          <p:cNvPr id="138" name="Rectangle 137"/>
-          <p:cNvSpPr/>
-          <p:nvPr/>
-        </p:nvSpPr>
-        <p:spPr>
-          <a:xfrm>
-            <a:off x="17149572" y="6620256"/>
-            <a:ext cx="201168" cy="146304"/>
-          </a:xfrm>
-          <a:prstGeom prst="rect">
-            <a:avLst/>
-          </a:prstGeom>
-          <a:solidFill>
-            <a:srgbClr val="AAB8E8"/>
-          </a:solidFill>
-          <a:ln>
-            <a:noFill/>
-          </a:ln>
-          <a:effectLst/>
-        </p:spPr>
-        <p:style>
-          <a:lnRef idx="1">
-            <a:schemeClr val="accent1"/>
-          </a:lnRef>
-          <a:fillRef idx="3">
-            <a:schemeClr val="accent1"/>
-          </a:fillRef>
-          <a:effectRef idx="2">
-            <a:schemeClr val="accent1"/>
-          </a:effectRef>
-          <a:fontRef idx="minor">
-            <a:schemeClr val="lt1"/>
-          </a:fontRef>
-        </p:style>
-        <p:txBody>
-          <a:bodyPr rtlCol="0" anchor="ctr"/>
-          <a:lstStyle/>
-          <a:p>
-            <a:pPr algn="ctr"/>
-          </a:p>
-        </p:txBody>
-      </p:sp>
-      <p:sp>
-        <p:nvSpPr>
-          <p:cNvPr id="139" name="TextBox 138"/>
-          <p:cNvSpPr txBox="1"/>
-          <p:nvPr/>
-        </p:nvSpPr>
-        <p:spPr>
-          <a:xfrm>
-            <a:off x="13546836" y="6894576"/>
-            <a:ext cx="4018788" cy="292608"/>
-          </a:xfrm>
-          <a:prstGeom prst="rect">
-            <a:avLst/>
-          </a:prstGeom>
-          <a:noFill/>
-        </p:spPr>
-        <p:txBody>
-          <a:bodyPr wrap="square" anchor="ctr" lIns="0" rIns="0" tIns="0" bIns="0">
-            <a:spAutoFit/>
-          </a:bodyPr>
-          <a:lstStyle/>
-          <a:p>
-            <a:pPr algn="ctr">
-              <a:lnSpc>
-                <a:spcPct val="110000"/>
-              </a:lnSpc>
-            </a:pPr>
-            <a:r>
-              <a:rPr sz="1500" b="0">
-                <a:solidFill>
-                  <a:srgbClr val="555555"/>
-                </a:solidFill>
-                <a:latin typeface="Arial"/>
-                <a:ea typeface="Arial"/>
-              </a:rPr>
-              <a:t>CacheLib WAF </a:t>
-            </a:r>
-            <a:r>
-              <a:rPr sz="1700" b="1">
-                <a:solidFill>
-                  <a:srgbClr val="1428A0"/>
-                </a:solidFill>
-                <a:latin typeface="Arial"/>
-                <a:ea typeface="Arial"/>
-              </a:rPr>
-              <a:t>3.22 → 1.03</a:t>
-            </a:r>
-          </a:p>
-        </p:txBody>
-      </p:sp>
-      <p:sp>
-        <p:nvSpPr>
-          <p:cNvPr id="140" name="Rounded Rectangle 139"/>
-          <p:cNvSpPr/>
-          <p:nvPr/>
-        </p:nvSpPr>
-        <p:spPr>
-          <a:xfrm>
-            <a:off x="7168896" y="7242048"/>
-            <a:ext cx="2103120" cy="457200"/>
-          </a:xfrm>
-          <a:prstGeom prst="roundRect">
-            <a:avLst>
-              <a:gd name="adj" fmla="val 16000"/>
-            </a:avLst>
-          </a:prstGeom>
-          <a:solidFill>
-            <a:srgbClr val="F5F5F5"/>
-          </a:solidFill>
-          <a:ln>
-            <a:noFill/>
-          </a:ln>
-          <a:effectLst/>
-        </p:spPr>
-        <p:style>
-          <a:lnRef idx="1">
-            <a:schemeClr val="accent1"/>
-          </a:lnRef>
-          <a:fillRef idx="3">
-            <a:schemeClr val="accent1"/>
-          </a:fillRef>
-          <a:effectRef idx="2">
-            <a:schemeClr val="accent1"/>
-          </a:effectRef>
-          <a:fontRef idx="minor">
-            <a:schemeClr val="lt1"/>
-          </a:fontRef>
-        </p:style>
-        <p:txBody>
-          <a:bodyPr rtlCol="0" anchor="ctr"/>
-          <a:lstStyle/>
-          <a:p>
-            <a:pPr algn="ctr"/>
-          </a:p>
-        </p:txBody>
-      </p:sp>
-      <p:sp>
-        <p:nvSpPr>
-          <p:cNvPr id="141" name="TextBox 140"/>
-          <p:cNvSpPr txBox="1"/>
-          <p:nvPr/>
-        </p:nvSpPr>
-        <p:spPr>
-          <a:xfrm>
-            <a:off x="7223759" y="7242048"/>
-            <a:ext cx="1993391" cy="457200"/>
-          </a:xfrm>
-          <a:prstGeom prst="rect">
-            <a:avLst/>
-          </a:prstGeom>
-          <a:noFill/>
-        </p:spPr>
-        <p:txBody>
-          <a:bodyPr wrap="square" anchor="ctr" lIns="0" rIns="0" tIns="0" bIns="0">
-            <a:spAutoFit/>
-          </a:bodyPr>
-          <a:lstStyle/>
-          <a:p>
-            <a:pPr algn="ctr">
-              <a:lnSpc>
-                <a:spcPct val="110000"/>
-              </a:lnSpc>
-            </a:pPr>
-            <a:r>
-              <a:rPr sz="1700" b="1">
-                <a:solidFill>
-                  <a:srgbClr val="555555"/>
-                </a:solidFill>
-                <a:latin typeface="Arial"/>
-                <a:ea typeface="Arial"/>
-              </a:rPr>
-              <a:t>지금</a:t>
-            </a:r>
-          </a:p>
-        </p:txBody>
-      </p:sp>
-      <p:sp>
-        <p:nvSpPr>
-          <p:cNvPr id="142" name="Rounded Rectangle 141"/>
-          <p:cNvSpPr/>
-          <p:nvPr/>
-        </p:nvSpPr>
-        <p:spPr>
-          <a:xfrm>
-            <a:off x="9400032" y="7242048"/>
-            <a:ext cx="4018788" cy="457200"/>
-          </a:xfrm>
-          <a:prstGeom prst="roundRect">
-            <a:avLst>
-              <a:gd name="adj" fmla="val 16000"/>
-            </a:avLst>
-          </a:prstGeom>
-          <a:solidFill>
-            <a:srgbClr val="3C5AC8"/>
-          </a:solidFill>
-          <a:ln>
-            <a:noFill/>
-          </a:ln>
-          <a:effectLst/>
-        </p:spPr>
-        <p:style>
-          <a:lnRef idx="1">
-            <a:schemeClr val="accent1"/>
-          </a:lnRef>
-          <a:fillRef idx="3">
-            <a:schemeClr val="accent1"/>
-          </a:fillRef>
-          <a:effectRef idx="2">
-            <a:schemeClr val="accent1"/>
-          </a:effectRef>
-          <a:fontRef idx="minor">
-            <a:schemeClr val="lt1"/>
-          </a:fontRef>
-        </p:style>
-        <p:txBody>
-          <a:bodyPr rtlCol="0" anchor="ctr"/>
-          <a:lstStyle/>
-          <a:p>
-            <a:pPr algn="ctr"/>
-          </a:p>
-        </p:txBody>
-      </p:sp>
-      <p:sp>
-        <p:nvSpPr>
-          <p:cNvPr id="143" name="TextBox 142"/>
-          <p:cNvSpPr txBox="1"/>
-          <p:nvPr/>
-        </p:nvSpPr>
-        <p:spPr>
-          <a:xfrm>
-            <a:off x="9454896" y="7242048"/>
-            <a:ext cx="3909060" cy="457200"/>
-          </a:xfrm>
-          <a:prstGeom prst="rect">
-            <a:avLst/>
-          </a:prstGeom>
-          <a:noFill/>
-        </p:spPr>
-        <p:txBody>
-          <a:bodyPr wrap="square" anchor="ctr" lIns="0" rIns="0" tIns="0" bIns="0">
-            <a:spAutoFit/>
-          </a:bodyPr>
-          <a:lstStyle/>
-          <a:p>
-            <a:pPr algn="ctr">
-              <a:lnSpc>
-                <a:spcPct val="110000"/>
-              </a:lnSpc>
-            </a:pPr>
-            <a:r>
-              <a:rPr sz="1700" b="1">
-                <a:solidFill>
-                  <a:srgbClr val="FFFFFF"/>
-                </a:solidFill>
-                <a:latin typeface="Arial"/>
-                <a:ea typeface="Arial"/>
-              </a:rPr>
-              <a:t>단기 2026~27  </a:t>
-            </a:r>
-            <a:r>
-              <a:rPr sz="1600" b="0">
-                <a:solidFill>
-                  <a:srgbClr val="FFFFFF"/>
-                </a:solidFill>
-                <a:latin typeface="Arial"/>
-                <a:ea typeface="Arial"/>
-              </a:rPr>
-              <a:t>스펙으로 협력</a:t>
-            </a:r>
-          </a:p>
-        </p:txBody>
-      </p:sp>
-      <p:sp>
-        <p:nvSpPr>
-          <p:cNvPr id="144" name="Rounded Rectangle 143"/>
-          <p:cNvSpPr/>
-          <p:nvPr/>
-        </p:nvSpPr>
-        <p:spPr>
-          <a:xfrm>
-            <a:off x="13546836" y="7242048"/>
-            <a:ext cx="4018788" cy="457200"/>
-          </a:xfrm>
-          <a:prstGeom prst="roundRect">
-            <a:avLst>
-              <a:gd name="adj" fmla="val 16000"/>
-            </a:avLst>
-          </a:prstGeom>
-          <a:solidFill>
-            <a:srgbClr val="1428A0"/>
-          </a:solidFill>
-          <a:ln>
-            <a:noFill/>
-          </a:ln>
-          <a:effectLst/>
-        </p:spPr>
-        <p:style>
-          <a:lnRef idx="1">
-            <a:schemeClr val="accent1"/>
-          </a:lnRef>
-          <a:fillRef idx="3">
-            <a:schemeClr val="accent1"/>
-          </a:fillRef>
-          <a:effectRef idx="2">
-            <a:schemeClr val="accent1"/>
-          </a:effectRef>
-          <a:fontRef idx="minor">
-            <a:schemeClr val="lt1"/>
-          </a:fontRef>
-        </p:style>
-        <p:txBody>
-          <a:bodyPr rtlCol="0" anchor="ctr"/>
-          <a:lstStyle/>
-          <a:p>
-            <a:pPr algn="ctr"/>
-          </a:p>
-        </p:txBody>
-      </p:sp>
-      <p:sp>
-        <p:nvSpPr>
-          <p:cNvPr id="145" name="TextBox 144"/>
-          <p:cNvSpPr txBox="1"/>
-          <p:nvPr/>
-        </p:nvSpPr>
-        <p:spPr>
-          <a:xfrm>
-            <a:off x="13601700" y="7242048"/>
-            <a:ext cx="3909060" cy="457200"/>
-          </a:xfrm>
-          <a:prstGeom prst="rect">
-            <a:avLst/>
-          </a:prstGeom>
-          <a:noFill/>
-        </p:spPr>
-        <p:txBody>
-          <a:bodyPr wrap="square" anchor="ctr" lIns="0" rIns="0" tIns="0" bIns="0">
-            <a:spAutoFit/>
-          </a:bodyPr>
-          <a:lstStyle/>
-          <a:p>
-            <a:pPr algn="ctr">
-              <a:lnSpc>
-                <a:spcPct val="110000"/>
-              </a:lnSpc>
-            </a:pPr>
-            <a:r>
-              <a:rPr sz="1700" b="1">
-                <a:solidFill>
-                  <a:srgbClr val="FFFFFF"/>
-                </a:solidFill>
-                <a:latin typeface="Arial"/>
-                <a:ea typeface="Arial"/>
-              </a:rPr>
-              <a:t>중장기 2028~  </a:t>
-            </a:r>
-            <a:r>
-              <a:rPr sz="1600" b="0">
-                <a:solidFill>
-                  <a:srgbClr val="AAB8E8"/>
-                </a:solidFill>
-                <a:latin typeface="Arial"/>
-                <a:ea typeface="Arial"/>
-              </a:rPr>
-              <a:t>고객과 공동 설계</a:t>
-            </a:r>
-          </a:p>
-        </p:txBody>
-      </p:sp>
-      <p:sp>
-        <p:nvSpPr>
-          <p:cNvPr id="146" name="TextBox 145"/>
-          <p:cNvSpPr txBox="1"/>
-          <p:nvPr/>
-        </p:nvSpPr>
-        <p:spPr>
-          <a:xfrm>
-            <a:off x="7168896" y="7772400"/>
-            <a:ext cx="2103120" cy="603504"/>
+            <a:off x="722376" y="9601200"/>
+            <a:ext cx="15453359" cy="566928"/>
           </a:xfrm>
           <a:prstGeom prst="rect">
             <a:avLst/>
@@ -28524,9 +25497,9 @@
           </a:bodyPr>
           <a:lstStyle/>
           <a:p>
-            <a:pPr algn="ctr">
-              <a:lnSpc>
-                <a:spcPct val="100000"/>
+            <a:pPr algn="l">
+              <a:lnSpc>
+                <a:spcPct val="105000"/>
               </a:lnSpc>
             </a:pPr>
             <a:r>
@@ -28537,309 +25510,14 @@
                 <a:latin typeface="Arial"/>
                 <a:ea typeface="Arial"/>
               </a:rPr>
-              <a:t>QLC 정격</a:t>
-            </a:r>
-          </a:p>
-          <a:p>
-            <a:pPr algn="ctr">
-              <a:lnSpc>
-                <a:spcPct val="100000"/>
-              </a:lnSpc>
-            </a:pPr>
-            <a:r>
-              <a:rPr sz="1600" b="1">
-                <a:solidFill>
-                  <a:srgbClr val="1A1A1A"/>
-                </a:solidFill>
-                <a:latin typeface="Arial"/>
-                <a:ea typeface="Arial"/>
-              </a:rPr>
-              <a:t>0.3~0.6</a:t>
-            </a:r>
-          </a:p>
-        </p:txBody>
-      </p:sp>
-      <p:sp>
-        <p:nvSpPr>
-          <p:cNvPr id="147" name="TextBox 146"/>
-          <p:cNvSpPr txBox="1"/>
-          <p:nvPr/>
-        </p:nvSpPr>
-        <p:spPr>
-          <a:xfrm>
-            <a:off x="9400032" y="7772400"/>
-            <a:ext cx="4018788" cy="603504"/>
-          </a:xfrm>
-          <a:prstGeom prst="rect">
-            <a:avLst/>
-          </a:prstGeom>
-          <a:noFill/>
-        </p:spPr>
-        <p:txBody>
-          <a:bodyPr wrap="square" anchor="t" lIns="0" rIns="0" tIns="0" bIns="0">
-            <a:spAutoFit/>
-          </a:bodyPr>
-          <a:lstStyle/>
-          <a:p>
-            <a:pPr algn="ctr">
-              <a:lnSpc>
-                <a:spcPct val="100000"/>
-              </a:lnSpc>
-            </a:pPr>
-            <a:r>
-              <a:rPr sz="1600" b="1">
-                <a:solidFill>
-                  <a:srgbClr val="1A1A1A"/>
-                </a:solidFill>
-                <a:latin typeface="Arial"/>
-                <a:ea typeface="Arial"/>
-              </a:rPr>
-              <a:t>작은 쓰기 증폭 제거</a:t>
-            </a:r>
-          </a:p>
-          <a:p>
-            <a:pPr algn="ctr">
-              <a:lnSpc>
-                <a:spcPct val="100000"/>
-              </a:lnSpc>
-            </a:pPr>
-            <a:r>
-              <a:rPr sz="1500" b="0">
-                <a:solidFill>
-                  <a:srgbClr val="555555"/>
-                </a:solidFill>
-                <a:latin typeface="Arial"/>
-                <a:ea typeface="Arial"/>
-              </a:rPr>
-              <a:t>pSLC가 쓰기 지연 · 대역 흡수</a:t>
-            </a:r>
-          </a:p>
-        </p:txBody>
-      </p:sp>
-      <p:sp>
-        <p:nvSpPr>
-          <p:cNvPr id="148" name="TextBox 147"/>
-          <p:cNvSpPr txBox="1"/>
-          <p:nvPr/>
-        </p:nvSpPr>
-        <p:spPr>
-          <a:xfrm>
-            <a:off x="13546836" y="7772400"/>
-            <a:ext cx="4018788" cy="603504"/>
-          </a:xfrm>
-          <a:prstGeom prst="rect">
-            <a:avLst/>
-          </a:prstGeom>
-          <a:noFill/>
-        </p:spPr>
-        <p:txBody>
-          <a:bodyPr wrap="square" anchor="t" lIns="0" rIns="0" tIns="0" bIns="0">
-            <a:spAutoFit/>
-          </a:bodyPr>
-          <a:lstStyle/>
-          <a:p>
-            <a:pPr algn="ctr">
-              <a:lnSpc>
-                <a:spcPct val="100000"/>
-              </a:lnSpc>
-            </a:pPr>
-            <a:r>
-              <a:rPr sz="1600" b="1">
-                <a:solidFill>
-                  <a:srgbClr val="1428A0"/>
-                </a:solidFill>
-                <a:latin typeface="Arial"/>
-                <a:ea typeface="Arial"/>
-              </a:rPr>
-              <a:t>WAF를 근원적으로 ≈ 1</a:t>
-            </a:r>
-          </a:p>
-          <a:p>
-            <a:pPr algn="ctr">
-              <a:lnSpc>
-                <a:spcPct val="100000"/>
-              </a:lnSpc>
-            </a:pPr>
-            <a:r>
-              <a:rPr sz="1500" b="0">
-                <a:solidFill>
-                  <a:srgbClr val="555555"/>
-                </a:solidFill>
-                <a:latin typeface="Arial"/>
-                <a:ea typeface="Arial"/>
-              </a:rPr>
-              <a:t>GC 간섭 ↓, p99.9 -55% (TLC)</a:t>
-            </a:r>
-          </a:p>
-        </p:txBody>
-      </p:sp>
-      <p:sp>
-        <p:nvSpPr>
-          <p:cNvPr id="149" name="Rectangle 148"/>
-          <p:cNvSpPr/>
-          <p:nvPr/>
-        </p:nvSpPr>
-        <p:spPr>
-          <a:xfrm>
-            <a:off x="722376" y="8631936"/>
-            <a:ext cx="16843248" cy="731520"/>
-          </a:xfrm>
-          <a:prstGeom prst="rect">
-            <a:avLst/>
-          </a:prstGeom>
-          <a:solidFill>
-            <a:srgbClr val="1428A0"/>
-          </a:solidFill>
-          <a:ln>
-            <a:noFill/>
-          </a:ln>
-          <a:effectLst/>
-        </p:spPr>
-        <p:style>
-          <a:lnRef idx="1">
-            <a:schemeClr val="accent1"/>
-          </a:lnRef>
-          <a:fillRef idx="3">
-            <a:schemeClr val="accent1"/>
-          </a:fillRef>
-          <a:effectRef idx="2">
-            <a:schemeClr val="accent1"/>
-          </a:effectRef>
-          <a:fontRef idx="minor">
-            <a:schemeClr val="lt1"/>
-          </a:fontRef>
-        </p:style>
-        <p:txBody>
-          <a:bodyPr rtlCol="0" anchor="ctr"/>
-          <a:lstStyle/>
-          <a:p>
-            <a:pPr algn="ctr"/>
-          </a:p>
-        </p:txBody>
-      </p:sp>
-      <p:sp>
-        <p:nvSpPr>
-          <p:cNvPr id="150" name="TextBox 149"/>
-          <p:cNvSpPr txBox="1"/>
-          <p:nvPr/>
-        </p:nvSpPr>
-        <p:spPr>
-          <a:xfrm>
-            <a:off x="1088136" y="8631936"/>
-            <a:ext cx="1234440" cy="731520"/>
-          </a:xfrm>
-          <a:prstGeom prst="rect">
-            <a:avLst/>
-          </a:prstGeom>
-          <a:noFill/>
-        </p:spPr>
-        <p:txBody>
-          <a:bodyPr wrap="square" anchor="ctr" lIns="0" rIns="0" tIns="0" bIns="0">
-            <a:spAutoFit/>
-          </a:bodyPr>
-          <a:lstStyle/>
-          <a:p>
-            <a:pPr algn="l">
-              <a:lnSpc>
-                <a:spcPct val="110000"/>
-              </a:lnSpc>
-            </a:pPr>
-            <a:r>
-              <a:rPr sz="2000" b="0">
-                <a:solidFill>
-                  <a:srgbClr val="AAB8E8"/>
-                </a:solidFill>
-                <a:latin typeface="Arial"/>
-                <a:ea typeface="Arial"/>
-              </a:rPr>
-              <a:t>기회</a:t>
-            </a:r>
-          </a:p>
-        </p:txBody>
-      </p:sp>
-      <p:sp>
-        <p:nvSpPr>
-          <p:cNvPr id="151" name="TextBox 150"/>
-          <p:cNvSpPr txBox="1"/>
-          <p:nvPr/>
-        </p:nvSpPr>
-        <p:spPr>
-          <a:xfrm>
-            <a:off x="2322576" y="8631936"/>
-            <a:ext cx="15060168" cy="731520"/>
-          </a:xfrm>
-          <a:prstGeom prst="rect">
-            <a:avLst/>
-          </a:prstGeom>
-          <a:noFill/>
-        </p:spPr>
-        <p:txBody>
-          <a:bodyPr wrap="square" anchor="ctr" lIns="0" rIns="0" tIns="0" bIns="0">
-            <a:spAutoFit/>
-          </a:bodyPr>
-          <a:lstStyle/>
-          <a:p>
-            <a:pPr algn="l">
-              <a:lnSpc>
-                <a:spcPct val="110000"/>
-              </a:lnSpc>
-            </a:pPr>
-            <a:r>
-              <a:rPr sz="2300" b="1">
-                <a:solidFill>
-                  <a:srgbClr val="FFFFFF"/>
-                </a:solidFill>
-                <a:latin typeface="Arial"/>
-                <a:ea typeface="Arial"/>
-              </a:rPr>
-              <a:t>단기에는 Mixed Media로 모아 쓰고, 중장기에는 고객과 FDP로 WAF를 근원적으로 낮춥니다</a:t>
-            </a:r>
-          </a:p>
-        </p:txBody>
-      </p:sp>
-      <p:sp>
-        <p:nvSpPr>
-          <p:cNvPr id="152" name="TextBox 151"/>
-          <p:cNvSpPr txBox="1"/>
-          <p:nvPr/>
-        </p:nvSpPr>
-        <p:spPr>
-          <a:xfrm>
-            <a:off x="722376" y="9601200"/>
-            <a:ext cx="15453359" cy="566928"/>
-          </a:xfrm>
-          <a:prstGeom prst="rect">
-            <a:avLst/>
-          </a:prstGeom>
-          <a:noFill/>
-        </p:spPr>
-        <p:txBody>
-          <a:bodyPr wrap="square" anchor="t" lIns="0" rIns="0" tIns="0" bIns="0">
-            <a:spAutoFit/>
-          </a:bodyPr>
-          <a:lstStyle/>
-          <a:p>
-            <a:pPr algn="l">
-              <a:lnSpc>
-                <a:spcPct val="105000"/>
-              </a:lnSpc>
-            </a:pPr>
-            <a:r>
-              <a:rPr sz="1500" b="0">
-                <a:solidFill>
-                  <a:srgbClr val="555555"/>
-                </a:solidFill>
-                <a:latin typeface="Arial"/>
-                <a:ea typeface="Arial"/>
-              </a:rPr>
-              <a:t>출처: 분할은 과제팀 산술(TLC eSSD 2026 353~435 · 2030 540~1,200EB, 용량형 30~60% · 관행 15~40%는 근거 없는 가정, 범위 = L~H) · Micron 6600 ION 사양 · CSAL 백서(별도 캐시 구성) · Kioxia pSLC VoC · CacheLib FDP · 삼성 PM9D3a · 계단 대응은 과제팀 해석 · 모두 검색 확인 등급</a:t>
-            </a:r>
-          </a:p>
-        </p:txBody>
-      </p:sp>
-      <p:sp>
-        <p:nvSpPr>
-          <p:cNvPr id="153" name="TextBox 152"/>
+              <a:t>출처: 총량 SK hynix 509(2026) · 2030은 McKinsey 1,078과 SK hynix 1,933의 중간 · QLC 비중 TrendForce 18%(2026) · TLC 분할은 과제팀 산술(용량형 30~60% · 관행 15~40%는 근거 없는 가정, 성능 일부 = 성능 RI의 20~40%) · Meta · Forward Insights(재인용) · Micron 6600 ION 사양 · 모두 검색 확인 등급</a:t>
+            </a:r>
+          </a:p>
+        </p:txBody>
+      </p:sp>
+      <p:sp>
+        <p:nvSpPr>
+          <p:cNvPr id="82" name="TextBox 81"/>
           <p:cNvSpPr txBox="1"/>
           <p:nvPr/>
         </p:nvSpPr>

--- a/outputs/presentation/ssd-future-ready-strategy.pptx
+++ b/outputs/presentation/ssd-future-ready-strategy.pptx
@@ -577,7 +577,7 @@
           <a:lstStyle/>
           <a:p>
             <a:r>
-              <a:t>2장입니다. 1장의 제품 포트폴리오를 받치는 핵심 기술 여섯 가지를, 왼쪽에는 어떤 제품군에 쓰이는지, 오른쪽에는 고객과 어떻게 협력해야 하는지로 정리했습니다. 왼쪽부터 보겠습니다. Fault Tolerant는 다이와 플레인 단위로 고장을 격리합니다. 같은 폼팩터에서 245테라바이트는 다이 1,024개, 512테라바이트는 약 2,133개라 고용량일수록 필요합니다. Large Mapping은 매핑 단위를 4킬로바이트에서 8에서 64킬로바이트로 키웁니다. 245테라바이트 드라이브의 매핑 DRAM이 약 245기가바이트에서 15기가바이트로 줄어드는 대신, 매핑 단위보다 작은 쓰기는 최대 16배를 다시 씁니다. Mixed Media는 pSLC와 QLC를 별도 네임스페이스로 나눕니다. 작은 쓰기를 모아 순차로 내리면 4킬로바이트 쓰기의 WAF가 70을 넘던 것이 1.02까지 내려간 사례가 있고, 고객이 요구한 pSLC 비율은 QLC 용량의 0.5에서 2퍼센트입니다. Multi-Tenant QoS는 네임스페이스 단위로 테넌트를 격리합니다. 이웃 테넌트의 쓰기만으로 WAF가 1.28에서 3.0으로 오르고, 하드웨어로 격리하면 p99 지연이 최대 3.1배 줄었습니다. FDP는 배치 핸들로 수명이 같은 데이터를 모읍니다. SLC급, 고내구 TLC, 고용량 QLC에 모두 걸려 가장 넓습니다. Confidential Storage는 RoT, 암호화, 증명으로 기밀 VM의 디스크를 지킵니다. Meta는 Meta도 접근하지 못하는 Muse 기밀 VM을 예고했습니다. 고용량 QLC에는 여섯 가지 중 다섯 가지가 걸립니다. 오른쪽은 협력의 깊이입니다. 가로축은 고객 시스템과 함께 설계돼야 하는 정도, 세로축은 명확한 스펙만으로 최적화가 닫히는지입니다. Mixed Media와 Confidential Storage는 고객 시스템에 깊이 들어갑니다. 그러나 Mixed Media의 인터페이스는 표준 네임스페이스이고, pSLC 비율은 출하 시 정하는 값이며 고객이 이미 수치로 요구합니다. 네임스페이스 간 QoS도 목표 수치로 사내에서 검증할 수 있습니다. Confidential Storage는 Caliptra, SPDM, TDISP, OCP L.O.C.K. 같은 표준이 인터페이스와 동작을 정하고, 삼성은 L.O.C.K.의 공저자입니다. Large Mapping과 QoS도 고객의 쓰기 크기와 지연 목표를 스펙으로 받으면 됩니다. 이 다섯은 고객 요구를 정확한 스펙으로 받는 협력이면 충분합니다. FDP는 다릅니다. 효과는 고객 소프트웨어가 데이터 수명을 얼마나 잘 나누는지와, SSD의 RU 크기와 GC 정책이 맞물릴 때만 납니다. FAST'26의 WARP 연구에서는 같은 FDP 지원 드라이브, 같은 워크로드에서 한 장치는 WAF가 1 근처를 지켰고 다른 장치는 무너졌습니다. 분류가 어긋나 사용자 데이터의 99퍼센트가 한 핸들로 몰리면 효과가 사라지고, 한 핸들의 무효화가 다른 핸들의 WAF까지 키우기도 합니다. 게다가 RUH와 RG 구성은 출하 시 고정되므로, 고객 워크로드를 보고 미리 함께 정해야 합니다. CacheLib이 WAF를 3.22에서 1.03으로 낮춘 결과도 삼성 엔지니어가 Meta의 오픈소스 CacheLib 안에 들어가 구현하고 Meta가 받아들인 결과였습니다. 그래서 FDP는 고객과 함께 설계해야 제대로 동작합니다. 정리하면, 스펙을 정확히 받든 함께 설계하든, 핵심 기술을 제대로 확보하려면 고객과의 협력이 필수입니다. 협력의 깊이 판단은 과제팀의 판단이고, 근거는 위키에 정리했습니다.</a:t>
+              <a:t>2장입니다. 1장의 제품 포트폴리오를 받치는 핵심 기술 여섯 가지를, 왼쪽에는 어떤 제품군에 쓰이는지, 오른쪽에는 고객과 어떻게 협력해야 하는지로 정리했습니다. 왼쪽부터 보겠습니다. Fault Tolerant는 다이와 플레인 단위로 고장을 격리합니다. 같은 폼팩터에서 245테라바이트는 다이 1,024개, 512테라바이트는 약 2,133개라 고용량일수록 필요합니다. Large Mapping은 매핑 단위를 4킬로바이트에서 8에서 64킬로바이트로 키웁니다. 245테라바이트 드라이브의 매핑 DRAM이 약 245기가바이트에서 15기가바이트로 줄어드는 대신, 매핑 단위보다 작은 쓰기는 최대 16배를 다시 씁니다. Mixed Media는 pSLC와 QLC를 별도 네임스페이스로 나눕니다. 작은 쓰기를 모아 순차로 내리면 4킬로바이트 쓰기의 WAF가 70을 넘던 것이 1.02까지 내려간 사례가 있고, 고객이 요구한 pSLC 비율은 QLC 용량의 0.5에서 2퍼센트입니다. Multi-Tenant QoS는 네임스페이스 단위로 테넌트를 격리합니다. 이웃 테넌트의 쓰기만으로 WAF가 1.28에서 3.0으로 오르고, 하드웨어로 격리하면 p99 지연이 최대 3.1배 줄었습니다. FDP는 배치 핸들로 수명이 같은 데이터를 모읍니다. SLC급, 고내구 TLC, 고용량 QLC에 모두 걸려 가장 넓습니다. Confidential Storage는 RoT, 암호화, 증명으로 기밀 VM의 디스크를 지킵니다. Meta는 Meta도 접근하지 못하는 Muse 기밀 VM을 예고했습니다. 고용량 QLC에는 여섯 가지 중 다섯 가지가 걸립니다. 오른쪽은 협력의 깊이입니다. 막대 길이는 고객 시스템과 함께 설계돼야 하는 정도와, 명확한 스펙만으로는 최적화가 닫히지 않는 정도를 더한 값입니다. 여섯 가지 중 Fault Tolerant를 뺀 다섯이 고객 협력이 필요하고, 깊이만 다릅니다. Mixed Media와 Confidential Storage는 고객 시스템에 깊이 들어갑니다. 그러나 Mixed Media의 인터페이스는 표준 네임스페이스이고, pSLC 비율은 출하 시 정하는 값이며 고객이 이미 수치로 요구합니다. 네임스페이스 간 QoS도 목표 수치로 사내에서 검증할 수 있습니다. Confidential Storage는 Caliptra, SPDM, TDISP, OCP L.O.C.K. 같은 표준이 인터페이스와 동작을 정하고, 삼성은 L.O.C.K.의 공저자입니다. Large Mapping과 QoS도 고객의 쓰기 크기와 지연 목표를 스펙으로 받으면 됩니다. 이 다섯은 고객 요구를 정확한 스펙으로 받는 협력이면 충분합니다. FDP는 다릅니다. 효과는 고객 소프트웨어가 데이터 수명을 얼마나 잘 나누는지와, SSD의 RU 크기와 GC 정책이 맞물릴 때만 납니다. FAST'26의 WARP 연구에서는 같은 FDP 지원 드라이브, 같은 워크로드에서 한 장치는 WAF가 1 근처를 지켰고 다른 장치는 무너졌습니다. 분류가 어긋나 사용자 데이터의 99퍼센트가 한 핸들로 몰리면 효과가 사라지고, 한 핸들의 무효화가 다른 핸들의 WAF까지 키우기도 합니다. 게다가 RUH와 RG 구성은 출하 시 고정되므로, 고객 워크로드를 보고 미리 함께 정해야 합니다. CacheLib이 WAF를 3.22에서 1.03으로 낮춘 결과도 삼성 엔지니어가 Meta의 오픈소스 CacheLib 안에 들어가 구현하고 Meta가 받아들인 결과였습니다. 그래서 FDP는 고객과 함께 설계해야 제대로 동작합니다. 정리하면, 스펙을 정확히 받든 함께 설계하든, 핵심 기술을 제대로 확보하려면 고객과의 협력이 필수입니다. 협력의 깊이 판단은 과제팀의 판단이고, 근거는 위키에 정리했습니다.</a:t>
             </a:r>
           </a:p>
         </p:txBody>
@@ -12645,7 +12645,7 @@
                 <a:latin typeface="Arial"/>
                 <a:ea typeface="Arial"/>
               </a:rPr>
-              <a:t>핵심 기술 여섯 가지 중 다섯은 명확한 스펙으로 풀리지만,</a:t>
+              <a:t>핵심 기술 여섯 가지 중 다섯은 고객 협력이 필요하고,</a:t>
             </a:r>
           </a:p>
           <a:p>
@@ -12662,7 +12662,7 @@
                 <a:latin typeface="Arial"/>
                 <a:ea typeface="Arial"/>
               </a:rPr>
-              <a:t>FDP는 고객과 함께 설계해야 제대로 동작합니다</a:t>
+              <a:t>협력의 깊이는 스펙 협력부터 공동 설계까지 다릅니다</a:t>
             </a:r>
           </a:p>
         </p:txBody>
@@ -13265,7 +13265,7 @@
             </a:avLst>
           </a:prstGeom>
           <a:solidFill>
-            <a:srgbClr val="F5F5F5"/>
+            <a:srgbClr val="EEF1FA"/>
           </a:solidFill>
           <a:ln>
             <a:noFill/>
@@ -13435,7 +13435,7 @@
             </a:avLst>
           </a:prstGeom>
           <a:solidFill>
-            <a:srgbClr val="F5F5F5"/>
+            <a:srgbClr val="EEF1FA"/>
           </a:solidFill>
           <a:ln>
             <a:noFill/>
@@ -13605,7 +13605,7 @@
             </a:avLst>
           </a:prstGeom>
           <a:solidFill>
-            <a:srgbClr val="F5F5F5"/>
+            <a:srgbClr val="EEF1FA"/>
           </a:solidFill>
           <a:ln>
             <a:noFill/>
@@ -14171,7 +14171,7 @@
             </a:avLst>
           </a:prstGeom>
           <a:solidFill>
-            <a:srgbClr val="F5F5F5"/>
+            <a:srgbClr val="EEF1FA"/>
           </a:solidFill>
           <a:ln>
             <a:noFill/>
@@ -14403,7 +14403,17 @@
                 <a:latin typeface="Arial"/>
                 <a:ea typeface="Arial"/>
               </a:rPr>
-              <a:t>고객과 어떻게 협력하나</a:t>
+              <a:t>고객 협력의 깊이  </a:t>
+            </a:r>
+            <a:r>
+              <a:rPr sz="1800" b="1">
+                <a:solidFill>
+                  <a:srgbClr val="1428A0"/>
+                </a:solidFill>
+                <a:latin typeface="Arial"/>
+                <a:ea typeface="Arial"/>
+              </a:rPr>
+              <a:t>6개 중 5개가 고객 협력 필요</a:t>
             </a:r>
           </a:p>
         </p:txBody>
@@ -14416,19 +14426,17 @@
         </p:nvSpPr>
         <p:spPr>
           <a:xfrm>
-            <a:off x="8449056" y="3017520"/>
-            <a:ext cx="9070848" cy="4663440"/>
-          </a:xfrm>
-          <a:prstGeom prst="rect">
-            <a:avLst/>
-          </a:prstGeom>
-          <a:solidFill>
-            <a:srgbClr val="FFFFFF"/>
-          </a:solidFill>
-          <a:ln w="9525">
-            <a:solidFill>
-              <a:srgbClr val="D9D9D9"/>
-            </a:solidFill>
+            <a:off x="11192255" y="3017520"/>
+            <a:ext cx="1188720" cy="4681728"/>
+          </a:xfrm>
+          <a:prstGeom prst="rect">
+            <a:avLst/>
+          </a:prstGeom>
+          <a:solidFill>
+            <a:srgbClr val="F5F5F5"/>
+          </a:solidFill>
+          <a:ln>
+            <a:noFill/>
           </a:ln>
           <a:effectLst/>
         </p:spPr>
@@ -14456,20 +14464,60 @@
       </p:sp>
       <p:sp>
         <p:nvSpPr>
-          <p:cNvPr id="45" name="Rectangle 44"/>
+          <p:cNvPr id="45" name="TextBox 44"/>
+          <p:cNvSpPr txBox="1"/>
+          <p:nvPr/>
+        </p:nvSpPr>
+        <p:spPr>
+          <a:xfrm>
+            <a:off x="11192255" y="2596896"/>
+            <a:ext cx="1188720" cy="365760"/>
+          </a:xfrm>
+          <a:prstGeom prst="rect">
+            <a:avLst/>
+          </a:prstGeom>
+          <a:noFill/>
+        </p:spPr>
+        <p:txBody>
+          <a:bodyPr wrap="square" anchor="ctr" lIns="0" rIns="0" tIns="0" bIns="0">
+            <a:spAutoFit/>
+          </a:bodyPr>
+          <a:lstStyle/>
+          <a:p>
+            <a:pPr algn="ctr">
+              <a:lnSpc>
+                <a:spcPct val="110000"/>
+              </a:lnSpc>
+            </a:pPr>
+            <a:r>
+              <a:rPr sz="1700" b="1">
+                <a:solidFill>
+                  <a:srgbClr val="555555"/>
+                </a:solidFill>
+                <a:latin typeface="Arial"/>
+                <a:ea typeface="Arial"/>
+              </a:rPr>
+              <a:t>SSD 안에서</a:t>
+            </a:r>
+          </a:p>
+        </p:txBody>
+      </p:sp>
+      <p:sp>
+        <p:nvSpPr>
+          <p:cNvPr id="46" name="Rectangle 45"/>
           <p:cNvSpPr/>
           <p:nvPr/>
         </p:nvSpPr>
         <p:spPr>
           <a:xfrm>
-            <a:off x="11136714" y="4866815"/>
-            <a:ext cx="6383189" cy="2814144"/>
-          </a:xfrm>
-          <a:prstGeom prst="rect">
-            <a:avLst/>
-          </a:prstGeom>
-          <a:solidFill>
-            <a:srgbClr val="F5F5F5"/>
+            <a:off x="12380976" y="3017520"/>
+            <a:ext cx="3383279" cy="4681728"/>
+          </a:xfrm>
+          <a:prstGeom prst="rect">
+            <a:avLst/>
+          </a:prstGeom>
+          <a:solidFill>
+            <a:srgbClr val="EEF1FA"/>
           </a:solidFill>
           <a:ln>
             <a:noFill/>
@@ -14500,25 +14548,63 @@
       </p:sp>
       <p:sp>
         <p:nvSpPr>
-          <p:cNvPr id="46" name="Rectangle 45"/>
+          <p:cNvPr id="47" name="TextBox 46"/>
+          <p:cNvSpPr txBox="1"/>
+          <p:nvPr/>
+        </p:nvSpPr>
+        <p:spPr>
+          <a:xfrm>
+            <a:off x="12380976" y="2596896"/>
+            <a:ext cx="3383279" cy="365760"/>
+          </a:xfrm>
+          <a:prstGeom prst="rect">
+            <a:avLst/>
+          </a:prstGeom>
+          <a:noFill/>
+        </p:spPr>
+        <p:txBody>
+          <a:bodyPr wrap="square" anchor="ctr" lIns="0" rIns="0" tIns="0" bIns="0">
+            <a:spAutoFit/>
+          </a:bodyPr>
+          <a:lstStyle/>
+          <a:p>
+            <a:pPr algn="ctr">
+              <a:lnSpc>
+                <a:spcPct val="110000"/>
+              </a:lnSpc>
+            </a:pPr>
+            <a:r>
+              <a:rPr sz="1700" b="1">
+                <a:solidFill>
+                  <a:srgbClr val="3C5AC8"/>
+                </a:solidFill>
+                <a:latin typeface="Arial"/>
+                <a:ea typeface="Arial"/>
+              </a:rPr>
+              <a:t>스펙으로 협력</a:t>
+            </a:r>
+          </a:p>
+        </p:txBody>
+      </p:sp>
+      <p:sp>
+        <p:nvSpPr>
+          <p:cNvPr id="48" name="Rectangle 47"/>
           <p:cNvSpPr/>
           <p:nvPr/>
         </p:nvSpPr>
         <p:spPr>
           <a:xfrm>
-            <a:off x="13992352" y="3017520"/>
-            <a:ext cx="3527551" cy="1849295"/>
-          </a:xfrm>
-          <a:prstGeom prst="rect">
-            <a:avLst/>
-          </a:prstGeom>
-          <a:solidFill>
-            <a:srgbClr val="EEF1FA"/>
-          </a:solidFill>
-          <a:ln w="25400">
-            <a:solidFill>
-              <a:srgbClr val="1428A0"/>
-            </a:solidFill>
+            <a:off x="15764255" y="3017520"/>
+            <a:ext cx="1801368" cy="4681728"/>
+          </a:xfrm>
+          <a:prstGeom prst="rect">
+            <a:avLst/>
+          </a:prstGeom>
+          <a:solidFill>
+            <a:srgbClr val="AAB8E8"/>
+          </a:solidFill>
+          <a:ln>
+            <a:noFill/>
           </a:ln>
           <a:effectLst/>
         </p:spPr>
@@ -14546,14 +14632,14 @@
       </p:sp>
       <p:sp>
         <p:nvSpPr>
-          <p:cNvPr id="47" name="TextBox 46"/>
+          <p:cNvPr id="49" name="TextBox 48"/>
           <p:cNvSpPr txBox="1"/>
           <p:nvPr/>
         </p:nvSpPr>
         <p:spPr>
           <a:xfrm>
-            <a:off x="14138656" y="3108960"/>
-            <a:ext cx="2743200" cy="329184"/>
+            <a:off x="15764255" y="2596896"/>
+            <a:ext cx="1801368" cy="365760"/>
           </a:xfrm>
           <a:prstGeom prst="rect">
             <a:avLst/>
@@ -14566,34 +14652,34 @@
           </a:bodyPr>
           <a:lstStyle/>
           <a:p>
-            <a:pPr algn="l">
+            <a:pPr algn="ctr">
               <a:lnSpc>
                 <a:spcPct val="110000"/>
               </a:lnSpc>
             </a:pPr>
             <a:r>
-              <a:rPr sz="1800" b="1">
+              <a:rPr sz="1700" b="1">
                 <a:solidFill>
                   <a:srgbClr val="1428A0"/>
                 </a:solidFill>
                 <a:latin typeface="Arial"/>
                 <a:ea typeface="Arial"/>
               </a:rPr>
-              <a:t>공동 설계 필수</a:t>
-            </a:r>
-          </a:p>
-        </p:txBody>
-      </p:sp>
-      <p:sp>
-        <p:nvSpPr>
-          <p:cNvPr id="48" name="TextBox 47"/>
+              <a:t>공동 설계</a:t>
+            </a:r>
+          </a:p>
+        </p:txBody>
+      </p:sp>
+      <p:sp>
+        <p:nvSpPr>
+          <p:cNvPr id="50" name="TextBox 49"/>
           <p:cNvSpPr txBox="1"/>
           <p:nvPr/>
         </p:nvSpPr>
         <p:spPr>
           <a:xfrm>
-            <a:off x="11283018" y="4958255"/>
-            <a:ext cx="2743200" cy="329184"/>
+            <a:off x="8174736" y="3054096"/>
+            <a:ext cx="2926079" cy="384048"/>
           </a:xfrm>
           <a:prstGeom prst="rect">
             <a:avLst/>
@@ -14612,28 +14698,28 @@
               </a:lnSpc>
             </a:pPr>
             <a:r>
-              <a:rPr sz="1800" b="1">
-                <a:solidFill>
-                  <a:srgbClr val="555555"/>
-                </a:solidFill>
-                <a:latin typeface="Arial"/>
-                <a:ea typeface="Arial"/>
-              </a:rPr>
-              <a:t>스펙으로 협력</a:t>
-            </a:r>
-          </a:p>
-        </p:txBody>
-      </p:sp>
-      <p:sp>
-        <p:nvSpPr>
-          <p:cNvPr id="49" name="TextBox 48"/>
+              <a:rPr sz="1900" b="1">
+                <a:solidFill>
+                  <a:srgbClr val="1428A0"/>
+                </a:solidFill>
+                <a:latin typeface="Arial"/>
+                <a:ea typeface="Arial"/>
+              </a:rPr>
+              <a:t>FDP</a:t>
+            </a:r>
+          </a:p>
+        </p:txBody>
+      </p:sp>
+      <p:sp>
+        <p:nvSpPr>
+          <p:cNvPr id="51" name="TextBox 50"/>
           <p:cNvSpPr txBox="1"/>
           <p:nvPr/>
         </p:nvSpPr>
         <p:spPr>
           <a:xfrm>
-            <a:off x="8558784" y="4958255"/>
-            <a:ext cx="1828800" cy="329184"/>
+            <a:off x="8174736" y="3419856"/>
+            <a:ext cx="2926079" cy="310896"/>
           </a:xfrm>
           <a:prstGeom prst="rect">
             <a:avLst/>
@@ -14652,34 +14738,34 @@
               </a:lnSpc>
             </a:pPr>
             <a:r>
-              <a:rPr sz="1800" b="1">
-                <a:solidFill>
-                  <a:srgbClr val="555555"/>
-                </a:solidFill>
-                <a:latin typeface="Arial"/>
-                <a:ea typeface="Arial"/>
-              </a:rPr>
-              <a:t>SSD 안에서</a:t>
-            </a:r>
-          </a:p>
-        </p:txBody>
-      </p:sp>
-      <p:sp>
-        <p:nvSpPr>
-          <p:cNvPr id="50" name="Rectangle 49"/>
+              <a:rPr sz="1500" b="0">
+                <a:solidFill>
+                  <a:srgbClr val="1428A0"/>
+                </a:solidFill>
+                <a:latin typeface="Arial"/>
+                <a:ea typeface="Arial"/>
+              </a:rPr>
+              <a:t>데이터 수명 분류 · 반복 튜닝</a:t>
+            </a:r>
+          </a:p>
+        </p:txBody>
+      </p:sp>
+      <p:sp>
+        <p:nvSpPr>
+          <p:cNvPr id="52" name="Rectangle 51"/>
           <p:cNvSpPr/>
           <p:nvPr/>
         </p:nvSpPr>
         <p:spPr>
           <a:xfrm>
-            <a:off x="8449056" y="7671816"/>
-            <a:ext cx="9070848" cy="27432"/>
-          </a:xfrm>
-          <a:prstGeom prst="rect">
-            <a:avLst/>
-          </a:prstGeom>
-          <a:solidFill>
-            <a:srgbClr val="555555"/>
+            <a:off x="11192255" y="3200400"/>
+            <a:ext cx="6373368" cy="414528"/>
+          </a:xfrm>
+          <a:prstGeom prst="rect">
+            <a:avLst/>
+          </a:prstGeom>
+          <a:solidFill>
+            <a:srgbClr val="1428A0"/>
           </a:solidFill>
           <a:ln>
             <a:noFill/>
@@ -14710,20 +14796,20 @@
       </p:sp>
       <p:sp>
         <p:nvSpPr>
-          <p:cNvPr id="51" name="Rectangle 50"/>
+          <p:cNvPr id="53" name="Rectangle 52"/>
           <p:cNvSpPr/>
           <p:nvPr/>
         </p:nvSpPr>
         <p:spPr>
           <a:xfrm>
-            <a:off x="8439912" y="3017520"/>
-            <a:ext cx="27432" cy="4663440"/>
-          </a:xfrm>
-          <a:prstGeom prst="rect">
-            <a:avLst/>
-          </a:prstGeom>
-          <a:solidFill>
-            <a:srgbClr val="555555"/>
+            <a:off x="8174736" y="3792321"/>
+            <a:ext cx="9390888" cy="10972"/>
+          </a:xfrm>
+          <a:prstGeom prst="rect">
+            <a:avLst/>
+          </a:prstGeom>
+          <a:solidFill>
+            <a:srgbClr val="FFFFFF"/>
           </a:solidFill>
           <a:ln>
             <a:noFill/>
@@ -14754,14 +14840,14 @@
       </p:sp>
       <p:sp>
         <p:nvSpPr>
-          <p:cNvPr id="52" name="TextBox 51"/>
+          <p:cNvPr id="54" name="TextBox 53"/>
           <p:cNvSpPr txBox="1"/>
           <p:nvPr/>
         </p:nvSpPr>
         <p:spPr>
           <a:xfrm>
-            <a:off x="8449056" y="7735824"/>
-            <a:ext cx="9070848" cy="310896"/>
+            <a:off x="8174736" y="3834384"/>
+            <a:ext cx="2926079" cy="384048"/>
           </a:xfrm>
           <a:prstGeom prst="rect">
             <a:avLst/>
@@ -14774,34 +14860,34 @@
           </a:bodyPr>
           <a:lstStyle/>
           <a:p>
-            <a:pPr algn="r">
+            <a:pPr algn="l">
               <a:lnSpc>
                 <a:spcPct val="110000"/>
               </a:lnSpc>
             </a:pPr>
             <a:r>
-              <a:rPr sz="1600" b="1">
-                <a:solidFill>
-                  <a:srgbClr val="555555"/>
-                </a:solidFill>
-                <a:latin typeface="Arial"/>
-                <a:ea typeface="Arial"/>
-              </a:rPr>
-              <a:t>고객 시스템과 함께 설계되는 정도  →</a:t>
-            </a:r>
-          </a:p>
-        </p:txBody>
-      </p:sp>
-      <p:sp>
-        <p:nvSpPr>
-          <p:cNvPr id="53" name="TextBox 52"/>
+              <a:rPr sz="1900" b="1">
+                <a:solidFill>
+                  <a:srgbClr val="1A1A1A"/>
+                </a:solidFill>
+                <a:latin typeface="Arial"/>
+                <a:ea typeface="Arial"/>
+              </a:rPr>
+              <a:t>Mixed Media</a:t>
+            </a:r>
+          </a:p>
+        </p:txBody>
+      </p:sp>
+      <p:sp>
+        <p:nvSpPr>
+          <p:cNvPr id="55" name="TextBox 54"/>
           <p:cNvSpPr txBox="1"/>
           <p:nvPr/>
         </p:nvSpPr>
         <p:spPr>
           <a:xfrm>
-            <a:off x="8174736" y="2633472"/>
-            <a:ext cx="4206240" cy="310896"/>
+            <a:off x="8174736" y="4200144"/>
+            <a:ext cx="2926079" cy="310896"/>
           </a:xfrm>
           <a:prstGeom prst="rect">
             <a:avLst/>
@@ -14820,34 +14906,34 @@
               </a:lnSpc>
             </a:pPr>
             <a:r>
-              <a:rPr sz="1600" b="1">
-                <a:solidFill>
-                  <a:srgbClr val="555555"/>
-                </a:solidFill>
-                <a:latin typeface="Arial"/>
-                <a:ea typeface="Arial"/>
-              </a:rPr>
-              <a:t>↑  스펙만으로는 안 닫힘</a:t>
-            </a:r>
-          </a:p>
-        </p:txBody>
-      </p:sp>
-      <p:sp>
-        <p:nvSpPr>
-          <p:cNvPr id="54" name="Oval 53"/>
+              <a:rPr sz="1500" b="0">
+                <a:solidFill>
+                  <a:srgbClr val="1428A0"/>
+                </a:solidFill>
+                <a:latin typeface="Arial"/>
+                <a:ea typeface="Arial"/>
+              </a:rPr>
+              <a:t>데이터 분리 · pSLC 비율</a:t>
+            </a:r>
+          </a:p>
+        </p:txBody>
+      </p:sp>
+      <p:sp>
+        <p:nvSpPr>
+          <p:cNvPr id="56" name="Rectangle 55"/>
           <p:cNvSpPr/>
           <p:nvPr/>
         </p:nvSpPr>
         <p:spPr>
           <a:xfrm>
-            <a:off x="9292336" y="7033943"/>
-            <a:ext cx="329184" cy="329184"/>
-          </a:xfrm>
-          <a:prstGeom prst="ellipse">
-            <a:avLst/>
-          </a:prstGeom>
-          <a:solidFill>
-            <a:srgbClr val="8A8A8A"/>
+            <a:off x="11192255" y="3980688"/>
+            <a:ext cx="4008119" cy="414528"/>
+          </a:xfrm>
+          <a:prstGeom prst="rect">
+            <a:avLst/>
+          </a:prstGeom>
+          <a:solidFill>
+            <a:srgbClr val="3C5AC8"/>
           </a:solidFill>
           <a:ln>
             <a:noFill/>
@@ -14878,60 +14964,20 @@
       </p:sp>
       <p:sp>
         <p:nvSpPr>
-          <p:cNvPr id="55" name="TextBox 54"/>
-          <p:cNvSpPr txBox="1"/>
-          <p:nvPr/>
-        </p:nvSpPr>
-        <p:spPr>
-          <a:xfrm>
-            <a:off x="9712960" y="7015655"/>
-            <a:ext cx="2926080" cy="365760"/>
-          </a:xfrm>
-          <a:prstGeom prst="rect">
-            <a:avLst/>
-          </a:prstGeom>
-          <a:noFill/>
-        </p:spPr>
-        <p:txBody>
-          <a:bodyPr wrap="square" anchor="ctr" lIns="0" rIns="0" tIns="0" bIns="0">
-            <a:spAutoFit/>
-          </a:bodyPr>
-          <a:lstStyle/>
-          <a:p>
-            <a:pPr algn="l">
-              <a:lnSpc>
-                <a:spcPct val="110000"/>
-              </a:lnSpc>
-            </a:pPr>
-            <a:r>
-              <a:rPr sz="1800" b="1">
-                <a:solidFill>
-                  <a:srgbClr val="1A1A1A"/>
-                </a:solidFill>
-                <a:latin typeface="Arial"/>
-                <a:ea typeface="Arial"/>
-              </a:rPr>
-              <a:t>Fault Tolerant</a:t>
-            </a:r>
-          </a:p>
-        </p:txBody>
-      </p:sp>
-      <p:sp>
-        <p:nvSpPr>
-          <p:cNvPr id="56" name="Oval 55"/>
+          <p:cNvPr id="57" name="Rectangle 56"/>
           <p:cNvSpPr/>
           <p:nvPr/>
         </p:nvSpPr>
         <p:spPr>
           <a:xfrm>
-            <a:off x="12315952" y="5297213"/>
-            <a:ext cx="329184" cy="329184"/>
-          </a:xfrm>
-          <a:prstGeom prst="ellipse">
-            <a:avLst/>
-          </a:prstGeom>
-          <a:solidFill>
-            <a:srgbClr val="8A8A8A"/>
+            <a:off x="8174736" y="4572609"/>
+            <a:ext cx="9390888" cy="10972"/>
+          </a:xfrm>
+          <a:prstGeom prst="rect">
+            <a:avLst/>
+          </a:prstGeom>
+          <a:solidFill>
+            <a:srgbClr val="FFFFFF"/>
           </a:solidFill>
           <a:ln>
             <a:noFill/>
@@ -14962,14 +15008,14 @@
       </p:sp>
       <p:sp>
         <p:nvSpPr>
-          <p:cNvPr id="57" name="TextBox 56"/>
+          <p:cNvPr id="58" name="TextBox 57"/>
           <p:cNvSpPr txBox="1"/>
           <p:nvPr/>
         </p:nvSpPr>
         <p:spPr>
           <a:xfrm>
-            <a:off x="12736576" y="5278925"/>
-            <a:ext cx="2926080" cy="365760"/>
+            <a:off x="8174736" y="4614672"/>
+            <a:ext cx="2926079" cy="384048"/>
           </a:xfrm>
           <a:prstGeom prst="rect">
             <a:avLst/>
@@ -14988,34 +15034,74 @@
               </a:lnSpc>
             </a:pPr>
             <a:r>
-              <a:rPr sz="1800" b="1">
+              <a:rPr sz="1900" b="1">
                 <a:solidFill>
                   <a:srgbClr val="1A1A1A"/>
                 </a:solidFill>
                 <a:latin typeface="Arial"/>
                 <a:ea typeface="Arial"/>
               </a:rPr>
-              <a:t>Large Mapping</a:t>
-            </a:r>
-          </a:p>
-        </p:txBody>
-      </p:sp>
-      <p:sp>
-        <p:nvSpPr>
-          <p:cNvPr id="58" name="Oval 57"/>
+              <a:t>Confidential Storage</a:t>
+            </a:r>
+          </a:p>
+        </p:txBody>
+      </p:sp>
+      <p:sp>
+        <p:nvSpPr>
+          <p:cNvPr id="59" name="TextBox 58"/>
+          <p:cNvSpPr txBox="1"/>
+          <p:nvPr/>
+        </p:nvSpPr>
+        <p:spPr>
+          <a:xfrm>
+            <a:off x="8174736" y="4980432"/>
+            <a:ext cx="2926079" cy="310896"/>
+          </a:xfrm>
+          <a:prstGeom prst="rect">
+            <a:avLst/>
+          </a:prstGeom>
+          <a:noFill/>
+        </p:spPr>
+        <p:txBody>
+          <a:bodyPr wrap="square" anchor="ctr" lIns="0" rIns="0" tIns="0" bIns="0">
+            <a:spAutoFit/>
+          </a:bodyPr>
+          <a:lstStyle/>
+          <a:p>
+            <a:pPr algn="l">
+              <a:lnSpc>
+                <a:spcPct val="110000"/>
+              </a:lnSpc>
+            </a:pPr>
+            <a:r>
+              <a:rPr sz="1500" b="0">
+                <a:solidFill>
+                  <a:srgbClr val="1428A0"/>
+                </a:solidFill>
+                <a:latin typeface="Arial"/>
+                <a:ea typeface="Arial"/>
+              </a:rPr>
+              <a:t>기밀 VM · 키 · 증명 연동</a:t>
+            </a:r>
+          </a:p>
+        </p:txBody>
+      </p:sp>
+      <p:sp>
+        <p:nvSpPr>
+          <p:cNvPr id="60" name="Rectangle 59"/>
           <p:cNvSpPr/>
           <p:nvPr/>
         </p:nvSpPr>
         <p:spPr>
           <a:xfrm>
-            <a:off x="12819888" y="5747476"/>
-            <a:ext cx="329184" cy="329184"/>
-          </a:xfrm>
-          <a:prstGeom prst="ellipse">
-            <a:avLst/>
-          </a:prstGeom>
-          <a:solidFill>
-            <a:srgbClr val="8A8A8A"/>
+            <a:off x="11192255" y="4760976"/>
+            <a:ext cx="2880360" cy="414528"/>
+          </a:xfrm>
+          <a:prstGeom prst="rect">
+            <a:avLst/>
+          </a:prstGeom>
+          <a:solidFill>
+            <a:srgbClr val="3C5AC8"/>
           </a:solidFill>
           <a:ln>
             <a:noFill/>
@@ -15046,60 +15132,20 @@
       </p:sp>
       <p:sp>
         <p:nvSpPr>
-          <p:cNvPr id="59" name="TextBox 58"/>
-          <p:cNvSpPr txBox="1"/>
-          <p:nvPr/>
-        </p:nvSpPr>
-        <p:spPr>
-          <a:xfrm>
-            <a:off x="13240511" y="5729188"/>
-            <a:ext cx="2926080" cy="365760"/>
-          </a:xfrm>
-          <a:prstGeom prst="rect">
-            <a:avLst/>
-          </a:prstGeom>
-          <a:noFill/>
-        </p:spPr>
-        <p:txBody>
-          <a:bodyPr wrap="square" anchor="ctr" lIns="0" rIns="0" tIns="0" bIns="0">
-            <a:spAutoFit/>
-          </a:bodyPr>
-          <a:lstStyle/>
-          <a:p>
-            <a:pPr algn="l">
-              <a:lnSpc>
-                <a:spcPct val="110000"/>
-              </a:lnSpc>
-            </a:pPr>
-            <a:r>
-              <a:rPr sz="1800" b="1">
-                <a:solidFill>
-                  <a:srgbClr val="1A1A1A"/>
-                </a:solidFill>
-                <a:latin typeface="Arial"/>
-                <a:ea typeface="Arial"/>
-              </a:rPr>
-              <a:t>Multi-Tenant QoS</a:t>
-            </a:r>
-          </a:p>
-        </p:txBody>
-      </p:sp>
-      <p:sp>
-        <p:nvSpPr>
-          <p:cNvPr id="60" name="Oval 59"/>
+          <p:cNvPr id="61" name="Rectangle 60"/>
           <p:cNvSpPr/>
           <p:nvPr/>
         </p:nvSpPr>
         <p:spPr>
           <a:xfrm>
-            <a:off x="16011482" y="5506264"/>
-            <a:ext cx="329184" cy="329184"/>
-          </a:xfrm>
-          <a:prstGeom prst="ellipse">
-            <a:avLst/>
-          </a:prstGeom>
-          <a:solidFill>
-            <a:srgbClr val="8A8A8A"/>
+            <a:off x="8174736" y="5352897"/>
+            <a:ext cx="9390888" cy="10972"/>
+          </a:xfrm>
+          <a:prstGeom prst="rect">
+            <a:avLst/>
+          </a:prstGeom>
+          <a:solidFill>
+            <a:srgbClr val="FFFFFF"/>
           </a:solidFill>
           <a:ln>
             <a:noFill/>
@@ -15130,14 +15176,14 @@
       </p:sp>
       <p:sp>
         <p:nvSpPr>
-          <p:cNvPr id="61" name="TextBox 60"/>
+          <p:cNvPr id="62" name="TextBox 61"/>
           <p:cNvSpPr txBox="1"/>
           <p:nvPr/>
         </p:nvSpPr>
         <p:spPr>
           <a:xfrm>
-            <a:off x="14164394" y="5103928"/>
-            <a:ext cx="2377440" cy="365760"/>
+            <a:off x="8174736" y="5394959"/>
+            <a:ext cx="2926079" cy="384048"/>
           </a:xfrm>
           <a:prstGeom prst="rect">
             <a:avLst/>
@@ -15150,40 +15196,80 @@
           </a:bodyPr>
           <a:lstStyle/>
           <a:p>
-            <a:pPr algn="r">
+            <a:pPr algn="l">
               <a:lnSpc>
                 <a:spcPct val="110000"/>
               </a:lnSpc>
             </a:pPr>
             <a:r>
-              <a:rPr sz="1800" b="1">
+              <a:rPr sz="1900" b="1">
                 <a:solidFill>
                   <a:srgbClr val="1A1A1A"/>
                 </a:solidFill>
                 <a:latin typeface="Arial"/>
                 <a:ea typeface="Arial"/>
               </a:rPr>
-              <a:t>Mixed Media</a:t>
-            </a:r>
-          </a:p>
-        </p:txBody>
-      </p:sp>
-      <p:sp>
-        <p:nvSpPr>
-          <p:cNvPr id="62" name="Oval 61"/>
+              <a:t>Large Mapping</a:t>
+            </a:r>
+          </a:p>
+        </p:txBody>
+      </p:sp>
+      <p:sp>
+        <p:nvSpPr>
+          <p:cNvPr id="63" name="TextBox 62"/>
+          <p:cNvSpPr txBox="1"/>
+          <p:nvPr/>
+        </p:nvSpPr>
+        <p:spPr>
+          <a:xfrm>
+            <a:off x="8174736" y="5760720"/>
+            <a:ext cx="2926079" cy="310896"/>
+          </a:xfrm>
+          <a:prstGeom prst="rect">
+            <a:avLst/>
+          </a:prstGeom>
+          <a:noFill/>
+        </p:spPr>
+        <p:txBody>
+          <a:bodyPr wrap="square" anchor="ctr" lIns="0" rIns="0" tIns="0" bIns="0">
+            <a:spAutoFit/>
+          </a:bodyPr>
+          <a:lstStyle/>
+          <a:p>
+            <a:pPr algn="l">
+              <a:lnSpc>
+                <a:spcPct val="110000"/>
+              </a:lnSpc>
+            </a:pPr>
+            <a:r>
+              <a:rPr sz="1500" b="0">
+                <a:solidFill>
+                  <a:srgbClr val="1428A0"/>
+                </a:solidFill>
+                <a:latin typeface="Arial"/>
+                <a:ea typeface="Arial"/>
+              </a:rPr>
+              <a:t>쓰기 크기 · IU 정렬</a:t>
+            </a:r>
+          </a:p>
+        </p:txBody>
+      </p:sp>
+      <p:sp>
+        <p:nvSpPr>
+          <p:cNvPr id="64" name="Rectangle 63"/>
           <p:cNvSpPr/>
           <p:nvPr/>
         </p:nvSpPr>
         <p:spPr>
           <a:xfrm>
-            <a:off x="16011482" y="7033943"/>
-            <a:ext cx="329184" cy="329184"/>
-          </a:xfrm>
-          <a:prstGeom prst="ellipse">
-            <a:avLst/>
-          </a:prstGeom>
-          <a:solidFill>
-            <a:srgbClr val="8A8A8A"/>
+            <a:off x="11192255" y="5541264"/>
+            <a:ext cx="2880360" cy="414528"/>
+          </a:xfrm>
+          <a:prstGeom prst="rect">
+            <a:avLst/>
+          </a:prstGeom>
+          <a:solidFill>
+            <a:srgbClr val="3C5AC8"/>
           </a:solidFill>
           <a:ln>
             <a:noFill/>
@@ -15214,60 +15300,20 @@
       </p:sp>
       <p:sp>
         <p:nvSpPr>
-          <p:cNvPr id="63" name="TextBox 62"/>
-          <p:cNvSpPr txBox="1"/>
-          <p:nvPr/>
-        </p:nvSpPr>
-        <p:spPr>
-          <a:xfrm>
-            <a:off x="12993962" y="7015655"/>
-            <a:ext cx="2926080" cy="365760"/>
-          </a:xfrm>
-          <a:prstGeom prst="rect">
-            <a:avLst/>
-          </a:prstGeom>
-          <a:noFill/>
-        </p:spPr>
-        <p:txBody>
-          <a:bodyPr wrap="square" anchor="ctr" lIns="0" rIns="0" tIns="0" bIns="0">
-            <a:spAutoFit/>
-          </a:bodyPr>
-          <a:lstStyle/>
-          <a:p>
-            <a:pPr algn="r">
-              <a:lnSpc>
-                <a:spcPct val="110000"/>
-              </a:lnSpc>
-            </a:pPr>
-            <a:r>
-              <a:rPr sz="1800" b="1">
-                <a:solidFill>
-                  <a:srgbClr val="1A1A1A"/>
-                </a:solidFill>
-                <a:latin typeface="Arial"/>
-                <a:ea typeface="Arial"/>
-              </a:rPr>
-              <a:t>Confidential Storage</a:t>
-            </a:r>
-          </a:p>
-        </p:txBody>
-      </p:sp>
-      <p:sp>
-        <p:nvSpPr>
-          <p:cNvPr id="64" name="Oval 63"/>
+          <p:cNvPr id="65" name="Rectangle 64"/>
           <p:cNvSpPr/>
           <p:nvPr/>
         </p:nvSpPr>
         <p:spPr>
           <a:xfrm>
-            <a:off x="16304903" y="3740211"/>
-            <a:ext cx="548640" cy="548640"/>
-          </a:xfrm>
-          <a:prstGeom prst="ellipse">
-            <a:avLst/>
-          </a:prstGeom>
-          <a:solidFill>
-            <a:srgbClr val="1428A0"/>
+            <a:off x="8174736" y="6133185"/>
+            <a:ext cx="9390888" cy="10972"/>
+          </a:xfrm>
+          <a:prstGeom prst="rect">
+            <a:avLst/>
+          </a:prstGeom>
+          <a:solidFill>
+            <a:srgbClr val="FFFFFF"/>
           </a:solidFill>
           <a:ln>
             <a:noFill/>
@@ -15298,14 +15344,14 @@
       </p:sp>
       <p:sp>
         <p:nvSpPr>
-          <p:cNvPr id="65" name="TextBox 64"/>
+          <p:cNvPr id="66" name="TextBox 65"/>
           <p:cNvSpPr txBox="1"/>
           <p:nvPr/>
         </p:nvSpPr>
         <p:spPr>
           <a:xfrm>
-            <a:off x="15664823" y="3319587"/>
-            <a:ext cx="1828800" cy="384048"/>
+            <a:off x="8174736" y="6175248"/>
+            <a:ext cx="2926079" cy="384048"/>
           </a:xfrm>
           <a:prstGeom prst="rect">
             <a:avLst/>
@@ -15318,34 +15364,34 @@
           </a:bodyPr>
           <a:lstStyle/>
           <a:p>
-            <a:pPr algn="ctr">
+            <a:pPr algn="l">
               <a:lnSpc>
                 <a:spcPct val="110000"/>
               </a:lnSpc>
             </a:pPr>
             <a:r>
-              <a:rPr sz="2400" b="1">
-                <a:solidFill>
-                  <a:srgbClr val="1428A0"/>
-                </a:solidFill>
-                <a:latin typeface="Arial"/>
-                <a:ea typeface="Arial"/>
-              </a:rPr>
-              <a:t>FDP</a:t>
-            </a:r>
-          </a:p>
-        </p:txBody>
-      </p:sp>
-      <p:sp>
-        <p:nvSpPr>
-          <p:cNvPr id="66" name="TextBox 65"/>
+              <a:rPr sz="1900" b="1">
+                <a:solidFill>
+                  <a:srgbClr val="1A1A1A"/>
+                </a:solidFill>
+                <a:latin typeface="Arial"/>
+                <a:ea typeface="Arial"/>
+              </a:rPr>
+              <a:t>Multi-Tenant QoS</a:t>
+            </a:r>
+          </a:p>
+        </p:txBody>
+      </p:sp>
+      <p:sp>
+        <p:nvSpPr>
+          <p:cNvPr id="67" name="TextBox 66"/>
           <p:cNvSpPr txBox="1"/>
           <p:nvPr/>
         </p:nvSpPr>
         <p:spPr>
           <a:xfrm>
-            <a:off x="14138656" y="3842687"/>
-            <a:ext cx="2194560" cy="256032"/>
+            <a:off x="8174736" y="6541008"/>
+            <a:ext cx="2926079" cy="310896"/>
           </a:xfrm>
           <a:prstGeom prst="rect">
             <a:avLst/>
@@ -15366,52 +15412,12 @@
             <a:r>
               <a:rPr sz="1500" b="0">
                 <a:solidFill>
-                  <a:srgbClr val="555555"/>
-                </a:solidFill>
-                <a:latin typeface="Arial"/>
-                <a:ea typeface="Arial"/>
-              </a:rPr>
-              <a:t>CacheLib WAF</a:t>
-            </a:r>
-          </a:p>
-        </p:txBody>
-      </p:sp>
-      <p:sp>
-        <p:nvSpPr>
-          <p:cNvPr id="67" name="TextBox 66"/>
-          <p:cNvSpPr txBox="1"/>
-          <p:nvPr/>
-        </p:nvSpPr>
-        <p:spPr>
-          <a:xfrm>
-            <a:off x="14138656" y="4117007"/>
-            <a:ext cx="640080" cy="292608"/>
-          </a:xfrm>
-          <a:prstGeom prst="rect">
-            <a:avLst/>
-          </a:prstGeom>
-          <a:noFill/>
-        </p:spPr>
-        <p:txBody>
-          <a:bodyPr wrap="square" anchor="ctr" lIns="0" rIns="0" tIns="0" bIns="0">
-            <a:spAutoFit/>
-          </a:bodyPr>
-          <a:lstStyle/>
-          <a:p>
-            <a:pPr algn="l">
-              <a:lnSpc>
-                <a:spcPct val="110000"/>
-              </a:lnSpc>
-            </a:pPr>
-            <a:r>
-              <a:rPr sz="1600" b="0">
-                <a:solidFill>
-                  <a:srgbClr val="555555"/>
-                </a:solidFill>
-                <a:latin typeface="Arial"/>
-                <a:ea typeface="Arial"/>
-              </a:rPr>
-              <a:t>혼자</a:t>
+                  <a:srgbClr val="1428A0"/>
+                </a:solidFill>
+                <a:latin typeface="Arial"/>
+                <a:ea typeface="Arial"/>
+              </a:rPr>
+              <a:t>테넌트 매핑 · 지연 목표</a:t>
             </a:r>
           </a:p>
         </p:txBody>
@@ -15424,14 +15430,14 @@
         </p:nvSpPr>
         <p:spPr>
           <a:xfrm>
-            <a:off x="14778736" y="4181015"/>
-            <a:ext cx="1051560" cy="182880"/>
-          </a:xfrm>
-          <a:prstGeom prst="rect">
-            <a:avLst/>
-          </a:prstGeom>
-          <a:solidFill>
-            <a:srgbClr val="8A8A8A"/>
+            <a:off x="11192255" y="6321552"/>
+            <a:ext cx="2880360" cy="414528"/>
+          </a:xfrm>
+          <a:prstGeom prst="rect">
+            <a:avLst/>
+          </a:prstGeom>
+          <a:solidFill>
+            <a:srgbClr val="3C5AC8"/>
           </a:solidFill>
           <a:ln>
             <a:noFill/>
@@ -15462,100 +15468,20 @@
       </p:sp>
       <p:sp>
         <p:nvSpPr>
-          <p:cNvPr id="69" name="TextBox 68"/>
-          <p:cNvSpPr txBox="1"/>
-          <p:nvPr/>
-        </p:nvSpPr>
-        <p:spPr>
-          <a:xfrm>
-            <a:off x="15885160" y="4117007"/>
-            <a:ext cx="731520" cy="292608"/>
-          </a:xfrm>
-          <a:prstGeom prst="rect">
-            <a:avLst/>
-          </a:prstGeom>
-          <a:noFill/>
-        </p:spPr>
-        <p:txBody>
-          <a:bodyPr wrap="square" anchor="ctr" lIns="0" rIns="0" tIns="0" bIns="0">
-            <a:spAutoFit/>
-          </a:bodyPr>
-          <a:lstStyle/>
-          <a:p>
-            <a:pPr algn="l">
-              <a:lnSpc>
-                <a:spcPct val="110000"/>
-              </a:lnSpc>
-            </a:pPr>
-            <a:r>
-              <a:rPr sz="1600" b="1">
-                <a:solidFill>
-                  <a:srgbClr val="555555"/>
-                </a:solidFill>
-                <a:latin typeface="Arial"/>
-                <a:ea typeface="Arial"/>
-              </a:rPr>
-              <a:t>3.22</a:t>
-            </a:r>
-          </a:p>
-        </p:txBody>
-      </p:sp>
-      <p:sp>
-        <p:nvSpPr>
-          <p:cNvPr id="70" name="TextBox 69"/>
-          <p:cNvSpPr txBox="1"/>
-          <p:nvPr/>
-        </p:nvSpPr>
-        <p:spPr>
-          <a:xfrm>
-            <a:off x="14138656" y="4446191"/>
-            <a:ext cx="640080" cy="292608"/>
-          </a:xfrm>
-          <a:prstGeom prst="rect">
-            <a:avLst/>
-          </a:prstGeom>
-          <a:noFill/>
-        </p:spPr>
-        <p:txBody>
-          <a:bodyPr wrap="square" anchor="ctr" lIns="0" rIns="0" tIns="0" bIns="0">
-            <a:spAutoFit/>
-          </a:bodyPr>
-          <a:lstStyle/>
-          <a:p>
-            <a:pPr algn="l">
-              <a:lnSpc>
-                <a:spcPct val="110000"/>
-              </a:lnSpc>
-            </a:pPr>
-            <a:r>
-              <a:rPr sz="1600" b="1">
-                <a:solidFill>
-                  <a:srgbClr val="1428A0"/>
-                </a:solidFill>
-                <a:latin typeface="Arial"/>
-                <a:ea typeface="Arial"/>
-              </a:rPr>
-              <a:t>함께</a:t>
-            </a:r>
-          </a:p>
-        </p:txBody>
-      </p:sp>
-      <p:sp>
-        <p:nvSpPr>
-          <p:cNvPr id="71" name="Rectangle 70"/>
+          <p:cNvPr id="69" name="Rectangle 68"/>
           <p:cNvSpPr/>
           <p:nvPr/>
         </p:nvSpPr>
         <p:spPr>
           <a:xfrm>
-            <a:off x="14778736" y="4510199"/>
-            <a:ext cx="336368" cy="182880"/>
-          </a:xfrm>
-          <a:prstGeom prst="rect">
-            <a:avLst/>
-          </a:prstGeom>
-          <a:solidFill>
-            <a:srgbClr val="1428A0"/>
+            <a:off x="8174736" y="6913473"/>
+            <a:ext cx="9390888" cy="10972"/>
+          </a:xfrm>
+          <a:prstGeom prst="rect">
+            <a:avLst/>
+          </a:prstGeom>
+          <a:solidFill>
+            <a:srgbClr val="FFFFFF"/>
           </a:solidFill>
           <a:ln>
             <a:noFill/>
@@ -15586,14 +15512,14 @@
       </p:sp>
       <p:sp>
         <p:nvSpPr>
-          <p:cNvPr id="72" name="TextBox 71"/>
+          <p:cNvPr id="70" name="TextBox 69"/>
           <p:cNvSpPr txBox="1"/>
           <p:nvPr/>
         </p:nvSpPr>
         <p:spPr>
           <a:xfrm>
-            <a:off x="15169968" y="4446191"/>
-            <a:ext cx="731520" cy="292608"/>
+            <a:off x="8174736" y="6955536"/>
+            <a:ext cx="2926079" cy="384048"/>
           </a:xfrm>
           <a:prstGeom prst="rect">
             <a:avLst/>
@@ -15612,34 +15538,74 @@
               </a:lnSpc>
             </a:pPr>
             <a:r>
-              <a:rPr sz="1600" b="1">
-                <a:solidFill>
-                  <a:srgbClr val="1428A0"/>
-                </a:solidFill>
-                <a:latin typeface="Arial"/>
-                <a:ea typeface="Arial"/>
-              </a:rPr>
-              <a:t>1.03</a:t>
-            </a:r>
-          </a:p>
-        </p:txBody>
-      </p:sp>
-      <p:sp>
-        <p:nvSpPr>
-          <p:cNvPr id="73" name="Rectangle 72"/>
+              <a:rPr sz="1900" b="1">
+                <a:solidFill>
+                  <a:srgbClr val="555555"/>
+                </a:solidFill>
+                <a:latin typeface="Arial"/>
+                <a:ea typeface="Arial"/>
+              </a:rPr>
+              <a:t>Fault Tolerant</a:t>
+            </a:r>
+          </a:p>
+        </p:txBody>
+      </p:sp>
+      <p:sp>
+        <p:nvSpPr>
+          <p:cNvPr id="71" name="TextBox 70"/>
+          <p:cNvSpPr txBox="1"/>
+          <p:nvPr/>
+        </p:nvSpPr>
+        <p:spPr>
+          <a:xfrm>
+            <a:off x="8174736" y="7321295"/>
+            <a:ext cx="2926079" cy="310896"/>
+          </a:xfrm>
+          <a:prstGeom prst="rect">
+            <a:avLst/>
+          </a:prstGeom>
+          <a:noFill/>
+        </p:spPr>
+        <p:txBody>
+          <a:bodyPr wrap="square" anchor="ctr" lIns="0" rIns="0" tIns="0" bIns="0">
+            <a:spAutoFit/>
+          </a:bodyPr>
+          <a:lstStyle/>
+          <a:p>
+            <a:pPr algn="l">
+              <a:lnSpc>
+                <a:spcPct val="110000"/>
+              </a:lnSpc>
+            </a:pPr>
+            <a:r>
+              <a:rPr sz="1500" b="0">
+                <a:solidFill>
+                  <a:srgbClr val="555555"/>
+                </a:solidFill>
+                <a:latin typeface="Arial"/>
+                <a:ea typeface="Arial"/>
+              </a:rPr>
+              <a:t>SSD 안에서 완결</a:t>
+            </a:r>
+          </a:p>
+        </p:txBody>
+      </p:sp>
+      <p:sp>
+        <p:nvSpPr>
+          <p:cNvPr id="72" name="Rectangle 71"/>
           <p:cNvSpPr/>
           <p:nvPr/>
         </p:nvSpPr>
         <p:spPr>
           <a:xfrm>
-            <a:off x="722376" y="8595360"/>
-            <a:ext cx="16843248" cy="731520"/>
-          </a:xfrm>
-          <a:prstGeom prst="rect">
-            <a:avLst/>
-          </a:prstGeom>
-          <a:solidFill>
-            <a:srgbClr val="1428A0"/>
+            <a:off x="11192255" y="7101840"/>
+            <a:ext cx="502920" cy="414528"/>
+          </a:xfrm>
+          <a:prstGeom prst="rect">
+            <a:avLst/>
+          </a:prstGeom>
+          <a:solidFill>
+            <a:srgbClr val="8A8A8A"/>
           </a:solidFill>
           <a:ln>
             <a:noFill/>
@@ -15670,14 +15636,14 @@
       </p:sp>
       <p:sp>
         <p:nvSpPr>
-          <p:cNvPr id="74" name="TextBox 73"/>
+          <p:cNvPr id="73" name="TextBox 72"/>
           <p:cNvSpPr txBox="1"/>
           <p:nvPr/>
         </p:nvSpPr>
         <p:spPr>
           <a:xfrm>
-            <a:off x="1088136" y="8595360"/>
-            <a:ext cx="1234440" cy="731520"/>
+            <a:off x="12563855" y="3200400"/>
+            <a:ext cx="4818888" cy="414528"/>
           </a:xfrm>
           <a:prstGeom prst="rect">
             <a:avLst/>
@@ -15690,34 +15656,176 @@
           </a:bodyPr>
           <a:lstStyle/>
           <a:p>
-            <a:pPr algn="l">
+            <a:pPr algn="r">
               <a:lnSpc>
                 <a:spcPct val="110000"/>
               </a:lnSpc>
             </a:pPr>
             <a:r>
-              <a:rPr sz="2000" b="0">
+              <a:rPr sz="1600" b="0">
                 <a:solidFill>
                   <a:srgbClr val="AAB8E8"/>
                 </a:solidFill>
                 <a:latin typeface="Arial"/>
                 <a:ea typeface="Arial"/>
               </a:rPr>
-              <a:t>결론</a:t>
-            </a:r>
-          </a:p>
-        </p:txBody>
-      </p:sp>
-      <p:sp>
-        <p:nvSpPr>
-          <p:cNvPr id="75" name="TextBox 74"/>
+              <a:t>CacheLib WAF  </a:t>
+            </a:r>
+            <a:r>
+              <a:rPr sz="1800" b="1">
+                <a:solidFill>
+                  <a:srgbClr val="FFFFFF"/>
+                </a:solidFill>
+                <a:latin typeface="Arial"/>
+                <a:ea typeface="Arial"/>
+              </a:rPr>
+              <a:t>3.22 → 1.03</a:t>
+            </a:r>
+          </a:p>
+        </p:txBody>
+      </p:sp>
+      <p:sp>
+        <p:nvSpPr>
+          <p:cNvPr id="74" name="Rectangle 73"/>
+          <p:cNvSpPr/>
+          <p:nvPr/>
+        </p:nvSpPr>
+        <p:spPr>
+          <a:xfrm>
+            <a:off x="7955279" y="3108960"/>
+            <a:ext cx="36576" cy="3718560"/>
+          </a:xfrm>
+          <a:prstGeom prst="rect">
+            <a:avLst/>
+          </a:prstGeom>
+          <a:solidFill>
+            <a:srgbClr val="1428A0"/>
+          </a:solidFill>
+          <a:ln>
+            <a:noFill/>
+          </a:ln>
+          <a:effectLst/>
+        </p:spPr>
+        <p:style>
+          <a:lnRef idx="1">
+            <a:schemeClr val="accent1"/>
+          </a:lnRef>
+          <a:fillRef idx="3">
+            <a:schemeClr val="accent1"/>
+          </a:fillRef>
+          <a:effectRef idx="2">
+            <a:schemeClr val="accent1"/>
+          </a:effectRef>
+          <a:fontRef idx="minor">
+            <a:schemeClr val="lt1"/>
+          </a:fontRef>
+        </p:style>
+        <p:txBody>
+          <a:bodyPr rtlCol="0" anchor="ctr"/>
+          <a:lstStyle/>
+          <a:p>
+            <a:pPr algn="ctr"/>
+          </a:p>
+        </p:txBody>
+      </p:sp>
+      <p:sp>
+        <p:nvSpPr>
+          <p:cNvPr id="75" name="Rectangle 74"/>
+          <p:cNvSpPr/>
+          <p:nvPr/>
+        </p:nvSpPr>
+        <p:spPr>
+          <a:xfrm>
+            <a:off x="7955279" y="3108960"/>
+            <a:ext cx="128016" cy="36576"/>
+          </a:xfrm>
+          <a:prstGeom prst="rect">
+            <a:avLst/>
+          </a:prstGeom>
+          <a:solidFill>
+            <a:srgbClr val="1428A0"/>
+          </a:solidFill>
+          <a:ln>
+            <a:noFill/>
+          </a:ln>
+          <a:effectLst/>
+        </p:spPr>
+        <p:style>
+          <a:lnRef idx="1">
+            <a:schemeClr val="accent1"/>
+          </a:lnRef>
+          <a:fillRef idx="3">
+            <a:schemeClr val="accent1"/>
+          </a:fillRef>
+          <a:effectRef idx="2">
+            <a:schemeClr val="accent1"/>
+          </a:effectRef>
+          <a:fontRef idx="minor">
+            <a:schemeClr val="lt1"/>
+          </a:fontRef>
+        </p:style>
+        <p:txBody>
+          <a:bodyPr rtlCol="0" anchor="ctr"/>
+          <a:lstStyle/>
+          <a:p>
+            <a:pPr algn="ctr"/>
+          </a:p>
+        </p:txBody>
+      </p:sp>
+      <p:sp>
+        <p:nvSpPr>
+          <p:cNvPr id="76" name="Rectangle 75"/>
+          <p:cNvSpPr/>
+          <p:nvPr/>
+        </p:nvSpPr>
+        <p:spPr>
+          <a:xfrm>
+            <a:off x="7955279" y="6790944"/>
+            <a:ext cx="128016" cy="36576"/>
+          </a:xfrm>
+          <a:prstGeom prst="rect">
+            <a:avLst/>
+          </a:prstGeom>
+          <a:solidFill>
+            <a:srgbClr val="1428A0"/>
+          </a:solidFill>
+          <a:ln>
+            <a:noFill/>
+          </a:ln>
+          <a:effectLst/>
+        </p:spPr>
+        <p:style>
+          <a:lnRef idx="1">
+            <a:schemeClr val="accent1"/>
+          </a:lnRef>
+          <a:fillRef idx="3">
+            <a:schemeClr val="accent1"/>
+          </a:fillRef>
+          <a:effectRef idx="2">
+            <a:schemeClr val="accent1"/>
+          </a:effectRef>
+          <a:fontRef idx="minor">
+            <a:schemeClr val="lt1"/>
+          </a:fontRef>
+        </p:style>
+        <p:txBody>
+          <a:bodyPr rtlCol="0" anchor="ctr"/>
+          <a:lstStyle/>
+          <a:p>
+            <a:pPr algn="ctr"/>
+          </a:p>
+        </p:txBody>
+      </p:sp>
+      <p:sp>
+        <p:nvSpPr>
+          <p:cNvPr id="77" name="TextBox 76"/>
           <p:cNvSpPr txBox="1"/>
           <p:nvPr/>
         </p:nvSpPr>
         <p:spPr>
           <a:xfrm>
-            <a:off x="2322576" y="8595360"/>
-            <a:ext cx="15060168" cy="731520"/>
+            <a:off x="11192255" y="7754112"/>
+            <a:ext cx="6373368" cy="310896"/>
           </a:xfrm>
           <a:prstGeom prst="rect">
             <a:avLst/>
@@ -15730,12 +15838,136 @@
           </a:bodyPr>
           <a:lstStyle/>
           <a:p>
+            <a:pPr algn="r">
+              <a:lnSpc>
+                <a:spcPct val="110000"/>
+              </a:lnSpc>
+            </a:pPr>
+            <a:r>
+              <a:rPr sz="1500" b="1">
+                <a:solidFill>
+                  <a:srgbClr val="555555"/>
+                </a:solidFill>
+                <a:latin typeface="Arial"/>
+                <a:ea typeface="Arial"/>
+              </a:rPr>
+              <a:t>고객 시스템과 함께 설계되는 정도 + 스펙만으로 안 닫히는 정도  →</a:t>
+            </a:r>
+          </a:p>
+        </p:txBody>
+      </p:sp>
+      <p:sp>
+        <p:nvSpPr>
+          <p:cNvPr id="78" name="Rectangle 77"/>
+          <p:cNvSpPr/>
+          <p:nvPr/>
+        </p:nvSpPr>
+        <p:spPr>
+          <a:xfrm>
+            <a:off x="722376" y="8595360"/>
+            <a:ext cx="16843248" cy="731520"/>
+          </a:xfrm>
+          <a:prstGeom prst="rect">
+            <a:avLst/>
+          </a:prstGeom>
+          <a:solidFill>
+            <a:srgbClr val="1428A0"/>
+          </a:solidFill>
+          <a:ln>
+            <a:noFill/>
+          </a:ln>
+          <a:effectLst/>
+        </p:spPr>
+        <p:style>
+          <a:lnRef idx="1">
+            <a:schemeClr val="accent1"/>
+          </a:lnRef>
+          <a:fillRef idx="3">
+            <a:schemeClr val="accent1"/>
+          </a:fillRef>
+          <a:effectRef idx="2">
+            <a:schemeClr val="accent1"/>
+          </a:effectRef>
+          <a:fontRef idx="minor">
+            <a:schemeClr val="lt1"/>
+          </a:fontRef>
+        </p:style>
+        <p:txBody>
+          <a:bodyPr rtlCol="0" anchor="ctr"/>
+          <a:lstStyle/>
+          <a:p>
+            <a:pPr algn="ctr"/>
+          </a:p>
+        </p:txBody>
+      </p:sp>
+      <p:sp>
+        <p:nvSpPr>
+          <p:cNvPr id="79" name="TextBox 78"/>
+          <p:cNvSpPr txBox="1"/>
+          <p:nvPr/>
+        </p:nvSpPr>
+        <p:spPr>
+          <a:xfrm>
+            <a:off x="1088136" y="8595360"/>
+            <a:ext cx="1234440" cy="731520"/>
+          </a:xfrm>
+          <a:prstGeom prst="rect">
+            <a:avLst/>
+          </a:prstGeom>
+          <a:noFill/>
+        </p:spPr>
+        <p:txBody>
+          <a:bodyPr wrap="square" anchor="ctr" lIns="0" rIns="0" tIns="0" bIns="0">
+            <a:spAutoFit/>
+          </a:bodyPr>
+          <a:lstStyle/>
+          <a:p>
             <a:pPr algn="l">
               <a:lnSpc>
                 <a:spcPct val="110000"/>
               </a:lnSpc>
             </a:pPr>
             <a:r>
+              <a:rPr sz="2000" b="0">
+                <a:solidFill>
+                  <a:srgbClr val="AAB8E8"/>
+                </a:solidFill>
+                <a:latin typeface="Arial"/>
+                <a:ea typeface="Arial"/>
+              </a:rPr>
+              <a:t>결론</a:t>
+            </a:r>
+          </a:p>
+        </p:txBody>
+      </p:sp>
+      <p:sp>
+        <p:nvSpPr>
+          <p:cNvPr id="80" name="TextBox 79"/>
+          <p:cNvSpPr txBox="1"/>
+          <p:nvPr/>
+        </p:nvSpPr>
+        <p:spPr>
+          <a:xfrm>
+            <a:off x="2322576" y="8595360"/>
+            <a:ext cx="15060168" cy="731520"/>
+          </a:xfrm>
+          <a:prstGeom prst="rect">
+            <a:avLst/>
+          </a:prstGeom>
+          <a:noFill/>
+        </p:spPr>
+        <p:txBody>
+          <a:bodyPr wrap="square" anchor="ctr" lIns="0" rIns="0" tIns="0" bIns="0">
+            <a:spAutoFit/>
+          </a:bodyPr>
+          <a:lstStyle/>
+          <a:p>
+            <a:pPr algn="l">
+              <a:lnSpc>
+                <a:spcPct val="110000"/>
+              </a:lnSpc>
+            </a:pPr>
+            <a:r>
               <a:rPr sz="2300" b="1">
                 <a:solidFill>
                   <a:srgbClr val="FFFFFF"/>
@@ -15750,7 +15982,7 @@
       </p:sp>
       <p:sp>
         <p:nvSpPr>
-          <p:cNvPr id="76" name="TextBox 75"/>
+          <p:cNvPr id="81" name="TextBox 80"/>
           <p:cNvSpPr txBox="1"/>
           <p:nvPr/>
         </p:nvSpPr>
@@ -15790,7 +16022,7 @@
       </p:sp>
       <p:sp>
         <p:nvSpPr>
-          <p:cNvPr id="77" name="TextBox 76"/>
+          <p:cNvPr id="82" name="TextBox 81"/>
           <p:cNvSpPr txBox="1"/>
           <p:nvPr/>
         </p:nvSpPr>

--- a/outputs/presentation/ssd-future-ready-strategy.pptx
+++ b/outputs/presentation/ssd-future-ready-strategy.pptx
@@ -578,7 +578,7 @@
           <a:lstStyle/>
           <a:p>
             <a:r>
-              <a:t>2장입니다. 1장의 제품 포트폴리오를 받치는 핵심 기술 여섯 가지를, 왼쪽에는 어떤 제품군에 쓰이는지, 오른쪽에는 고객과 어떻게 협력해야 하는지로 정리했습니다. 왼쪽부터 보겠습니다. Fault Tolerant는 다이와 플레인 단위로 고장을 격리합니다. 같은 폼팩터에서 245테라바이트는 다이 1,024개, 512테라바이트는 약 2,133개라 고용량일수록 필요합니다. Large Mapping은 매핑 단위를 4킬로바이트에서 8에서 64킬로바이트로 키웁니다. 245테라바이트 드라이브의 매핑 DRAM이 약 245기가바이트에서 15기가바이트로 줄어드는 대신, 매핑 단위보다 작은 쓰기는 최대 16배를 다시 씁니다. Mixed Media는 pSLC와 QLC를 별도 네임스페이스로 나눕니다. 작은 쓰기를 모아 순차로 내리면 4킬로바이트 쓰기의 WAF가 70을 넘던 것이 1.02까지 내려간 사례가 있고, 고객이 요구한 pSLC 비율은 QLC 용량의 0.5에서 2퍼센트입니다. Multi-Tenant QoS는 네임스페이스 단위로 테넌트를 격리합니다. 이웃 테넌트의 쓰기만으로 WAF가 1.28에서 3.0으로 오르고, 하드웨어로 격리하면 p99 지연이 최대 3.1배 줄었습니다. FDP는 배치 핸들로 수명이 같은 데이터를 모읍니다. SLC급, 고내구 TLC, 고용량 QLC에 모두 걸려 가장 넓습니다. Confidential Storage는 RoT, 암호화, 증명으로 기밀 VM의 디스크를 지킵니다. Meta는 Meta도 접근하지 못하는 Muse 기밀 VM을 예고했습니다. 고용량 QLC에는 여섯 가지 중 다섯 가지가 걸립니다. 오른쪽은 협력의 깊이입니다. 막대 길이는 고객 시스템과 함께 설계돼야 하는 정도와, 명확한 스펙만으로는 최적화가 닫히지 않는 정도를 더한 값입니다. 여섯 가지 중 Fault Tolerant를 뺀 다섯이 고객 협력이 필요하고, 깊이만 다릅니다. Mixed Media와 Confidential Storage는 고객 시스템에 깊이 들어갑니다. 그러나 Mixed Media의 인터페이스는 표준 네임스페이스이고, pSLC 비율은 출하 시 정하는 값이며 고객이 이미 수치로 요구합니다. 네임스페이스 간 QoS도 목표 수치로 사내에서 검증할 수 있습니다. Confidential Storage는 Caliptra, SPDM, TDISP, OCP L.O.C.K. 같은 표준이 인터페이스와 동작을 정하고, 삼성은 L.O.C.K.의 공저자입니다. Large Mapping과 QoS도 고객의 쓰기 크기와 지연 목표를 스펙으로 받으면 됩니다. 이 다섯은 고객 요구를 정확한 스펙으로 받는 협력이면 충분합니다. FDP는 다릅니다. 효과는 고객 소프트웨어가 데이터 수명을 얼마나 잘 나누는지와, SSD의 RU 크기와 GC 정책이 맞물릴 때만 납니다. FAST'26의 WARP 연구에서는 같은 FDP 지원 드라이브, 같은 워크로드에서 한 장치는 WAF가 1 근처를 지켰고 다른 장치는 무너졌습니다. 분류가 어긋나 사용자 데이터의 99퍼센트가 한 핸들로 몰리면 효과가 사라지고, 한 핸들의 무효화가 다른 핸들의 WAF까지 키우기도 합니다. 게다가 RUH와 RG 구성은 출하 시 고정되므로, 고객 워크로드를 보고 미리 함께 정해야 합니다. CacheLib이 WAF를 3.22에서 1.03으로 낮춘 결과도 삼성 엔지니어가 Meta의 오픈소스 CacheLib 안에 들어가 구현하고 Meta가 받아들인 결과였습니다. 그래서 FDP는 고객과 함께 설계해야 제대로 동작합니다. 정리하면, 스펙을 정확히 받든 함께 설계하든, 핵심 기술을 제대로 확보하려면 고객과의 협력이 필수입니다. 협력의 깊이 판단은 과제팀의 판단이고, 근거는 위키에 정리했습니다.</a:t>
+              <a:t>2장입니다. 1장의 제품 포트폴리오를 받치는 핵심 기술 여섯 가지를, 왼쪽에는 어떤 제품군에 쓰이는지, 오른쪽에는 고객과 어느 단계까지 협력해야 하는지로 정리했습니다. 왼쪽부터 보겠습니다. Fault Tolerant는 다이와 플레인 단위로 고장을 격리합니다. 같은 폼팩터에서 245테라바이트는 다이 1,024개, 512테라바이트는 약 2,133개라 고용량일수록 필요합니다. Large Mapping은 매핑 단위를 4킬로바이트에서 8에서 64킬로바이트로 키웁니다. 245테라바이트 드라이브의 매핑 DRAM이 약 245기가바이트에서 15기가바이트로 줄어드는 대신, 매핑 단위보다 작은 쓰기는 최대 16배를 다시 씁니다. Mixed Media는 pSLC와 QLC를 별도 네임스페이스로 나눕니다. 작은 쓰기를 모아 순차로 내리면 4킬로바이트 쓰기의 WAF가 70을 넘던 것이 1.02까지 내려간 사례가 있고, 고객이 요구한 pSLC 비율은 QLC 용량의 0.5에서 2퍼센트입니다. Multi-Tenant QoS는 네임스페이스 단위로 테넌트를 격리합니다. 이웃 테넌트의 쓰기만으로 WAF가 1.28에서 3.0으로 오르고, 하드웨어로 격리하면 p99 지연이 최대 3.1배 줄었습니다. FDP는 배치 핸들로 수명이 같은 데이터를 모읍니다. SLC급, 고내구 TLC, 고용량 QLC에 모두 걸려 가장 넓습니다. Confidential Storage는 RoT, 암호화, 증명으로 기밀 VM의 디스크를 지킵니다. 고용량 QLC에는 여섯 가지 중 다섯 가지가 걸립니다. 오른쪽은 고객 협력을 두 단계로 나눈 것입니다. 첫째 단계는 고객 시스템 개발입니다. 고객이 자기 시스템에 기능을 넣어야 쓸 수 있지만, 넣고 나면 스펙으로 닫힙니다. Confidential Storage는 고객의 하이퍼바이저, 키 관리, 증명 서비스와 연동해야 하고, 인터페이스는 SPDM, TDISP, L.O.C.K. 표준이 정합니다. Large Mapping은 고객이 쓰기 크기를 매핑 단위에 맞춰야 하고, Multi-Tenant QoS는 고객이 테넌트를 네임스페이스에 나눠 싣고 지연 목표를 줍니다. 둘째 단계는 최적화까지 함께 하는 것입니다. 고객이 개발한 뒤에도, 고객 워크로드에서 양쪽 정책을 함께 맞춰야 효과가 납니다. Mixed Media는 고객 소프트웨어가 작은 쓰기를 pSLC에 모아 내려야 하고, pSLC 비율과 내림 정책이 고객의 쓰기 몰림에 맞아야 WAF가 내려갑니다. pSLC 비율은 출하 시 정해지므로 배치마다 고객 워크로드를 보고 함께 정합니다. 다만 변수가 적어 한 번 맞추면 되므로 단기에 실행할 수 있습니다. FDP는 고객 소프트웨어의 수명 분류와 SSD의 RU 크기, GC 정책이 맞물릴 때만 효과가 납니다. FAST'26의 WARP 연구에서는 같은 FDP 지원 드라이브, 같은 워크로드에서 한 장치는 WAF가 1 근처를 지켰고 다른 장치는 무너졌습니다. 그래서 고객 워크로드 안에서 반복해 함께 튜닝해야 하고, 중장기 과제입니다. CacheLib이 WAF를 3.22에서 1.03으로 낮춘 결과도 삼성 엔지니어가 Meta의 오픈소스 CacheLib 안에 들어가 구현하고 Meta가 받아들인 결과였습니다. 정리하면, 고객 시스템 개발부터 최적화까지 단계는 달라도, 핵심 기술을 제대로 확보하려면 고객과의 협력이 필수입니다. 협력 단계 판단은 과제팀의 판단이고, 근거는 위키에 정리했습니다.</a:t>
             </a:r>
           </a:p>
         </p:txBody>
@@ -12716,7 +12716,7 @@
                 <a:latin typeface="Arial"/>
                 <a:ea typeface="Arial"/>
               </a:rPr>
-              <a:t>핵심 기술 여섯 가지 중 다섯은 고객 협력이 필요하고,</a:t>
+              <a:t>핵심 기술 여섯 가지 중 다섯은 고객 시스템 개발이 필요하고,</a:t>
             </a:r>
           </a:p>
           <a:p>
@@ -12733,7 +12733,7 @@
                 <a:latin typeface="Arial"/>
                 <a:ea typeface="Arial"/>
               </a:rPr>
-              <a:t>협력의 깊이는 스펙 협력부터 공동 설계까지 다릅니다</a:t>
+              <a:t>Mixed Media와 FDP는 고객과 최적화까지 함께 해야 합니다</a:t>
             </a:r>
           </a:p>
         </p:txBody>
@@ -13508,8 +13508,10 @@
           <a:solidFill>
             <a:srgbClr val="EEF1FA"/>
           </a:solidFill>
-          <a:ln>
-            <a:noFill/>
+          <a:ln w="19050">
+            <a:solidFill>
+              <a:srgbClr val="1428A0"/>
+            </a:solidFill>
           </a:ln>
           <a:effectLst/>
         </p:spPr>
@@ -13565,7 +13567,7 @@
             <a:r>
               <a:rPr sz="2000" b="1">
                 <a:solidFill>
-                  <a:srgbClr val="1A1A1A"/>
+                  <a:srgbClr val="1428A0"/>
                 </a:solidFill>
                 <a:latin typeface="Arial"/>
                 <a:ea typeface="Arial"/>
@@ -13630,7 +13632,7 @@
             <a:avLst/>
           </a:prstGeom>
           <a:solidFill>
-            <a:srgbClr val="3C5AC8"/>
+            <a:srgbClr val="1428A0"/>
           </a:solidFill>
           <a:ln>
             <a:noFill/>
@@ -14474,7 +14476,7 @@
                 <a:latin typeface="Arial"/>
                 <a:ea typeface="Arial"/>
               </a:rPr>
-              <a:t>고객 협력의 깊이  </a:t>
+              <a:t>고객 협력의 두 단계  </a:t>
             </a:r>
             <a:r>
               <a:rPr sz="1800" b="1">
@@ -14497,8 +14499,8 @@
         </p:nvSpPr>
         <p:spPr>
           <a:xfrm>
-            <a:off x="11192255" y="3017520"/>
-            <a:ext cx="1188720" cy="4681728"/>
+            <a:off x="10963655" y="3163824"/>
+            <a:ext cx="868679" cy="4535424"/>
           </a:xfrm>
           <a:prstGeom prst="rect">
             <a:avLst/>
@@ -14541,8 +14543,8 @@
         </p:nvSpPr>
         <p:spPr>
           <a:xfrm>
-            <a:off x="11192255" y="2596896"/>
-            <a:ext cx="1188720" cy="365760"/>
+            <a:off x="10963655" y="2615184"/>
+            <a:ext cx="868679" cy="530352"/>
           </a:xfrm>
           <a:prstGeom prst="rect">
             <a:avLst/>
@@ -14557,18 +14559,35 @@
           <a:p>
             <a:pPr algn="ctr">
               <a:lnSpc>
-                <a:spcPct val="110000"/>
-              </a:lnSpc>
-            </a:pPr>
-            <a:r>
-              <a:rPr sz="1700" b="1">
+                <a:spcPct val="100000"/>
+              </a:lnSpc>
+            </a:pPr>
+            <a:r>
+              <a:rPr sz="1500" b="1">
                 <a:solidFill>
                   <a:srgbClr val="555555"/>
                 </a:solidFill>
                 <a:latin typeface="Arial"/>
                 <a:ea typeface="Arial"/>
               </a:rPr>
-              <a:t>SSD 안에서</a:t>
+              <a:t>SSD</a:t>
+            </a:r>
+          </a:p>
+          <a:p>
+            <a:pPr algn="ctr">
+              <a:lnSpc>
+                <a:spcPct val="100000"/>
+              </a:lnSpc>
+            </a:pPr>
+            <a:r>
+              <a:rPr sz="1500" b="1">
+                <a:solidFill>
+                  <a:srgbClr val="555555"/>
+                </a:solidFill>
+                <a:latin typeface="Arial"/>
+                <a:ea typeface="Arial"/>
+              </a:rPr>
+              <a:t>안에서</a:t>
             </a:r>
           </a:p>
         </p:txBody>
@@ -14581,8 +14600,8 @@
         </p:nvSpPr>
         <p:spPr>
           <a:xfrm>
-            <a:off x="12380976" y="3017520"/>
-            <a:ext cx="3383279" cy="4681728"/>
+            <a:off x="11832335" y="3163824"/>
+            <a:ext cx="3154679" cy="4535424"/>
           </a:xfrm>
           <a:prstGeom prst="rect">
             <a:avLst/>
@@ -14625,8 +14644,8 @@
         </p:nvSpPr>
         <p:spPr>
           <a:xfrm>
-            <a:off x="12380976" y="2596896"/>
-            <a:ext cx="3383279" cy="365760"/>
+            <a:off x="11832335" y="2615184"/>
+            <a:ext cx="3154679" cy="530352"/>
           </a:xfrm>
           <a:prstGeom prst="rect">
             <a:avLst/>
@@ -14641,18 +14660,35 @@
           <a:p>
             <a:pPr algn="ctr">
               <a:lnSpc>
-                <a:spcPct val="110000"/>
-              </a:lnSpc>
-            </a:pPr>
-            <a:r>
-              <a:rPr sz="1700" b="1">
+                <a:spcPct val="100000"/>
+              </a:lnSpc>
+            </a:pPr>
+            <a:r>
+              <a:rPr sz="1500" b="1">
                 <a:solidFill>
                   <a:srgbClr val="3C5AC8"/>
                 </a:solidFill>
                 <a:latin typeface="Arial"/>
                 <a:ea typeface="Arial"/>
               </a:rPr>
-              <a:t>스펙으로 협력</a:t>
+              <a:t>① 고객 시스템</a:t>
+            </a:r>
+          </a:p>
+          <a:p>
+            <a:pPr algn="ctr">
+              <a:lnSpc>
+                <a:spcPct val="100000"/>
+              </a:lnSpc>
+            </a:pPr>
+            <a:r>
+              <a:rPr sz="1500" b="1">
+                <a:solidFill>
+                  <a:srgbClr val="3C5AC8"/>
+                </a:solidFill>
+                <a:latin typeface="Arial"/>
+                <a:ea typeface="Arial"/>
+              </a:rPr>
+              <a:t>개발</a:t>
             </a:r>
           </a:p>
         </p:txBody>
@@ -14665,8 +14701,8 @@
         </p:nvSpPr>
         <p:spPr>
           <a:xfrm>
-            <a:off x="15764255" y="3017520"/>
-            <a:ext cx="1801368" cy="4681728"/>
+            <a:off x="14987015" y="3163824"/>
+            <a:ext cx="2578608" cy="4535424"/>
           </a:xfrm>
           <a:prstGeom prst="rect">
             <a:avLst/>
@@ -14709,8 +14745,8 @@
         </p:nvSpPr>
         <p:spPr>
           <a:xfrm>
-            <a:off x="15764255" y="2596896"/>
-            <a:ext cx="1801368" cy="365760"/>
+            <a:off x="14987015" y="2615184"/>
+            <a:ext cx="2578608" cy="530352"/>
           </a:xfrm>
           <a:prstGeom prst="rect">
             <a:avLst/>
@@ -14725,32 +14761,89 @@
           <a:p>
             <a:pPr algn="ctr">
               <a:lnSpc>
+                <a:spcPct val="100000"/>
+              </a:lnSpc>
+            </a:pPr>
+            <a:r>
+              <a:rPr sz="1500" b="1">
+                <a:solidFill>
+                  <a:srgbClr val="1428A0"/>
+                </a:solidFill>
+                <a:latin typeface="Arial"/>
+                <a:ea typeface="Arial"/>
+              </a:rPr>
+              <a:t>② 최적화까지</a:t>
+            </a:r>
+          </a:p>
+          <a:p>
+            <a:pPr algn="ctr">
+              <a:lnSpc>
+                <a:spcPct val="100000"/>
+              </a:lnSpc>
+            </a:pPr>
+            <a:r>
+              <a:rPr sz="1500" b="1">
+                <a:solidFill>
+                  <a:srgbClr val="1428A0"/>
+                </a:solidFill>
+                <a:latin typeface="Arial"/>
+                <a:ea typeface="Arial"/>
+              </a:rPr>
+              <a:t>함께</a:t>
+            </a:r>
+          </a:p>
+        </p:txBody>
+      </p:sp>
+      <p:sp>
+        <p:nvSpPr>
+          <p:cNvPr id="50" name="TextBox 49"/>
+          <p:cNvSpPr txBox="1"/>
+          <p:nvPr/>
+        </p:nvSpPr>
+        <p:spPr>
+          <a:xfrm>
+            <a:off x="8174736" y="3200400"/>
+            <a:ext cx="2697479" cy="384048"/>
+          </a:xfrm>
+          <a:prstGeom prst="rect">
+            <a:avLst/>
+          </a:prstGeom>
+          <a:noFill/>
+        </p:spPr>
+        <p:txBody>
+          <a:bodyPr wrap="square" anchor="ctr" lIns="0" rIns="0" tIns="0" bIns="0">
+            <a:spAutoFit/>
+          </a:bodyPr>
+          <a:lstStyle/>
+          <a:p>
+            <a:pPr algn="l">
+              <a:lnSpc>
                 <a:spcPct val="110000"/>
               </a:lnSpc>
             </a:pPr>
             <a:r>
-              <a:rPr sz="1700" b="1">
+              <a:rPr sz="1900" b="1">
                 <a:solidFill>
                   <a:srgbClr val="1428A0"/>
                 </a:solidFill>
                 <a:latin typeface="Arial"/>
                 <a:ea typeface="Arial"/>
               </a:rPr>
-              <a:t>공동 설계</a:t>
-            </a:r>
-          </a:p>
-        </p:txBody>
-      </p:sp>
-      <p:sp>
-        <p:nvSpPr>
-          <p:cNvPr id="50" name="TextBox 49"/>
-          <p:cNvSpPr txBox="1"/>
-          <p:nvPr/>
-        </p:nvSpPr>
-        <p:spPr>
-          <a:xfrm>
-            <a:off x="8174736" y="3054096"/>
-            <a:ext cx="2926079" cy="384048"/>
+              <a:t>FDP</a:t>
+            </a:r>
+          </a:p>
+        </p:txBody>
+      </p:sp>
+      <p:sp>
+        <p:nvSpPr>
+          <p:cNvPr id="51" name="TextBox 50"/>
+          <p:cNvSpPr txBox="1"/>
+          <p:nvPr/>
+        </p:nvSpPr>
+        <p:spPr>
+          <a:xfrm>
+            <a:off x="8174736" y="3566160"/>
+            <a:ext cx="2697479" cy="310896"/>
           </a:xfrm>
           <a:prstGeom prst="rect">
             <a:avLst/>
@@ -14769,54 +14862,14 @@
               </a:lnSpc>
             </a:pPr>
             <a:r>
-              <a:rPr sz="1900" b="1">
+              <a:rPr sz="1500" b="0">
                 <a:solidFill>
                   <a:srgbClr val="1428A0"/>
                 </a:solidFill>
                 <a:latin typeface="Arial"/>
                 <a:ea typeface="Arial"/>
               </a:rPr>
-              <a:t>FDP</a:t>
-            </a:r>
-          </a:p>
-        </p:txBody>
-      </p:sp>
-      <p:sp>
-        <p:nvSpPr>
-          <p:cNvPr id="51" name="TextBox 50"/>
-          <p:cNvSpPr txBox="1"/>
-          <p:nvPr/>
-        </p:nvSpPr>
-        <p:spPr>
-          <a:xfrm>
-            <a:off x="8174736" y="3419856"/>
-            <a:ext cx="2926079" cy="310896"/>
-          </a:xfrm>
-          <a:prstGeom prst="rect">
-            <a:avLst/>
-          </a:prstGeom>
-          <a:noFill/>
-        </p:spPr>
-        <p:txBody>
-          <a:bodyPr wrap="square" anchor="ctr" lIns="0" rIns="0" tIns="0" bIns="0">
-            <a:spAutoFit/>
-          </a:bodyPr>
-          <a:lstStyle/>
-          <a:p>
-            <a:pPr algn="l">
-              <a:lnSpc>
-                <a:spcPct val="110000"/>
-              </a:lnSpc>
-            </a:pPr>
-            <a:r>
-              <a:rPr sz="1500" b="0">
-                <a:solidFill>
-                  <a:srgbClr val="1428A0"/>
-                </a:solidFill>
-                <a:latin typeface="Arial"/>
-                <a:ea typeface="Arial"/>
-              </a:rPr>
-              <a:t>데이터 수명 분류 · 반복 튜닝</a:t>
+              <a:t>CacheLib WAF 3.22 → 1.03</a:t>
             </a:r>
           </a:p>
         </p:txBody>
@@ -14829,8 +14882,8 @@
         </p:nvSpPr>
         <p:spPr>
           <a:xfrm>
-            <a:off x="11192255" y="3200400"/>
-            <a:ext cx="6373368" cy="414528"/>
+            <a:off x="10963655" y="3300984"/>
+            <a:ext cx="4023359" cy="481583"/>
           </a:xfrm>
           <a:prstGeom prst="rect">
             <a:avLst/>
@@ -14867,14 +14920,98 @@
       </p:sp>
       <p:sp>
         <p:nvSpPr>
-          <p:cNvPr id="53" name="Rectangle 52"/>
+          <p:cNvPr id="53" name="TextBox 52"/>
+          <p:cNvSpPr txBox="1"/>
+          <p:nvPr/>
+        </p:nvSpPr>
+        <p:spPr>
+          <a:xfrm>
+            <a:off x="11942063" y="3300984"/>
+            <a:ext cx="2971800" cy="481583"/>
+          </a:xfrm>
+          <a:prstGeom prst="rect">
+            <a:avLst/>
+          </a:prstGeom>
+          <a:noFill/>
+        </p:spPr>
+        <p:txBody>
+          <a:bodyPr wrap="square" anchor="ctr" lIns="0" rIns="0" tIns="0" bIns="0">
+            <a:spAutoFit/>
+          </a:bodyPr>
+          <a:lstStyle/>
+          <a:p>
+            <a:pPr algn="l">
+              <a:lnSpc>
+                <a:spcPct val="110000"/>
+              </a:lnSpc>
+            </a:pPr>
+            <a:r>
+              <a:rPr sz="1600" b="1">
+                <a:solidFill>
+                  <a:srgbClr val="FFFFFF"/>
+                </a:solidFill>
+                <a:latin typeface="Arial"/>
+                <a:ea typeface="Arial"/>
+              </a:rPr>
+              <a:t>수명 분류 · 배치 핸들</a:t>
+            </a:r>
+          </a:p>
+        </p:txBody>
+      </p:sp>
+      <p:sp>
+        <p:nvSpPr>
+          <p:cNvPr id="54" name="Rectangle 53"/>
           <p:cNvSpPr/>
           <p:nvPr/>
         </p:nvSpPr>
         <p:spPr>
           <a:xfrm>
-            <a:off x="8174736" y="3792321"/>
-            <a:ext cx="9390888" cy="10972"/>
+            <a:off x="14987015" y="3300984"/>
+            <a:ext cx="2578608" cy="481583"/>
+          </a:xfrm>
+          <a:prstGeom prst="rect">
+            <a:avLst/>
+          </a:prstGeom>
+          <a:solidFill>
+            <a:srgbClr val="1428A0"/>
+          </a:solidFill>
+          <a:ln>
+            <a:noFill/>
+          </a:ln>
+          <a:effectLst/>
+        </p:spPr>
+        <p:style>
+          <a:lnRef idx="1">
+            <a:schemeClr val="accent1"/>
+          </a:lnRef>
+          <a:fillRef idx="3">
+            <a:schemeClr val="accent1"/>
+          </a:fillRef>
+          <a:effectRef idx="2">
+            <a:schemeClr val="accent1"/>
+          </a:effectRef>
+          <a:fontRef idx="minor">
+            <a:schemeClr val="lt1"/>
+          </a:fontRef>
+        </p:style>
+        <p:txBody>
+          <a:bodyPr rtlCol="0" anchor="ctr"/>
+          <a:lstStyle/>
+          <a:p>
+            <a:pPr algn="ctr"/>
+          </a:p>
+        </p:txBody>
+      </p:sp>
+      <p:sp>
+        <p:nvSpPr>
+          <p:cNvPr id="55" name="Rectangle 54"/>
+          <p:cNvSpPr/>
+          <p:nvPr/>
+        </p:nvSpPr>
+        <p:spPr>
+          <a:xfrm>
+            <a:off x="14977871" y="3374136"/>
+            <a:ext cx="18288" cy="335279"/>
           </a:xfrm>
           <a:prstGeom prst="rect">
             <a:avLst/>
@@ -14911,14 +15048,14 @@
       </p:sp>
       <p:sp>
         <p:nvSpPr>
-          <p:cNvPr id="54" name="TextBox 53"/>
-          <p:cNvSpPr txBox="1"/>
-          <p:nvPr/>
-        </p:nvSpPr>
-        <p:spPr>
-          <a:xfrm>
-            <a:off x="8174736" y="3834384"/>
-            <a:ext cx="2926079" cy="384048"/>
+          <p:cNvPr id="56" name="TextBox 55"/>
+          <p:cNvSpPr txBox="1"/>
+          <p:nvPr/>
+        </p:nvSpPr>
+        <p:spPr>
+          <a:xfrm>
+            <a:off x="15096743" y="3300984"/>
+            <a:ext cx="2414016" cy="481583"/>
           </a:xfrm>
           <a:prstGeom prst="rect">
             <a:avLst/>
@@ -14937,28 +15074,448 @@
               </a:lnSpc>
             </a:pPr>
             <a:r>
+              <a:rPr sz="1600" b="1">
+                <a:solidFill>
+                  <a:srgbClr val="FFFFFF"/>
+                </a:solidFill>
+                <a:latin typeface="Arial"/>
+                <a:ea typeface="Arial"/>
+              </a:rPr>
+              <a:t>RU · RUH · GC 반복 튜닝</a:t>
+            </a:r>
+          </a:p>
+        </p:txBody>
+      </p:sp>
+      <p:sp>
+        <p:nvSpPr>
+          <p:cNvPr id="57" name="Rectangle 56"/>
+          <p:cNvSpPr/>
+          <p:nvPr/>
+        </p:nvSpPr>
+        <p:spPr>
+          <a:xfrm>
+            <a:off x="8174736" y="3914241"/>
+            <a:ext cx="9390888" cy="10972"/>
+          </a:xfrm>
+          <a:prstGeom prst="rect">
+            <a:avLst/>
+          </a:prstGeom>
+          <a:solidFill>
+            <a:srgbClr val="FFFFFF"/>
+          </a:solidFill>
+          <a:ln>
+            <a:noFill/>
+          </a:ln>
+          <a:effectLst/>
+        </p:spPr>
+        <p:style>
+          <a:lnRef idx="1">
+            <a:schemeClr val="accent1"/>
+          </a:lnRef>
+          <a:fillRef idx="3">
+            <a:schemeClr val="accent1"/>
+          </a:fillRef>
+          <a:effectRef idx="2">
+            <a:schemeClr val="accent1"/>
+          </a:effectRef>
+          <a:fontRef idx="minor">
+            <a:schemeClr val="lt1"/>
+          </a:fontRef>
+        </p:style>
+        <p:txBody>
+          <a:bodyPr rtlCol="0" anchor="ctr"/>
+          <a:lstStyle/>
+          <a:p>
+            <a:pPr algn="ctr"/>
+          </a:p>
+        </p:txBody>
+      </p:sp>
+      <p:sp>
+        <p:nvSpPr>
+          <p:cNvPr id="58" name="TextBox 57"/>
+          <p:cNvSpPr txBox="1"/>
+          <p:nvPr/>
+        </p:nvSpPr>
+        <p:spPr>
+          <a:xfrm>
+            <a:off x="8174736" y="3956304"/>
+            <a:ext cx="2697479" cy="384048"/>
+          </a:xfrm>
+          <a:prstGeom prst="rect">
+            <a:avLst/>
+          </a:prstGeom>
+          <a:noFill/>
+        </p:spPr>
+        <p:txBody>
+          <a:bodyPr wrap="square" anchor="ctr" lIns="0" rIns="0" tIns="0" bIns="0">
+            <a:spAutoFit/>
+          </a:bodyPr>
+          <a:lstStyle/>
+          <a:p>
+            <a:pPr algn="l">
+              <a:lnSpc>
+                <a:spcPct val="110000"/>
+              </a:lnSpc>
+            </a:pPr>
+            <a:r>
               <a:rPr sz="1900" b="1">
                 <a:solidFill>
+                  <a:srgbClr val="1428A0"/>
+                </a:solidFill>
+                <a:latin typeface="Arial"/>
+                <a:ea typeface="Arial"/>
+              </a:rPr>
+              <a:t>Mixed Media</a:t>
+            </a:r>
+          </a:p>
+        </p:txBody>
+      </p:sp>
+      <p:sp>
+        <p:nvSpPr>
+          <p:cNvPr id="59" name="TextBox 58"/>
+          <p:cNvSpPr txBox="1"/>
+          <p:nvPr/>
+        </p:nvSpPr>
+        <p:spPr>
+          <a:xfrm>
+            <a:off x="8174736" y="4322064"/>
+            <a:ext cx="2697479" cy="310896"/>
+          </a:xfrm>
+          <a:prstGeom prst="rect">
+            <a:avLst/>
+          </a:prstGeom>
+          <a:noFill/>
+        </p:spPr>
+        <p:txBody>
+          <a:bodyPr wrap="square" anchor="ctr" lIns="0" rIns="0" tIns="0" bIns="0">
+            <a:spAutoFit/>
+          </a:bodyPr>
+          <a:lstStyle/>
+          <a:p>
+            <a:pPr algn="l">
+              <a:lnSpc>
+                <a:spcPct val="110000"/>
+              </a:lnSpc>
+            </a:pPr>
+            <a:r>
+              <a:rPr sz="1500" b="0">
+                <a:solidFill>
+                  <a:srgbClr val="1428A0"/>
+                </a:solidFill>
+                <a:latin typeface="Arial"/>
+                <a:ea typeface="Arial"/>
+              </a:rPr>
+              <a:t>4KB 쓰기 WAF 70+ → 1.02</a:t>
+            </a:r>
+          </a:p>
+        </p:txBody>
+      </p:sp>
+      <p:sp>
+        <p:nvSpPr>
+          <p:cNvPr id="60" name="Rectangle 59"/>
+          <p:cNvSpPr/>
+          <p:nvPr/>
+        </p:nvSpPr>
+        <p:spPr>
+          <a:xfrm>
+            <a:off x="10963655" y="4056888"/>
+            <a:ext cx="4023359" cy="481583"/>
+          </a:xfrm>
+          <a:prstGeom prst="rect">
+            <a:avLst/>
+          </a:prstGeom>
+          <a:solidFill>
+            <a:srgbClr val="1428A0"/>
+          </a:solidFill>
+          <a:ln>
+            <a:noFill/>
+          </a:ln>
+          <a:effectLst/>
+        </p:spPr>
+        <p:style>
+          <a:lnRef idx="1">
+            <a:schemeClr val="accent1"/>
+          </a:lnRef>
+          <a:fillRef idx="3">
+            <a:schemeClr val="accent1"/>
+          </a:fillRef>
+          <a:effectRef idx="2">
+            <a:schemeClr val="accent1"/>
+          </a:effectRef>
+          <a:fontRef idx="minor">
+            <a:schemeClr val="lt1"/>
+          </a:fontRef>
+        </p:style>
+        <p:txBody>
+          <a:bodyPr rtlCol="0" anchor="ctr"/>
+          <a:lstStyle/>
+          <a:p>
+            <a:pPr algn="ctr"/>
+          </a:p>
+        </p:txBody>
+      </p:sp>
+      <p:sp>
+        <p:nvSpPr>
+          <p:cNvPr id="61" name="TextBox 60"/>
+          <p:cNvSpPr txBox="1"/>
+          <p:nvPr/>
+        </p:nvSpPr>
+        <p:spPr>
+          <a:xfrm>
+            <a:off x="11942063" y="4056888"/>
+            <a:ext cx="2971800" cy="481583"/>
+          </a:xfrm>
+          <a:prstGeom prst="rect">
+            <a:avLst/>
+          </a:prstGeom>
+          <a:noFill/>
+        </p:spPr>
+        <p:txBody>
+          <a:bodyPr wrap="square" anchor="ctr" lIns="0" rIns="0" tIns="0" bIns="0">
+            <a:spAutoFit/>
+          </a:bodyPr>
+          <a:lstStyle/>
+          <a:p>
+            <a:pPr algn="l">
+              <a:lnSpc>
+                <a:spcPct val="110000"/>
+              </a:lnSpc>
+            </a:pPr>
+            <a:r>
+              <a:rPr sz="1600" b="1">
+                <a:solidFill>
+                  <a:srgbClr val="FFFFFF"/>
+                </a:solidFill>
+                <a:latin typeface="Arial"/>
+                <a:ea typeface="Arial"/>
+              </a:rPr>
+              <a:t>pSLC · QLC 모아쓰기</a:t>
+            </a:r>
+          </a:p>
+        </p:txBody>
+      </p:sp>
+      <p:sp>
+        <p:nvSpPr>
+          <p:cNvPr id="62" name="Rectangle 61"/>
+          <p:cNvSpPr/>
+          <p:nvPr/>
+        </p:nvSpPr>
+        <p:spPr>
+          <a:xfrm>
+            <a:off x="14987015" y="4056888"/>
+            <a:ext cx="2062886" cy="481583"/>
+          </a:xfrm>
+          <a:prstGeom prst="rect">
+            <a:avLst/>
+          </a:prstGeom>
+          <a:solidFill>
+            <a:srgbClr val="1428A0"/>
+          </a:solidFill>
+          <a:ln>
+            <a:noFill/>
+          </a:ln>
+          <a:effectLst/>
+        </p:spPr>
+        <p:style>
+          <a:lnRef idx="1">
+            <a:schemeClr val="accent1"/>
+          </a:lnRef>
+          <a:fillRef idx="3">
+            <a:schemeClr val="accent1"/>
+          </a:fillRef>
+          <a:effectRef idx="2">
+            <a:schemeClr val="accent1"/>
+          </a:effectRef>
+          <a:fontRef idx="minor">
+            <a:schemeClr val="lt1"/>
+          </a:fontRef>
+        </p:style>
+        <p:txBody>
+          <a:bodyPr rtlCol="0" anchor="ctr"/>
+          <a:lstStyle/>
+          <a:p>
+            <a:pPr algn="ctr"/>
+          </a:p>
+        </p:txBody>
+      </p:sp>
+      <p:sp>
+        <p:nvSpPr>
+          <p:cNvPr id="63" name="Rectangle 62"/>
+          <p:cNvSpPr/>
+          <p:nvPr/>
+        </p:nvSpPr>
+        <p:spPr>
+          <a:xfrm>
+            <a:off x="14977871" y="4130040"/>
+            <a:ext cx="18288" cy="335279"/>
+          </a:xfrm>
+          <a:prstGeom prst="rect">
+            <a:avLst/>
+          </a:prstGeom>
+          <a:solidFill>
+            <a:srgbClr val="FFFFFF"/>
+          </a:solidFill>
+          <a:ln>
+            <a:noFill/>
+          </a:ln>
+          <a:effectLst/>
+        </p:spPr>
+        <p:style>
+          <a:lnRef idx="1">
+            <a:schemeClr val="accent1"/>
+          </a:lnRef>
+          <a:fillRef idx="3">
+            <a:schemeClr val="accent1"/>
+          </a:fillRef>
+          <a:effectRef idx="2">
+            <a:schemeClr val="accent1"/>
+          </a:effectRef>
+          <a:fontRef idx="minor">
+            <a:schemeClr val="lt1"/>
+          </a:fontRef>
+        </p:style>
+        <p:txBody>
+          <a:bodyPr rtlCol="0" anchor="ctr"/>
+          <a:lstStyle/>
+          <a:p>
+            <a:pPr algn="ctr"/>
+          </a:p>
+        </p:txBody>
+      </p:sp>
+      <p:sp>
+        <p:nvSpPr>
+          <p:cNvPr id="64" name="TextBox 63"/>
+          <p:cNvSpPr txBox="1"/>
+          <p:nvPr/>
+        </p:nvSpPr>
+        <p:spPr>
+          <a:xfrm>
+            <a:off x="15096743" y="4056888"/>
+            <a:ext cx="1898294" cy="481583"/>
+          </a:xfrm>
+          <a:prstGeom prst="rect">
+            <a:avLst/>
+          </a:prstGeom>
+          <a:noFill/>
+        </p:spPr>
+        <p:txBody>
+          <a:bodyPr wrap="square" anchor="ctr" lIns="0" rIns="0" tIns="0" bIns="0">
+            <a:spAutoFit/>
+          </a:bodyPr>
+          <a:lstStyle/>
+          <a:p>
+            <a:pPr algn="l">
+              <a:lnSpc>
+                <a:spcPct val="110000"/>
+              </a:lnSpc>
+            </a:pPr>
+            <a:r>
+              <a:rPr sz="1600" b="1">
+                <a:solidFill>
+                  <a:srgbClr val="FFFFFF"/>
+                </a:solidFill>
+                <a:latin typeface="Arial"/>
+                <a:ea typeface="Arial"/>
+              </a:rPr>
+              <a:t>pSLC 비율 · 내림</a:t>
+            </a:r>
+          </a:p>
+        </p:txBody>
+      </p:sp>
+      <p:sp>
+        <p:nvSpPr>
+          <p:cNvPr id="65" name="Rectangle 64"/>
+          <p:cNvSpPr/>
+          <p:nvPr/>
+        </p:nvSpPr>
+        <p:spPr>
+          <a:xfrm>
+            <a:off x="8174736" y="4670145"/>
+            <a:ext cx="9390888" cy="10972"/>
+          </a:xfrm>
+          <a:prstGeom prst="rect">
+            <a:avLst/>
+          </a:prstGeom>
+          <a:solidFill>
+            <a:srgbClr val="FFFFFF"/>
+          </a:solidFill>
+          <a:ln>
+            <a:noFill/>
+          </a:ln>
+          <a:effectLst/>
+        </p:spPr>
+        <p:style>
+          <a:lnRef idx="1">
+            <a:schemeClr val="accent1"/>
+          </a:lnRef>
+          <a:fillRef idx="3">
+            <a:schemeClr val="accent1"/>
+          </a:fillRef>
+          <a:effectRef idx="2">
+            <a:schemeClr val="accent1"/>
+          </a:effectRef>
+          <a:fontRef idx="minor">
+            <a:schemeClr val="lt1"/>
+          </a:fontRef>
+        </p:style>
+        <p:txBody>
+          <a:bodyPr rtlCol="0" anchor="ctr"/>
+          <a:lstStyle/>
+          <a:p>
+            <a:pPr algn="ctr"/>
+          </a:p>
+        </p:txBody>
+      </p:sp>
+      <p:sp>
+        <p:nvSpPr>
+          <p:cNvPr id="66" name="TextBox 65"/>
+          <p:cNvSpPr txBox="1"/>
+          <p:nvPr/>
+        </p:nvSpPr>
+        <p:spPr>
+          <a:xfrm>
+            <a:off x="8174736" y="4712208"/>
+            <a:ext cx="2697479" cy="384048"/>
+          </a:xfrm>
+          <a:prstGeom prst="rect">
+            <a:avLst/>
+          </a:prstGeom>
+          <a:noFill/>
+        </p:spPr>
+        <p:txBody>
+          <a:bodyPr wrap="square" anchor="ctr" lIns="0" rIns="0" tIns="0" bIns="0">
+            <a:spAutoFit/>
+          </a:bodyPr>
+          <a:lstStyle/>
+          <a:p>
+            <a:pPr algn="l">
+              <a:lnSpc>
+                <a:spcPct val="110000"/>
+              </a:lnSpc>
+            </a:pPr>
+            <a:r>
+              <a:rPr sz="1900" b="1">
+                <a:solidFill>
                   <a:srgbClr val="1A1A1A"/>
                 </a:solidFill>
                 <a:latin typeface="Arial"/>
                 <a:ea typeface="Arial"/>
               </a:rPr>
-              <a:t>Mixed Media</a:t>
-            </a:r>
-          </a:p>
-        </p:txBody>
-      </p:sp>
-      <p:sp>
-        <p:nvSpPr>
-          <p:cNvPr id="55" name="TextBox 54"/>
-          <p:cNvSpPr txBox="1"/>
-          <p:nvPr/>
-        </p:nvSpPr>
-        <p:spPr>
-          <a:xfrm>
-            <a:off x="8174736" y="4200144"/>
-            <a:ext cx="2926079" cy="310896"/>
+              <a:t>Confidential Storage</a:t>
+            </a:r>
+          </a:p>
+        </p:txBody>
+      </p:sp>
+      <p:sp>
+        <p:nvSpPr>
+          <p:cNvPr id="67" name="TextBox 66"/>
+          <p:cNvSpPr txBox="1"/>
+          <p:nvPr/>
+        </p:nvSpPr>
+        <p:spPr>
+          <a:xfrm>
+            <a:off x="8174736" y="5077968"/>
+            <a:ext cx="2697479" cy="310896"/>
           </a:xfrm>
           <a:prstGeom prst="rect">
             <a:avLst/>
@@ -14984,21 +15541,21 @@
                 <a:latin typeface="Arial"/>
                 <a:ea typeface="Arial"/>
               </a:rPr>
-              <a:t>데이터 분리 · pSLC 비율</a:t>
-            </a:r>
-          </a:p>
-        </p:txBody>
-      </p:sp>
-      <p:sp>
-        <p:nvSpPr>
-          <p:cNvPr id="56" name="Rectangle 55"/>
+              <a:t>SPDM · TDISP · L.O.C.K.</a:t>
+            </a:r>
+          </a:p>
+        </p:txBody>
+      </p:sp>
+      <p:sp>
+        <p:nvSpPr>
+          <p:cNvPr id="68" name="Rectangle 67"/>
           <p:cNvSpPr/>
           <p:nvPr/>
         </p:nvSpPr>
         <p:spPr>
           <a:xfrm>
-            <a:off x="11192255" y="3980688"/>
-            <a:ext cx="4008119" cy="414528"/>
+            <a:off x="10963655" y="4812792"/>
+            <a:ext cx="4023359" cy="481583"/>
           </a:xfrm>
           <a:prstGeom prst="rect">
             <a:avLst/>
@@ -15035,13 +15592,53 @@
       </p:sp>
       <p:sp>
         <p:nvSpPr>
-          <p:cNvPr id="57" name="Rectangle 56"/>
+          <p:cNvPr id="69" name="TextBox 68"/>
+          <p:cNvSpPr txBox="1"/>
+          <p:nvPr/>
+        </p:nvSpPr>
+        <p:spPr>
+          <a:xfrm>
+            <a:off x="11942063" y="4812792"/>
+            <a:ext cx="2971800" cy="481583"/>
+          </a:xfrm>
+          <a:prstGeom prst="rect">
+            <a:avLst/>
+          </a:prstGeom>
+          <a:noFill/>
+        </p:spPr>
+        <p:txBody>
+          <a:bodyPr wrap="square" anchor="ctr" lIns="0" rIns="0" tIns="0" bIns="0">
+            <a:spAutoFit/>
+          </a:bodyPr>
+          <a:lstStyle/>
+          <a:p>
+            <a:pPr algn="l">
+              <a:lnSpc>
+                <a:spcPct val="110000"/>
+              </a:lnSpc>
+            </a:pPr>
+            <a:r>
+              <a:rPr sz="1600" b="1">
+                <a:solidFill>
+                  <a:srgbClr val="FFFFFF"/>
+                </a:solidFill>
+                <a:latin typeface="Arial"/>
+                <a:ea typeface="Arial"/>
+              </a:rPr>
+              <a:t>기밀 VM · 키 · 증명 연동</a:t>
+            </a:r>
+          </a:p>
+        </p:txBody>
+      </p:sp>
+      <p:sp>
+        <p:nvSpPr>
+          <p:cNvPr id="70" name="Rectangle 69"/>
           <p:cNvSpPr/>
           <p:nvPr/>
         </p:nvSpPr>
         <p:spPr>
           <a:xfrm>
-            <a:off x="8174736" y="4572609"/>
+            <a:off x="8174736" y="5426049"/>
             <a:ext cx="9390888" cy="10972"/>
           </a:xfrm>
           <a:prstGeom prst="rect">
@@ -15079,14 +15676,14 @@
       </p:sp>
       <p:sp>
         <p:nvSpPr>
-          <p:cNvPr id="58" name="TextBox 57"/>
-          <p:cNvSpPr txBox="1"/>
-          <p:nvPr/>
-        </p:nvSpPr>
-        <p:spPr>
-          <a:xfrm>
-            <a:off x="8174736" y="4614672"/>
-            <a:ext cx="2926079" cy="384048"/>
+          <p:cNvPr id="71" name="TextBox 70"/>
+          <p:cNvSpPr txBox="1"/>
+          <p:nvPr/>
+        </p:nvSpPr>
+        <p:spPr>
+          <a:xfrm>
+            <a:off x="8174736" y="5468112"/>
+            <a:ext cx="2697479" cy="384048"/>
           </a:xfrm>
           <a:prstGeom prst="rect">
             <a:avLst/>
@@ -15112,21 +15709,21 @@
                 <a:latin typeface="Arial"/>
                 <a:ea typeface="Arial"/>
               </a:rPr>
-              <a:t>Confidential Storage</a:t>
-            </a:r>
-          </a:p>
-        </p:txBody>
-      </p:sp>
-      <p:sp>
-        <p:nvSpPr>
-          <p:cNvPr id="59" name="TextBox 58"/>
-          <p:cNvSpPr txBox="1"/>
-          <p:nvPr/>
-        </p:nvSpPr>
-        <p:spPr>
-          <a:xfrm>
-            <a:off x="8174736" y="4980432"/>
-            <a:ext cx="2926079" cy="310896"/>
+              <a:t>Large Mapping</a:t>
+            </a:r>
+          </a:p>
+        </p:txBody>
+      </p:sp>
+      <p:sp>
+        <p:nvSpPr>
+          <p:cNvPr id="72" name="TextBox 71"/>
+          <p:cNvSpPr txBox="1"/>
+          <p:nvPr/>
+        </p:nvSpPr>
+        <p:spPr>
+          <a:xfrm>
+            <a:off x="8174736" y="5833872"/>
+            <a:ext cx="2697479" cy="310896"/>
           </a:xfrm>
           <a:prstGeom prst="rect">
             <a:avLst/>
@@ -15152,21 +15749,21 @@
                 <a:latin typeface="Arial"/>
                 <a:ea typeface="Arial"/>
               </a:rPr>
-              <a:t>기밀 VM · 키 · 증명 연동</a:t>
-            </a:r>
-          </a:p>
-        </p:txBody>
-      </p:sp>
-      <p:sp>
-        <p:nvSpPr>
-          <p:cNvPr id="60" name="Rectangle 59"/>
+              <a:t>IU 4KB → 16~64KB</a:t>
+            </a:r>
+          </a:p>
+        </p:txBody>
+      </p:sp>
+      <p:sp>
+        <p:nvSpPr>
+          <p:cNvPr id="73" name="Rectangle 72"/>
           <p:cNvSpPr/>
           <p:nvPr/>
         </p:nvSpPr>
         <p:spPr>
           <a:xfrm>
-            <a:off x="11192255" y="4760976"/>
-            <a:ext cx="2880360" cy="414528"/>
+            <a:off x="10963655" y="5568696"/>
+            <a:ext cx="4023359" cy="481583"/>
           </a:xfrm>
           <a:prstGeom prst="rect">
             <a:avLst/>
@@ -15203,13 +15800,53 @@
       </p:sp>
       <p:sp>
         <p:nvSpPr>
-          <p:cNvPr id="61" name="Rectangle 60"/>
+          <p:cNvPr id="74" name="TextBox 73"/>
+          <p:cNvSpPr txBox="1"/>
+          <p:nvPr/>
+        </p:nvSpPr>
+        <p:spPr>
+          <a:xfrm>
+            <a:off x="11942063" y="5568696"/>
+            <a:ext cx="2971800" cy="481583"/>
+          </a:xfrm>
+          <a:prstGeom prst="rect">
+            <a:avLst/>
+          </a:prstGeom>
+          <a:noFill/>
+        </p:spPr>
+        <p:txBody>
+          <a:bodyPr wrap="square" anchor="ctr" lIns="0" rIns="0" tIns="0" bIns="0">
+            <a:spAutoFit/>
+          </a:bodyPr>
+          <a:lstStyle/>
+          <a:p>
+            <a:pPr algn="l">
+              <a:lnSpc>
+                <a:spcPct val="110000"/>
+              </a:lnSpc>
+            </a:pPr>
+            <a:r>
+              <a:rPr sz="1600" b="1">
+                <a:solidFill>
+                  <a:srgbClr val="FFFFFF"/>
+                </a:solidFill>
+                <a:latin typeface="Arial"/>
+                <a:ea typeface="Arial"/>
+              </a:rPr>
+              <a:t>쓰기 크기 · IU 정렬</a:t>
+            </a:r>
+          </a:p>
+        </p:txBody>
+      </p:sp>
+      <p:sp>
+        <p:nvSpPr>
+          <p:cNvPr id="75" name="Rectangle 74"/>
           <p:cNvSpPr/>
           <p:nvPr/>
         </p:nvSpPr>
         <p:spPr>
           <a:xfrm>
-            <a:off x="8174736" y="5352897"/>
+            <a:off x="8174736" y="6181953"/>
             <a:ext cx="9390888" cy="10972"/>
           </a:xfrm>
           <a:prstGeom prst="rect">
@@ -15247,14 +15884,14 @@
       </p:sp>
       <p:sp>
         <p:nvSpPr>
-          <p:cNvPr id="62" name="TextBox 61"/>
-          <p:cNvSpPr txBox="1"/>
-          <p:nvPr/>
-        </p:nvSpPr>
-        <p:spPr>
-          <a:xfrm>
-            <a:off x="8174736" y="5394959"/>
-            <a:ext cx="2926079" cy="384048"/>
+          <p:cNvPr id="76" name="TextBox 75"/>
+          <p:cNvSpPr txBox="1"/>
+          <p:nvPr/>
+        </p:nvSpPr>
+        <p:spPr>
+          <a:xfrm>
+            <a:off x="8174736" y="6224016"/>
+            <a:ext cx="2697479" cy="384048"/>
           </a:xfrm>
           <a:prstGeom prst="rect">
             <a:avLst/>
@@ -15280,21 +15917,21 @@
                 <a:latin typeface="Arial"/>
                 <a:ea typeface="Arial"/>
               </a:rPr>
-              <a:t>Large Mapping</a:t>
-            </a:r>
-          </a:p>
-        </p:txBody>
-      </p:sp>
-      <p:sp>
-        <p:nvSpPr>
-          <p:cNvPr id="63" name="TextBox 62"/>
-          <p:cNvSpPr txBox="1"/>
-          <p:nvPr/>
-        </p:nvSpPr>
-        <p:spPr>
-          <a:xfrm>
-            <a:off x="8174736" y="5760720"/>
-            <a:ext cx="2926079" cy="310896"/>
+              <a:t>Multi-Tenant QoS</a:t>
+            </a:r>
+          </a:p>
+        </p:txBody>
+      </p:sp>
+      <p:sp>
+        <p:nvSpPr>
+          <p:cNvPr id="77" name="TextBox 76"/>
+          <p:cNvSpPr txBox="1"/>
+          <p:nvPr/>
+        </p:nvSpPr>
+        <p:spPr>
+          <a:xfrm>
+            <a:off x="8174736" y="6589776"/>
+            <a:ext cx="2697479" cy="310896"/>
           </a:xfrm>
           <a:prstGeom prst="rect">
             <a:avLst/>
@@ -15320,21 +15957,21 @@
                 <a:latin typeface="Arial"/>
                 <a:ea typeface="Arial"/>
               </a:rPr>
-              <a:t>쓰기 크기 · IU 정렬</a:t>
-            </a:r>
-          </a:p>
-        </p:txBody>
-      </p:sp>
-      <p:sp>
-        <p:nvSpPr>
-          <p:cNvPr id="64" name="Rectangle 63"/>
+              <a:t>NVM Set · 지연 목표</a:t>
+            </a:r>
+          </a:p>
+        </p:txBody>
+      </p:sp>
+      <p:sp>
+        <p:nvSpPr>
+          <p:cNvPr id="78" name="Rectangle 77"/>
           <p:cNvSpPr/>
           <p:nvPr/>
         </p:nvSpPr>
         <p:spPr>
           <a:xfrm>
-            <a:off x="11192255" y="5541264"/>
-            <a:ext cx="2880360" cy="414528"/>
+            <a:off x="10963655" y="6324600"/>
+            <a:ext cx="4023359" cy="481583"/>
           </a:xfrm>
           <a:prstGeom prst="rect">
             <a:avLst/>
@@ -15371,13 +16008,53 @@
       </p:sp>
       <p:sp>
         <p:nvSpPr>
-          <p:cNvPr id="65" name="Rectangle 64"/>
+          <p:cNvPr id="79" name="TextBox 78"/>
+          <p:cNvSpPr txBox="1"/>
+          <p:nvPr/>
+        </p:nvSpPr>
+        <p:spPr>
+          <a:xfrm>
+            <a:off x="11942063" y="6324600"/>
+            <a:ext cx="2971800" cy="481583"/>
+          </a:xfrm>
+          <a:prstGeom prst="rect">
+            <a:avLst/>
+          </a:prstGeom>
+          <a:noFill/>
+        </p:spPr>
+        <p:txBody>
+          <a:bodyPr wrap="square" anchor="ctr" lIns="0" rIns="0" tIns="0" bIns="0">
+            <a:spAutoFit/>
+          </a:bodyPr>
+          <a:lstStyle/>
+          <a:p>
+            <a:pPr algn="l">
+              <a:lnSpc>
+                <a:spcPct val="110000"/>
+              </a:lnSpc>
+            </a:pPr>
+            <a:r>
+              <a:rPr sz="1600" b="1">
+                <a:solidFill>
+                  <a:srgbClr val="FFFFFF"/>
+                </a:solidFill>
+                <a:latin typeface="Arial"/>
+                <a:ea typeface="Arial"/>
+              </a:rPr>
+              <a:t>테넌트 → 네임스페이스</a:t>
+            </a:r>
+          </a:p>
+        </p:txBody>
+      </p:sp>
+      <p:sp>
+        <p:nvSpPr>
+          <p:cNvPr id="80" name="Rectangle 79"/>
           <p:cNvSpPr/>
           <p:nvPr/>
         </p:nvSpPr>
         <p:spPr>
           <a:xfrm>
-            <a:off x="8174736" y="6133185"/>
+            <a:off x="8174736" y="6937857"/>
             <a:ext cx="9390888" cy="10972"/>
           </a:xfrm>
           <a:prstGeom prst="rect">
@@ -15415,14 +16092,14 @@
       </p:sp>
       <p:sp>
         <p:nvSpPr>
-          <p:cNvPr id="66" name="TextBox 65"/>
-          <p:cNvSpPr txBox="1"/>
-          <p:nvPr/>
-        </p:nvSpPr>
-        <p:spPr>
-          <a:xfrm>
-            <a:off x="8174736" y="6175248"/>
-            <a:ext cx="2926079" cy="384048"/>
+          <p:cNvPr id="81" name="TextBox 80"/>
+          <p:cNvSpPr txBox="1"/>
+          <p:nvPr/>
+        </p:nvSpPr>
+        <p:spPr>
+          <a:xfrm>
+            <a:off x="8174736" y="6979920"/>
+            <a:ext cx="2697479" cy="384048"/>
           </a:xfrm>
           <a:prstGeom prst="rect">
             <a:avLst/>
@@ -15443,26 +16120,26 @@
             <a:r>
               <a:rPr sz="1900" b="1">
                 <a:solidFill>
-                  <a:srgbClr val="1A1A1A"/>
-                </a:solidFill>
-                <a:latin typeface="Arial"/>
-                <a:ea typeface="Arial"/>
-              </a:rPr>
-              <a:t>Multi-Tenant QoS</a:t>
-            </a:r>
-          </a:p>
-        </p:txBody>
-      </p:sp>
-      <p:sp>
-        <p:nvSpPr>
-          <p:cNvPr id="67" name="TextBox 66"/>
-          <p:cNvSpPr txBox="1"/>
-          <p:nvPr/>
-        </p:nvSpPr>
-        <p:spPr>
-          <a:xfrm>
-            <a:off x="8174736" y="6541008"/>
-            <a:ext cx="2926079" cy="310896"/>
+                  <a:srgbClr val="555555"/>
+                </a:solidFill>
+                <a:latin typeface="Arial"/>
+                <a:ea typeface="Arial"/>
+              </a:rPr>
+              <a:t>Fault Tolerant</a:t>
+            </a:r>
+          </a:p>
+        </p:txBody>
+      </p:sp>
+      <p:sp>
+        <p:nvSpPr>
+          <p:cNvPr id="82" name="TextBox 81"/>
+          <p:cNvSpPr txBox="1"/>
+          <p:nvPr/>
+        </p:nvSpPr>
+        <p:spPr>
+          <a:xfrm>
+            <a:off x="8174736" y="7345680"/>
+            <a:ext cx="2697479" cy="310896"/>
           </a:xfrm>
           <a:prstGeom prst="rect">
             <a:avLst/>
@@ -15483,194 +16160,26 @@
             <a:r>
               <a:rPr sz="1500" b="0">
                 <a:solidFill>
-                  <a:srgbClr val="1428A0"/>
-                </a:solidFill>
-                <a:latin typeface="Arial"/>
-                <a:ea typeface="Arial"/>
-              </a:rPr>
-              <a:t>테넌트 매핑 · 지연 목표</a:t>
-            </a:r>
-          </a:p>
-        </p:txBody>
-      </p:sp>
-      <p:sp>
-        <p:nvSpPr>
-          <p:cNvPr id="68" name="Rectangle 67"/>
+                  <a:srgbClr val="555555"/>
+                </a:solidFill>
+                <a:latin typeface="Arial"/>
+                <a:ea typeface="Arial"/>
+              </a:rPr>
+              <a:t>다이 패리티 · 격리</a:t>
+            </a:r>
+          </a:p>
+        </p:txBody>
+      </p:sp>
+      <p:sp>
+        <p:nvSpPr>
+          <p:cNvPr id="83" name="Rectangle 82"/>
           <p:cNvSpPr/>
           <p:nvPr/>
         </p:nvSpPr>
         <p:spPr>
           <a:xfrm>
-            <a:off x="11192255" y="6321552"/>
-            <a:ext cx="2880360" cy="414528"/>
-          </a:xfrm>
-          <a:prstGeom prst="rect">
-            <a:avLst/>
-          </a:prstGeom>
-          <a:solidFill>
-            <a:srgbClr val="3C5AC8"/>
-          </a:solidFill>
-          <a:ln>
-            <a:noFill/>
-          </a:ln>
-          <a:effectLst/>
-        </p:spPr>
-        <p:style>
-          <a:lnRef idx="1">
-            <a:schemeClr val="accent1"/>
-          </a:lnRef>
-          <a:fillRef idx="3">
-            <a:schemeClr val="accent1"/>
-          </a:fillRef>
-          <a:effectRef idx="2">
-            <a:schemeClr val="accent1"/>
-          </a:effectRef>
-          <a:fontRef idx="minor">
-            <a:schemeClr val="lt1"/>
-          </a:fontRef>
-        </p:style>
-        <p:txBody>
-          <a:bodyPr rtlCol="0" anchor="ctr"/>
-          <a:lstStyle/>
-          <a:p>
-            <a:pPr algn="ctr"/>
-          </a:p>
-        </p:txBody>
-      </p:sp>
-      <p:sp>
-        <p:nvSpPr>
-          <p:cNvPr id="69" name="Rectangle 68"/>
-          <p:cNvSpPr/>
-          <p:nvPr/>
-        </p:nvSpPr>
-        <p:spPr>
-          <a:xfrm>
-            <a:off x="8174736" y="6913473"/>
-            <a:ext cx="9390888" cy="10972"/>
-          </a:xfrm>
-          <a:prstGeom prst="rect">
-            <a:avLst/>
-          </a:prstGeom>
-          <a:solidFill>
-            <a:srgbClr val="FFFFFF"/>
-          </a:solidFill>
-          <a:ln>
-            <a:noFill/>
-          </a:ln>
-          <a:effectLst/>
-        </p:spPr>
-        <p:style>
-          <a:lnRef idx="1">
-            <a:schemeClr val="accent1"/>
-          </a:lnRef>
-          <a:fillRef idx="3">
-            <a:schemeClr val="accent1"/>
-          </a:fillRef>
-          <a:effectRef idx="2">
-            <a:schemeClr val="accent1"/>
-          </a:effectRef>
-          <a:fontRef idx="minor">
-            <a:schemeClr val="lt1"/>
-          </a:fontRef>
-        </p:style>
-        <p:txBody>
-          <a:bodyPr rtlCol="0" anchor="ctr"/>
-          <a:lstStyle/>
-          <a:p>
-            <a:pPr algn="ctr"/>
-          </a:p>
-        </p:txBody>
-      </p:sp>
-      <p:sp>
-        <p:nvSpPr>
-          <p:cNvPr id="70" name="TextBox 69"/>
-          <p:cNvSpPr txBox="1"/>
-          <p:nvPr/>
-        </p:nvSpPr>
-        <p:spPr>
-          <a:xfrm>
-            <a:off x="8174736" y="6955536"/>
-            <a:ext cx="2926079" cy="384048"/>
-          </a:xfrm>
-          <a:prstGeom prst="rect">
-            <a:avLst/>
-          </a:prstGeom>
-          <a:noFill/>
-        </p:spPr>
-        <p:txBody>
-          <a:bodyPr wrap="square" anchor="ctr" lIns="0" rIns="0" tIns="0" bIns="0">
-            <a:spAutoFit/>
-          </a:bodyPr>
-          <a:lstStyle/>
-          <a:p>
-            <a:pPr algn="l">
-              <a:lnSpc>
-                <a:spcPct val="110000"/>
-              </a:lnSpc>
-            </a:pPr>
-            <a:r>
-              <a:rPr sz="1900" b="1">
-                <a:solidFill>
-                  <a:srgbClr val="555555"/>
-                </a:solidFill>
-                <a:latin typeface="Arial"/>
-                <a:ea typeface="Arial"/>
-              </a:rPr>
-              <a:t>Fault Tolerant</a:t>
-            </a:r>
-          </a:p>
-        </p:txBody>
-      </p:sp>
-      <p:sp>
-        <p:nvSpPr>
-          <p:cNvPr id="71" name="TextBox 70"/>
-          <p:cNvSpPr txBox="1"/>
-          <p:nvPr/>
-        </p:nvSpPr>
-        <p:spPr>
-          <a:xfrm>
-            <a:off x="8174736" y="7321295"/>
-            <a:ext cx="2926079" cy="310896"/>
-          </a:xfrm>
-          <a:prstGeom prst="rect">
-            <a:avLst/>
-          </a:prstGeom>
-          <a:noFill/>
-        </p:spPr>
-        <p:txBody>
-          <a:bodyPr wrap="square" anchor="ctr" lIns="0" rIns="0" tIns="0" bIns="0">
-            <a:spAutoFit/>
-          </a:bodyPr>
-          <a:lstStyle/>
-          <a:p>
-            <a:pPr algn="l">
-              <a:lnSpc>
-                <a:spcPct val="110000"/>
-              </a:lnSpc>
-            </a:pPr>
-            <a:r>
-              <a:rPr sz="1500" b="0">
-                <a:solidFill>
-                  <a:srgbClr val="555555"/>
-                </a:solidFill>
-                <a:latin typeface="Arial"/>
-                <a:ea typeface="Arial"/>
-              </a:rPr>
-              <a:t>SSD 안에서 완결</a:t>
-            </a:r>
-          </a:p>
-        </p:txBody>
-      </p:sp>
-      <p:sp>
-        <p:nvSpPr>
-          <p:cNvPr id="72" name="Rectangle 71"/>
-          <p:cNvSpPr/>
-          <p:nvPr/>
-        </p:nvSpPr>
-        <p:spPr>
-          <a:xfrm>
-            <a:off x="11192255" y="7101840"/>
-            <a:ext cx="502920" cy="414528"/>
+            <a:off x="10963655" y="7080504"/>
+            <a:ext cx="502920" cy="481583"/>
           </a:xfrm>
           <a:prstGeom prst="rect">
             <a:avLst/>
@@ -15707,14 +16216,14 @@
       </p:sp>
       <p:sp>
         <p:nvSpPr>
-          <p:cNvPr id="73" name="TextBox 72"/>
-          <p:cNvSpPr txBox="1"/>
-          <p:nvPr/>
-        </p:nvSpPr>
-        <p:spPr>
-          <a:xfrm>
-            <a:off x="12563855" y="3200400"/>
-            <a:ext cx="4818888" cy="414528"/>
+          <p:cNvPr id="84" name="TextBox 83"/>
+          <p:cNvSpPr txBox="1"/>
+          <p:nvPr/>
+        </p:nvSpPr>
+        <p:spPr>
+          <a:xfrm>
+            <a:off x="11969495" y="7080504"/>
+            <a:ext cx="2971800" cy="481583"/>
           </a:xfrm>
           <a:prstGeom prst="rect">
             <a:avLst/>
@@ -15727,44 +16236,34 @@
           </a:bodyPr>
           <a:lstStyle/>
           <a:p>
-            <a:pPr algn="r">
+            <a:pPr algn="l">
               <a:lnSpc>
                 <a:spcPct val="110000"/>
               </a:lnSpc>
             </a:pPr>
             <a:r>
-              <a:rPr sz="1600" b="0">
-                <a:solidFill>
-                  <a:srgbClr val="AAB8E8"/>
-                </a:solidFill>
-                <a:latin typeface="Arial"/>
-                <a:ea typeface="Arial"/>
-              </a:rPr>
-              <a:t>CacheLib WAF  </a:t>
-            </a:r>
-            <a:r>
-              <a:rPr sz="1800" b="1">
-                <a:solidFill>
-                  <a:srgbClr val="FFFFFF"/>
-                </a:solidFill>
-                <a:latin typeface="Arial"/>
-                <a:ea typeface="Arial"/>
-              </a:rPr>
-              <a:t>3.22 → 1.03</a:t>
-            </a:r>
-          </a:p>
-        </p:txBody>
-      </p:sp>
-      <p:sp>
-        <p:nvSpPr>
-          <p:cNvPr id="74" name="Rectangle 73"/>
+              <a:rPr sz="1500" b="0">
+                <a:solidFill>
+                  <a:srgbClr val="555555"/>
+                </a:solidFill>
+                <a:latin typeface="Arial"/>
+                <a:ea typeface="Arial"/>
+              </a:rPr>
+              <a:t>고객 협력 없이 SSD 안에서 완결</a:t>
+            </a:r>
+          </a:p>
+        </p:txBody>
+      </p:sp>
+      <p:sp>
+        <p:nvSpPr>
+          <p:cNvPr id="85" name="Rectangle 84"/>
           <p:cNvSpPr/>
           <p:nvPr/>
         </p:nvSpPr>
         <p:spPr>
           <a:xfrm>
-            <a:off x="7955279" y="3108960"/>
-            <a:ext cx="36576" cy="3718560"/>
+            <a:off x="7955279" y="3255264"/>
+            <a:ext cx="36576" cy="3596640"/>
           </a:xfrm>
           <a:prstGeom prst="rect">
             <a:avLst/>
@@ -15801,13 +16300,13 @@
       </p:sp>
       <p:sp>
         <p:nvSpPr>
-          <p:cNvPr id="75" name="Rectangle 74"/>
+          <p:cNvPr id="86" name="Rectangle 85"/>
           <p:cNvSpPr/>
           <p:nvPr/>
         </p:nvSpPr>
         <p:spPr>
           <a:xfrm>
-            <a:off x="7955279" y="3108960"/>
+            <a:off x="7955279" y="3255264"/>
             <a:ext cx="128016" cy="36576"/>
           </a:xfrm>
           <a:prstGeom prst="rect">
@@ -15845,13 +16344,13 @@
       </p:sp>
       <p:sp>
         <p:nvSpPr>
-          <p:cNvPr id="76" name="Rectangle 75"/>
+          <p:cNvPr id="87" name="Rectangle 86"/>
           <p:cNvSpPr/>
           <p:nvPr/>
         </p:nvSpPr>
         <p:spPr>
           <a:xfrm>
-            <a:off x="7955279" y="6790944"/>
+            <a:off x="7955279" y="6815328"/>
             <a:ext cx="128016" cy="36576"/>
           </a:xfrm>
           <a:prstGeom prst="rect">
@@ -15889,14 +16388,14 @@
       </p:sp>
       <p:sp>
         <p:nvSpPr>
-          <p:cNvPr id="77" name="TextBox 76"/>
-          <p:cNvSpPr txBox="1"/>
-          <p:nvPr/>
-        </p:nvSpPr>
-        <p:spPr>
-          <a:xfrm>
-            <a:off x="11192255" y="7754112"/>
-            <a:ext cx="6373368" cy="310896"/>
+          <p:cNvPr id="88" name="TextBox 87"/>
+          <p:cNvSpPr txBox="1"/>
+          <p:nvPr/>
+        </p:nvSpPr>
+        <p:spPr>
+          <a:xfrm>
+            <a:off x="11832335" y="7754112"/>
+            <a:ext cx="5733288" cy="310896"/>
           </a:xfrm>
           <a:prstGeom prst="rect">
             <a:avLst/>
@@ -15917,19 +16416,29 @@
             <a:r>
               <a:rPr sz="1500" b="1">
                 <a:solidFill>
-                  <a:srgbClr val="555555"/>
-                </a:solidFill>
-                <a:latin typeface="Arial"/>
-                <a:ea typeface="Arial"/>
-              </a:rPr>
-              <a:t>고객 시스템과 함께 설계되는 정도 + 스펙만으로 안 닫히는 정도  →</a:t>
-            </a:r>
-          </a:p>
-        </p:txBody>
-      </p:sp>
-      <p:sp>
-        <p:nvSpPr>
-          <p:cNvPr id="78" name="Rectangle 77"/>
+                  <a:srgbClr val="3C5AC8"/>
+                </a:solidFill>
+                <a:latin typeface="Arial"/>
+                <a:ea typeface="Arial"/>
+              </a:rPr>
+              <a:t>① 개발하면 스펙으로 닫힘   </a:t>
+            </a:r>
+            <a:r>
+              <a:rPr sz="1500" b="1">
+                <a:solidFill>
+                  <a:srgbClr val="1428A0"/>
+                </a:solidFill>
+                <a:latin typeface="Arial"/>
+                <a:ea typeface="Arial"/>
+              </a:rPr>
+              <a:t>② 고객 워크로드에서 함께 튜닝해야 효과</a:t>
+            </a:r>
+          </a:p>
+        </p:txBody>
+      </p:sp>
+      <p:sp>
+        <p:nvSpPr>
+          <p:cNvPr id="89" name="Rectangle 88"/>
           <p:cNvSpPr/>
           <p:nvPr/>
         </p:nvSpPr>
@@ -15973,7 +16482,7 @@
       </p:sp>
       <p:sp>
         <p:nvSpPr>
-          <p:cNvPr id="79" name="TextBox 78"/>
+          <p:cNvPr id="90" name="TextBox 89"/>
           <p:cNvSpPr txBox="1"/>
           <p:nvPr/>
         </p:nvSpPr>
@@ -16013,7 +16522,7 @@
       </p:sp>
       <p:sp>
         <p:nvSpPr>
-          <p:cNvPr id="80" name="TextBox 79"/>
+          <p:cNvPr id="91" name="TextBox 90"/>
           <p:cNvSpPr txBox="1"/>
           <p:nvPr/>
         </p:nvSpPr>
@@ -16046,14 +16555,14 @@
                 <a:latin typeface="Arial"/>
                 <a:ea typeface="Arial"/>
               </a:rPr>
-              <a:t>스펙을 정확히 받든 함께 설계하든, 핵심 기술을 제대로 확보하려면 고객과의 협력이 필수입니다</a:t>
-            </a:r>
-          </a:p>
-        </p:txBody>
-      </p:sp>
-      <p:sp>
-        <p:nvSpPr>
-          <p:cNvPr id="81" name="TextBox 80"/>
+              <a:t>고객 시스템 개발부터 최적화까지, 핵심 기술을 제대로 확보하려면 고객과의 협력이 필수입니다</a:t>
+            </a:r>
+          </a:p>
+        </p:txBody>
+      </p:sp>
+      <p:sp>
+        <p:nvSpPr>
+          <p:cNvPr id="92" name="TextBox 91"/>
           <p:cNvSpPr txBox="1"/>
           <p:nvPr/>
         </p:nvSpPr>
@@ -16086,14 +16595,14 @@
                 <a:latin typeface="Arial"/>
                 <a:ea typeface="Arial"/>
               </a:rPr>
-              <a:t>출처: WAF 3.22 → 1.03(CacheLib FDP, 삼성 EuroSys'25 · Meta 반영) · 같은 FDP 지원 장치에서도 결과가 갈림(WARP FAST'26) · RUH · RG 출하 시 고정(NVMe FDP) · 제품군 적합도와 협력 깊이는 과제팀 판단(위키 ssd-core-technologies-customer-collaboration)</a:t>
-            </a:r>
-          </a:p>
-        </p:txBody>
-      </p:sp>
-      <p:sp>
-        <p:nvSpPr>
-          <p:cNvPr id="82" name="TextBox 81"/>
+              <a:t>출처: WAF 3.22 → 1.03(CacheLib FDP, 삼성 EuroSys'25 · Meta 반영) · 같은 FDP 지원 장치에서도 결과가 갈림(WARP FAST'26) · 4KB WAF 70+ → 1.02(CSAL) · 배치별 pSLC 비율(Kioxia) · 제품군 적합도와 협력 단계는 과제팀 판단(위키 ssd-core-technologies-customer-collaboration §3.5)</a:t>
+            </a:r>
+          </a:p>
+        </p:txBody>
+      </p:sp>
+      <p:sp>
+        <p:nvSpPr>
+          <p:cNvPr id="93" name="TextBox 92"/>
           <p:cNvSpPr txBox="1"/>
           <p:nvPr/>
         </p:nvSpPr>

--- a/outputs/presentation/ssd-future-ready-strategy.pptx
+++ b/outputs/presentation/ssd-future-ready-strategy.pptx
@@ -509,7 +509,7 @@
           <a:lstStyle/>
           <a:p>
             <a:r>
-              <a:t>1장은 지금 수요의 모양과 삼성의 대응 현황입니다. HBM에서 삼성 점유율은 2022년 40퍼센트에서 2025년 2분기 17퍼센트로, SK하이닉스는 50에서 62퍼센트로 갈렸습니다. 하나의 수요를 늦게 읽으면 첫 호황을 놓친다는 교훈입니다. 그래서 하이퍼스케일러의 데이터센터 응용 네 가지를 SSD에 요구하는 특성으로 비교했습니다. 범용 클라우드는 여러 VM이 SSD를 나눠 써서 QoS와 격리가 요구입니다. 하드웨어로 격리하면 p99 지연이 최대 3.1배 줄었습니다. AI 학습은 대역입니다. NVIDIA SuperPOD 가이드를 GPU당으로 환산하면 멀티모달 학습은 기본보다 약 3배의 읽기 대역을 요구합니다. AI 추론은 DWPD만의 문제가 아닙니다. 세 가지를 함께 봐야 합니다. 첫째 읽기 대역입니다. 70B 모델의 128K 토큰 KV 캐시는 약 43기가바이트이고, 이것을 1초 안에 되살리려면 GPU 8개 서버 기준 GPU당 약 5.4기가바이트 매초가 필요합니다. 과제팀 산술입니다. 공개 측정에서는 문맥이 1K 토큰일 때 다시 계산하는 것보다 빠르려면 23.2기가바이트 매초, 80K 토큰이면 3.5기가바이트 매초가 필요했습니다. 405B 모델 가중치 810기가바이트를 PM1763 한 대로 읽으면 약 28.5초, PM1753이면 약 56초입니다. 둘째 꼬리 지연입니다. MLPerf의 Llama 2 70B 대화형 기준은 첫 토큰 p99 450밀리초, 토큰당 40밀리초입니다. SSD 계층을 넣고도 p99 첫 토큰 목표를 지키면 GPU당 세션을 10.77배 늘릴 수 있었다는 결과가 있고, SSD의 지연 흔들림이 첫 토큰 지연을 키운다는 연구도 있습니다. NVIDIA의 차세대 스토리지 목표도 전력과 꼬리 지연 제약 안에서 IOPS를 최대화하는 것입니다. 셋째 쓰기 내구입니다. KV 캐시 계층 드라이브 실측은 3.2 DWPD로 QLC 정격을 크게 넘고, AI 전용 SSD는 50에서 120 DWPD로 나왔습니다. 에이전트는 사용자마다 VM을 하나씩 주는 구조라 디스크가 메모리보다 13배 크고, 대부분 휴면이라 용량과 TB당 비용이 요구입니다. 가운데 막대는 eSSD 수요 비중입니다. 올해 범용 85, 학습 6, 추론 9퍼센트에서 2030년에는 범용 47, 학습 12, 추론 41퍼센트가 됩니다. 아래는 삼성 SSD 포트폴리오가 각 수요를 어떻게 맡고 있는지입니다. 고성능 TLC는 PM9D3a와 PM1753이 범용 VM과 DB를, PCIe 6.0의 PM1763이 학습 데이터 로딩을, PM1753이 NVIDIA CMX 같은 KV 계층을 맡습니다. 고내구 TLC는 3 DWPD의 PM1755와 PM1745가 쓰기가 많은 KV를 맡습니다. 고용량 QLC는 BM1743이 122테라바이트까지 객체, 데이터셋, 사용자 VM 디스크를 맡고, 245테라바이트 BM1773이 FMS 2026에서 공개됐습니다. 가중치와 RAG 읽기는 BM1743이 맞지만 삼성이 이 용도로 내세운 적은 없어 점선으로 두었습니다. 비어 있는 곳은 초고DWPD입니다. 경쟁사는 Solidigm P5810 50, Kioxia FL6 60, DapuStor X5 120 DWPD 같은 SLC급 제품을 내고 있지만, 삼성의 30 DWPD 이상 제품은 2018년 Z-SSD SZ985가 마지막이고 단종됐습니다. 7세대 Z-NAND는 계획 단계입니다. 제품 이미지는 공식 사진을 구할 수 없어 폼팩터를 따라 재현한 것이고, 삼성 모델 사양은 공식 페이지 검색 결과로 확인한 2차 자료입니다.</a:t>
+              <a:t>1장은 지금 수요의 모양과 삼성의 대응 현황입니다. HBM에서 삼성 점유율은 2022년 40퍼센트에서 2025년 2분기 17퍼센트로, SK하이닉스는 50에서 62퍼센트로 갈렸습니다. 하나의 수요를 늦게 읽으면 첫 호황을 놓친다는 교훈입니다. 그래서 하이퍼스케일러의 데이터센터 응용 네 가지를 SSD에 요구하는 특성으로 비교했습니다. 범용 클라우드는 여러 VM이 SSD를 나눠 써서 QoS와 격리가 요구입니다. 하드웨어로 격리하면 p99 지연이 최대 3.1배 줄었습니다. AI 학습은 대역입니다. NVIDIA SuperPOD 가이드를 GPU당으로 환산하면 멀티모달 학습은 기본보다 약 3배의 읽기 대역을 요구합니다. AI 추론은 DWPD만의 문제가 아닙니다. 세 가지를 함께 봐야 합니다. 첫째 읽기 대역입니다. 70B 모델의 128K 토큰 KV 캐시는 약 43기가바이트이고, 이것을 1초 안에 되살리려면 GPU 8개 서버 기준 GPU당 약 5.4기가바이트 매초가 필요합니다. 과제팀 산술입니다. 공개 측정에서는 문맥이 1K 토큰일 때 다시 계산하는 것보다 빠르려면 23.2기가바이트 매초, 80K 토큰이면 3.5기가바이트 매초가 필요했습니다. 405B 모델 가중치 810기가바이트를 PM1763 한 대로 읽으면 약 28.5초, PM1753이면 약 56초입니다. 둘째 꼬리 지연입니다. MLPerf의 Llama 2 70B 대화형 기준은 첫 토큰 p99 450밀리초, 토큰당 40밀리초입니다. SSD 계층을 넣고도 p99 첫 토큰 목표를 지키면 GPU당 세션을 10.77배 늘릴 수 있었다는 결과가 있고, SSD의 지연 흔들림이 첫 토큰 지연을 키운다는 연구도 있습니다. NVIDIA의 차세대 스토리지 목표도 전력과 꼬리 지연 제약 안에서 IOPS를 최대화하는 것입니다. 셋째 쓰기 내구입니다. KV 캐시 계층 드라이브 실측은 3.2 DWPD로 QLC 정격을 크게 넘고, AI 전용 SSD는 50에서 120 DWPD로 나왔습니다. 에이전트는 사용자마다 VM을 하나씩 주는 구조라 디스크가 메모리보다 13배 크고, 대부분 휴면이라 용량과 TB당 비용이 요구입니다. 가운데 막대는 eSSD 수요 비중입니다. 올해 범용 85, 학습 6, 추론 9퍼센트에서 2030년에는 범용 47, 학습 12, 추론 41퍼센트가 됩니다. 아래는 삼성 SSD 포트폴리오가 각 수요를 어떻게 맡고 있는지입니다. 고내구 TLC는 3 DWPD의 PM1755와 PM1745가 쓰기가 많은 KV를 맡고, 체크포인트 간격이 짧아지면 학습에도 쓰일 수 있어 점선으로 두었습니다. 고성능 TLC는 세대로 나눴습니다. 2026년 7월 양산한 PCIe 6.0의 PM1763은 순차 읽기 28.4기가바이트 매초로 학습 데이터 로딩을 맡고, GPU가 직접 512바이트 단위로 읽는 경로를 백서로 보였기 때문에 가중치 로딩과 GPU 직결은 신호로 두었습니다. PCIe 5.0의 PM9D3a와 PM1753은 범용 VM과 DB를 맡고, PM1753은 NVIDIA CMX 같은 KV 계층에 공급됩니다. 고용량 QLC는 BM1743이 122테라바이트까지 객체, 데이터셋, 사용자 VM 디스크를 맡고, 245테라바이트 BM1773이 FMS 2026에서 공개됐습니다. 가중치와 RAG 읽기는 BM1743이 맞지만 삼성이 이 용도로 내세운 적은 없어 점선으로 두었습니다. 정리하면 삼성은 TLC와 QLC 제품군으로 응용별 수요를 맡고 있지만, AI 추론은 대역, 꼬리 지연, 내구를 한꺼번에 요구한다는 점이 다음 장의 출발점입니다. SLC급 초고DWPD는 3장에서 포트폴리오 확장의 선택지로 다룹니다. 제품 이미지는 공식 사진을 구할 수 없어 폼팩터를 따라 재현한 것이고, 삼성 모델 사양은 공식 페이지 검색 결과로 확인한 2차 자료입니다.</a:t>
             </a:r>
           </a:p>
         </p:txBody>
@@ -4147,7 +4147,7 @@
                 <a:latin typeface="Arial"/>
                 <a:ea typeface="Arial"/>
               </a:rPr>
-              <a:t>AI 추론의 초고DWPD 영역은 아직 비어 있습니다</a:t>
+              <a:t>AI 추론은 대역 · 꼬리 지연 · 내구를 한꺼번에 요구합니다</a:t>
             </a:r>
           </a:p>
         </p:txBody>
@@ -10143,27 +10143,7 @@
                 <a:latin typeface="Arial"/>
                 <a:ea typeface="Arial"/>
               </a:rPr>
-              <a:t> 대응 가능 · 신호   </a:t>
-            </a:r>
-            <a:r>
-              <a:rPr sz="1600" b="0">
-                <a:solidFill>
-                  <a:srgbClr val="1428A0"/>
-                </a:solidFill>
-                <a:latin typeface="Arial"/>
-                <a:ea typeface="Arial"/>
-              </a:rPr>
-              <a:t>▨</a:t>
-            </a:r>
-            <a:r>
-              <a:rPr sz="1600" b="1">
-                <a:solidFill>
-                  <a:srgbClr val="1428A0"/>
-                </a:solidFill>
-                <a:latin typeface="Arial"/>
-                <a:ea typeface="Arial"/>
-              </a:rPr>
-              <a:t> 공백</a:t>
+              <a:t> 대응 가능 · 신호</a:t>
             </a:r>
           </a:p>
         </p:txBody>
@@ -10216,7 +10196,7 @@
       </p:sp>
       <p:pic>
         <p:nvPicPr>
-          <p:cNvPr id="149" name="Picture 148" descr="p_zssd.png"/>
+          <p:cNvPr id="149" name="Picture 148" descr="p_pm1755.png"/>
           <p:cNvPicPr>
             <a:picLocks noChangeAspect="1"/>
           </p:cNvPicPr>
@@ -10230,8 +10210,8 @@
         </p:blipFill>
         <p:spPr>
           <a:xfrm>
-            <a:off x="777240" y="6491224"/>
-            <a:ext cx="914400" cy="550672"/>
+            <a:off x="822960" y="6464808"/>
+            <a:ext cx="822959" cy="603503"/>
           </a:xfrm>
           <a:prstGeom prst="rect">
             <a:avLst/>
@@ -10273,7 +10253,7 @@
                 <a:latin typeface="Arial"/>
                 <a:ea typeface="Arial"/>
               </a:rPr>
-              <a:t>SLC급 · 30+ DWPD</a:t>
+              <a:t>고내구 TLC · 3 DWPD</a:t>
             </a:r>
           </a:p>
         </p:txBody>
@@ -10313,7 +10293,7 @@
                 <a:latin typeface="Arial"/>
                 <a:ea typeface="Arial"/>
               </a:rPr>
-              <a:t>SZ985 (2018 · 단종)</a:t>
+              <a:t>PM1755 · PM1745</a:t>
             </a:r>
           </a:p>
         </p:txBody>
@@ -10380,6 +10360,261 @@
               <a:gd name="adj" fmla="val 11111"/>
             </a:avLst>
           </a:prstGeom>
+          <a:solidFill>
+            <a:srgbClr val="FFFFFF"/>
+          </a:solidFill>
+          <a:ln w="15875">
+            <a:solidFill>
+              <a:srgbClr val="3C5AC8"/>
+            </a:solidFill>
+            <a:prstDash val="dash"/>
+          </a:ln>
+          <a:effectLst/>
+        </p:spPr>
+        <p:style>
+          <a:lnRef idx="1">
+            <a:schemeClr val="accent1"/>
+          </a:lnRef>
+          <a:fillRef idx="3">
+            <a:schemeClr val="accent1"/>
+          </a:fillRef>
+          <a:effectRef idx="2">
+            <a:schemeClr val="accent1"/>
+          </a:effectRef>
+          <a:fontRef idx="minor">
+            <a:schemeClr val="lt1"/>
+          </a:fontRef>
+        </p:style>
+        <p:txBody>
+          <a:bodyPr rtlCol="0" anchor="ctr"/>
+          <a:lstStyle/>
+          <a:p>
+            <a:pPr algn="ctr"/>
+          </a:p>
+        </p:txBody>
+      </p:sp>
+      <p:sp>
+        <p:nvSpPr>
+          <p:cNvPr id="154" name="TextBox 153"/>
+          <p:cNvSpPr txBox="1"/>
+          <p:nvPr/>
+        </p:nvSpPr>
+        <p:spPr>
+          <a:xfrm>
+            <a:off x="7749540" y="6455664"/>
+            <a:ext cx="3022092" cy="329184"/>
+          </a:xfrm>
+          <a:prstGeom prst="rect">
+            <a:avLst/>
+          </a:prstGeom>
+          <a:noFill/>
+        </p:spPr>
+        <p:txBody>
+          <a:bodyPr wrap="square" anchor="ctr" lIns="0" rIns="0" tIns="0" bIns="0">
+            <a:spAutoFit/>
+          </a:bodyPr>
+          <a:lstStyle/>
+          <a:p>
+            <a:pPr algn="ctr">
+              <a:lnSpc>
+                <a:spcPct val="110000"/>
+              </a:lnSpc>
+            </a:pPr>
+            <a:r>
+              <a:rPr sz="1700" b="1">
+                <a:solidFill>
+                  <a:srgbClr val="3C5AC8"/>
+                </a:solidFill>
+                <a:latin typeface="Arial"/>
+                <a:ea typeface="Arial"/>
+              </a:rPr>
+              <a:t>체크포인트</a:t>
+            </a:r>
+          </a:p>
+        </p:txBody>
+      </p:sp>
+      <p:sp>
+        <p:nvSpPr>
+          <p:cNvPr id="155" name="TextBox 154"/>
+          <p:cNvSpPr txBox="1"/>
+          <p:nvPr/>
+        </p:nvSpPr>
+        <p:spPr>
+          <a:xfrm>
+            <a:off x="7749540" y="6775704"/>
+            <a:ext cx="3022092" cy="292608"/>
+          </a:xfrm>
+          <a:prstGeom prst="rect">
+            <a:avLst/>
+          </a:prstGeom>
+          <a:noFill/>
+        </p:spPr>
+        <p:txBody>
+          <a:bodyPr wrap="square" anchor="ctr" lIns="0" rIns="0" tIns="0" bIns="0">
+            <a:spAutoFit/>
+          </a:bodyPr>
+          <a:lstStyle/>
+          <a:p>
+            <a:pPr algn="ctr">
+              <a:lnSpc>
+                <a:spcPct val="110000"/>
+              </a:lnSpc>
+            </a:pPr>
+            <a:r>
+              <a:rPr sz="1500" b="0">
+                <a:solidFill>
+                  <a:srgbClr val="555555"/>
+                </a:solidFill>
+                <a:latin typeface="Arial"/>
+                <a:ea typeface="Arial"/>
+              </a:rPr>
+              <a:t>PM1755</a:t>
+            </a:r>
+          </a:p>
+        </p:txBody>
+      </p:sp>
+      <p:sp>
+        <p:nvSpPr>
+          <p:cNvPr id="156" name="Rounded Rectangle 155"/>
+          <p:cNvSpPr/>
+          <p:nvPr/>
+        </p:nvSpPr>
+        <p:spPr>
+          <a:xfrm>
+            <a:off x="11009376" y="6437376"/>
+            <a:ext cx="3204972" cy="658368"/>
+          </a:xfrm>
+          <a:prstGeom prst="roundRect">
+            <a:avLst>
+              <a:gd name="adj" fmla="val 11111"/>
+            </a:avLst>
+          </a:prstGeom>
+          <a:solidFill>
+            <a:srgbClr val="1428A0"/>
+          </a:solidFill>
+          <a:ln>
+            <a:noFill/>
+          </a:ln>
+          <a:effectLst/>
+        </p:spPr>
+        <p:style>
+          <a:lnRef idx="1">
+            <a:schemeClr val="accent1"/>
+          </a:lnRef>
+          <a:fillRef idx="3">
+            <a:schemeClr val="accent1"/>
+          </a:fillRef>
+          <a:effectRef idx="2">
+            <a:schemeClr val="accent1"/>
+          </a:effectRef>
+          <a:fontRef idx="minor">
+            <a:schemeClr val="lt1"/>
+          </a:fontRef>
+        </p:style>
+        <p:txBody>
+          <a:bodyPr rtlCol="0" anchor="ctr"/>
+          <a:lstStyle/>
+          <a:p>
+            <a:pPr algn="ctr"/>
+          </a:p>
+        </p:txBody>
+      </p:sp>
+      <p:sp>
+        <p:nvSpPr>
+          <p:cNvPr id="157" name="TextBox 156"/>
+          <p:cNvSpPr txBox="1"/>
+          <p:nvPr/>
+        </p:nvSpPr>
+        <p:spPr>
+          <a:xfrm>
+            <a:off x="11100816" y="6455664"/>
+            <a:ext cx="3022092" cy="329184"/>
+          </a:xfrm>
+          <a:prstGeom prst="rect">
+            <a:avLst/>
+          </a:prstGeom>
+          <a:noFill/>
+        </p:spPr>
+        <p:txBody>
+          <a:bodyPr wrap="square" anchor="ctr" lIns="0" rIns="0" tIns="0" bIns="0">
+            <a:spAutoFit/>
+          </a:bodyPr>
+          <a:lstStyle/>
+          <a:p>
+            <a:pPr algn="ctr">
+              <a:lnSpc>
+                <a:spcPct val="110000"/>
+              </a:lnSpc>
+            </a:pPr>
+            <a:r>
+              <a:rPr sz="1700" b="1">
+                <a:solidFill>
+                  <a:srgbClr val="FFFFFF"/>
+                </a:solidFill>
+                <a:latin typeface="Arial"/>
+                <a:ea typeface="Arial"/>
+              </a:rPr>
+              <a:t>쓰기 많은 KV</a:t>
+            </a:r>
+          </a:p>
+        </p:txBody>
+      </p:sp>
+      <p:sp>
+        <p:nvSpPr>
+          <p:cNvPr id="158" name="TextBox 157"/>
+          <p:cNvSpPr txBox="1"/>
+          <p:nvPr/>
+        </p:nvSpPr>
+        <p:spPr>
+          <a:xfrm>
+            <a:off x="11100816" y="6775704"/>
+            <a:ext cx="3022092" cy="292608"/>
+          </a:xfrm>
+          <a:prstGeom prst="rect">
+            <a:avLst/>
+          </a:prstGeom>
+          <a:noFill/>
+        </p:spPr>
+        <p:txBody>
+          <a:bodyPr wrap="square" anchor="ctr" lIns="0" rIns="0" tIns="0" bIns="0">
+            <a:spAutoFit/>
+          </a:bodyPr>
+          <a:lstStyle/>
+          <a:p>
+            <a:pPr algn="ctr">
+              <a:lnSpc>
+                <a:spcPct val="110000"/>
+              </a:lnSpc>
+            </a:pPr>
+            <a:r>
+              <a:rPr sz="1500" b="1">
+                <a:solidFill>
+                  <a:srgbClr val="AAB8E8"/>
+                </a:solidFill>
+                <a:latin typeface="Arial"/>
+                <a:ea typeface="Arial"/>
+              </a:rPr>
+              <a:t>PM1755</a:t>
+            </a:r>
+          </a:p>
+        </p:txBody>
+      </p:sp>
+      <p:sp>
+        <p:nvSpPr>
+          <p:cNvPr id="159" name="Rounded Rectangle 158"/>
+          <p:cNvSpPr/>
+          <p:nvPr/>
+        </p:nvSpPr>
+        <p:spPr>
+          <a:xfrm>
+            <a:off x="14360652" y="6437376"/>
+            <a:ext cx="3204972" cy="658368"/>
+          </a:xfrm>
+          <a:prstGeom prst="roundRect">
+            <a:avLst>
+              <a:gd name="adj" fmla="val 11111"/>
+            </a:avLst>
+          </a:prstGeom>
           <a:noFill/>
           <a:ln w="9525">
             <a:solidFill>
@@ -10412,14 +10647,14 @@
       </p:sp>
       <p:sp>
         <p:nvSpPr>
-          <p:cNvPr id="154" name="Rounded Rectangle 153"/>
-          <p:cNvSpPr/>
-          <p:nvPr/>
-        </p:nvSpPr>
-        <p:spPr>
-          <a:xfrm>
-            <a:off x="11009376" y="6437376"/>
-            <a:ext cx="3204972" cy="658368"/>
+          <p:cNvPr id="160" name="Rounded Rectangle 159"/>
+          <p:cNvSpPr/>
+          <p:nvPr/>
+        </p:nvSpPr>
+        <p:spPr>
+          <a:xfrm>
+            <a:off x="722376" y="7150608"/>
+            <a:ext cx="3383280" cy="658368"/>
           </a:xfrm>
           <a:prstGeom prst="roundRect">
             <a:avLst>
@@ -10427,191 +10662,6 @@
             </a:avLst>
           </a:prstGeom>
           <a:solidFill>
-            <a:srgbClr val="EEF1FA"/>
-          </a:solidFill>
-          <a:ln w="25400">
-            <a:solidFill>
-              <a:srgbClr val="1428A0"/>
-            </a:solidFill>
-            <a:prstDash val="dash"/>
-          </a:ln>
-          <a:effectLst/>
-        </p:spPr>
-        <p:style>
-          <a:lnRef idx="1">
-            <a:schemeClr val="accent1"/>
-          </a:lnRef>
-          <a:fillRef idx="3">
-            <a:schemeClr val="accent1"/>
-          </a:fillRef>
-          <a:effectRef idx="2">
-            <a:schemeClr val="accent1"/>
-          </a:effectRef>
-          <a:fontRef idx="minor">
-            <a:schemeClr val="lt1"/>
-          </a:fontRef>
-        </p:style>
-        <p:txBody>
-          <a:bodyPr rtlCol="0" anchor="ctr"/>
-          <a:lstStyle/>
-          <a:p>
-            <a:pPr algn="ctr"/>
-          </a:p>
-        </p:txBody>
-      </p:sp>
-      <p:sp>
-        <p:nvSpPr>
-          <p:cNvPr id="155" name="TextBox 154"/>
-          <p:cNvSpPr txBox="1"/>
-          <p:nvPr/>
-        </p:nvSpPr>
-        <p:spPr>
-          <a:xfrm>
-            <a:off x="11100816" y="6455664"/>
-            <a:ext cx="3022092" cy="329184"/>
-          </a:xfrm>
-          <a:prstGeom prst="rect">
-            <a:avLst/>
-          </a:prstGeom>
-          <a:noFill/>
-        </p:spPr>
-        <p:txBody>
-          <a:bodyPr wrap="square" anchor="ctr" lIns="0" rIns="0" tIns="0" bIns="0">
-            <a:spAutoFit/>
-          </a:bodyPr>
-          <a:lstStyle/>
-          <a:p>
-            <a:pPr algn="ctr">
-              <a:lnSpc>
-                <a:spcPct val="110000"/>
-              </a:lnSpc>
-            </a:pPr>
-            <a:r>
-              <a:rPr sz="1700" b="1">
-                <a:solidFill>
-                  <a:srgbClr val="1428A0"/>
-                </a:solidFill>
-                <a:latin typeface="Arial"/>
-                <a:ea typeface="Arial"/>
-              </a:rPr>
-              <a:t>초고DWPD KV</a:t>
-            </a:r>
-          </a:p>
-        </p:txBody>
-      </p:sp>
-      <p:sp>
-        <p:nvSpPr>
-          <p:cNvPr id="156" name="TextBox 155"/>
-          <p:cNvSpPr txBox="1"/>
-          <p:nvPr/>
-        </p:nvSpPr>
-        <p:spPr>
-          <a:xfrm>
-            <a:off x="11100816" y="6775704"/>
-            <a:ext cx="3022092" cy="292608"/>
-          </a:xfrm>
-          <a:prstGeom prst="rect">
-            <a:avLst/>
-          </a:prstGeom>
-          <a:noFill/>
-        </p:spPr>
-        <p:txBody>
-          <a:bodyPr wrap="square" anchor="ctr" lIns="0" rIns="0" tIns="0" bIns="0">
-            <a:spAutoFit/>
-          </a:bodyPr>
-          <a:lstStyle/>
-          <a:p>
-            <a:pPr algn="ctr">
-              <a:lnSpc>
-                <a:spcPct val="110000"/>
-              </a:lnSpc>
-            </a:pPr>
-            <a:r>
-              <a:rPr sz="1500" b="1">
-                <a:solidFill>
-                  <a:srgbClr val="1428A0"/>
-                </a:solidFill>
-                <a:latin typeface="Arial"/>
-                <a:ea typeface="Arial"/>
-              </a:rPr>
-              <a:t>공백  </a:t>
-            </a:r>
-            <a:r>
-              <a:rPr sz="1500" b="0">
-                <a:solidFill>
-                  <a:srgbClr val="555555"/>
-                </a:solidFill>
-                <a:latin typeface="Arial"/>
-                <a:ea typeface="Arial"/>
-              </a:rPr>
-              <a:t>삼성 제품 없음</a:t>
-            </a:r>
-          </a:p>
-        </p:txBody>
-      </p:sp>
-      <p:sp>
-        <p:nvSpPr>
-          <p:cNvPr id="157" name="Rounded Rectangle 156"/>
-          <p:cNvSpPr/>
-          <p:nvPr/>
-        </p:nvSpPr>
-        <p:spPr>
-          <a:xfrm>
-            <a:off x="14360652" y="6437376"/>
-            <a:ext cx="3204972" cy="658368"/>
-          </a:xfrm>
-          <a:prstGeom prst="roundRect">
-            <a:avLst>
-              <a:gd name="adj" fmla="val 11111"/>
-            </a:avLst>
-          </a:prstGeom>
-          <a:noFill/>
-          <a:ln w="9525">
-            <a:solidFill>
-              <a:srgbClr val="D9D9D9"/>
-            </a:solidFill>
-          </a:ln>
-          <a:effectLst/>
-        </p:spPr>
-        <p:style>
-          <a:lnRef idx="1">
-            <a:schemeClr val="accent1"/>
-          </a:lnRef>
-          <a:fillRef idx="3">
-            <a:schemeClr val="accent1"/>
-          </a:fillRef>
-          <a:effectRef idx="2">
-            <a:schemeClr val="accent1"/>
-          </a:effectRef>
-          <a:fontRef idx="minor">
-            <a:schemeClr val="lt1"/>
-          </a:fontRef>
-        </p:style>
-        <p:txBody>
-          <a:bodyPr rtlCol="0" anchor="ctr"/>
-          <a:lstStyle/>
-          <a:p>
-            <a:pPr algn="ctr"/>
-          </a:p>
-        </p:txBody>
-      </p:sp>
-      <p:sp>
-        <p:nvSpPr>
-          <p:cNvPr id="158" name="Rounded Rectangle 157"/>
-          <p:cNvSpPr/>
-          <p:nvPr/>
-        </p:nvSpPr>
-        <p:spPr>
-          <a:xfrm>
-            <a:off x="722376" y="7150608"/>
-            <a:ext cx="3383280" cy="658368"/>
-          </a:xfrm>
-          <a:prstGeom prst="roundRect">
-            <a:avLst>
-              <a:gd name="adj" fmla="val 11111"/>
-            </a:avLst>
-          </a:prstGeom>
-          <a:solidFill>
             <a:srgbClr val="F5F5F5"/>
           </a:solidFill>
           <a:ln>
@@ -10643,7 +10693,7 @@
       </p:sp>
       <p:pic>
         <p:nvPicPr>
-          <p:cNvPr id="159" name="Picture 158" descr="p_pm1755.png"/>
+          <p:cNvPr id="161" name="Picture 160" descr="p_pm1763.png"/>
           <p:cNvPicPr>
             <a:picLocks noChangeAspect="1"/>
           </p:cNvPicPr>
@@ -10657,8 +10707,8 @@
         </p:blipFill>
         <p:spPr>
           <a:xfrm>
-            <a:off x="822960" y="7178040"/>
-            <a:ext cx="822959" cy="603503"/>
+            <a:off x="798522" y="7178040"/>
+            <a:ext cx="871835" cy="603503"/>
           </a:xfrm>
           <a:prstGeom prst="rect">
             <a:avLst/>
@@ -10667,7 +10717,7 @@
       </p:pic>
       <p:sp>
         <p:nvSpPr>
-          <p:cNvPr id="160" name="TextBox 159"/>
+          <p:cNvPr id="162" name="TextBox 161"/>
           <p:cNvSpPr txBox="1"/>
           <p:nvPr/>
         </p:nvSpPr>
@@ -10700,14 +10750,14 @@
                 <a:latin typeface="Arial"/>
                 <a:ea typeface="Arial"/>
               </a:rPr>
-              <a:t>고내구 TLC · 3 DWPD</a:t>
-            </a:r>
-          </a:p>
-        </p:txBody>
-      </p:sp>
-      <p:sp>
-        <p:nvSpPr>
-          <p:cNvPr id="161" name="TextBox 160"/>
+              <a:t>고성능 TLC · PCIe 6.0</a:t>
+            </a:r>
+          </a:p>
+        </p:txBody>
+      </p:sp>
+      <p:sp>
+        <p:nvSpPr>
+          <p:cNvPr id="163" name="TextBox 162"/>
           <p:cNvSpPr txBox="1"/>
           <p:nvPr/>
         </p:nvSpPr>
@@ -10740,14 +10790,14 @@
                 <a:latin typeface="Arial"/>
                 <a:ea typeface="Arial"/>
               </a:rPr>
-              <a:t>PM1755 · PM1745</a:t>
-            </a:r>
-          </a:p>
-        </p:txBody>
-      </p:sp>
-      <p:sp>
-        <p:nvSpPr>
-          <p:cNvPr id="162" name="Rounded Rectangle 161"/>
+              <a:t>PM1763</a:t>
+            </a:r>
+          </a:p>
+        </p:txBody>
+      </p:sp>
+      <p:sp>
+        <p:nvSpPr>
+          <p:cNvPr id="164" name="Rounded Rectangle 163"/>
           <p:cNvSpPr/>
           <p:nvPr/>
         </p:nvSpPr>
@@ -10793,13 +10843,139 @@
       </p:sp>
       <p:sp>
         <p:nvSpPr>
-          <p:cNvPr id="163" name="Rounded Rectangle 162"/>
+          <p:cNvPr id="165" name="Rounded Rectangle 164"/>
           <p:cNvSpPr/>
           <p:nvPr/>
         </p:nvSpPr>
         <p:spPr>
           <a:xfrm>
             <a:off x="7658100" y="7150608"/>
+            <a:ext cx="3204972" cy="658368"/>
+          </a:xfrm>
+          <a:prstGeom prst="roundRect">
+            <a:avLst>
+              <a:gd name="adj" fmla="val 11111"/>
+            </a:avLst>
+          </a:prstGeom>
+          <a:solidFill>
+            <a:srgbClr val="1428A0"/>
+          </a:solidFill>
+          <a:ln>
+            <a:noFill/>
+          </a:ln>
+          <a:effectLst/>
+        </p:spPr>
+        <p:style>
+          <a:lnRef idx="1">
+            <a:schemeClr val="accent1"/>
+          </a:lnRef>
+          <a:fillRef idx="3">
+            <a:schemeClr val="accent1"/>
+          </a:fillRef>
+          <a:effectRef idx="2">
+            <a:schemeClr val="accent1"/>
+          </a:effectRef>
+          <a:fontRef idx="minor">
+            <a:schemeClr val="lt1"/>
+          </a:fontRef>
+        </p:style>
+        <p:txBody>
+          <a:bodyPr rtlCol="0" anchor="ctr"/>
+          <a:lstStyle/>
+          <a:p>
+            <a:pPr algn="ctr"/>
+          </a:p>
+        </p:txBody>
+      </p:sp>
+      <p:sp>
+        <p:nvSpPr>
+          <p:cNvPr id="166" name="TextBox 165"/>
+          <p:cNvSpPr txBox="1"/>
+          <p:nvPr/>
+        </p:nvSpPr>
+        <p:spPr>
+          <a:xfrm>
+            <a:off x="7749540" y="7168896"/>
+            <a:ext cx="3022092" cy="329184"/>
+          </a:xfrm>
+          <a:prstGeom prst="rect">
+            <a:avLst/>
+          </a:prstGeom>
+          <a:noFill/>
+        </p:spPr>
+        <p:txBody>
+          <a:bodyPr wrap="square" anchor="ctr" lIns="0" rIns="0" tIns="0" bIns="0">
+            <a:spAutoFit/>
+          </a:bodyPr>
+          <a:lstStyle/>
+          <a:p>
+            <a:pPr algn="ctr">
+              <a:lnSpc>
+                <a:spcPct val="110000"/>
+              </a:lnSpc>
+            </a:pPr>
+            <a:r>
+              <a:rPr sz="1700" b="1">
+                <a:solidFill>
+                  <a:srgbClr val="FFFFFF"/>
+                </a:solidFill>
+                <a:latin typeface="Arial"/>
+                <a:ea typeface="Arial"/>
+              </a:rPr>
+              <a:t>데이터 로딩</a:t>
+            </a:r>
+          </a:p>
+        </p:txBody>
+      </p:sp>
+      <p:sp>
+        <p:nvSpPr>
+          <p:cNvPr id="167" name="TextBox 166"/>
+          <p:cNvSpPr txBox="1"/>
+          <p:nvPr/>
+        </p:nvSpPr>
+        <p:spPr>
+          <a:xfrm>
+            <a:off x="7749540" y="7488936"/>
+            <a:ext cx="3022092" cy="292608"/>
+          </a:xfrm>
+          <a:prstGeom prst="rect">
+            <a:avLst/>
+          </a:prstGeom>
+          <a:noFill/>
+        </p:spPr>
+        <p:txBody>
+          <a:bodyPr wrap="square" anchor="ctr" lIns="0" rIns="0" tIns="0" bIns="0">
+            <a:spAutoFit/>
+          </a:bodyPr>
+          <a:lstStyle/>
+          <a:p>
+            <a:pPr algn="ctr">
+              <a:lnSpc>
+                <a:spcPct val="110000"/>
+              </a:lnSpc>
+            </a:pPr>
+            <a:r>
+              <a:rPr sz="1500" b="1">
+                <a:solidFill>
+                  <a:srgbClr val="AAB8E8"/>
+                </a:solidFill>
+                <a:latin typeface="Arial"/>
+                <a:ea typeface="Arial"/>
+              </a:rPr>
+              <a:t>PM1763</a:t>
+            </a:r>
+          </a:p>
+        </p:txBody>
+      </p:sp>
+      <p:sp>
+        <p:nvSpPr>
+          <p:cNvPr id="168" name="Rounded Rectangle 167"/>
+          <p:cNvSpPr/>
+          <p:nvPr/>
+        </p:nvSpPr>
+        <p:spPr>
+          <a:xfrm>
+            <a:off x="11009376" y="7150608"/>
             <a:ext cx="3204972" cy="658368"/>
           </a:xfrm>
           <a:prstGeom prst="roundRect">
@@ -10842,13 +11018,13 @@
       </p:sp>
       <p:sp>
         <p:nvSpPr>
-          <p:cNvPr id="164" name="TextBox 163"/>
+          <p:cNvPr id="169" name="TextBox 168"/>
           <p:cNvSpPr txBox="1"/>
           <p:nvPr/>
         </p:nvSpPr>
         <p:spPr>
           <a:xfrm>
-            <a:off x="7749540" y="7168896"/>
+            <a:off x="11100816" y="7168896"/>
             <a:ext cx="3022092" cy="329184"/>
           </a:xfrm>
           <a:prstGeom prst="rect">
@@ -10875,20 +11051,20 @@
                 <a:latin typeface="Arial"/>
                 <a:ea typeface="Arial"/>
               </a:rPr>
-              <a:t>체크포인트</a:t>
-            </a:r>
-          </a:p>
-        </p:txBody>
-      </p:sp>
-      <p:sp>
-        <p:nvSpPr>
-          <p:cNvPr id="165" name="TextBox 164"/>
+              <a:t>가중치 로딩 · GPU 직결</a:t>
+            </a:r>
+          </a:p>
+        </p:txBody>
+      </p:sp>
+      <p:sp>
+        <p:nvSpPr>
+          <p:cNvPr id="170" name="TextBox 169"/>
           <p:cNvSpPr txBox="1"/>
           <p:nvPr/>
         </p:nvSpPr>
         <p:spPr>
           <a:xfrm>
-            <a:off x="7749540" y="7488936"/>
+            <a:off x="11100816" y="7488936"/>
             <a:ext cx="3022092" cy="292608"/>
           </a:xfrm>
           <a:prstGeom prst="rect">
@@ -10915,140 +11091,14 @@
                 <a:latin typeface="Arial"/>
                 <a:ea typeface="Arial"/>
               </a:rPr>
-              <a:t>PM1755</a:t>
-            </a:r>
-          </a:p>
-        </p:txBody>
-      </p:sp>
-      <p:sp>
-        <p:nvSpPr>
-          <p:cNvPr id="166" name="Rounded Rectangle 165"/>
-          <p:cNvSpPr/>
-          <p:nvPr/>
-        </p:nvSpPr>
-        <p:spPr>
-          <a:xfrm>
-            <a:off x="11009376" y="7150608"/>
-            <a:ext cx="3204972" cy="658368"/>
-          </a:xfrm>
-          <a:prstGeom prst="roundRect">
-            <a:avLst>
-              <a:gd name="adj" fmla="val 11111"/>
-            </a:avLst>
-          </a:prstGeom>
-          <a:solidFill>
-            <a:srgbClr val="1428A0"/>
-          </a:solidFill>
-          <a:ln>
-            <a:noFill/>
-          </a:ln>
-          <a:effectLst/>
-        </p:spPr>
-        <p:style>
-          <a:lnRef idx="1">
-            <a:schemeClr val="accent1"/>
-          </a:lnRef>
-          <a:fillRef idx="3">
-            <a:schemeClr val="accent1"/>
-          </a:fillRef>
-          <a:effectRef idx="2">
-            <a:schemeClr val="accent1"/>
-          </a:effectRef>
-          <a:fontRef idx="minor">
-            <a:schemeClr val="lt1"/>
-          </a:fontRef>
-        </p:style>
-        <p:txBody>
-          <a:bodyPr rtlCol="0" anchor="ctr"/>
-          <a:lstStyle/>
-          <a:p>
-            <a:pPr algn="ctr"/>
-          </a:p>
-        </p:txBody>
-      </p:sp>
-      <p:sp>
-        <p:nvSpPr>
-          <p:cNvPr id="167" name="TextBox 166"/>
-          <p:cNvSpPr txBox="1"/>
-          <p:nvPr/>
-        </p:nvSpPr>
-        <p:spPr>
-          <a:xfrm>
-            <a:off x="11100816" y="7168896"/>
-            <a:ext cx="3022092" cy="329184"/>
-          </a:xfrm>
-          <a:prstGeom prst="rect">
-            <a:avLst/>
-          </a:prstGeom>
-          <a:noFill/>
-        </p:spPr>
-        <p:txBody>
-          <a:bodyPr wrap="square" anchor="ctr" lIns="0" rIns="0" tIns="0" bIns="0">
-            <a:spAutoFit/>
-          </a:bodyPr>
-          <a:lstStyle/>
-          <a:p>
-            <a:pPr algn="ctr">
-              <a:lnSpc>
-                <a:spcPct val="110000"/>
-              </a:lnSpc>
-            </a:pPr>
-            <a:r>
-              <a:rPr sz="1700" b="1">
-                <a:solidFill>
-                  <a:srgbClr val="FFFFFF"/>
-                </a:solidFill>
-                <a:latin typeface="Arial"/>
-                <a:ea typeface="Arial"/>
-              </a:rPr>
-              <a:t>쓰기 많은 KV</a:t>
-            </a:r>
-          </a:p>
-        </p:txBody>
-      </p:sp>
-      <p:sp>
-        <p:nvSpPr>
-          <p:cNvPr id="168" name="TextBox 167"/>
-          <p:cNvSpPr txBox="1"/>
-          <p:nvPr/>
-        </p:nvSpPr>
-        <p:spPr>
-          <a:xfrm>
-            <a:off x="11100816" y="7488936"/>
-            <a:ext cx="3022092" cy="292608"/>
-          </a:xfrm>
-          <a:prstGeom prst="rect">
-            <a:avLst/>
-          </a:prstGeom>
-          <a:noFill/>
-        </p:spPr>
-        <p:txBody>
-          <a:bodyPr wrap="square" anchor="ctr" lIns="0" rIns="0" tIns="0" bIns="0">
-            <a:spAutoFit/>
-          </a:bodyPr>
-          <a:lstStyle/>
-          <a:p>
-            <a:pPr algn="ctr">
-              <a:lnSpc>
-                <a:spcPct val="110000"/>
-              </a:lnSpc>
-            </a:pPr>
-            <a:r>
-              <a:rPr sz="1500" b="1">
-                <a:solidFill>
-                  <a:srgbClr val="AAB8E8"/>
-                </a:solidFill>
-                <a:latin typeface="Arial"/>
-                <a:ea typeface="Arial"/>
-              </a:rPr>
-              <a:t>PM1755</a:t>
-            </a:r>
-          </a:p>
-        </p:txBody>
-      </p:sp>
-      <p:sp>
-        <p:nvSpPr>
-          <p:cNvPr id="169" name="Rounded Rectangle 168"/>
+              <a:t>PM1763</a:t>
+            </a:r>
+          </a:p>
+        </p:txBody>
+      </p:sp>
+      <p:sp>
+        <p:nvSpPr>
+          <p:cNvPr id="171" name="Rounded Rectangle 170"/>
           <p:cNvSpPr/>
           <p:nvPr/>
         </p:nvSpPr>
@@ -11094,7 +11144,7 @@
       </p:sp>
       <p:sp>
         <p:nvSpPr>
-          <p:cNvPr id="170" name="Rounded Rectangle 169"/>
+          <p:cNvPr id="172" name="Rounded Rectangle 171"/>
           <p:cNvSpPr/>
           <p:nvPr/>
         </p:nvSpPr>
@@ -11140,7 +11190,7 @@
       </p:sp>
       <p:pic>
         <p:nvPicPr>
-          <p:cNvPr id="171" name="Picture 170" descr="p_pm1763.png"/>
+          <p:cNvPr id="173" name="Picture 172" descr="p_pm1753.png"/>
           <p:cNvPicPr>
             <a:picLocks noChangeAspect="1"/>
           </p:cNvPicPr>
@@ -11154,8 +11204,8 @@
         </p:blipFill>
         <p:spPr>
           <a:xfrm>
-            <a:off x="798522" y="7891271"/>
-            <a:ext cx="871835" cy="603503"/>
+            <a:off x="822960" y="7891271"/>
+            <a:ext cx="822959" cy="603503"/>
           </a:xfrm>
           <a:prstGeom prst="rect">
             <a:avLst/>
@@ -11164,7 +11214,7 @@
       </p:pic>
       <p:sp>
         <p:nvSpPr>
-          <p:cNvPr id="172" name="TextBox 171"/>
+          <p:cNvPr id="174" name="TextBox 173"/>
           <p:cNvSpPr txBox="1"/>
           <p:nvPr/>
         </p:nvSpPr>
@@ -11197,14 +11247,14 @@
                 <a:latin typeface="Arial"/>
                 <a:ea typeface="Arial"/>
               </a:rPr>
-              <a:t>고성능 TLC · 1 DWPD</a:t>
-            </a:r>
-          </a:p>
-        </p:txBody>
-      </p:sp>
-      <p:sp>
-        <p:nvSpPr>
-          <p:cNvPr id="173" name="TextBox 172"/>
+              <a:t>고성능 TLC · PCIe 5.0</a:t>
+            </a:r>
+          </a:p>
+        </p:txBody>
+      </p:sp>
+      <p:sp>
+        <p:nvSpPr>
+          <p:cNvPr id="175" name="TextBox 174"/>
           <p:cNvSpPr txBox="1"/>
           <p:nvPr/>
         </p:nvSpPr>
@@ -11237,14 +11287,14 @@
                 <a:latin typeface="Arial"/>
                 <a:ea typeface="Arial"/>
               </a:rPr>
-              <a:t>PM1753 · PM1763</a:t>
-            </a:r>
-          </a:p>
-        </p:txBody>
-      </p:sp>
-      <p:sp>
-        <p:nvSpPr>
-          <p:cNvPr id="174" name="Rounded Rectangle 173"/>
+              <a:t>PM1753 · PM9D3a</a:t>
+            </a:r>
+          </a:p>
+        </p:txBody>
+      </p:sp>
+      <p:sp>
+        <p:nvSpPr>
+          <p:cNvPr id="176" name="Rounded Rectangle 175"/>
           <p:cNvSpPr/>
           <p:nvPr/>
         </p:nvSpPr>
@@ -11290,7 +11340,7 @@
       </p:sp>
       <p:sp>
         <p:nvSpPr>
-          <p:cNvPr id="175" name="TextBox 174"/>
+          <p:cNvPr id="177" name="TextBox 176"/>
           <p:cNvSpPr txBox="1"/>
           <p:nvPr/>
         </p:nvSpPr>
@@ -11330,7 +11380,7 @@
       </p:sp>
       <p:sp>
         <p:nvSpPr>
-          <p:cNvPr id="176" name="TextBox 175"/>
+          <p:cNvPr id="178" name="TextBox 177"/>
           <p:cNvSpPr txBox="1"/>
           <p:nvPr/>
         </p:nvSpPr>
@@ -11370,7 +11420,7 @@
       </p:sp>
       <p:sp>
         <p:nvSpPr>
-          <p:cNvPr id="177" name="Rounded Rectangle 176"/>
+          <p:cNvPr id="179" name="Rounded Rectangle 178"/>
           <p:cNvSpPr/>
           <p:nvPr/>
         </p:nvSpPr>
@@ -11384,113 +11434,33 @@
               <a:gd name="adj" fmla="val 11111"/>
             </a:avLst>
           </a:prstGeom>
-          <a:solidFill>
-            <a:srgbClr val="1428A0"/>
-          </a:solidFill>
-          <a:ln>
-            <a:noFill/>
-          </a:ln>
-          <a:effectLst/>
-        </p:spPr>
-        <p:style>
-          <a:lnRef idx="1">
-            <a:schemeClr val="accent1"/>
-          </a:lnRef>
-          <a:fillRef idx="3">
-            <a:schemeClr val="accent1"/>
-          </a:fillRef>
-          <a:effectRef idx="2">
-            <a:schemeClr val="accent1"/>
-          </a:effectRef>
-          <a:fontRef idx="minor">
-            <a:schemeClr val="lt1"/>
-          </a:fontRef>
-        </p:style>
-        <p:txBody>
-          <a:bodyPr rtlCol="0" anchor="ctr"/>
-          <a:lstStyle/>
-          <a:p>
-            <a:pPr algn="ctr"/>
-          </a:p>
-        </p:txBody>
-      </p:sp>
-      <p:sp>
-        <p:nvSpPr>
-          <p:cNvPr id="178" name="TextBox 177"/>
-          <p:cNvSpPr txBox="1"/>
-          <p:nvPr/>
-        </p:nvSpPr>
-        <p:spPr>
-          <a:xfrm>
-            <a:off x="7749540" y="7882127"/>
-            <a:ext cx="3022092" cy="329184"/>
-          </a:xfrm>
-          <a:prstGeom prst="rect">
-            <a:avLst/>
-          </a:prstGeom>
           <a:noFill/>
-        </p:spPr>
-        <p:txBody>
-          <a:bodyPr wrap="square" anchor="ctr" lIns="0" rIns="0" tIns="0" bIns="0">
-            <a:spAutoFit/>
-          </a:bodyPr>
-          <a:lstStyle/>
-          <a:p>
-            <a:pPr algn="ctr">
-              <a:lnSpc>
-                <a:spcPct val="110000"/>
-              </a:lnSpc>
-            </a:pPr>
-            <a:r>
-              <a:rPr sz="1700" b="1">
-                <a:solidFill>
-                  <a:srgbClr val="FFFFFF"/>
-                </a:solidFill>
-                <a:latin typeface="Arial"/>
-                <a:ea typeface="Arial"/>
-              </a:rPr>
-              <a:t>데이터 로딩</a:t>
-            </a:r>
-          </a:p>
-        </p:txBody>
-      </p:sp>
-      <p:sp>
-        <p:nvSpPr>
-          <p:cNvPr id="179" name="TextBox 178"/>
-          <p:cNvSpPr txBox="1"/>
-          <p:nvPr/>
-        </p:nvSpPr>
-        <p:spPr>
-          <a:xfrm>
-            <a:off x="7749540" y="8202167"/>
-            <a:ext cx="3022092" cy="292608"/>
-          </a:xfrm>
-          <a:prstGeom prst="rect">
-            <a:avLst/>
-          </a:prstGeom>
-          <a:noFill/>
-        </p:spPr>
-        <p:txBody>
-          <a:bodyPr wrap="square" anchor="ctr" lIns="0" rIns="0" tIns="0" bIns="0">
-            <a:spAutoFit/>
-          </a:bodyPr>
-          <a:lstStyle/>
-          <a:p>
-            <a:pPr algn="ctr">
-              <a:lnSpc>
-                <a:spcPct val="110000"/>
-              </a:lnSpc>
-            </a:pPr>
-            <a:r>
-              <a:rPr sz="1500" b="1">
-                <a:solidFill>
-                  <a:srgbClr val="AAB8E8"/>
-                </a:solidFill>
-                <a:latin typeface="Arial"/>
-                <a:ea typeface="Arial"/>
-              </a:rPr>
-              <a:t>PM1763</a:t>
-            </a:r>
+          <a:ln w="9525">
+            <a:solidFill>
+              <a:srgbClr val="D9D9D9"/>
+            </a:solidFill>
+          </a:ln>
+          <a:effectLst/>
+        </p:spPr>
+        <p:style>
+          <a:lnRef idx="1">
+            <a:schemeClr val="accent1"/>
+          </a:lnRef>
+          <a:fillRef idx="3">
+            <a:schemeClr val="accent1"/>
+          </a:fillRef>
+          <a:effectRef idx="2">
+            <a:schemeClr val="accent1"/>
+          </a:effectRef>
+          <a:fontRef idx="minor">
+            <a:schemeClr val="lt1"/>
+          </a:fontRef>
+        </p:style>
+        <p:txBody>
+          <a:bodyPr rtlCol="0" anchor="ctr"/>
+          <a:lstStyle/>
+          <a:p>
+            <a:pPr algn="ctr"/>
           </a:p>
         </p:txBody>
       </p:sp>

--- a/outputs/presentation/ssd-future-ready-strategy.pptx
+++ b/outputs/presentation/ssd-future-ready-strategy.pptx
@@ -29380,20 +29380,20 @@
       </p:sp>
       <p:sp>
         <p:nvSpPr>
-          <p:cNvPr id="155" name="Oval 154"/>
-          <p:cNvSpPr/>
-          <p:nvPr/>
-        </p:nvSpPr>
-        <p:spPr>
-          <a:xfrm>
-            <a:off x="15371064" y="2852928"/>
-            <a:ext cx="365760" cy="365760"/>
-          </a:xfrm>
-          <a:prstGeom prst="ellipse">
-            <a:avLst/>
-          </a:prstGeom>
-          <a:solidFill>
-            <a:srgbClr val="1428A0"/>
+          <p:cNvPr id="155" name="Rectangle 154"/>
+          <p:cNvSpPr/>
+          <p:nvPr/>
+        </p:nvSpPr>
+        <p:spPr>
+          <a:xfrm>
+            <a:off x="15279624" y="2761488"/>
+            <a:ext cx="73152" cy="1353312"/>
+          </a:xfrm>
+          <a:prstGeom prst="rect">
+            <a:avLst/>
+          </a:prstGeom>
+          <a:solidFill>
+            <a:srgbClr val="009E73"/>
           </a:solidFill>
           <a:ln>
             <a:noFill/>
@@ -29424,13 +29424,57 @@
       </p:sp>
       <p:sp>
         <p:nvSpPr>
-          <p:cNvPr id="156" name="TextBox 155"/>
+          <p:cNvPr id="156" name="Oval 155"/>
+          <p:cNvSpPr/>
+          <p:nvPr/>
+        </p:nvSpPr>
+        <p:spPr>
+          <a:xfrm>
+            <a:off x="15407640" y="2852928"/>
+            <a:ext cx="365760" cy="365760"/>
+          </a:xfrm>
+          <a:prstGeom prst="ellipse">
+            <a:avLst/>
+          </a:prstGeom>
+          <a:solidFill>
+            <a:srgbClr val="009E73"/>
+          </a:solidFill>
+          <a:ln>
+            <a:noFill/>
+          </a:ln>
+          <a:effectLst/>
+        </p:spPr>
+        <p:style>
+          <a:lnRef idx="1">
+            <a:schemeClr val="accent1"/>
+          </a:lnRef>
+          <a:fillRef idx="3">
+            <a:schemeClr val="accent1"/>
+          </a:fillRef>
+          <a:effectRef idx="2">
+            <a:schemeClr val="accent1"/>
+          </a:effectRef>
+          <a:fontRef idx="minor">
+            <a:schemeClr val="lt1"/>
+          </a:fontRef>
+        </p:style>
+        <p:txBody>
+          <a:bodyPr rtlCol="0" anchor="ctr"/>
+          <a:lstStyle/>
+          <a:p>
+            <a:pPr algn="ctr"/>
+          </a:p>
+        </p:txBody>
+      </p:sp>
+      <p:sp>
+        <p:nvSpPr>
+          <p:cNvPr id="157" name="TextBox 156"/>
           <p:cNvSpPr txBox="1"/>
           <p:nvPr/>
         </p:nvSpPr>
         <p:spPr>
           <a:xfrm>
-            <a:off x="15371064" y="2852928"/>
+            <a:off x="15407640" y="2852928"/>
             <a:ext cx="365760" cy="365760"/>
           </a:xfrm>
           <a:prstGeom prst="rect">
@@ -29464,7 +29508,7 @@
       </p:sp>
       <p:pic>
         <p:nvPicPr>
-          <p:cNvPr id="157" name="Picture 156" descr="p_bm1743.png"/>
+          <p:cNvPr id="158" name="Picture 157" descr="p_bm1743.png"/>
           <p:cNvPicPr>
             <a:picLocks noChangeAspect="1"/>
           </p:cNvPicPr>
@@ -29488,14 +29532,14 @@
       </p:pic>
       <p:sp>
         <p:nvSpPr>
-          <p:cNvPr id="158" name="TextBox 157"/>
+          <p:cNvPr id="159" name="TextBox 158"/>
           <p:cNvSpPr txBox="1"/>
           <p:nvPr/>
         </p:nvSpPr>
         <p:spPr>
           <a:xfrm>
-            <a:off x="15371064" y="3364991"/>
-            <a:ext cx="2103120" cy="274320"/>
+            <a:off x="15462504" y="3364991"/>
+            <a:ext cx="2048256" cy="274320"/>
           </a:xfrm>
           <a:prstGeom prst="rect">
             <a:avLst/>
@@ -29528,14 +29572,14 @@
       </p:sp>
       <p:sp>
         <p:nvSpPr>
-          <p:cNvPr id="159" name="TextBox 158"/>
+          <p:cNvPr id="160" name="TextBox 159"/>
           <p:cNvSpPr txBox="1"/>
           <p:nvPr/>
         </p:nvSpPr>
         <p:spPr>
           <a:xfrm>
-            <a:off x="15371064" y="3621024"/>
-            <a:ext cx="2103120" cy="274320"/>
+            <a:off x="15462504" y="3621024"/>
+            <a:ext cx="2048256" cy="274320"/>
           </a:xfrm>
           <a:prstGeom prst="rect">
             <a:avLst/>
@@ -29556,7 +29600,7 @@
             <a:r>
               <a:rPr sz="1600" b="1">
                 <a:solidFill>
-                  <a:srgbClr val="1428A0"/>
+                  <a:srgbClr val="009E73"/>
                 </a:solidFill>
                 <a:latin typeface="Arial"/>
                 <a:ea typeface="Arial"/>
@@ -29568,14 +29612,14 @@
       </p:sp>
       <p:sp>
         <p:nvSpPr>
-          <p:cNvPr id="160" name="TextBox 159"/>
+          <p:cNvPr id="161" name="TextBox 160"/>
           <p:cNvSpPr txBox="1"/>
           <p:nvPr/>
         </p:nvSpPr>
         <p:spPr>
           <a:xfrm>
-            <a:off x="15371064" y="3858768"/>
-            <a:ext cx="2103120" cy="256032"/>
+            <a:off x="15462504" y="3858768"/>
+            <a:ext cx="2048256" cy="256032"/>
           </a:xfrm>
           <a:prstGeom prst="rect">
             <a:avLst/>
@@ -29608,7 +29652,7 @@
       </p:sp>
       <p:sp>
         <p:nvSpPr>
-          <p:cNvPr id="161" name="Oval 160"/>
+          <p:cNvPr id="162" name="Oval 161"/>
           <p:cNvSpPr/>
           <p:nvPr/>
         </p:nvSpPr>
@@ -29621,7 +29665,7 @@
             <a:avLst/>
           </a:prstGeom>
           <a:solidFill>
-            <a:srgbClr val="1428A0"/>
+            <a:srgbClr val="009E73"/>
           </a:solidFill>
           <a:ln w="19050">
             <a:solidFill>
@@ -29654,7 +29698,7 @@
       </p:sp>
       <p:sp>
         <p:nvSpPr>
-          <p:cNvPr id="162" name="TextBox 161"/>
+          <p:cNvPr id="163" name="TextBox 162"/>
           <p:cNvSpPr txBox="1"/>
           <p:nvPr/>
         </p:nvSpPr>
@@ -29694,7 +29738,7 @@
       </p:sp>
       <p:sp>
         <p:nvSpPr>
-          <p:cNvPr id="163" name="Rounded Rectangle 162"/>
+          <p:cNvPr id="164" name="Rounded Rectangle 163"/>
           <p:cNvSpPr/>
           <p:nvPr/>
         </p:nvSpPr>
@@ -29740,20 +29784,20 @@
       </p:sp>
       <p:sp>
         <p:nvSpPr>
-          <p:cNvPr id="164" name="Oval 163"/>
-          <p:cNvSpPr/>
-          <p:nvPr/>
-        </p:nvSpPr>
-        <p:spPr>
-          <a:xfrm>
-            <a:off x="15371064" y="4297680"/>
-            <a:ext cx="365760" cy="365760"/>
-          </a:xfrm>
-          <a:prstGeom prst="ellipse">
-            <a:avLst/>
-          </a:prstGeom>
-          <a:solidFill>
-            <a:srgbClr val="1428A0"/>
+          <p:cNvPr id="165" name="Rectangle 164"/>
+          <p:cNvSpPr/>
+          <p:nvPr/>
+        </p:nvSpPr>
+        <p:spPr>
+          <a:xfrm>
+            <a:off x="15279624" y="4206240"/>
+            <a:ext cx="73152" cy="1353312"/>
+          </a:xfrm>
+          <a:prstGeom prst="rect">
+            <a:avLst/>
+          </a:prstGeom>
+          <a:solidFill>
+            <a:srgbClr val="0072B2"/>
           </a:solidFill>
           <a:ln>
             <a:noFill/>
@@ -29784,13 +29828,57 @@
       </p:sp>
       <p:sp>
         <p:nvSpPr>
-          <p:cNvPr id="165" name="TextBox 164"/>
+          <p:cNvPr id="166" name="Oval 165"/>
+          <p:cNvSpPr/>
+          <p:nvPr/>
+        </p:nvSpPr>
+        <p:spPr>
+          <a:xfrm>
+            <a:off x="15407640" y="4297680"/>
+            <a:ext cx="365760" cy="365760"/>
+          </a:xfrm>
+          <a:prstGeom prst="ellipse">
+            <a:avLst/>
+          </a:prstGeom>
+          <a:solidFill>
+            <a:srgbClr val="0072B2"/>
+          </a:solidFill>
+          <a:ln>
+            <a:noFill/>
+          </a:ln>
+          <a:effectLst/>
+        </p:spPr>
+        <p:style>
+          <a:lnRef idx="1">
+            <a:schemeClr val="accent1"/>
+          </a:lnRef>
+          <a:fillRef idx="3">
+            <a:schemeClr val="accent1"/>
+          </a:fillRef>
+          <a:effectRef idx="2">
+            <a:schemeClr val="accent1"/>
+          </a:effectRef>
+          <a:fontRef idx="minor">
+            <a:schemeClr val="lt1"/>
+          </a:fontRef>
+        </p:style>
+        <p:txBody>
+          <a:bodyPr rtlCol="0" anchor="ctr"/>
+          <a:lstStyle/>
+          <a:p>
+            <a:pPr algn="ctr"/>
+          </a:p>
+        </p:txBody>
+      </p:sp>
+      <p:sp>
+        <p:nvSpPr>
+          <p:cNvPr id="167" name="TextBox 166"/>
           <p:cNvSpPr txBox="1"/>
           <p:nvPr/>
         </p:nvSpPr>
         <p:spPr>
           <a:xfrm>
-            <a:off x="15371064" y="4297680"/>
+            <a:off x="15407640" y="4297680"/>
             <a:ext cx="365760" cy="365760"/>
           </a:xfrm>
           <a:prstGeom prst="rect">
@@ -29824,7 +29912,7 @@
       </p:sp>
       <p:pic>
         <p:nvPicPr>
-          <p:cNvPr id="166" name="Picture 165" descr="p_pm1753.png"/>
+          <p:cNvPr id="168" name="Picture 167" descr="p_pm1753.png"/>
           <p:cNvPicPr>
             <a:picLocks noChangeAspect="1"/>
           </p:cNvPicPr>
@@ -29848,14 +29936,14 @@
       </p:pic>
       <p:sp>
         <p:nvSpPr>
-          <p:cNvPr id="167" name="TextBox 166"/>
+          <p:cNvPr id="169" name="TextBox 168"/>
           <p:cNvSpPr txBox="1"/>
           <p:nvPr/>
         </p:nvSpPr>
         <p:spPr>
           <a:xfrm>
-            <a:off x="15371064" y="4809744"/>
-            <a:ext cx="2103120" cy="274320"/>
+            <a:off x="15462504" y="4809744"/>
+            <a:ext cx="2048256" cy="274320"/>
           </a:xfrm>
           <a:prstGeom prst="rect">
             <a:avLst/>
@@ -29888,14 +29976,14 @@
       </p:sp>
       <p:sp>
         <p:nvSpPr>
-          <p:cNvPr id="168" name="TextBox 167"/>
+          <p:cNvPr id="170" name="TextBox 169"/>
           <p:cNvSpPr txBox="1"/>
           <p:nvPr/>
         </p:nvSpPr>
         <p:spPr>
           <a:xfrm>
-            <a:off x="15371064" y="5065776"/>
-            <a:ext cx="2103120" cy="274320"/>
+            <a:off x="15462504" y="5065776"/>
+            <a:ext cx="2048256" cy="274320"/>
           </a:xfrm>
           <a:prstGeom prst="rect">
             <a:avLst/>
@@ -29916,7 +30004,7 @@
             <a:r>
               <a:rPr sz="1600" b="1">
                 <a:solidFill>
-                  <a:srgbClr val="1428A0"/>
+                  <a:srgbClr val="0072B2"/>
                 </a:solidFill>
                 <a:latin typeface="Arial"/>
                 <a:ea typeface="Arial"/>
@@ -29928,14 +30016,14 @@
       </p:sp>
       <p:sp>
         <p:nvSpPr>
-          <p:cNvPr id="169" name="TextBox 168"/>
+          <p:cNvPr id="171" name="TextBox 170"/>
           <p:cNvSpPr txBox="1"/>
           <p:nvPr/>
         </p:nvSpPr>
         <p:spPr>
           <a:xfrm>
-            <a:off x="15371064" y="5303520"/>
-            <a:ext cx="2103120" cy="256032"/>
+            <a:off x="15462504" y="5303520"/>
+            <a:ext cx="2048256" cy="256032"/>
           </a:xfrm>
           <a:prstGeom prst="rect">
             <a:avLst/>
@@ -29968,7 +30056,7 @@
       </p:sp>
       <p:sp>
         <p:nvSpPr>
-          <p:cNvPr id="170" name="Oval 169"/>
+          <p:cNvPr id="172" name="Oval 171"/>
           <p:cNvSpPr/>
           <p:nvPr/>
         </p:nvSpPr>
@@ -29981,7 +30069,7 @@
             <a:avLst/>
           </a:prstGeom>
           <a:solidFill>
-            <a:srgbClr val="1428A0"/>
+            <a:srgbClr val="0072B2"/>
           </a:solidFill>
           <a:ln w="19050">
             <a:solidFill>
@@ -30014,7 +30102,7 @@
       </p:sp>
       <p:sp>
         <p:nvSpPr>
-          <p:cNvPr id="171" name="TextBox 170"/>
+          <p:cNvPr id="173" name="TextBox 172"/>
           <p:cNvSpPr txBox="1"/>
           <p:nvPr/>
         </p:nvSpPr>
@@ -30054,7 +30142,7 @@
       </p:sp>
       <p:sp>
         <p:nvSpPr>
-          <p:cNvPr id="172" name="Rounded Rectangle 171"/>
+          <p:cNvPr id="174" name="Rounded Rectangle 173"/>
           <p:cNvSpPr/>
           <p:nvPr/>
         </p:nvSpPr>
@@ -30100,20 +30188,20 @@
       </p:sp>
       <p:sp>
         <p:nvSpPr>
-          <p:cNvPr id="173" name="Oval 172"/>
-          <p:cNvSpPr/>
-          <p:nvPr/>
-        </p:nvSpPr>
-        <p:spPr>
-          <a:xfrm>
-            <a:off x="15371064" y="5742432"/>
-            <a:ext cx="365760" cy="365760"/>
-          </a:xfrm>
-          <a:prstGeom prst="ellipse">
-            <a:avLst/>
-          </a:prstGeom>
-          <a:solidFill>
-            <a:srgbClr val="1428A0"/>
+          <p:cNvPr id="175" name="Rectangle 174"/>
+          <p:cNvSpPr/>
+          <p:nvPr/>
+        </p:nvSpPr>
+        <p:spPr>
+          <a:xfrm>
+            <a:off x="15279624" y="5650992"/>
+            <a:ext cx="73152" cy="1353312"/>
+          </a:xfrm>
+          <a:prstGeom prst="rect">
+            <a:avLst/>
+          </a:prstGeom>
+          <a:solidFill>
+            <a:srgbClr val="E69F00"/>
           </a:solidFill>
           <a:ln>
             <a:noFill/>
@@ -30144,13 +30232,57 @@
       </p:sp>
       <p:sp>
         <p:nvSpPr>
-          <p:cNvPr id="174" name="TextBox 173"/>
+          <p:cNvPr id="176" name="Oval 175"/>
+          <p:cNvSpPr/>
+          <p:nvPr/>
+        </p:nvSpPr>
+        <p:spPr>
+          <a:xfrm>
+            <a:off x="15407640" y="5742432"/>
+            <a:ext cx="365760" cy="365760"/>
+          </a:xfrm>
+          <a:prstGeom prst="ellipse">
+            <a:avLst/>
+          </a:prstGeom>
+          <a:solidFill>
+            <a:srgbClr val="E69F00"/>
+          </a:solidFill>
+          <a:ln>
+            <a:noFill/>
+          </a:ln>
+          <a:effectLst/>
+        </p:spPr>
+        <p:style>
+          <a:lnRef idx="1">
+            <a:schemeClr val="accent1"/>
+          </a:lnRef>
+          <a:fillRef idx="3">
+            <a:schemeClr val="accent1"/>
+          </a:fillRef>
+          <a:effectRef idx="2">
+            <a:schemeClr val="accent1"/>
+          </a:effectRef>
+          <a:fontRef idx="minor">
+            <a:schemeClr val="lt1"/>
+          </a:fontRef>
+        </p:style>
+        <p:txBody>
+          <a:bodyPr rtlCol="0" anchor="ctr"/>
+          <a:lstStyle/>
+          <a:p>
+            <a:pPr algn="ctr"/>
+          </a:p>
+        </p:txBody>
+      </p:sp>
+      <p:sp>
+        <p:nvSpPr>
+          <p:cNvPr id="177" name="TextBox 176"/>
           <p:cNvSpPr txBox="1"/>
           <p:nvPr/>
         </p:nvSpPr>
         <p:spPr>
           <a:xfrm>
-            <a:off x="15371064" y="5742432"/>
+            <a:off x="15407640" y="5742432"/>
             <a:ext cx="365760" cy="365760"/>
           </a:xfrm>
           <a:prstGeom prst="rect">
@@ -30184,7 +30316,7 @@
       </p:sp>
       <p:pic>
         <p:nvPicPr>
-          <p:cNvPr id="175" name="Picture 174" descr="p_pm1755.png"/>
+          <p:cNvPr id="178" name="Picture 177" descr="p_pm1755.png"/>
           <p:cNvPicPr>
             <a:picLocks noChangeAspect="1"/>
           </p:cNvPicPr>
@@ -30208,14 +30340,14 @@
       </p:pic>
       <p:sp>
         <p:nvSpPr>
-          <p:cNvPr id="176" name="TextBox 175"/>
+          <p:cNvPr id="179" name="TextBox 178"/>
           <p:cNvSpPr txBox="1"/>
           <p:nvPr/>
         </p:nvSpPr>
         <p:spPr>
           <a:xfrm>
-            <a:off x="15371064" y="6254496"/>
-            <a:ext cx="2103120" cy="274320"/>
+            <a:off x="15462504" y="6254496"/>
+            <a:ext cx="2048256" cy="274320"/>
           </a:xfrm>
           <a:prstGeom prst="rect">
             <a:avLst/>
@@ -30248,14 +30380,14 @@
       </p:sp>
       <p:sp>
         <p:nvSpPr>
-          <p:cNvPr id="177" name="TextBox 176"/>
+          <p:cNvPr id="180" name="TextBox 179"/>
           <p:cNvSpPr txBox="1"/>
           <p:nvPr/>
         </p:nvSpPr>
         <p:spPr>
           <a:xfrm>
-            <a:off x="15371064" y="6510528"/>
-            <a:ext cx="2103120" cy="274320"/>
+            <a:off x="15462504" y="6510528"/>
+            <a:ext cx="2048256" cy="274320"/>
           </a:xfrm>
           <a:prstGeom prst="rect">
             <a:avLst/>
@@ -30276,7 +30408,7 @@
             <a:r>
               <a:rPr sz="1600" b="1">
                 <a:solidFill>
-                  <a:srgbClr val="1428A0"/>
+                  <a:srgbClr val="E69F00"/>
                 </a:solidFill>
                 <a:latin typeface="Arial"/>
                 <a:ea typeface="Arial"/>
@@ -30288,14 +30420,14 @@
       </p:sp>
       <p:sp>
         <p:nvSpPr>
-          <p:cNvPr id="178" name="TextBox 177"/>
+          <p:cNvPr id="181" name="TextBox 180"/>
           <p:cNvSpPr txBox="1"/>
           <p:nvPr/>
         </p:nvSpPr>
         <p:spPr>
           <a:xfrm>
-            <a:off x="15371064" y="6748272"/>
-            <a:ext cx="2103120" cy="256032"/>
+            <a:off x="15462504" y="6748272"/>
+            <a:ext cx="2048256" cy="256032"/>
           </a:xfrm>
           <a:prstGeom prst="rect">
             <a:avLst/>
@@ -30328,7 +30460,7 @@
       </p:sp>
       <p:sp>
         <p:nvSpPr>
-          <p:cNvPr id="179" name="Oval 178"/>
+          <p:cNvPr id="182" name="Oval 181"/>
           <p:cNvSpPr/>
           <p:nvPr/>
         </p:nvSpPr>
@@ -30341,7 +30473,7 @@
             <a:avLst/>
           </a:prstGeom>
           <a:solidFill>
-            <a:srgbClr val="1428A0"/>
+            <a:srgbClr val="E69F00"/>
           </a:solidFill>
           <a:ln w="19050">
             <a:solidFill>
@@ -30374,7 +30506,7 @@
       </p:sp>
       <p:sp>
         <p:nvSpPr>
-          <p:cNvPr id="180" name="TextBox 179"/>
+          <p:cNvPr id="183" name="TextBox 182"/>
           <p:cNvSpPr txBox="1"/>
           <p:nvPr/>
         </p:nvSpPr>
@@ -30414,7 +30546,7 @@
       </p:sp>
       <p:sp>
         <p:nvSpPr>
-          <p:cNvPr id="181" name="Rounded Rectangle 180"/>
+          <p:cNvPr id="184" name="Rounded Rectangle 183"/>
           <p:cNvSpPr/>
           <p:nvPr/>
         </p:nvSpPr>
@@ -30460,20 +30592,20 @@
       </p:sp>
       <p:sp>
         <p:nvSpPr>
-          <p:cNvPr id="182" name="Oval 181"/>
-          <p:cNvSpPr/>
-          <p:nvPr/>
-        </p:nvSpPr>
-        <p:spPr>
-          <a:xfrm>
-            <a:off x="15371064" y="7187184"/>
-            <a:ext cx="365760" cy="365760"/>
-          </a:xfrm>
-          <a:prstGeom prst="ellipse">
-            <a:avLst/>
-          </a:prstGeom>
-          <a:solidFill>
-            <a:srgbClr val="1428A0"/>
+          <p:cNvPr id="185" name="Rectangle 184"/>
+          <p:cNvSpPr/>
+          <p:nvPr/>
+        </p:nvSpPr>
+        <p:spPr>
+          <a:xfrm>
+            <a:off x="15279624" y="7095744"/>
+            <a:ext cx="73152" cy="1353312"/>
+          </a:xfrm>
+          <a:prstGeom prst="rect">
+            <a:avLst/>
+          </a:prstGeom>
+          <a:solidFill>
+            <a:srgbClr val="CC79A7"/>
           </a:solidFill>
           <a:ln>
             <a:noFill/>
@@ -30504,13 +30636,57 @@
       </p:sp>
       <p:sp>
         <p:nvSpPr>
-          <p:cNvPr id="183" name="TextBox 182"/>
+          <p:cNvPr id="186" name="Oval 185"/>
+          <p:cNvSpPr/>
+          <p:nvPr/>
+        </p:nvSpPr>
+        <p:spPr>
+          <a:xfrm>
+            <a:off x="15407640" y="7187184"/>
+            <a:ext cx="365760" cy="365760"/>
+          </a:xfrm>
+          <a:prstGeom prst="ellipse">
+            <a:avLst/>
+          </a:prstGeom>
+          <a:solidFill>
+            <a:srgbClr val="CC79A7"/>
+          </a:solidFill>
+          <a:ln>
+            <a:noFill/>
+          </a:ln>
+          <a:effectLst/>
+        </p:spPr>
+        <p:style>
+          <a:lnRef idx="1">
+            <a:schemeClr val="accent1"/>
+          </a:lnRef>
+          <a:fillRef idx="3">
+            <a:schemeClr val="accent1"/>
+          </a:fillRef>
+          <a:effectRef idx="2">
+            <a:schemeClr val="accent1"/>
+          </a:effectRef>
+          <a:fontRef idx="minor">
+            <a:schemeClr val="lt1"/>
+          </a:fontRef>
+        </p:style>
+        <p:txBody>
+          <a:bodyPr rtlCol="0" anchor="ctr"/>
+          <a:lstStyle/>
+          <a:p>
+            <a:pPr algn="ctr"/>
+          </a:p>
+        </p:txBody>
+      </p:sp>
+      <p:sp>
+        <p:nvSpPr>
+          <p:cNvPr id="187" name="TextBox 186"/>
           <p:cNvSpPr txBox="1"/>
           <p:nvPr/>
         </p:nvSpPr>
         <p:spPr>
           <a:xfrm>
-            <a:off x="15371064" y="7187184"/>
+            <a:off x="15407640" y="7187184"/>
             <a:ext cx="365760" cy="365760"/>
           </a:xfrm>
           <a:prstGeom prst="rect">
@@ -30544,7 +30720,7 @@
       </p:sp>
       <p:pic>
         <p:nvPicPr>
-          <p:cNvPr id="184" name="Picture 183" descr="p_zssd.png"/>
+          <p:cNvPr id="188" name="Picture 187" descr="p_zssd.png"/>
           <p:cNvPicPr>
             <a:picLocks noChangeAspect="1"/>
           </p:cNvPicPr>
@@ -30568,14 +30744,14 @@
       </p:pic>
       <p:sp>
         <p:nvSpPr>
-          <p:cNvPr id="185" name="TextBox 184"/>
+          <p:cNvPr id="189" name="TextBox 188"/>
           <p:cNvSpPr txBox="1"/>
           <p:nvPr/>
         </p:nvSpPr>
         <p:spPr>
           <a:xfrm>
-            <a:off x="15371064" y="7699248"/>
-            <a:ext cx="2103120" cy="274320"/>
+            <a:off x="15462504" y="7699248"/>
+            <a:ext cx="2048256" cy="274320"/>
           </a:xfrm>
           <a:prstGeom prst="rect">
             <a:avLst/>
@@ -30608,14 +30784,14 @@
       </p:sp>
       <p:sp>
         <p:nvSpPr>
-          <p:cNvPr id="186" name="TextBox 185"/>
+          <p:cNvPr id="190" name="TextBox 189"/>
           <p:cNvSpPr txBox="1"/>
           <p:nvPr/>
         </p:nvSpPr>
         <p:spPr>
           <a:xfrm>
-            <a:off x="15371064" y="7955280"/>
-            <a:ext cx="2103120" cy="274320"/>
+            <a:off x="15462504" y="7955280"/>
+            <a:ext cx="2048256" cy="274320"/>
           </a:xfrm>
           <a:prstGeom prst="rect">
             <a:avLst/>
@@ -30636,7 +30812,7 @@
             <a:r>
               <a:rPr sz="1600" b="1">
                 <a:solidFill>
-                  <a:srgbClr val="1428A0"/>
+                  <a:srgbClr val="CC79A7"/>
                 </a:solidFill>
                 <a:latin typeface="Arial"/>
                 <a:ea typeface="Arial"/>
@@ -30648,14 +30824,14 @@
       </p:sp>
       <p:sp>
         <p:nvSpPr>
-          <p:cNvPr id="187" name="TextBox 186"/>
+          <p:cNvPr id="191" name="TextBox 190"/>
           <p:cNvSpPr txBox="1"/>
           <p:nvPr/>
         </p:nvSpPr>
         <p:spPr>
           <a:xfrm>
-            <a:off x="15371064" y="8193024"/>
-            <a:ext cx="2103120" cy="256032"/>
+            <a:off x="15462504" y="8193024"/>
+            <a:ext cx="2048256" cy="256032"/>
           </a:xfrm>
           <a:prstGeom prst="rect">
             <a:avLst/>
@@ -30688,7 +30864,7 @@
       </p:sp>
       <p:sp>
         <p:nvSpPr>
-          <p:cNvPr id="188" name="Oval 187"/>
+          <p:cNvPr id="192" name="Oval 191"/>
           <p:cNvSpPr/>
           <p:nvPr/>
         </p:nvSpPr>
@@ -30701,7 +30877,7 @@
             <a:avLst/>
           </a:prstGeom>
           <a:solidFill>
-            <a:srgbClr val="1428A0"/>
+            <a:srgbClr val="CC79A7"/>
           </a:solidFill>
           <a:ln w="19050">
             <a:solidFill>
@@ -30734,7 +30910,7 @@
       </p:sp>
       <p:sp>
         <p:nvSpPr>
-          <p:cNvPr id="189" name="TextBox 188"/>
+          <p:cNvPr id="193" name="TextBox 192"/>
           <p:cNvSpPr txBox="1"/>
           <p:nvPr/>
         </p:nvSpPr>
@@ -30774,7 +30950,7 @@
       </p:sp>
       <p:sp>
         <p:nvSpPr>
-          <p:cNvPr id="190" name="TextBox 189"/>
+          <p:cNvPr id="194" name="TextBox 193"/>
           <p:cNvSpPr txBox="1"/>
           <p:nvPr/>
         </p:nvSpPr>
@@ -30814,7 +30990,7 @@
       </p:sp>
       <p:sp>
         <p:nvSpPr>
-          <p:cNvPr id="191" name="Rectangle 190"/>
+          <p:cNvPr id="195" name="Rectangle 194"/>
           <p:cNvSpPr/>
           <p:nvPr/>
         </p:nvSpPr>
@@ -30827,11 +31003,11 @@
             <a:avLst/>
           </a:prstGeom>
           <a:solidFill>
-            <a:srgbClr val="E8ECF8"/>
+            <a:srgbClr val="ECEEF1"/>
           </a:solidFill>
           <a:ln w="6350">
             <a:solidFill>
-              <a:srgbClr val="AAB8E8"/>
+              <a:srgbClr val="8A8A8A"/>
             </a:solidFill>
           </a:ln>
           <a:effectLst/>
@@ -30860,7 +31036,7 @@
       </p:sp>
       <p:sp>
         <p:nvSpPr>
-          <p:cNvPr id="192" name="TextBox 191"/>
+          <p:cNvPr id="196" name="TextBox 195"/>
           <p:cNvSpPr txBox="1"/>
           <p:nvPr/>
         </p:nvSpPr>
@@ -30888,7 +31064,7 @@
             <a:r>
               <a:rPr sz="1500" b="1">
                 <a:solidFill>
-                  <a:srgbClr val="1428A0"/>
+                  <a:srgbClr val="555555"/>
                 </a:solidFill>
                 <a:latin typeface="Arial"/>
                 <a:ea typeface="Arial"/>
@@ -30900,7 +31076,7 @@
       </p:sp>
       <p:sp>
         <p:nvSpPr>
-          <p:cNvPr id="193" name="Rectangle 192"/>
+          <p:cNvPr id="197" name="Rectangle 196"/>
           <p:cNvSpPr/>
           <p:nvPr/>
         </p:nvSpPr>
@@ -30913,11 +31089,11 @@
             <a:avLst/>
           </a:prstGeom>
           <a:solidFill>
-            <a:srgbClr val="D3DBF4"/>
+            <a:srgbClr val="D5D9DF"/>
           </a:solidFill>
           <a:ln w="6350">
             <a:solidFill>
-              <a:srgbClr val="AAB8E8"/>
+              <a:srgbClr val="8A8A8A"/>
             </a:solidFill>
           </a:ln>
           <a:effectLst/>
@@ -30946,7 +31122,7 @@
       </p:sp>
       <p:sp>
         <p:nvSpPr>
-          <p:cNvPr id="194" name="TextBox 193"/>
+          <p:cNvPr id="198" name="TextBox 197"/>
           <p:cNvSpPr txBox="1"/>
           <p:nvPr/>
         </p:nvSpPr>
@@ -30974,7 +31150,7 @@
             <a:r>
               <a:rPr sz="1500" b="1">
                 <a:solidFill>
-                  <a:srgbClr val="1428A0"/>
+                  <a:srgbClr val="555555"/>
                 </a:solidFill>
                 <a:latin typeface="Arial"/>
                 <a:ea typeface="Arial"/>
@@ -30986,7 +31162,7 @@
       </p:sp>
       <p:sp>
         <p:nvSpPr>
-          <p:cNvPr id="195" name="Rectangle 194"/>
+          <p:cNvPr id="199" name="Rectangle 198"/>
           <p:cNvSpPr/>
           <p:nvPr/>
         </p:nvSpPr>
@@ -30999,11 +31175,11 @@
             <a:avLst/>
           </a:prstGeom>
           <a:solidFill>
-            <a:srgbClr val="C2CDF0"/>
+            <a:srgbClr val="BEC4CC"/>
           </a:solidFill>
           <a:ln w="6350">
             <a:solidFill>
-              <a:srgbClr val="AAB8E8"/>
+              <a:srgbClr val="8A8A8A"/>
             </a:solidFill>
           </a:ln>
           <a:effectLst/>
@@ -31032,7 +31208,7 @@
       </p:sp>
       <p:sp>
         <p:nvSpPr>
-          <p:cNvPr id="196" name="TextBox 195"/>
+          <p:cNvPr id="200" name="TextBox 199"/>
           <p:cNvSpPr txBox="1"/>
           <p:nvPr/>
         </p:nvSpPr>
@@ -31060,7 +31236,7 @@
             <a:r>
               <a:rPr sz="1500" b="1">
                 <a:solidFill>
-                  <a:srgbClr val="1428A0"/>
+                  <a:srgbClr val="555555"/>
                 </a:solidFill>
                 <a:latin typeface="Arial"/>
                 <a:ea typeface="Arial"/>
@@ -31072,7 +31248,7 @@
       </p:sp>
       <p:sp>
         <p:nvSpPr>
-          <p:cNvPr id="197" name="Rectangle 196"/>
+          <p:cNvPr id="201" name="Rectangle 200"/>
           <p:cNvSpPr/>
           <p:nvPr/>
         </p:nvSpPr>
@@ -31116,7 +31292,7 @@
       </p:sp>
       <p:sp>
         <p:nvSpPr>
-          <p:cNvPr id="198" name="TextBox 197"/>
+          <p:cNvPr id="202" name="TextBox 201"/>
           <p:cNvSpPr txBox="1"/>
           <p:nvPr/>
         </p:nvSpPr>
@@ -31156,7 +31332,7 @@
       </p:sp>
       <p:sp>
         <p:nvSpPr>
-          <p:cNvPr id="199" name="TextBox 198"/>
+          <p:cNvPr id="203" name="TextBox 202"/>
           <p:cNvSpPr txBox="1"/>
           <p:nvPr/>
         </p:nvSpPr>
@@ -31196,7 +31372,7 @@
       </p:sp>
       <p:sp>
         <p:nvSpPr>
-          <p:cNvPr id="200" name="TextBox 199"/>
+          <p:cNvPr id="204" name="TextBox 203"/>
           <p:cNvSpPr txBox="1"/>
           <p:nvPr/>
         </p:nvSpPr>
@@ -31229,14 +31405,14 @@
                 <a:latin typeface="Arial"/>
                 <a:ea typeface="Arial"/>
               </a:rPr>
-              <a:t>출처: WAF 3.22 → 1.03(CacheLib FDP, 삼성 EuroSys'25) · p99.9 −55%(삼성 기술 블로그, PM9D3a 7.68TB RocksDB, TLC) · 공개 실험 테일 1.5~6배 ↓(ZNS · Valet · WALTZ) · DWPD 확장은 WAF 3 → 1 산술(⚠️) · 꼬리 지연 높이는 정성 등급 · 제품 이미지는 형태 재현</a:t>
-            </a:r>
-          </a:p>
-        </p:txBody>
-      </p:sp>
-      <p:sp>
-        <p:nvSpPr>
-          <p:cNvPr id="201" name="TextBox 200"/>
+              <a:t>출처: WAF 3.22 → 1.03(CacheLib FDP, 삼성 EuroSys'25) · p99.9 −55%(삼성 기술 블로그, PM9D3a 7.68TB RocksDB, TLC) · 공개 실험 테일 1.5~6배 ↓(ZNS · Valet · WALTZ) · DWPD 확장은 WAF 3 → 1 산술(⚠️) · 꼬리 지연 높이는 정성 등급 · 3D 그림은 제품군 구분을 위해 예외 색 · 제품 이미지는 형태 재현</a:t>
+            </a:r>
+          </a:p>
+        </p:txBody>
+      </p:sp>
+      <p:sp>
+        <p:nvSpPr>
+          <p:cNvPr id="205" name="TextBox 204"/>
           <p:cNvSpPr txBox="1"/>
           <p:nvPr/>
         </p:nvSpPr>

--- a/outputs/presentation/ssd-future-ready-strategy.pptx
+++ b/outputs/presentation/ssd-future-ready-strategy.pptx
@@ -509,7 +509,7 @@
           <a:lstStyle/>
           <a:p>
             <a:r>
-              <a:t>1장은 지금 수요의 모양과 삼성의 대응 현황입니다. HBM에서 삼성 점유율은 2022년 40퍼센트에서 2025년 2분기 17퍼센트로, SK하이닉스는 50에서 62퍼센트로 갈렸습니다. 하나의 수요를 늦게 읽으면 첫 호황을 놓친다는 교훈입니다. 그래서 하이퍼스케일러의 데이터센터 응용 네 가지를 SSD에 요구하는 특성으로 비교했습니다. 범용 클라우드는 여러 VM이 SSD를 나눠 써서 QoS와 격리가 요구입니다. 하드웨어로 격리하면 p99 지연이 최대 3.1배 줄었습니다. AI 학습은 대역입니다. NVIDIA SuperPOD 가이드를 GPU당으로 환산하면 멀티모달 학습은 기본보다 약 3배의 읽기 대역을 요구합니다. AI 추론은 DWPD만의 문제가 아닙니다. 세 가지를 함께 봐야 합니다. 첫째 읽기 대역입니다. 70B 모델의 128K 토큰 KV 캐시는 약 43기가바이트이고, 이것을 1초 안에 되살리려면 GPU 8개 서버 기준 GPU당 약 5.4기가바이트 매초가 필요합니다. 과제팀 산술입니다. 공개 측정에서는 문맥이 1K 토큰일 때 다시 계산하는 것보다 빠르려면 23.2기가바이트 매초, 80K 토큰이면 3.5기가바이트 매초가 필요했습니다. 405B 모델 가중치 810기가바이트를 PM1763 한 대로 읽으면 약 28.5초, PM1753이면 약 56초입니다. 둘째 꼬리 지연입니다. MLPerf의 Llama 2 70B 대화형 기준은 첫 토큰 p99 450밀리초, 토큰당 40밀리초입니다. SSD 계층을 넣고도 p99 첫 토큰 목표를 지키면 GPU당 세션을 10.77배 늘릴 수 있었다는 결과가 있고, SSD의 지연 흔들림이 첫 토큰 지연을 키운다는 연구도 있습니다. NVIDIA의 차세대 스토리지 목표도 전력과 꼬리 지연 제약 안에서 IOPS를 최대화하는 것입니다. 셋째 쓰기 내구입니다. KV 캐시 계층 드라이브 실측은 3.2 DWPD로 QLC 정격을 크게 넘고, AI 전용 SSD는 50에서 120 DWPD로 나왔습니다. 에이전트는 사용자마다 VM을 하나씩 주는 구조라 디스크가 메모리보다 13배 크고, 대부분 휴면이라 용량과 TB당 비용이 요구입니다. 가운데 막대는 eSSD 수요 비중입니다. 올해 범용 85, 학습 6, 추론 9퍼센트에서 2030년에는 범용 47, 학습 12, 추론 41퍼센트가 됩니다. 아래는 삼성 SSD 포트폴리오가 각 수요를 어떻게 맡고 있는지입니다. 고내구 TLC는 3 DWPD의 PM1755와 PM1745가 쓰기가 많은 KV를 맡고, 체크포인트 간격이 짧아지면 학습에도 쓰일 수 있어 점선으로 두었습니다. 고성능 TLC는 세대로 나눴습니다. 2026년 7월 양산한 PCIe 6.0의 PM1763은 순차 읽기 28.4기가바이트 매초로 학습 데이터 로딩을 맡고, GPU가 직접 512바이트 단위로 읽는 경로를 백서로 보였기 때문에 가중치 로딩과 GPU 직결은 신호로 두었습니다. PCIe 5.0의 PM9D3a와 PM1753은 범용 VM과 DB를 맡고, PM1753은 NVIDIA CMX 같은 KV 계층에 공급됩니다. 고용량 QLC는 BM1743이 122테라바이트까지 객체, 데이터셋, 사용자 VM 디스크를 맡고, 245테라바이트 BM1773이 FMS 2026에서 공개됐습니다. 가중치와 RAG 읽기는 BM1743이 맞지만 삼성이 이 용도로 내세운 적은 없어 점선으로 두었습니다. 정리하면 삼성은 TLC와 QLC 제품군으로 응용별 수요를 맡고 있지만, AI 추론은 대역, 꼬리 지연, 내구를 한꺼번에 요구한다는 점이 다음 장의 출발점입니다. SLC급 초고DWPD는 3장에서 포트폴리오 확장의 선택지로 다룹니다. 제품 이미지는 공식 사진을 구할 수 없어 폼팩터를 따라 재현한 것이고, 삼성 모델 사양은 공식 페이지 검색 결과로 확인한 2차 자료입니다.</a:t>
+              <a:t>1장은 지금 수요의 모양과 삼성의 대응 현황입니다. HBM에서 삼성 점유율은 2022년 40퍼센트에서 2025년 2분기 17퍼센트로, SK하이닉스는 50에서 62퍼센트로 갈렸습니다. 하나의 수요를 늦게 읽으면 첫 호황을 놓친다는 교훈입니다. 그래서 하이퍼스케일러의 데이터센터 응용 네 가지를 SSD에 요구하는 특성으로 비교했습니다. 범용 클라우드는 여러 VM이 SSD를 나눠 써서 QoS와 격리가 요구입니다. 하드웨어로 격리하면 p99 지연이 최대 3.1배 줄었습니다. AI 학습에서 SSD는 GPU 서버에 학습 데이터를 공급하고, 주기적으로 체크포인트를 받아 둡니다. 그래서 요구는 대역과 체크포인트입니다. NVIDIA SuperPOD 가이드를 GPU당으로 환산하면 멀티모달 학습은 기본 0.16에서 0.49기가바이트 매초로 약 3배의 읽기 대역을 요구하고, 405B 모델은 체크포인트 한 번에 약 5.7테라바이트를 씁니다. AI 추론에서 SSD는 GPU HBM과 CPU DRAM 아래의 메모리 계층입니다. 긴 문맥의 KV 캐시가 HBM과 DRAM을 넘치면 SSD로 내려가고, 같은 문맥을 다시 쓸 때 다시 올라옵니다. RAG 색인과 모델 가중치도 SSD에 둡니다. 그래서 DWPD만의 문제가 아니라 세 가지를 함께 봐야 합니다. 첫째 읽기 대역입니다. 70B 모델의 128K 토큰 KV 캐시는 약 43기가바이트이고, 이것을 1초 안에 되살리려면 GPU 8개 서버 기준 GPU당 약 5.4기가바이트 매초가 필요합니다. 과제팀 산술입니다. 공개 측정에서는 문맥이 1K 토큰일 때 다시 계산하는 것보다 빠르려면 23.2기가바이트 매초, 80K 토큰이면 3.5기가바이트 매초가 필요했습니다. 405B 모델 가중치 810기가바이트를 PM1763 한 대로 읽으면 약 28.5초, PM1753이면 약 56초입니다. 둘째 꼬리 지연입니다. MLPerf의 Llama 2 70B 대화형 기준은 첫 토큰 p99 450밀리초, 토큰당 40밀리초입니다. SSD 계층을 넣고도 p99 첫 토큰 목표를 지키면 GPU당 세션을 10.77배 늘릴 수 있었다는 결과가 있고, SSD의 지연 흔들림이 첫 토큰 지연을 키운다는 연구도 있습니다. NVIDIA의 차세대 스토리지 목표도 전력과 꼬리 지연 제약 안에서 IOPS를 최대화하는 것입니다. 셋째 쓰기 내구입니다. KV 캐시 계층 드라이브 실측은 3.2 DWPD로 QLC 정격을 크게 넘고, AI 전용 SSD는 50에서 120 DWPD로 나왔습니다. 에이전트는 사용자마다 VM을 하나씩 주는 구조라 디스크가 메모리보다 13배 크고, 대부분 휴면이라 용량과 TB당 비용이 요구입니다. 가운데 막대는 eSSD 수요 비중입니다. 올해 범용 85, 학습 6, 추론 9퍼센트에서 2030년에는 범용 47, 학습 12, 추론 41퍼센트가 됩니다. 아래는 삼성 SSD 포트폴리오가 각 수요를 어떻게 맡고 있는지입니다. 고내구 TLC는 3 DWPD의 PM1755와 PM1745가 쓰기가 많은 KV를 맡고, 체크포인트 간격이 짧아지면 학습에도 쓰일 수 있어 점선으로 두었습니다. 고성능 TLC는 세대로 나눴습니다. 2026년 7월 양산한 PCIe 6.0의 PM1763은 순차 읽기 28.4기가바이트 매초로 학습 데이터 로딩을 맡고, GPU가 직접 512바이트 단위로 읽는 경로를 백서로 보였기 때문에 가중치 로딩과 GPU 직결은 신호로 두었습니다. PCIe 5.0의 PM9D3a와 PM1753은 범용 VM과 DB를 맡고, PM1753은 NVIDIA CMX 같은 KV 계층에 공급됩니다. 고용량 QLC는 BM1743이 122테라바이트까지 객체, 데이터셋, 사용자 VM 디스크를 맡고, 245테라바이트 BM1773이 FMS 2026에서 공개됐습니다. 가중치와 RAG 읽기는 BM1743이 맞지만 삼성이 이 용도로 내세운 적은 없어 점선으로 두었습니다. 정리하면 삼성은 TLC와 QLC 제품군으로 응용별 수요를 맡고 있지만, AI 추론은 대역, 꼬리 지연, 내구를 한꺼번에 요구한다는 점이 다음 장의 출발점입니다. SLC급 초고DWPD는 3장에서 포트폴리오 확장의 선택지로 다룹니다. 제품 이미지는 공식 사진을 구할 수 없어 폼팩터를 따라 재현한 것이고, 삼성 모델 사양은 공식 페이지 검색 결과로 확인한 2차 자료입니다.</a:t>
             </a:r>
           </a:p>
         </p:txBody>
@@ -6799,20 +6799,22 @@
       </p:sp>
       <p:sp>
         <p:nvSpPr>
-          <p:cNvPr id="71" name="Rectangle 70"/>
-          <p:cNvSpPr/>
-          <p:nvPr/>
-        </p:nvSpPr>
-        <p:spPr>
-          <a:xfrm>
-            <a:off x="8023860" y="3927814"/>
-            <a:ext cx="566928" cy="388153"/>
-          </a:xfrm>
-          <a:prstGeom prst="rect">
-            <a:avLst/>
-          </a:prstGeom>
-          <a:solidFill>
-            <a:srgbClr val="8A8A8A"/>
+          <p:cNvPr id="71" name="Rounded Rectangle 70"/>
+          <p:cNvSpPr/>
+          <p:nvPr/>
+        </p:nvSpPr>
+        <p:spPr>
+          <a:xfrm>
+            <a:off x="7840979" y="2944368"/>
+            <a:ext cx="2839212" cy="512064"/>
+          </a:xfrm>
+          <a:prstGeom prst="roundRect">
+            <a:avLst>
+              <a:gd name="adj" fmla="val 14285"/>
+            </a:avLst>
+          </a:prstGeom>
+          <a:solidFill>
+            <a:srgbClr val="1A1A1A"/>
           </a:solidFill>
           <a:ln>
             <a:noFill/>
@@ -6849,8 +6851,270 @@
         </p:nvSpPr>
         <p:spPr>
           <a:xfrm>
-            <a:off x="7795260" y="3598630"/>
-            <a:ext cx="1024128" cy="310896"/>
+            <a:off x="7932420" y="2944368"/>
+            <a:ext cx="1097280" cy="512064"/>
+          </a:xfrm>
+          <a:prstGeom prst="rect">
+            <a:avLst/>
+          </a:prstGeom>
+          <a:noFill/>
+        </p:spPr>
+        <p:txBody>
+          <a:bodyPr wrap="square" anchor="ctr" lIns="0" rIns="0" tIns="0" bIns="0">
+            <a:spAutoFit/>
+          </a:bodyPr>
+          <a:lstStyle/>
+          <a:p>
+            <a:pPr algn="l">
+              <a:lnSpc>
+                <a:spcPct val="110000"/>
+              </a:lnSpc>
+            </a:pPr>
+            <a:r>
+              <a:rPr sz="1600" b="1">
+                <a:solidFill>
+                  <a:srgbClr val="FFFFFF"/>
+                </a:solidFill>
+                <a:latin typeface="Arial"/>
+                <a:ea typeface="Arial"/>
+              </a:rPr>
+              <a:t>GPU 서버</a:t>
+            </a:r>
+          </a:p>
+        </p:txBody>
+      </p:sp>
+      <p:sp>
+        <p:nvSpPr>
+          <p:cNvPr id="73" name="Rectangle 72"/>
+          <p:cNvSpPr/>
+          <p:nvPr/>
+        </p:nvSpPr>
+        <p:spPr>
+          <a:xfrm>
+            <a:off x="8983980" y="3044951"/>
+            <a:ext cx="328041" cy="310896"/>
+          </a:xfrm>
+          <a:prstGeom prst="rect">
+            <a:avLst/>
+          </a:prstGeom>
+          <a:solidFill>
+            <a:srgbClr val="AAB8E8"/>
+          </a:solidFill>
+          <a:ln>
+            <a:noFill/>
+          </a:ln>
+          <a:effectLst/>
+        </p:spPr>
+        <p:style>
+          <a:lnRef idx="1">
+            <a:schemeClr val="accent1"/>
+          </a:lnRef>
+          <a:fillRef idx="3">
+            <a:schemeClr val="accent1"/>
+          </a:fillRef>
+          <a:effectRef idx="2">
+            <a:schemeClr val="accent1"/>
+          </a:effectRef>
+          <a:fontRef idx="minor">
+            <a:schemeClr val="lt1"/>
+          </a:fontRef>
+        </p:style>
+        <p:txBody>
+          <a:bodyPr rtlCol="0" anchor="ctr"/>
+          <a:lstStyle/>
+          <a:p>
+            <a:pPr algn="ctr"/>
+          </a:p>
+        </p:txBody>
+      </p:sp>
+      <p:sp>
+        <p:nvSpPr>
+          <p:cNvPr id="74" name="Rectangle 73"/>
+          <p:cNvSpPr/>
+          <p:nvPr/>
+        </p:nvSpPr>
+        <p:spPr>
+          <a:xfrm>
+            <a:off x="9385173" y="3044951"/>
+            <a:ext cx="328041" cy="310896"/>
+          </a:xfrm>
+          <a:prstGeom prst="rect">
+            <a:avLst/>
+          </a:prstGeom>
+          <a:solidFill>
+            <a:srgbClr val="AAB8E8"/>
+          </a:solidFill>
+          <a:ln>
+            <a:noFill/>
+          </a:ln>
+          <a:effectLst/>
+        </p:spPr>
+        <p:style>
+          <a:lnRef idx="1">
+            <a:schemeClr val="accent1"/>
+          </a:lnRef>
+          <a:fillRef idx="3">
+            <a:schemeClr val="accent1"/>
+          </a:fillRef>
+          <a:effectRef idx="2">
+            <a:schemeClr val="accent1"/>
+          </a:effectRef>
+          <a:fontRef idx="minor">
+            <a:schemeClr val="lt1"/>
+          </a:fontRef>
+        </p:style>
+        <p:txBody>
+          <a:bodyPr rtlCol="0" anchor="ctr"/>
+          <a:lstStyle/>
+          <a:p>
+            <a:pPr algn="ctr"/>
+          </a:p>
+        </p:txBody>
+      </p:sp>
+      <p:sp>
+        <p:nvSpPr>
+          <p:cNvPr id="75" name="Rectangle 74"/>
+          <p:cNvSpPr/>
+          <p:nvPr/>
+        </p:nvSpPr>
+        <p:spPr>
+          <a:xfrm>
+            <a:off x="9786365" y="3044951"/>
+            <a:ext cx="328041" cy="310896"/>
+          </a:xfrm>
+          <a:prstGeom prst="rect">
+            <a:avLst/>
+          </a:prstGeom>
+          <a:solidFill>
+            <a:srgbClr val="AAB8E8"/>
+          </a:solidFill>
+          <a:ln>
+            <a:noFill/>
+          </a:ln>
+          <a:effectLst/>
+        </p:spPr>
+        <p:style>
+          <a:lnRef idx="1">
+            <a:schemeClr val="accent1"/>
+          </a:lnRef>
+          <a:fillRef idx="3">
+            <a:schemeClr val="accent1"/>
+          </a:fillRef>
+          <a:effectRef idx="2">
+            <a:schemeClr val="accent1"/>
+          </a:effectRef>
+          <a:fontRef idx="minor">
+            <a:schemeClr val="lt1"/>
+          </a:fontRef>
+        </p:style>
+        <p:txBody>
+          <a:bodyPr rtlCol="0" anchor="ctr"/>
+          <a:lstStyle/>
+          <a:p>
+            <a:pPr algn="ctr"/>
+          </a:p>
+        </p:txBody>
+      </p:sp>
+      <p:sp>
+        <p:nvSpPr>
+          <p:cNvPr id="76" name="Rectangle 75"/>
+          <p:cNvSpPr/>
+          <p:nvPr/>
+        </p:nvSpPr>
+        <p:spPr>
+          <a:xfrm>
+            <a:off x="10187559" y="3044951"/>
+            <a:ext cx="328041" cy="310896"/>
+          </a:xfrm>
+          <a:prstGeom prst="rect">
+            <a:avLst/>
+          </a:prstGeom>
+          <a:solidFill>
+            <a:srgbClr val="AAB8E8"/>
+          </a:solidFill>
+          <a:ln>
+            <a:noFill/>
+          </a:ln>
+          <a:effectLst/>
+        </p:spPr>
+        <p:style>
+          <a:lnRef idx="1">
+            <a:schemeClr val="accent1"/>
+          </a:lnRef>
+          <a:fillRef idx="3">
+            <a:schemeClr val="accent1"/>
+          </a:fillRef>
+          <a:effectRef idx="2">
+            <a:schemeClr val="accent1"/>
+          </a:effectRef>
+          <a:fontRef idx="minor">
+            <a:schemeClr val="lt1"/>
+          </a:fontRef>
+        </p:style>
+        <p:txBody>
+          <a:bodyPr rtlCol="0" anchor="ctr"/>
+          <a:lstStyle/>
+          <a:p>
+            <a:pPr algn="ctr"/>
+          </a:p>
+        </p:txBody>
+      </p:sp>
+      <p:sp>
+        <p:nvSpPr>
+          <p:cNvPr id="77" name="Rounded Rectangle 76"/>
+          <p:cNvSpPr/>
+          <p:nvPr/>
+        </p:nvSpPr>
+        <p:spPr>
+          <a:xfrm>
+            <a:off x="7840979" y="4041648"/>
+            <a:ext cx="2839212" cy="420624"/>
+          </a:xfrm>
+          <a:prstGeom prst="roundRect">
+            <a:avLst>
+              <a:gd name="adj" fmla="val 17391"/>
+            </a:avLst>
+          </a:prstGeom>
+          <a:solidFill>
+            <a:srgbClr val="1428A0"/>
+          </a:solidFill>
+          <a:ln>
+            <a:noFill/>
+          </a:ln>
+          <a:effectLst/>
+        </p:spPr>
+        <p:style>
+          <a:lnRef idx="1">
+            <a:schemeClr val="accent1"/>
+          </a:lnRef>
+          <a:fillRef idx="3">
+            <a:schemeClr val="accent1"/>
+          </a:fillRef>
+          <a:effectRef idx="2">
+            <a:schemeClr val="accent1"/>
+          </a:effectRef>
+          <a:fontRef idx="minor">
+            <a:schemeClr val="lt1"/>
+          </a:fontRef>
+        </p:style>
+        <p:txBody>
+          <a:bodyPr rtlCol="0" anchor="ctr"/>
+          <a:lstStyle/>
+          <a:p>
+            <a:pPr algn="ctr"/>
+          </a:p>
+        </p:txBody>
+      </p:sp>
+      <p:sp>
+        <p:nvSpPr>
+          <p:cNvPr id="78" name="TextBox 77"/>
+          <p:cNvSpPr txBox="1"/>
+          <p:nvPr/>
+        </p:nvSpPr>
+        <p:spPr>
+          <a:xfrm>
+            <a:off x="7840979" y="4041648"/>
+            <a:ext cx="2839212" cy="420624"/>
           </a:xfrm>
           <a:prstGeom prst="rect">
             <a:avLst/>
@@ -6869,28 +7133,116 @@
               </a:lnSpc>
             </a:pPr>
             <a:r>
-              <a:rPr sz="2000" b="1">
-                <a:solidFill>
-                  <a:srgbClr val="1A1A1A"/>
-                </a:solidFill>
-                <a:latin typeface="Arial"/>
-                <a:ea typeface="Arial"/>
-              </a:rPr>
-              <a:t>0.16</a:t>
-            </a:r>
-          </a:p>
-        </p:txBody>
-      </p:sp>
-      <p:sp>
-        <p:nvSpPr>
-          <p:cNvPr id="73" name="TextBox 72"/>
+              <a:rPr sz="1700" b="1">
+                <a:solidFill>
+                  <a:srgbClr val="FFFFFF"/>
+                </a:solidFill>
+                <a:latin typeface="Arial"/>
+                <a:ea typeface="Arial"/>
+              </a:rPr>
+              <a:t>SSD</a:t>
+            </a:r>
+          </a:p>
+        </p:txBody>
+      </p:sp>
+      <p:sp>
+        <p:nvSpPr>
+          <p:cNvPr id="79" name="Up Arrow 78"/>
+          <p:cNvSpPr/>
+          <p:nvPr/>
+        </p:nvSpPr>
+        <p:spPr>
+          <a:xfrm>
+            <a:off x="8876538" y="3511296"/>
+            <a:ext cx="274320" cy="493776"/>
+          </a:xfrm>
+          <a:prstGeom prst="upArrow">
+            <a:avLst/>
+          </a:prstGeom>
+          <a:solidFill>
+            <a:srgbClr val="1428A0"/>
+          </a:solidFill>
+          <a:ln>
+            <a:noFill/>
+          </a:ln>
+          <a:effectLst/>
+        </p:spPr>
+        <p:style>
+          <a:lnRef idx="1">
+            <a:schemeClr val="accent1"/>
+          </a:lnRef>
+          <a:fillRef idx="3">
+            <a:schemeClr val="accent1"/>
+          </a:fillRef>
+          <a:effectRef idx="2">
+            <a:schemeClr val="accent1"/>
+          </a:effectRef>
+          <a:fontRef idx="minor">
+            <a:schemeClr val="lt1"/>
+          </a:fontRef>
+        </p:style>
+        <p:txBody>
+          <a:bodyPr rtlCol="0" anchor="ctr"/>
+          <a:lstStyle/>
+          <a:p>
+            <a:pPr algn="ctr"/>
+          </a:p>
+        </p:txBody>
+      </p:sp>
+      <p:sp>
+        <p:nvSpPr>
+          <p:cNvPr id="80" name="Down Arrow 79"/>
+          <p:cNvSpPr/>
+          <p:nvPr/>
+        </p:nvSpPr>
+        <p:spPr>
+          <a:xfrm>
+            <a:off x="9370313" y="3511296"/>
+            <a:ext cx="274320" cy="493776"/>
+          </a:xfrm>
+          <a:prstGeom prst="downArrow">
+            <a:avLst/>
+          </a:prstGeom>
+          <a:solidFill>
+            <a:srgbClr val="3C5AC8"/>
+          </a:solidFill>
+          <a:ln>
+            <a:noFill/>
+          </a:ln>
+          <a:effectLst/>
+        </p:spPr>
+        <p:style>
+          <a:lnRef idx="1">
+            <a:schemeClr val="accent1"/>
+          </a:lnRef>
+          <a:fillRef idx="3">
+            <a:schemeClr val="accent1"/>
+          </a:fillRef>
+          <a:effectRef idx="2">
+            <a:schemeClr val="accent1"/>
+          </a:effectRef>
+          <a:fontRef idx="minor">
+            <a:schemeClr val="lt1"/>
+          </a:fontRef>
+        </p:style>
+        <p:txBody>
+          <a:bodyPr rtlCol="0" anchor="ctr"/>
+          <a:lstStyle/>
+          <a:p>
+            <a:pPr algn="ctr"/>
+          </a:p>
+        </p:txBody>
+      </p:sp>
+      <p:sp>
+        <p:nvSpPr>
+          <p:cNvPr id="81" name="TextBox 80"/>
           <p:cNvSpPr txBox="1"/>
           <p:nvPr/>
         </p:nvSpPr>
         <p:spPr>
           <a:xfrm>
-            <a:off x="7749540" y="4352544"/>
-            <a:ext cx="1115568" cy="256032"/>
+            <a:off x="7840979" y="3566160"/>
+            <a:ext cx="980693" cy="384048"/>
           </a:xfrm>
           <a:prstGeom prst="rect">
             <a:avLst/>
@@ -6898,7 +7250,133 @@
           <a:noFill/>
         </p:spPr>
         <p:txBody>
-          <a:bodyPr wrap="square" anchor="t" lIns="0" rIns="0" tIns="0" bIns="0">
+          <a:bodyPr wrap="square" anchor="ctr" lIns="0" rIns="0" tIns="0" bIns="0">
+            <a:spAutoFit/>
+          </a:bodyPr>
+          <a:lstStyle/>
+          <a:p>
+            <a:pPr algn="r">
+              <a:lnSpc>
+                <a:spcPct val="110000"/>
+              </a:lnSpc>
+            </a:pPr>
+            <a:r>
+              <a:rPr sz="1500" b="1">
+                <a:solidFill>
+                  <a:srgbClr val="1428A0"/>
+                </a:solidFill>
+                <a:latin typeface="Arial"/>
+                <a:ea typeface="Arial"/>
+              </a:rPr>
+              <a:t>데이터 로딩</a:t>
+            </a:r>
+          </a:p>
+        </p:txBody>
+      </p:sp>
+      <p:sp>
+        <p:nvSpPr>
+          <p:cNvPr id="82" name="TextBox 81"/>
+          <p:cNvSpPr txBox="1"/>
+          <p:nvPr/>
+        </p:nvSpPr>
+        <p:spPr>
+          <a:xfrm>
+            <a:off x="9699498" y="3566160"/>
+            <a:ext cx="980694" cy="384048"/>
+          </a:xfrm>
+          <a:prstGeom prst="rect">
+            <a:avLst/>
+          </a:prstGeom>
+          <a:noFill/>
+        </p:spPr>
+        <p:txBody>
+          <a:bodyPr wrap="square" anchor="ctr" lIns="0" rIns="0" tIns="0" bIns="0">
+            <a:spAutoFit/>
+          </a:bodyPr>
+          <a:lstStyle/>
+          <a:p>
+            <a:pPr algn="l">
+              <a:lnSpc>
+                <a:spcPct val="110000"/>
+              </a:lnSpc>
+            </a:pPr>
+            <a:r>
+              <a:rPr sz="1500" b="1">
+                <a:solidFill>
+                  <a:srgbClr val="3C5AC8"/>
+                </a:solidFill>
+                <a:latin typeface="Arial"/>
+                <a:ea typeface="Arial"/>
+              </a:rPr>
+              <a:t>체크포인트</a:t>
+            </a:r>
+          </a:p>
+        </p:txBody>
+      </p:sp>
+      <p:sp>
+        <p:nvSpPr>
+          <p:cNvPr id="83" name="Rounded Rectangle 82"/>
+          <p:cNvSpPr/>
+          <p:nvPr/>
+        </p:nvSpPr>
+        <p:spPr>
+          <a:xfrm>
+            <a:off x="12100803" y="2944368"/>
+            <a:ext cx="1022116" cy="347472"/>
+          </a:xfrm>
+          <a:prstGeom prst="roundRect">
+            <a:avLst>
+              <a:gd name="adj" fmla="val 21052"/>
+            </a:avLst>
+          </a:prstGeom>
+          <a:solidFill>
+            <a:srgbClr val="1A1A1A"/>
+          </a:solidFill>
+          <a:ln>
+            <a:noFill/>
+          </a:ln>
+          <a:effectLst/>
+        </p:spPr>
+        <p:style>
+          <a:lnRef idx="1">
+            <a:schemeClr val="accent1"/>
+          </a:lnRef>
+          <a:fillRef idx="3">
+            <a:schemeClr val="accent1"/>
+          </a:fillRef>
+          <a:effectRef idx="2">
+            <a:schemeClr val="accent1"/>
+          </a:effectRef>
+          <a:fontRef idx="minor">
+            <a:schemeClr val="lt1"/>
+          </a:fontRef>
+        </p:style>
+        <p:txBody>
+          <a:bodyPr rtlCol="0" anchor="ctr"/>
+          <a:lstStyle/>
+          <a:p>
+            <a:pPr algn="ctr"/>
+          </a:p>
+        </p:txBody>
+      </p:sp>
+      <p:sp>
+        <p:nvSpPr>
+          <p:cNvPr id="84" name="TextBox 83"/>
+          <p:cNvSpPr txBox="1"/>
+          <p:nvPr/>
+        </p:nvSpPr>
+        <p:spPr>
+          <a:xfrm>
+            <a:off x="12100803" y="2944368"/>
+            <a:ext cx="1022116" cy="347472"/>
+          </a:xfrm>
+          <a:prstGeom prst="rect">
+            <a:avLst/>
+          </a:prstGeom>
+          <a:noFill/>
+        </p:spPr>
+        <p:txBody>
+          <a:bodyPr wrap="square" anchor="ctr" lIns="0" rIns="0" tIns="0" bIns="0">
             <a:spAutoFit/>
           </a:bodyPr>
           <a:lstStyle/>
@@ -6909,34 +7387,36 @@
               </a:lnSpc>
             </a:pPr>
             <a:r>
-              <a:rPr sz="1600" b="0">
-                <a:solidFill>
-                  <a:srgbClr val="555555"/>
-                </a:solidFill>
-                <a:latin typeface="Arial"/>
-                <a:ea typeface="Arial"/>
-              </a:rPr>
-              <a:t>기본</a:t>
-            </a:r>
-          </a:p>
-        </p:txBody>
-      </p:sp>
-      <p:sp>
-        <p:nvSpPr>
-          <p:cNvPr id="74" name="Rectangle 73"/>
-          <p:cNvSpPr/>
-          <p:nvPr/>
-        </p:nvSpPr>
-        <p:spPr>
-          <a:xfrm>
-            <a:off x="8983980" y="3127248"/>
-            <a:ext cx="566928" cy="1188720"/>
-          </a:xfrm>
-          <a:prstGeom prst="rect">
-            <a:avLst/>
-          </a:prstGeom>
-          <a:solidFill>
-            <a:srgbClr val="1428A0"/>
+              <a:rPr sz="1500" b="1">
+                <a:solidFill>
+                  <a:srgbClr val="FFFFFF"/>
+                </a:solidFill>
+                <a:latin typeface="Arial"/>
+                <a:ea typeface="Arial"/>
+              </a:rPr>
+              <a:t>GPU HBM</a:t>
+            </a:r>
+          </a:p>
+        </p:txBody>
+      </p:sp>
+      <p:sp>
+        <p:nvSpPr>
+          <p:cNvPr id="85" name="Rounded Rectangle 84"/>
+          <p:cNvSpPr/>
+          <p:nvPr/>
+        </p:nvSpPr>
+        <p:spPr>
+          <a:xfrm>
+            <a:off x="11703314" y="3374135"/>
+            <a:ext cx="1817095" cy="347472"/>
+          </a:xfrm>
+          <a:prstGeom prst="roundRect">
+            <a:avLst>
+              <a:gd name="adj" fmla="val 21052"/>
+            </a:avLst>
+          </a:prstGeom>
+          <a:solidFill>
+            <a:srgbClr val="8A8A8A"/>
           </a:solidFill>
           <a:ln>
             <a:noFill/>
@@ -6967,14 +7447,14 @@
       </p:sp>
       <p:sp>
         <p:nvSpPr>
-          <p:cNvPr id="75" name="TextBox 74"/>
+          <p:cNvPr id="86" name="TextBox 85"/>
           <p:cNvSpPr txBox="1"/>
           <p:nvPr/>
         </p:nvSpPr>
         <p:spPr>
           <a:xfrm>
-            <a:off x="8755380" y="2798064"/>
-            <a:ext cx="1024128" cy="310896"/>
+            <a:off x="11703314" y="3374135"/>
+            <a:ext cx="1817095" cy="347472"/>
           </a:xfrm>
           <a:prstGeom prst="rect">
             <a:avLst/>
@@ -6993,28 +7473,74 @@
               </a:lnSpc>
             </a:pPr>
             <a:r>
-              <a:rPr sz="2000" b="1">
-                <a:solidFill>
-                  <a:srgbClr val="1428A0"/>
-                </a:solidFill>
-                <a:latin typeface="Arial"/>
-                <a:ea typeface="Arial"/>
-              </a:rPr>
-              <a:t>0.49</a:t>
-            </a:r>
-          </a:p>
-        </p:txBody>
-      </p:sp>
-      <p:sp>
-        <p:nvSpPr>
-          <p:cNvPr id="76" name="TextBox 75"/>
+              <a:rPr sz="1500" b="1">
+                <a:solidFill>
+                  <a:srgbClr val="FFFFFF"/>
+                </a:solidFill>
+                <a:latin typeface="Arial"/>
+                <a:ea typeface="Arial"/>
+              </a:rPr>
+              <a:t>CPU DRAM</a:t>
+            </a:r>
+          </a:p>
+        </p:txBody>
+      </p:sp>
+      <p:sp>
+        <p:nvSpPr>
+          <p:cNvPr id="87" name="Rounded Rectangle 86"/>
+          <p:cNvSpPr/>
+          <p:nvPr/>
+        </p:nvSpPr>
+        <p:spPr>
+          <a:xfrm>
+            <a:off x="11192256" y="3803904"/>
+            <a:ext cx="2839212" cy="347472"/>
+          </a:xfrm>
+          <a:prstGeom prst="roundRect">
+            <a:avLst>
+              <a:gd name="adj" fmla="val 21052"/>
+            </a:avLst>
+          </a:prstGeom>
+          <a:solidFill>
+            <a:srgbClr val="1428A0"/>
+          </a:solidFill>
+          <a:ln>
+            <a:noFill/>
+          </a:ln>
+          <a:effectLst/>
+        </p:spPr>
+        <p:style>
+          <a:lnRef idx="1">
+            <a:schemeClr val="accent1"/>
+          </a:lnRef>
+          <a:fillRef idx="3">
+            <a:schemeClr val="accent1"/>
+          </a:fillRef>
+          <a:effectRef idx="2">
+            <a:schemeClr val="accent1"/>
+          </a:effectRef>
+          <a:fontRef idx="minor">
+            <a:schemeClr val="lt1"/>
+          </a:fontRef>
+        </p:style>
+        <p:txBody>
+          <a:bodyPr rtlCol="0" anchor="ctr"/>
+          <a:lstStyle/>
+          <a:p>
+            <a:pPr algn="ctr"/>
+          </a:p>
+        </p:txBody>
+      </p:sp>
+      <p:sp>
+        <p:nvSpPr>
+          <p:cNvPr id="88" name="TextBox 87"/>
           <p:cNvSpPr txBox="1"/>
           <p:nvPr/>
         </p:nvSpPr>
         <p:spPr>
           <a:xfrm>
-            <a:off x="8709660" y="4352544"/>
-            <a:ext cx="1115568" cy="256032"/>
+            <a:off x="11192256" y="3803904"/>
+            <a:ext cx="2839212" cy="347472"/>
           </a:xfrm>
           <a:prstGeom prst="rect">
             <a:avLst/>
@@ -7022,7 +7548,7 @@
           <a:noFill/>
         </p:spPr>
         <p:txBody>
-          <a:bodyPr wrap="square" anchor="t" lIns="0" rIns="0" tIns="0" bIns="0">
+          <a:bodyPr wrap="square" anchor="ctr" lIns="0" rIns="0" tIns="0" bIns="0">
             <a:spAutoFit/>
           </a:bodyPr>
           <a:lstStyle/>
@@ -7035,26 +7561,1484 @@
             <a:r>
               <a:rPr sz="1600" b="1">
                 <a:solidFill>
+                  <a:srgbClr val="FFFFFF"/>
+                </a:solidFill>
+                <a:latin typeface="Arial"/>
+                <a:ea typeface="Arial"/>
+              </a:rPr>
+              <a:t>SSD  KV · RAG · 가중치</a:t>
+            </a:r>
+          </a:p>
+        </p:txBody>
+      </p:sp>
+      <p:sp>
+        <p:nvSpPr>
+          <p:cNvPr id="89" name="Down Arrow 88"/>
+          <p:cNvSpPr/>
+          <p:nvPr/>
+        </p:nvSpPr>
+        <p:spPr>
+          <a:xfrm>
+            <a:off x="11283696" y="2980944"/>
+            <a:ext cx="219456" cy="731520"/>
+          </a:xfrm>
+          <a:prstGeom prst="downArrow">
+            <a:avLst/>
+          </a:prstGeom>
+          <a:solidFill>
+            <a:srgbClr val="3C5AC8"/>
+          </a:solidFill>
+          <a:ln>
+            <a:noFill/>
+          </a:ln>
+          <a:effectLst/>
+        </p:spPr>
+        <p:style>
+          <a:lnRef idx="1">
+            <a:schemeClr val="accent1"/>
+          </a:lnRef>
+          <a:fillRef idx="3">
+            <a:schemeClr val="accent1"/>
+          </a:fillRef>
+          <a:effectRef idx="2">
+            <a:schemeClr val="accent1"/>
+          </a:effectRef>
+          <a:fontRef idx="minor">
+            <a:schemeClr val="lt1"/>
+          </a:fontRef>
+        </p:style>
+        <p:txBody>
+          <a:bodyPr rtlCol="0" anchor="ctr"/>
+          <a:lstStyle/>
+          <a:p>
+            <a:pPr algn="ctr"/>
+          </a:p>
+        </p:txBody>
+      </p:sp>
+      <p:sp>
+        <p:nvSpPr>
+          <p:cNvPr id="90" name="Up Arrow 89"/>
+          <p:cNvSpPr/>
+          <p:nvPr/>
+        </p:nvSpPr>
+        <p:spPr>
+          <a:xfrm>
+            <a:off x="13720572" y="2980944"/>
+            <a:ext cx="219456" cy="731520"/>
+          </a:xfrm>
+          <a:prstGeom prst="upArrow">
+            <a:avLst/>
+          </a:prstGeom>
+          <a:solidFill>
+            <a:srgbClr val="1428A0"/>
+          </a:solidFill>
+          <a:ln>
+            <a:noFill/>
+          </a:ln>
+          <a:effectLst/>
+        </p:spPr>
+        <p:style>
+          <a:lnRef idx="1">
+            <a:schemeClr val="accent1"/>
+          </a:lnRef>
+          <a:fillRef idx="3">
+            <a:schemeClr val="accent1"/>
+          </a:fillRef>
+          <a:effectRef idx="2">
+            <a:schemeClr val="accent1"/>
+          </a:effectRef>
+          <a:fontRef idx="minor">
+            <a:schemeClr val="lt1"/>
+          </a:fontRef>
+        </p:style>
+        <p:txBody>
+          <a:bodyPr rtlCol="0" anchor="ctr"/>
+          <a:lstStyle/>
+          <a:p>
+            <a:pPr algn="ctr"/>
+          </a:p>
+        </p:txBody>
+      </p:sp>
+      <p:sp>
+        <p:nvSpPr>
+          <p:cNvPr id="91" name="TextBox 90"/>
+          <p:cNvSpPr txBox="1"/>
+          <p:nvPr/>
+        </p:nvSpPr>
+        <p:spPr>
+          <a:xfrm>
+            <a:off x="11192256" y="4206240"/>
+            <a:ext cx="2839212" cy="292608"/>
+          </a:xfrm>
+          <a:prstGeom prst="rect">
+            <a:avLst/>
+          </a:prstGeom>
+          <a:noFill/>
+        </p:spPr>
+        <p:txBody>
+          <a:bodyPr wrap="square" anchor="ctr" lIns="0" rIns="0" tIns="0" bIns="0">
+            <a:spAutoFit/>
+          </a:bodyPr>
+          <a:lstStyle/>
+          <a:p>
+            <a:pPr algn="ctr">
+              <a:lnSpc>
+                <a:spcPct val="110000"/>
+              </a:lnSpc>
+            </a:pPr>
+            <a:r>
+              <a:rPr sz="1500" b="1">
+                <a:solidFill>
+                  <a:srgbClr val="3C5AC8"/>
+                </a:solidFill>
+                <a:latin typeface="Arial"/>
+                <a:ea typeface="Arial"/>
+              </a:rPr>
+              <a:t>↓ 넘치면 오프로드</a:t>
+            </a:r>
+            <a:r>
+              <a:rPr sz="1500" b="1">
+                <a:solidFill>
                   <a:srgbClr val="1428A0"/>
                 </a:solidFill>
                 <a:latin typeface="Arial"/>
                 <a:ea typeface="Arial"/>
               </a:rPr>
-              <a:t>멀티모달</a:t>
-            </a:r>
-          </a:p>
-        </p:txBody>
-      </p:sp>
-      <p:sp>
-        <p:nvSpPr>
-          <p:cNvPr id="77" name="TextBox 76"/>
+              <a:t>    ↑ 재사용</a:t>
+            </a:r>
+          </a:p>
+        </p:txBody>
+      </p:sp>
+      <p:sp>
+        <p:nvSpPr>
+          <p:cNvPr id="92" name="Rectangle 91"/>
+          <p:cNvSpPr/>
+          <p:nvPr/>
+        </p:nvSpPr>
+        <p:spPr>
+          <a:xfrm>
+            <a:off x="14561820" y="2926079"/>
+            <a:ext cx="219456" cy="182880"/>
+          </a:xfrm>
+          <a:prstGeom prst="rect">
+            <a:avLst/>
+          </a:prstGeom>
+          <a:solidFill>
+            <a:srgbClr val="D9D9D9"/>
+          </a:solidFill>
+          <a:ln>
+            <a:noFill/>
+          </a:ln>
+          <a:effectLst/>
+        </p:spPr>
+        <p:style>
+          <a:lnRef idx="1">
+            <a:schemeClr val="accent1"/>
+          </a:lnRef>
+          <a:fillRef idx="3">
+            <a:schemeClr val="accent1"/>
+          </a:fillRef>
+          <a:effectRef idx="2">
+            <a:schemeClr val="accent1"/>
+          </a:effectRef>
+          <a:fontRef idx="minor">
+            <a:schemeClr val="lt1"/>
+          </a:fontRef>
+        </p:style>
+        <p:txBody>
+          <a:bodyPr rtlCol="0" anchor="ctr"/>
+          <a:lstStyle/>
+          <a:p>
+            <a:pPr algn="ctr"/>
+          </a:p>
+        </p:txBody>
+      </p:sp>
+      <p:sp>
+        <p:nvSpPr>
+          <p:cNvPr id="93" name="Rectangle 92"/>
+          <p:cNvSpPr/>
+          <p:nvPr/>
+        </p:nvSpPr>
+        <p:spPr>
+          <a:xfrm>
+            <a:off x="14836140" y="2926079"/>
+            <a:ext cx="219456" cy="182880"/>
+          </a:xfrm>
+          <a:prstGeom prst="rect">
+            <a:avLst/>
+          </a:prstGeom>
+          <a:solidFill>
+            <a:srgbClr val="D9D9D9"/>
+          </a:solidFill>
+          <a:ln>
+            <a:noFill/>
+          </a:ln>
+          <a:effectLst/>
+        </p:spPr>
+        <p:style>
+          <a:lnRef idx="1">
+            <a:schemeClr val="accent1"/>
+          </a:lnRef>
+          <a:fillRef idx="3">
+            <a:schemeClr val="accent1"/>
+          </a:fillRef>
+          <a:effectRef idx="2">
+            <a:schemeClr val="accent1"/>
+          </a:effectRef>
+          <a:fontRef idx="minor">
+            <a:schemeClr val="lt1"/>
+          </a:fontRef>
+        </p:style>
+        <p:txBody>
+          <a:bodyPr rtlCol="0" anchor="ctr"/>
+          <a:lstStyle/>
+          <a:p>
+            <a:pPr algn="ctr"/>
+          </a:p>
+        </p:txBody>
+      </p:sp>
+      <p:sp>
+        <p:nvSpPr>
+          <p:cNvPr id="94" name="Rectangle 93"/>
+          <p:cNvSpPr/>
+          <p:nvPr/>
+        </p:nvSpPr>
+        <p:spPr>
+          <a:xfrm>
+            <a:off x="15110460" y="2926079"/>
+            <a:ext cx="219456" cy="182880"/>
+          </a:xfrm>
+          <a:prstGeom prst="rect">
+            <a:avLst/>
+          </a:prstGeom>
+          <a:solidFill>
+            <a:srgbClr val="D9D9D9"/>
+          </a:solidFill>
+          <a:ln>
+            <a:noFill/>
+          </a:ln>
+          <a:effectLst/>
+        </p:spPr>
+        <p:style>
+          <a:lnRef idx="1">
+            <a:schemeClr val="accent1"/>
+          </a:lnRef>
+          <a:fillRef idx="3">
+            <a:schemeClr val="accent1"/>
+          </a:fillRef>
+          <a:effectRef idx="2">
+            <a:schemeClr val="accent1"/>
+          </a:effectRef>
+          <a:fontRef idx="minor">
+            <a:schemeClr val="lt1"/>
+          </a:fontRef>
+        </p:style>
+        <p:txBody>
+          <a:bodyPr rtlCol="0" anchor="ctr"/>
+          <a:lstStyle/>
+          <a:p>
+            <a:pPr algn="ctr"/>
+          </a:p>
+        </p:txBody>
+      </p:sp>
+      <p:sp>
+        <p:nvSpPr>
+          <p:cNvPr id="95" name="Rectangle 94"/>
+          <p:cNvSpPr/>
+          <p:nvPr/>
+        </p:nvSpPr>
+        <p:spPr>
+          <a:xfrm>
+            <a:off x="15384780" y="2926079"/>
+            <a:ext cx="219456" cy="182880"/>
+          </a:xfrm>
+          <a:prstGeom prst="rect">
+            <a:avLst/>
+          </a:prstGeom>
+          <a:solidFill>
+            <a:srgbClr val="1428A0"/>
+          </a:solidFill>
+          <a:ln>
+            <a:noFill/>
+          </a:ln>
+          <a:effectLst/>
+        </p:spPr>
+        <p:style>
+          <a:lnRef idx="1">
+            <a:schemeClr val="accent1"/>
+          </a:lnRef>
+          <a:fillRef idx="3">
+            <a:schemeClr val="accent1"/>
+          </a:fillRef>
+          <a:effectRef idx="2">
+            <a:schemeClr val="accent1"/>
+          </a:effectRef>
+          <a:fontRef idx="minor">
+            <a:schemeClr val="lt1"/>
+          </a:fontRef>
+        </p:style>
+        <p:txBody>
+          <a:bodyPr rtlCol="0" anchor="ctr"/>
+          <a:lstStyle/>
+          <a:p>
+            <a:pPr algn="ctr"/>
+          </a:p>
+        </p:txBody>
+      </p:sp>
+      <p:sp>
+        <p:nvSpPr>
+          <p:cNvPr id="96" name="Rectangle 95"/>
+          <p:cNvSpPr/>
+          <p:nvPr/>
+        </p:nvSpPr>
+        <p:spPr>
+          <a:xfrm>
+            <a:off x="15659100" y="2926079"/>
+            <a:ext cx="219456" cy="182880"/>
+          </a:xfrm>
+          <a:prstGeom prst="rect">
+            <a:avLst/>
+          </a:prstGeom>
+          <a:solidFill>
+            <a:srgbClr val="D9D9D9"/>
+          </a:solidFill>
+          <a:ln>
+            <a:noFill/>
+          </a:ln>
+          <a:effectLst/>
+        </p:spPr>
+        <p:style>
+          <a:lnRef idx="1">
+            <a:schemeClr val="accent1"/>
+          </a:lnRef>
+          <a:fillRef idx="3">
+            <a:schemeClr val="accent1"/>
+          </a:fillRef>
+          <a:effectRef idx="2">
+            <a:schemeClr val="accent1"/>
+          </a:effectRef>
+          <a:fontRef idx="minor">
+            <a:schemeClr val="lt1"/>
+          </a:fontRef>
+        </p:style>
+        <p:txBody>
+          <a:bodyPr rtlCol="0" anchor="ctr"/>
+          <a:lstStyle/>
+          <a:p>
+            <a:pPr algn="ctr"/>
+          </a:p>
+        </p:txBody>
+      </p:sp>
+      <p:sp>
+        <p:nvSpPr>
+          <p:cNvPr id="97" name="Rectangle 96"/>
+          <p:cNvSpPr/>
+          <p:nvPr/>
+        </p:nvSpPr>
+        <p:spPr>
+          <a:xfrm>
+            <a:off x="15933420" y="2926079"/>
+            <a:ext cx="219456" cy="182880"/>
+          </a:xfrm>
+          <a:prstGeom prst="rect">
+            <a:avLst/>
+          </a:prstGeom>
+          <a:solidFill>
+            <a:srgbClr val="D9D9D9"/>
+          </a:solidFill>
+          <a:ln>
+            <a:noFill/>
+          </a:ln>
+          <a:effectLst/>
+        </p:spPr>
+        <p:style>
+          <a:lnRef idx="1">
+            <a:schemeClr val="accent1"/>
+          </a:lnRef>
+          <a:fillRef idx="3">
+            <a:schemeClr val="accent1"/>
+          </a:fillRef>
+          <a:effectRef idx="2">
+            <a:schemeClr val="accent1"/>
+          </a:effectRef>
+          <a:fontRef idx="minor">
+            <a:schemeClr val="lt1"/>
+          </a:fontRef>
+        </p:style>
+        <p:txBody>
+          <a:bodyPr rtlCol="0" anchor="ctr"/>
+          <a:lstStyle/>
+          <a:p>
+            <a:pPr algn="ctr"/>
+          </a:p>
+        </p:txBody>
+      </p:sp>
+      <p:sp>
+        <p:nvSpPr>
+          <p:cNvPr id="98" name="Rectangle 97"/>
+          <p:cNvSpPr/>
+          <p:nvPr/>
+        </p:nvSpPr>
+        <p:spPr>
+          <a:xfrm>
+            <a:off x="16207740" y="2926079"/>
+            <a:ext cx="219456" cy="182880"/>
+          </a:xfrm>
+          <a:prstGeom prst="rect">
+            <a:avLst/>
+          </a:prstGeom>
+          <a:solidFill>
+            <a:srgbClr val="D9D9D9"/>
+          </a:solidFill>
+          <a:ln>
+            <a:noFill/>
+          </a:ln>
+          <a:effectLst/>
+        </p:spPr>
+        <p:style>
+          <a:lnRef idx="1">
+            <a:schemeClr val="accent1"/>
+          </a:lnRef>
+          <a:fillRef idx="3">
+            <a:schemeClr val="accent1"/>
+          </a:fillRef>
+          <a:effectRef idx="2">
+            <a:schemeClr val="accent1"/>
+          </a:effectRef>
+          <a:fontRef idx="minor">
+            <a:schemeClr val="lt1"/>
+          </a:fontRef>
+        </p:style>
+        <p:txBody>
+          <a:bodyPr rtlCol="0" anchor="ctr"/>
+          <a:lstStyle/>
+          <a:p>
+            <a:pPr algn="ctr"/>
+          </a:p>
+        </p:txBody>
+      </p:sp>
+      <p:sp>
+        <p:nvSpPr>
+          <p:cNvPr id="99" name="Rectangle 98"/>
+          <p:cNvSpPr/>
+          <p:nvPr/>
+        </p:nvSpPr>
+        <p:spPr>
+          <a:xfrm>
+            <a:off x="16482060" y="2926079"/>
+            <a:ext cx="219456" cy="182880"/>
+          </a:xfrm>
+          <a:prstGeom prst="rect">
+            <a:avLst/>
+          </a:prstGeom>
+          <a:solidFill>
+            <a:srgbClr val="D9D9D9"/>
+          </a:solidFill>
+          <a:ln>
+            <a:noFill/>
+          </a:ln>
+          <a:effectLst/>
+        </p:spPr>
+        <p:style>
+          <a:lnRef idx="1">
+            <a:schemeClr val="accent1"/>
+          </a:lnRef>
+          <a:fillRef idx="3">
+            <a:schemeClr val="accent1"/>
+          </a:fillRef>
+          <a:effectRef idx="2">
+            <a:schemeClr val="accent1"/>
+          </a:effectRef>
+          <a:fontRef idx="minor">
+            <a:schemeClr val="lt1"/>
+          </a:fontRef>
+        </p:style>
+        <p:txBody>
+          <a:bodyPr rtlCol="0" anchor="ctr"/>
+          <a:lstStyle/>
+          <a:p>
+            <a:pPr algn="ctr"/>
+          </a:p>
+        </p:txBody>
+      </p:sp>
+      <p:sp>
+        <p:nvSpPr>
+          <p:cNvPr id="100" name="Rectangle 99"/>
+          <p:cNvSpPr/>
+          <p:nvPr/>
+        </p:nvSpPr>
+        <p:spPr>
+          <a:xfrm>
+            <a:off x="16756380" y="2926079"/>
+            <a:ext cx="219456" cy="182880"/>
+          </a:xfrm>
+          <a:prstGeom prst="rect">
+            <a:avLst/>
+          </a:prstGeom>
+          <a:solidFill>
+            <a:srgbClr val="D9D9D9"/>
+          </a:solidFill>
+          <a:ln>
+            <a:noFill/>
+          </a:ln>
+          <a:effectLst/>
+        </p:spPr>
+        <p:style>
+          <a:lnRef idx="1">
+            <a:schemeClr val="accent1"/>
+          </a:lnRef>
+          <a:fillRef idx="3">
+            <a:schemeClr val="accent1"/>
+          </a:fillRef>
+          <a:effectRef idx="2">
+            <a:schemeClr val="accent1"/>
+          </a:effectRef>
+          <a:fontRef idx="minor">
+            <a:schemeClr val="lt1"/>
+          </a:fontRef>
+        </p:style>
+        <p:txBody>
+          <a:bodyPr rtlCol="0" anchor="ctr"/>
+          <a:lstStyle/>
+          <a:p>
+            <a:pPr algn="ctr"/>
+          </a:p>
+        </p:txBody>
+      </p:sp>
+      <p:sp>
+        <p:nvSpPr>
+          <p:cNvPr id="101" name="Rectangle 100"/>
+          <p:cNvSpPr/>
+          <p:nvPr/>
+        </p:nvSpPr>
+        <p:spPr>
+          <a:xfrm>
+            <a:off x="17030700" y="2926079"/>
+            <a:ext cx="219456" cy="182880"/>
+          </a:xfrm>
+          <a:prstGeom prst="rect">
+            <a:avLst/>
+          </a:prstGeom>
+          <a:solidFill>
+            <a:srgbClr val="D9D9D9"/>
+          </a:solidFill>
+          <a:ln>
+            <a:noFill/>
+          </a:ln>
+          <a:effectLst/>
+        </p:spPr>
+        <p:style>
+          <a:lnRef idx="1">
+            <a:schemeClr val="accent1"/>
+          </a:lnRef>
+          <a:fillRef idx="3">
+            <a:schemeClr val="accent1"/>
+          </a:fillRef>
+          <a:effectRef idx="2">
+            <a:schemeClr val="accent1"/>
+          </a:effectRef>
+          <a:fontRef idx="minor">
+            <a:schemeClr val="lt1"/>
+          </a:fontRef>
+        </p:style>
+        <p:txBody>
+          <a:bodyPr rtlCol="0" anchor="ctr"/>
+          <a:lstStyle/>
+          <a:p>
+            <a:pPr algn="ctr"/>
+          </a:p>
+        </p:txBody>
+      </p:sp>
+      <p:sp>
+        <p:nvSpPr>
+          <p:cNvPr id="102" name="Rectangle 101"/>
+          <p:cNvSpPr/>
+          <p:nvPr/>
+        </p:nvSpPr>
+        <p:spPr>
+          <a:xfrm>
+            <a:off x="14561820" y="3172968"/>
+            <a:ext cx="219456" cy="182880"/>
+          </a:xfrm>
+          <a:prstGeom prst="rect">
+            <a:avLst/>
+          </a:prstGeom>
+          <a:solidFill>
+            <a:srgbClr val="D9D9D9"/>
+          </a:solidFill>
+          <a:ln>
+            <a:noFill/>
+          </a:ln>
+          <a:effectLst/>
+        </p:spPr>
+        <p:style>
+          <a:lnRef idx="1">
+            <a:schemeClr val="accent1"/>
+          </a:lnRef>
+          <a:fillRef idx="3">
+            <a:schemeClr val="accent1"/>
+          </a:fillRef>
+          <a:effectRef idx="2">
+            <a:schemeClr val="accent1"/>
+          </a:effectRef>
+          <a:fontRef idx="minor">
+            <a:schemeClr val="lt1"/>
+          </a:fontRef>
+        </p:style>
+        <p:txBody>
+          <a:bodyPr rtlCol="0" anchor="ctr"/>
+          <a:lstStyle/>
+          <a:p>
+            <a:pPr algn="ctr"/>
+          </a:p>
+        </p:txBody>
+      </p:sp>
+      <p:sp>
+        <p:nvSpPr>
+          <p:cNvPr id="103" name="Rectangle 102"/>
+          <p:cNvSpPr/>
+          <p:nvPr/>
+        </p:nvSpPr>
+        <p:spPr>
+          <a:xfrm>
+            <a:off x="14836140" y="3172968"/>
+            <a:ext cx="219456" cy="182880"/>
+          </a:xfrm>
+          <a:prstGeom prst="rect">
+            <a:avLst/>
+          </a:prstGeom>
+          <a:solidFill>
+            <a:srgbClr val="D9D9D9"/>
+          </a:solidFill>
+          <a:ln>
+            <a:noFill/>
+          </a:ln>
+          <a:effectLst/>
+        </p:spPr>
+        <p:style>
+          <a:lnRef idx="1">
+            <a:schemeClr val="accent1"/>
+          </a:lnRef>
+          <a:fillRef idx="3">
+            <a:schemeClr val="accent1"/>
+          </a:fillRef>
+          <a:effectRef idx="2">
+            <a:schemeClr val="accent1"/>
+          </a:effectRef>
+          <a:fontRef idx="minor">
+            <a:schemeClr val="lt1"/>
+          </a:fontRef>
+        </p:style>
+        <p:txBody>
+          <a:bodyPr rtlCol="0" anchor="ctr"/>
+          <a:lstStyle/>
+          <a:p>
+            <a:pPr algn="ctr"/>
+          </a:p>
+        </p:txBody>
+      </p:sp>
+      <p:sp>
+        <p:nvSpPr>
+          <p:cNvPr id="104" name="Rectangle 103"/>
+          <p:cNvSpPr/>
+          <p:nvPr/>
+        </p:nvSpPr>
+        <p:spPr>
+          <a:xfrm>
+            <a:off x="15110460" y="3172968"/>
+            <a:ext cx="219456" cy="182880"/>
+          </a:xfrm>
+          <a:prstGeom prst="rect">
+            <a:avLst/>
+          </a:prstGeom>
+          <a:solidFill>
+            <a:srgbClr val="D9D9D9"/>
+          </a:solidFill>
+          <a:ln>
+            <a:noFill/>
+          </a:ln>
+          <a:effectLst/>
+        </p:spPr>
+        <p:style>
+          <a:lnRef idx="1">
+            <a:schemeClr val="accent1"/>
+          </a:lnRef>
+          <a:fillRef idx="3">
+            <a:schemeClr val="accent1"/>
+          </a:fillRef>
+          <a:effectRef idx="2">
+            <a:schemeClr val="accent1"/>
+          </a:effectRef>
+          <a:fontRef idx="minor">
+            <a:schemeClr val="lt1"/>
+          </a:fontRef>
+        </p:style>
+        <p:txBody>
+          <a:bodyPr rtlCol="0" anchor="ctr"/>
+          <a:lstStyle/>
+          <a:p>
+            <a:pPr algn="ctr"/>
+          </a:p>
+        </p:txBody>
+      </p:sp>
+      <p:sp>
+        <p:nvSpPr>
+          <p:cNvPr id="105" name="Rectangle 104"/>
+          <p:cNvSpPr/>
+          <p:nvPr/>
+        </p:nvSpPr>
+        <p:spPr>
+          <a:xfrm>
+            <a:off x="15384780" y="3172968"/>
+            <a:ext cx="219456" cy="182880"/>
+          </a:xfrm>
+          <a:prstGeom prst="rect">
+            <a:avLst/>
+          </a:prstGeom>
+          <a:solidFill>
+            <a:srgbClr val="D9D9D9"/>
+          </a:solidFill>
+          <a:ln>
+            <a:noFill/>
+          </a:ln>
+          <a:effectLst/>
+        </p:spPr>
+        <p:style>
+          <a:lnRef idx="1">
+            <a:schemeClr val="accent1"/>
+          </a:lnRef>
+          <a:fillRef idx="3">
+            <a:schemeClr val="accent1"/>
+          </a:fillRef>
+          <a:effectRef idx="2">
+            <a:schemeClr val="accent1"/>
+          </a:effectRef>
+          <a:fontRef idx="minor">
+            <a:schemeClr val="lt1"/>
+          </a:fontRef>
+        </p:style>
+        <p:txBody>
+          <a:bodyPr rtlCol="0" anchor="ctr"/>
+          <a:lstStyle/>
+          <a:p>
+            <a:pPr algn="ctr"/>
+          </a:p>
+        </p:txBody>
+      </p:sp>
+      <p:sp>
+        <p:nvSpPr>
+          <p:cNvPr id="106" name="Rectangle 105"/>
+          <p:cNvSpPr/>
+          <p:nvPr/>
+        </p:nvSpPr>
+        <p:spPr>
+          <a:xfrm>
+            <a:off x="15659100" y="3172968"/>
+            <a:ext cx="219456" cy="182880"/>
+          </a:xfrm>
+          <a:prstGeom prst="rect">
+            <a:avLst/>
+          </a:prstGeom>
+          <a:solidFill>
+            <a:srgbClr val="D9D9D9"/>
+          </a:solidFill>
+          <a:ln>
+            <a:noFill/>
+          </a:ln>
+          <a:effectLst/>
+        </p:spPr>
+        <p:style>
+          <a:lnRef idx="1">
+            <a:schemeClr val="accent1"/>
+          </a:lnRef>
+          <a:fillRef idx="3">
+            <a:schemeClr val="accent1"/>
+          </a:fillRef>
+          <a:effectRef idx="2">
+            <a:schemeClr val="accent1"/>
+          </a:effectRef>
+          <a:fontRef idx="minor">
+            <a:schemeClr val="lt1"/>
+          </a:fontRef>
+        </p:style>
+        <p:txBody>
+          <a:bodyPr rtlCol="0" anchor="ctr"/>
+          <a:lstStyle/>
+          <a:p>
+            <a:pPr algn="ctr"/>
+          </a:p>
+        </p:txBody>
+      </p:sp>
+      <p:sp>
+        <p:nvSpPr>
+          <p:cNvPr id="107" name="Rectangle 106"/>
+          <p:cNvSpPr/>
+          <p:nvPr/>
+        </p:nvSpPr>
+        <p:spPr>
+          <a:xfrm>
+            <a:off x="15933420" y="3172968"/>
+            <a:ext cx="219456" cy="182880"/>
+          </a:xfrm>
+          <a:prstGeom prst="rect">
+            <a:avLst/>
+          </a:prstGeom>
+          <a:solidFill>
+            <a:srgbClr val="D9D9D9"/>
+          </a:solidFill>
+          <a:ln>
+            <a:noFill/>
+          </a:ln>
+          <a:effectLst/>
+        </p:spPr>
+        <p:style>
+          <a:lnRef idx="1">
+            <a:schemeClr val="accent1"/>
+          </a:lnRef>
+          <a:fillRef idx="3">
+            <a:schemeClr val="accent1"/>
+          </a:fillRef>
+          <a:effectRef idx="2">
+            <a:schemeClr val="accent1"/>
+          </a:effectRef>
+          <a:fontRef idx="minor">
+            <a:schemeClr val="lt1"/>
+          </a:fontRef>
+        </p:style>
+        <p:txBody>
+          <a:bodyPr rtlCol="0" anchor="ctr"/>
+          <a:lstStyle/>
+          <a:p>
+            <a:pPr algn="ctr"/>
+          </a:p>
+        </p:txBody>
+      </p:sp>
+      <p:sp>
+        <p:nvSpPr>
+          <p:cNvPr id="108" name="Rectangle 107"/>
+          <p:cNvSpPr/>
+          <p:nvPr/>
+        </p:nvSpPr>
+        <p:spPr>
+          <a:xfrm>
+            <a:off x="16207740" y="3172968"/>
+            <a:ext cx="219456" cy="182880"/>
+          </a:xfrm>
+          <a:prstGeom prst="rect">
+            <a:avLst/>
+          </a:prstGeom>
+          <a:solidFill>
+            <a:srgbClr val="D9D9D9"/>
+          </a:solidFill>
+          <a:ln>
+            <a:noFill/>
+          </a:ln>
+          <a:effectLst/>
+        </p:spPr>
+        <p:style>
+          <a:lnRef idx="1">
+            <a:schemeClr val="accent1"/>
+          </a:lnRef>
+          <a:fillRef idx="3">
+            <a:schemeClr val="accent1"/>
+          </a:fillRef>
+          <a:effectRef idx="2">
+            <a:schemeClr val="accent1"/>
+          </a:effectRef>
+          <a:fontRef idx="minor">
+            <a:schemeClr val="lt1"/>
+          </a:fontRef>
+        </p:style>
+        <p:txBody>
+          <a:bodyPr rtlCol="0" anchor="ctr"/>
+          <a:lstStyle/>
+          <a:p>
+            <a:pPr algn="ctr"/>
+          </a:p>
+        </p:txBody>
+      </p:sp>
+      <p:sp>
+        <p:nvSpPr>
+          <p:cNvPr id="109" name="Rectangle 108"/>
+          <p:cNvSpPr/>
+          <p:nvPr/>
+        </p:nvSpPr>
+        <p:spPr>
+          <a:xfrm>
+            <a:off x="16482060" y="3172968"/>
+            <a:ext cx="219456" cy="182880"/>
+          </a:xfrm>
+          <a:prstGeom prst="rect">
+            <a:avLst/>
+          </a:prstGeom>
+          <a:solidFill>
+            <a:srgbClr val="1428A0"/>
+          </a:solidFill>
+          <a:ln>
+            <a:noFill/>
+          </a:ln>
+          <a:effectLst/>
+        </p:spPr>
+        <p:style>
+          <a:lnRef idx="1">
+            <a:schemeClr val="accent1"/>
+          </a:lnRef>
+          <a:fillRef idx="3">
+            <a:schemeClr val="accent1"/>
+          </a:fillRef>
+          <a:effectRef idx="2">
+            <a:schemeClr val="accent1"/>
+          </a:effectRef>
+          <a:fontRef idx="minor">
+            <a:schemeClr val="lt1"/>
+          </a:fontRef>
+        </p:style>
+        <p:txBody>
+          <a:bodyPr rtlCol="0" anchor="ctr"/>
+          <a:lstStyle/>
+          <a:p>
+            <a:pPr algn="ctr"/>
+          </a:p>
+        </p:txBody>
+      </p:sp>
+      <p:sp>
+        <p:nvSpPr>
+          <p:cNvPr id="110" name="Rectangle 109"/>
+          <p:cNvSpPr/>
+          <p:nvPr/>
+        </p:nvSpPr>
+        <p:spPr>
+          <a:xfrm>
+            <a:off x="16756380" y="3172968"/>
+            <a:ext cx="219456" cy="182880"/>
+          </a:xfrm>
+          <a:prstGeom prst="rect">
+            <a:avLst/>
+          </a:prstGeom>
+          <a:solidFill>
+            <a:srgbClr val="D9D9D9"/>
+          </a:solidFill>
+          <a:ln>
+            <a:noFill/>
+          </a:ln>
+          <a:effectLst/>
+        </p:spPr>
+        <p:style>
+          <a:lnRef idx="1">
+            <a:schemeClr val="accent1"/>
+          </a:lnRef>
+          <a:fillRef idx="3">
+            <a:schemeClr val="accent1"/>
+          </a:fillRef>
+          <a:effectRef idx="2">
+            <a:schemeClr val="accent1"/>
+          </a:effectRef>
+          <a:fontRef idx="minor">
+            <a:schemeClr val="lt1"/>
+          </a:fontRef>
+        </p:style>
+        <p:txBody>
+          <a:bodyPr rtlCol="0" anchor="ctr"/>
+          <a:lstStyle/>
+          <a:p>
+            <a:pPr algn="ctr"/>
+          </a:p>
+        </p:txBody>
+      </p:sp>
+      <p:sp>
+        <p:nvSpPr>
+          <p:cNvPr id="111" name="Rectangle 110"/>
+          <p:cNvSpPr/>
+          <p:nvPr/>
+        </p:nvSpPr>
+        <p:spPr>
+          <a:xfrm>
+            <a:off x="17030700" y="3172968"/>
+            <a:ext cx="219456" cy="182880"/>
+          </a:xfrm>
+          <a:prstGeom prst="rect">
+            <a:avLst/>
+          </a:prstGeom>
+          <a:solidFill>
+            <a:srgbClr val="D9D9D9"/>
+          </a:solidFill>
+          <a:ln>
+            <a:noFill/>
+          </a:ln>
+          <a:effectLst/>
+        </p:spPr>
+        <p:style>
+          <a:lnRef idx="1">
+            <a:schemeClr val="accent1"/>
+          </a:lnRef>
+          <a:fillRef idx="3">
+            <a:schemeClr val="accent1"/>
+          </a:fillRef>
+          <a:effectRef idx="2">
+            <a:schemeClr val="accent1"/>
+          </a:effectRef>
+          <a:fontRef idx="minor">
+            <a:schemeClr val="lt1"/>
+          </a:fontRef>
+        </p:style>
+        <p:txBody>
+          <a:bodyPr rtlCol="0" anchor="ctr"/>
+          <a:lstStyle/>
+          <a:p>
+            <a:pPr algn="ctr"/>
+          </a:p>
+        </p:txBody>
+      </p:sp>
+      <p:sp>
+        <p:nvSpPr>
+          <p:cNvPr id="112" name="Rectangle 111"/>
+          <p:cNvSpPr/>
+          <p:nvPr/>
+        </p:nvSpPr>
+        <p:spPr>
+          <a:xfrm>
+            <a:off x="14561820" y="3419856"/>
+            <a:ext cx="219456" cy="182880"/>
+          </a:xfrm>
+          <a:prstGeom prst="rect">
+            <a:avLst/>
+          </a:prstGeom>
+          <a:solidFill>
+            <a:srgbClr val="D9D9D9"/>
+          </a:solidFill>
+          <a:ln>
+            <a:noFill/>
+          </a:ln>
+          <a:effectLst/>
+        </p:spPr>
+        <p:style>
+          <a:lnRef idx="1">
+            <a:schemeClr val="accent1"/>
+          </a:lnRef>
+          <a:fillRef idx="3">
+            <a:schemeClr val="accent1"/>
+          </a:fillRef>
+          <a:effectRef idx="2">
+            <a:schemeClr val="accent1"/>
+          </a:effectRef>
+          <a:fontRef idx="minor">
+            <a:schemeClr val="lt1"/>
+          </a:fontRef>
+        </p:style>
+        <p:txBody>
+          <a:bodyPr rtlCol="0" anchor="ctr"/>
+          <a:lstStyle/>
+          <a:p>
+            <a:pPr algn="ctr"/>
+          </a:p>
+        </p:txBody>
+      </p:sp>
+      <p:sp>
+        <p:nvSpPr>
+          <p:cNvPr id="113" name="Rectangle 112"/>
+          <p:cNvSpPr/>
+          <p:nvPr/>
+        </p:nvSpPr>
+        <p:spPr>
+          <a:xfrm>
+            <a:off x="14836140" y="3419856"/>
+            <a:ext cx="219456" cy="182880"/>
+          </a:xfrm>
+          <a:prstGeom prst="rect">
+            <a:avLst/>
+          </a:prstGeom>
+          <a:solidFill>
+            <a:srgbClr val="1428A0"/>
+          </a:solidFill>
+          <a:ln>
+            <a:noFill/>
+          </a:ln>
+          <a:effectLst/>
+        </p:spPr>
+        <p:style>
+          <a:lnRef idx="1">
+            <a:schemeClr val="accent1"/>
+          </a:lnRef>
+          <a:fillRef idx="3">
+            <a:schemeClr val="accent1"/>
+          </a:fillRef>
+          <a:effectRef idx="2">
+            <a:schemeClr val="accent1"/>
+          </a:effectRef>
+          <a:fontRef idx="minor">
+            <a:schemeClr val="lt1"/>
+          </a:fontRef>
+        </p:style>
+        <p:txBody>
+          <a:bodyPr rtlCol="0" anchor="ctr"/>
+          <a:lstStyle/>
+          <a:p>
+            <a:pPr algn="ctr"/>
+          </a:p>
+        </p:txBody>
+      </p:sp>
+      <p:sp>
+        <p:nvSpPr>
+          <p:cNvPr id="114" name="Rectangle 113"/>
+          <p:cNvSpPr/>
+          <p:nvPr/>
+        </p:nvSpPr>
+        <p:spPr>
+          <a:xfrm>
+            <a:off x="15110460" y="3419856"/>
+            <a:ext cx="219456" cy="182880"/>
+          </a:xfrm>
+          <a:prstGeom prst="rect">
+            <a:avLst/>
+          </a:prstGeom>
+          <a:solidFill>
+            <a:srgbClr val="D9D9D9"/>
+          </a:solidFill>
+          <a:ln>
+            <a:noFill/>
+          </a:ln>
+          <a:effectLst/>
+        </p:spPr>
+        <p:style>
+          <a:lnRef idx="1">
+            <a:schemeClr val="accent1"/>
+          </a:lnRef>
+          <a:fillRef idx="3">
+            <a:schemeClr val="accent1"/>
+          </a:fillRef>
+          <a:effectRef idx="2">
+            <a:schemeClr val="accent1"/>
+          </a:effectRef>
+          <a:fontRef idx="minor">
+            <a:schemeClr val="lt1"/>
+          </a:fontRef>
+        </p:style>
+        <p:txBody>
+          <a:bodyPr rtlCol="0" anchor="ctr"/>
+          <a:lstStyle/>
+          <a:p>
+            <a:pPr algn="ctr"/>
+          </a:p>
+        </p:txBody>
+      </p:sp>
+      <p:sp>
+        <p:nvSpPr>
+          <p:cNvPr id="115" name="Rectangle 114"/>
+          <p:cNvSpPr/>
+          <p:nvPr/>
+        </p:nvSpPr>
+        <p:spPr>
+          <a:xfrm>
+            <a:off x="15384780" y="3419856"/>
+            <a:ext cx="219456" cy="182880"/>
+          </a:xfrm>
+          <a:prstGeom prst="rect">
+            <a:avLst/>
+          </a:prstGeom>
+          <a:solidFill>
+            <a:srgbClr val="D9D9D9"/>
+          </a:solidFill>
+          <a:ln>
+            <a:noFill/>
+          </a:ln>
+          <a:effectLst/>
+        </p:spPr>
+        <p:style>
+          <a:lnRef idx="1">
+            <a:schemeClr val="accent1"/>
+          </a:lnRef>
+          <a:fillRef idx="3">
+            <a:schemeClr val="accent1"/>
+          </a:fillRef>
+          <a:effectRef idx="2">
+            <a:schemeClr val="accent1"/>
+          </a:effectRef>
+          <a:fontRef idx="minor">
+            <a:schemeClr val="lt1"/>
+          </a:fontRef>
+        </p:style>
+        <p:txBody>
+          <a:bodyPr rtlCol="0" anchor="ctr"/>
+          <a:lstStyle/>
+          <a:p>
+            <a:pPr algn="ctr"/>
+          </a:p>
+        </p:txBody>
+      </p:sp>
+      <p:sp>
+        <p:nvSpPr>
+          <p:cNvPr id="116" name="Rectangle 115"/>
+          <p:cNvSpPr/>
+          <p:nvPr/>
+        </p:nvSpPr>
+        <p:spPr>
+          <a:xfrm>
+            <a:off x="15659100" y="3419856"/>
+            <a:ext cx="219456" cy="182880"/>
+          </a:xfrm>
+          <a:prstGeom prst="rect">
+            <a:avLst/>
+          </a:prstGeom>
+          <a:solidFill>
+            <a:srgbClr val="D9D9D9"/>
+          </a:solidFill>
+          <a:ln>
+            <a:noFill/>
+          </a:ln>
+          <a:effectLst/>
+        </p:spPr>
+        <p:style>
+          <a:lnRef idx="1">
+            <a:schemeClr val="accent1"/>
+          </a:lnRef>
+          <a:fillRef idx="3">
+            <a:schemeClr val="accent1"/>
+          </a:fillRef>
+          <a:effectRef idx="2">
+            <a:schemeClr val="accent1"/>
+          </a:effectRef>
+          <a:fontRef idx="minor">
+            <a:schemeClr val="lt1"/>
+          </a:fontRef>
+        </p:style>
+        <p:txBody>
+          <a:bodyPr rtlCol="0" anchor="ctr"/>
+          <a:lstStyle/>
+          <a:p>
+            <a:pPr algn="ctr"/>
+          </a:p>
+        </p:txBody>
+      </p:sp>
+      <p:sp>
+        <p:nvSpPr>
+          <p:cNvPr id="117" name="Rectangle 116"/>
+          <p:cNvSpPr/>
+          <p:nvPr/>
+        </p:nvSpPr>
+        <p:spPr>
+          <a:xfrm>
+            <a:off x="15933420" y="3419856"/>
+            <a:ext cx="219456" cy="182880"/>
+          </a:xfrm>
+          <a:prstGeom prst="rect">
+            <a:avLst/>
+          </a:prstGeom>
+          <a:solidFill>
+            <a:srgbClr val="D9D9D9"/>
+          </a:solidFill>
+          <a:ln>
+            <a:noFill/>
+          </a:ln>
+          <a:effectLst/>
+        </p:spPr>
+        <p:style>
+          <a:lnRef idx="1">
+            <a:schemeClr val="accent1"/>
+          </a:lnRef>
+          <a:fillRef idx="3">
+            <a:schemeClr val="accent1"/>
+          </a:fillRef>
+          <a:effectRef idx="2">
+            <a:schemeClr val="accent1"/>
+          </a:effectRef>
+          <a:fontRef idx="minor">
+            <a:schemeClr val="lt1"/>
+          </a:fontRef>
+        </p:style>
+        <p:txBody>
+          <a:bodyPr rtlCol="0" anchor="ctr"/>
+          <a:lstStyle/>
+          <a:p>
+            <a:pPr algn="ctr"/>
+          </a:p>
+        </p:txBody>
+      </p:sp>
+      <p:sp>
+        <p:nvSpPr>
+          <p:cNvPr id="118" name="Rectangle 117"/>
+          <p:cNvSpPr/>
+          <p:nvPr/>
+        </p:nvSpPr>
+        <p:spPr>
+          <a:xfrm>
+            <a:off x="16207740" y="3419856"/>
+            <a:ext cx="219456" cy="182880"/>
+          </a:xfrm>
+          <a:prstGeom prst="rect">
+            <a:avLst/>
+          </a:prstGeom>
+          <a:solidFill>
+            <a:srgbClr val="D9D9D9"/>
+          </a:solidFill>
+          <a:ln>
+            <a:noFill/>
+          </a:ln>
+          <a:effectLst/>
+        </p:spPr>
+        <p:style>
+          <a:lnRef idx="1">
+            <a:schemeClr val="accent1"/>
+          </a:lnRef>
+          <a:fillRef idx="3">
+            <a:schemeClr val="accent1"/>
+          </a:fillRef>
+          <a:effectRef idx="2">
+            <a:schemeClr val="accent1"/>
+          </a:effectRef>
+          <a:fontRef idx="minor">
+            <a:schemeClr val="lt1"/>
+          </a:fontRef>
+        </p:style>
+        <p:txBody>
+          <a:bodyPr rtlCol="0" anchor="ctr"/>
+          <a:lstStyle/>
+          <a:p>
+            <a:pPr algn="ctr"/>
+          </a:p>
+        </p:txBody>
+      </p:sp>
+      <p:sp>
+        <p:nvSpPr>
+          <p:cNvPr id="119" name="Rectangle 118"/>
+          <p:cNvSpPr/>
+          <p:nvPr/>
+        </p:nvSpPr>
+        <p:spPr>
+          <a:xfrm>
+            <a:off x="16482060" y="3419856"/>
+            <a:ext cx="219456" cy="182880"/>
+          </a:xfrm>
+          <a:prstGeom prst="rect">
+            <a:avLst/>
+          </a:prstGeom>
+          <a:solidFill>
+            <a:srgbClr val="D9D9D9"/>
+          </a:solidFill>
+          <a:ln>
+            <a:noFill/>
+          </a:ln>
+          <a:effectLst/>
+        </p:spPr>
+        <p:style>
+          <a:lnRef idx="1">
+            <a:schemeClr val="accent1"/>
+          </a:lnRef>
+          <a:fillRef idx="3">
+            <a:schemeClr val="accent1"/>
+          </a:fillRef>
+          <a:effectRef idx="2">
+            <a:schemeClr val="accent1"/>
+          </a:effectRef>
+          <a:fontRef idx="minor">
+            <a:schemeClr val="lt1"/>
+          </a:fontRef>
+        </p:style>
+        <p:txBody>
+          <a:bodyPr rtlCol="0" anchor="ctr"/>
+          <a:lstStyle/>
+          <a:p>
+            <a:pPr algn="ctr"/>
+          </a:p>
+        </p:txBody>
+      </p:sp>
+      <p:sp>
+        <p:nvSpPr>
+          <p:cNvPr id="120" name="Rectangle 119"/>
+          <p:cNvSpPr/>
+          <p:nvPr/>
+        </p:nvSpPr>
+        <p:spPr>
+          <a:xfrm>
+            <a:off x="16756380" y="3419856"/>
+            <a:ext cx="219456" cy="182880"/>
+          </a:xfrm>
+          <a:prstGeom prst="rect">
+            <a:avLst/>
+          </a:prstGeom>
+          <a:solidFill>
+            <a:srgbClr val="D9D9D9"/>
+          </a:solidFill>
+          <a:ln>
+            <a:noFill/>
+          </a:ln>
+          <a:effectLst/>
+        </p:spPr>
+        <p:style>
+          <a:lnRef idx="1">
+            <a:schemeClr val="accent1"/>
+          </a:lnRef>
+          <a:fillRef idx="3">
+            <a:schemeClr val="accent1"/>
+          </a:fillRef>
+          <a:effectRef idx="2">
+            <a:schemeClr val="accent1"/>
+          </a:effectRef>
+          <a:fontRef idx="minor">
+            <a:schemeClr val="lt1"/>
+          </a:fontRef>
+        </p:style>
+        <p:txBody>
+          <a:bodyPr rtlCol="0" anchor="ctr"/>
+          <a:lstStyle/>
+          <a:p>
+            <a:pPr algn="ctr"/>
+          </a:p>
+        </p:txBody>
+      </p:sp>
+      <p:sp>
+        <p:nvSpPr>
+          <p:cNvPr id="121" name="Rectangle 120"/>
+          <p:cNvSpPr/>
+          <p:nvPr/>
+        </p:nvSpPr>
+        <p:spPr>
+          <a:xfrm>
+            <a:off x="17030700" y="3419856"/>
+            <a:ext cx="219456" cy="182880"/>
+          </a:xfrm>
+          <a:prstGeom prst="rect">
+            <a:avLst/>
+          </a:prstGeom>
+          <a:solidFill>
+            <a:srgbClr val="D9D9D9"/>
+          </a:solidFill>
+          <a:ln>
+            <a:noFill/>
+          </a:ln>
+          <a:effectLst/>
+        </p:spPr>
+        <p:style>
+          <a:lnRef idx="1">
+            <a:schemeClr val="accent1"/>
+          </a:lnRef>
+          <a:fillRef idx="3">
+            <a:schemeClr val="accent1"/>
+          </a:fillRef>
+          <a:effectRef idx="2">
+            <a:schemeClr val="accent1"/>
+          </a:effectRef>
+          <a:fontRef idx="minor">
+            <a:schemeClr val="lt1"/>
+          </a:fontRef>
+        </p:style>
+        <p:txBody>
+          <a:bodyPr rtlCol="0" anchor="ctr"/>
+          <a:lstStyle/>
+          <a:p>
+            <a:pPr algn="ctr"/>
+          </a:p>
+        </p:txBody>
+      </p:sp>
+      <p:sp>
+        <p:nvSpPr>
+          <p:cNvPr id="122" name="TextBox 121"/>
           <p:cNvSpPr txBox="1"/>
           <p:nvPr/>
         </p:nvSpPr>
         <p:spPr>
           <a:xfrm>
-            <a:off x="9761220" y="3236975"/>
-            <a:ext cx="1010412" cy="566928"/>
+            <a:off x="14543532" y="3657600"/>
+            <a:ext cx="2839212" cy="274320"/>
           </a:xfrm>
           <a:prstGeom prst="rect">
             <a:avLst/>
@@ -7073,129 +9057,58 @@
               </a:lnSpc>
             </a:pPr>
             <a:r>
-              <a:rPr sz="3400" b="1">
+              <a:rPr sz="1600" b="0">
                 <a:solidFill>
                   <a:srgbClr val="1428A0"/>
                 </a:solidFill>
                 <a:latin typeface="Arial"/>
                 <a:ea typeface="Arial"/>
               </a:rPr>
-              <a:t>×3</a:t>
-            </a:r>
-          </a:p>
-        </p:txBody>
-      </p:sp>
-      <p:sp>
-        <p:nvSpPr>
-          <p:cNvPr id="78" name="TextBox 77"/>
+              <a:t>■</a:t>
+            </a:r>
+            <a:r>
+              <a:rPr sz="1600" b="0">
+                <a:solidFill>
+                  <a:srgbClr val="555555"/>
+                </a:solidFill>
+                <a:latin typeface="Arial"/>
+                <a:ea typeface="Arial"/>
+              </a:rPr>
+              <a:t> 활성  </a:t>
+            </a:r>
+            <a:r>
+              <a:rPr sz="1600" b="0">
+                <a:solidFill>
+                  <a:srgbClr val="D9D9D9"/>
+                </a:solidFill>
+                <a:latin typeface="Arial"/>
+                <a:ea typeface="Arial"/>
+              </a:rPr>
+              <a:t>■</a:t>
+            </a:r>
+            <a:r>
+              <a:rPr sz="1600" b="0">
+                <a:solidFill>
+                  <a:srgbClr val="555555"/>
+                </a:solidFill>
+                <a:latin typeface="Arial"/>
+                <a:ea typeface="Arial"/>
+              </a:rPr>
+              <a:t> 휴면 (대부분)</a:t>
+            </a:r>
+          </a:p>
+        </p:txBody>
+      </p:sp>
+      <p:sp>
+        <p:nvSpPr>
+          <p:cNvPr id="123" name="TextBox 122"/>
           <p:cNvSpPr txBox="1"/>
           <p:nvPr/>
         </p:nvSpPr>
         <p:spPr>
           <a:xfrm>
-            <a:off x="9761220" y="3803904"/>
-            <a:ext cx="1101852" cy="512064"/>
-          </a:xfrm>
-          <a:prstGeom prst="rect">
-            <a:avLst/>
-          </a:prstGeom>
-          <a:noFill/>
-        </p:spPr>
-        <p:txBody>
-          <a:bodyPr wrap="square" anchor="t" lIns="0" rIns="0" tIns="0" bIns="0">
-            <a:spAutoFit/>
-          </a:bodyPr>
-          <a:lstStyle/>
-          <a:p>
-            <a:pPr algn="l">
-              <a:lnSpc>
-                <a:spcPct val="100000"/>
-              </a:lnSpc>
-            </a:pPr>
-            <a:r>
-              <a:rPr sz="1500" b="0">
-                <a:solidFill>
-                  <a:srgbClr val="555555"/>
-                </a:solidFill>
-                <a:latin typeface="Arial"/>
-                <a:ea typeface="Arial"/>
-              </a:rPr>
-              <a:t>GPU당 읽기</a:t>
-            </a:r>
-          </a:p>
-          <a:p>
-            <a:pPr algn="l">
-              <a:lnSpc>
-                <a:spcPct val="100000"/>
-              </a:lnSpc>
-            </a:pPr>
-            <a:r>
-              <a:rPr sz="1500" b="0">
-                <a:solidFill>
-                  <a:srgbClr val="555555"/>
-                </a:solidFill>
-                <a:latin typeface="Arial"/>
-                <a:ea typeface="Arial"/>
-              </a:rPr>
-              <a:t>GB/s</a:t>
-            </a:r>
-          </a:p>
-        </p:txBody>
-      </p:sp>
-      <p:sp>
-        <p:nvSpPr>
-          <p:cNvPr id="79" name="Rectangle 78"/>
-          <p:cNvSpPr/>
-          <p:nvPr/>
-        </p:nvSpPr>
-        <p:spPr>
-          <a:xfrm>
-            <a:off x="11192256" y="2871215"/>
-            <a:ext cx="54864" cy="475488"/>
-          </a:xfrm>
-          <a:prstGeom prst="rect">
-            <a:avLst/>
-          </a:prstGeom>
-          <a:solidFill>
-            <a:srgbClr val="1428A0"/>
-          </a:solidFill>
-          <a:ln>
-            <a:noFill/>
-          </a:ln>
-          <a:effectLst/>
-        </p:spPr>
-        <p:style>
-          <a:lnRef idx="1">
-            <a:schemeClr val="accent1"/>
-          </a:lnRef>
-          <a:fillRef idx="3">
-            <a:schemeClr val="accent1"/>
-          </a:fillRef>
-          <a:effectRef idx="2">
-            <a:schemeClr val="accent1"/>
-          </a:effectRef>
-          <a:fontRef idx="minor">
-            <a:schemeClr val="lt1"/>
-          </a:fontRef>
-        </p:style>
-        <p:txBody>
-          <a:bodyPr rtlCol="0" anchor="ctr"/>
-          <a:lstStyle/>
-          <a:p>
-            <a:pPr algn="ctr"/>
-          </a:p>
-        </p:txBody>
-      </p:sp>
-      <p:sp>
-        <p:nvSpPr>
-          <p:cNvPr id="80" name="TextBox 79"/>
-          <p:cNvSpPr txBox="1"/>
-          <p:nvPr/>
-        </p:nvSpPr>
-        <p:spPr>
-          <a:xfrm>
-            <a:off x="11338560" y="2834639"/>
-            <a:ext cx="1188720" cy="274320"/>
+            <a:off x="14543532" y="4005072"/>
+            <a:ext cx="1243584" cy="292608"/>
           </a:xfrm>
           <a:prstGeom prst="rect">
             <a:avLst/>
@@ -7214,28 +9127,316 @@
               </a:lnSpc>
             </a:pPr>
             <a:r>
-              <a:rPr sz="1700" b="1">
+              <a:rPr sz="1600" b="1">
+                <a:solidFill>
+                  <a:srgbClr val="1428A0"/>
+                </a:solidFill>
+                <a:latin typeface="Arial"/>
+                <a:ea typeface="Arial"/>
+              </a:rPr>
+              <a:t>VM 디스크</a:t>
+            </a:r>
+          </a:p>
+        </p:txBody>
+      </p:sp>
+      <p:sp>
+        <p:nvSpPr>
+          <p:cNvPr id="124" name="Rectangle 123"/>
+          <p:cNvSpPr/>
+          <p:nvPr/>
+        </p:nvSpPr>
+        <p:spPr>
+          <a:xfrm>
+            <a:off x="15787116" y="4050791"/>
+            <a:ext cx="809244" cy="201168"/>
+          </a:xfrm>
+          <a:prstGeom prst="rect">
+            <a:avLst/>
+          </a:prstGeom>
+          <a:solidFill>
+            <a:srgbClr val="1428A0"/>
+          </a:solidFill>
+          <a:ln>
+            <a:noFill/>
+          </a:ln>
+          <a:effectLst/>
+        </p:spPr>
+        <p:style>
+          <a:lnRef idx="1">
+            <a:schemeClr val="accent1"/>
+          </a:lnRef>
+          <a:fillRef idx="3">
+            <a:schemeClr val="accent1"/>
+          </a:fillRef>
+          <a:effectRef idx="2">
+            <a:schemeClr val="accent1"/>
+          </a:effectRef>
+          <a:fontRef idx="minor">
+            <a:schemeClr val="lt1"/>
+          </a:fontRef>
+        </p:style>
+        <p:txBody>
+          <a:bodyPr rtlCol="0" anchor="ctr"/>
+          <a:lstStyle/>
+          <a:p>
+            <a:pPr algn="ctr"/>
+          </a:p>
+        </p:txBody>
+      </p:sp>
+      <p:sp>
+        <p:nvSpPr>
+          <p:cNvPr id="125" name="TextBox 124"/>
+          <p:cNvSpPr txBox="1"/>
+          <p:nvPr/>
+        </p:nvSpPr>
+        <p:spPr>
+          <a:xfrm>
+            <a:off x="16651224" y="4005072"/>
+            <a:ext cx="868680" cy="292608"/>
+          </a:xfrm>
+          <a:prstGeom prst="rect">
+            <a:avLst/>
+          </a:prstGeom>
+          <a:noFill/>
+        </p:spPr>
+        <p:txBody>
+          <a:bodyPr wrap="square" anchor="ctr" lIns="0" rIns="0" tIns="0" bIns="0">
+            <a:spAutoFit/>
+          </a:bodyPr>
+          <a:lstStyle/>
+          <a:p>
+            <a:pPr algn="l">
+              <a:lnSpc>
+                <a:spcPct val="110000"/>
+              </a:lnSpc>
+            </a:pPr>
+            <a:r>
+              <a:rPr sz="1600" b="1">
+                <a:solidFill>
+                  <a:srgbClr val="1428A0"/>
+                </a:solidFill>
+                <a:latin typeface="Arial"/>
+                <a:ea typeface="Arial"/>
+              </a:rPr>
+              <a:t>100GB</a:t>
+            </a:r>
+          </a:p>
+        </p:txBody>
+      </p:sp>
+      <p:sp>
+        <p:nvSpPr>
+          <p:cNvPr id="126" name="TextBox 125"/>
+          <p:cNvSpPr txBox="1"/>
+          <p:nvPr/>
+        </p:nvSpPr>
+        <p:spPr>
+          <a:xfrm>
+            <a:off x="14543532" y="4352544"/>
+            <a:ext cx="1243584" cy="292608"/>
+          </a:xfrm>
+          <a:prstGeom prst="rect">
+            <a:avLst/>
+          </a:prstGeom>
+          <a:noFill/>
+        </p:spPr>
+        <p:txBody>
+          <a:bodyPr wrap="square" anchor="ctr" lIns="0" rIns="0" tIns="0" bIns="0">
+            <a:spAutoFit/>
+          </a:bodyPr>
+          <a:lstStyle/>
+          <a:p>
+            <a:pPr algn="l">
+              <a:lnSpc>
+                <a:spcPct val="110000"/>
+              </a:lnSpc>
+            </a:pPr>
+            <a:r>
+              <a:rPr sz="1600" b="0">
+                <a:solidFill>
+                  <a:srgbClr val="555555"/>
+                </a:solidFill>
+                <a:latin typeface="Arial"/>
+                <a:ea typeface="Arial"/>
+              </a:rPr>
+              <a:t>VM 메모리</a:t>
+            </a:r>
+          </a:p>
+        </p:txBody>
+      </p:sp>
+      <p:sp>
+        <p:nvSpPr>
+          <p:cNvPr id="127" name="Rectangle 126"/>
+          <p:cNvSpPr/>
+          <p:nvPr/>
+        </p:nvSpPr>
+        <p:spPr>
+          <a:xfrm>
+            <a:off x="15787116" y="4398264"/>
+            <a:ext cx="73152" cy="201168"/>
+          </a:xfrm>
+          <a:prstGeom prst="rect">
+            <a:avLst/>
+          </a:prstGeom>
+          <a:solidFill>
+            <a:srgbClr val="8A8A8A"/>
+          </a:solidFill>
+          <a:ln>
+            <a:noFill/>
+          </a:ln>
+          <a:effectLst/>
+        </p:spPr>
+        <p:style>
+          <a:lnRef idx="1">
+            <a:schemeClr val="accent1"/>
+          </a:lnRef>
+          <a:fillRef idx="3">
+            <a:schemeClr val="accent1"/>
+          </a:fillRef>
+          <a:effectRef idx="2">
+            <a:schemeClr val="accent1"/>
+          </a:effectRef>
+          <a:fontRef idx="minor">
+            <a:schemeClr val="lt1"/>
+          </a:fontRef>
+        </p:style>
+        <p:txBody>
+          <a:bodyPr rtlCol="0" anchor="ctr"/>
+          <a:lstStyle/>
+          <a:p>
+            <a:pPr algn="ctr"/>
+          </a:p>
+        </p:txBody>
+      </p:sp>
+      <p:sp>
+        <p:nvSpPr>
+          <p:cNvPr id="128" name="TextBox 127"/>
+          <p:cNvSpPr txBox="1"/>
+          <p:nvPr/>
+        </p:nvSpPr>
+        <p:spPr>
+          <a:xfrm>
+            <a:off x="15915132" y="4352544"/>
+            <a:ext cx="868680" cy="292608"/>
+          </a:xfrm>
+          <a:prstGeom prst="rect">
+            <a:avLst/>
+          </a:prstGeom>
+          <a:noFill/>
+        </p:spPr>
+        <p:txBody>
+          <a:bodyPr wrap="square" anchor="ctr" lIns="0" rIns="0" tIns="0" bIns="0">
+            <a:spAutoFit/>
+          </a:bodyPr>
+          <a:lstStyle/>
+          <a:p>
+            <a:pPr algn="l">
+              <a:lnSpc>
+                <a:spcPct val="110000"/>
+              </a:lnSpc>
+            </a:pPr>
+            <a:r>
+              <a:rPr sz="1600" b="1">
+                <a:solidFill>
+                  <a:srgbClr val="555555"/>
+                </a:solidFill>
+                <a:latin typeface="Arial"/>
+                <a:ea typeface="Arial"/>
+              </a:rPr>
+              <a:t>7.75GB</a:t>
+            </a:r>
+          </a:p>
+        </p:txBody>
+      </p:sp>
+      <p:sp>
+        <p:nvSpPr>
+          <p:cNvPr id="129" name="TextBox 128"/>
+          <p:cNvSpPr txBox="1"/>
+          <p:nvPr/>
+        </p:nvSpPr>
+        <p:spPr>
+          <a:xfrm>
+            <a:off x="722376" y="5321808"/>
+            <a:ext cx="3383280" cy="274320"/>
+          </a:xfrm>
+          <a:prstGeom prst="rect">
+            <a:avLst/>
+          </a:prstGeom>
+          <a:noFill/>
+        </p:spPr>
+        <p:txBody>
+          <a:bodyPr wrap="square" anchor="ctr" lIns="0" rIns="0" tIns="0" bIns="0">
+            <a:spAutoFit/>
+          </a:bodyPr>
+          <a:lstStyle/>
+          <a:p>
+            <a:pPr algn="l">
+              <a:lnSpc>
+                <a:spcPct val="110000"/>
+              </a:lnSpc>
+            </a:pPr>
+            <a:r>
+              <a:rPr sz="1800" b="1">
                 <a:solidFill>
                   <a:srgbClr val="1A1A1A"/>
                 </a:solidFill>
                 <a:latin typeface="Arial"/>
                 <a:ea typeface="Arial"/>
               </a:rPr>
-              <a:t>읽기 대역</a:t>
-            </a:r>
-          </a:p>
-        </p:txBody>
-      </p:sp>
-      <p:sp>
-        <p:nvSpPr>
-          <p:cNvPr id="81" name="TextBox 80"/>
+              <a:t>eSSD 수요 비중</a:t>
+            </a:r>
+          </a:p>
+        </p:txBody>
+      </p:sp>
+      <p:sp>
+        <p:nvSpPr>
+          <p:cNvPr id="130" name="TextBox 129"/>
           <p:cNvSpPr txBox="1"/>
           <p:nvPr/>
         </p:nvSpPr>
         <p:spPr>
           <a:xfrm>
-            <a:off x="12527280" y="2807208"/>
-            <a:ext cx="1504188" cy="329184"/>
+            <a:off x="722376" y="5650992"/>
+            <a:ext cx="2651760" cy="274320"/>
+          </a:xfrm>
+          <a:prstGeom prst="rect">
+            <a:avLst/>
+          </a:prstGeom>
+          <a:noFill/>
+        </p:spPr>
+        <p:txBody>
+          <a:bodyPr wrap="square" anchor="ctr" lIns="0" rIns="0" tIns="0" bIns="0">
+            <a:spAutoFit/>
+          </a:bodyPr>
+          <a:lstStyle/>
+          <a:p>
+            <a:pPr algn="l">
+              <a:lnSpc>
+                <a:spcPct val="110000"/>
+              </a:lnSpc>
+            </a:pPr>
+            <a:r>
+              <a:rPr sz="1500" b="0">
+                <a:solidFill>
+                  <a:srgbClr val="555555"/>
+                </a:solidFill>
+                <a:latin typeface="Arial"/>
+                <a:ea typeface="Arial"/>
+              </a:rPr>
+              <a:t>출처: McKinsey 2024-12</a:t>
+            </a:r>
+          </a:p>
+        </p:txBody>
+      </p:sp>
+      <p:sp>
+        <p:nvSpPr>
+          <p:cNvPr id="131" name="TextBox 130"/>
+          <p:cNvSpPr txBox="1"/>
+          <p:nvPr/>
+        </p:nvSpPr>
+        <p:spPr>
+          <a:xfrm>
+            <a:off x="722376" y="5321808"/>
+            <a:ext cx="3273552" cy="274320"/>
           </a:xfrm>
           <a:prstGeom prst="rect">
             <a:avLst/>
@@ -7254,28 +9455,286 @@
               </a:lnSpc>
             </a:pPr>
             <a:r>
-              <a:rPr sz="2000" b="1">
-                <a:solidFill>
-                  <a:srgbClr val="1428A0"/>
-                </a:solidFill>
-                <a:latin typeface="Arial"/>
-                <a:ea typeface="Arial"/>
-              </a:rPr>
-              <a:t>5.4GB/s</a:t>
-            </a:r>
-          </a:p>
-        </p:txBody>
-      </p:sp>
-      <p:sp>
-        <p:nvSpPr>
-          <p:cNvPr id="82" name="TextBox 81"/>
+              <a:rPr sz="1600" b="0">
+                <a:solidFill>
+                  <a:srgbClr val="555555"/>
+                </a:solidFill>
+                <a:latin typeface="Arial"/>
+                <a:ea typeface="Arial"/>
+              </a:rPr>
+              <a:t>2026 올해</a:t>
+            </a:r>
+          </a:p>
+        </p:txBody>
+      </p:sp>
+      <p:sp>
+        <p:nvSpPr>
+          <p:cNvPr id="132" name="Rectangle 131"/>
+          <p:cNvSpPr/>
+          <p:nvPr/>
+        </p:nvSpPr>
+        <p:spPr>
+          <a:xfrm>
+            <a:off x="4306824" y="5321808"/>
+            <a:ext cx="10337292" cy="274320"/>
+          </a:xfrm>
+          <a:prstGeom prst="rect">
+            <a:avLst/>
+          </a:prstGeom>
+          <a:solidFill>
+            <a:srgbClr val="8A8A8A"/>
+          </a:solidFill>
+          <a:ln w="12700">
+            <a:solidFill>
+              <a:srgbClr val="FFFFFF"/>
+            </a:solidFill>
+          </a:ln>
+          <a:effectLst/>
+        </p:spPr>
+        <p:style>
+          <a:lnRef idx="1">
+            <a:schemeClr val="accent1"/>
+          </a:lnRef>
+          <a:fillRef idx="3">
+            <a:schemeClr val="accent1"/>
+          </a:fillRef>
+          <a:effectRef idx="2">
+            <a:schemeClr val="accent1"/>
+          </a:effectRef>
+          <a:fontRef idx="minor">
+            <a:schemeClr val="lt1"/>
+          </a:fontRef>
+        </p:style>
+        <p:txBody>
+          <a:bodyPr rtlCol="0" anchor="ctr"/>
+          <a:lstStyle/>
+          <a:p>
+            <a:pPr algn="ctr"/>
+          </a:p>
+        </p:txBody>
+      </p:sp>
+      <p:sp>
+        <p:nvSpPr>
+          <p:cNvPr id="133" name="TextBox 132"/>
           <p:cNvSpPr txBox="1"/>
           <p:nvPr/>
         </p:nvSpPr>
         <p:spPr>
           <a:xfrm>
-            <a:off x="11338560" y="3108959"/>
-            <a:ext cx="2692908" cy="256032"/>
+            <a:off x="4306824" y="5321808"/>
+            <a:ext cx="10337292" cy="274320"/>
+          </a:xfrm>
+          <a:prstGeom prst="rect">
+            <a:avLst/>
+          </a:prstGeom>
+          <a:noFill/>
+        </p:spPr>
+        <p:txBody>
+          <a:bodyPr wrap="square" anchor="ctr" lIns="0" rIns="0" tIns="0" bIns="0">
+            <a:spAutoFit/>
+          </a:bodyPr>
+          <a:lstStyle/>
+          <a:p>
+            <a:pPr algn="ctr">
+              <a:lnSpc>
+                <a:spcPct val="110000"/>
+              </a:lnSpc>
+            </a:pPr>
+            <a:r>
+              <a:rPr sz="1600" b="1">
+                <a:solidFill>
+                  <a:srgbClr val="FFFFFF"/>
+                </a:solidFill>
+                <a:latin typeface="Arial"/>
+                <a:ea typeface="Arial"/>
+              </a:rPr>
+              <a:t>범용 · 엔터프라이즈 85%</a:t>
+            </a:r>
+          </a:p>
+        </p:txBody>
+      </p:sp>
+      <p:sp>
+        <p:nvSpPr>
+          <p:cNvPr id="134" name="Rectangle 133"/>
+          <p:cNvSpPr/>
+          <p:nvPr/>
+        </p:nvSpPr>
+        <p:spPr>
+          <a:xfrm>
+            <a:off x="14644116" y="5321808"/>
+            <a:ext cx="729691" cy="274320"/>
+          </a:xfrm>
+          <a:prstGeom prst="rect">
+            <a:avLst/>
+          </a:prstGeom>
+          <a:solidFill>
+            <a:srgbClr val="AAB8E8"/>
+          </a:solidFill>
+          <a:ln w="12700">
+            <a:solidFill>
+              <a:srgbClr val="FFFFFF"/>
+            </a:solidFill>
+          </a:ln>
+          <a:effectLst/>
+        </p:spPr>
+        <p:style>
+          <a:lnRef idx="1">
+            <a:schemeClr val="accent1"/>
+          </a:lnRef>
+          <a:fillRef idx="3">
+            <a:schemeClr val="accent1"/>
+          </a:fillRef>
+          <a:effectRef idx="2">
+            <a:schemeClr val="accent1"/>
+          </a:effectRef>
+          <a:fontRef idx="minor">
+            <a:schemeClr val="lt1"/>
+          </a:fontRef>
+        </p:style>
+        <p:txBody>
+          <a:bodyPr rtlCol="0" anchor="ctr"/>
+          <a:lstStyle/>
+          <a:p>
+            <a:pPr algn="ctr"/>
+          </a:p>
+        </p:txBody>
+      </p:sp>
+      <p:sp>
+        <p:nvSpPr>
+          <p:cNvPr id="135" name="TextBox 134"/>
+          <p:cNvSpPr txBox="1"/>
+          <p:nvPr/>
+        </p:nvSpPr>
+        <p:spPr>
+          <a:xfrm>
+            <a:off x="14644116" y="5321808"/>
+            <a:ext cx="729691" cy="274320"/>
+          </a:xfrm>
+          <a:prstGeom prst="rect">
+            <a:avLst/>
+          </a:prstGeom>
+          <a:noFill/>
+        </p:spPr>
+        <p:txBody>
+          <a:bodyPr wrap="square" anchor="ctr" lIns="0" rIns="0" tIns="0" bIns="0">
+            <a:spAutoFit/>
+          </a:bodyPr>
+          <a:lstStyle/>
+          <a:p>
+            <a:pPr algn="ctr">
+              <a:lnSpc>
+                <a:spcPct val="110000"/>
+              </a:lnSpc>
+            </a:pPr>
+            <a:r>
+              <a:rPr sz="1600" b="1">
+                <a:solidFill>
+                  <a:srgbClr val="1A1A1A"/>
+                </a:solidFill>
+                <a:latin typeface="Arial"/>
+                <a:ea typeface="Arial"/>
+              </a:rPr>
+              <a:t>6%</a:t>
+            </a:r>
+          </a:p>
+        </p:txBody>
+      </p:sp>
+      <p:sp>
+        <p:nvSpPr>
+          <p:cNvPr id="136" name="Rectangle 135"/>
+          <p:cNvSpPr/>
+          <p:nvPr/>
+        </p:nvSpPr>
+        <p:spPr>
+          <a:xfrm>
+            <a:off x="15373807" y="5321808"/>
+            <a:ext cx="1094536" cy="274320"/>
+          </a:xfrm>
+          <a:prstGeom prst="rect">
+            <a:avLst/>
+          </a:prstGeom>
+          <a:solidFill>
+            <a:srgbClr val="1428A0"/>
+          </a:solidFill>
+          <a:ln w="12700">
+            <a:solidFill>
+              <a:srgbClr val="FFFFFF"/>
+            </a:solidFill>
+          </a:ln>
+          <a:effectLst/>
+        </p:spPr>
+        <p:style>
+          <a:lnRef idx="1">
+            <a:schemeClr val="accent1"/>
+          </a:lnRef>
+          <a:fillRef idx="3">
+            <a:schemeClr val="accent1"/>
+          </a:fillRef>
+          <a:effectRef idx="2">
+            <a:schemeClr val="accent1"/>
+          </a:effectRef>
+          <a:fontRef idx="minor">
+            <a:schemeClr val="lt1"/>
+          </a:fontRef>
+        </p:style>
+        <p:txBody>
+          <a:bodyPr rtlCol="0" anchor="ctr"/>
+          <a:lstStyle/>
+          <a:p>
+            <a:pPr algn="ctr"/>
+          </a:p>
+        </p:txBody>
+      </p:sp>
+      <p:sp>
+        <p:nvSpPr>
+          <p:cNvPr id="137" name="TextBox 136"/>
+          <p:cNvSpPr txBox="1"/>
+          <p:nvPr/>
+        </p:nvSpPr>
+        <p:spPr>
+          <a:xfrm>
+            <a:off x="15373807" y="5321808"/>
+            <a:ext cx="1094536" cy="274320"/>
+          </a:xfrm>
+          <a:prstGeom prst="rect">
+            <a:avLst/>
+          </a:prstGeom>
+          <a:noFill/>
+        </p:spPr>
+        <p:txBody>
+          <a:bodyPr wrap="square" anchor="ctr" lIns="0" rIns="0" tIns="0" bIns="0">
+            <a:spAutoFit/>
+          </a:bodyPr>
+          <a:lstStyle/>
+          <a:p>
+            <a:pPr algn="ctr">
+              <a:lnSpc>
+                <a:spcPct val="110000"/>
+              </a:lnSpc>
+            </a:pPr>
+            <a:r>
+              <a:rPr sz="1600" b="1">
+                <a:solidFill>
+                  <a:srgbClr val="FFFFFF"/>
+                </a:solidFill>
+                <a:latin typeface="Arial"/>
+                <a:ea typeface="Arial"/>
+              </a:rPr>
+              <a:t>9%</a:t>
+            </a:r>
+          </a:p>
+        </p:txBody>
+      </p:sp>
+      <p:sp>
+        <p:nvSpPr>
+          <p:cNvPr id="138" name="TextBox 137"/>
+          <p:cNvSpPr txBox="1"/>
+          <p:nvPr/>
+        </p:nvSpPr>
+        <p:spPr>
+          <a:xfrm>
+            <a:off x="16559784" y="5321808"/>
+            <a:ext cx="1005840" cy="274320"/>
           </a:xfrm>
           <a:prstGeom prst="rect">
             <a:avLst/>
@@ -7294,28 +9753,240 @@
               </a:lnSpc>
             </a:pPr>
             <a:r>
-              <a:rPr sz="1500" b="0">
+              <a:rPr sz="1600" b="0">
                 <a:solidFill>
                   <a:srgbClr val="555555"/>
                 </a:solidFill>
                 <a:latin typeface="Arial"/>
                 <a:ea typeface="Arial"/>
               </a:rPr>
-              <a:t>GPU당 · 128K KV 1초 복원</a:t>
-            </a:r>
-          </a:p>
-        </p:txBody>
-      </p:sp>
-      <p:sp>
-        <p:nvSpPr>
-          <p:cNvPr id="83" name="Rectangle 82"/>
-          <p:cNvSpPr/>
-          <p:nvPr/>
-        </p:nvSpPr>
-        <p:spPr>
-          <a:xfrm>
-            <a:off x="11192256" y="3438144"/>
-            <a:ext cx="54864" cy="475488"/>
+              <a:t>286EB</a:t>
+            </a:r>
+          </a:p>
+        </p:txBody>
+      </p:sp>
+      <p:sp>
+        <p:nvSpPr>
+          <p:cNvPr id="139" name="TextBox 138"/>
+          <p:cNvSpPr txBox="1"/>
+          <p:nvPr/>
+        </p:nvSpPr>
+        <p:spPr>
+          <a:xfrm>
+            <a:off x="722376" y="5650992"/>
+            <a:ext cx="3273552" cy="274320"/>
+          </a:xfrm>
+          <a:prstGeom prst="rect">
+            <a:avLst/>
+          </a:prstGeom>
+          <a:noFill/>
+        </p:spPr>
+        <p:txBody>
+          <a:bodyPr wrap="square" anchor="ctr" lIns="0" rIns="0" tIns="0" bIns="0">
+            <a:spAutoFit/>
+          </a:bodyPr>
+          <a:lstStyle/>
+          <a:p>
+            <a:pPr algn="r">
+              <a:lnSpc>
+                <a:spcPct val="110000"/>
+              </a:lnSpc>
+            </a:pPr>
+            <a:r>
+              <a:rPr sz="1600" b="1">
+                <a:solidFill>
+                  <a:srgbClr val="1A1A1A"/>
+                </a:solidFill>
+                <a:latin typeface="Arial"/>
+                <a:ea typeface="Arial"/>
+              </a:rPr>
+              <a:t>2030</a:t>
+            </a:r>
+          </a:p>
+        </p:txBody>
+      </p:sp>
+      <p:sp>
+        <p:nvSpPr>
+          <p:cNvPr id="140" name="Rectangle 139"/>
+          <p:cNvSpPr/>
+          <p:nvPr/>
+        </p:nvSpPr>
+        <p:spPr>
+          <a:xfrm>
+            <a:off x="4306824" y="5650992"/>
+            <a:ext cx="5715914" cy="274320"/>
+          </a:xfrm>
+          <a:prstGeom prst="rect">
+            <a:avLst/>
+          </a:prstGeom>
+          <a:solidFill>
+            <a:srgbClr val="8A8A8A"/>
+          </a:solidFill>
+          <a:ln w="12700">
+            <a:solidFill>
+              <a:srgbClr val="FFFFFF"/>
+            </a:solidFill>
+          </a:ln>
+          <a:effectLst/>
+        </p:spPr>
+        <p:style>
+          <a:lnRef idx="1">
+            <a:schemeClr val="accent1"/>
+          </a:lnRef>
+          <a:fillRef idx="3">
+            <a:schemeClr val="accent1"/>
+          </a:fillRef>
+          <a:effectRef idx="2">
+            <a:schemeClr val="accent1"/>
+          </a:effectRef>
+          <a:fontRef idx="minor">
+            <a:schemeClr val="lt1"/>
+          </a:fontRef>
+        </p:style>
+        <p:txBody>
+          <a:bodyPr rtlCol="0" anchor="ctr"/>
+          <a:lstStyle/>
+          <a:p>
+            <a:pPr algn="ctr"/>
+          </a:p>
+        </p:txBody>
+      </p:sp>
+      <p:sp>
+        <p:nvSpPr>
+          <p:cNvPr id="141" name="TextBox 140"/>
+          <p:cNvSpPr txBox="1"/>
+          <p:nvPr/>
+        </p:nvSpPr>
+        <p:spPr>
+          <a:xfrm>
+            <a:off x="4306824" y="5650992"/>
+            <a:ext cx="5715914" cy="274320"/>
+          </a:xfrm>
+          <a:prstGeom prst="rect">
+            <a:avLst/>
+          </a:prstGeom>
+          <a:noFill/>
+        </p:spPr>
+        <p:txBody>
+          <a:bodyPr wrap="square" anchor="ctr" lIns="0" rIns="0" tIns="0" bIns="0">
+            <a:spAutoFit/>
+          </a:bodyPr>
+          <a:lstStyle/>
+          <a:p>
+            <a:pPr algn="ctr">
+              <a:lnSpc>
+                <a:spcPct val="110000"/>
+              </a:lnSpc>
+            </a:pPr>
+            <a:r>
+              <a:rPr sz="1600" b="1">
+                <a:solidFill>
+                  <a:srgbClr val="FFFFFF"/>
+                </a:solidFill>
+                <a:latin typeface="Arial"/>
+                <a:ea typeface="Arial"/>
+              </a:rPr>
+              <a:t>범용 · 엔터프라이즈 47%</a:t>
+            </a:r>
+          </a:p>
+        </p:txBody>
+      </p:sp>
+      <p:sp>
+        <p:nvSpPr>
+          <p:cNvPr id="142" name="Rectangle 141"/>
+          <p:cNvSpPr/>
+          <p:nvPr/>
+        </p:nvSpPr>
+        <p:spPr>
+          <a:xfrm>
+            <a:off x="10022738" y="5650992"/>
+            <a:ext cx="1459382" cy="274320"/>
+          </a:xfrm>
+          <a:prstGeom prst="rect">
+            <a:avLst/>
+          </a:prstGeom>
+          <a:solidFill>
+            <a:srgbClr val="AAB8E8"/>
+          </a:solidFill>
+          <a:ln w="12700">
+            <a:solidFill>
+              <a:srgbClr val="FFFFFF"/>
+            </a:solidFill>
+          </a:ln>
+          <a:effectLst/>
+        </p:spPr>
+        <p:style>
+          <a:lnRef idx="1">
+            <a:schemeClr val="accent1"/>
+          </a:lnRef>
+          <a:fillRef idx="3">
+            <a:schemeClr val="accent1"/>
+          </a:fillRef>
+          <a:effectRef idx="2">
+            <a:schemeClr val="accent1"/>
+          </a:effectRef>
+          <a:fontRef idx="minor">
+            <a:schemeClr val="lt1"/>
+          </a:fontRef>
+        </p:style>
+        <p:txBody>
+          <a:bodyPr rtlCol="0" anchor="ctr"/>
+          <a:lstStyle/>
+          <a:p>
+            <a:pPr algn="ctr"/>
+          </a:p>
+        </p:txBody>
+      </p:sp>
+      <p:sp>
+        <p:nvSpPr>
+          <p:cNvPr id="143" name="TextBox 142"/>
+          <p:cNvSpPr txBox="1"/>
+          <p:nvPr/>
+        </p:nvSpPr>
+        <p:spPr>
+          <a:xfrm>
+            <a:off x="10022738" y="5650992"/>
+            <a:ext cx="1459382" cy="274320"/>
+          </a:xfrm>
+          <a:prstGeom prst="rect">
+            <a:avLst/>
+          </a:prstGeom>
+          <a:noFill/>
+        </p:spPr>
+        <p:txBody>
+          <a:bodyPr wrap="square" anchor="ctr" lIns="0" rIns="0" tIns="0" bIns="0">
+            <a:spAutoFit/>
+          </a:bodyPr>
+          <a:lstStyle/>
+          <a:p>
+            <a:pPr algn="ctr">
+              <a:lnSpc>
+                <a:spcPct val="110000"/>
+              </a:lnSpc>
+            </a:pPr>
+            <a:r>
+              <a:rPr sz="1600" b="1">
+                <a:solidFill>
+                  <a:srgbClr val="1A1A1A"/>
+                </a:solidFill>
+                <a:latin typeface="Arial"/>
+                <a:ea typeface="Arial"/>
+              </a:rPr>
+              <a:t>AI 학습 12%</a:t>
+            </a:r>
+          </a:p>
+        </p:txBody>
+      </p:sp>
+      <p:sp>
+        <p:nvSpPr>
+          <p:cNvPr id="144" name="Rectangle 143"/>
+          <p:cNvSpPr/>
+          <p:nvPr/>
+        </p:nvSpPr>
+        <p:spPr>
+          <a:xfrm>
+            <a:off x="11482120" y="5650992"/>
+            <a:ext cx="4986223" cy="274320"/>
           </a:xfrm>
           <a:prstGeom prst="rect">
             <a:avLst/>
@@ -7323,43 +9994,85 @@
           <a:solidFill>
             <a:srgbClr val="1428A0"/>
           </a:solidFill>
-          <a:ln>
-            <a:noFill/>
-          </a:ln>
-          <a:effectLst/>
-        </p:spPr>
-        <p:style>
-          <a:lnRef idx="1">
-            <a:schemeClr val="accent1"/>
-          </a:lnRef>
-          <a:fillRef idx="3">
-            <a:schemeClr val="accent1"/>
-          </a:fillRef>
-          <a:effectRef idx="2">
-            <a:schemeClr val="accent1"/>
-          </a:effectRef>
-          <a:fontRef idx="minor">
-            <a:schemeClr val="lt1"/>
-          </a:fontRef>
-        </p:style>
-        <p:txBody>
-          <a:bodyPr rtlCol="0" anchor="ctr"/>
-          <a:lstStyle/>
-          <a:p>
-            <a:pPr algn="ctr"/>
-          </a:p>
-        </p:txBody>
-      </p:sp>
-      <p:sp>
-        <p:nvSpPr>
-          <p:cNvPr id="84" name="TextBox 83"/>
+          <a:ln w="12700">
+            <a:solidFill>
+              <a:srgbClr val="FFFFFF"/>
+            </a:solidFill>
+          </a:ln>
+          <a:effectLst/>
+        </p:spPr>
+        <p:style>
+          <a:lnRef idx="1">
+            <a:schemeClr val="accent1"/>
+          </a:lnRef>
+          <a:fillRef idx="3">
+            <a:schemeClr val="accent1"/>
+          </a:fillRef>
+          <a:effectRef idx="2">
+            <a:schemeClr val="accent1"/>
+          </a:effectRef>
+          <a:fontRef idx="minor">
+            <a:schemeClr val="lt1"/>
+          </a:fontRef>
+        </p:style>
+        <p:txBody>
+          <a:bodyPr rtlCol="0" anchor="ctr"/>
+          <a:lstStyle/>
+          <a:p>
+            <a:pPr algn="ctr"/>
+          </a:p>
+        </p:txBody>
+      </p:sp>
+      <p:sp>
+        <p:nvSpPr>
+          <p:cNvPr id="145" name="TextBox 144"/>
           <p:cNvSpPr txBox="1"/>
           <p:nvPr/>
         </p:nvSpPr>
         <p:spPr>
           <a:xfrm>
-            <a:off x="11338560" y="3401568"/>
-            <a:ext cx="1188720" cy="274320"/>
+            <a:off x="11482120" y="5650992"/>
+            <a:ext cx="4986223" cy="274320"/>
+          </a:xfrm>
+          <a:prstGeom prst="rect">
+            <a:avLst/>
+          </a:prstGeom>
+          <a:noFill/>
+        </p:spPr>
+        <p:txBody>
+          <a:bodyPr wrap="square" anchor="ctr" lIns="0" rIns="0" tIns="0" bIns="0">
+            <a:spAutoFit/>
+          </a:bodyPr>
+          <a:lstStyle/>
+          <a:p>
+            <a:pPr algn="ctr">
+              <a:lnSpc>
+                <a:spcPct val="110000"/>
+              </a:lnSpc>
+            </a:pPr>
+            <a:r>
+              <a:rPr sz="1600" b="1">
+                <a:solidFill>
+                  <a:srgbClr val="FFFFFF"/>
+                </a:solidFill>
+                <a:latin typeface="Arial"/>
+                <a:ea typeface="Arial"/>
+              </a:rPr>
+              <a:t>AI 추론 41%</a:t>
+            </a:r>
+          </a:p>
+        </p:txBody>
+      </p:sp>
+      <p:sp>
+        <p:nvSpPr>
+          <p:cNvPr id="146" name="TextBox 145"/>
+          <p:cNvSpPr txBox="1"/>
+          <p:nvPr/>
+        </p:nvSpPr>
+        <p:spPr>
+          <a:xfrm>
+            <a:off x="16559784" y="5650992"/>
+            <a:ext cx="1005840" cy="274320"/>
           </a:xfrm>
           <a:prstGeom prst="rect">
             <a:avLst/>
@@ -7378,28 +10091,78 @@
               </a:lnSpc>
             </a:pPr>
             <a:r>
-              <a:rPr sz="1700" b="1">
+              <a:rPr sz="1600" b="1">
                 <a:solidFill>
                   <a:srgbClr val="1A1A1A"/>
                 </a:solidFill>
                 <a:latin typeface="Arial"/>
                 <a:ea typeface="Arial"/>
               </a:rPr>
-              <a:t>꼬리 지연</a:t>
-            </a:r>
-          </a:p>
-        </p:txBody>
-      </p:sp>
-      <p:sp>
-        <p:nvSpPr>
-          <p:cNvPr id="85" name="TextBox 84"/>
+              <a:t>1,078EB</a:t>
+            </a:r>
+          </a:p>
+        </p:txBody>
+      </p:sp>
+      <p:sp>
+        <p:nvSpPr>
+          <p:cNvPr id="147" name="TextBox 146"/>
           <p:cNvSpPr txBox="1"/>
           <p:nvPr/>
         </p:nvSpPr>
         <p:spPr>
           <a:xfrm>
-            <a:off x="12527280" y="3374136"/>
-            <a:ext cx="1504188" cy="329184"/>
+            <a:off x="722376" y="6053328"/>
+            <a:ext cx="8869680" cy="329184"/>
+          </a:xfrm>
+          <a:prstGeom prst="rect">
+            <a:avLst/>
+          </a:prstGeom>
+          <a:noFill/>
+        </p:spPr>
+        <p:txBody>
+          <a:bodyPr wrap="square" anchor="ctr" lIns="0" rIns="0" tIns="0" bIns="0">
+            <a:spAutoFit/>
+          </a:bodyPr>
+          <a:lstStyle/>
+          <a:p>
+            <a:pPr algn="l">
+              <a:lnSpc>
+                <a:spcPct val="110000"/>
+              </a:lnSpc>
+            </a:pPr>
+            <a:r>
+              <a:rPr sz="1900" b="1">
+                <a:solidFill>
+                  <a:srgbClr val="1A1A1A"/>
+                </a:solidFill>
+                <a:latin typeface="Arial"/>
+                <a:ea typeface="Arial"/>
+              </a:rPr>
+              <a:t>삼성 SSD 포트폴리오  </a:t>
+            </a:r>
+            <a:r>
+              <a:rPr sz="1700" b="0">
+                <a:solidFill>
+                  <a:srgbClr val="555555"/>
+                </a:solidFill>
+                <a:latin typeface="Arial"/>
+                <a:ea typeface="Arial"/>
+              </a:rPr>
+              <a:t>수요별 대응 현황</a:t>
+            </a:r>
+          </a:p>
+        </p:txBody>
+      </p:sp>
+      <p:sp>
+        <p:nvSpPr>
+          <p:cNvPr id="148" name="TextBox 147"/>
+          <p:cNvSpPr txBox="1"/>
+          <p:nvPr/>
+        </p:nvSpPr>
+        <p:spPr>
+          <a:xfrm>
+            <a:off x="10250424" y="6053328"/>
+            <a:ext cx="7315200" cy="329184"/>
           </a:xfrm>
           <a:prstGeom prst="rect">
             <a:avLst/>
@@ -7418,2731 +10181,43 @@
               </a:lnSpc>
             </a:pPr>
             <a:r>
-              <a:rPr sz="2000" b="1">
+              <a:rPr sz="1600" b="0">
                 <a:solidFill>
                   <a:srgbClr val="1428A0"/>
                 </a:solidFill>
                 <a:latin typeface="Arial"/>
                 <a:ea typeface="Arial"/>
               </a:rPr>
-              <a:t>p99 450ms</a:t>
-            </a:r>
-          </a:p>
-        </p:txBody>
-      </p:sp>
-      <p:sp>
-        <p:nvSpPr>
-          <p:cNvPr id="86" name="TextBox 85"/>
-          <p:cNvSpPr txBox="1"/>
-          <p:nvPr/>
-        </p:nvSpPr>
-        <p:spPr>
-          <a:xfrm>
-            <a:off x="11338560" y="3675887"/>
-            <a:ext cx="2692908" cy="256032"/>
-          </a:xfrm>
-          <a:prstGeom prst="rect">
-            <a:avLst/>
-          </a:prstGeom>
-          <a:noFill/>
-        </p:spPr>
-        <p:txBody>
-          <a:bodyPr wrap="square" anchor="ctr" lIns="0" rIns="0" tIns="0" bIns="0">
-            <a:spAutoFit/>
-          </a:bodyPr>
-          <a:lstStyle/>
-          <a:p>
-            <a:pPr algn="l">
-              <a:lnSpc>
-                <a:spcPct val="110000"/>
-              </a:lnSpc>
-            </a:pPr>
-            <a:r>
-              <a:rPr sz="1500" b="0">
+              <a:t>■</a:t>
+            </a:r>
+            <a:r>
+              <a:rPr sz="1600" b="0">
                 <a:solidFill>
                   <a:srgbClr val="555555"/>
                 </a:solidFill>
                 <a:latin typeface="Arial"/>
                 <a:ea typeface="Arial"/>
               </a:rPr>
-              <a:t>첫 토큰 (MLPerf 70B)</a:t>
-            </a:r>
-          </a:p>
-        </p:txBody>
-      </p:sp>
-      <p:sp>
-        <p:nvSpPr>
-          <p:cNvPr id="87" name="Rectangle 86"/>
-          <p:cNvSpPr/>
-          <p:nvPr/>
-        </p:nvSpPr>
-        <p:spPr>
-          <a:xfrm>
-            <a:off x="11192256" y="4005072"/>
-            <a:ext cx="54864" cy="475488"/>
-          </a:xfrm>
-          <a:prstGeom prst="rect">
-            <a:avLst/>
-          </a:prstGeom>
-          <a:solidFill>
-            <a:srgbClr val="3C5AC8"/>
-          </a:solidFill>
-          <a:ln>
-            <a:noFill/>
-          </a:ln>
-          <a:effectLst/>
-        </p:spPr>
-        <p:style>
-          <a:lnRef idx="1">
-            <a:schemeClr val="accent1"/>
-          </a:lnRef>
-          <a:fillRef idx="3">
-            <a:schemeClr val="accent1"/>
-          </a:fillRef>
-          <a:effectRef idx="2">
-            <a:schemeClr val="accent1"/>
-          </a:effectRef>
-          <a:fontRef idx="minor">
-            <a:schemeClr val="lt1"/>
-          </a:fontRef>
-        </p:style>
-        <p:txBody>
-          <a:bodyPr rtlCol="0" anchor="ctr"/>
-          <a:lstStyle/>
-          <a:p>
-            <a:pPr algn="ctr"/>
-          </a:p>
-        </p:txBody>
-      </p:sp>
-      <p:sp>
-        <p:nvSpPr>
-          <p:cNvPr id="88" name="TextBox 87"/>
-          <p:cNvSpPr txBox="1"/>
-          <p:nvPr/>
-        </p:nvSpPr>
-        <p:spPr>
-          <a:xfrm>
-            <a:off x="11338560" y="3968496"/>
-            <a:ext cx="1188720" cy="274320"/>
-          </a:xfrm>
-          <a:prstGeom prst="rect">
-            <a:avLst/>
-          </a:prstGeom>
-          <a:noFill/>
-        </p:spPr>
-        <p:txBody>
-          <a:bodyPr wrap="square" anchor="ctr" lIns="0" rIns="0" tIns="0" bIns="0">
-            <a:spAutoFit/>
-          </a:bodyPr>
-          <a:lstStyle/>
-          <a:p>
-            <a:pPr algn="l">
-              <a:lnSpc>
-                <a:spcPct val="110000"/>
-              </a:lnSpc>
-            </a:pPr>
-            <a:r>
-              <a:rPr sz="1700" b="1">
-                <a:solidFill>
-                  <a:srgbClr val="1A1A1A"/>
-                </a:solidFill>
-                <a:latin typeface="Arial"/>
-                <a:ea typeface="Arial"/>
-              </a:rPr>
-              <a:t>쓰기 내구</a:t>
-            </a:r>
-          </a:p>
-        </p:txBody>
-      </p:sp>
-      <p:sp>
-        <p:nvSpPr>
-          <p:cNvPr id="89" name="TextBox 88"/>
-          <p:cNvSpPr txBox="1"/>
-          <p:nvPr/>
-        </p:nvSpPr>
-        <p:spPr>
-          <a:xfrm>
-            <a:off x="12527280" y="3941063"/>
-            <a:ext cx="1504188" cy="329184"/>
-          </a:xfrm>
-          <a:prstGeom prst="rect">
-            <a:avLst/>
-          </a:prstGeom>
-          <a:noFill/>
-        </p:spPr>
-        <p:txBody>
-          <a:bodyPr wrap="square" anchor="ctr" lIns="0" rIns="0" tIns="0" bIns="0">
-            <a:spAutoFit/>
-          </a:bodyPr>
-          <a:lstStyle/>
-          <a:p>
-            <a:pPr algn="r">
-              <a:lnSpc>
-                <a:spcPct val="110000"/>
-              </a:lnSpc>
-            </a:pPr>
-            <a:r>
-              <a:rPr sz="2000" b="1">
-                <a:solidFill>
-                  <a:srgbClr val="1428A0"/>
-                </a:solidFill>
-                <a:latin typeface="Arial"/>
-                <a:ea typeface="Arial"/>
-              </a:rPr>
-              <a:t>3.2 DWPD</a:t>
-            </a:r>
-          </a:p>
-        </p:txBody>
-      </p:sp>
-      <p:sp>
-        <p:nvSpPr>
-          <p:cNvPr id="90" name="TextBox 89"/>
-          <p:cNvSpPr txBox="1"/>
-          <p:nvPr/>
-        </p:nvSpPr>
-        <p:spPr>
-          <a:xfrm>
-            <a:off x="11338560" y="4242816"/>
-            <a:ext cx="2692908" cy="256032"/>
-          </a:xfrm>
-          <a:prstGeom prst="rect">
-            <a:avLst/>
-          </a:prstGeom>
-          <a:noFill/>
-        </p:spPr>
-        <p:txBody>
-          <a:bodyPr wrap="square" anchor="ctr" lIns="0" rIns="0" tIns="0" bIns="0">
-            <a:spAutoFit/>
-          </a:bodyPr>
-          <a:lstStyle/>
-          <a:p>
-            <a:pPr algn="l">
-              <a:lnSpc>
-                <a:spcPct val="110000"/>
-              </a:lnSpc>
-            </a:pPr>
-            <a:r>
-              <a:rPr sz="1500" b="0">
+              <a:t> 대응 중   </a:t>
+            </a:r>
+            <a:r>
+              <a:rPr sz="1600" b="0">
+                <a:solidFill>
+                  <a:srgbClr val="3C5AC8"/>
+                </a:solidFill>
+                <a:latin typeface="Arial"/>
+                <a:ea typeface="Arial"/>
+              </a:rPr>
+              <a:t>▢</a:t>
+            </a:r>
+            <a:r>
+              <a:rPr sz="1600" b="0">
                 <a:solidFill>
                   <a:srgbClr val="555555"/>
                 </a:solidFill>
                 <a:latin typeface="Arial"/>
                 <a:ea typeface="Arial"/>
               </a:rPr>
-              <a:t>KV 계층 실측</a:t>
-            </a:r>
-          </a:p>
-        </p:txBody>
-      </p:sp>
-      <p:sp>
-        <p:nvSpPr>
-          <p:cNvPr id="91" name="Rectangle 90"/>
-          <p:cNvSpPr/>
-          <p:nvPr/>
-        </p:nvSpPr>
-        <p:spPr>
-          <a:xfrm>
-            <a:off x="14561820" y="2926079"/>
-            <a:ext cx="219456" cy="182880"/>
-          </a:xfrm>
-          <a:prstGeom prst="rect">
-            <a:avLst/>
-          </a:prstGeom>
-          <a:solidFill>
-            <a:srgbClr val="D9D9D9"/>
-          </a:solidFill>
-          <a:ln>
-            <a:noFill/>
-          </a:ln>
-          <a:effectLst/>
-        </p:spPr>
-        <p:style>
-          <a:lnRef idx="1">
-            <a:schemeClr val="accent1"/>
-          </a:lnRef>
-          <a:fillRef idx="3">
-            <a:schemeClr val="accent1"/>
-          </a:fillRef>
-          <a:effectRef idx="2">
-            <a:schemeClr val="accent1"/>
-          </a:effectRef>
-          <a:fontRef idx="minor">
-            <a:schemeClr val="lt1"/>
-          </a:fontRef>
-        </p:style>
-        <p:txBody>
-          <a:bodyPr rtlCol="0" anchor="ctr"/>
-          <a:lstStyle/>
-          <a:p>
-            <a:pPr algn="ctr"/>
-          </a:p>
-        </p:txBody>
-      </p:sp>
-      <p:sp>
-        <p:nvSpPr>
-          <p:cNvPr id="92" name="Rectangle 91"/>
-          <p:cNvSpPr/>
-          <p:nvPr/>
-        </p:nvSpPr>
-        <p:spPr>
-          <a:xfrm>
-            <a:off x="14836140" y="2926079"/>
-            <a:ext cx="219456" cy="182880"/>
-          </a:xfrm>
-          <a:prstGeom prst="rect">
-            <a:avLst/>
-          </a:prstGeom>
-          <a:solidFill>
-            <a:srgbClr val="D9D9D9"/>
-          </a:solidFill>
-          <a:ln>
-            <a:noFill/>
-          </a:ln>
-          <a:effectLst/>
-        </p:spPr>
-        <p:style>
-          <a:lnRef idx="1">
-            <a:schemeClr val="accent1"/>
-          </a:lnRef>
-          <a:fillRef idx="3">
-            <a:schemeClr val="accent1"/>
-          </a:fillRef>
-          <a:effectRef idx="2">
-            <a:schemeClr val="accent1"/>
-          </a:effectRef>
-          <a:fontRef idx="minor">
-            <a:schemeClr val="lt1"/>
-          </a:fontRef>
-        </p:style>
-        <p:txBody>
-          <a:bodyPr rtlCol="0" anchor="ctr"/>
-          <a:lstStyle/>
-          <a:p>
-            <a:pPr algn="ctr"/>
-          </a:p>
-        </p:txBody>
-      </p:sp>
-      <p:sp>
-        <p:nvSpPr>
-          <p:cNvPr id="93" name="Rectangle 92"/>
-          <p:cNvSpPr/>
-          <p:nvPr/>
-        </p:nvSpPr>
-        <p:spPr>
-          <a:xfrm>
-            <a:off x="15110460" y="2926079"/>
-            <a:ext cx="219456" cy="182880"/>
-          </a:xfrm>
-          <a:prstGeom prst="rect">
-            <a:avLst/>
-          </a:prstGeom>
-          <a:solidFill>
-            <a:srgbClr val="D9D9D9"/>
-          </a:solidFill>
-          <a:ln>
-            <a:noFill/>
-          </a:ln>
-          <a:effectLst/>
-        </p:spPr>
-        <p:style>
-          <a:lnRef idx="1">
-            <a:schemeClr val="accent1"/>
-          </a:lnRef>
-          <a:fillRef idx="3">
-            <a:schemeClr val="accent1"/>
-          </a:fillRef>
-          <a:effectRef idx="2">
-            <a:schemeClr val="accent1"/>
-          </a:effectRef>
-          <a:fontRef idx="minor">
-            <a:schemeClr val="lt1"/>
-          </a:fontRef>
-        </p:style>
-        <p:txBody>
-          <a:bodyPr rtlCol="0" anchor="ctr"/>
-          <a:lstStyle/>
-          <a:p>
-            <a:pPr algn="ctr"/>
-          </a:p>
-        </p:txBody>
-      </p:sp>
-      <p:sp>
-        <p:nvSpPr>
-          <p:cNvPr id="94" name="Rectangle 93"/>
-          <p:cNvSpPr/>
-          <p:nvPr/>
-        </p:nvSpPr>
-        <p:spPr>
-          <a:xfrm>
-            <a:off x="15384780" y="2926079"/>
-            <a:ext cx="219456" cy="182880"/>
-          </a:xfrm>
-          <a:prstGeom prst="rect">
-            <a:avLst/>
-          </a:prstGeom>
-          <a:solidFill>
-            <a:srgbClr val="1428A0"/>
-          </a:solidFill>
-          <a:ln>
-            <a:noFill/>
-          </a:ln>
-          <a:effectLst/>
-        </p:spPr>
-        <p:style>
-          <a:lnRef idx="1">
-            <a:schemeClr val="accent1"/>
-          </a:lnRef>
-          <a:fillRef idx="3">
-            <a:schemeClr val="accent1"/>
-          </a:fillRef>
-          <a:effectRef idx="2">
-            <a:schemeClr val="accent1"/>
-          </a:effectRef>
-          <a:fontRef idx="minor">
-            <a:schemeClr val="lt1"/>
-          </a:fontRef>
-        </p:style>
-        <p:txBody>
-          <a:bodyPr rtlCol="0" anchor="ctr"/>
-          <a:lstStyle/>
-          <a:p>
-            <a:pPr algn="ctr"/>
-          </a:p>
-        </p:txBody>
-      </p:sp>
-      <p:sp>
-        <p:nvSpPr>
-          <p:cNvPr id="95" name="Rectangle 94"/>
-          <p:cNvSpPr/>
-          <p:nvPr/>
-        </p:nvSpPr>
-        <p:spPr>
-          <a:xfrm>
-            <a:off x="15659100" y="2926079"/>
-            <a:ext cx="219456" cy="182880"/>
-          </a:xfrm>
-          <a:prstGeom prst="rect">
-            <a:avLst/>
-          </a:prstGeom>
-          <a:solidFill>
-            <a:srgbClr val="D9D9D9"/>
-          </a:solidFill>
-          <a:ln>
-            <a:noFill/>
-          </a:ln>
-          <a:effectLst/>
-        </p:spPr>
-        <p:style>
-          <a:lnRef idx="1">
-            <a:schemeClr val="accent1"/>
-          </a:lnRef>
-          <a:fillRef idx="3">
-            <a:schemeClr val="accent1"/>
-          </a:fillRef>
-          <a:effectRef idx="2">
-            <a:schemeClr val="accent1"/>
-          </a:effectRef>
-          <a:fontRef idx="minor">
-            <a:schemeClr val="lt1"/>
-          </a:fontRef>
-        </p:style>
-        <p:txBody>
-          <a:bodyPr rtlCol="0" anchor="ctr"/>
-          <a:lstStyle/>
-          <a:p>
-            <a:pPr algn="ctr"/>
-          </a:p>
-        </p:txBody>
-      </p:sp>
-      <p:sp>
-        <p:nvSpPr>
-          <p:cNvPr id="96" name="Rectangle 95"/>
-          <p:cNvSpPr/>
-          <p:nvPr/>
-        </p:nvSpPr>
-        <p:spPr>
-          <a:xfrm>
-            <a:off x="15933420" y="2926079"/>
-            <a:ext cx="219456" cy="182880"/>
-          </a:xfrm>
-          <a:prstGeom prst="rect">
-            <a:avLst/>
-          </a:prstGeom>
-          <a:solidFill>
-            <a:srgbClr val="D9D9D9"/>
-          </a:solidFill>
-          <a:ln>
-            <a:noFill/>
-          </a:ln>
-          <a:effectLst/>
-        </p:spPr>
-        <p:style>
-          <a:lnRef idx="1">
-            <a:schemeClr val="accent1"/>
-          </a:lnRef>
-          <a:fillRef idx="3">
-            <a:schemeClr val="accent1"/>
-          </a:fillRef>
-          <a:effectRef idx="2">
-            <a:schemeClr val="accent1"/>
-          </a:effectRef>
-          <a:fontRef idx="minor">
-            <a:schemeClr val="lt1"/>
-          </a:fontRef>
-        </p:style>
-        <p:txBody>
-          <a:bodyPr rtlCol="0" anchor="ctr"/>
-          <a:lstStyle/>
-          <a:p>
-            <a:pPr algn="ctr"/>
-          </a:p>
-        </p:txBody>
-      </p:sp>
-      <p:sp>
-        <p:nvSpPr>
-          <p:cNvPr id="97" name="Rectangle 96"/>
-          <p:cNvSpPr/>
-          <p:nvPr/>
-        </p:nvSpPr>
-        <p:spPr>
-          <a:xfrm>
-            <a:off x="16207740" y="2926079"/>
-            <a:ext cx="219456" cy="182880"/>
-          </a:xfrm>
-          <a:prstGeom prst="rect">
-            <a:avLst/>
-          </a:prstGeom>
-          <a:solidFill>
-            <a:srgbClr val="D9D9D9"/>
-          </a:solidFill>
-          <a:ln>
-            <a:noFill/>
-          </a:ln>
-          <a:effectLst/>
-        </p:spPr>
-        <p:style>
-          <a:lnRef idx="1">
-            <a:schemeClr val="accent1"/>
-          </a:lnRef>
-          <a:fillRef idx="3">
-            <a:schemeClr val="accent1"/>
-          </a:fillRef>
-          <a:effectRef idx="2">
-            <a:schemeClr val="accent1"/>
-          </a:effectRef>
-          <a:fontRef idx="minor">
-            <a:schemeClr val="lt1"/>
-          </a:fontRef>
-        </p:style>
-        <p:txBody>
-          <a:bodyPr rtlCol="0" anchor="ctr"/>
-          <a:lstStyle/>
-          <a:p>
-            <a:pPr algn="ctr"/>
-          </a:p>
-        </p:txBody>
-      </p:sp>
-      <p:sp>
-        <p:nvSpPr>
-          <p:cNvPr id="98" name="Rectangle 97"/>
-          <p:cNvSpPr/>
-          <p:nvPr/>
-        </p:nvSpPr>
-        <p:spPr>
-          <a:xfrm>
-            <a:off x="16482060" y="2926079"/>
-            <a:ext cx="219456" cy="182880"/>
-          </a:xfrm>
-          <a:prstGeom prst="rect">
-            <a:avLst/>
-          </a:prstGeom>
-          <a:solidFill>
-            <a:srgbClr val="D9D9D9"/>
-          </a:solidFill>
-          <a:ln>
-            <a:noFill/>
-          </a:ln>
-          <a:effectLst/>
-        </p:spPr>
-        <p:style>
-          <a:lnRef idx="1">
-            <a:schemeClr val="accent1"/>
-          </a:lnRef>
-          <a:fillRef idx="3">
-            <a:schemeClr val="accent1"/>
-          </a:fillRef>
-          <a:effectRef idx="2">
-            <a:schemeClr val="accent1"/>
-          </a:effectRef>
-          <a:fontRef idx="minor">
-            <a:schemeClr val="lt1"/>
-          </a:fontRef>
-        </p:style>
-        <p:txBody>
-          <a:bodyPr rtlCol="0" anchor="ctr"/>
-          <a:lstStyle/>
-          <a:p>
-            <a:pPr algn="ctr"/>
-          </a:p>
-        </p:txBody>
-      </p:sp>
-      <p:sp>
-        <p:nvSpPr>
-          <p:cNvPr id="99" name="Rectangle 98"/>
-          <p:cNvSpPr/>
-          <p:nvPr/>
-        </p:nvSpPr>
-        <p:spPr>
-          <a:xfrm>
-            <a:off x="16756380" y="2926079"/>
-            <a:ext cx="219456" cy="182880"/>
-          </a:xfrm>
-          <a:prstGeom prst="rect">
-            <a:avLst/>
-          </a:prstGeom>
-          <a:solidFill>
-            <a:srgbClr val="D9D9D9"/>
-          </a:solidFill>
-          <a:ln>
-            <a:noFill/>
-          </a:ln>
-          <a:effectLst/>
-        </p:spPr>
-        <p:style>
-          <a:lnRef idx="1">
-            <a:schemeClr val="accent1"/>
-          </a:lnRef>
-          <a:fillRef idx="3">
-            <a:schemeClr val="accent1"/>
-          </a:fillRef>
-          <a:effectRef idx="2">
-            <a:schemeClr val="accent1"/>
-          </a:effectRef>
-          <a:fontRef idx="minor">
-            <a:schemeClr val="lt1"/>
-          </a:fontRef>
-        </p:style>
-        <p:txBody>
-          <a:bodyPr rtlCol="0" anchor="ctr"/>
-          <a:lstStyle/>
-          <a:p>
-            <a:pPr algn="ctr"/>
-          </a:p>
-        </p:txBody>
-      </p:sp>
-      <p:sp>
-        <p:nvSpPr>
-          <p:cNvPr id="100" name="Rectangle 99"/>
-          <p:cNvSpPr/>
-          <p:nvPr/>
-        </p:nvSpPr>
-        <p:spPr>
-          <a:xfrm>
-            <a:off x="17030700" y="2926079"/>
-            <a:ext cx="219456" cy="182880"/>
-          </a:xfrm>
-          <a:prstGeom prst="rect">
-            <a:avLst/>
-          </a:prstGeom>
-          <a:solidFill>
-            <a:srgbClr val="D9D9D9"/>
-          </a:solidFill>
-          <a:ln>
-            <a:noFill/>
-          </a:ln>
-          <a:effectLst/>
-        </p:spPr>
-        <p:style>
-          <a:lnRef idx="1">
-            <a:schemeClr val="accent1"/>
-          </a:lnRef>
-          <a:fillRef idx="3">
-            <a:schemeClr val="accent1"/>
-          </a:fillRef>
-          <a:effectRef idx="2">
-            <a:schemeClr val="accent1"/>
-          </a:effectRef>
-          <a:fontRef idx="minor">
-            <a:schemeClr val="lt1"/>
-          </a:fontRef>
-        </p:style>
-        <p:txBody>
-          <a:bodyPr rtlCol="0" anchor="ctr"/>
-          <a:lstStyle/>
-          <a:p>
-            <a:pPr algn="ctr"/>
-          </a:p>
-        </p:txBody>
-      </p:sp>
-      <p:sp>
-        <p:nvSpPr>
-          <p:cNvPr id="101" name="Rectangle 100"/>
-          <p:cNvSpPr/>
-          <p:nvPr/>
-        </p:nvSpPr>
-        <p:spPr>
-          <a:xfrm>
-            <a:off x="14561820" y="3172968"/>
-            <a:ext cx="219456" cy="182880"/>
-          </a:xfrm>
-          <a:prstGeom prst="rect">
-            <a:avLst/>
-          </a:prstGeom>
-          <a:solidFill>
-            <a:srgbClr val="D9D9D9"/>
-          </a:solidFill>
-          <a:ln>
-            <a:noFill/>
-          </a:ln>
-          <a:effectLst/>
-        </p:spPr>
-        <p:style>
-          <a:lnRef idx="1">
-            <a:schemeClr val="accent1"/>
-          </a:lnRef>
-          <a:fillRef idx="3">
-            <a:schemeClr val="accent1"/>
-          </a:fillRef>
-          <a:effectRef idx="2">
-            <a:schemeClr val="accent1"/>
-          </a:effectRef>
-          <a:fontRef idx="minor">
-            <a:schemeClr val="lt1"/>
-          </a:fontRef>
-        </p:style>
-        <p:txBody>
-          <a:bodyPr rtlCol="0" anchor="ctr"/>
-          <a:lstStyle/>
-          <a:p>
-            <a:pPr algn="ctr"/>
-          </a:p>
-        </p:txBody>
-      </p:sp>
-      <p:sp>
-        <p:nvSpPr>
-          <p:cNvPr id="102" name="Rectangle 101"/>
-          <p:cNvSpPr/>
-          <p:nvPr/>
-        </p:nvSpPr>
-        <p:spPr>
-          <a:xfrm>
-            <a:off x="14836140" y="3172968"/>
-            <a:ext cx="219456" cy="182880"/>
-          </a:xfrm>
-          <a:prstGeom prst="rect">
-            <a:avLst/>
-          </a:prstGeom>
-          <a:solidFill>
-            <a:srgbClr val="D9D9D9"/>
-          </a:solidFill>
-          <a:ln>
-            <a:noFill/>
-          </a:ln>
-          <a:effectLst/>
-        </p:spPr>
-        <p:style>
-          <a:lnRef idx="1">
-            <a:schemeClr val="accent1"/>
-          </a:lnRef>
-          <a:fillRef idx="3">
-            <a:schemeClr val="accent1"/>
-          </a:fillRef>
-          <a:effectRef idx="2">
-            <a:schemeClr val="accent1"/>
-          </a:effectRef>
-          <a:fontRef idx="minor">
-            <a:schemeClr val="lt1"/>
-          </a:fontRef>
-        </p:style>
-        <p:txBody>
-          <a:bodyPr rtlCol="0" anchor="ctr"/>
-          <a:lstStyle/>
-          <a:p>
-            <a:pPr algn="ctr"/>
-          </a:p>
-        </p:txBody>
-      </p:sp>
-      <p:sp>
-        <p:nvSpPr>
-          <p:cNvPr id="103" name="Rectangle 102"/>
-          <p:cNvSpPr/>
-          <p:nvPr/>
-        </p:nvSpPr>
-        <p:spPr>
-          <a:xfrm>
-            <a:off x="15110460" y="3172968"/>
-            <a:ext cx="219456" cy="182880"/>
-          </a:xfrm>
-          <a:prstGeom prst="rect">
-            <a:avLst/>
-          </a:prstGeom>
-          <a:solidFill>
-            <a:srgbClr val="D9D9D9"/>
-          </a:solidFill>
-          <a:ln>
-            <a:noFill/>
-          </a:ln>
-          <a:effectLst/>
-        </p:spPr>
-        <p:style>
-          <a:lnRef idx="1">
-            <a:schemeClr val="accent1"/>
-          </a:lnRef>
-          <a:fillRef idx="3">
-            <a:schemeClr val="accent1"/>
-          </a:fillRef>
-          <a:effectRef idx="2">
-            <a:schemeClr val="accent1"/>
-          </a:effectRef>
-          <a:fontRef idx="minor">
-            <a:schemeClr val="lt1"/>
-          </a:fontRef>
-        </p:style>
-        <p:txBody>
-          <a:bodyPr rtlCol="0" anchor="ctr"/>
-          <a:lstStyle/>
-          <a:p>
-            <a:pPr algn="ctr"/>
-          </a:p>
-        </p:txBody>
-      </p:sp>
-      <p:sp>
-        <p:nvSpPr>
-          <p:cNvPr id="104" name="Rectangle 103"/>
-          <p:cNvSpPr/>
-          <p:nvPr/>
-        </p:nvSpPr>
-        <p:spPr>
-          <a:xfrm>
-            <a:off x="15384780" y="3172968"/>
-            <a:ext cx="219456" cy="182880"/>
-          </a:xfrm>
-          <a:prstGeom prst="rect">
-            <a:avLst/>
-          </a:prstGeom>
-          <a:solidFill>
-            <a:srgbClr val="D9D9D9"/>
-          </a:solidFill>
-          <a:ln>
-            <a:noFill/>
-          </a:ln>
-          <a:effectLst/>
-        </p:spPr>
-        <p:style>
-          <a:lnRef idx="1">
-            <a:schemeClr val="accent1"/>
-          </a:lnRef>
-          <a:fillRef idx="3">
-            <a:schemeClr val="accent1"/>
-          </a:fillRef>
-          <a:effectRef idx="2">
-            <a:schemeClr val="accent1"/>
-          </a:effectRef>
-          <a:fontRef idx="minor">
-            <a:schemeClr val="lt1"/>
-          </a:fontRef>
-        </p:style>
-        <p:txBody>
-          <a:bodyPr rtlCol="0" anchor="ctr"/>
-          <a:lstStyle/>
-          <a:p>
-            <a:pPr algn="ctr"/>
-          </a:p>
-        </p:txBody>
-      </p:sp>
-      <p:sp>
-        <p:nvSpPr>
-          <p:cNvPr id="105" name="Rectangle 104"/>
-          <p:cNvSpPr/>
-          <p:nvPr/>
-        </p:nvSpPr>
-        <p:spPr>
-          <a:xfrm>
-            <a:off x="15659100" y="3172968"/>
-            <a:ext cx="219456" cy="182880"/>
-          </a:xfrm>
-          <a:prstGeom prst="rect">
-            <a:avLst/>
-          </a:prstGeom>
-          <a:solidFill>
-            <a:srgbClr val="D9D9D9"/>
-          </a:solidFill>
-          <a:ln>
-            <a:noFill/>
-          </a:ln>
-          <a:effectLst/>
-        </p:spPr>
-        <p:style>
-          <a:lnRef idx="1">
-            <a:schemeClr val="accent1"/>
-          </a:lnRef>
-          <a:fillRef idx="3">
-            <a:schemeClr val="accent1"/>
-          </a:fillRef>
-          <a:effectRef idx="2">
-            <a:schemeClr val="accent1"/>
-          </a:effectRef>
-          <a:fontRef idx="minor">
-            <a:schemeClr val="lt1"/>
-          </a:fontRef>
-        </p:style>
-        <p:txBody>
-          <a:bodyPr rtlCol="0" anchor="ctr"/>
-          <a:lstStyle/>
-          <a:p>
-            <a:pPr algn="ctr"/>
-          </a:p>
-        </p:txBody>
-      </p:sp>
-      <p:sp>
-        <p:nvSpPr>
-          <p:cNvPr id="106" name="Rectangle 105"/>
-          <p:cNvSpPr/>
-          <p:nvPr/>
-        </p:nvSpPr>
-        <p:spPr>
-          <a:xfrm>
-            <a:off x="15933420" y="3172968"/>
-            <a:ext cx="219456" cy="182880"/>
-          </a:xfrm>
-          <a:prstGeom prst="rect">
-            <a:avLst/>
-          </a:prstGeom>
-          <a:solidFill>
-            <a:srgbClr val="D9D9D9"/>
-          </a:solidFill>
-          <a:ln>
-            <a:noFill/>
-          </a:ln>
-          <a:effectLst/>
-        </p:spPr>
-        <p:style>
-          <a:lnRef idx="1">
-            <a:schemeClr val="accent1"/>
-          </a:lnRef>
-          <a:fillRef idx="3">
-            <a:schemeClr val="accent1"/>
-          </a:fillRef>
-          <a:effectRef idx="2">
-            <a:schemeClr val="accent1"/>
-          </a:effectRef>
-          <a:fontRef idx="minor">
-            <a:schemeClr val="lt1"/>
-          </a:fontRef>
-        </p:style>
-        <p:txBody>
-          <a:bodyPr rtlCol="0" anchor="ctr"/>
-          <a:lstStyle/>
-          <a:p>
-            <a:pPr algn="ctr"/>
-          </a:p>
-        </p:txBody>
-      </p:sp>
-      <p:sp>
-        <p:nvSpPr>
-          <p:cNvPr id="107" name="Rectangle 106"/>
-          <p:cNvSpPr/>
-          <p:nvPr/>
-        </p:nvSpPr>
-        <p:spPr>
-          <a:xfrm>
-            <a:off x="16207740" y="3172968"/>
-            <a:ext cx="219456" cy="182880"/>
-          </a:xfrm>
-          <a:prstGeom prst="rect">
-            <a:avLst/>
-          </a:prstGeom>
-          <a:solidFill>
-            <a:srgbClr val="D9D9D9"/>
-          </a:solidFill>
-          <a:ln>
-            <a:noFill/>
-          </a:ln>
-          <a:effectLst/>
-        </p:spPr>
-        <p:style>
-          <a:lnRef idx="1">
-            <a:schemeClr val="accent1"/>
-          </a:lnRef>
-          <a:fillRef idx="3">
-            <a:schemeClr val="accent1"/>
-          </a:fillRef>
-          <a:effectRef idx="2">
-            <a:schemeClr val="accent1"/>
-          </a:effectRef>
-          <a:fontRef idx="minor">
-            <a:schemeClr val="lt1"/>
-          </a:fontRef>
-        </p:style>
-        <p:txBody>
-          <a:bodyPr rtlCol="0" anchor="ctr"/>
-          <a:lstStyle/>
-          <a:p>
-            <a:pPr algn="ctr"/>
-          </a:p>
-        </p:txBody>
-      </p:sp>
-      <p:sp>
-        <p:nvSpPr>
-          <p:cNvPr id="108" name="Rectangle 107"/>
-          <p:cNvSpPr/>
-          <p:nvPr/>
-        </p:nvSpPr>
-        <p:spPr>
-          <a:xfrm>
-            <a:off x="16482060" y="3172968"/>
-            <a:ext cx="219456" cy="182880"/>
-          </a:xfrm>
-          <a:prstGeom prst="rect">
-            <a:avLst/>
-          </a:prstGeom>
-          <a:solidFill>
-            <a:srgbClr val="1428A0"/>
-          </a:solidFill>
-          <a:ln>
-            <a:noFill/>
-          </a:ln>
-          <a:effectLst/>
-        </p:spPr>
-        <p:style>
-          <a:lnRef idx="1">
-            <a:schemeClr val="accent1"/>
-          </a:lnRef>
-          <a:fillRef idx="3">
-            <a:schemeClr val="accent1"/>
-          </a:fillRef>
-          <a:effectRef idx="2">
-            <a:schemeClr val="accent1"/>
-          </a:effectRef>
-          <a:fontRef idx="minor">
-            <a:schemeClr val="lt1"/>
-          </a:fontRef>
-        </p:style>
-        <p:txBody>
-          <a:bodyPr rtlCol="0" anchor="ctr"/>
-          <a:lstStyle/>
-          <a:p>
-            <a:pPr algn="ctr"/>
-          </a:p>
-        </p:txBody>
-      </p:sp>
-      <p:sp>
-        <p:nvSpPr>
-          <p:cNvPr id="109" name="Rectangle 108"/>
-          <p:cNvSpPr/>
-          <p:nvPr/>
-        </p:nvSpPr>
-        <p:spPr>
-          <a:xfrm>
-            <a:off x="16756380" y="3172968"/>
-            <a:ext cx="219456" cy="182880"/>
-          </a:xfrm>
-          <a:prstGeom prst="rect">
-            <a:avLst/>
-          </a:prstGeom>
-          <a:solidFill>
-            <a:srgbClr val="D9D9D9"/>
-          </a:solidFill>
-          <a:ln>
-            <a:noFill/>
-          </a:ln>
-          <a:effectLst/>
-        </p:spPr>
-        <p:style>
-          <a:lnRef idx="1">
-            <a:schemeClr val="accent1"/>
-          </a:lnRef>
-          <a:fillRef idx="3">
-            <a:schemeClr val="accent1"/>
-          </a:fillRef>
-          <a:effectRef idx="2">
-            <a:schemeClr val="accent1"/>
-          </a:effectRef>
-          <a:fontRef idx="minor">
-            <a:schemeClr val="lt1"/>
-          </a:fontRef>
-        </p:style>
-        <p:txBody>
-          <a:bodyPr rtlCol="0" anchor="ctr"/>
-          <a:lstStyle/>
-          <a:p>
-            <a:pPr algn="ctr"/>
-          </a:p>
-        </p:txBody>
-      </p:sp>
-      <p:sp>
-        <p:nvSpPr>
-          <p:cNvPr id="110" name="Rectangle 109"/>
-          <p:cNvSpPr/>
-          <p:nvPr/>
-        </p:nvSpPr>
-        <p:spPr>
-          <a:xfrm>
-            <a:off x="17030700" y="3172968"/>
-            <a:ext cx="219456" cy="182880"/>
-          </a:xfrm>
-          <a:prstGeom prst="rect">
-            <a:avLst/>
-          </a:prstGeom>
-          <a:solidFill>
-            <a:srgbClr val="D9D9D9"/>
-          </a:solidFill>
-          <a:ln>
-            <a:noFill/>
-          </a:ln>
-          <a:effectLst/>
-        </p:spPr>
-        <p:style>
-          <a:lnRef idx="1">
-            <a:schemeClr val="accent1"/>
-          </a:lnRef>
-          <a:fillRef idx="3">
-            <a:schemeClr val="accent1"/>
-          </a:fillRef>
-          <a:effectRef idx="2">
-            <a:schemeClr val="accent1"/>
-          </a:effectRef>
-          <a:fontRef idx="minor">
-            <a:schemeClr val="lt1"/>
-          </a:fontRef>
-        </p:style>
-        <p:txBody>
-          <a:bodyPr rtlCol="0" anchor="ctr"/>
-          <a:lstStyle/>
-          <a:p>
-            <a:pPr algn="ctr"/>
-          </a:p>
-        </p:txBody>
-      </p:sp>
-      <p:sp>
-        <p:nvSpPr>
-          <p:cNvPr id="111" name="Rectangle 110"/>
-          <p:cNvSpPr/>
-          <p:nvPr/>
-        </p:nvSpPr>
-        <p:spPr>
-          <a:xfrm>
-            <a:off x="14561820" y="3419856"/>
-            <a:ext cx="219456" cy="182880"/>
-          </a:xfrm>
-          <a:prstGeom prst="rect">
-            <a:avLst/>
-          </a:prstGeom>
-          <a:solidFill>
-            <a:srgbClr val="D9D9D9"/>
-          </a:solidFill>
-          <a:ln>
-            <a:noFill/>
-          </a:ln>
-          <a:effectLst/>
-        </p:spPr>
-        <p:style>
-          <a:lnRef idx="1">
-            <a:schemeClr val="accent1"/>
-          </a:lnRef>
-          <a:fillRef idx="3">
-            <a:schemeClr val="accent1"/>
-          </a:fillRef>
-          <a:effectRef idx="2">
-            <a:schemeClr val="accent1"/>
-          </a:effectRef>
-          <a:fontRef idx="minor">
-            <a:schemeClr val="lt1"/>
-          </a:fontRef>
-        </p:style>
-        <p:txBody>
-          <a:bodyPr rtlCol="0" anchor="ctr"/>
-          <a:lstStyle/>
-          <a:p>
-            <a:pPr algn="ctr"/>
-          </a:p>
-        </p:txBody>
-      </p:sp>
-      <p:sp>
-        <p:nvSpPr>
-          <p:cNvPr id="112" name="Rectangle 111"/>
-          <p:cNvSpPr/>
-          <p:nvPr/>
-        </p:nvSpPr>
-        <p:spPr>
-          <a:xfrm>
-            <a:off x="14836140" y="3419856"/>
-            <a:ext cx="219456" cy="182880"/>
-          </a:xfrm>
-          <a:prstGeom prst="rect">
-            <a:avLst/>
-          </a:prstGeom>
-          <a:solidFill>
-            <a:srgbClr val="1428A0"/>
-          </a:solidFill>
-          <a:ln>
-            <a:noFill/>
-          </a:ln>
-          <a:effectLst/>
-        </p:spPr>
-        <p:style>
-          <a:lnRef idx="1">
-            <a:schemeClr val="accent1"/>
-          </a:lnRef>
-          <a:fillRef idx="3">
-            <a:schemeClr val="accent1"/>
-          </a:fillRef>
-          <a:effectRef idx="2">
-            <a:schemeClr val="accent1"/>
-          </a:effectRef>
-          <a:fontRef idx="minor">
-            <a:schemeClr val="lt1"/>
-          </a:fontRef>
-        </p:style>
-        <p:txBody>
-          <a:bodyPr rtlCol="0" anchor="ctr"/>
-          <a:lstStyle/>
-          <a:p>
-            <a:pPr algn="ctr"/>
-          </a:p>
-        </p:txBody>
-      </p:sp>
-      <p:sp>
-        <p:nvSpPr>
-          <p:cNvPr id="113" name="Rectangle 112"/>
-          <p:cNvSpPr/>
-          <p:nvPr/>
-        </p:nvSpPr>
-        <p:spPr>
-          <a:xfrm>
-            <a:off x="15110460" y="3419856"/>
-            <a:ext cx="219456" cy="182880"/>
-          </a:xfrm>
-          <a:prstGeom prst="rect">
-            <a:avLst/>
-          </a:prstGeom>
-          <a:solidFill>
-            <a:srgbClr val="D9D9D9"/>
-          </a:solidFill>
-          <a:ln>
-            <a:noFill/>
-          </a:ln>
-          <a:effectLst/>
-        </p:spPr>
-        <p:style>
-          <a:lnRef idx="1">
-            <a:schemeClr val="accent1"/>
-          </a:lnRef>
-          <a:fillRef idx="3">
-            <a:schemeClr val="accent1"/>
-          </a:fillRef>
-          <a:effectRef idx="2">
-            <a:schemeClr val="accent1"/>
-          </a:effectRef>
-          <a:fontRef idx="minor">
-            <a:schemeClr val="lt1"/>
-          </a:fontRef>
-        </p:style>
-        <p:txBody>
-          <a:bodyPr rtlCol="0" anchor="ctr"/>
-          <a:lstStyle/>
-          <a:p>
-            <a:pPr algn="ctr"/>
-          </a:p>
-        </p:txBody>
-      </p:sp>
-      <p:sp>
-        <p:nvSpPr>
-          <p:cNvPr id="114" name="Rectangle 113"/>
-          <p:cNvSpPr/>
-          <p:nvPr/>
-        </p:nvSpPr>
-        <p:spPr>
-          <a:xfrm>
-            <a:off x="15384780" y="3419856"/>
-            <a:ext cx="219456" cy="182880"/>
-          </a:xfrm>
-          <a:prstGeom prst="rect">
-            <a:avLst/>
-          </a:prstGeom>
-          <a:solidFill>
-            <a:srgbClr val="D9D9D9"/>
-          </a:solidFill>
-          <a:ln>
-            <a:noFill/>
-          </a:ln>
-          <a:effectLst/>
-        </p:spPr>
-        <p:style>
-          <a:lnRef idx="1">
-            <a:schemeClr val="accent1"/>
-          </a:lnRef>
-          <a:fillRef idx="3">
-            <a:schemeClr val="accent1"/>
-          </a:fillRef>
-          <a:effectRef idx="2">
-            <a:schemeClr val="accent1"/>
-          </a:effectRef>
-          <a:fontRef idx="minor">
-            <a:schemeClr val="lt1"/>
-          </a:fontRef>
-        </p:style>
-        <p:txBody>
-          <a:bodyPr rtlCol="0" anchor="ctr"/>
-          <a:lstStyle/>
-          <a:p>
-            <a:pPr algn="ctr"/>
-          </a:p>
-        </p:txBody>
-      </p:sp>
-      <p:sp>
-        <p:nvSpPr>
-          <p:cNvPr id="115" name="Rectangle 114"/>
-          <p:cNvSpPr/>
-          <p:nvPr/>
-        </p:nvSpPr>
-        <p:spPr>
-          <a:xfrm>
-            <a:off x="15659100" y="3419856"/>
-            <a:ext cx="219456" cy="182880"/>
-          </a:xfrm>
-          <a:prstGeom prst="rect">
-            <a:avLst/>
-          </a:prstGeom>
-          <a:solidFill>
-            <a:srgbClr val="D9D9D9"/>
-          </a:solidFill>
-          <a:ln>
-            <a:noFill/>
-          </a:ln>
-          <a:effectLst/>
-        </p:spPr>
-        <p:style>
-          <a:lnRef idx="1">
-            <a:schemeClr val="accent1"/>
-          </a:lnRef>
-          <a:fillRef idx="3">
-            <a:schemeClr val="accent1"/>
-          </a:fillRef>
-          <a:effectRef idx="2">
-            <a:schemeClr val="accent1"/>
-          </a:effectRef>
-          <a:fontRef idx="minor">
-            <a:schemeClr val="lt1"/>
-          </a:fontRef>
-        </p:style>
-        <p:txBody>
-          <a:bodyPr rtlCol="0" anchor="ctr"/>
-          <a:lstStyle/>
-          <a:p>
-            <a:pPr algn="ctr"/>
-          </a:p>
-        </p:txBody>
-      </p:sp>
-      <p:sp>
-        <p:nvSpPr>
-          <p:cNvPr id="116" name="Rectangle 115"/>
-          <p:cNvSpPr/>
-          <p:nvPr/>
-        </p:nvSpPr>
-        <p:spPr>
-          <a:xfrm>
-            <a:off x="15933420" y="3419856"/>
-            <a:ext cx="219456" cy="182880"/>
-          </a:xfrm>
-          <a:prstGeom prst="rect">
-            <a:avLst/>
-          </a:prstGeom>
-          <a:solidFill>
-            <a:srgbClr val="D9D9D9"/>
-          </a:solidFill>
-          <a:ln>
-            <a:noFill/>
-          </a:ln>
-          <a:effectLst/>
-        </p:spPr>
-        <p:style>
-          <a:lnRef idx="1">
-            <a:schemeClr val="accent1"/>
-          </a:lnRef>
-          <a:fillRef idx="3">
-            <a:schemeClr val="accent1"/>
-          </a:fillRef>
-          <a:effectRef idx="2">
-            <a:schemeClr val="accent1"/>
-          </a:effectRef>
-          <a:fontRef idx="minor">
-            <a:schemeClr val="lt1"/>
-          </a:fontRef>
-        </p:style>
-        <p:txBody>
-          <a:bodyPr rtlCol="0" anchor="ctr"/>
-          <a:lstStyle/>
-          <a:p>
-            <a:pPr algn="ctr"/>
-          </a:p>
-        </p:txBody>
-      </p:sp>
-      <p:sp>
-        <p:nvSpPr>
-          <p:cNvPr id="117" name="Rectangle 116"/>
-          <p:cNvSpPr/>
-          <p:nvPr/>
-        </p:nvSpPr>
-        <p:spPr>
-          <a:xfrm>
-            <a:off x="16207740" y="3419856"/>
-            <a:ext cx="219456" cy="182880"/>
-          </a:xfrm>
-          <a:prstGeom prst="rect">
-            <a:avLst/>
-          </a:prstGeom>
-          <a:solidFill>
-            <a:srgbClr val="D9D9D9"/>
-          </a:solidFill>
-          <a:ln>
-            <a:noFill/>
-          </a:ln>
-          <a:effectLst/>
-        </p:spPr>
-        <p:style>
-          <a:lnRef idx="1">
-            <a:schemeClr val="accent1"/>
-          </a:lnRef>
-          <a:fillRef idx="3">
-            <a:schemeClr val="accent1"/>
-          </a:fillRef>
-          <a:effectRef idx="2">
-            <a:schemeClr val="accent1"/>
-          </a:effectRef>
-          <a:fontRef idx="minor">
-            <a:schemeClr val="lt1"/>
-          </a:fontRef>
-        </p:style>
-        <p:txBody>
-          <a:bodyPr rtlCol="0" anchor="ctr"/>
-          <a:lstStyle/>
-          <a:p>
-            <a:pPr algn="ctr"/>
-          </a:p>
-        </p:txBody>
-      </p:sp>
-      <p:sp>
-        <p:nvSpPr>
-          <p:cNvPr id="118" name="Rectangle 117"/>
-          <p:cNvSpPr/>
-          <p:nvPr/>
-        </p:nvSpPr>
-        <p:spPr>
-          <a:xfrm>
-            <a:off x="16482060" y="3419856"/>
-            <a:ext cx="219456" cy="182880"/>
-          </a:xfrm>
-          <a:prstGeom prst="rect">
-            <a:avLst/>
-          </a:prstGeom>
-          <a:solidFill>
-            <a:srgbClr val="D9D9D9"/>
-          </a:solidFill>
-          <a:ln>
-            <a:noFill/>
-          </a:ln>
-          <a:effectLst/>
-        </p:spPr>
-        <p:style>
-          <a:lnRef idx="1">
-            <a:schemeClr val="accent1"/>
-          </a:lnRef>
-          <a:fillRef idx="3">
-            <a:schemeClr val="accent1"/>
-          </a:fillRef>
-          <a:effectRef idx="2">
-            <a:schemeClr val="accent1"/>
-          </a:effectRef>
-          <a:fontRef idx="minor">
-            <a:schemeClr val="lt1"/>
-          </a:fontRef>
-        </p:style>
-        <p:txBody>
-          <a:bodyPr rtlCol="0" anchor="ctr"/>
-          <a:lstStyle/>
-          <a:p>
-            <a:pPr algn="ctr"/>
-          </a:p>
-        </p:txBody>
-      </p:sp>
-      <p:sp>
-        <p:nvSpPr>
-          <p:cNvPr id="119" name="Rectangle 118"/>
-          <p:cNvSpPr/>
-          <p:nvPr/>
-        </p:nvSpPr>
-        <p:spPr>
-          <a:xfrm>
-            <a:off x="16756380" y="3419856"/>
-            <a:ext cx="219456" cy="182880"/>
-          </a:xfrm>
-          <a:prstGeom prst="rect">
-            <a:avLst/>
-          </a:prstGeom>
-          <a:solidFill>
-            <a:srgbClr val="D9D9D9"/>
-          </a:solidFill>
-          <a:ln>
-            <a:noFill/>
-          </a:ln>
-          <a:effectLst/>
-        </p:spPr>
-        <p:style>
-          <a:lnRef idx="1">
-            <a:schemeClr val="accent1"/>
-          </a:lnRef>
-          <a:fillRef idx="3">
-            <a:schemeClr val="accent1"/>
-          </a:fillRef>
-          <a:effectRef idx="2">
-            <a:schemeClr val="accent1"/>
-          </a:effectRef>
-          <a:fontRef idx="minor">
-            <a:schemeClr val="lt1"/>
-          </a:fontRef>
-        </p:style>
-        <p:txBody>
-          <a:bodyPr rtlCol="0" anchor="ctr"/>
-          <a:lstStyle/>
-          <a:p>
-            <a:pPr algn="ctr"/>
-          </a:p>
-        </p:txBody>
-      </p:sp>
-      <p:sp>
-        <p:nvSpPr>
-          <p:cNvPr id="120" name="Rectangle 119"/>
-          <p:cNvSpPr/>
-          <p:nvPr/>
-        </p:nvSpPr>
-        <p:spPr>
-          <a:xfrm>
-            <a:off x="17030700" y="3419856"/>
-            <a:ext cx="219456" cy="182880"/>
-          </a:xfrm>
-          <a:prstGeom prst="rect">
-            <a:avLst/>
-          </a:prstGeom>
-          <a:solidFill>
-            <a:srgbClr val="D9D9D9"/>
-          </a:solidFill>
-          <a:ln>
-            <a:noFill/>
-          </a:ln>
-          <a:effectLst/>
-        </p:spPr>
-        <p:style>
-          <a:lnRef idx="1">
-            <a:schemeClr val="accent1"/>
-          </a:lnRef>
-          <a:fillRef idx="3">
-            <a:schemeClr val="accent1"/>
-          </a:fillRef>
-          <a:effectRef idx="2">
-            <a:schemeClr val="accent1"/>
-          </a:effectRef>
-          <a:fontRef idx="minor">
-            <a:schemeClr val="lt1"/>
-          </a:fontRef>
-        </p:style>
-        <p:txBody>
-          <a:bodyPr rtlCol="0" anchor="ctr"/>
-          <a:lstStyle/>
-          <a:p>
-            <a:pPr algn="ctr"/>
-          </a:p>
-        </p:txBody>
-      </p:sp>
-      <p:sp>
-        <p:nvSpPr>
-          <p:cNvPr id="121" name="TextBox 120"/>
-          <p:cNvSpPr txBox="1"/>
-          <p:nvPr/>
-        </p:nvSpPr>
-        <p:spPr>
-          <a:xfrm>
-            <a:off x="14543532" y="3657600"/>
-            <a:ext cx="2839212" cy="274320"/>
-          </a:xfrm>
-          <a:prstGeom prst="rect">
-            <a:avLst/>
-          </a:prstGeom>
-          <a:noFill/>
-        </p:spPr>
-        <p:txBody>
-          <a:bodyPr wrap="square" anchor="ctr" lIns="0" rIns="0" tIns="0" bIns="0">
-            <a:spAutoFit/>
-          </a:bodyPr>
-          <a:lstStyle/>
-          <a:p>
-            <a:pPr algn="l">
-              <a:lnSpc>
-                <a:spcPct val="110000"/>
-              </a:lnSpc>
-            </a:pPr>
-            <a:r>
-              <a:rPr sz="1600" b="0">
-                <a:solidFill>
-                  <a:srgbClr val="1428A0"/>
-                </a:solidFill>
-                <a:latin typeface="Arial"/>
-                <a:ea typeface="Arial"/>
-              </a:rPr>
-              <a:t>■</a:t>
-            </a:r>
-            <a:r>
-              <a:rPr sz="1600" b="0">
-                <a:solidFill>
-                  <a:srgbClr val="555555"/>
-                </a:solidFill>
-                <a:latin typeface="Arial"/>
-                <a:ea typeface="Arial"/>
-              </a:rPr>
-              <a:t> 활성  </a:t>
-            </a:r>
-            <a:r>
-              <a:rPr sz="1600" b="0">
-                <a:solidFill>
-                  <a:srgbClr val="D9D9D9"/>
-                </a:solidFill>
-                <a:latin typeface="Arial"/>
-                <a:ea typeface="Arial"/>
-              </a:rPr>
-              <a:t>■</a:t>
-            </a:r>
-            <a:r>
-              <a:rPr sz="1600" b="0">
-                <a:solidFill>
-                  <a:srgbClr val="555555"/>
-                </a:solidFill>
-                <a:latin typeface="Arial"/>
-                <a:ea typeface="Arial"/>
-              </a:rPr>
-              <a:t> 휴면 (대부분)</a:t>
-            </a:r>
-          </a:p>
-        </p:txBody>
-      </p:sp>
-      <p:sp>
-        <p:nvSpPr>
-          <p:cNvPr id="122" name="TextBox 121"/>
-          <p:cNvSpPr txBox="1"/>
-          <p:nvPr/>
-        </p:nvSpPr>
-        <p:spPr>
-          <a:xfrm>
-            <a:off x="14543532" y="4005072"/>
-            <a:ext cx="1243584" cy="292608"/>
-          </a:xfrm>
-          <a:prstGeom prst="rect">
-            <a:avLst/>
-          </a:prstGeom>
-          <a:noFill/>
-        </p:spPr>
-        <p:txBody>
-          <a:bodyPr wrap="square" anchor="ctr" lIns="0" rIns="0" tIns="0" bIns="0">
-            <a:spAutoFit/>
-          </a:bodyPr>
-          <a:lstStyle/>
-          <a:p>
-            <a:pPr algn="l">
-              <a:lnSpc>
-                <a:spcPct val="110000"/>
-              </a:lnSpc>
-            </a:pPr>
-            <a:r>
-              <a:rPr sz="1600" b="1">
-                <a:solidFill>
-                  <a:srgbClr val="1428A0"/>
-                </a:solidFill>
-                <a:latin typeface="Arial"/>
-                <a:ea typeface="Arial"/>
-              </a:rPr>
-              <a:t>VM 디스크</a:t>
-            </a:r>
-          </a:p>
-        </p:txBody>
-      </p:sp>
-      <p:sp>
-        <p:nvSpPr>
-          <p:cNvPr id="123" name="Rectangle 122"/>
-          <p:cNvSpPr/>
-          <p:nvPr/>
-        </p:nvSpPr>
-        <p:spPr>
-          <a:xfrm>
-            <a:off x="15787116" y="4050791"/>
-            <a:ext cx="809244" cy="201168"/>
-          </a:xfrm>
-          <a:prstGeom prst="rect">
-            <a:avLst/>
-          </a:prstGeom>
-          <a:solidFill>
-            <a:srgbClr val="1428A0"/>
-          </a:solidFill>
-          <a:ln>
-            <a:noFill/>
-          </a:ln>
-          <a:effectLst/>
-        </p:spPr>
-        <p:style>
-          <a:lnRef idx="1">
-            <a:schemeClr val="accent1"/>
-          </a:lnRef>
-          <a:fillRef idx="3">
-            <a:schemeClr val="accent1"/>
-          </a:fillRef>
-          <a:effectRef idx="2">
-            <a:schemeClr val="accent1"/>
-          </a:effectRef>
-          <a:fontRef idx="minor">
-            <a:schemeClr val="lt1"/>
-          </a:fontRef>
-        </p:style>
-        <p:txBody>
-          <a:bodyPr rtlCol="0" anchor="ctr"/>
-          <a:lstStyle/>
-          <a:p>
-            <a:pPr algn="ctr"/>
-          </a:p>
-        </p:txBody>
-      </p:sp>
-      <p:sp>
-        <p:nvSpPr>
-          <p:cNvPr id="124" name="TextBox 123"/>
-          <p:cNvSpPr txBox="1"/>
-          <p:nvPr/>
-        </p:nvSpPr>
-        <p:spPr>
-          <a:xfrm>
-            <a:off x="16651224" y="4005072"/>
-            <a:ext cx="868680" cy="292608"/>
-          </a:xfrm>
-          <a:prstGeom prst="rect">
-            <a:avLst/>
-          </a:prstGeom>
-          <a:noFill/>
-        </p:spPr>
-        <p:txBody>
-          <a:bodyPr wrap="square" anchor="ctr" lIns="0" rIns="0" tIns="0" bIns="0">
-            <a:spAutoFit/>
-          </a:bodyPr>
-          <a:lstStyle/>
-          <a:p>
-            <a:pPr algn="l">
-              <a:lnSpc>
-                <a:spcPct val="110000"/>
-              </a:lnSpc>
-            </a:pPr>
-            <a:r>
-              <a:rPr sz="1600" b="1">
-                <a:solidFill>
-                  <a:srgbClr val="1428A0"/>
-                </a:solidFill>
-                <a:latin typeface="Arial"/>
-                <a:ea typeface="Arial"/>
-              </a:rPr>
-              <a:t>100GB</a:t>
-            </a:r>
-          </a:p>
-        </p:txBody>
-      </p:sp>
-      <p:sp>
-        <p:nvSpPr>
-          <p:cNvPr id="125" name="TextBox 124"/>
-          <p:cNvSpPr txBox="1"/>
-          <p:nvPr/>
-        </p:nvSpPr>
-        <p:spPr>
-          <a:xfrm>
-            <a:off x="14543532" y="4352544"/>
-            <a:ext cx="1243584" cy="292608"/>
-          </a:xfrm>
-          <a:prstGeom prst="rect">
-            <a:avLst/>
-          </a:prstGeom>
-          <a:noFill/>
-        </p:spPr>
-        <p:txBody>
-          <a:bodyPr wrap="square" anchor="ctr" lIns="0" rIns="0" tIns="0" bIns="0">
-            <a:spAutoFit/>
-          </a:bodyPr>
-          <a:lstStyle/>
-          <a:p>
-            <a:pPr algn="l">
-              <a:lnSpc>
-                <a:spcPct val="110000"/>
-              </a:lnSpc>
-            </a:pPr>
-            <a:r>
-              <a:rPr sz="1600" b="0">
-                <a:solidFill>
-                  <a:srgbClr val="555555"/>
-                </a:solidFill>
-                <a:latin typeface="Arial"/>
-                <a:ea typeface="Arial"/>
-              </a:rPr>
-              <a:t>VM 메모리</a:t>
-            </a:r>
-          </a:p>
-        </p:txBody>
-      </p:sp>
-      <p:sp>
-        <p:nvSpPr>
-          <p:cNvPr id="126" name="Rectangle 125"/>
-          <p:cNvSpPr/>
-          <p:nvPr/>
-        </p:nvSpPr>
-        <p:spPr>
-          <a:xfrm>
-            <a:off x="15787116" y="4398264"/>
-            <a:ext cx="73152" cy="201168"/>
-          </a:xfrm>
-          <a:prstGeom prst="rect">
-            <a:avLst/>
-          </a:prstGeom>
-          <a:solidFill>
-            <a:srgbClr val="8A8A8A"/>
-          </a:solidFill>
-          <a:ln>
-            <a:noFill/>
-          </a:ln>
-          <a:effectLst/>
-        </p:spPr>
-        <p:style>
-          <a:lnRef idx="1">
-            <a:schemeClr val="accent1"/>
-          </a:lnRef>
-          <a:fillRef idx="3">
-            <a:schemeClr val="accent1"/>
-          </a:fillRef>
-          <a:effectRef idx="2">
-            <a:schemeClr val="accent1"/>
-          </a:effectRef>
-          <a:fontRef idx="minor">
-            <a:schemeClr val="lt1"/>
-          </a:fontRef>
-        </p:style>
-        <p:txBody>
-          <a:bodyPr rtlCol="0" anchor="ctr"/>
-          <a:lstStyle/>
-          <a:p>
-            <a:pPr algn="ctr"/>
-          </a:p>
-        </p:txBody>
-      </p:sp>
-      <p:sp>
-        <p:nvSpPr>
-          <p:cNvPr id="127" name="TextBox 126"/>
-          <p:cNvSpPr txBox="1"/>
-          <p:nvPr/>
-        </p:nvSpPr>
-        <p:spPr>
-          <a:xfrm>
-            <a:off x="15915132" y="4352544"/>
-            <a:ext cx="868680" cy="292608"/>
-          </a:xfrm>
-          <a:prstGeom prst="rect">
-            <a:avLst/>
-          </a:prstGeom>
-          <a:noFill/>
-        </p:spPr>
-        <p:txBody>
-          <a:bodyPr wrap="square" anchor="ctr" lIns="0" rIns="0" tIns="0" bIns="0">
-            <a:spAutoFit/>
-          </a:bodyPr>
-          <a:lstStyle/>
-          <a:p>
-            <a:pPr algn="l">
-              <a:lnSpc>
-                <a:spcPct val="110000"/>
-              </a:lnSpc>
-            </a:pPr>
-            <a:r>
-              <a:rPr sz="1600" b="1">
-                <a:solidFill>
-                  <a:srgbClr val="555555"/>
-                </a:solidFill>
-                <a:latin typeface="Arial"/>
-                <a:ea typeface="Arial"/>
-              </a:rPr>
-              <a:t>7.75GB</a:t>
-            </a:r>
-          </a:p>
-        </p:txBody>
-      </p:sp>
-      <p:sp>
-        <p:nvSpPr>
-          <p:cNvPr id="128" name="TextBox 127"/>
-          <p:cNvSpPr txBox="1"/>
-          <p:nvPr/>
-        </p:nvSpPr>
-        <p:spPr>
-          <a:xfrm>
-            <a:off x="722376" y="5321808"/>
-            <a:ext cx="3383280" cy="274320"/>
-          </a:xfrm>
-          <a:prstGeom prst="rect">
-            <a:avLst/>
-          </a:prstGeom>
-          <a:noFill/>
-        </p:spPr>
-        <p:txBody>
-          <a:bodyPr wrap="square" anchor="ctr" lIns="0" rIns="0" tIns="0" bIns="0">
-            <a:spAutoFit/>
-          </a:bodyPr>
-          <a:lstStyle/>
-          <a:p>
-            <a:pPr algn="l">
-              <a:lnSpc>
-                <a:spcPct val="110000"/>
-              </a:lnSpc>
-            </a:pPr>
-            <a:r>
-              <a:rPr sz="1800" b="1">
-                <a:solidFill>
-                  <a:srgbClr val="1A1A1A"/>
-                </a:solidFill>
-                <a:latin typeface="Arial"/>
-                <a:ea typeface="Arial"/>
-              </a:rPr>
-              <a:t>eSSD 수요 비중</a:t>
-            </a:r>
-          </a:p>
-        </p:txBody>
-      </p:sp>
-      <p:sp>
-        <p:nvSpPr>
-          <p:cNvPr id="129" name="TextBox 128"/>
-          <p:cNvSpPr txBox="1"/>
-          <p:nvPr/>
-        </p:nvSpPr>
-        <p:spPr>
-          <a:xfrm>
-            <a:off x="722376" y="5650992"/>
-            <a:ext cx="2651760" cy="274320"/>
-          </a:xfrm>
-          <a:prstGeom prst="rect">
-            <a:avLst/>
-          </a:prstGeom>
-          <a:noFill/>
-        </p:spPr>
-        <p:txBody>
-          <a:bodyPr wrap="square" anchor="ctr" lIns="0" rIns="0" tIns="0" bIns="0">
-            <a:spAutoFit/>
-          </a:bodyPr>
-          <a:lstStyle/>
-          <a:p>
-            <a:pPr algn="l">
-              <a:lnSpc>
-                <a:spcPct val="110000"/>
-              </a:lnSpc>
-            </a:pPr>
-            <a:r>
-              <a:rPr sz="1500" b="0">
-                <a:solidFill>
-                  <a:srgbClr val="555555"/>
-                </a:solidFill>
-                <a:latin typeface="Arial"/>
-                <a:ea typeface="Arial"/>
-              </a:rPr>
-              <a:t>출처: McKinsey 2024-12</a:t>
-            </a:r>
-          </a:p>
-        </p:txBody>
-      </p:sp>
-      <p:sp>
-        <p:nvSpPr>
-          <p:cNvPr id="130" name="TextBox 129"/>
-          <p:cNvSpPr txBox="1"/>
-          <p:nvPr/>
-        </p:nvSpPr>
-        <p:spPr>
-          <a:xfrm>
-            <a:off x="722376" y="5321808"/>
-            <a:ext cx="3273552" cy="274320"/>
-          </a:xfrm>
-          <a:prstGeom prst="rect">
-            <a:avLst/>
-          </a:prstGeom>
-          <a:noFill/>
-        </p:spPr>
-        <p:txBody>
-          <a:bodyPr wrap="square" anchor="ctr" lIns="0" rIns="0" tIns="0" bIns="0">
-            <a:spAutoFit/>
-          </a:bodyPr>
-          <a:lstStyle/>
-          <a:p>
-            <a:pPr algn="r">
-              <a:lnSpc>
-                <a:spcPct val="110000"/>
-              </a:lnSpc>
-            </a:pPr>
-            <a:r>
-              <a:rPr sz="1600" b="0">
-                <a:solidFill>
-                  <a:srgbClr val="555555"/>
-                </a:solidFill>
-                <a:latin typeface="Arial"/>
-                <a:ea typeface="Arial"/>
-              </a:rPr>
-              <a:t>2026 올해</a:t>
-            </a:r>
-          </a:p>
-        </p:txBody>
-      </p:sp>
-      <p:sp>
-        <p:nvSpPr>
-          <p:cNvPr id="131" name="Rectangle 130"/>
-          <p:cNvSpPr/>
-          <p:nvPr/>
-        </p:nvSpPr>
-        <p:spPr>
-          <a:xfrm>
-            <a:off x="4306824" y="5321808"/>
-            <a:ext cx="10337292" cy="274320"/>
-          </a:xfrm>
-          <a:prstGeom prst="rect">
-            <a:avLst/>
-          </a:prstGeom>
-          <a:solidFill>
-            <a:srgbClr val="8A8A8A"/>
-          </a:solidFill>
-          <a:ln w="12700">
-            <a:solidFill>
-              <a:srgbClr val="FFFFFF"/>
-            </a:solidFill>
-          </a:ln>
-          <a:effectLst/>
-        </p:spPr>
-        <p:style>
-          <a:lnRef idx="1">
-            <a:schemeClr val="accent1"/>
-          </a:lnRef>
-          <a:fillRef idx="3">
-            <a:schemeClr val="accent1"/>
-          </a:fillRef>
-          <a:effectRef idx="2">
-            <a:schemeClr val="accent1"/>
-          </a:effectRef>
-          <a:fontRef idx="minor">
-            <a:schemeClr val="lt1"/>
-          </a:fontRef>
-        </p:style>
-        <p:txBody>
-          <a:bodyPr rtlCol="0" anchor="ctr"/>
-          <a:lstStyle/>
-          <a:p>
-            <a:pPr algn="ctr"/>
-          </a:p>
-        </p:txBody>
-      </p:sp>
-      <p:sp>
-        <p:nvSpPr>
-          <p:cNvPr id="132" name="TextBox 131"/>
-          <p:cNvSpPr txBox="1"/>
-          <p:nvPr/>
-        </p:nvSpPr>
-        <p:spPr>
-          <a:xfrm>
-            <a:off x="4306824" y="5321808"/>
-            <a:ext cx="10337292" cy="274320"/>
-          </a:xfrm>
-          <a:prstGeom prst="rect">
-            <a:avLst/>
-          </a:prstGeom>
-          <a:noFill/>
-        </p:spPr>
-        <p:txBody>
-          <a:bodyPr wrap="square" anchor="ctr" lIns="0" rIns="0" tIns="0" bIns="0">
-            <a:spAutoFit/>
-          </a:bodyPr>
-          <a:lstStyle/>
-          <a:p>
-            <a:pPr algn="ctr">
-              <a:lnSpc>
-                <a:spcPct val="110000"/>
-              </a:lnSpc>
-            </a:pPr>
-            <a:r>
-              <a:rPr sz="1600" b="1">
-                <a:solidFill>
-                  <a:srgbClr val="FFFFFF"/>
-                </a:solidFill>
-                <a:latin typeface="Arial"/>
-                <a:ea typeface="Arial"/>
-              </a:rPr>
-              <a:t>범용 · 엔터프라이즈 85%</a:t>
-            </a:r>
-          </a:p>
-        </p:txBody>
-      </p:sp>
-      <p:sp>
-        <p:nvSpPr>
-          <p:cNvPr id="133" name="Rectangle 132"/>
-          <p:cNvSpPr/>
-          <p:nvPr/>
-        </p:nvSpPr>
-        <p:spPr>
-          <a:xfrm>
-            <a:off x="14644116" y="5321808"/>
-            <a:ext cx="729691" cy="274320"/>
-          </a:xfrm>
-          <a:prstGeom prst="rect">
-            <a:avLst/>
-          </a:prstGeom>
-          <a:solidFill>
-            <a:srgbClr val="AAB8E8"/>
-          </a:solidFill>
-          <a:ln w="12700">
-            <a:solidFill>
-              <a:srgbClr val="FFFFFF"/>
-            </a:solidFill>
-          </a:ln>
-          <a:effectLst/>
-        </p:spPr>
-        <p:style>
-          <a:lnRef idx="1">
-            <a:schemeClr val="accent1"/>
-          </a:lnRef>
-          <a:fillRef idx="3">
-            <a:schemeClr val="accent1"/>
-          </a:fillRef>
-          <a:effectRef idx="2">
-            <a:schemeClr val="accent1"/>
-          </a:effectRef>
-          <a:fontRef idx="minor">
-            <a:schemeClr val="lt1"/>
-          </a:fontRef>
-        </p:style>
-        <p:txBody>
-          <a:bodyPr rtlCol="0" anchor="ctr"/>
-          <a:lstStyle/>
-          <a:p>
-            <a:pPr algn="ctr"/>
-          </a:p>
-        </p:txBody>
-      </p:sp>
-      <p:sp>
-        <p:nvSpPr>
-          <p:cNvPr id="134" name="TextBox 133"/>
-          <p:cNvSpPr txBox="1"/>
-          <p:nvPr/>
-        </p:nvSpPr>
-        <p:spPr>
-          <a:xfrm>
-            <a:off x="14644116" y="5321808"/>
-            <a:ext cx="729691" cy="274320"/>
-          </a:xfrm>
-          <a:prstGeom prst="rect">
-            <a:avLst/>
-          </a:prstGeom>
-          <a:noFill/>
-        </p:spPr>
-        <p:txBody>
-          <a:bodyPr wrap="square" anchor="ctr" lIns="0" rIns="0" tIns="0" bIns="0">
-            <a:spAutoFit/>
-          </a:bodyPr>
-          <a:lstStyle/>
-          <a:p>
-            <a:pPr algn="ctr">
-              <a:lnSpc>
-                <a:spcPct val="110000"/>
-              </a:lnSpc>
-            </a:pPr>
-            <a:r>
-              <a:rPr sz="1600" b="1">
-                <a:solidFill>
-                  <a:srgbClr val="1A1A1A"/>
-                </a:solidFill>
-                <a:latin typeface="Arial"/>
-                <a:ea typeface="Arial"/>
-              </a:rPr>
-              <a:t>6%</a:t>
-            </a:r>
-          </a:p>
-        </p:txBody>
-      </p:sp>
-      <p:sp>
-        <p:nvSpPr>
-          <p:cNvPr id="135" name="Rectangle 134"/>
-          <p:cNvSpPr/>
-          <p:nvPr/>
-        </p:nvSpPr>
-        <p:spPr>
-          <a:xfrm>
-            <a:off x="15373807" y="5321808"/>
-            <a:ext cx="1094536" cy="274320"/>
-          </a:xfrm>
-          <a:prstGeom prst="rect">
-            <a:avLst/>
-          </a:prstGeom>
-          <a:solidFill>
-            <a:srgbClr val="1428A0"/>
-          </a:solidFill>
-          <a:ln w="12700">
-            <a:solidFill>
-              <a:srgbClr val="FFFFFF"/>
-            </a:solidFill>
-          </a:ln>
-          <a:effectLst/>
-        </p:spPr>
-        <p:style>
-          <a:lnRef idx="1">
-            <a:schemeClr val="accent1"/>
-          </a:lnRef>
-          <a:fillRef idx="3">
-            <a:schemeClr val="accent1"/>
-          </a:fillRef>
-          <a:effectRef idx="2">
-            <a:schemeClr val="accent1"/>
-          </a:effectRef>
-          <a:fontRef idx="minor">
-            <a:schemeClr val="lt1"/>
-          </a:fontRef>
-        </p:style>
-        <p:txBody>
-          <a:bodyPr rtlCol="0" anchor="ctr"/>
-          <a:lstStyle/>
-          <a:p>
-            <a:pPr algn="ctr"/>
-          </a:p>
-        </p:txBody>
-      </p:sp>
-      <p:sp>
-        <p:nvSpPr>
-          <p:cNvPr id="136" name="TextBox 135"/>
-          <p:cNvSpPr txBox="1"/>
-          <p:nvPr/>
-        </p:nvSpPr>
-        <p:spPr>
-          <a:xfrm>
-            <a:off x="15373807" y="5321808"/>
-            <a:ext cx="1094536" cy="274320"/>
-          </a:xfrm>
-          <a:prstGeom prst="rect">
-            <a:avLst/>
-          </a:prstGeom>
-          <a:noFill/>
-        </p:spPr>
-        <p:txBody>
-          <a:bodyPr wrap="square" anchor="ctr" lIns="0" rIns="0" tIns="0" bIns="0">
-            <a:spAutoFit/>
-          </a:bodyPr>
-          <a:lstStyle/>
-          <a:p>
-            <a:pPr algn="ctr">
-              <a:lnSpc>
-                <a:spcPct val="110000"/>
-              </a:lnSpc>
-            </a:pPr>
-            <a:r>
-              <a:rPr sz="1600" b="1">
-                <a:solidFill>
-                  <a:srgbClr val="FFFFFF"/>
-                </a:solidFill>
-                <a:latin typeface="Arial"/>
-                <a:ea typeface="Arial"/>
-              </a:rPr>
-              <a:t>9%</a:t>
-            </a:r>
-          </a:p>
-        </p:txBody>
-      </p:sp>
-      <p:sp>
-        <p:nvSpPr>
-          <p:cNvPr id="137" name="TextBox 136"/>
-          <p:cNvSpPr txBox="1"/>
-          <p:nvPr/>
-        </p:nvSpPr>
-        <p:spPr>
-          <a:xfrm>
-            <a:off x="16559784" y="5321808"/>
-            <a:ext cx="1005840" cy="274320"/>
-          </a:xfrm>
-          <a:prstGeom prst="rect">
-            <a:avLst/>
-          </a:prstGeom>
-          <a:noFill/>
-        </p:spPr>
-        <p:txBody>
-          <a:bodyPr wrap="square" anchor="ctr" lIns="0" rIns="0" tIns="0" bIns="0">
-            <a:spAutoFit/>
-          </a:bodyPr>
-          <a:lstStyle/>
-          <a:p>
-            <a:pPr algn="l">
-              <a:lnSpc>
-                <a:spcPct val="110000"/>
-              </a:lnSpc>
-            </a:pPr>
-            <a:r>
-              <a:rPr sz="1600" b="0">
-                <a:solidFill>
-                  <a:srgbClr val="555555"/>
-                </a:solidFill>
-                <a:latin typeface="Arial"/>
-                <a:ea typeface="Arial"/>
-              </a:rPr>
-              <a:t>286EB</a:t>
-            </a:r>
-          </a:p>
-        </p:txBody>
-      </p:sp>
-      <p:sp>
-        <p:nvSpPr>
-          <p:cNvPr id="138" name="TextBox 137"/>
-          <p:cNvSpPr txBox="1"/>
-          <p:nvPr/>
-        </p:nvSpPr>
-        <p:spPr>
-          <a:xfrm>
-            <a:off x="722376" y="5650992"/>
-            <a:ext cx="3273552" cy="274320"/>
-          </a:xfrm>
-          <a:prstGeom prst="rect">
-            <a:avLst/>
-          </a:prstGeom>
-          <a:noFill/>
-        </p:spPr>
-        <p:txBody>
-          <a:bodyPr wrap="square" anchor="ctr" lIns="0" rIns="0" tIns="0" bIns="0">
-            <a:spAutoFit/>
-          </a:bodyPr>
-          <a:lstStyle/>
-          <a:p>
-            <a:pPr algn="r">
-              <a:lnSpc>
-                <a:spcPct val="110000"/>
-              </a:lnSpc>
-            </a:pPr>
-            <a:r>
-              <a:rPr sz="1600" b="1">
-                <a:solidFill>
-                  <a:srgbClr val="1A1A1A"/>
-                </a:solidFill>
-                <a:latin typeface="Arial"/>
-                <a:ea typeface="Arial"/>
-              </a:rPr>
-              <a:t>2030</a:t>
-            </a:r>
-          </a:p>
-        </p:txBody>
-      </p:sp>
-      <p:sp>
-        <p:nvSpPr>
-          <p:cNvPr id="139" name="Rectangle 138"/>
-          <p:cNvSpPr/>
-          <p:nvPr/>
-        </p:nvSpPr>
-        <p:spPr>
-          <a:xfrm>
-            <a:off x="4306824" y="5650992"/>
-            <a:ext cx="5715914" cy="274320"/>
-          </a:xfrm>
-          <a:prstGeom prst="rect">
-            <a:avLst/>
-          </a:prstGeom>
-          <a:solidFill>
-            <a:srgbClr val="8A8A8A"/>
-          </a:solidFill>
-          <a:ln w="12700">
-            <a:solidFill>
-              <a:srgbClr val="FFFFFF"/>
-            </a:solidFill>
-          </a:ln>
-          <a:effectLst/>
-        </p:spPr>
-        <p:style>
-          <a:lnRef idx="1">
-            <a:schemeClr val="accent1"/>
-          </a:lnRef>
-          <a:fillRef idx="3">
-            <a:schemeClr val="accent1"/>
-          </a:fillRef>
-          <a:effectRef idx="2">
-            <a:schemeClr val="accent1"/>
-          </a:effectRef>
-          <a:fontRef idx="minor">
-            <a:schemeClr val="lt1"/>
-          </a:fontRef>
-        </p:style>
-        <p:txBody>
-          <a:bodyPr rtlCol="0" anchor="ctr"/>
-          <a:lstStyle/>
-          <a:p>
-            <a:pPr algn="ctr"/>
-          </a:p>
-        </p:txBody>
-      </p:sp>
-      <p:sp>
-        <p:nvSpPr>
-          <p:cNvPr id="140" name="TextBox 139"/>
-          <p:cNvSpPr txBox="1"/>
-          <p:nvPr/>
-        </p:nvSpPr>
-        <p:spPr>
-          <a:xfrm>
-            <a:off x="4306824" y="5650992"/>
-            <a:ext cx="5715914" cy="274320"/>
-          </a:xfrm>
-          <a:prstGeom prst="rect">
-            <a:avLst/>
-          </a:prstGeom>
-          <a:noFill/>
-        </p:spPr>
-        <p:txBody>
-          <a:bodyPr wrap="square" anchor="ctr" lIns="0" rIns="0" tIns="0" bIns="0">
-            <a:spAutoFit/>
-          </a:bodyPr>
-          <a:lstStyle/>
-          <a:p>
-            <a:pPr algn="ctr">
-              <a:lnSpc>
-                <a:spcPct val="110000"/>
-              </a:lnSpc>
-            </a:pPr>
-            <a:r>
-              <a:rPr sz="1600" b="1">
-                <a:solidFill>
-                  <a:srgbClr val="FFFFFF"/>
-                </a:solidFill>
-                <a:latin typeface="Arial"/>
-                <a:ea typeface="Arial"/>
-              </a:rPr>
-              <a:t>범용 · 엔터프라이즈 47%</a:t>
-            </a:r>
-          </a:p>
-        </p:txBody>
-      </p:sp>
-      <p:sp>
-        <p:nvSpPr>
-          <p:cNvPr id="141" name="Rectangle 140"/>
-          <p:cNvSpPr/>
-          <p:nvPr/>
-        </p:nvSpPr>
-        <p:spPr>
-          <a:xfrm>
-            <a:off x="10022738" y="5650992"/>
-            <a:ext cx="1459382" cy="274320"/>
-          </a:xfrm>
-          <a:prstGeom prst="rect">
-            <a:avLst/>
-          </a:prstGeom>
-          <a:solidFill>
-            <a:srgbClr val="AAB8E8"/>
-          </a:solidFill>
-          <a:ln w="12700">
-            <a:solidFill>
-              <a:srgbClr val="FFFFFF"/>
-            </a:solidFill>
-          </a:ln>
-          <a:effectLst/>
-        </p:spPr>
-        <p:style>
-          <a:lnRef idx="1">
-            <a:schemeClr val="accent1"/>
-          </a:lnRef>
-          <a:fillRef idx="3">
-            <a:schemeClr val="accent1"/>
-          </a:fillRef>
-          <a:effectRef idx="2">
-            <a:schemeClr val="accent1"/>
-          </a:effectRef>
-          <a:fontRef idx="minor">
-            <a:schemeClr val="lt1"/>
-          </a:fontRef>
-        </p:style>
-        <p:txBody>
-          <a:bodyPr rtlCol="0" anchor="ctr"/>
-          <a:lstStyle/>
-          <a:p>
-            <a:pPr algn="ctr"/>
-          </a:p>
-        </p:txBody>
-      </p:sp>
-      <p:sp>
-        <p:nvSpPr>
-          <p:cNvPr id="142" name="TextBox 141"/>
-          <p:cNvSpPr txBox="1"/>
-          <p:nvPr/>
-        </p:nvSpPr>
-        <p:spPr>
-          <a:xfrm>
-            <a:off x="10022738" y="5650992"/>
-            <a:ext cx="1459382" cy="274320"/>
-          </a:xfrm>
-          <a:prstGeom prst="rect">
-            <a:avLst/>
-          </a:prstGeom>
-          <a:noFill/>
-        </p:spPr>
-        <p:txBody>
-          <a:bodyPr wrap="square" anchor="ctr" lIns="0" rIns="0" tIns="0" bIns="0">
-            <a:spAutoFit/>
-          </a:bodyPr>
-          <a:lstStyle/>
-          <a:p>
-            <a:pPr algn="ctr">
-              <a:lnSpc>
-                <a:spcPct val="110000"/>
-              </a:lnSpc>
-            </a:pPr>
-            <a:r>
-              <a:rPr sz="1600" b="1">
-                <a:solidFill>
-                  <a:srgbClr val="1A1A1A"/>
-                </a:solidFill>
-                <a:latin typeface="Arial"/>
-                <a:ea typeface="Arial"/>
-              </a:rPr>
-              <a:t>AI 학습 12%</a:t>
-            </a:r>
-          </a:p>
-        </p:txBody>
-      </p:sp>
-      <p:sp>
-        <p:nvSpPr>
-          <p:cNvPr id="143" name="Rectangle 142"/>
-          <p:cNvSpPr/>
-          <p:nvPr/>
-        </p:nvSpPr>
-        <p:spPr>
-          <a:xfrm>
-            <a:off x="11482120" y="5650992"/>
-            <a:ext cx="4986223" cy="274320"/>
-          </a:xfrm>
-          <a:prstGeom prst="rect">
-            <a:avLst/>
-          </a:prstGeom>
-          <a:solidFill>
-            <a:srgbClr val="1428A0"/>
-          </a:solidFill>
-          <a:ln w="12700">
-            <a:solidFill>
-              <a:srgbClr val="FFFFFF"/>
-            </a:solidFill>
-          </a:ln>
-          <a:effectLst/>
-        </p:spPr>
-        <p:style>
-          <a:lnRef idx="1">
-            <a:schemeClr val="accent1"/>
-          </a:lnRef>
-          <a:fillRef idx="3">
-            <a:schemeClr val="accent1"/>
-          </a:fillRef>
-          <a:effectRef idx="2">
-            <a:schemeClr val="accent1"/>
-          </a:effectRef>
-          <a:fontRef idx="minor">
-            <a:schemeClr val="lt1"/>
-          </a:fontRef>
-        </p:style>
-        <p:txBody>
-          <a:bodyPr rtlCol="0" anchor="ctr"/>
-          <a:lstStyle/>
-          <a:p>
-            <a:pPr algn="ctr"/>
-          </a:p>
-        </p:txBody>
-      </p:sp>
-      <p:sp>
-        <p:nvSpPr>
-          <p:cNvPr id="144" name="TextBox 143"/>
-          <p:cNvSpPr txBox="1"/>
-          <p:nvPr/>
-        </p:nvSpPr>
-        <p:spPr>
-          <a:xfrm>
-            <a:off x="11482120" y="5650992"/>
-            <a:ext cx="4986223" cy="274320"/>
-          </a:xfrm>
-          <a:prstGeom prst="rect">
-            <a:avLst/>
-          </a:prstGeom>
-          <a:noFill/>
-        </p:spPr>
-        <p:txBody>
-          <a:bodyPr wrap="square" anchor="ctr" lIns="0" rIns="0" tIns="0" bIns="0">
-            <a:spAutoFit/>
-          </a:bodyPr>
-          <a:lstStyle/>
-          <a:p>
-            <a:pPr algn="ctr">
-              <a:lnSpc>
-                <a:spcPct val="110000"/>
-              </a:lnSpc>
-            </a:pPr>
-            <a:r>
-              <a:rPr sz="1600" b="1">
-                <a:solidFill>
-                  <a:srgbClr val="FFFFFF"/>
-                </a:solidFill>
-                <a:latin typeface="Arial"/>
-                <a:ea typeface="Arial"/>
-              </a:rPr>
-              <a:t>AI 추론 41%</a:t>
-            </a:r>
-          </a:p>
-        </p:txBody>
-      </p:sp>
-      <p:sp>
-        <p:nvSpPr>
-          <p:cNvPr id="145" name="TextBox 144"/>
-          <p:cNvSpPr txBox="1"/>
-          <p:nvPr/>
-        </p:nvSpPr>
-        <p:spPr>
-          <a:xfrm>
-            <a:off x="16559784" y="5650992"/>
-            <a:ext cx="1005840" cy="274320"/>
-          </a:xfrm>
-          <a:prstGeom prst="rect">
-            <a:avLst/>
-          </a:prstGeom>
-          <a:noFill/>
-        </p:spPr>
-        <p:txBody>
-          <a:bodyPr wrap="square" anchor="ctr" lIns="0" rIns="0" tIns="0" bIns="0">
-            <a:spAutoFit/>
-          </a:bodyPr>
-          <a:lstStyle/>
-          <a:p>
-            <a:pPr algn="l">
-              <a:lnSpc>
-                <a:spcPct val="110000"/>
-              </a:lnSpc>
-            </a:pPr>
-            <a:r>
-              <a:rPr sz="1600" b="1">
-                <a:solidFill>
-                  <a:srgbClr val="1A1A1A"/>
-                </a:solidFill>
-                <a:latin typeface="Arial"/>
-                <a:ea typeface="Arial"/>
-              </a:rPr>
-              <a:t>1,078EB</a:t>
-            </a:r>
-          </a:p>
-        </p:txBody>
-      </p:sp>
-      <p:sp>
-        <p:nvSpPr>
-          <p:cNvPr id="146" name="TextBox 145"/>
-          <p:cNvSpPr txBox="1"/>
-          <p:nvPr/>
-        </p:nvSpPr>
-        <p:spPr>
-          <a:xfrm>
-            <a:off x="722376" y="6053328"/>
-            <a:ext cx="8869680" cy="329184"/>
-          </a:xfrm>
-          <a:prstGeom prst="rect">
-            <a:avLst/>
-          </a:prstGeom>
-          <a:noFill/>
-        </p:spPr>
-        <p:txBody>
-          <a:bodyPr wrap="square" anchor="ctr" lIns="0" rIns="0" tIns="0" bIns="0">
-            <a:spAutoFit/>
-          </a:bodyPr>
-          <a:lstStyle/>
-          <a:p>
-            <a:pPr algn="l">
-              <a:lnSpc>
-                <a:spcPct val="110000"/>
-              </a:lnSpc>
-            </a:pPr>
-            <a:r>
-              <a:rPr sz="1900" b="1">
-                <a:solidFill>
-                  <a:srgbClr val="1A1A1A"/>
-                </a:solidFill>
-                <a:latin typeface="Arial"/>
-                <a:ea typeface="Arial"/>
-              </a:rPr>
-              <a:t>삼성 SSD 포트폴리오  </a:t>
-            </a:r>
-            <a:r>
-              <a:rPr sz="1700" b="0">
-                <a:solidFill>
-                  <a:srgbClr val="555555"/>
-                </a:solidFill>
-                <a:latin typeface="Arial"/>
-                <a:ea typeface="Arial"/>
-              </a:rPr>
-              <a:t>수요별 대응 현황</a:t>
-            </a:r>
-          </a:p>
-        </p:txBody>
-      </p:sp>
-      <p:sp>
-        <p:nvSpPr>
-          <p:cNvPr id="147" name="TextBox 146"/>
-          <p:cNvSpPr txBox="1"/>
-          <p:nvPr/>
-        </p:nvSpPr>
-        <p:spPr>
-          <a:xfrm>
-            <a:off x="10250424" y="6053328"/>
-            <a:ext cx="7315200" cy="329184"/>
-          </a:xfrm>
-          <a:prstGeom prst="rect">
-            <a:avLst/>
-          </a:prstGeom>
-          <a:noFill/>
-        </p:spPr>
-        <p:txBody>
-          <a:bodyPr wrap="square" anchor="ctr" lIns="0" rIns="0" tIns="0" bIns="0">
-            <a:spAutoFit/>
-          </a:bodyPr>
-          <a:lstStyle/>
-          <a:p>
-            <a:pPr algn="r">
-              <a:lnSpc>
-                <a:spcPct val="110000"/>
-              </a:lnSpc>
-            </a:pPr>
-            <a:r>
-              <a:rPr sz="1600" b="0">
-                <a:solidFill>
-                  <a:srgbClr val="1428A0"/>
-                </a:solidFill>
-                <a:latin typeface="Arial"/>
-                <a:ea typeface="Arial"/>
-              </a:rPr>
-              <a:t>■</a:t>
-            </a:r>
-            <a:r>
-              <a:rPr sz="1600" b="0">
-                <a:solidFill>
-                  <a:srgbClr val="555555"/>
-                </a:solidFill>
-                <a:latin typeface="Arial"/>
-                <a:ea typeface="Arial"/>
-              </a:rPr>
-              <a:t> 대응 중   </a:t>
-            </a:r>
-            <a:r>
-              <a:rPr sz="1600" b="0">
-                <a:solidFill>
-                  <a:srgbClr val="3C5AC8"/>
-                </a:solidFill>
-                <a:latin typeface="Arial"/>
-                <a:ea typeface="Arial"/>
-              </a:rPr>
-              <a:t>▢</a:t>
-            </a:r>
-            <a:r>
-              <a:rPr sz="1600" b="0">
-                <a:solidFill>
-                  <a:srgbClr val="555555"/>
-                </a:solidFill>
-                <a:latin typeface="Arial"/>
-                <a:ea typeface="Arial"/>
-              </a:rPr>
               <a:t> 대응 가능 · 신호</a:t>
             </a:r>
           </a:p>
@@ -10150,7 +10225,7 @@
       </p:sp>
       <p:sp>
         <p:nvSpPr>
-          <p:cNvPr id="148" name="Rounded Rectangle 147"/>
+          <p:cNvPr id="149" name="Rounded Rectangle 148"/>
           <p:cNvSpPr/>
           <p:nvPr/>
         </p:nvSpPr>
@@ -10196,7 +10271,7 @@
       </p:sp>
       <p:pic>
         <p:nvPicPr>
-          <p:cNvPr id="149" name="Picture 148" descr="p_pm1755.png"/>
+          <p:cNvPr id="150" name="Picture 149" descr="p_pm1755.png"/>
           <p:cNvPicPr>
             <a:picLocks noChangeAspect="1"/>
           </p:cNvPicPr>
@@ -10220,7 +10295,7 @@
       </p:pic>
       <p:sp>
         <p:nvSpPr>
-          <p:cNvPr id="150" name="TextBox 149"/>
+          <p:cNvPr id="151" name="TextBox 150"/>
           <p:cNvSpPr txBox="1"/>
           <p:nvPr/>
         </p:nvSpPr>
@@ -10260,7 +10335,7 @@
       </p:sp>
       <p:sp>
         <p:nvSpPr>
-          <p:cNvPr id="151" name="TextBox 150"/>
+          <p:cNvPr id="152" name="TextBox 151"/>
           <p:cNvSpPr txBox="1"/>
           <p:nvPr/>
         </p:nvSpPr>
@@ -10300,7 +10375,7 @@
       </p:sp>
       <p:sp>
         <p:nvSpPr>
-          <p:cNvPr id="152" name="Rounded Rectangle 151"/>
+          <p:cNvPr id="153" name="Rounded Rectangle 152"/>
           <p:cNvSpPr/>
           <p:nvPr/>
         </p:nvSpPr>
@@ -10346,7 +10421,7 @@
       </p:sp>
       <p:sp>
         <p:nvSpPr>
-          <p:cNvPr id="153" name="Rounded Rectangle 152"/>
+          <p:cNvPr id="154" name="Rounded Rectangle 153"/>
           <p:cNvSpPr/>
           <p:nvPr/>
         </p:nvSpPr>
@@ -10395,7 +10470,7 @@
       </p:sp>
       <p:sp>
         <p:nvSpPr>
-          <p:cNvPr id="154" name="TextBox 153"/>
+          <p:cNvPr id="155" name="TextBox 154"/>
           <p:cNvSpPr txBox="1"/>
           <p:nvPr/>
         </p:nvSpPr>
@@ -10435,7 +10510,7 @@
       </p:sp>
       <p:sp>
         <p:nvSpPr>
-          <p:cNvPr id="155" name="TextBox 154"/>
+          <p:cNvPr id="156" name="TextBox 155"/>
           <p:cNvSpPr txBox="1"/>
           <p:nvPr/>
         </p:nvSpPr>
@@ -10475,7 +10550,7 @@
       </p:sp>
       <p:sp>
         <p:nvSpPr>
-          <p:cNvPr id="156" name="Rounded Rectangle 155"/>
+          <p:cNvPr id="157" name="Rounded Rectangle 156"/>
           <p:cNvSpPr/>
           <p:nvPr/>
         </p:nvSpPr>
@@ -10521,7 +10596,7 @@
       </p:sp>
       <p:sp>
         <p:nvSpPr>
-          <p:cNvPr id="157" name="TextBox 156"/>
+          <p:cNvPr id="158" name="TextBox 157"/>
           <p:cNvSpPr txBox="1"/>
           <p:nvPr/>
         </p:nvSpPr>
@@ -10561,7 +10636,7 @@
       </p:sp>
       <p:sp>
         <p:nvSpPr>
-          <p:cNvPr id="158" name="TextBox 157"/>
+          <p:cNvPr id="159" name="TextBox 158"/>
           <p:cNvSpPr txBox="1"/>
           <p:nvPr/>
         </p:nvSpPr>
@@ -10601,7 +10676,7 @@
       </p:sp>
       <p:sp>
         <p:nvSpPr>
-          <p:cNvPr id="159" name="Rounded Rectangle 158"/>
+          <p:cNvPr id="160" name="Rounded Rectangle 159"/>
           <p:cNvSpPr/>
           <p:nvPr/>
         </p:nvSpPr>
@@ -10647,7 +10722,7 @@
       </p:sp>
       <p:sp>
         <p:nvSpPr>
-          <p:cNvPr id="160" name="Rounded Rectangle 159"/>
+          <p:cNvPr id="161" name="Rounded Rectangle 160"/>
           <p:cNvSpPr/>
           <p:nvPr/>
         </p:nvSpPr>
@@ -10693,7 +10768,7 @@
       </p:sp>
       <p:pic>
         <p:nvPicPr>
-          <p:cNvPr id="161" name="Picture 160" descr="p_pm1763.png"/>
+          <p:cNvPr id="162" name="Picture 161" descr="p_pm1763.png"/>
           <p:cNvPicPr>
             <a:picLocks noChangeAspect="1"/>
           </p:cNvPicPr>
@@ -10717,7 +10792,7 @@
       </p:pic>
       <p:sp>
         <p:nvSpPr>
-          <p:cNvPr id="162" name="TextBox 161"/>
+          <p:cNvPr id="163" name="TextBox 162"/>
           <p:cNvSpPr txBox="1"/>
           <p:nvPr/>
         </p:nvSpPr>
@@ -10757,7 +10832,7 @@
       </p:sp>
       <p:sp>
         <p:nvSpPr>
-          <p:cNvPr id="163" name="TextBox 162"/>
+          <p:cNvPr id="164" name="TextBox 163"/>
           <p:cNvSpPr txBox="1"/>
           <p:nvPr/>
         </p:nvSpPr>
@@ -10797,7 +10872,7 @@
       </p:sp>
       <p:sp>
         <p:nvSpPr>
-          <p:cNvPr id="164" name="Rounded Rectangle 163"/>
+          <p:cNvPr id="165" name="Rounded Rectangle 164"/>
           <p:cNvSpPr/>
           <p:nvPr/>
         </p:nvSpPr>
@@ -10843,7 +10918,7 @@
       </p:sp>
       <p:sp>
         <p:nvSpPr>
-          <p:cNvPr id="165" name="Rounded Rectangle 164"/>
+          <p:cNvPr id="166" name="Rounded Rectangle 165"/>
           <p:cNvSpPr/>
           <p:nvPr/>
         </p:nvSpPr>
@@ -10889,7 +10964,7 @@
       </p:sp>
       <p:sp>
         <p:nvSpPr>
-          <p:cNvPr id="166" name="TextBox 165"/>
+          <p:cNvPr id="167" name="TextBox 166"/>
           <p:cNvSpPr txBox="1"/>
           <p:nvPr/>
         </p:nvSpPr>
@@ -10929,7 +11004,7 @@
       </p:sp>
       <p:sp>
         <p:nvSpPr>
-          <p:cNvPr id="167" name="TextBox 166"/>
+          <p:cNvPr id="168" name="TextBox 167"/>
           <p:cNvSpPr txBox="1"/>
           <p:nvPr/>
         </p:nvSpPr>
@@ -10969,7 +11044,7 @@
       </p:sp>
       <p:sp>
         <p:nvSpPr>
-          <p:cNvPr id="168" name="Rounded Rectangle 167"/>
+          <p:cNvPr id="169" name="Rounded Rectangle 168"/>
           <p:cNvSpPr/>
           <p:nvPr/>
         </p:nvSpPr>
@@ -11018,7 +11093,7 @@
       </p:sp>
       <p:sp>
         <p:nvSpPr>
-          <p:cNvPr id="169" name="TextBox 168"/>
+          <p:cNvPr id="170" name="TextBox 169"/>
           <p:cNvSpPr txBox="1"/>
           <p:nvPr/>
         </p:nvSpPr>
@@ -11058,7 +11133,7 @@
       </p:sp>
       <p:sp>
         <p:nvSpPr>
-          <p:cNvPr id="170" name="TextBox 169"/>
+          <p:cNvPr id="171" name="TextBox 170"/>
           <p:cNvSpPr txBox="1"/>
           <p:nvPr/>
         </p:nvSpPr>
@@ -11098,7 +11173,7 @@
       </p:sp>
       <p:sp>
         <p:nvSpPr>
-          <p:cNvPr id="171" name="Rounded Rectangle 170"/>
+          <p:cNvPr id="172" name="Rounded Rectangle 171"/>
           <p:cNvSpPr/>
           <p:nvPr/>
         </p:nvSpPr>
@@ -11144,7 +11219,7 @@
       </p:sp>
       <p:sp>
         <p:nvSpPr>
-          <p:cNvPr id="172" name="Rounded Rectangle 171"/>
+          <p:cNvPr id="173" name="Rounded Rectangle 172"/>
           <p:cNvSpPr/>
           <p:nvPr/>
         </p:nvSpPr>
@@ -11190,7 +11265,7 @@
       </p:sp>
       <p:pic>
         <p:nvPicPr>
-          <p:cNvPr id="173" name="Picture 172" descr="p_pm1753.png"/>
+          <p:cNvPr id="174" name="Picture 173" descr="p_pm1753.png"/>
           <p:cNvPicPr>
             <a:picLocks noChangeAspect="1"/>
           </p:cNvPicPr>
@@ -11214,7 +11289,7 @@
       </p:pic>
       <p:sp>
         <p:nvSpPr>
-          <p:cNvPr id="174" name="TextBox 173"/>
+          <p:cNvPr id="175" name="TextBox 174"/>
           <p:cNvSpPr txBox="1"/>
           <p:nvPr/>
         </p:nvSpPr>
@@ -11254,7 +11329,7 @@
       </p:sp>
       <p:sp>
         <p:nvSpPr>
-          <p:cNvPr id="175" name="TextBox 174"/>
+          <p:cNvPr id="176" name="TextBox 175"/>
           <p:cNvSpPr txBox="1"/>
           <p:nvPr/>
         </p:nvSpPr>
@@ -11294,7 +11369,7 @@
       </p:sp>
       <p:sp>
         <p:nvSpPr>
-          <p:cNvPr id="176" name="Rounded Rectangle 175"/>
+          <p:cNvPr id="177" name="Rounded Rectangle 176"/>
           <p:cNvSpPr/>
           <p:nvPr/>
         </p:nvSpPr>
@@ -11340,7 +11415,7 @@
       </p:sp>
       <p:sp>
         <p:nvSpPr>
-          <p:cNvPr id="177" name="TextBox 176"/>
+          <p:cNvPr id="178" name="TextBox 177"/>
           <p:cNvSpPr txBox="1"/>
           <p:nvPr/>
         </p:nvSpPr>
@@ -11380,7 +11455,7 @@
       </p:sp>
       <p:sp>
         <p:nvSpPr>
-          <p:cNvPr id="178" name="TextBox 177"/>
+          <p:cNvPr id="179" name="TextBox 178"/>
           <p:cNvSpPr txBox="1"/>
           <p:nvPr/>
         </p:nvSpPr>
@@ -11420,7 +11495,7 @@
       </p:sp>
       <p:sp>
         <p:nvSpPr>
-          <p:cNvPr id="179" name="Rounded Rectangle 178"/>
+          <p:cNvPr id="180" name="Rounded Rectangle 179"/>
           <p:cNvSpPr/>
           <p:nvPr/>
         </p:nvSpPr>
@@ -11466,7 +11541,7 @@
       </p:sp>
       <p:sp>
         <p:nvSpPr>
-          <p:cNvPr id="180" name="Rounded Rectangle 179"/>
+          <p:cNvPr id="181" name="Rounded Rectangle 180"/>
           <p:cNvSpPr/>
           <p:nvPr/>
         </p:nvSpPr>
@@ -11512,7 +11587,7 @@
       </p:sp>
       <p:sp>
         <p:nvSpPr>
-          <p:cNvPr id="181" name="TextBox 180"/>
+          <p:cNvPr id="182" name="TextBox 181"/>
           <p:cNvSpPr txBox="1"/>
           <p:nvPr/>
         </p:nvSpPr>
@@ -11552,7 +11627,7 @@
       </p:sp>
       <p:sp>
         <p:nvSpPr>
-          <p:cNvPr id="182" name="TextBox 181"/>
+          <p:cNvPr id="183" name="TextBox 182"/>
           <p:cNvSpPr txBox="1"/>
           <p:nvPr/>
         </p:nvSpPr>
@@ -11592,7 +11667,7 @@
       </p:sp>
       <p:sp>
         <p:nvSpPr>
-          <p:cNvPr id="183" name="Rounded Rectangle 182"/>
+          <p:cNvPr id="184" name="Rounded Rectangle 183"/>
           <p:cNvSpPr/>
           <p:nvPr/>
         </p:nvSpPr>
@@ -11641,7 +11716,7 @@
       </p:sp>
       <p:sp>
         <p:nvSpPr>
-          <p:cNvPr id="184" name="TextBox 183"/>
+          <p:cNvPr id="185" name="TextBox 184"/>
           <p:cNvSpPr txBox="1"/>
           <p:nvPr/>
         </p:nvSpPr>
@@ -11681,7 +11756,7 @@
       </p:sp>
       <p:sp>
         <p:nvSpPr>
-          <p:cNvPr id="185" name="TextBox 184"/>
+          <p:cNvPr id="186" name="TextBox 185"/>
           <p:cNvSpPr txBox="1"/>
           <p:nvPr/>
         </p:nvSpPr>
@@ -11721,7 +11796,7 @@
       </p:sp>
       <p:sp>
         <p:nvSpPr>
-          <p:cNvPr id="186" name="Rounded Rectangle 185"/>
+          <p:cNvPr id="187" name="Rounded Rectangle 186"/>
           <p:cNvSpPr/>
           <p:nvPr/>
         </p:nvSpPr>
@@ -11767,7 +11842,7 @@
       </p:sp>
       <p:pic>
         <p:nvPicPr>
-          <p:cNvPr id="187" name="Picture 186" descr="p_bm1743.png"/>
+          <p:cNvPr id="188" name="Picture 187" descr="p_bm1743.png"/>
           <p:cNvPicPr>
             <a:picLocks noChangeAspect="1"/>
           </p:cNvPicPr>
@@ -11791,7 +11866,7 @@
       </p:pic>
       <p:sp>
         <p:nvSpPr>
-          <p:cNvPr id="188" name="TextBox 187"/>
+          <p:cNvPr id="189" name="TextBox 188"/>
           <p:cNvSpPr txBox="1"/>
           <p:nvPr/>
         </p:nvSpPr>
@@ -11831,7 +11906,7 @@
       </p:sp>
       <p:sp>
         <p:nvSpPr>
-          <p:cNvPr id="189" name="TextBox 188"/>
+          <p:cNvPr id="190" name="TextBox 189"/>
           <p:cNvSpPr txBox="1"/>
           <p:nvPr/>
         </p:nvSpPr>
@@ -11871,7 +11946,7 @@
       </p:sp>
       <p:sp>
         <p:nvSpPr>
-          <p:cNvPr id="190" name="Rounded Rectangle 189"/>
+          <p:cNvPr id="191" name="Rounded Rectangle 190"/>
           <p:cNvSpPr/>
           <p:nvPr/>
         </p:nvSpPr>
@@ -11917,7 +11992,7 @@
       </p:sp>
       <p:sp>
         <p:nvSpPr>
-          <p:cNvPr id="191" name="TextBox 190"/>
+          <p:cNvPr id="192" name="TextBox 191"/>
           <p:cNvSpPr txBox="1"/>
           <p:nvPr/>
         </p:nvSpPr>
@@ -11957,7 +12032,7 @@
       </p:sp>
       <p:sp>
         <p:nvSpPr>
-          <p:cNvPr id="192" name="TextBox 191"/>
+          <p:cNvPr id="193" name="TextBox 192"/>
           <p:cNvSpPr txBox="1"/>
           <p:nvPr/>
         </p:nvSpPr>
@@ -11997,7 +12072,7 @@
       </p:sp>
       <p:sp>
         <p:nvSpPr>
-          <p:cNvPr id="193" name="Rounded Rectangle 192"/>
+          <p:cNvPr id="194" name="Rounded Rectangle 193"/>
           <p:cNvSpPr/>
           <p:nvPr/>
         </p:nvSpPr>
@@ -12043,7 +12118,7 @@
       </p:sp>
       <p:sp>
         <p:nvSpPr>
-          <p:cNvPr id="194" name="TextBox 193"/>
+          <p:cNvPr id="195" name="TextBox 194"/>
           <p:cNvSpPr txBox="1"/>
           <p:nvPr/>
         </p:nvSpPr>
@@ -12083,7 +12158,7 @@
       </p:sp>
       <p:sp>
         <p:nvSpPr>
-          <p:cNvPr id="195" name="TextBox 194"/>
+          <p:cNvPr id="196" name="TextBox 195"/>
           <p:cNvSpPr txBox="1"/>
           <p:nvPr/>
         </p:nvSpPr>
@@ -12123,7 +12198,7 @@
       </p:sp>
       <p:sp>
         <p:nvSpPr>
-          <p:cNvPr id="196" name="Rounded Rectangle 195"/>
+          <p:cNvPr id="197" name="Rounded Rectangle 196"/>
           <p:cNvSpPr/>
           <p:nvPr/>
         </p:nvSpPr>
@@ -12172,7 +12247,7 @@
       </p:sp>
       <p:sp>
         <p:nvSpPr>
-          <p:cNvPr id="197" name="TextBox 196"/>
+          <p:cNvPr id="198" name="TextBox 197"/>
           <p:cNvSpPr txBox="1"/>
           <p:nvPr/>
         </p:nvSpPr>
@@ -12212,7 +12287,7 @@
       </p:sp>
       <p:sp>
         <p:nvSpPr>
-          <p:cNvPr id="198" name="TextBox 197"/>
+          <p:cNvPr id="199" name="TextBox 198"/>
           <p:cNvSpPr txBox="1"/>
           <p:nvPr/>
         </p:nvSpPr>
@@ -12252,7 +12327,7 @@
       </p:sp>
       <p:sp>
         <p:nvSpPr>
-          <p:cNvPr id="199" name="Rounded Rectangle 198"/>
+          <p:cNvPr id="200" name="Rounded Rectangle 199"/>
           <p:cNvSpPr/>
           <p:nvPr/>
         </p:nvSpPr>
@@ -12298,7 +12373,7 @@
       </p:sp>
       <p:sp>
         <p:nvSpPr>
-          <p:cNvPr id="200" name="TextBox 199"/>
+          <p:cNvPr id="201" name="TextBox 200"/>
           <p:cNvSpPr txBox="1"/>
           <p:nvPr/>
         </p:nvSpPr>
@@ -12338,7 +12413,7 @@
       </p:sp>
       <p:sp>
         <p:nvSpPr>
-          <p:cNvPr id="201" name="TextBox 200"/>
+          <p:cNvPr id="202" name="TextBox 201"/>
           <p:cNvSpPr txBox="1"/>
           <p:nvPr/>
         </p:nvSpPr>
@@ -12378,7 +12453,7 @@
       </p:sp>
       <p:sp>
         <p:nvSpPr>
-          <p:cNvPr id="202" name="TextBox 201"/>
+          <p:cNvPr id="203" name="TextBox 202"/>
           <p:cNvSpPr txBox="1"/>
           <p:nvPr/>
         </p:nvSpPr>
@@ -12411,14 +12486,14 @@
                 <a:latin typeface="Arial"/>
                 <a:ea typeface="Arial"/>
               </a:rPr>
-              <a:t>출처: 수요 비중 McKinsey(2024-12, 2026 보간 · 상세 참고 8장) · HBM 과제팀 집계 · p99 FlashBlox(FAST'17) · GPU당 대역 NVIDIA SuperPOD(환산) · 추론 대역 70B · 128K KV 43GB 1초 복원(⚠️ 산술) · MLPerf 70B 첫 토큰 p99 · KV 실측 StorageReview · 삼성 모델 사양 공식 페이지 검색 확인(🟡) · 제품 이미지는 형태 재현</a:t>
-            </a:r>
-          </a:p>
-        </p:txBody>
-      </p:sp>
-      <p:sp>
-        <p:nvSpPr>
-          <p:cNvPr id="203" name="TextBox 202"/>
+              <a:t>출처: 수요 비중 McKinsey(2024-12, 2026 보간 · 상세 참고 8장) · HBM 과제팀 집계 · p99 FlashBlox(FAST'17) · 학습 · 추론 카드의 SSD 역할 수치(GPU당 대역 · KV 복원 대역 · p99 목표 · DWPD 실측)는 노트 · 에이전트 Google · Muse 관측(제3자) · 삼성 모델 사양 공식 페이지 검색 확인(🟡) · 제품 이미지는 형태 재현</a:t>
+            </a:r>
+          </a:p>
+        </p:txBody>
+      </p:sp>
+      <p:sp>
+        <p:nvSpPr>
+          <p:cNvPr id="204" name="TextBox 203"/>
           <p:cNvSpPr txBox="1"/>
           <p:nvPr/>
         </p:nvSpPr>

--- a/outputs/presentation/ssd-future-ready-strategy.pptx
+++ b/outputs/presentation/ssd-future-ready-strategy.pptx
@@ -649,7 +649,7 @@
           <a:lstStyle/>
           <a:p>
             <a:r>
-              <a:t>3장은 SSD 차별화 요구가 어떻게 바뀌어 왔고, 그 변화에 대비한 기술로 포트폴리오를 어떻게 완성할지입니다. 맨 위 띠를 보시면, 지난 20년 동안 SSD를 차별화하는 요구는 계속 바뀌었습니다. 처음에는 HDD보다 빠른 성능, 곧 IOPS와 대역이었고, 이후 같은 성능을 더 적은 전력으로 내는 전력 효율이 됐습니다. 데이터센터로 들어오면서 여러 VM이 한 드라이브를 나눠 쓰니 VM 단위의 QoS 보장이 중요해졌습니다. 그리고 AI 시대에는 예측 가능한 QoS, 고용량, 고내구가 함께 중요해지고 있습니다. 2장의 세 기술, FDP, Mixed Media, Large Mapping으로 우리가 차별화하려는 것이 바로 QLC의 고용량과 고객 워크로드에 맞춘 내구성입니다. 이 띠의 시기 구분은 과제팀의 정리입니다. 먼저 원리입니다. SSD는 빈 블록을 만들려고 살아 있는 데이터를 옮기는 GC를 합니다. 그동안 읽기는 프로그램과 지우기 뒤에서 기다리고, 지우기는 블록당 약 10밀리초가 걸립니다. 그래서 GC가 일어날 때마다 지연 스파이크가 생기고, 연구에서는 GC가 99에서 99.99 백분위 지연을 5배에서 138배까지 키웠습니다. 세 기술은 GC를 세 방향으로 줄입니다. Mixed Media는 작은 쓰기를 pSLC에 모아 QLC에는 큰 단위로만 쓰므로 블록이 덜 조각나 GC 빈도가 줍니다. Large Mapping은 매핑 단위에 맞춘 큰 쓰기만 받으니 부분 덮어쓰기와 매핑 갱신이 줄어 GC 횟수가 줍니다. FDP는 수명이 같은 데이터를 같은 블록에 모아, 블록이 통째로 지워지니 옮길 데이터가 거의 없어 GC 시간이 줍니다. GC가 드물고 짧아지면 지연이 예측 가능해집니다. 그 결과 지표가 좋아집니다. WAF에서 1을 뺀 값이 호스트 쓰기 하나당 GC가 옮기는 양인데, 삼성 엔지니어가 Meta의 CacheLib 안에 FDP를 구현했을 때 WAF가 3.22에서 1.03으로 68퍼센트, GC 복사량은 2.22에서 0.03으로 줄었습니다. WAF는 SSD만 잘 만들어서는 3 근처에서 더 내려가지 않던 지표이고, 그 이유는 참고 5장에 정리해 두었습니다. 상자를 누르면 그 장으로 갑니다. 꼬리 지연도 줍니다. 삼성 PM9D3a 7.68테라바이트에서 RocksDB에 FDP 최적화 분류를 적용하자 p99.9 꼬리 지연이 55퍼센트 줄었고, ZNS, Valet, WALTZ 같은 공개 실험에서도 1.5배에서 6배 줄었습니다. 다만 꼬리 지연 측정은 모두 TLC이고, QLC나 KV 캐시 계층의 첫 토큰 p99를 직접 잰 결과는 아직 없으며, 칩 사이 큐 불균형이 주원인이라는 반대 연구도 있습니다. 이제 포트폴리오입니다. 오른쪽 3D 그림의 바닥은 정격 DWPD와 최대 용량, 높이는 꼬리 지연이 낮을수록 위입니다. 진한 기둥이 지금의 제품군이고 점선 상자가 WAF와 꼬리 지연을 낮춘 뒤 닿는 영역입니다. 같은 NAND와 같은 OP에서 WAF가 3에서 1로 내려가면 정격 DWPD는 약 3배가 됩니다. 과제팀 산술입니다. BM1743 같은 QLC가 0.3에서 1 DWPD가 되면 지금 TLC가 맡는 KV 캐시 오프로드까지 원가 우위로 들어갈 수 있고, PM1753 같은 고성능 TLC가 1에서 3 DWPD가 되면 쓰기가 많은 KV를 맡을 수 있습니다. PM1755 같은 고내구 TLC는 3에서 9 DWPD로 초고DWPD의 입구까지 가고, SLC급에서 WAF를 낮추면 30 DWPD가 100 근처로 올라갑니다. 초고DWPD가 필요해지면 TLC의 WAF를 낮춰 대응할지, SLC급을 극한으로 올릴지 요구에 따라 고를 수 있습니다. 정리하면, 새로운 차별화 요구에 대비한 기술을 미리 준비해야 미래의 추론 수요에 능동적으로 대응하는 제품 포트폴리오를 완성할 수 있습니다. 꼬리 지연 높이는 정성 등급이고, 제품 이미지는 형태 재현입니다.</a:t>
+              <a:t>3장은 SSD 차별화 요구가 어떻게 바뀌어 왔고, 그 변화에 대비한 기술로 포트폴리오를 어떻게 완성할지입니다. 맨 위 띠를 보시면, 지난 20년 동안 SSD를 차별화하는 요구는 계속 바뀌었습니다. 처음에는 HDD보다 빠른 성능, 곧 IOPS와 대역이었고, 이후 같은 성능을 더 적은 전력으로 내는 전력 효율이 됐습니다. 데이터센터로 들어오면서 여러 VM이 한 드라이브를 나눠 쓰니 VM 단위의 QoS 보장이 중요해졌습니다. 그리고 AI 시대에는 예측 가능한 QoS, 고용량, 고내구가 함께 중요해지고 있습니다. 2장의 세 기술, FDP, Mixed Media, Large Mapping으로 우리가 차별화하려는 것이 바로 QLC의 고용량과 고객 워크로드에 맞춘 내구성입니다. 이 띠의 시기 구분은 과제팀의 정리입니다. 먼저 원리입니다. SSD는 빈 블록을 만들려고 살아 있는 데이터를 옮기는 GC를 합니다. 그동안 읽기는 프로그램과 지우기 뒤에서 기다리고, 지우기는 블록당 약 10밀리초가 걸립니다. 그래서 GC가 일어날 때마다 지연 스파이크가 생기고, 연구에서는 GC가 99에서 99.99 백분위 지연을 5배에서 138배까지 키웠습니다. 세 기술은 GC를 세 방향으로 줄입니다. Mixed Media는 작은 쓰기를 pSLC에 모아 QLC에는 큰 단위로만 쓰므로 블록이 덜 조각나 GC 빈도가 줍니다. Large Mapping은 매핑 단위에 맞춘 큰 쓰기만 받으니 부분 덮어쓰기와 매핑 갱신이 줄어 GC 횟수가 줍니다. FDP는 수명이 같은 데이터를 같은 블록에 모아, 블록이 통째로 지워지니 옮길 데이터가 거의 없어 GC 시간이 줍니다. GC가 드물고 짧아지면 지연이 예측 가능해집니다. 그 결과 지표가 좋아집니다. WAF에서 1을 뺀 값이 호스트 쓰기 하나당 GC가 옮기는 양인데, 삼성 엔지니어가 Meta의 CacheLib 안에 FDP를 구현했을 때 WAF가 3.22에서 1.03으로 68퍼센트, GC 복사량은 2.22에서 0.03으로 줄었습니다. WAF는 SSD만 잘 만들어서는 3 근처에서 더 내려가지 않던 지표이고, 그 이유는 참고 5장에 정리해 두었습니다. 상자를 누르면 그 장으로 갑니다. 꼬리 지연도 줍니다. 삼성 PM9D3a 7.68테라바이트에서 RocksDB에 FDP 최적화 분류를 적용하자 p99.9 꼬리 지연이 55퍼센트 줄었고, ZNS, Valet, WALTZ 같은 공개 실험에서도 1.5배에서 6배 줄었습니다. 다만 꼬리 지연 측정은 모두 TLC이고, QLC나 KV 캐시 계층의 첫 토큰 p99를 직접 잰 결과는 아직 없으며, 칩 사이 큐 불균형이 주원인이라는 반대 연구도 있습니다. 이제 포트폴리오입니다. 오른쪽 3D 그림의 바닥은 정격 DWPD와 최대 용량, 높이는 꼬리 지연이 낮을수록 위입니다. 처음에는 지금의 제품군 기둥만 보이고, 클릭할 때마다 QLC, TLC, 고내구 TLC, SLC급 순서로 WAF와 꼬리 지연을 낮춘 뒤 닿는 영역이 점선 상자로 넓어지며 오른쪽 카드에 DWPD 변화가 나타납니다. 같은 NAND와 같은 OP에서 WAF가 3에서 1로 내려가면 정격 DWPD는 약 3배가 됩니다. 과제팀 산술입니다. BM1743 같은 QLC가 0.3에서 1 DWPD가 되면 지금 TLC가 맡는 KV 캐시 오프로드까지 원가 우위로 들어갈 수 있고, PM1753 같은 고성능 TLC가 1에서 3 DWPD가 되면 쓰기가 많은 KV를 맡을 수 있습니다. PM1755 같은 고내구 TLC는 3에서 9 DWPD로 초고DWPD의 입구까지 가고, SLC급에서 WAF를 낮추면 30 DWPD가 100 근처로 올라갑니다. 초고DWPD가 필요해지면 TLC의 WAF를 낮춰 대응할지, SLC급을 극한으로 올릴지 요구에 따라 고를 수 있습니다. 정리하면, 새로운 차별화 요구에 대비한 기술을 미리 준비해야 미래의 추론 수요에 능동적으로 대응하는 제품 포트폴리오를 완성할 수 있습니다. 꼬리 지연 높이는 정성 등급이고, 제품 이미지는 형태 재현입니다.</a:t>
             </a:r>
           </a:p>
         </p:txBody>
@@ -12735,26 +12735,26 @@
               <p:cTn id="2" dur="indefinite" nodeType="mainSeq">
                 <p:childTnLst>
                   <p:par>
-                    <p:cTn id="3" fill="hold">
+                    <p:cTn id="4" fill="hold">
                       <p:stCondLst>
                         <p:cond delay="indefinite"/>
                       </p:stCondLst>
                       <p:childTnLst>
                         <p:par>
-                          <p:cTn id="4" fill="hold">
+                          <p:cTn id="5" fill="hold">
                             <p:stCondLst>
                               <p:cond delay="0"/>
                             </p:stCondLst>
                             <p:childTnLst>
                               <p:par>
-                                <p:cTn id="5" presetID="10" presetClass="entr" presetSubtype="0" fill="hold" nodeType="clickEffect">
+                                <p:cTn id="6" presetID="10" presetClass="entr" presetSubtype="0" fill="hold" nodeType="clickEffect">
                                   <p:stCondLst>
                                     <p:cond delay="0"/>
                                   </p:stCondLst>
                                   <p:childTnLst>
                                     <p:set>
                                       <p:cBhvr>
-                                        <p:cTn id="6" dur="1" fill="hold">
+                                        <p:cTn id="7" dur="1" fill="hold">
                                           <p:stCondLst>
                                             <p:cond delay="0"/>
                                           </p:stCondLst>
@@ -12772,7 +12772,7 @@
                                     </p:set>
                                     <p:animEffect transition="in" filter="fade">
                                       <p:cBhvr>
-                                        <p:cTn id="7" dur="500"/>
+                                        <p:cTn id="8" dur="500"/>
                                         <p:tgtEl>
                                           <p:spTgt spid="207"/>
                                         </p:tgtEl>
@@ -27583,26 +27583,26 @@
               <p:cTn id="2" dur="indefinite" nodeType="mainSeq">
                 <p:childTnLst>
                   <p:par>
-                    <p:cTn id="3" fill="hold">
+                    <p:cTn id="4" fill="hold">
                       <p:stCondLst>
                         <p:cond delay="indefinite"/>
                       </p:stCondLst>
                       <p:childTnLst>
                         <p:par>
-                          <p:cTn id="4" fill="hold">
+                          <p:cTn id="5" fill="hold">
                             <p:stCondLst>
                               <p:cond delay="0"/>
                             </p:stCondLst>
                             <p:childTnLst>
                               <p:par>
-                                <p:cTn id="5" presetID="10" presetClass="entr" presetSubtype="0" fill="hold" nodeType="clickEffect">
+                                <p:cTn id="6" presetID="10" presetClass="entr" presetSubtype="0" fill="hold" nodeType="clickEffect">
                                   <p:stCondLst>
                                     <p:cond delay="0"/>
                                   </p:stCondLst>
                                   <p:childTnLst>
                                     <p:set>
                                       <p:cBhvr>
-                                        <p:cTn id="6" dur="1" fill="hold">
+                                        <p:cTn id="7" dur="1" fill="hold">
                                           <p:stCondLst>
                                             <p:cond delay="0"/>
                                           </p:stCondLst>
@@ -27620,7 +27620,7 @@
                                     </p:set>
                                     <p:animEffect transition="in" filter="fade">
                                       <p:cBhvr>
-                                        <p:cTn id="7" dur="500"/>
+                                        <p:cTn id="8" dur="500"/>
                                         <p:tgtEl>
                                           <p:spTgt spid="334"/>
                                         </p:tgtEl>
@@ -34634,7 +34634,7 @@
       <p:sp>
         <p:nvSpPr>
           <p:cNvPr id="162" name="Rounded Rectangle 161">
-            <a:hlinkClick action="ppaction://hlinksldjump" r:id="rId8"/>
+            <a:hlinkClick action="ppaction://hlinksldjump" r:id="rId12"/>
           </p:cNvPr>
           <p:cNvSpPr/>
           <p:nvPr/>
@@ -34684,7 +34684,7 @@
       <p:sp>
         <p:nvSpPr>
           <p:cNvPr id="163" name="TextBox 162">
-            <a:hlinkClick action="ppaction://hlinksldjump" r:id="rId8"/>
+            <a:hlinkClick action="ppaction://hlinksldjump" r:id="rId12"/>
           </p:cNvPr>
           <p:cNvSpPr txBox="1"/>
           <p:nvPr/>
@@ -35761,7 +35761,7 @@
       </p:sp>
       <p:pic>
         <p:nvPicPr>
-          <p:cNvPr id="189" name="Picture 188" descr="portfolio_3d.png"/>
+          <p:cNvPr id="189" name="Picture 188" descr="portfolio_3d_base.png"/>
           <p:cNvPicPr>
             <a:picLocks noChangeAspect="1"/>
           </p:cNvPicPr>
@@ -35785,7 +35785,7 @@
       </p:pic>
       <p:sp>
         <p:nvSpPr>
-          <p:cNvPr id="190" name="TextBox 189"/>
+          <p:cNvPr id="194" name="TextBox 193"/>
           <p:cNvSpPr txBox="1"/>
           <p:nvPr/>
         </p:nvSpPr>
@@ -35842,7 +35842,7 @@
       </p:sp>
       <p:sp>
         <p:nvSpPr>
-          <p:cNvPr id="191" name="Rounded Rectangle 190"/>
+          <p:cNvPr id="195" name="Rounded Rectangle 194"/>
           <p:cNvSpPr/>
           <p:nvPr/>
         </p:nvSpPr>
@@ -35888,7 +35888,7 @@
       </p:sp>
       <p:sp>
         <p:nvSpPr>
-          <p:cNvPr id="192" name="Rectangle 191"/>
+          <p:cNvPr id="196" name="Rectangle 195"/>
           <p:cNvSpPr/>
           <p:nvPr/>
         </p:nvSpPr>
@@ -35932,7 +35932,7 @@
       </p:sp>
       <p:sp>
         <p:nvSpPr>
-          <p:cNvPr id="193" name="Oval 192"/>
+          <p:cNvPr id="197" name="Oval 196"/>
           <p:cNvSpPr/>
           <p:nvPr/>
         </p:nvSpPr>
@@ -35976,7 +35976,7 @@
       </p:sp>
       <p:sp>
         <p:nvSpPr>
-          <p:cNvPr id="194" name="TextBox 193"/>
+          <p:cNvPr id="198" name="TextBox 197"/>
           <p:cNvSpPr txBox="1"/>
           <p:nvPr/>
         </p:nvSpPr>
@@ -36016,14 +36016,14 @@
       </p:sp>
       <p:pic>
         <p:nvPicPr>
-          <p:cNvPr id="195" name="Picture 194" descr="p_bm1743.png"/>
+          <p:cNvPr id="199" name="Picture 198" descr="p_bm1743.png"/>
           <p:cNvPicPr>
             <a:picLocks noChangeAspect="1"/>
           </p:cNvPicPr>
           <p:nvPr/>
         </p:nvPicPr>
         <p:blipFill>
-          <a:blip r:embed="rId3"/>
+          <a:blip r:embed="rId7"/>
           <a:stretch>
             <a:fillRect/>
           </a:stretch>
@@ -36040,7 +36040,7 @@
       </p:pic>
       <p:sp>
         <p:nvSpPr>
-          <p:cNvPr id="196" name="TextBox 195"/>
+          <p:cNvPr id="200" name="TextBox 199"/>
           <p:cNvSpPr txBox="1"/>
           <p:nvPr/>
         </p:nvSpPr>
@@ -36080,13 +36080,211 @@
       </p:sp>
       <p:sp>
         <p:nvSpPr>
-          <p:cNvPr id="197" name="TextBox 196"/>
+          <p:cNvPr id="206" name="Rounded Rectangle 205"/>
+          <p:cNvSpPr/>
+          <p:nvPr/>
+        </p:nvSpPr>
+        <p:spPr>
+          <a:xfrm>
+            <a:off x="15279624" y="5372100"/>
+            <a:ext cx="2286000" cy="1266444"/>
+          </a:xfrm>
+          <a:prstGeom prst="roundRect">
+            <a:avLst>
+              <a:gd name="adj" fmla="val 5776"/>
+            </a:avLst>
+          </a:prstGeom>
+          <a:solidFill>
+            <a:srgbClr val="F5F5F5"/>
+          </a:solidFill>
+          <a:ln>
+            <a:noFill/>
+          </a:ln>
+          <a:effectLst/>
+        </p:spPr>
+        <p:style>
+          <a:lnRef idx="1">
+            <a:schemeClr val="accent1"/>
+          </a:lnRef>
+          <a:fillRef idx="3">
+            <a:schemeClr val="accent1"/>
+          </a:fillRef>
+          <a:effectRef idx="2">
+            <a:schemeClr val="accent1"/>
+          </a:effectRef>
+          <a:fontRef idx="minor">
+            <a:schemeClr val="lt1"/>
+          </a:fontRef>
+        </p:style>
+        <p:txBody>
+          <a:bodyPr rtlCol="0" anchor="ctr"/>
+          <a:lstStyle/>
+          <a:p>
+            <a:pPr algn="ctr"/>
+          </a:p>
+        </p:txBody>
+      </p:sp>
+      <p:sp>
+        <p:nvSpPr>
+          <p:cNvPr id="207" name="Rectangle 206"/>
+          <p:cNvSpPr/>
+          <p:nvPr/>
+        </p:nvSpPr>
+        <p:spPr>
+          <a:xfrm>
+            <a:off x="15279624" y="5372100"/>
+            <a:ext cx="73152" cy="1266444"/>
+          </a:xfrm>
+          <a:prstGeom prst="rect">
+            <a:avLst/>
+          </a:prstGeom>
+          <a:solidFill>
+            <a:srgbClr val="0072B2"/>
+          </a:solidFill>
+          <a:ln>
+            <a:noFill/>
+          </a:ln>
+          <a:effectLst/>
+        </p:spPr>
+        <p:style>
+          <a:lnRef idx="1">
+            <a:schemeClr val="accent1"/>
+          </a:lnRef>
+          <a:fillRef idx="3">
+            <a:schemeClr val="accent1"/>
+          </a:fillRef>
+          <a:effectRef idx="2">
+            <a:schemeClr val="accent1"/>
+          </a:effectRef>
+          <a:fontRef idx="minor">
+            <a:schemeClr val="lt1"/>
+          </a:fontRef>
+        </p:style>
+        <p:txBody>
+          <a:bodyPr rtlCol="0" anchor="ctr"/>
+          <a:lstStyle/>
+          <a:p>
+            <a:pPr algn="ctr"/>
+          </a:p>
+        </p:txBody>
+      </p:sp>
+      <p:sp>
+        <p:nvSpPr>
+          <p:cNvPr id="208" name="Oval 207"/>
+          <p:cNvSpPr/>
+          <p:nvPr/>
+        </p:nvSpPr>
+        <p:spPr>
+          <a:xfrm>
+            <a:off x="15407640" y="5436107"/>
+            <a:ext cx="347472" cy="347472"/>
+          </a:xfrm>
+          <a:prstGeom prst="ellipse">
+            <a:avLst/>
+          </a:prstGeom>
+          <a:solidFill>
+            <a:srgbClr val="0072B2"/>
+          </a:solidFill>
+          <a:ln>
+            <a:noFill/>
+          </a:ln>
+          <a:effectLst/>
+        </p:spPr>
+        <p:style>
+          <a:lnRef idx="1">
+            <a:schemeClr val="accent1"/>
+          </a:lnRef>
+          <a:fillRef idx="3">
+            <a:schemeClr val="accent1"/>
+          </a:fillRef>
+          <a:effectRef idx="2">
+            <a:schemeClr val="accent1"/>
+          </a:effectRef>
+          <a:fontRef idx="minor">
+            <a:schemeClr val="lt1"/>
+          </a:fontRef>
+        </p:style>
+        <p:txBody>
+          <a:bodyPr rtlCol="0" anchor="ctr"/>
+          <a:lstStyle/>
+          <a:p>
+            <a:pPr algn="ctr"/>
+          </a:p>
+        </p:txBody>
+      </p:sp>
+      <p:sp>
+        <p:nvSpPr>
+          <p:cNvPr id="209" name="TextBox 208"/>
           <p:cNvSpPr txBox="1"/>
           <p:nvPr/>
         </p:nvSpPr>
         <p:spPr>
           <a:xfrm>
-            <a:off x="15462504" y="4773168"/>
+            <a:off x="15407640" y="5436107"/>
+            <a:ext cx="347472" cy="347472"/>
+          </a:xfrm>
+          <a:prstGeom prst="rect">
+            <a:avLst/>
+          </a:prstGeom>
+          <a:noFill/>
+        </p:spPr>
+        <p:txBody>
+          <a:bodyPr wrap="square" anchor="ctr" lIns="0" rIns="0" tIns="0" bIns="0">
+            <a:spAutoFit/>
+          </a:bodyPr>
+          <a:lstStyle/>
+          <a:p>
+            <a:pPr algn="ctr">
+              <a:lnSpc>
+                <a:spcPct val="110000"/>
+              </a:lnSpc>
+            </a:pPr>
+            <a:r>
+              <a:rPr sz="1600" b="1">
+                <a:solidFill>
+                  <a:srgbClr val="FFFFFF"/>
+                </a:solidFill>
+                <a:latin typeface="Arial"/>
+                <a:ea typeface="Arial"/>
+              </a:rPr>
+              <a:t>2</a:t>
+            </a:r>
+          </a:p>
+        </p:txBody>
+      </p:sp>
+      <p:pic>
+        <p:nvPicPr>
+          <p:cNvPr id="210" name="Picture 209" descr="p_pm1753.png"/>
+          <p:cNvPicPr>
+            <a:picLocks noChangeAspect="1"/>
+          </p:cNvPicPr>
+          <p:nvPr/>
+        </p:nvPicPr>
+        <p:blipFill>
+          <a:blip r:embed="rId8"/>
+          <a:stretch>
+            <a:fillRect/>
+          </a:stretch>
+        </p:blipFill>
+        <p:spPr>
+          <a:xfrm>
+            <a:off x="16327027" y="5399531"/>
+            <a:ext cx="648392" cy="475488"/>
+          </a:xfrm>
+          <a:prstGeom prst="rect">
+            <a:avLst/>
+          </a:prstGeom>
+        </p:spPr>
+      </p:pic>
+      <p:sp>
+        <p:nvSpPr>
+          <p:cNvPr id="211" name="TextBox 210"/>
+          <p:cNvSpPr txBox="1"/>
+          <p:nvPr/>
+        </p:nvSpPr>
+        <p:spPr>
+          <a:xfrm>
+            <a:off x="15462504" y="5875020"/>
             <a:ext cx="2048256" cy="256032"/>
           </a:xfrm>
           <a:prstGeom prst="rect">
@@ -36106,28 +36304,226 @@
               </a:lnSpc>
             </a:pPr>
             <a:r>
-              <a:rPr sz="1600" b="1">
+              <a:rPr sz="1500" b="1">
                 <a:solidFill>
-                  <a:srgbClr val="009E73"/>
+                  <a:srgbClr val="1A1A1A"/>
                 </a:solidFill>
                 <a:latin typeface="Arial"/>
                 <a:ea typeface="Arial"/>
               </a:rPr>
-              <a:t>0.3 → 1 DWPD</a:t>
-            </a:r>
-          </a:p>
-        </p:txBody>
-      </p:sp>
-      <p:sp>
-        <p:nvSpPr>
-          <p:cNvPr id="198" name="TextBox 197"/>
+              <a:t>PM1753 · TLC</a:t>
+            </a:r>
+          </a:p>
+        </p:txBody>
+      </p:sp>
+      <p:sp>
+        <p:nvSpPr>
+          <p:cNvPr id="217" name="Rounded Rectangle 216"/>
+          <p:cNvSpPr/>
+          <p:nvPr/>
+        </p:nvSpPr>
+        <p:spPr>
+          <a:xfrm>
+            <a:off x="15279624" y="6711696"/>
+            <a:ext cx="2286000" cy="1266444"/>
+          </a:xfrm>
+          <a:prstGeom prst="roundRect">
+            <a:avLst>
+              <a:gd name="adj" fmla="val 5776"/>
+            </a:avLst>
+          </a:prstGeom>
+          <a:solidFill>
+            <a:srgbClr val="F5F5F5"/>
+          </a:solidFill>
+          <a:ln>
+            <a:noFill/>
+          </a:ln>
+          <a:effectLst/>
+        </p:spPr>
+        <p:style>
+          <a:lnRef idx="1">
+            <a:schemeClr val="accent1"/>
+          </a:lnRef>
+          <a:fillRef idx="3">
+            <a:schemeClr val="accent1"/>
+          </a:fillRef>
+          <a:effectRef idx="2">
+            <a:schemeClr val="accent1"/>
+          </a:effectRef>
+          <a:fontRef idx="minor">
+            <a:schemeClr val="lt1"/>
+          </a:fontRef>
+        </p:style>
+        <p:txBody>
+          <a:bodyPr rtlCol="0" anchor="ctr"/>
+          <a:lstStyle/>
+          <a:p>
+            <a:pPr algn="ctr"/>
+          </a:p>
+        </p:txBody>
+      </p:sp>
+      <p:sp>
+        <p:nvSpPr>
+          <p:cNvPr id="218" name="Rectangle 217"/>
+          <p:cNvSpPr/>
+          <p:nvPr/>
+        </p:nvSpPr>
+        <p:spPr>
+          <a:xfrm>
+            <a:off x="15279624" y="6711696"/>
+            <a:ext cx="73152" cy="1266444"/>
+          </a:xfrm>
+          <a:prstGeom prst="rect">
+            <a:avLst/>
+          </a:prstGeom>
+          <a:solidFill>
+            <a:srgbClr val="E69F00"/>
+          </a:solidFill>
+          <a:ln>
+            <a:noFill/>
+          </a:ln>
+          <a:effectLst/>
+        </p:spPr>
+        <p:style>
+          <a:lnRef idx="1">
+            <a:schemeClr val="accent1"/>
+          </a:lnRef>
+          <a:fillRef idx="3">
+            <a:schemeClr val="accent1"/>
+          </a:fillRef>
+          <a:effectRef idx="2">
+            <a:schemeClr val="accent1"/>
+          </a:effectRef>
+          <a:fontRef idx="minor">
+            <a:schemeClr val="lt1"/>
+          </a:fontRef>
+        </p:style>
+        <p:txBody>
+          <a:bodyPr rtlCol="0" anchor="ctr"/>
+          <a:lstStyle/>
+          <a:p>
+            <a:pPr algn="ctr"/>
+          </a:p>
+        </p:txBody>
+      </p:sp>
+      <p:sp>
+        <p:nvSpPr>
+          <p:cNvPr id="219" name="Oval 218"/>
+          <p:cNvSpPr/>
+          <p:nvPr/>
+        </p:nvSpPr>
+        <p:spPr>
+          <a:xfrm>
+            <a:off x="15407640" y="6775704"/>
+            <a:ext cx="347472" cy="347472"/>
+          </a:xfrm>
+          <a:prstGeom prst="ellipse">
+            <a:avLst/>
+          </a:prstGeom>
+          <a:solidFill>
+            <a:srgbClr val="E69F00"/>
+          </a:solidFill>
+          <a:ln>
+            <a:noFill/>
+          </a:ln>
+          <a:effectLst/>
+        </p:spPr>
+        <p:style>
+          <a:lnRef idx="1">
+            <a:schemeClr val="accent1"/>
+          </a:lnRef>
+          <a:fillRef idx="3">
+            <a:schemeClr val="accent1"/>
+          </a:fillRef>
+          <a:effectRef idx="2">
+            <a:schemeClr val="accent1"/>
+          </a:effectRef>
+          <a:fontRef idx="minor">
+            <a:schemeClr val="lt1"/>
+          </a:fontRef>
+        </p:style>
+        <p:txBody>
+          <a:bodyPr rtlCol="0" anchor="ctr"/>
+          <a:lstStyle/>
+          <a:p>
+            <a:pPr algn="ctr"/>
+          </a:p>
+        </p:txBody>
+      </p:sp>
+      <p:sp>
+        <p:nvSpPr>
+          <p:cNvPr id="220" name="TextBox 219"/>
           <p:cNvSpPr txBox="1"/>
           <p:nvPr/>
         </p:nvSpPr>
         <p:spPr>
           <a:xfrm>
-            <a:off x="15462504" y="4992624"/>
-            <a:ext cx="2048256" cy="237744"/>
+            <a:off x="15407640" y="6775704"/>
+            <a:ext cx="347472" cy="347472"/>
+          </a:xfrm>
+          <a:prstGeom prst="rect">
+            <a:avLst/>
+          </a:prstGeom>
+          <a:noFill/>
+        </p:spPr>
+        <p:txBody>
+          <a:bodyPr wrap="square" anchor="ctr" lIns="0" rIns="0" tIns="0" bIns="0">
+            <a:spAutoFit/>
+          </a:bodyPr>
+          <a:lstStyle/>
+          <a:p>
+            <a:pPr algn="ctr">
+              <a:lnSpc>
+                <a:spcPct val="110000"/>
+              </a:lnSpc>
+            </a:pPr>
+            <a:r>
+              <a:rPr sz="1600" b="1">
+                <a:solidFill>
+                  <a:srgbClr val="FFFFFF"/>
+                </a:solidFill>
+                <a:latin typeface="Arial"/>
+                <a:ea typeface="Arial"/>
+              </a:rPr>
+              <a:t>3</a:t>
+            </a:r>
+          </a:p>
+        </p:txBody>
+      </p:sp>
+      <p:pic>
+        <p:nvPicPr>
+          <p:cNvPr id="221" name="Picture 220" descr="p_pm1755.png"/>
+          <p:cNvPicPr>
+            <a:picLocks noChangeAspect="1"/>
+          </p:cNvPicPr>
+          <p:nvPr/>
+        </p:nvPicPr>
+        <p:blipFill>
+          <a:blip r:embed="rId9"/>
+          <a:stretch>
+            <a:fillRect/>
+          </a:stretch>
+        </p:blipFill>
+        <p:spPr>
+          <a:xfrm>
+            <a:off x="16327027" y="6739128"/>
+            <a:ext cx="648392" cy="475488"/>
+          </a:xfrm>
+          <a:prstGeom prst="rect">
+            <a:avLst/>
+          </a:prstGeom>
+        </p:spPr>
+      </p:pic>
+      <p:sp>
+        <p:nvSpPr>
+          <p:cNvPr id="222" name="TextBox 221"/>
+          <p:cNvSpPr txBox="1"/>
+          <p:nvPr/>
+        </p:nvSpPr>
+        <p:spPr>
+          <a:xfrm>
+            <a:off x="15462504" y="7214616"/>
+            <a:ext cx="2048256" cy="256032"/>
           </a:xfrm>
           <a:prstGeom prst="rect">
             <a:avLst/>
@@ -36146,21 +36542,1217 @@
               </a:lnSpc>
             </a:pPr>
             <a:r>
-              <a:rPr sz="1500" b="0">
+              <a:rPr sz="1500" b="1">
+                <a:solidFill>
+                  <a:srgbClr val="1A1A1A"/>
+                </a:solidFill>
+                <a:latin typeface="Arial"/>
+                <a:ea typeface="Arial"/>
+              </a:rPr>
+              <a:t>PM1755 · 고내구 TLC</a:t>
+            </a:r>
+          </a:p>
+        </p:txBody>
+      </p:sp>
+      <p:sp>
+        <p:nvSpPr>
+          <p:cNvPr id="228" name="Rounded Rectangle 227"/>
+          <p:cNvSpPr/>
+          <p:nvPr/>
+        </p:nvSpPr>
+        <p:spPr>
+          <a:xfrm>
+            <a:off x="15279624" y="8051292"/>
+            <a:ext cx="2286000" cy="1266444"/>
+          </a:xfrm>
+          <a:prstGeom prst="roundRect">
+            <a:avLst>
+              <a:gd name="adj" fmla="val 5776"/>
+            </a:avLst>
+          </a:prstGeom>
+          <a:solidFill>
+            <a:srgbClr val="F5F5F5"/>
+          </a:solidFill>
+          <a:ln>
+            <a:noFill/>
+          </a:ln>
+          <a:effectLst/>
+        </p:spPr>
+        <p:style>
+          <a:lnRef idx="1">
+            <a:schemeClr val="accent1"/>
+          </a:lnRef>
+          <a:fillRef idx="3">
+            <a:schemeClr val="accent1"/>
+          </a:fillRef>
+          <a:effectRef idx="2">
+            <a:schemeClr val="accent1"/>
+          </a:effectRef>
+          <a:fontRef idx="minor">
+            <a:schemeClr val="lt1"/>
+          </a:fontRef>
+        </p:style>
+        <p:txBody>
+          <a:bodyPr rtlCol="0" anchor="ctr"/>
+          <a:lstStyle/>
+          <a:p>
+            <a:pPr algn="ctr"/>
+          </a:p>
+        </p:txBody>
+      </p:sp>
+      <p:sp>
+        <p:nvSpPr>
+          <p:cNvPr id="229" name="Rectangle 228"/>
+          <p:cNvSpPr/>
+          <p:nvPr/>
+        </p:nvSpPr>
+        <p:spPr>
+          <a:xfrm>
+            <a:off x="15279624" y="8051292"/>
+            <a:ext cx="73152" cy="1266444"/>
+          </a:xfrm>
+          <a:prstGeom prst="rect">
+            <a:avLst/>
+          </a:prstGeom>
+          <a:solidFill>
+            <a:srgbClr val="CC79A7"/>
+          </a:solidFill>
+          <a:ln>
+            <a:noFill/>
+          </a:ln>
+          <a:effectLst/>
+        </p:spPr>
+        <p:style>
+          <a:lnRef idx="1">
+            <a:schemeClr val="accent1"/>
+          </a:lnRef>
+          <a:fillRef idx="3">
+            <a:schemeClr val="accent1"/>
+          </a:fillRef>
+          <a:effectRef idx="2">
+            <a:schemeClr val="accent1"/>
+          </a:effectRef>
+          <a:fontRef idx="minor">
+            <a:schemeClr val="lt1"/>
+          </a:fontRef>
+        </p:style>
+        <p:txBody>
+          <a:bodyPr rtlCol="0" anchor="ctr"/>
+          <a:lstStyle/>
+          <a:p>
+            <a:pPr algn="ctr"/>
+          </a:p>
+        </p:txBody>
+      </p:sp>
+      <p:sp>
+        <p:nvSpPr>
+          <p:cNvPr id="230" name="Oval 229"/>
+          <p:cNvSpPr/>
+          <p:nvPr/>
+        </p:nvSpPr>
+        <p:spPr>
+          <a:xfrm>
+            <a:off x="15407640" y="8115300"/>
+            <a:ext cx="347472" cy="347472"/>
+          </a:xfrm>
+          <a:prstGeom prst="ellipse">
+            <a:avLst/>
+          </a:prstGeom>
+          <a:solidFill>
+            <a:srgbClr val="CC79A7"/>
+          </a:solidFill>
+          <a:ln>
+            <a:noFill/>
+          </a:ln>
+          <a:effectLst/>
+        </p:spPr>
+        <p:style>
+          <a:lnRef idx="1">
+            <a:schemeClr val="accent1"/>
+          </a:lnRef>
+          <a:fillRef idx="3">
+            <a:schemeClr val="accent1"/>
+          </a:fillRef>
+          <a:effectRef idx="2">
+            <a:schemeClr val="accent1"/>
+          </a:effectRef>
+          <a:fontRef idx="minor">
+            <a:schemeClr val="lt1"/>
+          </a:fontRef>
+        </p:style>
+        <p:txBody>
+          <a:bodyPr rtlCol="0" anchor="ctr"/>
+          <a:lstStyle/>
+          <a:p>
+            <a:pPr algn="ctr"/>
+          </a:p>
+        </p:txBody>
+      </p:sp>
+      <p:sp>
+        <p:nvSpPr>
+          <p:cNvPr id="231" name="TextBox 230"/>
+          <p:cNvSpPr txBox="1"/>
+          <p:nvPr/>
+        </p:nvSpPr>
+        <p:spPr>
+          <a:xfrm>
+            <a:off x="15407640" y="8115300"/>
+            <a:ext cx="347472" cy="347472"/>
+          </a:xfrm>
+          <a:prstGeom prst="rect">
+            <a:avLst/>
+          </a:prstGeom>
+          <a:noFill/>
+        </p:spPr>
+        <p:txBody>
+          <a:bodyPr wrap="square" anchor="ctr" lIns="0" rIns="0" tIns="0" bIns="0">
+            <a:spAutoFit/>
+          </a:bodyPr>
+          <a:lstStyle/>
+          <a:p>
+            <a:pPr algn="ctr">
+              <a:lnSpc>
+                <a:spcPct val="110000"/>
+              </a:lnSpc>
+            </a:pPr>
+            <a:r>
+              <a:rPr sz="1600" b="1">
+                <a:solidFill>
+                  <a:srgbClr val="FFFFFF"/>
+                </a:solidFill>
+                <a:latin typeface="Arial"/>
+                <a:ea typeface="Arial"/>
+              </a:rPr>
+              <a:t>4</a:t>
+            </a:r>
+          </a:p>
+        </p:txBody>
+      </p:sp>
+      <p:pic>
+        <p:nvPicPr>
+          <p:cNvPr id="232" name="Picture 231" descr="p_zssd.png"/>
+          <p:cNvPicPr>
+            <a:picLocks noChangeAspect="1"/>
+          </p:cNvPicPr>
+          <p:nvPr/>
+        </p:nvPicPr>
+        <p:blipFill>
+          <a:blip r:embed="rId10"/>
+          <a:stretch>
+            <a:fillRect/>
+          </a:stretch>
+        </p:blipFill>
+        <p:spPr>
+          <a:xfrm>
+            <a:off x="16256446" y="8078724"/>
+            <a:ext cx="789555" cy="475488"/>
+          </a:xfrm>
+          <a:prstGeom prst="rect">
+            <a:avLst/>
+          </a:prstGeom>
+        </p:spPr>
+      </p:pic>
+      <p:sp>
+        <p:nvSpPr>
+          <p:cNvPr id="233" name="TextBox 232"/>
+          <p:cNvSpPr txBox="1"/>
+          <p:nvPr/>
+        </p:nvSpPr>
+        <p:spPr>
+          <a:xfrm>
+            <a:off x="15462504" y="8554212"/>
+            <a:ext cx="2048256" cy="256032"/>
+          </a:xfrm>
+          <a:prstGeom prst="rect">
+            <a:avLst/>
+          </a:prstGeom>
+          <a:noFill/>
+        </p:spPr>
+        <p:txBody>
+          <a:bodyPr wrap="square" anchor="ctr" lIns="0" rIns="0" tIns="0" bIns="0">
+            <a:spAutoFit/>
+          </a:bodyPr>
+          <a:lstStyle/>
+          <a:p>
+            <a:pPr algn="l">
+              <a:lnSpc>
+                <a:spcPct val="110000"/>
+              </a:lnSpc>
+            </a:pPr>
+            <a:r>
+              <a:rPr sz="1500" b="1">
+                <a:solidFill>
+                  <a:srgbClr val="1A1A1A"/>
+                </a:solidFill>
+                <a:latin typeface="Arial"/>
+                <a:ea typeface="Arial"/>
+              </a:rPr>
+              <a:t>Z-NAND · SLC급</a:t>
+            </a:r>
+          </a:p>
+        </p:txBody>
+      </p:sp>
+      <p:sp>
+        <p:nvSpPr>
+          <p:cNvPr id="239" name="TextBox 238"/>
+          <p:cNvSpPr txBox="1"/>
+          <p:nvPr/>
+        </p:nvSpPr>
+        <p:spPr>
+          <a:xfrm>
+            <a:off x="11146536" y="4005072"/>
+            <a:ext cx="914400" cy="274320"/>
+          </a:xfrm>
+          <a:prstGeom prst="rect">
+            <a:avLst/>
+          </a:prstGeom>
+          <a:noFill/>
+        </p:spPr>
+        <p:txBody>
+          <a:bodyPr wrap="square" anchor="ctr" lIns="0" rIns="0" tIns="0" bIns="0">
+            <a:spAutoFit/>
+          </a:bodyPr>
+          <a:lstStyle/>
+          <a:p>
+            <a:pPr algn="l">
+              <a:lnSpc>
+                <a:spcPct val="110000"/>
+              </a:lnSpc>
+            </a:pPr>
+            <a:r>
+              <a:rPr sz="1500" b="1">
                 <a:solidFill>
                   <a:srgbClr val="555555"/>
                 </a:solidFill>
                 <a:latin typeface="Arial"/>
                 <a:ea typeface="Arial"/>
               </a:rPr>
-              <a:t>KV 오프로드 진입</a:t>
-            </a:r>
-          </a:p>
-        </p:txBody>
-      </p:sp>
-      <p:sp>
-        <p:nvSpPr>
-          <p:cNvPr id="199" name="Oval 198"/>
+              <a:t>바닥 =</a:t>
+            </a:r>
+          </a:p>
+        </p:txBody>
+      </p:sp>
+      <p:sp>
+        <p:nvSpPr>
+          <p:cNvPr id="240" name="Rectangle 239"/>
+          <p:cNvSpPr/>
+          <p:nvPr/>
+        </p:nvSpPr>
+        <p:spPr>
+          <a:xfrm>
+            <a:off x="11878056" y="4050791"/>
+            <a:ext cx="274320" cy="182880"/>
+          </a:xfrm>
+          <a:prstGeom prst="rect">
+            <a:avLst/>
+          </a:prstGeom>
+          <a:solidFill>
+            <a:srgbClr val="ECEEF1"/>
+          </a:solidFill>
+          <a:ln w="6350">
+            <a:solidFill>
+              <a:srgbClr val="8A8A8A"/>
+            </a:solidFill>
+          </a:ln>
+          <a:effectLst/>
+        </p:spPr>
+        <p:style>
+          <a:lnRef idx="1">
+            <a:schemeClr val="accent1"/>
+          </a:lnRef>
+          <a:fillRef idx="3">
+            <a:schemeClr val="accent1"/>
+          </a:fillRef>
+          <a:effectRef idx="2">
+            <a:schemeClr val="accent1"/>
+          </a:effectRef>
+          <a:fontRef idx="minor">
+            <a:schemeClr val="lt1"/>
+          </a:fontRef>
+        </p:style>
+        <p:txBody>
+          <a:bodyPr rtlCol="0" anchor="ctr"/>
+          <a:lstStyle/>
+          <a:p>
+            <a:pPr algn="ctr"/>
+          </a:p>
+        </p:txBody>
+      </p:sp>
+      <p:sp>
+        <p:nvSpPr>
+          <p:cNvPr id="241" name="TextBox 240"/>
+          <p:cNvSpPr txBox="1"/>
+          <p:nvPr/>
+        </p:nvSpPr>
+        <p:spPr>
+          <a:xfrm>
+            <a:off x="12207240" y="4005072"/>
+            <a:ext cx="1828800" cy="274320"/>
+          </a:xfrm>
+          <a:prstGeom prst="rect">
+            <a:avLst/>
+          </a:prstGeom>
+          <a:noFill/>
+        </p:spPr>
+        <p:txBody>
+          <a:bodyPr wrap="square" anchor="ctr" lIns="0" rIns="0" tIns="0" bIns="0">
+            <a:spAutoFit/>
+          </a:bodyPr>
+          <a:lstStyle/>
+          <a:p>
+            <a:pPr algn="l">
+              <a:lnSpc>
+                <a:spcPct val="110000"/>
+              </a:lnSpc>
+            </a:pPr>
+            <a:r>
+              <a:rPr sz="1500" b="1">
+                <a:solidFill>
+                  <a:srgbClr val="555555"/>
+                </a:solidFill>
+                <a:latin typeface="Arial"/>
+                <a:ea typeface="Arial"/>
+              </a:rPr>
+              <a:t>가중치 · RAG</a:t>
+            </a:r>
+          </a:p>
+        </p:txBody>
+      </p:sp>
+      <p:sp>
+        <p:nvSpPr>
+          <p:cNvPr id="242" name="Rectangle 241"/>
+          <p:cNvSpPr/>
+          <p:nvPr/>
+        </p:nvSpPr>
+        <p:spPr>
+          <a:xfrm>
+            <a:off x="11878056" y="4325112"/>
+            <a:ext cx="274320" cy="182880"/>
+          </a:xfrm>
+          <a:prstGeom prst="rect">
+            <a:avLst/>
+          </a:prstGeom>
+          <a:solidFill>
+            <a:srgbClr val="D5D9DF"/>
+          </a:solidFill>
+          <a:ln w="6350">
+            <a:solidFill>
+              <a:srgbClr val="8A8A8A"/>
+            </a:solidFill>
+          </a:ln>
+          <a:effectLst/>
+        </p:spPr>
+        <p:style>
+          <a:lnRef idx="1">
+            <a:schemeClr val="accent1"/>
+          </a:lnRef>
+          <a:fillRef idx="3">
+            <a:schemeClr val="accent1"/>
+          </a:fillRef>
+          <a:effectRef idx="2">
+            <a:schemeClr val="accent1"/>
+          </a:effectRef>
+          <a:fontRef idx="minor">
+            <a:schemeClr val="lt1"/>
+          </a:fontRef>
+        </p:style>
+        <p:txBody>
+          <a:bodyPr rtlCol="0" anchor="ctr"/>
+          <a:lstStyle/>
+          <a:p>
+            <a:pPr algn="ctr"/>
+          </a:p>
+        </p:txBody>
+      </p:sp>
+      <p:sp>
+        <p:nvSpPr>
+          <p:cNvPr id="243" name="TextBox 242"/>
+          <p:cNvSpPr txBox="1"/>
+          <p:nvPr/>
+        </p:nvSpPr>
+        <p:spPr>
+          <a:xfrm>
+            <a:off x="12207240" y="4279392"/>
+            <a:ext cx="1828800" cy="274320"/>
+          </a:xfrm>
+          <a:prstGeom prst="rect">
+            <a:avLst/>
+          </a:prstGeom>
+          <a:noFill/>
+        </p:spPr>
+        <p:txBody>
+          <a:bodyPr wrap="square" anchor="ctr" lIns="0" rIns="0" tIns="0" bIns="0">
+            <a:spAutoFit/>
+          </a:bodyPr>
+          <a:lstStyle/>
+          <a:p>
+            <a:pPr algn="l">
+              <a:lnSpc>
+                <a:spcPct val="110000"/>
+              </a:lnSpc>
+            </a:pPr>
+            <a:r>
+              <a:rPr sz="1500" b="1">
+                <a:solidFill>
+                  <a:srgbClr val="555555"/>
+                </a:solidFill>
+                <a:latin typeface="Arial"/>
+                <a:ea typeface="Arial"/>
+              </a:rPr>
+              <a:t>KV 오프로드</a:t>
+            </a:r>
+          </a:p>
+        </p:txBody>
+      </p:sp>
+      <p:sp>
+        <p:nvSpPr>
+          <p:cNvPr id="244" name="Rectangle 243"/>
+          <p:cNvSpPr/>
+          <p:nvPr/>
+        </p:nvSpPr>
+        <p:spPr>
+          <a:xfrm>
+            <a:off x="11878056" y="4599431"/>
+            <a:ext cx="274320" cy="182880"/>
+          </a:xfrm>
+          <a:prstGeom prst="rect">
+            <a:avLst/>
+          </a:prstGeom>
+          <a:solidFill>
+            <a:srgbClr val="BEC4CC"/>
+          </a:solidFill>
+          <a:ln w="6350">
+            <a:solidFill>
+              <a:srgbClr val="8A8A8A"/>
+            </a:solidFill>
+          </a:ln>
+          <a:effectLst/>
+        </p:spPr>
+        <p:style>
+          <a:lnRef idx="1">
+            <a:schemeClr val="accent1"/>
+          </a:lnRef>
+          <a:fillRef idx="3">
+            <a:schemeClr val="accent1"/>
+          </a:fillRef>
+          <a:effectRef idx="2">
+            <a:schemeClr val="accent1"/>
+          </a:effectRef>
+          <a:fontRef idx="minor">
+            <a:schemeClr val="lt1"/>
+          </a:fontRef>
+        </p:style>
+        <p:txBody>
+          <a:bodyPr rtlCol="0" anchor="ctr"/>
+          <a:lstStyle/>
+          <a:p>
+            <a:pPr algn="ctr"/>
+          </a:p>
+        </p:txBody>
+      </p:sp>
+      <p:sp>
+        <p:nvSpPr>
+          <p:cNvPr id="245" name="TextBox 244"/>
+          <p:cNvSpPr txBox="1"/>
+          <p:nvPr/>
+        </p:nvSpPr>
+        <p:spPr>
+          <a:xfrm>
+            <a:off x="12207240" y="4553712"/>
+            <a:ext cx="1828800" cy="274320"/>
+          </a:xfrm>
+          <a:prstGeom prst="rect">
+            <a:avLst/>
+          </a:prstGeom>
+          <a:noFill/>
+        </p:spPr>
+        <p:txBody>
+          <a:bodyPr wrap="square" anchor="ctr" lIns="0" rIns="0" tIns="0" bIns="0">
+            <a:spAutoFit/>
+          </a:bodyPr>
+          <a:lstStyle/>
+          <a:p>
+            <a:pPr algn="l">
+              <a:lnSpc>
+                <a:spcPct val="110000"/>
+              </a:lnSpc>
+            </a:pPr>
+            <a:r>
+              <a:rPr sz="1500" b="1">
+                <a:solidFill>
+                  <a:srgbClr val="555555"/>
+                </a:solidFill>
+                <a:latin typeface="Arial"/>
+                <a:ea typeface="Arial"/>
+              </a:rPr>
+              <a:t>초고DWPD KV</a:t>
+            </a:r>
+          </a:p>
+        </p:txBody>
+      </p:sp>
+      <p:grpSp>
+        <p:nvGrpSpPr>
+          <p:cNvPr id="246" name="Group 245"/>
+          <p:cNvGrpSpPr/>
+          <p:nvPr/>
+        </p:nvGrpSpPr>
+        <p:grpSpPr>
+          <a:xfrm>
+            <a:off x="8769096" y="4005072"/>
+            <a:ext cx="8823960" cy="5358384"/>
+            <a:chOff x="8769096" y="4005072"/>
+            <a:chExt cx="8823960" cy="5358384"/>
+          </a:xfrm>
+        </p:grpSpPr>
+        <p:pic>
+          <p:nvPicPr>
+            <p:cNvPr id="190" name="Picture 189" descr="portfolio_3d_qlc.png"/>
+            <p:cNvPicPr>
+              <a:picLocks noChangeAspect="1"/>
+            </p:cNvPicPr>
+            <p:nvPr/>
+          </p:nvPicPr>
+          <p:blipFill>
+            <a:blip r:embed="rId3"/>
+            <a:stretch>
+              <a:fillRect/>
+            </a:stretch>
+          </p:blipFill>
+          <p:spPr>
+            <a:xfrm>
+              <a:off x="8769096" y="4041648"/>
+              <a:ext cx="6303421" cy="5321808"/>
+            </a:xfrm>
+            <a:prstGeom prst="rect">
+              <a:avLst/>
+            </a:prstGeom>
+          </p:spPr>
+        </p:pic>
+        <p:sp>
+          <p:nvSpPr>
+            <p:cNvPr id="201" name="TextBox 200"/>
+            <p:cNvSpPr txBox="1"/>
+            <p:nvPr/>
+          </p:nvSpPr>
+          <p:spPr>
+            <a:xfrm>
+              <a:off x="15462504" y="4773168"/>
+              <a:ext cx="2048256" cy="256032"/>
+            </a:xfrm>
+            <a:prstGeom prst="rect">
+              <a:avLst/>
+            </a:prstGeom>
+            <a:noFill/>
+          </p:spPr>
+          <p:txBody>
+            <a:bodyPr wrap="square" anchor="ctr" lIns="0" rIns="0" tIns="0" bIns="0">
+              <a:spAutoFit/>
+            </a:bodyPr>
+            <a:lstStyle/>
+            <a:p>
+              <a:pPr algn="l">
+                <a:lnSpc>
+                  <a:spcPct val="110000"/>
+                </a:lnSpc>
+              </a:pPr>
+              <a:r>
+                <a:rPr sz="1600" b="1">
+                  <a:solidFill>
+                    <a:srgbClr val="009E73"/>
+                  </a:solidFill>
+                  <a:latin typeface="Arial"/>
+                  <a:ea typeface="Arial"/>
+                </a:rPr>
+                <a:t>0.3 → 1 DWPD</a:t>
+              </a:r>
+            </a:p>
+          </p:txBody>
+        </p:sp>
+        <p:sp>
+          <p:nvSpPr>
+            <p:cNvPr id="202" name="TextBox 201"/>
+            <p:cNvSpPr txBox="1"/>
+            <p:nvPr/>
+          </p:nvSpPr>
+          <p:spPr>
+            <a:xfrm>
+              <a:off x="15462504" y="4992624"/>
+              <a:ext cx="2048256" cy="237744"/>
+            </a:xfrm>
+            <a:prstGeom prst="rect">
+              <a:avLst/>
+            </a:prstGeom>
+            <a:noFill/>
+          </p:spPr>
+          <p:txBody>
+            <a:bodyPr wrap="square" anchor="ctr" lIns="0" rIns="0" tIns="0" bIns="0">
+              <a:spAutoFit/>
+            </a:bodyPr>
+            <a:lstStyle/>
+            <a:p>
+              <a:pPr algn="l">
+                <a:lnSpc>
+                  <a:spcPct val="110000"/>
+                </a:lnSpc>
+              </a:pPr>
+              <a:r>
+                <a:rPr sz="1500" b="0">
+                  <a:solidFill>
+                    <a:srgbClr val="555555"/>
+                  </a:solidFill>
+                  <a:latin typeface="Arial"/>
+                  <a:ea typeface="Arial"/>
+                </a:rPr>
+                <a:t>KV 오프로드 진입</a:t>
+              </a:r>
+            </a:p>
+          </p:txBody>
+        </p:sp>
+        <p:sp>
+          <p:nvSpPr>
+            <p:cNvPr id="203" name="Rounded Rectangle 202"/>
+            <p:cNvSpPr/>
+            <p:nvPr/>
+          </p:nvSpPr>
+          <p:spPr>
+            <a:xfrm>
+              <a:off x="15252192" y="4005072"/>
+              <a:ext cx="2340864" cy="1321308"/>
+            </a:xfrm>
+            <a:prstGeom prst="roundRect">
+              <a:avLst>
+                <a:gd name="adj" fmla="val 5536"/>
+              </a:avLst>
+            </a:prstGeom>
+            <a:noFill/>
+            <a:ln w="31750">
+              <a:solidFill>
+                <a:srgbClr val="009E73"/>
+              </a:solidFill>
+            </a:ln>
+            <a:effectLst/>
+          </p:spPr>
+          <p:style>
+            <a:lnRef idx="1">
+              <a:schemeClr val="accent1"/>
+            </a:lnRef>
+            <a:fillRef idx="3">
+              <a:schemeClr val="accent1"/>
+            </a:fillRef>
+            <a:effectRef idx="2">
+              <a:schemeClr val="accent1"/>
+            </a:effectRef>
+            <a:fontRef idx="minor">
+              <a:schemeClr val="lt1"/>
+            </a:fontRef>
+          </p:style>
+          <p:txBody>
+            <a:bodyPr rtlCol="0" anchor="ctr"/>
+            <a:lstStyle/>
+            <a:p>
+              <a:pPr algn="ctr"/>
+            </a:p>
+          </p:txBody>
+        </p:sp>
+      </p:grpSp>
+      <p:grpSp>
+        <p:nvGrpSpPr>
+          <p:cNvPr id="247" name="Group 246"/>
+          <p:cNvGrpSpPr/>
+          <p:nvPr/>
+        </p:nvGrpSpPr>
+        <p:grpSpPr>
+          <a:xfrm>
+            <a:off x="8769096" y="4041648"/>
+            <a:ext cx="8823960" cy="5321808"/>
+            <a:chOff x="8769096" y="4041648"/>
+            <a:chExt cx="8823960" cy="5321808"/>
+          </a:xfrm>
+        </p:grpSpPr>
+        <p:pic>
+          <p:nvPicPr>
+            <p:cNvPr id="191" name="Picture 190" descr="portfolio_3d_tlc.png"/>
+            <p:cNvPicPr>
+              <a:picLocks noChangeAspect="1"/>
+            </p:cNvPicPr>
+            <p:nvPr/>
+          </p:nvPicPr>
+          <p:blipFill>
+            <a:blip r:embed="rId4"/>
+            <a:stretch>
+              <a:fillRect/>
+            </a:stretch>
+          </p:blipFill>
+          <p:spPr>
+            <a:xfrm>
+              <a:off x="8769096" y="4041648"/>
+              <a:ext cx="6303421" cy="5321808"/>
+            </a:xfrm>
+            <a:prstGeom prst="rect">
+              <a:avLst/>
+            </a:prstGeom>
+          </p:spPr>
+        </p:pic>
+        <p:sp>
+          <p:nvSpPr>
+            <p:cNvPr id="212" name="TextBox 211"/>
+            <p:cNvSpPr txBox="1"/>
+            <p:nvPr/>
+          </p:nvSpPr>
+          <p:spPr>
+            <a:xfrm>
+              <a:off x="15462504" y="6112764"/>
+              <a:ext cx="2048256" cy="256032"/>
+            </a:xfrm>
+            <a:prstGeom prst="rect">
+              <a:avLst/>
+            </a:prstGeom>
+            <a:noFill/>
+          </p:spPr>
+          <p:txBody>
+            <a:bodyPr wrap="square" anchor="ctr" lIns="0" rIns="0" tIns="0" bIns="0">
+              <a:spAutoFit/>
+            </a:bodyPr>
+            <a:lstStyle/>
+            <a:p>
+              <a:pPr algn="l">
+                <a:lnSpc>
+                  <a:spcPct val="110000"/>
+                </a:lnSpc>
+              </a:pPr>
+              <a:r>
+                <a:rPr sz="1600" b="1">
+                  <a:solidFill>
+                    <a:srgbClr val="0072B2"/>
+                  </a:solidFill>
+                  <a:latin typeface="Arial"/>
+                  <a:ea typeface="Arial"/>
+                </a:rPr>
+                <a:t>1 → 3 DWPD</a:t>
+              </a:r>
+            </a:p>
+          </p:txBody>
+        </p:sp>
+        <p:sp>
+          <p:nvSpPr>
+            <p:cNvPr id="213" name="TextBox 212"/>
+            <p:cNvSpPr txBox="1"/>
+            <p:nvPr/>
+          </p:nvSpPr>
+          <p:spPr>
+            <a:xfrm>
+              <a:off x="15462504" y="6332220"/>
+              <a:ext cx="2048256" cy="237744"/>
+            </a:xfrm>
+            <a:prstGeom prst="rect">
+              <a:avLst/>
+            </a:prstGeom>
+            <a:noFill/>
+          </p:spPr>
+          <p:txBody>
+            <a:bodyPr wrap="square" anchor="ctr" lIns="0" rIns="0" tIns="0" bIns="0">
+              <a:spAutoFit/>
+            </a:bodyPr>
+            <a:lstStyle/>
+            <a:p>
+              <a:pPr algn="l">
+                <a:lnSpc>
+                  <a:spcPct val="110000"/>
+                </a:lnSpc>
+              </a:pPr>
+              <a:r>
+                <a:rPr sz="1500" b="0">
+                  <a:solidFill>
+                    <a:srgbClr val="555555"/>
+                  </a:solidFill>
+                  <a:latin typeface="Arial"/>
+                  <a:ea typeface="Arial"/>
+                </a:rPr>
+                <a:t>쓰기 많은 KV</a:t>
+              </a:r>
+            </a:p>
+          </p:txBody>
+        </p:sp>
+        <p:sp>
+          <p:nvSpPr>
+            <p:cNvPr id="214" name="Rounded Rectangle 213"/>
+            <p:cNvSpPr/>
+            <p:nvPr/>
+          </p:nvSpPr>
+          <p:spPr>
+            <a:xfrm>
+              <a:off x="15252192" y="5344668"/>
+              <a:ext cx="2340864" cy="1321308"/>
+            </a:xfrm>
+            <a:prstGeom prst="roundRect">
+              <a:avLst>
+                <a:gd name="adj" fmla="val 5536"/>
+              </a:avLst>
+            </a:prstGeom>
+            <a:noFill/>
+            <a:ln w="31750">
+              <a:solidFill>
+                <a:srgbClr val="0072B2"/>
+              </a:solidFill>
+            </a:ln>
+            <a:effectLst/>
+          </p:spPr>
+          <p:style>
+            <a:lnRef idx="1">
+              <a:schemeClr val="accent1"/>
+            </a:lnRef>
+            <a:fillRef idx="3">
+              <a:schemeClr val="accent1"/>
+            </a:fillRef>
+            <a:effectRef idx="2">
+              <a:schemeClr val="accent1"/>
+            </a:effectRef>
+            <a:fontRef idx="minor">
+              <a:schemeClr val="lt1"/>
+            </a:fontRef>
+          </p:style>
+          <p:txBody>
+            <a:bodyPr rtlCol="0" anchor="ctr"/>
+            <a:lstStyle/>
+            <a:p>
+              <a:pPr algn="ctr"/>
+            </a:p>
+          </p:txBody>
+        </p:sp>
+      </p:grpSp>
+      <p:grpSp>
+        <p:nvGrpSpPr>
+          <p:cNvPr id="248" name="Group 247"/>
+          <p:cNvGrpSpPr/>
+          <p:nvPr/>
+        </p:nvGrpSpPr>
+        <p:grpSpPr>
+          <a:xfrm>
+            <a:off x="8769096" y="4041648"/>
+            <a:ext cx="8823960" cy="5321808"/>
+            <a:chOff x="8769096" y="4041648"/>
+            <a:chExt cx="8823960" cy="5321808"/>
+          </a:xfrm>
+        </p:grpSpPr>
+        <p:pic>
+          <p:nvPicPr>
+            <p:cNvPr id="192" name="Picture 191" descr="portfolio_3d_hetlc.png"/>
+            <p:cNvPicPr>
+              <a:picLocks noChangeAspect="1"/>
+            </p:cNvPicPr>
+            <p:nvPr/>
+          </p:nvPicPr>
+          <p:blipFill>
+            <a:blip r:embed="rId5"/>
+            <a:stretch>
+              <a:fillRect/>
+            </a:stretch>
+          </p:blipFill>
+          <p:spPr>
+            <a:xfrm>
+              <a:off x="8769096" y="4041648"/>
+              <a:ext cx="6303421" cy="5321808"/>
+            </a:xfrm>
+            <a:prstGeom prst="rect">
+              <a:avLst/>
+            </a:prstGeom>
+          </p:spPr>
+        </p:pic>
+        <p:sp>
+          <p:nvSpPr>
+            <p:cNvPr id="223" name="TextBox 222"/>
+            <p:cNvSpPr txBox="1"/>
+            <p:nvPr/>
+          </p:nvSpPr>
+          <p:spPr>
+            <a:xfrm>
+              <a:off x="15462504" y="7452360"/>
+              <a:ext cx="2048256" cy="256032"/>
+            </a:xfrm>
+            <a:prstGeom prst="rect">
+              <a:avLst/>
+            </a:prstGeom>
+            <a:noFill/>
+          </p:spPr>
+          <p:txBody>
+            <a:bodyPr wrap="square" anchor="ctr" lIns="0" rIns="0" tIns="0" bIns="0">
+              <a:spAutoFit/>
+            </a:bodyPr>
+            <a:lstStyle/>
+            <a:p>
+              <a:pPr algn="l">
+                <a:lnSpc>
+                  <a:spcPct val="110000"/>
+                </a:lnSpc>
+              </a:pPr>
+              <a:r>
+                <a:rPr sz="1600" b="1">
+                  <a:solidFill>
+                    <a:srgbClr val="E69F00"/>
+                  </a:solidFill>
+                  <a:latin typeface="Arial"/>
+                  <a:ea typeface="Arial"/>
+                </a:rPr>
+                <a:t>3 → 9 DWPD</a:t>
+              </a:r>
+            </a:p>
+          </p:txBody>
+        </p:sp>
+        <p:sp>
+          <p:nvSpPr>
+            <p:cNvPr id="224" name="TextBox 223"/>
+            <p:cNvSpPr txBox="1"/>
+            <p:nvPr/>
+          </p:nvSpPr>
+          <p:spPr>
+            <a:xfrm>
+              <a:off x="15462504" y="7671816"/>
+              <a:ext cx="2048256" cy="237744"/>
+            </a:xfrm>
+            <a:prstGeom prst="rect">
+              <a:avLst/>
+            </a:prstGeom>
+            <a:noFill/>
+          </p:spPr>
+          <p:txBody>
+            <a:bodyPr wrap="square" anchor="ctr" lIns="0" rIns="0" tIns="0" bIns="0">
+              <a:spAutoFit/>
+            </a:bodyPr>
+            <a:lstStyle/>
+            <a:p>
+              <a:pPr algn="l">
+                <a:lnSpc>
+                  <a:spcPct val="110000"/>
+                </a:lnSpc>
+              </a:pPr>
+              <a:r>
+                <a:rPr sz="1500" b="0">
+                  <a:solidFill>
+                    <a:srgbClr val="555555"/>
+                  </a:solidFill>
+                  <a:latin typeface="Arial"/>
+                  <a:ea typeface="Arial"/>
+                </a:rPr>
+                <a:t>초고DWPD 입구</a:t>
+              </a:r>
+            </a:p>
+          </p:txBody>
+        </p:sp>
+        <p:sp>
+          <p:nvSpPr>
+            <p:cNvPr id="225" name="Rounded Rectangle 224"/>
+            <p:cNvSpPr/>
+            <p:nvPr/>
+          </p:nvSpPr>
+          <p:spPr>
+            <a:xfrm>
+              <a:off x="15252192" y="6684264"/>
+              <a:ext cx="2340864" cy="1321308"/>
+            </a:xfrm>
+            <a:prstGeom prst="roundRect">
+              <a:avLst>
+                <a:gd name="adj" fmla="val 5536"/>
+              </a:avLst>
+            </a:prstGeom>
+            <a:noFill/>
+            <a:ln w="31750">
+              <a:solidFill>
+                <a:srgbClr val="E69F00"/>
+              </a:solidFill>
+            </a:ln>
+            <a:effectLst/>
+          </p:spPr>
+          <p:style>
+            <a:lnRef idx="1">
+              <a:schemeClr val="accent1"/>
+            </a:lnRef>
+            <a:fillRef idx="3">
+              <a:schemeClr val="accent1"/>
+            </a:fillRef>
+            <a:effectRef idx="2">
+              <a:schemeClr val="accent1"/>
+            </a:effectRef>
+            <a:fontRef idx="minor">
+              <a:schemeClr val="lt1"/>
+            </a:fontRef>
+          </p:style>
+          <p:txBody>
+            <a:bodyPr rtlCol="0" anchor="ctr"/>
+            <a:lstStyle/>
+            <a:p>
+              <a:pPr algn="ctr"/>
+            </a:p>
+          </p:txBody>
+        </p:sp>
+      </p:grpSp>
+      <p:grpSp>
+        <p:nvGrpSpPr>
+          <p:cNvPr id="249" name="Group 248"/>
+          <p:cNvGrpSpPr/>
+          <p:nvPr/>
+        </p:nvGrpSpPr>
+        <p:grpSpPr>
+          <a:xfrm>
+            <a:off x="8769096" y="4041648"/>
+            <a:ext cx="8823960" cy="5321808"/>
+            <a:chOff x="8769096" y="4041648"/>
+            <a:chExt cx="8823960" cy="5321808"/>
+          </a:xfrm>
+        </p:grpSpPr>
+        <p:pic>
+          <p:nvPicPr>
+            <p:cNvPr id="193" name="Picture 192" descr="portfolio_3d_slc.png"/>
+            <p:cNvPicPr>
+              <a:picLocks noChangeAspect="1"/>
+            </p:cNvPicPr>
+            <p:nvPr/>
+          </p:nvPicPr>
+          <p:blipFill>
+            <a:blip r:embed="rId6"/>
+            <a:stretch>
+              <a:fillRect/>
+            </a:stretch>
+          </p:blipFill>
+          <p:spPr>
+            <a:xfrm>
+              <a:off x="8769096" y="4041648"/>
+              <a:ext cx="6303421" cy="5321808"/>
+            </a:xfrm>
+            <a:prstGeom prst="rect">
+              <a:avLst/>
+            </a:prstGeom>
+          </p:spPr>
+        </p:pic>
+        <p:sp>
+          <p:nvSpPr>
+            <p:cNvPr id="234" name="TextBox 233"/>
+            <p:cNvSpPr txBox="1"/>
+            <p:nvPr/>
+          </p:nvSpPr>
+          <p:spPr>
+            <a:xfrm>
+              <a:off x="15462504" y="8791956"/>
+              <a:ext cx="2048256" cy="256032"/>
+            </a:xfrm>
+            <a:prstGeom prst="rect">
+              <a:avLst/>
+            </a:prstGeom>
+            <a:noFill/>
+          </p:spPr>
+          <p:txBody>
+            <a:bodyPr wrap="square" anchor="ctr" lIns="0" rIns="0" tIns="0" bIns="0">
+              <a:spAutoFit/>
+            </a:bodyPr>
+            <a:lstStyle/>
+            <a:p>
+              <a:pPr algn="l">
+                <a:lnSpc>
+                  <a:spcPct val="110000"/>
+                </a:lnSpc>
+              </a:pPr>
+              <a:r>
+                <a:rPr sz="1600" b="1">
+                  <a:solidFill>
+                    <a:srgbClr val="CC79A7"/>
+                  </a:solidFill>
+                  <a:latin typeface="Arial"/>
+                  <a:ea typeface="Arial"/>
+                </a:rPr>
+                <a:t>30 → 100 DWPD</a:t>
+              </a:r>
+            </a:p>
+          </p:txBody>
+        </p:sp>
+        <p:sp>
+          <p:nvSpPr>
+            <p:cNvPr id="235" name="TextBox 234"/>
+            <p:cNvSpPr txBox="1"/>
+            <p:nvPr/>
+          </p:nvSpPr>
+          <p:spPr>
+            <a:xfrm>
+              <a:off x="15462504" y="9011412"/>
+              <a:ext cx="2048256" cy="237744"/>
+            </a:xfrm>
+            <a:prstGeom prst="rect">
+              <a:avLst/>
+            </a:prstGeom>
+            <a:noFill/>
+          </p:spPr>
+          <p:txBody>
+            <a:bodyPr wrap="square" anchor="ctr" lIns="0" rIns="0" tIns="0" bIns="0">
+              <a:spAutoFit/>
+            </a:bodyPr>
+            <a:lstStyle/>
+            <a:p>
+              <a:pPr algn="l">
+                <a:lnSpc>
+                  <a:spcPct val="110000"/>
+                </a:lnSpc>
+              </a:pPr>
+              <a:r>
+                <a:rPr sz="1500" b="0">
+                  <a:solidFill>
+                    <a:srgbClr val="555555"/>
+                  </a:solidFill>
+                  <a:latin typeface="Arial"/>
+                  <a:ea typeface="Arial"/>
+                </a:rPr>
+                <a:t>초고DWPD KV (공백)</a:t>
+              </a:r>
+            </a:p>
+          </p:txBody>
+        </p:sp>
+        <p:sp>
+          <p:nvSpPr>
+            <p:cNvPr id="236" name="Rounded Rectangle 235"/>
+            <p:cNvSpPr/>
+            <p:nvPr/>
+          </p:nvSpPr>
+          <p:spPr>
+            <a:xfrm>
+              <a:off x="15252192" y="8023860"/>
+              <a:ext cx="2340864" cy="1321308"/>
+            </a:xfrm>
+            <a:prstGeom prst="roundRect">
+              <a:avLst>
+                <a:gd name="adj" fmla="val 5536"/>
+              </a:avLst>
+            </a:prstGeom>
+            <a:noFill/>
+            <a:ln w="31750">
+              <a:solidFill>
+                <a:srgbClr val="CC79A7"/>
+              </a:solidFill>
+            </a:ln>
+            <a:effectLst/>
+          </p:spPr>
+          <p:style>
+            <a:lnRef idx="1">
+              <a:schemeClr val="accent1"/>
+            </a:lnRef>
+            <a:fillRef idx="3">
+              <a:schemeClr val="accent1"/>
+            </a:fillRef>
+            <a:effectRef idx="2">
+              <a:schemeClr val="accent1"/>
+            </a:effectRef>
+            <a:fontRef idx="minor">
+              <a:schemeClr val="lt1"/>
+            </a:fontRef>
+          </p:style>
+          <p:txBody>
+            <a:bodyPr rtlCol="0" anchor="ctr"/>
+            <a:lstStyle/>
+            <a:p>
+              <a:pPr algn="ctr"/>
+            </a:p>
+          </p:txBody>
+        </p:sp>
+      </p:grpSp>
+      <p:sp>
+        <p:nvSpPr>
+          <p:cNvPr id="204" name="Oval 203"/>
           <p:cNvSpPr/>
           <p:nvPr/>
         </p:nvSpPr>
@@ -36206,7 +37798,7 @@
       </p:sp>
       <p:sp>
         <p:nvSpPr>
-          <p:cNvPr id="200" name="TextBox 199"/>
+          <p:cNvPr id="205" name="TextBox 204"/>
           <p:cNvSpPr txBox="1"/>
           <p:nvPr/>
         </p:nvSpPr>
@@ -36246,147 +37838,59 @@
       </p:sp>
       <p:sp>
         <p:nvSpPr>
-          <p:cNvPr id="201" name="Rounded Rectangle 200"/>
-          <p:cNvSpPr/>
-          <p:nvPr/>
-        </p:nvSpPr>
-        <p:spPr>
-          <a:xfrm>
-            <a:off x="15279624" y="5372100"/>
-            <a:ext cx="2286000" cy="1266444"/>
-          </a:xfrm>
-          <a:prstGeom prst="roundRect">
-            <a:avLst>
-              <a:gd name="adj" fmla="val 5776"/>
-            </a:avLst>
-          </a:prstGeom>
-          <a:solidFill>
-            <a:srgbClr val="F5F5F5"/>
-          </a:solidFill>
-          <a:ln>
-            <a:noFill/>
-          </a:ln>
-          <a:effectLst/>
-        </p:spPr>
-        <p:style>
-          <a:lnRef idx="1">
-            <a:schemeClr val="accent1"/>
-          </a:lnRef>
-          <a:fillRef idx="3">
-            <a:schemeClr val="accent1"/>
-          </a:fillRef>
-          <a:effectRef idx="2">
-            <a:schemeClr val="accent1"/>
-          </a:effectRef>
-          <a:fontRef idx="minor">
-            <a:schemeClr val="lt1"/>
-          </a:fontRef>
-        </p:style>
-        <p:txBody>
-          <a:bodyPr rtlCol="0" anchor="ctr"/>
-          <a:lstStyle/>
-          <a:p>
-            <a:pPr algn="ctr"/>
-          </a:p>
-        </p:txBody>
-      </p:sp>
-      <p:sp>
-        <p:nvSpPr>
-          <p:cNvPr id="202" name="Rectangle 201"/>
-          <p:cNvSpPr/>
-          <p:nvPr/>
-        </p:nvSpPr>
-        <p:spPr>
-          <a:xfrm>
-            <a:off x="15279624" y="5372100"/>
-            <a:ext cx="73152" cy="1266444"/>
-          </a:xfrm>
-          <a:prstGeom prst="rect">
+          <p:cNvPr id="215" name="Oval 214"/>
+          <p:cNvSpPr/>
+          <p:nvPr/>
+        </p:nvSpPr>
+        <p:spPr>
+          <a:xfrm>
+            <a:off x="11015097" y="5605063"/>
+            <a:ext cx="347472" cy="347472"/>
+          </a:xfrm>
+          <a:prstGeom prst="ellipse">
             <a:avLst/>
           </a:prstGeom>
           <a:solidFill>
             <a:srgbClr val="0072B2"/>
           </a:solidFill>
-          <a:ln>
-            <a:noFill/>
-          </a:ln>
-          <a:effectLst/>
-        </p:spPr>
-        <p:style>
-          <a:lnRef idx="1">
-            <a:schemeClr val="accent1"/>
-          </a:lnRef>
-          <a:fillRef idx="3">
-            <a:schemeClr val="accent1"/>
-          </a:fillRef>
-          <a:effectRef idx="2">
-            <a:schemeClr val="accent1"/>
-          </a:effectRef>
-          <a:fontRef idx="minor">
-            <a:schemeClr val="lt1"/>
-          </a:fontRef>
-        </p:style>
-        <p:txBody>
-          <a:bodyPr rtlCol="0" anchor="ctr"/>
-          <a:lstStyle/>
-          <a:p>
-            <a:pPr algn="ctr"/>
-          </a:p>
-        </p:txBody>
-      </p:sp>
-      <p:sp>
-        <p:nvSpPr>
-          <p:cNvPr id="203" name="Oval 202"/>
-          <p:cNvSpPr/>
-          <p:nvPr/>
-        </p:nvSpPr>
-        <p:spPr>
-          <a:xfrm>
-            <a:off x="15407640" y="5436107"/>
-            <a:ext cx="347472" cy="347472"/>
-          </a:xfrm>
-          <a:prstGeom prst="ellipse">
-            <a:avLst/>
-          </a:prstGeom>
-          <a:solidFill>
-            <a:srgbClr val="0072B2"/>
-          </a:solidFill>
-          <a:ln>
-            <a:noFill/>
-          </a:ln>
-          <a:effectLst/>
-        </p:spPr>
-        <p:style>
-          <a:lnRef idx="1">
-            <a:schemeClr val="accent1"/>
-          </a:lnRef>
-          <a:fillRef idx="3">
-            <a:schemeClr val="accent1"/>
-          </a:fillRef>
-          <a:effectRef idx="2">
-            <a:schemeClr val="accent1"/>
-          </a:effectRef>
-          <a:fontRef idx="minor">
-            <a:schemeClr val="lt1"/>
-          </a:fontRef>
-        </p:style>
-        <p:txBody>
-          <a:bodyPr rtlCol="0" anchor="ctr"/>
-          <a:lstStyle/>
-          <a:p>
-            <a:pPr algn="ctr"/>
-          </a:p>
-        </p:txBody>
-      </p:sp>
-      <p:sp>
-        <p:nvSpPr>
-          <p:cNvPr id="204" name="TextBox 203"/>
+          <a:ln w="19050">
+            <a:solidFill>
+              <a:srgbClr val="FFFFFF"/>
+            </a:solidFill>
+          </a:ln>
+          <a:effectLst/>
+        </p:spPr>
+        <p:style>
+          <a:lnRef idx="1">
+            <a:schemeClr val="accent1"/>
+          </a:lnRef>
+          <a:fillRef idx="3">
+            <a:schemeClr val="accent1"/>
+          </a:fillRef>
+          <a:effectRef idx="2">
+            <a:schemeClr val="accent1"/>
+          </a:effectRef>
+          <a:fontRef idx="minor">
+            <a:schemeClr val="lt1"/>
+          </a:fontRef>
+        </p:style>
+        <p:txBody>
+          <a:bodyPr rtlCol="0" anchor="ctr"/>
+          <a:lstStyle/>
+          <a:p>
+            <a:pPr algn="ctr"/>
+          </a:p>
+        </p:txBody>
+      </p:sp>
+      <p:sp>
+        <p:nvSpPr>
+          <p:cNvPr id="216" name="TextBox 215"/>
           <p:cNvSpPr txBox="1"/>
           <p:nvPr/>
         </p:nvSpPr>
         <p:spPr>
           <a:xfrm>
-            <a:off x="15407640" y="5436107"/>
+            <a:off x="11015097" y="5605063"/>
             <a:ext cx="347472" cy="347472"/>
           </a:xfrm>
           <a:prstGeom prst="rect">
@@ -36418,166 +37922,22 @@
           </a:p>
         </p:txBody>
       </p:sp>
-      <p:pic>
-        <p:nvPicPr>
-          <p:cNvPr id="205" name="Picture 204" descr="p_pm1753.png"/>
-          <p:cNvPicPr>
-            <a:picLocks noChangeAspect="1"/>
-          </p:cNvPicPr>
-          <p:nvPr/>
-        </p:nvPicPr>
-        <p:blipFill>
-          <a:blip r:embed="rId4"/>
-          <a:stretch>
-            <a:fillRect/>
-          </a:stretch>
-        </p:blipFill>
-        <p:spPr>
-          <a:xfrm>
-            <a:off x="16327027" y="5399531"/>
-            <a:ext cx="648392" cy="475488"/>
-          </a:xfrm>
-          <a:prstGeom prst="rect">
-            <a:avLst/>
-          </a:prstGeom>
-        </p:spPr>
-      </p:pic>
-      <p:sp>
-        <p:nvSpPr>
-          <p:cNvPr id="206" name="TextBox 205"/>
-          <p:cNvSpPr txBox="1"/>
-          <p:nvPr/>
-        </p:nvSpPr>
-        <p:spPr>
-          <a:xfrm>
-            <a:off x="15462504" y="5875020"/>
-            <a:ext cx="2048256" cy="256032"/>
-          </a:xfrm>
-          <a:prstGeom prst="rect">
-            <a:avLst/>
-          </a:prstGeom>
-          <a:noFill/>
-        </p:spPr>
-        <p:txBody>
-          <a:bodyPr wrap="square" anchor="ctr" lIns="0" rIns="0" tIns="0" bIns="0">
-            <a:spAutoFit/>
-          </a:bodyPr>
-          <a:lstStyle/>
-          <a:p>
-            <a:pPr algn="l">
-              <a:lnSpc>
-                <a:spcPct val="110000"/>
-              </a:lnSpc>
-            </a:pPr>
-            <a:r>
-              <a:rPr sz="1500" b="1">
-                <a:solidFill>
-                  <a:srgbClr val="1A1A1A"/>
-                </a:solidFill>
-                <a:latin typeface="Arial"/>
-                <a:ea typeface="Arial"/>
-              </a:rPr>
-              <a:t>PM1753 · TLC</a:t>
-            </a:r>
-          </a:p>
-        </p:txBody>
-      </p:sp>
-      <p:sp>
-        <p:nvSpPr>
-          <p:cNvPr id="207" name="TextBox 206"/>
-          <p:cNvSpPr txBox="1"/>
-          <p:nvPr/>
-        </p:nvSpPr>
-        <p:spPr>
-          <a:xfrm>
-            <a:off x="15462504" y="6112764"/>
-            <a:ext cx="2048256" cy="256032"/>
-          </a:xfrm>
-          <a:prstGeom prst="rect">
-            <a:avLst/>
-          </a:prstGeom>
-          <a:noFill/>
-        </p:spPr>
-        <p:txBody>
-          <a:bodyPr wrap="square" anchor="ctr" lIns="0" rIns="0" tIns="0" bIns="0">
-            <a:spAutoFit/>
-          </a:bodyPr>
-          <a:lstStyle/>
-          <a:p>
-            <a:pPr algn="l">
-              <a:lnSpc>
-                <a:spcPct val="110000"/>
-              </a:lnSpc>
-            </a:pPr>
-            <a:r>
-              <a:rPr sz="1600" b="1">
-                <a:solidFill>
-                  <a:srgbClr val="0072B2"/>
-                </a:solidFill>
-                <a:latin typeface="Arial"/>
-                <a:ea typeface="Arial"/>
-              </a:rPr>
-              <a:t>1 → 3 DWPD</a:t>
-            </a:r>
-          </a:p>
-        </p:txBody>
-      </p:sp>
-      <p:sp>
-        <p:nvSpPr>
-          <p:cNvPr id="208" name="TextBox 207"/>
-          <p:cNvSpPr txBox="1"/>
-          <p:nvPr/>
-        </p:nvSpPr>
-        <p:spPr>
-          <a:xfrm>
-            <a:off x="15462504" y="6332220"/>
-            <a:ext cx="2048256" cy="237744"/>
-          </a:xfrm>
-          <a:prstGeom prst="rect">
-            <a:avLst/>
-          </a:prstGeom>
-          <a:noFill/>
-        </p:spPr>
-        <p:txBody>
-          <a:bodyPr wrap="square" anchor="ctr" lIns="0" rIns="0" tIns="0" bIns="0">
-            <a:spAutoFit/>
-          </a:bodyPr>
-          <a:lstStyle/>
-          <a:p>
-            <a:pPr algn="l">
-              <a:lnSpc>
-                <a:spcPct val="110000"/>
-              </a:lnSpc>
-            </a:pPr>
-            <a:r>
-              <a:rPr sz="1500" b="0">
-                <a:solidFill>
-                  <a:srgbClr val="555555"/>
-                </a:solidFill>
-                <a:latin typeface="Arial"/>
-                <a:ea typeface="Arial"/>
-              </a:rPr>
-              <a:t>쓰기 많은 KV</a:t>
-            </a:r>
-          </a:p>
-        </p:txBody>
-      </p:sp>
-      <p:sp>
-        <p:nvSpPr>
-          <p:cNvPr id="209" name="Oval 208"/>
-          <p:cNvSpPr/>
-          <p:nvPr/>
-        </p:nvSpPr>
-        <p:spPr>
-          <a:xfrm>
-            <a:off x="11015097" y="5605063"/>
+      <p:sp>
+        <p:nvSpPr>
+          <p:cNvPr id="226" name="Oval 225"/>
+          <p:cNvSpPr/>
+          <p:nvPr/>
+        </p:nvSpPr>
+        <p:spPr>
+          <a:xfrm>
+            <a:off x="11326206" y="6233717"/>
             <a:ext cx="347472" cy="347472"/>
           </a:xfrm>
           <a:prstGeom prst="ellipse">
             <a:avLst/>
           </a:prstGeom>
           <a:solidFill>
-            <a:srgbClr val="0072B2"/>
+            <a:srgbClr val="E69F00"/>
           </a:solidFill>
           <a:ln w="19050">
             <a:solidFill>
@@ -36610,187 +37970,13 @@
       </p:sp>
       <p:sp>
         <p:nvSpPr>
-          <p:cNvPr id="210" name="TextBox 209"/>
+          <p:cNvPr id="227" name="TextBox 226"/>
           <p:cNvSpPr txBox="1"/>
           <p:nvPr/>
         </p:nvSpPr>
         <p:spPr>
           <a:xfrm>
-            <a:off x="11015097" y="5605063"/>
-            <a:ext cx="347472" cy="347472"/>
-          </a:xfrm>
-          <a:prstGeom prst="rect">
-            <a:avLst/>
-          </a:prstGeom>
-          <a:noFill/>
-        </p:spPr>
-        <p:txBody>
-          <a:bodyPr wrap="square" anchor="ctr" lIns="0" rIns="0" tIns="0" bIns="0">
-            <a:spAutoFit/>
-          </a:bodyPr>
-          <a:lstStyle/>
-          <a:p>
-            <a:pPr algn="ctr">
-              <a:lnSpc>
-                <a:spcPct val="110000"/>
-              </a:lnSpc>
-            </a:pPr>
-            <a:r>
-              <a:rPr sz="1600" b="1">
-                <a:solidFill>
-                  <a:srgbClr val="FFFFFF"/>
-                </a:solidFill>
-                <a:latin typeface="Arial"/>
-                <a:ea typeface="Arial"/>
-              </a:rPr>
-              <a:t>2</a:t>
-            </a:r>
-          </a:p>
-        </p:txBody>
-      </p:sp>
-      <p:sp>
-        <p:nvSpPr>
-          <p:cNvPr id="211" name="Rounded Rectangle 210"/>
-          <p:cNvSpPr/>
-          <p:nvPr/>
-        </p:nvSpPr>
-        <p:spPr>
-          <a:xfrm>
-            <a:off x="15279624" y="6711696"/>
-            <a:ext cx="2286000" cy="1266444"/>
-          </a:xfrm>
-          <a:prstGeom prst="roundRect">
-            <a:avLst>
-              <a:gd name="adj" fmla="val 5776"/>
-            </a:avLst>
-          </a:prstGeom>
-          <a:solidFill>
-            <a:srgbClr val="F5F5F5"/>
-          </a:solidFill>
-          <a:ln>
-            <a:noFill/>
-          </a:ln>
-          <a:effectLst/>
-        </p:spPr>
-        <p:style>
-          <a:lnRef idx="1">
-            <a:schemeClr val="accent1"/>
-          </a:lnRef>
-          <a:fillRef idx="3">
-            <a:schemeClr val="accent1"/>
-          </a:fillRef>
-          <a:effectRef idx="2">
-            <a:schemeClr val="accent1"/>
-          </a:effectRef>
-          <a:fontRef idx="minor">
-            <a:schemeClr val="lt1"/>
-          </a:fontRef>
-        </p:style>
-        <p:txBody>
-          <a:bodyPr rtlCol="0" anchor="ctr"/>
-          <a:lstStyle/>
-          <a:p>
-            <a:pPr algn="ctr"/>
-          </a:p>
-        </p:txBody>
-      </p:sp>
-      <p:sp>
-        <p:nvSpPr>
-          <p:cNvPr id="212" name="Rectangle 211"/>
-          <p:cNvSpPr/>
-          <p:nvPr/>
-        </p:nvSpPr>
-        <p:spPr>
-          <a:xfrm>
-            <a:off x="15279624" y="6711696"/>
-            <a:ext cx="73152" cy="1266444"/>
-          </a:xfrm>
-          <a:prstGeom prst="rect">
-            <a:avLst/>
-          </a:prstGeom>
-          <a:solidFill>
-            <a:srgbClr val="E69F00"/>
-          </a:solidFill>
-          <a:ln>
-            <a:noFill/>
-          </a:ln>
-          <a:effectLst/>
-        </p:spPr>
-        <p:style>
-          <a:lnRef idx="1">
-            <a:schemeClr val="accent1"/>
-          </a:lnRef>
-          <a:fillRef idx="3">
-            <a:schemeClr val="accent1"/>
-          </a:fillRef>
-          <a:effectRef idx="2">
-            <a:schemeClr val="accent1"/>
-          </a:effectRef>
-          <a:fontRef idx="minor">
-            <a:schemeClr val="lt1"/>
-          </a:fontRef>
-        </p:style>
-        <p:txBody>
-          <a:bodyPr rtlCol="0" anchor="ctr"/>
-          <a:lstStyle/>
-          <a:p>
-            <a:pPr algn="ctr"/>
-          </a:p>
-        </p:txBody>
-      </p:sp>
-      <p:sp>
-        <p:nvSpPr>
-          <p:cNvPr id="213" name="Oval 212"/>
-          <p:cNvSpPr/>
-          <p:nvPr/>
-        </p:nvSpPr>
-        <p:spPr>
-          <a:xfrm>
-            <a:off x="15407640" y="6775704"/>
-            <a:ext cx="347472" cy="347472"/>
-          </a:xfrm>
-          <a:prstGeom prst="ellipse">
-            <a:avLst/>
-          </a:prstGeom>
-          <a:solidFill>
-            <a:srgbClr val="E69F00"/>
-          </a:solidFill>
-          <a:ln>
-            <a:noFill/>
-          </a:ln>
-          <a:effectLst/>
-        </p:spPr>
-        <p:style>
-          <a:lnRef idx="1">
-            <a:schemeClr val="accent1"/>
-          </a:lnRef>
-          <a:fillRef idx="3">
-            <a:schemeClr val="accent1"/>
-          </a:fillRef>
-          <a:effectRef idx="2">
-            <a:schemeClr val="accent1"/>
-          </a:effectRef>
-          <a:fontRef idx="minor">
-            <a:schemeClr val="lt1"/>
-          </a:fontRef>
-        </p:style>
-        <p:txBody>
-          <a:bodyPr rtlCol="0" anchor="ctr"/>
-          <a:lstStyle/>
-          <a:p>
-            <a:pPr algn="ctr"/>
-          </a:p>
-        </p:txBody>
-      </p:sp>
-      <p:sp>
-        <p:nvSpPr>
-          <p:cNvPr id="214" name="TextBox 213"/>
-          <p:cNvSpPr txBox="1"/>
-          <p:nvPr/>
-        </p:nvSpPr>
-        <p:spPr>
-          <a:xfrm>
-            <a:off x="15407640" y="6775704"/>
+            <a:off x="11326206" y="6233717"/>
             <a:ext cx="347472" cy="347472"/>
           </a:xfrm>
           <a:prstGeom prst="rect">
@@ -36822,166 +38008,22 @@
           </a:p>
         </p:txBody>
       </p:sp>
-      <p:pic>
-        <p:nvPicPr>
-          <p:cNvPr id="215" name="Picture 214" descr="p_pm1755.png"/>
-          <p:cNvPicPr>
-            <a:picLocks noChangeAspect="1"/>
-          </p:cNvPicPr>
-          <p:nvPr/>
-        </p:nvPicPr>
-        <p:blipFill>
-          <a:blip r:embed="rId5"/>
-          <a:stretch>
-            <a:fillRect/>
-          </a:stretch>
-        </p:blipFill>
-        <p:spPr>
-          <a:xfrm>
-            <a:off x="16327027" y="6739128"/>
-            <a:ext cx="648392" cy="475488"/>
-          </a:xfrm>
-          <a:prstGeom prst="rect">
-            <a:avLst/>
-          </a:prstGeom>
-        </p:spPr>
-      </p:pic>
-      <p:sp>
-        <p:nvSpPr>
-          <p:cNvPr id="216" name="TextBox 215"/>
-          <p:cNvSpPr txBox="1"/>
-          <p:nvPr/>
-        </p:nvSpPr>
-        <p:spPr>
-          <a:xfrm>
-            <a:off x="15462504" y="7214616"/>
-            <a:ext cx="2048256" cy="256032"/>
-          </a:xfrm>
-          <a:prstGeom prst="rect">
-            <a:avLst/>
-          </a:prstGeom>
-          <a:noFill/>
-        </p:spPr>
-        <p:txBody>
-          <a:bodyPr wrap="square" anchor="ctr" lIns="0" rIns="0" tIns="0" bIns="0">
-            <a:spAutoFit/>
-          </a:bodyPr>
-          <a:lstStyle/>
-          <a:p>
-            <a:pPr algn="l">
-              <a:lnSpc>
-                <a:spcPct val="110000"/>
-              </a:lnSpc>
-            </a:pPr>
-            <a:r>
-              <a:rPr sz="1500" b="1">
-                <a:solidFill>
-                  <a:srgbClr val="1A1A1A"/>
-                </a:solidFill>
-                <a:latin typeface="Arial"/>
-                <a:ea typeface="Arial"/>
-              </a:rPr>
-              <a:t>PM1755 · 고내구 TLC</a:t>
-            </a:r>
-          </a:p>
-        </p:txBody>
-      </p:sp>
-      <p:sp>
-        <p:nvSpPr>
-          <p:cNvPr id="217" name="TextBox 216"/>
-          <p:cNvSpPr txBox="1"/>
-          <p:nvPr/>
-        </p:nvSpPr>
-        <p:spPr>
-          <a:xfrm>
-            <a:off x="15462504" y="7452360"/>
-            <a:ext cx="2048256" cy="256032"/>
-          </a:xfrm>
-          <a:prstGeom prst="rect">
-            <a:avLst/>
-          </a:prstGeom>
-          <a:noFill/>
-        </p:spPr>
-        <p:txBody>
-          <a:bodyPr wrap="square" anchor="ctr" lIns="0" rIns="0" tIns="0" bIns="0">
-            <a:spAutoFit/>
-          </a:bodyPr>
-          <a:lstStyle/>
-          <a:p>
-            <a:pPr algn="l">
-              <a:lnSpc>
-                <a:spcPct val="110000"/>
-              </a:lnSpc>
-            </a:pPr>
-            <a:r>
-              <a:rPr sz="1600" b="1">
-                <a:solidFill>
-                  <a:srgbClr val="E69F00"/>
-                </a:solidFill>
-                <a:latin typeface="Arial"/>
-                <a:ea typeface="Arial"/>
-              </a:rPr>
-              <a:t>3 → 9 DWPD</a:t>
-            </a:r>
-          </a:p>
-        </p:txBody>
-      </p:sp>
-      <p:sp>
-        <p:nvSpPr>
-          <p:cNvPr id="218" name="TextBox 217"/>
-          <p:cNvSpPr txBox="1"/>
-          <p:nvPr/>
-        </p:nvSpPr>
-        <p:spPr>
-          <a:xfrm>
-            <a:off x="15462504" y="7671816"/>
-            <a:ext cx="2048256" cy="237744"/>
-          </a:xfrm>
-          <a:prstGeom prst="rect">
-            <a:avLst/>
-          </a:prstGeom>
-          <a:noFill/>
-        </p:spPr>
-        <p:txBody>
-          <a:bodyPr wrap="square" anchor="ctr" lIns="0" rIns="0" tIns="0" bIns="0">
-            <a:spAutoFit/>
-          </a:bodyPr>
-          <a:lstStyle/>
-          <a:p>
-            <a:pPr algn="l">
-              <a:lnSpc>
-                <a:spcPct val="110000"/>
-              </a:lnSpc>
-            </a:pPr>
-            <a:r>
-              <a:rPr sz="1500" b="0">
-                <a:solidFill>
-                  <a:srgbClr val="555555"/>
-                </a:solidFill>
-                <a:latin typeface="Arial"/>
-                <a:ea typeface="Arial"/>
-              </a:rPr>
-              <a:t>초고DWPD 입구</a:t>
-            </a:r>
-          </a:p>
-        </p:txBody>
-      </p:sp>
-      <p:sp>
-        <p:nvSpPr>
-          <p:cNvPr id="219" name="Oval 218"/>
-          <p:cNvSpPr/>
-          <p:nvPr/>
-        </p:nvSpPr>
-        <p:spPr>
-          <a:xfrm>
-            <a:off x="11326206" y="6233717"/>
+      <p:sp>
+        <p:nvSpPr>
+          <p:cNvPr id="237" name="Oval 236"/>
+          <p:cNvSpPr/>
+          <p:nvPr/>
+        </p:nvSpPr>
+        <p:spPr>
+          <a:xfrm>
+            <a:off x="12352293" y="6901321"/>
             <a:ext cx="347472" cy="347472"/>
           </a:xfrm>
           <a:prstGeom prst="ellipse">
             <a:avLst/>
           </a:prstGeom>
           <a:solidFill>
-            <a:srgbClr val="E69F00"/>
+            <a:srgbClr val="CC79A7"/>
           </a:solidFill>
           <a:ln w="19050">
             <a:solidFill>
@@ -37014,187 +38056,13 @@
       </p:sp>
       <p:sp>
         <p:nvSpPr>
-          <p:cNvPr id="220" name="TextBox 219"/>
+          <p:cNvPr id="238" name="TextBox 237"/>
           <p:cNvSpPr txBox="1"/>
           <p:nvPr/>
         </p:nvSpPr>
         <p:spPr>
           <a:xfrm>
-            <a:off x="11326206" y="6233717"/>
-            <a:ext cx="347472" cy="347472"/>
-          </a:xfrm>
-          <a:prstGeom prst="rect">
-            <a:avLst/>
-          </a:prstGeom>
-          <a:noFill/>
-        </p:spPr>
-        <p:txBody>
-          <a:bodyPr wrap="square" anchor="ctr" lIns="0" rIns="0" tIns="0" bIns="0">
-            <a:spAutoFit/>
-          </a:bodyPr>
-          <a:lstStyle/>
-          <a:p>
-            <a:pPr algn="ctr">
-              <a:lnSpc>
-                <a:spcPct val="110000"/>
-              </a:lnSpc>
-            </a:pPr>
-            <a:r>
-              <a:rPr sz="1600" b="1">
-                <a:solidFill>
-                  <a:srgbClr val="FFFFFF"/>
-                </a:solidFill>
-                <a:latin typeface="Arial"/>
-                <a:ea typeface="Arial"/>
-              </a:rPr>
-              <a:t>3</a:t>
-            </a:r>
-          </a:p>
-        </p:txBody>
-      </p:sp>
-      <p:sp>
-        <p:nvSpPr>
-          <p:cNvPr id="221" name="Rounded Rectangle 220"/>
-          <p:cNvSpPr/>
-          <p:nvPr/>
-        </p:nvSpPr>
-        <p:spPr>
-          <a:xfrm>
-            <a:off x="15279624" y="8051292"/>
-            <a:ext cx="2286000" cy="1266444"/>
-          </a:xfrm>
-          <a:prstGeom prst="roundRect">
-            <a:avLst>
-              <a:gd name="adj" fmla="val 5776"/>
-            </a:avLst>
-          </a:prstGeom>
-          <a:solidFill>
-            <a:srgbClr val="F5F5F5"/>
-          </a:solidFill>
-          <a:ln>
-            <a:noFill/>
-          </a:ln>
-          <a:effectLst/>
-        </p:spPr>
-        <p:style>
-          <a:lnRef idx="1">
-            <a:schemeClr val="accent1"/>
-          </a:lnRef>
-          <a:fillRef idx="3">
-            <a:schemeClr val="accent1"/>
-          </a:fillRef>
-          <a:effectRef idx="2">
-            <a:schemeClr val="accent1"/>
-          </a:effectRef>
-          <a:fontRef idx="minor">
-            <a:schemeClr val="lt1"/>
-          </a:fontRef>
-        </p:style>
-        <p:txBody>
-          <a:bodyPr rtlCol="0" anchor="ctr"/>
-          <a:lstStyle/>
-          <a:p>
-            <a:pPr algn="ctr"/>
-          </a:p>
-        </p:txBody>
-      </p:sp>
-      <p:sp>
-        <p:nvSpPr>
-          <p:cNvPr id="222" name="Rectangle 221"/>
-          <p:cNvSpPr/>
-          <p:nvPr/>
-        </p:nvSpPr>
-        <p:spPr>
-          <a:xfrm>
-            <a:off x="15279624" y="8051292"/>
-            <a:ext cx="73152" cy="1266444"/>
-          </a:xfrm>
-          <a:prstGeom prst="rect">
-            <a:avLst/>
-          </a:prstGeom>
-          <a:solidFill>
-            <a:srgbClr val="CC79A7"/>
-          </a:solidFill>
-          <a:ln>
-            <a:noFill/>
-          </a:ln>
-          <a:effectLst/>
-        </p:spPr>
-        <p:style>
-          <a:lnRef idx="1">
-            <a:schemeClr val="accent1"/>
-          </a:lnRef>
-          <a:fillRef idx="3">
-            <a:schemeClr val="accent1"/>
-          </a:fillRef>
-          <a:effectRef idx="2">
-            <a:schemeClr val="accent1"/>
-          </a:effectRef>
-          <a:fontRef idx="minor">
-            <a:schemeClr val="lt1"/>
-          </a:fontRef>
-        </p:style>
-        <p:txBody>
-          <a:bodyPr rtlCol="0" anchor="ctr"/>
-          <a:lstStyle/>
-          <a:p>
-            <a:pPr algn="ctr"/>
-          </a:p>
-        </p:txBody>
-      </p:sp>
-      <p:sp>
-        <p:nvSpPr>
-          <p:cNvPr id="223" name="Oval 222"/>
-          <p:cNvSpPr/>
-          <p:nvPr/>
-        </p:nvSpPr>
-        <p:spPr>
-          <a:xfrm>
-            <a:off x="15407640" y="8115300"/>
-            <a:ext cx="347472" cy="347472"/>
-          </a:xfrm>
-          <a:prstGeom prst="ellipse">
-            <a:avLst/>
-          </a:prstGeom>
-          <a:solidFill>
-            <a:srgbClr val="CC79A7"/>
-          </a:solidFill>
-          <a:ln>
-            <a:noFill/>
-          </a:ln>
-          <a:effectLst/>
-        </p:spPr>
-        <p:style>
-          <a:lnRef idx="1">
-            <a:schemeClr val="accent1"/>
-          </a:lnRef>
-          <a:fillRef idx="3">
-            <a:schemeClr val="accent1"/>
-          </a:fillRef>
-          <a:effectRef idx="2">
-            <a:schemeClr val="accent1"/>
-          </a:effectRef>
-          <a:fontRef idx="minor">
-            <a:schemeClr val="lt1"/>
-          </a:fontRef>
-        </p:style>
-        <p:txBody>
-          <a:bodyPr rtlCol="0" anchor="ctr"/>
-          <a:lstStyle/>
-          <a:p>
-            <a:pPr algn="ctr"/>
-          </a:p>
-        </p:txBody>
-      </p:sp>
-      <p:sp>
-        <p:nvSpPr>
-          <p:cNvPr id="224" name="TextBox 223"/>
-          <p:cNvSpPr txBox="1"/>
-          <p:nvPr/>
-        </p:nvSpPr>
-        <p:spPr>
-          <a:xfrm>
-            <a:off x="15407640" y="8115300"/>
+            <a:off x="12352293" y="6901321"/>
             <a:ext cx="347472" cy="347472"/>
           </a:xfrm>
           <a:prstGeom prst="rect">
@@ -37226,537 +38094,9 @@
           </a:p>
         </p:txBody>
       </p:sp>
-      <p:pic>
-        <p:nvPicPr>
-          <p:cNvPr id="225" name="Picture 224" descr="p_zssd.png"/>
-          <p:cNvPicPr>
-            <a:picLocks noChangeAspect="1"/>
-          </p:cNvPicPr>
-          <p:nvPr/>
-        </p:nvPicPr>
-        <p:blipFill>
-          <a:blip r:embed="rId6"/>
-          <a:stretch>
-            <a:fillRect/>
-          </a:stretch>
-        </p:blipFill>
-        <p:spPr>
-          <a:xfrm>
-            <a:off x="16256446" y="8078724"/>
-            <a:ext cx="789555" cy="475488"/>
-          </a:xfrm>
-          <a:prstGeom prst="rect">
-            <a:avLst/>
-          </a:prstGeom>
-        </p:spPr>
-      </p:pic>
-      <p:sp>
-        <p:nvSpPr>
-          <p:cNvPr id="226" name="TextBox 225"/>
-          <p:cNvSpPr txBox="1"/>
-          <p:nvPr/>
-        </p:nvSpPr>
-        <p:spPr>
-          <a:xfrm>
-            <a:off x="15462504" y="8554212"/>
-            <a:ext cx="2048256" cy="256032"/>
-          </a:xfrm>
-          <a:prstGeom prst="rect">
-            <a:avLst/>
-          </a:prstGeom>
-          <a:noFill/>
-        </p:spPr>
-        <p:txBody>
-          <a:bodyPr wrap="square" anchor="ctr" lIns="0" rIns="0" tIns="0" bIns="0">
-            <a:spAutoFit/>
-          </a:bodyPr>
-          <a:lstStyle/>
-          <a:p>
-            <a:pPr algn="l">
-              <a:lnSpc>
-                <a:spcPct val="110000"/>
-              </a:lnSpc>
-            </a:pPr>
-            <a:r>
-              <a:rPr sz="1500" b="1">
-                <a:solidFill>
-                  <a:srgbClr val="1A1A1A"/>
-                </a:solidFill>
-                <a:latin typeface="Arial"/>
-                <a:ea typeface="Arial"/>
-              </a:rPr>
-              <a:t>Z-NAND · SLC급</a:t>
-            </a:r>
-          </a:p>
-        </p:txBody>
-      </p:sp>
-      <p:sp>
-        <p:nvSpPr>
-          <p:cNvPr id="227" name="TextBox 226"/>
-          <p:cNvSpPr txBox="1"/>
-          <p:nvPr/>
-        </p:nvSpPr>
-        <p:spPr>
-          <a:xfrm>
-            <a:off x="15462504" y="8791956"/>
-            <a:ext cx="2048256" cy="256032"/>
-          </a:xfrm>
-          <a:prstGeom prst="rect">
-            <a:avLst/>
-          </a:prstGeom>
-          <a:noFill/>
-        </p:spPr>
-        <p:txBody>
-          <a:bodyPr wrap="square" anchor="ctr" lIns="0" rIns="0" tIns="0" bIns="0">
-            <a:spAutoFit/>
-          </a:bodyPr>
-          <a:lstStyle/>
-          <a:p>
-            <a:pPr algn="l">
-              <a:lnSpc>
-                <a:spcPct val="110000"/>
-              </a:lnSpc>
-            </a:pPr>
-            <a:r>
-              <a:rPr sz="1600" b="1">
-                <a:solidFill>
-                  <a:srgbClr val="CC79A7"/>
-                </a:solidFill>
-                <a:latin typeface="Arial"/>
-                <a:ea typeface="Arial"/>
-              </a:rPr>
-              <a:t>30 → 100 DWPD</a:t>
-            </a:r>
-          </a:p>
-        </p:txBody>
-      </p:sp>
-      <p:sp>
-        <p:nvSpPr>
-          <p:cNvPr id="228" name="TextBox 227"/>
-          <p:cNvSpPr txBox="1"/>
-          <p:nvPr/>
-        </p:nvSpPr>
-        <p:spPr>
-          <a:xfrm>
-            <a:off x="15462504" y="9011412"/>
-            <a:ext cx="2048256" cy="237744"/>
-          </a:xfrm>
-          <a:prstGeom prst="rect">
-            <a:avLst/>
-          </a:prstGeom>
-          <a:noFill/>
-        </p:spPr>
-        <p:txBody>
-          <a:bodyPr wrap="square" anchor="ctr" lIns="0" rIns="0" tIns="0" bIns="0">
-            <a:spAutoFit/>
-          </a:bodyPr>
-          <a:lstStyle/>
-          <a:p>
-            <a:pPr algn="l">
-              <a:lnSpc>
-                <a:spcPct val="110000"/>
-              </a:lnSpc>
-            </a:pPr>
-            <a:r>
-              <a:rPr sz="1500" b="0">
-                <a:solidFill>
-                  <a:srgbClr val="555555"/>
-                </a:solidFill>
-                <a:latin typeface="Arial"/>
-                <a:ea typeface="Arial"/>
-              </a:rPr>
-              <a:t>초고DWPD KV (공백)</a:t>
-            </a:r>
-          </a:p>
-        </p:txBody>
-      </p:sp>
-      <p:sp>
-        <p:nvSpPr>
-          <p:cNvPr id="229" name="Oval 228"/>
-          <p:cNvSpPr/>
-          <p:nvPr/>
-        </p:nvSpPr>
-        <p:spPr>
-          <a:xfrm>
-            <a:off x="12352293" y="6901321"/>
-            <a:ext cx="347472" cy="347472"/>
-          </a:xfrm>
-          <a:prstGeom prst="ellipse">
-            <a:avLst/>
-          </a:prstGeom>
-          <a:solidFill>
-            <a:srgbClr val="CC79A7"/>
-          </a:solidFill>
-          <a:ln w="19050">
-            <a:solidFill>
-              <a:srgbClr val="FFFFFF"/>
-            </a:solidFill>
-          </a:ln>
-          <a:effectLst/>
-        </p:spPr>
-        <p:style>
-          <a:lnRef idx="1">
-            <a:schemeClr val="accent1"/>
-          </a:lnRef>
-          <a:fillRef idx="3">
-            <a:schemeClr val="accent1"/>
-          </a:fillRef>
-          <a:effectRef idx="2">
-            <a:schemeClr val="accent1"/>
-          </a:effectRef>
-          <a:fontRef idx="minor">
-            <a:schemeClr val="lt1"/>
-          </a:fontRef>
-        </p:style>
-        <p:txBody>
-          <a:bodyPr rtlCol="0" anchor="ctr"/>
-          <a:lstStyle/>
-          <a:p>
-            <a:pPr algn="ctr"/>
-          </a:p>
-        </p:txBody>
-      </p:sp>
-      <p:sp>
-        <p:nvSpPr>
-          <p:cNvPr id="230" name="TextBox 229"/>
-          <p:cNvSpPr txBox="1"/>
-          <p:nvPr/>
-        </p:nvSpPr>
-        <p:spPr>
-          <a:xfrm>
-            <a:off x="12352293" y="6901321"/>
-            <a:ext cx="347472" cy="347472"/>
-          </a:xfrm>
-          <a:prstGeom prst="rect">
-            <a:avLst/>
-          </a:prstGeom>
-          <a:noFill/>
-        </p:spPr>
-        <p:txBody>
-          <a:bodyPr wrap="square" anchor="ctr" lIns="0" rIns="0" tIns="0" bIns="0">
-            <a:spAutoFit/>
-          </a:bodyPr>
-          <a:lstStyle/>
-          <a:p>
-            <a:pPr algn="ctr">
-              <a:lnSpc>
-                <a:spcPct val="110000"/>
-              </a:lnSpc>
-            </a:pPr>
-            <a:r>
-              <a:rPr sz="1600" b="1">
-                <a:solidFill>
-                  <a:srgbClr val="FFFFFF"/>
-                </a:solidFill>
-                <a:latin typeface="Arial"/>
-                <a:ea typeface="Arial"/>
-              </a:rPr>
-              <a:t>4</a:t>
-            </a:r>
-          </a:p>
-        </p:txBody>
-      </p:sp>
-      <p:sp>
-        <p:nvSpPr>
-          <p:cNvPr id="231" name="TextBox 230"/>
-          <p:cNvSpPr txBox="1"/>
-          <p:nvPr/>
-        </p:nvSpPr>
-        <p:spPr>
-          <a:xfrm>
-            <a:off x="11146536" y="4005072"/>
-            <a:ext cx="914400" cy="274320"/>
-          </a:xfrm>
-          <a:prstGeom prst="rect">
-            <a:avLst/>
-          </a:prstGeom>
-          <a:noFill/>
-        </p:spPr>
-        <p:txBody>
-          <a:bodyPr wrap="square" anchor="ctr" lIns="0" rIns="0" tIns="0" bIns="0">
-            <a:spAutoFit/>
-          </a:bodyPr>
-          <a:lstStyle/>
-          <a:p>
-            <a:pPr algn="l">
-              <a:lnSpc>
-                <a:spcPct val="110000"/>
-              </a:lnSpc>
-            </a:pPr>
-            <a:r>
-              <a:rPr sz="1500" b="1">
-                <a:solidFill>
-                  <a:srgbClr val="555555"/>
-                </a:solidFill>
-                <a:latin typeface="Arial"/>
-                <a:ea typeface="Arial"/>
-              </a:rPr>
-              <a:t>바닥 =</a:t>
-            </a:r>
-          </a:p>
-        </p:txBody>
-      </p:sp>
-      <p:sp>
-        <p:nvSpPr>
-          <p:cNvPr id="232" name="Rectangle 231"/>
-          <p:cNvSpPr/>
-          <p:nvPr/>
-        </p:nvSpPr>
-        <p:spPr>
-          <a:xfrm>
-            <a:off x="11878056" y="4050791"/>
-            <a:ext cx="274320" cy="182880"/>
-          </a:xfrm>
-          <a:prstGeom prst="rect">
-            <a:avLst/>
-          </a:prstGeom>
-          <a:solidFill>
-            <a:srgbClr val="ECEEF1"/>
-          </a:solidFill>
-          <a:ln w="6350">
-            <a:solidFill>
-              <a:srgbClr val="8A8A8A"/>
-            </a:solidFill>
-          </a:ln>
-          <a:effectLst/>
-        </p:spPr>
-        <p:style>
-          <a:lnRef idx="1">
-            <a:schemeClr val="accent1"/>
-          </a:lnRef>
-          <a:fillRef idx="3">
-            <a:schemeClr val="accent1"/>
-          </a:fillRef>
-          <a:effectRef idx="2">
-            <a:schemeClr val="accent1"/>
-          </a:effectRef>
-          <a:fontRef idx="minor">
-            <a:schemeClr val="lt1"/>
-          </a:fontRef>
-        </p:style>
-        <p:txBody>
-          <a:bodyPr rtlCol="0" anchor="ctr"/>
-          <a:lstStyle/>
-          <a:p>
-            <a:pPr algn="ctr"/>
-          </a:p>
-        </p:txBody>
-      </p:sp>
-      <p:sp>
-        <p:nvSpPr>
-          <p:cNvPr id="233" name="TextBox 232"/>
-          <p:cNvSpPr txBox="1"/>
-          <p:nvPr/>
-        </p:nvSpPr>
-        <p:spPr>
-          <a:xfrm>
-            <a:off x="12207240" y="4005072"/>
-            <a:ext cx="1828800" cy="274320"/>
-          </a:xfrm>
-          <a:prstGeom prst="rect">
-            <a:avLst/>
-          </a:prstGeom>
-          <a:noFill/>
-        </p:spPr>
-        <p:txBody>
-          <a:bodyPr wrap="square" anchor="ctr" lIns="0" rIns="0" tIns="0" bIns="0">
-            <a:spAutoFit/>
-          </a:bodyPr>
-          <a:lstStyle/>
-          <a:p>
-            <a:pPr algn="l">
-              <a:lnSpc>
-                <a:spcPct val="110000"/>
-              </a:lnSpc>
-            </a:pPr>
-            <a:r>
-              <a:rPr sz="1500" b="1">
-                <a:solidFill>
-                  <a:srgbClr val="555555"/>
-                </a:solidFill>
-                <a:latin typeface="Arial"/>
-                <a:ea typeface="Arial"/>
-              </a:rPr>
-              <a:t>가중치 · RAG</a:t>
-            </a:r>
-          </a:p>
-        </p:txBody>
-      </p:sp>
-      <p:sp>
-        <p:nvSpPr>
-          <p:cNvPr id="234" name="Rectangle 233"/>
-          <p:cNvSpPr/>
-          <p:nvPr/>
-        </p:nvSpPr>
-        <p:spPr>
-          <a:xfrm>
-            <a:off x="11878056" y="4325112"/>
-            <a:ext cx="274320" cy="182880"/>
-          </a:xfrm>
-          <a:prstGeom prst="rect">
-            <a:avLst/>
-          </a:prstGeom>
-          <a:solidFill>
-            <a:srgbClr val="D5D9DF"/>
-          </a:solidFill>
-          <a:ln w="6350">
-            <a:solidFill>
-              <a:srgbClr val="8A8A8A"/>
-            </a:solidFill>
-          </a:ln>
-          <a:effectLst/>
-        </p:spPr>
-        <p:style>
-          <a:lnRef idx="1">
-            <a:schemeClr val="accent1"/>
-          </a:lnRef>
-          <a:fillRef idx="3">
-            <a:schemeClr val="accent1"/>
-          </a:fillRef>
-          <a:effectRef idx="2">
-            <a:schemeClr val="accent1"/>
-          </a:effectRef>
-          <a:fontRef idx="minor">
-            <a:schemeClr val="lt1"/>
-          </a:fontRef>
-        </p:style>
-        <p:txBody>
-          <a:bodyPr rtlCol="0" anchor="ctr"/>
-          <a:lstStyle/>
-          <a:p>
-            <a:pPr algn="ctr"/>
-          </a:p>
-        </p:txBody>
-      </p:sp>
-      <p:sp>
-        <p:nvSpPr>
-          <p:cNvPr id="235" name="TextBox 234"/>
-          <p:cNvSpPr txBox="1"/>
-          <p:nvPr/>
-        </p:nvSpPr>
-        <p:spPr>
-          <a:xfrm>
-            <a:off x="12207240" y="4279392"/>
-            <a:ext cx="1828800" cy="274320"/>
-          </a:xfrm>
-          <a:prstGeom prst="rect">
-            <a:avLst/>
-          </a:prstGeom>
-          <a:noFill/>
-        </p:spPr>
-        <p:txBody>
-          <a:bodyPr wrap="square" anchor="ctr" lIns="0" rIns="0" tIns="0" bIns="0">
-            <a:spAutoFit/>
-          </a:bodyPr>
-          <a:lstStyle/>
-          <a:p>
-            <a:pPr algn="l">
-              <a:lnSpc>
-                <a:spcPct val="110000"/>
-              </a:lnSpc>
-            </a:pPr>
-            <a:r>
-              <a:rPr sz="1500" b="1">
-                <a:solidFill>
-                  <a:srgbClr val="555555"/>
-                </a:solidFill>
-                <a:latin typeface="Arial"/>
-                <a:ea typeface="Arial"/>
-              </a:rPr>
-              <a:t>KV 오프로드</a:t>
-            </a:r>
-          </a:p>
-        </p:txBody>
-      </p:sp>
-      <p:sp>
-        <p:nvSpPr>
-          <p:cNvPr id="236" name="Rectangle 235"/>
-          <p:cNvSpPr/>
-          <p:nvPr/>
-        </p:nvSpPr>
-        <p:spPr>
-          <a:xfrm>
-            <a:off x="11878056" y="4599431"/>
-            <a:ext cx="274320" cy="182880"/>
-          </a:xfrm>
-          <a:prstGeom prst="rect">
-            <a:avLst/>
-          </a:prstGeom>
-          <a:solidFill>
-            <a:srgbClr val="BEC4CC"/>
-          </a:solidFill>
-          <a:ln w="6350">
-            <a:solidFill>
-              <a:srgbClr val="8A8A8A"/>
-            </a:solidFill>
-          </a:ln>
-          <a:effectLst/>
-        </p:spPr>
-        <p:style>
-          <a:lnRef idx="1">
-            <a:schemeClr val="accent1"/>
-          </a:lnRef>
-          <a:fillRef idx="3">
-            <a:schemeClr val="accent1"/>
-          </a:fillRef>
-          <a:effectRef idx="2">
-            <a:schemeClr val="accent1"/>
-          </a:effectRef>
-          <a:fontRef idx="minor">
-            <a:schemeClr val="lt1"/>
-          </a:fontRef>
-        </p:style>
-        <p:txBody>
-          <a:bodyPr rtlCol="0" anchor="ctr"/>
-          <a:lstStyle/>
-          <a:p>
-            <a:pPr algn="ctr"/>
-          </a:p>
-        </p:txBody>
-      </p:sp>
-      <p:sp>
-        <p:nvSpPr>
-          <p:cNvPr id="237" name="TextBox 236"/>
-          <p:cNvSpPr txBox="1"/>
-          <p:nvPr/>
-        </p:nvSpPr>
-        <p:spPr>
-          <a:xfrm>
-            <a:off x="12207240" y="4553712"/>
-            <a:ext cx="1828800" cy="274320"/>
-          </a:xfrm>
-          <a:prstGeom prst="rect">
-            <a:avLst/>
-          </a:prstGeom>
-          <a:noFill/>
-        </p:spPr>
-        <p:txBody>
-          <a:bodyPr wrap="square" anchor="ctr" lIns="0" rIns="0" tIns="0" bIns="0">
-            <a:spAutoFit/>
-          </a:bodyPr>
-          <a:lstStyle/>
-          <a:p>
-            <a:pPr algn="l">
-              <a:lnSpc>
-                <a:spcPct val="110000"/>
-              </a:lnSpc>
-            </a:pPr>
-            <a:r>
-              <a:rPr sz="1500" b="1">
-                <a:solidFill>
-                  <a:srgbClr val="555555"/>
-                </a:solidFill>
-                <a:latin typeface="Arial"/>
-                <a:ea typeface="Arial"/>
-              </a:rPr>
-              <a:t>초고DWPD KV</a:t>
-            </a:r>
-          </a:p>
-        </p:txBody>
-      </p:sp>
-      <p:sp>
-        <p:nvSpPr>
-          <p:cNvPr id="238" name="TextBox 237"/>
+      <p:sp>
+        <p:nvSpPr>
+          <p:cNvPr id="250" name="TextBox 249"/>
           <p:cNvSpPr txBox="1"/>
           <p:nvPr/>
         </p:nvSpPr>
@@ -37796,7 +38136,7 @@
       </p:sp>
       <p:sp>
         <p:nvSpPr>
-          <p:cNvPr id="239" name="TextBox 238"/>
+          <p:cNvPr id="251" name="TextBox 250"/>
           <p:cNvSpPr txBox="1"/>
           <p:nvPr/>
         </p:nvSpPr>
@@ -37839,6 +38179,248 @@
   <p:clrMapOvr>
     <a:masterClrMapping/>
   </p:clrMapOvr>
+  <p:timing>
+    <p:tnLst>
+      <p:par>
+        <p:cTn id="1" dur="indefinite" restart="never" nodeType="tmRoot">
+          <p:childTnLst>
+            <p:seq concurrent="1" nextAc="seek">
+              <p:cTn id="2" dur="indefinite" nodeType="mainSeq">
+                <p:childTnLst>
+                  <p:par>
+                    <p:cTn id="4" fill="hold">
+                      <p:stCondLst>
+                        <p:cond delay="indefinite"/>
+                      </p:stCondLst>
+                      <p:childTnLst>
+                        <p:par>
+                          <p:cTn id="5" fill="hold">
+                            <p:stCondLst>
+                              <p:cond delay="0"/>
+                            </p:stCondLst>
+                            <p:childTnLst>
+                              <p:par>
+                                <p:cTn id="6" presetID="10" presetClass="entr" presetSubtype="0" fill="hold" nodeType="clickEffect">
+                                  <p:stCondLst>
+                                    <p:cond delay="0"/>
+                                  </p:stCondLst>
+                                  <p:childTnLst>
+                                    <p:set>
+                                      <p:cBhvr>
+                                        <p:cTn id="7" dur="1" fill="hold">
+                                          <p:stCondLst>
+                                            <p:cond delay="0"/>
+                                          </p:stCondLst>
+                                        </p:cTn>
+                                        <p:tgtEl>
+                                          <p:spTgt spid="246"/>
+                                        </p:tgtEl>
+                                        <p:attrNameLst>
+                                          <p:attrName>style.visibility</p:attrName>
+                                        </p:attrNameLst>
+                                      </p:cBhvr>
+                                      <p:to>
+                                        <p:strVal val="visible"/>
+                                      </p:to>
+                                    </p:set>
+                                    <p:animEffect transition="in" filter="fade">
+                                      <p:cBhvr>
+                                        <p:cTn id="8" dur="500"/>
+                                        <p:tgtEl>
+                                          <p:spTgt spid="246"/>
+                                        </p:tgtEl>
+                                      </p:cBhvr>
+                                    </p:animEffect>
+                                  </p:childTnLst>
+                                </p:cTn>
+                              </p:par>
+                            </p:childTnLst>
+                          </p:cTn>
+                        </p:par>
+                      </p:childTnLst>
+                    </p:cTn>
+                  </p:par>
+                  <p:par>
+                    <p:cTn id="9" fill="hold">
+                      <p:stCondLst>
+                        <p:cond delay="indefinite"/>
+                      </p:stCondLst>
+                      <p:childTnLst>
+                        <p:par>
+                          <p:cTn id="10" fill="hold">
+                            <p:stCondLst>
+                              <p:cond delay="0"/>
+                            </p:stCondLst>
+                            <p:childTnLst>
+                              <p:par>
+                                <p:cTn id="11" presetID="10" presetClass="entr" presetSubtype="0" fill="hold" nodeType="clickEffect">
+                                  <p:stCondLst>
+                                    <p:cond delay="0"/>
+                                  </p:stCondLst>
+                                  <p:childTnLst>
+                                    <p:set>
+                                      <p:cBhvr>
+                                        <p:cTn id="12" dur="1" fill="hold">
+                                          <p:stCondLst>
+                                            <p:cond delay="0"/>
+                                          </p:stCondLst>
+                                        </p:cTn>
+                                        <p:tgtEl>
+                                          <p:spTgt spid="247"/>
+                                        </p:tgtEl>
+                                        <p:attrNameLst>
+                                          <p:attrName>style.visibility</p:attrName>
+                                        </p:attrNameLst>
+                                      </p:cBhvr>
+                                      <p:to>
+                                        <p:strVal val="visible"/>
+                                      </p:to>
+                                    </p:set>
+                                    <p:animEffect transition="in" filter="fade">
+                                      <p:cBhvr>
+                                        <p:cTn id="13" dur="500"/>
+                                        <p:tgtEl>
+                                          <p:spTgt spid="247"/>
+                                        </p:tgtEl>
+                                      </p:cBhvr>
+                                    </p:animEffect>
+                                  </p:childTnLst>
+                                </p:cTn>
+                              </p:par>
+                            </p:childTnLst>
+                          </p:cTn>
+                        </p:par>
+                      </p:childTnLst>
+                    </p:cTn>
+                  </p:par>
+                  <p:par>
+                    <p:cTn id="14" fill="hold">
+                      <p:stCondLst>
+                        <p:cond delay="indefinite"/>
+                      </p:stCondLst>
+                      <p:childTnLst>
+                        <p:par>
+                          <p:cTn id="15" fill="hold">
+                            <p:stCondLst>
+                              <p:cond delay="0"/>
+                            </p:stCondLst>
+                            <p:childTnLst>
+                              <p:par>
+                                <p:cTn id="16" presetID="10" presetClass="entr" presetSubtype="0" fill="hold" nodeType="clickEffect">
+                                  <p:stCondLst>
+                                    <p:cond delay="0"/>
+                                  </p:stCondLst>
+                                  <p:childTnLst>
+                                    <p:set>
+                                      <p:cBhvr>
+                                        <p:cTn id="17" dur="1" fill="hold">
+                                          <p:stCondLst>
+                                            <p:cond delay="0"/>
+                                          </p:stCondLst>
+                                        </p:cTn>
+                                        <p:tgtEl>
+                                          <p:spTgt spid="248"/>
+                                        </p:tgtEl>
+                                        <p:attrNameLst>
+                                          <p:attrName>style.visibility</p:attrName>
+                                        </p:attrNameLst>
+                                      </p:cBhvr>
+                                      <p:to>
+                                        <p:strVal val="visible"/>
+                                      </p:to>
+                                    </p:set>
+                                    <p:animEffect transition="in" filter="fade">
+                                      <p:cBhvr>
+                                        <p:cTn id="18" dur="500"/>
+                                        <p:tgtEl>
+                                          <p:spTgt spid="248"/>
+                                        </p:tgtEl>
+                                      </p:cBhvr>
+                                    </p:animEffect>
+                                  </p:childTnLst>
+                                </p:cTn>
+                              </p:par>
+                            </p:childTnLst>
+                          </p:cTn>
+                        </p:par>
+                      </p:childTnLst>
+                    </p:cTn>
+                  </p:par>
+                  <p:par>
+                    <p:cTn id="19" fill="hold">
+                      <p:stCondLst>
+                        <p:cond delay="indefinite"/>
+                      </p:stCondLst>
+                      <p:childTnLst>
+                        <p:par>
+                          <p:cTn id="20" fill="hold">
+                            <p:stCondLst>
+                              <p:cond delay="0"/>
+                            </p:stCondLst>
+                            <p:childTnLst>
+                              <p:par>
+                                <p:cTn id="21" presetID="10" presetClass="entr" presetSubtype="0" fill="hold" nodeType="clickEffect">
+                                  <p:stCondLst>
+                                    <p:cond delay="0"/>
+                                  </p:stCondLst>
+                                  <p:childTnLst>
+                                    <p:set>
+                                      <p:cBhvr>
+                                        <p:cTn id="22" dur="1" fill="hold">
+                                          <p:stCondLst>
+                                            <p:cond delay="0"/>
+                                          </p:stCondLst>
+                                        </p:cTn>
+                                        <p:tgtEl>
+                                          <p:spTgt spid="249"/>
+                                        </p:tgtEl>
+                                        <p:attrNameLst>
+                                          <p:attrName>style.visibility</p:attrName>
+                                        </p:attrNameLst>
+                                      </p:cBhvr>
+                                      <p:to>
+                                        <p:strVal val="visible"/>
+                                      </p:to>
+                                    </p:set>
+                                    <p:animEffect transition="in" filter="fade">
+                                      <p:cBhvr>
+                                        <p:cTn id="23" dur="500"/>
+                                        <p:tgtEl>
+                                          <p:spTgt spid="249"/>
+                                        </p:tgtEl>
+                                      </p:cBhvr>
+                                    </p:animEffect>
+                                  </p:childTnLst>
+                                </p:cTn>
+                              </p:par>
+                            </p:childTnLst>
+                          </p:cTn>
+                        </p:par>
+                      </p:childTnLst>
+                    </p:cTn>
+                  </p:par>
+                </p:childTnLst>
+              </p:cTn>
+              <p:prevCondLst>
+                <p:cond evt="onPrev" delay="0">
+                  <p:tgtEl>
+                    <p:sldTgt/>
+                  </p:tgtEl>
+                </p:cond>
+              </p:prevCondLst>
+              <p:nextCondLst>
+                <p:cond evt="onNext" delay="0">
+                  <p:tgtEl>
+                    <p:sldTgt/>
+                  </p:tgtEl>
+                </p:cond>
+              </p:nextCondLst>
+            </p:seq>
+          </p:childTnLst>
+        </p:cTn>
+      </p:par>
+    </p:tnLst>
+  </p:timing>
 </p:sld>
 </file>
 

--- a/outputs/presentation/ssd-future-ready-strategy.pptx
+++ b/outputs/presentation/ssd-future-ready-strategy.pptx
@@ -929,7 +929,7 @@
           <a:lstStyle/>
           <a:p>
             <a:r>
-              <a:t>4장 실행 전략입니다. 2장과 3장에서 본 FDP의 요구, 곧 데이터가 언제 지워지는지와 그것이 SSD의 배치 정책과 어떻게 맞물리는지는 고객 시스템 안에 있습니다. 그래서 지금까지와 다른 방식이 필요하고, 그 방식을 FDP에 집중합니다. 나머지 다섯 기술은 고객 요구를 정확한 스펙으로 받는 지금 방식을 다듬어 준비합니다. 첫째, 계약입니다. 지금의 Multi-Year Deal, MYD는 여러 해의 수량과 가격을 약속합니다. Micron은 Anthropic과의 전략적 계약에서 다년 공급 위에 공동 설계와 운영 통합을 묶었습니다. 우리도 MYD 위에 기술 협력을 쌓겠습니다. 둘째, 역량입니다. NAND와 SSD 펌웨어는 강점이고, 비어 있는 곳은 그 위입니다. KV 캐시 소프트웨어는 LMCache에서 시작했고 Dynamo와 Mooncake에는 아직 기여가 없습니다. 고객의 지표인 토큰당 비용과 GPU 가동률로 말하는 사람이 필요합니다. 역량에서 화두를 하나 드리겠습니다. 지금까지 고객 관계 관리, CRM은 경영진과 경영진, 영업과 구매 사이의 일이었습니다. 앞으로는 엔지니어와 엔지니어 사이까지 넓어져야 합니다. 고객 엔지니어가 신뢰하는 상대는 같은 문제를 같은 언어로 푸는 엔지니어이고, 고객과 국가마다 다른 언어와 문화를 이해하는 것도 그 관계의 일부입니다. 엔지니어 수준의 고객 관계를 우리가 맡을 준비가 되어 있는지 함께 생각해 보면 좋겠습니다. 셋째, 사람입니다. 이 역량을 고객 현장에서 쓰는 것이 사람입니다. 스펙 문서로는 명시된 요구만 옵니다. Palantir와 OpenAI의 FDE처럼 삼성 Pod가 고객 AI 데이터센터 안에서 고객 엔지니어와 함께 일합니다. 핵심 업무는 세 가지입니다. 하나, 고객 워크로드 측정과 분석입니다. 고객 트레이스로 쓰기 크기와 데이터 수명을 재서, 고객이 말한 요구와 실제 요구의 차이를 찾습니다. 둘, 호스트 소프트웨어 스택의 최적화와 평가입니다. 고객 엔지니어와 함께 KV 캐시 소프트웨어와 SSD를 맞물려 최적화하고, 고객 환경에서 WAF와 꼬리 지연, 그리고 토큰당 비용과 GPU 가동률로 효과를 평가합니다. LMCache에 FDP 배치를 머지한 것이 선례입니다. 셋, 차세대 제품을 위한 기술 교류입니다. 현장에서 증명한 것을 고객 엔지니어와 함께 다음 제품의 사양과 고객 RFQ, OCP 요구로 굳힙니다. 이렇게 고객 안에서 요구를 찾고, 수요를 함께 만듭니다. 첫 90일에는 다섯 가지를 하겠습니다. 전략 고객 한두 곳을 정해 FDP 공동 설계 의제를 맞추고, Co-Design Pod를 꾸리고, 시스템 소프트웨어 전문가 채용을 시작하고, 고객 KV 트레이스로 WAF를 실측하고, 신호 대시보드를 돌리겠습니다. 마지막으로, 실패할 수도 있는 기술에 투자하는 것이 불확실한 미래에 실패하지 않는 불변 전략입니다. 지금 예측할 수 있는 범위 안에서 최선을 다하고, 신호가 바뀌면 판단을 고치겠습니다.</a:t>
+              <a:t>4장 실행 전략입니다. 2장과 3장에서 본 FDP의 요구, 곧 데이터가 언제 지워지는지와 그것이 SSD의 배치 정책과 어떻게 맞물리는지는 고객 시스템 안에 있습니다. 그래서 지금까지와 다른 방식이 필요하고, 그 방식을 FDP에 집중합니다. 나머지 다섯 기술은 고객 요구를 정확한 스펙으로 받는 지금 방식을 다듬어 준비합니다. 첫째, 계약입니다. 지금의 Multi-Year Deal, MYD는 여러 해의 수량과 가격을 약속합니다. Micron은 Anthropic과의 전략적 계약에서 다년 공급 위에 공동 설계와 운영 통합을 묶었습니다. 우리도 MYD 위에 기술 협력을 쌓겠습니다. 둘째, 역량입니다. 가운데는 AI 추론 시스템을 위에서 아래까지 여섯 층으로 나눈 그림입니다. 맨 위 추론 엔진은 vLLM, SGLang, TensorRT-LLM이고, 그 아래 KV 캐시 관리자는 Dynamo, LMCache, Mooncake입니다. 그 아래로 전송과 I/O 라이브러리, 커널과 파일 시스템, SSD 펌웨어, NAND가 이어집니다. 삼성은 NAND와 SSD 펌웨어에서 강점이 있습니다. 1장의 포트폴리오와 3장의 FDP, pSLC, Large Mapping이 여기에 있습니다. 가운데 세 층은 일부입니다. LMCache에 FDP 지원이 머지되었고, xNVMe는 삼성이 유지하며, 커널 write streams와 XFS 작업에도 참여하고 있지만, Dynamo와 Mooncake에는 아직 기여가 없습니다. 추론 엔진 층은 비어 있습니다. 여기서 중요한 사실이 하나 있습니다. 데이터가 언제 버려질지, 곧 prefix를 공유하는지와 세션이 언제 끝나는지 같은 수명 정보는 KV 캐시 관리자 층에 있습니다. 그런데 그 정보를 SSD 배치로 내려보내는 코드는 지금 어느 층에도 없습니다. 3장의 WAF와 꼬리 지연 개선은 바로 이 경로가 있어야 나옵니다. 그래서 역량이란 SSD만이 아니라 스택 전체를 읽고, 수명 정보가 FDP 핸들까지 내려가는 경로를 고객과 함께 만드는 능력입니다. 역량에서 화두를 하나 드리겠습니다. 지금까지 고객 관계 관리, CRM은 경영진과 경영진, 영업과 구매 사이의 일이었습니다. 앞으로는 엔지니어와 엔지니어 사이까지 넓어져야 합니다. 고객 엔지니어가 신뢰하는 상대는 같은 문제를 같은 언어로 푸는 엔지니어이고, 고객과 국가마다 다른 언어와 문화를 이해하는 것도 그 관계의 일부입니다. 엔지니어 수준의 고객 관계를 우리가 맡을 준비가 되어 있는지 함께 생각해 보면 좋겠습니다. 셋째, 사람입니다. 이 역량을 고객 현장에서 쓰는 것이 사람입니다. 스펙 문서로는 명시된 요구만 옵니다. Palantir와 OpenAI의 FDE처럼 삼성 Pod가 고객 AI 데이터센터 안에서 고객 엔지니어와 함께 일합니다. 핵심 업무는 세 가지입니다. 하나, 고객 워크로드 측정과 분석입니다. 고객 트레이스로 쓰기 크기와 데이터 수명을 재서, 고객이 말한 요구와 실제 요구의 차이를 찾습니다. 둘, 호스트 소프트웨어 스택의 최적화와 평가입니다. 고객 엔지니어와 함께 KV 캐시 소프트웨어와 SSD를 맞물려 최적화하고, 고객 환경에서 WAF와 꼬리 지연, 그리고 토큰당 비용과 GPU 가동률로 효과를 평가합니다. LMCache에 FDP 배치를 머지한 것이 선례입니다. 셋, 차세대 제품을 위한 기술 교류입니다. 현장에서 증명한 것을 고객 엔지니어와 함께 다음 제품의 사양과 고객 RFQ, OCP 요구로 굳힙니다. 이렇게 고객 안에서 요구를 찾고, 수요를 함께 만듭니다. 첫 90일에는 다섯 가지를 하겠습니다. 전략 고객 한두 곳을 정해 FDP 공동 설계 의제를 맞추고, Co-Design Pod를 꾸리고, 시스템 소프트웨어 전문가 채용을 시작하고, 고객 KV 트레이스로 WAF를 실측하고, 신호 대시보드를 돌리겠습니다. 마지막으로, 실패할 수도 있는 기술에 투자하는 것이 불확실한 미래에 실패하지 않는 불변 전략입니다. 지금 예측할 수 있는 범위 안에서 최선을 다하고, 신호가 바뀌면 판단을 고치겠습니다.</a:t>
             </a:r>
           </a:p>
         </p:txBody>
@@ -52415,7 +52415,7 @@
                 <a:latin typeface="Arial"/>
                 <a:ea typeface="Arial"/>
               </a:rPr>
-              <a:t>고객 시스템 안으로 들어가는 새로운 방식이 필요하므로,</a:t>
+              <a:t>세 기술의 효과는 고객 시스템 안에서 나오므로,</a:t>
             </a:r>
           </a:p>
           <a:p>
@@ -53682,7 +53682,7 @@
                 <a:latin typeface="Arial"/>
                 <a:ea typeface="Arial"/>
               </a:rPr>
-              <a:t>역량: 고객처럼 보는 눈</a:t>
+              <a:t>역량: 추론 스택 전체를 보는 눈</a:t>
             </a:r>
           </a:p>
         </p:txBody>
@@ -53766,8 +53766,3006 @@
                 <a:latin typeface="Arial"/>
                 <a:ea typeface="Arial"/>
               </a:rPr>
-              <a:t>고객의 지표  </a:t>
-            </a:r>
+              <a:t>수명 정보는 </a:t>
+            </a:r>
+            <a:r>
+              <a:rPr sz="1700" b="1">
+                <a:solidFill>
+                  <a:srgbClr val="1A1A1A"/>
+                </a:solidFill>
+                <a:latin typeface="Arial"/>
+                <a:ea typeface="Arial"/>
+              </a:rPr>
+              <a:t>KV 캐시 층</a:t>
+            </a:r>
+            <a:r>
+              <a:rPr sz="1600" b="0">
+                <a:solidFill>
+                  <a:srgbClr val="555555"/>
+                </a:solidFill>
+                <a:latin typeface="Arial"/>
+                <a:ea typeface="Arial"/>
+              </a:rPr>
+              <a:t>에, 배치는 </a:t>
+            </a:r>
+            <a:r>
+              <a:rPr sz="1700" b="1">
+                <a:solidFill>
+                  <a:srgbClr val="1A1A1A"/>
+                </a:solidFill>
+                <a:latin typeface="Arial"/>
+                <a:ea typeface="Arial"/>
+              </a:rPr>
+              <a:t>SSD</a:t>
+            </a:r>
+            <a:r>
+              <a:rPr sz="1600" b="0">
+                <a:solidFill>
+                  <a:srgbClr val="555555"/>
+                </a:solidFill>
+                <a:latin typeface="Arial"/>
+                <a:ea typeface="Arial"/>
+              </a:rPr>
+              <a:t>에 있다</a:t>
+            </a:r>
+          </a:p>
+        </p:txBody>
+      </p:sp>
+      <p:sp>
+        <p:nvSpPr>
+          <p:cNvPr id="37" name="Rounded Rectangle 36"/>
+          <p:cNvSpPr/>
+          <p:nvPr/>
+        </p:nvSpPr>
+        <p:spPr>
+          <a:xfrm>
+            <a:off x="5532120" y="3163824"/>
+            <a:ext cx="3749039" cy="585216"/>
+          </a:xfrm>
+          <a:prstGeom prst="roundRect">
+            <a:avLst>
+              <a:gd name="adj" fmla="val 12500"/>
+            </a:avLst>
+          </a:prstGeom>
+          <a:solidFill>
+            <a:srgbClr val="FFFFFF"/>
+          </a:solidFill>
+          <a:ln w="15875">
+            <a:solidFill>
+              <a:srgbClr val="8A8A8A"/>
+            </a:solidFill>
+            <a:prstDash val="dash"/>
+          </a:ln>
+          <a:effectLst/>
+        </p:spPr>
+        <p:style>
+          <a:lnRef idx="1">
+            <a:schemeClr val="accent1"/>
+          </a:lnRef>
+          <a:fillRef idx="3">
+            <a:schemeClr val="accent1"/>
+          </a:fillRef>
+          <a:effectRef idx="2">
+            <a:schemeClr val="accent1"/>
+          </a:effectRef>
+          <a:fontRef idx="minor">
+            <a:schemeClr val="lt1"/>
+          </a:fontRef>
+        </p:style>
+        <p:txBody>
+          <a:bodyPr rtlCol="0" anchor="ctr"/>
+          <a:lstStyle/>
+          <a:p>
+            <a:pPr algn="ctr"/>
+          </a:p>
+        </p:txBody>
+      </p:sp>
+      <p:sp>
+        <p:nvSpPr>
+          <p:cNvPr id="38" name="TextBox 37"/>
+          <p:cNvSpPr txBox="1"/>
+          <p:nvPr/>
+        </p:nvSpPr>
+        <p:spPr>
+          <a:xfrm>
+            <a:off x="5678424" y="3182112"/>
+            <a:ext cx="2743199" cy="292608"/>
+          </a:xfrm>
+          <a:prstGeom prst="rect">
+            <a:avLst/>
+          </a:prstGeom>
+          <a:noFill/>
+        </p:spPr>
+        <p:txBody>
+          <a:bodyPr wrap="square" anchor="ctr" lIns="0" rIns="0" tIns="0" bIns="0">
+            <a:spAutoFit/>
+          </a:bodyPr>
+          <a:lstStyle/>
+          <a:p>
+            <a:pPr algn="l">
+              <a:lnSpc>
+                <a:spcPct val="110000"/>
+              </a:lnSpc>
+            </a:pPr>
+            <a:r>
+              <a:rPr sz="1700" b="1">
+                <a:solidFill>
+                  <a:srgbClr val="1A1A1A"/>
+                </a:solidFill>
+                <a:latin typeface="Arial"/>
+                <a:ea typeface="Arial"/>
+              </a:rPr>
+              <a:t>추론 엔진</a:t>
+            </a:r>
+          </a:p>
+        </p:txBody>
+      </p:sp>
+      <p:sp>
+        <p:nvSpPr>
+          <p:cNvPr id="39" name="TextBox 38"/>
+          <p:cNvSpPr txBox="1"/>
+          <p:nvPr/>
+        </p:nvSpPr>
+        <p:spPr>
+          <a:xfrm>
+            <a:off x="5678424" y="3456432"/>
+            <a:ext cx="2926079" cy="274320"/>
+          </a:xfrm>
+          <a:prstGeom prst="rect">
+            <a:avLst/>
+          </a:prstGeom>
+          <a:noFill/>
+        </p:spPr>
+        <p:txBody>
+          <a:bodyPr wrap="square" anchor="ctr" lIns="0" rIns="0" tIns="0" bIns="0">
+            <a:spAutoFit/>
+          </a:bodyPr>
+          <a:lstStyle/>
+          <a:p>
+            <a:pPr algn="l">
+              <a:lnSpc>
+                <a:spcPct val="110000"/>
+              </a:lnSpc>
+            </a:pPr>
+            <a:r>
+              <a:rPr sz="1500" b="0">
+                <a:solidFill>
+                  <a:srgbClr val="555555"/>
+                </a:solidFill>
+                <a:latin typeface="Arial"/>
+                <a:ea typeface="Arial"/>
+              </a:rPr>
+              <a:t>vLLM · SGLang · TensorRT-LLM</a:t>
+            </a:r>
+          </a:p>
+        </p:txBody>
+      </p:sp>
+      <p:sp>
+        <p:nvSpPr>
+          <p:cNvPr id="40" name="Rounded Rectangle 39"/>
+          <p:cNvSpPr/>
+          <p:nvPr/>
+        </p:nvSpPr>
+        <p:spPr>
+          <a:xfrm>
+            <a:off x="8494776" y="3291840"/>
+            <a:ext cx="676656" cy="329184"/>
+          </a:xfrm>
+          <a:prstGeom prst="roundRect">
+            <a:avLst>
+              <a:gd name="adj" fmla="val 22222"/>
+            </a:avLst>
+          </a:prstGeom>
+          <a:solidFill>
+            <a:srgbClr val="FFFFFF"/>
+          </a:solidFill>
+          <a:ln w="12700">
+            <a:solidFill>
+              <a:srgbClr val="8A8A8A"/>
+            </a:solidFill>
+            <a:prstDash val="dash"/>
+          </a:ln>
+          <a:effectLst/>
+        </p:spPr>
+        <p:style>
+          <a:lnRef idx="1">
+            <a:schemeClr val="accent1"/>
+          </a:lnRef>
+          <a:fillRef idx="3">
+            <a:schemeClr val="accent1"/>
+          </a:fillRef>
+          <a:effectRef idx="2">
+            <a:schemeClr val="accent1"/>
+          </a:effectRef>
+          <a:fontRef idx="minor">
+            <a:schemeClr val="lt1"/>
+          </a:fontRef>
+        </p:style>
+        <p:txBody>
+          <a:bodyPr rtlCol="0" anchor="ctr"/>
+          <a:lstStyle/>
+          <a:p>
+            <a:pPr algn="ctr"/>
+          </a:p>
+        </p:txBody>
+      </p:sp>
+      <p:sp>
+        <p:nvSpPr>
+          <p:cNvPr id="41" name="TextBox 40"/>
+          <p:cNvSpPr txBox="1"/>
+          <p:nvPr/>
+        </p:nvSpPr>
+        <p:spPr>
+          <a:xfrm>
+            <a:off x="8549640" y="3291840"/>
+            <a:ext cx="566928" cy="329184"/>
+          </a:xfrm>
+          <a:prstGeom prst="rect">
+            <a:avLst/>
+          </a:prstGeom>
+          <a:noFill/>
+        </p:spPr>
+        <p:txBody>
+          <a:bodyPr wrap="square" anchor="ctr" lIns="0" rIns="0" tIns="0" bIns="0">
+            <a:spAutoFit/>
+          </a:bodyPr>
+          <a:lstStyle/>
+          <a:p>
+            <a:pPr algn="ctr">
+              <a:lnSpc>
+                <a:spcPct val="110000"/>
+              </a:lnSpc>
+            </a:pPr>
+            <a:r>
+              <a:rPr sz="1500" b="1">
+                <a:solidFill>
+                  <a:srgbClr val="555555"/>
+                </a:solidFill>
+                <a:latin typeface="Arial"/>
+                <a:ea typeface="Arial"/>
+              </a:rPr>
+              <a:t>공백</a:t>
+            </a:r>
+          </a:p>
+        </p:txBody>
+      </p:sp>
+      <p:sp>
+        <p:nvSpPr>
+          <p:cNvPr id="42" name="Rounded Rectangle 41"/>
+          <p:cNvSpPr/>
+          <p:nvPr/>
+        </p:nvSpPr>
+        <p:spPr>
+          <a:xfrm>
+            <a:off x="5532120" y="3813048"/>
+            <a:ext cx="3749039" cy="585216"/>
+          </a:xfrm>
+          <a:prstGeom prst="roundRect">
+            <a:avLst>
+              <a:gd name="adj" fmla="val 12500"/>
+            </a:avLst>
+          </a:prstGeom>
+          <a:solidFill>
+            <a:srgbClr val="EEF1FA"/>
+          </a:solidFill>
+          <a:ln w="15875">
+            <a:solidFill>
+              <a:srgbClr val="3C5AC8"/>
+            </a:solidFill>
+          </a:ln>
+          <a:effectLst/>
+        </p:spPr>
+        <p:style>
+          <a:lnRef idx="1">
+            <a:schemeClr val="accent1"/>
+          </a:lnRef>
+          <a:fillRef idx="3">
+            <a:schemeClr val="accent1"/>
+          </a:fillRef>
+          <a:effectRef idx="2">
+            <a:schemeClr val="accent1"/>
+          </a:effectRef>
+          <a:fontRef idx="minor">
+            <a:schemeClr val="lt1"/>
+          </a:fontRef>
+        </p:style>
+        <p:txBody>
+          <a:bodyPr rtlCol="0" anchor="ctr"/>
+          <a:lstStyle/>
+          <a:p>
+            <a:pPr algn="ctr"/>
+          </a:p>
+        </p:txBody>
+      </p:sp>
+      <p:sp>
+        <p:nvSpPr>
+          <p:cNvPr id="43" name="TextBox 42"/>
+          <p:cNvSpPr txBox="1"/>
+          <p:nvPr/>
+        </p:nvSpPr>
+        <p:spPr>
+          <a:xfrm>
+            <a:off x="5678424" y="3831335"/>
+            <a:ext cx="2743199" cy="292608"/>
+          </a:xfrm>
+          <a:prstGeom prst="rect">
+            <a:avLst/>
+          </a:prstGeom>
+          <a:noFill/>
+        </p:spPr>
+        <p:txBody>
+          <a:bodyPr wrap="square" anchor="ctr" lIns="0" rIns="0" tIns="0" bIns="0">
+            <a:spAutoFit/>
+          </a:bodyPr>
+          <a:lstStyle/>
+          <a:p>
+            <a:pPr algn="l">
+              <a:lnSpc>
+                <a:spcPct val="110000"/>
+              </a:lnSpc>
+            </a:pPr>
+            <a:r>
+              <a:rPr sz="1700" b="1">
+                <a:solidFill>
+                  <a:srgbClr val="1A1A1A"/>
+                </a:solidFill>
+                <a:latin typeface="Arial"/>
+                <a:ea typeface="Arial"/>
+              </a:rPr>
+              <a:t>KV 캐시 관리자</a:t>
+            </a:r>
+          </a:p>
+        </p:txBody>
+      </p:sp>
+      <p:sp>
+        <p:nvSpPr>
+          <p:cNvPr id="44" name="TextBox 43"/>
+          <p:cNvSpPr txBox="1"/>
+          <p:nvPr/>
+        </p:nvSpPr>
+        <p:spPr>
+          <a:xfrm>
+            <a:off x="5678424" y="4105656"/>
+            <a:ext cx="2926079" cy="274320"/>
+          </a:xfrm>
+          <a:prstGeom prst="rect">
+            <a:avLst/>
+          </a:prstGeom>
+          <a:noFill/>
+        </p:spPr>
+        <p:txBody>
+          <a:bodyPr wrap="square" anchor="ctr" lIns="0" rIns="0" tIns="0" bIns="0">
+            <a:spAutoFit/>
+          </a:bodyPr>
+          <a:lstStyle/>
+          <a:p>
+            <a:pPr algn="l">
+              <a:lnSpc>
+                <a:spcPct val="110000"/>
+              </a:lnSpc>
+            </a:pPr>
+            <a:r>
+              <a:rPr sz="1500" b="0">
+                <a:solidFill>
+                  <a:srgbClr val="555555"/>
+                </a:solidFill>
+                <a:latin typeface="Arial"/>
+                <a:ea typeface="Arial"/>
+              </a:rPr>
+              <a:t>Dynamo · LMCache · Mooncake</a:t>
+            </a:r>
+          </a:p>
+        </p:txBody>
+      </p:sp>
+      <p:sp>
+        <p:nvSpPr>
+          <p:cNvPr id="45" name="Rounded Rectangle 44"/>
+          <p:cNvSpPr/>
+          <p:nvPr/>
+        </p:nvSpPr>
+        <p:spPr>
+          <a:xfrm>
+            <a:off x="8494776" y="3941063"/>
+            <a:ext cx="676656" cy="329184"/>
+          </a:xfrm>
+          <a:prstGeom prst="roundRect">
+            <a:avLst>
+              <a:gd name="adj" fmla="val 22222"/>
+            </a:avLst>
+          </a:prstGeom>
+          <a:solidFill>
+            <a:srgbClr val="3C5AC8"/>
+          </a:solidFill>
+          <a:ln>
+            <a:noFill/>
+          </a:ln>
+          <a:effectLst/>
+        </p:spPr>
+        <p:style>
+          <a:lnRef idx="1">
+            <a:schemeClr val="accent1"/>
+          </a:lnRef>
+          <a:fillRef idx="3">
+            <a:schemeClr val="accent1"/>
+          </a:fillRef>
+          <a:effectRef idx="2">
+            <a:schemeClr val="accent1"/>
+          </a:effectRef>
+          <a:fontRef idx="minor">
+            <a:schemeClr val="lt1"/>
+          </a:fontRef>
+        </p:style>
+        <p:txBody>
+          <a:bodyPr rtlCol="0" anchor="ctr"/>
+          <a:lstStyle/>
+          <a:p>
+            <a:pPr algn="ctr"/>
+          </a:p>
+        </p:txBody>
+      </p:sp>
+      <p:sp>
+        <p:nvSpPr>
+          <p:cNvPr id="46" name="TextBox 45"/>
+          <p:cNvSpPr txBox="1"/>
+          <p:nvPr/>
+        </p:nvSpPr>
+        <p:spPr>
+          <a:xfrm>
+            <a:off x="8549640" y="3941063"/>
+            <a:ext cx="566928" cy="329184"/>
+          </a:xfrm>
+          <a:prstGeom prst="rect">
+            <a:avLst/>
+          </a:prstGeom>
+          <a:noFill/>
+        </p:spPr>
+        <p:txBody>
+          <a:bodyPr wrap="square" anchor="ctr" lIns="0" rIns="0" tIns="0" bIns="0">
+            <a:spAutoFit/>
+          </a:bodyPr>
+          <a:lstStyle/>
+          <a:p>
+            <a:pPr algn="ctr">
+              <a:lnSpc>
+                <a:spcPct val="110000"/>
+              </a:lnSpc>
+            </a:pPr>
+            <a:r>
+              <a:rPr sz="1500" b="1">
+                <a:solidFill>
+                  <a:srgbClr val="FFFFFF"/>
+                </a:solidFill>
+                <a:latin typeface="Arial"/>
+                <a:ea typeface="Arial"/>
+              </a:rPr>
+              <a:t>일부</a:t>
+            </a:r>
+          </a:p>
+        </p:txBody>
+      </p:sp>
+      <p:sp>
+        <p:nvSpPr>
+          <p:cNvPr id="47" name="Rounded Rectangle 46"/>
+          <p:cNvSpPr/>
+          <p:nvPr/>
+        </p:nvSpPr>
+        <p:spPr>
+          <a:xfrm>
+            <a:off x="5532120" y="4462272"/>
+            <a:ext cx="3749039" cy="585216"/>
+          </a:xfrm>
+          <a:prstGeom prst="roundRect">
+            <a:avLst>
+              <a:gd name="adj" fmla="val 12500"/>
+            </a:avLst>
+          </a:prstGeom>
+          <a:solidFill>
+            <a:srgbClr val="EEF1FA"/>
+          </a:solidFill>
+          <a:ln w="15875">
+            <a:solidFill>
+              <a:srgbClr val="3C5AC8"/>
+            </a:solidFill>
+          </a:ln>
+          <a:effectLst/>
+        </p:spPr>
+        <p:style>
+          <a:lnRef idx="1">
+            <a:schemeClr val="accent1"/>
+          </a:lnRef>
+          <a:fillRef idx="3">
+            <a:schemeClr val="accent1"/>
+          </a:fillRef>
+          <a:effectRef idx="2">
+            <a:schemeClr val="accent1"/>
+          </a:effectRef>
+          <a:fontRef idx="minor">
+            <a:schemeClr val="lt1"/>
+          </a:fontRef>
+        </p:style>
+        <p:txBody>
+          <a:bodyPr rtlCol="0" anchor="ctr"/>
+          <a:lstStyle/>
+          <a:p>
+            <a:pPr algn="ctr"/>
+          </a:p>
+        </p:txBody>
+      </p:sp>
+      <p:sp>
+        <p:nvSpPr>
+          <p:cNvPr id="48" name="TextBox 47"/>
+          <p:cNvSpPr txBox="1"/>
+          <p:nvPr/>
+        </p:nvSpPr>
+        <p:spPr>
+          <a:xfrm>
+            <a:off x="5678424" y="4480559"/>
+            <a:ext cx="2743199" cy="292608"/>
+          </a:xfrm>
+          <a:prstGeom prst="rect">
+            <a:avLst/>
+          </a:prstGeom>
+          <a:noFill/>
+        </p:spPr>
+        <p:txBody>
+          <a:bodyPr wrap="square" anchor="ctr" lIns="0" rIns="0" tIns="0" bIns="0">
+            <a:spAutoFit/>
+          </a:bodyPr>
+          <a:lstStyle/>
+          <a:p>
+            <a:pPr algn="l">
+              <a:lnSpc>
+                <a:spcPct val="110000"/>
+              </a:lnSpc>
+            </a:pPr>
+            <a:r>
+              <a:rPr sz="1700" b="1">
+                <a:solidFill>
+                  <a:srgbClr val="1A1A1A"/>
+                </a:solidFill>
+                <a:latin typeface="Arial"/>
+                <a:ea typeface="Arial"/>
+              </a:rPr>
+              <a:t>전송 · I/O</a:t>
+            </a:r>
+          </a:p>
+        </p:txBody>
+      </p:sp>
+      <p:sp>
+        <p:nvSpPr>
+          <p:cNvPr id="49" name="TextBox 48"/>
+          <p:cNvSpPr txBox="1"/>
+          <p:nvPr/>
+        </p:nvSpPr>
+        <p:spPr>
+          <a:xfrm>
+            <a:off x="5678424" y="4754880"/>
+            <a:ext cx="2926079" cy="274320"/>
+          </a:xfrm>
+          <a:prstGeom prst="rect">
+            <a:avLst/>
+          </a:prstGeom>
+          <a:noFill/>
+        </p:spPr>
+        <p:txBody>
+          <a:bodyPr wrap="square" anchor="ctr" lIns="0" rIns="0" tIns="0" bIns="0">
+            <a:spAutoFit/>
+          </a:bodyPr>
+          <a:lstStyle/>
+          <a:p>
+            <a:pPr algn="l">
+              <a:lnSpc>
+                <a:spcPct val="110000"/>
+              </a:lnSpc>
+            </a:pPr>
+            <a:r>
+              <a:rPr sz="1500" b="0">
+                <a:solidFill>
+                  <a:srgbClr val="555555"/>
+                </a:solidFill>
+                <a:latin typeface="Arial"/>
+                <a:ea typeface="Arial"/>
+              </a:rPr>
+              <a:t>NIXL · GDS · io_uring · xNVMe</a:t>
+            </a:r>
+          </a:p>
+        </p:txBody>
+      </p:sp>
+      <p:sp>
+        <p:nvSpPr>
+          <p:cNvPr id="50" name="Rounded Rectangle 49"/>
+          <p:cNvSpPr/>
+          <p:nvPr/>
+        </p:nvSpPr>
+        <p:spPr>
+          <a:xfrm>
+            <a:off x="8494776" y="4590288"/>
+            <a:ext cx="676656" cy="329184"/>
+          </a:xfrm>
+          <a:prstGeom prst="roundRect">
+            <a:avLst>
+              <a:gd name="adj" fmla="val 22222"/>
+            </a:avLst>
+          </a:prstGeom>
+          <a:solidFill>
+            <a:srgbClr val="3C5AC8"/>
+          </a:solidFill>
+          <a:ln>
+            <a:noFill/>
+          </a:ln>
+          <a:effectLst/>
+        </p:spPr>
+        <p:style>
+          <a:lnRef idx="1">
+            <a:schemeClr val="accent1"/>
+          </a:lnRef>
+          <a:fillRef idx="3">
+            <a:schemeClr val="accent1"/>
+          </a:fillRef>
+          <a:effectRef idx="2">
+            <a:schemeClr val="accent1"/>
+          </a:effectRef>
+          <a:fontRef idx="minor">
+            <a:schemeClr val="lt1"/>
+          </a:fontRef>
+        </p:style>
+        <p:txBody>
+          <a:bodyPr rtlCol="0" anchor="ctr"/>
+          <a:lstStyle/>
+          <a:p>
+            <a:pPr algn="ctr"/>
+          </a:p>
+        </p:txBody>
+      </p:sp>
+      <p:sp>
+        <p:nvSpPr>
+          <p:cNvPr id="51" name="TextBox 50"/>
+          <p:cNvSpPr txBox="1"/>
+          <p:nvPr/>
+        </p:nvSpPr>
+        <p:spPr>
+          <a:xfrm>
+            <a:off x="8549640" y="4590288"/>
+            <a:ext cx="566928" cy="329184"/>
+          </a:xfrm>
+          <a:prstGeom prst="rect">
+            <a:avLst/>
+          </a:prstGeom>
+          <a:noFill/>
+        </p:spPr>
+        <p:txBody>
+          <a:bodyPr wrap="square" anchor="ctr" lIns="0" rIns="0" tIns="0" bIns="0">
+            <a:spAutoFit/>
+          </a:bodyPr>
+          <a:lstStyle/>
+          <a:p>
+            <a:pPr algn="ctr">
+              <a:lnSpc>
+                <a:spcPct val="110000"/>
+              </a:lnSpc>
+            </a:pPr>
+            <a:r>
+              <a:rPr sz="1500" b="1">
+                <a:solidFill>
+                  <a:srgbClr val="FFFFFF"/>
+                </a:solidFill>
+                <a:latin typeface="Arial"/>
+                <a:ea typeface="Arial"/>
+              </a:rPr>
+              <a:t>일부</a:t>
+            </a:r>
+          </a:p>
+        </p:txBody>
+      </p:sp>
+      <p:sp>
+        <p:nvSpPr>
+          <p:cNvPr id="52" name="Rounded Rectangle 51"/>
+          <p:cNvSpPr/>
+          <p:nvPr/>
+        </p:nvSpPr>
+        <p:spPr>
+          <a:xfrm>
+            <a:off x="5532120" y="5111496"/>
+            <a:ext cx="3749039" cy="585216"/>
+          </a:xfrm>
+          <a:prstGeom prst="roundRect">
+            <a:avLst>
+              <a:gd name="adj" fmla="val 12500"/>
+            </a:avLst>
+          </a:prstGeom>
+          <a:solidFill>
+            <a:srgbClr val="EEF1FA"/>
+          </a:solidFill>
+          <a:ln w="15875">
+            <a:solidFill>
+              <a:srgbClr val="3C5AC8"/>
+            </a:solidFill>
+          </a:ln>
+          <a:effectLst/>
+        </p:spPr>
+        <p:style>
+          <a:lnRef idx="1">
+            <a:schemeClr val="accent1"/>
+          </a:lnRef>
+          <a:fillRef idx="3">
+            <a:schemeClr val="accent1"/>
+          </a:fillRef>
+          <a:effectRef idx="2">
+            <a:schemeClr val="accent1"/>
+          </a:effectRef>
+          <a:fontRef idx="minor">
+            <a:schemeClr val="lt1"/>
+          </a:fontRef>
+        </p:style>
+        <p:txBody>
+          <a:bodyPr rtlCol="0" anchor="ctr"/>
+          <a:lstStyle/>
+          <a:p>
+            <a:pPr algn="ctr"/>
+          </a:p>
+        </p:txBody>
+      </p:sp>
+      <p:sp>
+        <p:nvSpPr>
+          <p:cNvPr id="53" name="TextBox 52"/>
+          <p:cNvSpPr txBox="1"/>
+          <p:nvPr/>
+        </p:nvSpPr>
+        <p:spPr>
+          <a:xfrm>
+            <a:off x="5678424" y="5129783"/>
+            <a:ext cx="2743199" cy="292608"/>
+          </a:xfrm>
+          <a:prstGeom prst="rect">
+            <a:avLst/>
+          </a:prstGeom>
+          <a:noFill/>
+        </p:spPr>
+        <p:txBody>
+          <a:bodyPr wrap="square" anchor="ctr" lIns="0" rIns="0" tIns="0" bIns="0">
+            <a:spAutoFit/>
+          </a:bodyPr>
+          <a:lstStyle/>
+          <a:p>
+            <a:pPr algn="l">
+              <a:lnSpc>
+                <a:spcPct val="110000"/>
+              </a:lnSpc>
+            </a:pPr>
+            <a:r>
+              <a:rPr sz="1700" b="1">
+                <a:solidFill>
+                  <a:srgbClr val="1A1A1A"/>
+                </a:solidFill>
+                <a:latin typeface="Arial"/>
+                <a:ea typeface="Arial"/>
+              </a:rPr>
+              <a:t>커널 · 파일 시스템</a:t>
+            </a:r>
+          </a:p>
+        </p:txBody>
+      </p:sp>
+      <p:sp>
+        <p:nvSpPr>
+          <p:cNvPr id="54" name="TextBox 53"/>
+          <p:cNvSpPr txBox="1"/>
+          <p:nvPr/>
+        </p:nvSpPr>
+        <p:spPr>
+          <a:xfrm>
+            <a:off x="5678424" y="5404104"/>
+            <a:ext cx="2926079" cy="274320"/>
+          </a:xfrm>
+          <a:prstGeom prst="rect">
+            <a:avLst/>
+          </a:prstGeom>
+          <a:noFill/>
+        </p:spPr>
+        <p:txBody>
+          <a:bodyPr wrap="square" anchor="ctr" lIns="0" rIns="0" tIns="0" bIns="0">
+            <a:spAutoFit/>
+          </a:bodyPr>
+          <a:lstStyle/>
+          <a:p>
+            <a:pPr algn="l">
+              <a:lnSpc>
+                <a:spcPct val="110000"/>
+              </a:lnSpc>
+            </a:pPr>
+            <a:r>
+              <a:rPr sz="1500" b="0">
+                <a:solidFill>
+                  <a:srgbClr val="555555"/>
+                </a:solidFill>
+                <a:latin typeface="Arial"/>
+                <a:ea typeface="Arial"/>
+              </a:rPr>
+              <a:t>write streams · XFS · NVMe FDP</a:t>
+            </a:r>
+          </a:p>
+        </p:txBody>
+      </p:sp>
+      <p:sp>
+        <p:nvSpPr>
+          <p:cNvPr id="55" name="Rounded Rectangle 54"/>
+          <p:cNvSpPr/>
+          <p:nvPr/>
+        </p:nvSpPr>
+        <p:spPr>
+          <a:xfrm>
+            <a:off x="8494776" y="5239512"/>
+            <a:ext cx="676656" cy="329184"/>
+          </a:xfrm>
+          <a:prstGeom prst="roundRect">
+            <a:avLst>
+              <a:gd name="adj" fmla="val 22222"/>
+            </a:avLst>
+          </a:prstGeom>
+          <a:solidFill>
+            <a:srgbClr val="3C5AC8"/>
+          </a:solidFill>
+          <a:ln>
+            <a:noFill/>
+          </a:ln>
+          <a:effectLst/>
+        </p:spPr>
+        <p:style>
+          <a:lnRef idx="1">
+            <a:schemeClr val="accent1"/>
+          </a:lnRef>
+          <a:fillRef idx="3">
+            <a:schemeClr val="accent1"/>
+          </a:fillRef>
+          <a:effectRef idx="2">
+            <a:schemeClr val="accent1"/>
+          </a:effectRef>
+          <a:fontRef idx="minor">
+            <a:schemeClr val="lt1"/>
+          </a:fontRef>
+        </p:style>
+        <p:txBody>
+          <a:bodyPr rtlCol="0" anchor="ctr"/>
+          <a:lstStyle/>
+          <a:p>
+            <a:pPr algn="ctr"/>
+          </a:p>
+        </p:txBody>
+      </p:sp>
+      <p:sp>
+        <p:nvSpPr>
+          <p:cNvPr id="56" name="TextBox 55"/>
+          <p:cNvSpPr txBox="1"/>
+          <p:nvPr/>
+        </p:nvSpPr>
+        <p:spPr>
+          <a:xfrm>
+            <a:off x="8549640" y="5239512"/>
+            <a:ext cx="566928" cy="329184"/>
+          </a:xfrm>
+          <a:prstGeom prst="rect">
+            <a:avLst/>
+          </a:prstGeom>
+          <a:noFill/>
+        </p:spPr>
+        <p:txBody>
+          <a:bodyPr wrap="square" anchor="ctr" lIns="0" rIns="0" tIns="0" bIns="0">
+            <a:spAutoFit/>
+          </a:bodyPr>
+          <a:lstStyle/>
+          <a:p>
+            <a:pPr algn="ctr">
+              <a:lnSpc>
+                <a:spcPct val="110000"/>
+              </a:lnSpc>
+            </a:pPr>
+            <a:r>
+              <a:rPr sz="1500" b="1">
+                <a:solidFill>
+                  <a:srgbClr val="FFFFFF"/>
+                </a:solidFill>
+                <a:latin typeface="Arial"/>
+                <a:ea typeface="Arial"/>
+              </a:rPr>
+              <a:t>일부</a:t>
+            </a:r>
+          </a:p>
+        </p:txBody>
+      </p:sp>
+      <p:sp>
+        <p:nvSpPr>
+          <p:cNvPr id="57" name="Rounded Rectangle 56"/>
+          <p:cNvSpPr/>
+          <p:nvPr/>
+        </p:nvSpPr>
+        <p:spPr>
+          <a:xfrm>
+            <a:off x="5532120" y="5760720"/>
+            <a:ext cx="3749039" cy="585216"/>
+          </a:xfrm>
+          <a:prstGeom prst="roundRect">
+            <a:avLst>
+              <a:gd name="adj" fmla="val 12500"/>
+            </a:avLst>
+          </a:prstGeom>
+          <a:solidFill>
+            <a:srgbClr val="1428A0"/>
+          </a:solidFill>
+          <a:ln>
+            <a:noFill/>
+          </a:ln>
+          <a:effectLst/>
+        </p:spPr>
+        <p:style>
+          <a:lnRef idx="1">
+            <a:schemeClr val="accent1"/>
+          </a:lnRef>
+          <a:fillRef idx="3">
+            <a:schemeClr val="accent1"/>
+          </a:fillRef>
+          <a:effectRef idx="2">
+            <a:schemeClr val="accent1"/>
+          </a:effectRef>
+          <a:fontRef idx="minor">
+            <a:schemeClr val="lt1"/>
+          </a:fontRef>
+        </p:style>
+        <p:txBody>
+          <a:bodyPr rtlCol="0" anchor="ctr"/>
+          <a:lstStyle/>
+          <a:p>
+            <a:pPr algn="ctr"/>
+          </a:p>
+        </p:txBody>
+      </p:sp>
+      <p:sp>
+        <p:nvSpPr>
+          <p:cNvPr id="58" name="TextBox 57"/>
+          <p:cNvSpPr txBox="1"/>
+          <p:nvPr/>
+        </p:nvSpPr>
+        <p:spPr>
+          <a:xfrm>
+            <a:off x="5678424" y="5779007"/>
+            <a:ext cx="2743199" cy="292608"/>
+          </a:xfrm>
+          <a:prstGeom prst="rect">
+            <a:avLst/>
+          </a:prstGeom>
+          <a:noFill/>
+        </p:spPr>
+        <p:txBody>
+          <a:bodyPr wrap="square" anchor="ctr" lIns="0" rIns="0" tIns="0" bIns="0">
+            <a:spAutoFit/>
+          </a:bodyPr>
+          <a:lstStyle/>
+          <a:p>
+            <a:pPr algn="l">
+              <a:lnSpc>
+                <a:spcPct val="110000"/>
+              </a:lnSpc>
+            </a:pPr>
+            <a:r>
+              <a:rPr sz="1700" b="1">
+                <a:solidFill>
+                  <a:srgbClr val="FFFFFF"/>
+                </a:solidFill>
+                <a:latin typeface="Arial"/>
+                <a:ea typeface="Arial"/>
+              </a:rPr>
+              <a:t>SSD 펌웨어</a:t>
+            </a:r>
+          </a:p>
+        </p:txBody>
+      </p:sp>
+      <p:sp>
+        <p:nvSpPr>
+          <p:cNvPr id="59" name="TextBox 58"/>
+          <p:cNvSpPr txBox="1"/>
+          <p:nvPr/>
+        </p:nvSpPr>
+        <p:spPr>
+          <a:xfrm>
+            <a:off x="5678424" y="6053328"/>
+            <a:ext cx="2926079" cy="274320"/>
+          </a:xfrm>
+          <a:prstGeom prst="rect">
+            <a:avLst/>
+          </a:prstGeom>
+          <a:noFill/>
+        </p:spPr>
+        <p:txBody>
+          <a:bodyPr wrap="square" anchor="ctr" lIns="0" rIns="0" tIns="0" bIns="0">
+            <a:spAutoFit/>
+          </a:bodyPr>
+          <a:lstStyle/>
+          <a:p>
+            <a:pPr algn="l">
+              <a:lnSpc>
+                <a:spcPct val="110000"/>
+              </a:lnSpc>
+            </a:pPr>
+            <a:r>
+              <a:rPr sz="1500" b="0">
+                <a:solidFill>
+                  <a:srgbClr val="AAB8E8"/>
+                </a:solidFill>
+                <a:latin typeface="Arial"/>
+                <a:ea typeface="Arial"/>
+              </a:rPr>
+              <a:t>FDP · pSLC · Large IU · GC</a:t>
+            </a:r>
+          </a:p>
+        </p:txBody>
+      </p:sp>
+      <p:sp>
+        <p:nvSpPr>
+          <p:cNvPr id="60" name="Rounded Rectangle 59"/>
+          <p:cNvSpPr/>
+          <p:nvPr/>
+        </p:nvSpPr>
+        <p:spPr>
+          <a:xfrm>
+            <a:off x="8494776" y="5888736"/>
+            <a:ext cx="676656" cy="329184"/>
+          </a:xfrm>
+          <a:prstGeom prst="roundRect">
+            <a:avLst>
+              <a:gd name="adj" fmla="val 22222"/>
+            </a:avLst>
+          </a:prstGeom>
+          <a:solidFill>
+            <a:srgbClr val="FFFFFF"/>
+          </a:solidFill>
+          <a:ln>
+            <a:noFill/>
+          </a:ln>
+          <a:effectLst/>
+        </p:spPr>
+        <p:style>
+          <a:lnRef idx="1">
+            <a:schemeClr val="accent1"/>
+          </a:lnRef>
+          <a:fillRef idx="3">
+            <a:schemeClr val="accent1"/>
+          </a:fillRef>
+          <a:effectRef idx="2">
+            <a:schemeClr val="accent1"/>
+          </a:effectRef>
+          <a:fontRef idx="minor">
+            <a:schemeClr val="lt1"/>
+          </a:fontRef>
+        </p:style>
+        <p:txBody>
+          <a:bodyPr rtlCol="0" anchor="ctr"/>
+          <a:lstStyle/>
+          <a:p>
+            <a:pPr algn="ctr"/>
+          </a:p>
+        </p:txBody>
+      </p:sp>
+      <p:sp>
+        <p:nvSpPr>
+          <p:cNvPr id="61" name="TextBox 60"/>
+          <p:cNvSpPr txBox="1"/>
+          <p:nvPr/>
+        </p:nvSpPr>
+        <p:spPr>
+          <a:xfrm>
+            <a:off x="8549640" y="5888736"/>
+            <a:ext cx="566928" cy="329184"/>
+          </a:xfrm>
+          <a:prstGeom prst="rect">
+            <a:avLst/>
+          </a:prstGeom>
+          <a:noFill/>
+        </p:spPr>
+        <p:txBody>
+          <a:bodyPr wrap="square" anchor="ctr" lIns="0" rIns="0" tIns="0" bIns="0">
+            <a:spAutoFit/>
+          </a:bodyPr>
+          <a:lstStyle/>
+          <a:p>
+            <a:pPr algn="ctr">
+              <a:lnSpc>
+                <a:spcPct val="110000"/>
+              </a:lnSpc>
+            </a:pPr>
+            <a:r>
+              <a:rPr sz="1500" b="1">
+                <a:solidFill>
+                  <a:srgbClr val="1428A0"/>
+                </a:solidFill>
+                <a:latin typeface="Arial"/>
+                <a:ea typeface="Arial"/>
+              </a:rPr>
+              <a:t>강점</a:t>
+            </a:r>
+          </a:p>
+        </p:txBody>
+      </p:sp>
+      <p:sp>
+        <p:nvSpPr>
+          <p:cNvPr id="62" name="Rounded Rectangle 61"/>
+          <p:cNvSpPr/>
+          <p:nvPr/>
+        </p:nvSpPr>
+        <p:spPr>
+          <a:xfrm>
+            <a:off x="5532120" y="6409944"/>
+            <a:ext cx="3749039" cy="585216"/>
+          </a:xfrm>
+          <a:prstGeom prst="roundRect">
+            <a:avLst>
+              <a:gd name="adj" fmla="val 12500"/>
+            </a:avLst>
+          </a:prstGeom>
+          <a:solidFill>
+            <a:srgbClr val="1428A0"/>
+          </a:solidFill>
+          <a:ln>
+            <a:noFill/>
+          </a:ln>
+          <a:effectLst/>
+        </p:spPr>
+        <p:style>
+          <a:lnRef idx="1">
+            <a:schemeClr val="accent1"/>
+          </a:lnRef>
+          <a:fillRef idx="3">
+            <a:schemeClr val="accent1"/>
+          </a:fillRef>
+          <a:effectRef idx="2">
+            <a:schemeClr val="accent1"/>
+          </a:effectRef>
+          <a:fontRef idx="minor">
+            <a:schemeClr val="lt1"/>
+          </a:fontRef>
+        </p:style>
+        <p:txBody>
+          <a:bodyPr rtlCol="0" anchor="ctr"/>
+          <a:lstStyle/>
+          <a:p>
+            <a:pPr algn="ctr"/>
+          </a:p>
+        </p:txBody>
+      </p:sp>
+      <p:sp>
+        <p:nvSpPr>
+          <p:cNvPr id="63" name="TextBox 62"/>
+          <p:cNvSpPr txBox="1"/>
+          <p:nvPr/>
+        </p:nvSpPr>
+        <p:spPr>
+          <a:xfrm>
+            <a:off x="5678424" y="6428231"/>
+            <a:ext cx="2743199" cy="292608"/>
+          </a:xfrm>
+          <a:prstGeom prst="rect">
+            <a:avLst/>
+          </a:prstGeom>
+          <a:noFill/>
+        </p:spPr>
+        <p:txBody>
+          <a:bodyPr wrap="square" anchor="ctr" lIns="0" rIns="0" tIns="0" bIns="0">
+            <a:spAutoFit/>
+          </a:bodyPr>
+          <a:lstStyle/>
+          <a:p>
+            <a:pPr algn="l">
+              <a:lnSpc>
+                <a:spcPct val="110000"/>
+              </a:lnSpc>
+            </a:pPr>
+            <a:r>
+              <a:rPr sz="1700" b="1">
+                <a:solidFill>
+                  <a:srgbClr val="FFFFFF"/>
+                </a:solidFill>
+                <a:latin typeface="Arial"/>
+                <a:ea typeface="Arial"/>
+              </a:rPr>
+              <a:t>NAND</a:t>
+            </a:r>
+          </a:p>
+        </p:txBody>
+      </p:sp>
+      <p:sp>
+        <p:nvSpPr>
+          <p:cNvPr id="64" name="TextBox 63"/>
+          <p:cNvSpPr txBox="1"/>
+          <p:nvPr/>
+        </p:nvSpPr>
+        <p:spPr>
+          <a:xfrm>
+            <a:off x="5678424" y="6702552"/>
+            <a:ext cx="2926079" cy="274320"/>
+          </a:xfrm>
+          <a:prstGeom prst="rect">
+            <a:avLst/>
+          </a:prstGeom>
+          <a:noFill/>
+        </p:spPr>
+        <p:txBody>
+          <a:bodyPr wrap="square" anchor="ctr" lIns="0" rIns="0" tIns="0" bIns="0">
+            <a:spAutoFit/>
+          </a:bodyPr>
+          <a:lstStyle/>
+          <a:p>
+            <a:pPr algn="l">
+              <a:lnSpc>
+                <a:spcPct val="110000"/>
+              </a:lnSpc>
+            </a:pPr>
+            <a:r>
+              <a:rPr sz="1500" b="0">
+                <a:solidFill>
+                  <a:srgbClr val="AAB8E8"/>
+                </a:solidFill>
+                <a:latin typeface="Arial"/>
+                <a:ea typeface="Arial"/>
+              </a:rPr>
+              <a:t>TLC · QLC · Z-NAND</a:t>
+            </a:r>
+          </a:p>
+        </p:txBody>
+      </p:sp>
+      <p:sp>
+        <p:nvSpPr>
+          <p:cNvPr id="65" name="Rounded Rectangle 64"/>
+          <p:cNvSpPr/>
+          <p:nvPr/>
+        </p:nvSpPr>
+        <p:spPr>
+          <a:xfrm>
+            <a:off x="8494776" y="6537959"/>
+            <a:ext cx="676656" cy="329184"/>
+          </a:xfrm>
+          <a:prstGeom prst="roundRect">
+            <a:avLst>
+              <a:gd name="adj" fmla="val 22222"/>
+            </a:avLst>
+          </a:prstGeom>
+          <a:solidFill>
+            <a:srgbClr val="FFFFFF"/>
+          </a:solidFill>
+          <a:ln>
+            <a:noFill/>
+          </a:ln>
+          <a:effectLst/>
+        </p:spPr>
+        <p:style>
+          <a:lnRef idx="1">
+            <a:schemeClr val="accent1"/>
+          </a:lnRef>
+          <a:fillRef idx="3">
+            <a:schemeClr val="accent1"/>
+          </a:fillRef>
+          <a:effectRef idx="2">
+            <a:schemeClr val="accent1"/>
+          </a:effectRef>
+          <a:fontRef idx="minor">
+            <a:schemeClr val="lt1"/>
+          </a:fontRef>
+        </p:style>
+        <p:txBody>
+          <a:bodyPr rtlCol="0" anchor="ctr"/>
+          <a:lstStyle/>
+          <a:p>
+            <a:pPr algn="ctr"/>
+          </a:p>
+        </p:txBody>
+      </p:sp>
+      <p:sp>
+        <p:nvSpPr>
+          <p:cNvPr id="66" name="TextBox 65"/>
+          <p:cNvSpPr txBox="1"/>
+          <p:nvPr/>
+        </p:nvSpPr>
+        <p:spPr>
+          <a:xfrm>
+            <a:off x="8549640" y="6537959"/>
+            <a:ext cx="566928" cy="329184"/>
+          </a:xfrm>
+          <a:prstGeom prst="rect">
+            <a:avLst/>
+          </a:prstGeom>
+          <a:noFill/>
+        </p:spPr>
+        <p:txBody>
+          <a:bodyPr wrap="square" anchor="ctr" lIns="0" rIns="0" tIns="0" bIns="0">
+            <a:spAutoFit/>
+          </a:bodyPr>
+          <a:lstStyle/>
+          <a:p>
+            <a:pPr algn="ctr">
+              <a:lnSpc>
+                <a:spcPct val="110000"/>
+              </a:lnSpc>
+            </a:pPr>
+            <a:r>
+              <a:rPr sz="1500" b="1">
+                <a:solidFill>
+                  <a:srgbClr val="1428A0"/>
+                </a:solidFill>
+                <a:latin typeface="Arial"/>
+                <a:ea typeface="Arial"/>
+              </a:rPr>
+              <a:t>강점</a:t>
+            </a:r>
+          </a:p>
+        </p:txBody>
+      </p:sp>
+      <p:sp>
+        <p:nvSpPr>
+          <p:cNvPr id="67" name="Down Arrow 66"/>
+          <p:cNvSpPr/>
+          <p:nvPr/>
+        </p:nvSpPr>
+        <p:spPr>
+          <a:xfrm>
+            <a:off x="9409176" y="4014216"/>
+            <a:ext cx="384048" cy="2130552"/>
+          </a:xfrm>
+          <a:prstGeom prst="downArrow">
+            <a:avLst/>
+          </a:prstGeom>
+          <a:solidFill>
+            <a:srgbClr val="AAB8E8"/>
+          </a:solidFill>
+          <a:ln>
+            <a:noFill/>
+          </a:ln>
+          <a:effectLst/>
+        </p:spPr>
+        <p:style>
+          <a:lnRef idx="1">
+            <a:schemeClr val="accent1"/>
+          </a:lnRef>
+          <a:fillRef idx="3">
+            <a:schemeClr val="accent1"/>
+          </a:fillRef>
+          <a:effectRef idx="2">
+            <a:schemeClr val="accent1"/>
+          </a:effectRef>
+          <a:fontRef idx="minor">
+            <a:schemeClr val="lt1"/>
+          </a:fontRef>
+        </p:style>
+        <p:txBody>
+          <a:bodyPr rtlCol="0" anchor="ctr"/>
+          <a:lstStyle/>
+          <a:p>
+            <a:pPr algn="ctr"/>
+          </a:p>
+        </p:txBody>
+      </p:sp>
+      <p:sp>
+        <p:nvSpPr>
+          <p:cNvPr id="68" name="TextBox 67"/>
+          <p:cNvSpPr txBox="1"/>
+          <p:nvPr/>
+        </p:nvSpPr>
+        <p:spPr>
+          <a:xfrm>
+            <a:off x="9848088" y="3995928"/>
+            <a:ext cx="1216152" cy="566928"/>
+          </a:xfrm>
+          <a:prstGeom prst="rect">
+            <a:avLst/>
+          </a:prstGeom>
+          <a:noFill/>
+        </p:spPr>
+        <p:txBody>
+          <a:bodyPr wrap="square" anchor="ctr" lIns="0" rIns="0" tIns="0" bIns="0">
+            <a:spAutoFit/>
+          </a:bodyPr>
+          <a:lstStyle/>
+          <a:p>
+            <a:pPr algn="l">
+              <a:lnSpc>
+                <a:spcPct val="95000"/>
+              </a:lnSpc>
+            </a:pPr>
+            <a:r>
+              <a:rPr sz="1600" b="1">
+                <a:solidFill>
+                  <a:srgbClr val="1428A0"/>
+                </a:solidFill>
+                <a:latin typeface="Arial"/>
+                <a:ea typeface="Arial"/>
+              </a:rPr>
+              <a:t>수명 정보</a:t>
+            </a:r>
+          </a:p>
+          <a:p>
+            <a:pPr algn="l">
+              <a:lnSpc>
+                <a:spcPct val="95000"/>
+              </a:lnSpc>
+            </a:pPr>
+            <a:r>
+              <a:rPr sz="1500" b="0">
+                <a:solidFill>
+                  <a:srgbClr val="555555"/>
+                </a:solidFill>
+                <a:latin typeface="Arial"/>
+                <a:ea typeface="Arial"/>
+              </a:rPr>
+              <a:t>prefix · 세션</a:t>
+            </a:r>
+          </a:p>
+        </p:txBody>
+      </p:sp>
+      <p:sp>
+        <p:nvSpPr>
+          <p:cNvPr id="69" name="TextBox 68"/>
+          <p:cNvSpPr txBox="1"/>
+          <p:nvPr/>
+        </p:nvSpPr>
+        <p:spPr>
+          <a:xfrm>
+            <a:off x="9848088" y="4695444"/>
+            <a:ext cx="1216152" cy="768096"/>
+          </a:xfrm>
+          <a:prstGeom prst="rect">
+            <a:avLst/>
+          </a:prstGeom>
+          <a:noFill/>
+        </p:spPr>
+        <p:txBody>
+          <a:bodyPr wrap="square" anchor="ctr" lIns="0" rIns="0" tIns="0" bIns="0">
+            <a:spAutoFit/>
+          </a:bodyPr>
+          <a:lstStyle/>
+          <a:p>
+            <a:pPr algn="l">
+              <a:lnSpc>
+                <a:spcPct val="95000"/>
+              </a:lnSpc>
+            </a:pPr>
+            <a:r>
+              <a:rPr sz="1600" b="1">
+                <a:solidFill>
+                  <a:srgbClr val="1428A0"/>
+                </a:solidFill>
+                <a:latin typeface="Arial"/>
+                <a:ea typeface="Arial"/>
+              </a:rPr>
+              <a:t>함께</a:t>
+            </a:r>
+          </a:p>
+          <a:p>
+            <a:pPr algn="l">
+              <a:lnSpc>
+                <a:spcPct val="95000"/>
+              </a:lnSpc>
+            </a:pPr>
+            <a:r>
+              <a:rPr sz="1600" b="1">
+                <a:solidFill>
+                  <a:srgbClr val="1428A0"/>
+                </a:solidFill>
+                <a:latin typeface="Arial"/>
+                <a:ea typeface="Arial"/>
+              </a:rPr>
+              <a:t>만들</a:t>
+            </a:r>
+          </a:p>
+          <a:p>
+            <a:pPr algn="l">
+              <a:lnSpc>
+                <a:spcPct val="95000"/>
+              </a:lnSpc>
+            </a:pPr>
+            <a:r>
+              <a:rPr sz="1600" b="1">
+                <a:solidFill>
+                  <a:srgbClr val="1428A0"/>
+                </a:solidFill>
+                <a:latin typeface="Arial"/>
+                <a:ea typeface="Arial"/>
+              </a:rPr>
+              <a:t>경로</a:t>
+            </a:r>
+          </a:p>
+        </p:txBody>
+      </p:sp>
+      <p:sp>
+        <p:nvSpPr>
+          <p:cNvPr id="70" name="TextBox 69"/>
+          <p:cNvSpPr txBox="1"/>
+          <p:nvPr/>
+        </p:nvSpPr>
+        <p:spPr>
+          <a:xfrm>
+            <a:off x="9848088" y="5779008"/>
+            <a:ext cx="1216152" cy="566928"/>
+          </a:xfrm>
+          <a:prstGeom prst="rect">
+            <a:avLst/>
+          </a:prstGeom>
+          <a:noFill/>
+        </p:spPr>
+        <p:txBody>
+          <a:bodyPr wrap="square" anchor="ctr" lIns="0" rIns="0" tIns="0" bIns="0">
+            <a:spAutoFit/>
+          </a:bodyPr>
+          <a:lstStyle/>
+          <a:p>
+            <a:pPr algn="l">
+              <a:lnSpc>
+                <a:spcPct val="95000"/>
+              </a:lnSpc>
+            </a:pPr>
+            <a:r>
+              <a:rPr sz="1600" b="1">
+                <a:solidFill>
+                  <a:srgbClr val="1428A0"/>
+                </a:solidFill>
+                <a:latin typeface="Arial"/>
+                <a:ea typeface="Arial"/>
+              </a:rPr>
+              <a:t>SSD 배치</a:t>
+            </a:r>
+          </a:p>
+          <a:p>
+            <a:pPr algn="l">
+              <a:lnSpc>
+                <a:spcPct val="95000"/>
+              </a:lnSpc>
+            </a:pPr>
+            <a:r>
+              <a:rPr sz="1500" b="0">
+                <a:solidFill>
+                  <a:srgbClr val="555555"/>
+                </a:solidFill>
+                <a:latin typeface="Arial"/>
+                <a:ea typeface="Arial"/>
+              </a:rPr>
+              <a:t>FDP 핸들</a:t>
+            </a:r>
+          </a:p>
+        </p:txBody>
+      </p:sp>
+      <p:sp>
+        <p:nvSpPr>
+          <p:cNvPr id="71" name="Rounded Rectangle 70"/>
+          <p:cNvSpPr/>
+          <p:nvPr/>
+        </p:nvSpPr>
+        <p:spPr>
+          <a:xfrm>
+            <a:off x="5532120" y="7150607"/>
+            <a:ext cx="5532120" cy="1389888"/>
+          </a:xfrm>
+          <a:prstGeom prst="roundRect">
+            <a:avLst>
+              <a:gd name="adj" fmla="val 5263"/>
+            </a:avLst>
+          </a:prstGeom>
+          <a:solidFill>
+            <a:srgbClr val="FFFFFF"/>
+          </a:solidFill>
+          <a:ln w="19050">
+            <a:solidFill>
+              <a:srgbClr val="1428A0"/>
+            </a:solidFill>
+          </a:ln>
+          <a:effectLst/>
+        </p:spPr>
+        <p:style>
+          <a:lnRef idx="1">
+            <a:schemeClr val="accent1"/>
+          </a:lnRef>
+          <a:fillRef idx="3">
+            <a:schemeClr val="accent1"/>
+          </a:fillRef>
+          <a:effectRef idx="2">
+            <a:schemeClr val="accent1"/>
+          </a:effectRef>
+          <a:fontRef idx="minor">
+            <a:schemeClr val="lt1"/>
+          </a:fontRef>
+        </p:style>
+        <p:txBody>
+          <a:bodyPr rtlCol="0" anchor="ctr"/>
+          <a:lstStyle/>
+          <a:p>
+            <a:pPr algn="ctr"/>
+          </a:p>
+        </p:txBody>
+      </p:sp>
+      <p:sp>
+        <p:nvSpPr>
+          <p:cNvPr id="72" name="Rounded Rectangle 71"/>
+          <p:cNvSpPr/>
+          <p:nvPr/>
+        </p:nvSpPr>
+        <p:spPr>
+          <a:xfrm>
+            <a:off x="5696712" y="7242047"/>
+            <a:ext cx="731520" cy="329184"/>
+          </a:xfrm>
+          <a:prstGeom prst="roundRect">
+            <a:avLst>
+              <a:gd name="adj" fmla="val 22222"/>
+            </a:avLst>
+          </a:prstGeom>
+          <a:solidFill>
+            <a:srgbClr val="1428A0"/>
+          </a:solidFill>
+          <a:ln>
+            <a:noFill/>
+          </a:ln>
+          <a:effectLst/>
+        </p:spPr>
+        <p:style>
+          <a:lnRef idx="1">
+            <a:schemeClr val="accent1"/>
+          </a:lnRef>
+          <a:fillRef idx="3">
+            <a:schemeClr val="accent1"/>
+          </a:fillRef>
+          <a:effectRef idx="2">
+            <a:schemeClr val="accent1"/>
+          </a:effectRef>
+          <a:fontRef idx="minor">
+            <a:schemeClr val="lt1"/>
+          </a:fontRef>
+        </p:style>
+        <p:txBody>
+          <a:bodyPr rtlCol="0" anchor="ctr"/>
+          <a:lstStyle/>
+          <a:p>
+            <a:pPr algn="ctr"/>
+          </a:p>
+        </p:txBody>
+      </p:sp>
+      <p:sp>
+        <p:nvSpPr>
+          <p:cNvPr id="73" name="TextBox 72"/>
+          <p:cNvSpPr txBox="1"/>
+          <p:nvPr/>
+        </p:nvSpPr>
+        <p:spPr>
+          <a:xfrm>
+            <a:off x="5751575" y="7242047"/>
+            <a:ext cx="621792" cy="329184"/>
+          </a:xfrm>
+          <a:prstGeom prst="rect">
+            <a:avLst/>
+          </a:prstGeom>
+          <a:noFill/>
+        </p:spPr>
+        <p:txBody>
+          <a:bodyPr wrap="square" anchor="ctr" lIns="0" rIns="0" tIns="0" bIns="0">
+            <a:spAutoFit/>
+          </a:bodyPr>
+          <a:lstStyle/>
+          <a:p>
+            <a:pPr algn="ctr">
+              <a:lnSpc>
+                <a:spcPct val="110000"/>
+              </a:lnSpc>
+            </a:pPr>
+            <a:r>
+              <a:rPr sz="1600" b="1">
+                <a:solidFill>
+                  <a:srgbClr val="FFFFFF"/>
+                </a:solidFill>
+                <a:latin typeface="Arial"/>
+                <a:ea typeface="Arial"/>
+              </a:rPr>
+              <a:t>화두</a:t>
+            </a:r>
+          </a:p>
+        </p:txBody>
+      </p:sp>
+      <p:sp>
+        <p:nvSpPr>
+          <p:cNvPr id="74" name="TextBox 73"/>
+          <p:cNvSpPr txBox="1"/>
+          <p:nvPr/>
+        </p:nvSpPr>
+        <p:spPr>
+          <a:xfrm>
+            <a:off x="6519672" y="7223759"/>
+            <a:ext cx="4434840" cy="365760"/>
+          </a:xfrm>
+          <a:prstGeom prst="rect">
+            <a:avLst/>
+          </a:prstGeom>
+          <a:noFill/>
+        </p:spPr>
+        <p:txBody>
+          <a:bodyPr wrap="square" anchor="ctr" lIns="0" rIns="0" tIns="0" bIns="0">
+            <a:spAutoFit/>
+          </a:bodyPr>
+          <a:lstStyle/>
+          <a:p>
+            <a:pPr algn="l">
+              <a:lnSpc>
+                <a:spcPct val="110000"/>
+              </a:lnSpc>
+            </a:pPr>
+            <a:r>
+              <a:rPr sz="1700" b="1">
+                <a:solidFill>
+                  <a:srgbClr val="1A1A1A"/>
+                </a:solidFill>
+                <a:latin typeface="Arial"/>
+                <a:ea typeface="Arial"/>
+              </a:rPr>
+              <a:t>고객 관계(CRM)를 </a:t>
+            </a:r>
+            <a:r>
+              <a:rPr sz="1700" b="1">
+                <a:solidFill>
+                  <a:srgbClr val="1428A0"/>
+                </a:solidFill>
+                <a:latin typeface="Arial"/>
+                <a:ea typeface="Arial"/>
+              </a:rPr>
+              <a:t>엔지니어까지</a:t>
+            </a:r>
+          </a:p>
+        </p:txBody>
+      </p:sp>
+      <p:sp>
+        <p:nvSpPr>
+          <p:cNvPr id="75" name="Rounded Rectangle 74"/>
+          <p:cNvSpPr/>
+          <p:nvPr/>
+        </p:nvSpPr>
+        <p:spPr>
+          <a:xfrm>
+            <a:off x="5751576" y="7644383"/>
+            <a:ext cx="1060704" cy="274320"/>
+          </a:xfrm>
+          <a:prstGeom prst="roundRect">
+            <a:avLst>
+              <a:gd name="adj" fmla="val 26666"/>
+            </a:avLst>
+          </a:prstGeom>
+          <a:solidFill>
+            <a:srgbClr val="F5F5F5"/>
+          </a:solidFill>
+          <a:ln>
+            <a:noFill/>
+          </a:ln>
+          <a:effectLst/>
+        </p:spPr>
+        <p:style>
+          <a:lnRef idx="1">
+            <a:schemeClr val="accent1"/>
+          </a:lnRef>
+          <a:fillRef idx="3">
+            <a:schemeClr val="accent1"/>
+          </a:fillRef>
+          <a:effectRef idx="2">
+            <a:schemeClr val="accent1"/>
+          </a:effectRef>
+          <a:fontRef idx="minor">
+            <a:schemeClr val="lt1"/>
+          </a:fontRef>
+        </p:style>
+        <p:txBody>
+          <a:bodyPr rtlCol="0" anchor="ctr"/>
+          <a:lstStyle/>
+          <a:p>
+            <a:pPr algn="ctr"/>
+          </a:p>
+        </p:txBody>
+      </p:sp>
+      <p:sp>
+        <p:nvSpPr>
+          <p:cNvPr id="76" name="TextBox 75"/>
+          <p:cNvSpPr txBox="1"/>
+          <p:nvPr/>
+        </p:nvSpPr>
+        <p:spPr>
+          <a:xfrm>
+            <a:off x="5806440" y="7644383"/>
+            <a:ext cx="950976" cy="274320"/>
+          </a:xfrm>
+          <a:prstGeom prst="rect">
+            <a:avLst/>
+          </a:prstGeom>
+          <a:noFill/>
+        </p:spPr>
+        <p:txBody>
+          <a:bodyPr wrap="square" anchor="ctr" lIns="0" rIns="0" tIns="0" bIns="0">
+            <a:spAutoFit/>
+          </a:bodyPr>
+          <a:lstStyle/>
+          <a:p>
+            <a:pPr algn="ctr">
+              <a:lnSpc>
+                <a:spcPct val="110000"/>
+              </a:lnSpc>
+            </a:pPr>
+            <a:r>
+              <a:rPr sz="1500" b="1">
+                <a:solidFill>
+                  <a:srgbClr val="555555"/>
+                </a:solidFill>
+                <a:latin typeface="Arial"/>
+                <a:ea typeface="Arial"/>
+              </a:rPr>
+              <a:t>경영진</a:t>
+            </a:r>
+          </a:p>
+        </p:txBody>
+      </p:sp>
+      <p:sp>
+        <p:nvSpPr>
+          <p:cNvPr id="77" name="Rounded Rectangle 76"/>
+          <p:cNvSpPr/>
+          <p:nvPr/>
+        </p:nvSpPr>
+        <p:spPr>
+          <a:xfrm>
+            <a:off x="8129016" y="7644383"/>
+            <a:ext cx="1060704" cy="274320"/>
+          </a:xfrm>
+          <a:prstGeom prst="roundRect">
+            <a:avLst>
+              <a:gd name="adj" fmla="val 26666"/>
+            </a:avLst>
+          </a:prstGeom>
+          <a:solidFill>
+            <a:srgbClr val="F5F5F5"/>
+          </a:solidFill>
+          <a:ln>
+            <a:noFill/>
+          </a:ln>
+          <a:effectLst/>
+        </p:spPr>
+        <p:style>
+          <a:lnRef idx="1">
+            <a:schemeClr val="accent1"/>
+          </a:lnRef>
+          <a:fillRef idx="3">
+            <a:schemeClr val="accent1"/>
+          </a:fillRef>
+          <a:effectRef idx="2">
+            <a:schemeClr val="accent1"/>
+          </a:effectRef>
+          <a:fontRef idx="minor">
+            <a:schemeClr val="lt1"/>
+          </a:fontRef>
+        </p:style>
+        <p:txBody>
+          <a:bodyPr rtlCol="0" anchor="ctr"/>
+          <a:lstStyle/>
+          <a:p>
+            <a:pPr algn="ctr"/>
+          </a:p>
+        </p:txBody>
+      </p:sp>
+      <p:sp>
+        <p:nvSpPr>
+          <p:cNvPr id="78" name="TextBox 77"/>
+          <p:cNvSpPr txBox="1"/>
+          <p:nvPr/>
+        </p:nvSpPr>
+        <p:spPr>
+          <a:xfrm>
+            <a:off x="8183880" y="7644383"/>
+            <a:ext cx="950976" cy="274320"/>
+          </a:xfrm>
+          <a:prstGeom prst="rect">
+            <a:avLst/>
+          </a:prstGeom>
+          <a:noFill/>
+        </p:spPr>
+        <p:txBody>
+          <a:bodyPr wrap="square" anchor="ctr" lIns="0" rIns="0" tIns="0" bIns="0">
+            <a:spAutoFit/>
+          </a:bodyPr>
+          <a:lstStyle/>
+          <a:p>
+            <a:pPr algn="ctr">
+              <a:lnSpc>
+                <a:spcPct val="110000"/>
+              </a:lnSpc>
+            </a:pPr>
+            <a:r>
+              <a:rPr sz="1500" b="1">
+                <a:solidFill>
+                  <a:srgbClr val="555555"/>
+                </a:solidFill>
+                <a:latin typeface="Arial"/>
+                <a:ea typeface="Arial"/>
+              </a:rPr>
+              <a:t>경영진</a:t>
+            </a:r>
+          </a:p>
+        </p:txBody>
+      </p:sp>
+      <p:sp>
+        <p:nvSpPr>
+          <p:cNvPr id="79" name="Rectangle 78"/>
+          <p:cNvSpPr/>
+          <p:nvPr/>
+        </p:nvSpPr>
+        <p:spPr>
+          <a:xfrm>
+            <a:off x="6848856" y="7772400"/>
+            <a:ext cx="1243584" cy="18288"/>
+          </a:xfrm>
+          <a:prstGeom prst="rect">
+            <a:avLst/>
+          </a:prstGeom>
+          <a:solidFill>
+            <a:srgbClr val="8A8A8A"/>
+          </a:solidFill>
+          <a:ln>
+            <a:noFill/>
+          </a:ln>
+          <a:effectLst/>
+        </p:spPr>
+        <p:style>
+          <a:lnRef idx="1">
+            <a:schemeClr val="accent1"/>
+          </a:lnRef>
+          <a:fillRef idx="3">
+            <a:schemeClr val="accent1"/>
+          </a:fillRef>
+          <a:effectRef idx="2">
+            <a:schemeClr val="accent1"/>
+          </a:effectRef>
+          <a:fontRef idx="minor">
+            <a:schemeClr val="lt1"/>
+          </a:fontRef>
+        </p:style>
+        <p:txBody>
+          <a:bodyPr rtlCol="0" anchor="ctr"/>
+          <a:lstStyle/>
+          <a:p>
+            <a:pPr algn="ctr"/>
+          </a:p>
+        </p:txBody>
+      </p:sp>
+      <p:sp>
+        <p:nvSpPr>
+          <p:cNvPr id="80" name="Rounded Rectangle 79"/>
+          <p:cNvSpPr/>
+          <p:nvPr/>
+        </p:nvSpPr>
+        <p:spPr>
+          <a:xfrm>
+            <a:off x="5751576" y="7955279"/>
+            <a:ext cx="1060704" cy="274320"/>
+          </a:xfrm>
+          <a:prstGeom prst="roundRect">
+            <a:avLst>
+              <a:gd name="adj" fmla="val 26666"/>
+            </a:avLst>
+          </a:prstGeom>
+          <a:solidFill>
+            <a:srgbClr val="F5F5F5"/>
+          </a:solidFill>
+          <a:ln>
+            <a:noFill/>
+          </a:ln>
+          <a:effectLst/>
+        </p:spPr>
+        <p:style>
+          <a:lnRef idx="1">
+            <a:schemeClr val="accent1"/>
+          </a:lnRef>
+          <a:fillRef idx="3">
+            <a:schemeClr val="accent1"/>
+          </a:fillRef>
+          <a:effectRef idx="2">
+            <a:schemeClr val="accent1"/>
+          </a:effectRef>
+          <a:fontRef idx="minor">
+            <a:schemeClr val="lt1"/>
+          </a:fontRef>
+        </p:style>
+        <p:txBody>
+          <a:bodyPr rtlCol="0" anchor="ctr"/>
+          <a:lstStyle/>
+          <a:p>
+            <a:pPr algn="ctr"/>
+          </a:p>
+        </p:txBody>
+      </p:sp>
+      <p:sp>
+        <p:nvSpPr>
+          <p:cNvPr id="81" name="TextBox 80"/>
+          <p:cNvSpPr txBox="1"/>
+          <p:nvPr/>
+        </p:nvSpPr>
+        <p:spPr>
+          <a:xfrm>
+            <a:off x="5806440" y="7955279"/>
+            <a:ext cx="950976" cy="274320"/>
+          </a:xfrm>
+          <a:prstGeom prst="rect">
+            <a:avLst/>
+          </a:prstGeom>
+          <a:noFill/>
+        </p:spPr>
+        <p:txBody>
+          <a:bodyPr wrap="square" anchor="ctr" lIns="0" rIns="0" tIns="0" bIns="0">
+            <a:spAutoFit/>
+          </a:bodyPr>
+          <a:lstStyle/>
+          <a:p>
+            <a:pPr algn="ctr">
+              <a:lnSpc>
+                <a:spcPct val="110000"/>
+              </a:lnSpc>
+            </a:pPr>
+            <a:r>
+              <a:rPr sz="1500" b="1">
+                <a:solidFill>
+                  <a:srgbClr val="555555"/>
+                </a:solidFill>
+                <a:latin typeface="Arial"/>
+                <a:ea typeface="Arial"/>
+              </a:rPr>
+              <a:t>영업</a:t>
+            </a:r>
+          </a:p>
+        </p:txBody>
+      </p:sp>
+      <p:sp>
+        <p:nvSpPr>
+          <p:cNvPr id="82" name="Rounded Rectangle 81"/>
+          <p:cNvSpPr/>
+          <p:nvPr/>
+        </p:nvSpPr>
+        <p:spPr>
+          <a:xfrm>
+            <a:off x="8129016" y="7955279"/>
+            <a:ext cx="1060704" cy="274320"/>
+          </a:xfrm>
+          <a:prstGeom prst="roundRect">
+            <a:avLst>
+              <a:gd name="adj" fmla="val 26666"/>
+            </a:avLst>
+          </a:prstGeom>
+          <a:solidFill>
+            <a:srgbClr val="F5F5F5"/>
+          </a:solidFill>
+          <a:ln>
+            <a:noFill/>
+          </a:ln>
+          <a:effectLst/>
+        </p:spPr>
+        <p:style>
+          <a:lnRef idx="1">
+            <a:schemeClr val="accent1"/>
+          </a:lnRef>
+          <a:fillRef idx="3">
+            <a:schemeClr val="accent1"/>
+          </a:fillRef>
+          <a:effectRef idx="2">
+            <a:schemeClr val="accent1"/>
+          </a:effectRef>
+          <a:fontRef idx="minor">
+            <a:schemeClr val="lt1"/>
+          </a:fontRef>
+        </p:style>
+        <p:txBody>
+          <a:bodyPr rtlCol="0" anchor="ctr"/>
+          <a:lstStyle/>
+          <a:p>
+            <a:pPr algn="ctr"/>
+          </a:p>
+        </p:txBody>
+      </p:sp>
+      <p:sp>
+        <p:nvSpPr>
+          <p:cNvPr id="83" name="TextBox 82"/>
+          <p:cNvSpPr txBox="1"/>
+          <p:nvPr/>
+        </p:nvSpPr>
+        <p:spPr>
+          <a:xfrm>
+            <a:off x="8183880" y="7955279"/>
+            <a:ext cx="950976" cy="274320"/>
+          </a:xfrm>
+          <a:prstGeom prst="rect">
+            <a:avLst/>
+          </a:prstGeom>
+          <a:noFill/>
+        </p:spPr>
+        <p:txBody>
+          <a:bodyPr wrap="square" anchor="ctr" lIns="0" rIns="0" tIns="0" bIns="0">
+            <a:spAutoFit/>
+          </a:bodyPr>
+          <a:lstStyle/>
+          <a:p>
+            <a:pPr algn="ctr">
+              <a:lnSpc>
+                <a:spcPct val="110000"/>
+              </a:lnSpc>
+            </a:pPr>
+            <a:r>
+              <a:rPr sz="1500" b="1">
+                <a:solidFill>
+                  <a:srgbClr val="555555"/>
+                </a:solidFill>
+                <a:latin typeface="Arial"/>
+                <a:ea typeface="Arial"/>
+              </a:rPr>
+              <a:t>구매</a:t>
+            </a:r>
+          </a:p>
+        </p:txBody>
+      </p:sp>
+      <p:sp>
+        <p:nvSpPr>
+          <p:cNvPr id="84" name="Rectangle 83"/>
+          <p:cNvSpPr/>
+          <p:nvPr/>
+        </p:nvSpPr>
+        <p:spPr>
+          <a:xfrm>
+            <a:off x="6848856" y="8083296"/>
+            <a:ext cx="1243584" cy="18288"/>
+          </a:xfrm>
+          <a:prstGeom prst="rect">
+            <a:avLst/>
+          </a:prstGeom>
+          <a:solidFill>
+            <a:srgbClr val="8A8A8A"/>
+          </a:solidFill>
+          <a:ln>
+            <a:noFill/>
+          </a:ln>
+          <a:effectLst/>
+        </p:spPr>
+        <p:style>
+          <a:lnRef idx="1">
+            <a:schemeClr val="accent1"/>
+          </a:lnRef>
+          <a:fillRef idx="3">
+            <a:schemeClr val="accent1"/>
+          </a:fillRef>
+          <a:effectRef idx="2">
+            <a:schemeClr val="accent1"/>
+          </a:effectRef>
+          <a:fontRef idx="minor">
+            <a:schemeClr val="lt1"/>
+          </a:fontRef>
+        </p:style>
+        <p:txBody>
+          <a:bodyPr rtlCol="0" anchor="ctr"/>
+          <a:lstStyle/>
+          <a:p>
+            <a:pPr algn="ctr"/>
+          </a:p>
+        </p:txBody>
+      </p:sp>
+      <p:sp>
+        <p:nvSpPr>
+          <p:cNvPr id="85" name="Rounded Rectangle 84"/>
+          <p:cNvSpPr/>
+          <p:nvPr/>
+        </p:nvSpPr>
+        <p:spPr>
+          <a:xfrm>
+            <a:off x="5751576" y="8266175"/>
+            <a:ext cx="1060704" cy="274320"/>
+          </a:xfrm>
+          <a:prstGeom prst="roundRect">
+            <a:avLst>
+              <a:gd name="adj" fmla="val 26666"/>
+            </a:avLst>
+          </a:prstGeom>
+          <a:solidFill>
+            <a:srgbClr val="1428A0"/>
+          </a:solidFill>
+          <a:ln>
+            <a:noFill/>
+          </a:ln>
+          <a:effectLst/>
+        </p:spPr>
+        <p:style>
+          <a:lnRef idx="1">
+            <a:schemeClr val="accent1"/>
+          </a:lnRef>
+          <a:fillRef idx="3">
+            <a:schemeClr val="accent1"/>
+          </a:fillRef>
+          <a:effectRef idx="2">
+            <a:schemeClr val="accent1"/>
+          </a:effectRef>
+          <a:fontRef idx="minor">
+            <a:schemeClr val="lt1"/>
+          </a:fontRef>
+        </p:style>
+        <p:txBody>
+          <a:bodyPr rtlCol="0" anchor="ctr"/>
+          <a:lstStyle/>
+          <a:p>
+            <a:pPr algn="ctr"/>
+          </a:p>
+        </p:txBody>
+      </p:sp>
+      <p:sp>
+        <p:nvSpPr>
+          <p:cNvPr id="86" name="TextBox 85"/>
+          <p:cNvSpPr txBox="1"/>
+          <p:nvPr/>
+        </p:nvSpPr>
+        <p:spPr>
+          <a:xfrm>
+            <a:off x="5806440" y="8266175"/>
+            <a:ext cx="950976" cy="274320"/>
+          </a:xfrm>
+          <a:prstGeom prst="rect">
+            <a:avLst/>
+          </a:prstGeom>
+          <a:noFill/>
+        </p:spPr>
+        <p:txBody>
+          <a:bodyPr wrap="square" anchor="ctr" lIns="0" rIns="0" tIns="0" bIns="0">
+            <a:spAutoFit/>
+          </a:bodyPr>
+          <a:lstStyle/>
+          <a:p>
+            <a:pPr algn="ctr">
+              <a:lnSpc>
+                <a:spcPct val="110000"/>
+              </a:lnSpc>
+            </a:pPr>
+            <a:r>
+              <a:rPr sz="1500" b="1">
+                <a:solidFill>
+                  <a:srgbClr val="FFFFFF"/>
+                </a:solidFill>
+                <a:latin typeface="Arial"/>
+                <a:ea typeface="Arial"/>
+              </a:rPr>
+              <a:t>엔지니어</a:t>
+            </a:r>
+          </a:p>
+        </p:txBody>
+      </p:sp>
+      <p:sp>
+        <p:nvSpPr>
+          <p:cNvPr id="87" name="Rounded Rectangle 86"/>
+          <p:cNvSpPr/>
+          <p:nvPr/>
+        </p:nvSpPr>
+        <p:spPr>
+          <a:xfrm>
+            <a:off x="8129016" y="8266175"/>
+            <a:ext cx="1060704" cy="274320"/>
+          </a:xfrm>
+          <a:prstGeom prst="roundRect">
+            <a:avLst>
+              <a:gd name="adj" fmla="val 26666"/>
+            </a:avLst>
+          </a:prstGeom>
+          <a:solidFill>
+            <a:srgbClr val="1428A0"/>
+          </a:solidFill>
+          <a:ln>
+            <a:noFill/>
+          </a:ln>
+          <a:effectLst/>
+        </p:spPr>
+        <p:style>
+          <a:lnRef idx="1">
+            <a:schemeClr val="accent1"/>
+          </a:lnRef>
+          <a:fillRef idx="3">
+            <a:schemeClr val="accent1"/>
+          </a:fillRef>
+          <a:effectRef idx="2">
+            <a:schemeClr val="accent1"/>
+          </a:effectRef>
+          <a:fontRef idx="minor">
+            <a:schemeClr val="lt1"/>
+          </a:fontRef>
+        </p:style>
+        <p:txBody>
+          <a:bodyPr rtlCol="0" anchor="ctr"/>
+          <a:lstStyle/>
+          <a:p>
+            <a:pPr algn="ctr"/>
+          </a:p>
+        </p:txBody>
+      </p:sp>
+      <p:sp>
+        <p:nvSpPr>
+          <p:cNvPr id="88" name="TextBox 87"/>
+          <p:cNvSpPr txBox="1"/>
+          <p:nvPr/>
+        </p:nvSpPr>
+        <p:spPr>
+          <a:xfrm>
+            <a:off x="8183880" y="8266175"/>
+            <a:ext cx="950976" cy="274320"/>
+          </a:xfrm>
+          <a:prstGeom prst="rect">
+            <a:avLst/>
+          </a:prstGeom>
+          <a:noFill/>
+        </p:spPr>
+        <p:txBody>
+          <a:bodyPr wrap="square" anchor="ctr" lIns="0" rIns="0" tIns="0" bIns="0">
+            <a:spAutoFit/>
+          </a:bodyPr>
+          <a:lstStyle/>
+          <a:p>
+            <a:pPr algn="ctr">
+              <a:lnSpc>
+                <a:spcPct val="110000"/>
+              </a:lnSpc>
+            </a:pPr>
+            <a:r>
+              <a:rPr sz="1500" b="1">
+                <a:solidFill>
+                  <a:srgbClr val="FFFFFF"/>
+                </a:solidFill>
+                <a:latin typeface="Arial"/>
+                <a:ea typeface="Arial"/>
+              </a:rPr>
+              <a:t>엔지니어</a:t>
+            </a:r>
+          </a:p>
+        </p:txBody>
+      </p:sp>
+      <p:sp>
+        <p:nvSpPr>
+          <p:cNvPr id="89" name="Rectangle 88"/>
+          <p:cNvSpPr/>
+          <p:nvPr/>
+        </p:nvSpPr>
+        <p:spPr>
+          <a:xfrm>
+            <a:off x="6848856" y="8375904"/>
+            <a:ext cx="1243584" cy="54864"/>
+          </a:xfrm>
+          <a:prstGeom prst="rect">
+            <a:avLst/>
+          </a:prstGeom>
+          <a:solidFill>
+            <a:srgbClr val="1428A0"/>
+          </a:solidFill>
+          <a:ln>
+            <a:noFill/>
+          </a:ln>
+          <a:effectLst/>
+        </p:spPr>
+        <p:style>
+          <a:lnRef idx="1">
+            <a:schemeClr val="accent1"/>
+          </a:lnRef>
+          <a:fillRef idx="3">
+            <a:schemeClr val="accent1"/>
+          </a:fillRef>
+          <a:effectRef idx="2">
+            <a:schemeClr val="accent1"/>
+          </a:effectRef>
+          <a:fontRef idx="minor">
+            <a:schemeClr val="lt1"/>
+          </a:fontRef>
+        </p:style>
+        <p:txBody>
+          <a:bodyPr rtlCol="0" anchor="ctr"/>
+          <a:lstStyle/>
+          <a:p>
+            <a:pPr algn="ctr"/>
+          </a:p>
+        </p:txBody>
+      </p:sp>
+      <p:sp>
+        <p:nvSpPr>
+          <p:cNvPr id="90" name="Rounded Rectangle 89"/>
+          <p:cNvSpPr/>
+          <p:nvPr/>
+        </p:nvSpPr>
+        <p:spPr>
+          <a:xfrm>
+            <a:off x="6903720" y="8275319"/>
+            <a:ext cx="1133856" cy="256032"/>
+          </a:xfrm>
+          <a:prstGeom prst="roundRect">
+            <a:avLst>
+              <a:gd name="adj" fmla="val 28571"/>
+            </a:avLst>
+          </a:prstGeom>
+          <a:solidFill>
+            <a:srgbClr val="FFFFFF"/>
+          </a:solidFill>
+          <a:ln w="12700">
+            <a:solidFill>
+              <a:srgbClr val="1428A0"/>
+            </a:solidFill>
+          </a:ln>
+          <a:effectLst/>
+        </p:spPr>
+        <p:style>
+          <a:lnRef idx="1">
+            <a:schemeClr val="accent1"/>
+          </a:lnRef>
+          <a:fillRef idx="3">
+            <a:schemeClr val="accent1"/>
+          </a:fillRef>
+          <a:effectRef idx="2">
+            <a:schemeClr val="accent1"/>
+          </a:effectRef>
+          <a:fontRef idx="minor">
+            <a:schemeClr val="lt1"/>
+          </a:fontRef>
+        </p:style>
+        <p:txBody>
+          <a:bodyPr rtlCol="0" anchor="ctr"/>
+          <a:lstStyle/>
+          <a:p>
+            <a:pPr algn="ctr"/>
+          </a:p>
+        </p:txBody>
+      </p:sp>
+      <p:sp>
+        <p:nvSpPr>
+          <p:cNvPr id="91" name="TextBox 90"/>
+          <p:cNvSpPr txBox="1"/>
+          <p:nvPr/>
+        </p:nvSpPr>
+        <p:spPr>
+          <a:xfrm>
+            <a:off x="6958583" y="8275319"/>
+            <a:ext cx="1024128" cy="256032"/>
+          </a:xfrm>
+          <a:prstGeom prst="rect">
+            <a:avLst/>
+          </a:prstGeom>
+          <a:noFill/>
+        </p:spPr>
+        <p:txBody>
+          <a:bodyPr wrap="square" anchor="ctr" lIns="0" rIns="0" tIns="0" bIns="0">
+            <a:spAutoFit/>
+          </a:bodyPr>
+          <a:lstStyle/>
+          <a:p>
+            <a:pPr algn="ctr">
+              <a:lnSpc>
+                <a:spcPct val="110000"/>
+              </a:lnSpc>
+            </a:pPr>
+            <a:r>
+              <a:rPr sz="1500" b="1">
+                <a:solidFill>
+                  <a:srgbClr val="1428A0"/>
+                </a:solidFill>
+                <a:latin typeface="Arial"/>
+                <a:ea typeface="Arial"/>
+              </a:rPr>
+              <a:t>언어 · 문화</a:t>
+            </a:r>
+          </a:p>
+        </p:txBody>
+      </p:sp>
+      <p:sp>
+        <p:nvSpPr>
+          <p:cNvPr id="92" name="Rectangle 91"/>
+          <p:cNvSpPr/>
+          <p:nvPr/>
+        </p:nvSpPr>
+        <p:spPr>
+          <a:xfrm>
+            <a:off x="9372600" y="7644383"/>
+            <a:ext cx="36576" cy="585216"/>
+          </a:xfrm>
+          <a:prstGeom prst="rect">
+            <a:avLst/>
+          </a:prstGeom>
+          <a:solidFill>
+            <a:srgbClr val="8A8A8A"/>
+          </a:solidFill>
+          <a:ln>
+            <a:noFill/>
+          </a:ln>
+          <a:effectLst/>
+        </p:spPr>
+        <p:style>
+          <a:lnRef idx="1">
+            <a:schemeClr val="accent1"/>
+          </a:lnRef>
+          <a:fillRef idx="3">
+            <a:schemeClr val="accent1"/>
+          </a:fillRef>
+          <a:effectRef idx="2">
+            <a:schemeClr val="accent1"/>
+          </a:effectRef>
+          <a:fontRef idx="minor">
+            <a:schemeClr val="lt1"/>
+          </a:fontRef>
+        </p:style>
+        <p:txBody>
+          <a:bodyPr rtlCol="0" anchor="ctr"/>
+          <a:lstStyle/>
+          <a:p>
+            <a:pPr algn="ctr"/>
+          </a:p>
+        </p:txBody>
+      </p:sp>
+      <p:sp>
+        <p:nvSpPr>
+          <p:cNvPr id="93" name="Rectangle 92"/>
+          <p:cNvSpPr/>
+          <p:nvPr/>
+        </p:nvSpPr>
+        <p:spPr>
+          <a:xfrm>
+            <a:off x="9281160" y="7644383"/>
+            <a:ext cx="109728" cy="36576"/>
+          </a:xfrm>
+          <a:prstGeom prst="rect">
+            <a:avLst/>
+          </a:prstGeom>
+          <a:solidFill>
+            <a:srgbClr val="8A8A8A"/>
+          </a:solidFill>
+          <a:ln>
+            <a:noFill/>
+          </a:ln>
+          <a:effectLst/>
+        </p:spPr>
+        <p:style>
+          <a:lnRef idx="1">
+            <a:schemeClr val="accent1"/>
+          </a:lnRef>
+          <a:fillRef idx="3">
+            <a:schemeClr val="accent1"/>
+          </a:fillRef>
+          <a:effectRef idx="2">
+            <a:schemeClr val="accent1"/>
+          </a:effectRef>
+          <a:fontRef idx="minor">
+            <a:schemeClr val="lt1"/>
+          </a:fontRef>
+        </p:style>
+        <p:txBody>
+          <a:bodyPr rtlCol="0" anchor="ctr"/>
+          <a:lstStyle/>
+          <a:p>
+            <a:pPr algn="ctr"/>
+          </a:p>
+        </p:txBody>
+      </p:sp>
+      <p:sp>
+        <p:nvSpPr>
+          <p:cNvPr id="94" name="Rectangle 93"/>
+          <p:cNvSpPr/>
+          <p:nvPr/>
+        </p:nvSpPr>
+        <p:spPr>
+          <a:xfrm>
+            <a:off x="9281160" y="8193024"/>
+            <a:ext cx="109728" cy="36576"/>
+          </a:xfrm>
+          <a:prstGeom prst="rect">
+            <a:avLst/>
+          </a:prstGeom>
+          <a:solidFill>
+            <a:srgbClr val="8A8A8A"/>
+          </a:solidFill>
+          <a:ln>
+            <a:noFill/>
+          </a:ln>
+          <a:effectLst/>
+        </p:spPr>
+        <p:style>
+          <a:lnRef idx="1">
+            <a:schemeClr val="accent1"/>
+          </a:lnRef>
+          <a:fillRef idx="3">
+            <a:schemeClr val="accent1"/>
+          </a:fillRef>
+          <a:effectRef idx="2">
+            <a:schemeClr val="accent1"/>
+          </a:effectRef>
+          <a:fontRef idx="minor">
+            <a:schemeClr val="lt1"/>
+          </a:fontRef>
+        </p:style>
+        <p:txBody>
+          <a:bodyPr rtlCol="0" anchor="ctr"/>
+          <a:lstStyle/>
+          <a:p>
+            <a:pPr algn="ctr"/>
+          </a:p>
+        </p:txBody>
+      </p:sp>
+      <p:sp>
+        <p:nvSpPr>
+          <p:cNvPr id="95" name="TextBox 94"/>
+          <p:cNvSpPr txBox="1"/>
+          <p:nvPr/>
+        </p:nvSpPr>
+        <p:spPr>
+          <a:xfrm>
+            <a:off x="9445752" y="7799831"/>
+            <a:ext cx="731520" cy="274320"/>
+          </a:xfrm>
+          <a:prstGeom prst="rect">
+            <a:avLst/>
+          </a:prstGeom>
+          <a:noFill/>
+        </p:spPr>
+        <p:txBody>
+          <a:bodyPr wrap="square" anchor="ctr" lIns="0" rIns="0" tIns="0" bIns="0">
+            <a:spAutoFit/>
+          </a:bodyPr>
+          <a:lstStyle/>
+          <a:p>
+            <a:pPr algn="l">
+              <a:lnSpc>
+                <a:spcPct val="110000"/>
+              </a:lnSpc>
+            </a:pPr>
+            <a:r>
+              <a:rPr sz="1500" b="1">
+                <a:solidFill>
+                  <a:srgbClr val="8A8A8A"/>
+                </a:solidFill>
+                <a:latin typeface="Arial"/>
+                <a:ea typeface="Arial"/>
+              </a:rPr>
+              <a:t>지금</a:t>
+            </a:r>
+          </a:p>
+        </p:txBody>
+      </p:sp>
+      <p:sp>
+        <p:nvSpPr>
+          <p:cNvPr id="96" name="Rectangle 95"/>
+          <p:cNvSpPr/>
+          <p:nvPr/>
+        </p:nvSpPr>
+        <p:spPr>
+          <a:xfrm>
+            <a:off x="10104120" y="7644383"/>
+            <a:ext cx="36576" cy="896112"/>
+          </a:xfrm>
+          <a:prstGeom prst="rect">
+            <a:avLst/>
+          </a:prstGeom>
+          <a:solidFill>
+            <a:srgbClr val="1428A0"/>
+          </a:solidFill>
+          <a:ln>
+            <a:noFill/>
+          </a:ln>
+          <a:effectLst/>
+        </p:spPr>
+        <p:style>
+          <a:lnRef idx="1">
+            <a:schemeClr val="accent1"/>
+          </a:lnRef>
+          <a:fillRef idx="3">
+            <a:schemeClr val="accent1"/>
+          </a:fillRef>
+          <a:effectRef idx="2">
+            <a:schemeClr val="accent1"/>
+          </a:effectRef>
+          <a:fontRef idx="minor">
+            <a:schemeClr val="lt1"/>
+          </a:fontRef>
+        </p:style>
+        <p:txBody>
+          <a:bodyPr rtlCol="0" anchor="ctr"/>
+          <a:lstStyle/>
+          <a:p>
+            <a:pPr algn="ctr"/>
+          </a:p>
+        </p:txBody>
+      </p:sp>
+      <p:sp>
+        <p:nvSpPr>
+          <p:cNvPr id="97" name="Rectangle 96"/>
+          <p:cNvSpPr/>
+          <p:nvPr/>
+        </p:nvSpPr>
+        <p:spPr>
+          <a:xfrm>
+            <a:off x="10012680" y="7644383"/>
+            <a:ext cx="109728" cy="36576"/>
+          </a:xfrm>
+          <a:prstGeom prst="rect">
+            <a:avLst/>
+          </a:prstGeom>
+          <a:solidFill>
+            <a:srgbClr val="1428A0"/>
+          </a:solidFill>
+          <a:ln>
+            <a:noFill/>
+          </a:ln>
+          <a:effectLst/>
+        </p:spPr>
+        <p:style>
+          <a:lnRef idx="1">
+            <a:schemeClr val="accent1"/>
+          </a:lnRef>
+          <a:fillRef idx="3">
+            <a:schemeClr val="accent1"/>
+          </a:fillRef>
+          <a:effectRef idx="2">
+            <a:schemeClr val="accent1"/>
+          </a:effectRef>
+          <a:fontRef idx="minor">
+            <a:schemeClr val="lt1"/>
+          </a:fontRef>
+        </p:style>
+        <p:txBody>
+          <a:bodyPr rtlCol="0" anchor="ctr"/>
+          <a:lstStyle/>
+          <a:p>
+            <a:pPr algn="ctr"/>
+          </a:p>
+        </p:txBody>
+      </p:sp>
+      <p:sp>
+        <p:nvSpPr>
+          <p:cNvPr id="98" name="Rectangle 97"/>
+          <p:cNvSpPr/>
+          <p:nvPr/>
+        </p:nvSpPr>
+        <p:spPr>
+          <a:xfrm>
+            <a:off x="10012680" y="8503920"/>
+            <a:ext cx="109728" cy="36576"/>
+          </a:xfrm>
+          <a:prstGeom prst="rect">
+            <a:avLst/>
+          </a:prstGeom>
+          <a:solidFill>
+            <a:srgbClr val="1428A0"/>
+          </a:solidFill>
+          <a:ln>
+            <a:noFill/>
+          </a:ln>
+          <a:effectLst/>
+        </p:spPr>
+        <p:style>
+          <a:lnRef idx="1">
+            <a:schemeClr val="accent1"/>
+          </a:lnRef>
+          <a:fillRef idx="3">
+            <a:schemeClr val="accent1"/>
+          </a:fillRef>
+          <a:effectRef idx="2">
+            <a:schemeClr val="accent1"/>
+          </a:effectRef>
+          <a:fontRef idx="minor">
+            <a:schemeClr val="lt1"/>
+          </a:fontRef>
+        </p:style>
+        <p:txBody>
+          <a:bodyPr rtlCol="0" anchor="ctr"/>
+          <a:lstStyle/>
+          <a:p>
+            <a:pPr algn="ctr"/>
+          </a:p>
+        </p:txBody>
+      </p:sp>
+      <p:sp>
+        <p:nvSpPr>
+          <p:cNvPr id="99" name="TextBox 98"/>
+          <p:cNvSpPr txBox="1"/>
+          <p:nvPr/>
+        </p:nvSpPr>
+        <p:spPr>
+          <a:xfrm>
+            <a:off x="10177272" y="7955279"/>
+            <a:ext cx="731520" cy="274320"/>
+          </a:xfrm>
+          <a:prstGeom prst="rect">
+            <a:avLst/>
+          </a:prstGeom>
+          <a:noFill/>
+        </p:spPr>
+        <p:txBody>
+          <a:bodyPr wrap="square" anchor="ctr" lIns="0" rIns="0" tIns="0" bIns="0">
+            <a:spAutoFit/>
+          </a:bodyPr>
+          <a:lstStyle/>
+          <a:p>
+            <a:pPr algn="l">
+              <a:lnSpc>
+                <a:spcPct val="110000"/>
+              </a:lnSpc>
+            </a:pPr>
+            <a:r>
+              <a:rPr sz="1500" b="1">
+                <a:solidFill>
+                  <a:srgbClr val="1428A0"/>
+                </a:solidFill>
+                <a:latin typeface="Arial"/>
+                <a:ea typeface="Arial"/>
+              </a:rPr>
+              <a:t>앞으로</a:t>
+            </a:r>
+          </a:p>
+        </p:txBody>
+      </p:sp>
+      <p:sp>
+        <p:nvSpPr>
+          <p:cNvPr id="100" name="Oval 99"/>
+          <p:cNvSpPr/>
+          <p:nvPr/>
+        </p:nvSpPr>
+        <p:spPr>
+          <a:xfrm>
+            <a:off x="11484864" y="2139696"/>
+            <a:ext cx="438912" cy="438912"/>
+          </a:xfrm>
+          <a:prstGeom prst="ellipse">
+            <a:avLst/>
+          </a:prstGeom>
+          <a:solidFill>
+            <a:srgbClr val="1428A0"/>
+          </a:solidFill>
+          <a:ln>
+            <a:noFill/>
+          </a:ln>
+          <a:effectLst/>
+        </p:spPr>
+        <p:style>
+          <a:lnRef idx="1">
+            <a:schemeClr val="accent1"/>
+          </a:lnRef>
+          <a:fillRef idx="3">
+            <a:schemeClr val="accent1"/>
+          </a:fillRef>
+          <a:effectRef idx="2">
+            <a:schemeClr val="accent1"/>
+          </a:effectRef>
+          <a:fontRef idx="minor">
+            <a:schemeClr val="lt1"/>
+          </a:fontRef>
+        </p:style>
+        <p:txBody>
+          <a:bodyPr rtlCol="0" anchor="ctr"/>
+          <a:lstStyle/>
+          <a:p>
+            <a:pPr algn="ctr"/>
+          </a:p>
+        </p:txBody>
+      </p:sp>
+      <p:sp>
+        <p:nvSpPr>
+          <p:cNvPr id="101" name="TextBox 100"/>
+          <p:cNvSpPr txBox="1"/>
+          <p:nvPr/>
+        </p:nvSpPr>
+        <p:spPr>
+          <a:xfrm>
+            <a:off x="11484864" y="2139696"/>
+            <a:ext cx="438912" cy="438912"/>
+          </a:xfrm>
+          <a:prstGeom prst="rect">
+            <a:avLst/>
+          </a:prstGeom>
+          <a:noFill/>
+        </p:spPr>
+        <p:txBody>
+          <a:bodyPr wrap="square" anchor="ctr" lIns="0" rIns="0" tIns="0" bIns="0">
+            <a:spAutoFit/>
+          </a:bodyPr>
+          <a:lstStyle/>
+          <a:p>
+            <a:pPr algn="ctr">
+              <a:lnSpc>
+                <a:spcPct val="110000"/>
+              </a:lnSpc>
+            </a:pPr>
+            <a:r>
+              <a:rPr sz="2000" b="1">
+                <a:solidFill>
+                  <a:srgbClr val="FFFFFF"/>
+                </a:solidFill>
+                <a:latin typeface="Arial"/>
+                <a:ea typeface="Arial"/>
+              </a:rPr>
+              <a:t>3</a:t>
+            </a:r>
+          </a:p>
+        </p:txBody>
+      </p:sp>
+      <p:sp>
+        <p:nvSpPr>
+          <p:cNvPr id="102" name="TextBox 101"/>
+          <p:cNvSpPr txBox="1"/>
+          <p:nvPr/>
+        </p:nvSpPr>
+        <p:spPr>
+          <a:xfrm>
+            <a:off x="12070080" y="2103120"/>
+            <a:ext cx="5495544" cy="512063"/>
+          </a:xfrm>
+          <a:prstGeom prst="rect">
+            <a:avLst/>
+          </a:prstGeom>
+          <a:noFill/>
+        </p:spPr>
+        <p:txBody>
+          <a:bodyPr wrap="square" anchor="ctr" lIns="0" rIns="0" tIns="0" bIns="0">
+            <a:spAutoFit/>
+          </a:bodyPr>
+          <a:lstStyle/>
+          <a:p>
+            <a:pPr algn="l">
+              <a:lnSpc>
+                <a:spcPct val="110000"/>
+              </a:lnSpc>
+            </a:pPr>
+            <a:r>
+              <a:rPr sz="2400" b="1">
+                <a:solidFill>
+                  <a:srgbClr val="1A1A1A"/>
+                </a:solidFill>
+                <a:latin typeface="Arial"/>
+                <a:ea typeface="Arial"/>
+              </a:rPr>
+              <a:t>사람: 고객 안에 상주 (FDE)</a:t>
+            </a:r>
+          </a:p>
+        </p:txBody>
+      </p:sp>
+      <p:pic>
+        <p:nvPicPr>
+          <p:cNvPr id="103" name="Picture 102" descr="palantir.png"/>
+          <p:cNvPicPr>
+            <a:picLocks noChangeAspect="1"/>
+          </p:cNvPicPr>
+          <p:nvPr/>
+        </p:nvPicPr>
+        <p:blipFill>
+          <a:blip r:embed="rId4"/>
+          <a:stretch>
+            <a:fillRect/>
+          </a:stretch>
+        </p:blipFill>
+        <p:spPr>
+          <a:xfrm>
+            <a:off x="11484864" y="2715768"/>
+            <a:ext cx="310896" cy="310896"/>
+          </a:xfrm>
+          <a:prstGeom prst="rect">
+            <a:avLst/>
+          </a:prstGeom>
+        </p:spPr>
+      </p:pic>
+      <p:sp>
+        <p:nvSpPr>
+          <p:cNvPr id="104" name="TextBox 103"/>
+          <p:cNvSpPr txBox="1"/>
+          <p:nvPr/>
+        </p:nvSpPr>
+        <p:spPr>
+          <a:xfrm>
+            <a:off x="11887200" y="2688336"/>
+            <a:ext cx="5678424" cy="347472"/>
+          </a:xfrm>
+          <a:prstGeom prst="rect">
+            <a:avLst/>
+          </a:prstGeom>
+          <a:noFill/>
+        </p:spPr>
+        <p:txBody>
+          <a:bodyPr wrap="square" anchor="ctr" lIns="0" rIns="0" tIns="0" bIns="0">
+            <a:spAutoFit/>
+          </a:bodyPr>
+          <a:lstStyle/>
+          <a:p>
+            <a:pPr algn="l">
+              <a:lnSpc>
+                <a:spcPct val="110000"/>
+              </a:lnSpc>
+            </a:pPr>
             <a:r>
               <a:rPr sz="1800" b="1">
                 <a:solidFill>
@@ -53776,21 +56774,31 @@
                 <a:latin typeface="Arial"/>
                 <a:ea typeface="Arial"/>
               </a:rPr>
-              <a:t>토큰당 비용 · GPU 가동률</a:t>
-            </a:r>
-          </a:p>
-        </p:txBody>
-      </p:sp>
-      <p:sp>
-        <p:nvSpPr>
-          <p:cNvPr id="37" name="TextBox 36"/>
+              <a:t>Palantir FDE</a:t>
+            </a:r>
+            <a:r>
+              <a:rPr sz="1600" b="0">
+                <a:solidFill>
+                  <a:srgbClr val="555555"/>
+                </a:solidFill>
+                <a:latin typeface="Arial"/>
+                <a:ea typeface="Arial"/>
+              </a:rPr>
+              <a:t>   Anthropic · OpenAI도 채택</a:t>
+            </a:r>
+          </a:p>
+        </p:txBody>
+      </p:sp>
+      <p:sp>
+        <p:nvSpPr>
+          <p:cNvPr id="105" name="TextBox 104"/>
           <p:cNvSpPr txBox="1"/>
           <p:nvPr/>
         </p:nvSpPr>
         <p:spPr>
           <a:xfrm>
-            <a:off x="7178040" y="3182112"/>
-            <a:ext cx="1280160" cy="329184"/>
+            <a:off x="11484864" y="3182112"/>
+            <a:ext cx="4572000" cy="329184"/>
           </a:xfrm>
           <a:prstGeom prst="rect">
             <a:avLst/>
@@ -53803,7 +56811,7 @@
           </a:bodyPr>
           <a:lstStyle/>
           <a:p>
-            <a:pPr algn="ctr">
+            <a:pPr algn="l">
               <a:lnSpc>
                 <a:spcPct val="110000"/>
               </a:lnSpc>
@@ -53823,2652 +56831,7 @@
       </p:sp>
       <p:sp>
         <p:nvSpPr>
-          <p:cNvPr id="38" name="TextBox 37"/>
-          <p:cNvSpPr txBox="1"/>
-          <p:nvPr/>
-        </p:nvSpPr>
-        <p:spPr>
-          <a:xfrm>
-            <a:off x="8586216" y="3182112"/>
-            <a:ext cx="2478024" cy="329184"/>
-          </a:xfrm>
-          <a:prstGeom prst="rect">
-            <a:avLst/>
-          </a:prstGeom>
-          <a:noFill/>
-        </p:spPr>
-        <p:txBody>
-          <a:bodyPr wrap="square" anchor="t" lIns="0" rIns="0" tIns="0" bIns="0">
-            <a:spAutoFit/>
-          </a:bodyPr>
-          <a:lstStyle/>
-          <a:p>
-            <a:pPr algn="ctr">
-              <a:lnSpc>
-                <a:spcPct val="110000"/>
-              </a:lnSpc>
-            </a:pPr>
-            <a:r>
-              <a:rPr sz="1800" b="1">
-                <a:solidFill>
-                  <a:srgbClr val="1428A0"/>
-                </a:solidFill>
-                <a:latin typeface="Arial"/>
-                <a:ea typeface="Arial"/>
-              </a:rPr>
-              <a:t>필요한 기술</a:t>
-            </a:r>
-          </a:p>
-        </p:txBody>
-      </p:sp>
-      <p:sp>
-        <p:nvSpPr>
-          <p:cNvPr id="39" name="TextBox 38"/>
-          <p:cNvSpPr txBox="1"/>
-          <p:nvPr/>
-        </p:nvSpPr>
-        <p:spPr>
-          <a:xfrm>
-            <a:off x="5532120" y="3584448"/>
-            <a:ext cx="1572768" cy="457200"/>
-          </a:xfrm>
-          <a:prstGeom prst="rect">
-            <a:avLst/>
-          </a:prstGeom>
-          <a:noFill/>
-        </p:spPr>
-        <p:txBody>
-          <a:bodyPr wrap="square" anchor="ctr" lIns="0" rIns="0" tIns="0" bIns="0">
-            <a:spAutoFit/>
-          </a:bodyPr>
-          <a:lstStyle/>
-          <a:p>
-            <a:pPr algn="l">
-              <a:lnSpc>
-                <a:spcPct val="110000"/>
-              </a:lnSpc>
-            </a:pPr>
-            <a:r>
-              <a:rPr sz="1800" b="1">
-                <a:solidFill>
-                  <a:srgbClr val="1428A0"/>
-                </a:solidFill>
-                <a:latin typeface="Arial"/>
-                <a:ea typeface="Arial"/>
-              </a:rPr>
-              <a:t>AI DC 운영</a:t>
-            </a:r>
-          </a:p>
-        </p:txBody>
-      </p:sp>
-      <p:sp>
-        <p:nvSpPr>
-          <p:cNvPr id="40" name="Rounded Rectangle 39"/>
-          <p:cNvSpPr/>
-      